--- a/recommendation/presentation/발표_P3_데이터생성_최호길.pptx
+++ b/recommendation/presentation/발표_P3_데이터생성_최호길.pptx
@@ -4090,7 +4090,7 @@
                 <a:latin typeface="맑은 고딕"/>
                 <a:ea typeface="맑은 고딕"/>
               </a:rPr>
-              <a:t>이상 유형별 라벨 부족 → 도메인 규칙으로 데이터 생성</a:t>
+              <a:t>정상 baseline 위에 영역/노이즈/이상을 규칙으로 합성</a:t>
             </a:r>
           </a:p>
         </p:txBody>
@@ -4104,7 +4104,7 @@
         <p:spPr>
           <a:xfrm>
             <a:off x="640080" y="1828800"/>
-            <a:ext cx="10972800" cy="1143000"/>
+            <a:ext cx="10972800" cy="566928"/>
           </a:xfrm>
           <a:prstGeom prst="rect">
             <a:avLst/>
@@ -4123,7 +4123,7 @@
               </a:spcAft>
             </a:pPr>
             <a:r>
-              <a:rPr sz="1450" b="0">
+              <a:rPr sz="1400" b="0">
                 <a:solidFill>
                   <a:srgbClr val="5B9BD5"/>
                 </a:solidFill>
@@ -4133,134 +4133,21 @@
               <a:t>●  </a:t>
             </a:r>
             <a:r>
-              <a:rPr sz="1450">
+              <a:rPr sz="1400">
                 <a:solidFill>
                   <a:srgbClr val="1A1F2E"/>
                 </a:solidFill>
                 <a:latin typeface="맑은 고딕"/>
                 <a:ea typeface="맑은 고딕"/>
               </a:rPr>
-              <a:t>실 계측 trend는 정상은 많지만 이상은 드물고, 평균이동/산포/spike/drift 같은 </a:t>
-            </a:r>
-            <a:r>
-              <a:rPr sz="1450" b="1">
-                <a:solidFill>
-                  <a:srgbClr val="0F1E3D"/>
-                </a:solidFill>
-                <a:latin typeface="맑은 고딕"/>
-                <a:ea typeface="맑은 고딕"/>
-              </a:rPr>
-              <a:t>이상 유형별 라벨이 희소</a:t>
-            </a:r>
-            <a:r>
-              <a:rPr sz="1450">
-                <a:solidFill>
-                  <a:srgbClr val="1A1F2E"/>
-                </a:solidFill>
-                <a:latin typeface="맑은 고딕"/>
-                <a:ea typeface="맑은 고딕"/>
-              </a:rPr>
-              <a:t>해 모델 학습과 평가가 어렵습니다</a:t>
-            </a:r>
-          </a:p>
-          <a:p>
-            <a:pPr marL="274320" indent="-274320">
-              <a:spcAft>
-                <a:spcPts val="500"/>
-              </a:spcAft>
-            </a:pPr>
-            <a:r>
-              <a:rPr sz="1450" b="0">
-                <a:solidFill>
-                  <a:srgbClr val="5B9BD5"/>
-                </a:solidFill>
-                <a:latin typeface="맑은 고딕"/>
-                <a:ea typeface="맑은 고딕"/>
-              </a:rPr>
-              <a:t>●  </a:t>
-            </a:r>
-            <a:r>
-              <a:rPr sz="1450">
-                <a:solidFill>
-                  <a:srgbClr val="1A1F2E"/>
-                </a:solidFill>
-                <a:latin typeface="맑은 고딕"/>
-                <a:ea typeface="맑은 고딕"/>
-              </a:rPr>
-              <a:t>본인이 BBD담당, Overlay담당, CD담당으로 쌓은 trend 분석 경험을 바탕으로 계측 trend의 </a:t>
-            </a:r>
-            <a:r>
-              <a:rPr sz="1450" b="1">
-                <a:solidFill>
-                  <a:srgbClr val="0F1E3D"/>
-                </a:solidFill>
-                <a:latin typeface="맑은 고딕"/>
-                <a:ea typeface="맑은 고딕"/>
-              </a:rPr>
-              <a:t>영역 구조, 노이즈, 이상 발생 방식</a:t>
-            </a:r>
-            <a:r>
-              <a:rPr sz="1450">
-                <a:solidFill>
-                  <a:srgbClr val="1A1F2E"/>
-                </a:solidFill>
-                <a:latin typeface="맑은 고딕"/>
-                <a:ea typeface="맑은 고딕"/>
-              </a:rPr>
-              <a:t>을 generator 규칙으로 옮겨 검증 가능한 benchmark를 만들었습니다</a:t>
-            </a:r>
-          </a:p>
-        </p:txBody>
-      </p:sp>
-      <p:sp>
-        <p:nvSpPr>
-          <p:cNvPr id="6" name="Rectangle 5"/>
-          <p:cNvSpPr/>
-          <p:nvPr/>
-        </p:nvSpPr>
-        <p:spPr>
-          <a:xfrm>
-            <a:off x="1957199" y="3090816"/>
-            <a:ext cx="8338561" cy="2532600"/>
-          </a:xfrm>
-          <a:prstGeom prst="rect">
-            <a:avLst/>
-          </a:prstGeom>
-          <a:solidFill>
-            <a:srgbClr val="FFFFFF"/>
-          </a:solidFill>
-          <a:ln w="12700">
-            <a:solidFill>
-              <a:srgbClr val="D7DEEA"/>
-            </a:solidFill>
-          </a:ln>
-          <a:effectLst/>
-        </p:spPr>
-        <p:style>
-          <a:lnRef idx="1">
-            <a:schemeClr val="accent1"/>
-          </a:lnRef>
-          <a:fillRef idx="3">
-            <a:schemeClr val="accent1"/>
-          </a:fillRef>
-          <a:effectRef idx="2">
-            <a:schemeClr val="accent1"/>
-          </a:effectRef>
-          <a:fontRef idx="minor">
-            <a:schemeClr val="lt1"/>
-          </a:fontRef>
-        </p:style>
-        <p:txBody>
-          <a:bodyPr rtlCol="0" anchor="ctr"/>
-          <a:lstStyle/>
-          <a:p>
-            <a:pPr algn="ctr"/>
+              <a:t>이상 유형별 라벨이 희소한 계측 trend를, 도메인 규칙으로 정상 baseline과 이상을 합성해 검증 가능한 benchmark로 만들었습니다</a:t>
+            </a:r>
           </a:p>
         </p:txBody>
       </p:sp>
       <p:pic>
         <p:nvPicPr>
-          <p:cNvPr id="7" name="Picture 6" descr="p3_generator_top_reference.png"/>
+          <p:cNvPr id="6" name="Picture 5" descr="p3_generator_top_reference.png"/>
           <p:cNvPicPr>
             <a:picLocks noChangeAspect="1"/>
           </p:cNvPicPr>
@@ -4274,8 +4161,8 @@
         </p:blipFill>
         <p:spPr>
           <a:xfrm>
-            <a:off x="1966199" y="3099816"/>
-            <a:ext cx="8320561" cy="2514600"/>
+            <a:off x="3834544" y="2560320"/>
+            <a:ext cx="4583872" cy="1385316"/>
           </a:xfrm>
           <a:prstGeom prst="rect">
             <a:avLst/>
@@ -4284,14 +4171,14 @@
       </p:pic>
       <p:sp>
         <p:nvSpPr>
-          <p:cNvPr id="8" name="TextBox 7"/>
+          <p:cNvPr id="7" name="TextBox 6"/>
           <p:cNvSpPr txBox="1"/>
           <p:nvPr/>
         </p:nvSpPr>
         <p:spPr>
           <a:xfrm>
-            <a:off x="1797035" y="5614416"/>
-            <a:ext cx="8658889" cy="329184"/>
+            <a:off x="640080" y="4009644"/>
+            <a:ext cx="10972800" cy="329184"/>
           </a:xfrm>
           <a:prstGeom prst="rect">
             <a:avLst/>
@@ -4306,15 +4193,61 @@
           <a:p>
             <a:pPr algn="ctr"/>
             <a:r>
-              <a:rPr sz="1450" b="1">
+              <a:rPr sz="1250" b="1">
                 <a:solidFill>
                   <a:srgbClr val="0F1E3D"/>
                 </a:solidFill>
                 <a:latin typeface="맑은 고딕"/>
                 <a:ea typeface="맑은 고딕"/>
               </a:rPr>
-              <a:t>정상 baseline(밀집/희소/결핍 영역) 위에 이상 4종(평균이동 / 산포 / spike / drift)을 합성</a:t>
-            </a:r>
+              <a:t>정상 baseline(밀집/희소/결핍 영역) + 이상 합성 예시</a:t>
+            </a:r>
+          </a:p>
+        </p:txBody>
+      </p:sp>
+      <p:sp>
+        <p:nvSpPr>
+          <p:cNvPr id="8" name="Rectangle 7"/>
+          <p:cNvSpPr/>
+          <p:nvPr/>
+        </p:nvSpPr>
+        <p:spPr>
+          <a:xfrm>
+            <a:off x="640080" y="4567428"/>
+            <a:ext cx="10972800" cy="1458468"/>
+          </a:xfrm>
+          <a:prstGeom prst="rect">
+            <a:avLst/>
+          </a:prstGeom>
+          <a:solidFill>
+            <a:srgbClr val="FFFFFF"/>
+          </a:solidFill>
+          <a:ln w="15875">
+            <a:solidFill>
+              <a:srgbClr val="333740"/>
+            </a:solidFill>
+          </a:ln>
+          <a:effectLst/>
+        </p:spPr>
+        <p:style>
+          <a:lnRef idx="1">
+            <a:schemeClr val="accent1"/>
+          </a:lnRef>
+          <a:fillRef idx="3">
+            <a:schemeClr val="accent1"/>
+          </a:fillRef>
+          <a:effectRef idx="2">
+            <a:schemeClr val="accent1"/>
+          </a:effectRef>
+          <a:fontRef idx="minor">
+            <a:schemeClr val="lt1"/>
+          </a:fontRef>
+        </p:style>
+        <p:txBody>
+          <a:bodyPr rtlCol="0" anchor="ctr"/>
+          <a:lstStyle/>
+          <a:p>
+            <a:pPr algn="ctr"/>
           </a:p>
         </p:txBody>
       </p:sp>
@@ -4326,44 +4259,8 @@
         </p:nvSpPr>
         <p:spPr>
           <a:xfrm>
-            <a:off x="640080" y="5961888"/>
-            <a:ext cx="10972800" cy="274320"/>
-          </a:xfrm>
-          <a:prstGeom prst="rect">
-            <a:avLst/>
-          </a:prstGeom>
-          <a:noFill/>
-        </p:spPr>
-        <p:txBody>
-          <a:bodyPr wrap="square" anchor="t" lIns="0" rIns="0" tIns="0" bIns="0">
-            <a:spAutoFit/>
-          </a:bodyPr>
-          <a:lstStyle/>
-          <a:p>
-            <a:pPr algn="ctr"/>
-            <a:r>
-              <a:rPr sz="1300">
-                <a:solidFill>
-                  <a:srgbClr val="3A485C"/>
-                </a:solidFill>
-                <a:latin typeface="맑은 고딕"/>
-                <a:ea typeface="맑은 고딕"/>
-              </a:rPr>
-              <a:t>정상 신호 생성 → 노이즈 → 이상 주입 → 학습/평가 trend 이미지</a:t>
-            </a:r>
-          </a:p>
-        </p:txBody>
-      </p:sp>
-      <p:sp>
-        <p:nvSpPr>
-          <p:cNvPr id="10" name="TextBox 9"/>
-          <p:cNvSpPr txBox="1"/>
-          <p:nvPr/>
-        </p:nvSpPr>
-        <p:spPr>
-          <a:xfrm>
-            <a:off x="457200" y="6437376"/>
-            <a:ext cx="8229600" cy="292608"/>
+            <a:off x="914400" y="4695444"/>
+            <a:ext cx="10479024" cy="1202436"/>
           </a:xfrm>
           <a:prstGeom prst="rect">
             <a:avLst/>
@@ -4378,6 +4275,169 @@
           <a:p>
             <a:pPr algn="l"/>
             <a:r>
+              <a:rPr sz="1450" b="1">
+                <a:solidFill>
+                  <a:srgbClr val="0F1E3D"/>
+                </a:solidFill>
+                <a:latin typeface="맑은 고딕"/>
+                <a:ea typeface="맑은 고딕"/>
+              </a:rPr>
+              <a:t>trend 생성 구성요소 — 무엇을, 왜 넣었나</a:t>
+            </a:r>
+          </a:p>
+          <a:p>
+            <a:pPr algn="l"/>
+            <a:r>
+              <a:rPr sz="500">
+                <a:solidFill>
+                  <a:srgbClr val="FFFFFF"/>
+                </a:solidFill>
+                <a:latin typeface="맑은 고딕"/>
+                <a:ea typeface="맑은 고딕"/>
+              </a:rPr>
+              <a:t> </a:t>
+            </a:r>
+          </a:p>
+          <a:p>
+            <a:pPr algn="l"/>
+            <a:r>
+              <a:rPr sz="1350" b="1" i="0">
+                <a:solidFill>
+                  <a:srgbClr val="0F1E3D"/>
+                </a:solidFill>
+                <a:latin typeface="맑은 고딕"/>
+                <a:ea typeface="맑은 고딕"/>
+              </a:rPr>
+              <a:t>영역(Region)</a:t>
+            </a:r>
+          </a:p>
+          <a:p>
+            <a:pPr algn="l"/>
+            <a:r>
+              <a:rPr sz="1300">
+                <a:solidFill>
+                  <a:srgbClr val="1A1F2E"/>
+                </a:solidFill>
+                <a:latin typeface="맑은 고딕"/>
+                <a:ea typeface="맑은 고딕"/>
+              </a:rPr>
+              <a:t>    측정 빈도에 따라 밀집/희소/결핍이 실제로 교차하므로, 정상 baseline에 그대로 반영</a:t>
+            </a:r>
+          </a:p>
+          <a:p>
+            <a:pPr algn="l"/>
+            <a:r>
+              <a:rPr sz="1350" b="1" i="0">
+                <a:solidFill>
+                  <a:srgbClr val="0F1E3D"/>
+                </a:solidFill>
+                <a:latin typeface="맑은 고딕"/>
+                <a:ea typeface="맑은 고딕"/>
+              </a:rPr>
+              <a:t>노이즈(Noise)</a:t>
+            </a:r>
+          </a:p>
+          <a:p>
+            <a:pPr algn="l"/>
+            <a:r>
+              <a:rPr sz="1300">
+                <a:solidFill>
+                  <a:srgbClr val="1A1F2E"/>
+                </a:solidFill>
+                <a:latin typeface="맑은 고딕"/>
+                <a:ea typeface="맑은 고딕"/>
+              </a:rPr>
+              <a:t>    계측 변동을 현장 현상으로 재현: Gaussian=산포 / Correlated=설비 변동 / Laplacian=계측 헌팅</a:t>
+            </a:r>
+          </a:p>
+          <a:p>
+            <a:pPr algn="l"/>
+            <a:r>
+              <a:rPr sz="1350" b="1" i="0">
+                <a:solidFill>
+                  <a:srgbClr val="0F1E3D"/>
+                </a:solidFill>
+                <a:latin typeface="맑은 고딕"/>
+                <a:ea typeface="맑은 고딕"/>
+              </a:rPr>
+              <a:t>이상(Anomaly 5종)</a:t>
+            </a:r>
+          </a:p>
+          <a:p>
+            <a:pPr algn="l"/>
+            <a:r>
+              <a:rPr sz="1300">
+                <a:solidFill>
+                  <a:srgbClr val="1A1F2E"/>
+                </a:solidFill>
+                <a:latin typeface="맑은 고딕"/>
+                <a:ea typeface="맑은 고딕"/>
+              </a:rPr>
+              <a:t>    실제 불량 발생 방식을 라벨로 확보: avg / std / spike / drift / context</a:t>
+            </a:r>
+          </a:p>
+        </p:txBody>
+      </p:sp>
+      <p:sp>
+        <p:nvSpPr>
+          <p:cNvPr id="10" name="TextBox 9"/>
+          <p:cNvSpPr txBox="1"/>
+          <p:nvPr/>
+        </p:nvSpPr>
+        <p:spPr>
+          <a:xfrm>
+            <a:off x="640080" y="6053328"/>
+            <a:ext cx="10972800" cy="329184"/>
+          </a:xfrm>
+          <a:prstGeom prst="rect">
+            <a:avLst/>
+          </a:prstGeom>
+          <a:noFill/>
+        </p:spPr>
+        <p:txBody>
+          <a:bodyPr wrap="square" anchor="ctr" lIns="0" rIns="0" tIns="0" bIns="0">
+            <a:spAutoFit/>
+          </a:bodyPr>
+          <a:lstStyle/>
+          <a:p>
+            <a:pPr algn="ctr"/>
+            <a:r>
+              <a:rPr sz="1250" b="1">
+                <a:solidFill>
+                  <a:srgbClr val="0F1E3D"/>
+                </a:solidFill>
+                <a:latin typeface="맑은 고딕"/>
+                <a:ea typeface="맑은 고딕"/>
+              </a:rPr>
+              <a:t/>
+            </a:r>
+          </a:p>
+        </p:txBody>
+      </p:sp>
+      <p:sp>
+        <p:nvSpPr>
+          <p:cNvPr id="11" name="TextBox 10"/>
+          <p:cNvSpPr txBox="1"/>
+          <p:nvPr/>
+        </p:nvSpPr>
+        <p:spPr>
+          <a:xfrm>
+            <a:off x="457200" y="6437376"/>
+            <a:ext cx="8229600" cy="292608"/>
+          </a:xfrm>
+          <a:prstGeom prst="rect">
+            <a:avLst/>
+          </a:prstGeom>
+          <a:noFill/>
+        </p:spPr>
+        <p:txBody>
+          <a:bodyPr wrap="square" anchor="ctr" lIns="0" rIns="0" tIns="0" bIns="0">
+            <a:spAutoFit/>
+          </a:bodyPr>
+          <a:lstStyle/>
+          <a:p>
+            <a:pPr algn="l"/>
+            <a:r>
               <a:rPr sz="900">
                 <a:solidFill>
                   <a:srgbClr val="6B7280"/>
@@ -4392,7 +4452,7 @@
       </p:sp>
       <p:sp>
         <p:nvSpPr>
-          <p:cNvPr id="11" name="TextBox 10"/>
+          <p:cNvPr id="12" name="TextBox 11"/>
           <p:cNvSpPr txBox="1"/>
           <p:nvPr/>
         </p:nvSpPr>
@@ -5918,7 +5978,7 @@
                 <a:latin typeface="맑은 고딕"/>
                 <a:ea typeface="맑은 고딕"/>
               </a:rPr>
-              <a:t>정상 baseline 오른쪽 끝에 도메인 규칙으로 이상을 주입합니다. 강도는 각 series의 baseline 산포에 비례하고, 너무 약하면 보이도록 보정합니다(context는 fleet 대비 전체 이탈)</a:t>
+              <a:t>정상 baseline 오른쪽 끝에 도메인 규칙으로 이상을 주입합니다(강도는 baseline 산포에 비례). context만 오른쪽 끝이 아니라 fleet 대비 전체 시계열이 벗어나는 형태입니다</a:t>
             </a:r>
           </a:p>
         </p:txBody>
@@ -5931,8 +5991,8 @@
         </p:nvSpPr>
         <p:spPr>
           <a:xfrm>
-            <a:off x="631081" y="3350579"/>
-            <a:ext cx="2589748" cy="1671267"/>
+            <a:off x="631081" y="3538545"/>
+            <a:ext cx="2029678" cy="1311222"/>
           </a:xfrm>
           <a:prstGeom prst="rect">
             <a:avLst/>
@@ -5985,8 +6045,8 @@
         </p:blipFill>
         <p:spPr>
           <a:xfrm>
-            <a:off x="640081" y="3359579"/>
-            <a:ext cx="2571748" cy="1653267"/>
+            <a:off x="640081" y="3547545"/>
+            <a:ext cx="2011678" cy="1293222"/>
           </a:xfrm>
           <a:prstGeom prst="rect">
             <a:avLst/>
@@ -6001,8 +6061,8 @@
         </p:nvSpPr>
         <p:spPr>
           <a:xfrm>
-            <a:off x="525780" y="5104286"/>
-            <a:ext cx="2800350" cy="402336"/>
+            <a:off x="525780" y="4932207"/>
+            <a:ext cx="2240280" cy="420624"/>
           </a:xfrm>
           <a:prstGeom prst="rect">
             <a:avLst/>
@@ -6017,14 +6077,14 @@
           <a:p>
             <a:pPr algn="ctr"/>
             <a:r>
-              <a:rPr sz="1400" b="1">
+              <a:rPr sz="1300" b="1">
                 <a:solidFill>
                   <a:srgbClr val="0F1E3D"/>
                 </a:solidFill>
                 <a:latin typeface="맑은 고딕"/>
                 <a:ea typeface="맑은 고딕"/>
               </a:rPr>
-              <a:t>Mean Shift — 평균 이동</a:t>
+              <a:t>avg — 평균 이동</a:t>
             </a:r>
           </a:p>
         </p:txBody>
@@ -6037,8 +6097,8 @@
         </p:nvSpPr>
         <p:spPr>
           <a:xfrm>
-            <a:off x="3431431" y="3350579"/>
-            <a:ext cx="2589748" cy="1671267"/>
+            <a:off x="2871361" y="3538545"/>
+            <a:ext cx="2029678" cy="1311222"/>
           </a:xfrm>
           <a:prstGeom prst="rect">
             <a:avLst/>
@@ -6091,8 +6151,8 @@
         </p:blipFill>
         <p:spPr>
           <a:xfrm>
-            <a:off x="3440431" y="3359579"/>
-            <a:ext cx="2571748" cy="1653267"/>
+            <a:off x="2880361" y="3547545"/>
+            <a:ext cx="2011678" cy="1293222"/>
           </a:xfrm>
           <a:prstGeom prst="rect">
             <a:avLst/>
@@ -6107,8 +6167,8 @@
         </p:nvSpPr>
         <p:spPr>
           <a:xfrm>
-            <a:off x="3326130" y="5104286"/>
-            <a:ext cx="2800350" cy="402336"/>
+            <a:off x="2766060" y="4932207"/>
+            <a:ext cx="2240280" cy="420624"/>
           </a:xfrm>
           <a:prstGeom prst="rect">
             <a:avLst/>
@@ -6123,14 +6183,14 @@
           <a:p>
             <a:pPr algn="ctr"/>
             <a:r>
-              <a:rPr sz="1400" b="1">
+              <a:rPr sz="1300" b="1">
                 <a:solidFill>
                   <a:srgbClr val="0F1E3D"/>
                 </a:solidFill>
                 <a:latin typeface="맑은 고딕"/>
                 <a:ea typeface="맑은 고딕"/>
               </a:rPr>
-              <a:t>Std 변화 — 산포 확대</a:t>
+              <a:t>std — 산포 확대</a:t>
             </a:r>
           </a:p>
         </p:txBody>
@@ -6143,8 +6203,8 @@
         </p:nvSpPr>
         <p:spPr>
           <a:xfrm>
-            <a:off x="6231781" y="3350579"/>
-            <a:ext cx="2589748" cy="1671267"/>
+            <a:off x="5111641" y="3538545"/>
+            <a:ext cx="2029678" cy="1311222"/>
           </a:xfrm>
           <a:prstGeom prst="rect">
             <a:avLst/>
@@ -6197,8 +6257,8 @@
         </p:blipFill>
         <p:spPr>
           <a:xfrm>
-            <a:off x="6240781" y="3359579"/>
-            <a:ext cx="2571748" cy="1653267"/>
+            <a:off x="5120641" y="3547545"/>
+            <a:ext cx="2011678" cy="1293222"/>
           </a:xfrm>
           <a:prstGeom prst="rect">
             <a:avLst/>
@@ -6213,8 +6273,8 @@
         </p:nvSpPr>
         <p:spPr>
           <a:xfrm>
-            <a:off x="6126480" y="5104286"/>
-            <a:ext cx="2800350" cy="402336"/>
+            <a:off x="5006340" y="4932207"/>
+            <a:ext cx="2240280" cy="420624"/>
           </a:xfrm>
           <a:prstGeom prst="rect">
             <a:avLst/>
@@ -6229,14 +6289,14 @@
           <a:p>
             <a:pPr algn="ctr"/>
             <a:r>
-              <a:rPr sz="1400" b="1">
+              <a:rPr sz="1300" b="1">
                 <a:solidFill>
                   <a:srgbClr val="0F1E3D"/>
                 </a:solidFill>
                 <a:latin typeface="맑은 고딕"/>
                 <a:ea typeface="맑은 고딕"/>
               </a:rPr>
-              <a:t>Spike — 순간 튐</a:t>
+              <a:t>spike — 순간 튐</a:t>
             </a:r>
           </a:p>
         </p:txBody>
@@ -6249,8 +6309,8 @@
         </p:nvSpPr>
         <p:spPr>
           <a:xfrm>
-            <a:off x="9032131" y="3350579"/>
-            <a:ext cx="2589748" cy="1671267"/>
+            <a:off x="7351921" y="3538545"/>
+            <a:ext cx="2029678" cy="1311222"/>
           </a:xfrm>
           <a:prstGeom prst="rect">
             <a:avLst/>
@@ -6303,8 +6363,8 @@
         </p:blipFill>
         <p:spPr>
           <a:xfrm>
-            <a:off x="9041131" y="3359579"/>
-            <a:ext cx="2571748" cy="1653267"/>
+            <a:off x="7360921" y="3547545"/>
+            <a:ext cx="2011678" cy="1293222"/>
           </a:xfrm>
           <a:prstGeom prst="rect">
             <a:avLst/>
@@ -6319,8 +6379,8 @@
         </p:nvSpPr>
         <p:spPr>
           <a:xfrm>
-            <a:off x="8926830" y="5104286"/>
-            <a:ext cx="2800350" cy="402336"/>
+            <a:off x="7246620" y="4932207"/>
+            <a:ext cx="2240280" cy="420624"/>
           </a:xfrm>
           <a:prstGeom prst="rect">
             <a:avLst/>
@@ -6335,21 +6395,127 @@
           <a:p>
             <a:pPr algn="ctr"/>
             <a:r>
-              <a:rPr sz="1400" b="1">
+              <a:rPr sz="1300" b="1">
                 <a:solidFill>
                   <a:srgbClr val="0F1E3D"/>
                 </a:solidFill>
                 <a:latin typeface="맑은 고딕"/>
                 <a:ea typeface="맑은 고딕"/>
               </a:rPr>
-              <a:t>Drift — 선형 추세</a:t>
-            </a:r>
-          </a:p>
-        </p:txBody>
-      </p:sp>
-      <p:sp>
-        <p:nvSpPr>
-          <p:cNvPr id="18" name="TextBox 17"/>
+              <a:t>drift — 선형 추세</a:t>
+            </a:r>
+          </a:p>
+        </p:txBody>
+      </p:sp>
+      <p:sp>
+        <p:nvSpPr>
+          <p:cNvPr id="18" name="Rectangle 17"/>
+          <p:cNvSpPr/>
+          <p:nvPr/>
+        </p:nvSpPr>
+        <p:spPr>
+          <a:xfrm>
+            <a:off x="9592201" y="3538545"/>
+            <a:ext cx="2029678" cy="1311222"/>
+          </a:xfrm>
+          <a:prstGeom prst="rect">
+            <a:avLst/>
+          </a:prstGeom>
+          <a:solidFill>
+            <a:srgbClr val="FFFFFF"/>
+          </a:solidFill>
+          <a:ln w="12700">
+            <a:solidFill>
+              <a:srgbClr val="D7DEEA"/>
+            </a:solidFill>
+          </a:ln>
+          <a:effectLst/>
+        </p:spPr>
+        <p:style>
+          <a:lnRef idx="1">
+            <a:schemeClr val="accent1"/>
+          </a:lnRef>
+          <a:fillRef idx="3">
+            <a:schemeClr val="accent1"/>
+          </a:fillRef>
+          <a:effectRef idx="2">
+            <a:schemeClr val="accent1"/>
+          </a:effectRef>
+          <a:fontRef idx="minor">
+            <a:schemeClr val="lt1"/>
+          </a:fontRef>
+        </p:style>
+        <p:txBody>
+          <a:bodyPr rtlCol="0" anchor="ctr"/>
+          <a:lstStyle/>
+          <a:p>
+            <a:pPr algn="ctr"/>
+          </a:p>
+        </p:txBody>
+      </p:sp>
+      <p:pic>
+        <p:nvPicPr>
+          <p:cNvPr id="19" name="Picture 18" descr="trend_context.png"/>
+          <p:cNvPicPr>
+            <a:picLocks noChangeAspect="1"/>
+          </p:cNvPicPr>
+          <p:nvPr/>
+        </p:nvPicPr>
+        <p:blipFill>
+          <a:blip r:embed="rId6"/>
+          <a:stretch>
+            <a:fillRect/>
+          </a:stretch>
+        </p:blipFill>
+        <p:spPr>
+          <a:xfrm>
+            <a:off x="9601201" y="3547545"/>
+            <a:ext cx="2011678" cy="1293222"/>
+          </a:xfrm>
+          <a:prstGeom prst="rect">
+            <a:avLst/>
+          </a:prstGeom>
+        </p:spPr>
+      </p:pic>
+      <p:sp>
+        <p:nvSpPr>
+          <p:cNvPr id="20" name="TextBox 19"/>
+          <p:cNvSpPr txBox="1"/>
+          <p:nvPr/>
+        </p:nvSpPr>
+        <p:spPr>
+          <a:xfrm>
+            <a:off x="9486900" y="4932207"/>
+            <a:ext cx="2240280" cy="420624"/>
+          </a:xfrm>
+          <a:prstGeom prst="rect">
+            <a:avLst/>
+          </a:prstGeom>
+          <a:noFill/>
+        </p:spPr>
+        <p:txBody>
+          <a:bodyPr wrap="square" anchor="ctr" lIns="0" rIns="0" tIns="0" bIns="0">
+            <a:spAutoFit/>
+          </a:bodyPr>
+          <a:lstStyle/>
+          <a:p>
+            <a:pPr algn="ctr"/>
+            <a:r>
+              <a:rPr sz="1300" b="1">
+                <a:solidFill>
+                  <a:srgbClr val="0F1E3D"/>
+                </a:solidFill>
+                <a:latin typeface="맑은 고딕"/>
+                <a:ea typeface="맑은 고딕"/>
+              </a:rPr>
+              <a:t>context — fleet 대비 이탈</a:t>
+            </a:r>
+          </a:p>
+        </p:txBody>
+      </p:sp>
+      <p:sp>
+        <p:nvSpPr>
+          <p:cNvPr id="21" name="TextBox 20"/>
           <p:cNvSpPr txBox="1"/>
           <p:nvPr/>
         </p:nvSpPr>
@@ -6378,14 +6544,14 @@
                 <a:latin typeface="맑은 고딕"/>
                 <a:ea typeface="맑은 고딕"/>
               </a:rPr>
-              <a:t>mean_shift y=x+delta / std 산포 확대 / spike 일부 점 급등 / drift y=x+k(t-t0) / context legend 대비 outlier</a:t>
-            </a:r>
-          </a:p>
-        </p:txBody>
-      </p:sp>
-      <p:sp>
-        <p:nvSpPr>
-          <p:cNvPr id="19" name="TextBox 18"/>
+              <a:t>avg y=x+delta / std 산포 확대 / spike 일부 점 급등 / drift y=x+k(t-t0) / context legend(fleet) 대비 outlier</a:t>
+            </a:r>
+          </a:p>
+        </p:txBody>
+      </p:sp>
+      <p:sp>
+        <p:nvSpPr>
+          <p:cNvPr id="22" name="TextBox 21"/>
           <p:cNvSpPr txBox="1"/>
           <p:nvPr/>
         </p:nvSpPr>
@@ -6421,7 +6587,7 @@
       </p:sp>
       <p:sp>
         <p:nvSpPr>
-          <p:cNvPr id="20" name="TextBox 19"/>
+          <p:cNvPr id="23" name="TextBox 22"/>
           <p:cNvSpPr txBox="1"/>
           <p:nvPr/>
         </p:nvSpPr>

--- a/recommendation/presentation/발표_P3_데이터생성_최호길.pptx
+++ b/recommendation/presentation/발표_P3_데이터생성_최호길.pptx
@@ -4090,142 +4090,30 @@
                 <a:latin typeface="맑은 고딕"/>
                 <a:ea typeface="맑은 고딕"/>
               </a:rPr>
-              <a:t>정상 baseline 위에 영역/노이즈/이상을 규칙으로 합성</a:t>
-            </a:r>
-          </a:p>
-        </p:txBody>
-      </p:sp>
-      <p:sp>
-        <p:nvSpPr>
-          <p:cNvPr id="5" name="TextBox 4"/>
-          <p:cNvSpPr txBox="1"/>
-          <p:nvPr/>
-        </p:nvSpPr>
-        <p:spPr>
-          <a:xfrm>
-            <a:off x="640080" y="1828800"/>
-            <a:ext cx="10972800" cy="566928"/>
-          </a:xfrm>
-          <a:prstGeom prst="rect">
-            <a:avLst/>
-          </a:prstGeom>
-          <a:noFill/>
-        </p:spPr>
-        <p:txBody>
-          <a:bodyPr wrap="square" anchor="t" lIns="0" rIns="0" tIns="0" bIns="0">
-            <a:spAutoFit/>
-          </a:bodyPr>
-          <a:lstStyle/>
-          <a:p>
-            <a:pPr marL="274320" indent="-274320">
-              <a:spcAft>
-                <a:spcPts val="500"/>
-              </a:spcAft>
-            </a:pPr>
-            <a:r>
-              <a:rPr sz="1400" b="0">
-                <a:solidFill>
-                  <a:srgbClr val="5B9BD5"/>
-                </a:solidFill>
-                <a:latin typeface="맑은 고딕"/>
-                <a:ea typeface="맑은 고딕"/>
-              </a:rPr>
-              <a:t>●  </a:t>
-            </a:r>
-            <a:r>
-              <a:rPr sz="1400">
-                <a:solidFill>
-                  <a:srgbClr val="1A1F2E"/>
-                </a:solidFill>
-                <a:latin typeface="맑은 고딕"/>
-                <a:ea typeface="맑은 고딕"/>
-              </a:rPr>
-              <a:t>이상 유형별 라벨이 희소한 계측 trend를, 도메인 규칙으로 정상 baseline과 이상을 합성해 검증 가능한 benchmark로 만들었습니다</a:t>
-            </a:r>
-          </a:p>
-        </p:txBody>
-      </p:sp>
-      <p:pic>
-        <p:nvPicPr>
-          <p:cNvPr id="6" name="Picture 5" descr="p3_generator_top_reference.png"/>
-          <p:cNvPicPr>
-            <a:picLocks noChangeAspect="1"/>
-          </p:cNvPicPr>
-          <p:nvPr/>
-        </p:nvPicPr>
-        <p:blipFill>
-          <a:blip r:embed="rId2"/>
-          <a:stretch>
-            <a:fillRect/>
-          </a:stretch>
-        </p:blipFill>
-        <p:spPr>
-          <a:xfrm>
-            <a:off x="3834544" y="2560320"/>
-            <a:ext cx="4583872" cy="1385316"/>
-          </a:xfrm>
-          <a:prstGeom prst="rect">
-            <a:avLst/>
-          </a:prstGeom>
-        </p:spPr>
-      </p:pic>
-      <p:sp>
-        <p:nvSpPr>
-          <p:cNvPr id="7" name="TextBox 6"/>
-          <p:cNvSpPr txBox="1"/>
-          <p:nvPr/>
-        </p:nvSpPr>
-        <p:spPr>
-          <a:xfrm>
-            <a:off x="640080" y="4009644"/>
-            <a:ext cx="10972800" cy="329184"/>
-          </a:xfrm>
-          <a:prstGeom prst="rect">
-            <a:avLst/>
-          </a:prstGeom>
-          <a:noFill/>
-        </p:spPr>
-        <p:txBody>
-          <a:bodyPr wrap="square" anchor="ctr" lIns="0" rIns="0" tIns="0" bIns="0">
-            <a:spAutoFit/>
-          </a:bodyPr>
-          <a:lstStyle/>
-          <a:p>
-            <a:pPr algn="ctr"/>
-            <a:r>
-              <a:rPr sz="1250" b="1">
-                <a:solidFill>
-                  <a:srgbClr val="0F1E3D"/>
-                </a:solidFill>
-                <a:latin typeface="맑은 고딕"/>
-                <a:ea typeface="맑은 고딕"/>
-              </a:rPr>
-              <a:t>정상 baseline(밀집/희소/결핍 영역) + 이상 합성 예시</a:t>
-            </a:r>
-          </a:p>
-        </p:txBody>
-      </p:sp>
-      <p:sp>
-        <p:nvSpPr>
-          <p:cNvPr id="8" name="Rectangle 7"/>
+              <a:t>이상 유형별 라벨 부족을 도메인 규칙 generator로 해결</a:t>
+            </a:r>
+          </a:p>
+        </p:txBody>
+      </p:sp>
+      <p:sp>
+        <p:nvSpPr>
+          <p:cNvPr id="5" name="Rectangle 4"/>
           <p:cNvSpPr/>
           <p:nvPr/>
         </p:nvSpPr>
         <p:spPr>
           <a:xfrm>
-            <a:off x="640080" y="4567428"/>
-            <a:ext cx="10972800" cy="1458468"/>
+            <a:off x="640080" y="1783080"/>
+            <a:ext cx="5349240" cy="640080"/>
           </a:xfrm>
           <a:prstGeom prst="rect">
             <a:avLst/>
           </a:prstGeom>
           <a:solidFill>
-            <a:srgbClr val="FFFFFF"/>
+            <a:srgbClr val="0F1E3D"/>
           </a:solidFill>
-          <a:ln w="15875">
-            <a:solidFill>
-              <a:srgbClr val="333740"/>
-            </a:solidFill>
+          <a:ln>
+            <a:noFill/>
           </a:ln>
           <a:effectLst/>
         </p:spPr>
@@ -4253,14 +4141,14 @@
       </p:sp>
       <p:sp>
         <p:nvSpPr>
-          <p:cNvPr id="9" name="TextBox 8"/>
+          <p:cNvPr id="6" name="TextBox 5"/>
           <p:cNvSpPr txBox="1"/>
           <p:nvPr/>
         </p:nvSpPr>
         <p:spPr>
           <a:xfrm>
-            <a:off x="914400" y="4695444"/>
-            <a:ext cx="10479024" cy="1202436"/>
+            <a:off x="868680" y="1783080"/>
+            <a:ext cx="4983480" cy="640080"/>
           </a:xfrm>
           <a:prstGeom prst="rect">
             <a:avLst/>
@@ -4275,44 +4163,122 @@
           <a:p>
             <a:pPr algn="l"/>
             <a:r>
-              <a:rPr sz="1450" b="1">
+              <a:rPr sz="1550" b="1">
+                <a:solidFill>
+                  <a:srgbClr val="FFFFFF"/>
+                </a:solidFill>
+                <a:latin typeface="맑은 고딕"/>
+                <a:ea typeface="맑은 고딕"/>
+              </a:rPr>
+              <a:t>문제 — 이상 유형별 라벨이 희소</a:t>
+            </a:r>
+          </a:p>
+        </p:txBody>
+      </p:sp>
+      <p:sp>
+        <p:nvSpPr>
+          <p:cNvPr id="7" name="Rectangle 6"/>
+          <p:cNvSpPr/>
+          <p:nvPr/>
+        </p:nvSpPr>
+        <p:spPr>
+          <a:xfrm>
+            <a:off x="640080" y="2423160"/>
+            <a:ext cx="5349240" cy="3520440"/>
+          </a:xfrm>
+          <a:prstGeom prst="rect">
+            <a:avLst/>
+          </a:prstGeom>
+          <a:solidFill>
+            <a:srgbClr val="F2F5FA"/>
+          </a:solidFill>
+          <a:ln>
+            <a:noFill/>
+          </a:ln>
+          <a:effectLst/>
+        </p:spPr>
+        <p:style>
+          <a:lnRef idx="1">
+            <a:schemeClr val="accent1"/>
+          </a:lnRef>
+          <a:fillRef idx="3">
+            <a:schemeClr val="accent1"/>
+          </a:fillRef>
+          <a:effectRef idx="2">
+            <a:schemeClr val="accent1"/>
+          </a:effectRef>
+          <a:fontRef idx="minor">
+            <a:schemeClr val="lt1"/>
+          </a:fontRef>
+        </p:style>
+        <p:txBody>
+          <a:bodyPr rtlCol="0" anchor="ctr"/>
+          <a:lstStyle/>
+          <a:p>
+            <a:pPr algn="ctr"/>
+          </a:p>
+        </p:txBody>
+      </p:sp>
+      <p:sp>
+        <p:nvSpPr>
+          <p:cNvPr id="8" name="TextBox 7"/>
+          <p:cNvSpPr txBox="1"/>
+          <p:nvPr/>
+        </p:nvSpPr>
+        <p:spPr>
+          <a:xfrm>
+            <a:off x="868680" y="2606040"/>
+            <a:ext cx="4892040" cy="2276856"/>
+          </a:xfrm>
+          <a:prstGeom prst="rect">
+            <a:avLst/>
+          </a:prstGeom>
+          <a:noFill/>
+        </p:spPr>
+        <p:txBody>
+          <a:bodyPr wrap="square" anchor="t" lIns="0" rIns="0" tIns="0" bIns="0">
+            <a:spAutoFit/>
+          </a:bodyPr>
+          <a:lstStyle/>
+          <a:p>
+            <a:pPr marL="274320" indent="-274320">
+              <a:lnSpc>
+                <a:spcPct val="110000"/>
+              </a:lnSpc>
+              <a:spcAft>
+                <a:spcPts val="400"/>
+              </a:spcAft>
+            </a:pPr>
+            <a:r>
+              <a:rPr sz="1300" b="0">
+                <a:solidFill>
+                  <a:srgbClr val="5B9BD5"/>
+                </a:solidFill>
+                <a:latin typeface="맑은 고딕"/>
+                <a:ea typeface="맑은 고딕"/>
+              </a:rPr>
+              <a:t>●  </a:t>
+            </a:r>
+            <a:r>
+              <a:rPr sz="1300">
+                <a:solidFill>
+                  <a:srgbClr val="1A1F2E"/>
+                </a:solidFill>
+                <a:latin typeface="맑은 고딕"/>
+                <a:ea typeface="맑은 고딕"/>
+              </a:rPr>
+              <a:t>실 계측 trend는 정상은 많지만 이상은 드물어, </a:t>
+            </a:r>
+            <a:r>
+              <a:rPr sz="1300" b="1">
                 <a:solidFill>
                   <a:srgbClr val="0F1E3D"/>
                 </a:solidFill>
                 <a:latin typeface="맑은 고딕"/>
                 <a:ea typeface="맑은 고딕"/>
               </a:rPr>
-              <a:t>trend 생성 구성요소 — 무엇을, 왜 넣었나</a:t>
-            </a:r>
-          </a:p>
-          <a:p>
-            <a:pPr algn="l"/>
-            <a:r>
-              <a:rPr sz="500">
-                <a:solidFill>
-                  <a:srgbClr val="FFFFFF"/>
-                </a:solidFill>
-                <a:latin typeface="맑은 고딕"/>
-                <a:ea typeface="맑은 고딕"/>
-              </a:rPr>
-              <a:t> </a:t>
-            </a:r>
-          </a:p>
-          <a:p>
-            <a:pPr algn="l"/>
-            <a:r>
-              <a:rPr sz="1350" b="1" i="0">
-                <a:solidFill>
-                  <a:srgbClr val="0F1E3D"/>
-                </a:solidFill>
-                <a:latin typeface="맑은 고딕"/>
-                <a:ea typeface="맑은 고딕"/>
-              </a:rPr>
-              <a:t>영역(Region)</a:t>
-            </a:r>
-          </a:p>
-          <a:p>
-            <a:pPr algn="l"/>
+              <a:t>avg / std / spike / drift / context</a:t>
+            </a:r>
             <a:r>
               <a:rPr sz="1300">
                 <a:solidFill>
@@ -4321,24 +4287,28 @@
                 <a:latin typeface="맑은 고딕"/>
                 <a:ea typeface="맑은 고딕"/>
               </a:rPr>
-              <a:t>    측정 빈도에 따라 밀집/희소/결핍이 실제로 교차하므로, 정상 baseline에 그대로 반영</a:t>
-            </a:r>
-          </a:p>
-          <a:p>
-            <a:pPr algn="l"/>
-            <a:r>
-              <a:rPr sz="1350" b="1" i="0">
-                <a:solidFill>
-                  <a:srgbClr val="0F1E3D"/>
-                </a:solidFill>
-                <a:latin typeface="맑은 고딕"/>
-                <a:ea typeface="맑은 고딕"/>
-              </a:rPr>
-              <a:t>노이즈(Noise)</a:t>
-            </a:r>
-          </a:p>
-          <a:p>
-            <a:pPr algn="l"/>
+              <a:t> 같은 이상 유형별 라벨이 부족합니다</a:t>
+            </a:r>
+          </a:p>
+          <a:p>
+            <a:pPr marL="274320" indent="-274320">
+              <a:lnSpc>
+                <a:spcPct val="110000"/>
+              </a:lnSpc>
+              <a:spcAft>
+                <a:spcPts val="400"/>
+              </a:spcAft>
+            </a:pPr>
+            <a:r>
+              <a:rPr sz="1300" b="0">
+                <a:solidFill>
+                  <a:srgbClr val="5B9BD5"/>
+                </a:solidFill>
+                <a:latin typeface="맑은 고딕"/>
+                <a:ea typeface="맑은 고딕"/>
+              </a:rPr>
+              <a:t>●  </a:t>
+            </a:r>
             <a:r>
               <a:rPr sz="1300">
                 <a:solidFill>
@@ -4347,47 +4317,141 @@
                 <a:latin typeface="맑은 고딕"/>
                 <a:ea typeface="맑은 고딕"/>
               </a:rPr>
-              <a:t>    계측 변동을 현장 현상으로 재현: Gaussian=산포 / Correlated=설비 변동 / Laplacian=계측 헌팅</a:t>
-            </a:r>
-          </a:p>
-          <a:p>
-            <a:pPr algn="l"/>
-            <a:r>
-              <a:rPr sz="1350" b="1" i="0">
-                <a:solidFill>
-                  <a:srgbClr val="0F1E3D"/>
-                </a:solidFill>
-                <a:latin typeface="맑은 고딕"/>
-                <a:ea typeface="맑은 고딕"/>
-              </a:rPr>
-              <a:t>이상(Anomaly 5종)</a:t>
-            </a:r>
-          </a:p>
-          <a:p>
-            <a:pPr algn="l"/>
-            <a:r>
-              <a:rPr sz="1300">
-                <a:solidFill>
-                  <a:srgbClr val="1A1F2E"/>
-                </a:solidFill>
-                <a:latin typeface="맑은 고딕"/>
-                <a:ea typeface="맑은 고딕"/>
-              </a:rPr>
-              <a:t>    실제 불량 발생 방식을 라벨로 확보: avg / std / spike / drift / context</a:t>
-            </a:r>
-          </a:p>
-        </p:txBody>
-      </p:sp>
-      <p:sp>
-        <p:nvSpPr>
-          <p:cNvPr id="10" name="TextBox 9"/>
+              <a:t>유형별 평가셋이 없으면 모델 학습도, 성능 비교도 어렵습니다</a:t>
+            </a:r>
+          </a:p>
+          <a:p>
+            <a:pPr marL="420624" indent="-420624" lvl="1">
+              <a:lnSpc>
+                <a:spcPct val="110000"/>
+              </a:lnSpc>
+              <a:spcAft>
+                <a:spcPts val="400"/>
+              </a:spcAft>
+            </a:pPr>
+            <a:r>
+              <a:rPr sz="1200" b="0">
+                <a:solidFill>
+                  <a:srgbClr val="6E7B8E"/>
+                </a:solidFill>
+                <a:latin typeface="맑은 고딕"/>
+                <a:ea typeface="맑은 고딕"/>
+              </a:rPr>
+              <a:t>–  </a:t>
+            </a:r>
+            <a:r>
+              <a:rPr sz="1200">
+                <a:solidFill>
+                  <a:srgbClr val="4A5666"/>
+                </a:solidFill>
+                <a:latin typeface="맑은 고딕"/>
+                <a:ea typeface="맑은 고딕"/>
+              </a:rPr>
+              <a:t>정답 라벨이 적어 정량 metric 자체가 성립하기 힘든 상황</a:t>
+            </a:r>
+          </a:p>
+        </p:txBody>
+      </p:sp>
+      <p:sp>
+        <p:nvSpPr>
+          <p:cNvPr id="9" name="Rectangle 8"/>
+          <p:cNvSpPr/>
+          <p:nvPr/>
+        </p:nvSpPr>
+        <p:spPr>
+          <a:xfrm>
+            <a:off x="868680" y="5102352"/>
+            <a:ext cx="2372868" cy="685800"/>
+          </a:xfrm>
+          <a:prstGeom prst="rect">
+            <a:avLst/>
+          </a:prstGeom>
+          <a:solidFill>
+            <a:srgbClr val="FFFFFF"/>
+          </a:solidFill>
+          <a:ln w="12700">
+            <a:solidFill>
+              <a:srgbClr val="D7DEEA"/>
+            </a:solidFill>
+          </a:ln>
+          <a:effectLst/>
+        </p:spPr>
+        <p:style>
+          <a:lnRef idx="1">
+            <a:schemeClr val="accent1"/>
+          </a:lnRef>
+          <a:fillRef idx="3">
+            <a:schemeClr val="accent1"/>
+          </a:fillRef>
+          <a:effectRef idx="2">
+            <a:schemeClr val="accent1"/>
+          </a:effectRef>
+          <a:fontRef idx="minor">
+            <a:schemeClr val="lt1"/>
+          </a:fontRef>
+        </p:style>
+        <p:txBody>
+          <a:bodyPr rtlCol="0" anchor="ctr"/>
+          <a:lstStyle/>
+          <a:p>
+            <a:pPr algn="ctr"/>
+          </a:p>
+        </p:txBody>
+      </p:sp>
+      <p:sp>
+        <p:nvSpPr>
+          <p:cNvPr id="10" name="Rectangle 9"/>
+          <p:cNvSpPr/>
+          <p:nvPr/>
+        </p:nvSpPr>
+        <p:spPr>
+          <a:xfrm>
+            <a:off x="868680" y="5102352"/>
+            <a:ext cx="2372868" cy="64008"/>
+          </a:xfrm>
+          <a:prstGeom prst="rect">
+            <a:avLst/>
+          </a:prstGeom>
+          <a:solidFill>
+            <a:srgbClr val="5B9BD5"/>
+          </a:solidFill>
+          <a:ln>
+            <a:noFill/>
+          </a:ln>
+          <a:effectLst/>
+        </p:spPr>
+        <p:style>
+          <a:lnRef idx="1">
+            <a:schemeClr val="accent1"/>
+          </a:lnRef>
+          <a:fillRef idx="3">
+            <a:schemeClr val="accent1"/>
+          </a:fillRef>
+          <a:effectRef idx="2">
+            <a:schemeClr val="accent1"/>
+          </a:effectRef>
+          <a:fontRef idx="minor">
+            <a:schemeClr val="lt1"/>
+          </a:fontRef>
+        </p:style>
+        <p:txBody>
+          <a:bodyPr rtlCol="0" anchor="ctr"/>
+          <a:lstStyle/>
+          <a:p>
+            <a:pPr algn="ctr"/>
+          </a:p>
+        </p:txBody>
+      </p:sp>
+      <p:sp>
+        <p:nvSpPr>
+          <p:cNvPr id="11" name="TextBox 10"/>
           <p:cNvSpPr txBox="1"/>
           <p:nvPr/>
         </p:nvSpPr>
         <p:spPr>
           <a:xfrm>
-            <a:off x="640080" y="6053328"/>
-            <a:ext cx="10972800" cy="329184"/>
+            <a:off x="868680" y="5212080"/>
+            <a:ext cx="2372868" cy="329184"/>
           </a:xfrm>
           <a:prstGeom prst="rect">
             <a:avLst/>
@@ -4402,28 +4466,28 @@
           <a:p>
             <a:pPr algn="ctr"/>
             <a:r>
-              <a:rPr sz="1250" b="1">
+              <a:rPr sz="1600" b="1">
                 <a:solidFill>
                   <a:srgbClr val="0F1E3D"/>
                 </a:solidFill>
                 <a:latin typeface="맑은 고딕"/>
                 <a:ea typeface="맑은 고딕"/>
               </a:rPr>
-              <a:t/>
-            </a:r>
-          </a:p>
-        </p:txBody>
-      </p:sp>
-      <p:sp>
-        <p:nvSpPr>
-          <p:cNvPr id="11" name="TextBox 10"/>
+              <a:t>이상 5종</a:t>
+            </a:r>
+          </a:p>
+        </p:txBody>
+      </p:sp>
+      <p:sp>
+        <p:nvSpPr>
+          <p:cNvPr id="12" name="TextBox 11"/>
           <p:cNvSpPr txBox="1"/>
           <p:nvPr/>
         </p:nvSpPr>
         <p:spPr>
           <a:xfrm>
-            <a:off x="457200" y="6437376"/>
-            <a:ext cx="8229600" cy="292608"/>
+            <a:off x="868680" y="5522976"/>
+            <a:ext cx="2372868" cy="256032"/>
           </a:xfrm>
           <a:prstGeom prst="rect">
             <a:avLst/>
@@ -4436,8 +4500,609 @@
           </a:bodyPr>
           <a:lstStyle/>
           <a:p>
+            <a:pPr algn="ctr"/>
+            <a:r>
+              <a:rPr sz="900">
+                <a:solidFill>
+                  <a:srgbClr val="6B7280"/>
+                </a:solidFill>
+                <a:latin typeface="맑은 고딕"/>
+                <a:ea typeface="맑은 고딕"/>
+              </a:rPr>
+              <a:t>avg/std/spike/drift/context</a:t>
+            </a:r>
+          </a:p>
+        </p:txBody>
+      </p:sp>
+      <p:sp>
+        <p:nvSpPr>
+          <p:cNvPr id="13" name="Rectangle 12"/>
+          <p:cNvSpPr/>
+          <p:nvPr/>
+        </p:nvSpPr>
+        <p:spPr>
+          <a:xfrm>
+            <a:off x="3387852" y="5102352"/>
+            <a:ext cx="2372868" cy="685800"/>
+          </a:xfrm>
+          <a:prstGeom prst="rect">
+            <a:avLst/>
+          </a:prstGeom>
+          <a:solidFill>
+            <a:srgbClr val="FFFFFF"/>
+          </a:solidFill>
+          <a:ln w="12700">
+            <a:solidFill>
+              <a:srgbClr val="D7DEEA"/>
+            </a:solidFill>
+          </a:ln>
+          <a:effectLst/>
+        </p:spPr>
+        <p:style>
+          <a:lnRef idx="1">
+            <a:schemeClr val="accent1"/>
+          </a:lnRef>
+          <a:fillRef idx="3">
+            <a:schemeClr val="accent1"/>
+          </a:fillRef>
+          <a:effectRef idx="2">
+            <a:schemeClr val="accent1"/>
+          </a:effectRef>
+          <a:fontRef idx="minor">
+            <a:schemeClr val="lt1"/>
+          </a:fontRef>
+        </p:style>
+        <p:txBody>
+          <a:bodyPr rtlCol="0" anchor="ctr"/>
+          <a:lstStyle/>
+          <a:p>
+            <a:pPr algn="ctr"/>
+          </a:p>
+        </p:txBody>
+      </p:sp>
+      <p:sp>
+        <p:nvSpPr>
+          <p:cNvPr id="14" name="Rectangle 13"/>
+          <p:cNvSpPr/>
+          <p:nvPr/>
+        </p:nvSpPr>
+        <p:spPr>
+          <a:xfrm>
+            <a:off x="3387852" y="5102352"/>
+            <a:ext cx="2372868" cy="64008"/>
+          </a:xfrm>
+          <a:prstGeom prst="rect">
+            <a:avLst/>
+          </a:prstGeom>
+          <a:solidFill>
+            <a:srgbClr val="5B9BD5"/>
+          </a:solidFill>
+          <a:ln>
+            <a:noFill/>
+          </a:ln>
+          <a:effectLst/>
+        </p:spPr>
+        <p:style>
+          <a:lnRef idx="1">
+            <a:schemeClr val="accent1"/>
+          </a:lnRef>
+          <a:fillRef idx="3">
+            <a:schemeClr val="accent1"/>
+          </a:fillRef>
+          <a:effectRef idx="2">
+            <a:schemeClr val="accent1"/>
+          </a:effectRef>
+          <a:fontRef idx="minor">
+            <a:schemeClr val="lt1"/>
+          </a:fontRef>
+        </p:style>
+        <p:txBody>
+          <a:bodyPr rtlCol="0" anchor="ctr"/>
+          <a:lstStyle/>
+          <a:p>
+            <a:pPr algn="ctr"/>
+          </a:p>
+        </p:txBody>
+      </p:sp>
+      <p:sp>
+        <p:nvSpPr>
+          <p:cNvPr id="15" name="TextBox 14"/>
+          <p:cNvSpPr txBox="1"/>
+          <p:nvPr/>
+        </p:nvSpPr>
+        <p:spPr>
+          <a:xfrm>
+            <a:off x="3387852" y="5212080"/>
+            <a:ext cx="2372868" cy="329184"/>
+          </a:xfrm>
+          <a:prstGeom prst="rect">
+            <a:avLst/>
+          </a:prstGeom>
+          <a:noFill/>
+        </p:spPr>
+        <p:txBody>
+          <a:bodyPr wrap="square" anchor="ctr" lIns="0" rIns="0" tIns="0" bIns="0">
+            <a:spAutoFit/>
+          </a:bodyPr>
+          <a:lstStyle/>
+          <a:p>
+            <a:pPr algn="ctr"/>
+            <a:r>
+              <a:rPr sz="1600" b="1">
+                <a:solidFill>
+                  <a:srgbClr val="0F1E3D"/>
+                </a:solidFill>
+                <a:latin typeface="맑은 고딕"/>
+                <a:ea typeface="맑은 고딕"/>
+              </a:rPr>
+              <a:t>라벨 희소</a:t>
+            </a:r>
+          </a:p>
+        </p:txBody>
+      </p:sp>
+      <p:sp>
+        <p:nvSpPr>
+          <p:cNvPr id="16" name="TextBox 15"/>
+          <p:cNvSpPr txBox="1"/>
+          <p:nvPr/>
+        </p:nvSpPr>
+        <p:spPr>
+          <a:xfrm>
+            <a:off x="3387852" y="5522976"/>
+            <a:ext cx="2372868" cy="256032"/>
+          </a:xfrm>
+          <a:prstGeom prst="rect">
+            <a:avLst/>
+          </a:prstGeom>
+          <a:noFill/>
+        </p:spPr>
+        <p:txBody>
+          <a:bodyPr wrap="square" anchor="ctr" lIns="0" rIns="0" tIns="0" bIns="0">
+            <a:spAutoFit/>
+          </a:bodyPr>
+          <a:lstStyle/>
+          <a:p>
+            <a:pPr algn="ctr"/>
+            <a:r>
+              <a:rPr sz="900">
+                <a:solidFill>
+                  <a:srgbClr val="6B7280"/>
+                </a:solidFill>
+                <a:latin typeface="맑은 고딕"/>
+                <a:ea typeface="맑은 고딕"/>
+              </a:rPr>
+              <a:t>정량 평가 난항</a:t>
+            </a:r>
+          </a:p>
+        </p:txBody>
+      </p:sp>
+      <p:sp>
+        <p:nvSpPr>
+          <p:cNvPr id="17" name="Rectangle 16"/>
+          <p:cNvSpPr/>
+          <p:nvPr/>
+        </p:nvSpPr>
+        <p:spPr>
+          <a:xfrm>
+            <a:off x="6263640" y="1783080"/>
+            <a:ext cx="5349240" cy="640080"/>
+          </a:xfrm>
+          <a:prstGeom prst="rect">
+            <a:avLst/>
+          </a:prstGeom>
+          <a:solidFill>
+            <a:srgbClr val="0F1E3D"/>
+          </a:solidFill>
+          <a:ln>
+            <a:noFill/>
+          </a:ln>
+          <a:effectLst/>
+        </p:spPr>
+        <p:style>
+          <a:lnRef idx="1">
+            <a:schemeClr val="accent1"/>
+          </a:lnRef>
+          <a:fillRef idx="3">
+            <a:schemeClr val="accent1"/>
+          </a:fillRef>
+          <a:effectRef idx="2">
+            <a:schemeClr val="accent1"/>
+          </a:effectRef>
+          <a:fontRef idx="minor">
+            <a:schemeClr val="lt1"/>
+          </a:fontRef>
+        </p:style>
+        <p:txBody>
+          <a:bodyPr rtlCol="0" anchor="ctr"/>
+          <a:lstStyle/>
+          <a:p>
+            <a:pPr algn="ctr"/>
+          </a:p>
+        </p:txBody>
+      </p:sp>
+      <p:sp>
+        <p:nvSpPr>
+          <p:cNvPr id="18" name="TextBox 17"/>
+          <p:cNvSpPr txBox="1"/>
+          <p:nvPr/>
+        </p:nvSpPr>
+        <p:spPr>
+          <a:xfrm>
+            <a:off x="6492240" y="1783080"/>
+            <a:ext cx="4983480" cy="640080"/>
+          </a:xfrm>
+          <a:prstGeom prst="rect">
+            <a:avLst/>
+          </a:prstGeom>
+          <a:noFill/>
+        </p:spPr>
+        <p:txBody>
+          <a:bodyPr wrap="square" anchor="ctr" lIns="0" rIns="0" tIns="0" bIns="0">
+            <a:spAutoFit/>
+          </a:bodyPr>
+          <a:lstStyle/>
+          <a:p>
             <a:pPr algn="l"/>
             <a:r>
+              <a:rPr sz="1550" b="1">
+                <a:solidFill>
+                  <a:srgbClr val="FFFFFF"/>
+                </a:solidFill>
+                <a:latin typeface="맑은 고딕"/>
+                <a:ea typeface="맑은 고딕"/>
+              </a:rPr>
+              <a:t>해법 — domain knowledge generator</a:t>
+            </a:r>
+          </a:p>
+        </p:txBody>
+      </p:sp>
+      <p:sp>
+        <p:nvSpPr>
+          <p:cNvPr id="19" name="Rectangle 18"/>
+          <p:cNvSpPr/>
+          <p:nvPr/>
+        </p:nvSpPr>
+        <p:spPr>
+          <a:xfrm>
+            <a:off x="6263640" y="2423160"/>
+            <a:ext cx="5349240" cy="3520440"/>
+          </a:xfrm>
+          <a:prstGeom prst="rect">
+            <a:avLst/>
+          </a:prstGeom>
+          <a:solidFill>
+            <a:srgbClr val="F2F5FA"/>
+          </a:solidFill>
+          <a:ln>
+            <a:noFill/>
+          </a:ln>
+          <a:effectLst/>
+        </p:spPr>
+        <p:style>
+          <a:lnRef idx="1">
+            <a:schemeClr val="accent1"/>
+          </a:lnRef>
+          <a:fillRef idx="3">
+            <a:schemeClr val="accent1"/>
+          </a:fillRef>
+          <a:effectRef idx="2">
+            <a:schemeClr val="accent1"/>
+          </a:effectRef>
+          <a:fontRef idx="minor">
+            <a:schemeClr val="lt1"/>
+          </a:fontRef>
+        </p:style>
+        <p:txBody>
+          <a:bodyPr rtlCol="0" anchor="ctr"/>
+          <a:lstStyle/>
+          <a:p>
+            <a:pPr algn="ctr"/>
+          </a:p>
+        </p:txBody>
+      </p:sp>
+      <p:sp>
+        <p:nvSpPr>
+          <p:cNvPr id="20" name="TextBox 19"/>
+          <p:cNvSpPr txBox="1"/>
+          <p:nvPr/>
+        </p:nvSpPr>
+        <p:spPr>
+          <a:xfrm>
+            <a:off x="6492240" y="2606040"/>
+            <a:ext cx="4892040" cy="2276856"/>
+          </a:xfrm>
+          <a:prstGeom prst="rect">
+            <a:avLst/>
+          </a:prstGeom>
+          <a:noFill/>
+        </p:spPr>
+        <p:txBody>
+          <a:bodyPr wrap="square" anchor="t" lIns="0" rIns="0" tIns="0" bIns="0">
+            <a:spAutoFit/>
+          </a:bodyPr>
+          <a:lstStyle/>
+          <a:p>
+            <a:pPr marL="274320" indent="-274320">
+              <a:lnSpc>
+                <a:spcPct val="110000"/>
+              </a:lnSpc>
+              <a:spcAft>
+                <a:spcPts val="400"/>
+              </a:spcAft>
+            </a:pPr>
+            <a:r>
+              <a:rPr sz="1300" b="0">
+                <a:solidFill>
+                  <a:srgbClr val="5B9BD5"/>
+                </a:solidFill>
+                <a:latin typeface="맑은 고딕"/>
+                <a:ea typeface="맑은 고딕"/>
+              </a:rPr>
+              <a:t>●  </a:t>
+            </a:r>
+            <a:r>
+              <a:rPr sz="1300">
+                <a:solidFill>
+                  <a:srgbClr val="1A1F2E"/>
+                </a:solidFill>
+                <a:latin typeface="맑은 고딕"/>
+                <a:ea typeface="맑은 고딕"/>
+              </a:rPr>
+              <a:t>BBD담당/Overlay담당/CD담당으로 쌓은 trend 분석 경험으로 계측의 </a:t>
+            </a:r>
+            <a:r>
+              <a:rPr sz="1300" b="1">
+                <a:solidFill>
+                  <a:srgbClr val="0F1E3D"/>
+                </a:solidFill>
+                <a:latin typeface="맑은 고딕"/>
+                <a:ea typeface="맑은 고딕"/>
+              </a:rPr>
+              <a:t>영역 구조, 노이즈, 이상 발생 방식</a:t>
+            </a:r>
+            <a:r>
+              <a:rPr sz="1300">
+                <a:solidFill>
+                  <a:srgbClr val="1A1F2E"/>
+                </a:solidFill>
+                <a:latin typeface="맑은 고딕"/>
+                <a:ea typeface="맑은 고딕"/>
+              </a:rPr>
+              <a:t>을 규칙으로 코드화했습니다</a:t>
+            </a:r>
+          </a:p>
+          <a:p>
+            <a:pPr marL="274320" indent="-274320">
+              <a:lnSpc>
+                <a:spcPct val="110000"/>
+              </a:lnSpc>
+              <a:spcAft>
+                <a:spcPts val="400"/>
+              </a:spcAft>
+            </a:pPr>
+            <a:r>
+              <a:rPr sz="1300" b="0">
+                <a:solidFill>
+                  <a:srgbClr val="5B9BD5"/>
+                </a:solidFill>
+                <a:latin typeface="맑은 고딕"/>
+                <a:ea typeface="맑은 고딕"/>
+              </a:rPr>
+              <a:t>●  </a:t>
+            </a:r>
+            <a:r>
+              <a:rPr sz="1300">
+                <a:solidFill>
+                  <a:srgbClr val="1A1F2E"/>
+                </a:solidFill>
+                <a:latin typeface="맑은 고딕"/>
+                <a:ea typeface="맑은 고딕"/>
+              </a:rPr>
+              <a:t>정상 baseline을 만들고 그 위에 이상을 합성해 </a:t>
+            </a:r>
+            <a:r>
+              <a:rPr sz="1300" b="1">
+                <a:solidFill>
+                  <a:srgbClr val="0F1E3D"/>
+                </a:solidFill>
+                <a:latin typeface="맑은 고딕"/>
+                <a:ea typeface="맑은 고딕"/>
+              </a:rPr>
+              <a:t>검증 가능한 benchmark</a:t>
+            </a:r>
+            <a:r>
+              <a:rPr sz="1300">
+                <a:solidFill>
+                  <a:srgbClr val="1A1F2E"/>
+                </a:solidFill>
+                <a:latin typeface="맑은 고딕"/>
+                <a:ea typeface="맑은 고딕"/>
+              </a:rPr>
+              <a:t>를 확보했습니다</a:t>
+            </a:r>
+          </a:p>
+          <a:p>
+            <a:pPr marL="420624" indent="-420624" lvl="1">
+              <a:lnSpc>
+                <a:spcPct val="110000"/>
+              </a:lnSpc>
+              <a:spcAft>
+                <a:spcPts val="400"/>
+              </a:spcAft>
+            </a:pPr>
+            <a:r>
+              <a:rPr sz="1200" b="0">
+                <a:solidFill>
+                  <a:srgbClr val="6E7B8E"/>
+                </a:solidFill>
+                <a:latin typeface="맑은 고딕"/>
+                <a:ea typeface="맑은 고딕"/>
+              </a:rPr>
+              <a:t>–  </a:t>
+            </a:r>
+            <a:r>
+              <a:rPr sz="1200">
+                <a:solidFill>
+                  <a:srgbClr val="4A5666"/>
+                </a:solidFill>
+                <a:latin typeface="맑은 고딕"/>
+                <a:ea typeface="맑은 고딕"/>
+              </a:rPr>
+              <a:t>영역(계측 밀도) + 노이즈(계측 변동) + 이상(불량 방식) 세 축을 규칙화</a:t>
+            </a:r>
+          </a:p>
+        </p:txBody>
+      </p:sp>
+      <p:sp>
+        <p:nvSpPr>
+          <p:cNvPr id="21" name="Rectangle 20"/>
+          <p:cNvSpPr/>
+          <p:nvPr/>
+        </p:nvSpPr>
+        <p:spPr>
+          <a:xfrm>
+            <a:off x="6492240" y="5102352"/>
+            <a:ext cx="2372868" cy="685800"/>
+          </a:xfrm>
+          <a:prstGeom prst="rect">
+            <a:avLst/>
+          </a:prstGeom>
+          <a:solidFill>
+            <a:srgbClr val="FFFFFF"/>
+          </a:solidFill>
+          <a:ln w="12700">
+            <a:solidFill>
+              <a:srgbClr val="D7DEEA"/>
+            </a:solidFill>
+          </a:ln>
+          <a:effectLst/>
+        </p:spPr>
+        <p:style>
+          <a:lnRef idx="1">
+            <a:schemeClr val="accent1"/>
+          </a:lnRef>
+          <a:fillRef idx="3">
+            <a:schemeClr val="accent1"/>
+          </a:fillRef>
+          <a:effectRef idx="2">
+            <a:schemeClr val="accent1"/>
+          </a:effectRef>
+          <a:fontRef idx="minor">
+            <a:schemeClr val="lt1"/>
+          </a:fontRef>
+        </p:style>
+        <p:txBody>
+          <a:bodyPr rtlCol="0" anchor="ctr"/>
+          <a:lstStyle/>
+          <a:p>
+            <a:pPr algn="ctr"/>
+          </a:p>
+        </p:txBody>
+      </p:sp>
+      <p:sp>
+        <p:nvSpPr>
+          <p:cNvPr id="22" name="Rectangle 21"/>
+          <p:cNvSpPr/>
+          <p:nvPr/>
+        </p:nvSpPr>
+        <p:spPr>
+          <a:xfrm>
+            <a:off x="6492240" y="5102352"/>
+            <a:ext cx="2372868" cy="64008"/>
+          </a:xfrm>
+          <a:prstGeom prst="rect">
+            <a:avLst/>
+          </a:prstGeom>
+          <a:solidFill>
+            <a:srgbClr val="5B9BD5"/>
+          </a:solidFill>
+          <a:ln>
+            <a:noFill/>
+          </a:ln>
+          <a:effectLst/>
+        </p:spPr>
+        <p:style>
+          <a:lnRef idx="1">
+            <a:schemeClr val="accent1"/>
+          </a:lnRef>
+          <a:fillRef idx="3">
+            <a:schemeClr val="accent1"/>
+          </a:fillRef>
+          <a:effectRef idx="2">
+            <a:schemeClr val="accent1"/>
+          </a:effectRef>
+          <a:fontRef idx="minor">
+            <a:schemeClr val="lt1"/>
+          </a:fontRef>
+        </p:style>
+        <p:txBody>
+          <a:bodyPr rtlCol="0" anchor="ctr"/>
+          <a:lstStyle/>
+          <a:p>
+            <a:pPr algn="ctr"/>
+          </a:p>
+        </p:txBody>
+      </p:sp>
+      <p:sp>
+        <p:nvSpPr>
+          <p:cNvPr id="23" name="TextBox 22"/>
+          <p:cNvSpPr txBox="1"/>
+          <p:nvPr/>
+        </p:nvSpPr>
+        <p:spPr>
+          <a:xfrm>
+            <a:off x="6492240" y="5212080"/>
+            <a:ext cx="2372868" cy="329184"/>
+          </a:xfrm>
+          <a:prstGeom prst="rect">
+            <a:avLst/>
+          </a:prstGeom>
+          <a:noFill/>
+        </p:spPr>
+        <p:txBody>
+          <a:bodyPr wrap="square" anchor="ctr" lIns="0" rIns="0" tIns="0" bIns="0">
+            <a:spAutoFit/>
+          </a:bodyPr>
+          <a:lstStyle/>
+          <a:p>
+            <a:pPr algn="ctr"/>
+            <a:r>
+              <a:rPr sz="1600" b="1">
+                <a:solidFill>
+                  <a:srgbClr val="0F1E3D"/>
+                </a:solidFill>
+                <a:latin typeface="맑은 고딕"/>
+                <a:ea typeface="맑은 고딕"/>
+              </a:rPr>
+              <a:t>규칙 기반</a:t>
+            </a:r>
+          </a:p>
+        </p:txBody>
+      </p:sp>
+      <p:sp>
+        <p:nvSpPr>
+          <p:cNvPr id="24" name="TextBox 23"/>
+          <p:cNvSpPr txBox="1"/>
+          <p:nvPr/>
+        </p:nvSpPr>
+        <p:spPr>
+          <a:xfrm>
+            <a:off x="6492240" y="5522976"/>
+            <a:ext cx="2372868" cy="256032"/>
+          </a:xfrm>
+          <a:prstGeom prst="rect">
+            <a:avLst/>
+          </a:prstGeom>
+          <a:noFill/>
+        </p:spPr>
+        <p:txBody>
+          <a:bodyPr wrap="square" anchor="ctr" lIns="0" rIns="0" tIns="0" bIns="0">
+            <a:spAutoFit/>
+          </a:bodyPr>
+          <a:lstStyle/>
+          <a:p>
+            <a:pPr algn="ctr"/>
+            <a:r>
               <a:rPr sz="900">
                 <a:solidFill>
                   <a:srgbClr val="6B7280"/>
@@ -4445,6 +5110,204 @@
                 <a:latin typeface="맑은 고딕"/>
                 <a:ea typeface="맑은 고딕"/>
               </a:rPr>
+              <a:t>영역+노이즈+이상</a:t>
+            </a:r>
+          </a:p>
+        </p:txBody>
+      </p:sp>
+      <p:sp>
+        <p:nvSpPr>
+          <p:cNvPr id="25" name="Rectangle 24"/>
+          <p:cNvSpPr/>
+          <p:nvPr/>
+        </p:nvSpPr>
+        <p:spPr>
+          <a:xfrm>
+            <a:off x="9011412" y="5102352"/>
+            <a:ext cx="2372868" cy="685800"/>
+          </a:xfrm>
+          <a:prstGeom prst="rect">
+            <a:avLst/>
+          </a:prstGeom>
+          <a:solidFill>
+            <a:srgbClr val="FFFFFF"/>
+          </a:solidFill>
+          <a:ln w="12700">
+            <a:solidFill>
+              <a:srgbClr val="D7DEEA"/>
+            </a:solidFill>
+          </a:ln>
+          <a:effectLst/>
+        </p:spPr>
+        <p:style>
+          <a:lnRef idx="1">
+            <a:schemeClr val="accent1"/>
+          </a:lnRef>
+          <a:fillRef idx="3">
+            <a:schemeClr val="accent1"/>
+          </a:fillRef>
+          <a:effectRef idx="2">
+            <a:schemeClr val="accent1"/>
+          </a:effectRef>
+          <a:fontRef idx="minor">
+            <a:schemeClr val="lt1"/>
+          </a:fontRef>
+        </p:style>
+        <p:txBody>
+          <a:bodyPr rtlCol="0" anchor="ctr"/>
+          <a:lstStyle/>
+          <a:p>
+            <a:pPr algn="ctr"/>
+          </a:p>
+        </p:txBody>
+      </p:sp>
+      <p:sp>
+        <p:nvSpPr>
+          <p:cNvPr id="26" name="Rectangle 25"/>
+          <p:cNvSpPr/>
+          <p:nvPr/>
+        </p:nvSpPr>
+        <p:spPr>
+          <a:xfrm>
+            <a:off x="9011412" y="5102352"/>
+            <a:ext cx="2372868" cy="64008"/>
+          </a:xfrm>
+          <a:prstGeom prst="rect">
+            <a:avLst/>
+          </a:prstGeom>
+          <a:solidFill>
+            <a:srgbClr val="5B9BD5"/>
+          </a:solidFill>
+          <a:ln>
+            <a:noFill/>
+          </a:ln>
+          <a:effectLst/>
+        </p:spPr>
+        <p:style>
+          <a:lnRef idx="1">
+            <a:schemeClr val="accent1"/>
+          </a:lnRef>
+          <a:fillRef idx="3">
+            <a:schemeClr val="accent1"/>
+          </a:fillRef>
+          <a:effectRef idx="2">
+            <a:schemeClr val="accent1"/>
+          </a:effectRef>
+          <a:fontRef idx="minor">
+            <a:schemeClr val="lt1"/>
+          </a:fontRef>
+        </p:style>
+        <p:txBody>
+          <a:bodyPr rtlCol="0" anchor="ctr"/>
+          <a:lstStyle/>
+          <a:p>
+            <a:pPr algn="ctr"/>
+          </a:p>
+        </p:txBody>
+      </p:sp>
+      <p:sp>
+        <p:nvSpPr>
+          <p:cNvPr id="27" name="TextBox 26"/>
+          <p:cNvSpPr txBox="1"/>
+          <p:nvPr/>
+        </p:nvSpPr>
+        <p:spPr>
+          <a:xfrm>
+            <a:off x="9011412" y="5212080"/>
+            <a:ext cx="2372868" cy="329184"/>
+          </a:xfrm>
+          <a:prstGeom prst="rect">
+            <a:avLst/>
+          </a:prstGeom>
+          <a:noFill/>
+        </p:spPr>
+        <p:txBody>
+          <a:bodyPr wrap="square" anchor="ctr" lIns="0" rIns="0" tIns="0" bIns="0">
+            <a:spAutoFit/>
+          </a:bodyPr>
+          <a:lstStyle/>
+          <a:p>
+            <a:pPr algn="ctr"/>
+            <a:r>
+              <a:rPr sz="1600" b="1">
+                <a:solidFill>
+                  <a:srgbClr val="0F1E3D"/>
+                </a:solidFill>
+                <a:latin typeface="맑은 고딕"/>
+                <a:ea typeface="맑은 고딕"/>
+              </a:rPr>
+              <a:t>benchmark</a:t>
+            </a:r>
+          </a:p>
+        </p:txBody>
+      </p:sp>
+      <p:sp>
+        <p:nvSpPr>
+          <p:cNvPr id="28" name="TextBox 27"/>
+          <p:cNvSpPr txBox="1"/>
+          <p:nvPr/>
+        </p:nvSpPr>
+        <p:spPr>
+          <a:xfrm>
+            <a:off x="9011412" y="5522976"/>
+            <a:ext cx="2372868" cy="256032"/>
+          </a:xfrm>
+          <a:prstGeom prst="rect">
+            <a:avLst/>
+          </a:prstGeom>
+          <a:noFill/>
+        </p:spPr>
+        <p:txBody>
+          <a:bodyPr wrap="square" anchor="ctr" lIns="0" rIns="0" tIns="0" bIns="0">
+            <a:spAutoFit/>
+          </a:bodyPr>
+          <a:lstStyle/>
+          <a:p>
+            <a:pPr algn="ctr"/>
+            <a:r>
+              <a:rPr sz="900">
+                <a:solidFill>
+                  <a:srgbClr val="6B7280"/>
+                </a:solidFill>
+                <a:latin typeface="맑은 고딕"/>
+                <a:ea typeface="맑은 고딕"/>
+              </a:rPr>
+              <a:t>검증 가능</a:t>
+            </a:r>
+          </a:p>
+        </p:txBody>
+      </p:sp>
+      <p:sp>
+        <p:nvSpPr>
+          <p:cNvPr id="29" name="TextBox 28"/>
+          <p:cNvSpPr txBox="1"/>
+          <p:nvPr/>
+        </p:nvSpPr>
+        <p:spPr>
+          <a:xfrm>
+            <a:off x="457200" y="6437376"/>
+            <a:ext cx="8229600" cy="292608"/>
+          </a:xfrm>
+          <a:prstGeom prst="rect">
+            <a:avLst/>
+          </a:prstGeom>
+          <a:noFill/>
+        </p:spPr>
+        <p:txBody>
+          <a:bodyPr wrap="square" anchor="ctr" lIns="0" rIns="0" tIns="0" bIns="0">
+            <a:spAutoFit/>
+          </a:bodyPr>
+          <a:lstStyle/>
+          <a:p>
+            <a:pPr algn="l"/>
+            <a:r>
+              <a:rPr sz="900">
+                <a:solidFill>
+                  <a:srgbClr val="6B7280"/>
+                </a:solidFill>
+                <a:latin typeface="맑은 고딕"/>
+                <a:ea typeface="맑은 고딕"/>
+              </a:rPr>
               <a:t>최호길 | QIE Data Science | AI Specialist 인증</a:t>
             </a:r>
           </a:p>
@@ -4452,7 +5315,7 @@
       </p:sp>
       <p:sp>
         <p:nvSpPr>
-          <p:cNvPr id="12" name="TextBox 11"/>
+          <p:cNvPr id="30" name="TextBox 29"/>
           <p:cNvSpPr txBox="1"/>
           <p:nvPr/>
         </p:nvSpPr>
@@ -4587,7 +5450,7 @@
                 <a:latin typeface="맑은 고딕"/>
                 <a:ea typeface="맑은 고딕"/>
               </a:rPr>
-              <a:t>P3 | 정상 baseline</a:t>
+              <a:t>P3 | 정상 baseline (영역)</a:t>
             </a:r>
           </a:p>
         </p:txBody>
@@ -4623,118 +5486,21 @@
                 <a:latin typeface="맑은 고딕"/>
                 <a:ea typeface="맑은 고딕"/>
               </a:rPr>
-              <a:t>계측은 밀집/희소/결핍 영역이 섞여 나온다</a:t>
-            </a:r>
-          </a:p>
-        </p:txBody>
-      </p:sp>
-      <p:sp>
-        <p:nvSpPr>
-          <p:cNvPr id="5" name="TextBox 4"/>
-          <p:cNvSpPr txBox="1"/>
-          <p:nvPr/>
-        </p:nvSpPr>
-        <p:spPr>
-          <a:xfrm>
-            <a:off x="640080" y="1828800"/>
-            <a:ext cx="10972800" cy="1143000"/>
-          </a:xfrm>
-          <a:prstGeom prst="rect">
-            <a:avLst/>
-          </a:prstGeom>
-          <a:noFill/>
-        </p:spPr>
-        <p:txBody>
-          <a:bodyPr wrap="square" anchor="t" lIns="0" rIns="0" tIns="0" bIns="0">
-            <a:spAutoFit/>
-          </a:bodyPr>
-          <a:lstStyle/>
-          <a:p>
-            <a:pPr marL="274320" indent="-274320">
-              <a:spcAft>
-                <a:spcPts val="500"/>
-              </a:spcAft>
-            </a:pPr>
-            <a:r>
-              <a:rPr sz="1450" b="0">
-                <a:solidFill>
-                  <a:srgbClr val="5B9BD5"/>
-                </a:solidFill>
-                <a:latin typeface="맑은 고딕"/>
-                <a:ea typeface="맑은 고딕"/>
-              </a:rPr>
-              <a:t>●  </a:t>
-            </a:r>
-            <a:r>
-              <a:rPr sz="1450">
-                <a:solidFill>
-                  <a:srgbClr val="1A1F2E"/>
-                </a:solidFill>
-                <a:latin typeface="맑은 고딕"/>
-                <a:ea typeface="맑은 고딕"/>
-              </a:rPr>
-              <a:t>계측 trend는 주기성이 없고 측정 빈도에 따라 </a:t>
-            </a:r>
-            <a:r>
-              <a:rPr sz="1450" b="1">
-                <a:solidFill>
-                  <a:srgbClr val="0F1E3D"/>
-                </a:solidFill>
-                <a:latin typeface="맑은 고딕"/>
-                <a:ea typeface="맑은 고딕"/>
-              </a:rPr>
-              <a:t>밀집(dense) / 희소(sparse) / 결핍(missing)</a:t>
-            </a:r>
-            <a:r>
-              <a:rPr sz="1450">
-                <a:solidFill>
-                  <a:srgbClr val="1A1F2E"/>
-                </a:solidFill>
-                <a:latin typeface="맑은 고딕"/>
-                <a:ea typeface="맑은 고딕"/>
-              </a:rPr>
-              <a:t> 영역이 랜덤하게 교차합니다. 실제 계측이 이렇게 나오므로 baseline 생성에 그대로 반영했습니다</a:t>
-            </a:r>
-          </a:p>
-          <a:p>
-            <a:pPr marL="274320" indent="-274320">
-              <a:spcAft>
-                <a:spcPts val="500"/>
-              </a:spcAft>
-            </a:pPr>
-            <a:r>
-              <a:rPr sz="1450" b="0">
-                <a:solidFill>
-                  <a:srgbClr val="5B9BD5"/>
-                </a:solidFill>
-                <a:latin typeface="맑은 고딕"/>
-                <a:ea typeface="맑은 고딕"/>
-              </a:rPr>
-              <a:t>●  </a:t>
-            </a:r>
-            <a:r>
-              <a:rPr sz="1450">
-                <a:solidFill>
-                  <a:srgbClr val="1A1F2E"/>
-                </a:solidFill>
-                <a:latin typeface="맑은 고딕"/>
-                <a:ea typeface="맑은 고딕"/>
-              </a:rPr>
-              <a:t>한 chart를 12~25개 episode로 나누고 episode마다 영역 밀도를 확률로 샘플링합니다(밀집/희소/결핍 중심 5종). 신호 자체는 강한 평균회귀로 거의 평탄하게 두고, 변동은 노이즈로만 만들어 실제 계측과 비슷하게 했습니다</a:t>
-            </a:r>
-          </a:p>
-        </p:txBody>
-      </p:sp>
-      <p:sp>
-        <p:nvSpPr>
-          <p:cNvPr id="6" name="Rectangle 5"/>
+              <a:t>측정 빈도에 따라 밀집/희소/결핍 영역이 교차한다</a:t>
+            </a:r>
+          </a:p>
+        </p:txBody>
+      </p:sp>
+      <p:sp>
+        <p:nvSpPr>
+          <p:cNvPr id="5" name="Rectangle 4"/>
           <p:cNvSpPr/>
           <p:nvPr/>
         </p:nvSpPr>
         <p:spPr>
           <a:xfrm>
-            <a:off x="4161680" y="3090816"/>
-            <a:ext cx="3929600" cy="2532600"/>
+            <a:off x="631081" y="2055904"/>
+            <a:ext cx="10990798" cy="3703520"/>
           </a:xfrm>
           <a:prstGeom prst="rect">
             <a:avLst/>
@@ -4773,7 +5539,7 @@
       </p:sp>
       <p:pic>
         <p:nvPicPr>
-          <p:cNvPr id="7" name="Picture 6" descr="trend_normal.png"/>
+          <p:cNvPr id="6" name="Picture 5" descr="p3_deck_regions.png"/>
           <p:cNvPicPr>
             <a:picLocks noChangeAspect="1"/>
           </p:cNvPicPr>
@@ -4787,14 +5553,50 @@
         </p:blipFill>
         <p:spPr>
           <a:xfrm>
-            <a:off x="4170680" y="3099816"/>
-            <a:ext cx="3911600" cy="2514600"/>
+            <a:off x="640081" y="2064904"/>
+            <a:ext cx="10972798" cy="3685520"/>
           </a:xfrm>
           <a:prstGeom prst="rect">
             <a:avLst/>
           </a:prstGeom>
         </p:spPr>
       </p:pic>
+      <p:sp>
+        <p:nvSpPr>
+          <p:cNvPr id="7" name="TextBox 6"/>
+          <p:cNvSpPr txBox="1"/>
+          <p:nvPr/>
+        </p:nvSpPr>
+        <p:spPr>
+          <a:xfrm>
+            <a:off x="640080" y="5961888"/>
+            <a:ext cx="10972800" cy="274320"/>
+          </a:xfrm>
+          <a:prstGeom prst="rect">
+            <a:avLst/>
+          </a:prstGeom>
+          <a:noFill/>
+        </p:spPr>
+        <p:txBody>
+          <a:bodyPr wrap="square" anchor="t" lIns="0" rIns="0" tIns="0" bIns="0">
+            <a:spAutoFit/>
+          </a:bodyPr>
+          <a:lstStyle/>
+          <a:p>
+            <a:pPr algn="ctr"/>
+            <a:r>
+              <a:rPr sz="1300">
+                <a:solidFill>
+                  <a:srgbClr val="3A485C"/>
+                </a:solidFill>
+                <a:latin typeface="맑은 고딕"/>
+                <a:ea typeface="맑은 고딕"/>
+              </a:rPr>
+              <a:t>한 chart를 12~25개 episode로 나눠 영역 밀도를 확률로 샘플링 — 실제 계측 분포를 모사하고, 신호는 평탄하게 두어 변동은 노이즈로만 만듦</a:t>
+            </a:r>
+          </a:p>
+        </p:txBody>
+      </p:sp>
       <p:sp>
         <p:nvSpPr>
           <p:cNvPr id="8" name="TextBox 7"/>
@@ -4803,8 +5605,8 @@
         </p:nvSpPr>
         <p:spPr>
           <a:xfrm>
-            <a:off x="4001516" y="5614416"/>
-            <a:ext cx="4249928" cy="329184"/>
+            <a:off x="457200" y="6437376"/>
+            <a:ext cx="8229600" cy="292608"/>
           </a:xfrm>
           <a:prstGeom prst="rect">
             <a:avLst/>
@@ -4817,16 +5619,16 @@
           </a:bodyPr>
           <a:lstStyle/>
           <a:p>
-            <a:pPr algn="ctr"/>
-            <a:r>
-              <a:rPr sz="1450" b="1">
-                <a:solidFill>
-                  <a:srgbClr val="0F1E3D"/>
-                </a:solidFill>
-                <a:latin typeface="맑은 고딕"/>
-                <a:ea typeface="맑은 고딕"/>
-              </a:rPr>
-              <a:t>정상 trend — episode별 영역 밀도 차이</a:t>
+            <a:pPr algn="l"/>
+            <a:r>
+              <a:rPr sz="900">
+                <a:solidFill>
+                  <a:srgbClr val="6B7280"/>
+                </a:solidFill>
+                <a:latin typeface="맑은 고딕"/>
+                <a:ea typeface="맑은 고딕"/>
+              </a:rPr>
+              <a:t>최호길 | QIE Data Science | AI Specialist 인증</a:t>
             </a:r>
           </a:p>
         </p:txBody>
@@ -4834,78 +5636,6 @@
       <p:sp>
         <p:nvSpPr>
           <p:cNvPr id="9" name="TextBox 8"/>
-          <p:cNvSpPr txBox="1"/>
-          <p:nvPr/>
-        </p:nvSpPr>
-        <p:spPr>
-          <a:xfrm>
-            <a:off x="640080" y="5961888"/>
-            <a:ext cx="10972800" cy="274320"/>
-          </a:xfrm>
-          <a:prstGeom prst="rect">
-            <a:avLst/>
-          </a:prstGeom>
-          <a:noFill/>
-        </p:spPr>
-        <p:txBody>
-          <a:bodyPr wrap="square" anchor="t" lIns="0" rIns="0" tIns="0" bIns="0">
-            <a:spAutoFit/>
-          </a:bodyPr>
-          <a:lstStyle/>
-          <a:p>
-            <a:pPr algn="ctr"/>
-            <a:r>
-              <a:rPr sz="1300">
-                <a:solidFill>
-                  <a:srgbClr val="3A485C"/>
-                </a:solidFill>
-                <a:latin typeface="맑은 고딕"/>
-                <a:ea typeface="맑은 고딕"/>
-              </a:rPr>
-              <a:t>밀집/희소/결핍 영역은 실제 계측 분포를 모사</a:t>
-            </a:r>
-          </a:p>
-        </p:txBody>
-      </p:sp>
-      <p:sp>
-        <p:nvSpPr>
-          <p:cNvPr id="10" name="TextBox 9"/>
-          <p:cNvSpPr txBox="1"/>
-          <p:nvPr/>
-        </p:nvSpPr>
-        <p:spPr>
-          <a:xfrm>
-            <a:off x="457200" y="6437376"/>
-            <a:ext cx="8229600" cy="292608"/>
-          </a:xfrm>
-          <a:prstGeom prst="rect">
-            <a:avLst/>
-          </a:prstGeom>
-          <a:noFill/>
-        </p:spPr>
-        <p:txBody>
-          <a:bodyPr wrap="square" anchor="ctr" lIns="0" rIns="0" tIns="0" bIns="0">
-            <a:spAutoFit/>
-          </a:bodyPr>
-          <a:lstStyle/>
-          <a:p>
-            <a:pPr algn="l"/>
-            <a:r>
-              <a:rPr sz="900">
-                <a:solidFill>
-                  <a:srgbClr val="6B7280"/>
-                </a:solidFill>
-                <a:latin typeface="맑은 고딕"/>
-                <a:ea typeface="맑은 고딕"/>
-              </a:rPr>
-              <a:t>최호길 | QIE Data Science | AI Specialist 인증</a:t>
-            </a:r>
-          </a:p>
-        </p:txBody>
-      </p:sp>
-      <p:sp>
-        <p:nvSpPr>
-          <p:cNvPr id="11" name="TextBox 10"/>
           <p:cNvSpPr txBox="1"/>
           <p:nvPr/>
         </p:nvSpPr>
@@ -5076,71 +5806,21 @@
                 <a:latin typeface="맑은 고딕"/>
                 <a:ea typeface="맑은 고딕"/>
               </a:rPr>
-              <a:t>계측 노이즈 3종 — 현장 현상에 매칭</a:t>
-            </a:r>
-          </a:p>
-        </p:txBody>
-      </p:sp>
-      <p:sp>
-        <p:nvSpPr>
-          <p:cNvPr id="5" name="TextBox 4"/>
-          <p:cNvSpPr txBox="1"/>
-          <p:nvPr/>
-        </p:nvSpPr>
-        <p:spPr>
-          <a:xfrm>
-            <a:off x="640080" y="1828800"/>
-            <a:ext cx="10972800" cy="685800"/>
-          </a:xfrm>
-          <a:prstGeom prst="rect">
-            <a:avLst/>
-          </a:prstGeom>
-          <a:noFill/>
-        </p:spPr>
-        <p:txBody>
-          <a:bodyPr wrap="square" anchor="t" lIns="0" rIns="0" tIns="0" bIns="0">
-            <a:spAutoFit/>
-          </a:bodyPr>
-          <a:lstStyle/>
-          <a:p>
-            <a:pPr marL="274320" indent="-274320">
-              <a:spcAft>
-                <a:spcPts val="500"/>
-              </a:spcAft>
-            </a:pPr>
-            <a:r>
-              <a:rPr sz="1400" b="0">
-                <a:solidFill>
-                  <a:srgbClr val="5B9BD5"/>
-                </a:solidFill>
-                <a:latin typeface="맑은 고딕"/>
-                <a:ea typeface="맑은 고딕"/>
-              </a:rPr>
-              <a:t>●  </a:t>
-            </a:r>
-            <a:r>
-              <a:rPr sz="1400">
-                <a:solidFill>
-                  <a:srgbClr val="1A1F2E"/>
-                </a:solidFill>
-                <a:latin typeface="맑은 고딕"/>
-                <a:ea typeface="맑은 고딕"/>
-              </a:rPr>
-              <a:t>계측값의 변동을 세 가지 노이즈로 표현했습니다. chart 하나는 한 가지 노이즈를 따르고, 영역별로 산포를 다르게 주지 않습니다</a:t>
-            </a:r>
-          </a:p>
-        </p:txBody>
-      </p:sp>
-      <p:sp>
-        <p:nvSpPr>
-          <p:cNvPr id="6" name="Rectangle 5"/>
+              <a:t>계측 노이즈 3종 — 현장 현상에 맞춰 변동을 재현</a:t>
+            </a:r>
+          </a:p>
+        </p:txBody>
+      </p:sp>
+      <p:sp>
+        <p:nvSpPr>
+          <p:cNvPr id="5" name="Rectangle 4"/>
           <p:cNvSpPr/>
           <p:nvPr/>
         </p:nvSpPr>
         <p:spPr>
           <a:xfrm>
-            <a:off x="640080" y="2642616"/>
-            <a:ext cx="3413760" cy="3383280"/>
+            <a:off x="631080" y="2395364"/>
+            <a:ext cx="10990800" cy="3086320"/>
           </a:xfrm>
           <a:prstGeom prst="rect">
             <a:avLst/>
@@ -5148,9 +5828,9 @@
           <a:solidFill>
             <a:srgbClr val="FFFFFF"/>
           </a:solidFill>
-          <a:ln w="15875">
+          <a:ln w="12700">
             <a:solidFill>
-              <a:srgbClr val="333740"/>
+              <a:srgbClr val="D7DEEA"/>
             </a:solidFill>
           </a:ln>
           <a:effectLst/>
@@ -5177,6 +5857,30 @@
           </a:p>
         </p:txBody>
       </p:sp>
+      <p:pic>
+        <p:nvPicPr>
+          <p:cNvPr id="6" name="Picture 5" descr="p3_deck_noise.png"/>
+          <p:cNvPicPr>
+            <a:picLocks noChangeAspect="1"/>
+          </p:cNvPicPr>
+          <p:nvPr/>
+        </p:nvPicPr>
+        <p:blipFill>
+          <a:blip r:embed="rId2"/>
+          <a:stretch>
+            <a:fillRect/>
+          </a:stretch>
+        </p:blipFill>
+        <p:spPr>
+          <a:xfrm>
+            <a:off x="640080" y="2404364"/>
+            <a:ext cx="10972800" cy="3068320"/>
+          </a:xfrm>
+          <a:prstGeom prst="rect">
+            <a:avLst/>
+          </a:prstGeom>
+        </p:spPr>
+      </p:pic>
       <p:sp>
         <p:nvSpPr>
           <p:cNvPr id="7" name="TextBox 6"/>
@@ -5185,8 +5889,44 @@
         </p:nvSpPr>
         <p:spPr>
           <a:xfrm>
-            <a:off x="914400" y="2770632"/>
-            <a:ext cx="2919984" cy="3127248"/>
+            <a:off x="640080" y="5961888"/>
+            <a:ext cx="10972800" cy="274320"/>
+          </a:xfrm>
+          <a:prstGeom prst="rect">
+            <a:avLst/>
+          </a:prstGeom>
+          <a:noFill/>
+        </p:spPr>
+        <p:txBody>
+          <a:bodyPr wrap="square" anchor="t" lIns="0" rIns="0" tIns="0" bIns="0">
+            <a:spAutoFit/>
+          </a:bodyPr>
+          <a:lstStyle/>
+          <a:p>
+            <a:pPr algn="ctr"/>
+            <a:r>
+              <a:rPr sz="1300">
+                <a:solidFill>
+                  <a:srgbClr val="3A485C"/>
+                </a:solidFill>
+                <a:latin typeface="맑은 고딕"/>
+                <a:ea typeface="맑은 고딕"/>
+              </a:rPr>
+              <a:t>chart 하나는 한 가지 노이즈만 사용 — Gaussian(산포) / Correlated AR(설비 변동) / Laplacian(계측 헌팅)</a:t>
+            </a:r>
+          </a:p>
+        </p:txBody>
+      </p:sp>
+      <p:sp>
+        <p:nvSpPr>
+          <p:cNvPr id="8" name="TextBox 7"/>
+          <p:cNvSpPr txBox="1"/>
+          <p:nvPr/>
+        </p:nvSpPr>
+        <p:spPr>
+          <a:xfrm>
+            <a:off x="457200" y="6437376"/>
+            <a:ext cx="8229600" cy="292608"/>
           </a:xfrm>
           <a:prstGeom prst="rect">
             <a:avLst/>
@@ -5201,548 +5941,6 @@
           <a:p>
             <a:pPr algn="l"/>
             <a:r>
-              <a:rPr sz="1450" b="1">
-                <a:solidFill>
-                  <a:srgbClr val="0F1E3D"/>
-                </a:solidFill>
-                <a:latin typeface="맑은 고딕"/>
-                <a:ea typeface="맑은 고딕"/>
-              </a:rPr>
-              <a:t>Gaussian — 기본 산포</a:t>
-            </a:r>
-          </a:p>
-          <a:p>
-            <a:pPr algn="l"/>
-            <a:r>
-              <a:rPr sz="500">
-                <a:solidFill>
-                  <a:srgbClr val="FFFFFF"/>
-                </a:solidFill>
-                <a:latin typeface="맑은 고딕"/>
-                <a:ea typeface="맑은 고딕"/>
-              </a:rPr>
-              <a:t> </a:t>
-            </a:r>
-          </a:p>
-          <a:p>
-            <a:pPr algn="l"/>
-            <a:r>
-              <a:rPr sz="1350" b="1" i="0">
-                <a:solidFill>
-                  <a:srgbClr val="0F1E3D"/>
-                </a:solidFill>
-                <a:latin typeface="맑은 고딕"/>
-                <a:ea typeface="맑은 고딕"/>
-              </a:rPr>
-              <a:t>분포</a:t>
-            </a:r>
-          </a:p>
-          <a:p>
-            <a:pPr algn="l"/>
-            <a:r>
-              <a:rPr sz="1300">
-                <a:solidFill>
-                  <a:srgbClr val="1A1F2E"/>
-                </a:solidFill>
-                <a:latin typeface="Consolas"/>
-                <a:ea typeface="Consolas"/>
-              </a:rPr>
-              <a:t>    e_t ~ N(0, sigma^2)</a:t>
-            </a:r>
-          </a:p>
-          <a:p>
-            <a:pPr algn="l"/>
-            <a:r>
-              <a:rPr sz="1350" b="1" i="0">
-                <a:solidFill>
-                  <a:srgbClr val="0F1E3D"/>
-                </a:solidFill>
-                <a:latin typeface="맑은 고딕"/>
-                <a:ea typeface="맑은 고딕"/>
-              </a:rPr>
-              <a:t>현장 의미</a:t>
-            </a:r>
-          </a:p>
-          <a:p>
-            <a:pPr algn="l"/>
-            <a:r>
-              <a:rPr sz="1300">
-                <a:solidFill>
-                  <a:srgbClr val="1A1F2E"/>
-                </a:solidFill>
-                <a:latin typeface="맑은 고딕"/>
-                <a:ea typeface="맑은 고딕"/>
-              </a:rPr>
-              <a:t>    일반적인 무작위 계측 산포</a:t>
-            </a:r>
-          </a:p>
-          <a:p>
-            <a:pPr algn="l"/>
-            <a:r>
-              <a:rPr sz="1300">
-                <a:solidFill>
-                  <a:srgbClr val="1A1F2E"/>
-                </a:solidFill>
-                <a:latin typeface="맑은 고딕"/>
-                <a:ea typeface="맑은 고딕"/>
-              </a:rPr>
-              <a:t>    가장 흔한 기본 노이즈</a:t>
-            </a:r>
-          </a:p>
-        </p:txBody>
-      </p:sp>
-      <p:sp>
-        <p:nvSpPr>
-          <p:cNvPr id="8" name="TextBox 7"/>
-          <p:cNvSpPr txBox="1"/>
-          <p:nvPr/>
-        </p:nvSpPr>
-        <p:spPr>
-          <a:xfrm>
-            <a:off x="640080" y="6053328"/>
-            <a:ext cx="3413760" cy="329184"/>
-          </a:xfrm>
-          <a:prstGeom prst="rect">
-            <a:avLst/>
-          </a:prstGeom>
-          <a:noFill/>
-        </p:spPr>
-        <p:txBody>
-          <a:bodyPr wrap="square" anchor="ctr" lIns="0" rIns="0" tIns="0" bIns="0">
-            <a:spAutoFit/>
-          </a:bodyPr>
-          <a:lstStyle/>
-          <a:p>
-            <a:pPr algn="ctr"/>
-            <a:r>
-              <a:rPr sz="1250" b="1">
-                <a:solidFill>
-                  <a:srgbClr val="0F1E3D"/>
-                </a:solidFill>
-                <a:latin typeface="맑은 고딕"/>
-                <a:ea typeface="맑은 고딕"/>
-              </a:rPr>
-              <a:t>기본 계측 산포</a:t>
-            </a:r>
-          </a:p>
-        </p:txBody>
-      </p:sp>
-      <p:sp>
-        <p:nvSpPr>
-          <p:cNvPr id="9" name="Rectangle 8"/>
-          <p:cNvSpPr/>
-          <p:nvPr/>
-        </p:nvSpPr>
-        <p:spPr>
-          <a:xfrm>
-            <a:off x="4419600" y="2642616"/>
-            <a:ext cx="3413760" cy="3383280"/>
-          </a:xfrm>
-          <a:prstGeom prst="rect">
-            <a:avLst/>
-          </a:prstGeom>
-          <a:solidFill>
-            <a:srgbClr val="FFFFFF"/>
-          </a:solidFill>
-          <a:ln w="15875">
-            <a:solidFill>
-              <a:srgbClr val="333740"/>
-            </a:solidFill>
-          </a:ln>
-          <a:effectLst/>
-        </p:spPr>
-        <p:style>
-          <a:lnRef idx="1">
-            <a:schemeClr val="accent1"/>
-          </a:lnRef>
-          <a:fillRef idx="3">
-            <a:schemeClr val="accent1"/>
-          </a:fillRef>
-          <a:effectRef idx="2">
-            <a:schemeClr val="accent1"/>
-          </a:effectRef>
-          <a:fontRef idx="minor">
-            <a:schemeClr val="lt1"/>
-          </a:fontRef>
-        </p:style>
-        <p:txBody>
-          <a:bodyPr rtlCol="0" anchor="ctr"/>
-          <a:lstStyle/>
-          <a:p>
-            <a:pPr algn="ctr"/>
-          </a:p>
-        </p:txBody>
-      </p:sp>
-      <p:sp>
-        <p:nvSpPr>
-          <p:cNvPr id="10" name="TextBox 9"/>
-          <p:cNvSpPr txBox="1"/>
-          <p:nvPr/>
-        </p:nvSpPr>
-        <p:spPr>
-          <a:xfrm>
-            <a:off x="4693920" y="2770632"/>
-            <a:ext cx="2919984" cy="3127248"/>
-          </a:xfrm>
-          <a:prstGeom prst="rect">
-            <a:avLst/>
-          </a:prstGeom>
-          <a:noFill/>
-        </p:spPr>
-        <p:txBody>
-          <a:bodyPr wrap="square" anchor="ctr" lIns="0" rIns="0" tIns="0" bIns="0">
-            <a:spAutoFit/>
-          </a:bodyPr>
-          <a:lstStyle/>
-          <a:p>
-            <a:pPr algn="l"/>
-            <a:r>
-              <a:rPr sz="1450" b="1">
-                <a:solidFill>
-                  <a:srgbClr val="0F1E3D"/>
-                </a:solidFill>
-                <a:latin typeface="맑은 고딕"/>
-                <a:ea typeface="맑은 고딕"/>
-              </a:rPr>
-              <a:t>Correlated AR(1) — 설비 변동</a:t>
-            </a:r>
-          </a:p>
-          <a:p>
-            <a:pPr algn="l"/>
-            <a:r>
-              <a:rPr sz="500">
-                <a:solidFill>
-                  <a:srgbClr val="FFFFFF"/>
-                </a:solidFill>
-                <a:latin typeface="맑은 고딕"/>
-                <a:ea typeface="맑은 고딕"/>
-              </a:rPr>
-              <a:t> </a:t>
-            </a:r>
-          </a:p>
-          <a:p>
-            <a:pPr algn="l"/>
-            <a:r>
-              <a:rPr sz="1350" b="1" i="0">
-                <a:solidFill>
-                  <a:srgbClr val="0F1E3D"/>
-                </a:solidFill>
-                <a:latin typeface="맑은 고딕"/>
-                <a:ea typeface="맑은 고딕"/>
-              </a:rPr>
-              <a:t>분포</a:t>
-            </a:r>
-          </a:p>
-          <a:p>
-            <a:pPr algn="l"/>
-            <a:r>
-              <a:rPr sz="1300">
-                <a:solidFill>
-                  <a:srgbClr val="1A1F2E"/>
-                </a:solidFill>
-                <a:latin typeface="Consolas"/>
-                <a:ea typeface="Consolas"/>
-              </a:rPr>
-              <a:t>    e_t = rho * e_(t-1) + (1-rho) * w_t</a:t>
-            </a:r>
-          </a:p>
-          <a:p>
-            <a:pPr algn="l"/>
-            <a:r>
-              <a:rPr sz="1350" b="1" i="0">
-                <a:solidFill>
-                  <a:srgbClr val="0F1E3D"/>
-                </a:solidFill>
-                <a:latin typeface="맑은 고딕"/>
-                <a:ea typeface="맑은 고딕"/>
-              </a:rPr>
-              <a:t>현장 의미</a:t>
-            </a:r>
-          </a:p>
-          <a:p>
-            <a:pPr algn="l"/>
-            <a:r>
-              <a:rPr sz="1300">
-                <a:solidFill>
-                  <a:srgbClr val="1A1F2E"/>
-                </a:solidFill>
-                <a:latin typeface="맑은 고딕"/>
-                <a:ea typeface="맑은 고딕"/>
-              </a:rPr>
-              <a:t>    설비 이상이나 컨디션에 따라</a:t>
-            </a:r>
-          </a:p>
-          <a:p>
-            <a:pPr algn="l"/>
-            <a:r>
-              <a:rPr sz="1300">
-                <a:solidFill>
-                  <a:srgbClr val="1A1F2E"/>
-                </a:solidFill>
-                <a:latin typeface="맑은 고딕"/>
-                <a:ea typeface="맑은 고딕"/>
-              </a:rPr>
-              <a:t>    시간적으로 끌리는(자기상관) 변동</a:t>
-            </a:r>
-          </a:p>
-        </p:txBody>
-      </p:sp>
-      <p:sp>
-        <p:nvSpPr>
-          <p:cNvPr id="11" name="TextBox 10"/>
-          <p:cNvSpPr txBox="1"/>
-          <p:nvPr/>
-        </p:nvSpPr>
-        <p:spPr>
-          <a:xfrm>
-            <a:off x="4419600" y="6053328"/>
-            <a:ext cx="3413760" cy="329184"/>
-          </a:xfrm>
-          <a:prstGeom prst="rect">
-            <a:avLst/>
-          </a:prstGeom>
-          <a:noFill/>
-        </p:spPr>
-        <p:txBody>
-          <a:bodyPr wrap="square" anchor="ctr" lIns="0" rIns="0" tIns="0" bIns="0">
-            <a:spAutoFit/>
-          </a:bodyPr>
-          <a:lstStyle/>
-          <a:p>
-            <a:pPr algn="ctr"/>
-            <a:r>
-              <a:rPr sz="1250" b="1">
-                <a:solidFill>
-                  <a:srgbClr val="0F1E3D"/>
-                </a:solidFill>
-                <a:latin typeface="맑은 고딕"/>
-                <a:ea typeface="맑은 고딕"/>
-              </a:rPr>
-              <a:t>설비 상태변동/컨디션</a:t>
-            </a:r>
-          </a:p>
-        </p:txBody>
-      </p:sp>
-      <p:sp>
-        <p:nvSpPr>
-          <p:cNvPr id="12" name="Rectangle 11"/>
-          <p:cNvSpPr/>
-          <p:nvPr/>
-        </p:nvSpPr>
-        <p:spPr>
-          <a:xfrm>
-            <a:off x="8199120" y="2642616"/>
-            <a:ext cx="3413760" cy="3383280"/>
-          </a:xfrm>
-          <a:prstGeom prst="rect">
-            <a:avLst/>
-          </a:prstGeom>
-          <a:solidFill>
-            <a:srgbClr val="FFFFFF"/>
-          </a:solidFill>
-          <a:ln w="15875">
-            <a:solidFill>
-              <a:srgbClr val="333740"/>
-            </a:solidFill>
-          </a:ln>
-          <a:effectLst/>
-        </p:spPr>
-        <p:style>
-          <a:lnRef idx="1">
-            <a:schemeClr val="accent1"/>
-          </a:lnRef>
-          <a:fillRef idx="3">
-            <a:schemeClr val="accent1"/>
-          </a:fillRef>
-          <a:effectRef idx="2">
-            <a:schemeClr val="accent1"/>
-          </a:effectRef>
-          <a:fontRef idx="minor">
-            <a:schemeClr val="lt1"/>
-          </a:fontRef>
-        </p:style>
-        <p:txBody>
-          <a:bodyPr rtlCol="0" anchor="ctr"/>
-          <a:lstStyle/>
-          <a:p>
-            <a:pPr algn="ctr"/>
-          </a:p>
-        </p:txBody>
-      </p:sp>
-      <p:sp>
-        <p:nvSpPr>
-          <p:cNvPr id="13" name="TextBox 12"/>
-          <p:cNvSpPr txBox="1"/>
-          <p:nvPr/>
-        </p:nvSpPr>
-        <p:spPr>
-          <a:xfrm>
-            <a:off x="8473440" y="2770632"/>
-            <a:ext cx="2919984" cy="3127248"/>
-          </a:xfrm>
-          <a:prstGeom prst="rect">
-            <a:avLst/>
-          </a:prstGeom>
-          <a:noFill/>
-        </p:spPr>
-        <p:txBody>
-          <a:bodyPr wrap="square" anchor="ctr" lIns="0" rIns="0" tIns="0" bIns="0">
-            <a:spAutoFit/>
-          </a:bodyPr>
-          <a:lstStyle/>
-          <a:p>
-            <a:pPr algn="l"/>
-            <a:r>
-              <a:rPr sz="1450" b="1">
-                <a:solidFill>
-                  <a:srgbClr val="0F1E3D"/>
-                </a:solidFill>
-                <a:latin typeface="맑은 고딕"/>
-                <a:ea typeface="맑은 고딕"/>
-              </a:rPr>
-              <a:t>Laplacian — 계측 헌팅</a:t>
-            </a:r>
-          </a:p>
-          <a:p>
-            <a:pPr algn="l"/>
-            <a:r>
-              <a:rPr sz="500">
-                <a:solidFill>
-                  <a:srgbClr val="FFFFFF"/>
-                </a:solidFill>
-                <a:latin typeface="맑은 고딕"/>
-                <a:ea typeface="맑은 고딕"/>
-              </a:rPr>
-              <a:t> </a:t>
-            </a:r>
-          </a:p>
-          <a:p>
-            <a:pPr algn="l"/>
-            <a:r>
-              <a:rPr sz="1350" b="1" i="0">
-                <a:solidFill>
-                  <a:srgbClr val="0F1E3D"/>
-                </a:solidFill>
-                <a:latin typeface="맑은 고딕"/>
-                <a:ea typeface="맑은 고딕"/>
-              </a:rPr>
-              <a:t>분포</a:t>
-            </a:r>
-          </a:p>
-          <a:p>
-            <a:pPr algn="l"/>
-            <a:r>
-              <a:rPr sz="1300">
-                <a:solidFill>
-                  <a:srgbClr val="1A1F2E"/>
-                </a:solidFill>
-                <a:latin typeface="Consolas"/>
-                <a:ea typeface="Consolas"/>
-              </a:rPr>
-              <a:t>    e_t ~ Laplace(0, b)</a:t>
-            </a:r>
-          </a:p>
-          <a:p>
-            <a:pPr algn="l"/>
-            <a:r>
-              <a:rPr sz="1350" b="1" i="0">
-                <a:solidFill>
-                  <a:srgbClr val="0F1E3D"/>
-                </a:solidFill>
-                <a:latin typeface="맑은 고딕"/>
-                <a:ea typeface="맑은 고딕"/>
-              </a:rPr>
-              <a:t>현장 의미</a:t>
-            </a:r>
-          </a:p>
-          <a:p>
-            <a:pPr algn="l"/>
-            <a:r>
-              <a:rPr sz="1300">
-                <a:solidFill>
-                  <a:srgbClr val="1A1F2E"/>
-                </a:solidFill>
-                <a:latin typeface="맑은 고딕"/>
-                <a:ea typeface="맑은 고딕"/>
-              </a:rPr>
-              <a:t>    계측 미스 등 헌팅으로</a:t>
-            </a:r>
-          </a:p>
-          <a:p>
-            <a:pPr algn="l"/>
-            <a:r>
-              <a:rPr sz="1300">
-                <a:solidFill>
-                  <a:srgbClr val="1A1F2E"/>
-                </a:solidFill>
-                <a:latin typeface="맑은 고딕"/>
-                <a:ea typeface="맑은 고딕"/>
-              </a:rPr>
-              <a:t>    가우시안보다 한 번씩 크게 튐(heavy-tail)</a:t>
-            </a:r>
-          </a:p>
-        </p:txBody>
-      </p:sp>
-      <p:sp>
-        <p:nvSpPr>
-          <p:cNvPr id="14" name="TextBox 13"/>
-          <p:cNvSpPr txBox="1"/>
-          <p:nvPr/>
-        </p:nvSpPr>
-        <p:spPr>
-          <a:xfrm>
-            <a:off x="8199120" y="6053328"/>
-            <a:ext cx="3413760" cy="329184"/>
-          </a:xfrm>
-          <a:prstGeom prst="rect">
-            <a:avLst/>
-          </a:prstGeom>
-          <a:noFill/>
-        </p:spPr>
-        <p:txBody>
-          <a:bodyPr wrap="square" anchor="ctr" lIns="0" rIns="0" tIns="0" bIns="0">
-            <a:spAutoFit/>
-          </a:bodyPr>
-          <a:lstStyle/>
-          <a:p>
-            <a:pPr algn="ctr"/>
-            <a:r>
-              <a:rPr sz="1250" b="1">
-                <a:solidFill>
-                  <a:srgbClr val="0F1E3D"/>
-                </a:solidFill>
-                <a:latin typeface="맑은 고딕"/>
-                <a:ea typeface="맑은 고딕"/>
-              </a:rPr>
-              <a:t>계측 미스/헌팅 spike</a:t>
-            </a:r>
-          </a:p>
-        </p:txBody>
-      </p:sp>
-      <p:sp>
-        <p:nvSpPr>
-          <p:cNvPr id="15" name="TextBox 14"/>
-          <p:cNvSpPr txBox="1"/>
-          <p:nvPr/>
-        </p:nvSpPr>
-        <p:spPr>
-          <a:xfrm>
-            <a:off x="457200" y="6437376"/>
-            <a:ext cx="8229600" cy="292608"/>
-          </a:xfrm>
-          <a:prstGeom prst="rect">
-            <a:avLst/>
-          </a:prstGeom>
-          <a:noFill/>
-        </p:spPr>
-        <p:txBody>
-          <a:bodyPr wrap="square" anchor="ctr" lIns="0" rIns="0" tIns="0" bIns="0">
-            <a:spAutoFit/>
-          </a:bodyPr>
-          <a:lstStyle/>
-          <a:p>
-            <a:pPr algn="l"/>
-            <a:r>
               <a:rPr sz="900">
                 <a:solidFill>
                   <a:srgbClr val="6B7280"/>
@@ -5757,7 +5955,7 @@
       </p:sp>
       <p:sp>
         <p:nvSpPr>
-          <p:cNvPr id="16" name="TextBox 15"/>
+          <p:cNvPr id="9" name="TextBox 8"/>
           <p:cNvSpPr txBox="1"/>
           <p:nvPr/>
         </p:nvSpPr>
@@ -5928,71 +6126,21 @@
                 <a:latin typeface="맑은 고딕"/>
                 <a:ea typeface="맑은 고딕"/>
               </a:rPr>
-              <a:t>이상 합성 — 실제 불량 발생 방식 5종</a:t>
-            </a:r>
-          </a:p>
-        </p:txBody>
-      </p:sp>
-      <p:sp>
-        <p:nvSpPr>
-          <p:cNvPr id="5" name="TextBox 4"/>
-          <p:cNvSpPr txBox="1"/>
-          <p:nvPr/>
-        </p:nvSpPr>
-        <p:spPr>
-          <a:xfrm>
-            <a:off x="640080" y="1828800"/>
-            <a:ext cx="10972800" cy="868680"/>
-          </a:xfrm>
-          <a:prstGeom prst="rect">
-            <a:avLst/>
-          </a:prstGeom>
-          <a:noFill/>
-        </p:spPr>
-        <p:txBody>
-          <a:bodyPr wrap="square" anchor="t" lIns="0" rIns="0" tIns="0" bIns="0">
-            <a:spAutoFit/>
-          </a:bodyPr>
-          <a:lstStyle/>
-          <a:p>
-            <a:pPr marL="274320" indent="-274320">
-              <a:spcAft>
-                <a:spcPts val="500"/>
-              </a:spcAft>
-            </a:pPr>
-            <a:r>
-              <a:rPr sz="1450" b="0">
-                <a:solidFill>
-                  <a:srgbClr val="5B9BD5"/>
-                </a:solidFill>
-                <a:latin typeface="맑은 고딕"/>
-                <a:ea typeface="맑은 고딕"/>
-              </a:rPr>
-              <a:t>●  </a:t>
-            </a:r>
-            <a:r>
-              <a:rPr sz="1450">
-                <a:solidFill>
-                  <a:srgbClr val="1A1F2E"/>
-                </a:solidFill>
-                <a:latin typeface="맑은 고딕"/>
-                <a:ea typeface="맑은 고딕"/>
-              </a:rPr>
-              <a:t>정상 baseline 오른쪽 끝에 도메인 규칙으로 이상을 주입합니다(강도는 baseline 산포에 비례). context만 오른쪽 끝이 아니라 fleet 대비 전체 시계열이 벗어나는 형태입니다</a:t>
-            </a:r>
-          </a:p>
-        </p:txBody>
-      </p:sp>
-      <p:sp>
-        <p:nvSpPr>
-          <p:cNvPr id="6" name="Rectangle 5"/>
+              <a:t>이상 합성 5종 — 실제 불량 발생 방식 (파랑 정상, 빨강 이상)</a:t>
+            </a:r>
+          </a:p>
+        </p:txBody>
+      </p:sp>
+      <p:sp>
+        <p:nvSpPr>
+          <p:cNvPr id="5" name="Rectangle 4"/>
           <p:cNvSpPr/>
           <p:nvPr/>
         </p:nvSpPr>
         <p:spPr>
           <a:xfrm>
-            <a:off x="631081" y="3538545"/>
-            <a:ext cx="2029678" cy="1311222"/>
+            <a:off x="631082" y="2817831"/>
+            <a:ext cx="10990796" cy="2318198"/>
           </a:xfrm>
           <a:prstGeom prst="rect">
             <a:avLst/>
@@ -6031,7 +6179,7 @@
       </p:sp>
       <p:pic>
         <p:nvPicPr>
-          <p:cNvPr id="7" name="Picture 6" descr="trend_mean_shift.png"/>
+          <p:cNvPr id="6" name="Picture 5" descr="p3_deck_anomaly.png"/>
           <p:cNvPicPr>
             <a:picLocks noChangeAspect="1"/>
           </p:cNvPicPr>
@@ -6045,14 +6193,50 @@
         </p:blipFill>
         <p:spPr>
           <a:xfrm>
-            <a:off x="640081" y="3547545"/>
-            <a:ext cx="2011678" cy="1293222"/>
+            <a:off x="640082" y="2826831"/>
+            <a:ext cx="10972796" cy="2300198"/>
           </a:xfrm>
           <a:prstGeom prst="rect">
             <a:avLst/>
           </a:prstGeom>
         </p:spPr>
       </p:pic>
+      <p:sp>
+        <p:nvSpPr>
+          <p:cNvPr id="7" name="TextBox 6"/>
+          <p:cNvSpPr txBox="1"/>
+          <p:nvPr/>
+        </p:nvSpPr>
+        <p:spPr>
+          <a:xfrm>
+            <a:off x="640080" y="5961888"/>
+            <a:ext cx="10972800" cy="274320"/>
+          </a:xfrm>
+          <a:prstGeom prst="rect">
+            <a:avLst/>
+          </a:prstGeom>
+          <a:noFill/>
+        </p:spPr>
+        <p:txBody>
+          <a:bodyPr wrap="square" anchor="t" lIns="0" rIns="0" tIns="0" bIns="0">
+            <a:spAutoFit/>
+          </a:bodyPr>
+          <a:lstStyle/>
+          <a:p>
+            <a:pPr algn="ctr"/>
+            <a:r>
+              <a:rPr sz="1300">
+                <a:solidFill>
+                  <a:srgbClr val="3A485C"/>
+                </a:solidFill>
+                <a:latin typeface="맑은 고딕"/>
+                <a:ea typeface="맑은 고딕"/>
+              </a:rPr>
+              <a:t>정상 baseline 오른쪽 끝에 주입하고 강도는 baseline 산포에 비례 (context만 fleet 대비 전체 시계열이 이탈)</a:t>
+            </a:r>
+          </a:p>
+        </p:txBody>
+      </p:sp>
       <p:sp>
         <p:nvSpPr>
           <p:cNvPr id="8" name="TextBox 7"/>
@@ -6061,8 +6245,8 @@
         </p:nvSpPr>
         <p:spPr>
           <a:xfrm>
-            <a:off x="525780" y="4932207"/>
-            <a:ext cx="2240280" cy="420624"/>
+            <a:off x="457200" y="6437376"/>
+            <a:ext cx="8229600" cy="292608"/>
           </a:xfrm>
           <a:prstGeom prst="rect">
             <a:avLst/>
@@ -6075,502 +6259,6 @@
           </a:bodyPr>
           <a:lstStyle/>
           <a:p>
-            <a:pPr algn="ctr"/>
-            <a:r>
-              <a:rPr sz="1300" b="1">
-                <a:solidFill>
-                  <a:srgbClr val="0F1E3D"/>
-                </a:solidFill>
-                <a:latin typeface="맑은 고딕"/>
-                <a:ea typeface="맑은 고딕"/>
-              </a:rPr>
-              <a:t>avg — 평균 이동</a:t>
-            </a:r>
-          </a:p>
-        </p:txBody>
-      </p:sp>
-      <p:sp>
-        <p:nvSpPr>
-          <p:cNvPr id="9" name="Rectangle 8"/>
-          <p:cNvSpPr/>
-          <p:nvPr/>
-        </p:nvSpPr>
-        <p:spPr>
-          <a:xfrm>
-            <a:off x="2871361" y="3538545"/>
-            <a:ext cx="2029678" cy="1311222"/>
-          </a:xfrm>
-          <a:prstGeom prst="rect">
-            <a:avLst/>
-          </a:prstGeom>
-          <a:solidFill>
-            <a:srgbClr val="FFFFFF"/>
-          </a:solidFill>
-          <a:ln w="12700">
-            <a:solidFill>
-              <a:srgbClr val="D7DEEA"/>
-            </a:solidFill>
-          </a:ln>
-          <a:effectLst/>
-        </p:spPr>
-        <p:style>
-          <a:lnRef idx="1">
-            <a:schemeClr val="accent1"/>
-          </a:lnRef>
-          <a:fillRef idx="3">
-            <a:schemeClr val="accent1"/>
-          </a:fillRef>
-          <a:effectRef idx="2">
-            <a:schemeClr val="accent1"/>
-          </a:effectRef>
-          <a:fontRef idx="minor">
-            <a:schemeClr val="lt1"/>
-          </a:fontRef>
-        </p:style>
-        <p:txBody>
-          <a:bodyPr rtlCol="0" anchor="ctr"/>
-          <a:lstStyle/>
-          <a:p>
-            <a:pPr algn="ctr"/>
-          </a:p>
-        </p:txBody>
-      </p:sp>
-      <p:pic>
-        <p:nvPicPr>
-          <p:cNvPr id="10" name="Picture 9" descr="trend_standard_deviation.png"/>
-          <p:cNvPicPr>
-            <a:picLocks noChangeAspect="1"/>
-          </p:cNvPicPr>
-          <p:nvPr/>
-        </p:nvPicPr>
-        <p:blipFill>
-          <a:blip r:embed="rId3"/>
-          <a:stretch>
-            <a:fillRect/>
-          </a:stretch>
-        </p:blipFill>
-        <p:spPr>
-          <a:xfrm>
-            <a:off x="2880361" y="3547545"/>
-            <a:ext cx="2011678" cy="1293222"/>
-          </a:xfrm>
-          <a:prstGeom prst="rect">
-            <a:avLst/>
-          </a:prstGeom>
-        </p:spPr>
-      </p:pic>
-      <p:sp>
-        <p:nvSpPr>
-          <p:cNvPr id="11" name="TextBox 10"/>
-          <p:cNvSpPr txBox="1"/>
-          <p:nvPr/>
-        </p:nvSpPr>
-        <p:spPr>
-          <a:xfrm>
-            <a:off x="2766060" y="4932207"/>
-            <a:ext cx="2240280" cy="420624"/>
-          </a:xfrm>
-          <a:prstGeom prst="rect">
-            <a:avLst/>
-          </a:prstGeom>
-          <a:noFill/>
-        </p:spPr>
-        <p:txBody>
-          <a:bodyPr wrap="square" anchor="ctr" lIns="0" rIns="0" tIns="0" bIns="0">
-            <a:spAutoFit/>
-          </a:bodyPr>
-          <a:lstStyle/>
-          <a:p>
-            <a:pPr algn="ctr"/>
-            <a:r>
-              <a:rPr sz="1300" b="1">
-                <a:solidFill>
-                  <a:srgbClr val="0F1E3D"/>
-                </a:solidFill>
-                <a:latin typeface="맑은 고딕"/>
-                <a:ea typeface="맑은 고딕"/>
-              </a:rPr>
-              <a:t>std — 산포 확대</a:t>
-            </a:r>
-          </a:p>
-        </p:txBody>
-      </p:sp>
-      <p:sp>
-        <p:nvSpPr>
-          <p:cNvPr id="12" name="Rectangle 11"/>
-          <p:cNvSpPr/>
-          <p:nvPr/>
-        </p:nvSpPr>
-        <p:spPr>
-          <a:xfrm>
-            <a:off x="5111641" y="3538545"/>
-            <a:ext cx="2029678" cy="1311222"/>
-          </a:xfrm>
-          <a:prstGeom prst="rect">
-            <a:avLst/>
-          </a:prstGeom>
-          <a:solidFill>
-            <a:srgbClr val="FFFFFF"/>
-          </a:solidFill>
-          <a:ln w="12700">
-            <a:solidFill>
-              <a:srgbClr val="D7DEEA"/>
-            </a:solidFill>
-          </a:ln>
-          <a:effectLst/>
-        </p:spPr>
-        <p:style>
-          <a:lnRef idx="1">
-            <a:schemeClr val="accent1"/>
-          </a:lnRef>
-          <a:fillRef idx="3">
-            <a:schemeClr val="accent1"/>
-          </a:fillRef>
-          <a:effectRef idx="2">
-            <a:schemeClr val="accent1"/>
-          </a:effectRef>
-          <a:fontRef idx="minor">
-            <a:schemeClr val="lt1"/>
-          </a:fontRef>
-        </p:style>
-        <p:txBody>
-          <a:bodyPr rtlCol="0" anchor="ctr"/>
-          <a:lstStyle/>
-          <a:p>
-            <a:pPr algn="ctr"/>
-          </a:p>
-        </p:txBody>
-      </p:sp>
-      <p:pic>
-        <p:nvPicPr>
-          <p:cNvPr id="13" name="Picture 12" descr="trend_spike.png"/>
-          <p:cNvPicPr>
-            <a:picLocks noChangeAspect="1"/>
-          </p:cNvPicPr>
-          <p:nvPr/>
-        </p:nvPicPr>
-        <p:blipFill>
-          <a:blip r:embed="rId4"/>
-          <a:stretch>
-            <a:fillRect/>
-          </a:stretch>
-        </p:blipFill>
-        <p:spPr>
-          <a:xfrm>
-            <a:off x="5120641" y="3547545"/>
-            <a:ext cx="2011678" cy="1293222"/>
-          </a:xfrm>
-          <a:prstGeom prst="rect">
-            <a:avLst/>
-          </a:prstGeom>
-        </p:spPr>
-      </p:pic>
-      <p:sp>
-        <p:nvSpPr>
-          <p:cNvPr id="14" name="TextBox 13"/>
-          <p:cNvSpPr txBox="1"/>
-          <p:nvPr/>
-        </p:nvSpPr>
-        <p:spPr>
-          <a:xfrm>
-            <a:off x="5006340" y="4932207"/>
-            <a:ext cx="2240280" cy="420624"/>
-          </a:xfrm>
-          <a:prstGeom prst="rect">
-            <a:avLst/>
-          </a:prstGeom>
-          <a:noFill/>
-        </p:spPr>
-        <p:txBody>
-          <a:bodyPr wrap="square" anchor="ctr" lIns="0" rIns="0" tIns="0" bIns="0">
-            <a:spAutoFit/>
-          </a:bodyPr>
-          <a:lstStyle/>
-          <a:p>
-            <a:pPr algn="ctr"/>
-            <a:r>
-              <a:rPr sz="1300" b="1">
-                <a:solidFill>
-                  <a:srgbClr val="0F1E3D"/>
-                </a:solidFill>
-                <a:latin typeface="맑은 고딕"/>
-                <a:ea typeface="맑은 고딕"/>
-              </a:rPr>
-              <a:t>spike — 순간 튐</a:t>
-            </a:r>
-          </a:p>
-        </p:txBody>
-      </p:sp>
-      <p:sp>
-        <p:nvSpPr>
-          <p:cNvPr id="15" name="Rectangle 14"/>
-          <p:cNvSpPr/>
-          <p:nvPr/>
-        </p:nvSpPr>
-        <p:spPr>
-          <a:xfrm>
-            <a:off x="7351921" y="3538545"/>
-            <a:ext cx="2029678" cy="1311222"/>
-          </a:xfrm>
-          <a:prstGeom prst="rect">
-            <a:avLst/>
-          </a:prstGeom>
-          <a:solidFill>
-            <a:srgbClr val="FFFFFF"/>
-          </a:solidFill>
-          <a:ln w="12700">
-            <a:solidFill>
-              <a:srgbClr val="D7DEEA"/>
-            </a:solidFill>
-          </a:ln>
-          <a:effectLst/>
-        </p:spPr>
-        <p:style>
-          <a:lnRef idx="1">
-            <a:schemeClr val="accent1"/>
-          </a:lnRef>
-          <a:fillRef idx="3">
-            <a:schemeClr val="accent1"/>
-          </a:fillRef>
-          <a:effectRef idx="2">
-            <a:schemeClr val="accent1"/>
-          </a:effectRef>
-          <a:fontRef idx="minor">
-            <a:schemeClr val="lt1"/>
-          </a:fontRef>
-        </p:style>
-        <p:txBody>
-          <a:bodyPr rtlCol="0" anchor="ctr"/>
-          <a:lstStyle/>
-          <a:p>
-            <a:pPr algn="ctr"/>
-          </a:p>
-        </p:txBody>
-      </p:sp>
-      <p:pic>
-        <p:nvPicPr>
-          <p:cNvPr id="16" name="Picture 15" descr="trend_drift.png"/>
-          <p:cNvPicPr>
-            <a:picLocks noChangeAspect="1"/>
-          </p:cNvPicPr>
-          <p:nvPr/>
-        </p:nvPicPr>
-        <p:blipFill>
-          <a:blip r:embed="rId5"/>
-          <a:stretch>
-            <a:fillRect/>
-          </a:stretch>
-        </p:blipFill>
-        <p:spPr>
-          <a:xfrm>
-            <a:off x="7360921" y="3547545"/>
-            <a:ext cx="2011678" cy="1293222"/>
-          </a:xfrm>
-          <a:prstGeom prst="rect">
-            <a:avLst/>
-          </a:prstGeom>
-        </p:spPr>
-      </p:pic>
-      <p:sp>
-        <p:nvSpPr>
-          <p:cNvPr id="17" name="TextBox 16"/>
-          <p:cNvSpPr txBox="1"/>
-          <p:nvPr/>
-        </p:nvSpPr>
-        <p:spPr>
-          <a:xfrm>
-            <a:off x="7246620" y="4932207"/>
-            <a:ext cx="2240280" cy="420624"/>
-          </a:xfrm>
-          <a:prstGeom prst="rect">
-            <a:avLst/>
-          </a:prstGeom>
-          <a:noFill/>
-        </p:spPr>
-        <p:txBody>
-          <a:bodyPr wrap="square" anchor="ctr" lIns="0" rIns="0" tIns="0" bIns="0">
-            <a:spAutoFit/>
-          </a:bodyPr>
-          <a:lstStyle/>
-          <a:p>
-            <a:pPr algn="ctr"/>
-            <a:r>
-              <a:rPr sz="1300" b="1">
-                <a:solidFill>
-                  <a:srgbClr val="0F1E3D"/>
-                </a:solidFill>
-                <a:latin typeface="맑은 고딕"/>
-                <a:ea typeface="맑은 고딕"/>
-              </a:rPr>
-              <a:t>drift — 선형 추세</a:t>
-            </a:r>
-          </a:p>
-        </p:txBody>
-      </p:sp>
-      <p:sp>
-        <p:nvSpPr>
-          <p:cNvPr id="18" name="Rectangle 17"/>
-          <p:cNvSpPr/>
-          <p:nvPr/>
-        </p:nvSpPr>
-        <p:spPr>
-          <a:xfrm>
-            <a:off x="9592201" y="3538545"/>
-            <a:ext cx="2029678" cy="1311222"/>
-          </a:xfrm>
-          <a:prstGeom prst="rect">
-            <a:avLst/>
-          </a:prstGeom>
-          <a:solidFill>
-            <a:srgbClr val="FFFFFF"/>
-          </a:solidFill>
-          <a:ln w="12700">
-            <a:solidFill>
-              <a:srgbClr val="D7DEEA"/>
-            </a:solidFill>
-          </a:ln>
-          <a:effectLst/>
-        </p:spPr>
-        <p:style>
-          <a:lnRef idx="1">
-            <a:schemeClr val="accent1"/>
-          </a:lnRef>
-          <a:fillRef idx="3">
-            <a:schemeClr val="accent1"/>
-          </a:fillRef>
-          <a:effectRef idx="2">
-            <a:schemeClr val="accent1"/>
-          </a:effectRef>
-          <a:fontRef idx="minor">
-            <a:schemeClr val="lt1"/>
-          </a:fontRef>
-        </p:style>
-        <p:txBody>
-          <a:bodyPr rtlCol="0" anchor="ctr"/>
-          <a:lstStyle/>
-          <a:p>
-            <a:pPr algn="ctr"/>
-          </a:p>
-        </p:txBody>
-      </p:sp>
-      <p:pic>
-        <p:nvPicPr>
-          <p:cNvPr id="19" name="Picture 18" descr="trend_context.png"/>
-          <p:cNvPicPr>
-            <a:picLocks noChangeAspect="1"/>
-          </p:cNvPicPr>
-          <p:nvPr/>
-        </p:nvPicPr>
-        <p:blipFill>
-          <a:blip r:embed="rId6"/>
-          <a:stretch>
-            <a:fillRect/>
-          </a:stretch>
-        </p:blipFill>
-        <p:spPr>
-          <a:xfrm>
-            <a:off x="9601201" y="3547545"/>
-            <a:ext cx="2011678" cy="1293222"/>
-          </a:xfrm>
-          <a:prstGeom prst="rect">
-            <a:avLst/>
-          </a:prstGeom>
-        </p:spPr>
-      </p:pic>
-      <p:sp>
-        <p:nvSpPr>
-          <p:cNvPr id="20" name="TextBox 19"/>
-          <p:cNvSpPr txBox="1"/>
-          <p:nvPr/>
-        </p:nvSpPr>
-        <p:spPr>
-          <a:xfrm>
-            <a:off x="9486900" y="4932207"/>
-            <a:ext cx="2240280" cy="420624"/>
-          </a:xfrm>
-          <a:prstGeom prst="rect">
-            <a:avLst/>
-          </a:prstGeom>
-          <a:noFill/>
-        </p:spPr>
-        <p:txBody>
-          <a:bodyPr wrap="square" anchor="ctr" lIns="0" rIns="0" tIns="0" bIns="0">
-            <a:spAutoFit/>
-          </a:bodyPr>
-          <a:lstStyle/>
-          <a:p>
-            <a:pPr algn="ctr"/>
-            <a:r>
-              <a:rPr sz="1300" b="1">
-                <a:solidFill>
-                  <a:srgbClr val="0F1E3D"/>
-                </a:solidFill>
-                <a:latin typeface="맑은 고딕"/>
-                <a:ea typeface="맑은 고딕"/>
-              </a:rPr>
-              <a:t>context — fleet 대비 이탈</a:t>
-            </a:r>
-          </a:p>
-        </p:txBody>
-      </p:sp>
-      <p:sp>
-        <p:nvSpPr>
-          <p:cNvPr id="21" name="TextBox 20"/>
-          <p:cNvSpPr txBox="1"/>
-          <p:nvPr/>
-        </p:nvSpPr>
-        <p:spPr>
-          <a:xfrm>
-            <a:off x="640080" y="5961888"/>
-            <a:ext cx="10972800" cy="274320"/>
-          </a:xfrm>
-          <a:prstGeom prst="rect">
-            <a:avLst/>
-          </a:prstGeom>
-          <a:noFill/>
-        </p:spPr>
-        <p:txBody>
-          <a:bodyPr wrap="square" anchor="t" lIns="0" rIns="0" tIns="0" bIns="0">
-            <a:spAutoFit/>
-          </a:bodyPr>
-          <a:lstStyle/>
-          <a:p>
-            <a:pPr algn="ctr"/>
-            <a:r>
-              <a:rPr sz="1300">
-                <a:solidFill>
-                  <a:srgbClr val="3A485C"/>
-                </a:solidFill>
-                <a:latin typeface="맑은 고딕"/>
-                <a:ea typeface="맑은 고딕"/>
-              </a:rPr>
-              <a:t>avg y=x+delta / std 산포 확대 / spike 일부 점 급등 / drift y=x+k(t-t0) / context legend(fleet) 대비 outlier</a:t>
-            </a:r>
-          </a:p>
-        </p:txBody>
-      </p:sp>
-      <p:sp>
-        <p:nvSpPr>
-          <p:cNvPr id="22" name="TextBox 21"/>
-          <p:cNvSpPr txBox="1"/>
-          <p:nvPr/>
-        </p:nvSpPr>
-        <p:spPr>
-          <a:xfrm>
-            <a:off x="457200" y="6437376"/>
-            <a:ext cx="8229600" cy="292608"/>
-          </a:xfrm>
-          <a:prstGeom prst="rect">
-            <a:avLst/>
-          </a:prstGeom>
-          <a:noFill/>
-        </p:spPr>
-        <p:txBody>
-          <a:bodyPr wrap="square" anchor="ctr" lIns="0" rIns="0" tIns="0" bIns="0">
-            <a:spAutoFit/>
-          </a:bodyPr>
-          <a:lstStyle/>
-          <a:p>
             <a:pPr algn="l"/>
             <a:r>
               <a:rPr sz="900">
@@ -6587,7 +6275,7 @@
       </p:sp>
       <p:sp>
         <p:nvSpPr>
-          <p:cNvPr id="23" name="TextBox 22"/>
+          <p:cNvPr id="9" name="TextBox 8"/>
           <p:cNvSpPr txBox="1"/>
           <p:nvPr/>
         </p:nvSpPr>
@@ -7007,7 +6695,7 @@
                 <a:latin typeface="맑은 고딕"/>
                 <a:ea typeface="맑은 고딕"/>
               </a:rPr>
-              <a:t>    평균이동/산포/spike/drift/context (오른쪽 끝)</a:t>
+              <a:t>    avg/std/spike/drift/context (오른쪽 끝)</a:t>
             </a:r>
           </a:p>
           <a:p>
@@ -7795,7 +7483,7 @@
                 <a:latin typeface="맑은 고딕"/>
                 <a:ea typeface="맑은 고딕"/>
               </a:rPr>
-              <a:t>이상이 잡히면 2차에서 유형(평균이동/산포/spike/drift/context) 진단</a:t>
+              <a:t>이상이 잡히면 2차에서 유형(avg/std/spike/drift/context) 진단</a:t>
             </a:r>
           </a:p>
         </p:txBody>

--- a/recommendation/presentation/발표_P3_데이터생성_최호길.pptx
+++ b/recommendation/presentation/발표_P3_데이터생성_최호길.pptx
@@ -12,6 +12,7 @@
     <p:sldId id="260" r:id="rId11"/>
     <p:sldId id="261" r:id="rId12"/>
     <p:sldId id="262" r:id="rId13"/>
+    <p:sldId id="263" r:id="rId14"/>
   </p:sldIdLst>
   <p:sldSz cx="12191695" cy="6858000" type="screen4x3"/>
   <p:notesSz cx="6858000" cy="9144000"/>
@@ -3249,7 +3250,7 @@
                 <a:latin typeface="맑은 고딕"/>
                 <a:ea typeface="맑은 고딕"/>
               </a:rPr>
-              <a:t>현장 계측 trend의 영역 구조와 노이즈, 이상 발생 방식을 domain knowledge로 코드화해 학습·평가 데이터를 만들고 1차 binary gate로 검증한 과제</a:t>
+              <a:t>이상 유형별 검증 데이터가 없던 문제를, 현장에서 trend를 보던 판정 기준을 생성 규칙으로 옮겨 풀었습니다. 정상 baseline 위에 이상을 합성해 평가셋을 만들고 1차 gate로 확인했습니다</a:t>
             </a:r>
           </a:p>
         </p:txBody>
@@ -4090,7 +4091,7 @@
                 <a:latin typeface="맑은 고딕"/>
                 <a:ea typeface="맑은 고딕"/>
               </a:rPr>
-              <a:t>이상 유형별 라벨 부족을 도메인 규칙 generator로 해결</a:t>
+              <a:t>없던 검증 데이터를 현장 판정 기준으로 만들었다</a:t>
             </a:r>
           </a:p>
         </p:txBody>
@@ -4170,7 +4171,7 @@
                 <a:latin typeface="맑은 고딕"/>
                 <a:ea typeface="맑은 고딕"/>
               </a:rPr>
-              <a:t>문제 — 이상 유형별 라벨이 희소</a:t>
+              <a:t>문제 — 이상 데이터가 거의 없다</a:t>
             </a:r>
           </a:p>
         </p:txBody>
@@ -4267,27 +4268,7 @@
                 <a:latin typeface="맑은 고딕"/>
                 <a:ea typeface="맑은 고딕"/>
               </a:rPr>
-              <a:t>실 계측 trend는 정상은 많지만 이상은 드물어, </a:t>
-            </a:r>
-            <a:r>
-              <a:rPr sz="1300" b="1">
-                <a:solidFill>
-                  <a:srgbClr val="0F1E3D"/>
-                </a:solidFill>
-                <a:latin typeface="맑은 고딕"/>
-                <a:ea typeface="맑은 고딕"/>
-              </a:rPr>
-              <a:t>avg / std / spike / drift / context</a:t>
-            </a:r>
-            <a:r>
-              <a:rPr sz="1300">
-                <a:solidFill>
-                  <a:srgbClr val="1A1F2E"/>
-                </a:solidFill>
-                <a:latin typeface="맑은 고딕"/>
-                <a:ea typeface="맑은 고딕"/>
-              </a:rPr>
-              <a:t> 같은 이상 유형별 라벨이 부족합니다</a:t>
+              <a:t>정상 trend는 쌓여 있지만 avg / std / spike / drift / context 같은 이상은 드물게 나와, 유형별로 모아 둔 데이터가 거의 없습니다</a:t>
             </a:r>
           </a:p>
           <a:p>
@@ -4317,7 +4298,7 @@
                 <a:latin typeface="맑은 고딕"/>
                 <a:ea typeface="맑은 고딕"/>
               </a:rPr>
-              <a:t>유형별 평가셋이 없으면 모델 학습도, 성능 비교도 어렵습니다</a:t>
+              <a:t>데이터가 없으니 모델을 학습시키기도, 잘 되는지 비교하기도 어려웠습니다</a:t>
             </a:r>
           </a:p>
           <a:p>
@@ -4347,7 +4328,7 @@
                 <a:latin typeface="맑은 고딕"/>
                 <a:ea typeface="맑은 고딕"/>
               </a:rPr>
-              <a:t>정답 라벨이 적어 정량 metric 자체가 성립하기 힘든 상황</a:t>
+              <a:t>정답이 적어 정량 지표 자체가 잘 서지 않는 상황</a:t>
             </a:r>
           </a:p>
         </p:txBody>
@@ -4635,7 +4616,7 @@
                 <a:latin typeface="맑은 고딕"/>
                 <a:ea typeface="맑은 고딕"/>
               </a:rPr>
-              <a:t>라벨 희소</a:t>
+              <a:t>데이터 부재</a:t>
             </a:r>
           </a:p>
         </p:txBody>
@@ -4671,7 +4652,7 @@
                 <a:latin typeface="맑은 고딕"/>
                 <a:ea typeface="맑은 고딕"/>
               </a:rPr>
-              <a:t>정량 평가 난항</a:t>
+              <a:t>학습·비교 난항</a:t>
             </a:r>
           </a:p>
         </p:txBody>
@@ -4751,7 +4732,7 @@
                 <a:latin typeface="맑은 고딕"/>
                 <a:ea typeface="맑은 고딕"/>
               </a:rPr>
-              <a:t>해법 — domain knowledge generator</a:t>
+              <a:t>해법 — 판정 기준을 생성 규칙으로</a:t>
             </a:r>
           </a:p>
         </p:txBody>
@@ -4848,27 +4829,7 @@
                 <a:latin typeface="맑은 고딕"/>
                 <a:ea typeface="맑은 고딕"/>
               </a:rPr>
-              <a:t>BBD담당/Overlay담당/CD담당으로 쌓은 trend 분석 경험으로 계측의 </a:t>
-            </a:r>
-            <a:r>
-              <a:rPr sz="1300" b="1">
-                <a:solidFill>
-                  <a:srgbClr val="0F1E3D"/>
-                </a:solidFill>
-                <a:latin typeface="맑은 고딕"/>
-                <a:ea typeface="맑은 고딕"/>
-              </a:rPr>
-              <a:t>영역 구조, 노이즈, 이상 발생 방식</a:t>
-            </a:r>
-            <a:r>
-              <a:rPr sz="1300">
-                <a:solidFill>
-                  <a:srgbClr val="1A1F2E"/>
-                </a:solidFill>
-                <a:latin typeface="맑은 고딕"/>
-                <a:ea typeface="맑은 고딕"/>
-              </a:rPr>
-              <a:t>을 규칙으로 코드화했습니다</a:t>
+              <a:t>BBD / Overlay / CD를 담당하며 trend를 직접 보던 판정 기준을, 영역과 노이즈, 이상 발생 방식이라는 생성 규칙으로 옮겼습니다</a:t>
             </a:r>
           </a:p>
           <a:p>
@@ -4898,27 +4859,7 @@
                 <a:latin typeface="맑은 고딕"/>
                 <a:ea typeface="맑은 고딕"/>
               </a:rPr>
-              <a:t>정상 baseline을 만들고 그 위에 이상을 합성해 </a:t>
-            </a:r>
-            <a:r>
-              <a:rPr sz="1300" b="1">
-                <a:solidFill>
-                  <a:srgbClr val="0F1E3D"/>
-                </a:solidFill>
-                <a:latin typeface="맑은 고딕"/>
-                <a:ea typeface="맑은 고딕"/>
-              </a:rPr>
-              <a:t>검증 가능한 benchmark</a:t>
-            </a:r>
-            <a:r>
-              <a:rPr sz="1300">
-                <a:solidFill>
-                  <a:srgbClr val="1A1F2E"/>
-                </a:solidFill>
-                <a:latin typeface="맑은 고딕"/>
-                <a:ea typeface="맑은 고딕"/>
-              </a:rPr>
-              <a:t>를 확보했습니다</a:t>
+              <a:t>정상 baseline을 만들고 그 위에 이상을 합성해, 부족하던 검증 데이터를 직접 확보했습니다</a:t>
             </a:r>
           </a:p>
           <a:p>
@@ -4948,7 +4889,7 @@
                 <a:latin typeface="맑은 고딕"/>
                 <a:ea typeface="맑은 고딕"/>
               </a:rPr>
-              <a:t>영역(계측 밀도) + 노이즈(계측 변동) + 이상(불량 방식) 세 축을 규칙화</a:t>
+              <a:t>성능 수치가 아니라, 검증할 데이터를 만든 것이 이 과제의 핵심</a:t>
             </a:r>
           </a:p>
         </p:txBody>
@@ -5074,7 +5015,7 @@
                 <a:latin typeface="맑은 고딕"/>
                 <a:ea typeface="맑은 고딕"/>
               </a:rPr>
-              <a:t>규칙 기반</a:t>
+              <a:t>판정 기준</a:t>
             </a:r>
           </a:p>
         </p:txBody>
@@ -5110,7 +5051,7 @@
                 <a:latin typeface="맑은 고딕"/>
                 <a:ea typeface="맑은 고딕"/>
               </a:rPr>
-              <a:t>영역+노이즈+이상</a:t>
+              <a:t>현장 경험을 규칙화</a:t>
             </a:r>
           </a:p>
         </p:txBody>
@@ -5236,7 +5177,7 @@
                 <a:latin typeface="맑은 고딕"/>
                 <a:ea typeface="맑은 고딕"/>
               </a:rPr>
-              <a:t>benchmark</a:t>
+              <a:t>평가셋 확보</a:t>
             </a:r>
           </a:p>
         </p:txBody>
@@ -5592,7 +5533,7 @@
                 <a:latin typeface="맑은 고딕"/>
                 <a:ea typeface="맑은 고딕"/>
               </a:rPr>
-              <a:t>한 chart를 12~25개 episode로 나눠 영역 밀도를 확률로 샘플링 — 실제 계측 분포를 모사하고, 신호는 평탄하게 두어 변동은 노이즈로만 만듦</a:t>
+              <a:t>한 chart를 여러 episode로 나눠 영역마다 측정 밀도를 다르게 주고, 신호 자체는 평탄하게 둔 채 변동은 노이즈로만 만들었습니다</a:t>
             </a:r>
           </a:p>
         </p:txBody>
@@ -5912,7 +5853,7 @@
                 <a:latin typeface="맑은 고딕"/>
                 <a:ea typeface="맑은 고딕"/>
               </a:rPr>
-              <a:t>chart 하나는 한 가지 노이즈만 사용 — Gaussian(산포) / Correlated AR(설비 변동) / Laplacian(계측 헌팅)</a:t>
+              <a:t>chart 하나는 한 가지 노이즈만 씁니다. Gaussian은 기본 산포, Correlated는 설비 상태에 따라 천천히 흐르는 변동, Laplacian은 계측이 한 번씩 튀는 헌팅입니다</a:t>
             </a:r>
           </a:p>
         </p:txBody>
@@ -6126,7 +6067,7 @@
                 <a:latin typeface="맑은 고딕"/>
                 <a:ea typeface="맑은 고딕"/>
               </a:rPr>
-              <a:t>이상 합성 5종 — 실제 불량 발생 방식 (파랑 정상, 빨강 이상)</a:t>
+              <a:t>이상 합성 5종 — 실제 불량이 나타나는 방식 (파랑 정상, 빨강 이상)</a:t>
             </a:r>
           </a:p>
         </p:txBody>
@@ -6232,7 +6173,7 @@
                 <a:latin typeface="맑은 고딕"/>
                 <a:ea typeface="맑은 고딕"/>
               </a:rPr>
-              <a:t>정상 baseline 오른쪽 끝에 주입하고 강도는 baseline 산포에 비례 (context만 fleet 대비 전체 시계열이 이탈)</a:t>
+              <a:t>정상 baseline 오른쪽 끝에 이상을 주입하고 강도는 그 series의 산포에 맞춰 정합니다. context만 끝이 아니라 fleet 대비 전체가 벗어나는 형태입니다</a:t>
             </a:r>
           </a:p>
         </p:txBody>
@@ -6446,7 +6387,7 @@
                 <a:latin typeface="맑은 고딕"/>
                 <a:ea typeface="맑은 고딕"/>
               </a:rPr>
-              <a:t>생성 파이프라인과 데이터 구성</a:t>
+              <a:t>생성 흐름과 데이터 구성</a:t>
             </a:r>
           </a:p>
         </p:txBody>
@@ -6496,7 +6437,7 @@
                 <a:latin typeface="맑은 고딕"/>
                 <a:ea typeface="맑은 고딕"/>
               </a:rPr>
-              <a:t>chart 정의부터 이미지 렌더까지 규칙 기반으로 생성하고, 이상 강도는 보이도록 floor 보정합니다</a:t>
+              <a:t>chart를 정의하고 episode를 이어 붙여 정상 baseline을 만든 뒤, 노이즈와 이상을 얹어 학습/평가 이미지로 렌더합니다</a:t>
             </a:r>
           </a:p>
         </p:txBody>
@@ -6578,7 +6519,7 @@
                 <a:latin typeface="맑은 고딕"/>
                 <a:ea typeface="맑은 고딕"/>
               </a:rPr>
-              <a:t>생성 파이프라인</a:t>
+              <a:t>생성 흐름</a:t>
             </a:r>
           </a:p>
           <a:p>
@@ -6643,7 +6584,7 @@
                 <a:latin typeface="맑은 고딕"/>
                 <a:ea typeface="맑은 고딕"/>
               </a:rPr>
-              <a:t>    12~25개, 영역 밀도 샘플링(밀집/희소/결핍)</a:t>
+              <a:t>    12~25개를 이어 붙이며 영역 밀도를 샘플링</a:t>
             </a:r>
           </a:p>
           <a:p>
@@ -6669,7 +6610,7 @@
                 <a:latin typeface="맑은 고딕"/>
                 <a:ea typeface="맑은 고딕"/>
               </a:rPr>
-              <a:t>    Gaussian / Correlated / Laplacian 중 1종</a:t>
+              <a:t>    Gaussian / Correlated / Laplacian 중 하나</a:t>
             </a:r>
           </a:p>
           <a:p>
@@ -6695,7 +6636,7 @@
                 <a:latin typeface="맑은 고딕"/>
                 <a:ea typeface="맑은 고딕"/>
               </a:rPr>
-              <a:t>    avg/std/spike/drift/context (오른쪽 끝)</a:t>
+              <a:t>    avg/std/spike/drift/context, 강도 보정</a:t>
             </a:r>
           </a:p>
           <a:p>
@@ -6721,7 +6662,7 @@
                 <a:latin typeface="맑은 고딕"/>
                 <a:ea typeface="맑은 고딕"/>
               </a:rPr>
-              <a:t>    강도 floor 보정 → 학습/평가 trend 이미지</a:t>
+              <a:t>    정상/이상 trend 이미지로 출력</a:t>
             </a:r>
           </a:p>
         </p:txBody>
@@ -6757,7 +6698,7 @@
                 <a:latin typeface="맑은 고딕"/>
                 <a:ea typeface="맑은 고딕"/>
               </a:rPr>
-              <a:t>규칙 기반 생성 흐름</a:t>
+              <a:t>현장 판정 기준을 그대로 옮긴 흐름</a:t>
             </a:r>
           </a:p>
         </p:txBody>
@@ -6891,7 +6832,7 @@
                 <a:latin typeface="맑은 고딕"/>
                 <a:ea typeface="맑은 고딕"/>
               </a:rPr>
-              <a:t>    별도 test 1,500 (이상 5종 stratified)</a:t>
+              <a:t>    별도 test 1,500 (이상 5종 고르게)</a:t>
             </a:r>
           </a:p>
           <a:p>
@@ -6917,7 +6858,7 @@
                 <a:latin typeface="맑은 고딕"/>
                 <a:ea typeface="맑은 고딕"/>
               </a:rPr>
-              <a:t>    test/val은 이상 강도를 0.8배로 낮춰</a:t>
+              <a:t>    test는 이상 강도를 0.8배로 낮춰</a:t>
             </a:r>
           </a:p>
           <a:p>
@@ -6930,7 +6871,7 @@
                 <a:latin typeface="맑은 고딕"/>
                 <a:ea typeface="맑은 고딕"/>
               </a:rPr>
-              <a:t>    더 어려운 평가셋 구성</a:t>
+              <a:t>    일부러 더 어렵게 만들었습니다</a:t>
             </a:r>
           </a:p>
           <a:p>
@@ -6956,7 +6897,7 @@
                 <a:latin typeface="맑은 고딕"/>
                 <a:ea typeface="맑은 고딕"/>
               </a:rPr>
-              <a:t>    정상은 fleet 중심에서 벗어나지 않게 강제</a:t>
+              <a:t>    정상은 fleet 중심에서 벗어나지 않게 둡니다</a:t>
             </a:r>
           </a:p>
         </p:txBody>
@@ -7170,7 +7111,7 @@
                 <a:latin typeface="맑은 고딕"/>
                 <a:ea typeface="맑은 고딕"/>
               </a:rPr>
-              <a:t>P3 | 1차 binary gate (PoC)</a:t>
+              <a:t>P3 | 생성 데이터 검증</a:t>
             </a:r>
           </a:p>
         </p:txBody>
@@ -7206,7 +7147,7 @@
                 <a:latin typeface="맑은 고딕"/>
                 <a:ea typeface="맑은 고딕"/>
               </a:rPr>
-              <a:t>생성 데이터로 정상/이상 1차 판정 검증</a:t>
+              <a:t>만든 데이터로 1차 gate가 학습되는지 확인</a:t>
             </a:r>
           </a:p>
         </p:txBody>
@@ -7286,7 +7227,7 @@
                 <a:latin typeface="맑은 고딕"/>
                 <a:ea typeface="맑은 고딕"/>
               </a:rPr>
-              <a:t>모델 — 1차 binary gate</a:t>
+              <a:t>무엇을 확인했나</a:t>
             </a:r>
           </a:p>
         </p:txBody>
@@ -7383,47 +7324,7 @@
                 <a:latin typeface="맑은 고딕"/>
                 <a:ea typeface="맑은 고딕"/>
               </a:rPr>
-              <a:t>trend 이미지를 </a:t>
-            </a:r>
-            <a:r>
-              <a:rPr sz="1300" b="1">
-                <a:solidFill>
-                  <a:srgbClr val="0F1E3D"/>
-                </a:solidFill>
-                <a:latin typeface="맑은 고딕"/>
-                <a:ea typeface="맑은 고딕"/>
-              </a:rPr>
-              <a:t>ConvNeXtV2-Tiny</a:t>
-            </a:r>
-            <a:r>
-              <a:rPr sz="1300">
-                <a:solidFill>
-                  <a:srgbClr val="1A1F2E"/>
-                </a:solidFill>
-                <a:latin typeface="맑은 고딕"/>
-                <a:ea typeface="맑은 고딕"/>
-              </a:rPr>
-              <a:t>로 정상/이상 2분류하며, </a:t>
-            </a:r>
-            <a:r>
-              <a:rPr sz="1300" b="1">
-                <a:solidFill>
-                  <a:srgbClr val="0F1E3D"/>
-                </a:solidFill>
-                <a:latin typeface="맑은 고딕"/>
-                <a:ea typeface="맑은 고딕"/>
-              </a:rPr>
-              <a:t>놓침(FN) 최소화</a:t>
-            </a:r>
-            <a:r>
-              <a:rPr sz="1300">
-                <a:solidFill>
-                  <a:srgbClr val="1A1F2E"/>
-                </a:solidFill>
-                <a:latin typeface="맑은 고딕"/>
-                <a:ea typeface="맑은 고딕"/>
-              </a:rPr>
-              <a:t>가 목표입니다</a:t>
+              <a:t>생성한 데이터로 정상/이상을 1차로 거르는 gate를 학습시켜, 이 데이터가 실제로 쓸 만한지 봤습니다</a:t>
             </a:r>
           </a:p>
           <a:p>
@@ -7453,7 +7354,7 @@
                 <a:latin typeface="맑은 고딕"/>
                 <a:ea typeface="맑은 고딕"/>
               </a:rPr>
-              <a:t>Focal loss + EMA로 학습하고, normal threshold를 올려 FN을 더 줄입니다</a:t>
+              <a:t>ConvNeXtV2-Tiny에 Focal loss로 학습하고, 놓치는 쪽을 줄이려고 normal threshold를 높였습니다</a:t>
             </a:r>
           </a:p>
           <a:p>
@@ -7483,7 +7384,7 @@
                 <a:latin typeface="맑은 고딕"/>
                 <a:ea typeface="맑은 고딕"/>
               </a:rPr>
-              <a:t>이상이 잡히면 2차에서 유형(avg/std/spike/drift/context) 진단</a:t>
+              <a:t>이상이 걸리면 2차에서 유형(avg/std/spike/drift/context)을 나눠 봅니다</a:t>
             </a:r>
           </a:p>
         </p:txBody>
@@ -7609,7 +7510,7 @@
                 <a:latin typeface="맑은 고딕"/>
                 <a:ea typeface="맑은 고딕"/>
               </a:rPr>
-              <a:t>2-stage</a:t>
+              <a:t>1차 gate</a:t>
             </a:r>
           </a:p>
         </p:txBody>
@@ -7645,7 +7546,7 @@
                 <a:latin typeface="맑은 고딕"/>
                 <a:ea typeface="맑은 고딕"/>
               </a:rPr>
-              <a:t>binary gate → 유형 진단</a:t>
+              <a:t>정상/이상 선별</a:t>
             </a:r>
           </a:p>
         </p:txBody>
@@ -7771,7 +7672,7 @@
                 <a:latin typeface="맑은 고딕"/>
                 <a:ea typeface="맑은 고딕"/>
               </a:rPr>
-              <a:t>ConvNeXtV2</a:t>
+              <a:t>2-stage</a:t>
             </a:r>
           </a:p>
         </p:txBody>
@@ -7807,7 +7708,7 @@
                 <a:latin typeface="맑은 고딕"/>
                 <a:ea typeface="맑은 고딕"/>
               </a:rPr>
-              <a:t>Tiny backbone</a:t>
+              <a:t>이후 유형 진단</a:t>
             </a:r>
           </a:p>
         </p:txBody>
@@ -7887,7 +7788,7 @@
                 <a:latin typeface="맑은 고딕"/>
                 <a:ea typeface="맑은 고딕"/>
               </a:rPr>
-              <a:t>성과 — 생성셋 검증(PoC)</a:t>
+              <a:t>결과 — 데이터가 학습된다</a:t>
             </a:r>
           </a:p>
         </p:txBody>
@@ -7984,47 +7885,7 @@
                 <a:latin typeface="맑은 고딕"/>
                 <a:ea typeface="맑은 고딕"/>
               </a:rPr>
-              <a:t>test 1,500에서 </a:t>
-            </a:r>
-            <a:r>
-              <a:rPr sz="1300" b="1">
-                <a:solidFill>
-                  <a:srgbClr val="0F1E3D"/>
-                </a:solidFill>
-                <a:latin typeface="맑은 고딕"/>
-                <a:ea typeface="맑은 고딕"/>
-              </a:rPr>
-              <a:t>binary F1 0.9967</a:t>
-            </a:r>
-            <a:r>
-              <a:rPr sz="1300">
-                <a:solidFill>
-                  <a:srgbClr val="1A1F2E"/>
-                </a:solidFill>
-                <a:latin typeface="맑은 고딕"/>
-                <a:ea typeface="맑은 고딕"/>
-              </a:rPr>
-              <a:t>, </a:t>
-            </a:r>
-            <a:r>
-              <a:rPr sz="1300" b="1">
-                <a:solidFill>
-                  <a:srgbClr val="0F1E3D"/>
-                </a:solidFill>
-                <a:latin typeface="맑은 고딕"/>
-                <a:ea typeface="맑은 고딕"/>
-              </a:rPr>
-              <a:t>이상 recall 0.9987</a:t>
-            </a:r>
-            <a:r>
-              <a:rPr sz="1300">
-                <a:solidFill>
-                  <a:srgbClr val="1A1F2E"/>
-                </a:solidFill>
-                <a:latin typeface="맑은 고딕"/>
-                <a:ea typeface="맑은 고딕"/>
-              </a:rPr>
-              <a:t>(normal threshold 0.9)</a:t>
+              <a:t>test 1,500에서 정상과 이상이 깔끔하게 갈렸습니다 (F1 0.9967, 이상 recall 0.9987, NT 0.9)</a:t>
             </a:r>
           </a:p>
           <a:p>
@@ -8054,7 +7915,7 @@
                 <a:latin typeface="맑은 고딕"/>
                 <a:ea typeface="맑은 고딕"/>
               </a:rPr>
-              <a:t>정상 750 중 오탐 4건, 이상 750 중 놓침 1건 수준</a:t>
+              <a:t>정상 750 중 4건 오탐, 이상 750 중 1건 놓침 정도였습니다</a:t>
             </a:r>
           </a:p>
           <a:p>
@@ -8084,7 +7945,7 @@
                 <a:latin typeface="맑은 고딕"/>
                 <a:ea typeface="맑은 고딕"/>
               </a:rPr>
-              <a:t>FN을 유형별로 분해해 데이터 난이도와 threshold로 피드백</a:t>
+              <a:t>이 수치 자체가 목적이 아니라, 생성 데이터가 학습 가능하다는 신호입니다</a:t>
             </a:r>
           </a:p>
         </p:txBody>
@@ -8210,7 +8071,7 @@
                 <a:latin typeface="맑은 고딕"/>
                 <a:ea typeface="맑은 고딕"/>
               </a:rPr>
-              <a:t>F1 0.9967</a:t>
+              <a:t>학습 가능</a:t>
             </a:r>
           </a:p>
         </p:txBody>
@@ -8246,7 +8107,7 @@
                 <a:latin typeface="맑은 고딕"/>
                 <a:ea typeface="맑은 고딕"/>
               </a:rPr>
-              <a:t>binary gate</a:t>
+              <a:t>생성 데이터로</a:t>
             </a:r>
           </a:p>
         </p:txBody>
@@ -8372,7 +8233,7 @@
                 <a:latin typeface="맑은 고딕"/>
                 <a:ea typeface="맑은 고딕"/>
               </a:rPr>
-              <a:t>recall 0.9987</a:t>
+              <a:t>F1 0.9967</a:t>
             </a:r>
           </a:p>
         </p:txBody>
@@ -8408,7 +8269,7 @@
                 <a:latin typeface="맑은 고딕"/>
                 <a:ea typeface="맑은 고딕"/>
               </a:rPr>
-              <a:t>abnormal</a:t>
+              <a:t>1차 gate (PoC)</a:t>
             </a:r>
           </a:p>
         </p:txBody>
@@ -8481,6 +8342,688 @@
                 <a:ea typeface="맑은 고딕"/>
               </a:rPr>
               <a:t>7</a:t>
+            </a:r>
+          </a:p>
+        </p:txBody>
+      </p:sp>
+    </p:spTree>
+  </p:cSld>
+  <p:clrMapOvr>
+    <a:masterClrMapping/>
+  </p:clrMapOvr>
+</p:sld>
+</file>
+
+<file path=ppt/slides/slide8.xml><?xml version="1.0" encoding="utf-8"?>
+<p:sld xmlns:a="http://schemas.openxmlformats.org/drawingml/2006/main" xmlns:p="http://schemas.openxmlformats.org/presentationml/2006/main" xmlns:r="http://schemas.openxmlformats.org/officeDocument/2006/relationships">
+  <p:cSld>
+    <p:bg>
+      <p:bgPr>
+        <a:solidFill>
+          <a:srgbClr val="FFFFFF"/>
+        </a:solidFill>
+        <a:effectLst/>
+      </p:bgPr>
+    </p:bg>
+    <p:spTree>
+      <p:nvGrpSpPr>
+        <p:cNvPr id="1" name=""/>
+        <p:cNvGrpSpPr/>
+        <p:nvPr/>
+      </p:nvGrpSpPr>
+      <p:grpSpPr/>
+      <p:sp>
+        <p:nvSpPr>
+          <p:cNvPr id="2" name="Rectangle 1"/>
+          <p:cNvSpPr/>
+          <p:nvPr/>
+        </p:nvSpPr>
+        <p:spPr>
+          <a:xfrm>
+            <a:off x="640080" y="502920"/>
+            <a:ext cx="123444" cy="768096"/>
+          </a:xfrm>
+          <a:prstGeom prst="rect">
+            <a:avLst/>
+          </a:prstGeom>
+          <a:solidFill>
+            <a:srgbClr val="CFD4DB"/>
+          </a:solidFill>
+          <a:ln>
+            <a:noFill/>
+          </a:ln>
+          <a:effectLst/>
+        </p:spPr>
+        <p:style>
+          <a:lnRef idx="1">
+            <a:schemeClr val="accent1"/>
+          </a:lnRef>
+          <a:fillRef idx="3">
+            <a:schemeClr val="accent1"/>
+          </a:fillRef>
+          <a:effectRef idx="2">
+            <a:schemeClr val="accent1"/>
+          </a:effectRef>
+          <a:fontRef idx="minor">
+            <a:schemeClr val="lt1"/>
+          </a:fontRef>
+        </p:style>
+        <p:txBody>
+          <a:bodyPr rtlCol="0" anchor="ctr"/>
+          <a:lstStyle/>
+          <a:p>
+            <a:pPr algn="ctr"/>
+          </a:p>
+        </p:txBody>
+      </p:sp>
+      <p:sp>
+        <p:nvSpPr>
+          <p:cNvPr id="3" name="TextBox 2"/>
+          <p:cNvSpPr txBox="1"/>
+          <p:nvPr/>
+        </p:nvSpPr>
+        <p:spPr>
+          <a:xfrm>
+            <a:off x="932688" y="448056"/>
+            <a:ext cx="10881360" cy="256032"/>
+          </a:xfrm>
+          <a:prstGeom prst="rect">
+            <a:avLst/>
+          </a:prstGeom>
+          <a:noFill/>
+        </p:spPr>
+        <p:txBody>
+          <a:bodyPr wrap="square" anchor="t" lIns="0" rIns="0" tIns="0" bIns="0">
+            <a:spAutoFit/>
+          </a:bodyPr>
+          <a:lstStyle/>
+          <a:p>
+            <a:pPr algn="l"/>
+            <a:r>
+              <a:rPr sz="1300" b="1">
+                <a:solidFill>
+                  <a:srgbClr val="8A929E"/>
+                </a:solidFill>
+                <a:latin typeface="맑은 고딕"/>
+                <a:ea typeface="맑은 고딕"/>
+              </a:rPr>
+              <a:t>P3 | robustness 점검</a:t>
+            </a:r>
+          </a:p>
+        </p:txBody>
+      </p:sp>
+      <p:sp>
+        <p:nvSpPr>
+          <p:cNvPr id="4" name="TextBox 3"/>
+          <p:cNvSpPr txBox="1"/>
+          <p:nvPr/>
+        </p:nvSpPr>
+        <p:spPr>
+          <a:xfrm>
+            <a:off x="932688" y="704088"/>
+            <a:ext cx="10881360" cy="603504"/>
+          </a:xfrm>
+          <a:prstGeom prst="rect">
+            <a:avLst/>
+          </a:prstGeom>
+          <a:noFill/>
+        </p:spPr>
+        <p:txBody>
+          <a:bodyPr wrap="square" anchor="t" lIns="0" rIns="0" tIns="0" bIns="0">
+            <a:spAutoFit/>
+          </a:bodyPr>
+          <a:lstStyle/>
+          <a:p>
+            <a:pPr algn="l"/>
+            <a:r>
+              <a:rPr sz="3100" b="1">
+                <a:solidFill>
+                  <a:srgbClr val="0F1E3D"/>
+                </a:solidFill>
+                <a:latin typeface="맑은 고딕"/>
+                <a:ea typeface="맑은 고딕"/>
+              </a:rPr>
+              <a:t>모델이 색이나 노이즈가 아니라 실제 패턴을 보게</a:t>
+            </a:r>
+          </a:p>
+        </p:txBody>
+      </p:sp>
+      <p:sp>
+        <p:nvSpPr>
+          <p:cNvPr id="5" name="TextBox 4"/>
+          <p:cNvSpPr txBox="1"/>
+          <p:nvPr/>
+        </p:nvSpPr>
+        <p:spPr>
+          <a:xfrm>
+            <a:off x="640080" y="1828800"/>
+            <a:ext cx="10972800" cy="685800"/>
+          </a:xfrm>
+          <a:prstGeom prst="rect">
+            <a:avLst/>
+          </a:prstGeom>
+          <a:noFill/>
+        </p:spPr>
+        <p:txBody>
+          <a:bodyPr wrap="square" anchor="t" lIns="0" rIns="0" tIns="0" bIns="0">
+            <a:spAutoFit/>
+          </a:bodyPr>
+          <a:lstStyle/>
+          <a:p>
+            <a:pPr marL="274320" indent="-274320">
+              <a:spcAft>
+                <a:spcPts val="500"/>
+              </a:spcAft>
+            </a:pPr>
+            <a:r>
+              <a:rPr sz="1400" b="0">
+                <a:solidFill>
+                  <a:srgbClr val="5B9BD5"/>
+                </a:solidFill>
+                <a:latin typeface="맑은 고딕"/>
+                <a:ea typeface="맑은 고딕"/>
+              </a:rPr>
+              <a:t>●  </a:t>
+            </a:r>
+            <a:r>
+              <a:rPr sz="1400">
+                <a:solidFill>
+                  <a:srgbClr val="1A1F2E"/>
+                </a:solidFill>
+                <a:latin typeface="맑은 고딕"/>
+                <a:ea typeface="맑은 고딕"/>
+              </a:rPr>
+              <a:t>PoC 수치보다, 모델이 trend의 진짜 모양을 보고 판단하는지가 더 중요했습니다. 두 가지로 점검했습니다</a:t>
+            </a:r>
+          </a:p>
+        </p:txBody>
+      </p:sp>
+      <p:sp>
+        <p:nvSpPr>
+          <p:cNvPr id="6" name="Rectangle 5"/>
+          <p:cNvSpPr/>
+          <p:nvPr/>
+        </p:nvSpPr>
+        <p:spPr>
+          <a:xfrm>
+            <a:off x="640080" y="2642616"/>
+            <a:ext cx="5303520" cy="3383280"/>
+          </a:xfrm>
+          <a:prstGeom prst="rect">
+            <a:avLst/>
+          </a:prstGeom>
+          <a:solidFill>
+            <a:srgbClr val="FFFFFF"/>
+          </a:solidFill>
+          <a:ln w="15875">
+            <a:solidFill>
+              <a:srgbClr val="333740"/>
+            </a:solidFill>
+          </a:ln>
+          <a:effectLst/>
+        </p:spPr>
+        <p:style>
+          <a:lnRef idx="1">
+            <a:schemeClr val="accent1"/>
+          </a:lnRef>
+          <a:fillRef idx="3">
+            <a:schemeClr val="accent1"/>
+          </a:fillRef>
+          <a:effectRef idx="2">
+            <a:schemeClr val="accent1"/>
+          </a:effectRef>
+          <a:fontRef idx="minor">
+            <a:schemeClr val="lt1"/>
+          </a:fontRef>
+        </p:style>
+        <p:txBody>
+          <a:bodyPr rtlCol="0" anchor="ctr"/>
+          <a:lstStyle/>
+          <a:p>
+            <a:pPr algn="ctr"/>
+          </a:p>
+        </p:txBody>
+      </p:sp>
+      <p:sp>
+        <p:nvSpPr>
+          <p:cNvPr id="7" name="TextBox 6"/>
+          <p:cNvSpPr txBox="1"/>
+          <p:nvPr/>
+        </p:nvSpPr>
+        <p:spPr>
+          <a:xfrm>
+            <a:off x="914400" y="2770632"/>
+            <a:ext cx="4809744" cy="3127248"/>
+          </a:xfrm>
+          <a:prstGeom prst="rect">
+            <a:avLst/>
+          </a:prstGeom>
+          <a:noFill/>
+        </p:spPr>
+        <p:txBody>
+          <a:bodyPr wrap="square" anchor="ctr" lIns="0" rIns="0" tIns="0" bIns="0">
+            <a:spAutoFit/>
+          </a:bodyPr>
+          <a:lstStyle/>
+          <a:p>
+            <a:pPr algn="l"/>
+            <a:r>
+              <a:rPr sz="1450" b="1">
+                <a:solidFill>
+                  <a:srgbClr val="0F1E3D"/>
+                </a:solidFill>
+                <a:latin typeface="맑은 고딕"/>
+                <a:ea typeface="맑은 고딕"/>
+              </a:rPr>
+              <a:t>Smoothing window (median)</a:t>
+            </a:r>
+          </a:p>
+          <a:p>
+            <a:pPr algn="l"/>
+            <a:r>
+              <a:rPr sz="500">
+                <a:solidFill>
+                  <a:srgbClr val="FFFFFF"/>
+                </a:solidFill>
+                <a:latin typeface="맑은 고딕"/>
+                <a:ea typeface="맑은 고딕"/>
+              </a:rPr>
+              <a:t> </a:t>
+            </a:r>
+          </a:p>
+          <a:p>
+            <a:pPr algn="l"/>
+            <a:r>
+              <a:rPr sz="1350" b="1" i="0">
+                <a:solidFill>
+                  <a:srgbClr val="0F1E3D"/>
+                </a:solidFill>
+                <a:latin typeface="맑은 고딕"/>
+                <a:ea typeface="맑은 고딕"/>
+              </a:rPr>
+              <a:t>무엇</a:t>
+            </a:r>
+          </a:p>
+          <a:p>
+            <a:pPr algn="l"/>
+            <a:r>
+              <a:rPr sz="1300">
+                <a:solidFill>
+                  <a:srgbClr val="1A1F2E"/>
+                </a:solidFill>
+                <a:latin typeface="맑은 고딕"/>
+                <a:ea typeface="맑은 고딕"/>
+              </a:rPr>
+              <a:t>    trend를 window 크기(1=원본 / 3 / 5)로 median 평활</a:t>
+            </a:r>
+          </a:p>
+          <a:p>
+            <a:pPr algn="l"/>
+            <a:r>
+              <a:rPr sz="1350" b="1" i="0">
+                <a:solidFill>
+                  <a:srgbClr val="0F1E3D"/>
+                </a:solidFill>
+                <a:latin typeface="맑은 고딕"/>
+                <a:ea typeface="맑은 고딕"/>
+              </a:rPr>
+              <a:t>왜</a:t>
+            </a:r>
+          </a:p>
+          <a:p>
+            <a:pPr algn="l"/>
+            <a:r>
+              <a:rPr sz="1300">
+                <a:solidFill>
+                  <a:srgbClr val="1A1F2E"/>
+                </a:solidFill>
+                <a:latin typeface="맑은 고딕"/>
+                <a:ea typeface="맑은 고딕"/>
+              </a:rPr>
+              <a:t>    점마다 튀는 노이즈에 휘둘리지 않고 추세를 보게 하려고</a:t>
+            </a:r>
+          </a:p>
+          <a:p>
+            <a:pPr algn="l"/>
+            <a:r>
+              <a:rPr sz="1350" b="1" i="0">
+                <a:solidFill>
+                  <a:srgbClr val="0F1E3D"/>
+                </a:solidFill>
+                <a:latin typeface="맑은 고딕"/>
+                <a:ea typeface="맑은 고딕"/>
+              </a:rPr>
+              <a:t>현재</a:t>
+            </a:r>
+          </a:p>
+          <a:p>
+            <a:pPr algn="l"/>
+            <a:r>
+              <a:rPr sz="1300">
+                <a:solidFill>
+                  <a:srgbClr val="1A1F2E"/>
+                </a:solidFill>
+                <a:latin typeface="맑은 고딕"/>
+                <a:ea typeface="맑은 고딕"/>
+              </a:rPr>
+              <a:t>    baseline은 원본 그대로, 3/5-median과 비교 중</a:t>
+            </a:r>
+          </a:p>
+        </p:txBody>
+      </p:sp>
+      <p:sp>
+        <p:nvSpPr>
+          <p:cNvPr id="8" name="TextBox 7"/>
+          <p:cNvSpPr txBox="1"/>
+          <p:nvPr/>
+        </p:nvSpPr>
+        <p:spPr>
+          <a:xfrm>
+            <a:off x="640080" y="6053328"/>
+            <a:ext cx="5303520" cy="329184"/>
+          </a:xfrm>
+          <a:prstGeom prst="rect">
+            <a:avLst/>
+          </a:prstGeom>
+          <a:noFill/>
+        </p:spPr>
+        <p:txBody>
+          <a:bodyPr wrap="square" anchor="ctr" lIns="0" rIns="0" tIns="0" bIns="0">
+            <a:spAutoFit/>
+          </a:bodyPr>
+          <a:lstStyle/>
+          <a:p>
+            <a:pPr algn="ctr"/>
+            <a:r>
+              <a:rPr sz="1250" b="1">
+                <a:solidFill>
+                  <a:srgbClr val="0F1E3D"/>
+                </a:solidFill>
+                <a:latin typeface="맑은 고딕"/>
+                <a:ea typeface="맑은 고딕"/>
+              </a:rPr>
+              <a:t>노이즈에 덜 민감하게</a:t>
+            </a:r>
+          </a:p>
+        </p:txBody>
+      </p:sp>
+      <p:sp>
+        <p:nvSpPr>
+          <p:cNvPr id="9" name="Rectangle 8"/>
+          <p:cNvSpPr/>
+          <p:nvPr/>
+        </p:nvSpPr>
+        <p:spPr>
+          <a:xfrm>
+            <a:off x="6309360" y="2642616"/>
+            <a:ext cx="5303520" cy="3383280"/>
+          </a:xfrm>
+          <a:prstGeom prst="rect">
+            <a:avLst/>
+          </a:prstGeom>
+          <a:solidFill>
+            <a:srgbClr val="FFFFFF"/>
+          </a:solidFill>
+          <a:ln w="15875">
+            <a:solidFill>
+              <a:srgbClr val="333740"/>
+            </a:solidFill>
+          </a:ln>
+          <a:effectLst/>
+        </p:spPr>
+        <p:style>
+          <a:lnRef idx="1">
+            <a:schemeClr val="accent1"/>
+          </a:lnRef>
+          <a:fillRef idx="3">
+            <a:schemeClr val="accent1"/>
+          </a:fillRef>
+          <a:effectRef idx="2">
+            <a:schemeClr val="accent1"/>
+          </a:effectRef>
+          <a:fontRef idx="minor">
+            <a:schemeClr val="lt1"/>
+          </a:fontRef>
+        </p:style>
+        <p:txBody>
+          <a:bodyPr rtlCol="0" anchor="ctr"/>
+          <a:lstStyle/>
+          <a:p>
+            <a:pPr algn="ctr"/>
+          </a:p>
+        </p:txBody>
+      </p:sp>
+      <p:sp>
+        <p:nvSpPr>
+          <p:cNvPr id="10" name="TextBox 9"/>
+          <p:cNvSpPr txBox="1"/>
+          <p:nvPr/>
+        </p:nvSpPr>
+        <p:spPr>
+          <a:xfrm>
+            <a:off x="6583680" y="2770632"/>
+            <a:ext cx="4809744" cy="3127248"/>
+          </a:xfrm>
+          <a:prstGeom prst="rect">
+            <a:avLst/>
+          </a:prstGeom>
+          <a:noFill/>
+        </p:spPr>
+        <p:txBody>
+          <a:bodyPr wrap="square" anchor="ctr" lIns="0" rIns="0" tIns="0" bIns="0">
+            <a:spAutoFit/>
+          </a:bodyPr>
+          <a:lstStyle/>
+          <a:p>
+            <a:pPr algn="l"/>
+            <a:r>
+              <a:rPr sz="1450" b="1">
+                <a:solidFill>
+                  <a:srgbClr val="0F1E3D"/>
+                </a:solidFill>
+                <a:latin typeface="맑은 고딕"/>
+                <a:ea typeface="맑은 고딕"/>
+              </a:rPr>
+              <a:t>Color / alpha shortcut 점검</a:t>
+            </a:r>
+          </a:p>
+          <a:p>
+            <a:pPr algn="l"/>
+            <a:r>
+              <a:rPr sz="500">
+                <a:solidFill>
+                  <a:srgbClr val="FFFFFF"/>
+                </a:solidFill>
+                <a:latin typeface="맑은 고딕"/>
+                <a:ea typeface="맑은 고딕"/>
+              </a:rPr>
+              <a:t> </a:t>
+            </a:r>
+          </a:p>
+          <a:p>
+            <a:pPr algn="l"/>
+            <a:r>
+              <a:rPr sz="1350" b="1" i="0">
+                <a:solidFill>
+                  <a:srgbClr val="0F1E3D"/>
+                </a:solidFill>
+                <a:latin typeface="맑은 고딕"/>
+                <a:ea typeface="맑은 고딕"/>
+              </a:rPr>
+              <a:t>무엇</a:t>
+            </a:r>
+          </a:p>
+          <a:p>
+            <a:pPr algn="l"/>
+            <a:r>
+              <a:rPr sz="1300">
+                <a:solidFill>
+                  <a:srgbClr val="1A1F2E"/>
+                </a:solidFill>
+                <a:latin typeface="맑은 고딕"/>
+                <a:ea typeface="맑은 고딕"/>
+              </a:rPr>
+              <a:t>    같은 데이터를 색과 투명도만 바꿔 렌더 (파랑/빨강, alpha 0.4/0.15)</a:t>
+            </a:r>
+          </a:p>
+          <a:p>
+            <a:pPr algn="l"/>
+            <a:r>
+              <a:rPr sz="1350" b="1" i="0">
+                <a:solidFill>
+                  <a:srgbClr val="0F1E3D"/>
+                </a:solidFill>
+                <a:latin typeface="맑은 고딕"/>
+                <a:ea typeface="맑은 고딕"/>
+              </a:rPr>
+              <a:t>왜</a:t>
+            </a:r>
+          </a:p>
+          <a:p>
+            <a:pPr algn="l"/>
+            <a:r>
+              <a:rPr sz="1300">
+                <a:solidFill>
+                  <a:srgbClr val="1A1F2E"/>
+                </a:solidFill>
+                <a:latin typeface="맑은 고딕"/>
+                <a:ea typeface="맑은 고딕"/>
+              </a:rPr>
+              <a:t>    이상 패턴을 보는지, 색이나 대비 같은 쉬운 단서에 기대는지 확인</a:t>
+            </a:r>
+          </a:p>
+          <a:p>
+            <a:pPr algn="l"/>
+            <a:r>
+              <a:rPr sz="1350" b="1" i="0">
+                <a:solidFill>
+                  <a:srgbClr val="0F1E3D"/>
+                </a:solidFill>
+                <a:latin typeface="맑은 고딕"/>
+                <a:ea typeface="맑은 고딕"/>
+              </a:rPr>
+              <a:t>판단</a:t>
+            </a:r>
+          </a:p>
+          <a:p>
+            <a:pPr algn="l"/>
+            <a:r>
+              <a:rPr sz="1300">
+                <a:solidFill>
+                  <a:srgbClr val="1A1F2E"/>
+                </a:solidFill>
+                <a:latin typeface="맑은 고딕"/>
+                <a:ea typeface="맑은 고딕"/>
+              </a:rPr>
+              <a:t>    색을 바꿔도 판정이 유지되면 패턴을 학습한 것</a:t>
+            </a:r>
+          </a:p>
+        </p:txBody>
+      </p:sp>
+      <p:sp>
+        <p:nvSpPr>
+          <p:cNvPr id="11" name="TextBox 10"/>
+          <p:cNvSpPr txBox="1"/>
+          <p:nvPr/>
+        </p:nvSpPr>
+        <p:spPr>
+          <a:xfrm>
+            <a:off x="6309360" y="6053328"/>
+            <a:ext cx="5303520" cy="329184"/>
+          </a:xfrm>
+          <a:prstGeom prst="rect">
+            <a:avLst/>
+          </a:prstGeom>
+          <a:noFill/>
+        </p:spPr>
+        <p:txBody>
+          <a:bodyPr wrap="square" anchor="ctr" lIns="0" rIns="0" tIns="0" bIns="0">
+            <a:spAutoFit/>
+          </a:bodyPr>
+          <a:lstStyle/>
+          <a:p>
+            <a:pPr algn="ctr"/>
+            <a:r>
+              <a:rPr sz="1250" b="1">
+                <a:solidFill>
+                  <a:srgbClr val="0F1E3D"/>
+                </a:solidFill>
+                <a:latin typeface="맑은 고딕"/>
+                <a:ea typeface="맑은 고딕"/>
+              </a:rPr>
+              <a:t>색이 아니라 패턴을 학습했는지</a:t>
+            </a:r>
+          </a:p>
+        </p:txBody>
+      </p:sp>
+      <p:sp>
+        <p:nvSpPr>
+          <p:cNvPr id="12" name="TextBox 11"/>
+          <p:cNvSpPr txBox="1"/>
+          <p:nvPr/>
+        </p:nvSpPr>
+        <p:spPr>
+          <a:xfrm>
+            <a:off x="457200" y="6437376"/>
+            <a:ext cx="8229600" cy="292608"/>
+          </a:xfrm>
+          <a:prstGeom prst="rect">
+            <a:avLst/>
+          </a:prstGeom>
+          <a:noFill/>
+        </p:spPr>
+        <p:txBody>
+          <a:bodyPr wrap="square" anchor="ctr" lIns="0" rIns="0" tIns="0" bIns="0">
+            <a:spAutoFit/>
+          </a:bodyPr>
+          <a:lstStyle/>
+          <a:p>
+            <a:pPr algn="l"/>
+            <a:r>
+              <a:rPr sz="900">
+                <a:solidFill>
+                  <a:srgbClr val="6B7280"/>
+                </a:solidFill>
+                <a:latin typeface="맑은 고딕"/>
+                <a:ea typeface="맑은 고딕"/>
+              </a:rPr>
+              <a:t>최호길 | QIE Data Science | AI Specialist 인증</a:t>
+            </a:r>
+          </a:p>
+        </p:txBody>
+      </p:sp>
+      <p:sp>
+        <p:nvSpPr>
+          <p:cNvPr id="13" name="TextBox 12"/>
+          <p:cNvSpPr txBox="1"/>
+          <p:nvPr/>
+        </p:nvSpPr>
+        <p:spPr>
+          <a:xfrm>
+            <a:off x="10972800" y="6437376"/>
+            <a:ext cx="758952" cy="292608"/>
+          </a:xfrm>
+          <a:prstGeom prst="rect">
+            <a:avLst/>
+          </a:prstGeom>
+          <a:noFill/>
+        </p:spPr>
+        <p:txBody>
+          <a:bodyPr wrap="square" anchor="ctr" lIns="0" rIns="0" tIns="0" bIns="0">
+            <a:spAutoFit/>
+          </a:bodyPr>
+          <a:lstStyle/>
+          <a:p>
+            <a:pPr algn="r"/>
+            <a:r>
+              <a:rPr sz="900">
+                <a:solidFill>
+                  <a:srgbClr val="6B7280"/>
+                </a:solidFill>
+                <a:latin typeface="맑은 고딕"/>
+                <a:ea typeface="맑은 고딕"/>
+              </a:rPr>
+              <a:t>8</a:t>
             </a:r>
           </a:p>
         </p:txBody>

--- a/recommendation/presentation/발표_P3_데이터생성_최호길.pptx
+++ b/recommendation/presentation/발표_P3_데이터생성_최호길.pptx
@@ -12,7 +12,6 @@
     <p:sldId id="260" r:id="rId11"/>
     <p:sldId id="261" r:id="rId12"/>
     <p:sldId id="262" r:id="rId13"/>
-    <p:sldId id="263" r:id="rId14"/>
   </p:sldIdLst>
   <p:sldSz cx="12191695" cy="6858000" type="screen4x3"/>
   <p:notesSz cx="6858000" cy="9144000"/>
@@ -3250,7 +3249,7 @@
                 <a:latin typeface="맑은 고딕"/>
                 <a:ea typeface="맑은 고딕"/>
               </a:rPr>
-              <a:t>이상 유형별 검증 데이터가 없던 문제를, 현장에서 trend를 보던 판정 기준을 생성 규칙으로 옮겨 풀었습니다. 정상 baseline 위에 이상을 합성해 평가셋을 만들고 1차 gate로 확인했습니다</a:t>
+              <a:t>현장 계측 trend의 영역 구조와 노이즈, 이상 발생 방식을 domain knowledge로 코드화해 학습·평가 데이터를 만들고 1차 binary gate로 검증한 과제</a:t>
             </a:r>
           </a:p>
         </p:txBody>
@@ -4091,7 +4090,7 @@
                 <a:latin typeface="맑은 고딕"/>
                 <a:ea typeface="맑은 고딕"/>
               </a:rPr>
-              <a:t>없던 검증 데이터를 현장 판정 기준으로 만들었다</a:t>
+              <a:t>이상 유형별 라벨 부족을 도메인 규칙 generator로 해결</a:t>
             </a:r>
           </a:p>
         </p:txBody>
@@ -4171,7 +4170,7 @@
                 <a:latin typeface="맑은 고딕"/>
                 <a:ea typeface="맑은 고딕"/>
               </a:rPr>
-              <a:t>문제 — 이상 데이터가 거의 없다</a:t>
+              <a:t>문제 — 이상 유형별 라벨이 희소</a:t>
             </a:r>
           </a:p>
         </p:txBody>
@@ -4268,7 +4267,27 @@
                 <a:latin typeface="맑은 고딕"/>
                 <a:ea typeface="맑은 고딕"/>
               </a:rPr>
-              <a:t>정상 trend는 쌓여 있지만 avg / std / spike / drift / context 같은 이상은 드물게 나와, 유형별로 모아 둔 데이터가 거의 없습니다</a:t>
+              <a:t>실 계측 trend는 정상은 많지만 이상은 드물어, </a:t>
+            </a:r>
+            <a:r>
+              <a:rPr sz="1300" b="1">
+                <a:solidFill>
+                  <a:srgbClr val="0F1E3D"/>
+                </a:solidFill>
+                <a:latin typeface="맑은 고딕"/>
+                <a:ea typeface="맑은 고딕"/>
+              </a:rPr>
+              <a:t>avg / std / spike / drift / context</a:t>
+            </a:r>
+            <a:r>
+              <a:rPr sz="1300">
+                <a:solidFill>
+                  <a:srgbClr val="1A1F2E"/>
+                </a:solidFill>
+                <a:latin typeface="맑은 고딕"/>
+                <a:ea typeface="맑은 고딕"/>
+              </a:rPr>
+              <a:t> 같은 이상 유형별 라벨이 부족합니다</a:t>
             </a:r>
           </a:p>
           <a:p>
@@ -4298,7 +4317,7 @@
                 <a:latin typeface="맑은 고딕"/>
                 <a:ea typeface="맑은 고딕"/>
               </a:rPr>
-              <a:t>데이터가 없으니 모델을 학습시키기도, 잘 되는지 비교하기도 어려웠습니다</a:t>
+              <a:t>유형별 평가셋이 없으면 모델 학습도, 성능 비교도 어렵습니다</a:t>
             </a:r>
           </a:p>
           <a:p>
@@ -4328,7 +4347,7 @@
                 <a:latin typeface="맑은 고딕"/>
                 <a:ea typeface="맑은 고딕"/>
               </a:rPr>
-              <a:t>정답이 적어 정량 지표 자체가 잘 서지 않는 상황</a:t>
+              <a:t>정답 라벨이 적어 정량 metric 자체가 성립하기 힘든 상황</a:t>
             </a:r>
           </a:p>
         </p:txBody>
@@ -4616,7 +4635,7 @@
                 <a:latin typeface="맑은 고딕"/>
                 <a:ea typeface="맑은 고딕"/>
               </a:rPr>
-              <a:t>데이터 부재</a:t>
+              <a:t>라벨 희소</a:t>
             </a:r>
           </a:p>
         </p:txBody>
@@ -4652,7 +4671,7 @@
                 <a:latin typeface="맑은 고딕"/>
                 <a:ea typeface="맑은 고딕"/>
               </a:rPr>
-              <a:t>학습·비교 난항</a:t>
+              <a:t>정량 평가 난항</a:t>
             </a:r>
           </a:p>
         </p:txBody>
@@ -4732,7 +4751,7 @@
                 <a:latin typeface="맑은 고딕"/>
                 <a:ea typeface="맑은 고딕"/>
               </a:rPr>
-              <a:t>해법 — 판정 기준을 생성 규칙으로</a:t>
+              <a:t>해법 — domain knowledge generator</a:t>
             </a:r>
           </a:p>
         </p:txBody>
@@ -4829,7 +4848,27 @@
                 <a:latin typeface="맑은 고딕"/>
                 <a:ea typeface="맑은 고딕"/>
               </a:rPr>
-              <a:t>BBD / Overlay / CD를 담당하며 trend를 직접 보던 판정 기준을, 영역과 노이즈, 이상 발생 방식이라는 생성 규칙으로 옮겼습니다</a:t>
+              <a:t>BBD담당/Overlay담당/CD담당으로 쌓은 trend 분석 경험으로 계측의 </a:t>
+            </a:r>
+            <a:r>
+              <a:rPr sz="1300" b="1">
+                <a:solidFill>
+                  <a:srgbClr val="0F1E3D"/>
+                </a:solidFill>
+                <a:latin typeface="맑은 고딕"/>
+                <a:ea typeface="맑은 고딕"/>
+              </a:rPr>
+              <a:t>영역 구조, 노이즈, 이상 발생 방식</a:t>
+            </a:r>
+            <a:r>
+              <a:rPr sz="1300">
+                <a:solidFill>
+                  <a:srgbClr val="1A1F2E"/>
+                </a:solidFill>
+                <a:latin typeface="맑은 고딕"/>
+                <a:ea typeface="맑은 고딕"/>
+              </a:rPr>
+              <a:t>을 규칙으로 코드화했습니다</a:t>
             </a:r>
           </a:p>
           <a:p>
@@ -4859,7 +4898,27 @@
                 <a:latin typeface="맑은 고딕"/>
                 <a:ea typeface="맑은 고딕"/>
               </a:rPr>
-              <a:t>정상 baseline을 만들고 그 위에 이상을 합성해, 부족하던 검증 데이터를 직접 확보했습니다</a:t>
+              <a:t>정상 baseline을 만들고 그 위에 이상을 합성해 </a:t>
+            </a:r>
+            <a:r>
+              <a:rPr sz="1300" b="1">
+                <a:solidFill>
+                  <a:srgbClr val="0F1E3D"/>
+                </a:solidFill>
+                <a:latin typeface="맑은 고딕"/>
+                <a:ea typeface="맑은 고딕"/>
+              </a:rPr>
+              <a:t>검증 가능한 benchmark</a:t>
+            </a:r>
+            <a:r>
+              <a:rPr sz="1300">
+                <a:solidFill>
+                  <a:srgbClr val="1A1F2E"/>
+                </a:solidFill>
+                <a:latin typeface="맑은 고딕"/>
+                <a:ea typeface="맑은 고딕"/>
+              </a:rPr>
+              <a:t>를 확보했습니다</a:t>
             </a:r>
           </a:p>
           <a:p>
@@ -4889,7 +4948,7 @@
                 <a:latin typeface="맑은 고딕"/>
                 <a:ea typeface="맑은 고딕"/>
               </a:rPr>
-              <a:t>성능 수치가 아니라, 검증할 데이터를 만든 것이 이 과제의 핵심</a:t>
+              <a:t>영역(계측 밀도) + 노이즈(계측 변동) + 이상(불량 방식) 세 축을 규칙화</a:t>
             </a:r>
           </a:p>
         </p:txBody>
@@ -5015,7 +5074,7 @@
                 <a:latin typeface="맑은 고딕"/>
                 <a:ea typeface="맑은 고딕"/>
               </a:rPr>
-              <a:t>판정 기준</a:t>
+              <a:t>규칙 기반</a:t>
             </a:r>
           </a:p>
         </p:txBody>
@@ -5051,7 +5110,7 @@
                 <a:latin typeface="맑은 고딕"/>
                 <a:ea typeface="맑은 고딕"/>
               </a:rPr>
-              <a:t>현장 경험을 규칙화</a:t>
+              <a:t>영역+노이즈+이상</a:t>
             </a:r>
           </a:p>
         </p:txBody>
@@ -5177,7 +5236,7 @@
                 <a:latin typeface="맑은 고딕"/>
                 <a:ea typeface="맑은 고딕"/>
               </a:rPr>
-              <a:t>평가셋 확보</a:t>
+              <a:t>benchmark</a:t>
             </a:r>
           </a:p>
         </p:txBody>
@@ -5533,7 +5592,7 @@
                 <a:latin typeface="맑은 고딕"/>
                 <a:ea typeface="맑은 고딕"/>
               </a:rPr>
-              <a:t>한 chart를 여러 episode로 나눠 영역마다 측정 밀도를 다르게 주고, 신호 자체는 평탄하게 둔 채 변동은 노이즈로만 만들었습니다</a:t>
+              <a:t>한 chart를 12~25개 episode로 나눠 영역 밀도를 확률로 샘플링 — 실제 계측 분포를 모사하고, 신호는 평탄하게 두어 변동은 노이즈로만 만듦</a:t>
             </a:r>
           </a:p>
         </p:txBody>
@@ -5853,7 +5912,7 @@
                 <a:latin typeface="맑은 고딕"/>
                 <a:ea typeface="맑은 고딕"/>
               </a:rPr>
-              <a:t>chart 하나는 한 가지 노이즈만 씁니다. Gaussian은 기본 산포, Correlated는 설비 상태에 따라 천천히 흐르는 변동, Laplacian은 계측이 한 번씩 튀는 헌팅입니다</a:t>
+              <a:t>chart 하나는 한 가지 노이즈만 사용 — Gaussian(산포) / Correlated AR(설비 변동) / Laplacian(계측 헌팅)</a:t>
             </a:r>
           </a:p>
         </p:txBody>
@@ -6067,7 +6126,7 @@
                 <a:latin typeface="맑은 고딕"/>
                 <a:ea typeface="맑은 고딕"/>
               </a:rPr>
-              <a:t>이상 합성 5종 — 실제 불량이 나타나는 방식 (파랑 정상, 빨강 이상)</a:t>
+              <a:t>이상 합성 5종 — 실제 불량 발생 방식 (파랑 정상, 빨강 이상)</a:t>
             </a:r>
           </a:p>
         </p:txBody>
@@ -6173,7 +6232,7 @@
                 <a:latin typeface="맑은 고딕"/>
                 <a:ea typeface="맑은 고딕"/>
               </a:rPr>
-              <a:t>정상 baseline 오른쪽 끝에 이상을 주입하고 강도는 그 series의 산포에 맞춰 정합니다. context만 끝이 아니라 fleet 대비 전체가 벗어나는 형태입니다</a:t>
+              <a:t>정상 baseline 오른쪽 끝에 주입하고 강도는 baseline 산포에 비례 (context만 fleet 대비 전체 시계열이 이탈)</a:t>
             </a:r>
           </a:p>
         </p:txBody>
@@ -6387,7 +6446,7 @@
                 <a:latin typeface="맑은 고딕"/>
                 <a:ea typeface="맑은 고딕"/>
               </a:rPr>
-              <a:t>생성 흐름과 데이터 구성</a:t>
+              <a:t>생성 파이프라인과 데이터 구성</a:t>
             </a:r>
           </a:p>
         </p:txBody>
@@ -6437,7 +6496,7 @@
                 <a:latin typeface="맑은 고딕"/>
                 <a:ea typeface="맑은 고딕"/>
               </a:rPr>
-              <a:t>chart를 정의하고 episode를 이어 붙여 정상 baseline을 만든 뒤, 노이즈와 이상을 얹어 학습/평가 이미지로 렌더합니다</a:t>
+              <a:t>chart 정의부터 이미지 렌더까지 규칙 기반으로 생성하고, 이상 강도는 보이도록 floor 보정합니다</a:t>
             </a:r>
           </a:p>
         </p:txBody>
@@ -6519,7 +6578,7 @@
                 <a:latin typeface="맑은 고딕"/>
                 <a:ea typeface="맑은 고딕"/>
               </a:rPr>
-              <a:t>생성 흐름</a:t>
+              <a:t>생성 파이프라인</a:t>
             </a:r>
           </a:p>
           <a:p>
@@ -6584,7 +6643,7 @@
                 <a:latin typeface="맑은 고딕"/>
                 <a:ea typeface="맑은 고딕"/>
               </a:rPr>
-              <a:t>    12~25개를 이어 붙이며 영역 밀도를 샘플링</a:t>
+              <a:t>    12~25개, 영역 밀도 샘플링(밀집/희소/결핍)</a:t>
             </a:r>
           </a:p>
           <a:p>
@@ -6610,7 +6669,7 @@
                 <a:latin typeface="맑은 고딕"/>
                 <a:ea typeface="맑은 고딕"/>
               </a:rPr>
-              <a:t>    Gaussian / Correlated / Laplacian 중 하나</a:t>
+              <a:t>    Gaussian / Correlated / Laplacian 중 1종</a:t>
             </a:r>
           </a:p>
           <a:p>
@@ -6636,7 +6695,7 @@
                 <a:latin typeface="맑은 고딕"/>
                 <a:ea typeface="맑은 고딕"/>
               </a:rPr>
-              <a:t>    avg/std/spike/drift/context, 강도 보정</a:t>
+              <a:t>    avg/std/spike/drift/context (오른쪽 끝)</a:t>
             </a:r>
           </a:p>
           <a:p>
@@ -6662,7 +6721,7 @@
                 <a:latin typeface="맑은 고딕"/>
                 <a:ea typeface="맑은 고딕"/>
               </a:rPr>
-              <a:t>    정상/이상 trend 이미지로 출력</a:t>
+              <a:t>    강도 floor 보정 → 학습/평가 trend 이미지</a:t>
             </a:r>
           </a:p>
         </p:txBody>
@@ -6698,7 +6757,7 @@
                 <a:latin typeface="맑은 고딕"/>
                 <a:ea typeface="맑은 고딕"/>
               </a:rPr>
-              <a:t>현장 판정 기준을 그대로 옮긴 흐름</a:t>
+              <a:t>규칙 기반 생성 흐름</a:t>
             </a:r>
           </a:p>
         </p:txBody>
@@ -6832,7 +6891,7 @@
                 <a:latin typeface="맑은 고딕"/>
                 <a:ea typeface="맑은 고딕"/>
               </a:rPr>
-              <a:t>    별도 test 1,500 (이상 5종 고르게)</a:t>
+              <a:t>    별도 test 1,500 (이상 5종 stratified)</a:t>
             </a:r>
           </a:p>
           <a:p>
@@ -6858,7 +6917,7 @@
                 <a:latin typeface="맑은 고딕"/>
                 <a:ea typeface="맑은 고딕"/>
               </a:rPr>
-              <a:t>    test는 이상 강도를 0.8배로 낮춰</a:t>
+              <a:t>    test/val은 이상 강도를 0.8배로 낮춰</a:t>
             </a:r>
           </a:p>
           <a:p>
@@ -6871,7 +6930,7 @@
                 <a:latin typeface="맑은 고딕"/>
                 <a:ea typeface="맑은 고딕"/>
               </a:rPr>
-              <a:t>    일부러 더 어렵게 만들었습니다</a:t>
+              <a:t>    더 어려운 평가셋 구성</a:t>
             </a:r>
           </a:p>
           <a:p>
@@ -6897,7 +6956,7 @@
                 <a:latin typeface="맑은 고딕"/>
                 <a:ea typeface="맑은 고딕"/>
               </a:rPr>
-              <a:t>    정상은 fleet 중심에서 벗어나지 않게 둡니다</a:t>
+              <a:t>    정상은 fleet 중심에서 벗어나지 않게 강제</a:t>
             </a:r>
           </a:p>
         </p:txBody>
@@ -7111,7 +7170,7 @@
                 <a:latin typeface="맑은 고딕"/>
                 <a:ea typeface="맑은 고딕"/>
               </a:rPr>
-              <a:t>P3 | 생성 데이터 검증</a:t>
+              <a:t>P3 | 1차 binary gate (PoC)</a:t>
             </a:r>
           </a:p>
         </p:txBody>
@@ -7147,7 +7206,7 @@
                 <a:latin typeface="맑은 고딕"/>
                 <a:ea typeface="맑은 고딕"/>
               </a:rPr>
-              <a:t>만든 데이터로 1차 gate가 학습되는지 확인</a:t>
+              <a:t>생성 데이터로 정상/이상 1차 판정 검증</a:t>
             </a:r>
           </a:p>
         </p:txBody>
@@ -7227,7 +7286,7 @@
                 <a:latin typeface="맑은 고딕"/>
                 <a:ea typeface="맑은 고딕"/>
               </a:rPr>
-              <a:t>무엇을 확인했나</a:t>
+              <a:t>모델 — 1차 binary gate</a:t>
             </a:r>
           </a:p>
         </p:txBody>
@@ -7324,7 +7383,47 @@
                 <a:latin typeface="맑은 고딕"/>
                 <a:ea typeface="맑은 고딕"/>
               </a:rPr>
-              <a:t>생성한 데이터로 정상/이상을 1차로 거르는 gate를 학습시켜, 이 데이터가 실제로 쓸 만한지 봤습니다</a:t>
+              <a:t>trend 이미지를 </a:t>
+            </a:r>
+            <a:r>
+              <a:rPr sz="1300" b="1">
+                <a:solidFill>
+                  <a:srgbClr val="0F1E3D"/>
+                </a:solidFill>
+                <a:latin typeface="맑은 고딕"/>
+                <a:ea typeface="맑은 고딕"/>
+              </a:rPr>
+              <a:t>ConvNeXtV2-Tiny</a:t>
+            </a:r>
+            <a:r>
+              <a:rPr sz="1300">
+                <a:solidFill>
+                  <a:srgbClr val="1A1F2E"/>
+                </a:solidFill>
+                <a:latin typeface="맑은 고딕"/>
+                <a:ea typeface="맑은 고딕"/>
+              </a:rPr>
+              <a:t>로 정상/이상 2분류하며, </a:t>
+            </a:r>
+            <a:r>
+              <a:rPr sz="1300" b="1">
+                <a:solidFill>
+                  <a:srgbClr val="0F1E3D"/>
+                </a:solidFill>
+                <a:latin typeface="맑은 고딕"/>
+                <a:ea typeface="맑은 고딕"/>
+              </a:rPr>
+              <a:t>놓침(FN) 최소화</a:t>
+            </a:r>
+            <a:r>
+              <a:rPr sz="1300">
+                <a:solidFill>
+                  <a:srgbClr val="1A1F2E"/>
+                </a:solidFill>
+                <a:latin typeface="맑은 고딕"/>
+                <a:ea typeface="맑은 고딕"/>
+              </a:rPr>
+              <a:t>가 목표입니다</a:t>
             </a:r>
           </a:p>
           <a:p>
@@ -7354,7 +7453,7 @@
                 <a:latin typeface="맑은 고딕"/>
                 <a:ea typeface="맑은 고딕"/>
               </a:rPr>
-              <a:t>ConvNeXtV2-Tiny에 Focal loss로 학습하고, 놓치는 쪽을 줄이려고 normal threshold를 높였습니다</a:t>
+              <a:t>Focal loss + EMA로 학습하고, normal threshold를 올려 FN을 더 줄입니다</a:t>
             </a:r>
           </a:p>
           <a:p>
@@ -7384,7 +7483,7 @@
                 <a:latin typeface="맑은 고딕"/>
                 <a:ea typeface="맑은 고딕"/>
               </a:rPr>
-              <a:t>이상이 걸리면 2차에서 유형(avg/std/spike/drift/context)을 나눠 봅니다</a:t>
+              <a:t>이상이 잡히면 2차에서 유형(avg/std/spike/drift/context) 진단</a:t>
             </a:r>
           </a:p>
         </p:txBody>
@@ -7510,7 +7609,7 @@
                 <a:latin typeface="맑은 고딕"/>
                 <a:ea typeface="맑은 고딕"/>
               </a:rPr>
-              <a:t>1차 gate</a:t>
+              <a:t>2-stage</a:t>
             </a:r>
           </a:p>
         </p:txBody>
@@ -7546,7 +7645,7 @@
                 <a:latin typeface="맑은 고딕"/>
                 <a:ea typeface="맑은 고딕"/>
               </a:rPr>
-              <a:t>정상/이상 선별</a:t>
+              <a:t>binary gate → 유형 진단</a:t>
             </a:r>
           </a:p>
         </p:txBody>
@@ -7672,7 +7771,7 @@
                 <a:latin typeface="맑은 고딕"/>
                 <a:ea typeface="맑은 고딕"/>
               </a:rPr>
-              <a:t>2-stage</a:t>
+              <a:t>ConvNeXtV2</a:t>
             </a:r>
           </a:p>
         </p:txBody>
@@ -7708,7 +7807,7 @@
                 <a:latin typeface="맑은 고딕"/>
                 <a:ea typeface="맑은 고딕"/>
               </a:rPr>
-              <a:t>이후 유형 진단</a:t>
+              <a:t>Tiny backbone</a:t>
             </a:r>
           </a:p>
         </p:txBody>
@@ -7788,7 +7887,7 @@
                 <a:latin typeface="맑은 고딕"/>
                 <a:ea typeface="맑은 고딕"/>
               </a:rPr>
-              <a:t>결과 — 데이터가 학습된다</a:t>
+              <a:t>성과 — 생성셋 검증(PoC)</a:t>
             </a:r>
           </a:p>
         </p:txBody>
@@ -7885,7 +7984,47 @@
                 <a:latin typeface="맑은 고딕"/>
                 <a:ea typeface="맑은 고딕"/>
               </a:rPr>
-              <a:t>test 1,500에서 정상과 이상이 깔끔하게 갈렸습니다 (F1 0.9967, 이상 recall 0.9987, NT 0.9)</a:t>
+              <a:t>test 1,500에서 </a:t>
+            </a:r>
+            <a:r>
+              <a:rPr sz="1300" b="1">
+                <a:solidFill>
+                  <a:srgbClr val="0F1E3D"/>
+                </a:solidFill>
+                <a:latin typeface="맑은 고딕"/>
+                <a:ea typeface="맑은 고딕"/>
+              </a:rPr>
+              <a:t>binary F1 0.9967</a:t>
+            </a:r>
+            <a:r>
+              <a:rPr sz="1300">
+                <a:solidFill>
+                  <a:srgbClr val="1A1F2E"/>
+                </a:solidFill>
+                <a:latin typeface="맑은 고딕"/>
+                <a:ea typeface="맑은 고딕"/>
+              </a:rPr>
+              <a:t>, </a:t>
+            </a:r>
+            <a:r>
+              <a:rPr sz="1300" b="1">
+                <a:solidFill>
+                  <a:srgbClr val="0F1E3D"/>
+                </a:solidFill>
+                <a:latin typeface="맑은 고딕"/>
+                <a:ea typeface="맑은 고딕"/>
+              </a:rPr>
+              <a:t>이상 recall 0.9987</a:t>
+            </a:r>
+            <a:r>
+              <a:rPr sz="1300">
+                <a:solidFill>
+                  <a:srgbClr val="1A1F2E"/>
+                </a:solidFill>
+                <a:latin typeface="맑은 고딕"/>
+                <a:ea typeface="맑은 고딕"/>
+              </a:rPr>
+              <a:t>(normal threshold 0.9)</a:t>
             </a:r>
           </a:p>
           <a:p>
@@ -7915,7 +8054,7 @@
                 <a:latin typeface="맑은 고딕"/>
                 <a:ea typeface="맑은 고딕"/>
               </a:rPr>
-              <a:t>정상 750 중 4건 오탐, 이상 750 중 1건 놓침 정도였습니다</a:t>
+              <a:t>정상 750 중 오탐 4건, 이상 750 중 놓침 1건 수준</a:t>
             </a:r>
           </a:p>
           <a:p>
@@ -7945,7 +8084,7 @@
                 <a:latin typeface="맑은 고딕"/>
                 <a:ea typeface="맑은 고딕"/>
               </a:rPr>
-              <a:t>이 수치 자체가 목적이 아니라, 생성 데이터가 학습 가능하다는 신호입니다</a:t>
+              <a:t>FN을 유형별로 분해해 데이터 난이도와 threshold로 피드백</a:t>
             </a:r>
           </a:p>
         </p:txBody>
@@ -8071,7 +8210,7 @@
                 <a:latin typeface="맑은 고딕"/>
                 <a:ea typeface="맑은 고딕"/>
               </a:rPr>
-              <a:t>학습 가능</a:t>
+              <a:t>F1 0.9967</a:t>
             </a:r>
           </a:p>
         </p:txBody>
@@ -8107,7 +8246,7 @@
                 <a:latin typeface="맑은 고딕"/>
                 <a:ea typeface="맑은 고딕"/>
               </a:rPr>
-              <a:t>생성 데이터로</a:t>
+              <a:t>binary gate</a:t>
             </a:r>
           </a:p>
         </p:txBody>
@@ -8233,7 +8372,7 @@
                 <a:latin typeface="맑은 고딕"/>
                 <a:ea typeface="맑은 고딕"/>
               </a:rPr>
-              <a:t>F1 0.9967</a:t>
+              <a:t>recall 0.9987</a:t>
             </a:r>
           </a:p>
         </p:txBody>
@@ -8269,7 +8408,7 @@
                 <a:latin typeface="맑은 고딕"/>
                 <a:ea typeface="맑은 고딕"/>
               </a:rPr>
-              <a:t>1차 gate (PoC)</a:t>
+              <a:t>abnormal</a:t>
             </a:r>
           </a:p>
         </p:txBody>
@@ -8342,688 +8481,6 @@
                 <a:ea typeface="맑은 고딕"/>
               </a:rPr>
               <a:t>7</a:t>
-            </a:r>
-          </a:p>
-        </p:txBody>
-      </p:sp>
-    </p:spTree>
-  </p:cSld>
-  <p:clrMapOvr>
-    <a:masterClrMapping/>
-  </p:clrMapOvr>
-</p:sld>
-</file>
-
-<file path=ppt/slides/slide8.xml><?xml version="1.0" encoding="utf-8"?>
-<p:sld xmlns:a="http://schemas.openxmlformats.org/drawingml/2006/main" xmlns:p="http://schemas.openxmlformats.org/presentationml/2006/main" xmlns:r="http://schemas.openxmlformats.org/officeDocument/2006/relationships">
-  <p:cSld>
-    <p:bg>
-      <p:bgPr>
-        <a:solidFill>
-          <a:srgbClr val="FFFFFF"/>
-        </a:solidFill>
-        <a:effectLst/>
-      </p:bgPr>
-    </p:bg>
-    <p:spTree>
-      <p:nvGrpSpPr>
-        <p:cNvPr id="1" name=""/>
-        <p:cNvGrpSpPr/>
-        <p:nvPr/>
-      </p:nvGrpSpPr>
-      <p:grpSpPr/>
-      <p:sp>
-        <p:nvSpPr>
-          <p:cNvPr id="2" name="Rectangle 1"/>
-          <p:cNvSpPr/>
-          <p:nvPr/>
-        </p:nvSpPr>
-        <p:spPr>
-          <a:xfrm>
-            <a:off x="640080" y="502920"/>
-            <a:ext cx="123444" cy="768096"/>
-          </a:xfrm>
-          <a:prstGeom prst="rect">
-            <a:avLst/>
-          </a:prstGeom>
-          <a:solidFill>
-            <a:srgbClr val="CFD4DB"/>
-          </a:solidFill>
-          <a:ln>
-            <a:noFill/>
-          </a:ln>
-          <a:effectLst/>
-        </p:spPr>
-        <p:style>
-          <a:lnRef idx="1">
-            <a:schemeClr val="accent1"/>
-          </a:lnRef>
-          <a:fillRef idx="3">
-            <a:schemeClr val="accent1"/>
-          </a:fillRef>
-          <a:effectRef idx="2">
-            <a:schemeClr val="accent1"/>
-          </a:effectRef>
-          <a:fontRef idx="minor">
-            <a:schemeClr val="lt1"/>
-          </a:fontRef>
-        </p:style>
-        <p:txBody>
-          <a:bodyPr rtlCol="0" anchor="ctr"/>
-          <a:lstStyle/>
-          <a:p>
-            <a:pPr algn="ctr"/>
-          </a:p>
-        </p:txBody>
-      </p:sp>
-      <p:sp>
-        <p:nvSpPr>
-          <p:cNvPr id="3" name="TextBox 2"/>
-          <p:cNvSpPr txBox="1"/>
-          <p:nvPr/>
-        </p:nvSpPr>
-        <p:spPr>
-          <a:xfrm>
-            <a:off x="932688" y="448056"/>
-            <a:ext cx="10881360" cy="256032"/>
-          </a:xfrm>
-          <a:prstGeom prst="rect">
-            <a:avLst/>
-          </a:prstGeom>
-          <a:noFill/>
-        </p:spPr>
-        <p:txBody>
-          <a:bodyPr wrap="square" anchor="t" lIns="0" rIns="0" tIns="0" bIns="0">
-            <a:spAutoFit/>
-          </a:bodyPr>
-          <a:lstStyle/>
-          <a:p>
-            <a:pPr algn="l"/>
-            <a:r>
-              <a:rPr sz="1300" b="1">
-                <a:solidFill>
-                  <a:srgbClr val="8A929E"/>
-                </a:solidFill>
-                <a:latin typeface="맑은 고딕"/>
-                <a:ea typeface="맑은 고딕"/>
-              </a:rPr>
-              <a:t>P3 | robustness 점검</a:t>
-            </a:r>
-          </a:p>
-        </p:txBody>
-      </p:sp>
-      <p:sp>
-        <p:nvSpPr>
-          <p:cNvPr id="4" name="TextBox 3"/>
-          <p:cNvSpPr txBox="1"/>
-          <p:nvPr/>
-        </p:nvSpPr>
-        <p:spPr>
-          <a:xfrm>
-            <a:off x="932688" y="704088"/>
-            <a:ext cx="10881360" cy="603504"/>
-          </a:xfrm>
-          <a:prstGeom prst="rect">
-            <a:avLst/>
-          </a:prstGeom>
-          <a:noFill/>
-        </p:spPr>
-        <p:txBody>
-          <a:bodyPr wrap="square" anchor="t" lIns="0" rIns="0" tIns="0" bIns="0">
-            <a:spAutoFit/>
-          </a:bodyPr>
-          <a:lstStyle/>
-          <a:p>
-            <a:pPr algn="l"/>
-            <a:r>
-              <a:rPr sz="3100" b="1">
-                <a:solidFill>
-                  <a:srgbClr val="0F1E3D"/>
-                </a:solidFill>
-                <a:latin typeface="맑은 고딕"/>
-                <a:ea typeface="맑은 고딕"/>
-              </a:rPr>
-              <a:t>모델이 색이나 노이즈가 아니라 실제 패턴을 보게</a:t>
-            </a:r>
-          </a:p>
-        </p:txBody>
-      </p:sp>
-      <p:sp>
-        <p:nvSpPr>
-          <p:cNvPr id="5" name="TextBox 4"/>
-          <p:cNvSpPr txBox="1"/>
-          <p:nvPr/>
-        </p:nvSpPr>
-        <p:spPr>
-          <a:xfrm>
-            <a:off x="640080" y="1828800"/>
-            <a:ext cx="10972800" cy="685800"/>
-          </a:xfrm>
-          <a:prstGeom prst="rect">
-            <a:avLst/>
-          </a:prstGeom>
-          <a:noFill/>
-        </p:spPr>
-        <p:txBody>
-          <a:bodyPr wrap="square" anchor="t" lIns="0" rIns="0" tIns="0" bIns="0">
-            <a:spAutoFit/>
-          </a:bodyPr>
-          <a:lstStyle/>
-          <a:p>
-            <a:pPr marL="274320" indent="-274320">
-              <a:spcAft>
-                <a:spcPts val="500"/>
-              </a:spcAft>
-            </a:pPr>
-            <a:r>
-              <a:rPr sz="1400" b="0">
-                <a:solidFill>
-                  <a:srgbClr val="5B9BD5"/>
-                </a:solidFill>
-                <a:latin typeface="맑은 고딕"/>
-                <a:ea typeface="맑은 고딕"/>
-              </a:rPr>
-              <a:t>●  </a:t>
-            </a:r>
-            <a:r>
-              <a:rPr sz="1400">
-                <a:solidFill>
-                  <a:srgbClr val="1A1F2E"/>
-                </a:solidFill>
-                <a:latin typeface="맑은 고딕"/>
-                <a:ea typeface="맑은 고딕"/>
-              </a:rPr>
-              <a:t>PoC 수치보다, 모델이 trend의 진짜 모양을 보고 판단하는지가 더 중요했습니다. 두 가지로 점검했습니다</a:t>
-            </a:r>
-          </a:p>
-        </p:txBody>
-      </p:sp>
-      <p:sp>
-        <p:nvSpPr>
-          <p:cNvPr id="6" name="Rectangle 5"/>
-          <p:cNvSpPr/>
-          <p:nvPr/>
-        </p:nvSpPr>
-        <p:spPr>
-          <a:xfrm>
-            <a:off x="640080" y="2642616"/>
-            <a:ext cx="5303520" cy="3383280"/>
-          </a:xfrm>
-          <a:prstGeom prst="rect">
-            <a:avLst/>
-          </a:prstGeom>
-          <a:solidFill>
-            <a:srgbClr val="FFFFFF"/>
-          </a:solidFill>
-          <a:ln w="15875">
-            <a:solidFill>
-              <a:srgbClr val="333740"/>
-            </a:solidFill>
-          </a:ln>
-          <a:effectLst/>
-        </p:spPr>
-        <p:style>
-          <a:lnRef idx="1">
-            <a:schemeClr val="accent1"/>
-          </a:lnRef>
-          <a:fillRef idx="3">
-            <a:schemeClr val="accent1"/>
-          </a:fillRef>
-          <a:effectRef idx="2">
-            <a:schemeClr val="accent1"/>
-          </a:effectRef>
-          <a:fontRef idx="minor">
-            <a:schemeClr val="lt1"/>
-          </a:fontRef>
-        </p:style>
-        <p:txBody>
-          <a:bodyPr rtlCol="0" anchor="ctr"/>
-          <a:lstStyle/>
-          <a:p>
-            <a:pPr algn="ctr"/>
-          </a:p>
-        </p:txBody>
-      </p:sp>
-      <p:sp>
-        <p:nvSpPr>
-          <p:cNvPr id="7" name="TextBox 6"/>
-          <p:cNvSpPr txBox="1"/>
-          <p:nvPr/>
-        </p:nvSpPr>
-        <p:spPr>
-          <a:xfrm>
-            <a:off x="914400" y="2770632"/>
-            <a:ext cx="4809744" cy="3127248"/>
-          </a:xfrm>
-          <a:prstGeom prst="rect">
-            <a:avLst/>
-          </a:prstGeom>
-          <a:noFill/>
-        </p:spPr>
-        <p:txBody>
-          <a:bodyPr wrap="square" anchor="ctr" lIns="0" rIns="0" tIns="0" bIns="0">
-            <a:spAutoFit/>
-          </a:bodyPr>
-          <a:lstStyle/>
-          <a:p>
-            <a:pPr algn="l"/>
-            <a:r>
-              <a:rPr sz="1450" b="1">
-                <a:solidFill>
-                  <a:srgbClr val="0F1E3D"/>
-                </a:solidFill>
-                <a:latin typeface="맑은 고딕"/>
-                <a:ea typeface="맑은 고딕"/>
-              </a:rPr>
-              <a:t>Smoothing window (median)</a:t>
-            </a:r>
-          </a:p>
-          <a:p>
-            <a:pPr algn="l"/>
-            <a:r>
-              <a:rPr sz="500">
-                <a:solidFill>
-                  <a:srgbClr val="FFFFFF"/>
-                </a:solidFill>
-                <a:latin typeface="맑은 고딕"/>
-                <a:ea typeface="맑은 고딕"/>
-              </a:rPr>
-              <a:t> </a:t>
-            </a:r>
-          </a:p>
-          <a:p>
-            <a:pPr algn="l"/>
-            <a:r>
-              <a:rPr sz="1350" b="1" i="0">
-                <a:solidFill>
-                  <a:srgbClr val="0F1E3D"/>
-                </a:solidFill>
-                <a:latin typeface="맑은 고딕"/>
-                <a:ea typeface="맑은 고딕"/>
-              </a:rPr>
-              <a:t>무엇</a:t>
-            </a:r>
-          </a:p>
-          <a:p>
-            <a:pPr algn="l"/>
-            <a:r>
-              <a:rPr sz="1300">
-                <a:solidFill>
-                  <a:srgbClr val="1A1F2E"/>
-                </a:solidFill>
-                <a:latin typeface="맑은 고딕"/>
-                <a:ea typeface="맑은 고딕"/>
-              </a:rPr>
-              <a:t>    trend를 window 크기(1=원본 / 3 / 5)로 median 평활</a:t>
-            </a:r>
-          </a:p>
-          <a:p>
-            <a:pPr algn="l"/>
-            <a:r>
-              <a:rPr sz="1350" b="1" i="0">
-                <a:solidFill>
-                  <a:srgbClr val="0F1E3D"/>
-                </a:solidFill>
-                <a:latin typeface="맑은 고딕"/>
-                <a:ea typeface="맑은 고딕"/>
-              </a:rPr>
-              <a:t>왜</a:t>
-            </a:r>
-          </a:p>
-          <a:p>
-            <a:pPr algn="l"/>
-            <a:r>
-              <a:rPr sz="1300">
-                <a:solidFill>
-                  <a:srgbClr val="1A1F2E"/>
-                </a:solidFill>
-                <a:latin typeface="맑은 고딕"/>
-                <a:ea typeface="맑은 고딕"/>
-              </a:rPr>
-              <a:t>    점마다 튀는 노이즈에 휘둘리지 않고 추세를 보게 하려고</a:t>
-            </a:r>
-          </a:p>
-          <a:p>
-            <a:pPr algn="l"/>
-            <a:r>
-              <a:rPr sz="1350" b="1" i="0">
-                <a:solidFill>
-                  <a:srgbClr val="0F1E3D"/>
-                </a:solidFill>
-                <a:latin typeface="맑은 고딕"/>
-                <a:ea typeface="맑은 고딕"/>
-              </a:rPr>
-              <a:t>현재</a:t>
-            </a:r>
-          </a:p>
-          <a:p>
-            <a:pPr algn="l"/>
-            <a:r>
-              <a:rPr sz="1300">
-                <a:solidFill>
-                  <a:srgbClr val="1A1F2E"/>
-                </a:solidFill>
-                <a:latin typeface="맑은 고딕"/>
-                <a:ea typeface="맑은 고딕"/>
-              </a:rPr>
-              <a:t>    baseline은 원본 그대로, 3/5-median과 비교 중</a:t>
-            </a:r>
-          </a:p>
-        </p:txBody>
-      </p:sp>
-      <p:sp>
-        <p:nvSpPr>
-          <p:cNvPr id="8" name="TextBox 7"/>
-          <p:cNvSpPr txBox="1"/>
-          <p:nvPr/>
-        </p:nvSpPr>
-        <p:spPr>
-          <a:xfrm>
-            <a:off x="640080" y="6053328"/>
-            <a:ext cx="5303520" cy="329184"/>
-          </a:xfrm>
-          <a:prstGeom prst="rect">
-            <a:avLst/>
-          </a:prstGeom>
-          <a:noFill/>
-        </p:spPr>
-        <p:txBody>
-          <a:bodyPr wrap="square" anchor="ctr" lIns="0" rIns="0" tIns="0" bIns="0">
-            <a:spAutoFit/>
-          </a:bodyPr>
-          <a:lstStyle/>
-          <a:p>
-            <a:pPr algn="ctr"/>
-            <a:r>
-              <a:rPr sz="1250" b="1">
-                <a:solidFill>
-                  <a:srgbClr val="0F1E3D"/>
-                </a:solidFill>
-                <a:latin typeface="맑은 고딕"/>
-                <a:ea typeface="맑은 고딕"/>
-              </a:rPr>
-              <a:t>노이즈에 덜 민감하게</a:t>
-            </a:r>
-          </a:p>
-        </p:txBody>
-      </p:sp>
-      <p:sp>
-        <p:nvSpPr>
-          <p:cNvPr id="9" name="Rectangle 8"/>
-          <p:cNvSpPr/>
-          <p:nvPr/>
-        </p:nvSpPr>
-        <p:spPr>
-          <a:xfrm>
-            <a:off x="6309360" y="2642616"/>
-            <a:ext cx="5303520" cy="3383280"/>
-          </a:xfrm>
-          <a:prstGeom prst="rect">
-            <a:avLst/>
-          </a:prstGeom>
-          <a:solidFill>
-            <a:srgbClr val="FFFFFF"/>
-          </a:solidFill>
-          <a:ln w="15875">
-            <a:solidFill>
-              <a:srgbClr val="333740"/>
-            </a:solidFill>
-          </a:ln>
-          <a:effectLst/>
-        </p:spPr>
-        <p:style>
-          <a:lnRef idx="1">
-            <a:schemeClr val="accent1"/>
-          </a:lnRef>
-          <a:fillRef idx="3">
-            <a:schemeClr val="accent1"/>
-          </a:fillRef>
-          <a:effectRef idx="2">
-            <a:schemeClr val="accent1"/>
-          </a:effectRef>
-          <a:fontRef idx="minor">
-            <a:schemeClr val="lt1"/>
-          </a:fontRef>
-        </p:style>
-        <p:txBody>
-          <a:bodyPr rtlCol="0" anchor="ctr"/>
-          <a:lstStyle/>
-          <a:p>
-            <a:pPr algn="ctr"/>
-          </a:p>
-        </p:txBody>
-      </p:sp>
-      <p:sp>
-        <p:nvSpPr>
-          <p:cNvPr id="10" name="TextBox 9"/>
-          <p:cNvSpPr txBox="1"/>
-          <p:nvPr/>
-        </p:nvSpPr>
-        <p:spPr>
-          <a:xfrm>
-            <a:off x="6583680" y="2770632"/>
-            <a:ext cx="4809744" cy="3127248"/>
-          </a:xfrm>
-          <a:prstGeom prst="rect">
-            <a:avLst/>
-          </a:prstGeom>
-          <a:noFill/>
-        </p:spPr>
-        <p:txBody>
-          <a:bodyPr wrap="square" anchor="ctr" lIns="0" rIns="0" tIns="0" bIns="0">
-            <a:spAutoFit/>
-          </a:bodyPr>
-          <a:lstStyle/>
-          <a:p>
-            <a:pPr algn="l"/>
-            <a:r>
-              <a:rPr sz="1450" b="1">
-                <a:solidFill>
-                  <a:srgbClr val="0F1E3D"/>
-                </a:solidFill>
-                <a:latin typeface="맑은 고딕"/>
-                <a:ea typeface="맑은 고딕"/>
-              </a:rPr>
-              <a:t>Color / alpha shortcut 점검</a:t>
-            </a:r>
-          </a:p>
-          <a:p>
-            <a:pPr algn="l"/>
-            <a:r>
-              <a:rPr sz="500">
-                <a:solidFill>
-                  <a:srgbClr val="FFFFFF"/>
-                </a:solidFill>
-                <a:latin typeface="맑은 고딕"/>
-                <a:ea typeface="맑은 고딕"/>
-              </a:rPr>
-              <a:t> </a:t>
-            </a:r>
-          </a:p>
-          <a:p>
-            <a:pPr algn="l"/>
-            <a:r>
-              <a:rPr sz="1350" b="1" i="0">
-                <a:solidFill>
-                  <a:srgbClr val="0F1E3D"/>
-                </a:solidFill>
-                <a:latin typeface="맑은 고딕"/>
-                <a:ea typeface="맑은 고딕"/>
-              </a:rPr>
-              <a:t>무엇</a:t>
-            </a:r>
-          </a:p>
-          <a:p>
-            <a:pPr algn="l"/>
-            <a:r>
-              <a:rPr sz="1300">
-                <a:solidFill>
-                  <a:srgbClr val="1A1F2E"/>
-                </a:solidFill>
-                <a:latin typeface="맑은 고딕"/>
-                <a:ea typeface="맑은 고딕"/>
-              </a:rPr>
-              <a:t>    같은 데이터를 색과 투명도만 바꿔 렌더 (파랑/빨강, alpha 0.4/0.15)</a:t>
-            </a:r>
-          </a:p>
-          <a:p>
-            <a:pPr algn="l"/>
-            <a:r>
-              <a:rPr sz="1350" b="1" i="0">
-                <a:solidFill>
-                  <a:srgbClr val="0F1E3D"/>
-                </a:solidFill>
-                <a:latin typeface="맑은 고딕"/>
-                <a:ea typeface="맑은 고딕"/>
-              </a:rPr>
-              <a:t>왜</a:t>
-            </a:r>
-          </a:p>
-          <a:p>
-            <a:pPr algn="l"/>
-            <a:r>
-              <a:rPr sz="1300">
-                <a:solidFill>
-                  <a:srgbClr val="1A1F2E"/>
-                </a:solidFill>
-                <a:latin typeface="맑은 고딕"/>
-                <a:ea typeface="맑은 고딕"/>
-              </a:rPr>
-              <a:t>    이상 패턴을 보는지, 색이나 대비 같은 쉬운 단서에 기대는지 확인</a:t>
-            </a:r>
-          </a:p>
-          <a:p>
-            <a:pPr algn="l"/>
-            <a:r>
-              <a:rPr sz="1350" b="1" i="0">
-                <a:solidFill>
-                  <a:srgbClr val="0F1E3D"/>
-                </a:solidFill>
-                <a:latin typeface="맑은 고딕"/>
-                <a:ea typeface="맑은 고딕"/>
-              </a:rPr>
-              <a:t>판단</a:t>
-            </a:r>
-          </a:p>
-          <a:p>
-            <a:pPr algn="l"/>
-            <a:r>
-              <a:rPr sz="1300">
-                <a:solidFill>
-                  <a:srgbClr val="1A1F2E"/>
-                </a:solidFill>
-                <a:latin typeface="맑은 고딕"/>
-                <a:ea typeface="맑은 고딕"/>
-              </a:rPr>
-              <a:t>    색을 바꿔도 판정이 유지되면 패턴을 학습한 것</a:t>
-            </a:r>
-          </a:p>
-        </p:txBody>
-      </p:sp>
-      <p:sp>
-        <p:nvSpPr>
-          <p:cNvPr id="11" name="TextBox 10"/>
-          <p:cNvSpPr txBox="1"/>
-          <p:nvPr/>
-        </p:nvSpPr>
-        <p:spPr>
-          <a:xfrm>
-            <a:off x="6309360" y="6053328"/>
-            <a:ext cx="5303520" cy="329184"/>
-          </a:xfrm>
-          <a:prstGeom prst="rect">
-            <a:avLst/>
-          </a:prstGeom>
-          <a:noFill/>
-        </p:spPr>
-        <p:txBody>
-          <a:bodyPr wrap="square" anchor="ctr" lIns="0" rIns="0" tIns="0" bIns="0">
-            <a:spAutoFit/>
-          </a:bodyPr>
-          <a:lstStyle/>
-          <a:p>
-            <a:pPr algn="ctr"/>
-            <a:r>
-              <a:rPr sz="1250" b="1">
-                <a:solidFill>
-                  <a:srgbClr val="0F1E3D"/>
-                </a:solidFill>
-                <a:latin typeface="맑은 고딕"/>
-                <a:ea typeface="맑은 고딕"/>
-              </a:rPr>
-              <a:t>색이 아니라 패턴을 학습했는지</a:t>
-            </a:r>
-          </a:p>
-        </p:txBody>
-      </p:sp>
-      <p:sp>
-        <p:nvSpPr>
-          <p:cNvPr id="12" name="TextBox 11"/>
-          <p:cNvSpPr txBox="1"/>
-          <p:nvPr/>
-        </p:nvSpPr>
-        <p:spPr>
-          <a:xfrm>
-            <a:off x="457200" y="6437376"/>
-            <a:ext cx="8229600" cy="292608"/>
-          </a:xfrm>
-          <a:prstGeom prst="rect">
-            <a:avLst/>
-          </a:prstGeom>
-          <a:noFill/>
-        </p:spPr>
-        <p:txBody>
-          <a:bodyPr wrap="square" anchor="ctr" lIns="0" rIns="0" tIns="0" bIns="0">
-            <a:spAutoFit/>
-          </a:bodyPr>
-          <a:lstStyle/>
-          <a:p>
-            <a:pPr algn="l"/>
-            <a:r>
-              <a:rPr sz="900">
-                <a:solidFill>
-                  <a:srgbClr val="6B7280"/>
-                </a:solidFill>
-                <a:latin typeface="맑은 고딕"/>
-                <a:ea typeface="맑은 고딕"/>
-              </a:rPr>
-              <a:t>최호길 | QIE Data Science | AI Specialist 인증</a:t>
-            </a:r>
-          </a:p>
-        </p:txBody>
-      </p:sp>
-      <p:sp>
-        <p:nvSpPr>
-          <p:cNvPr id="13" name="TextBox 12"/>
-          <p:cNvSpPr txBox="1"/>
-          <p:nvPr/>
-        </p:nvSpPr>
-        <p:spPr>
-          <a:xfrm>
-            <a:off x="10972800" y="6437376"/>
-            <a:ext cx="758952" cy="292608"/>
-          </a:xfrm>
-          <a:prstGeom prst="rect">
-            <a:avLst/>
-          </a:prstGeom>
-          <a:noFill/>
-        </p:spPr>
-        <p:txBody>
-          <a:bodyPr wrap="square" anchor="ctr" lIns="0" rIns="0" tIns="0" bIns="0">
-            <a:spAutoFit/>
-          </a:bodyPr>
-          <a:lstStyle/>
-          <a:p>
-            <a:pPr algn="r"/>
-            <a:r>
-              <a:rPr sz="900">
-                <a:solidFill>
-                  <a:srgbClr val="6B7280"/>
-                </a:solidFill>
-                <a:latin typeface="맑은 고딕"/>
-                <a:ea typeface="맑은 고딕"/>
-              </a:rPr>
-              <a:t>8</a:t>
             </a:r>
           </a:p>
         </p:txBody>

--- a/recommendation/presentation/발표_P3_데이터생성_최호길.pptx
+++ b/recommendation/presentation/발표_P3_데이터생성_최호길.pptx
@@ -10,8 +10,6 @@
     <p:sldId id="258" r:id="rId9"/>
     <p:sldId id="259" r:id="rId10"/>
     <p:sldId id="260" r:id="rId11"/>
-    <p:sldId id="261" r:id="rId12"/>
-    <p:sldId id="262" r:id="rId13"/>
   </p:sldIdLst>
   <p:sldSz cx="12191695" cy="6858000" type="screen4x3"/>
   <p:notesSz cx="6858000" cy="9144000"/>
@@ -5450,7 +5448,7 @@
                 <a:latin typeface="맑은 고딕"/>
                 <a:ea typeface="맑은 고딕"/>
               </a:rPr>
-              <a:t>P3 | 정상 baseline (영역)</a:t>
+              <a:t>P3 | trend 생성</a:t>
             </a:r>
           </a:p>
         </p:txBody>
@@ -5486,7 +5484,7 @@
                 <a:latin typeface="맑은 고딕"/>
                 <a:ea typeface="맑은 고딕"/>
               </a:rPr>
-              <a:t>측정 빈도에 따라 밀집/희소/결핍 영역이 교차한다</a:t>
+              <a:t>정상 baseline(영역 + 노이즈) 위에 이상 5종을 합성</a:t>
             </a:r>
           </a:p>
         </p:txBody>
@@ -5499,8 +5497,8 @@
         </p:nvSpPr>
         <p:spPr>
           <a:xfrm>
-            <a:off x="631081" y="2055904"/>
-            <a:ext cx="10990798" cy="3703520"/>
+            <a:off x="2056119" y="1819800"/>
+            <a:ext cx="8140722" cy="4132800"/>
           </a:xfrm>
           <a:prstGeom prst="rect">
             <a:avLst/>
@@ -5539,7 +5537,7 @@
       </p:sp>
       <p:pic>
         <p:nvPicPr>
-          <p:cNvPr id="6" name="Picture 5" descr="p3_deck_regions.png"/>
+          <p:cNvPr id="6" name="Picture 5" descr="p3_deck_combined.png"/>
           <p:cNvPicPr>
             <a:picLocks noChangeAspect="1"/>
           </p:cNvPicPr>
@@ -5553,8 +5551,8 @@
         </p:blipFill>
         <p:spPr>
           <a:xfrm>
-            <a:off x="640081" y="2064904"/>
-            <a:ext cx="10972798" cy="3685520"/>
+            <a:off x="2065119" y="1828800"/>
+            <a:ext cx="8122722" cy="4114800"/>
           </a:xfrm>
           <a:prstGeom prst="rect">
             <a:avLst/>
@@ -5592,7 +5590,7 @@
                 <a:latin typeface="맑은 고딕"/>
                 <a:ea typeface="맑은 고딕"/>
               </a:rPr>
-              <a:t>한 chart를 12~25개 episode로 나눠 영역 밀도를 확률로 샘플링 — 실제 계측 분포를 모사하고, 신호는 평탄하게 두어 변동은 노이즈로만 만듦</a:t>
+              <a:t>(a) 측정 빈도에 따라 밀집/희소/결핍이 갈리는 정상 baseline, (b) 계측 변동을 Gaussian/설비(AR)/헌팅(Laplacian) 노이즈로 재현, (c) 그 위에 이상 5종(avg/std/spike/drift/context) 합성</a:t>
             </a:r>
           </a:p>
         </p:txBody>
@@ -5770,7 +5768,7 @@
                 <a:latin typeface="맑은 고딕"/>
                 <a:ea typeface="맑은 고딕"/>
               </a:rPr>
-              <a:t>P3 | 계측 노이즈</a:t>
+              <a:t>P3 | 파이프라인/데이터</a:t>
             </a:r>
           </a:p>
         </p:txBody>
@@ -5806,21 +5804,71 @@
                 <a:latin typeface="맑은 고딕"/>
                 <a:ea typeface="맑은 고딕"/>
               </a:rPr>
-              <a:t>계측 노이즈 3종 — 현장 현상에 맞춰 변동을 재현</a:t>
-            </a:r>
-          </a:p>
-        </p:txBody>
-      </p:sp>
-      <p:sp>
-        <p:nvSpPr>
-          <p:cNvPr id="5" name="Rectangle 4"/>
+              <a:t>생성 파이프라인과 데이터 구성</a:t>
+            </a:r>
+          </a:p>
+        </p:txBody>
+      </p:sp>
+      <p:sp>
+        <p:nvSpPr>
+          <p:cNvPr id="5" name="TextBox 4"/>
+          <p:cNvSpPr txBox="1"/>
+          <p:nvPr/>
+        </p:nvSpPr>
+        <p:spPr>
+          <a:xfrm>
+            <a:off x="640080" y="1828800"/>
+            <a:ext cx="10972800" cy="640080"/>
+          </a:xfrm>
+          <a:prstGeom prst="rect">
+            <a:avLst/>
+          </a:prstGeom>
+          <a:noFill/>
+        </p:spPr>
+        <p:txBody>
+          <a:bodyPr wrap="square" anchor="t" lIns="0" rIns="0" tIns="0" bIns="0">
+            <a:spAutoFit/>
+          </a:bodyPr>
+          <a:lstStyle/>
+          <a:p>
+            <a:pPr marL="274320" indent="-274320">
+              <a:spcAft>
+                <a:spcPts val="500"/>
+              </a:spcAft>
+            </a:pPr>
+            <a:r>
+              <a:rPr sz="1400" b="0">
+                <a:solidFill>
+                  <a:srgbClr val="5B9BD5"/>
+                </a:solidFill>
+                <a:latin typeface="맑은 고딕"/>
+                <a:ea typeface="맑은 고딕"/>
+              </a:rPr>
+              <a:t>●  </a:t>
+            </a:r>
+            <a:r>
+              <a:rPr sz="1400">
+                <a:solidFill>
+                  <a:srgbClr val="1A1F2E"/>
+                </a:solidFill>
+                <a:latin typeface="맑은 고딕"/>
+                <a:ea typeface="맑은 고딕"/>
+              </a:rPr>
+              <a:t>chart 정의부터 이미지 렌더까지 규칙 기반으로 생성하고, 이상 강도는 보이도록 floor 보정합니다</a:t>
+            </a:r>
+          </a:p>
+        </p:txBody>
+      </p:sp>
+      <p:sp>
+        <p:nvSpPr>
+          <p:cNvPr id="6" name="Rectangle 5"/>
           <p:cNvSpPr/>
           <p:nvPr/>
         </p:nvSpPr>
         <p:spPr>
           <a:xfrm>
-            <a:off x="631080" y="2395364"/>
-            <a:ext cx="10990800" cy="3086320"/>
+            <a:off x="640080" y="2596896"/>
+            <a:ext cx="5303520" cy="3429000"/>
           </a:xfrm>
           <a:prstGeom prst="rect">
             <a:avLst/>
@@ -5828,9 +5876,9 @@
           <a:solidFill>
             <a:srgbClr val="FFFFFF"/>
           </a:solidFill>
-          <a:ln w="12700">
+          <a:ln w="15875">
             <a:solidFill>
-              <a:srgbClr val="D7DEEA"/>
+              <a:srgbClr val="333740"/>
             </a:solidFill>
           </a:ln>
           <a:effectLst/>
@@ -5857,30 +5905,6 @@
           </a:p>
         </p:txBody>
       </p:sp>
-      <p:pic>
-        <p:nvPicPr>
-          <p:cNvPr id="6" name="Picture 5" descr="p3_deck_noise.png"/>
-          <p:cNvPicPr>
-            <a:picLocks noChangeAspect="1"/>
-          </p:cNvPicPr>
-          <p:nvPr/>
-        </p:nvPicPr>
-        <p:blipFill>
-          <a:blip r:embed="rId2"/>
-          <a:stretch>
-            <a:fillRect/>
-          </a:stretch>
-        </p:blipFill>
-        <p:spPr>
-          <a:xfrm>
-            <a:off x="640080" y="2404364"/>
-            <a:ext cx="10972800" cy="3068320"/>
-          </a:xfrm>
-          <a:prstGeom prst="rect">
-            <a:avLst/>
-          </a:prstGeom>
-        </p:spPr>
-      </p:pic>
       <p:sp>
         <p:nvSpPr>
           <p:cNvPr id="7" name="TextBox 6"/>
@@ -5889,44 +5913,8 @@
         </p:nvSpPr>
         <p:spPr>
           <a:xfrm>
-            <a:off x="640080" y="5961888"/>
-            <a:ext cx="10972800" cy="274320"/>
-          </a:xfrm>
-          <a:prstGeom prst="rect">
-            <a:avLst/>
-          </a:prstGeom>
-          <a:noFill/>
-        </p:spPr>
-        <p:txBody>
-          <a:bodyPr wrap="square" anchor="t" lIns="0" rIns="0" tIns="0" bIns="0">
-            <a:spAutoFit/>
-          </a:bodyPr>
-          <a:lstStyle/>
-          <a:p>
-            <a:pPr algn="ctr"/>
-            <a:r>
-              <a:rPr sz="1300">
-                <a:solidFill>
-                  <a:srgbClr val="3A485C"/>
-                </a:solidFill>
-                <a:latin typeface="맑은 고딕"/>
-                <a:ea typeface="맑은 고딕"/>
-              </a:rPr>
-              <a:t>chart 하나는 한 가지 노이즈만 사용 — Gaussian(산포) / Correlated AR(설비 변동) / Laplacian(계측 헌팅)</a:t>
-            </a:r>
-          </a:p>
-        </p:txBody>
-      </p:sp>
-      <p:sp>
-        <p:nvSpPr>
-          <p:cNvPr id="8" name="TextBox 7"/>
-          <p:cNvSpPr txBox="1"/>
-          <p:nvPr/>
-        </p:nvSpPr>
-        <p:spPr>
-          <a:xfrm>
-            <a:off x="457200" y="6437376"/>
-            <a:ext cx="8229600" cy="292608"/>
+            <a:off x="914400" y="2724912"/>
+            <a:ext cx="4809744" cy="3172968"/>
           </a:xfrm>
           <a:prstGeom prst="rect">
             <a:avLst/>
@@ -5941,6 +5929,456 @@
           <a:p>
             <a:pPr algn="l"/>
             <a:r>
+              <a:rPr sz="1450" b="1">
+                <a:solidFill>
+                  <a:srgbClr val="0F1E3D"/>
+                </a:solidFill>
+                <a:latin typeface="맑은 고딕"/>
+                <a:ea typeface="맑은 고딕"/>
+              </a:rPr>
+              <a:t>생성 파이프라인</a:t>
+            </a:r>
+          </a:p>
+          <a:p>
+            <a:pPr algn="l"/>
+            <a:r>
+              <a:rPr sz="500">
+                <a:solidFill>
+                  <a:srgbClr val="FFFFFF"/>
+                </a:solidFill>
+                <a:latin typeface="맑은 고딕"/>
+                <a:ea typeface="맑은 고딕"/>
+              </a:rPr>
+              <a:t> </a:t>
+            </a:r>
+          </a:p>
+          <a:p>
+            <a:pPr algn="l"/>
+            <a:r>
+              <a:rPr sz="1350" b="1" i="0">
+                <a:solidFill>
+                  <a:srgbClr val="0F1E3D"/>
+                </a:solidFill>
+                <a:latin typeface="맑은 고딕"/>
+                <a:ea typeface="맑은 고딕"/>
+              </a:rPr>
+              <a:t>① chart 정의</a:t>
+            </a:r>
+          </a:p>
+          <a:p>
+            <a:pPr algn="l"/>
+            <a:r>
+              <a:rPr sz="1300">
+                <a:solidFill>
+                  <a:srgbClr val="1A1F2E"/>
+                </a:solidFill>
+                <a:latin typeface="Consolas"/>
+                <a:ea typeface="Consolas"/>
+              </a:rPr>
+              <a:t>    device x step x item, fleet legend(eqp/chamber/recipe)</a:t>
+            </a:r>
+          </a:p>
+          <a:p>
+            <a:pPr algn="l"/>
+            <a:r>
+              <a:rPr sz="1350" b="1" i="0">
+                <a:solidFill>
+                  <a:srgbClr val="0F1E3D"/>
+                </a:solidFill>
+                <a:latin typeface="맑은 고딕"/>
+                <a:ea typeface="맑은 고딕"/>
+              </a:rPr>
+              <a:t>② episode 조립</a:t>
+            </a:r>
+          </a:p>
+          <a:p>
+            <a:pPr algn="l"/>
+            <a:r>
+              <a:rPr sz="1300">
+                <a:solidFill>
+                  <a:srgbClr val="1A1F2E"/>
+                </a:solidFill>
+                <a:latin typeface="맑은 고딕"/>
+                <a:ea typeface="맑은 고딕"/>
+              </a:rPr>
+              <a:t>    12~25개, 영역 밀도 샘플링(밀집/희소/결핍)</a:t>
+            </a:r>
+          </a:p>
+          <a:p>
+            <a:pPr algn="l"/>
+            <a:r>
+              <a:rPr sz="1350" b="1" i="0">
+                <a:solidFill>
+                  <a:srgbClr val="0F1E3D"/>
+                </a:solidFill>
+                <a:latin typeface="맑은 고딕"/>
+                <a:ea typeface="맑은 고딕"/>
+              </a:rPr>
+              <a:t>③ 노이즈</a:t>
+            </a:r>
+          </a:p>
+          <a:p>
+            <a:pPr algn="l"/>
+            <a:r>
+              <a:rPr sz="1300">
+                <a:solidFill>
+                  <a:srgbClr val="1A1F2E"/>
+                </a:solidFill>
+                <a:latin typeface="맑은 고딕"/>
+                <a:ea typeface="맑은 고딕"/>
+              </a:rPr>
+              <a:t>    Gaussian / Correlated / Laplacian 중 1종</a:t>
+            </a:r>
+          </a:p>
+          <a:p>
+            <a:pPr algn="l"/>
+            <a:r>
+              <a:rPr sz="1350" b="1" i="0">
+                <a:solidFill>
+                  <a:srgbClr val="0F1E3D"/>
+                </a:solidFill>
+                <a:latin typeface="맑은 고딕"/>
+                <a:ea typeface="맑은 고딕"/>
+              </a:rPr>
+              <a:t>④ 이상 주입</a:t>
+            </a:r>
+          </a:p>
+          <a:p>
+            <a:pPr algn="l"/>
+            <a:r>
+              <a:rPr sz="1300">
+                <a:solidFill>
+                  <a:srgbClr val="1A1F2E"/>
+                </a:solidFill>
+                <a:latin typeface="맑은 고딕"/>
+                <a:ea typeface="맑은 고딕"/>
+              </a:rPr>
+              <a:t>    avg/std/spike/drift/context (오른쪽 끝)</a:t>
+            </a:r>
+          </a:p>
+          <a:p>
+            <a:pPr algn="l"/>
+            <a:r>
+              <a:rPr sz="1350" b="1" i="0">
+                <a:solidFill>
+                  <a:srgbClr val="0F1E3D"/>
+                </a:solidFill>
+                <a:latin typeface="맑은 고딕"/>
+                <a:ea typeface="맑은 고딕"/>
+              </a:rPr>
+              <a:t>⑤ 렌더</a:t>
+            </a:r>
+          </a:p>
+          <a:p>
+            <a:pPr algn="l"/>
+            <a:r>
+              <a:rPr sz="1300">
+                <a:solidFill>
+                  <a:srgbClr val="1A1F2E"/>
+                </a:solidFill>
+                <a:latin typeface="맑은 고딕"/>
+                <a:ea typeface="맑은 고딕"/>
+              </a:rPr>
+              <a:t>    강도 floor 보정 → 학습/평가 trend 이미지</a:t>
+            </a:r>
+          </a:p>
+        </p:txBody>
+      </p:sp>
+      <p:sp>
+        <p:nvSpPr>
+          <p:cNvPr id="8" name="TextBox 7"/>
+          <p:cNvSpPr txBox="1"/>
+          <p:nvPr/>
+        </p:nvSpPr>
+        <p:spPr>
+          <a:xfrm>
+            <a:off x="640080" y="6053328"/>
+            <a:ext cx="5303520" cy="329184"/>
+          </a:xfrm>
+          <a:prstGeom prst="rect">
+            <a:avLst/>
+          </a:prstGeom>
+          <a:noFill/>
+        </p:spPr>
+        <p:txBody>
+          <a:bodyPr wrap="square" anchor="ctr" lIns="0" rIns="0" tIns="0" bIns="0">
+            <a:spAutoFit/>
+          </a:bodyPr>
+          <a:lstStyle/>
+          <a:p>
+            <a:pPr algn="ctr"/>
+            <a:r>
+              <a:rPr sz="1250" b="1">
+                <a:solidFill>
+                  <a:srgbClr val="0F1E3D"/>
+                </a:solidFill>
+                <a:latin typeface="맑은 고딕"/>
+                <a:ea typeface="맑은 고딕"/>
+              </a:rPr>
+              <a:t>규칙 기반 생성 흐름</a:t>
+            </a:r>
+          </a:p>
+        </p:txBody>
+      </p:sp>
+      <p:sp>
+        <p:nvSpPr>
+          <p:cNvPr id="9" name="Rectangle 8"/>
+          <p:cNvSpPr/>
+          <p:nvPr/>
+        </p:nvSpPr>
+        <p:spPr>
+          <a:xfrm>
+            <a:off x="6309360" y="2596896"/>
+            <a:ext cx="5303520" cy="3429000"/>
+          </a:xfrm>
+          <a:prstGeom prst="rect">
+            <a:avLst/>
+          </a:prstGeom>
+          <a:solidFill>
+            <a:srgbClr val="FFFFFF"/>
+          </a:solidFill>
+          <a:ln w="15875">
+            <a:solidFill>
+              <a:srgbClr val="333740"/>
+            </a:solidFill>
+          </a:ln>
+          <a:effectLst/>
+        </p:spPr>
+        <p:style>
+          <a:lnRef idx="1">
+            <a:schemeClr val="accent1"/>
+          </a:lnRef>
+          <a:fillRef idx="3">
+            <a:schemeClr val="accent1"/>
+          </a:fillRef>
+          <a:effectRef idx="2">
+            <a:schemeClr val="accent1"/>
+          </a:effectRef>
+          <a:fontRef idx="minor">
+            <a:schemeClr val="lt1"/>
+          </a:fontRef>
+        </p:style>
+        <p:txBody>
+          <a:bodyPr rtlCol="0" anchor="ctr"/>
+          <a:lstStyle/>
+          <a:p>
+            <a:pPr algn="ctr"/>
+          </a:p>
+        </p:txBody>
+      </p:sp>
+      <p:sp>
+        <p:nvSpPr>
+          <p:cNvPr id="10" name="TextBox 9"/>
+          <p:cNvSpPr txBox="1"/>
+          <p:nvPr/>
+        </p:nvSpPr>
+        <p:spPr>
+          <a:xfrm>
+            <a:off x="6583680" y="2724912"/>
+            <a:ext cx="4809744" cy="3172968"/>
+          </a:xfrm>
+          <a:prstGeom prst="rect">
+            <a:avLst/>
+          </a:prstGeom>
+          <a:noFill/>
+        </p:spPr>
+        <p:txBody>
+          <a:bodyPr wrap="square" anchor="ctr" lIns="0" rIns="0" tIns="0" bIns="0">
+            <a:spAutoFit/>
+          </a:bodyPr>
+          <a:lstStyle/>
+          <a:p>
+            <a:pPr algn="l"/>
+            <a:r>
+              <a:rPr sz="1450" b="1">
+                <a:solidFill>
+                  <a:srgbClr val="0F1E3D"/>
+                </a:solidFill>
+                <a:latin typeface="맑은 고딕"/>
+                <a:ea typeface="맑은 고딕"/>
+              </a:rPr>
+              <a:t>데이터 구성</a:t>
+            </a:r>
+          </a:p>
+          <a:p>
+            <a:pPr algn="l"/>
+            <a:r>
+              <a:rPr sz="500">
+                <a:solidFill>
+                  <a:srgbClr val="FFFFFF"/>
+                </a:solidFill>
+                <a:latin typeface="맑은 고딕"/>
+                <a:ea typeface="맑은 고딕"/>
+              </a:rPr>
+              <a:t> </a:t>
+            </a:r>
+          </a:p>
+          <a:p>
+            <a:pPr algn="l"/>
+            <a:r>
+              <a:rPr sz="1350" b="1" i="0">
+                <a:solidFill>
+                  <a:srgbClr val="0F1E3D"/>
+                </a:solidFill>
+                <a:latin typeface="맑은 고딕"/>
+                <a:ea typeface="맑은 고딕"/>
+              </a:rPr>
+              <a:t>규모</a:t>
+            </a:r>
+          </a:p>
+          <a:p>
+            <a:pPr algn="l"/>
+            <a:r>
+              <a:rPr sz="1300">
+                <a:solidFill>
+                  <a:srgbClr val="1A1F2E"/>
+                </a:solidFill>
+                <a:latin typeface="맑은 고딕"/>
+                <a:ea typeface="맑은 고딕"/>
+              </a:rPr>
+              <a:t>    정상 3,500 + 이상 3,500 = 7,000</a:t>
+            </a:r>
+          </a:p>
+          <a:p>
+            <a:pPr algn="l"/>
+            <a:r>
+              <a:rPr sz="1300">
+                <a:solidFill>
+                  <a:srgbClr val="1A1F2E"/>
+                </a:solidFill>
+                <a:latin typeface="맑은 고딕"/>
+                <a:ea typeface="맑은 고딕"/>
+              </a:rPr>
+              <a:t>    별도 test 1,500 (이상 5종 stratified)</a:t>
+            </a:r>
+          </a:p>
+          <a:p>
+            <a:pPr algn="l"/>
+            <a:r>
+              <a:rPr sz="1350" b="1" i="0">
+                <a:solidFill>
+                  <a:srgbClr val="0F1E3D"/>
+                </a:solidFill>
+                <a:latin typeface="맑은 고딕"/>
+                <a:ea typeface="맑은 고딕"/>
+              </a:rPr>
+              <a:t>평가 난이도</a:t>
+            </a:r>
+          </a:p>
+          <a:p>
+            <a:pPr algn="l"/>
+            <a:r>
+              <a:rPr sz="1300">
+                <a:solidFill>
+                  <a:srgbClr val="1A1F2E"/>
+                </a:solidFill>
+                <a:latin typeface="맑은 고딕"/>
+                <a:ea typeface="맑은 고딕"/>
+              </a:rPr>
+              <a:t>    test/val은 이상 강도를 0.8배로 낮춰</a:t>
+            </a:r>
+          </a:p>
+          <a:p>
+            <a:pPr algn="l"/>
+            <a:r>
+              <a:rPr sz="1300">
+                <a:solidFill>
+                  <a:srgbClr val="1A1F2E"/>
+                </a:solidFill>
+                <a:latin typeface="맑은 고딕"/>
+                <a:ea typeface="맑은 고딕"/>
+              </a:rPr>
+              <a:t>    더 어려운 평가셋 구성</a:t>
+            </a:r>
+          </a:p>
+          <a:p>
+            <a:pPr algn="l"/>
+            <a:r>
+              <a:rPr sz="1350" b="1" i="0">
+                <a:solidFill>
+                  <a:srgbClr val="0F1E3D"/>
+                </a:solidFill>
+                <a:latin typeface="맑은 고딕"/>
+                <a:ea typeface="맑은 고딕"/>
+              </a:rPr>
+              <a:t>정상 보호</a:t>
+            </a:r>
+          </a:p>
+          <a:p>
+            <a:pPr algn="l"/>
+            <a:r>
+              <a:rPr sz="1300">
+                <a:solidFill>
+                  <a:srgbClr val="1A1F2E"/>
+                </a:solidFill>
+                <a:latin typeface="맑은 고딕"/>
+                <a:ea typeface="맑은 고딕"/>
+              </a:rPr>
+              <a:t>    정상은 fleet 중심에서 벗어나지 않게 강제</a:t>
+            </a:r>
+          </a:p>
+        </p:txBody>
+      </p:sp>
+      <p:sp>
+        <p:nvSpPr>
+          <p:cNvPr id="11" name="TextBox 10"/>
+          <p:cNvSpPr txBox="1"/>
+          <p:nvPr/>
+        </p:nvSpPr>
+        <p:spPr>
+          <a:xfrm>
+            <a:off x="6309360" y="6053328"/>
+            <a:ext cx="5303520" cy="329184"/>
+          </a:xfrm>
+          <a:prstGeom prst="rect">
+            <a:avLst/>
+          </a:prstGeom>
+          <a:noFill/>
+        </p:spPr>
+        <p:txBody>
+          <a:bodyPr wrap="square" anchor="ctr" lIns="0" rIns="0" tIns="0" bIns="0">
+            <a:spAutoFit/>
+          </a:bodyPr>
+          <a:lstStyle/>
+          <a:p>
+            <a:pPr algn="ctr"/>
+            <a:r>
+              <a:rPr sz="1250" b="1">
+                <a:solidFill>
+                  <a:srgbClr val="0F1E3D"/>
+                </a:solidFill>
+                <a:latin typeface="맑은 고딕"/>
+                <a:ea typeface="맑은 고딕"/>
+              </a:rPr>
+              <a:t>정상 3,500 + 이상 3,500 + test 1,500</a:t>
+            </a:r>
+          </a:p>
+        </p:txBody>
+      </p:sp>
+      <p:sp>
+        <p:nvSpPr>
+          <p:cNvPr id="12" name="TextBox 11"/>
+          <p:cNvSpPr txBox="1"/>
+          <p:nvPr/>
+        </p:nvSpPr>
+        <p:spPr>
+          <a:xfrm>
+            <a:off x="457200" y="6437376"/>
+            <a:ext cx="8229600" cy="292608"/>
+          </a:xfrm>
+          <a:prstGeom prst="rect">
+            <a:avLst/>
+          </a:prstGeom>
+          <a:noFill/>
+        </p:spPr>
+        <p:txBody>
+          <a:bodyPr wrap="square" anchor="ctr" lIns="0" rIns="0" tIns="0" bIns="0">
+            <a:spAutoFit/>
+          </a:bodyPr>
+          <a:lstStyle/>
+          <a:p>
+            <a:pPr algn="l"/>
+            <a:r>
               <a:rPr sz="900">
                 <a:solidFill>
                   <a:srgbClr val="6B7280"/>
@@ -5955,7 +6393,7 @@
       </p:sp>
       <p:sp>
         <p:nvSpPr>
-          <p:cNvPr id="9" name="TextBox 8"/>
+          <p:cNvPr id="13" name="TextBox 12"/>
           <p:cNvSpPr txBox="1"/>
           <p:nvPr/>
         </p:nvSpPr>
@@ -6090,7 +6528,7 @@
                 <a:latin typeface="맑은 고딕"/>
                 <a:ea typeface="맑은 고딕"/>
               </a:rPr>
-              <a:t>P3 | 이상 합성</a:t>
+              <a:t>P3 | 1차 binary gate (PoC)</a:t>
             </a:r>
           </a:p>
         </p:txBody>
@@ -6126,7 +6564,7 @@
                 <a:latin typeface="맑은 고딕"/>
                 <a:ea typeface="맑은 고딕"/>
               </a:rPr>
-              <a:t>이상 합성 5종 — 실제 불량 발생 방식 (파랑 정상, 빨강 이상)</a:t>
+              <a:t>생성 데이터로 정상/이상 1차 판정 검증</a:t>
             </a:r>
           </a:p>
         </p:txBody>
@@ -6139,8 +6577,285 @@
         </p:nvSpPr>
         <p:spPr>
           <a:xfrm>
-            <a:off x="631082" y="2817831"/>
-            <a:ext cx="10990796" cy="2318198"/>
+            <a:off x="640080" y="1783080"/>
+            <a:ext cx="5349240" cy="640080"/>
+          </a:xfrm>
+          <a:prstGeom prst="rect">
+            <a:avLst/>
+          </a:prstGeom>
+          <a:solidFill>
+            <a:srgbClr val="0F1E3D"/>
+          </a:solidFill>
+          <a:ln>
+            <a:noFill/>
+          </a:ln>
+          <a:effectLst/>
+        </p:spPr>
+        <p:style>
+          <a:lnRef idx="1">
+            <a:schemeClr val="accent1"/>
+          </a:lnRef>
+          <a:fillRef idx="3">
+            <a:schemeClr val="accent1"/>
+          </a:fillRef>
+          <a:effectRef idx="2">
+            <a:schemeClr val="accent1"/>
+          </a:effectRef>
+          <a:fontRef idx="minor">
+            <a:schemeClr val="lt1"/>
+          </a:fontRef>
+        </p:style>
+        <p:txBody>
+          <a:bodyPr rtlCol="0" anchor="ctr"/>
+          <a:lstStyle/>
+          <a:p>
+            <a:pPr algn="ctr"/>
+          </a:p>
+        </p:txBody>
+      </p:sp>
+      <p:sp>
+        <p:nvSpPr>
+          <p:cNvPr id="6" name="TextBox 5"/>
+          <p:cNvSpPr txBox="1"/>
+          <p:nvPr/>
+        </p:nvSpPr>
+        <p:spPr>
+          <a:xfrm>
+            <a:off x="868680" y="1783080"/>
+            <a:ext cx="4983480" cy="640080"/>
+          </a:xfrm>
+          <a:prstGeom prst="rect">
+            <a:avLst/>
+          </a:prstGeom>
+          <a:noFill/>
+        </p:spPr>
+        <p:txBody>
+          <a:bodyPr wrap="square" anchor="ctr" lIns="0" rIns="0" tIns="0" bIns="0">
+            <a:spAutoFit/>
+          </a:bodyPr>
+          <a:lstStyle/>
+          <a:p>
+            <a:pPr algn="l"/>
+            <a:r>
+              <a:rPr sz="1550" b="1">
+                <a:solidFill>
+                  <a:srgbClr val="FFFFFF"/>
+                </a:solidFill>
+                <a:latin typeface="맑은 고딕"/>
+                <a:ea typeface="맑은 고딕"/>
+              </a:rPr>
+              <a:t>모델 — 1차 binary gate</a:t>
+            </a:r>
+          </a:p>
+        </p:txBody>
+      </p:sp>
+      <p:sp>
+        <p:nvSpPr>
+          <p:cNvPr id="7" name="Rectangle 6"/>
+          <p:cNvSpPr/>
+          <p:nvPr/>
+        </p:nvSpPr>
+        <p:spPr>
+          <a:xfrm>
+            <a:off x="640080" y="2423160"/>
+            <a:ext cx="5349240" cy="3520440"/>
+          </a:xfrm>
+          <a:prstGeom prst="rect">
+            <a:avLst/>
+          </a:prstGeom>
+          <a:solidFill>
+            <a:srgbClr val="F2F5FA"/>
+          </a:solidFill>
+          <a:ln>
+            <a:noFill/>
+          </a:ln>
+          <a:effectLst/>
+        </p:spPr>
+        <p:style>
+          <a:lnRef idx="1">
+            <a:schemeClr val="accent1"/>
+          </a:lnRef>
+          <a:fillRef idx="3">
+            <a:schemeClr val="accent1"/>
+          </a:fillRef>
+          <a:effectRef idx="2">
+            <a:schemeClr val="accent1"/>
+          </a:effectRef>
+          <a:fontRef idx="minor">
+            <a:schemeClr val="lt1"/>
+          </a:fontRef>
+        </p:style>
+        <p:txBody>
+          <a:bodyPr rtlCol="0" anchor="ctr"/>
+          <a:lstStyle/>
+          <a:p>
+            <a:pPr algn="ctr"/>
+          </a:p>
+        </p:txBody>
+      </p:sp>
+      <p:sp>
+        <p:nvSpPr>
+          <p:cNvPr id="8" name="TextBox 7"/>
+          <p:cNvSpPr txBox="1"/>
+          <p:nvPr/>
+        </p:nvSpPr>
+        <p:spPr>
+          <a:xfrm>
+            <a:off x="868680" y="2606040"/>
+            <a:ext cx="4892040" cy="2276856"/>
+          </a:xfrm>
+          <a:prstGeom prst="rect">
+            <a:avLst/>
+          </a:prstGeom>
+          <a:noFill/>
+        </p:spPr>
+        <p:txBody>
+          <a:bodyPr wrap="square" anchor="t" lIns="0" rIns="0" tIns="0" bIns="0">
+            <a:spAutoFit/>
+          </a:bodyPr>
+          <a:lstStyle/>
+          <a:p>
+            <a:pPr marL="274320" indent="-274320">
+              <a:lnSpc>
+                <a:spcPct val="110000"/>
+              </a:lnSpc>
+              <a:spcAft>
+                <a:spcPts val="400"/>
+              </a:spcAft>
+            </a:pPr>
+            <a:r>
+              <a:rPr sz="1300" b="0">
+                <a:solidFill>
+                  <a:srgbClr val="5B9BD5"/>
+                </a:solidFill>
+                <a:latin typeface="맑은 고딕"/>
+                <a:ea typeface="맑은 고딕"/>
+              </a:rPr>
+              <a:t>●  </a:t>
+            </a:r>
+            <a:r>
+              <a:rPr sz="1300">
+                <a:solidFill>
+                  <a:srgbClr val="1A1F2E"/>
+                </a:solidFill>
+                <a:latin typeface="맑은 고딕"/>
+                <a:ea typeface="맑은 고딕"/>
+              </a:rPr>
+              <a:t>trend 이미지를 </a:t>
+            </a:r>
+            <a:r>
+              <a:rPr sz="1300" b="1">
+                <a:solidFill>
+                  <a:srgbClr val="0F1E3D"/>
+                </a:solidFill>
+                <a:latin typeface="맑은 고딕"/>
+                <a:ea typeface="맑은 고딕"/>
+              </a:rPr>
+              <a:t>ConvNeXtV2-Tiny</a:t>
+            </a:r>
+            <a:r>
+              <a:rPr sz="1300">
+                <a:solidFill>
+                  <a:srgbClr val="1A1F2E"/>
+                </a:solidFill>
+                <a:latin typeface="맑은 고딕"/>
+                <a:ea typeface="맑은 고딕"/>
+              </a:rPr>
+              <a:t>로 정상/이상 2분류하며, </a:t>
+            </a:r>
+            <a:r>
+              <a:rPr sz="1300" b="1">
+                <a:solidFill>
+                  <a:srgbClr val="0F1E3D"/>
+                </a:solidFill>
+                <a:latin typeface="맑은 고딕"/>
+                <a:ea typeface="맑은 고딕"/>
+              </a:rPr>
+              <a:t>놓침(FN) 최소화</a:t>
+            </a:r>
+            <a:r>
+              <a:rPr sz="1300">
+                <a:solidFill>
+                  <a:srgbClr val="1A1F2E"/>
+                </a:solidFill>
+                <a:latin typeface="맑은 고딕"/>
+                <a:ea typeface="맑은 고딕"/>
+              </a:rPr>
+              <a:t>가 목표입니다</a:t>
+            </a:r>
+          </a:p>
+          <a:p>
+            <a:pPr marL="274320" indent="-274320">
+              <a:lnSpc>
+                <a:spcPct val="110000"/>
+              </a:lnSpc>
+              <a:spcAft>
+                <a:spcPts val="400"/>
+              </a:spcAft>
+            </a:pPr>
+            <a:r>
+              <a:rPr sz="1300" b="0">
+                <a:solidFill>
+                  <a:srgbClr val="5B9BD5"/>
+                </a:solidFill>
+                <a:latin typeface="맑은 고딕"/>
+                <a:ea typeface="맑은 고딕"/>
+              </a:rPr>
+              <a:t>●  </a:t>
+            </a:r>
+            <a:r>
+              <a:rPr sz="1300">
+                <a:solidFill>
+                  <a:srgbClr val="1A1F2E"/>
+                </a:solidFill>
+                <a:latin typeface="맑은 고딕"/>
+                <a:ea typeface="맑은 고딕"/>
+              </a:rPr>
+              <a:t>Focal loss + EMA로 학습하고, normal threshold를 올려 FN을 더 줄입니다</a:t>
+            </a:r>
+          </a:p>
+          <a:p>
+            <a:pPr marL="420624" indent="-420624" lvl="1">
+              <a:lnSpc>
+                <a:spcPct val="110000"/>
+              </a:lnSpc>
+              <a:spcAft>
+                <a:spcPts val="400"/>
+              </a:spcAft>
+            </a:pPr>
+            <a:r>
+              <a:rPr sz="1200" b="0">
+                <a:solidFill>
+                  <a:srgbClr val="6E7B8E"/>
+                </a:solidFill>
+                <a:latin typeface="맑은 고딕"/>
+                <a:ea typeface="맑은 고딕"/>
+              </a:rPr>
+              <a:t>–  </a:t>
+            </a:r>
+            <a:r>
+              <a:rPr sz="1200">
+                <a:solidFill>
+                  <a:srgbClr val="4A5666"/>
+                </a:solidFill>
+                <a:latin typeface="맑은 고딕"/>
+                <a:ea typeface="맑은 고딕"/>
+              </a:rPr>
+              <a:t>이상이 잡히면 2차에서 유형(avg/std/spike/drift/context) 진단</a:t>
+            </a:r>
+          </a:p>
+        </p:txBody>
+      </p:sp>
+      <p:sp>
+        <p:nvSpPr>
+          <p:cNvPr id="9" name="Rectangle 8"/>
+          <p:cNvSpPr/>
+          <p:nvPr/>
+        </p:nvSpPr>
+        <p:spPr>
+          <a:xfrm>
+            <a:off x="868680" y="5102352"/>
+            <a:ext cx="2372868" cy="685800"/>
           </a:xfrm>
           <a:prstGeom prst="rect">
             <a:avLst/>
@@ -6177,180 +6892,22 @@
           </a:p>
         </p:txBody>
       </p:sp>
-      <p:pic>
-        <p:nvPicPr>
-          <p:cNvPr id="6" name="Picture 5" descr="p3_deck_anomaly.png"/>
-          <p:cNvPicPr>
-            <a:picLocks noChangeAspect="1"/>
-          </p:cNvPicPr>
-          <p:nvPr/>
-        </p:nvPicPr>
-        <p:blipFill>
-          <a:blip r:embed="rId2"/>
-          <a:stretch>
-            <a:fillRect/>
-          </a:stretch>
-        </p:blipFill>
-        <p:spPr>
-          <a:xfrm>
-            <a:off x="640082" y="2826831"/>
-            <a:ext cx="10972796" cy="2300198"/>
-          </a:xfrm>
-          <a:prstGeom prst="rect">
-            <a:avLst/>
-          </a:prstGeom>
-        </p:spPr>
-      </p:pic>
-      <p:sp>
-        <p:nvSpPr>
-          <p:cNvPr id="7" name="TextBox 6"/>
-          <p:cNvSpPr txBox="1"/>
-          <p:nvPr/>
-        </p:nvSpPr>
-        <p:spPr>
-          <a:xfrm>
-            <a:off x="640080" y="5961888"/>
-            <a:ext cx="10972800" cy="274320"/>
-          </a:xfrm>
-          <a:prstGeom prst="rect">
-            <a:avLst/>
-          </a:prstGeom>
-          <a:noFill/>
-        </p:spPr>
-        <p:txBody>
-          <a:bodyPr wrap="square" anchor="t" lIns="0" rIns="0" tIns="0" bIns="0">
-            <a:spAutoFit/>
-          </a:bodyPr>
-          <a:lstStyle/>
-          <a:p>
-            <a:pPr algn="ctr"/>
-            <a:r>
-              <a:rPr sz="1300">
-                <a:solidFill>
-                  <a:srgbClr val="3A485C"/>
-                </a:solidFill>
-                <a:latin typeface="맑은 고딕"/>
-                <a:ea typeface="맑은 고딕"/>
-              </a:rPr>
-              <a:t>정상 baseline 오른쪽 끝에 주입하고 강도는 baseline 산포에 비례 (context만 fleet 대비 전체 시계열이 이탈)</a:t>
-            </a:r>
-          </a:p>
-        </p:txBody>
-      </p:sp>
-      <p:sp>
-        <p:nvSpPr>
-          <p:cNvPr id="8" name="TextBox 7"/>
-          <p:cNvSpPr txBox="1"/>
-          <p:nvPr/>
-        </p:nvSpPr>
-        <p:spPr>
-          <a:xfrm>
-            <a:off x="457200" y="6437376"/>
-            <a:ext cx="8229600" cy="292608"/>
-          </a:xfrm>
-          <a:prstGeom prst="rect">
-            <a:avLst/>
-          </a:prstGeom>
-          <a:noFill/>
-        </p:spPr>
-        <p:txBody>
-          <a:bodyPr wrap="square" anchor="ctr" lIns="0" rIns="0" tIns="0" bIns="0">
-            <a:spAutoFit/>
-          </a:bodyPr>
-          <a:lstStyle/>
-          <a:p>
-            <a:pPr algn="l"/>
-            <a:r>
-              <a:rPr sz="900">
-                <a:solidFill>
-                  <a:srgbClr val="6B7280"/>
-                </a:solidFill>
-                <a:latin typeface="맑은 고딕"/>
-                <a:ea typeface="맑은 고딕"/>
-              </a:rPr>
-              <a:t>최호길 | QIE Data Science | AI Specialist 인증</a:t>
-            </a:r>
-          </a:p>
-        </p:txBody>
-      </p:sp>
-      <p:sp>
-        <p:nvSpPr>
-          <p:cNvPr id="9" name="TextBox 8"/>
-          <p:cNvSpPr txBox="1"/>
-          <p:nvPr/>
-        </p:nvSpPr>
-        <p:spPr>
-          <a:xfrm>
-            <a:off x="10972800" y="6437376"/>
-            <a:ext cx="758952" cy="292608"/>
-          </a:xfrm>
-          <a:prstGeom prst="rect">
-            <a:avLst/>
-          </a:prstGeom>
-          <a:noFill/>
-        </p:spPr>
-        <p:txBody>
-          <a:bodyPr wrap="square" anchor="ctr" lIns="0" rIns="0" tIns="0" bIns="0">
-            <a:spAutoFit/>
-          </a:bodyPr>
-          <a:lstStyle/>
-          <a:p>
-            <a:pPr algn="r"/>
-            <a:r>
-              <a:rPr sz="900">
-                <a:solidFill>
-                  <a:srgbClr val="6B7280"/>
-                </a:solidFill>
-                <a:latin typeface="맑은 고딕"/>
-                <a:ea typeface="맑은 고딕"/>
-              </a:rPr>
-              <a:t>5</a:t>
-            </a:r>
-          </a:p>
-        </p:txBody>
-      </p:sp>
-    </p:spTree>
-  </p:cSld>
-  <p:clrMapOvr>
-    <a:masterClrMapping/>
-  </p:clrMapOvr>
-</p:sld>
-</file>
-
-<file path=ppt/slides/slide6.xml><?xml version="1.0" encoding="utf-8"?>
-<p:sld xmlns:a="http://schemas.openxmlformats.org/drawingml/2006/main" xmlns:p="http://schemas.openxmlformats.org/presentationml/2006/main" xmlns:r="http://schemas.openxmlformats.org/officeDocument/2006/relationships">
-  <p:cSld>
-    <p:bg>
-      <p:bgPr>
-        <a:solidFill>
-          <a:srgbClr val="FFFFFF"/>
-        </a:solidFill>
-        <a:effectLst/>
-      </p:bgPr>
-    </p:bg>
-    <p:spTree>
-      <p:nvGrpSpPr>
-        <p:cNvPr id="1" name=""/>
-        <p:cNvGrpSpPr/>
-        <p:nvPr/>
-      </p:nvGrpSpPr>
-      <p:grpSpPr/>
-      <p:sp>
-        <p:nvSpPr>
-          <p:cNvPr id="2" name="Rectangle 1"/>
+      <p:sp>
+        <p:nvSpPr>
+          <p:cNvPr id="10" name="Rectangle 9"/>
           <p:cNvSpPr/>
           <p:nvPr/>
         </p:nvSpPr>
         <p:spPr>
           <a:xfrm>
-            <a:off x="640080" y="502920"/>
-            <a:ext cx="123444" cy="768096"/>
+            <a:off x="868680" y="5102352"/>
+            <a:ext cx="2372868" cy="64008"/>
           </a:xfrm>
           <a:prstGeom prst="rect">
             <a:avLst/>
           </a:prstGeom>
           <a:solidFill>
-            <a:srgbClr val="CFD4DB"/>
+            <a:srgbClr val="5B9BD5"/>
           </a:solidFill>
           <a:ln>
             <a:noFill/>
@@ -6381,182 +6938,14 @@
       </p:sp>
       <p:sp>
         <p:nvSpPr>
-          <p:cNvPr id="3" name="TextBox 2"/>
+          <p:cNvPr id="11" name="TextBox 10"/>
           <p:cNvSpPr txBox="1"/>
           <p:nvPr/>
         </p:nvSpPr>
         <p:spPr>
           <a:xfrm>
-            <a:off x="932688" y="448056"/>
-            <a:ext cx="10881360" cy="256032"/>
-          </a:xfrm>
-          <a:prstGeom prst="rect">
-            <a:avLst/>
-          </a:prstGeom>
-          <a:noFill/>
-        </p:spPr>
-        <p:txBody>
-          <a:bodyPr wrap="square" anchor="t" lIns="0" rIns="0" tIns="0" bIns="0">
-            <a:spAutoFit/>
-          </a:bodyPr>
-          <a:lstStyle/>
-          <a:p>
-            <a:pPr algn="l"/>
-            <a:r>
-              <a:rPr sz="1300" b="1">
-                <a:solidFill>
-                  <a:srgbClr val="8A929E"/>
-                </a:solidFill>
-                <a:latin typeface="맑은 고딕"/>
-                <a:ea typeface="맑은 고딕"/>
-              </a:rPr>
-              <a:t>P3 | 파이프라인/데이터</a:t>
-            </a:r>
-          </a:p>
-        </p:txBody>
-      </p:sp>
-      <p:sp>
-        <p:nvSpPr>
-          <p:cNvPr id="4" name="TextBox 3"/>
-          <p:cNvSpPr txBox="1"/>
-          <p:nvPr/>
-        </p:nvSpPr>
-        <p:spPr>
-          <a:xfrm>
-            <a:off x="932688" y="704088"/>
-            <a:ext cx="10881360" cy="603504"/>
-          </a:xfrm>
-          <a:prstGeom prst="rect">
-            <a:avLst/>
-          </a:prstGeom>
-          <a:noFill/>
-        </p:spPr>
-        <p:txBody>
-          <a:bodyPr wrap="square" anchor="t" lIns="0" rIns="0" tIns="0" bIns="0">
-            <a:spAutoFit/>
-          </a:bodyPr>
-          <a:lstStyle/>
-          <a:p>
-            <a:pPr algn="l"/>
-            <a:r>
-              <a:rPr sz="3100" b="1">
-                <a:solidFill>
-                  <a:srgbClr val="0F1E3D"/>
-                </a:solidFill>
-                <a:latin typeface="맑은 고딕"/>
-                <a:ea typeface="맑은 고딕"/>
-              </a:rPr>
-              <a:t>생성 파이프라인과 데이터 구성</a:t>
-            </a:r>
-          </a:p>
-        </p:txBody>
-      </p:sp>
-      <p:sp>
-        <p:nvSpPr>
-          <p:cNvPr id="5" name="TextBox 4"/>
-          <p:cNvSpPr txBox="1"/>
-          <p:nvPr/>
-        </p:nvSpPr>
-        <p:spPr>
-          <a:xfrm>
-            <a:off x="640080" y="1828800"/>
-            <a:ext cx="10972800" cy="640080"/>
-          </a:xfrm>
-          <a:prstGeom prst="rect">
-            <a:avLst/>
-          </a:prstGeom>
-          <a:noFill/>
-        </p:spPr>
-        <p:txBody>
-          <a:bodyPr wrap="square" anchor="t" lIns="0" rIns="0" tIns="0" bIns="0">
-            <a:spAutoFit/>
-          </a:bodyPr>
-          <a:lstStyle/>
-          <a:p>
-            <a:pPr marL="274320" indent="-274320">
-              <a:spcAft>
-                <a:spcPts val="500"/>
-              </a:spcAft>
-            </a:pPr>
-            <a:r>
-              <a:rPr sz="1400" b="0">
-                <a:solidFill>
-                  <a:srgbClr val="5B9BD5"/>
-                </a:solidFill>
-                <a:latin typeface="맑은 고딕"/>
-                <a:ea typeface="맑은 고딕"/>
-              </a:rPr>
-              <a:t>●  </a:t>
-            </a:r>
-            <a:r>
-              <a:rPr sz="1400">
-                <a:solidFill>
-                  <a:srgbClr val="1A1F2E"/>
-                </a:solidFill>
-                <a:latin typeface="맑은 고딕"/>
-                <a:ea typeface="맑은 고딕"/>
-              </a:rPr>
-              <a:t>chart 정의부터 이미지 렌더까지 규칙 기반으로 생성하고, 이상 강도는 보이도록 floor 보정합니다</a:t>
-            </a:r>
-          </a:p>
-        </p:txBody>
-      </p:sp>
-      <p:sp>
-        <p:nvSpPr>
-          <p:cNvPr id="6" name="Rectangle 5"/>
-          <p:cNvSpPr/>
-          <p:nvPr/>
-        </p:nvSpPr>
-        <p:spPr>
-          <a:xfrm>
-            <a:off x="640080" y="2596896"/>
-            <a:ext cx="5303520" cy="3429000"/>
-          </a:xfrm>
-          <a:prstGeom prst="rect">
-            <a:avLst/>
-          </a:prstGeom>
-          <a:solidFill>
-            <a:srgbClr val="FFFFFF"/>
-          </a:solidFill>
-          <a:ln w="15875">
-            <a:solidFill>
-              <a:srgbClr val="333740"/>
-            </a:solidFill>
-          </a:ln>
-          <a:effectLst/>
-        </p:spPr>
-        <p:style>
-          <a:lnRef idx="1">
-            <a:schemeClr val="accent1"/>
-          </a:lnRef>
-          <a:fillRef idx="3">
-            <a:schemeClr val="accent1"/>
-          </a:fillRef>
-          <a:effectRef idx="2">
-            <a:schemeClr val="accent1"/>
-          </a:effectRef>
-          <a:fontRef idx="minor">
-            <a:schemeClr val="lt1"/>
-          </a:fontRef>
-        </p:style>
-        <p:txBody>
-          <a:bodyPr rtlCol="0" anchor="ctr"/>
-          <a:lstStyle/>
-          <a:p>
-            <a:pPr algn="ctr"/>
-          </a:p>
-        </p:txBody>
-      </p:sp>
-      <p:sp>
-        <p:nvSpPr>
-          <p:cNvPr id="7" name="TextBox 6"/>
-          <p:cNvSpPr txBox="1"/>
-          <p:nvPr/>
-        </p:nvSpPr>
-        <p:spPr>
-          <a:xfrm>
-            <a:off x="914400" y="2724912"/>
-            <a:ext cx="4809744" cy="3172968"/>
+            <a:off x="868680" y="5212080"/>
+            <a:ext cx="2372868" cy="329184"/>
           </a:xfrm>
           <a:prstGeom prst="rect">
             <a:avLst/>
@@ -6569,173 +6958,30 @@
           </a:bodyPr>
           <a:lstStyle/>
           <a:p>
-            <a:pPr algn="l"/>
-            <a:r>
-              <a:rPr sz="1450" b="1">
+            <a:pPr algn="ctr"/>
+            <a:r>
+              <a:rPr sz="1600" b="1">
                 <a:solidFill>
                   <a:srgbClr val="0F1E3D"/>
                 </a:solidFill>
                 <a:latin typeface="맑은 고딕"/>
                 <a:ea typeface="맑은 고딕"/>
               </a:rPr>
-              <a:t>생성 파이프라인</a:t>
-            </a:r>
-          </a:p>
-          <a:p>
-            <a:pPr algn="l"/>
-            <a:r>
-              <a:rPr sz="500">
-                <a:solidFill>
-                  <a:srgbClr val="FFFFFF"/>
-                </a:solidFill>
-                <a:latin typeface="맑은 고딕"/>
-                <a:ea typeface="맑은 고딕"/>
-              </a:rPr>
-              <a:t> </a:t>
-            </a:r>
-          </a:p>
-          <a:p>
-            <a:pPr algn="l"/>
-            <a:r>
-              <a:rPr sz="1350" b="1" i="0">
-                <a:solidFill>
-                  <a:srgbClr val="0F1E3D"/>
-                </a:solidFill>
-                <a:latin typeface="맑은 고딕"/>
-                <a:ea typeface="맑은 고딕"/>
-              </a:rPr>
-              <a:t>① chart 정의</a:t>
-            </a:r>
-          </a:p>
-          <a:p>
-            <a:pPr algn="l"/>
-            <a:r>
-              <a:rPr sz="1300">
-                <a:solidFill>
-                  <a:srgbClr val="1A1F2E"/>
-                </a:solidFill>
-                <a:latin typeface="Consolas"/>
-                <a:ea typeface="Consolas"/>
-              </a:rPr>
-              <a:t>    device x step x item, fleet legend(eqp/chamber/recipe)</a:t>
-            </a:r>
-          </a:p>
-          <a:p>
-            <a:pPr algn="l"/>
-            <a:r>
-              <a:rPr sz="1350" b="1" i="0">
-                <a:solidFill>
-                  <a:srgbClr val="0F1E3D"/>
-                </a:solidFill>
-                <a:latin typeface="맑은 고딕"/>
-                <a:ea typeface="맑은 고딕"/>
-              </a:rPr>
-              <a:t>② episode 조립</a:t>
-            </a:r>
-          </a:p>
-          <a:p>
-            <a:pPr algn="l"/>
-            <a:r>
-              <a:rPr sz="1300">
-                <a:solidFill>
-                  <a:srgbClr val="1A1F2E"/>
-                </a:solidFill>
-                <a:latin typeface="맑은 고딕"/>
-                <a:ea typeface="맑은 고딕"/>
-              </a:rPr>
-              <a:t>    12~25개, 영역 밀도 샘플링(밀집/희소/결핍)</a:t>
-            </a:r>
-          </a:p>
-          <a:p>
-            <a:pPr algn="l"/>
-            <a:r>
-              <a:rPr sz="1350" b="1" i="0">
-                <a:solidFill>
-                  <a:srgbClr val="0F1E3D"/>
-                </a:solidFill>
-                <a:latin typeface="맑은 고딕"/>
-                <a:ea typeface="맑은 고딕"/>
-              </a:rPr>
-              <a:t>③ 노이즈</a:t>
-            </a:r>
-          </a:p>
-          <a:p>
-            <a:pPr algn="l"/>
-            <a:r>
-              <a:rPr sz="1300">
-                <a:solidFill>
-                  <a:srgbClr val="1A1F2E"/>
-                </a:solidFill>
-                <a:latin typeface="맑은 고딕"/>
-                <a:ea typeface="맑은 고딕"/>
-              </a:rPr>
-              <a:t>    Gaussian / Correlated / Laplacian 중 1종</a:t>
-            </a:r>
-          </a:p>
-          <a:p>
-            <a:pPr algn="l"/>
-            <a:r>
-              <a:rPr sz="1350" b="1" i="0">
-                <a:solidFill>
-                  <a:srgbClr val="0F1E3D"/>
-                </a:solidFill>
-                <a:latin typeface="맑은 고딕"/>
-                <a:ea typeface="맑은 고딕"/>
-              </a:rPr>
-              <a:t>④ 이상 주입</a:t>
-            </a:r>
-          </a:p>
-          <a:p>
-            <a:pPr algn="l"/>
-            <a:r>
-              <a:rPr sz="1300">
-                <a:solidFill>
-                  <a:srgbClr val="1A1F2E"/>
-                </a:solidFill>
-                <a:latin typeface="맑은 고딕"/>
-                <a:ea typeface="맑은 고딕"/>
-              </a:rPr>
-              <a:t>    avg/std/spike/drift/context (오른쪽 끝)</a:t>
-            </a:r>
-          </a:p>
-          <a:p>
-            <a:pPr algn="l"/>
-            <a:r>
-              <a:rPr sz="1350" b="1" i="0">
-                <a:solidFill>
-                  <a:srgbClr val="0F1E3D"/>
-                </a:solidFill>
-                <a:latin typeface="맑은 고딕"/>
-                <a:ea typeface="맑은 고딕"/>
-              </a:rPr>
-              <a:t>⑤ 렌더</a:t>
-            </a:r>
-          </a:p>
-          <a:p>
-            <a:pPr algn="l"/>
-            <a:r>
-              <a:rPr sz="1300">
-                <a:solidFill>
-                  <a:srgbClr val="1A1F2E"/>
-                </a:solidFill>
-                <a:latin typeface="맑은 고딕"/>
-                <a:ea typeface="맑은 고딕"/>
-              </a:rPr>
-              <a:t>    강도 floor 보정 → 학습/평가 trend 이미지</a:t>
-            </a:r>
-          </a:p>
-        </p:txBody>
-      </p:sp>
-      <p:sp>
-        <p:nvSpPr>
-          <p:cNvPr id="8" name="TextBox 7"/>
+              <a:t>2-stage</a:t>
+            </a:r>
+          </a:p>
+        </p:txBody>
+      </p:sp>
+      <p:sp>
+        <p:nvSpPr>
+          <p:cNvPr id="12" name="TextBox 11"/>
           <p:cNvSpPr txBox="1"/>
           <p:nvPr/>
         </p:nvSpPr>
         <p:spPr>
           <a:xfrm>
-            <a:off x="640080" y="6053328"/>
-            <a:ext cx="5303520" cy="329184"/>
+            <a:off x="868680" y="5522976"/>
+            <a:ext cx="2372868" cy="256032"/>
           </a:xfrm>
           <a:prstGeom prst="rect">
             <a:avLst/>
@@ -6750,753 +6996,27 @@
           <a:p>
             <a:pPr algn="ctr"/>
             <a:r>
-              <a:rPr sz="1250" b="1">
-                <a:solidFill>
-                  <a:srgbClr val="0F1E3D"/>
-                </a:solidFill>
-                <a:latin typeface="맑은 고딕"/>
-                <a:ea typeface="맑은 고딕"/>
-              </a:rPr>
-              <a:t>규칙 기반 생성 흐름</a:t>
-            </a:r>
-          </a:p>
-        </p:txBody>
-      </p:sp>
-      <p:sp>
-        <p:nvSpPr>
-          <p:cNvPr id="9" name="Rectangle 8"/>
+              <a:rPr sz="900">
+                <a:solidFill>
+                  <a:srgbClr val="6B7280"/>
+                </a:solidFill>
+                <a:latin typeface="맑은 고딕"/>
+                <a:ea typeface="맑은 고딕"/>
+              </a:rPr>
+              <a:t>binary gate → 유형 진단</a:t>
+            </a:r>
+          </a:p>
+        </p:txBody>
+      </p:sp>
+      <p:sp>
+        <p:nvSpPr>
+          <p:cNvPr id="13" name="Rectangle 12"/>
           <p:cNvSpPr/>
           <p:nvPr/>
         </p:nvSpPr>
         <p:spPr>
           <a:xfrm>
-            <a:off x="6309360" y="2596896"/>
-            <a:ext cx="5303520" cy="3429000"/>
-          </a:xfrm>
-          <a:prstGeom prst="rect">
-            <a:avLst/>
-          </a:prstGeom>
-          <a:solidFill>
-            <a:srgbClr val="FFFFFF"/>
-          </a:solidFill>
-          <a:ln w="15875">
-            <a:solidFill>
-              <a:srgbClr val="333740"/>
-            </a:solidFill>
-          </a:ln>
-          <a:effectLst/>
-        </p:spPr>
-        <p:style>
-          <a:lnRef idx="1">
-            <a:schemeClr val="accent1"/>
-          </a:lnRef>
-          <a:fillRef idx="3">
-            <a:schemeClr val="accent1"/>
-          </a:fillRef>
-          <a:effectRef idx="2">
-            <a:schemeClr val="accent1"/>
-          </a:effectRef>
-          <a:fontRef idx="minor">
-            <a:schemeClr val="lt1"/>
-          </a:fontRef>
-        </p:style>
-        <p:txBody>
-          <a:bodyPr rtlCol="0" anchor="ctr"/>
-          <a:lstStyle/>
-          <a:p>
-            <a:pPr algn="ctr"/>
-          </a:p>
-        </p:txBody>
-      </p:sp>
-      <p:sp>
-        <p:nvSpPr>
-          <p:cNvPr id="10" name="TextBox 9"/>
-          <p:cNvSpPr txBox="1"/>
-          <p:nvPr/>
-        </p:nvSpPr>
-        <p:spPr>
-          <a:xfrm>
-            <a:off x="6583680" y="2724912"/>
-            <a:ext cx="4809744" cy="3172968"/>
-          </a:xfrm>
-          <a:prstGeom prst="rect">
-            <a:avLst/>
-          </a:prstGeom>
-          <a:noFill/>
-        </p:spPr>
-        <p:txBody>
-          <a:bodyPr wrap="square" anchor="ctr" lIns="0" rIns="0" tIns="0" bIns="0">
-            <a:spAutoFit/>
-          </a:bodyPr>
-          <a:lstStyle/>
-          <a:p>
-            <a:pPr algn="l"/>
-            <a:r>
-              <a:rPr sz="1450" b="1">
-                <a:solidFill>
-                  <a:srgbClr val="0F1E3D"/>
-                </a:solidFill>
-                <a:latin typeface="맑은 고딕"/>
-                <a:ea typeface="맑은 고딕"/>
-              </a:rPr>
-              <a:t>데이터 구성</a:t>
-            </a:r>
-          </a:p>
-          <a:p>
-            <a:pPr algn="l"/>
-            <a:r>
-              <a:rPr sz="500">
-                <a:solidFill>
-                  <a:srgbClr val="FFFFFF"/>
-                </a:solidFill>
-                <a:latin typeface="맑은 고딕"/>
-                <a:ea typeface="맑은 고딕"/>
-              </a:rPr>
-              <a:t> </a:t>
-            </a:r>
-          </a:p>
-          <a:p>
-            <a:pPr algn="l"/>
-            <a:r>
-              <a:rPr sz="1350" b="1" i="0">
-                <a:solidFill>
-                  <a:srgbClr val="0F1E3D"/>
-                </a:solidFill>
-                <a:latin typeface="맑은 고딕"/>
-                <a:ea typeface="맑은 고딕"/>
-              </a:rPr>
-              <a:t>규모</a:t>
-            </a:r>
-          </a:p>
-          <a:p>
-            <a:pPr algn="l"/>
-            <a:r>
-              <a:rPr sz="1300">
-                <a:solidFill>
-                  <a:srgbClr val="1A1F2E"/>
-                </a:solidFill>
-                <a:latin typeface="맑은 고딕"/>
-                <a:ea typeface="맑은 고딕"/>
-              </a:rPr>
-              <a:t>    정상 3,500 + 이상 3,500 = 7,000</a:t>
-            </a:r>
-          </a:p>
-          <a:p>
-            <a:pPr algn="l"/>
-            <a:r>
-              <a:rPr sz="1300">
-                <a:solidFill>
-                  <a:srgbClr val="1A1F2E"/>
-                </a:solidFill>
-                <a:latin typeface="맑은 고딕"/>
-                <a:ea typeface="맑은 고딕"/>
-              </a:rPr>
-              <a:t>    별도 test 1,500 (이상 5종 stratified)</a:t>
-            </a:r>
-          </a:p>
-          <a:p>
-            <a:pPr algn="l"/>
-            <a:r>
-              <a:rPr sz="1350" b="1" i="0">
-                <a:solidFill>
-                  <a:srgbClr val="0F1E3D"/>
-                </a:solidFill>
-                <a:latin typeface="맑은 고딕"/>
-                <a:ea typeface="맑은 고딕"/>
-              </a:rPr>
-              <a:t>평가 난이도</a:t>
-            </a:r>
-          </a:p>
-          <a:p>
-            <a:pPr algn="l"/>
-            <a:r>
-              <a:rPr sz="1300">
-                <a:solidFill>
-                  <a:srgbClr val="1A1F2E"/>
-                </a:solidFill>
-                <a:latin typeface="맑은 고딕"/>
-                <a:ea typeface="맑은 고딕"/>
-              </a:rPr>
-              <a:t>    test/val은 이상 강도를 0.8배로 낮춰</a:t>
-            </a:r>
-          </a:p>
-          <a:p>
-            <a:pPr algn="l"/>
-            <a:r>
-              <a:rPr sz="1300">
-                <a:solidFill>
-                  <a:srgbClr val="1A1F2E"/>
-                </a:solidFill>
-                <a:latin typeface="맑은 고딕"/>
-                <a:ea typeface="맑은 고딕"/>
-              </a:rPr>
-              <a:t>    더 어려운 평가셋 구성</a:t>
-            </a:r>
-          </a:p>
-          <a:p>
-            <a:pPr algn="l"/>
-            <a:r>
-              <a:rPr sz="1350" b="1" i="0">
-                <a:solidFill>
-                  <a:srgbClr val="0F1E3D"/>
-                </a:solidFill>
-                <a:latin typeface="맑은 고딕"/>
-                <a:ea typeface="맑은 고딕"/>
-              </a:rPr>
-              <a:t>정상 보호</a:t>
-            </a:r>
-          </a:p>
-          <a:p>
-            <a:pPr algn="l"/>
-            <a:r>
-              <a:rPr sz="1300">
-                <a:solidFill>
-                  <a:srgbClr val="1A1F2E"/>
-                </a:solidFill>
-                <a:latin typeface="맑은 고딕"/>
-                <a:ea typeface="맑은 고딕"/>
-              </a:rPr>
-              <a:t>    정상은 fleet 중심에서 벗어나지 않게 강제</a:t>
-            </a:r>
-          </a:p>
-        </p:txBody>
-      </p:sp>
-      <p:sp>
-        <p:nvSpPr>
-          <p:cNvPr id="11" name="TextBox 10"/>
-          <p:cNvSpPr txBox="1"/>
-          <p:nvPr/>
-        </p:nvSpPr>
-        <p:spPr>
-          <a:xfrm>
-            <a:off x="6309360" y="6053328"/>
-            <a:ext cx="5303520" cy="329184"/>
-          </a:xfrm>
-          <a:prstGeom prst="rect">
-            <a:avLst/>
-          </a:prstGeom>
-          <a:noFill/>
-        </p:spPr>
-        <p:txBody>
-          <a:bodyPr wrap="square" anchor="ctr" lIns="0" rIns="0" tIns="0" bIns="0">
-            <a:spAutoFit/>
-          </a:bodyPr>
-          <a:lstStyle/>
-          <a:p>
-            <a:pPr algn="ctr"/>
-            <a:r>
-              <a:rPr sz="1250" b="1">
-                <a:solidFill>
-                  <a:srgbClr val="0F1E3D"/>
-                </a:solidFill>
-                <a:latin typeface="맑은 고딕"/>
-                <a:ea typeface="맑은 고딕"/>
-              </a:rPr>
-              <a:t>정상 3,500 + 이상 3,500 + test 1,500</a:t>
-            </a:r>
-          </a:p>
-        </p:txBody>
-      </p:sp>
-      <p:sp>
-        <p:nvSpPr>
-          <p:cNvPr id="12" name="TextBox 11"/>
-          <p:cNvSpPr txBox="1"/>
-          <p:nvPr/>
-        </p:nvSpPr>
-        <p:spPr>
-          <a:xfrm>
-            <a:off x="457200" y="6437376"/>
-            <a:ext cx="8229600" cy="292608"/>
-          </a:xfrm>
-          <a:prstGeom prst="rect">
-            <a:avLst/>
-          </a:prstGeom>
-          <a:noFill/>
-        </p:spPr>
-        <p:txBody>
-          <a:bodyPr wrap="square" anchor="ctr" lIns="0" rIns="0" tIns="0" bIns="0">
-            <a:spAutoFit/>
-          </a:bodyPr>
-          <a:lstStyle/>
-          <a:p>
-            <a:pPr algn="l"/>
-            <a:r>
-              <a:rPr sz="900">
-                <a:solidFill>
-                  <a:srgbClr val="6B7280"/>
-                </a:solidFill>
-                <a:latin typeface="맑은 고딕"/>
-                <a:ea typeface="맑은 고딕"/>
-              </a:rPr>
-              <a:t>최호길 | QIE Data Science | AI Specialist 인증</a:t>
-            </a:r>
-          </a:p>
-        </p:txBody>
-      </p:sp>
-      <p:sp>
-        <p:nvSpPr>
-          <p:cNvPr id="13" name="TextBox 12"/>
-          <p:cNvSpPr txBox="1"/>
-          <p:nvPr/>
-        </p:nvSpPr>
-        <p:spPr>
-          <a:xfrm>
-            <a:off x="10972800" y="6437376"/>
-            <a:ext cx="758952" cy="292608"/>
-          </a:xfrm>
-          <a:prstGeom prst="rect">
-            <a:avLst/>
-          </a:prstGeom>
-          <a:noFill/>
-        </p:spPr>
-        <p:txBody>
-          <a:bodyPr wrap="square" anchor="ctr" lIns="0" rIns="0" tIns="0" bIns="0">
-            <a:spAutoFit/>
-          </a:bodyPr>
-          <a:lstStyle/>
-          <a:p>
-            <a:pPr algn="r"/>
-            <a:r>
-              <a:rPr sz="900">
-                <a:solidFill>
-                  <a:srgbClr val="6B7280"/>
-                </a:solidFill>
-                <a:latin typeface="맑은 고딕"/>
-                <a:ea typeface="맑은 고딕"/>
-              </a:rPr>
-              <a:t>6</a:t>
-            </a:r>
-          </a:p>
-        </p:txBody>
-      </p:sp>
-    </p:spTree>
-  </p:cSld>
-  <p:clrMapOvr>
-    <a:masterClrMapping/>
-  </p:clrMapOvr>
-</p:sld>
-</file>
-
-<file path=ppt/slides/slide7.xml><?xml version="1.0" encoding="utf-8"?>
-<p:sld xmlns:a="http://schemas.openxmlformats.org/drawingml/2006/main" xmlns:p="http://schemas.openxmlformats.org/presentationml/2006/main" xmlns:r="http://schemas.openxmlformats.org/officeDocument/2006/relationships">
-  <p:cSld>
-    <p:bg>
-      <p:bgPr>
-        <a:solidFill>
-          <a:srgbClr val="FFFFFF"/>
-        </a:solidFill>
-        <a:effectLst/>
-      </p:bgPr>
-    </p:bg>
-    <p:spTree>
-      <p:nvGrpSpPr>
-        <p:cNvPr id="1" name=""/>
-        <p:cNvGrpSpPr/>
-        <p:nvPr/>
-      </p:nvGrpSpPr>
-      <p:grpSpPr/>
-      <p:sp>
-        <p:nvSpPr>
-          <p:cNvPr id="2" name="Rectangle 1"/>
-          <p:cNvSpPr/>
-          <p:nvPr/>
-        </p:nvSpPr>
-        <p:spPr>
-          <a:xfrm>
-            <a:off x="640080" y="502920"/>
-            <a:ext cx="123444" cy="768096"/>
-          </a:xfrm>
-          <a:prstGeom prst="rect">
-            <a:avLst/>
-          </a:prstGeom>
-          <a:solidFill>
-            <a:srgbClr val="CFD4DB"/>
-          </a:solidFill>
-          <a:ln>
-            <a:noFill/>
-          </a:ln>
-          <a:effectLst/>
-        </p:spPr>
-        <p:style>
-          <a:lnRef idx="1">
-            <a:schemeClr val="accent1"/>
-          </a:lnRef>
-          <a:fillRef idx="3">
-            <a:schemeClr val="accent1"/>
-          </a:fillRef>
-          <a:effectRef idx="2">
-            <a:schemeClr val="accent1"/>
-          </a:effectRef>
-          <a:fontRef idx="minor">
-            <a:schemeClr val="lt1"/>
-          </a:fontRef>
-        </p:style>
-        <p:txBody>
-          <a:bodyPr rtlCol="0" anchor="ctr"/>
-          <a:lstStyle/>
-          <a:p>
-            <a:pPr algn="ctr"/>
-          </a:p>
-        </p:txBody>
-      </p:sp>
-      <p:sp>
-        <p:nvSpPr>
-          <p:cNvPr id="3" name="TextBox 2"/>
-          <p:cNvSpPr txBox="1"/>
-          <p:nvPr/>
-        </p:nvSpPr>
-        <p:spPr>
-          <a:xfrm>
-            <a:off x="932688" y="448056"/>
-            <a:ext cx="10881360" cy="256032"/>
-          </a:xfrm>
-          <a:prstGeom prst="rect">
-            <a:avLst/>
-          </a:prstGeom>
-          <a:noFill/>
-        </p:spPr>
-        <p:txBody>
-          <a:bodyPr wrap="square" anchor="t" lIns="0" rIns="0" tIns="0" bIns="0">
-            <a:spAutoFit/>
-          </a:bodyPr>
-          <a:lstStyle/>
-          <a:p>
-            <a:pPr algn="l"/>
-            <a:r>
-              <a:rPr sz="1300" b="1">
-                <a:solidFill>
-                  <a:srgbClr val="8A929E"/>
-                </a:solidFill>
-                <a:latin typeface="맑은 고딕"/>
-                <a:ea typeface="맑은 고딕"/>
-              </a:rPr>
-              <a:t>P3 | 1차 binary gate (PoC)</a:t>
-            </a:r>
-          </a:p>
-        </p:txBody>
-      </p:sp>
-      <p:sp>
-        <p:nvSpPr>
-          <p:cNvPr id="4" name="TextBox 3"/>
-          <p:cNvSpPr txBox="1"/>
-          <p:nvPr/>
-        </p:nvSpPr>
-        <p:spPr>
-          <a:xfrm>
-            <a:off x="932688" y="704088"/>
-            <a:ext cx="10881360" cy="603504"/>
-          </a:xfrm>
-          <a:prstGeom prst="rect">
-            <a:avLst/>
-          </a:prstGeom>
-          <a:noFill/>
-        </p:spPr>
-        <p:txBody>
-          <a:bodyPr wrap="square" anchor="t" lIns="0" rIns="0" tIns="0" bIns="0">
-            <a:spAutoFit/>
-          </a:bodyPr>
-          <a:lstStyle/>
-          <a:p>
-            <a:pPr algn="l"/>
-            <a:r>
-              <a:rPr sz="3100" b="1">
-                <a:solidFill>
-                  <a:srgbClr val="0F1E3D"/>
-                </a:solidFill>
-                <a:latin typeface="맑은 고딕"/>
-                <a:ea typeface="맑은 고딕"/>
-              </a:rPr>
-              <a:t>생성 데이터로 정상/이상 1차 판정 검증</a:t>
-            </a:r>
-          </a:p>
-        </p:txBody>
-      </p:sp>
-      <p:sp>
-        <p:nvSpPr>
-          <p:cNvPr id="5" name="Rectangle 4"/>
-          <p:cNvSpPr/>
-          <p:nvPr/>
-        </p:nvSpPr>
-        <p:spPr>
-          <a:xfrm>
-            <a:off x="640080" y="1783080"/>
-            <a:ext cx="5349240" cy="640080"/>
-          </a:xfrm>
-          <a:prstGeom prst="rect">
-            <a:avLst/>
-          </a:prstGeom>
-          <a:solidFill>
-            <a:srgbClr val="0F1E3D"/>
-          </a:solidFill>
-          <a:ln>
-            <a:noFill/>
-          </a:ln>
-          <a:effectLst/>
-        </p:spPr>
-        <p:style>
-          <a:lnRef idx="1">
-            <a:schemeClr val="accent1"/>
-          </a:lnRef>
-          <a:fillRef idx="3">
-            <a:schemeClr val="accent1"/>
-          </a:fillRef>
-          <a:effectRef idx="2">
-            <a:schemeClr val="accent1"/>
-          </a:effectRef>
-          <a:fontRef idx="minor">
-            <a:schemeClr val="lt1"/>
-          </a:fontRef>
-        </p:style>
-        <p:txBody>
-          <a:bodyPr rtlCol="0" anchor="ctr"/>
-          <a:lstStyle/>
-          <a:p>
-            <a:pPr algn="ctr"/>
-          </a:p>
-        </p:txBody>
-      </p:sp>
-      <p:sp>
-        <p:nvSpPr>
-          <p:cNvPr id="6" name="TextBox 5"/>
-          <p:cNvSpPr txBox="1"/>
-          <p:nvPr/>
-        </p:nvSpPr>
-        <p:spPr>
-          <a:xfrm>
-            <a:off x="868680" y="1783080"/>
-            <a:ext cx="4983480" cy="640080"/>
-          </a:xfrm>
-          <a:prstGeom prst="rect">
-            <a:avLst/>
-          </a:prstGeom>
-          <a:noFill/>
-        </p:spPr>
-        <p:txBody>
-          <a:bodyPr wrap="square" anchor="ctr" lIns="0" rIns="0" tIns="0" bIns="0">
-            <a:spAutoFit/>
-          </a:bodyPr>
-          <a:lstStyle/>
-          <a:p>
-            <a:pPr algn="l"/>
-            <a:r>
-              <a:rPr sz="1550" b="1">
-                <a:solidFill>
-                  <a:srgbClr val="FFFFFF"/>
-                </a:solidFill>
-                <a:latin typeface="맑은 고딕"/>
-                <a:ea typeface="맑은 고딕"/>
-              </a:rPr>
-              <a:t>모델 — 1차 binary gate</a:t>
-            </a:r>
-          </a:p>
-        </p:txBody>
-      </p:sp>
-      <p:sp>
-        <p:nvSpPr>
-          <p:cNvPr id="7" name="Rectangle 6"/>
-          <p:cNvSpPr/>
-          <p:nvPr/>
-        </p:nvSpPr>
-        <p:spPr>
-          <a:xfrm>
-            <a:off x="640080" y="2423160"/>
-            <a:ext cx="5349240" cy="3520440"/>
-          </a:xfrm>
-          <a:prstGeom prst="rect">
-            <a:avLst/>
-          </a:prstGeom>
-          <a:solidFill>
-            <a:srgbClr val="F2F5FA"/>
-          </a:solidFill>
-          <a:ln>
-            <a:noFill/>
-          </a:ln>
-          <a:effectLst/>
-        </p:spPr>
-        <p:style>
-          <a:lnRef idx="1">
-            <a:schemeClr val="accent1"/>
-          </a:lnRef>
-          <a:fillRef idx="3">
-            <a:schemeClr val="accent1"/>
-          </a:fillRef>
-          <a:effectRef idx="2">
-            <a:schemeClr val="accent1"/>
-          </a:effectRef>
-          <a:fontRef idx="minor">
-            <a:schemeClr val="lt1"/>
-          </a:fontRef>
-        </p:style>
-        <p:txBody>
-          <a:bodyPr rtlCol="0" anchor="ctr"/>
-          <a:lstStyle/>
-          <a:p>
-            <a:pPr algn="ctr"/>
-          </a:p>
-        </p:txBody>
-      </p:sp>
-      <p:sp>
-        <p:nvSpPr>
-          <p:cNvPr id="8" name="TextBox 7"/>
-          <p:cNvSpPr txBox="1"/>
-          <p:nvPr/>
-        </p:nvSpPr>
-        <p:spPr>
-          <a:xfrm>
-            <a:off x="868680" y="2606040"/>
-            <a:ext cx="4892040" cy="2276856"/>
-          </a:xfrm>
-          <a:prstGeom prst="rect">
-            <a:avLst/>
-          </a:prstGeom>
-          <a:noFill/>
-        </p:spPr>
-        <p:txBody>
-          <a:bodyPr wrap="square" anchor="t" lIns="0" rIns="0" tIns="0" bIns="0">
-            <a:spAutoFit/>
-          </a:bodyPr>
-          <a:lstStyle/>
-          <a:p>
-            <a:pPr marL="274320" indent="-274320">
-              <a:lnSpc>
-                <a:spcPct val="110000"/>
-              </a:lnSpc>
-              <a:spcAft>
-                <a:spcPts val="400"/>
-              </a:spcAft>
-            </a:pPr>
-            <a:r>
-              <a:rPr sz="1300" b="0">
-                <a:solidFill>
-                  <a:srgbClr val="5B9BD5"/>
-                </a:solidFill>
-                <a:latin typeface="맑은 고딕"/>
-                <a:ea typeface="맑은 고딕"/>
-              </a:rPr>
-              <a:t>●  </a:t>
-            </a:r>
-            <a:r>
-              <a:rPr sz="1300">
-                <a:solidFill>
-                  <a:srgbClr val="1A1F2E"/>
-                </a:solidFill>
-                <a:latin typeface="맑은 고딕"/>
-                <a:ea typeface="맑은 고딕"/>
-              </a:rPr>
-              <a:t>trend 이미지를 </a:t>
-            </a:r>
-            <a:r>
-              <a:rPr sz="1300" b="1">
-                <a:solidFill>
-                  <a:srgbClr val="0F1E3D"/>
-                </a:solidFill>
-                <a:latin typeface="맑은 고딕"/>
-                <a:ea typeface="맑은 고딕"/>
-              </a:rPr>
-              <a:t>ConvNeXtV2-Tiny</a:t>
-            </a:r>
-            <a:r>
-              <a:rPr sz="1300">
-                <a:solidFill>
-                  <a:srgbClr val="1A1F2E"/>
-                </a:solidFill>
-                <a:latin typeface="맑은 고딕"/>
-                <a:ea typeface="맑은 고딕"/>
-              </a:rPr>
-              <a:t>로 정상/이상 2분류하며, </a:t>
-            </a:r>
-            <a:r>
-              <a:rPr sz="1300" b="1">
-                <a:solidFill>
-                  <a:srgbClr val="0F1E3D"/>
-                </a:solidFill>
-                <a:latin typeface="맑은 고딕"/>
-                <a:ea typeface="맑은 고딕"/>
-              </a:rPr>
-              <a:t>놓침(FN) 최소화</a:t>
-            </a:r>
-            <a:r>
-              <a:rPr sz="1300">
-                <a:solidFill>
-                  <a:srgbClr val="1A1F2E"/>
-                </a:solidFill>
-                <a:latin typeface="맑은 고딕"/>
-                <a:ea typeface="맑은 고딕"/>
-              </a:rPr>
-              <a:t>가 목표입니다</a:t>
-            </a:r>
-          </a:p>
-          <a:p>
-            <a:pPr marL="274320" indent="-274320">
-              <a:lnSpc>
-                <a:spcPct val="110000"/>
-              </a:lnSpc>
-              <a:spcAft>
-                <a:spcPts val="400"/>
-              </a:spcAft>
-            </a:pPr>
-            <a:r>
-              <a:rPr sz="1300" b="0">
-                <a:solidFill>
-                  <a:srgbClr val="5B9BD5"/>
-                </a:solidFill>
-                <a:latin typeface="맑은 고딕"/>
-                <a:ea typeface="맑은 고딕"/>
-              </a:rPr>
-              <a:t>●  </a:t>
-            </a:r>
-            <a:r>
-              <a:rPr sz="1300">
-                <a:solidFill>
-                  <a:srgbClr val="1A1F2E"/>
-                </a:solidFill>
-                <a:latin typeface="맑은 고딕"/>
-                <a:ea typeface="맑은 고딕"/>
-              </a:rPr>
-              <a:t>Focal loss + EMA로 학습하고, normal threshold를 올려 FN을 더 줄입니다</a:t>
-            </a:r>
-          </a:p>
-          <a:p>
-            <a:pPr marL="420624" indent="-420624" lvl="1">
-              <a:lnSpc>
-                <a:spcPct val="110000"/>
-              </a:lnSpc>
-              <a:spcAft>
-                <a:spcPts val="400"/>
-              </a:spcAft>
-            </a:pPr>
-            <a:r>
-              <a:rPr sz="1200" b="0">
-                <a:solidFill>
-                  <a:srgbClr val="6E7B8E"/>
-                </a:solidFill>
-                <a:latin typeface="맑은 고딕"/>
-                <a:ea typeface="맑은 고딕"/>
-              </a:rPr>
-              <a:t>–  </a:t>
-            </a:r>
-            <a:r>
-              <a:rPr sz="1200">
-                <a:solidFill>
-                  <a:srgbClr val="4A5666"/>
-                </a:solidFill>
-                <a:latin typeface="맑은 고딕"/>
-                <a:ea typeface="맑은 고딕"/>
-              </a:rPr>
-              <a:t>이상이 잡히면 2차에서 유형(avg/std/spike/drift/context) 진단</a:t>
-            </a:r>
-          </a:p>
-        </p:txBody>
-      </p:sp>
-      <p:sp>
-        <p:nvSpPr>
-          <p:cNvPr id="9" name="Rectangle 8"/>
-          <p:cNvSpPr/>
-          <p:nvPr/>
-        </p:nvSpPr>
-        <p:spPr>
-          <a:xfrm>
-            <a:off x="868680" y="5102352"/>
+            <a:off x="3387852" y="5102352"/>
             <a:ext cx="2372868" cy="685800"/>
           </a:xfrm>
           <a:prstGeom prst="rect">
@@ -7536,13 +7056,13 @@
       </p:sp>
       <p:sp>
         <p:nvSpPr>
-          <p:cNvPr id="10" name="Rectangle 9"/>
+          <p:cNvPr id="14" name="Rectangle 13"/>
           <p:cNvSpPr/>
           <p:nvPr/>
         </p:nvSpPr>
         <p:spPr>
           <a:xfrm>
-            <a:off x="868680" y="5102352"/>
+            <a:off x="3387852" y="5102352"/>
             <a:ext cx="2372868" cy="64008"/>
           </a:xfrm>
           <a:prstGeom prst="rect">
@@ -7580,13 +7100,13 @@
       </p:sp>
       <p:sp>
         <p:nvSpPr>
-          <p:cNvPr id="11" name="TextBox 10"/>
+          <p:cNvPr id="15" name="TextBox 14"/>
           <p:cNvSpPr txBox="1"/>
           <p:nvPr/>
         </p:nvSpPr>
         <p:spPr>
           <a:xfrm>
-            <a:off x="868680" y="5212080"/>
+            <a:off x="3387852" y="5212080"/>
             <a:ext cx="2372868" cy="329184"/>
           </a:xfrm>
           <a:prstGeom prst="rect">
@@ -7609,20 +7129,20 @@
                 <a:latin typeface="맑은 고딕"/>
                 <a:ea typeface="맑은 고딕"/>
               </a:rPr>
-              <a:t>2-stage</a:t>
-            </a:r>
-          </a:p>
-        </p:txBody>
-      </p:sp>
-      <p:sp>
-        <p:nvSpPr>
-          <p:cNvPr id="12" name="TextBox 11"/>
+              <a:t>ConvNeXtV2</a:t>
+            </a:r>
+          </a:p>
+        </p:txBody>
+      </p:sp>
+      <p:sp>
+        <p:nvSpPr>
+          <p:cNvPr id="16" name="TextBox 15"/>
           <p:cNvSpPr txBox="1"/>
           <p:nvPr/>
         </p:nvSpPr>
         <p:spPr>
           <a:xfrm>
-            <a:off x="868680" y="5522976"/>
+            <a:off x="3387852" y="5522976"/>
             <a:ext cx="2372868" cy="256032"/>
           </a:xfrm>
           <a:prstGeom prst="rect">
@@ -7645,20 +7165,297 @@
                 <a:latin typeface="맑은 고딕"/>
                 <a:ea typeface="맑은 고딕"/>
               </a:rPr>
-              <a:t>binary gate → 유형 진단</a:t>
-            </a:r>
-          </a:p>
-        </p:txBody>
-      </p:sp>
-      <p:sp>
-        <p:nvSpPr>
-          <p:cNvPr id="13" name="Rectangle 12"/>
+              <a:t>Tiny backbone</a:t>
+            </a:r>
+          </a:p>
+        </p:txBody>
+      </p:sp>
+      <p:sp>
+        <p:nvSpPr>
+          <p:cNvPr id="17" name="Rectangle 16"/>
           <p:cNvSpPr/>
           <p:nvPr/>
         </p:nvSpPr>
         <p:spPr>
           <a:xfrm>
-            <a:off x="3387852" y="5102352"/>
+            <a:off x="6263640" y="1783080"/>
+            <a:ext cx="5349240" cy="640080"/>
+          </a:xfrm>
+          <a:prstGeom prst="rect">
+            <a:avLst/>
+          </a:prstGeom>
+          <a:solidFill>
+            <a:srgbClr val="0F1E3D"/>
+          </a:solidFill>
+          <a:ln>
+            <a:noFill/>
+          </a:ln>
+          <a:effectLst/>
+        </p:spPr>
+        <p:style>
+          <a:lnRef idx="1">
+            <a:schemeClr val="accent1"/>
+          </a:lnRef>
+          <a:fillRef idx="3">
+            <a:schemeClr val="accent1"/>
+          </a:fillRef>
+          <a:effectRef idx="2">
+            <a:schemeClr val="accent1"/>
+          </a:effectRef>
+          <a:fontRef idx="minor">
+            <a:schemeClr val="lt1"/>
+          </a:fontRef>
+        </p:style>
+        <p:txBody>
+          <a:bodyPr rtlCol="0" anchor="ctr"/>
+          <a:lstStyle/>
+          <a:p>
+            <a:pPr algn="ctr"/>
+          </a:p>
+        </p:txBody>
+      </p:sp>
+      <p:sp>
+        <p:nvSpPr>
+          <p:cNvPr id="18" name="TextBox 17"/>
+          <p:cNvSpPr txBox="1"/>
+          <p:nvPr/>
+        </p:nvSpPr>
+        <p:spPr>
+          <a:xfrm>
+            <a:off x="6492240" y="1783080"/>
+            <a:ext cx="4983480" cy="640080"/>
+          </a:xfrm>
+          <a:prstGeom prst="rect">
+            <a:avLst/>
+          </a:prstGeom>
+          <a:noFill/>
+        </p:spPr>
+        <p:txBody>
+          <a:bodyPr wrap="square" anchor="ctr" lIns="0" rIns="0" tIns="0" bIns="0">
+            <a:spAutoFit/>
+          </a:bodyPr>
+          <a:lstStyle/>
+          <a:p>
+            <a:pPr algn="l"/>
+            <a:r>
+              <a:rPr sz="1550" b="1">
+                <a:solidFill>
+                  <a:srgbClr val="FFFFFF"/>
+                </a:solidFill>
+                <a:latin typeface="맑은 고딕"/>
+                <a:ea typeface="맑은 고딕"/>
+              </a:rPr>
+              <a:t>성과 — 생성셋 검증(PoC)</a:t>
+            </a:r>
+          </a:p>
+        </p:txBody>
+      </p:sp>
+      <p:sp>
+        <p:nvSpPr>
+          <p:cNvPr id="19" name="Rectangle 18"/>
+          <p:cNvSpPr/>
+          <p:nvPr/>
+        </p:nvSpPr>
+        <p:spPr>
+          <a:xfrm>
+            <a:off x="6263640" y="2423160"/>
+            <a:ext cx="5349240" cy="3520440"/>
+          </a:xfrm>
+          <a:prstGeom prst="rect">
+            <a:avLst/>
+          </a:prstGeom>
+          <a:solidFill>
+            <a:srgbClr val="F2F5FA"/>
+          </a:solidFill>
+          <a:ln>
+            <a:noFill/>
+          </a:ln>
+          <a:effectLst/>
+        </p:spPr>
+        <p:style>
+          <a:lnRef idx="1">
+            <a:schemeClr val="accent1"/>
+          </a:lnRef>
+          <a:fillRef idx="3">
+            <a:schemeClr val="accent1"/>
+          </a:fillRef>
+          <a:effectRef idx="2">
+            <a:schemeClr val="accent1"/>
+          </a:effectRef>
+          <a:fontRef idx="minor">
+            <a:schemeClr val="lt1"/>
+          </a:fontRef>
+        </p:style>
+        <p:txBody>
+          <a:bodyPr rtlCol="0" anchor="ctr"/>
+          <a:lstStyle/>
+          <a:p>
+            <a:pPr algn="ctr"/>
+          </a:p>
+        </p:txBody>
+      </p:sp>
+      <p:sp>
+        <p:nvSpPr>
+          <p:cNvPr id="20" name="TextBox 19"/>
+          <p:cNvSpPr txBox="1"/>
+          <p:nvPr/>
+        </p:nvSpPr>
+        <p:spPr>
+          <a:xfrm>
+            <a:off x="6492240" y="2606040"/>
+            <a:ext cx="4892040" cy="2276856"/>
+          </a:xfrm>
+          <a:prstGeom prst="rect">
+            <a:avLst/>
+          </a:prstGeom>
+          <a:noFill/>
+        </p:spPr>
+        <p:txBody>
+          <a:bodyPr wrap="square" anchor="t" lIns="0" rIns="0" tIns="0" bIns="0">
+            <a:spAutoFit/>
+          </a:bodyPr>
+          <a:lstStyle/>
+          <a:p>
+            <a:pPr marL="274320" indent="-274320">
+              <a:lnSpc>
+                <a:spcPct val="110000"/>
+              </a:lnSpc>
+              <a:spcAft>
+                <a:spcPts val="400"/>
+              </a:spcAft>
+            </a:pPr>
+            <a:r>
+              <a:rPr sz="1300" b="0">
+                <a:solidFill>
+                  <a:srgbClr val="5B9BD5"/>
+                </a:solidFill>
+                <a:latin typeface="맑은 고딕"/>
+                <a:ea typeface="맑은 고딕"/>
+              </a:rPr>
+              <a:t>●  </a:t>
+            </a:r>
+            <a:r>
+              <a:rPr sz="1300">
+                <a:solidFill>
+                  <a:srgbClr val="1A1F2E"/>
+                </a:solidFill>
+                <a:latin typeface="맑은 고딕"/>
+                <a:ea typeface="맑은 고딕"/>
+              </a:rPr>
+              <a:t>test 1,500에서 </a:t>
+            </a:r>
+            <a:r>
+              <a:rPr sz="1300" b="1">
+                <a:solidFill>
+                  <a:srgbClr val="0F1E3D"/>
+                </a:solidFill>
+                <a:latin typeface="맑은 고딕"/>
+                <a:ea typeface="맑은 고딕"/>
+              </a:rPr>
+              <a:t>binary F1 0.9967</a:t>
+            </a:r>
+            <a:r>
+              <a:rPr sz="1300">
+                <a:solidFill>
+                  <a:srgbClr val="1A1F2E"/>
+                </a:solidFill>
+                <a:latin typeface="맑은 고딕"/>
+                <a:ea typeface="맑은 고딕"/>
+              </a:rPr>
+              <a:t>, </a:t>
+            </a:r>
+            <a:r>
+              <a:rPr sz="1300" b="1">
+                <a:solidFill>
+                  <a:srgbClr val="0F1E3D"/>
+                </a:solidFill>
+                <a:latin typeface="맑은 고딕"/>
+                <a:ea typeface="맑은 고딕"/>
+              </a:rPr>
+              <a:t>이상 recall 0.9987</a:t>
+            </a:r>
+            <a:r>
+              <a:rPr sz="1300">
+                <a:solidFill>
+                  <a:srgbClr val="1A1F2E"/>
+                </a:solidFill>
+                <a:latin typeface="맑은 고딕"/>
+                <a:ea typeface="맑은 고딕"/>
+              </a:rPr>
+              <a:t>(normal threshold 0.9)</a:t>
+            </a:r>
+          </a:p>
+          <a:p>
+            <a:pPr marL="274320" indent="-274320">
+              <a:lnSpc>
+                <a:spcPct val="110000"/>
+              </a:lnSpc>
+              <a:spcAft>
+                <a:spcPts val="400"/>
+              </a:spcAft>
+            </a:pPr>
+            <a:r>
+              <a:rPr sz="1300" b="0">
+                <a:solidFill>
+                  <a:srgbClr val="5B9BD5"/>
+                </a:solidFill>
+                <a:latin typeface="맑은 고딕"/>
+                <a:ea typeface="맑은 고딕"/>
+              </a:rPr>
+              <a:t>●  </a:t>
+            </a:r>
+            <a:r>
+              <a:rPr sz="1300">
+                <a:solidFill>
+                  <a:srgbClr val="1A1F2E"/>
+                </a:solidFill>
+                <a:latin typeface="맑은 고딕"/>
+                <a:ea typeface="맑은 고딕"/>
+              </a:rPr>
+              <a:t>정상 750 중 오탐 4건, 이상 750 중 놓침 1건 수준</a:t>
+            </a:r>
+          </a:p>
+          <a:p>
+            <a:pPr marL="420624" indent="-420624" lvl="1">
+              <a:lnSpc>
+                <a:spcPct val="110000"/>
+              </a:lnSpc>
+              <a:spcAft>
+                <a:spcPts val="400"/>
+              </a:spcAft>
+            </a:pPr>
+            <a:r>
+              <a:rPr sz="1200" b="0">
+                <a:solidFill>
+                  <a:srgbClr val="6E7B8E"/>
+                </a:solidFill>
+                <a:latin typeface="맑은 고딕"/>
+                <a:ea typeface="맑은 고딕"/>
+              </a:rPr>
+              <a:t>–  </a:t>
+            </a:r>
+            <a:r>
+              <a:rPr sz="1200">
+                <a:solidFill>
+                  <a:srgbClr val="4A5666"/>
+                </a:solidFill>
+                <a:latin typeface="맑은 고딕"/>
+                <a:ea typeface="맑은 고딕"/>
+              </a:rPr>
+              <a:t>FN을 유형별로 분해해 데이터 난이도와 threshold로 피드백</a:t>
+            </a:r>
+          </a:p>
+        </p:txBody>
+      </p:sp>
+      <p:sp>
+        <p:nvSpPr>
+          <p:cNvPr id="21" name="Rectangle 20"/>
+          <p:cNvSpPr/>
+          <p:nvPr/>
+        </p:nvSpPr>
+        <p:spPr>
+          <a:xfrm>
+            <a:off x="6492240" y="5102352"/>
             <a:ext cx="2372868" cy="685800"/>
           </a:xfrm>
           <a:prstGeom prst="rect">
@@ -7698,13 +7495,13 @@
       </p:sp>
       <p:sp>
         <p:nvSpPr>
-          <p:cNvPr id="14" name="Rectangle 13"/>
+          <p:cNvPr id="22" name="Rectangle 21"/>
           <p:cNvSpPr/>
           <p:nvPr/>
         </p:nvSpPr>
         <p:spPr>
           <a:xfrm>
-            <a:off x="3387852" y="5102352"/>
+            <a:off x="6492240" y="5102352"/>
             <a:ext cx="2372868" cy="64008"/>
           </a:xfrm>
           <a:prstGeom prst="rect">
@@ -7742,13 +7539,13 @@
       </p:sp>
       <p:sp>
         <p:nvSpPr>
-          <p:cNvPr id="15" name="TextBox 14"/>
+          <p:cNvPr id="23" name="TextBox 22"/>
           <p:cNvSpPr txBox="1"/>
           <p:nvPr/>
         </p:nvSpPr>
         <p:spPr>
           <a:xfrm>
-            <a:off x="3387852" y="5212080"/>
+            <a:off x="6492240" y="5212080"/>
             <a:ext cx="2372868" cy="329184"/>
           </a:xfrm>
           <a:prstGeom prst="rect">
@@ -7771,20 +7568,20 @@
                 <a:latin typeface="맑은 고딕"/>
                 <a:ea typeface="맑은 고딕"/>
               </a:rPr>
-              <a:t>ConvNeXtV2</a:t>
-            </a:r>
-          </a:p>
-        </p:txBody>
-      </p:sp>
-      <p:sp>
-        <p:nvSpPr>
-          <p:cNvPr id="16" name="TextBox 15"/>
+              <a:t>F1 0.9967</a:t>
+            </a:r>
+          </a:p>
+        </p:txBody>
+      </p:sp>
+      <p:sp>
+        <p:nvSpPr>
+          <p:cNvPr id="24" name="TextBox 23"/>
           <p:cNvSpPr txBox="1"/>
           <p:nvPr/>
         </p:nvSpPr>
         <p:spPr>
           <a:xfrm>
-            <a:off x="3387852" y="5522976"/>
+            <a:off x="6492240" y="5522976"/>
             <a:ext cx="2372868" cy="256032"/>
           </a:xfrm>
           <a:prstGeom prst="rect">
@@ -7807,297 +7604,20 @@
                 <a:latin typeface="맑은 고딕"/>
                 <a:ea typeface="맑은 고딕"/>
               </a:rPr>
-              <a:t>Tiny backbone</a:t>
-            </a:r>
-          </a:p>
-        </p:txBody>
-      </p:sp>
-      <p:sp>
-        <p:nvSpPr>
-          <p:cNvPr id="17" name="Rectangle 16"/>
+              <a:t>binary gate</a:t>
+            </a:r>
+          </a:p>
+        </p:txBody>
+      </p:sp>
+      <p:sp>
+        <p:nvSpPr>
+          <p:cNvPr id="25" name="Rectangle 24"/>
           <p:cNvSpPr/>
           <p:nvPr/>
         </p:nvSpPr>
         <p:spPr>
           <a:xfrm>
-            <a:off x="6263640" y="1783080"/>
-            <a:ext cx="5349240" cy="640080"/>
-          </a:xfrm>
-          <a:prstGeom prst="rect">
-            <a:avLst/>
-          </a:prstGeom>
-          <a:solidFill>
-            <a:srgbClr val="0F1E3D"/>
-          </a:solidFill>
-          <a:ln>
-            <a:noFill/>
-          </a:ln>
-          <a:effectLst/>
-        </p:spPr>
-        <p:style>
-          <a:lnRef idx="1">
-            <a:schemeClr val="accent1"/>
-          </a:lnRef>
-          <a:fillRef idx="3">
-            <a:schemeClr val="accent1"/>
-          </a:fillRef>
-          <a:effectRef idx="2">
-            <a:schemeClr val="accent1"/>
-          </a:effectRef>
-          <a:fontRef idx="minor">
-            <a:schemeClr val="lt1"/>
-          </a:fontRef>
-        </p:style>
-        <p:txBody>
-          <a:bodyPr rtlCol="0" anchor="ctr"/>
-          <a:lstStyle/>
-          <a:p>
-            <a:pPr algn="ctr"/>
-          </a:p>
-        </p:txBody>
-      </p:sp>
-      <p:sp>
-        <p:nvSpPr>
-          <p:cNvPr id="18" name="TextBox 17"/>
-          <p:cNvSpPr txBox="1"/>
-          <p:nvPr/>
-        </p:nvSpPr>
-        <p:spPr>
-          <a:xfrm>
-            <a:off x="6492240" y="1783080"/>
-            <a:ext cx="4983480" cy="640080"/>
-          </a:xfrm>
-          <a:prstGeom prst="rect">
-            <a:avLst/>
-          </a:prstGeom>
-          <a:noFill/>
-        </p:spPr>
-        <p:txBody>
-          <a:bodyPr wrap="square" anchor="ctr" lIns="0" rIns="0" tIns="0" bIns="0">
-            <a:spAutoFit/>
-          </a:bodyPr>
-          <a:lstStyle/>
-          <a:p>
-            <a:pPr algn="l"/>
-            <a:r>
-              <a:rPr sz="1550" b="1">
-                <a:solidFill>
-                  <a:srgbClr val="FFFFFF"/>
-                </a:solidFill>
-                <a:latin typeface="맑은 고딕"/>
-                <a:ea typeface="맑은 고딕"/>
-              </a:rPr>
-              <a:t>성과 — 생성셋 검증(PoC)</a:t>
-            </a:r>
-          </a:p>
-        </p:txBody>
-      </p:sp>
-      <p:sp>
-        <p:nvSpPr>
-          <p:cNvPr id="19" name="Rectangle 18"/>
-          <p:cNvSpPr/>
-          <p:nvPr/>
-        </p:nvSpPr>
-        <p:spPr>
-          <a:xfrm>
-            <a:off x="6263640" y="2423160"/>
-            <a:ext cx="5349240" cy="3520440"/>
-          </a:xfrm>
-          <a:prstGeom prst="rect">
-            <a:avLst/>
-          </a:prstGeom>
-          <a:solidFill>
-            <a:srgbClr val="F2F5FA"/>
-          </a:solidFill>
-          <a:ln>
-            <a:noFill/>
-          </a:ln>
-          <a:effectLst/>
-        </p:spPr>
-        <p:style>
-          <a:lnRef idx="1">
-            <a:schemeClr val="accent1"/>
-          </a:lnRef>
-          <a:fillRef idx="3">
-            <a:schemeClr val="accent1"/>
-          </a:fillRef>
-          <a:effectRef idx="2">
-            <a:schemeClr val="accent1"/>
-          </a:effectRef>
-          <a:fontRef idx="minor">
-            <a:schemeClr val="lt1"/>
-          </a:fontRef>
-        </p:style>
-        <p:txBody>
-          <a:bodyPr rtlCol="0" anchor="ctr"/>
-          <a:lstStyle/>
-          <a:p>
-            <a:pPr algn="ctr"/>
-          </a:p>
-        </p:txBody>
-      </p:sp>
-      <p:sp>
-        <p:nvSpPr>
-          <p:cNvPr id="20" name="TextBox 19"/>
-          <p:cNvSpPr txBox="1"/>
-          <p:nvPr/>
-        </p:nvSpPr>
-        <p:spPr>
-          <a:xfrm>
-            <a:off x="6492240" y="2606040"/>
-            <a:ext cx="4892040" cy="2276856"/>
-          </a:xfrm>
-          <a:prstGeom prst="rect">
-            <a:avLst/>
-          </a:prstGeom>
-          <a:noFill/>
-        </p:spPr>
-        <p:txBody>
-          <a:bodyPr wrap="square" anchor="t" lIns="0" rIns="0" tIns="0" bIns="0">
-            <a:spAutoFit/>
-          </a:bodyPr>
-          <a:lstStyle/>
-          <a:p>
-            <a:pPr marL="274320" indent="-274320">
-              <a:lnSpc>
-                <a:spcPct val="110000"/>
-              </a:lnSpc>
-              <a:spcAft>
-                <a:spcPts val="400"/>
-              </a:spcAft>
-            </a:pPr>
-            <a:r>
-              <a:rPr sz="1300" b="0">
-                <a:solidFill>
-                  <a:srgbClr val="5B9BD5"/>
-                </a:solidFill>
-                <a:latin typeface="맑은 고딕"/>
-                <a:ea typeface="맑은 고딕"/>
-              </a:rPr>
-              <a:t>●  </a:t>
-            </a:r>
-            <a:r>
-              <a:rPr sz="1300">
-                <a:solidFill>
-                  <a:srgbClr val="1A1F2E"/>
-                </a:solidFill>
-                <a:latin typeface="맑은 고딕"/>
-                <a:ea typeface="맑은 고딕"/>
-              </a:rPr>
-              <a:t>test 1,500에서 </a:t>
-            </a:r>
-            <a:r>
-              <a:rPr sz="1300" b="1">
-                <a:solidFill>
-                  <a:srgbClr val="0F1E3D"/>
-                </a:solidFill>
-                <a:latin typeface="맑은 고딕"/>
-                <a:ea typeface="맑은 고딕"/>
-              </a:rPr>
-              <a:t>binary F1 0.9967</a:t>
-            </a:r>
-            <a:r>
-              <a:rPr sz="1300">
-                <a:solidFill>
-                  <a:srgbClr val="1A1F2E"/>
-                </a:solidFill>
-                <a:latin typeface="맑은 고딕"/>
-                <a:ea typeface="맑은 고딕"/>
-              </a:rPr>
-              <a:t>, </a:t>
-            </a:r>
-            <a:r>
-              <a:rPr sz="1300" b="1">
-                <a:solidFill>
-                  <a:srgbClr val="0F1E3D"/>
-                </a:solidFill>
-                <a:latin typeface="맑은 고딕"/>
-                <a:ea typeface="맑은 고딕"/>
-              </a:rPr>
-              <a:t>이상 recall 0.9987</a:t>
-            </a:r>
-            <a:r>
-              <a:rPr sz="1300">
-                <a:solidFill>
-                  <a:srgbClr val="1A1F2E"/>
-                </a:solidFill>
-                <a:latin typeface="맑은 고딕"/>
-                <a:ea typeface="맑은 고딕"/>
-              </a:rPr>
-              <a:t>(normal threshold 0.9)</a:t>
-            </a:r>
-          </a:p>
-          <a:p>
-            <a:pPr marL="274320" indent="-274320">
-              <a:lnSpc>
-                <a:spcPct val="110000"/>
-              </a:lnSpc>
-              <a:spcAft>
-                <a:spcPts val="400"/>
-              </a:spcAft>
-            </a:pPr>
-            <a:r>
-              <a:rPr sz="1300" b="0">
-                <a:solidFill>
-                  <a:srgbClr val="5B9BD5"/>
-                </a:solidFill>
-                <a:latin typeface="맑은 고딕"/>
-                <a:ea typeface="맑은 고딕"/>
-              </a:rPr>
-              <a:t>●  </a:t>
-            </a:r>
-            <a:r>
-              <a:rPr sz="1300">
-                <a:solidFill>
-                  <a:srgbClr val="1A1F2E"/>
-                </a:solidFill>
-                <a:latin typeface="맑은 고딕"/>
-                <a:ea typeface="맑은 고딕"/>
-              </a:rPr>
-              <a:t>정상 750 중 오탐 4건, 이상 750 중 놓침 1건 수준</a:t>
-            </a:r>
-          </a:p>
-          <a:p>
-            <a:pPr marL="420624" indent="-420624" lvl="1">
-              <a:lnSpc>
-                <a:spcPct val="110000"/>
-              </a:lnSpc>
-              <a:spcAft>
-                <a:spcPts val="400"/>
-              </a:spcAft>
-            </a:pPr>
-            <a:r>
-              <a:rPr sz="1200" b="0">
-                <a:solidFill>
-                  <a:srgbClr val="6E7B8E"/>
-                </a:solidFill>
-                <a:latin typeface="맑은 고딕"/>
-                <a:ea typeface="맑은 고딕"/>
-              </a:rPr>
-              <a:t>–  </a:t>
-            </a:r>
-            <a:r>
-              <a:rPr sz="1200">
-                <a:solidFill>
-                  <a:srgbClr val="4A5666"/>
-                </a:solidFill>
-                <a:latin typeface="맑은 고딕"/>
-                <a:ea typeface="맑은 고딕"/>
-              </a:rPr>
-              <a:t>FN을 유형별로 분해해 데이터 난이도와 threshold로 피드백</a:t>
-            </a:r>
-          </a:p>
-        </p:txBody>
-      </p:sp>
-      <p:sp>
-        <p:nvSpPr>
-          <p:cNvPr id="21" name="Rectangle 20"/>
-          <p:cNvSpPr/>
-          <p:nvPr/>
-        </p:nvSpPr>
-        <p:spPr>
-          <a:xfrm>
-            <a:off x="6492240" y="5102352"/>
+            <a:off x="9011412" y="5102352"/>
             <a:ext cx="2372868" cy="685800"/>
           </a:xfrm>
           <a:prstGeom prst="rect">
@@ -8137,13 +7657,13 @@
       </p:sp>
       <p:sp>
         <p:nvSpPr>
-          <p:cNvPr id="22" name="Rectangle 21"/>
+          <p:cNvPr id="26" name="Rectangle 25"/>
           <p:cNvSpPr/>
           <p:nvPr/>
         </p:nvSpPr>
         <p:spPr>
           <a:xfrm>
-            <a:off x="6492240" y="5102352"/>
+            <a:off x="9011412" y="5102352"/>
             <a:ext cx="2372868" cy="64008"/>
           </a:xfrm>
           <a:prstGeom prst="rect">
@@ -8181,13 +7701,13 @@
       </p:sp>
       <p:sp>
         <p:nvSpPr>
-          <p:cNvPr id="23" name="TextBox 22"/>
+          <p:cNvPr id="27" name="TextBox 26"/>
           <p:cNvSpPr txBox="1"/>
           <p:nvPr/>
         </p:nvSpPr>
         <p:spPr>
           <a:xfrm>
-            <a:off x="6492240" y="5212080"/>
+            <a:off x="9011412" y="5212080"/>
             <a:ext cx="2372868" cy="329184"/>
           </a:xfrm>
           <a:prstGeom prst="rect">
@@ -8210,20 +7730,20 @@
                 <a:latin typeface="맑은 고딕"/>
                 <a:ea typeface="맑은 고딕"/>
               </a:rPr>
-              <a:t>F1 0.9967</a:t>
-            </a:r>
-          </a:p>
-        </p:txBody>
-      </p:sp>
-      <p:sp>
-        <p:nvSpPr>
-          <p:cNvPr id="24" name="TextBox 23"/>
+              <a:t>recall 0.9987</a:t>
+            </a:r>
+          </a:p>
+        </p:txBody>
+      </p:sp>
+      <p:sp>
+        <p:nvSpPr>
+          <p:cNvPr id="28" name="TextBox 27"/>
           <p:cNvSpPr txBox="1"/>
           <p:nvPr/>
         </p:nvSpPr>
         <p:spPr>
           <a:xfrm>
-            <a:off x="6492240" y="5522976"/>
+            <a:off x="9011412" y="5522976"/>
             <a:ext cx="2372868" cy="256032"/>
           </a:xfrm>
           <a:prstGeom prst="rect">
@@ -8246,111 +7766,21 @@
                 <a:latin typeface="맑은 고딕"/>
                 <a:ea typeface="맑은 고딕"/>
               </a:rPr>
-              <a:t>binary gate</a:t>
-            </a:r>
-          </a:p>
-        </p:txBody>
-      </p:sp>
-      <p:sp>
-        <p:nvSpPr>
-          <p:cNvPr id="25" name="Rectangle 24"/>
-          <p:cNvSpPr/>
-          <p:nvPr/>
-        </p:nvSpPr>
-        <p:spPr>
-          <a:xfrm>
-            <a:off x="9011412" y="5102352"/>
-            <a:ext cx="2372868" cy="685800"/>
-          </a:xfrm>
-          <a:prstGeom prst="rect">
-            <a:avLst/>
-          </a:prstGeom>
-          <a:solidFill>
-            <a:srgbClr val="FFFFFF"/>
-          </a:solidFill>
-          <a:ln w="12700">
-            <a:solidFill>
-              <a:srgbClr val="D7DEEA"/>
-            </a:solidFill>
-          </a:ln>
-          <a:effectLst/>
-        </p:spPr>
-        <p:style>
-          <a:lnRef idx="1">
-            <a:schemeClr val="accent1"/>
-          </a:lnRef>
-          <a:fillRef idx="3">
-            <a:schemeClr val="accent1"/>
-          </a:fillRef>
-          <a:effectRef idx="2">
-            <a:schemeClr val="accent1"/>
-          </a:effectRef>
-          <a:fontRef idx="minor">
-            <a:schemeClr val="lt1"/>
-          </a:fontRef>
-        </p:style>
-        <p:txBody>
-          <a:bodyPr rtlCol="0" anchor="ctr"/>
-          <a:lstStyle/>
-          <a:p>
-            <a:pPr algn="ctr"/>
-          </a:p>
-        </p:txBody>
-      </p:sp>
-      <p:sp>
-        <p:nvSpPr>
-          <p:cNvPr id="26" name="Rectangle 25"/>
-          <p:cNvSpPr/>
-          <p:nvPr/>
-        </p:nvSpPr>
-        <p:spPr>
-          <a:xfrm>
-            <a:off x="9011412" y="5102352"/>
-            <a:ext cx="2372868" cy="64008"/>
-          </a:xfrm>
-          <a:prstGeom prst="rect">
-            <a:avLst/>
-          </a:prstGeom>
-          <a:solidFill>
-            <a:srgbClr val="5B9BD5"/>
-          </a:solidFill>
-          <a:ln>
-            <a:noFill/>
-          </a:ln>
-          <a:effectLst/>
-        </p:spPr>
-        <p:style>
-          <a:lnRef idx="1">
-            <a:schemeClr val="accent1"/>
-          </a:lnRef>
-          <a:fillRef idx="3">
-            <a:schemeClr val="accent1"/>
-          </a:fillRef>
-          <a:effectRef idx="2">
-            <a:schemeClr val="accent1"/>
-          </a:effectRef>
-          <a:fontRef idx="minor">
-            <a:schemeClr val="lt1"/>
-          </a:fontRef>
-        </p:style>
-        <p:txBody>
-          <a:bodyPr rtlCol="0" anchor="ctr"/>
-          <a:lstStyle/>
-          <a:p>
-            <a:pPr algn="ctr"/>
-          </a:p>
-        </p:txBody>
-      </p:sp>
-      <p:sp>
-        <p:nvSpPr>
-          <p:cNvPr id="27" name="TextBox 26"/>
+              <a:t>abnormal</a:t>
+            </a:r>
+          </a:p>
+        </p:txBody>
+      </p:sp>
+      <p:sp>
+        <p:nvSpPr>
+          <p:cNvPr id="29" name="TextBox 28"/>
           <p:cNvSpPr txBox="1"/>
           <p:nvPr/>
         </p:nvSpPr>
         <p:spPr>
           <a:xfrm>
-            <a:off x="9011412" y="5212080"/>
-            <a:ext cx="2372868" cy="329184"/>
+            <a:off x="457200" y="6437376"/>
+            <a:ext cx="8229600" cy="292608"/>
           </a:xfrm>
           <a:prstGeom prst="rect">
             <a:avLst/>
@@ -8363,30 +7793,30 @@
           </a:bodyPr>
           <a:lstStyle/>
           <a:p>
-            <a:pPr algn="ctr"/>
-            <a:r>
-              <a:rPr sz="1600" b="1">
-                <a:solidFill>
-                  <a:srgbClr val="0F1E3D"/>
-                </a:solidFill>
-                <a:latin typeface="맑은 고딕"/>
-                <a:ea typeface="맑은 고딕"/>
-              </a:rPr>
-              <a:t>recall 0.9987</a:t>
-            </a:r>
-          </a:p>
-        </p:txBody>
-      </p:sp>
-      <p:sp>
-        <p:nvSpPr>
-          <p:cNvPr id="28" name="TextBox 27"/>
+            <a:pPr algn="l"/>
+            <a:r>
+              <a:rPr sz="900">
+                <a:solidFill>
+                  <a:srgbClr val="6B7280"/>
+                </a:solidFill>
+                <a:latin typeface="맑은 고딕"/>
+                <a:ea typeface="맑은 고딕"/>
+              </a:rPr>
+              <a:t>최호길 | QIE Data Science | AI Specialist 인증</a:t>
+            </a:r>
+          </a:p>
+        </p:txBody>
+      </p:sp>
+      <p:sp>
+        <p:nvSpPr>
+          <p:cNvPr id="30" name="TextBox 29"/>
           <p:cNvSpPr txBox="1"/>
           <p:nvPr/>
         </p:nvSpPr>
         <p:spPr>
           <a:xfrm>
-            <a:off x="9011412" y="5522976"/>
-            <a:ext cx="2372868" cy="256032"/>
+            <a:off x="10972800" y="6437376"/>
+            <a:ext cx="758952" cy="292608"/>
           </a:xfrm>
           <a:prstGeom prst="rect">
             <a:avLst/>
@@ -8399,7 +7829,7 @@
           </a:bodyPr>
           <a:lstStyle/>
           <a:p>
-            <a:pPr algn="ctr"/>
+            <a:pPr algn="r"/>
             <a:r>
               <a:rPr sz="900">
                 <a:solidFill>
@@ -8408,79 +7838,7 @@
                 <a:latin typeface="맑은 고딕"/>
                 <a:ea typeface="맑은 고딕"/>
               </a:rPr>
-              <a:t>abnormal</a:t>
-            </a:r>
-          </a:p>
-        </p:txBody>
-      </p:sp>
-      <p:sp>
-        <p:nvSpPr>
-          <p:cNvPr id="29" name="TextBox 28"/>
-          <p:cNvSpPr txBox="1"/>
-          <p:nvPr/>
-        </p:nvSpPr>
-        <p:spPr>
-          <a:xfrm>
-            <a:off x="457200" y="6437376"/>
-            <a:ext cx="8229600" cy="292608"/>
-          </a:xfrm>
-          <a:prstGeom prst="rect">
-            <a:avLst/>
-          </a:prstGeom>
-          <a:noFill/>
-        </p:spPr>
-        <p:txBody>
-          <a:bodyPr wrap="square" anchor="ctr" lIns="0" rIns="0" tIns="0" bIns="0">
-            <a:spAutoFit/>
-          </a:bodyPr>
-          <a:lstStyle/>
-          <a:p>
-            <a:pPr algn="l"/>
-            <a:r>
-              <a:rPr sz="900">
-                <a:solidFill>
-                  <a:srgbClr val="6B7280"/>
-                </a:solidFill>
-                <a:latin typeface="맑은 고딕"/>
-                <a:ea typeface="맑은 고딕"/>
-              </a:rPr>
-              <a:t>최호길 | QIE Data Science | AI Specialist 인증</a:t>
-            </a:r>
-          </a:p>
-        </p:txBody>
-      </p:sp>
-      <p:sp>
-        <p:nvSpPr>
-          <p:cNvPr id="30" name="TextBox 29"/>
-          <p:cNvSpPr txBox="1"/>
-          <p:nvPr/>
-        </p:nvSpPr>
-        <p:spPr>
-          <a:xfrm>
-            <a:off x="10972800" y="6437376"/>
-            <a:ext cx="758952" cy="292608"/>
-          </a:xfrm>
-          <a:prstGeom prst="rect">
-            <a:avLst/>
-          </a:prstGeom>
-          <a:noFill/>
-        </p:spPr>
-        <p:txBody>
-          <a:bodyPr wrap="square" anchor="ctr" lIns="0" rIns="0" tIns="0" bIns="0">
-            <a:spAutoFit/>
-          </a:bodyPr>
-          <a:lstStyle/>
-          <a:p>
-            <a:pPr algn="r"/>
-            <a:r>
-              <a:rPr sz="900">
-                <a:solidFill>
-                  <a:srgbClr val="6B7280"/>
-                </a:solidFill>
-                <a:latin typeface="맑은 고딕"/>
-                <a:ea typeface="맑은 고딕"/>
-              </a:rPr>
-              <a:t>7</a:t>
+              <a:t>5</a:t>
             </a:r>
           </a:p>
         </p:txBody>

--- a/recommendation/presentation/발표_P3_데이터생성_최호길.pptx
+++ b/recommendation/presentation/발표_P3_데이터생성_최호길.pptx
@@ -10,6 +10,7 @@
     <p:sldId id="258" r:id="rId9"/>
     <p:sldId id="259" r:id="rId10"/>
     <p:sldId id="260" r:id="rId11"/>
+    <p:sldId id="261" r:id="rId12"/>
   </p:sldIdLst>
   <p:sldSz cx="12191695" cy="6858000" type="screen4x3"/>
   <p:notesSz cx="6858000" cy="9144000"/>
@@ -3247,7 +3248,7 @@
                 <a:latin typeface="맑은 고딕"/>
                 <a:ea typeface="맑은 고딕"/>
               </a:rPr>
-              <a:t>현장 계측 trend의 영역 구조와 노이즈, 이상 발생 방식을 domain knowledge로 코드화해 학습·평가 데이터를 만들고 1차 binary gate로 검증한 과제</a:t>
+              <a:t>이상 유형별 검증 데이터가 없던 문제를, 현장에서 trend를 보던 판정 기준을 생성 규칙으로 옮겨 풀었습니다. 정상 baseline 위에 이상을 합성해 평가셋을 만들고 1차 gate로 확인했습니다</a:t>
             </a:r>
           </a:p>
         </p:txBody>
@@ -4088,27 +4089,198 @@
                 <a:latin typeface="맑은 고딕"/>
                 <a:ea typeface="맑은 고딕"/>
               </a:rPr>
-              <a:t>이상 유형별 라벨 부족을 도메인 규칙 generator로 해결</a:t>
-            </a:r>
-          </a:p>
-        </p:txBody>
-      </p:sp>
-      <p:sp>
-        <p:nvSpPr>
-          <p:cNvPr id="5" name="Rectangle 4"/>
+              <a:t>없던 검증 데이터를 현장 판정 기준으로 만들었다</a:t>
+            </a:r>
+          </a:p>
+        </p:txBody>
+      </p:sp>
+      <p:sp>
+        <p:nvSpPr>
+          <p:cNvPr id="5" name="TextBox 4"/>
+          <p:cNvSpPr txBox="1"/>
+          <p:nvPr/>
+        </p:nvSpPr>
+        <p:spPr>
+          <a:xfrm>
+            <a:off x="640080" y="1828800"/>
+            <a:ext cx="10972800" cy="1828800"/>
+          </a:xfrm>
+          <a:prstGeom prst="rect">
+            <a:avLst/>
+          </a:prstGeom>
+          <a:noFill/>
+        </p:spPr>
+        <p:txBody>
+          <a:bodyPr wrap="square" anchor="t" lIns="0" rIns="0" tIns="0" bIns="0">
+            <a:spAutoFit/>
+          </a:bodyPr>
+          <a:lstStyle/>
+          <a:p>
+            <a:pPr marL="274320" indent="-274320">
+              <a:spcAft>
+                <a:spcPts val="500"/>
+              </a:spcAft>
+            </a:pPr>
+            <a:r>
+              <a:rPr sz="1400" b="0">
+                <a:solidFill>
+                  <a:srgbClr val="5B9BD5"/>
+                </a:solidFill>
+                <a:latin typeface="맑은 고딕"/>
+                <a:ea typeface="맑은 고딕"/>
+              </a:rPr>
+              <a:t>●  </a:t>
+            </a:r>
+            <a:r>
+              <a:rPr sz="1400">
+                <a:solidFill>
+                  <a:srgbClr val="1A1F2E"/>
+                </a:solidFill>
+                <a:latin typeface="맑은 고딕"/>
+                <a:ea typeface="맑은 고딕"/>
+              </a:rPr>
+              <a:t>정상 trend는 쌓여 있지만 </a:t>
+            </a:r>
+            <a:r>
+              <a:rPr sz="1400" b="1">
+                <a:solidFill>
+                  <a:srgbClr val="0F1E3D"/>
+                </a:solidFill>
+                <a:latin typeface="맑은 고딕"/>
+                <a:ea typeface="맑은 고딕"/>
+              </a:rPr>
+              <a:t>avg / std / spike / drift / context</a:t>
+            </a:r>
+            <a:r>
+              <a:rPr sz="1400">
+                <a:solidFill>
+                  <a:srgbClr val="1A1F2E"/>
+                </a:solidFill>
+                <a:latin typeface="맑은 고딕"/>
+                <a:ea typeface="맑은 고딕"/>
+              </a:rPr>
+              <a:t> 같은 이상은 드물게 나와, 유형별로 모아 둔 검증 데이터가 거의 없습니다</a:t>
+            </a:r>
+          </a:p>
+          <a:p>
+            <a:pPr marL="420624" indent="-420624" lvl="1">
+              <a:spcAft>
+                <a:spcPts val="500"/>
+              </a:spcAft>
+            </a:pPr>
+            <a:r>
+              <a:rPr sz="1300" b="0">
+                <a:solidFill>
+                  <a:srgbClr val="6E7B8E"/>
+                </a:solidFill>
+                <a:latin typeface="맑은 고딕"/>
+                <a:ea typeface="맑은 고딕"/>
+              </a:rPr>
+              <a:t>–  </a:t>
+            </a:r>
+            <a:r>
+              <a:rPr sz="1300">
+                <a:solidFill>
+                  <a:srgbClr val="4A5666"/>
+                </a:solidFill>
+                <a:latin typeface="맑은 고딕"/>
+                <a:ea typeface="맑은 고딕"/>
+              </a:rPr>
+              <a:t>정답이 적어 모델 학습도, 유형별 성능 비교도 잘 서지 않는 상황입니다</a:t>
+            </a:r>
+          </a:p>
+          <a:p>
+            <a:pPr marL="274320" indent="-274320">
+              <a:spcAft>
+                <a:spcPts val="500"/>
+              </a:spcAft>
+            </a:pPr>
+            <a:r>
+              <a:rPr sz="1400" b="0">
+                <a:solidFill>
+                  <a:srgbClr val="5B9BD5"/>
+                </a:solidFill>
+                <a:latin typeface="맑은 고딕"/>
+                <a:ea typeface="맑은 고딕"/>
+              </a:rPr>
+              <a:t>●  </a:t>
+            </a:r>
+            <a:r>
+              <a:rPr sz="1400">
+                <a:solidFill>
+                  <a:srgbClr val="1A1F2E"/>
+                </a:solidFill>
+                <a:latin typeface="맑은 고딕"/>
+                <a:ea typeface="맑은 고딕"/>
+              </a:rPr>
+              <a:t>본인이 BBD담당, Overlay담당, CD담당으로 trend를 보던 판정 기준을 </a:t>
+            </a:r>
+            <a:r>
+              <a:rPr sz="1400" b="1">
+                <a:solidFill>
+                  <a:srgbClr val="0F1E3D"/>
+                </a:solidFill>
+                <a:latin typeface="맑은 고딕"/>
+                <a:ea typeface="맑은 고딕"/>
+              </a:rPr>
+              <a:t>생성 규칙으로 옮겨</a:t>
+            </a:r>
+            <a:r>
+              <a:rPr sz="1400">
+                <a:solidFill>
+                  <a:srgbClr val="1A1F2E"/>
+                </a:solidFill>
+                <a:latin typeface="맑은 고딕"/>
+                <a:ea typeface="맑은 고딕"/>
+              </a:rPr>
+              <a:t>, 부족한 이상을 직접 만들어 검증 가능한 데이터를 확보했습니다</a:t>
+            </a:r>
+          </a:p>
+          <a:p>
+            <a:pPr marL="420624" indent="-420624" lvl="1">
+              <a:spcAft>
+                <a:spcPts val="500"/>
+              </a:spcAft>
+            </a:pPr>
+            <a:r>
+              <a:rPr sz="1300" b="0">
+                <a:solidFill>
+                  <a:srgbClr val="6E7B8E"/>
+                </a:solidFill>
+                <a:latin typeface="맑은 고딕"/>
+                <a:ea typeface="맑은 고딕"/>
+              </a:rPr>
+              <a:t>–  </a:t>
+            </a:r>
+            <a:r>
+              <a:rPr sz="1300">
+                <a:solidFill>
+                  <a:srgbClr val="4A5666"/>
+                </a:solidFill>
+                <a:latin typeface="맑은 고딕"/>
+                <a:ea typeface="맑은 고딕"/>
+              </a:rPr>
+              <a:t>성능 수치가 아니라, 없던 검증 데이터를 도메인 지식으로 메운 것이 핵심입니다</a:t>
+            </a:r>
+          </a:p>
+        </p:txBody>
+      </p:sp>
+      <p:sp>
+        <p:nvSpPr>
+          <p:cNvPr id="6" name="Rounded Rectangle 5"/>
           <p:cNvSpPr/>
           <p:nvPr/>
         </p:nvSpPr>
         <p:spPr>
           <a:xfrm>
-            <a:off x="640080" y="1783080"/>
-            <a:ext cx="5349240" cy="640080"/>
-          </a:xfrm>
-          <a:prstGeom prst="rect">
+            <a:off x="7406640" y="3931920"/>
+            <a:ext cx="4206240" cy="384048"/>
+          </a:xfrm>
+          <a:prstGeom prst="roundRect">
             <a:avLst/>
           </a:prstGeom>
           <a:solidFill>
-            <a:srgbClr val="0F1E3D"/>
+            <a:srgbClr val="E6F7F6"/>
           </a:solidFill>
           <a:ln>
             <a:noFill/>
@@ -4139,56 +4311,20 @@
       </p:sp>
       <p:sp>
         <p:nvSpPr>
-          <p:cNvPr id="6" name="TextBox 5"/>
-          <p:cNvSpPr txBox="1"/>
-          <p:nvPr/>
-        </p:nvSpPr>
-        <p:spPr>
-          <a:xfrm>
-            <a:off x="868680" y="1783080"/>
-            <a:ext cx="4983480" cy="640080"/>
-          </a:xfrm>
-          <a:prstGeom prst="rect">
-            <a:avLst/>
-          </a:prstGeom>
-          <a:noFill/>
-        </p:spPr>
-        <p:txBody>
-          <a:bodyPr wrap="square" anchor="ctr" lIns="0" rIns="0" tIns="0" bIns="0">
-            <a:spAutoFit/>
-          </a:bodyPr>
-          <a:lstStyle/>
-          <a:p>
-            <a:pPr algn="l"/>
-            <a:r>
-              <a:rPr sz="1550" b="1">
-                <a:solidFill>
-                  <a:srgbClr val="FFFFFF"/>
-                </a:solidFill>
-                <a:latin typeface="맑은 고딕"/>
-                <a:ea typeface="맑은 고딕"/>
-              </a:rPr>
-              <a:t>문제 — 이상 유형별 라벨이 희소</a:t>
-            </a:r>
-          </a:p>
-        </p:txBody>
-      </p:sp>
-      <p:sp>
-        <p:nvSpPr>
           <p:cNvPr id="7" name="Rectangle 6"/>
           <p:cNvSpPr/>
           <p:nvPr/>
         </p:nvSpPr>
         <p:spPr>
           <a:xfrm>
-            <a:off x="640080" y="2423160"/>
-            <a:ext cx="5349240" cy="3520440"/>
+            <a:off x="7406640" y="3931920"/>
+            <a:ext cx="82296" cy="384048"/>
           </a:xfrm>
           <a:prstGeom prst="rect">
             <a:avLst/>
           </a:prstGeom>
           <a:solidFill>
-            <a:srgbClr val="F2F5FA"/>
+            <a:srgbClr val="5B9BD5"/>
           </a:solidFill>
           <a:ln>
             <a:noFill/>
@@ -4225,8 +4361,8 @@
         </p:nvSpPr>
         <p:spPr>
           <a:xfrm>
-            <a:off x="868680" y="2606040"/>
-            <a:ext cx="4892040" cy="2276856"/>
+            <a:off x="7589520" y="3931920"/>
+            <a:ext cx="3877056" cy="384048"/>
           </a:xfrm>
           <a:prstGeom prst="rect">
             <a:avLst/>
@@ -4234,118 +4370,21 @@
           <a:noFill/>
         </p:spPr>
         <p:txBody>
-          <a:bodyPr wrap="square" anchor="t" lIns="0" rIns="0" tIns="0" bIns="0">
+          <a:bodyPr wrap="square" anchor="ctr" lIns="0" rIns="0" tIns="0" bIns="0">
             <a:spAutoFit/>
           </a:bodyPr>
           <a:lstStyle/>
           <a:p>
-            <a:pPr marL="274320" indent="-274320">
-              <a:lnSpc>
-                <a:spcPct val="110000"/>
-              </a:lnSpc>
-              <a:spcAft>
-                <a:spcPts val="400"/>
-              </a:spcAft>
-            </a:pPr>
-            <a:r>
-              <a:rPr sz="1300" b="0">
-                <a:solidFill>
-                  <a:srgbClr val="5B9BD5"/>
-                </a:solidFill>
-                <a:latin typeface="맑은 고딕"/>
-                <a:ea typeface="맑은 고딕"/>
-              </a:rPr>
-              <a:t>●  </a:t>
-            </a:r>
-            <a:r>
-              <a:rPr sz="1300">
-                <a:solidFill>
-                  <a:srgbClr val="1A1F2E"/>
-                </a:solidFill>
-                <a:latin typeface="맑은 고딕"/>
-                <a:ea typeface="맑은 고딕"/>
-              </a:rPr>
-              <a:t>실 계측 trend는 정상은 많지만 이상은 드물어, </a:t>
-            </a:r>
-            <a:r>
-              <a:rPr sz="1300" b="1">
+            <a:pPr algn="ctr"/>
+            <a:r>
+              <a:rPr sz="1350" b="1">
                 <a:solidFill>
                   <a:srgbClr val="0F1E3D"/>
                 </a:solidFill>
                 <a:latin typeface="맑은 고딕"/>
                 <a:ea typeface="맑은 고딕"/>
               </a:rPr>
-              <a:t>avg / std / spike / drift / context</a:t>
-            </a:r>
-            <a:r>
-              <a:rPr sz="1300">
-                <a:solidFill>
-                  <a:srgbClr val="1A1F2E"/>
-                </a:solidFill>
-                <a:latin typeface="맑은 고딕"/>
-                <a:ea typeface="맑은 고딕"/>
-              </a:rPr>
-              <a:t> 같은 이상 유형별 라벨이 부족합니다</a:t>
-            </a:r>
-          </a:p>
-          <a:p>
-            <a:pPr marL="274320" indent="-274320">
-              <a:lnSpc>
-                <a:spcPct val="110000"/>
-              </a:lnSpc>
-              <a:spcAft>
-                <a:spcPts val="400"/>
-              </a:spcAft>
-            </a:pPr>
-            <a:r>
-              <a:rPr sz="1300" b="0">
-                <a:solidFill>
-                  <a:srgbClr val="5B9BD5"/>
-                </a:solidFill>
-                <a:latin typeface="맑은 고딕"/>
-                <a:ea typeface="맑은 고딕"/>
-              </a:rPr>
-              <a:t>●  </a:t>
-            </a:r>
-            <a:r>
-              <a:rPr sz="1300">
-                <a:solidFill>
-                  <a:srgbClr val="1A1F2E"/>
-                </a:solidFill>
-                <a:latin typeface="맑은 고딕"/>
-                <a:ea typeface="맑은 고딕"/>
-              </a:rPr>
-              <a:t>유형별 평가셋이 없으면 모델 학습도, 성능 비교도 어렵습니다</a:t>
-            </a:r>
-          </a:p>
-          <a:p>
-            <a:pPr marL="420624" indent="-420624" lvl="1">
-              <a:lnSpc>
-                <a:spcPct val="110000"/>
-              </a:lnSpc>
-              <a:spcAft>
-                <a:spcPts val="400"/>
-              </a:spcAft>
-            </a:pPr>
-            <a:r>
-              <a:rPr sz="1200" b="0">
-                <a:solidFill>
-                  <a:srgbClr val="6E7B8E"/>
-                </a:solidFill>
-                <a:latin typeface="맑은 고딕"/>
-                <a:ea typeface="맑은 고딕"/>
-              </a:rPr>
-              <a:t>–  </a:t>
-            </a:r>
-            <a:r>
-              <a:rPr sz="1200">
-                <a:solidFill>
-                  <a:srgbClr val="4A5666"/>
-                </a:solidFill>
-                <a:latin typeface="맑은 고딕"/>
-                <a:ea typeface="맑은 고딕"/>
-              </a:rPr>
-              <a:t>정답 라벨이 적어 정량 metric 자체가 성립하기 힘든 상황</a:t>
+              <a:t>이상 5종 생성 규칙 + 검증셋 확보</a:t>
             </a:r>
           </a:p>
         </p:txBody>
@@ -4358,8 +4397,8 @@
         </p:nvSpPr>
         <p:spPr>
           <a:xfrm>
-            <a:off x="868680" y="5102352"/>
-            <a:ext cx="2372868" cy="685800"/>
+            <a:off x="2211363" y="4361832"/>
+            <a:ext cx="7830233" cy="1590768"/>
           </a:xfrm>
           <a:prstGeom prst="rect">
             <a:avLst/>
@@ -4396,50 +4435,30 @@
           </a:p>
         </p:txBody>
       </p:sp>
-      <p:sp>
-        <p:nvSpPr>
-          <p:cNvPr id="10" name="Rectangle 9"/>
-          <p:cNvSpPr/>
-          <p:nvPr/>
-        </p:nvSpPr>
-        <p:spPr>
-          <a:xfrm>
-            <a:off x="868680" y="5102352"/>
-            <a:ext cx="2372868" cy="64008"/>
-          </a:xfrm>
-          <a:prstGeom prst="rect">
-            <a:avLst/>
-          </a:prstGeom>
-          <a:solidFill>
-            <a:srgbClr val="5B9BD5"/>
-          </a:solidFill>
-          <a:ln>
-            <a:noFill/>
-          </a:ln>
-          <a:effectLst/>
-        </p:spPr>
-        <p:style>
-          <a:lnRef idx="1">
-            <a:schemeClr val="accent1"/>
-          </a:lnRef>
-          <a:fillRef idx="3">
-            <a:schemeClr val="accent1"/>
-          </a:fillRef>
-          <a:effectRef idx="2">
-            <a:schemeClr val="accent1"/>
-          </a:effectRef>
-          <a:fontRef idx="minor">
-            <a:schemeClr val="lt1"/>
-          </a:fontRef>
-        </p:style>
-        <p:txBody>
-          <a:bodyPr rtlCol="0" anchor="ctr"/>
-          <a:lstStyle/>
-          <a:p>
-            <a:pPr algn="ctr"/>
-          </a:p>
-        </p:txBody>
-      </p:sp>
+      <p:pic>
+        <p:nvPicPr>
+          <p:cNvPr id="10" name="Picture 9" descr="p3_deck_anomaly.png"/>
+          <p:cNvPicPr>
+            <a:picLocks noChangeAspect="1"/>
+          </p:cNvPicPr>
+          <p:nvPr/>
+        </p:nvPicPr>
+        <p:blipFill>
+          <a:blip r:embed="rId2"/>
+          <a:stretch>
+            <a:fillRect/>
+          </a:stretch>
+        </p:blipFill>
+        <p:spPr>
+          <a:xfrm>
+            <a:off x="2220363" y="4370832"/>
+            <a:ext cx="7812233" cy="1572768"/>
+          </a:xfrm>
+          <a:prstGeom prst="rect">
+            <a:avLst/>
+          </a:prstGeom>
+        </p:spPr>
+      </p:pic>
       <p:sp>
         <p:nvSpPr>
           <p:cNvPr id="11" name="TextBox 10"/>
@@ -4448,8 +4467,44 @@
         </p:nvSpPr>
         <p:spPr>
           <a:xfrm>
-            <a:off x="868680" y="5212080"/>
-            <a:ext cx="2372868" cy="329184"/>
+            <a:off x="640080" y="5961888"/>
+            <a:ext cx="10972800" cy="274320"/>
+          </a:xfrm>
+          <a:prstGeom prst="rect">
+            <a:avLst/>
+          </a:prstGeom>
+          <a:noFill/>
+        </p:spPr>
+        <p:txBody>
+          <a:bodyPr wrap="square" anchor="t" lIns="0" rIns="0" tIns="0" bIns="0">
+            <a:spAutoFit/>
+          </a:bodyPr>
+          <a:lstStyle/>
+          <a:p>
+            <a:pPr algn="ctr"/>
+            <a:r>
+              <a:rPr sz="1300">
+                <a:solidFill>
+                  <a:srgbClr val="3A485C"/>
+                </a:solidFill>
+                <a:latin typeface="맑은 고딕"/>
+                <a:ea typeface="맑은 고딕"/>
+              </a:rPr>
+              <a:t>현장에서 보던 이상 5종(평균 이동 / 산포 확대 / 순간 급등 / 선형 상승 / fleet 대비 이탈)을 생성 규칙으로 코드화</a:t>
+            </a:r>
+          </a:p>
+        </p:txBody>
+      </p:sp>
+      <p:sp>
+        <p:nvSpPr>
+          <p:cNvPr id="12" name="TextBox 11"/>
+          <p:cNvSpPr txBox="1"/>
+          <p:nvPr/>
+        </p:nvSpPr>
+        <p:spPr>
+          <a:xfrm>
+            <a:off x="457200" y="6437376"/>
+            <a:ext cx="8229600" cy="292608"/>
           </a:xfrm>
           <a:prstGeom prst="rect">
             <a:avLst/>
@@ -4462,43 +4517,7 @@
           </a:bodyPr>
           <a:lstStyle/>
           <a:p>
-            <a:pPr algn="ctr"/>
-            <a:r>
-              <a:rPr sz="1600" b="1">
-                <a:solidFill>
-                  <a:srgbClr val="0F1E3D"/>
-                </a:solidFill>
-                <a:latin typeface="맑은 고딕"/>
-                <a:ea typeface="맑은 고딕"/>
-              </a:rPr>
-              <a:t>이상 5종</a:t>
-            </a:r>
-          </a:p>
-        </p:txBody>
-      </p:sp>
-      <p:sp>
-        <p:nvSpPr>
-          <p:cNvPr id="12" name="TextBox 11"/>
-          <p:cNvSpPr txBox="1"/>
-          <p:nvPr/>
-        </p:nvSpPr>
-        <p:spPr>
-          <a:xfrm>
-            <a:off x="868680" y="5522976"/>
-            <a:ext cx="2372868" cy="256032"/>
-          </a:xfrm>
-          <a:prstGeom prst="rect">
-            <a:avLst/>
-          </a:prstGeom>
-          <a:noFill/>
-        </p:spPr>
-        <p:txBody>
-          <a:bodyPr wrap="square" anchor="ctr" lIns="0" rIns="0" tIns="0" bIns="0">
-            <a:spAutoFit/>
-          </a:bodyPr>
-          <a:lstStyle/>
-          <a:p>
-            <a:pPr algn="ctr"/>
+            <a:pPr algn="l"/>
             <a:r>
               <a:rPr sz="900">
                 <a:solidFill>
@@ -4507,805 +4526,6 @@
                 <a:latin typeface="맑은 고딕"/>
                 <a:ea typeface="맑은 고딕"/>
               </a:rPr>
-              <a:t>avg/std/spike/drift/context</a:t>
-            </a:r>
-          </a:p>
-        </p:txBody>
-      </p:sp>
-      <p:sp>
-        <p:nvSpPr>
-          <p:cNvPr id="13" name="Rectangle 12"/>
-          <p:cNvSpPr/>
-          <p:nvPr/>
-        </p:nvSpPr>
-        <p:spPr>
-          <a:xfrm>
-            <a:off x="3387852" y="5102352"/>
-            <a:ext cx="2372868" cy="685800"/>
-          </a:xfrm>
-          <a:prstGeom prst="rect">
-            <a:avLst/>
-          </a:prstGeom>
-          <a:solidFill>
-            <a:srgbClr val="FFFFFF"/>
-          </a:solidFill>
-          <a:ln w="12700">
-            <a:solidFill>
-              <a:srgbClr val="D7DEEA"/>
-            </a:solidFill>
-          </a:ln>
-          <a:effectLst/>
-        </p:spPr>
-        <p:style>
-          <a:lnRef idx="1">
-            <a:schemeClr val="accent1"/>
-          </a:lnRef>
-          <a:fillRef idx="3">
-            <a:schemeClr val="accent1"/>
-          </a:fillRef>
-          <a:effectRef idx="2">
-            <a:schemeClr val="accent1"/>
-          </a:effectRef>
-          <a:fontRef idx="minor">
-            <a:schemeClr val="lt1"/>
-          </a:fontRef>
-        </p:style>
-        <p:txBody>
-          <a:bodyPr rtlCol="0" anchor="ctr"/>
-          <a:lstStyle/>
-          <a:p>
-            <a:pPr algn="ctr"/>
-          </a:p>
-        </p:txBody>
-      </p:sp>
-      <p:sp>
-        <p:nvSpPr>
-          <p:cNvPr id="14" name="Rectangle 13"/>
-          <p:cNvSpPr/>
-          <p:nvPr/>
-        </p:nvSpPr>
-        <p:spPr>
-          <a:xfrm>
-            <a:off x="3387852" y="5102352"/>
-            <a:ext cx="2372868" cy="64008"/>
-          </a:xfrm>
-          <a:prstGeom prst="rect">
-            <a:avLst/>
-          </a:prstGeom>
-          <a:solidFill>
-            <a:srgbClr val="5B9BD5"/>
-          </a:solidFill>
-          <a:ln>
-            <a:noFill/>
-          </a:ln>
-          <a:effectLst/>
-        </p:spPr>
-        <p:style>
-          <a:lnRef idx="1">
-            <a:schemeClr val="accent1"/>
-          </a:lnRef>
-          <a:fillRef idx="3">
-            <a:schemeClr val="accent1"/>
-          </a:fillRef>
-          <a:effectRef idx="2">
-            <a:schemeClr val="accent1"/>
-          </a:effectRef>
-          <a:fontRef idx="minor">
-            <a:schemeClr val="lt1"/>
-          </a:fontRef>
-        </p:style>
-        <p:txBody>
-          <a:bodyPr rtlCol="0" anchor="ctr"/>
-          <a:lstStyle/>
-          <a:p>
-            <a:pPr algn="ctr"/>
-          </a:p>
-        </p:txBody>
-      </p:sp>
-      <p:sp>
-        <p:nvSpPr>
-          <p:cNvPr id="15" name="TextBox 14"/>
-          <p:cNvSpPr txBox="1"/>
-          <p:nvPr/>
-        </p:nvSpPr>
-        <p:spPr>
-          <a:xfrm>
-            <a:off x="3387852" y="5212080"/>
-            <a:ext cx="2372868" cy="329184"/>
-          </a:xfrm>
-          <a:prstGeom prst="rect">
-            <a:avLst/>
-          </a:prstGeom>
-          <a:noFill/>
-        </p:spPr>
-        <p:txBody>
-          <a:bodyPr wrap="square" anchor="ctr" lIns="0" rIns="0" tIns="0" bIns="0">
-            <a:spAutoFit/>
-          </a:bodyPr>
-          <a:lstStyle/>
-          <a:p>
-            <a:pPr algn="ctr"/>
-            <a:r>
-              <a:rPr sz="1600" b="1">
-                <a:solidFill>
-                  <a:srgbClr val="0F1E3D"/>
-                </a:solidFill>
-                <a:latin typeface="맑은 고딕"/>
-                <a:ea typeface="맑은 고딕"/>
-              </a:rPr>
-              <a:t>라벨 희소</a:t>
-            </a:r>
-          </a:p>
-        </p:txBody>
-      </p:sp>
-      <p:sp>
-        <p:nvSpPr>
-          <p:cNvPr id="16" name="TextBox 15"/>
-          <p:cNvSpPr txBox="1"/>
-          <p:nvPr/>
-        </p:nvSpPr>
-        <p:spPr>
-          <a:xfrm>
-            <a:off x="3387852" y="5522976"/>
-            <a:ext cx="2372868" cy="256032"/>
-          </a:xfrm>
-          <a:prstGeom prst="rect">
-            <a:avLst/>
-          </a:prstGeom>
-          <a:noFill/>
-        </p:spPr>
-        <p:txBody>
-          <a:bodyPr wrap="square" anchor="ctr" lIns="0" rIns="0" tIns="0" bIns="0">
-            <a:spAutoFit/>
-          </a:bodyPr>
-          <a:lstStyle/>
-          <a:p>
-            <a:pPr algn="ctr"/>
-            <a:r>
-              <a:rPr sz="900">
-                <a:solidFill>
-                  <a:srgbClr val="6B7280"/>
-                </a:solidFill>
-                <a:latin typeface="맑은 고딕"/>
-                <a:ea typeface="맑은 고딕"/>
-              </a:rPr>
-              <a:t>정량 평가 난항</a:t>
-            </a:r>
-          </a:p>
-        </p:txBody>
-      </p:sp>
-      <p:sp>
-        <p:nvSpPr>
-          <p:cNvPr id="17" name="Rectangle 16"/>
-          <p:cNvSpPr/>
-          <p:nvPr/>
-        </p:nvSpPr>
-        <p:spPr>
-          <a:xfrm>
-            <a:off x="6263640" y="1783080"/>
-            <a:ext cx="5349240" cy="640080"/>
-          </a:xfrm>
-          <a:prstGeom prst="rect">
-            <a:avLst/>
-          </a:prstGeom>
-          <a:solidFill>
-            <a:srgbClr val="0F1E3D"/>
-          </a:solidFill>
-          <a:ln>
-            <a:noFill/>
-          </a:ln>
-          <a:effectLst/>
-        </p:spPr>
-        <p:style>
-          <a:lnRef idx="1">
-            <a:schemeClr val="accent1"/>
-          </a:lnRef>
-          <a:fillRef idx="3">
-            <a:schemeClr val="accent1"/>
-          </a:fillRef>
-          <a:effectRef idx="2">
-            <a:schemeClr val="accent1"/>
-          </a:effectRef>
-          <a:fontRef idx="minor">
-            <a:schemeClr val="lt1"/>
-          </a:fontRef>
-        </p:style>
-        <p:txBody>
-          <a:bodyPr rtlCol="0" anchor="ctr"/>
-          <a:lstStyle/>
-          <a:p>
-            <a:pPr algn="ctr"/>
-          </a:p>
-        </p:txBody>
-      </p:sp>
-      <p:sp>
-        <p:nvSpPr>
-          <p:cNvPr id="18" name="TextBox 17"/>
-          <p:cNvSpPr txBox="1"/>
-          <p:nvPr/>
-        </p:nvSpPr>
-        <p:spPr>
-          <a:xfrm>
-            <a:off x="6492240" y="1783080"/>
-            <a:ext cx="4983480" cy="640080"/>
-          </a:xfrm>
-          <a:prstGeom prst="rect">
-            <a:avLst/>
-          </a:prstGeom>
-          <a:noFill/>
-        </p:spPr>
-        <p:txBody>
-          <a:bodyPr wrap="square" anchor="ctr" lIns="0" rIns="0" tIns="0" bIns="0">
-            <a:spAutoFit/>
-          </a:bodyPr>
-          <a:lstStyle/>
-          <a:p>
-            <a:pPr algn="l"/>
-            <a:r>
-              <a:rPr sz="1550" b="1">
-                <a:solidFill>
-                  <a:srgbClr val="FFFFFF"/>
-                </a:solidFill>
-                <a:latin typeface="맑은 고딕"/>
-                <a:ea typeface="맑은 고딕"/>
-              </a:rPr>
-              <a:t>해법 — domain knowledge generator</a:t>
-            </a:r>
-          </a:p>
-        </p:txBody>
-      </p:sp>
-      <p:sp>
-        <p:nvSpPr>
-          <p:cNvPr id="19" name="Rectangle 18"/>
-          <p:cNvSpPr/>
-          <p:nvPr/>
-        </p:nvSpPr>
-        <p:spPr>
-          <a:xfrm>
-            <a:off x="6263640" y="2423160"/>
-            <a:ext cx="5349240" cy="3520440"/>
-          </a:xfrm>
-          <a:prstGeom prst="rect">
-            <a:avLst/>
-          </a:prstGeom>
-          <a:solidFill>
-            <a:srgbClr val="F2F5FA"/>
-          </a:solidFill>
-          <a:ln>
-            <a:noFill/>
-          </a:ln>
-          <a:effectLst/>
-        </p:spPr>
-        <p:style>
-          <a:lnRef idx="1">
-            <a:schemeClr val="accent1"/>
-          </a:lnRef>
-          <a:fillRef idx="3">
-            <a:schemeClr val="accent1"/>
-          </a:fillRef>
-          <a:effectRef idx="2">
-            <a:schemeClr val="accent1"/>
-          </a:effectRef>
-          <a:fontRef idx="minor">
-            <a:schemeClr val="lt1"/>
-          </a:fontRef>
-        </p:style>
-        <p:txBody>
-          <a:bodyPr rtlCol="0" anchor="ctr"/>
-          <a:lstStyle/>
-          <a:p>
-            <a:pPr algn="ctr"/>
-          </a:p>
-        </p:txBody>
-      </p:sp>
-      <p:sp>
-        <p:nvSpPr>
-          <p:cNvPr id="20" name="TextBox 19"/>
-          <p:cNvSpPr txBox="1"/>
-          <p:nvPr/>
-        </p:nvSpPr>
-        <p:spPr>
-          <a:xfrm>
-            <a:off x="6492240" y="2606040"/>
-            <a:ext cx="4892040" cy="2276856"/>
-          </a:xfrm>
-          <a:prstGeom prst="rect">
-            <a:avLst/>
-          </a:prstGeom>
-          <a:noFill/>
-        </p:spPr>
-        <p:txBody>
-          <a:bodyPr wrap="square" anchor="t" lIns="0" rIns="0" tIns="0" bIns="0">
-            <a:spAutoFit/>
-          </a:bodyPr>
-          <a:lstStyle/>
-          <a:p>
-            <a:pPr marL="274320" indent="-274320">
-              <a:lnSpc>
-                <a:spcPct val="110000"/>
-              </a:lnSpc>
-              <a:spcAft>
-                <a:spcPts val="400"/>
-              </a:spcAft>
-            </a:pPr>
-            <a:r>
-              <a:rPr sz="1300" b="0">
-                <a:solidFill>
-                  <a:srgbClr val="5B9BD5"/>
-                </a:solidFill>
-                <a:latin typeface="맑은 고딕"/>
-                <a:ea typeface="맑은 고딕"/>
-              </a:rPr>
-              <a:t>●  </a:t>
-            </a:r>
-            <a:r>
-              <a:rPr sz="1300">
-                <a:solidFill>
-                  <a:srgbClr val="1A1F2E"/>
-                </a:solidFill>
-                <a:latin typeface="맑은 고딕"/>
-                <a:ea typeface="맑은 고딕"/>
-              </a:rPr>
-              <a:t>BBD담당/Overlay담당/CD담당으로 쌓은 trend 분석 경험으로 계측의 </a:t>
-            </a:r>
-            <a:r>
-              <a:rPr sz="1300" b="1">
-                <a:solidFill>
-                  <a:srgbClr val="0F1E3D"/>
-                </a:solidFill>
-                <a:latin typeface="맑은 고딕"/>
-                <a:ea typeface="맑은 고딕"/>
-              </a:rPr>
-              <a:t>영역 구조, 노이즈, 이상 발생 방식</a:t>
-            </a:r>
-            <a:r>
-              <a:rPr sz="1300">
-                <a:solidFill>
-                  <a:srgbClr val="1A1F2E"/>
-                </a:solidFill>
-                <a:latin typeface="맑은 고딕"/>
-                <a:ea typeface="맑은 고딕"/>
-              </a:rPr>
-              <a:t>을 규칙으로 코드화했습니다</a:t>
-            </a:r>
-          </a:p>
-          <a:p>
-            <a:pPr marL="274320" indent="-274320">
-              <a:lnSpc>
-                <a:spcPct val="110000"/>
-              </a:lnSpc>
-              <a:spcAft>
-                <a:spcPts val="400"/>
-              </a:spcAft>
-            </a:pPr>
-            <a:r>
-              <a:rPr sz="1300" b="0">
-                <a:solidFill>
-                  <a:srgbClr val="5B9BD5"/>
-                </a:solidFill>
-                <a:latin typeface="맑은 고딕"/>
-                <a:ea typeface="맑은 고딕"/>
-              </a:rPr>
-              <a:t>●  </a:t>
-            </a:r>
-            <a:r>
-              <a:rPr sz="1300">
-                <a:solidFill>
-                  <a:srgbClr val="1A1F2E"/>
-                </a:solidFill>
-                <a:latin typeface="맑은 고딕"/>
-                <a:ea typeface="맑은 고딕"/>
-              </a:rPr>
-              <a:t>정상 baseline을 만들고 그 위에 이상을 합성해 </a:t>
-            </a:r>
-            <a:r>
-              <a:rPr sz="1300" b="1">
-                <a:solidFill>
-                  <a:srgbClr val="0F1E3D"/>
-                </a:solidFill>
-                <a:latin typeface="맑은 고딕"/>
-                <a:ea typeface="맑은 고딕"/>
-              </a:rPr>
-              <a:t>검증 가능한 benchmark</a:t>
-            </a:r>
-            <a:r>
-              <a:rPr sz="1300">
-                <a:solidFill>
-                  <a:srgbClr val="1A1F2E"/>
-                </a:solidFill>
-                <a:latin typeface="맑은 고딕"/>
-                <a:ea typeface="맑은 고딕"/>
-              </a:rPr>
-              <a:t>를 확보했습니다</a:t>
-            </a:r>
-          </a:p>
-          <a:p>
-            <a:pPr marL="420624" indent="-420624" lvl="1">
-              <a:lnSpc>
-                <a:spcPct val="110000"/>
-              </a:lnSpc>
-              <a:spcAft>
-                <a:spcPts val="400"/>
-              </a:spcAft>
-            </a:pPr>
-            <a:r>
-              <a:rPr sz="1200" b="0">
-                <a:solidFill>
-                  <a:srgbClr val="6E7B8E"/>
-                </a:solidFill>
-                <a:latin typeface="맑은 고딕"/>
-                <a:ea typeface="맑은 고딕"/>
-              </a:rPr>
-              <a:t>–  </a:t>
-            </a:r>
-            <a:r>
-              <a:rPr sz="1200">
-                <a:solidFill>
-                  <a:srgbClr val="4A5666"/>
-                </a:solidFill>
-                <a:latin typeface="맑은 고딕"/>
-                <a:ea typeface="맑은 고딕"/>
-              </a:rPr>
-              <a:t>영역(계측 밀도) + 노이즈(계측 변동) + 이상(불량 방식) 세 축을 규칙화</a:t>
-            </a:r>
-          </a:p>
-        </p:txBody>
-      </p:sp>
-      <p:sp>
-        <p:nvSpPr>
-          <p:cNvPr id="21" name="Rectangle 20"/>
-          <p:cNvSpPr/>
-          <p:nvPr/>
-        </p:nvSpPr>
-        <p:spPr>
-          <a:xfrm>
-            <a:off x="6492240" y="5102352"/>
-            <a:ext cx="2372868" cy="685800"/>
-          </a:xfrm>
-          <a:prstGeom prst="rect">
-            <a:avLst/>
-          </a:prstGeom>
-          <a:solidFill>
-            <a:srgbClr val="FFFFFF"/>
-          </a:solidFill>
-          <a:ln w="12700">
-            <a:solidFill>
-              <a:srgbClr val="D7DEEA"/>
-            </a:solidFill>
-          </a:ln>
-          <a:effectLst/>
-        </p:spPr>
-        <p:style>
-          <a:lnRef idx="1">
-            <a:schemeClr val="accent1"/>
-          </a:lnRef>
-          <a:fillRef idx="3">
-            <a:schemeClr val="accent1"/>
-          </a:fillRef>
-          <a:effectRef idx="2">
-            <a:schemeClr val="accent1"/>
-          </a:effectRef>
-          <a:fontRef idx="minor">
-            <a:schemeClr val="lt1"/>
-          </a:fontRef>
-        </p:style>
-        <p:txBody>
-          <a:bodyPr rtlCol="0" anchor="ctr"/>
-          <a:lstStyle/>
-          <a:p>
-            <a:pPr algn="ctr"/>
-          </a:p>
-        </p:txBody>
-      </p:sp>
-      <p:sp>
-        <p:nvSpPr>
-          <p:cNvPr id="22" name="Rectangle 21"/>
-          <p:cNvSpPr/>
-          <p:nvPr/>
-        </p:nvSpPr>
-        <p:spPr>
-          <a:xfrm>
-            <a:off x="6492240" y="5102352"/>
-            <a:ext cx="2372868" cy="64008"/>
-          </a:xfrm>
-          <a:prstGeom prst="rect">
-            <a:avLst/>
-          </a:prstGeom>
-          <a:solidFill>
-            <a:srgbClr val="5B9BD5"/>
-          </a:solidFill>
-          <a:ln>
-            <a:noFill/>
-          </a:ln>
-          <a:effectLst/>
-        </p:spPr>
-        <p:style>
-          <a:lnRef idx="1">
-            <a:schemeClr val="accent1"/>
-          </a:lnRef>
-          <a:fillRef idx="3">
-            <a:schemeClr val="accent1"/>
-          </a:fillRef>
-          <a:effectRef idx="2">
-            <a:schemeClr val="accent1"/>
-          </a:effectRef>
-          <a:fontRef idx="minor">
-            <a:schemeClr val="lt1"/>
-          </a:fontRef>
-        </p:style>
-        <p:txBody>
-          <a:bodyPr rtlCol="0" anchor="ctr"/>
-          <a:lstStyle/>
-          <a:p>
-            <a:pPr algn="ctr"/>
-          </a:p>
-        </p:txBody>
-      </p:sp>
-      <p:sp>
-        <p:nvSpPr>
-          <p:cNvPr id="23" name="TextBox 22"/>
-          <p:cNvSpPr txBox="1"/>
-          <p:nvPr/>
-        </p:nvSpPr>
-        <p:spPr>
-          <a:xfrm>
-            <a:off x="6492240" y="5212080"/>
-            <a:ext cx="2372868" cy="329184"/>
-          </a:xfrm>
-          <a:prstGeom prst="rect">
-            <a:avLst/>
-          </a:prstGeom>
-          <a:noFill/>
-        </p:spPr>
-        <p:txBody>
-          <a:bodyPr wrap="square" anchor="ctr" lIns="0" rIns="0" tIns="0" bIns="0">
-            <a:spAutoFit/>
-          </a:bodyPr>
-          <a:lstStyle/>
-          <a:p>
-            <a:pPr algn="ctr"/>
-            <a:r>
-              <a:rPr sz="1600" b="1">
-                <a:solidFill>
-                  <a:srgbClr val="0F1E3D"/>
-                </a:solidFill>
-                <a:latin typeface="맑은 고딕"/>
-                <a:ea typeface="맑은 고딕"/>
-              </a:rPr>
-              <a:t>규칙 기반</a:t>
-            </a:r>
-          </a:p>
-        </p:txBody>
-      </p:sp>
-      <p:sp>
-        <p:nvSpPr>
-          <p:cNvPr id="24" name="TextBox 23"/>
-          <p:cNvSpPr txBox="1"/>
-          <p:nvPr/>
-        </p:nvSpPr>
-        <p:spPr>
-          <a:xfrm>
-            <a:off x="6492240" y="5522976"/>
-            <a:ext cx="2372868" cy="256032"/>
-          </a:xfrm>
-          <a:prstGeom prst="rect">
-            <a:avLst/>
-          </a:prstGeom>
-          <a:noFill/>
-        </p:spPr>
-        <p:txBody>
-          <a:bodyPr wrap="square" anchor="ctr" lIns="0" rIns="0" tIns="0" bIns="0">
-            <a:spAutoFit/>
-          </a:bodyPr>
-          <a:lstStyle/>
-          <a:p>
-            <a:pPr algn="ctr"/>
-            <a:r>
-              <a:rPr sz="900">
-                <a:solidFill>
-                  <a:srgbClr val="6B7280"/>
-                </a:solidFill>
-                <a:latin typeface="맑은 고딕"/>
-                <a:ea typeface="맑은 고딕"/>
-              </a:rPr>
-              <a:t>영역+노이즈+이상</a:t>
-            </a:r>
-          </a:p>
-        </p:txBody>
-      </p:sp>
-      <p:sp>
-        <p:nvSpPr>
-          <p:cNvPr id="25" name="Rectangle 24"/>
-          <p:cNvSpPr/>
-          <p:nvPr/>
-        </p:nvSpPr>
-        <p:spPr>
-          <a:xfrm>
-            <a:off x="9011412" y="5102352"/>
-            <a:ext cx="2372868" cy="685800"/>
-          </a:xfrm>
-          <a:prstGeom prst="rect">
-            <a:avLst/>
-          </a:prstGeom>
-          <a:solidFill>
-            <a:srgbClr val="FFFFFF"/>
-          </a:solidFill>
-          <a:ln w="12700">
-            <a:solidFill>
-              <a:srgbClr val="D7DEEA"/>
-            </a:solidFill>
-          </a:ln>
-          <a:effectLst/>
-        </p:spPr>
-        <p:style>
-          <a:lnRef idx="1">
-            <a:schemeClr val="accent1"/>
-          </a:lnRef>
-          <a:fillRef idx="3">
-            <a:schemeClr val="accent1"/>
-          </a:fillRef>
-          <a:effectRef idx="2">
-            <a:schemeClr val="accent1"/>
-          </a:effectRef>
-          <a:fontRef idx="minor">
-            <a:schemeClr val="lt1"/>
-          </a:fontRef>
-        </p:style>
-        <p:txBody>
-          <a:bodyPr rtlCol="0" anchor="ctr"/>
-          <a:lstStyle/>
-          <a:p>
-            <a:pPr algn="ctr"/>
-          </a:p>
-        </p:txBody>
-      </p:sp>
-      <p:sp>
-        <p:nvSpPr>
-          <p:cNvPr id="26" name="Rectangle 25"/>
-          <p:cNvSpPr/>
-          <p:nvPr/>
-        </p:nvSpPr>
-        <p:spPr>
-          <a:xfrm>
-            <a:off x="9011412" y="5102352"/>
-            <a:ext cx="2372868" cy="64008"/>
-          </a:xfrm>
-          <a:prstGeom prst="rect">
-            <a:avLst/>
-          </a:prstGeom>
-          <a:solidFill>
-            <a:srgbClr val="5B9BD5"/>
-          </a:solidFill>
-          <a:ln>
-            <a:noFill/>
-          </a:ln>
-          <a:effectLst/>
-        </p:spPr>
-        <p:style>
-          <a:lnRef idx="1">
-            <a:schemeClr val="accent1"/>
-          </a:lnRef>
-          <a:fillRef idx="3">
-            <a:schemeClr val="accent1"/>
-          </a:fillRef>
-          <a:effectRef idx="2">
-            <a:schemeClr val="accent1"/>
-          </a:effectRef>
-          <a:fontRef idx="minor">
-            <a:schemeClr val="lt1"/>
-          </a:fontRef>
-        </p:style>
-        <p:txBody>
-          <a:bodyPr rtlCol="0" anchor="ctr"/>
-          <a:lstStyle/>
-          <a:p>
-            <a:pPr algn="ctr"/>
-          </a:p>
-        </p:txBody>
-      </p:sp>
-      <p:sp>
-        <p:nvSpPr>
-          <p:cNvPr id="27" name="TextBox 26"/>
-          <p:cNvSpPr txBox="1"/>
-          <p:nvPr/>
-        </p:nvSpPr>
-        <p:spPr>
-          <a:xfrm>
-            <a:off x="9011412" y="5212080"/>
-            <a:ext cx="2372868" cy="329184"/>
-          </a:xfrm>
-          <a:prstGeom prst="rect">
-            <a:avLst/>
-          </a:prstGeom>
-          <a:noFill/>
-        </p:spPr>
-        <p:txBody>
-          <a:bodyPr wrap="square" anchor="ctr" lIns="0" rIns="0" tIns="0" bIns="0">
-            <a:spAutoFit/>
-          </a:bodyPr>
-          <a:lstStyle/>
-          <a:p>
-            <a:pPr algn="ctr"/>
-            <a:r>
-              <a:rPr sz="1600" b="1">
-                <a:solidFill>
-                  <a:srgbClr val="0F1E3D"/>
-                </a:solidFill>
-                <a:latin typeface="맑은 고딕"/>
-                <a:ea typeface="맑은 고딕"/>
-              </a:rPr>
-              <a:t>benchmark</a:t>
-            </a:r>
-          </a:p>
-        </p:txBody>
-      </p:sp>
-      <p:sp>
-        <p:nvSpPr>
-          <p:cNvPr id="28" name="TextBox 27"/>
-          <p:cNvSpPr txBox="1"/>
-          <p:nvPr/>
-        </p:nvSpPr>
-        <p:spPr>
-          <a:xfrm>
-            <a:off x="9011412" y="5522976"/>
-            <a:ext cx="2372868" cy="256032"/>
-          </a:xfrm>
-          <a:prstGeom prst="rect">
-            <a:avLst/>
-          </a:prstGeom>
-          <a:noFill/>
-        </p:spPr>
-        <p:txBody>
-          <a:bodyPr wrap="square" anchor="ctr" lIns="0" rIns="0" tIns="0" bIns="0">
-            <a:spAutoFit/>
-          </a:bodyPr>
-          <a:lstStyle/>
-          <a:p>
-            <a:pPr algn="ctr"/>
-            <a:r>
-              <a:rPr sz="900">
-                <a:solidFill>
-                  <a:srgbClr val="6B7280"/>
-                </a:solidFill>
-                <a:latin typeface="맑은 고딕"/>
-                <a:ea typeface="맑은 고딕"/>
-              </a:rPr>
-              <a:t>검증 가능</a:t>
-            </a:r>
-          </a:p>
-        </p:txBody>
-      </p:sp>
-      <p:sp>
-        <p:nvSpPr>
-          <p:cNvPr id="29" name="TextBox 28"/>
-          <p:cNvSpPr txBox="1"/>
-          <p:nvPr/>
-        </p:nvSpPr>
-        <p:spPr>
-          <a:xfrm>
-            <a:off x="457200" y="6437376"/>
-            <a:ext cx="8229600" cy="292608"/>
-          </a:xfrm>
-          <a:prstGeom prst="rect">
-            <a:avLst/>
-          </a:prstGeom>
-          <a:noFill/>
-        </p:spPr>
-        <p:txBody>
-          <a:bodyPr wrap="square" anchor="ctr" lIns="0" rIns="0" tIns="0" bIns="0">
-            <a:spAutoFit/>
-          </a:bodyPr>
-          <a:lstStyle/>
-          <a:p>
-            <a:pPr algn="l"/>
-            <a:r>
-              <a:rPr sz="900">
-                <a:solidFill>
-                  <a:srgbClr val="6B7280"/>
-                </a:solidFill>
-                <a:latin typeface="맑은 고딕"/>
-                <a:ea typeface="맑은 고딕"/>
-              </a:rPr>
               <a:t>최호길 | QIE Data Science | AI Specialist 인증</a:t>
             </a:r>
           </a:p>
@@ -5313,7 +4533,7 @@
       </p:sp>
       <p:sp>
         <p:nvSpPr>
-          <p:cNvPr id="30" name="TextBox 29"/>
+          <p:cNvPr id="13" name="TextBox 12"/>
           <p:cNvSpPr txBox="1"/>
           <p:nvPr/>
         </p:nvSpPr>
@@ -5448,7 +4668,7 @@
                 <a:latin typeface="맑은 고딕"/>
                 <a:ea typeface="맑은 고딕"/>
               </a:rPr>
-              <a:t>P3 | trend 생성</a:t>
+              <a:t>P3 | 정상 baseline 생성</a:t>
             </a:r>
           </a:p>
         </p:txBody>
@@ -5484,21 +4704,138 @@
                 <a:latin typeface="맑은 고딕"/>
                 <a:ea typeface="맑은 고딕"/>
               </a:rPr>
-              <a:t>정상 baseline(영역 + 노이즈) 위에 이상 5종을 합성</a:t>
-            </a:r>
-          </a:p>
-        </p:txBody>
-      </p:sp>
-      <p:sp>
-        <p:nvSpPr>
-          <p:cNvPr id="5" name="Rectangle 4"/>
+              <a:t>측정 밀도(영역)와 계측 변동(노이즈)으로 정상 baseline을 만든다</a:t>
+            </a:r>
+          </a:p>
+        </p:txBody>
+      </p:sp>
+      <p:sp>
+        <p:nvSpPr>
+          <p:cNvPr id="5" name="TextBox 4"/>
+          <p:cNvSpPr txBox="1"/>
+          <p:nvPr/>
+        </p:nvSpPr>
+        <p:spPr>
+          <a:xfrm>
+            <a:off x="640080" y="1828800"/>
+            <a:ext cx="10972800" cy="914400"/>
+          </a:xfrm>
+          <a:prstGeom prst="rect">
+            <a:avLst/>
+          </a:prstGeom>
+          <a:noFill/>
+        </p:spPr>
+        <p:txBody>
+          <a:bodyPr wrap="square" anchor="t" lIns="0" rIns="0" tIns="0" bIns="0">
+            <a:spAutoFit/>
+          </a:bodyPr>
+          <a:lstStyle/>
+          <a:p>
+            <a:pPr marL="274320" indent="-274320">
+              <a:spcAft>
+                <a:spcPts val="500"/>
+              </a:spcAft>
+            </a:pPr>
+            <a:r>
+              <a:rPr sz="1450" b="0">
+                <a:solidFill>
+                  <a:srgbClr val="5B9BD5"/>
+                </a:solidFill>
+                <a:latin typeface="맑은 고딕"/>
+                <a:ea typeface="맑은 고딕"/>
+              </a:rPr>
+              <a:t>●  </a:t>
+            </a:r>
+            <a:r>
+              <a:rPr sz="1450">
+                <a:solidFill>
+                  <a:srgbClr val="1A1F2E"/>
+                </a:solidFill>
+                <a:latin typeface="맑은 고딕"/>
+                <a:ea typeface="맑은 고딕"/>
+              </a:rPr>
+              <a:t>측정 빈도에 따라 </a:t>
+            </a:r>
+            <a:r>
+              <a:rPr sz="1450" b="1">
+                <a:solidFill>
+                  <a:srgbClr val="0F1E3D"/>
+                </a:solidFill>
+                <a:latin typeface="맑은 고딕"/>
+                <a:ea typeface="맑은 고딕"/>
+              </a:rPr>
+              <a:t>밀집 / 희소 / 결핍</a:t>
+            </a:r>
+            <a:r>
+              <a:rPr sz="1450">
+                <a:solidFill>
+                  <a:srgbClr val="1A1F2E"/>
+                </a:solidFill>
+                <a:latin typeface="맑은 고딕"/>
+                <a:ea typeface="맑은 고딕"/>
+              </a:rPr>
+              <a:t> 영역이 갈리는 실제 trend 구조를 episode 단위로 재현했습니다</a:t>
+            </a:r>
+          </a:p>
+          <a:p>
+            <a:pPr marL="274320" indent="-274320">
+              <a:spcAft>
+                <a:spcPts val="500"/>
+              </a:spcAft>
+            </a:pPr>
+            <a:r>
+              <a:rPr sz="1450" b="0">
+                <a:solidFill>
+                  <a:srgbClr val="5B9BD5"/>
+                </a:solidFill>
+                <a:latin typeface="맑은 고딕"/>
+                <a:ea typeface="맑은 고딕"/>
+              </a:rPr>
+              <a:t>●  </a:t>
+            </a:r>
+            <a:r>
+              <a:rPr sz="1450">
+                <a:solidFill>
+                  <a:srgbClr val="1A1F2E"/>
+                </a:solidFill>
+                <a:latin typeface="맑은 고딕"/>
+                <a:ea typeface="맑은 고딕"/>
+              </a:rPr>
+              <a:t>계측 변동은 설비 거동에 맞춰 </a:t>
+            </a:r>
+            <a:r>
+              <a:rPr sz="1450" b="1">
+                <a:solidFill>
+                  <a:srgbClr val="0F1E3D"/>
+                </a:solidFill>
+                <a:latin typeface="맑은 고딕"/>
+                <a:ea typeface="맑은 고딕"/>
+              </a:rPr>
+              <a:t>3종 노이즈</a:t>
+            </a:r>
+            <a:r>
+              <a:rPr sz="1450">
+                <a:solidFill>
+                  <a:srgbClr val="1A1F2E"/>
+                </a:solidFill>
+                <a:latin typeface="맑은 고딕"/>
+                <a:ea typeface="맑은 고딕"/>
+              </a:rPr>
+              <a:t>로 나눴습니다 — 기본 산포(Gaussian), 설비 상태변동(Correlated AR), 계측 헌팅(Laplacian)</a:t>
+            </a:r>
+          </a:p>
+        </p:txBody>
+      </p:sp>
+      <p:sp>
+        <p:nvSpPr>
+          <p:cNvPr id="6" name="Rectangle 5"/>
           <p:cNvSpPr/>
           <p:nvPr/>
         </p:nvSpPr>
         <p:spPr>
           <a:xfrm>
-            <a:off x="2056119" y="1819800"/>
-            <a:ext cx="8140722" cy="4132800"/>
+            <a:off x="2117584" y="2862216"/>
+            <a:ext cx="8017792" cy="3090384"/>
           </a:xfrm>
           <a:prstGeom prst="rect">
             <a:avLst/>
@@ -5537,7 +4874,7 @@
       </p:sp>
       <p:pic>
         <p:nvPicPr>
-          <p:cNvPr id="6" name="Picture 5" descr="p3_deck_combined.png"/>
+          <p:cNvPr id="7" name="Picture 6" descr="p3_deck_baseline.png"/>
           <p:cNvPicPr>
             <a:picLocks noChangeAspect="1"/>
           </p:cNvPicPr>
@@ -5551,8 +4888,8 @@
         </p:blipFill>
         <p:spPr>
           <a:xfrm>
-            <a:off x="2065119" y="1828800"/>
-            <a:ext cx="8122722" cy="4114800"/>
+            <a:off x="2126584" y="2871216"/>
+            <a:ext cx="7999792" cy="3072384"/>
           </a:xfrm>
           <a:prstGeom prst="rect">
             <a:avLst/>
@@ -5561,7 +4898,7 @@
       </p:pic>
       <p:sp>
         <p:nvSpPr>
-          <p:cNvPr id="7" name="TextBox 6"/>
+          <p:cNvPr id="8" name="TextBox 7"/>
           <p:cNvSpPr txBox="1"/>
           <p:nvPr/>
         </p:nvSpPr>
@@ -5590,14 +4927,14 @@
                 <a:latin typeface="맑은 고딕"/>
                 <a:ea typeface="맑은 고딕"/>
               </a:rPr>
-              <a:t>(a) 측정 빈도에 따라 밀집/희소/결핍이 갈리는 정상 baseline, (b) 계측 변동을 Gaussian/설비(AR)/헌팅(Laplacian) 노이즈로 재현, (c) 그 위에 이상 5종(avg/std/spike/drift/context) 합성</a:t>
-            </a:r>
-          </a:p>
-        </p:txBody>
-      </p:sp>
-      <p:sp>
-        <p:nvSpPr>
-          <p:cNvPr id="8" name="TextBox 7"/>
+              <a:t>측정 빈도에 따라 영역 밀도를 다르게 주고, 신호 자체는 평탄하게 둔 채 변동은 노이즈로만 만들어 실제 계측과 비슷하게 했습니다</a:t>
+            </a:r>
+          </a:p>
+        </p:txBody>
+      </p:sp>
+      <p:sp>
+        <p:nvSpPr>
+          <p:cNvPr id="9" name="TextBox 8"/>
           <p:cNvSpPr txBox="1"/>
           <p:nvPr/>
         </p:nvSpPr>
@@ -5633,7 +4970,7 @@
       </p:sp>
       <p:sp>
         <p:nvSpPr>
-          <p:cNvPr id="9" name="TextBox 8"/>
+          <p:cNvPr id="10" name="TextBox 9"/>
           <p:cNvSpPr txBox="1"/>
           <p:nvPr/>
         </p:nvSpPr>
@@ -5768,7 +5105,7 @@
                 <a:latin typeface="맑은 고딕"/>
                 <a:ea typeface="맑은 고딕"/>
               </a:rPr>
-              <a:t>P3 | 파이프라인/데이터</a:t>
+              <a:t>P3 | 이상 합성</a:t>
             </a:r>
           </a:p>
         </p:txBody>
@@ -5804,7 +5141,7 @@
                 <a:latin typeface="맑은 고딕"/>
                 <a:ea typeface="맑은 고딕"/>
               </a:rPr>
-              <a:t>생성 파이프라인과 데이터 구성</a:t>
+              <a:t>정상 baseline 위에 이상 5종을 현장 발생 방식대로 합성</a:t>
             </a:r>
           </a:p>
         </p:txBody>
@@ -5818,7 +5155,7 @@
         <p:spPr>
           <a:xfrm>
             <a:off x="640080" y="1828800"/>
-            <a:ext cx="10972800" cy="640080"/>
+            <a:ext cx="10972800" cy="1097280"/>
           </a:xfrm>
           <a:prstGeom prst="rect">
             <a:avLst/>
@@ -5837,7 +5174,7 @@
               </a:spcAft>
             </a:pPr>
             <a:r>
-              <a:rPr sz="1400" b="0">
+              <a:rPr sz="1450" b="0">
                 <a:solidFill>
                   <a:srgbClr val="5B9BD5"/>
                 </a:solidFill>
@@ -5847,39 +5184,154 @@
               <a:t>●  </a:t>
             </a:r>
             <a:r>
-              <a:rPr sz="1400">
+              <a:rPr sz="1450" b="1">
+                <a:solidFill>
+                  <a:srgbClr val="0F1E3D"/>
+                </a:solidFill>
+                <a:latin typeface="맑은 고딕"/>
+                <a:ea typeface="맑은 고딕"/>
+              </a:rPr>
+              <a:t>avg</a:t>
+            </a:r>
+            <a:r>
+              <a:rPr sz="1450">
                 <a:solidFill>
                   <a:srgbClr val="1A1F2E"/>
                 </a:solidFill>
                 <a:latin typeface="맑은 고딕"/>
                 <a:ea typeface="맑은 고딕"/>
               </a:rPr>
-              <a:t>chart 정의부터 이미지 렌더까지 규칙 기반으로 생성하고, 이상 강도는 보이도록 floor 보정합니다</a:t>
-            </a:r>
-          </a:p>
-        </p:txBody>
-      </p:sp>
-      <p:sp>
-        <p:nvSpPr>
-          <p:cNvPr id="6" name="Rectangle 5"/>
+              <a:t> 평균 이동, </a:t>
+            </a:r>
+            <a:r>
+              <a:rPr sz="1450" b="1">
+                <a:solidFill>
+                  <a:srgbClr val="0F1E3D"/>
+                </a:solidFill>
+                <a:latin typeface="맑은 고딕"/>
+                <a:ea typeface="맑은 고딕"/>
+              </a:rPr>
+              <a:t>std</a:t>
+            </a:r>
+            <a:r>
+              <a:rPr sz="1450">
+                <a:solidFill>
+                  <a:srgbClr val="1A1F2E"/>
+                </a:solidFill>
+                <a:latin typeface="맑은 고딕"/>
+                <a:ea typeface="맑은 고딕"/>
+              </a:rPr>
+              <a:t> 산포 확대, </a:t>
+            </a:r>
+            <a:r>
+              <a:rPr sz="1450" b="1">
+                <a:solidFill>
+                  <a:srgbClr val="0F1E3D"/>
+                </a:solidFill>
+                <a:latin typeface="맑은 고딕"/>
+                <a:ea typeface="맑은 고딕"/>
+              </a:rPr>
+              <a:t>spike</a:t>
+            </a:r>
+            <a:r>
+              <a:rPr sz="1450">
+                <a:solidFill>
+                  <a:srgbClr val="1A1F2E"/>
+                </a:solidFill>
+                <a:latin typeface="맑은 고딕"/>
+                <a:ea typeface="맑은 고딕"/>
+              </a:rPr>
+              <a:t> 순간 급등, </a:t>
+            </a:r>
+            <a:r>
+              <a:rPr sz="1450" b="1">
+                <a:solidFill>
+                  <a:srgbClr val="0F1E3D"/>
+                </a:solidFill>
+                <a:latin typeface="맑은 고딕"/>
+                <a:ea typeface="맑은 고딕"/>
+              </a:rPr>
+              <a:t>drift</a:t>
+            </a:r>
+            <a:r>
+              <a:rPr sz="1450">
+                <a:solidFill>
+                  <a:srgbClr val="1A1F2E"/>
+                </a:solidFill>
+                <a:latin typeface="맑은 고딕"/>
+                <a:ea typeface="맑은 고딕"/>
+              </a:rPr>
+              <a:t> 선형 상승, </a:t>
+            </a:r>
+            <a:r>
+              <a:rPr sz="1450" b="1">
+                <a:solidFill>
+                  <a:srgbClr val="0F1E3D"/>
+                </a:solidFill>
+                <a:latin typeface="맑은 고딕"/>
+                <a:ea typeface="맑은 고딕"/>
+              </a:rPr>
+              <a:t>context</a:t>
+            </a:r>
+            <a:r>
+              <a:rPr sz="1450">
+                <a:solidFill>
+                  <a:srgbClr val="1A1F2E"/>
+                </a:solidFill>
+                <a:latin typeface="맑은 고딕"/>
+                <a:ea typeface="맑은 고딕"/>
+              </a:rPr>
+              <a:t> fleet 대비 전체 이탈 — 5종을 trend 뒤쪽 구간에 주입합니다</a:t>
+            </a:r>
+          </a:p>
+          <a:p>
+            <a:pPr marL="420624" indent="-420624" lvl="1">
+              <a:spcAft>
+                <a:spcPts val="500"/>
+              </a:spcAft>
+            </a:pPr>
+            <a:r>
+              <a:rPr sz="1350" b="0">
+                <a:solidFill>
+                  <a:srgbClr val="6E7B8E"/>
+                </a:solidFill>
+                <a:latin typeface="맑은 고딕"/>
+                <a:ea typeface="맑은 고딕"/>
+              </a:rPr>
+              <a:t>–  </a:t>
+            </a:r>
+            <a:r>
+              <a:rPr sz="1350">
+                <a:solidFill>
+                  <a:srgbClr val="4A5666"/>
+                </a:solidFill>
+                <a:latin typeface="맑은 고딕"/>
+                <a:ea typeface="맑은 고딕"/>
+              </a:rPr>
+              <a:t>이상 강도는 정상 산포 기준 최소 강도로 보정해, 너무 약해 보이지 않게 둡니다</a:t>
+            </a:r>
+          </a:p>
+        </p:txBody>
+      </p:sp>
+      <p:sp>
+        <p:nvSpPr>
+          <p:cNvPr id="6" name="Rounded Rectangle 5"/>
           <p:cNvSpPr/>
           <p:nvPr/>
         </p:nvSpPr>
         <p:spPr>
           <a:xfrm>
-            <a:off x="640080" y="2596896"/>
-            <a:ext cx="5303520" cy="3429000"/>
-          </a:xfrm>
-          <a:prstGeom prst="rect">
+            <a:off x="7406640" y="3200400"/>
+            <a:ext cx="4206240" cy="384048"/>
+          </a:xfrm>
+          <a:prstGeom prst="roundRect">
             <a:avLst/>
           </a:prstGeom>
           <a:solidFill>
-            <a:srgbClr val="FFFFFF"/>
+            <a:srgbClr val="E6F7F6"/>
           </a:solidFill>
-          <a:ln w="15875">
-            <a:solidFill>
-              <a:srgbClr val="333740"/>
-            </a:solidFill>
+          <a:ln>
+            <a:noFill/>
           </a:ln>
           <a:effectLst/>
         </p:spPr>
@@ -5907,240 +5359,23 @@
       </p:sp>
       <p:sp>
         <p:nvSpPr>
-          <p:cNvPr id="7" name="TextBox 6"/>
-          <p:cNvSpPr txBox="1"/>
-          <p:nvPr/>
-        </p:nvSpPr>
-        <p:spPr>
-          <a:xfrm>
-            <a:off x="914400" y="2724912"/>
-            <a:ext cx="4809744" cy="3172968"/>
-          </a:xfrm>
-          <a:prstGeom prst="rect">
-            <a:avLst/>
-          </a:prstGeom>
-          <a:noFill/>
-        </p:spPr>
-        <p:txBody>
-          <a:bodyPr wrap="square" anchor="ctr" lIns="0" rIns="0" tIns="0" bIns="0">
-            <a:spAutoFit/>
-          </a:bodyPr>
-          <a:lstStyle/>
-          <a:p>
-            <a:pPr algn="l"/>
-            <a:r>
-              <a:rPr sz="1450" b="1">
-                <a:solidFill>
-                  <a:srgbClr val="0F1E3D"/>
-                </a:solidFill>
-                <a:latin typeface="맑은 고딕"/>
-                <a:ea typeface="맑은 고딕"/>
-              </a:rPr>
-              <a:t>생성 파이프라인</a:t>
-            </a:r>
-          </a:p>
-          <a:p>
-            <a:pPr algn="l"/>
-            <a:r>
-              <a:rPr sz="500">
-                <a:solidFill>
-                  <a:srgbClr val="FFFFFF"/>
-                </a:solidFill>
-                <a:latin typeface="맑은 고딕"/>
-                <a:ea typeface="맑은 고딕"/>
-              </a:rPr>
-              <a:t> </a:t>
-            </a:r>
-          </a:p>
-          <a:p>
-            <a:pPr algn="l"/>
-            <a:r>
-              <a:rPr sz="1350" b="1" i="0">
-                <a:solidFill>
-                  <a:srgbClr val="0F1E3D"/>
-                </a:solidFill>
-                <a:latin typeface="맑은 고딕"/>
-                <a:ea typeface="맑은 고딕"/>
-              </a:rPr>
-              <a:t>① chart 정의</a:t>
-            </a:r>
-          </a:p>
-          <a:p>
-            <a:pPr algn="l"/>
-            <a:r>
-              <a:rPr sz="1300">
-                <a:solidFill>
-                  <a:srgbClr val="1A1F2E"/>
-                </a:solidFill>
-                <a:latin typeface="Consolas"/>
-                <a:ea typeface="Consolas"/>
-              </a:rPr>
-              <a:t>    device x step x item, fleet legend(eqp/chamber/recipe)</a:t>
-            </a:r>
-          </a:p>
-          <a:p>
-            <a:pPr algn="l"/>
-            <a:r>
-              <a:rPr sz="1350" b="1" i="0">
-                <a:solidFill>
-                  <a:srgbClr val="0F1E3D"/>
-                </a:solidFill>
-                <a:latin typeface="맑은 고딕"/>
-                <a:ea typeface="맑은 고딕"/>
-              </a:rPr>
-              <a:t>② episode 조립</a:t>
-            </a:r>
-          </a:p>
-          <a:p>
-            <a:pPr algn="l"/>
-            <a:r>
-              <a:rPr sz="1300">
-                <a:solidFill>
-                  <a:srgbClr val="1A1F2E"/>
-                </a:solidFill>
-                <a:latin typeface="맑은 고딕"/>
-                <a:ea typeface="맑은 고딕"/>
-              </a:rPr>
-              <a:t>    12~25개, 영역 밀도 샘플링(밀집/희소/결핍)</a:t>
-            </a:r>
-          </a:p>
-          <a:p>
-            <a:pPr algn="l"/>
-            <a:r>
-              <a:rPr sz="1350" b="1" i="0">
-                <a:solidFill>
-                  <a:srgbClr val="0F1E3D"/>
-                </a:solidFill>
-                <a:latin typeface="맑은 고딕"/>
-                <a:ea typeface="맑은 고딕"/>
-              </a:rPr>
-              <a:t>③ 노이즈</a:t>
-            </a:r>
-          </a:p>
-          <a:p>
-            <a:pPr algn="l"/>
-            <a:r>
-              <a:rPr sz="1300">
-                <a:solidFill>
-                  <a:srgbClr val="1A1F2E"/>
-                </a:solidFill>
-                <a:latin typeface="맑은 고딕"/>
-                <a:ea typeface="맑은 고딕"/>
-              </a:rPr>
-              <a:t>    Gaussian / Correlated / Laplacian 중 1종</a:t>
-            </a:r>
-          </a:p>
-          <a:p>
-            <a:pPr algn="l"/>
-            <a:r>
-              <a:rPr sz="1350" b="1" i="0">
-                <a:solidFill>
-                  <a:srgbClr val="0F1E3D"/>
-                </a:solidFill>
-                <a:latin typeface="맑은 고딕"/>
-                <a:ea typeface="맑은 고딕"/>
-              </a:rPr>
-              <a:t>④ 이상 주입</a:t>
-            </a:r>
-          </a:p>
-          <a:p>
-            <a:pPr algn="l"/>
-            <a:r>
-              <a:rPr sz="1300">
-                <a:solidFill>
-                  <a:srgbClr val="1A1F2E"/>
-                </a:solidFill>
-                <a:latin typeface="맑은 고딕"/>
-                <a:ea typeface="맑은 고딕"/>
-              </a:rPr>
-              <a:t>    avg/std/spike/drift/context (오른쪽 끝)</a:t>
-            </a:r>
-          </a:p>
-          <a:p>
-            <a:pPr algn="l"/>
-            <a:r>
-              <a:rPr sz="1350" b="1" i="0">
-                <a:solidFill>
-                  <a:srgbClr val="0F1E3D"/>
-                </a:solidFill>
-                <a:latin typeface="맑은 고딕"/>
-                <a:ea typeface="맑은 고딕"/>
-              </a:rPr>
-              <a:t>⑤ 렌더</a:t>
-            </a:r>
-          </a:p>
-          <a:p>
-            <a:pPr algn="l"/>
-            <a:r>
-              <a:rPr sz="1300">
-                <a:solidFill>
-                  <a:srgbClr val="1A1F2E"/>
-                </a:solidFill>
-                <a:latin typeface="맑은 고딕"/>
-                <a:ea typeface="맑은 고딕"/>
-              </a:rPr>
-              <a:t>    강도 floor 보정 → 학습/평가 trend 이미지</a:t>
-            </a:r>
-          </a:p>
-        </p:txBody>
-      </p:sp>
-      <p:sp>
-        <p:nvSpPr>
-          <p:cNvPr id="8" name="TextBox 7"/>
-          <p:cNvSpPr txBox="1"/>
-          <p:nvPr/>
-        </p:nvSpPr>
-        <p:spPr>
-          <a:xfrm>
-            <a:off x="640080" y="6053328"/>
-            <a:ext cx="5303520" cy="329184"/>
-          </a:xfrm>
-          <a:prstGeom prst="rect">
-            <a:avLst/>
-          </a:prstGeom>
-          <a:noFill/>
-        </p:spPr>
-        <p:txBody>
-          <a:bodyPr wrap="square" anchor="ctr" lIns="0" rIns="0" tIns="0" bIns="0">
-            <a:spAutoFit/>
-          </a:bodyPr>
-          <a:lstStyle/>
-          <a:p>
-            <a:pPr algn="ctr"/>
-            <a:r>
-              <a:rPr sz="1250" b="1">
-                <a:solidFill>
-                  <a:srgbClr val="0F1E3D"/>
-                </a:solidFill>
-                <a:latin typeface="맑은 고딕"/>
-                <a:ea typeface="맑은 고딕"/>
-              </a:rPr>
-              <a:t>규칙 기반 생성 흐름</a:t>
-            </a:r>
-          </a:p>
-        </p:txBody>
-      </p:sp>
-      <p:sp>
-        <p:nvSpPr>
-          <p:cNvPr id="9" name="Rectangle 8"/>
+          <p:cNvPr id="7" name="Rectangle 6"/>
           <p:cNvSpPr/>
           <p:nvPr/>
         </p:nvSpPr>
         <p:spPr>
           <a:xfrm>
-            <a:off x="6309360" y="2596896"/>
-            <a:ext cx="5303520" cy="3429000"/>
+            <a:off x="7406640" y="3200400"/>
+            <a:ext cx="82296" cy="384048"/>
           </a:xfrm>
           <a:prstGeom prst="rect">
             <a:avLst/>
           </a:prstGeom>
           <a:solidFill>
-            <a:srgbClr val="FFFFFF"/>
+            <a:srgbClr val="5B9BD5"/>
           </a:solidFill>
-          <a:ln w="15875">
-            <a:solidFill>
-              <a:srgbClr val="333740"/>
-            </a:solidFill>
+          <a:ln>
+            <a:noFill/>
           </a:ln>
           <a:effectLst/>
         </p:spPr>
@@ -6168,14 +5403,14 @@
       </p:sp>
       <p:sp>
         <p:nvSpPr>
-          <p:cNvPr id="10" name="TextBox 9"/>
+          <p:cNvPr id="8" name="TextBox 7"/>
           <p:cNvSpPr txBox="1"/>
           <p:nvPr/>
         </p:nvSpPr>
         <p:spPr>
           <a:xfrm>
-            <a:off x="6583680" y="2724912"/>
-            <a:ext cx="4809744" cy="3172968"/>
+            <a:off x="7589520" y="3200400"/>
+            <a:ext cx="3877056" cy="384048"/>
           </a:xfrm>
           <a:prstGeom prst="rect">
             <a:avLst/>
@@ -6188,137 +5423,90 @@
           </a:bodyPr>
           <a:lstStyle/>
           <a:p>
-            <a:pPr algn="l"/>
-            <a:r>
-              <a:rPr sz="1450" b="1">
+            <a:pPr algn="ctr"/>
+            <a:r>
+              <a:rPr sz="1350" b="1">
                 <a:solidFill>
                   <a:srgbClr val="0F1E3D"/>
                 </a:solidFill>
                 <a:latin typeface="맑은 고딕"/>
                 <a:ea typeface="맑은 고딕"/>
               </a:rPr>
-              <a:t>데이터 구성</a:t>
-            </a:r>
-          </a:p>
-          <a:p>
-            <a:pPr algn="l"/>
-            <a:r>
-              <a:rPr sz="500">
-                <a:solidFill>
-                  <a:srgbClr val="FFFFFF"/>
-                </a:solidFill>
-                <a:latin typeface="맑은 고딕"/>
-                <a:ea typeface="맑은 고딕"/>
-              </a:rPr>
-              <a:t> </a:t>
-            </a:r>
-          </a:p>
-          <a:p>
-            <a:pPr algn="l"/>
-            <a:r>
-              <a:rPr sz="1350" b="1" i="0">
-                <a:solidFill>
-                  <a:srgbClr val="0F1E3D"/>
-                </a:solidFill>
-                <a:latin typeface="맑은 고딕"/>
-                <a:ea typeface="맑은 고딕"/>
-              </a:rPr>
-              <a:t>규모</a:t>
-            </a:r>
-          </a:p>
-          <a:p>
-            <a:pPr algn="l"/>
-            <a:r>
-              <a:rPr sz="1300">
-                <a:solidFill>
-                  <a:srgbClr val="1A1F2E"/>
-                </a:solidFill>
-                <a:latin typeface="맑은 고딕"/>
-                <a:ea typeface="맑은 고딕"/>
-              </a:rPr>
-              <a:t>    정상 3,500 + 이상 3,500 = 7,000</a:t>
-            </a:r>
-          </a:p>
-          <a:p>
-            <a:pPr algn="l"/>
-            <a:r>
-              <a:rPr sz="1300">
-                <a:solidFill>
-                  <a:srgbClr val="1A1F2E"/>
-                </a:solidFill>
-                <a:latin typeface="맑은 고딕"/>
-                <a:ea typeface="맑은 고딕"/>
-              </a:rPr>
-              <a:t>    별도 test 1,500 (이상 5종 stratified)</a:t>
-            </a:r>
-          </a:p>
-          <a:p>
-            <a:pPr algn="l"/>
-            <a:r>
-              <a:rPr sz="1350" b="1" i="0">
-                <a:solidFill>
-                  <a:srgbClr val="0F1E3D"/>
-                </a:solidFill>
-                <a:latin typeface="맑은 고딕"/>
-                <a:ea typeface="맑은 고딕"/>
-              </a:rPr>
-              <a:t>평가 난이도</a:t>
-            </a:r>
-          </a:p>
-          <a:p>
-            <a:pPr algn="l"/>
-            <a:r>
-              <a:rPr sz="1300">
-                <a:solidFill>
-                  <a:srgbClr val="1A1F2E"/>
-                </a:solidFill>
-                <a:latin typeface="맑은 고딕"/>
-                <a:ea typeface="맑은 고딕"/>
-              </a:rPr>
-              <a:t>    test/val은 이상 강도를 0.8배로 낮춰</a:t>
-            </a:r>
-          </a:p>
-          <a:p>
-            <a:pPr algn="l"/>
-            <a:r>
-              <a:rPr sz="1300">
-                <a:solidFill>
-                  <a:srgbClr val="1A1F2E"/>
-                </a:solidFill>
-                <a:latin typeface="맑은 고딕"/>
-                <a:ea typeface="맑은 고딕"/>
-              </a:rPr>
-              <a:t>    더 어려운 평가셋 구성</a:t>
-            </a:r>
-          </a:p>
-          <a:p>
-            <a:pPr algn="l"/>
-            <a:r>
-              <a:rPr sz="1350" b="1" i="0">
-                <a:solidFill>
-                  <a:srgbClr val="0F1E3D"/>
-                </a:solidFill>
-                <a:latin typeface="맑은 고딕"/>
-                <a:ea typeface="맑은 고딕"/>
-              </a:rPr>
-              <a:t>정상 보호</a:t>
-            </a:r>
-          </a:p>
-          <a:p>
-            <a:pPr algn="l"/>
-            <a:r>
-              <a:rPr sz="1300">
-                <a:solidFill>
-                  <a:srgbClr val="1A1F2E"/>
-                </a:solidFill>
-                <a:latin typeface="맑은 고딕"/>
-                <a:ea typeface="맑은 고딕"/>
-              </a:rPr>
-              <a:t>    정상은 fleet 중심에서 벗어나지 않게 강제</a:t>
-            </a:r>
-          </a:p>
-        </p:txBody>
-      </p:sp>
+              <a:t>정상 3,500 + 이상 3,500 = 7,000</a:t>
+            </a:r>
+          </a:p>
+        </p:txBody>
+      </p:sp>
+      <p:sp>
+        <p:nvSpPr>
+          <p:cNvPr id="9" name="Rectangle 8"/>
+          <p:cNvSpPr/>
+          <p:nvPr/>
+        </p:nvSpPr>
+        <p:spPr>
+          <a:xfrm>
+            <a:off x="1097424" y="3630312"/>
+            <a:ext cx="3090384" cy="1993104"/>
+          </a:xfrm>
+          <a:prstGeom prst="rect">
+            <a:avLst/>
+          </a:prstGeom>
+          <a:solidFill>
+            <a:srgbClr val="FFFFFF"/>
+          </a:solidFill>
+          <a:ln w="12700">
+            <a:solidFill>
+              <a:srgbClr val="D7DEEA"/>
+            </a:solidFill>
+          </a:ln>
+          <a:effectLst/>
+        </p:spPr>
+        <p:style>
+          <a:lnRef idx="1">
+            <a:schemeClr val="accent1"/>
+          </a:lnRef>
+          <a:fillRef idx="3">
+            <a:schemeClr val="accent1"/>
+          </a:fillRef>
+          <a:effectRef idx="2">
+            <a:schemeClr val="accent1"/>
+          </a:effectRef>
+          <a:fontRef idx="minor">
+            <a:schemeClr val="lt1"/>
+          </a:fontRef>
+        </p:style>
+        <p:txBody>
+          <a:bodyPr rtlCol="0" anchor="ctr"/>
+          <a:lstStyle/>
+          <a:p>
+            <a:pPr algn="ctr"/>
+          </a:p>
+        </p:txBody>
+      </p:sp>
+      <p:pic>
+        <p:nvPicPr>
+          <p:cNvPr id="10" name="Picture 9" descr="trend_mean_shift.png"/>
+          <p:cNvPicPr>
+            <a:picLocks noChangeAspect="1"/>
+          </p:cNvPicPr>
+          <p:nvPr/>
+        </p:nvPicPr>
+        <p:blipFill>
+          <a:blip r:embed="rId2"/>
+          <a:stretch>
+            <a:fillRect/>
+          </a:stretch>
+        </p:blipFill>
+        <p:spPr>
+          <a:xfrm>
+            <a:off x="1106424" y="3639312"/>
+            <a:ext cx="3072384" cy="1975104"/>
+          </a:xfrm>
+          <a:prstGeom prst="rect">
+            <a:avLst/>
+          </a:prstGeom>
+        </p:spPr>
+      </p:pic>
       <p:sp>
         <p:nvSpPr>
           <p:cNvPr id="11" name="TextBox 10"/>
@@ -6327,8 +5515,8 @@
         </p:nvSpPr>
         <p:spPr>
           <a:xfrm>
-            <a:off x="6309360" y="6053328"/>
-            <a:ext cx="5303520" cy="329184"/>
+            <a:off x="900684" y="5614416"/>
+            <a:ext cx="3483864" cy="329184"/>
           </a:xfrm>
           <a:prstGeom prst="rect">
             <a:avLst/>
@@ -6343,28 +5531,98 @@
           <a:p>
             <a:pPr algn="ctr"/>
             <a:r>
-              <a:rPr sz="1250" b="1">
+              <a:rPr sz="1450" b="1">
                 <a:solidFill>
                   <a:srgbClr val="0F1E3D"/>
                 </a:solidFill>
                 <a:latin typeface="맑은 고딕"/>
                 <a:ea typeface="맑은 고딕"/>
               </a:rPr>
-              <a:t>정상 3,500 + 이상 3,500 + test 1,500</a:t>
-            </a:r>
-          </a:p>
-        </p:txBody>
-      </p:sp>
-      <p:sp>
-        <p:nvSpPr>
-          <p:cNvPr id="12" name="TextBox 11"/>
+              <a:t>avg — 평균이 한 단계 이동</a:t>
+            </a:r>
+          </a:p>
+        </p:txBody>
+      </p:sp>
+      <p:sp>
+        <p:nvSpPr>
+          <p:cNvPr id="12" name="Rectangle 11"/>
+          <p:cNvSpPr/>
+          <p:nvPr/>
+        </p:nvSpPr>
+        <p:spPr>
+          <a:xfrm>
+            <a:off x="4581288" y="3630312"/>
+            <a:ext cx="3090384" cy="1993104"/>
+          </a:xfrm>
+          <a:prstGeom prst="rect">
+            <a:avLst/>
+          </a:prstGeom>
+          <a:solidFill>
+            <a:srgbClr val="FFFFFF"/>
+          </a:solidFill>
+          <a:ln w="12700">
+            <a:solidFill>
+              <a:srgbClr val="D7DEEA"/>
+            </a:solidFill>
+          </a:ln>
+          <a:effectLst/>
+        </p:spPr>
+        <p:style>
+          <a:lnRef idx="1">
+            <a:schemeClr val="accent1"/>
+          </a:lnRef>
+          <a:fillRef idx="3">
+            <a:schemeClr val="accent1"/>
+          </a:fillRef>
+          <a:effectRef idx="2">
+            <a:schemeClr val="accent1"/>
+          </a:effectRef>
+          <a:fontRef idx="minor">
+            <a:schemeClr val="lt1"/>
+          </a:fontRef>
+        </p:style>
+        <p:txBody>
+          <a:bodyPr rtlCol="0" anchor="ctr"/>
+          <a:lstStyle/>
+          <a:p>
+            <a:pPr algn="ctr"/>
+          </a:p>
+        </p:txBody>
+      </p:sp>
+      <p:pic>
+        <p:nvPicPr>
+          <p:cNvPr id="13" name="Picture 12" descr="trend_spike.png"/>
+          <p:cNvPicPr>
+            <a:picLocks noChangeAspect="1"/>
+          </p:cNvPicPr>
+          <p:nvPr/>
+        </p:nvPicPr>
+        <p:blipFill>
+          <a:blip r:embed="rId3"/>
+          <a:stretch>
+            <a:fillRect/>
+          </a:stretch>
+        </p:blipFill>
+        <p:spPr>
+          <a:xfrm>
+            <a:off x="4590288" y="3639312"/>
+            <a:ext cx="3072384" cy="1975104"/>
+          </a:xfrm>
+          <a:prstGeom prst="rect">
+            <a:avLst/>
+          </a:prstGeom>
+        </p:spPr>
+      </p:pic>
+      <p:sp>
+        <p:nvSpPr>
+          <p:cNvPr id="14" name="TextBox 13"/>
           <p:cNvSpPr txBox="1"/>
           <p:nvPr/>
         </p:nvSpPr>
         <p:spPr>
           <a:xfrm>
-            <a:off x="457200" y="6437376"/>
-            <a:ext cx="8229600" cy="292608"/>
+            <a:off x="4384548" y="5614416"/>
+            <a:ext cx="3483864" cy="329184"/>
           </a:xfrm>
           <a:prstGeom prst="rect">
             <a:avLst/>
@@ -6377,6 +5635,184 @@
           </a:bodyPr>
           <a:lstStyle/>
           <a:p>
+            <a:pPr algn="ctr"/>
+            <a:r>
+              <a:rPr sz="1450" b="1">
+                <a:solidFill>
+                  <a:srgbClr val="0F1E3D"/>
+                </a:solidFill>
+                <a:latin typeface="맑은 고딕"/>
+                <a:ea typeface="맑은 고딕"/>
+              </a:rPr>
+              <a:t>spike — 일부 점이 순간 급등</a:t>
+            </a:r>
+          </a:p>
+        </p:txBody>
+      </p:sp>
+      <p:sp>
+        <p:nvSpPr>
+          <p:cNvPr id="15" name="Rectangle 14"/>
+          <p:cNvSpPr/>
+          <p:nvPr/>
+        </p:nvSpPr>
+        <p:spPr>
+          <a:xfrm>
+            <a:off x="8065152" y="3630312"/>
+            <a:ext cx="3090384" cy="1993104"/>
+          </a:xfrm>
+          <a:prstGeom prst="rect">
+            <a:avLst/>
+          </a:prstGeom>
+          <a:solidFill>
+            <a:srgbClr val="FFFFFF"/>
+          </a:solidFill>
+          <a:ln w="12700">
+            <a:solidFill>
+              <a:srgbClr val="D7DEEA"/>
+            </a:solidFill>
+          </a:ln>
+          <a:effectLst/>
+        </p:spPr>
+        <p:style>
+          <a:lnRef idx="1">
+            <a:schemeClr val="accent1"/>
+          </a:lnRef>
+          <a:fillRef idx="3">
+            <a:schemeClr val="accent1"/>
+          </a:fillRef>
+          <a:effectRef idx="2">
+            <a:schemeClr val="accent1"/>
+          </a:effectRef>
+          <a:fontRef idx="minor">
+            <a:schemeClr val="lt1"/>
+          </a:fontRef>
+        </p:style>
+        <p:txBody>
+          <a:bodyPr rtlCol="0" anchor="ctr"/>
+          <a:lstStyle/>
+          <a:p>
+            <a:pPr algn="ctr"/>
+          </a:p>
+        </p:txBody>
+      </p:sp>
+      <p:pic>
+        <p:nvPicPr>
+          <p:cNvPr id="16" name="Picture 15" descr="trend_drift.png"/>
+          <p:cNvPicPr>
+            <a:picLocks noChangeAspect="1"/>
+          </p:cNvPicPr>
+          <p:nvPr/>
+        </p:nvPicPr>
+        <p:blipFill>
+          <a:blip r:embed="rId4"/>
+          <a:stretch>
+            <a:fillRect/>
+          </a:stretch>
+        </p:blipFill>
+        <p:spPr>
+          <a:xfrm>
+            <a:off x="8074152" y="3639312"/>
+            <a:ext cx="3072384" cy="1975104"/>
+          </a:xfrm>
+          <a:prstGeom prst="rect">
+            <a:avLst/>
+          </a:prstGeom>
+        </p:spPr>
+      </p:pic>
+      <p:sp>
+        <p:nvSpPr>
+          <p:cNvPr id="17" name="TextBox 16"/>
+          <p:cNvSpPr txBox="1"/>
+          <p:nvPr/>
+        </p:nvSpPr>
+        <p:spPr>
+          <a:xfrm>
+            <a:off x="7868412" y="5614416"/>
+            <a:ext cx="3483864" cy="329184"/>
+          </a:xfrm>
+          <a:prstGeom prst="rect">
+            <a:avLst/>
+          </a:prstGeom>
+          <a:noFill/>
+        </p:spPr>
+        <p:txBody>
+          <a:bodyPr wrap="square" anchor="ctr" lIns="0" rIns="0" tIns="0" bIns="0">
+            <a:spAutoFit/>
+          </a:bodyPr>
+          <a:lstStyle/>
+          <a:p>
+            <a:pPr algn="ctr"/>
+            <a:r>
+              <a:rPr sz="1450" b="1">
+                <a:solidFill>
+                  <a:srgbClr val="0F1E3D"/>
+                </a:solidFill>
+                <a:latin typeface="맑은 고딕"/>
+                <a:ea typeface="맑은 고딕"/>
+              </a:rPr>
+              <a:t>drift — 서서히 선형 상승</a:t>
+            </a:r>
+          </a:p>
+        </p:txBody>
+      </p:sp>
+      <p:sp>
+        <p:nvSpPr>
+          <p:cNvPr id="18" name="TextBox 17"/>
+          <p:cNvSpPr txBox="1"/>
+          <p:nvPr/>
+        </p:nvSpPr>
+        <p:spPr>
+          <a:xfrm>
+            <a:off x="640080" y="5961888"/>
+            <a:ext cx="10972800" cy="274320"/>
+          </a:xfrm>
+          <a:prstGeom prst="rect">
+            <a:avLst/>
+          </a:prstGeom>
+          <a:noFill/>
+        </p:spPr>
+        <p:txBody>
+          <a:bodyPr wrap="square" anchor="t" lIns="0" rIns="0" tIns="0" bIns="0">
+            <a:spAutoFit/>
+          </a:bodyPr>
+          <a:lstStyle/>
+          <a:p>
+            <a:pPr algn="ctr"/>
+            <a:r>
+              <a:rPr sz="1300">
+                <a:solidFill>
+                  <a:srgbClr val="3A485C"/>
+                </a:solidFill>
+                <a:latin typeface="맑은 고딕"/>
+                <a:ea typeface="맑은 고딕"/>
+              </a:rPr>
+              <a:t>파랑은 정상 측정, 빨강은 주입된 이상입니다. std와 context를 포함한 5종 모두 같은 규칙 엔진으로 만듭니다</a:t>
+            </a:r>
+          </a:p>
+        </p:txBody>
+      </p:sp>
+      <p:sp>
+        <p:nvSpPr>
+          <p:cNvPr id="19" name="TextBox 18"/>
+          <p:cNvSpPr txBox="1"/>
+          <p:nvPr/>
+        </p:nvSpPr>
+        <p:spPr>
+          <a:xfrm>
+            <a:off x="457200" y="6437376"/>
+            <a:ext cx="8229600" cy="292608"/>
+          </a:xfrm>
+          <a:prstGeom prst="rect">
+            <a:avLst/>
+          </a:prstGeom>
+          <a:noFill/>
+        </p:spPr>
+        <p:txBody>
+          <a:bodyPr wrap="square" anchor="ctr" lIns="0" rIns="0" tIns="0" bIns="0">
+            <a:spAutoFit/>
+          </a:bodyPr>
+          <a:lstStyle/>
+          <a:p>
             <a:pPr algn="l"/>
             <a:r>
               <a:rPr sz="900">
@@ -6393,7 +5829,7 @@
       </p:sp>
       <p:sp>
         <p:nvSpPr>
-          <p:cNvPr id="13" name="TextBox 12"/>
+          <p:cNvPr id="20" name="TextBox 19"/>
           <p:cNvSpPr txBox="1"/>
           <p:nvPr/>
         </p:nvSpPr>
@@ -6528,7 +5964,7 @@
                 <a:latin typeface="맑은 고딕"/>
                 <a:ea typeface="맑은 고딕"/>
               </a:rPr>
-              <a:t>P3 | 1차 binary gate (PoC)</a:t>
+              <a:t>P3 | 생성 파이프라인 / 데이터</a:t>
             </a:r>
           </a:p>
         </p:txBody>
@@ -6564,27 +6000,671 @@
                 <a:latin typeface="맑은 고딕"/>
                 <a:ea typeface="맑은 고딕"/>
               </a:rPr>
-              <a:t>생성 데이터로 정상/이상 1차 판정 검증</a:t>
-            </a:r>
-          </a:p>
-        </p:txBody>
-      </p:sp>
-      <p:sp>
-        <p:nvSpPr>
-          <p:cNvPr id="5" name="Rectangle 4"/>
+              <a:t>chart 정의부터 이미지 렌더까지 규칙 기반 생성</a:t>
+            </a:r>
+          </a:p>
+        </p:txBody>
+      </p:sp>
+      <p:sp>
+        <p:nvSpPr>
+          <p:cNvPr id="5" name="TextBox 4"/>
+          <p:cNvSpPr txBox="1"/>
+          <p:nvPr/>
+        </p:nvSpPr>
+        <p:spPr>
+          <a:xfrm>
+            <a:off x="640080" y="1828800"/>
+            <a:ext cx="10972800" cy="640080"/>
+          </a:xfrm>
+          <a:prstGeom prst="rect">
+            <a:avLst/>
+          </a:prstGeom>
+          <a:noFill/>
+        </p:spPr>
+        <p:txBody>
+          <a:bodyPr wrap="square" anchor="t" lIns="0" rIns="0" tIns="0" bIns="0">
+            <a:spAutoFit/>
+          </a:bodyPr>
+          <a:lstStyle/>
+          <a:p>
+            <a:pPr marL="274320" indent="-274320">
+              <a:spcAft>
+                <a:spcPts val="500"/>
+              </a:spcAft>
+            </a:pPr>
+            <a:r>
+              <a:rPr sz="1400" b="0">
+                <a:solidFill>
+                  <a:srgbClr val="5B9BD5"/>
+                </a:solidFill>
+                <a:latin typeface="맑은 고딕"/>
+                <a:ea typeface="맑은 고딕"/>
+              </a:rPr>
+              <a:t>●  </a:t>
+            </a:r>
+            <a:r>
+              <a:rPr sz="1400">
+                <a:solidFill>
+                  <a:srgbClr val="1A1F2E"/>
+                </a:solidFill>
+                <a:latin typeface="맑은 고딕"/>
+                <a:ea typeface="맑은 고딕"/>
+              </a:rPr>
+              <a:t>현장 판정 기준을 chart 정의, episode 조립, 노이즈, 이상 주입, 렌더의 5단계 생성 규칙으로 옮겼습니다</a:t>
+            </a:r>
+          </a:p>
+        </p:txBody>
+      </p:sp>
+      <p:sp>
+        <p:nvSpPr>
+          <p:cNvPr id="6" name="Rectangle 5"/>
           <p:cNvSpPr/>
           <p:nvPr/>
         </p:nvSpPr>
         <p:spPr>
           <a:xfrm>
-            <a:off x="640080" y="1783080"/>
-            <a:ext cx="5349240" cy="640080"/>
+            <a:off x="640080" y="2596896"/>
+            <a:ext cx="5303520" cy="3429000"/>
           </a:xfrm>
           <a:prstGeom prst="rect">
             <a:avLst/>
           </a:prstGeom>
           <a:solidFill>
-            <a:srgbClr val="0F1E3D"/>
+            <a:srgbClr val="FFFFFF"/>
+          </a:solidFill>
+          <a:ln w="15875">
+            <a:solidFill>
+              <a:srgbClr val="333740"/>
+            </a:solidFill>
+          </a:ln>
+          <a:effectLst/>
+        </p:spPr>
+        <p:style>
+          <a:lnRef idx="1">
+            <a:schemeClr val="accent1"/>
+          </a:lnRef>
+          <a:fillRef idx="3">
+            <a:schemeClr val="accent1"/>
+          </a:fillRef>
+          <a:effectRef idx="2">
+            <a:schemeClr val="accent1"/>
+          </a:effectRef>
+          <a:fontRef idx="minor">
+            <a:schemeClr val="lt1"/>
+          </a:fontRef>
+        </p:style>
+        <p:txBody>
+          <a:bodyPr rtlCol="0" anchor="ctr"/>
+          <a:lstStyle/>
+          <a:p>
+            <a:pPr algn="ctr"/>
+          </a:p>
+        </p:txBody>
+      </p:sp>
+      <p:sp>
+        <p:nvSpPr>
+          <p:cNvPr id="7" name="TextBox 6"/>
+          <p:cNvSpPr txBox="1"/>
+          <p:nvPr/>
+        </p:nvSpPr>
+        <p:spPr>
+          <a:xfrm>
+            <a:off x="914400" y="2724912"/>
+            <a:ext cx="4809744" cy="3172968"/>
+          </a:xfrm>
+          <a:prstGeom prst="rect">
+            <a:avLst/>
+          </a:prstGeom>
+          <a:noFill/>
+        </p:spPr>
+        <p:txBody>
+          <a:bodyPr wrap="square" anchor="ctr" lIns="0" rIns="0" tIns="0" bIns="0">
+            <a:spAutoFit/>
+          </a:bodyPr>
+          <a:lstStyle/>
+          <a:p>
+            <a:pPr algn="l"/>
+            <a:r>
+              <a:rPr sz="1450" b="1">
+                <a:solidFill>
+                  <a:srgbClr val="0F1E3D"/>
+                </a:solidFill>
+                <a:latin typeface="맑은 고딕"/>
+                <a:ea typeface="맑은 고딕"/>
+              </a:rPr>
+              <a:t>생성 파이프라인</a:t>
+            </a:r>
+          </a:p>
+          <a:p>
+            <a:pPr algn="l"/>
+            <a:r>
+              <a:rPr sz="500">
+                <a:solidFill>
+                  <a:srgbClr val="FFFFFF"/>
+                </a:solidFill>
+                <a:latin typeface="맑은 고딕"/>
+                <a:ea typeface="맑은 고딕"/>
+              </a:rPr>
+              <a:t> </a:t>
+            </a:r>
+          </a:p>
+          <a:p>
+            <a:pPr algn="l"/>
+            <a:r>
+              <a:rPr sz="1350" b="1" i="0">
+                <a:solidFill>
+                  <a:srgbClr val="0F1E3D"/>
+                </a:solidFill>
+                <a:latin typeface="맑은 고딕"/>
+                <a:ea typeface="맑은 고딕"/>
+              </a:rPr>
+              <a:t>① chart 정의</a:t>
+            </a:r>
+          </a:p>
+          <a:p>
+            <a:pPr algn="l"/>
+            <a:r>
+              <a:rPr sz="1300">
+                <a:solidFill>
+                  <a:srgbClr val="1A1F2E"/>
+                </a:solidFill>
+                <a:latin typeface="Consolas"/>
+                <a:ea typeface="Consolas"/>
+              </a:rPr>
+              <a:t>    device x step x item, fleet legend(eqp/chamber/recipe)</a:t>
+            </a:r>
+          </a:p>
+          <a:p>
+            <a:pPr algn="l"/>
+            <a:r>
+              <a:rPr sz="1350" b="1" i="0">
+                <a:solidFill>
+                  <a:srgbClr val="0F1E3D"/>
+                </a:solidFill>
+                <a:latin typeface="맑은 고딕"/>
+                <a:ea typeface="맑은 고딕"/>
+              </a:rPr>
+              <a:t>② episode 조립</a:t>
+            </a:r>
+          </a:p>
+          <a:p>
+            <a:pPr algn="l"/>
+            <a:r>
+              <a:rPr sz="1300">
+                <a:solidFill>
+                  <a:srgbClr val="1A1F2E"/>
+                </a:solidFill>
+                <a:latin typeface="맑은 고딕"/>
+                <a:ea typeface="맑은 고딕"/>
+              </a:rPr>
+              <a:t>    12~25개, 영역 밀도 샘플링(밀집/희소/결핍)</a:t>
+            </a:r>
+          </a:p>
+          <a:p>
+            <a:pPr algn="l"/>
+            <a:r>
+              <a:rPr sz="1350" b="1" i="0">
+                <a:solidFill>
+                  <a:srgbClr val="0F1E3D"/>
+                </a:solidFill>
+                <a:latin typeface="맑은 고딕"/>
+                <a:ea typeface="맑은 고딕"/>
+              </a:rPr>
+              <a:t>③ 노이즈</a:t>
+            </a:r>
+          </a:p>
+          <a:p>
+            <a:pPr algn="l"/>
+            <a:r>
+              <a:rPr sz="1300">
+                <a:solidFill>
+                  <a:srgbClr val="1A1F2E"/>
+                </a:solidFill>
+                <a:latin typeface="맑은 고딕"/>
+                <a:ea typeface="맑은 고딕"/>
+              </a:rPr>
+              <a:t>    Gaussian, Correlated AR, Laplacian 중 1종</a:t>
+            </a:r>
+          </a:p>
+          <a:p>
+            <a:pPr algn="l"/>
+            <a:r>
+              <a:rPr sz="1350" b="1" i="0">
+                <a:solidFill>
+                  <a:srgbClr val="0F1E3D"/>
+                </a:solidFill>
+                <a:latin typeface="맑은 고딕"/>
+                <a:ea typeface="맑은 고딕"/>
+              </a:rPr>
+              <a:t>④ 이상 주입</a:t>
+            </a:r>
+          </a:p>
+          <a:p>
+            <a:pPr algn="l"/>
+            <a:r>
+              <a:rPr sz="1300">
+                <a:solidFill>
+                  <a:srgbClr val="1A1F2E"/>
+                </a:solidFill>
+                <a:latin typeface="맑은 고딕"/>
+                <a:ea typeface="맑은 고딕"/>
+              </a:rPr>
+              <a:t>    avg/std/spike/drift/context, trend 뒤쪽 구간</a:t>
+            </a:r>
+          </a:p>
+          <a:p>
+            <a:pPr algn="l"/>
+            <a:r>
+              <a:rPr sz="1350" b="1" i="0">
+                <a:solidFill>
+                  <a:srgbClr val="0F1E3D"/>
+                </a:solidFill>
+                <a:latin typeface="맑은 고딕"/>
+                <a:ea typeface="맑은 고딕"/>
+              </a:rPr>
+              <a:t>⑤ 렌더</a:t>
+            </a:r>
+          </a:p>
+          <a:p>
+            <a:pPr algn="l"/>
+            <a:r>
+              <a:rPr sz="1300">
+                <a:solidFill>
+                  <a:srgbClr val="1A1F2E"/>
+                </a:solidFill>
+                <a:latin typeface="맑은 고딕"/>
+                <a:ea typeface="맑은 고딕"/>
+              </a:rPr>
+              <a:t>    이상 강도 보정 후 학습/평가 trend 이미지</a:t>
+            </a:r>
+          </a:p>
+        </p:txBody>
+      </p:sp>
+      <p:sp>
+        <p:nvSpPr>
+          <p:cNvPr id="8" name="TextBox 7"/>
+          <p:cNvSpPr txBox="1"/>
+          <p:nvPr/>
+        </p:nvSpPr>
+        <p:spPr>
+          <a:xfrm>
+            <a:off x="640080" y="6053328"/>
+            <a:ext cx="5303520" cy="329184"/>
+          </a:xfrm>
+          <a:prstGeom prst="rect">
+            <a:avLst/>
+          </a:prstGeom>
+          <a:noFill/>
+        </p:spPr>
+        <p:txBody>
+          <a:bodyPr wrap="square" anchor="ctr" lIns="0" rIns="0" tIns="0" bIns="0">
+            <a:spAutoFit/>
+          </a:bodyPr>
+          <a:lstStyle/>
+          <a:p>
+            <a:pPr algn="ctr"/>
+            <a:r>
+              <a:rPr sz="1250" b="1">
+                <a:solidFill>
+                  <a:srgbClr val="0F1E3D"/>
+                </a:solidFill>
+                <a:latin typeface="맑은 고딕"/>
+                <a:ea typeface="맑은 고딕"/>
+              </a:rPr>
+              <a:t>규칙 기반 생성 흐름</a:t>
+            </a:r>
+          </a:p>
+        </p:txBody>
+      </p:sp>
+      <p:sp>
+        <p:nvSpPr>
+          <p:cNvPr id="9" name="Rectangle 8"/>
+          <p:cNvSpPr/>
+          <p:nvPr/>
+        </p:nvSpPr>
+        <p:spPr>
+          <a:xfrm>
+            <a:off x="6309360" y="2596896"/>
+            <a:ext cx="5303520" cy="3429000"/>
+          </a:xfrm>
+          <a:prstGeom prst="rect">
+            <a:avLst/>
+          </a:prstGeom>
+          <a:solidFill>
+            <a:srgbClr val="FFFFFF"/>
+          </a:solidFill>
+          <a:ln w="15875">
+            <a:solidFill>
+              <a:srgbClr val="333740"/>
+            </a:solidFill>
+          </a:ln>
+          <a:effectLst/>
+        </p:spPr>
+        <p:style>
+          <a:lnRef idx="1">
+            <a:schemeClr val="accent1"/>
+          </a:lnRef>
+          <a:fillRef idx="3">
+            <a:schemeClr val="accent1"/>
+          </a:fillRef>
+          <a:effectRef idx="2">
+            <a:schemeClr val="accent1"/>
+          </a:effectRef>
+          <a:fontRef idx="minor">
+            <a:schemeClr val="lt1"/>
+          </a:fontRef>
+        </p:style>
+        <p:txBody>
+          <a:bodyPr rtlCol="0" anchor="ctr"/>
+          <a:lstStyle/>
+          <a:p>
+            <a:pPr algn="ctr"/>
+          </a:p>
+        </p:txBody>
+      </p:sp>
+      <p:sp>
+        <p:nvSpPr>
+          <p:cNvPr id="10" name="TextBox 9"/>
+          <p:cNvSpPr txBox="1"/>
+          <p:nvPr/>
+        </p:nvSpPr>
+        <p:spPr>
+          <a:xfrm>
+            <a:off x="6583680" y="2724912"/>
+            <a:ext cx="4809744" cy="3172968"/>
+          </a:xfrm>
+          <a:prstGeom prst="rect">
+            <a:avLst/>
+          </a:prstGeom>
+          <a:noFill/>
+        </p:spPr>
+        <p:txBody>
+          <a:bodyPr wrap="square" anchor="ctr" lIns="0" rIns="0" tIns="0" bIns="0">
+            <a:spAutoFit/>
+          </a:bodyPr>
+          <a:lstStyle/>
+          <a:p>
+            <a:pPr algn="l"/>
+            <a:r>
+              <a:rPr sz="1450" b="1">
+                <a:solidFill>
+                  <a:srgbClr val="0F1E3D"/>
+                </a:solidFill>
+                <a:latin typeface="맑은 고딕"/>
+                <a:ea typeface="맑은 고딕"/>
+              </a:rPr>
+              <a:t>데이터 구성</a:t>
+            </a:r>
+          </a:p>
+          <a:p>
+            <a:pPr algn="l"/>
+            <a:r>
+              <a:rPr sz="500">
+                <a:solidFill>
+                  <a:srgbClr val="FFFFFF"/>
+                </a:solidFill>
+                <a:latin typeface="맑은 고딕"/>
+                <a:ea typeface="맑은 고딕"/>
+              </a:rPr>
+              <a:t> </a:t>
+            </a:r>
+          </a:p>
+          <a:p>
+            <a:pPr algn="l"/>
+            <a:r>
+              <a:rPr sz="1350" b="1" i="0">
+                <a:solidFill>
+                  <a:srgbClr val="0F1E3D"/>
+                </a:solidFill>
+                <a:latin typeface="맑은 고딕"/>
+                <a:ea typeface="맑은 고딕"/>
+              </a:rPr>
+              <a:t>규모</a:t>
+            </a:r>
+          </a:p>
+          <a:p>
+            <a:pPr algn="l"/>
+            <a:r>
+              <a:rPr sz="1300">
+                <a:solidFill>
+                  <a:srgbClr val="1A1F2E"/>
+                </a:solidFill>
+                <a:latin typeface="맑은 고딕"/>
+                <a:ea typeface="맑은 고딕"/>
+              </a:rPr>
+              <a:t>    정상 3,500 + 이상 3,500 = 7,000</a:t>
+            </a:r>
+          </a:p>
+          <a:p>
+            <a:pPr algn="l"/>
+            <a:r>
+              <a:rPr sz="1300">
+                <a:solidFill>
+                  <a:srgbClr val="1A1F2E"/>
+                </a:solidFill>
+                <a:latin typeface="맑은 고딕"/>
+                <a:ea typeface="맑은 고딕"/>
+              </a:rPr>
+              <a:t>    별도 test 1,500 (이상 5종 stratified)</a:t>
+            </a:r>
+          </a:p>
+          <a:p>
+            <a:pPr algn="l"/>
+            <a:r>
+              <a:rPr sz="1350" b="1" i="0">
+                <a:solidFill>
+                  <a:srgbClr val="0F1E3D"/>
+                </a:solidFill>
+                <a:latin typeface="맑은 고딕"/>
+                <a:ea typeface="맑은 고딕"/>
+              </a:rPr>
+              <a:t>평가 난이도</a:t>
+            </a:r>
+          </a:p>
+          <a:p>
+            <a:pPr algn="l"/>
+            <a:r>
+              <a:rPr sz="1300">
+                <a:solidFill>
+                  <a:srgbClr val="1A1F2E"/>
+                </a:solidFill>
+                <a:latin typeface="맑은 고딕"/>
+                <a:ea typeface="맑은 고딕"/>
+              </a:rPr>
+              <a:t>    test/val은 이상 강도를 0.8배로 낮춰</a:t>
+            </a:r>
+          </a:p>
+          <a:p>
+            <a:pPr algn="l"/>
+            <a:r>
+              <a:rPr sz="1300">
+                <a:solidFill>
+                  <a:srgbClr val="1A1F2E"/>
+                </a:solidFill>
+                <a:latin typeface="맑은 고딕"/>
+                <a:ea typeface="맑은 고딕"/>
+              </a:rPr>
+              <a:t>    더 어려운 평가셋으로 구성</a:t>
+            </a:r>
+          </a:p>
+          <a:p>
+            <a:pPr algn="l"/>
+            <a:r>
+              <a:rPr sz="1350" b="1" i="0">
+                <a:solidFill>
+                  <a:srgbClr val="0F1E3D"/>
+                </a:solidFill>
+                <a:latin typeface="맑은 고딕"/>
+                <a:ea typeface="맑은 고딕"/>
+              </a:rPr>
+              <a:t>정상 보호</a:t>
+            </a:r>
+          </a:p>
+          <a:p>
+            <a:pPr algn="l"/>
+            <a:r>
+              <a:rPr sz="1300">
+                <a:solidFill>
+                  <a:srgbClr val="1A1F2E"/>
+                </a:solidFill>
+                <a:latin typeface="맑은 고딕"/>
+                <a:ea typeface="맑은 고딕"/>
+              </a:rPr>
+              <a:t>    정상은 fleet 중심에서 벗어나지 않게 둠</a:t>
+            </a:r>
+          </a:p>
+        </p:txBody>
+      </p:sp>
+      <p:sp>
+        <p:nvSpPr>
+          <p:cNvPr id="11" name="TextBox 10"/>
+          <p:cNvSpPr txBox="1"/>
+          <p:nvPr/>
+        </p:nvSpPr>
+        <p:spPr>
+          <a:xfrm>
+            <a:off x="6309360" y="6053328"/>
+            <a:ext cx="5303520" cy="329184"/>
+          </a:xfrm>
+          <a:prstGeom prst="rect">
+            <a:avLst/>
+          </a:prstGeom>
+          <a:noFill/>
+        </p:spPr>
+        <p:txBody>
+          <a:bodyPr wrap="square" anchor="ctr" lIns="0" rIns="0" tIns="0" bIns="0">
+            <a:spAutoFit/>
+          </a:bodyPr>
+          <a:lstStyle/>
+          <a:p>
+            <a:pPr algn="ctr"/>
+            <a:r>
+              <a:rPr sz="1250" b="1">
+                <a:solidFill>
+                  <a:srgbClr val="0F1E3D"/>
+                </a:solidFill>
+                <a:latin typeface="맑은 고딕"/>
+                <a:ea typeface="맑은 고딕"/>
+              </a:rPr>
+              <a:t>정상 3,500 + 이상 3,500 + test 1,500</a:t>
+            </a:r>
+          </a:p>
+        </p:txBody>
+      </p:sp>
+      <p:sp>
+        <p:nvSpPr>
+          <p:cNvPr id="12" name="TextBox 11"/>
+          <p:cNvSpPr txBox="1"/>
+          <p:nvPr/>
+        </p:nvSpPr>
+        <p:spPr>
+          <a:xfrm>
+            <a:off x="457200" y="6437376"/>
+            <a:ext cx="8229600" cy="292608"/>
+          </a:xfrm>
+          <a:prstGeom prst="rect">
+            <a:avLst/>
+          </a:prstGeom>
+          <a:noFill/>
+        </p:spPr>
+        <p:txBody>
+          <a:bodyPr wrap="square" anchor="ctr" lIns="0" rIns="0" tIns="0" bIns="0">
+            <a:spAutoFit/>
+          </a:bodyPr>
+          <a:lstStyle/>
+          <a:p>
+            <a:pPr algn="l"/>
+            <a:r>
+              <a:rPr sz="900">
+                <a:solidFill>
+                  <a:srgbClr val="6B7280"/>
+                </a:solidFill>
+                <a:latin typeface="맑은 고딕"/>
+                <a:ea typeface="맑은 고딕"/>
+              </a:rPr>
+              <a:t>최호길 | QIE Data Science | AI Specialist 인증</a:t>
+            </a:r>
+          </a:p>
+        </p:txBody>
+      </p:sp>
+      <p:sp>
+        <p:nvSpPr>
+          <p:cNvPr id="13" name="TextBox 12"/>
+          <p:cNvSpPr txBox="1"/>
+          <p:nvPr/>
+        </p:nvSpPr>
+        <p:spPr>
+          <a:xfrm>
+            <a:off x="10972800" y="6437376"/>
+            <a:ext cx="758952" cy="292608"/>
+          </a:xfrm>
+          <a:prstGeom prst="rect">
+            <a:avLst/>
+          </a:prstGeom>
+          <a:noFill/>
+        </p:spPr>
+        <p:txBody>
+          <a:bodyPr wrap="square" anchor="ctr" lIns="0" rIns="0" tIns="0" bIns="0">
+            <a:spAutoFit/>
+          </a:bodyPr>
+          <a:lstStyle/>
+          <a:p>
+            <a:pPr algn="r"/>
+            <a:r>
+              <a:rPr sz="900">
+                <a:solidFill>
+                  <a:srgbClr val="6B7280"/>
+                </a:solidFill>
+                <a:latin typeface="맑은 고딕"/>
+                <a:ea typeface="맑은 고딕"/>
+              </a:rPr>
+              <a:t>5</a:t>
+            </a:r>
+          </a:p>
+        </p:txBody>
+      </p:sp>
+    </p:spTree>
+  </p:cSld>
+  <p:clrMapOvr>
+    <a:masterClrMapping/>
+  </p:clrMapOvr>
+</p:sld>
+</file>
+
+<file path=ppt/slides/slide6.xml><?xml version="1.0" encoding="utf-8"?>
+<p:sld xmlns:a="http://schemas.openxmlformats.org/drawingml/2006/main" xmlns:p="http://schemas.openxmlformats.org/presentationml/2006/main" xmlns:r="http://schemas.openxmlformats.org/officeDocument/2006/relationships">
+  <p:cSld>
+    <p:bg>
+      <p:bgPr>
+        <a:solidFill>
+          <a:srgbClr val="FFFFFF"/>
+        </a:solidFill>
+        <a:effectLst/>
+      </p:bgPr>
+    </p:bg>
+    <p:spTree>
+      <p:nvGrpSpPr>
+        <p:cNvPr id="1" name=""/>
+        <p:cNvGrpSpPr/>
+        <p:nvPr/>
+      </p:nvGrpSpPr>
+      <p:grpSpPr/>
+      <p:sp>
+        <p:nvSpPr>
+          <p:cNvPr id="2" name="Rectangle 1"/>
+          <p:cNvSpPr/>
+          <p:nvPr/>
+        </p:nvSpPr>
+        <p:spPr>
+          <a:xfrm>
+            <a:off x="640080" y="502920"/>
+            <a:ext cx="123444" cy="768096"/>
+          </a:xfrm>
+          <a:prstGeom prst="rect">
+            <a:avLst/>
+          </a:prstGeom>
+          <a:solidFill>
+            <a:srgbClr val="CFD4DB"/>
           </a:solidFill>
           <a:ln>
             <a:noFill/>
@@ -6615,14 +6695,14 @@
       </p:sp>
       <p:sp>
         <p:nvSpPr>
-          <p:cNvPr id="6" name="TextBox 5"/>
+          <p:cNvPr id="3" name="TextBox 2"/>
           <p:cNvSpPr txBox="1"/>
           <p:nvPr/>
         </p:nvSpPr>
         <p:spPr>
           <a:xfrm>
-            <a:off x="868680" y="1783080"/>
-            <a:ext cx="4983480" cy="640080"/>
+            <a:off x="932688" y="448056"/>
+            <a:ext cx="10881360" cy="256032"/>
           </a:xfrm>
           <a:prstGeom prst="rect">
             <a:avLst/>
@@ -6630,41 +6710,261 @@
           <a:noFill/>
         </p:spPr>
         <p:txBody>
-          <a:bodyPr wrap="square" anchor="ctr" lIns="0" rIns="0" tIns="0" bIns="0">
+          <a:bodyPr wrap="square" anchor="t" lIns="0" rIns="0" tIns="0" bIns="0">
             <a:spAutoFit/>
           </a:bodyPr>
           <a:lstStyle/>
           <a:p>
             <a:pPr algn="l"/>
             <a:r>
-              <a:rPr sz="1550" b="1">
-                <a:solidFill>
-                  <a:srgbClr val="FFFFFF"/>
-                </a:solidFill>
-                <a:latin typeface="맑은 고딕"/>
-                <a:ea typeface="맑은 고딕"/>
-              </a:rPr>
-              <a:t>모델 — 1차 binary gate</a:t>
-            </a:r>
-          </a:p>
-        </p:txBody>
-      </p:sp>
-      <p:sp>
-        <p:nvSpPr>
-          <p:cNvPr id="7" name="Rectangle 6"/>
+              <a:rPr sz="1300" b="1">
+                <a:solidFill>
+                  <a:srgbClr val="8A929E"/>
+                </a:solidFill>
+                <a:latin typeface="맑은 고딕"/>
+                <a:ea typeface="맑은 고딕"/>
+              </a:rPr>
+              <a:t>P3 | 1차 binary gate (PoC)</a:t>
+            </a:r>
+          </a:p>
+        </p:txBody>
+      </p:sp>
+      <p:sp>
+        <p:nvSpPr>
+          <p:cNvPr id="4" name="TextBox 3"/>
+          <p:cNvSpPr txBox="1"/>
+          <p:nvPr/>
+        </p:nvSpPr>
+        <p:spPr>
+          <a:xfrm>
+            <a:off x="932688" y="704088"/>
+            <a:ext cx="10881360" cy="603504"/>
+          </a:xfrm>
+          <a:prstGeom prst="rect">
+            <a:avLst/>
+          </a:prstGeom>
+          <a:noFill/>
+        </p:spPr>
+        <p:txBody>
+          <a:bodyPr wrap="square" anchor="t" lIns="0" rIns="0" tIns="0" bIns="0">
+            <a:spAutoFit/>
+          </a:bodyPr>
+          <a:lstStyle/>
+          <a:p>
+            <a:pPr algn="l"/>
+            <a:r>
+              <a:rPr sz="3100" b="1">
+                <a:solidFill>
+                  <a:srgbClr val="0F1E3D"/>
+                </a:solidFill>
+                <a:latin typeface="맑은 고딕"/>
+                <a:ea typeface="맑은 고딕"/>
+              </a:rPr>
+              <a:t>생성 데이터로 정상/이상 1차 판정이 학습됨을 확인</a:t>
+            </a:r>
+          </a:p>
+        </p:txBody>
+      </p:sp>
+      <p:sp>
+        <p:nvSpPr>
+          <p:cNvPr id="5" name="TextBox 4"/>
+          <p:cNvSpPr txBox="1"/>
+          <p:nvPr/>
+        </p:nvSpPr>
+        <p:spPr>
+          <a:xfrm>
+            <a:off x="640080" y="1828800"/>
+            <a:ext cx="10972800" cy="1920240"/>
+          </a:xfrm>
+          <a:prstGeom prst="rect">
+            <a:avLst/>
+          </a:prstGeom>
+          <a:noFill/>
+        </p:spPr>
+        <p:txBody>
+          <a:bodyPr wrap="square" anchor="t" lIns="0" rIns="0" tIns="0" bIns="0">
+            <a:spAutoFit/>
+          </a:bodyPr>
+          <a:lstStyle/>
+          <a:p>
+            <a:pPr marL="274320" indent="-274320">
+              <a:spcAft>
+                <a:spcPts val="500"/>
+              </a:spcAft>
+            </a:pPr>
+            <a:r>
+              <a:rPr sz="1400" b="0">
+                <a:solidFill>
+                  <a:srgbClr val="5B9BD5"/>
+                </a:solidFill>
+                <a:latin typeface="맑은 고딕"/>
+                <a:ea typeface="맑은 고딕"/>
+              </a:rPr>
+              <a:t>●  </a:t>
+            </a:r>
+            <a:r>
+              <a:rPr sz="1400">
+                <a:solidFill>
+                  <a:srgbClr val="1A1F2E"/>
+                </a:solidFill>
+                <a:latin typeface="맑은 고딕"/>
+                <a:ea typeface="맑은 고딕"/>
+              </a:rPr>
+              <a:t>trend 이미지를 </a:t>
+            </a:r>
+            <a:r>
+              <a:rPr sz="1400" b="1">
+                <a:solidFill>
+                  <a:srgbClr val="0F1E3D"/>
+                </a:solidFill>
+                <a:latin typeface="맑은 고딕"/>
+                <a:ea typeface="맑은 고딕"/>
+              </a:rPr>
+              <a:t>ConvNeXtV2-Tiny</a:t>
+            </a:r>
+            <a:r>
+              <a:rPr sz="1400">
+                <a:solidFill>
+                  <a:srgbClr val="1A1F2E"/>
+                </a:solidFill>
+                <a:latin typeface="맑은 고딕"/>
+                <a:ea typeface="맑은 고딕"/>
+              </a:rPr>
+              <a:t>로 정상/이상 2분류하고, </a:t>
+            </a:r>
+            <a:r>
+              <a:rPr sz="1400" b="1">
+                <a:solidFill>
+                  <a:srgbClr val="0F1E3D"/>
+                </a:solidFill>
+                <a:latin typeface="맑은 고딕"/>
+                <a:ea typeface="맑은 고딕"/>
+              </a:rPr>
+              <a:t>놓침(FN) 최소화</a:t>
+            </a:r>
+            <a:r>
+              <a:rPr sz="1400">
+                <a:solidFill>
+                  <a:srgbClr val="1A1F2E"/>
+                </a:solidFill>
+                <a:latin typeface="맑은 고딕"/>
+                <a:ea typeface="맑은 고딕"/>
+              </a:rPr>
+              <a:t>를 목표로 Focal loss와 normal threshold 0.9를 적용했습니다</a:t>
+            </a:r>
+          </a:p>
+          <a:p>
+            <a:pPr marL="274320" indent="-274320">
+              <a:spcAft>
+                <a:spcPts val="500"/>
+              </a:spcAft>
+            </a:pPr>
+            <a:r>
+              <a:rPr sz="1400" b="0">
+                <a:solidFill>
+                  <a:srgbClr val="5B9BD5"/>
+                </a:solidFill>
+                <a:latin typeface="맑은 고딕"/>
+                <a:ea typeface="맑은 고딕"/>
+              </a:rPr>
+              <a:t>●  </a:t>
+            </a:r>
+            <a:r>
+              <a:rPr sz="1400">
+                <a:solidFill>
+                  <a:srgbClr val="1A1F2E"/>
+                </a:solidFill>
+                <a:latin typeface="맑은 고딕"/>
+                <a:ea typeface="맑은 고딕"/>
+              </a:rPr>
+              <a:t>test 1,500에서 </a:t>
+            </a:r>
+            <a:r>
+              <a:rPr sz="1400" b="1">
+                <a:solidFill>
+                  <a:srgbClr val="0F1E3D"/>
+                </a:solidFill>
+                <a:latin typeface="맑은 고딕"/>
+                <a:ea typeface="맑은 고딕"/>
+              </a:rPr>
+              <a:t>binary F1 0.9967</a:t>
+            </a:r>
+            <a:r>
+              <a:rPr sz="1400">
+                <a:solidFill>
+                  <a:srgbClr val="1A1F2E"/>
+                </a:solidFill>
+                <a:latin typeface="맑은 고딕"/>
+                <a:ea typeface="맑은 고딕"/>
+              </a:rPr>
+              <a:t>, </a:t>
+            </a:r>
+            <a:r>
+              <a:rPr sz="1400" b="1">
+                <a:solidFill>
+                  <a:srgbClr val="0F1E3D"/>
+                </a:solidFill>
+                <a:latin typeface="맑은 고딕"/>
+                <a:ea typeface="맑은 고딕"/>
+              </a:rPr>
+              <a:t>이상 recall 0.9987</a:t>
+            </a:r>
+            <a:r>
+              <a:rPr sz="1400">
+                <a:solidFill>
+                  <a:srgbClr val="1A1F2E"/>
+                </a:solidFill>
+                <a:latin typeface="맑은 고딕"/>
+                <a:ea typeface="맑은 고딕"/>
+              </a:rPr>
+              <a:t> — 정상 750 중 오탐 4건, 이상 750 중 놓침 1건 수준입니다</a:t>
+            </a:r>
+          </a:p>
+          <a:p>
+            <a:pPr marL="420624" indent="-420624" lvl="1">
+              <a:spcAft>
+                <a:spcPts val="500"/>
+              </a:spcAft>
+            </a:pPr>
+            <a:r>
+              <a:rPr sz="1300" b="0">
+                <a:solidFill>
+                  <a:srgbClr val="6E7B8E"/>
+                </a:solidFill>
+                <a:latin typeface="맑은 고딕"/>
+                <a:ea typeface="맑은 고딕"/>
+              </a:rPr>
+              <a:t>–  </a:t>
+            </a:r>
+            <a:r>
+              <a:rPr sz="1300">
+                <a:solidFill>
+                  <a:srgbClr val="4A5666"/>
+                </a:solidFill>
+                <a:latin typeface="맑은 고딕"/>
+                <a:ea typeface="맑은 고딕"/>
+              </a:rPr>
+              <a:t>robustness 점검 — smoothing window(median 1/3/5)로 노이즈가 아닌 추세를 보게, 색과 투명도만 바꿔 렌더해 색이 아니라 패턴을 학습하는지 확인</a:t>
+            </a:r>
+          </a:p>
+        </p:txBody>
+      </p:sp>
+      <p:sp>
+        <p:nvSpPr>
+          <p:cNvPr id="6" name="Rounded Rectangle 5"/>
           <p:cNvSpPr/>
           <p:nvPr/>
         </p:nvSpPr>
         <p:spPr>
           <a:xfrm>
-            <a:off x="640080" y="2423160"/>
-            <a:ext cx="5349240" cy="3520440"/>
-          </a:xfrm>
-          <a:prstGeom prst="rect">
+            <a:off x="7045452" y="4023360"/>
+            <a:ext cx="4567428" cy="384048"/>
+          </a:xfrm>
+          <a:prstGeom prst="roundRect">
             <a:avLst/>
           </a:prstGeom>
           <a:solidFill>
-            <a:srgbClr val="F2F5FA"/>
+            <a:srgbClr val="E6F7F6"/>
           </a:solidFill>
           <a:ln>
             <a:noFill/>
@@ -6695,14 +6995,58 @@
       </p:sp>
       <p:sp>
         <p:nvSpPr>
+          <p:cNvPr id="7" name="Rectangle 6"/>
+          <p:cNvSpPr/>
+          <p:nvPr/>
+        </p:nvSpPr>
+        <p:spPr>
+          <a:xfrm>
+            <a:off x="7045452" y="4023360"/>
+            <a:ext cx="82296" cy="384048"/>
+          </a:xfrm>
+          <a:prstGeom prst="rect">
+            <a:avLst/>
+          </a:prstGeom>
+          <a:solidFill>
+            <a:srgbClr val="5B9BD5"/>
+          </a:solidFill>
+          <a:ln>
+            <a:noFill/>
+          </a:ln>
+          <a:effectLst/>
+        </p:spPr>
+        <p:style>
+          <a:lnRef idx="1">
+            <a:schemeClr val="accent1"/>
+          </a:lnRef>
+          <a:fillRef idx="3">
+            <a:schemeClr val="accent1"/>
+          </a:fillRef>
+          <a:effectRef idx="2">
+            <a:schemeClr val="accent1"/>
+          </a:effectRef>
+          <a:fontRef idx="minor">
+            <a:schemeClr val="lt1"/>
+          </a:fontRef>
+        </p:style>
+        <p:txBody>
+          <a:bodyPr rtlCol="0" anchor="ctr"/>
+          <a:lstStyle/>
+          <a:p>
+            <a:pPr algn="ctr"/>
+          </a:p>
+        </p:txBody>
+      </p:sp>
+      <p:sp>
+        <p:nvSpPr>
           <p:cNvPr id="8" name="TextBox 7"/>
           <p:cNvSpPr txBox="1"/>
           <p:nvPr/>
         </p:nvSpPr>
         <p:spPr>
           <a:xfrm>
-            <a:off x="868680" y="2606040"/>
-            <a:ext cx="4892040" cy="2276856"/>
+            <a:off x="7228332" y="4023360"/>
+            <a:ext cx="4238244" cy="384048"/>
           </a:xfrm>
           <a:prstGeom prst="rect">
             <a:avLst/>
@@ -6710,138 +7054,21 @@
           <a:noFill/>
         </p:spPr>
         <p:txBody>
-          <a:bodyPr wrap="square" anchor="t" lIns="0" rIns="0" tIns="0" bIns="0">
+          <a:bodyPr wrap="square" anchor="ctr" lIns="0" rIns="0" tIns="0" bIns="0">
             <a:spAutoFit/>
           </a:bodyPr>
           <a:lstStyle/>
           <a:p>
-            <a:pPr marL="274320" indent="-274320">
-              <a:lnSpc>
-                <a:spcPct val="110000"/>
-              </a:lnSpc>
-              <a:spcAft>
-                <a:spcPts val="400"/>
-              </a:spcAft>
-            </a:pPr>
-            <a:r>
-              <a:rPr sz="1300" b="0">
-                <a:solidFill>
-                  <a:srgbClr val="5B9BD5"/>
-                </a:solidFill>
-                <a:latin typeface="맑은 고딕"/>
-                <a:ea typeface="맑은 고딕"/>
-              </a:rPr>
-              <a:t>●  </a:t>
-            </a:r>
-            <a:r>
-              <a:rPr sz="1300">
-                <a:solidFill>
-                  <a:srgbClr val="1A1F2E"/>
-                </a:solidFill>
-                <a:latin typeface="맑은 고딕"/>
-                <a:ea typeface="맑은 고딕"/>
-              </a:rPr>
-              <a:t>trend 이미지를 </a:t>
-            </a:r>
-            <a:r>
-              <a:rPr sz="1300" b="1">
+            <a:pPr algn="ctr"/>
+            <a:r>
+              <a:rPr sz="1350" b="1">
                 <a:solidFill>
                   <a:srgbClr val="0F1E3D"/>
                 </a:solidFill>
                 <a:latin typeface="맑은 고딕"/>
                 <a:ea typeface="맑은 고딕"/>
               </a:rPr>
-              <a:t>ConvNeXtV2-Tiny</a:t>
-            </a:r>
-            <a:r>
-              <a:rPr sz="1300">
-                <a:solidFill>
-                  <a:srgbClr val="1A1F2E"/>
-                </a:solidFill>
-                <a:latin typeface="맑은 고딕"/>
-                <a:ea typeface="맑은 고딕"/>
-              </a:rPr>
-              <a:t>로 정상/이상 2분류하며, </a:t>
-            </a:r>
-            <a:r>
-              <a:rPr sz="1300" b="1">
-                <a:solidFill>
-                  <a:srgbClr val="0F1E3D"/>
-                </a:solidFill>
-                <a:latin typeface="맑은 고딕"/>
-                <a:ea typeface="맑은 고딕"/>
-              </a:rPr>
-              <a:t>놓침(FN) 최소화</a:t>
-            </a:r>
-            <a:r>
-              <a:rPr sz="1300">
-                <a:solidFill>
-                  <a:srgbClr val="1A1F2E"/>
-                </a:solidFill>
-                <a:latin typeface="맑은 고딕"/>
-                <a:ea typeface="맑은 고딕"/>
-              </a:rPr>
-              <a:t>가 목표입니다</a:t>
-            </a:r>
-          </a:p>
-          <a:p>
-            <a:pPr marL="274320" indent="-274320">
-              <a:lnSpc>
-                <a:spcPct val="110000"/>
-              </a:lnSpc>
-              <a:spcAft>
-                <a:spcPts val="400"/>
-              </a:spcAft>
-            </a:pPr>
-            <a:r>
-              <a:rPr sz="1300" b="0">
-                <a:solidFill>
-                  <a:srgbClr val="5B9BD5"/>
-                </a:solidFill>
-                <a:latin typeface="맑은 고딕"/>
-                <a:ea typeface="맑은 고딕"/>
-              </a:rPr>
-              <a:t>●  </a:t>
-            </a:r>
-            <a:r>
-              <a:rPr sz="1300">
-                <a:solidFill>
-                  <a:srgbClr val="1A1F2E"/>
-                </a:solidFill>
-                <a:latin typeface="맑은 고딕"/>
-                <a:ea typeface="맑은 고딕"/>
-              </a:rPr>
-              <a:t>Focal loss + EMA로 학습하고, normal threshold를 올려 FN을 더 줄입니다</a:t>
-            </a:r>
-          </a:p>
-          <a:p>
-            <a:pPr marL="420624" indent="-420624" lvl="1">
-              <a:lnSpc>
-                <a:spcPct val="110000"/>
-              </a:lnSpc>
-              <a:spcAft>
-                <a:spcPts val="400"/>
-              </a:spcAft>
-            </a:pPr>
-            <a:r>
-              <a:rPr sz="1200" b="0">
-                <a:solidFill>
-                  <a:srgbClr val="6E7B8E"/>
-                </a:solidFill>
-                <a:latin typeface="맑은 고딕"/>
-                <a:ea typeface="맑은 고딕"/>
-              </a:rPr>
-              <a:t>–  </a:t>
-            </a:r>
-            <a:r>
-              <a:rPr sz="1200">
-                <a:solidFill>
-                  <a:srgbClr val="4A5666"/>
-                </a:solidFill>
-                <a:latin typeface="맑은 고딕"/>
-                <a:ea typeface="맑은 고딕"/>
-              </a:rPr>
-              <a:t>이상이 잡히면 2차에서 유형(avg/std/spike/drift/context) 진단</a:t>
+              <a:t>F1 0.9967 / recall 0.9987 (PoC, 생성셋)</a:t>
             </a:r>
           </a:p>
         </p:txBody>
@@ -6854,8 +7081,8 @@
         </p:nvSpPr>
         <p:spPr>
           <a:xfrm>
-            <a:off x="868680" y="5102352"/>
-            <a:ext cx="2372868" cy="685800"/>
+            <a:off x="4965336" y="4453272"/>
+            <a:ext cx="2322288" cy="1499328"/>
           </a:xfrm>
           <a:prstGeom prst="rect">
             <a:avLst/>
@@ -6892,50 +7119,30 @@
           </a:p>
         </p:txBody>
       </p:sp>
-      <p:sp>
-        <p:nvSpPr>
-          <p:cNvPr id="10" name="Rectangle 9"/>
-          <p:cNvSpPr/>
-          <p:nvPr/>
-        </p:nvSpPr>
-        <p:spPr>
-          <a:xfrm>
-            <a:off x="868680" y="5102352"/>
-            <a:ext cx="2372868" cy="64008"/>
-          </a:xfrm>
-          <a:prstGeom prst="rect">
-            <a:avLst/>
-          </a:prstGeom>
-          <a:solidFill>
-            <a:srgbClr val="5B9BD5"/>
-          </a:solidFill>
-          <a:ln>
-            <a:noFill/>
-          </a:ln>
-          <a:effectLst/>
-        </p:spPr>
-        <p:style>
-          <a:lnRef idx="1">
-            <a:schemeClr val="accent1"/>
-          </a:lnRef>
-          <a:fillRef idx="3">
-            <a:schemeClr val="accent1"/>
-          </a:fillRef>
-          <a:effectRef idx="2">
-            <a:schemeClr val="accent1"/>
-          </a:effectRef>
-          <a:fontRef idx="minor">
-            <a:schemeClr val="lt1"/>
-          </a:fontRef>
-        </p:style>
-        <p:txBody>
-          <a:bodyPr rtlCol="0" anchor="ctr"/>
-          <a:lstStyle/>
-          <a:p>
-            <a:pPr algn="ctr"/>
-          </a:p>
-        </p:txBody>
-      </p:sp>
+      <p:pic>
+        <p:nvPicPr>
+          <p:cNvPr id="10" name="Picture 9" descr="trend_context.png"/>
+          <p:cNvPicPr>
+            <a:picLocks noChangeAspect="1"/>
+          </p:cNvPicPr>
+          <p:nvPr/>
+        </p:nvPicPr>
+        <p:blipFill>
+          <a:blip r:embed="rId2"/>
+          <a:stretch>
+            <a:fillRect/>
+          </a:stretch>
+        </p:blipFill>
+        <p:spPr>
+          <a:xfrm>
+            <a:off x="4974336" y="4462272"/>
+            <a:ext cx="2304288" cy="1481328"/>
+          </a:xfrm>
+          <a:prstGeom prst="rect">
+            <a:avLst/>
+          </a:prstGeom>
+        </p:spPr>
+      </p:pic>
       <p:sp>
         <p:nvSpPr>
           <p:cNvPr id="11" name="TextBox 10"/>
@@ -6944,8 +7151,44 @@
         </p:nvSpPr>
         <p:spPr>
           <a:xfrm>
-            <a:off x="868680" y="5212080"/>
-            <a:ext cx="2372868" cy="329184"/>
+            <a:off x="640080" y="5961888"/>
+            <a:ext cx="10972800" cy="274320"/>
+          </a:xfrm>
+          <a:prstGeom prst="rect">
+            <a:avLst/>
+          </a:prstGeom>
+          <a:noFill/>
+        </p:spPr>
+        <p:txBody>
+          <a:bodyPr wrap="square" anchor="t" lIns="0" rIns="0" tIns="0" bIns="0">
+            <a:spAutoFit/>
+          </a:bodyPr>
+          <a:lstStyle/>
+          <a:p>
+            <a:pPr algn="ctr"/>
+            <a:r>
+              <a:rPr sz="1300">
+                <a:solidFill>
+                  <a:srgbClr val="3A485C"/>
+                </a:solidFill>
+                <a:latin typeface="맑은 고딕"/>
+                <a:ea typeface="맑은 고딕"/>
+              </a:rPr>
+              <a:t>context 이상 예시 — 정상(파랑)과 fleet 대비 이탈(빨강)을 1차 gate가 분리. 통과 시 2차에서 유형(avg/std/spike/drift/context) 진단</a:t>
+            </a:r>
+          </a:p>
+        </p:txBody>
+      </p:sp>
+      <p:sp>
+        <p:nvSpPr>
+          <p:cNvPr id="12" name="TextBox 11"/>
+          <p:cNvSpPr txBox="1"/>
+          <p:nvPr/>
+        </p:nvSpPr>
+        <p:spPr>
+          <a:xfrm>
+            <a:off x="457200" y="6437376"/>
+            <a:ext cx="8229600" cy="292608"/>
           </a:xfrm>
           <a:prstGeom prst="rect">
             <a:avLst/>
@@ -6958,30 +7201,30 @@
           </a:bodyPr>
           <a:lstStyle/>
           <a:p>
-            <a:pPr algn="ctr"/>
-            <a:r>
-              <a:rPr sz="1600" b="1">
-                <a:solidFill>
-                  <a:srgbClr val="0F1E3D"/>
-                </a:solidFill>
-                <a:latin typeface="맑은 고딕"/>
-                <a:ea typeface="맑은 고딕"/>
-              </a:rPr>
-              <a:t>2-stage</a:t>
-            </a:r>
-          </a:p>
-        </p:txBody>
-      </p:sp>
-      <p:sp>
-        <p:nvSpPr>
-          <p:cNvPr id="12" name="TextBox 11"/>
+            <a:pPr algn="l"/>
+            <a:r>
+              <a:rPr sz="900">
+                <a:solidFill>
+                  <a:srgbClr val="6B7280"/>
+                </a:solidFill>
+                <a:latin typeface="맑은 고딕"/>
+                <a:ea typeface="맑은 고딕"/>
+              </a:rPr>
+              <a:t>최호길 | QIE Data Science | AI Specialist 인증</a:t>
+            </a:r>
+          </a:p>
+        </p:txBody>
+      </p:sp>
+      <p:sp>
+        <p:nvSpPr>
+          <p:cNvPr id="13" name="TextBox 12"/>
           <p:cNvSpPr txBox="1"/>
           <p:nvPr/>
         </p:nvSpPr>
         <p:spPr>
           <a:xfrm>
-            <a:off x="868680" y="5522976"/>
-            <a:ext cx="2372868" cy="256032"/>
+            <a:off x="10972800" y="6437376"/>
+            <a:ext cx="758952" cy="292608"/>
           </a:xfrm>
           <a:prstGeom prst="rect">
             <a:avLst/>
@@ -6994,7 +7237,7 @@
           </a:bodyPr>
           <a:lstStyle/>
           <a:p>
-            <a:pPr algn="ctr"/>
+            <a:pPr algn="r"/>
             <a:r>
               <a:rPr sz="900">
                 <a:solidFill>
@@ -7003,842 +7246,7 @@
                 <a:latin typeface="맑은 고딕"/>
                 <a:ea typeface="맑은 고딕"/>
               </a:rPr>
-              <a:t>binary gate → 유형 진단</a:t>
-            </a:r>
-          </a:p>
-        </p:txBody>
-      </p:sp>
-      <p:sp>
-        <p:nvSpPr>
-          <p:cNvPr id="13" name="Rectangle 12"/>
-          <p:cNvSpPr/>
-          <p:nvPr/>
-        </p:nvSpPr>
-        <p:spPr>
-          <a:xfrm>
-            <a:off x="3387852" y="5102352"/>
-            <a:ext cx="2372868" cy="685800"/>
-          </a:xfrm>
-          <a:prstGeom prst="rect">
-            <a:avLst/>
-          </a:prstGeom>
-          <a:solidFill>
-            <a:srgbClr val="FFFFFF"/>
-          </a:solidFill>
-          <a:ln w="12700">
-            <a:solidFill>
-              <a:srgbClr val="D7DEEA"/>
-            </a:solidFill>
-          </a:ln>
-          <a:effectLst/>
-        </p:spPr>
-        <p:style>
-          <a:lnRef idx="1">
-            <a:schemeClr val="accent1"/>
-          </a:lnRef>
-          <a:fillRef idx="3">
-            <a:schemeClr val="accent1"/>
-          </a:fillRef>
-          <a:effectRef idx="2">
-            <a:schemeClr val="accent1"/>
-          </a:effectRef>
-          <a:fontRef idx="minor">
-            <a:schemeClr val="lt1"/>
-          </a:fontRef>
-        </p:style>
-        <p:txBody>
-          <a:bodyPr rtlCol="0" anchor="ctr"/>
-          <a:lstStyle/>
-          <a:p>
-            <a:pPr algn="ctr"/>
-          </a:p>
-        </p:txBody>
-      </p:sp>
-      <p:sp>
-        <p:nvSpPr>
-          <p:cNvPr id="14" name="Rectangle 13"/>
-          <p:cNvSpPr/>
-          <p:nvPr/>
-        </p:nvSpPr>
-        <p:spPr>
-          <a:xfrm>
-            <a:off x="3387852" y="5102352"/>
-            <a:ext cx="2372868" cy="64008"/>
-          </a:xfrm>
-          <a:prstGeom prst="rect">
-            <a:avLst/>
-          </a:prstGeom>
-          <a:solidFill>
-            <a:srgbClr val="5B9BD5"/>
-          </a:solidFill>
-          <a:ln>
-            <a:noFill/>
-          </a:ln>
-          <a:effectLst/>
-        </p:spPr>
-        <p:style>
-          <a:lnRef idx="1">
-            <a:schemeClr val="accent1"/>
-          </a:lnRef>
-          <a:fillRef idx="3">
-            <a:schemeClr val="accent1"/>
-          </a:fillRef>
-          <a:effectRef idx="2">
-            <a:schemeClr val="accent1"/>
-          </a:effectRef>
-          <a:fontRef idx="minor">
-            <a:schemeClr val="lt1"/>
-          </a:fontRef>
-        </p:style>
-        <p:txBody>
-          <a:bodyPr rtlCol="0" anchor="ctr"/>
-          <a:lstStyle/>
-          <a:p>
-            <a:pPr algn="ctr"/>
-          </a:p>
-        </p:txBody>
-      </p:sp>
-      <p:sp>
-        <p:nvSpPr>
-          <p:cNvPr id="15" name="TextBox 14"/>
-          <p:cNvSpPr txBox="1"/>
-          <p:nvPr/>
-        </p:nvSpPr>
-        <p:spPr>
-          <a:xfrm>
-            <a:off x="3387852" y="5212080"/>
-            <a:ext cx="2372868" cy="329184"/>
-          </a:xfrm>
-          <a:prstGeom prst="rect">
-            <a:avLst/>
-          </a:prstGeom>
-          <a:noFill/>
-        </p:spPr>
-        <p:txBody>
-          <a:bodyPr wrap="square" anchor="ctr" lIns="0" rIns="0" tIns="0" bIns="0">
-            <a:spAutoFit/>
-          </a:bodyPr>
-          <a:lstStyle/>
-          <a:p>
-            <a:pPr algn="ctr"/>
-            <a:r>
-              <a:rPr sz="1600" b="1">
-                <a:solidFill>
-                  <a:srgbClr val="0F1E3D"/>
-                </a:solidFill>
-                <a:latin typeface="맑은 고딕"/>
-                <a:ea typeface="맑은 고딕"/>
-              </a:rPr>
-              <a:t>ConvNeXtV2</a:t>
-            </a:r>
-          </a:p>
-        </p:txBody>
-      </p:sp>
-      <p:sp>
-        <p:nvSpPr>
-          <p:cNvPr id="16" name="TextBox 15"/>
-          <p:cNvSpPr txBox="1"/>
-          <p:nvPr/>
-        </p:nvSpPr>
-        <p:spPr>
-          <a:xfrm>
-            <a:off x="3387852" y="5522976"/>
-            <a:ext cx="2372868" cy="256032"/>
-          </a:xfrm>
-          <a:prstGeom prst="rect">
-            <a:avLst/>
-          </a:prstGeom>
-          <a:noFill/>
-        </p:spPr>
-        <p:txBody>
-          <a:bodyPr wrap="square" anchor="ctr" lIns="0" rIns="0" tIns="0" bIns="0">
-            <a:spAutoFit/>
-          </a:bodyPr>
-          <a:lstStyle/>
-          <a:p>
-            <a:pPr algn="ctr"/>
-            <a:r>
-              <a:rPr sz="900">
-                <a:solidFill>
-                  <a:srgbClr val="6B7280"/>
-                </a:solidFill>
-                <a:latin typeface="맑은 고딕"/>
-                <a:ea typeface="맑은 고딕"/>
-              </a:rPr>
-              <a:t>Tiny backbone</a:t>
-            </a:r>
-          </a:p>
-        </p:txBody>
-      </p:sp>
-      <p:sp>
-        <p:nvSpPr>
-          <p:cNvPr id="17" name="Rectangle 16"/>
-          <p:cNvSpPr/>
-          <p:nvPr/>
-        </p:nvSpPr>
-        <p:spPr>
-          <a:xfrm>
-            <a:off x="6263640" y="1783080"/>
-            <a:ext cx="5349240" cy="640080"/>
-          </a:xfrm>
-          <a:prstGeom prst="rect">
-            <a:avLst/>
-          </a:prstGeom>
-          <a:solidFill>
-            <a:srgbClr val="0F1E3D"/>
-          </a:solidFill>
-          <a:ln>
-            <a:noFill/>
-          </a:ln>
-          <a:effectLst/>
-        </p:spPr>
-        <p:style>
-          <a:lnRef idx="1">
-            <a:schemeClr val="accent1"/>
-          </a:lnRef>
-          <a:fillRef idx="3">
-            <a:schemeClr val="accent1"/>
-          </a:fillRef>
-          <a:effectRef idx="2">
-            <a:schemeClr val="accent1"/>
-          </a:effectRef>
-          <a:fontRef idx="minor">
-            <a:schemeClr val="lt1"/>
-          </a:fontRef>
-        </p:style>
-        <p:txBody>
-          <a:bodyPr rtlCol="0" anchor="ctr"/>
-          <a:lstStyle/>
-          <a:p>
-            <a:pPr algn="ctr"/>
-          </a:p>
-        </p:txBody>
-      </p:sp>
-      <p:sp>
-        <p:nvSpPr>
-          <p:cNvPr id="18" name="TextBox 17"/>
-          <p:cNvSpPr txBox="1"/>
-          <p:nvPr/>
-        </p:nvSpPr>
-        <p:spPr>
-          <a:xfrm>
-            <a:off x="6492240" y="1783080"/>
-            <a:ext cx="4983480" cy="640080"/>
-          </a:xfrm>
-          <a:prstGeom prst="rect">
-            <a:avLst/>
-          </a:prstGeom>
-          <a:noFill/>
-        </p:spPr>
-        <p:txBody>
-          <a:bodyPr wrap="square" anchor="ctr" lIns="0" rIns="0" tIns="0" bIns="0">
-            <a:spAutoFit/>
-          </a:bodyPr>
-          <a:lstStyle/>
-          <a:p>
-            <a:pPr algn="l"/>
-            <a:r>
-              <a:rPr sz="1550" b="1">
-                <a:solidFill>
-                  <a:srgbClr val="FFFFFF"/>
-                </a:solidFill>
-                <a:latin typeface="맑은 고딕"/>
-                <a:ea typeface="맑은 고딕"/>
-              </a:rPr>
-              <a:t>성과 — 생성셋 검증(PoC)</a:t>
-            </a:r>
-          </a:p>
-        </p:txBody>
-      </p:sp>
-      <p:sp>
-        <p:nvSpPr>
-          <p:cNvPr id="19" name="Rectangle 18"/>
-          <p:cNvSpPr/>
-          <p:nvPr/>
-        </p:nvSpPr>
-        <p:spPr>
-          <a:xfrm>
-            <a:off x="6263640" y="2423160"/>
-            <a:ext cx="5349240" cy="3520440"/>
-          </a:xfrm>
-          <a:prstGeom prst="rect">
-            <a:avLst/>
-          </a:prstGeom>
-          <a:solidFill>
-            <a:srgbClr val="F2F5FA"/>
-          </a:solidFill>
-          <a:ln>
-            <a:noFill/>
-          </a:ln>
-          <a:effectLst/>
-        </p:spPr>
-        <p:style>
-          <a:lnRef idx="1">
-            <a:schemeClr val="accent1"/>
-          </a:lnRef>
-          <a:fillRef idx="3">
-            <a:schemeClr val="accent1"/>
-          </a:fillRef>
-          <a:effectRef idx="2">
-            <a:schemeClr val="accent1"/>
-          </a:effectRef>
-          <a:fontRef idx="minor">
-            <a:schemeClr val="lt1"/>
-          </a:fontRef>
-        </p:style>
-        <p:txBody>
-          <a:bodyPr rtlCol="0" anchor="ctr"/>
-          <a:lstStyle/>
-          <a:p>
-            <a:pPr algn="ctr"/>
-          </a:p>
-        </p:txBody>
-      </p:sp>
-      <p:sp>
-        <p:nvSpPr>
-          <p:cNvPr id="20" name="TextBox 19"/>
-          <p:cNvSpPr txBox="1"/>
-          <p:nvPr/>
-        </p:nvSpPr>
-        <p:spPr>
-          <a:xfrm>
-            <a:off x="6492240" y="2606040"/>
-            <a:ext cx="4892040" cy="2276856"/>
-          </a:xfrm>
-          <a:prstGeom prst="rect">
-            <a:avLst/>
-          </a:prstGeom>
-          <a:noFill/>
-        </p:spPr>
-        <p:txBody>
-          <a:bodyPr wrap="square" anchor="t" lIns="0" rIns="0" tIns="0" bIns="0">
-            <a:spAutoFit/>
-          </a:bodyPr>
-          <a:lstStyle/>
-          <a:p>
-            <a:pPr marL="274320" indent="-274320">
-              <a:lnSpc>
-                <a:spcPct val="110000"/>
-              </a:lnSpc>
-              <a:spcAft>
-                <a:spcPts val="400"/>
-              </a:spcAft>
-            </a:pPr>
-            <a:r>
-              <a:rPr sz="1300" b="0">
-                <a:solidFill>
-                  <a:srgbClr val="5B9BD5"/>
-                </a:solidFill>
-                <a:latin typeface="맑은 고딕"/>
-                <a:ea typeface="맑은 고딕"/>
-              </a:rPr>
-              <a:t>●  </a:t>
-            </a:r>
-            <a:r>
-              <a:rPr sz="1300">
-                <a:solidFill>
-                  <a:srgbClr val="1A1F2E"/>
-                </a:solidFill>
-                <a:latin typeface="맑은 고딕"/>
-                <a:ea typeface="맑은 고딕"/>
-              </a:rPr>
-              <a:t>test 1,500에서 </a:t>
-            </a:r>
-            <a:r>
-              <a:rPr sz="1300" b="1">
-                <a:solidFill>
-                  <a:srgbClr val="0F1E3D"/>
-                </a:solidFill>
-                <a:latin typeface="맑은 고딕"/>
-                <a:ea typeface="맑은 고딕"/>
-              </a:rPr>
-              <a:t>binary F1 0.9967</a:t>
-            </a:r>
-            <a:r>
-              <a:rPr sz="1300">
-                <a:solidFill>
-                  <a:srgbClr val="1A1F2E"/>
-                </a:solidFill>
-                <a:latin typeface="맑은 고딕"/>
-                <a:ea typeface="맑은 고딕"/>
-              </a:rPr>
-              <a:t>, </a:t>
-            </a:r>
-            <a:r>
-              <a:rPr sz="1300" b="1">
-                <a:solidFill>
-                  <a:srgbClr val="0F1E3D"/>
-                </a:solidFill>
-                <a:latin typeface="맑은 고딕"/>
-                <a:ea typeface="맑은 고딕"/>
-              </a:rPr>
-              <a:t>이상 recall 0.9987</a:t>
-            </a:r>
-            <a:r>
-              <a:rPr sz="1300">
-                <a:solidFill>
-                  <a:srgbClr val="1A1F2E"/>
-                </a:solidFill>
-                <a:latin typeface="맑은 고딕"/>
-                <a:ea typeface="맑은 고딕"/>
-              </a:rPr>
-              <a:t>(normal threshold 0.9)</a:t>
-            </a:r>
-          </a:p>
-          <a:p>
-            <a:pPr marL="274320" indent="-274320">
-              <a:lnSpc>
-                <a:spcPct val="110000"/>
-              </a:lnSpc>
-              <a:spcAft>
-                <a:spcPts val="400"/>
-              </a:spcAft>
-            </a:pPr>
-            <a:r>
-              <a:rPr sz="1300" b="0">
-                <a:solidFill>
-                  <a:srgbClr val="5B9BD5"/>
-                </a:solidFill>
-                <a:latin typeface="맑은 고딕"/>
-                <a:ea typeface="맑은 고딕"/>
-              </a:rPr>
-              <a:t>●  </a:t>
-            </a:r>
-            <a:r>
-              <a:rPr sz="1300">
-                <a:solidFill>
-                  <a:srgbClr val="1A1F2E"/>
-                </a:solidFill>
-                <a:latin typeface="맑은 고딕"/>
-                <a:ea typeface="맑은 고딕"/>
-              </a:rPr>
-              <a:t>정상 750 중 오탐 4건, 이상 750 중 놓침 1건 수준</a:t>
-            </a:r>
-          </a:p>
-          <a:p>
-            <a:pPr marL="420624" indent="-420624" lvl="1">
-              <a:lnSpc>
-                <a:spcPct val="110000"/>
-              </a:lnSpc>
-              <a:spcAft>
-                <a:spcPts val="400"/>
-              </a:spcAft>
-            </a:pPr>
-            <a:r>
-              <a:rPr sz="1200" b="0">
-                <a:solidFill>
-                  <a:srgbClr val="6E7B8E"/>
-                </a:solidFill>
-                <a:latin typeface="맑은 고딕"/>
-                <a:ea typeface="맑은 고딕"/>
-              </a:rPr>
-              <a:t>–  </a:t>
-            </a:r>
-            <a:r>
-              <a:rPr sz="1200">
-                <a:solidFill>
-                  <a:srgbClr val="4A5666"/>
-                </a:solidFill>
-                <a:latin typeface="맑은 고딕"/>
-                <a:ea typeface="맑은 고딕"/>
-              </a:rPr>
-              <a:t>FN을 유형별로 분해해 데이터 난이도와 threshold로 피드백</a:t>
-            </a:r>
-          </a:p>
-        </p:txBody>
-      </p:sp>
-      <p:sp>
-        <p:nvSpPr>
-          <p:cNvPr id="21" name="Rectangle 20"/>
-          <p:cNvSpPr/>
-          <p:nvPr/>
-        </p:nvSpPr>
-        <p:spPr>
-          <a:xfrm>
-            <a:off x="6492240" y="5102352"/>
-            <a:ext cx="2372868" cy="685800"/>
-          </a:xfrm>
-          <a:prstGeom prst="rect">
-            <a:avLst/>
-          </a:prstGeom>
-          <a:solidFill>
-            <a:srgbClr val="FFFFFF"/>
-          </a:solidFill>
-          <a:ln w="12700">
-            <a:solidFill>
-              <a:srgbClr val="D7DEEA"/>
-            </a:solidFill>
-          </a:ln>
-          <a:effectLst/>
-        </p:spPr>
-        <p:style>
-          <a:lnRef idx="1">
-            <a:schemeClr val="accent1"/>
-          </a:lnRef>
-          <a:fillRef idx="3">
-            <a:schemeClr val="accent1"/>
-          </a:fillRef>
-          <a:effectRef idx="2">
-            <a:schemeClr val="accent1"/>
-          </a:effectRef>
-          <a:fontRef idx="minor">
-            <a:schemeClr val="lt1"/>
-          </a:fontRef>
-        </p:style>
-        <p:txBody>
-          <a:bodyPr rtlCol="0" anchor="ctr"/>
-          <a:lstStyle/>
-          <a:p>
-            <a:pPr algn="ctr"/>
-          </a:p>
-        </p:txBody>
-      </p:sp>
-      <p:sp>
-        <p:nvSpPr>
-          <p:cNvPr id="22" name="Rectangle 21"/>
-          <p:cNvSpPr/>
-          <p:nvPr/>
-        </p:nvSpPr>
-        <p:spPr>
-          <a:xfrm>
-            <a:off x="6492240" y="5102352"/>
-            <a:ext cx="2372868" cy="64008"/>
-          </a:xfrm>
-          <a:prstGeom prst="rect">
-            <a:avLst/>
-          </a:prstGeom>
-          <a:solidFill>
-            <a:srgbClr val="5B9BD5"/>
-          </a:solidFill>
-          <a:ln>
-            <a:noFill/>
-          </a:ln>
-          <a:effectLst/>
-        </p:spPr>
-        <p:style>
-          <a:lnRef idx="1">
-            <a:schemeClr val="accent1"/>
-          </a:lnRef>
-          <a:fillRef idx="3">
-            <a:schemeClr val="accent1"/>
-          </a:fillRef>
-          <a:effectRef idx="2">
-            <a:schemeClr val="accent1"/>
-          </a:effectRef>
-          <a:fontRef idx="minor">
-            <a:schemeClr val="lt1"/>
-          </a:fontRef>
-        </p:style>
-        <p:txBody>
-          <a:bodyPr rtlCol="0" anchor="ctr"/>
-          <a:lstStyle/>
-          <a:p>
-            <a:pPr algn="ctr"/>
-          </a:p>
-        </p:txBody>
-      </p:sp>
-      <p:sp>
-        <p:nvSpPr>
-          <p:cNvPr id="23" name="TextBox 22"/>
-          <p:cNvSpPr txBox="1"/>
-          <p:nvPr/>
-        </p:nvSpPr>
-        <p:spPr>
-          <a:xfrm>
-            <a:off x="6492240" y="5212080"/>
-            <a:ext cx="2372868" cy="329184"/>
-          </a:xfrm>
-          <a:prstGeom prst="rect">
-            <a:avLst/>
-          </a:prstGeom>
-          <a:noFill/>
-        </p:spPr>
-        <p:txBody>
-          <a:bodyPr wrap="square" anchor="ctr" lIns="0" rIns="0" tIns="0" bIns="0">
-            <a:spAutoFit/>
-          </a:bodyPr>
-          <a:lstStyle/>
-          <a:p>
-            <a:pPr algn="ctr"/>
-            <a:r>
-              <a:rPr sz="1600" b="1">
-                <a:solidFill>
-                  <a:srgbClr val="0F1E3D"/>
-                </a:solidFill>
-                <a:latin typeface="맑은 고딕"/>
-                <a:ea typeface="맑은 고딕"/>
-              </a:rPr>
-              <a:t>F1 0.9967</a:t>
-            </a:r>
-          </a:p>
-        </p:txBody>
-      </p:sp>
-      <p:sp>
-        <p:nvSpPr>
-          <p:cNvPr id="24" name="TextBox 23"/>
-          <p:cNvSpPr txBox="1"/>
-          <p:nvPr/>
-        </p:nvSpPr>
-        <p:spPr>
-          <a:xfrm>
-            <a:off x="6492240" y="5522976"/>
-            <a:ext cx="2372868" cy="256032"/>
-          </a:xfrm>
-          <a:prstGeom prst="rect">
-            <a:avLst/>
-          </a:prstGeom>
-          <a:noFill/>
-        </p:spPr>
-        <p:txBody>
-          <a:bodyPr wrap="square" anchor="ctr" lIns="0" rIns="0" tIns="0" bIns="0">
-            <a:spAutoFit/>
-          </a:bodyPr>
-          <a:lstStyle/>
-          <a:p>
-            <a:pPr algn="ctr"/>
-            <a:r>
-              <a:rPr sz="900">
-                <a:solidFill>
-                  <a:srgbClr val="6B7280"/>
-                </a:solidFill>
-                <a:latin typeface="맑은 고딕"/>
-                <a:ea typeface="맑은 고딕"/>
-              </a:rPr>
-              <a:t>binary gate</a:t>
-            </a:r>
-          </a:p>
-        </p:txBody>
-      </p:sp>
-      <p:sp>
-        <p:nvSpPr>
-          <p:cNvPr id="25" name="Rectangle 24"/>
-          <p:cNvSpPr/>
-          <p:nvPr/>
-        </p:nvSpPr>
-        <p:spPr>
-          <a:xfrm>
-            <a:off x="9011412" y="5102352"/>
-            <a:ext cx="2372868" cy="685800"/>
-          </a:xfrm>
-          <a:prstGeom prst="rect">
-            <a:avLst/>
-          </a:prstGeom>
-          <a:solidFill>
-            <a:srgbClr val="FFFFFF"/>
-          </a:solidFill>
-          <a:ln w="12700">
-            <a:solidFill>
-              <a:srgbClr val="D7DEEA"/>
-            </a:solidFill>
-          </a:ln>
-          <a:effectLst/>
-        </p:spPr>
-        <p:style>
-          <a:lnRef idx="1">
-            <a:schemeClr val="accent1"/>
-          </a:lnRef>
-          <a:fillRef idx="3">
-            <a:schemeClr val="accent1"/>
-          </a:fillRef>
-          <a:effectRef idx="2">
-            <a:schemeClr val="accent1"/>
-          </a:effectRef>
-          <a:fontRef idx="minor">
-            <a:schemeClr val="lt1"/>
-          </a:fontRef>
-        </p:style>
-        <p:txBody>
-          <a:bodyPr rtlCol="0" anchor="ctr"/>
-          <a:lstStyle/>
-          <a:p>
-            <a:pPr algn="ctr"/>
-          </a:p>
-        </p:txBody>
-      </p:sp>
-      <p:sp>
-        <p:nvSpPr>
-          <p:cNvPr id="26" name="Rectangle 25"/>
-          <p:cNvSpPr/>
-          <p:nvPr/>
-        </p:nvSpPr>
-        <p:spPr>
-          <a:xfrm>
-            <a:off x="9011412" y="5102352"/>
-            <a:ext cx="2372868" cy="64008"/>
-          </a:xfrm>
-          <a:prstGeom prst="rect">
-            <a:avLst/>
-          </a:prstGeom>
-          <a:solidFill>
-            <a:srgbClr val="5B9BD5"/>
-          </a:solidFill>
-          <a:ln>
-            <a:noFill/>
-          </a:ln>
-          <a:effectLst/>
-        </p:spPr>
-        <p:style>
-          <a:lnRef idx="1">
-            <a:schemeClr val="accent1"/>
-          </a:lnRef>
-          <a:fillRef idx="3">
-            <a:schemeClr val="accent1"/>
-          </a:fillRef>
-          <a:effectRef idx="2">
-            <a:schemeClr val="accent1"/>
-          </a:effectRef>
-          <a:fontRef idx="minor">
-            <a:schemeClr val="lt1"/>
-          </a:fontRef>
-        </p:style>
-        <p:txBody>
-          <a:bodyPr rtlCol="0" anchor="ctr"/>
-          <a:lstStyle/>
-          <a:p>
-            <a:pPr algn="ctr"/>
-          </a:p>
-        </p:txBody>
-      </p:sp>
-      <p:sp>
-        <p:nvSpPr>
-          <p:cNvPr id="27" name="TextBox 26"/>
-          <p:cNvSpPr txBox="1"/>
-          <p:nvPr/>
-        </p:nvSpPr>
-        <p:spPr>
-          <a:xfrm>
-            <a:off x="9011412" y="5212080"/>
-            <a:ext cx="2372868" cy="329184"/>
-          </a:xfrm>
-          <a:prstGeom prst="rect">
-            <a:avLst/>
-          </a:prstGeom>
-          <a:noFill/>
-        </p:spPr>
-        <p:txBody>
-          <a:bodyPr wrap="square" anchor="ctr" lIns="0" rIns="0" tIns="0" bIns="0">
-            <a:spAutoFit/>
-          </a:bodyPr>
-          <a:lstStyle/>
-          <a:p>
-            <a:pPr algn="ctr"/>
-            <a:r>
-              <a:rPr sz="1600" b="1">
-                <a:solidFill>
-                  <a:srgbClr val="0F1E3D"/>
-                </a:solidFill>
-                <a:latin typeface="맑은 고딕"/>
-                <a:ea typeface="맑은 고딕"/>
-              </a:rPr>
-              <a:t>recall 0.9987</a:t>
-            </a:r>
-          </a:p>
-        </p:txBody>
-      </p:sp>
-      <p:sp>
-        <p:nvSpPr>
-          <p:cNvPr id="28" name="TextBox 27"/>
-          <p:cNvSpPr txBox="1"/>
-          <p:nvPr/>
-        </p:nvSpPr>
-        <p:spPr>
-          <a:xfrm>
-            <a:off x="9011412" y="5522976"/>
-            <a:ext cx="2372868" cy="256032"/>
-          </a:xfrm>
-          <a:prstGeom prst="rect">
-            <a:avLst/>
-          </a:prstGeom>
-          <a:noFill/>
-        </p:spPr>
-        <p:txBody>
-          <a:bodyPr wrap="square" anchor="ctr" lIns="0" rIns="0" tIns="0" bIns="0">
-            <a:spAutoFit/>
-          </a:bodyPr>
-          <a:lstStyle/>
-          <a:p>
-            <a:pPr algn="ctr"/>
-            <a:r>
-              <a:rPr sz="900">
-                <a:solidFill>
-                  <a:srgbClr val="6B7280"/>
-                </a:solidFill>
-                <a:latin typeface="맑은 고딕"/>
-                <a:ea typeface="맑은 고딕"/>
-              </a:rPr>
-              <a:t>abnormal</a:t>
-            </a:r>
-          </a:p>
-        </p:txBody>
-      </p:sp>
-      <p:sp>
-        <p:nvSpPr>
-          <p:cNvPr id="29" name="TextBox 28"/>
-          <p:cNvSpPr txBox="1"/>
-          <p:nvPr/>
-        </p:nvSpPr>
-        <p:spPr>
-          <a:xfrm>
-            <a:off x="457200" y="6437376"/>
-            <a:ext cx="8229600" cy="292608"/>
-          </a:xfrm>
-          <a:prstGeom prst="rect">
-            <a:avLst/>
-          </a:prstGeom>
-          <a:noFill/>
-        </p:spPr>
-        <p:txBody>
-          <a:bodyPr wrap="square" anchor="ctr" lIns="0" rIns="0" tIns="0" bIns="0">
-            <a:spAutoFit/>
-          </a:bodyPr>
-          <a:lstStyle/>
-          <a:p>
-            <a:pPr algn="l"/>
-            <a:r>
-              <a:rPr sz="900">
-                <a:solidFill>
-                  <a:srgbClr val="6B7280"/>
-                </a:solidFill>
-                <a:latin typeface="맑은 고딕"/>
-                <a:ea typeface="맑은 고딕"/>
-              </a:rPr>
-              <a:t>최호길 | QIE Data Science | AI Specialist 인증</a:t>
-            </a:r>
-          </a:p>
-        </p:txBody>
-      </p:sp>
-      <p:sp>
-        <p:nvSpPr>
-          <p:cNvPr id="30" name="TextBox 29"/>
-          <p:cNvSpPr txBox="1"/>
-          <p:nvPr/>
-        </p:nvSpPr>
-        <p:spPr>
-          <a:xfrm>
-            <a:off x="10972800" y="6437376"/>
-            <a:ext cx="758952" cy="292608"/>
-          </a:xfrm>
-          <a:prstGeom prst="rect">
-            <a:avLst/>
-          </a:prstGeom>
-          <a:noFill/>
-        </p:spPr>
-        <p:txBody>
-          <a:bodyPr wrap="square" anchor="ctr" lIns="0" rIns="0" tIns="0" bIns="0">
-            <a:spAutoFit/>
-          </a:bodyPr>
-          <a:lstStyle/>
-          <a:p>
-            <a:pPr algn="r"/>
-            <a:r>
-              <a:rPr sz="900">
-                <a:solidFill>
-                  <a:srgbClr val="6B7280"/>
-                </a:solidFill>
-                <a:latin typeface="맑은 고딕"/>
-                <a:ea typeface="맑은 고딕"/>
-              </a:rPr>
-              <a:t>5</a:t>
+              <a:t>6</a:t>
             </a:r>
           </a:p>
         </p:txBody>

--- a/recommendation/presentation/발표_P3_데이터생성_최호길.pptx
+++ b/recommendation/presentation/발표_P3_데이터생성_최호길.pptx
@@ -4834,8 +4834,8 @@
         </p:nvSpPr>
         <p:spPr>
           <a:xfrm>
-            <a:off x="2117584" y="2862216"/>
-            <a:ext cx="8017792" cy="3090384"/>
+            <a:off x="2191656" y="2862216"/>
+            <a:ext cx="7869647" cy="3090384"/>
           </a:xfrm>
           <a:prstGeom prst="rect">
             <a:avLst/>
@@ -4888,8 +4888,8 @@
         </p:blipFill>
         <p:spPr>
           <a:xfrm>
-            <a:off x="2126584" y="2871216"/>
-            <a:ext cx="7999792" cy="3072384"/>
+            <a:off x="2200656" y="2871216"/>
+            <a:ext cx="7851647" cy="3072384"/>
           </a:xfrm>
           <a:prstGeom prst="rect">
             <a:avLst/>

--- a/recommendation/presentation/발표_P3_데이터생성_최호길.pptx
+++ b/recommendation/presentation/발표_P3_데이터생성_최호길.pptx
@@ -9,8 +9,6 @@
     <p:sldId id="257" r:id="rId8"/>
     <p:sldId id="258" r:id="rId9"/>
     <p:sldId id="259" r:id="rId10"/>
-    <p:sldId id="260" r:id="rId11"/>
-    <p:sldId id="261" r:id="rId12"/>
   </p:sldIdLst>
   <p:sldSz cx="12191695" cy="6858000" type="screen4x3"/>
   <p:notesSz cx="6858000" cy="9144000"/>
@@ -4053,7 +4051,7 @@
                 <a:latin typeface="맑은 고딕"/>
                 <a:ea typeface="맑은 고딕"/>
               </a:rPr>
-              <a:t>P3 | 개요</a:t>
+              <a:t>P3 | episode 생성 방식</a:t>
             </a:r>
           </a:p>
         </p:txBody>
@@ -4089,7 +4087,7 @@
                 <a:latin typeface="맑은 고딕"/>
                 <a:ea typeface="맑은 고딕"/>
               </a:rPr>
-              <a:t>없던 검증 데이터를 현장 판정 기준으로 만들었다</a:t>
+              <a:t>현장 판정 기준을 episode(구간) 생성 규칙으로 옮겼다</a:t>
             </a:r>
           </a:p>
         </p:txBody>
@@ -4103,7 +4101,7 @@
         <p:spPr>
           <a:xfrm>
             <a:off x="640080" y="1828800"/>
-            <a:ext cx="10972800" cy="1828800"/>
+            <a:ext cx="10972800" cy="1417320"/>
           </a:xfrm>
           <a:prstGeom prst="rect">
             <a:avLst/>
@@ -4139,17 +4137,24 @@
                 <a:latin typeface="맑은 고딕"/>
                 <a:ea typeface="맑은 고딕"/>
               </a:rPr>
-              <a:t>정상 trend는 쌓여 있지만 </a:t>
-            </a:r>
-            <a:r>
-              <a:rPr sz="1400" b="1">
-                <a:solidFill>
-                  <a:srgbClr val="0F1E3D"/>
+              <a:t>한 chart는 같은 device/step/item을 여러 설비(fleet)가 함께 찍은 trend이고, 그중 한 설비를 판정 대상으로 봅니다</a:t>
+            </a:r>
+          </a:p>
+          <a:p>
+            <a:pPr marL="274320" indent="-274320">
+              <a:spcAft>
+                <a:spcPts val="500"/>
+              </a:spcAft>
+            </a:pPr>
+            <a:r>
+              <a:rPr sz="1400" b="0">
+                <a:solidFill>
+                  <a:srgbClr val="5B9BD5"/>
                 </a:solidFill>
                 <a:latin typeface="맑은 고딕"/>
                 <a:ea typeface="맑은 고딕"/>
               </a:rPr>
-              <a:t>avg / std / spike / drift / context</a:t>
+              <a:t>●  </a:t>
             </a:r>
             <a:r>
               <a:rPr sz="1400">
@@ -4159,7 +4164,7 @@
                 <a:latin typeface="맑은 고딕"/>
                 <a:ea typeface="맑은 고딕"/>
               </a:rPr>
-              <a:t> 같은 이상은 드물게 나와, 유형별로 모아 둔 검증 데이터가 거의 없습니다</a:t>
+              <a:t>정상 baseline은 episode(구간)를 이어 붙여 만듭니다. episode마다 측정 밀도(밀집/희소/결핍)와 산포가 다르고, 변동은 노이즈 3종으로 재현합니다</a:t>
             </a:r>
           </a:p>
           <a:p>
@@ -4186,104 +4191,32 @@
                 <a:latin typeface="맑은 고딕"/>
                 <a:ea typeface="맑은 고딕"/>
               </a:rPr>
-              <a:t>정답이 적어 모델 학습도, 유형별 성능 비교도 잘 서지 않는 상황입니다</a:t>
-            </a:r>
-          </a:p>
-          <a:p>
-            <a:pPr marL="274320" indent="-274320">
-              <a:spcAft>
-                <a:spcPts val="500"/>
-              </a:spcAft>
-            </a:pPr>
-            <a:r>
-              <a:rPr sz="1400" b="0">
-                <a:solidFill>
-                  <a:srgbClr val="5B9BD5"/>
-                </a:solidFill>
-                <a:latin typeface="맑은 고딕"/>
-                <a:ea typeface="맑은 고딕"/>
-              </a:rPr>
-              <a:t>●  </a:t>
-            </a:r>
-            <a:r>
-              <a:rPr sz="1400">
-                <a:solidFill>
-                  <a:srgbClr val="1A1F2E"/>
-                </a:solidFill>
-                <a:latin typeface="맑은 고딕"/>
-                <a:ea typeface="맑은 고딕"/>
-              </a:rPr>
-              <a:t>본인이 BBD담당, Overlay담당, CD담당으로 trend를 보던 판정 기준을 </a:t>
-            </a:r>
-            <a:r>
-              <a:rPr sz="1400" b="1">
-                <a:solidFill>
-                  <a:srgbClr val="0F1E3D"/>
-                </a:solidFill>
-                <a:latin typeface="맑은 고딕"/>
-                <a:ea typeface="맑은 고딕"/>
-              </a:rPr>
-              <a:t>생성 규칙으로 옮겨</a:t>
-            </a:r>
-            <a:r>
-              <a:rPr sz="1400">
-                <a:solidFill>
-                  <a:srgbClr val="1A1F2E"/>
-                </a:solidFill>
-                <a:latin typeface="맑은 고딕"/>
-                <a:ea typeface="맑은 고딕"/>
-              </a:rPr>
-              <a:t>, 부족한 이상을 직접 만들어 검증 가능한 데이터를 확보했습니다</a:t>
-            </a:r>
-          </a:p>
-          <a:p>
-            <a:pPr marL="420624" indent="-420624" lvl="1">
-              <a:spcAft>
-                <a:spcPts val="500"/>
-              </a:spcAft>
-            </a:pPr>
-            <a:r>
-              <a:rPr sz="1300" b="0">
-                <a:solidFill>
-                  <a:srgbClr val="6E7B8E"/>
-                </a:solidFill>
-                <a:latin typeface="맑은 고딕"/>
-                <a:ea typeface="맑은 고딕"/>
-              </a:rPr>
-              <a:t>–  </a:t>
-            </a:r>
-            <a:r>
-              <a:rPr sz="1300">
-                <a:solidFill>
-                  <a:srgbClr val="4A5666"/>
-                </a:solidFill>
-                <a:latin typeface="맑은 고딕"/>
-                <a:ea typeface="맑은 고딕"/>
-              </a:rPr>
-              <a:t>성능 수치가 아니라, 없던 검증 데이터를 도메인 지식으로 메운 것이 핵심입니다</a:t>
-            </a:r>
-          </a:p>
-        </p:txBody>
-      </p:sp>
-      <p:sp>
-        <p:nvSpPr>
-          <p:cNvPr id="6" name="Rounded Rectangle 5"/>
+              <a:t>episode는 사내 표현이고, 학계 표준 용어로는 piecewise-stationary / regime segment입니다</a:t>
+            </a:r>
+          </a:p>
+        </p:txBody>
+      </p:sp>
+      <p:sp>
+        <p:nvSpPr>
+          <p:cNvPr id="6" name="Rectangle 5"/>
           <p:cNvSpPr/>
           <p:nvPr/>
         </p:nvSpPr>
         <p:spPr>
           <a:xfrm>
-            <a:off x="7406640" y="3931920"/>
-            <a:ext cx="4206240" cy="384048"/>
-          </a:xfrm>
-          <a:prstGeom prst="roundRect">
+            <a:off x="2834276" y="3365136"/>
+            <a:ext cx="6584407" cy="2587464"/>
+          </a:xfrm>
+          <a:prstGeom prst="rect">
             <a:avLst/>
           </a:prstGeom>
           <a:solidFill>
-            <a:srgbClr val="E6F7F6"/>
+            <a:srgbClr val="FFFFFF"/>
           </a:solidFill>
-          <a:ln>
-            <a:noFill/>
+          <a:ln w="12700">
+            <a:solidFill>
+              <a:srgbClr val="D7DEEA"/>
+            </a:solidFill>
           </a:ln>
           <a:effectLst/>
         </p:spPr>
@@ -4309,135 +4242,9 @@
           </a:p>
         </p:txBody>
       </p:sp>
-      <p:sp>
-        <p:nvSpPr>
-          <p:cNvPr id="7" name="Rectangle 6"/>
-          <p:cNvSpPr/>
-          <p:nvPr/>
-        </p:nvSpPr>
-        <p:spPr>
-          <a:xfrm>
-            <a:off x="7406640" y="3931920"/>
-            <a:ext cx="82296" cy="384048"/>
-          </a:xfrm>
-          <a:prstGeom prst="rect">
-            <a:avLst/>
-          </a:prstGeom>
-          <a:solidFill>
-            <a:srgbClr val="5B9BD5"/>
-          </a:solidFill>
-          <a:ln>
-            <a:noFill/>
-          </a:ln>
-          <a:effectLst/>
-        </p:spPr>
-        <p:style>
-          <a:lnRef idx="1">
-            <a:schemeClr val="accent1"/>
-          </a:lnRef>
-          <a:fillRef idx="3">
-            <a:schemeClr val="accent1"/>
-          </a:fillRef>
-          <a:effectRef idx="2">
-            <a:schemeClr val="accent1"/>
-          </a:effectRef>
-          <a:fontRef idx="minor">
-            <a:schemeClr val="lt1"/>
-          </a:fontRef>
-        </p:style>
-        <p:txBody>
-          <a:bodyPr rtlCol="0" anchor="ctr"/>
-          <a:lstStyle/>
-          <a:p>
-            <a:pPr algn="ctr"/>
-          </a:p>
-        </p:txBody>
-      </p:sp>
-      <p:sp>
-        <p:nvSpPr>
-          <p:cNvPr id="8" name="TextBox 7"/>
-          <p:cNvSpPr txBox="1"/>
-          <p:nvPr/>
-        </p:nvSpPr>
-        <p:spPr>
-          <a:xfrm>
-            <a:off x="7589520" y="3931920"/>
-            <a:ext cx="3877056" cy="384048"/>
-          </a:xfrm>
-          <a:prstGeom prst="rect">
-            <a:avLst/>
-          </a:prstGeom>
-          <a:noFill/>
-        </p:spPr>
-        <p:txBody>
-          <a:bodyPr wrap="square" anchor="ctr" lIns="0" rIns="0" tIns="0" bIns="0">
-            <a:spAutoFit/>
-          </a:bodyPr>
-          <a:lstStyle/>
-          <a:p>
-            <a:pPr algn="ctr"/>
-            <a:r>
-              <a:rPr sz="1350" b="1">
-                <a:solidFill>
-                  <a:srgbClr val="0F1E3D"/>
-                </a:solidFill>
-                <a:latin typeface="맑은 고딕"/>
-                <a:ea typeface="맑은 고딕"/>
-              </a:rPr>
-              <a:t>이상 5종 생성 규칙 + 검증셋 확보</a:t>
-            </a:r>
-          </a:p>
-        </p:txBody>
-      </p:sp>
-      <p:sp>
-        <p:nvSpPr>
-          <p:cNvPr id="9" name="Rectangle 8"/>
-          <p:cNvSpPr/>
-          <p:nvPr/>
-        </p:nvSpPr>
-        <p:spPr>
-          <a:xfrm>
-            <a:off x="2211363" y="4361832"/>
-            <a:ext cx="7830233" cy="1590768"/>
-          </a:xfrm>
-          <a:prstGeom prst="rect">
-            <a:avLst/>
-          </a:prstGeom>
-          <a:solidFill>
-            <a:srgbClr val="FFFFFF"/>
-          </a:solidFill>
-          <a:ln w="12700">
-            <a:solidFill>
-              <a:srgbClr val="D7DEEA"/>
-            </a:solidFill>
-          </a:ln>
-          <a:effectLst/>
-        </p:spPr>
-        <p:style>
-          <a:lnRef idx="1">
-            <a:schemeClr val="accent1"/>
-          </a:lnRef>
-          <a:fillRef idx="3">
-            <a:schemeClr val="accent1"/>
-          </a:fillRef>
-          <a:effectRef idx="2">
-            <a:schemeClr val="accent1"/>
-          </a:effectRef>
-          <a:fontRef idx="minor">
-            <a:schemeClr val="lt1"/>
-          </a:fontRef>
-        </p:style>
-        <p:txBody>
-          <a:bodyPr rtlCol="0" anchor="ctr"/>
-          <a:lstStyle/>
-          <a:p>
-            <a:pPr algn="ctr"/>
-          </a:p>
-        </p:txBody>
-      </p:sp>
       <p:pic>
         <p:nvPicPr>
-          <p:cNvPr id="10" name="Picture 9" descr="p3_deck_anomaly.png"/>
+          <p:cNvPr id="7" name="Picture 6" descr="p3_deck_baseline.png"/>
           <p:cNvPicPr>
             <a:picLocks noChangeAspect="1"/>
           </p:cNvPicPr>
@@ -4451,8 +4258,8 @@
         </p:blipFill>
         <p:spPr>
           <a:xfrm>
-            <a:off x="2220363" y="4370832"/>
-            <a:ext cx="7812233" cy="1572768"/>
+            <a:off x="2843276" y="3374136"/>
+            <a:ext cx="6566407" cy="2569464"/>
           </a:xfrm>
           <a:prstGeom prst="rect">
             <a:avLst/>
@@ -4461,7 +4268,7 @@
       </p:pic>
       <p:sp>
         <p:nvSpPr>
-          <p:cNvPr id="11" name="TextBox 10"/>
+          <p:cNvPr id="8" name="TextBox 7"/>
           <p:cNvSpPr txBox="1"/>
           <p:nvPr/>
         </p:nvSpPr>
@@ -4490,14 +4297,14 @@
                 <a:latin typeface="맑은 고딕"/>
                 <a:ea typeface="맑은 고딕"/>
               </a:rPr>
-              <a:t>현장에서 보던 이상 5종(평균 이동 / 산포 확대 / 순간 급등 / 선형 상승 / fleet 대비 이탈)을 생성 규칙으로 코드화</a:t>
-            </a:r>
-          </a:p>
-        </p:txBody>
-      </p:sp>
-      <p:sp>
-        <p:nvSpPr>
-          <p:cNvPr id="12" name="TextBox 11"/>
+              <a:t>현업(BBD / Overlay / CD) trend 판정 경험을 영역, 노이즈, 이상 규칙으로 코드화</a:t>
+            </a:r>
+          </a:p>
+        </p:txBody>
+      </p:sp>
+      <p:sp>
+        <p:nvSpPr>
+          <p:cNvPr id="9" name="TextBox 8"/>
           <p:cNvSpPr txBox="1"/>
           <p:nvPr/>
         </p:nvSpPr>
@@ -4533,7 +4340,7 @@
       </p:sp>
       <p:sp>
         <p:nvSpPr>
-          <p:cNvPr id="13" name="TextBox 12"/>
+          <p:cNvPr id="10" name="TextBox 9"/>
           <p:cNvSpPr txBox="1"/>
           <p:nvPr/>
         </p:nvSpPr>
@@ -4668,7 +4475,7 @@
                 <a:latin typeface="맑은 고딕"/>
                 <a:ea typeface="맑은 고딕"/>
               </a:rPr>
-              <a:t>P3 | 정상 baseline 생성</a:t>
+              <a:t>P3 | 생성 데이터</a:t>
             </a:r>
           </a:p>
         </p:txBody>
@@ -4704,7 +4511,7 @@
                 <a:latin typeface="맑은 고딕"/>
                 <a:ea typeface="맑은 고딕"/>
               </a:rPr>
-              <a:t>측정 밀도(영역)와 계측 변동(노이즈)으로 정상 baseline을 만든다</a:t>
+              <a:t>정상 baseline 위에 이상 5종을 현장 발생 방식대로 합성</a:t>
             </a:r>
           </a:p>
         </p:txBody>
@@ -4718,7 +4525,7 @@
         <p:spPr>
           <a:xfrm>
             <a:off x="640080" y="1828800"/>
-            <a:ext cx="10972800" cy="914400"/>
+            <a:ext cx="10972800" cy="1097280"/>
           </a:xfrm>
           <a:prstGeom prst="rect">
             <a:avLst/>
@@ -4754,99 +4561,57 @@
                 <a:latin typeface="맑은 고딕"/>
                 <a:ea typeface="맑은 고딕"/>
               </a:rPr>
-              <a:t>측정 빈도에 따라 </a:t>
-            </a:r>
-            <a:r>
-              <a:rPr sz="1450" b="1">
-                <a:solidFill>
-                  <a:srgbClr val="0F1E3D"/>
-                </a:solidFill>
-                <a:latin typeface="맑은 고딕"/>
-                <a:ea typeface="맑은 고딕"/>
-              </a:rPr>
-              <a:t>밀집 / 희소 / 결핍</a:t>
-            </a:r>
-            <a:r>
-              <a:rPr sz="1450">
-                <a:solidFill>
-                  <a:srgbClr val="1A1F2E"/>
-                </a:solidFill>
-                <a:latin typeface="맑은 고딕"/>
-                <a:ea typeface="맑은 고딕"/>
-              </a:rPr>
-              <a:t> 영역이 갈리는 실제 trend 구조를 episode 단위로 재현했습니다</a:t>
-            </a:r>
-          </a:p>
-          <a:p>
-            <a:pPr marL="274320" indent="-274320">
+              <a:t>정상(Normal)에 더해 Mean shift / Variance / Spike / Trend drift / Contextual 5종을 만듭니다. 이상은 주로 trend 오른쪽 끝 구간에 주입하고(분홍 음영), context만 전체가 fleet에서 벗어납니다</a:t>
+            </a:r>
+          </a:p>
+          <a:p>
+            <a:pPr marL="420624" indent="-420624" lvl="1">
               <a:spcAft>
                 <a:spcPts val="500"/>
               </a:spcAft>
             </a:pPr>
             <a:r>
-              <a:rPr sz="1450" b="0">
-                <a:solidFill>
-                  <a:srgbClr val="5B9BD5"/>
+              <a:rPr sz="1350" b="0">
+                <a:solidFill>
+                  <a:srgbClr val="6E7B8E"/>
                 </a:solidFill>
                 <a:latin typeface="맑은 고딕"/>
                 <a:ea typeface="맑은 고딕"/>
               </a:rPr>
-              <a:t>●  </a:t>
-            </a:r>
-            <a:r>
-              <a:rPr sz="1450">
-                <a:solidFill>
-                  <a:srgbClr val="1A1F2E"/>
+              <a:t>–  </a:t>
+            </a:r>
+            <a:r>
+              <a:rPr sz="1350">
+                <a:solidFill>
+                  <a:srgbClr val="4A5666"/>
                 </a:solidFill>
                 <a:latin typeface="맑은 고딕"/>
                 <a:ea typeface="맑은 고딕"/>
               </a:rPr>
-              <a:t>계측 변동은 설비 거동에 맞춰 </a:t>
-            </a:r>
-            <a:r>
-              <a:rPr sz="1450" b="1">
-                <a:solidFill>
-                  <a:srgbClr val="0F1E3D"/>
-                </a:solidFill>
-                <a:latin typeface="맑은 고딕"/>
-                <a:ea typeface="맑은 고딕"/>
-              </a:rPr>
-              <a:t>3종 노이즈</a:t>
-            </a:r>
-            <a:r>
-              <a:rPr sz="1450">
-                <a:solidFill>
-                  <a:srgbClr val="1A1F2E"/>
-                </a:solidFill>
-                <a:latin typeface="맑은 고딕"/>
-                <a:ea typeface="맑은 고딕"/>
-              </a:rPr>
-              <a:t>로 나눴습니다 — 기본 산포(Gaussian), 설비 상태변동(Correlated AR), 계측 헌팅(Laplacian)</a:t>
-            </a:r>
-          </a:p>
-        </p:txBody>
-      </p:sp>
-      <p:sp>
-        <p:nvSpPr>
-          <p:cNvPr id="6" name="Rectangle 5"/>
+              <a:t>이상 강도는 그 설비의 정상 산포(σ) 배수로 정해 너무 약해 보이지 않게 보정합니다</a:t>
+            </a:r>
+          </a:p>
+        </p:txBody>
+      </p:sp>
+      <p:sp>
+        <p:nvSpPr>
+          <p:cNvPr id="6" name="Rounded Rectangle 5"/>
           <p:cNvSpPr/>
           <p:nvPr/>
         </p:nvSpPr>
         <p:spPr>
           <a:xfrm>
-            <a:off x="2191656" y="2862216"/>
-            <a:ext cx="7869647" cy="3090384"/>
-          </a:xfrm>
-          <a:prstGeom prst="rect">
+            <a:off x="7406640" y="3200400"/>
+            <a:ext cx="4206240" cy="384048"/>
+          </a:xfrm>
+          <a:prstGeom prst="roundRect">
             <a:avLst/>
           </a:prstGeom>
           <a:solidFill>
-            <a:srgbClr val="FFFFFF"/>
+            <a:srgbClr val="E6F7F6"/>
           </a:solidFill>
-          <a:ln w="12700">
-            <a:solidFill>
-              <a:srgbClr val="D7DEEA"/>
-            </a:solidFill>
+          <a:ln>
+            <a:noFill/>
           </a:ln>
           <a:effectLst/>
         </p:spPr>
@@ -4872,9 +4637,135 @@
           </a:p>
         </p:txBody>
       </p:sp>
+      <p:sp>
+        <p:nvSpPr>
+          <p:cNvPr id="7" name="Rectangle 6"/>
+          <p:cNvSpPr/>
+          <p:nvPr/>
+        </p:nvSpPr>
+        <p:spPr>
+          <a:xfrm>
+            <a:off x="7406640" y="3200400"/>
+            <a:ext cx="82296" cy="384048"/>
+          </a:xfrm>
+          <a:prstGeom prst="rect">
+            <a:avLst/>
+          </a:prstGeom>
+          <a:solidFill>
+            <a:srgbClr val="5B9BD5"/>
+          </a:solidFill>
+          <a:ln>
+            <a:noFill/>
+          </a:ln>
+          <a:effectLst/>
+        </p:spPr>
+        <p:style>
+          <a:lnRef idx="1">
+            <a:schemeClr val="accent1"/>
+          </a:lnRef>
+          <a:fillRef idx="3">
+            <a:schemeClr val="accent1"/>
+          </a:fillRef>
+          <a:effectRef idx="2">
+            <a:schemeClr val="accent1"/>
+          </a:effectRef>
+          <a:fontRef idx="minor">
+            <a:schemeClr val="lt1"/>
+          </a:fontRef>
+        </p:style>
+        <p:txBody>
+          <a:bodyPr rtlCol="0" anchor="ctr"/>
+          <a:lstStyle/>
+          <a:p>
+            <a:pPr algn="ctr"/>
+          </a:p>
+        </p:txBody>
+      </p:sp>
+      <p:sp>
+        <p:nvSpPr>
+          <p:cNvPr id="8" name="TextBox 7"/>
+          <p:cNvSpPr txBox="1"/>
+          <p:nvPr/>
+        </p:nvSpPr>
+        <p:spPr>
+          <a:xfrm>
+            <a:off x="7589520" y="3200400"/>
+            <a:ext cx="3877056" cy="384048"/>
+          </a:xfrm>
+          <a:prstGeom prst="rect">
+            <a:avLst/>
+          </a:prstGeom>
+          <a:noFill/>
+        </p:spPr>
+        <p:txBody>
+          <a:bodyPr wrap="square" anchor="ctr" lIns="0" rIns="0" tIns="0" bIns="0">
+            <a:spAutoFit/>
+          </a:bodyPr>
+          <a:lstStyle/>
+          <a:p>
+            <a:pPr algn="ctr"/>
+            <a:r>
+              <a:rPr sz="1350" b="1">
+                <a:solidFill>
+                  <a:srgbClr val="0F1E3D"/>
+                </a:solidFill>
+                <a:latin typeface="맑은 고딕"/>
+                <a:ea typeface="맑은 고딕"/>
+              </a:rPr>
+              <a:t>정상 3,500 + 이상 3,500 = 7,000</a:t>
+            </a:r>
+          </a:p>
+        </p:txBody>
+      </p:sp>
+      <p:sp>
+        <p:nvSpPr>
+          <p:cNvPr id="9" name="Rectangle 8"/>
+          <p:cNvSpPr/>
+          <p:nvPr/>
+        </p:nvSpPr>
+        <p:spPr>
+          <a:xfrm>
+            <a:off x="3467549" y="3630312"/>
+            <a:ext cx="5317862" cy="2322288"/>
+          </a:xfrm>
+          <a:prstGeom prst="rect">
+            <a:avLst/>
+          </a:prstGeom>
+          <a:solidFill>
+            <a:srgbClr val="FFFFFF"/>
+          </a:solidFill>
+          <a:ln w="12700">
+            <a:solidFill>
+              <a:srgbClr val="D7DEEA"/>
+            </a:solidFill>
+          </a:ln>
+          <a:effectLst/>
+        </p:spPr>
+        <p:style>
+          <a:lnRef idx="1">
+            <a:schemeClr val="accent1"/>
+          </a:lnRef>
+          <a:fillRef idx="3">
+            <a:schemeClr val="accent1"/>
+          </a:fillRef>
+          <a:effectRef idx="2">
+            <a:schemeClr val="accent1"/>
+          </a:effectRef>
+          <a:fontRef idx="minor">
+            <a:schemeClr val="lt1"/>
+          </a:fontRef>
+        </p:style>
+        <p:txBody>
+          <a:bodyPr rtlCol="0" anchor="ctr"/>
+          <a:lstStyle/>
+          <a:p>
+            <a:pPr algn="ctr"/>
+          </a:p>
+        </p:txBody>
+      </p:sp>
       <p:pic>
         <p:nvPicPr>
-          <p:cNvPr id="7" name="Picture 6" descr="p3_deck_baseline.png"/>
+          <p:cNvPr id="10" name="Picture 9" descr="p3_deck_types.png"/>
           <p:cNvPicPr>
             <a:picLocks noChangeAspect="1"/>
           </p:cNvPicPr>
@@ -4888,8 +4779,8 @@
         </p:blipFill>
         <p:spPr>
           <a:xfrm>
-            <a:off x="2200656" y="2871216"/>
-            <a:ext cx="7851647" cy="3072384"/>
+            <a:off x="3476549" y="3639312"/>
+            <a:ext cx="5299862" cy="2304288"/>
           </a:xfrm>
           <a:prstGeom prst="rect">
             <a:avLst/>
@@ -4898,7 +4789,7 @@
       </p:pic>
       <p:sp>
         <p:nvSpPr>
-          <p:cNvPr id="8" name="TextBox 7"/>
+          <p:cNvPr id="11" name="TextBox 10"/>
           <p:cNvSpPr txBox="1"/>
           <p:nvPr/>
         </p:nvSpPr>
@@ -4927,14 +4818,14 @@
                 <a:latin typeface="맑은 고딕"/>
                 <a:ea typeface="맑은 고딕"/>
               </a:rPr>
-              <a:t>측정 빈도에 따라 영역 밀도를 다르게 주고, 신호 자체는 평탄하게 둔 채 변동은 노이즈로만 만들어 실제 계측과 비슷하게 했습니다</a:t>
-            </a:r>
-          </a:p>
-        </p:txBody>
-      </p:sp>
-      <p:sp>
-        <p:nvSpPr>
-          <p:cNvPr id="9" name="TextBox 8"/>
+              <a:t>회색 = 다른 설비(fleet), 파랑 = 판정 대상 정상, 빨강 = 주입된 이상, 분홍 음영 = 이상 구간</a:t>
+            </a:r>
+          </a:p>
+        </p:txBody>
+      </p:sp>
+      <p:sp>
+        <p:nvSpPr>
+          <p:cNvPr id="12" name="TextBox 11"/>
           <p:cNvSpPr txBox="1"/>
           <p:nvPr/>
         </p:nvSpPr>
@@ -4970,7 +4861,7 @@
       </p:sp>
       <p:sp>
         <p:nvSpPr>
-          <p:cNvPr id="10" name="TextBox 9"/>
+          <p:cNvPr id="13" name="TextBox 12"/>
           <p:cNvSpPr txBox="1"/>
           <p:nvPr/>
         </p:nvSpPr>
@@ -5105,7 +4996,7 @@
                 <a:latin typeface="맑은 고딕"/>
                 <a:ea typeface="맑은 고딕"/>
               </a:rPr>
-              <a:t>P3 | 이상 합성</a:t>
+              <a:t>P3 | 1차 binary gate (PoC)</a:t>
             </a:r>
           </a:p>
         </p:txBody>
@@ -5141,7 +5032,7 @@
                 <a:latin typeface="맑은 고딕"/>
                 <a:ea typeface="맑은 고딕"/>
               </a:rPr>
-              <a:t>정상 baseline 위에 이상 5종을 현장 발생 방식대로 합성</a:t>
+              <a:t>생성 데이터로 검증 — test 1,500 중 놓친 불량 1건</a:t>
             </a:r>
           </a:p>
         </p:txBody>
@@ -5155,7 +5046,7 @@
         <p:spPr>
           <a:xfrm>
             <a:off x="640080" y="1828800"/>
-            <a:ext cx="10972800" cy="1097280"/>
+            <a:ext cx="10972800" cy="1463040"/>
           </a:xfrm>
           <a:prstGeom prst="rect">
             <a:avLst/>
@@ -5174,7 +5065,7 @@
               </a:spcAft>
             </a:pPr>
             <a:r>
-              <a:rPr sz="1450" b="0">
+              <a:rPr sz="1400" b="0">
                 <a:solidFill>
                   <a:srgbClr val="5B9BD5"/>
                 </a:solidFill>
@@ -5184,104 +5075,81 @@
               <a:t>●  </a:t>
             </a:r>
             <a:r>
-              <a:rPr sz="1450" b="1">
-                <a:solidFill>
-                  <a:srgbClr val="0F1E3D"/>
+              <a:rPr sz="1400">
+                <a:solidFill>
+                  <a:srgbClr val="1A1F2E"/>
                 </a:solidFill>
                 <a:latin typeface="맑은 고딕"/>
                 <a:ea typeface="맑은 고딕"/>
               </a:rPr>
-              <a:t>avg</a:t>
-            </a:r>
-            <a:r>
-              <a:rPr sz="1450">
-                <a:solidFill>
-                  <a:srgbClr val="1A1F2E"/>
+              <a:t>trend 이미지를 </a:t>
+            </a:r>
+            <a:r>
+              <a:rPr sz="1400" b="1">
+                <a:solidFill>
+                  <a:srgbClr val="0F1E3D"/>
                 </a:solidFill>
                 <a:latin typeface="맑은 고딕"/>
                 <a:ea typeface="맑은 고딕"/>
               </a:rPr>
-              <a:t> 평균 이동, </a:t>
-            </a:r>
-            <a:r>
-              <a:rPr sz="1450" b="1">
-                <a:solidFill>
-                  <a:srgbClr val="0F1E3D"/>
+              <a:t>ConvNeXtV2-Tiny</a:t>
+            </a:r>
+            <a:r>
+              <a:rPr sz="1400">
+                <a:solidFill>
+                  <a:srgbClr val="1A1F2E"/>
                 </a:solidFill>
                 <a:latin typeface="맑은 고딕"/>
                 <a:ea typeface="맑은 고딕"/>
               </a:rPr>
-              <a:t>std</a:t>
-            </a:r>
-            <a:r>
-              <a:rPr sz="1450">
-                <a:solidFill>
-                  <a:srgbClr val="1A1F2E"/>
+              <a:t>로 정상/이상 1차 판정하고(Focal loss, normal threshold 0.9), 놓침(FN) 최소화를 목표로 했습니다</a:t>
+            </a:r>
+          </a:p>
+          <a:p>
+            <a:pPr marL="274320" indent="-274320">
+              <a:spcAft>
+                <a:spcPts val="500"/>
+              </a:spcAft>
+            </a:pPr>
+            <a:r>
+              <a:rPr sz="1400" b="0">
+                <a:solidFill>
+                  <a:srgbClr val="5B9BD5"/>
                 </a:solidFill>
                 <a:latin typeface="맑은 고딕"/>
                 <a:ea typeface="맑은 고딕"/>
               </a:rPr>
-              <a:t> 산포 확대, </a:t>
-            </a:r>
-            <a:r>
-              <a:rPr sz="1450" b="1">
-                <a:solidFill>
-                  <a:srgbClr val="0F1E3D"/>
+              <a:t>●  </a:t>
+            </a:r>
+            <a:r>
+              <a:rPr sz="1400">
+                <a:solidFill>
+                  <a:srgbClr val="1A1F2E"/>
                 </a:solidFill>
                 <a:latin typeface="맑은 고딕"/>
                 <a:ea typeface="맑은 고딕"/>
               </a:rPr>
-              <a:t>spike</a:t>
-            </a:r>
-            <a:r>
-              <a:rPr sz="1450">
-                <a:solidFill>
-                  <a:srgbClr val="1A1F2E"/>
+              <a:t>test 1,500(정상 750 / 불량 750)에서 </a:t>
+            </a:r>
+            <a:r>
+              <a:rPr sz="1400" b="1">
+                <a:solidFill>
+                  <a:srgbClr val="0F1E3D"/>
                 </a:solidFill>
                 <a:latin typeface="맑은 고딕"/>
                 <a:ea typeface="맑은 고딕"/>
               </a:rPr>
-              <a:t> 순간 급등, </a:t>
-            </a:r>
-            <a:r>
-              <a:rPr sz="1450" b="1">
-                <a:solidFill>
-                  <a:srgbClr val="0F1E3D"/>
+              <a:t>binary F1 0.9967, 이상 recall 0.9987</a:t>
+            </a:r>
+            <a:r>
+              <a:rPr sz="1400">
+                <a:solidFill>
+                  <a:srgbClr val="1A1F2E"/>
                 </a:solidFill>
                 <a:latin typeface="맑은 고딕"/>
                 <a:ea typeface="맑은 고딕"/>
               </a:rPr>
-              <a:t>drift</a:t>
-            </a:r>
-            <a:r>
-              <a:rPr sz="1450">
-                <a:solidFill>
-                  <a:srgbClr val="1A1F2E"/>
-                </a:solidFill>
-                <a:latin typeface="맑은 고딕"/>
-                <a:ea typeface="맑은 고딕"/>
-              </a:rPr>
-              <a:t> 선형 상승, </a:t>
-            </a:r>
-            <a:r>
-              <a:rPr sz="1450" b="1">
-                <a:solidFill>
-                  <a:srgbClr val="0F1E3D"/>
-                </a:solidFill>
-                <a:latin typeface="맑은 고딕"/>
-                <a:ea typeface="맑은 고딕"/>
-              </a:rPr>
-              <a:t>context</a:t>
-            </a:r>
-            <a:r>
-              <a:rPr sz="1450">
-                <a:solidFill>
-                  <a:srgbClr val="1A1F2E"/>
-                </a:solidFill>
-                <a:latin typeface="맑은 고딕"/>
-                <a:ea typeface="맑은 고딕"/>
-              </a:rPr>
-              <a:t> fleet 대비 전체 이탈 — 5종을 trend 뒤쪽 구간에 주입합니다</a:t>
+              <a:t> — 놓친 불량 1건(std), 정상 오경보 4건. 5-seed 평균 F1 0.9975</a:t>
             </a:r>
           </a:p>
           <a:p>
@@ -5291,7 +5159,7 @@
               </a:spcAft>
             </a:pPr>
             <a:r>
-              <a:rPr sz="1350" b="0">
+              <a:rPr sz="1300" b="0">
                 <a:solidFill>
                   <a:srgbClr val="6E7B8E"/>
                 </a:solidFill>
@@ -5301,14 +5169,14 @@
               <a:t>–  </a:t>
             </a:r>
             <a:r>
-              <a:rPr sz="1350">
+              <a:rPr sz="1300">
                 <a:solidFill>
                   <a:srgbClr val="4A5666"/>
                 </a:solidFill>
                 <a:latin typeface="맑은 고딕"/>
                 <a:ea typeface="맑은 고딕"/>
               </a:rPr>
-              <a:t>이상 강도는 정상 산포 기준 최소 강도로 보정해, 너무 약해 보이지 않게 둡니다</a:t>
+              <a:t>통과한 불량은 2차에서 유형 진단(type 정확도 0.73, 주 혼동 drift↔mean_shift). NT를 올리면 FN↓ / FP↑ — 운영은 0.9 균형점</a:t>
             </a:r>
           </a:p>
         </p:txBody>
@@ -5321,8 +5189,8 @@
         </p:nvSpPr>
         <p:spPr>
           <a:xfrm>
-            <a:off x="7406640" y="3200400"/>
-            <a:ext cx="4206240" cy="384048"/>
+            <a:off x="7150608" y="3566160"/>
+            <a:ext cx="4462272" cy="384048"/>
           </a:xfrm>
           <a:prstGeom prst="roundRect">
             <a:avLst/>
@@ -5365,7 +5233,7 @@
         </p:nvSpPr>
         <p:spPr>
           <a:xfrm>
-            <a:off x="7406640" y="3200400"/>
+            <a:off x="7150608" y="3566160"/>
             <a:ext cx="82296" cy="384048"/>
           </a:xfrm>
           <a:prstGeom prst="rect">
@@ -5409,8 +5277,8 @@
         </p:nvSpPr>
         <p:spPr>
           <a:xfrm>
-            <a:off x="7589520" y="3200400"/>
-            <a:ext cx="3877056" cy="384048"/>
+            <a:off x="7333488" y="3566160"/>
+            <a:ext cx="4133088" cy="384048"/>
           </a:xfrm>
           <a:prstGeom prst="rect">
             <a:avLst/>
@@ -5432,7 +5300,7 @@
                 <a:latin typeface="맑은 고딕"/>
                 <a:ea typeface="맑은 고딕"/>
               </a:rPr>
-              <a:t>정상 3,500 + 이상 3,500 = 7,000</a:t>
+              <a:t>F1 0.9967 / recall 0.9987 (생성셋 PoC)</a:t>
             </a:r>
           </a:p>
         </p:txBody>
@@ -5445,8 +5313,8 @@
         </p:nvSpPr>
         <p:spPr>
           <a:xfrm>
-            <a:off x="1097424" y="3630312"/>
-            <a:ext cx="3090384" cy="1993104"/>
+            <a:off x="2486566" y="3996072"/>
+            <a:ext cx="7279827" cy="1956528"/>
           </a:xfrm>
           <a:prstGeom prst="rect">
             <a:avLst/>
@@ -5485,7 +5353,7 @@
       </p:sp>
       <p:pic>
         <p:nvPicPr>
-          <p:cNvPr id="10" name="Picture 9" descr="trend_mean_shift.png"/>
+          <p:cNvPr id="10" name="Picture 9" descr="p3_deck_result.png"/>
           <p:cNvPicPr>
             <a:picLocks noChangeAspect="1"/>
           </p:cNvPicPr>
@@ -5499,8 +5367,8 @@
         </p:blipFill>
         <p:spPr>
           <a:xfrm>
-            <a:off x="1106424" y="3639312"/>
-            <a:ext cx="3072384" cy="1975104"/>
+            <a:off x="2495566" y="4005072"/>
+            <a:ext cx="7261827" cy="1938528"/>
           </a:xfrm>
           <a:prstGeom prst="rect">
             <a:avLst/>
@@ -5515,8 +5383,8 @@
         </p:nvSpPr>
         <p:spPr>
           <a:xfrm>
-            <a:off x="900684" y="5614416"/>
-            <a:ext cx="3483864" cy="329184"/>
+            <a:off x="640080" y="5961888"/>
+            <a:ext cx="10972800" cy="274320"/>
           </a:xfrm>
           <a:prstGeom prst="rect">
             <a:avLst/>
@@ -5524,105 +5392,35 @@
           <a:noFill/>
         </p:spPr>
         <p:txBody>
-          <a:bodyPr wrap="square" anchor="ctr" lIns="0" rIns="0" tIns="0" bIns="0">
+          <a:bodyPr wrap="square" anchor="t" lIns="0" rIns="0" tIns="0" bIns="0">
             <a:spAutoFit/>
           </a:bodyPr>
           <a:lstStyle/>
           <a:p>
             <a:pPr algn="ctr"/>
             <a:r>
-              <a:rPr sz="1450" b="1">
-                <a:solidFill>
-                  <a:srgbClr val="0F1E3D"/>
+              <a:rPr sz="1300">
+                <a:solidFill>
+                  <a:srgbClr val="3A485C"/>
                 </a:solidFill>
                 <a:latin typeface="맑은 고딕"/>
                 <a:ea typeface="맑은 고딕"/>
               </a:rPr>
-              <a:t>avg — 평균이 한 단계 이동</a:t>
-            </a:r>
-          </a:p>
-        </p:txBody>
-      </p:sp>
-      <p:sp>
-        <p:nvSpPr>
-          <p:cNvPr id="12" name="Rectangle 11"/>
-          <p:cNvSpPr/>
-          <p:nvPr/>
-        </p:nvSpPr>
-        <p:spPr>
-          <a:xfrm>
-            <a:off x="4581288" y="3630312"/>
-            <a:ext cx="3090384" cy="1993104"/>
-          </a:xfrm>
-          <a:prstGeom prst="rect">
-            <a:avLst/>
-          </a:prstGeom>
-          <a:solidFill>
-            <a:srgbClr val="FFFFFF"/>
-          </a:solidFill>
-          <a:ln w="12700">
-            <a:solidFill>
-              <a:srgbClr val="D7DEEA"/>
-            </a:solidFill>
-          </a:ln>
-          <a:effectLst/>
-        </p:spPr>
-        <p:style>
-          <a:lnRef idx="1">
-            <a:schemeClr val="accent1"/>
-          </a:lnRef>
-          <a:fillRef idx="3">
-            <a:schemeClr val="accent1"/>
-          </a:fillRef>
-          <a:effectRef idx="2">
-            <a:schemeClr val="accent1"/>
-          </a:effectRef>
-          <a:fontRef idx="minor">
-            <a:schemeClr val="lt1"/>
-          </a:fontRef>
-        </p:style>
-        <p:txBody>
-          <a:bodyPr rtlCol="0" anchor="ctr"/>
-          <a:lstStyle/>
-          <a:p>
-            <a:pPr algn="ctr"/>
-          </a:p>
-        </p:txBody>
-      </p:sp>
-      <p:pic>
-        <p:nvPicPr>
-          <p:cNvPr id="13" name="Picture 12" descr="trend_spike.png"/>
-          <p:cNvPicPr>
-            <a:picLocks noChangeAspect="1"/>
-          </p:cNvPicPr>
-          <p:nvPr/>
-        </p:nvPicPr>
-        <p:blipFill>
-          <a:blip r:embed="rId3"/>
-          <a:stretch>
-            <a:fillRect/>
-          </a:stretch>
-        </p:blipFill>
-        <p:spPr>
-          <a:xfrm>
-            <a:off x="4590288" y="3639312"/>
-            <a:ext cx="3072384" cy="1975104"/>
-          </a:xfrm>
-          <a:prstGeom prst="rect">
-            <a:avLst/>
-          </a:prstGeom>
-        </p:spPr>
-      </p:pic>
-      <p:sp>
-        <p:nvSpPr>
-          <p:cNvPr id="14" name="TextBox 13"/>
+              <a:t>좌 confusion(test 1,500 대표 run) / 중 NT trade-off(319-run 평균) / 우 유형별 오류</a:t>
+            </a:r>
+          </a:p>
+        </p:txBody>
+      </p:sp>
+      <p:sp>
+        <p:nvSpPr>
+          <p:cNvPr id="12" name="TextBox 11"/>
           <p:cNvSpPr txBox="1"/>
           <p:nvPr/>
         </p:nvSpPr>
         <p:spPr>
           <a:xfrm>
-            <a:off x="4384548" y="5614416"/>
-            <a:ext cx="3483864" cy="329184"/>
+            <a:off x="457200" y="6437376"/>
+            <a:ext cx="8229600" cy="292608"/>
           </a:xfrm>
           <a:prstGeom prst="rect">
             <a:avLst/>
@@ -5635,100 +5433,30 @@
           </a:bodyPr>
           <a:lstStyle/>
           <a:p>
-            <a:pPr algn="ctr"/>
-            <a:r>
-              <a:rPr sz="1450" b="1">
-                <a:solidFill>
-                  <a:srgbClr val="0F1E3D"/>
+            <a:pPr algn="l"/>
+            <a:r>
+              <a:rPr sz="900">
+                <a:solidFill>
+                  <a:srgbClr val="6B7280"/>
                 </a:solidFill>
                 <a:latin typeface="맑은 고딕"/>
                 <a:ea typeface="맑은 고딕"/>
               </a:rPr>
-              <a:t>spike — 일부 점이 순간 급등</a:t>
-            </a:r>
-          </a:p>
-        </p:txBody>
-      </p:sp>
-      <p:sp>
-        <p:nvSpPr>
-          <p:cNvPr id="15" name="Rectangle 14"/>
-          <p:cNvSpPr/>
-          <p:nvPr/>
-        </p:nvSpPr>
-        <p:spPr>
-          <a:xfrm>
-            <a:off x="8065152" y="3630312"/>
-            <a:ext cx="3090384" cy="1993104"/>
-          </a:xfrm>
-          <a:prstGeom prst="rect">
-            <a:avLst/>
-          </a:prstGeom>
-          <a:solidFill>
-            <a:srgbClr val="FFFFFF"/>
-          </a:solidFill>
-          <a:ln w="12700">
-            <a:solidFill>
-              <a:srgbClr val="D7DEEA"/>
-            </a:solidFill>
-          </a:ln>
-          <a:effectLst/>
-        </p:spPr>
-        <p:style>
-          <a:lnRef idx="1">
-            <a:schemeClr val="accent1"/>
-          </a:lnRef>
-          <a:fillRef idx="3">
-            <a:schemeClr val="accent1"/>
-          </a:fillRef>
-          <a:effectRef idx="2">
-            <a:schemeClr val="accent1"/>
-          </a:effectRef>
-          <a:fontRef idx="minor">
-            <a:schemeClr val="lt1"/>
-          </a:fontRef>
-        </p:style>
-        <p:txBody>
-          <a:bodyPr rtlCol="0" anchor="ctr"/>
-          <a:lstStyle/>
-          <a:p>
-            <a:pPr algn="ctr"/>
-          </a:p>
-        </p:txBody>
-      </p:sp>
-      <p:pic>
-        <p:nvPicPr>
-          <p:cNvPr id="16" name="Picture 15" descr="trend_drift.png"/>
-          <p:cNvPicPr>
-            <a:picLocks noChangeAspect="1"/>
-          </p:cNvPicPr>
-          <p:nvPr/>
-        </p:nvPicPr>
-        <p:blipFill>
-          <a:blip r:embed="rId4"/>
-          <a:stretch>
-            <a:fillRect/>
-          </a:stretch>
-        </p:blipFill>
-        <p:spPr>
-          <a:xfrm>
-            <a:off x="8074152" y="3639312"/>
-            <a:ext cx="3072384" cy="1975104"/>
-          </a:xfrm>
-          <a:prstGeom prst="rect">
-            <a:avLst/>
-          </a:prstGeom>
-        </p:spPr>
-      </p:pic>
-      <p:sp>
-        <p:nvSpPr>
-          <p:cNvPr id="17" name="TextBox 16"/>
+              <a:t>최호길 | QIE Data Science | AI Specialist 인증</a:t>
+            </a:r>
+          </a:p>
+        </p:txBody>
+      </p:sp>
+      <p:sp>
+        <p:nvSpPr>
+          <p:cNvPr id="13" name="TextBox 12"/>
           <p:cNvSpPr txBox="1"/>
           <p:nvPr/>
         </p:nvSpPr>
         <p:spPr>
           <a:xfrm>
-            <a:off x="7868412" y="5614416"/>
-            <a:ext cx="3483864" cy="329184"/>
+            <a:off x="10972800" y="6437376"/>
+            <a:ext cx="758952" cy="292608"/>
           </a:xfrm>
           <a:prstGeom prst="rect">
             <a:avLst/>
@@ -5741,114 +5469,6 @@
           </a:bodyPr>
           <a:lstStyle/>
           <a:p>
-            <a:pPr algn="ctr"/>
-            <a:r>
-              <a:rPr sz="1450" b="1">
-                <a:solidFill>
-                  <a:srgbClr val="0F1E3D"/>
-                </a:solidFill>
-                <a:latin typeface="맑은 고딕"/>
-                <a:ea typeface="맑은 고딕"/>
-              </a:rPr>
-              <a:t>drift — 서서히 선형 상승</a:t>
-            </a:r>
-          </a:p>
-        </p:txBody>
-      </p:sp>
-      <p:sp>
-        <p:nvSpPr>
-          <p:cNvPr id="18" name="TextBox 17"/>
-          <p:cNvSpPr txBox="1"/>
-          <p:nvPr/>
-        </p:nvSpPr>
-        <p:spPr>
-          <a:xfrm>
-            <a:off x="640080" y="5961888"/>
-            <a:ext cx="10972800" cy="274320"/>
-          </a:xfrm>
-          <a:prstGeom prst="rect">
-            <a:avLst/>
-          </a:prstGeom>
-          <a:noFill/>
-        </p:spPr>
-        <p:txBody>
-          <a:bodyPr wrap="square" anchor="t" lIns="0" rIns="0" tIns="0" bIns="0">
-            <a:spAutoFit/>
-          </a:bodyPr>
-          <a:lstStyle/>
-          <a:p>
-            <a:pPr algn="ctr"/>
-            <a:r>
-              <a:rPr sz="1300">
-                <a:solidFill>
-                  <a:srgbClr val="3A485C"/>
-                </a:solidFill>
-                <a:latin typeface="맑은 고딕"/>
-                <a:ea typeface="맑은 고딕"/>
-              </a:rPr>
-              <a:t>파랑은 정상 측정, 빨강은 주입된 이상입니다. std와 context를 포함한 5종 모두 같은 규칙 엔진으로 만듭니다</a:t>
-            </a:r>
-          </a:p>
-        </p:txBody>
-      </p:sp>
-      <p:sp>
-        <p:nvSpPr>
-          <p:cNvPr id="19" name="TextBox 18"/>
-          <p:cNvSpPr txBox="1"/>
-          <p:nvPr/>
-        </p:nvSpPr>
-        <p:spPr>
-          <a:xfrm>
-            <a:off x="457200" y="6437376"/>
-            <a:ext cx="8229600" cy="292608"/>
-          </a:xfrm>
-          <a:prstGeom prst="rect">
-            <a:avLst/>
-          </a:prstGeom>
-          <a:noFill/>
-        </p:spPr>
-        <p:txBody>
-          <a:bodyPr wrap="square" anchor="ctr" lIns="0" rIns="0" tIns="0" bIns="0">
-            <a:spAutoFit/>
-          </a:bodyPr>
-          <a:lstStyle/>
-          <a:p>
-            <a:pPr algn="l"/>
-            <a:r>
-              <a:rPr sz="900">
-                <a:solidFill>
-                  <a:srgbClr val="6B7280"/>
-                </a:solidFill>
-                <a:latin typeface="맑은 고딕"/>
-                <a:ea typeface="맑은 고딕"/>
-              </a:rPr>
-              <a:t>최호길 | QIE Data Science | AI Specialist 인증</a:t>
-            </a:r>
-          </a:p>
-        </p:txBody>
-      </p:sp>
-      <p:sp>
-        <p:nvSpPr>
-          <p:cNvPr id="20" name="TextBox 19"/>
-          <p:cNvSpPr txBox="1"/>
-          <p:nvPr/>
-        </p:nvSpPr>
-        <p:spPr>
-          <a:xfrm>
-            <a:off x="10972800" y="6437376"/>
-            <a:ext cx="758952" cy="292608"/>
-          </a:xfrm>
-          <a:prstGeom prst="rect">
-            <a:avLst/>
-          </a:prstGeom>
-          <a:noFill/>
-        </p:spPr>
-        <p:txBody>
-          <a:bodyPr wrap="square" anchor="ctr" lIns="0" rIns="0" tIns="0" bIns="0">
-            <a:spAutoFit/>
-          </a:bodyPr>
-          <a:lstStyle/>
-          <a:p>
             <a:pPr algn="r"/>
             <a:r>
               <a:rPr sz="900">
@@ -5859,1394 +5479,6 @@
                 <a:ea typeface="맑은 고딕"/>
               </a:rPr>
               <a:t>4</a:t>
-            </a:r>
-          </a:p>
-        </p:txBody>
-      </p:sp>
-    </p:spTree>
-  </p:cSld>
-  <p:clrMapOvr>
-    <a:masterClrMapping/>
-  </p:clrMapOvr>
-</p:sld>
-</file>
-
-<file path=ppt/slides/slide5.xml><?xml version="1.0" encoding="utf-8"?>
-<p:sld xmlns:a="http://schemas.openxmlformats.org/drawingml/2006/main" xmlns:p="http://schemas.openxmlformats.org/presentationml/2006/main" xmlns:r="http://schemas.openxmlformats.org/officeDocument/2006/relationships">
-  <p:cSld>
-    <p:bg>
-      <p:bgPr>
-        <a:solidFill>
-          <a:srgbClr val="FFFFFF"/>
-        </a:solidFill>
-        <a:effectLst/>
-      </p:bgPr>
-    </p:bg>
-    <p:spTree>
-      <p:nvGrpSpPr>
-        <p:cNvPr id="1" name=""/>
-        <p:cNvGrpSpPr/>
-        <p:nvPr/>
-      </p:nvGrpSpPr>
-      <p:grpSpPr/>
-      <p:sp>
-        <p:nvSpPr>
-          <p:cNvPr id="2" name="Rectangle 1"/>
-          <p:cNvSpPr/>
-          <p:nvPr/>
-        </p:nvSpPr>
-        <p:spPr>
-          <a:xfrm>
-            <a:off x="640080" y="502920"/>
-            <a:ext cx="123444" cy="768096"/>
-          </a:xfrm>
-          <a:prstGeom prst="rect">
-            <a:avLst/>
-          </a:prstGeom>
-          <a:solidFill>
-            <a:srgbClr val="CFD4DB"/>
-          </a:solidFill>
-          <a:ln>
-            <a:noFill/>
-          </a:ln>
-          <a:effectLst/>
-        </p:spPr>
-        <p:style>
-          <a:lnRef idx="1">
-            <a:schemeClr val="accent1"/>
-          </a:lnRef>
-          <a:fillRef idx="3">
-            <a:schemeClr val="accent1"/>
-          </a:fillRef>
-          <a:effectRef idx="2">
-            <a:schemeClr val="accent1"/>
-          </a:effectRef>
-          <a:fontRef idx="minor">
-            <a:schemeClr val="lt1"/>
-          </a:fontRef>
-        </p:style>
-        <p:txBody>
-          <a:bodyPr rtlCol="0" anchor="ctr"/>
-          <a:lstStyle/>
-          <a:p>
-            <a:pPr algn="ctr"/>
-          </a:p>
-        </p:txBody>
-      </p:sp>
-      <p:sp>
-        <p:nvSpPr>
-          <p:cNvPr id="3" name="TextBox 2"/>
-          <p:cNvSpPr txBox="1"/>
-          <p:nvPr/>
-        </p:nvSpPr>
-        <p:spPr>
-          <a:xfrm>
-            <a:off x="932688" y="448056"/>
-            <a:ext cx="10881360" cy="256032"/>
-          </a:xfrm>
-          <a:prstGeom prst="rect">
-            <a:avLst/>
-          </a:prstGeom>
-          <a:noFill/>
-        </p:spPr>
-        <p:txBody>
-          <a:bodyPr wrap="square" anchor="t" lIns="0" rIns="0" tIns="0" bIns="0">
-            <a:spAutoFit/>
-          </a:bodyPr>
-          <a:lstStyle/>
-          <a:p>
-            <a:pPr algn="l"/>
-            <a:r>
-              <a:rPr sz="1300" b="1">
-                <a:solidFill>
-                  <a:srgbClr val="8A929E"/>
-                </a:solidFill>
-                <a:latin typeface="맑은 고딕"/>
-                <a:ea typeface="맑은 고딕"/>
-              </a:rPr>
-              <a:t>P3 | 생성 파이프라인 / 데이터</a:t>
-            </a:r>
-          </a:p>
-        </p:txBody>
-      </p:sp>
-      <p:sp>
-        <p:nvSpPr>
-          <p:cNvPr id="4" name="TextBox 3"/>
-          <p:cNvSpPr txBox="1"/>
-          <p:nvPr/>
-        </p:nvSpPr>
-        <p:spPr>
-          <a:xfrm>
-            <a:off x="932688" y="704088"/>
-            <a:ext cx="10881360" cy="603504"/>
-          </a:xfrm>
-          <a:prstGeom prst="rect">
-            <a:avLst/>
-          </a:prstGeom>
-          <a:noFill/>
-        </p:spPr>
-        <p:txBody>
-          <a:bodyPr wrap="square" anchor="t" lIns="0" rIns="0" tIns="0" bIns="0">
-            <a:spAutoFit/>
-          </a:bodyPr>
-          <a:lstStyle/>
-          <a:p>
-            <a:pPr algn="l"/>
-            <a:r>
-              <a:rPr sz="3100" b="1">
-                <a:solidFill>
-                  <a:srgbClr val="0F1E3D"/>
-                </a:solidFill>
-                <a:latin typeface="맑은 고딕"/>
-                <a:ea typeface="맑은 고딕"/>
-              </a:rPr>
-              <a:t>chart 정의부터 이미지 렌더까지 규칙 기반 생성</a:t>
-            </a:r>
-          </a:p>
-        </p:txBody>
-      </p:sp>
-      <p:sp>
-        <p:nvSpPr>
-          <p:cNvPr id="5" name="TextBox 4"/>
-          <p:cNvSpPr txBox="1"/>
-          <p:nvPr/>
-        </p:nvSpPr>
-        <p:spPr>
-          <a:xfrm>
-            <a:off x="640080" y="1828800"/>
-            <a:ext cx="10972800" cy="640080"/>
-          </a:xfrm>
-          <a:prstGeom prst="rect">
-            <a:avLst/>
-          </a:prstGeom>
-          <a:noFill/>
-        </p:spPr>
-        <p:txBody>
-          <a:bodyPr wrap="square" anchor="t" lIns="0" rIns="0" tIns="0" bIns="0">
-            <a:spAutoFit/>
-          </a:bodyPr>
-          <a:lstStyle/>
-          <a:p>
-            <a:pPr marL="274320" indent="-274320">
-              <a:spcAft>
-                <a:spcPts val="500"/>
-              </a:spcAft>
-            </a:pPr>
-            <a:r>
-              <a:rPr sz="1400" b="0">
-                <a:solidFill>
-                  <a:srgbClr val="5B9BD5"/>
-                </a:solidFill>
-                <a:latin typeface="맑은 고딕"/>
-                <a:ea typeface="맑은 고딕"/>
-              </a:rPr>
-              <a:t>●  </a:t>
-            </a:r>
-            <a:r>
-              <a:rPr sz="1400">
-                <a:solidFill>
-                  <a:srgbClr val="1A1F2E"/>
-                </a:solidFill>
-                <a:latin typeface="맑은 고딕"/>
-                <a:ea typeface="맑은 고딕"/>
-              </a:rPr>
-              <a:t>현장 판정 기준을 chart 정의, episode 조립, 노이즈, 이상 주입, 렌더의 5단계 생성 규칙으로 옮겼습니다</a:t>
-            </a:r>
-          </a:p>
-        </p:txBody>
-      </p:sp>
-      <p:sp>
-        <p:nvSpPr>
-          <p:cNvPr id="6" name="Rectangle 5"/>
-          <p:cNvSpPr/>
-          <p:nvPr/>
-        </p:nvSpPr>
-        <p:spPr>
-          <a:xfrm>
-            <a:off x="640080" y="2596896"/>
-            <a:ext cx="5303520" cy="3429000"/>
-          </a:xfrm>
-          <a:prstGeom prst="rect">
-            <a:avLst/>
-          </a:prstGeom>
-          <a:solidFill>
-            <a:srgbClr val="FFFFFF"/>
-          </a:solidFill>
-          <a:ln w="15875">
-            <a:solidFill>
-              <a:srgbClr val="333740"/>
-            </a:solidFill>
-          </a:ln>
-          <a:effectLst/>
-        </p:spPr>
-        <p:style>
-          <a:lnRef idx="1">
-            <a:schemeClr val="accent1"/>
-          </a:lnRef>
-          <a:fillRef idx="3">
-            <a:schemeClr val="accent1"/>
-          </a:fillRef>
-          <a:effectRef idx="2">
-            <a:schemeClr val="accent1"/>
-          </a:effectRef>
-          <a:fontRef idx="minor">
-            <a:schemeClr val="lt1"/>
-          </a:fontRef>
-        </p:style>
-        <p:txBody>
-          <a:bodyPr rtlCol="0" anchor="ctr"/>
-          <a:lstStyle/>
-          <a:p>
-            <a:pPr algn="ctr"/>
-          </a:p>
-        </p:txBody>
-      </p:sp>
-      <p:sp>
-        <p:nvSpPr>
-          <p:cNvPr id="7" name="TextBox 6"/>
-          <p:cNvSpPr txBox="1"/>
-          <p:nvPr/>
-        </p:nvSpPr>
-        <p:spPr>
-          <a:xfrm>
-            <a:off x="914400" y="2724912"/>
-            <a:ext cx="4809744" cy="3172968"/>
-          </a:xfrm>
-          <a:prstGeom prst="rect">
-            <a:avLst/>
-          </a:prstGeom>
-          <a:noFill/>
-        </p:spPr>
-        <p:txBody>
-          <a:bodyPr wrap="square" anchor="ctr" lIns="0" rIns="0" tIns="0" bIns="0">
-            <a:spAutoFit/>
-          </a:bodyPr>
-          <a:lstStyle/>
-          <a:p>
-            <a:pPr algn="l"/>
-            <a:r>
-              <a:rPr sz="1450" b="1">
-                <a:solidFill>
-                  <a:srgbClr val="0F1E3D"/>
-                </a:solidFill>
-                <a:latin typeface="맑은 고딕"/>
-                <a:ea typeface="맑은 고딕"/>
-              </a:rPr>
-              <a:t>생성 파이프라인</a:t>
-            </a:r>
-          </a:p>
-          <a:p>
-            <a:pPr algn="l"/>
-            <a:r>
-              <a:rPr sz="500">
-                <a:solidFill>
-                  <a:srgbClr val="FFFFFF"/>
-                </a:solidFill>
-                <a:latin typeface="맑은 고딕"/>
-                <a:ea typeface="맑은 고딕"/>
-              </a:rPr>
-              <a:t> </a:t>
-            </a:r>
-          </a:p>
-          <a:p>
-            <a:pPr algn="l"/>
-            <a:r>
-              <a:rPr sz="1350" b="1" i="0">
-                <a:solidFill>
-                  <a:srgbClr val="0F1E3D"/>
-                </a:solidFill>
-                <a:latin typeface="맑은 고딕"/>
-                <a:ea typeface="맑은 고딕"/>
-              </a:rPr>
-              <a:t>① chart 정의</a:t>
-            </a:r>
-          </a:p>
-          <a:p>
-            <a:pPr algn="l"/>
-            <a:r>
-              <a:rPr sz="1300">
-                <a:solidFill>
-                  <a:srgbClr val="1A1F2E"/>
-                </a:solidFill>
-                <a:latin typeface="Consolas"/>
-                <a:ea typeface="Consolas"/>
-              </a:rPr>
-              <a:t>    device x step x item, fleet legend(eqp/chamber/recipe)</a:t>
-            </a:r>
-          </a:p>
-          <a:p>
-            <a:pPr algn="l"/>
-            <a:r>
-              <a:rPr sz="1350" b="1" i="0">
-                <a:solidFill>
-                  <a:srgbClr val="0F1E3D"/>
-                </a:solidFill>
-                <a:latin typeface="맑은 고딕"/>
-                <a:ea typeface="맑은 고딕"/>
-              </a:rPr>
-              <a:t>② episode 조립</a:t>
-            </a:r>
-          </a:p>
-          <a:p>
-            <a:pPr algn="l"/>
-            <a:r>
-              <a:rPr sz="1300">
-                <a:solidFill>
-                  <a:srgbClr val="1A1F2E"/>
-                </a:solidFill>
-                <a:latin typeface="맑은 고딕"/>
-                <a:ea typeface="맑은 고딕"/>
-              </a:rPr>
-              <a:t>    12~25개, 영역 밀도 샘플링(밀집/희소/결핍)</a:t>
-            </a:r>
-          </a:p>
-          <a:p>
-            <a:pPr algn="l"/>
-            <a:r>
-              <a:rPr sz="1350" b="1" i="0">
-                <a:solidFill>
-                  <a:srgbClr val="0F1E3D"/>
-                </a:solidFill>
-                <a:latin typeface="맑은 고딕"/>
-                <a:ea typeface="맑은 고딕"/>
-              </a:rPr>
-              <a:t>③ 노이즈</a:t>
-            </a:r>
-          </a:p>
-          <a:p>
-            <a:pPr algn="l"/>
-            <a:r>
-              <a:rPr sz="1300">
-                <a:solidFill>
-                  <a:srgbClr val="1A1F2E"/>
-                </a:solidFill>
-                <a:latin typeface="맑은 고딕"/>
-                <a:ea typeface="맑은 고딕"/>
-              </a:rPr>
-              <a:t>    Gaussian, Correlated AR, Laplacian 중 1종</a:t>
-            </a:r>
-          </a:p>
-          <a:p>
-            <a:pPr algn="l"/>
-            <a:r>
-              <a:rPr sz="1350" b="1" i="0">
-                <a:solidFill>
-                  <a:srgbClr val="0F1E3D"/>
-                </a:solidFill>
-                <a:latin typeface="맑은 고딕"/>
-                <a:ea typeface="맑은 고딕"/>
-              </a:rPr>
-              <a:t>④ 이상 주입</a:t>
-            </a:r>
-          </a:p>
-          <a:p>
-            <a:pPr algn="l"/>
-            <a:r>
-              <a:rPr sz="1300">
-                <a:solidFill>
-                  <a:srgbClr val="1A1F2E"/>
-                </a:solidFill>
-                <a:latin typeface="맑은 고딕"/>
-                <a:ea typeface="맑은 고딕"/>
-              </a:rPr>
-              <a:t>    avg/std/spike/drift/context, trend 뒤쪽 구간</a:t>
-            </a:r>
-          </a:p>
-          <a:p>
-            <a:pPr algn="l"/>
-            <a:r>
-              <a:rPr sz="1350" b="1" i="0">
-                <a:solidFill>
-                  <a:srgbClr val="0F1E3D"/>
-                </a:solidFill>
-                <a:latin typeface="맑은 고딕"/>
-                <a:ea typeface="맑은 고딕"/>
-              </a:rPr>
-              <a:t>⑤ 렌더</a:t>
-            </a:r>
-          </a:p>
-          <a:p>
-            <a:pPr algn="l"/>
-            <a:r>
-              <a:rPr sz="1300">
-                <a:solidFill>
-                  <a:srgbClr val="1A1F2E"/>
-                </a:solidFill>
-                <a:latin typeface="맑은 고딕"/>
-                <a:ea typeface="맑은 고딕"/>
-              </a:rPr>
-              <a:t>    이상 강도 보정 후 학습/평가 trend 이미지</a:t>
-            </a:r>
-          </a:p>
-        </p:txBody>
-      </p:sp>
-      <p:sp>
-        <p:nvSpPr>
-          <p:cNvPr id="8" name="TextBox 7"/>
-          <p:cNvSpPr txBox="1"/>
-          <p:nvPr/>
-        </p:nvSpPr>
-        <p:spPr>
-          <a:xfrm>
-            <a:off x="640080" y="6053328"/>
-            <a:ext cx="5303520" cy="329184"/>
-          </a:xfrm>
-          <a:prstGeom prst="rect">
-            <a:avLst/>
-          </a:prstGeom>
-          <a:noFill/>
-        </p:spPr>
-        <p:txBody>
-          <a:bodyPr wrap="square" anchor="ctr" lIns="0" rIns="0" tIns="0" bIns="0">
-            <a:spAutoFit/>
-          </a:bodyPr>
-          <a:lstStyle/>
-          <a:p>
-            <a:pPr algn="ctr"/>
-            <a:r>
-              <a:rPr sz="1250" b="1">
-                <a:solidFill>
-                  <a:srgbClr val="0F1E3D"/>
-                </a:solidFill>
-                <a:latin typeface="맑은 고딕"/>
-                <a:ea typeface="맑은 고딕"/>
-              </a:rPr>
-              <a:t>규칙 기반 생성 흐름</a:t>
-            </a:r>
-          </a:p>
-        </p:txBody>
-      </p:sp>
-      <p:sp>
-        <p:nvSpPr>
-          <p:cNvPr id="9" name="Rectangle 8"/>
-          <p:cNvSpPr/>
-          <p:nvPr/>
-        </p:nvSpPr>
-        <p:spPr>
-          <a:xfrm>
-            <a:off x="6309360" y="2596896"/>
-            <a:ext cx="5303520" cy="3429000"/>
-          </a:xfrm>
-          <a:prstGeom prst="rect">
-            <a:avLst/>
-          </a:prstGeom>
-          <a:solidFill>
-            <a:srgbClr val="FFFFFF"/>
-          </a:solidFill>
-          <a:ln w="15875">
-            <a:solidFill>
-              <a:srgbClr val="333740"/>
-            </a:solidFill>
-          </a:ln>
-          <a:effectLst/>
-        </p:spPr>
-        <p:style>
-          <a:lnRef idx="1">
-            <a:schemeClr val="accent1"/>
-          </a:lnRef>
-          <a:fillRef idx="3">
-            <a:schemeClr val="accent1"/>
-          </a:fillRef>
-          <a:effectRef idx="2">
-            <a:schemeClr val="accent1"/>
-          </a:effectRef>
-          <a:fontRef idx="minor">
-            <a:schemeClr val="lt1"/>
-          </a:fontRef>
-        </p:style>
-        <p:txBody>
-          <a:bodyPr rtlCol="0" anchor="ctr"/>
-          <a:lstStyle/>
-          <a:p>
-            <a:pPr algn="ctr"/>
-          </a:p>
-        </p:txBody>
-      </p:sp>
-      <p:sp>
-        <p:nvSpPr>
-          <p:cNvPr id="10" name="TextBox 9"/>
-          <p:cNvSpPr txBox="1"/>
-          <p:nvPr/>
-        </p:nvSpPr>
-        <p:spPr>
-          <a:xfrm>
-            <a:off x="6583680" y="2724912"/>
-            <a:ext cx="4809744" cy="3172968"/>
-          </a:xfrm>
-          <a:prstGeom prst="rect">
-            <a:avLst/>
-          </a:prstGeom>
-          <a:noFill/>
-        </p:spPr>
-        <p:txBody>
-          <a:bodyPr wrap="square" anchor="ctr" lIns="0" rIns="0" tIns="0" bIns="0">
-            <a:spAutoFit/>
-          </a:bodyPr>
-          <a:lstStyle/>
-          <a:p>
-            <a:pPr algn="l"/>
-            <a:r>
-              <a:rPr sz="1450" b="1">
-                <a:solidFill>
-                  <a:srgbClr val="0F1E3D"/>
-                </a:solidFill>
-                <a:latin typeface="맑은 고딕"/>
-                <a:ea typeface="맑은 고딕"/>
-              </a:rPr>
-              <a:t>데이터 구성</a:t>
-            </a:r>
-          </a:p>
-          <a:p>
-            <a:pPr algn="l"/>
-            <a:r>
-              <a:rPr sz="500">
-                <a:solidFill>
-                  <a:srgbClr val="FFFFFF"/>
-                </a:solidFill>
-                <a:latin typeface="맑은 고딕"/>
-                <a:ea typeface="맑은 고딕"/>
-              </a:rPr>
-              <a:t> </a:t>
-            </a:r>
-          </a:p>
-          <a:p>
-            <a:pPr algn="l"/>
-            <a:r>
-              <a:rPr sz="1350" b="1" i="0">
-                <a:solidFill>
-                  <a:srgbClr val="0F1E3D"/>
-                </a:solidFill>
-                <a:latin typeface="맑은 고딕"/>
-                <a:ea typeface="맑은 고딕"/>
-              </a:rPr>
-              <a:t>규모</a:t>
-            </a:r>
-          </a:p>
-          <a:p>
-            <a:pPr algn="l"/>
-            <a:r>
-              <a:rPr sz="1300">
-                <a:solidFill>
-                  <a:srgbClr val="1A1F2E"/>
-                </a:solidFill>
-                <a:latin typeface="맑은 고딕"/>
-                <a:ea typeface="맑은 고딕"/>
-              </a:rPr>
-              <a:t>    정상 3,500 + 이상 3,500 = 7,000</a:t>
-            </a:r>
-          </a:p>
-          <a:p>
-            <a:pPr algn="l"/>
-            <a:r>
-              <a:rPr sz="1300">
-                <a:solidFill>
-                  <a:srgbClr val="1A1F2E"/>
-                </a:solidFill>
-                <a:latin typeface="맑은 고딕"/>
-                <a:ea typeface="맑은 고딕"/>
-              </a:rPr>
-              <a:t>    별도 test 1,500 (이상 5종 stratified)</a:t>
-            </a:r>
-          </a:p>
-          <a:p>
-            <a:pPr algn="l"/>
-            <a:r>
-              <a:rPr sz="1350" b="1" i="0">
-                <a:solidFill>
-                  <a:srgbClr val="0F1E3D"/>
-                </a:solidFill>
-                <a:latin typeface="맑은 고딕"/>
-                <a:ea typeface="맑은 고딕"/>
-              </a:rPr>
-              <a:t>평가 난이도</a:t>
-            </a:r>
-          </a:p>
-          <a:p>
-            <a:pPr algn="l"/>
-            <a:r>
-              <a:rPr sz="1300">
-                <a:solidFill>
-                  <a:srgbClr val="1A1F2E"/>
-                </a:solidFill>
-                <a:latin typeface="맑은 고딕"/>
-                <a:ea typeface="맑은 고딕"/>
-              </a:rPr>
-              <a:t>    test/val은 이상 강도를 0.8배로 낮춰</a:t>
-            </a:r>
-          </a:p>
-          <a:p>
-            <a:pPr algn="l"/>
-            <a:r>
-              <a:rPr sz="1300">
-                <a:solidFill>
-                  <a:srgbClr val="1A1F2E"/>
-                </a:solidFill>
-                <a:latin typeface="맑은 고딕"/>
-                <a:ea typeface="맑은 고딕"/>
-              </a:rPr>
-              <a:t>    더 어려운 평가셋으로 구성</a:t>
-            </a:r>
-          </a:p>
-          <a:p>
-            <a:pPr algn="l"/>
-            <a:r>
-              <a:rPr sz="1350" b="1" i="0">
-                <a:solidFill>
-                  <a:srgbClr val="0F1E3D"/>
-                </a:solidFill>
-                <a:latin typeface="맑은 고딕"/>
-                <a:ea typeface="맑은 고딕"/>
-              </a:rPr>
-              <a:t>정상 보호</a:t>
-            </a:r>
-          </a:p>
-          <a:p>
-            <a:pPr algn="l"/>
-            <a:r>
-              <a:rPr sz="1300">
-                <a:solidFill>
-                  <a:srgbClr val="1A1F2E"/>
-                </a:solidFill>
-                <a:latin typeface="맑은 고딕"/>
-                <a:ea typeface="맑은 고딕"/>
-              </a:rPr>
-              <a:t>    정상은 fleet 중심에서 벗어나지 않게 둠</a:t>
-            </a:r>
-          </a:p>
-        </p:txBody>
-      </p:sp>
-      <p:sp>
-        <p:nvSpPr>
-          <p:cNvPr id="11" name="TextBox 10"/>
-          <p:cNvSpPr txBox="1"/>
-          <p:nvPr/>
-        </p:nvSpPr>
-        <p:spPr>
-          <a:xfrm>
-            <a:off x="6309360" y="6053328"/>
-            <a:ext cx="5303520" cy="329184"/>
-          </a:xfrm>
-          <a:prstGeom prst="rect">
-            <a:avLst/>
-          </a:prstGeom>
-          <a:noFill/>
-        </p:spPr>
-        <p:txBody>
-          <a:bodyPr wrap="square" anchor="ctr" lIns="0" rIns="0" tIns="0" bIns="0">
-            <a:spAutoFit/>
-          </a:bodyPr>
-          <a:lstStyle/>
-          <a:p>
-            <a:pPr algn="ctr"/>
-            <a:r>
-              <a:rPr sz="1250" b="1">
-                <a:solidFill>
-                  <a:srgbClr val="0F1E3D"/>
-                </a:solidFill>
-                <a:latin typeface="맑은 고딕"/>
-                <a:ea typeface="맑은 고딕"/>
-              </a:rPr>
-              <a:t>정상 3,500 + 이상 3,500 + test 1,500</a:t>
-            </a:r>
-          </a:p>
-        </p:txBody>
-      </p:sp>
-      <p:sp>
-        <p:nvSpPr>
-          <p:cNvPr id="12" name="TextBox 11"/>
-          <p:cNvSpPr txBox="1"/>
-          <p:nvPr/>
-        </p:nvSpPr>
-        <p:spPr>
-          <a:xfrm>
-            <a:off x="457200" y="6437376"/>
-            <a:ext cx="8229600" cy="292608"/>
-          </a:xfrm>
-          <a:prstGeom prst="rect">
-            <a:avLst/>
-          </a:prstGeom>
-          <a:noFill/>
-        </p:spPr>
-        <p:txBody>
-          <a:bodyPr wrap="square" anchor="ctr" lIns="0" rIns="0" tIns="0" bIns="0">
-            <a:spAutoFit/>
-          </a:bodyPr>
-          <a:lstStyle/>
-          <a:p>
-            <a:pPr algn="l"/>
-            <a:r>
-              <a:rPr sz="900">
-                <a:solidFill>
-                  <a:srgbClr val="6B7280"/>
-                </a:solidFill>
-                <a:latin typeface="맑은 고딕"/>
-                <a:ea typeface="맑은 고딕"/>
-              </a:rPr>
-              <a:t>최호길 | QIE Data Science | AI Specialist 인증</a:t>
-            </a:r>
-          </a:p>
-        </p:txBody>
-      </p:sp>
-      <p:sp>
-        <p:nvSpPr>
-          <p:cNvPr id="13" name="TextBox 12"/>
-          <p:cNvSpPr txBox="1"/>
-          <p:nvPr/>
-        </p:nvSpPr>
-        <p:spPr>
-          <a:xfrm>
-            <a:off x="10972800" y="6437376"/>
-            <a:ext cx="758952" cy="292608"/>
-          </a:xfrm>
-          <a:prstGeom prst="rect">
-            <a:avLst/>
-          </a:prstGeom>
-          <a:noFill/>
-        </p:spPr>
-        <p:txBody>
-          <a:bodyPr wrap="square" anchor="ctr" lIns="0" rIns="0" tIns="0" bIns="0">
-            <a:spAutoFit/>
-          </a:bodyPr>
-          <a:lstStyle/>
-          <a:p>
-            <a:pPr algn="r"/>
-            <a:r>
-              <a:rPr sz="900">
-                <a:solidFill>
-                  <a:srgbClr val="6B7280"/>
-                </a:solidFill>
-                <a:latin typeface="맑은 고딕"/>
-                <a:ea typeface="맑은 고딕"/>
-              </a:rPr>
-              <a:t>5</a:t>
-            </a:r>
-          </a:p>
-        </p:txBody>
-      </p:sp>
-    </p:spTree>
-  </p:cSld>
-  <p:clrMapOvr>
-    <a:masterClrMapping/>
-  </p:clrMapOvr>
-</p:sld>
-</file>
-
-<file path=ppt/slides/slide6.xml><?xml version="1.0" encoding="utf-8"?>
-<p:sld xmlns:a="http://schemas.openxmlformats.org/drawingml/2006/main" xmlns:p="http://schemas.openxmlformats.org/presentationml/2006/main" xmlns:r="http://schemas.openxmlformats.org/officeDocument/2006/relationships">
-  <p:cSld>
-    <p:bg>
-      <p:bgPr>
-        <a:solidFill>
-          <a:srgbClr val="FFFFFF"/>
-        </a:solidFill>
-        <a:effectLst/>
-      </p:bgPr>
-    </p:bg>
-    <p:spTree>
-      <p:nvGrpSpPr>
-        <p:cNvPr id="1" name=""/>
-        <p:cNvGrpSpPr/>
-        <p:nvPr/>
-      </p:nvGrpSpPr>
-      <p:grpSpPr/>
-      <p:sp>
-        <p:nvSpPr>
-          <p:cNvPr id="2" name="Rectangle 1"/>
-          <p:cNvSpPr/>
-          <p:nvPr/>
-        </p:nvSpPr>
-        <p:spPr>
-          <a:xfrm>
-            <a:off x="640080" y="502920"/>
-            <a:ext cx="123444" cy="768096"/>
-          </a:xfrm>
-          <a:prstGeom prst="rect">
-            <a:avLst/>
-          </a:prstGeom>
-          <a:solidFill>
-            <a:srgbClr val="CFD4DB"/>
-          </a:solidFill>
-          <a:ln>
-            <a:noFill/>
-          </a:ln>
-          <a:effectLst/>
-        </p:spPr>
-        <p:style>
-          <a:lnRef idx="1">
-            <a:schemeClr val="accent1"/>
-          </a:lnRef>
-          <a:fillRef idx="3">
-            <a:schemeClr val="accent1"/>
-          </a:fillRef>
-          <a:effectRef idx="2">
-            <a:schemeClr val="accent1"/>
-          </a:effectRef>
-          <a:fontRef idx="minor">
-            <a:schemeClr val="lt1"/>
-          </a:fontRef>
-        </p:style>
-        <p:txBody>
-          <a:bodyPr rtlCol="0" anchor="ctr"/>
-          <a:lstStyle/>
-          <a:p>
-            <a:pPr algn="ctr"/>
-          </a:p>
-        </p:txBody>
-      </p:sp>
-      <p:sp>
-        <p:nvSpPr>
-          <p:cNvPr id="3" name="TextBox 2"/>
-          <p:cNvSpPr txBox="1"/>
-          <p:nvPr/>
-        </p:nvSpPr>
-        <p:spPr>
-          <a:xfrm>
-            <a:off x="932688" y="448056"/>
-            <a:ext cx="10881360" cy="256032"/>
-          </a:xfrm>
-          <a:prstGeom prst="rect">
-            <a:avLst/>
-          </a:prstGeom>
-          <a:noFill/>
-        </p:spPr>
-        <p:txBody>
-          <a:bodyPr wrap="square" anchor="t" lIns="0" rIns="0" tIns="0" bIns="0">
-            <a:spAutoFit/>
-          </a:bodyPr>
-          <a:lstStyle/>
-          <a:p>
-            <a:pPr algn="l"/>
-            <a:r>
-              <a:rPr sz="1300" b="1">
-                <a:solidFill>
-                  <a:srgbClr val="8A929E"/>
-                </a:solidFill>
-                <a:latin typeface="맑은 고딕"/>
-                <a:ea typeface="맑은 고딕"/>
-              </a:rPr>
-              <a:t>P3 | 1차 binary gate (PoC)</a:t>
-            </a:r>
-          </a:p>
-        </p:txBody>
-      </p:sp>
-      <p:sp>
-        <p:nvSpPr>
-          <p:cNvPr id="4" name="TextBox 3"/>
-          <p:cNvSpPr txBox="1"/>
-          <p:nvPr/>
-        </p:nvSpPr>
-        <p:spPr>
-          <a:xfrm>
-            <a:off x="932688" y="704088"/>
-            <a:ext cx="10881360" cy="603504"/>
-          </a:xfrm>
-          <a:prstGeom prst="rect">
-            <a:avLst/>
-          </a:prstGeom>
-          <a:noFill/>
-        </p:spPr>
-        <p:txBody>
-          <a:bodyPr wrap="square" anchor="t" lIns="0" rIns="0" tIns="0" bIns="0">
-            <a:spAutoFit/>
-          </a:bodyPr>
-          <a:lstStyle/>
-          <a:p>
-            <a:pPr algn="l"/>
-            <a:r>
-              <a:rPr sz="3100" b="1">
-                <a:solidFill>
-                  <a:srgbClr val="0F1E3D"/>
-                </a:solidFill>
-                <a:latin typeface="맑은 고딕"/>
-                <a:ea typeface="맑은 고딕"/>
-              </a:rPr>
-              <a:t>생성 데이터로 정상/이상 1차 판정이 학습됨을 확인</a:t>
-            </a:r>
-          </a:p>
-        </p:txBody>
-      </p:sp>
-      <p:sp>
-        <p:nvSpPr>
-          <p:cNvPr id="5" name="TextBox 4"/>
-          <p:cNvSpPr txBox="1"/>
-          <p:nvPr/>
-        </p:nvSpPr>
-        <p:spPr>
-          <a:xfrm>
-            <a:off x="640080" y="1828800"/>
-            <a:ext cx="10972800" cy="1920240"/>
-          </a:xfrm>
-          <a:prstGeom prst="rect">
-            <a:avLst/>
-          </a:prstGeom>
-          <a:noFill/>
-        </p:spPr>
-        <p:txBody>
-          <a:bodyPr wrap="square" anchor="t" lIns="0" rIns="0" tIns="0" bIns="0">
-            <a:spAutoFit/>
-          </a:bodyPr>
-          <a:lstStyle/>
-          <a:p>
-            <a:pPr marL="274320" indent="-274320">
-              <a:spcAft>
-                <a:spcPts val="500"/>
-              </a:spcAft>
-            </a:pPr>
-            <a:r>
-              <a:rPr sz="1400" b="0">
-                <a:solidFill>
-                  <a:srgbClr val="5B9BD5"/>
-                </a:solidFill>
-                <a:latin typeface="맑은 고딕"/>
-                <a:ea typeface="맑은 고딕"/>
-              </a:rPr>
-              <a:t>●  </a:t>
-            </a:r>
-            <a:r>
-              <a:rPr sz="1400">
-                <a:solidFill>
-                  <a:srgbClr val="1A1F2E"/>
-                </a:solidFill>
-                <a:latin typeface="맑은 고딕"/>
-                <a:ea typeface="맑은 고딕"/>
-              </a:rPr>
-              <a:t>trend 이미지를 </a:t>
-            </a:r>
-            <a:r>
-              <a:rPr sz="1400" b="1">
-                <a:solidFill>
-                  <a:srgbClr val="0F1E3D"/>
-                </a:solidFill>
-                <a:latin typeface="맑은 고딕"/>
-                <a:ea typeface="맑은 고딕"/>
-              </a:rPr>
-              <a:t>ConvNeXtV2-Tiny</a:t>
-            </a:r>
-            <a:r>
-              <a:rPr sz="1400">
-                <a:solidFill>
-                  <a:srgbClr val="1A1F2E"/>
-                </a:solidFill>
-                <a:latin typeface="맑은 고딕"/>
-                <a:ea typeface="맑은 고딕"/>
-              </a:rPr>
-              <a:t>로 정상/이상 2분류하고, </a:t>
-            </a:r>
-            <a:r>
-              <a:rPr sz="1400" b="1">
-                <a:solidFill>
-                  <a:srgbClr val="0F1E3D"/>
-                </a:solidFill>
-                <a:latin typeface="맑은 고딕"/>
-                <a:ea typeface="맑은 고딕"/>
-              </a:rPr>
-              <a:t>놓침(FN) 최소화</a:t>
-            </a:r>
-            <a:r>
-              <a:rPr sz="1400">
-                <a:solidFill>
-                  <a:srgbClr val="1A1F2E"/>
-                </a:solidFill>
-                <a:latin typeface="맑은 고딕"/>
-                <a:ea typeface="맑은 고딕"/>
-              </a:rPr>
-              <a:t>를 목표로 Focal loss와 normal threshold 0.9를 적용했습니다</a:t>
-            </a:r>
-          </a:p>
-          <a:p>
-            <a:pPr marL="274320" indent="-274320">
-              <a:spcAft>
-                <a:spcPts val="500"/>
-              </a:spcAft>
-            </a:pPr>
-            <a:r>
-              <a:rPr sz="1400" b="0">
-                <a:solidFill>
-                  <a:srgbClr val="5B9BD5"/>
-                </a:solidFill>
-                <a:latin typeface="맑은 고딕"/>
-                <a:ea typeface="맑은 고딕"/>
-              </a:rPr>
-              <a:t>●  </a:t>
-            </a:r>
-            <a:r>
-              <a:rPr sz="1400">
-                <a:solidFill>
-                  <a:srgbClr val="1A1F2E"/>
-                </a:solidFill>
-                <a:latin typeface="맑은 고딕"/>
-                <a:ea typeface="맑은 고딕"/>
-              </a:rPr>
-              <a:t>test 1,500에서 </a:t>
-            </a:r>
-            <a:r>
-              <a:rPr sz="1400" b="1">
-                <a:solidFill>
-                  <a:srgbClr val="0F1E3D"/>
-                </a:solidFill>
-                <a:latin typeface="맑은 고딕"/>
-                <a:ea typeface="맑은 고딕"/>
-              </a:rPr>
-              <a:t>binary F1 0.9967</a:t>
-            </a:r>
-            <a:r>
-              <a:rPr sz="1400">
-                <a:solidFill>
-                  <a:srgbClr val="1A1F2E"/>
-                </a:solidFill>
-                <a:latin typeface="맑은 고딕"/>
-                <a:ea typeface="맑은 고딕"/>
-              </a:rPr>
-              <a:t>, </a:t>
-            </a:r>
-            <a:r>
-              <a:rPr sz="1400" b="1">
-                <a:solidFill>
-                  <a:srgbClr val="0F1E3D"/>
-                </a:solidFill>
-                <a:latin typeface="맑은 고딕"/>
-                <a:ea typeface="맑은 고딕"/>
-              </a:rPr>
-              <a:t>이상 recall 0.9987</a:t>
-            </a:r>
-            <a:r>
-              <a:rPr sz="1400">
-                <a:solidFill>
-                  <a:srgbClr val="1A1F2E"/>
-                </a:solidFill>
-                <a:latin typeface="맑은 고딕"/>
-                <a:ea typeface="맑은 고딕"/>
-              </a:rPr>
-              <a:t> — 정상 750 중 오탐 4건, 이상 750 중 놓침 1건 수준입니다</a:t>
-            </a:r>
-          </a:p>
-          <a:p>
-            <a:pPr marL="420624" indent="-420624" lvl="1">
-              <a:spcAft>
-                <a:spcPts val="500"/>
-              </a:spcAft>
-            </a:pPr>
-            <a:r>
-              <a:rPr sz="1300" b="0">
-                <a:solidFill>
-                  <a:srgbClr val="6E7B8E"/>
-                </a:solidFill>
-                <a:latin typeface="맑은 고딕"/>
-                <a:ea typeface="맑은 고딕"/>
-              </a:rPr>
-              <a:t>–  </a:t>
-            </a:r>
-            <a:r>
-              <a:rPr sz="1300">
-                <a:solidFill>
-                  <a:srgbClr val="4A5666"/>
-                </a:solidFill>
-                <a:latin typeface="맑은 고딕"/>
-                <a:ea typeface="맑은 고딕"/>
-              </a:rPr>
-              <a:t>robustness 점검 — smoothing window(median 1/3/5)로 노이즈가 아닌 추세를 보게, 색과 투명도만 바꿔 렌더해 색이 아니라 패턴을 학습하는지 확인</a:t>
-            </a:r>
-          </a:p>
-        </p:txBody>
-      </p:sp>
-      <p:sp>
-        <p:nvSpPr>
-          <p:cNvPr id="6" name="Rounded Rectangle 5"/>
-          <p:cNvSpPr/>
-          <p:nvPr/>
-        </p:nvSpPr>
-        <p:spPr>
-          <a:xfrm>
-            <a:off x="7045452" y="4023360"/>
-            <a:ext cx="4567428" cy="384048"/>
-          </a:xfrm>
-          <a:prstGeom prst="roundRect">
-            <a:avLst/>
-          </a:prstGeom>
-          <a:solidFill>
-            <a:srgbClr val="E6F7F6"/>
-          </a:solidFill>
-          <a:ln>
-            <a:noFill/>
-          </a:ln>
-          <a:effectLst/>
-        </p:spPr>
-        <p:style>
-          <a:lnRef idx="1">
-            <a:schemeClr val="accent1"/>
-          </a:lnRef>
-          <a:fillRef idx="3">
-            <a:schemeClr val="accent1"/>
-          </a:fillRef>
-          <a:effectRef idx="2">
-            <a:schemeClr val="accent1"/>
-          </a:effectRef>
-          <a:fontRef idx="minor">
-            <a:schemeClr val="lt1"/>
-          </a:fontRef>
-        </p:style>
-        <p:txBody>
-          <a:bodyPr rtlCol="0" anchor="ctr"/>
-          <a:lstStyle/>
-          <a:p>
-            <a:pPr algn="ctr"/>
-          </a:p>
-        </p:txBody>
-      </p:sp>
-      <p:sp>
-        <p:nvSpPr>
-          <p:cNvPr id="7" name="Rectangle 6"/>
-          <p:cNvSpPr/>
-          <p:nvPr/>
-        </p:nvSpPr>
-        <p:spPr>
-          <a:xfrm>
-            <a:off x="7045452" y="4023360"/>
-            <a:ext cx="82296" cy="384048"/>
-          </a:xfrm>
-          <a:prstGeom prst="rect">
-            <a:avLst/>
-          </a:prstGeom>
-          <a:solidFill>
-            <a:srgbClr val="5B9BD5"/>
-          </a:solidFill>
-          <a:ln>
-            <a:noFill/>
-          </a:ln>
-          <a:effectLst/>
-        </p:spPr>
-        <p:style>
-          <a:lnRef idx="1">
-            <a:schemeClr val="accent1"/>
-          </a:lnRef>
-          <a:fillRef idx="3">
-            <a:schemeClr val="accent1"/>
-          </a:fillRef>
-          <a:effectRef idx="2">
-            <a:schemeClr val="accent1"/>
-          </a:effectRef>
-          <a:fontRef idx="minor">
-            <a:schemeClr val="lt1"/>
-          </a:fontRef>
-        </p:style>
-        <p:txBody>
-          <a:bodyPr rtlCol="0" anchor="ctr"/>
-          <a:lstStyle/>
-          <a:p>
-            <a:pPr algn="ctr"/>
-          </a:p>
-        </p:txBody>
-      </p:sp>
-      <p:sp>
-        <p:nvSpPr>
-          <p:cNvPr id="8" name="TextBox 7"/>
-          <p:cNvSpPr txBox="1"/>
-          <p:nvPr/>
-        </p:nvSpPr>
-        <p:spPr>
-          <a:xfrm>
-            <a:off x="7228332" y="4023360"/>
-            <a:ext cx="4238244" cy="384048"/>
-          </a:xfrm>
-          <a:prstGeom prst="rect">
-            <a:avLst/>
-          </a:prstGeom>
-          <a:noFill/>
-        </p:spPr>
-        <p:txBody>
-          <a:bodyPr wrap="square" anchor="ctr" lIns="0" rIns="0" tIns="0" bIns="0">
-            <a:spAutoFit/>
-          </a:bodyPr>
-          <a:lstStyle/>
-          <a:p>
-            <a:pPr algn="ctr"/>
-            <a:r>
-              <a:rPr sz="1350" b="1">
-                <a:solidFill>
-                  <a:srgbClr val="0F1E3D"/>
-                </a:solidFill>
-                <a:latin typeface="맑은 고딕"/>
-                <a:ea typeface="맑은 고딕"/>
-              </a:rPr>
-              <a:t>F1 0.9967 / recall 0.9987 (PoC, 생성셋)</a:t>
-            </a:r>
-          </a:p>
-        </p:txBody>
-      </p:sp>
-      <p:sp>
-        <p:nvSpPr>
-          <p:cNvPr id="9" name="Rectangle 8"/>
-          <p:cNvSpPr/>
-          <p:nvPr/>
-        </p:nvSpPr>
-        <p:spPr>
-          <a:xfrm>
-            <a:off x="4965336" y="4453272"/>
-            <a:ext cx="2322288" cy="1499328"/>
-          </a:xfrm>
-          <a:prstGeom prst="rect">
-            <a:avLst/>
-          </a:prstGeom>
-          <a:solidFill>
-            <a:srgbClr val="FFFFFF"/>
-          </a:solidFill>
-          <a:ln w="12700">
-            <a:solidFill>
-              <a:srgbClr val="D7DEEA"/>
-            </a:solidFill>
-          </a:ln>
-          <a:effectLst/>
-        </p:spPr>
-        <p:style>
-          <a:lnRef idx="1">
-            <a:schemeClr val="accent1"/>
-          </a:lnRef>
-          <a:fillRef idx="3">
-            <a:schemeClr val="accent1"/>
-          </a:fillRef>
-          <a:effectRef idx="2">
-            <a:schemeClr val="accent1"/>
-          </a:effectRef>
-          <a:fontRef idx="minor">
-            <a:schemeClr val="lt1"/>
-          </a:fontRef>
-        </p:style>
-        <p:txBody>
-          <a:bodyPr rtlCol="0" anchor="ctr"/>
-          <a:lstStyle/>
-          <a:p>
-            <a:pPr algn="ctr"/>
-          </a:p>
-        </p:txBody>
-      </p:sp>
-      <p:pic>
-        <p:nvPicPr>
-          <p:cNvPr id="10" name="Picture 9" descr="trend_context.png"/>
-          <p:cNvPicPr>
-            <a:picLocks noChangeAspect="1"/>
-          </p:cNvPicPr>
-          <p:nvPr/>
-        </p:nvPicPr>
-        <p:blipFill>
-          <a:blip r:embed="rId2"/>
-          <a:stretch>
-            <a:fillRect/>
-          </a:stretch>
-        </p:blipFill>
-        <p:spPr>
-          <a:xfrm>
-            <a:off x="4974336" y="4462272"/>
-            <a:ext cx="2304288" cy="1481328"/>
-          </a:xfrm>
-          <a:prstGeom prst="rect">
-            <a:avLst/>
-          </a:prstGeom>
-        </p:spPr>
-      </p:pic>
-      <p:sp>
-        <p:nvSpPr>
-          <p:cNvPr id="11" name="TextBox 10"/>
-          <p:cNvSpPr txBox="1"/>
-          <p:nvPr/>
-        </p:nvSpPr>
-        <p:spPr>
-          <a:xfrm>
-            <a:off x="640080" y="5961888"/>
-            <a:ext cx="10972800" cy="274320"/>
-          </a:xfrm>
-          <a:prstGeom prst="rect">
-            <a:avLst/>
-          </a:prstGeom>
-          <a:noFill/>
-        </p:spPr>
-        <p:txBody>
-          <a:bodyPr wrap="square" anchor="t" lIns="0" rIns="0" tIns="0" bIns="0">
-            <a:spAutoFit/>
-          </a:bodyPr>
-          <a:lstStyle/>
-          <a:p>
-            <a:pPr algn="ctr"/>
-            <a:r>
-              <a:rPr sz="1300">
-                <a:solidFill>
-                  <a:srgbClr val="3A485C"/>
-                </a:solidFill>
-                <a:latin typeface="맑은 고딕"/>
-                <a:ea typeface="맑은 고딕"/>
-              </a:rPr>
-              <a:t>context 이상 예시 — 정상(파랑)과 fleet 대비 이탈(빨강)을 1차 gate가 분리. 통과 시 2차에서 유형(avg/std/spike/drift/context) 진단</a:t>
-            </a:r>
-          </a:p>
-        </p:txBody>
-      </p:sp>
-      <p:sp>
-        <p:nvSpPr>
-          <p:cNvPr id="12" name="TextBox 11"/>
-          <p:cNvSpPr txBox="1"/>
-          <p:nvPr/>
-        </p:nvSpPr>
-        <p:spPr>
-          <a:xfrm>
-            <a:off x="457200" y="6437376"/>
-            <a:ext cx="8229600" cy="292608"/>
-          </a:xfrm>
-          <a:prstGeom prst="rect">
-            <a:avLst/>
-          </a:prstGeom>
-          <a:noFill/>
-        </p:spPr>
-        <p:txBody>
-          <a:bodyPr wrap="square" anchor="ctr" lIns="0" rIns="0" tIns="0" bIns="0">
-            <a:spAutoFit/>
-          </a:bodyPr>
-          <a:lstStyle/>
-          <a:p>
-            <a:pPr algn="l"/>
-            <a:r>
-              <a:rPr sz="900">
-                <a:solidFill>
-                  <a:srgbClr val="6B7280"/>
-                </a:solidFill>
-                <a:latin typeface="맑은 고딕"/>
-                <a:ea typeface="맑은 고딕"/>
-              </a:rPr>
-              <a:t>최호길 | QIE Data Science | AI Specialist 인증</a:t>
-            </a:r>
-          </a:p>
-        </p:txBody>
-      </p:sp>
-      <p:sp>
-        <p:nvSpPr>
-          <p:cNvPr id="13" name="TextBox 12"/>
-          <p:cNvSpPr txBox="1"/>
-          <p:nvPr/>
-        </p:nvSpPr>
-        <p:spPr>
-          <a:xfrm>
-            <a:off x="10972800" y="6437376"/>
-            <a:ext cx="758952" cy="292608"/>
-          </a:xfrm>
-          <a:prstGeom prst="rect">
-            <a:avLst/>
-          </a:prstGeom>
-          <a:noFill/>
-        </p:spPr>
-        <p:txBody>
-          <a:bodyPr wrap="square" anchor="ctr" lIns="0" rIns="0" tIns="0" bIns="0">
-            <a:spAutoFit/>
-          </a:bodyPr>
-          <a:lstStyle/>
-          <a:p>
-            <a:pPr algn="r"/>
-            <a:r>
-              <a:rPr sz="900">
-                <a:solidFill>
-                  <a:srgbClr val="6B7280"/>
-                </a:solidFill>
-                <a:latin typeface="맑은 고딕"/>
-                <a:ea typeface="맑은 고딕"/>
-              </a:rPr>
-              <a:t>6</a:t>
             </a:r>
           </a:p>
         </p:txBody>

--- a/recommendation/presentation/발표_P3_데이터생성_최호길.pptx
+++ b/recommendation/presentation/발표_P3_데이터생성_최호길.pptx
@@ -4051,7 +4051,7 @@
                 <a:latin typeface="맑은 고딕"/>
                 <a:ea typeface="맑은 고딕"/>
               </a:rPr>
-              <a:t>P3 | episode 생성 방식</a:t>
+              <a:t>P3 | 순차 episode 생성</a:t>
             </a:r>
           </a:p>
         </p:txBody>
@@ -4087,7 +4087,7 @@
                 <a:latin typeface="맑은 고딕"/>
                 <a:ea typeface="맑은 고딕"/>
               </a:rPr>
-              <a:t>현장 판정 기준을 episode(구간) 생성 규칙으로 옮겼다</a:t>
+              <a:t>현장 판정 기준을 순차 episode 생성 규칙으로 옮겼다</a:t>
             </a:r>
           </a:p>
         </p:txBody>
@@ -4164,7 +4164,7 @@
                 <a:latin typeface="맑은 고딕"/>
                 <a:ea typeface="맑은 고딕"/>
               </a:rPr>
-              <a:t>정상 baseline은 episode(구간)를 이어 붙여 만듭니다. episode마다 측정 밀도(밀집/희소/결핍)와 산포가 다르고, 변동은 노이즈 3종으로 재현합니다</a:t>
+              <a:t>정상 baseline은 episode(자기완결 한 구간)를 하나씩 완결 생성하고 다음으로 넘어가며 이어 붙입니다. episode마다 측정 밀도(밀집/희소/결핍)와 산포가 다르고, 변동은 노이즈 3종으로 재현합니다</a:t>
             </a:r>
           </a:p>
           <a:p>
@@ -4191,7 +4191,7 @@
                 <a:latin typeface="맑은 고딕"/>
                 <a:ea typeface="맑은 고딕"/>
               </a:rPr>
-              <a:t>episode는 사내 표현이고, 학계 표준 용어로는 piecewise-stationary / regime segment입니다</a:t>
+              <a:t>순차 episode 생성(sequential episode generation) — episode는 자기완결 한 구간(=segment), 이어 붙여 trend 한 장을 구성</a:t>
             </a:r>
           </a:p>
         </p:txBody>
@@ -4297,7 +4297,7 @@
                 <a:latin typeface="맑은 고딕"/>
                 <a:ea typeface="맑은 고딕"/>
               </a:rPr>
-              <a:t>현업(BBD / Overlay / CD) trend 판정 경험을 영역, 노이즈, 이상 규칙으로 코드화</a:t>
+              <a:t>현업(BBD / Overlay / CD) trend 판정 경험을 영역, 노이즈, 이상 규칙으로 코드화 — episode를 순차로 생성</a:t>
             </a:r>
           </a:p>
         </p:txBody>

--- a/recommendation/presentation/발표_P3_데이터생성_최호길.pptx
+++ b/recommendation/presentation/발표_P3_데이터생성_최호길.pptx
@@ -9,6 +9,7 @@
     <p:sldId id="257" r:id="rId8"/>
     <p:sldId id="258" r:id="rId9"/>
     <p:sldId id="259" r:id="rId10"/>
+    <p:sldId id="260" r:id="rId11"/>
   </p:sldIdLst>
   <p:sldSz cx="12191695" cy="6858000" type="screen4x3"/>
   <p:notesSz cx="6858000" cy="9144000"/>
@@ -4087,7 +4088,7 @@
                 <a:latin typeface="맑은 고딕"/>
                 <a:ea typeface="맑은 고딕"/>
               </a:rPr>
-              <a:t>현장 판정 기준을 순차 episode 생성 규칙으로 옮겼다</a:t>
+              <a:t>순차 episode 기반 trend 생성 (Sequential Episode-Based)</a:t>
             </a:r>
           </a:p>
         </p:txBody>
@@ -4137,7 +4138,7 @@
                 <a:latin typeface="맑은 고딕"/>
                 <a:ea typeface="맑은 고딕"/>
               </a:rPr>
-              <a:t>한 chart는 같은 device/step/item을 여러 설비(fleet)가 함께 찍은 trend이고, 그중 한 설비를 판정 대상으로 봅니다</a:t>
+              <a:t>한 chart는 같은 device/step/item을 여러 설비(fleet)가 함께 찍은 trend이고, 그중 한 설비(target)를 판정 대상으로 봅니다 (fleet-conditioned)</a:t>
             </a:r>
           </a:p>
           <a:p>
@@ -4164,7 +4165,7 @@
                 <a:latin typeface="맑은 고딕"/>
                 <a:ea typeface="맑은 고딕"/>
               </a:rPr>
-              <a:t>정상 baseline은 episode(자기완결 한 구간)를 하나씩 완결 생성하고 다음으로 넘어가며 이어 붙입니다. episode마다 측정 밀도(밀집/희소/결핍)와 산포가 다르고, 변동은 노이즈 3종으로 재현합니다</a:t>
+              <a:t>정상 baseline은 episode(자기완결 한 구간)를 하나씩 완결 생성 후 이어 붙입니다. episode마다 길이/측정 밀도(밀집/희소/결핍)/결측 패턴이 다르고, 노이즈는 chart당 1종(Gaussian/AR/Laplacian)을 공유합니다</a:t>
             </a:r>
           </a:p>
           <a:p>
@@ -4191,7 +4192,7 @@
                 <a:latin typeface="맑은 고딕"/>
                 <a:ea typeface="맑은 고딕"/>
               </a:rPr>
-              <a:t>순차 episode 생성(sequential episode generation) — episode는 자기완결 한 구간(=segment), 이어 붙여 trend 한 장을 구성</a:t>
+              <a:t>episode = 자기완결 trend segment. 강화학습 episode 개념(완결 단위 순차 생성) 차용 — 시계열 표준어는 segment</a:t>
             </a:r>
           </a:p>
         </p:txBody>
@@ -4297,7 +4298,7 @@
                 <a:latin typeface="맑은 고딕"/>
                 <a:ea typeface="맑은 고딕"/>
               </a:rPr>
-              <a:t>현업(BBD / Overlay / CD) trend 판정 경험을 영역, 노이즈, 이상 규칙으로 코드화 — episode를 순차로 생성</a:t>
+              <a:t>현업(BBD / Overlay / CD) trend 판정 경험을 영역(밀도·결측), 노이즈, 이상 규칙으로 코드화</a:t>
             </a:r>
           </a:p>
         </p:txBody>
@@ -5032,7 +5033,7 @@
                 <a:latin typeface="맑은 고딕"/>
                 <a:ea typeface="맑은 고딕"/>
               </a:rPr>
-              <a:t>생성 데이터로 검증 — test 1,500 중 놓친 불량 1건</a:t>
+              <a:t>1차 gate 검증 — test 1,500 중 놓친 불량 1건</a:t>
             </a:r>
           </a:p>
         </p:txBody>
@@ -5102,7 +5103,27 @@
                 <a:latin typeface="맑은 고딕"/>
                 <a:ea typeface="맑은 고딕"/>
               </a:rPr>
-              <a:t>로 정상/이상 1차 판정하고(Focal loss, normal threshold 0.9), 놓침(FN) 최소화를 목표로 했습니다</a:t>
+              <a:t>로 정상/이상 1차 판정(Focal loss, NT 0.9). test 1,500(정상 750/불량 750)에서 </a:t>
+            </a:r>
+            <a:r>
+              <a:rPr sz="1400" b="1">
+                <a:solidFill>
+                  <a:srgbClr val="0F1E3D"/>
+                </a:solidFill>
+                <a:latin typeface="맑은 고딕"/>
+                <a:ea typeface="맑은 고딕"/>
+              </a:rPr>
+              <a:t>F1 0.9967, 이상 recall 0.9987</a:t>
+            </a:r>
+            <a:r>
+              <a:rPr sz="1400">
+                <a:solidFill>
+                  <a:srgbClr val="1A1F2E"/>
+                </a:solidFill>
+                <a:latin typeface="맑은 고딕"/>
+                <a:ea typeface="맑은 고딕"/>
+              </a:rPr>
+              <a:t> — 놓친 불량 1건(std), 정상 오경보 4건</a:t>
             </a:r>
           </a:p>
           <a:p>
@@ -5129,27 +5150,7 @@
                 <a:latin typeface="맑은 고딕"/>
                 <a:ea typeface="맑은 고딕"/>
               </a:rPr>
-              <a:t>test 1,500(정상 750 / 불량 750)에서 </a:t>
-            </a:r>
-            <a:r>
-              <a:rPr sz="1400" b="1">
-                <a:solidFill>
-                  <a:srgbClr val="0F1E3D"/>
-                </a:solidFill>
-                <a:latin typeface="맑은 고딕"/>
-                <a:ea typeface="맑은 고딕"/>
-              </a:rPr>
-              <a:t>binary F1 0.9967, 이상 recall 0.9987</a:t>
-            </a:r>
-            <a:r>
-              <a:rPr sz="1400">
-                <a:solidFill>
-                  <a:srgbClr val="1A1F2E"/>
-                </a:solidFill>
-                <a:latin typeface="맑은 고딕"/>
-                <a:ea typeface="맑은 고딕"/>
-              </a:rPr>
-              <a:t> — 놓친 불량 1건(std), 정상 오경보 4건. 5-seed 평균 F1 0.9975</a:t>
+              <a:t>5종 이상 중 4종은 FN 0, 미세 산포(std)만 1건. NT를 올리면 FN↓ / FP↑ — 운영은 0.9 균형점. 5-seed 평균 F1 0.9975로 안정적</a:t>
             </a:r>
           </a:p>
           <a:p>
@@ -5176,7 +5177,7 @@
                 <a:latin typeface="맑은 고딕"/>
                 <a:ea typeface="맑은 고딕"/>
               </a:rPr>
-              <a:t>통과한 불량은 2차에서 유형 진단(type 정확도 0.73, 주 혼동 drift↔mean_shift). NT를 올리면 FN↓ / FP↑ — 운영은 0.9 균형점</a:t>
+              <a:t>통과한 불량은 2차에서 유형 진단(type 정확도 0.73, 주 혼동 drift↔mean_shift)</a:t>
             </a:r>
           </a:p>
         </p:txBody>
@@ -5479,6 +5480,376 @@
                 <a:ea typeface="맑은 고딕"/>
               </a:rPr>
               <a:t>4</a:t>
+            </a:r>
+          </a:p>
+        </p:txBody>
+      </p:sp>
+    </p:spTree>
+  </p:cSld>
+  <p:clrMapOvr>
+    <a:masterClrMapping/>
+  </p:clrMapOvr>
+</p:sld>
+</file>
+
+<file path=ppt/slides/slide5.xml><?xml version="1.0" encoding="utf-8"?>
+<p:sld xmlns:a="http://schemas.openxmlformats.org/drawingml/2006/main" xmlns:p="http://schemas.openxmlformats.org/presentationml/2006/main" xmlns:r="http://schemas.openxmlformats.org/officeDocument/2006/relationships">
+  <p:cSld>
+    <p:bg>
+      <p:bgPr>
+        <a:solidFill>
+          <a:srgbClr val="FFFFFF"/>
+        </a:solidFill>
+        <a:effectLst/>
+      </p:bgPr>
+    </p:bg>
+    <p:spTree>
+      <p:nvGrpSpPr>
+        <p:cNvPr id="1" name=""/>
+        <p:cNvGrpSpPr/>
+        <p:nvPr/>
+      </p:nvGrpSpPr>
+      <p:grpSpPr/>
+      <p:sp>
+        <p:nvSpPr>
+          <p:cNvPr id="2" name="Rectangle 1"/>
+          <p:cNvSpPr/>
+          <p:nvPr/>
+        </p:nvSpPr>
+        <p:spPr>
+          <a:xfrm>
+            <a:off x="640080" y="502920"/>
+            <a:ext cx="123444" cy="768096"/>
+          </a:xfrm>
+          <a:prstGeom prst="rect">
+            <a:avLst/>
+          </a:prstGeom>
+          <a:solidFill>
+            <a:srgbClr val="CFD4DB"/>
+          </a:solidFill>
+          <a:ln>
+            <a:noFill/>
+          </a:ln>
+          <a:effectLst/>
+        </p:spPr>
+        <p:style>
+          <a:lnRef idx="1">
+            <a:schemeClr val="accent1"/>
+          </a:lnRef>
+          <a:fillRef idx="3">
+            <a:schemeClr val="accent1"/>
+          </a:fillRef>
+          <a:effectRef idx="2">
+            <a:schemeClr val="accent1"/>
+          </a:effectRef>
+          <a:fontRef idx="minor">
+            <a:schemeClr val="lt1"/>
+          </a:fontRef>
+        </p:style>
+        <p:txBody>
+          <a:bodyPr rtlCol="0" anchor="ctr"/>
+          <a:lstStyle/>
+          <a:p>
+            <a:pPr algn="ctr"/>
+          </a:p>
+        </p:txBody>
+      </p:sp>
+      <p:sp>
+        <p:nvSpPr>
+          <p:cNvPr id="3" name="TextBox 2"/>
+          <p:cNvSpPr txBox="1"/>
+          <p:nvPr/>
+        </p:nvSpPr>
+        <p:spPr>
+          <a:xfrm>
+            <a:off x="932688" y="448056"/>
+            <a:ext cx="10881360" cy="256032"/>
+          </a:xfrm>
+          <a:prstGeom prst="rect">
+            <a:avLst/>
+          </a:prstGeom>
+          <a:noFill/>
+        </p:spPr>
+        <p:txBody>
+          <a:bodyPr wrap="square" anchor="t" lIns="0" rIns="0" tIns="0" bIns="0">
+            <a:spAutoFit/>
+          </a:bodyPr>
+          <a:lstStyle/>
+          <a:p>
+            <a:pPr algn="l"/>
+            <a:r>
+              <a:rPr sz="1300" b="1">
+                <a:solidFill>
+                  <a:srgbClr val="8A929E"/>
+                </a:solidFill>
+                <a:latin typeface="맑은 고딕"/>
+                <a:ea typeface="맑은 고딕"/>
+              </a:rPr>
+              <a:t>P3 | 모델 근거 (Grad-CAM)</a:t>
+            </a:r>
+          </a:p>
+        </p:txBody>
+      </p:sp>
+      <p:sp>
+        <p:nvSpPr>
+          <p:cNvPr id="4" name="TextBox 3"/>
+          <p:cNvSpPr txBox="1"/>
+          <p:nvPr/>
+        </p:nvSpPr>
+        <p:spPr>
+          <a:xfrm>
+            <a:off x="932688" y="704088"/>
+            <a:ext cx="10881360" cy="603504"/>
+          </a:xfrm>
+          <a:prstGeom prst="rect">
+            <a:avLst/>
+          </a:prstGeom>
+          <a:noFill/>
+        </p:spPr>
+        <p:txBody>
+          <a:bodyPr wrap="square" anchor="t" lIns="0" rIns="0" tIns="0" bIns="0">
+            <a:spAutoFit/>
+          </a:bodyPr>
+          <a:lstStyle/>
+          <a:p>
+            <a:pPr algn="l"/>
+            <a:r>
+              <a:rPr sz="3100" b="1">
+                <a:solidFill>
+                  <a:srgbClr val="0F1E3D"/>
+                </a:solidFill>
+                <a:latin typeface="맑은 고딕"/>
+                <a:ea typeface="맑은 고딕"/>
+              </a:rPr>
+              <a:t>모델이 색이 아니라 이상 구간을 본다</a:t>
+            </a:r>
+          </a:p>
+        </p:txBody>
+      </p:sp>
+      <p:sp>
+        <p:nvSpPr>
+          <p:cNvPr id="5" name="TextBox 4"/>
+          <p:cNvSpPr txBox="1"/>
+          <p:nvPr/>
+        </p:nvSpPr>
+        <p:spPr>
+          <a:xfrm>
+            <a:off x="640080" y="1828800"/>
+            <a:ext cx="10972800" cy="566928"/>
+          </a:xfrm>
+          <a:prstGeom prst="rect">
+            <a:avLst/>
+          </a:prstGeom>
+          <a:noFill/>
+        </p:spPr>
+        <p:txBody>
+          <a:bodyPr wrap="square" anchor="t" lIns="0" rIns="0" tIns="0" bIns="0">
+            <a:spAutoFit/>
+          </a:bodyPr>
+          <a:lstStyle/>
+          <a:p>
+            <a:pPr marL="274320" indent="-274320">
+              <a:spcAft>
+                <a:spcPts val="500"/>
+              </a:spcAft>
+            </a:pPr>
+            <a:r>
+              <a:rPr sz="1450" b="0">
+                <a:solidFill>
+                  <a:srgbClr val="5B9BD5"/>
+                </a:solidFill>
+                <a:latin typeface="맑은 고딕"/>
+                <a:ea typeface="맑은 고딕"/>
+              </a:rPr>
+              <a:t>●  </a:t>
+            </a:r>
+            <a:r>
+              <a:rPr sz="1450">
+                <a:solidFill>
+                  <a:srgbClr val="1A1F2E"/>
+                </a:solidFill>
+                <a:latin typeface="맑은 고딕"/>
+                <a:ea typeface="맑은 고딕"/>
+              </a:rPr>
+              <a:t>Grad-CAM으로 보면 mean shift/std/spike/drift는 trend 오른쪽 끝(이상 구간), context는 전체에 모델 주목이 집중됩니다 — 색이나 대비가 아니라 실제 패턴을 학습</a:t>
+            </a:r>
+          </a:p>
+        </p:txBody>
+      </p:sp>
+      <p:sp>
+        <p:nvSpPr>
+          <p:cNvPr id="6" name="Rectangle 5"/>
+          <p:cNvSpPr/>
+          <p:nvPr/>
+        </p:nvSpPr>
+        <p:spPr>
+          <a:xfrm>
+            <a:off x="3984768" y="2514744"/>
+            <a:ext cx="4283424" cy="3437856"/>
+          </a:xfrm>
+          <a:prstGeom prst="rect">
+            <a:avLst/>
+          </a:prstGeom>
+          <a:solidFill>
+            <a:srgbClr val="FFFFFF"/>
+          </a:solidFill>
+          <a:ln w="12700">
+            <a:solidFill>
+              <a:srgbClr val="D7DEEA"/>
+            </a:solidFill>
+          </a:ln>
+          <a:effectLst/>
+        </p:spPr>
+        <p:style>
+          <a:lnRef idx="1">
+            <a:schemeClr val="accent1"/>
+          </a:lnRef>
+          <a:fillRef idx="3">
+            <a:schemeClr val="accent1"/>
+          </a:fillRef>
+          <a:effectRef idx="2">
+            <a:schemeClr val="accent1"/>
+          </a:effectRef>
+          <a:fontRef idx="minor">
+            <a:schemeClr val="lt1"/>
+          </a:fontRef>
+        </p:style>
+        <p:txBody>
+          <a:bodyPr rtlCol="0" anchor="ctr"/>
+          <a:lstStyle/>
+          <a:p>
+            <a:pPr algn="ctr"/>
+          </a:p>
+        </p:txBody>
+      </p:sp>
+      <p:pic>
+        <p:nvPicPr>
+          <p:cNvPr id="7" name="Picture 6" descr="p3_res_gradcam.png"/>
+          <p:cNvPicPr>
+            <a:picLocks noChangeAspect="1"/>
+          </p:cNvPicPr>
+          <p:nvPr/>
+        </p:nvPicPr>
+        <p:blipFill>
+          <a:blip r:embed="rId2"/>
+          <a:stretch>
+            <a:fillRect/>
+          </a:stretch>
+        </p:blipFill>
+        <p:spPr>
+          <a:xfrm>
+            <a:off x="3993768" y="2523744"/>
+            <a:ext cx="4265424" cy="3419856"/>
+          </a:xfrm>
+          <a:prstGeom prst="rect">
+            <a:avLst/>
+          </a:prstGeom>
+        </p:spPr>
+      </p:pic>
+      <p:sp>
+        <p:nvSpPr>
+          <p:cNvPr id="8" name="TextBox 7"/>
+          <p:cNvSpPr txBox="1"/>
+          <p:nvPr/>
+        </p:nvSpPr>
+        <p:spPr>
+          <a:xfrm>
+            <a:off x="640080" y="5961888"/>
+            <a:ext cx="10972800" cy="274320"/>
+          </a:xfrm>
+          <a:prstGeom prst="rect">
+            <a:avLst/>
+          </a:prstGeom>
+          <a:noFill/>
+        </p:spPr>
+        <p:txBody>
+          <a:bodyPr wrap="square" anchor="t" lIns="0" rIns="0" tIns="0" bIns="0">
+            <a:spAutoFit/>
+          </a:bodyPr>
+          <a:lstStyle/>
+          <a:p>
+            <a:pPr algn="ctr"/>
+            <a:r>
+              <a:rPr sz="1300">
+                <a:solidFill>
+                  <a:srgbClr val="3A485C"/>
+                </a:solidFill>
+                <a:latin typeface="맑은 고딕"/>
+                <a:ea typeface="맑은 고딕"/>
+              </a:rPr>
+              <a:t>클래스별(정상 + 이상 5종) Grad-CAM — 빨강일수록 모델이 강하게 주목한 영역 (실제 학습 결과)</a:t>
+            </a:r>
+          </a:p>
+        </p:txBody>
+      </p:sp>
+      <p:sp>
+        <p:nvSpPr>
+          <p:cNvPr id="9" name="TextBox 8"/>
+          <p:cNvSpPr txBox="1"/>
+          <p:nvPr/>
+        </p:nvSpPr>
+        <p:spPr>
+          <a:xfrm>
+            <a:off x="457200" y="6437376"/>
+            <a:ext cx="8229600" cy="292608"/>
+          </a:xfrm>
+          <a:prstGeom prst="rect">
+            <a:avLst/>
+          </a:prstGeom>
+          <a:noFill/>
+        </p:spPr>
+        <p:txBody>
+          <a:bodyPr wrap="square" anchor="ctr" lIns="0" rIns="0" tIns="0" bIns="0">
+            <a:spAutoFit/>
+          </a:bodyPr>
+          <a:lstStyle/>
+          <a:p>
+            <a:pPr algn="l"/>
+            <a:r>
+              <a:rPr sz="900">
+                <a:solidFill>
+                  <a:srgbClr val="6B7280"/>
+                </a:solidFill>
+                <a:latin typeface="맑은 고딕"/>
+                <a:ea typeface="맑은 고딕"/>
+              </a:rPr>
+              <a:t>최호길 | QIE Data Science | AI Specialist 인증</a:t>
+            </a:r>
+          </a:p>
+        </p:txBody>
+      </p:sp>
+      <p:sp>
+        <p:nvSpPr>
+          <p:cNvPr id="10" name="TextBox 9"/>
+          <p:cNvSpPr txBox="1"/>
+          <p:nvPr/>
+        </p:nvSpPr>
+        <p:spPr>
+          <a:xfrm>
+            <a:off x="10972800" y="6437376"/>
+            <a:ext cx="758952" cy="292608"/>
+          </a:xfrm>
+          <a:prstGeom prst="rect">
+            <a:avLst/>
+          </a:prstGeom>
+          <a:noFill/>
+        </p:spPr>
+        <p:txBody>
+          <a:bodyPr wrap="square" anchor="ctr" lIns="0" rIns="0" tIns="0" bIns="0">
+            <a:spAutoFit/>
+          </a:bodyPr>
+          <a:lstStyle/>
+          <a:p>
+            <a:pPr algn="r"/>
+            <a:r>
+              <a:rPr sz="900">
+                <a:solidFill>
+                  <a:srgbClr val="6B7280"/>
+                </a:solidFill>
+                <a:latin typeface="맑은 고딕"/>
+                <a:ea typeface="맑은 고딕"/>
+              </a:rPr>
+              <a:t>5</a:t>
             </a:r>
           </a:p>
         </p:txBody>

--- a/recommendation/presentation/발표_P3_데이터생성_최호길.pptx
+++ b/recommendation/presentation/발표_P3_데이터생성_최호길.pptx
@@ -9,7 +9,6 @@
     <p:sldId id="257" r:id="rId8"/>
     <p:sldId id="258" r:id="rId9"/>
     <p:sldId id="259" r:id="rId10"/>
-    <p:sldId id="260" r:id="rId11"/>
   </p:sldIdLst>
   <p:sldSz cx="12191695" cy="6858000" type="screen4x3"/>
   <p:notesSz cx="6858000" cy="9144000"/>
@@ -4997,7 +4996,7 @@
                 <a:latin typeface="맑은 고딕"/>
                 <a:ea typeface="맑은 고딕"/>
               </a:rPr>
-              <a:t>P3 | 1차 binary gate (PoC)</a:t>
+              <a:t>P3 | 조건별 실험</a:t>
             </a:r>
           </a:p>
         </p:txBody>
@@ -5033,7 +5032,7 @@
                 <a:latin typeface="맑은 고딕"/>
                 <a:ea typeface="맑은 고딕"/>
               </a:rPr>
-              <a:t>1차 gate 검증 — test 1,500 중 놓친 불량 1건</a:t>
+              <a:t>조건별 실험으로 성능을 끌어올렸다 (F1 0.9944 → 0.9988)</a:t>
             </a:r>
           </a:p>
         </p:txBody>
@@ -5047,7 +5046,7 @@
         <p:spPr>
           <a:xfrm>
             <a:off x="640080" y="1828800"/>
-            <a:ext cx="10972800" cy="1463040"/>
+            <a:ext cx="10972800" cy="1371600"/>
           </a:xfrm>
           <a:prstGeom prst="rect">
             <a:avLst/>
@@ -5083,47 +5082,7 @@
                 <a:latin typeface="맑은 고딕"/>
                 <a:ea typeface="맑은 고딕"/>
               </a:rPr>
-              <a:t>trend 이미지를 </a:t>
-            </a:r>
-            <a:r>
-              <a:rPr sz="1400" b="1">
-                <a:solidFill>
-                  <a:srgbClr val="0F1E3D"/>
-                </a:solidFill>
-                <a:latin typeface="맑은 고딕"/>
-                <a:ea typeface="맑은 고딕"/>
-              </a:rPr>
-              <a:t>ConvNeXtV2-Tiny</a:t>
-            </a:r>
-            <a:r>
-              <a:rPr sz="1400">
-                <a:solidFill>
-                  <a:srgbClr val="1A1F2E"/>
-                </a:solidFill>
-                <a:latin typeface="맑은 고딕"/>
-                <a:ea typeface="맑은 고딕"/>
-              </a:rPr>
-              <a:t>로 정상/이상 1차 판정(Focal loss, NT 0.9). test 1,500(정상 750/불량 750)에서 </a:t>
-            </a:r>
-            <a:r>
-              <a:rPr sz="1400" b="1">
-                <a:solidFill>
-                  <a:srgbClr val="0F1E3D"/>
-                </a:solidFill>
-                <a:latin typeface="맑은 고딕"/>
-                <a:ea typeface="맑은 고딕"/>
-              </a:rPr>
-              <a:t>F1 0.9967, 이상 recall 0.9987</a:t>
-            </a:r>
-            <a:r>
-              <a:rPr sz="1400">
-                <a:solidFill>
-                  <a:srgbClr val="1A1F2E"/>
-                </a:solidFill>
-                <a:latin typeface="맑은 고딕"/>
-                <a:ea typeface="맑은 고딕"/>
-              </a:rPr>
-              <a:t> — 놓친 불량 1건(std), 정상 오경보 4건</a:t>
+              <a:t>여러 학습 조건을 단독(single-axis)으로 바꿔 5-seed로 검증했습니다 (baseline F1 0.9944, 놓친 불량 FN 4.6)</a:t>
             </a:r>
           </a:p>
           <a:p>
@@ -5150,7 +5109,87 @@
                 <a:latin typeface="맑은 고딕"/>
                 <a:ea typeface="맑은 고딕"/>
               </a:rPr>
-              <a:t>5종 이상 중 4종은 FN 0, 미세 산포(std)만 1건. NT를 올리면 FN↓ / FP↑ — 운영은 0.9 균형점. 5-seed 평균 F1 0.9975로 안정적</a:t>
+              <a:t>정상 비율↑, </a:t>
+            </a:r>
+            <a:r>
+              <a:rPr sz="1400" b="1">
+                <a:solidFill>
+                  <a:srgbClr val="0F1E3D"/>
+                </a:solidFill>
+                <a:latin typeface="맑은 고딕"/>
+                <a:ea typeface="맑은 고딕"/>
+              </a:rPr>
+              <a:t>stochastic depth 0.05</a:t>
+            </a:r>
+            <a:r>
+              <a:rPr sz="1400">
+                <a:solidFill>
+                  <a:srgbClr val="1A1F2E"/>
+                </a:solidFill>
+                <a:latin typeface="맑은 고딕"/>
+                <a:ea typeface="맑은 고딕"/>
+              </a:rPr>
+              <a:t>, </a:t>
+            </a:r>
+            <a:r>
+              <a:rPr sz="1400" b="1">
+                <a:solidFill>
+                  <a:srgbClr val="0F1E3D"/>
+                </a:solidFill>
+                <a:latin typeface="맑은 고딕"/>
+                <a:ea typeface="맑은 고딕"/>
+              </a:rPr>
+              <a:t>label smoothing 0.02</a:t>
+            </a:r>
+            <a:r>
+              <a:rPr sz="1400">
+                <a:solidFill>
+                  <a:srgbClr val="1A1F2E"/>
+                </a:solidFill>
+                <a:latin typeface="맑은 고딕"/>
+                <a:ea typeface="맑은 고딕"/>
+              </a:rPr>
+              <a:t>가 특히 효과적 — 놓친 불량을 </a:t>
+            </a:r>
+            <a:r>
+              <a:rPr sz="1400" b="1">
+                <a:solidFill>
+                  <a:srgbClr val="0F1E3D"/>
+                </a:solidFill>
+                <a:latin typeface="맑은 고딕"/>
+                <a:ea typeface="맑은 고딕"/>
+              </a:rPr>
+              <a:t>4.6 → 0.8</a:t>
+            </a:r>
+            <a:r>
+              <a:rPr sz="1400">
+                <a:solidFill>
+                  <a:srgbClr val="1A1F2E"/>
+                </a:solidFill>
+                <a:latin typeface="맑은 고딕"/>
+                <a:ea typeface="맑은 고딕"/>
+              </a:rPr>
+              <a:t>로, F1을 </a:t>
+            </a:r>
+            <a:r>
+              <a:rPr sz="1400" b="1">
+                <a:solidFill>
+                  <a:srgbClr val="0F1E3D"/>
+                </a:solidFill>
+                <a:latin typeface="맑은 고딕"/>
+                <a:ea typeface="맑은 고딕"/>
+              </a:rPr>
+              <a:t>0.9988</a:t>
+            </a:r>
+            <a:r>
+              <a:rPr sz="1400">
+                <a:solidFill>
+                  <a:srgbClr val="1A1F2E"/>
+                </a:solidFill>
+                <a:latin typeface="맑은 고딕"/>
+                <a:ea typeface="맑은 고딕"/>
+              </a:rPr>
+              <a:t>까지 올렸습니다</a:t>
             </a:r>
           </a:p>
           <a:p>
@@ -5177,7 +5216,7 @@
                 <a:latin typeface="맑은 고딕"/>
                 <a:ea typeface="맑은 고딕"/>
               </a:rPr>
-              <a:t>통과한 불량은 2차에서 유형 진단(type 정확도 0.73, 주 혼동 drift↔mean_shift)</a:t>
+              <a:t>각 막대는 단독 조건 실험. normal threshold(NT)를 올리면 FN↓ / FP↑ — 운영은 0.9 균형점</a:t>
             </a:r>
           </a:p>
         </p:txBody>
@@ -5190,8 +5229,8 @@
         </p:nvSpPr>
         <p:spPr>
           <a:xfrm>
-            <a:off x="7150608" y="3566160"/>
-            <a:ext cx="4462272" cy="384048"/>
+            <a:off x="7406640" y="3474720"/>
+            <a:ext cx="4206240" cy="384048"/>
           </a:xfrm>
           <a:prstGeom prst="roundRect">
             <a:avLst/>
@@ -5234,7 +5273,7 @@
         </p:nvSpPr>
         <p:spPr>
           <a:xfrm>
-            <a:off x="7150608" y="3566160"/>
+            <a:off x="7406640" y="3474720"/>
             <a:ext cx="82296" cy="384048"/>
           </a:xfrm>
           <a:prstGeom prst="rect">
@@ -5278,8 +5317,8 @@
         </p:nvSpPr>
         <p:spPr>
           <a:xfrm>
-            <a:off x="7333488" y="3566160"/>
-            <a:ext cx="4133088" cy="384048"/>
+            <a:off x="7589520" y="3474720"/>
+            <a:ext cx="3877056" cy="384048"/>
           </a:xfrm>
           <a:prstGeom prst="rect">
             <a:avLst/>
@@ -5301,7 +5340,7 @@
                 <a:latin typeface="맑은 고딕"/>
                 <a:ea typeface="맑은 고딕"/>
               </a:rPr>
-              <a:t>F1 0.9967 / recall 0.9987 (생성셋 PoC)</a:t>
+              <a:t>F1 0.9944 → 0.9988 / FN 4.6 → 0.8</a:t>
             </a:r>
           </a:p>
         </p:txBody>
@@ -5314,8 +5353,8 @@
         </p:nvSpPr>
         <p:spPr>
           <a:xfrm>
-            <a:off x="2486566" y="3996072"/>
-            <a:ext cx="7279827" cy="1956528"/>
+            <a:off x="2858146" y="3904632"/>
+            <a:ext cx="6536668" cy="2047968"/>
           </a:xfrm>
           <a:prstGeom prst="rect">
             <a:avLst/>
@@ -5354,7 +5393,7 @@
       </p:sp>
       <p:pic>
         <p:nvPicPr>
-          <p:cNvPr id="10" name="Picture 9" descr="p3_deck_result.png"/>
+          <p:cNvPr id="10" name="Picture 9" descr="p3_deck_ablation.png"/>
           <p:cNvPicPr>
             <a:picLocks noChangeAspect="1"/>
           </p:cNvPicPr>
@@ -5368,8 +5407,8 @@
         </p:blipFill>
         <p:spPr>
           <a:xfrm>
-            <a:off x="2495566" y="4005072"/>
-            <a:ext cx="7261827" cy="1938528"/>
+            <a:off x="2867146" y="3913632"/>
+            <a:ext cx="6518668" cy="2029968"/>
           </a:xfrm>
           <a:prstGeom prst="rect">
             <a:avLst/>
@@ -5407,7 +5446,7 @@
                 <a:latin typeface="맑은 고딕"/>
                 <a:ea typeface="맑은 고딕"/>
               </a:rPr>
-              <a:t>좌 confusion(test 1,500 대표 run) / 중 NT trade-off(319-run 평균) / 우 유형별 오류</a:t>
+              <a:t>binary F1(좌)과 놓친 불량 FN(우) — 점선 = baseline, 막대 = 각 조건 단독 적용 (5-seed 평균)</a:t>
             </a:r>
           </a:p>
         </p:txBody>
@@ -5480,376 +5519,6 @@
                 <a:ea typeface="맑은 고딕"/>
               </a:rPr>
               <a:t>4</a:t>
-            </a:r>
-          </a:p>
-        </p:txBody>
-      </p:sp>
-    </p:spTree>
-  </p:cSld>
-  <p:clrMapOvr>
-    <a:masterClrMapping/>
-  </p:clrMapOvr>
-</p:sld>
-</file>
-
-<file path=ppt/slides/slide5.xml><?xml version="1.0" encoding="utf-8"?>
-<p:sld xmlns:a="http://schemas.openxmlformats.org/drawingml/2006/main" xmlns:p="http://schemas.openxmlformats.org/presentationml/2006/main" xmlns:r="http://schemas.openxmlformats.org/officeDocument/2006/relationships">
-  <p:cSld>
-    <p:bg>
-      <p:bgPr>
-        <a:solidFill>
-          <a:srgbClr val="FFFFFF"/>
-        </a:solidFill>
-        <a:effectLst/>
-      </p:bgPr>
-    </p:bg>
-    <p:spTree>
-      <p:nvGrpSpPr>
-        <p:cNvPr id="1" name=""/>
-        <p:cNvGrpSpPr/>
-        <p:nvPr/>
-      </p:nvGrpSpPr>
-      <p:grpSpPr/>
-      <p:sp>
-        <p:nvSpPr>
-          <p:cNvPr id="2" name="Rectangle 1"/>
-          <p:cNvSpPr/>
-          <p:nvPr/>
-        </p:nvSpPr>
-        <p:spPr>
-          <a:xfrm>
-            <a:off x="640080" y="502920"/>
-            <a:ext cx="123444" cy="768096"/>
-          </a:xfrm>
-          <a:prstGeom prst="rect">
-            <a:avLst/>
-          </a:prstGeom>
-          <a:solidFill>
-            <a:srgbClr val="CFD4DB"/>
-          </a:solidFill>
-          <a:ln>
-            <a:noFill/>
-          </a:ln>
-          <a:effectLst/>
-        </p:spPr>
-        <p:style>
-          <a:lnRef idx="1">
-            <a:schemeClr val="accent1"/>
-          </a:lnRef>
-          <a:fillRef idx="3">
-            <a:schemeClr val="accent1"/>
-          </a:fillRef>
-          <a:effectRef idx="2">
-            <a:schemeClr val="accent1"/>
-          </a:effectRef>
-          <a:fontRef idx="minor">
-            <a:schemeClr val="lt1"/>
-          </a:fontRef>
-        </p:style>
-        <p:txBody>
-          <a:bodyPr rtlCol="0" anchor="ctr"/>
-          <a:lstStyle/>
-          <a:p>
-            <a:pPr algn="ctr"/>
-          </a:p>
-        </p:txBody>
-      </p:sp>
-      <p:sp>
-        <p:nvSpPr>
-          <p:cNvPr id="3" name="TextBox 2"/>
-          <p:cNvSpPr txBox="1"/>
-          <p:nvPr/>
-        </p:nvSpPr>
-        <p:spPr>
-          <a:xfrm>
-            <a:off x="932688" y="448056"/>
-            <a:ext cx="10881360" cy="256032"/>
-          </a:xfrm>
-          <a:prstGeom prst="rect">
-            <a:avLst/>
-          </a:prstGeom>
-          <a:noFill/>
-        </p:spPr>
-        <p:txBody>
-          <a:bodyPr wrap="square" anchor="t" lIns="0" rIns="0" tIns="0" bIns="0">
-            <a:spAutoFit/>
-          </a:bodyPr>
-          <a:lstStyle/>
-          <a:p>
-            <a:pPr algn="l"/>
-            <a:r>
-              <a:rPr sz="1300" b="1">
-                <a:solidFill>
-                  <a:srgbClr val="8A929E"/>
-                </a:solidFill>
-                <a:latin typeface="맑은 고딕"/>
-                <a:ea typeface="맑은 고딕"/>
-              </a:rPr>
-              <a:t>P3 | 모델 근거 (Grad-CAM)</a:t>
-            </a:r>
-          </a:p>
-        </p:txBody>
-      </p:sp>
-      <p:sp>
-        <p:nvSpPr>
-          <p:cNvPr id="4" name="TextBox 3"/>
-          <p:cNvSpPr txBox="1"/>
-          <p:nvPr/>
-        </p:nvSpPr>
-        <p:spPr>
-          <a:xfrm>
-            <a:off x="932688" y="704088"/>
-            <a:ext cx="10881360" cy="603504"/>
-          </a:xfrm>
-          <a:prstGeom prst="rect">
-            <a:avLst/>
-          </a:prstGeom>
-          <a:noFill/>
-        </p:spPr>
-        <p:txBody>
-          <a:bodyPr wrap="square" anchor="t" lIns="0" rIns="0" tIns="0" bIns="0">
-            <a:spAutoFit/>
-          </a:bodyPr>
-          <a:lstStyle/>
-          <a:p>
-            <a:pPr algn="l"/>
-            <a:r>
-              <a:rPr sz="3100" b="1">
-                <a:solidFill>
-                  <a:srgbClr val="0F1E3D"/>
-                </a:solidFill>
-                <a:latin typeface="맑은 고딕"/>
-                <a:ea typeface="맑은 고딕"/>
-              </a:rPr>
-              <a:t>모델이 색이 아니라 이상 구간을 본다</a:t>
-            </a:r>
-          </a:p>
-        </p:txBody>
-      </p:sp>
-      <p:sp>
-        <p:nvSpPr>
-          <p:cNvPr id="5" name="TextBox 4"/>
-          <p:cNvSpPr txBox="1"/>
-          <p:nvPr/>
-        </p:nvSpPr>
-        <p:spPr>
-          <a:xfrm>
-            <a:off x="640080" y="1828800"/>
-            <a:ext cx="10972800" cy="566928"/>
-          </a:xfrm>
-          <a:prstGeom prst="rect">
-            <a:avLst/>
-          </a:prstGeom>
-          <a:noFill/>
-        </p:spPr>
-        <p:txBody>
-          <a:bodyPr wrap="square" anchor="t" lIns="0" rIns="0" tIns="0" bIns="0">
-            <a:spAutoFit/>
-          </a:bodyPr>
-          <a:lstStyle/>
-          <a:p>
-            <a:pPr marL="274320" indent="-274320">
-              <a:spcAft>
-                <a:spcPts val="500"/>
-              </a:spcAft>
-            </a:pPr>
-            <a:r>
-              <a:rPr sz="1450" b="0">
-                <a:solidFill>
-                  <a:srgbClr val="5B9BD5"/>
-                </a:solidFill>
-                <a:latin typeface="맑은 고딕"/>
-                <a:ea typeface="맑은 고딕"/>
-              </a:rPr>
-              <a:t>●  </a:t>
-            </a:r>
-            <a:r>
-              <a:rPr sz="1450">
-                <a:solidFill>
-                  <a:srgbClr val="1A1F2E"/>
-                </a:solidFill>
-                <a:latin typeface="맑은 고딕"/>
-                <a:ea typeface="맑은 고딕"/>
-              </a:rPr>
-              <a:t>Grad-CAM으로 보면 mean shift/std/spike/drift는 trend 오른쪽 끝(이상 구간), context는 전체에 모델 주목이 집중됩니다 — 색이나 대비가 아니라 실제 패턴을 학습</a:t>
-            </a:r>
-          </a:p>
-        </p:txBody>
-      </p:sp>
-      <p:sp>
-        <p:nvSpPr>
-          <p:cNvPr id="6" name="Rectangle 5"/>
-          <p:cNvSpPr/>
-          <p:nvPr/>
-        </p:nvSpPr>
-        <p:spPr>
-          <a:xfrm>
-            <a:off x="3984768" y="2514744"/>
-            <a:ext cx="4283424" cy="3437856"/>
-          </a:xfrm>
-          <a:prstGeom prst="rect">
-            <a:avLst/>
-          </a:prstGeom>
-          <a:solidFill>
-            <a:srgbClr val="FFFFFF"/>
-          </a:solidFill>
-          <a:ln w="12700">
-            <a:solidFill>
-              <a:srgbClr val="D7DEEA"/>
-            </a:solidFill>
-          </a:ln>
-          <a:effectLst/>
-        </p:spPr>
-        <p:style>
-          <a:lnRef idx="1">
-            <a:schemeClr val="accent1"/>
-          </a:lnRef>
-          <a:fillRef idx="3">
-            <a:schemeClr val="accent1"/>
-          </a:fillRef>
-          <a:effectRef idx="2">
-            <a:schemeClr val="accent1"/>
-          </a:effectRef>
-          <a:fontRef idx="minor">
-            <a:schemeClr val="lt1"/>
-          </a:fontRef>
-        </p:style>
-        <p:txBody>
-          <a:bodyPr rtlCol="0" anchor="ctr"/>
-          <a:lstStyle/>
-          <a:p>
-            <a:pPr algn="ctr"/>
-          </a:p>
-        </p:txBody>
-      </p:sp>
-      <p:pic>
-        <p:nvPicPr>
-          <p:cNvPr id="7" name="Picture 6" descr="p3_res_gradcam.png"/>
-          <p:cNvPicPr>
-            <a:picLocks noChangeAspect="1"/>
-          </p:cNvPicPr>
-          <p:nvPr/>
-        </p:nvPicPr>
-        <p:blipFill>
-          <a:blip r:embed="rId2"/>
-          <a:stretch>
-            <a:fillRect/>
-          </a:stretch>
-        </p:blipFill>
-        <p:spPr>
-          <a:xfrm>
-            <a:off x="3993768" y="2523744"/>
-            <a:ext cx="4265424" cy="3419856"/>
-          </a:xfrm>
-          <a:prstGeom prst="rect">
-            <a:avLst/>
-          </a:prstGeom>
-        </p:spPr>
-      </p:pic>
-      <p:sp>
-        <p:nvSpPr>
-          <p:cNvPr id="8" name="TextBox 7"/>
-          <p:cNvSpPr txBox="1"/>
-          <p:nvPr/>
-        </p:nvSpPr>
-        <p:spPr>
-          <a:xfrm>
-            <a:off x="640080" y="5961888"/>
-            <a:ext cx="10972800" cy="274320"/>
-          </a:xfrm>
-          <a:prstGeom prst="rect">
-            <a:avLst/>
-          </a:prstGeom>
-          <a:noFill/>
-        </p:spPr>
-        <p:txBody>
-          <a:bodyPr wrap="square" anchor="t" lIns="0" rIns="0" tIns="0" bIns="0">
-            <a:spAutoFit/>
-          </a:bodyPr>
-          <a:lstStyle/>
-          <a:p>
-            <a:pPr algn="ctr"/>
-            <a:r>
-              <a:rPr sz="1300">
-                <a:solidFill>
-                  <a:srgbClr val="3A485C"/>
-                </a:solidFill>
-                <a:latin typeface="맑은 고딕"/>
-                <a:ea typeface="맑은 고딕"/>
-              </a:rPr>
-              <a:t>클래스별(정상 + 이상 5종) Grad-CAM — 빨강일수록 모델이 강하게 주목한 영역 (실제 학습 결과)</a:t>
-            </a:r>
-          </a:p>
-        </p:txBody>
-      </p:sp>
-      <p:sp>
-        <p:nvSpPr>
-          <p:cNvPr id="9" name="TextBox 8"/>
-          <p:cNvSpPr txBox="1"/>
-          <p:nvPr/>
-        </p:nvSpPr>
-        <p:spPr>
-          <a:xfrm>
-            <a:off x="457200" y="6437376"/>
-            <a:ext cx="8229600" cy="292608"/>
-          </a:xfrm>
-          <a:prstGeom prst="rect">
-            <a:avLst/>
-          </a:prstGeom>
-          <a:noFill/>
-        </p:spPr>
-        <p:txBody>
-          <a:bodyPr wrap="square" anchor="ctr" lIns="0" rIns="0" tIns="0" bIns="0">
-            <a:spAutoFit/>
-          </a:bodyPr>
-          <a:lstStyle/>
-          <a:p>
-            <a:pPr algn="l"/>
-            <a:r>
-              <a:rPr sz="900">
-                <a:solidFill>
-                  <a:srgbClr val="6B7280"/>
-                </a:solidFill>
-                <a:latin typeface="맑은 고딕"/>
-                <a:ea typeface="맑은 고딕"/>
-              </a:rPr>
-              <a:t>최호길 | QIE Data Science | AI Specialist 인증</a:t>
-            </a:r>
-          </a:p>
-        </p:txBody>
-      </p:sp>
-      <p:sp>
-        <p:nvSpPr>
-          <p:cNvPr id="10" name="TextBox 9"/>
-          <p:cNvSpPr txBox="1"/>
-          <p:nvPr/>
-        </p:nvSpPr>
-        <p:spPr>
-          <a:xfrm>
-            <a:off x="10972800" y="6437376"/>
-            <a:ext cx="758952" cy="292608"/>
-          </a:xfrm>
-          <a:prstGeom prst="rect">
-            <a:avLst/>
-          </a:prstGeom>
-          <a:noFill/>
-        </p:spPr>
-        <p:txBody>
-          <a:bodyPr wrap="square" anchor="ctr" lIns="0" rIns="0" tIns="0" bIns="0">
-            <a:spAutoFit/>
-          </a:bodyPr>
-          <a:lstStyle/>
-          <a:p>
-            <a:pPr algn="r"/>
-            <a:r>
-              <a:rPr sz="900">
-                <a:solidFill>
-                  <a:srgbClr val="6B7280"/>
-                </a:solidFill>
-                <a:latin typeface="맑은 고딕"/>
-                <a:ea typeface="맑은 고딕"/>
-              </a:rPr>
-              <a:t>5</a:t>
             </a:r>
           </a:p>
         </p:txBody>

--- a/recommendation/presentation/발표_P3_데이터생성_최호길.pptx
+++ b/recommendation/presentation/발표_P3_데이터생성_최호길.pptx
@@ -9,6 +9,7 @@
     <p:sldId id="257" r:id="rId8"/>
     <p:sldId id="258" r:id="rId9"/>
     <p:sldId id="259" r:id="rId10"/>
+    <p:sldId id="260" r:id="rId11"/>
   </p:sldIdLst>
   <p:sldSz cx="12191695" cy="6858000" type="screen4x3"/>
   <p:notesSz cx="6858000" cy="9144000"/>
@@ -5082,7 +5083,27 @@
                 <a:latin typeface="맑은 고딕"/>
                 <a:ea typeface="맑은 고딕"/>
               </a:rPr>
-              <a:t>여러 학습 조건을 단독(single-axis)으로 바꿔 5-seed로 검증했습니다 (baseline F1 0.9944, 놓친 불량 FN 4.6)</a:t>
+              <a:t>여러 학습 조건을 단독(single-axis)으로 바꿔 </a:t>
+            </a:r>
+            <a:r>
+              <a:rPr sz="1400" b="1">
+                <a:solidFill>
+                  <a:srgbClr val="0F1E3D"/>
+                </a:solidFill>
+                <a:latin typeface="맑은 고딕"/>
+                <a:ea typeface="맑은 고딕"/>
+              </a:rPr>
+              <a:t>14개 축 × 5-seed</a:t>
+            </a:r>
+            <a:r>
+              <a:rPr sz="1400">
+                <a:solidFill>
+                  <a:srgbClr val="1A1F2E"/>
+                </a:solidFill>
+                <a:latin typeface="맑은 고딕"/>
+                <a:ea typeface="맑은 고딕"/>
+              </a:rPr>
+              <a:t>로 검증했습니다 (baseline F1 0.9944, 놓친 불량 FN 4.6)</a:t>
             </a:r>
           </a:p>
           <a:p>
@@ -5519,6 +5540,470 @@
                 <a:ea typeface="맑은 고딕"/>
               </a:rPr>
               <a:t>4</a:t>
+            </a:r>
+          </a:p>
+        </p:txBody>
+      </p:sp>
+    </p:spTree>
+  </p:cSld>
+  <p:clrMapOvr>
+    <a:masterClrMapping/>
+  </p:clrMapOvr>
+</p:sld>
+</file>
+
+<file path=ppt/slides/slide5.xml><?xml version="1.0" encoding="utf-8"?>
+<p:sld xmlns:a="http://schemas.openxmlformats.org/drawingml/2006/main" xmlns:p="http://schemas.openxmlformats.org/presentationml/2006/main" xmlns:r="http://schemas.openxmlformats.org/officeDocument/2006/relationships">
+  <p:cSld>
+    <p:bg>
+      <p:bgPr>
+        <a:solidFill>
+          <a:srgbClr val="FFFFFF"/>
+        </a:solidFill>
+        <a:effectLst/>
+      </p:bgPr>
+    </p:bg>
+    <p:spTree>
+      <p:nvGrpSpPr>
+        <p:cNvPr id="1" name=""/>
+        <p:cNvGrpSpPr/>
+        <p:nvPr/>
+      </p:nvGrpSpPr>
+      <p:grpSpPr/>
+      <p:sp>
+        <p:nvSpPr>
+          <p:cNvPr id="2" name="Rectangle 1"/>
+          <p:cNvSpPr/>
+          <p:nvPr/>
+        </p:nvSpPr>
+        <p:spPr>
+          <a:xfrm>
+            <a:off x="640080" y="502920"/>
+            <a:ext cx="123444" cy="768096"/>
+          </a:xfrm>
+          <a:prstGeom prst="rect">
+            <a:avLst/>
+          </a:prstGeom>
+          <a:solidFill>
+            <a:srgbClr val="CFD4DB"/>
+          </a:solidFill>
+          <a:ln>
+            <a:noFill/>
+          </a:ln>
+          <a:effectLst/>
+        </p:spPr>
+        <p:style>
+          <a:lnRef idx="1">
+            <a:schemeClr val="accent1"/>
+          </a:lnRef>
+          <a:fillRef idx="3">
+            <a:schemeClr val="accent1"/>
+          </a:fillRef>
+          <a:effectRef idx="2">
+            <a:schemeClr val="accent1"/>
+          </a:effectRef>
+          <a:fontRef idx="minor">
+            <a:schemeClr val="lt1"/>
+          </a:fontRef>
+        </p:style>
+        <p:txBody>
+          <a:bodyPr rtlCol="0" anchor="ctr"/>
+          <a:lstStyle/>
+          <a:p>
+            <a:pPr algn="ctr"/>
+          </a:p>
+        </p:txBody>
+      </p:sp>
+      <p:sp>
+        <p:nvSpPr>
+          <p:cNvPr id="3" name="TextBox 2"/>
+          <p:cNvSpPr txBox="1"/>
+          <p:nvPr/>
+        </p:nvSpPr>
+        <p:spPr>
+          <a:xfrm>
+            <a:off x="932688" y="448056"/>
+            <a:ext cx="10881360" cy="256032"/>
+          </a:xfrm>
+          <a:prstGeom prst="rect">
+            <a:avLst/>
+          </a:prstGeom>
+          <a:noFill/>
+        </p:spPr>
+        <p:txBody>
+          <a:bodyPr wrap="square" anchor="t" lIns="0" rIns="0" tIns="0" bIns="0">
+            <a:spAutoFit/>
+          </a:bodyPr>
+          <a:lstStyle/>
+          <a:p>
+            <a:pPr algn="l"/>
+            <a:r>
+              <a:rPr sz="1300" b="1">
+                <a:solidFill>
+                  <a:srgbClr val="8A929E"/>
+                </a:solidFill>
+                <a:latin typeface="맑은 고딕"/>
+                <a:ea typeface="맑은 고딕"/>
+              </a:rPr>
+              <a:t>P3 | 백본 × 데이터셋 × 운영</a:t>
+            </a:r>
+          </a:p>
+        </p:txBody>
+      </p:sp>
+      <p:sp>
+        <p:nvSpPr>
+          <p:cNvPr id="4" name="TextBox 3"/>
+          <p:cNvSpPr txBox="1"/>
+          <p:nvPr/>
+        </p:nvSpPr>
+        <p:spPr>
+          <a:xfrm>
+            <a:off x="932688" y="704088"/>
+            <a:ext cx="10881360" cy="603504"/>
+          </a:xfrm>
+          <a:prstGeom prst="rect">
+            <a:avLst/>
+          </a:prstGeom>
+          <a:noFill/>
+        </p:spPr>
+        <p:txBody>
+          <a:bodyPr wrap="square" anchor="t" lIns="0" rIns="0" tIns="0" bIns="0">
+            <a:spAutoFit/>
+          </a:bodyPr>
+          <a:lstStyle/>
+          <a:p>
+            <a:pPr algn="l"/>
+            <a:r>
+              <a:rPr sz="3100" b="1">
+                <a:solidFill>
+                  <a:srgbClr val="0F1E3D"/>
+                </a:solidFill>
+                <a:latin typeface="맑은 고딕"/>
+                <a:ea typeface="맑은 고딕"/>
+              </a:rPr>
+              <a:t>백본/데이터셋/임계값까지 동일 프로토콜로 검증</a:t>
+            </a:r>
+          </a:p>
+        </p:txBody>
+      </p:sp>
+      <p:sp>
+        <p:nvSpPr>
+          <p:cNvPr id="5" name="TextBox 4"/>
+          <p:cNvSpPr txBox="1"/>
+          <p:nvPr/>
+        </p:nvSpPr>
+        <p:spPr>
+          <a:xfrm>
+            <a:off x="640080" y="1828800"/>
+            <a:ext cx="10972800" cy="1371600"/>
+          </a:xfrm>
+          <a:prstGeom prst="rect">
+            <a:avLst/>
+          </a:prstGeom>
+          <a:noFill/>
+        </p:spPr>
+        <p:txBody>
+          <a:bodyPr wrap="square" anchor="t" lIns="0" rIns="0" tIns="0" bIns="0">
+            <a:spAutoFit/>
+          </a:bodyPr>
+          <a:lstStyle/>
+          <a:p>
+            <a:pPr marL="274320" indent="-274320">
+              <a:spcAft>
+                <a:spcPts val="500"/>
+              </a:spcAft>
+            </a:pPr>
+            <a:r>
+              <a:rPr sz="1400" b="0">
+                <a:solidFill>
+                  <a:srgbClr val="5B9BD5"/>
+                </a:solidFill>
+                <a:latin typeface="맑은 고딕"/>
+                <a:ea typeface="맑은 고딕"/>
+              </a:rPr>
+              <a:t>●  </a:t>
+            </a:r>
+            <a:r>
+              <a:rPr sz="1400">
+                <a:solidFill>
+                  <a:srgbClr val="1A1F2E"/>
+                </a:solidFill>
+                <a:latin typeface="맑은 고딕"/>
+                <a:ea typeface="맑은 고딕"/>
+              </a:rPr>
+              <a:t>백본을 키우면(ConvNeXtV2 Tiny→</a:t>
+            </a:r>
+            <a:r>
+              <a:rPr sz="1400" b="1">
+                <a:solidFill>
+                  <a:srgbClr val="0F1E3D"/>
+                </a:solidFill>
+                <a:latin typeface="맑은 고딕"/>
+                <a:ea typeface="맑은 고딕"/>
+              </a:rPr>
+              <a:t>Base</a:t>
+            </a:r>
+            <a:r>
+              <a:rPr sz="1400">
+                <a:solidFill>
+                  <a:srgbClr val="1A1F2E"/>
+                </a:solidFill>
+                <a:latin typeface="맑은 고딕"/>
+                <a:ea typeface="맑은 고딕"/>
+              </a:rPr>
+              <a:t>) 놓친 불량이 4.6→1.2로 줄고, 노이즈를 15% 키운 데이터셋에서도 F1 0.9944→</a:t>
+            </a:r>
+            <a:r>
+              <a:rPr sz="1400" b="1">
+                <a:solidFill>
+                  <a:srgbClr val="0F1E3D"/>
+                </a:solidFill>
+                <a:latin typeface="맑은 고딕"/>
+                <a:ea typeface="맑은 고딕"/>
+              </a:rPr>
+              <a:t>0.9960</a:t>
+            </a:r>
+            <a:r>
+              <a:rPr sz="1400">
+                <a:solidFill>
+                  <a:srgbClr val="1A1F2E"/>
+                </a:solidFill>
+                <a:latin typeface="맑은 고딕"/>
+                <a:ea typeface="맑은 고딕"/>
+              </a:rPr>
+              <a:t>으로 강건합니다 (모두 5-seed)</a:t>
+            </a:r>
+          </a:p>
+          <a:p>
+            <a:pPr marL="274320" indent="-274320">
+              <a:spcAft>
+                <a:spcPts val="500"/>
+              </a:spcAft>
+            </a:pPr>
+            <a:r>
+              <a:rPr sz="1400" b="0">
+                <a:solidFill>
+                  <a:srgbClr val="5B9BD5"/>
+                </a:solidFill>
+                <a:latin typeface="맑은 고딕"/>
+                <a:ea typeface="맑은 고딕"/>
+              </a:rPr>
+              <a:t>●  </a:t>
+            </a:r>
+            <a:r>
+              <a:rPr sz="1400">
+                <a:solidFill>
+                  <a:srgbClr val="1A1F2E"/>
+                </a:solidFill>
+                <a:latin typeface="맑은 고딕"/>
+                <a:ea typeface="맑은 고딕"/>
+              </a:rPr>
+              <a:t>운영 임계값(NT)을 올리면 FN↓ / FP↑ — 현장 비용에 맞춰 조절, 기본 0.9</a:t>
+            </a:r>
+          </a:p>
+          <a:p>
+            <a:pPr marL="420624" indent="-420624" lvl="1">
+              <a:spcAft>
+                <a:spcPts val="500"/>
+              </a:spcAft>
+            </a:pPr>
+            <a:r>
+              <a:rPr sz="1300" b="0">
+                <a:solidFill>
+                  <a:srgbClr val="6E7B8E"/>
+                </a:solidFill>
+                <a:latin typeface="맑은 고딕"/>
+                <a:ea typeface="맑은 고딕"/>
+              </a:rPr>
+              <a:t>–  </a:t>
+            </a:r>
+            <a:r>
+              <a:rPr sz="1300">
+                <a:solidFill>
+                  <a:srgbClr val="4A5666"/>
+                </a:solidFill>
+                <a:latin typeface="맑은 고딕"/>
+                <a:ea typeface="맑은 고딕"/>
+              </a:rPr>
+              <a:t>백본 6종·데이터셋 강도 변형 8종을 동일 baseline·5-seed·자동 controller로 비교하는 프레임워크를 갖췄고, 첫 비교셀 검증 후 순차 확장 중입니다</a:t>
+            </a:r>
+          </a:p>
+        </p:txBody>
+      </p:sp>
+      <p:sp>
+        <p:nvSpPr>
+          <p:cNvPr id="6" name="Rectangle 5"/>
+          <p:cNvSpPr/>
+          <p:nvPr/>
+        </p:nvSpPr>
+        <p:spPr>
+          <a:xfrm>
+            <a:off x="1219172" y="3319416"/>
+            <a:ext cx="9814616" cy="2633184"/>
+          </a:xfrm>
+          <a:prstGeom prst="rect">
+            <a:avLst/>
+          </a:prstGeom>
+          <a:solidFill>
+            <a:srgbClr val="FFFFFF"/>
+          </a:solidFill>
+          <a:ln w="12700">
+            <a:solidFill>
+              <a:srgbClr val="D7DEEA"/>
+            </a:solidFill>
+          </a:ln>
+          <a:effectLst/>
+        </p:spPr>
+        <p:style>
+          <a:lnRef idx="1">
+            <a:schemeClr val="accent1"/>
+          </a:lnRef>
+          <a:fillRef idx="3">
+            <a:schemeClr val="accent1"/>
+          </a:fillRef>
+          <a:effectRef idx="2">
+            <a:schemeClr val="accent1"/>
+          </a:effectRef>
+          <a:fontRef idx="minor">
+            <a:schemeClr val="lt1"/>
+          </a:fontRef>
+        </p:style>
+        <p:txBody>
+          <a:bodyPr rtlCol="0" anchor="ctr"/>
+          <a:lstStyle/>
+          <a:p>
+            <a:pPr algn="ctr"/>
+          </a:p>
+        </p:txBody>
+      </p:sp>
+      <p:pic>
+        <p:nvPicPr>
+          <p:cNvPr id="7" name="Picture 6" descr="p3_deck_robust.png"/>
+          <p:cNvPicPr>
+            <a:picLocks noChangeAspect="1"/>
+          </p:cNvPicPr>
+          <p:nvPr/>
+        </p:nvPicPr>
+        <p:blipFill>
+          <a:blip r:embed="rId2"/>
+          <a:stretch>
+            <a:fillRect/>
+          </a:stretch>
+        </p:blipFill>
+        <p:spPr>
+          <a:xfrm>
+            <a:off x="1228172" y="3328416"/>
+            <a:ext cx="9796616" cy="2615184"/>
+          </a:xfrm>
+          <a:prstGeom prst="rect">
+            <a:avLst/>
+          </a:prstGeom>
+        </p:spPr>
+      </p:pic>
+      <p:sp>
+        <p:nvSpPr>
+          <p:cNvPr id="8" name="TextBox 7"/>
+          <p:cNvSpPr txBox="1"/>
+          <p:nvPr/>
+        </p:nvSpPr>
+        <p:spPr>
+          <a:xfrm>
+            <a:off x="640080" y="5961888"/>
+            <a:ext cx="10972800" cy="274320"/>
+          </a:xfrm>
+          <a:prstGeom prst="rect">
+            <a:avLst/>
+          </a:prstGeom>
+          <a:noFill/>
+        </p:spPr>
+        <p:txBody>
+          <a:bodyPr wrap="square" anchor="t" lIns="0" rIns="0" tIns="0" bIns="0">
+            <a:spAutoFit/>
+          </a:bodyPr>
+          <a:lstStyle/>
+          <a:p>
+            <a:pPr algn="ctr"/>
+            <a:r>
+              <a:rPr sz="1300">
+                <a:solidFill>
+                  <a:srgbClr val="3A485C"/>
+                </a:solidFill>
+                <a:latin typeface="맑은 고딕"/>
+                <a:ea typeface="맑은 고딕"/>
+              </a:rPr>
+              <a:t>백본(좌) / 데이터셋 강건성(중) / 운영 임계값 NT trade-off(우) — 동일 baseline·5-seed 고정 비교</a:t>
+            </a:r>
+          </a:p>
+        </p:txBody>
+      </p:sp>
+      <p:sp>
+        <p:nvSpPr>
+          <p:cNvPr id="9" name="TextBox 8"/>
+          <p:cNvSpPr txBox="1"/>
+          <p:nvPr/>
+        </p:nvSpPr>
+        <p:spPr>
+          <a:xfrm>
+            <a:off x="457200" y="6437376"/>
+            <a:ext cx="8229600" cy="292608"/>
+          </a:xfrm>
+          <a:prstGeom prst="rect">
+            <a:avLst/>
+          </a:prstGeom>
+          <a:noFill/>
+        </p:spPr>
+        <p:txBody>
+          <a:bodyPr wrap="square" anchor="ctr" lIns="0" rIns="0" tIns="0" bIns="0">
+            <a:spAutoFit/>
+          </a:bodyPr>
+          <a:lstStyle/>
+          <a:p>
+            <a:pPr algn="l"/>
+            <a:r>
+              <a:rPr sz="900">
+                <a:solidFill>
+                  <a:srgbClr val="6B7280"/>
+                </a:solidFill>
+                <a:latin typeface="맑은 고딕"/>
+                <a:ea typeface="맑은 고딕"/>
+              </a:rPr>
+              <a:t>최호길 | QIE Data Science | AI Specialist 인증</a:t>
+            </a:r>
+          </a:p>
+        </p:txBody>
+      </p:sp>
+      <p:sp>
+        <p:nvSpPr>
+          <p:cNvPr id="10" name="TextBox 9"/>
+          <p:cNvSpPr txBox="1"/>
+          <p:nvPr/>
+        </p:nvSpPr>
+        <p:spPr>
+          <a:xfrm>
+            <a:off x="10972800" y="6437376"/>
+            <a:ext cx="758952" cy="292608"/>
+          </a:xfrm>
+          <a:prstGeom prst="rect">
+            <a:avLst/>
+          </a:prstGeom>
+          <a:noFill/>
+        </p:spPr>
+        <p:txBody>
+          <a:bodyPr wrap="square" anchor="ctr" lIns="0" rIns="0" tIns="0" bIns="0">
+            <a:spAutoFit/>
+          </a:bodyPr>
+          <a:lstStyle/>
+          <a:p>
+            <a:pPr algn="r"/>
+            <a:r>
+              <a:rPr sz="900">
+                <a:solidFill>
+                  <a:srgbClr val="6B7280"/>
+                </a:solidFill>
+                <a:latin typeface="맑은 고딕"/>
+                <a:ea typeface="맑은 고딕"/>
+              </a:rPr>
+              <a:t>5</a:t>
             </a:r>
           </a:p>
         </p:txBody>

--- a/recommendation/presentation/발표_P3_데이터생성_최호길.pptx
+++ b/recommendation/presentation/발표_P3_데이터생성_최호길.pptx
@@ -4102,7 +4102,7 @@
         <p:spPr>
           <a:xfrm>
             <a:off x="640080" y="1828800"/>
-            <a:ext cx="10972800" cy="1417320"/>
+            <a:ext cx="10972800" cy="749808"/>
           </a:xfrm>
           <a:prstGeom prst="rect">
             <a:avLst/>
@@ -4121,7 +4121,7 @@
               </a:spcAft>
             </a:pPr>
             <a:r>
-              <a:rPr sz="1400" b="0">
+              <a:rPr sz="1450" b="0">
                 <a:solidFill>
                   <a:srgbClr val="5B9BD5"/>
                 </a:solidFill>
@@ -4131,41 +4131,14 @@
               <a:t>●  </a:t>
             </a:r>
             <a:r>
-              <a:rPr sz="1400">
+              <a:rPr sz="1450">
                 <a:solidFill>
                   <a:srgbClr val="1A1F2E"/>
                 </a:solidFill>
                 <a:latin typeface="맑은 고딕"/>
                 <a:ea typeface="맑은 고딕"/>
               </a:rPr>
-              <a:t>한 chart는 같은 device/step/item을 여러 설비(fleet)가 함께 찍은 trend이고, 그중 한 설비(target)를 판정 대상으로 봅니다 (fleet-conditioned)</a:t>
-            </a:r>
-          </a:p>
-          <a:p>
-            <a:pPr marL="274320" indent="-274320">
-              <a:spcAft>
-                <a:spcPts val="500"/>
-              </a:spcAft>
-            </a:pPr>
-            <a:r>
-              <a:rPr sz="1400" b="0">
-                <a:solidFill>
-                  <a:srgbClr val="5B9BD5"/>
-                </a:solidFill>
-                <a:latin typeface="맑은 고딕"/>
-                <a:ea typeface="맑은 고딕"/>
-              </a:rPr>
-              <a:t>●  </a:t>
-            </a:r>
-            <a:r>
-              <a:rPr sz="1400">
-                <a:solidFill>
-                  <a:srgbClr val="1A1F2E"/>
-                </a:solidFill>
-                <a:latin typeface="맑은 고딕"/>
-                <a:ea typeface="맑은 고딕"/>
-              </a:rPr>
-              <a:t>정상 baseline은 episode(자기완결 한 구간)를 하나씩 완결 생성 후 이어 붙입니다. episode마다 길이/측정 밀도(밀집/희소/결핍)/결측 패턴이 다르고, 노이즈는 chart당 1종(Gaussian/AR/Laplacian)을 공유합니다</a:t>
+              <a:t>fleet(여러 설비)가 함께 찍은 한 trend에서 한 설비(target)를 판정합니다. episode(자기완결 구간)를 순차 생성해 이어 붙여 정상 baseline을 만듭니다</a:t>
             </a:r>
           </a:p>
           <a:p>
@@ -4175,7 +4148,7 @@
               </a:spcAft>
             </a:pPr>
             <a:r>
-              <a:rPr sz="1300" b="0">
+              <a:rPr sz="1350" b="0">
                 <a:solidFill>
                   <a:srgbClr val="6E7B8E"/>
                 </a:solidFill>
@@ -4185,14 +4158,14 @@
               <a:t>–  </a:t>
             </a:r>
             <a:r>
-              <a:rPr sz="1300">
+              <a:rPr sz="1350">
                 <a:solidFill>
                   <a:srgbClr val="4A5666"/>
                 </a:solidFill>
                 <a:latin typeface="맑은 고딕"/>
                 <a:ea typeface="맑은 고딕"/>
               </a:rPr>
-              <a:t>episode = 자기완결 trend segment. 강화학습 episode 개념(완결 단위 순차 생성) 차용 — 시계열 표준어는 segment</a:t>
+              <a:t>episode마다 길이/밀도/결측이 다르고, 노이즈는 chart당 1종 (episode = segment, 강화학습 개념 차용)</a:t>
             </a:r>
           </a:p>
         </p:txBody>
@@ -4205,8 +4178,8 @@
         </p:nvSpPr>
         <p:spPr>
           <a:xfrm>
-            <a:off x="2834276" y="3365136"/>
-            <a:ext cx="6584407" cy="2587464"/>
+            <a:off x="1635513" y="2697624"/>
+            <a:ext cx="8981933" cy="3254976"/>
           </a:xfrm>
           <a:prstGeom prst="rect">
             <a:avLst/>
@@ -4259,8 +4232,8 @@
         </p:blipFill>
         <p:spPr>
           <a:xfrm>
-            <a:off x="2843276" y="3374136"/>
-            <a:ext cx="6566407" cy="2569464"/>
+            <a:off x="1644513" y="2706624"/>
+            <a:ext cx="8963933" cy="3236976"/>
           </a:xfrm>
           <a:prstGeom prst="rect">
             <a:avLst/>

--- a/recommendation/presentation/발표_P3_데이터생성_최호길.pptx
+++ b/recommendation/presentation/발표_P3_데이터생성_최호길.pptx
@@ -9,7 +9,6 @@
     <p:sldId id="257" r:id="rId8"/>
     <p:sldId id="258" r:id="rId9"/>
     <p:sldId id="259" r:id="rId10"/>
-    <p:sldId id="260" r:id="rId11"/>
   </p:sldIdLst>
   <p:sldSz cx="12191695" cy="6858000" type="screen4x3"/>
   <p:notesSz cx="6858000" cy="9144000"/>
@@ -4138,7 +4137,7 @@
                 <a:latin typeface="맑은 고딕"/>
                 <a:ea typeface="맑은 고딕"/>
               </a:rPr>
-              <a:t>fleet(여러 설비)가 함께 찍은 한 trend에서 한 설비(target)를 판정합니다. episode(자기완결 구간)를 순차 생성해 이어 붙여 정상 baseline을 만듭니다</a:t>
+              <a:t>기본 baseline에 노이즈 3종과 밀도(밀집/희소/결핍)를 episode마다 가중치로 조합해 여러 episode를 순차 생성하고 이어 붙여 정상 trend를 만듭니다</a:t>
             </a:r>
           </a:p>
           <a:p>
@@ -4165,7 +4164,7 @@
                 <a:latin typeface="맑은 고딕"/>
                 <a:ea typeface="맑은 고딕"/>
               </a:rPr>
-              <a:t>episode마다 길이/밀도/결측이 다르고, 노이즈는 chart당 1종 (episode = segment, 강화학습 개념 차용)</a:t>
+              <a:t>한 trend는 여러 설비(fleet)가 함께 찍히고 그중 한 설비(target)를 판정. episode = 시작과 끝이 있는 자기완결 구간을 단어 뜻 그대로 사용</a:t>
             </a:r>
           </a:p>
         </p:txBody>
@@ -4970,7 +4969,7 @@
                 <a:latin typeface="맑은 고딕"/>
                 <a:ea typeface="맑은 고딕"/>
               </a:rPr>
-              <a:t>P3 | 조건별 실험</a:t>
+              <a:t>P3 | 결과</a:t>
             </a:r>
           </a:p>
         </p:txBody>
@@ -5006,7 +5005,7 @@
                 <a:latin typeface="맑은 고딕"/>
                 <a:ea typeface="맑은 고딕"/>
               </a:rPr>
-              <a:t>조건별 실험으로 성능을 끌어올렸다 (F1 0.9944 → 0.9988)</a:t>
+              <a:t>생성 데이터로 학습한 1차 gate — 조건·백본·운영까지 검증</a:t>
             </a:r>
           </a:p>
         </p:txBody>
@@ -5020,7 +5019,7 @@
         <p:spPr>
           <a:xfrm>
             <a:off x="640080" y="1828800"/>
-            <a:ext cx="10972800" cy="1371600"/>
+            <a:ext cx="10972800" cy="566928"/>
           </a:xfrm>
           <a:prstGeom prst="rect">
             <a:avLst/>
@@ -5039,7 +5038,7 @@
               </a:spcAft>
             </a:pPr>
             <a:r>
-              <a:rPr sz="1400" b="0">
+              <a:rPr sz="1450" b="0">
                 <a:solidFill>
                   <a:srgbClr val="5B9BD5"/>
                 </a:solidFill>
@@ -5049,168 +5048,54 @@
               <a:t>●  </a:t>
             </a:r>
             <a:r>
-              <a:rPr sz="1400">
+              <a:rPr sz="1450">
                 <a:solidFill>
                   <a:srgbClr val="1A1F2E"/>
                 </a:solidFill>
                 <a:latin typeface="맑은 고딕"/>
                 <a:ea typeface="맑은 고딕"/>
               </a:rPr>
-              <a:t>여러 학습 조건을 단독(single-axis)으로 바꿔 </a:t>
-            </a:r>
-            <a:r>
-              <a:rPr sz="1400" b="1">
+              <a:t>생성 데이터로 학습한 1차 gate를 여러 조건·백본·운영 임계값에서 검증했습니다. 정상 비율과 정규화로 놓친 불량을 </a:t>
+            </a:r>
+            <a:r>
+              <a:rPr sz="1450" b="1">
                 <a:solidFill>
                   <a:srgbClr val="0F1E3D"/>
                 </a:solidFill>
                 <a:latin typeface="맑은 고딕"/>
                 <a:ea typeface="맑은 고딕"/>
               </a:rPr>
-              <a:t>14개 축 × 5-seed</a:t>
-            </a:r>
-            <a:r>
-              <a:rPr sz="1400">
+              <a:t>4.6→0.8</a:t>
+            </a:r>
+            <a:r>
+              <a:rPr sz="1450">
                 <a:solidFill>
                   <a:srgbClr val="1A1F2E"/>
                 </a:solidFill>
                 <a:latin typeface="맑은 고딕"/>
                 <a:ea typeface="맑은 고딕"/>
               </a:rPr>
-              <a:t>로 검증했습니다 (baseline F1 0.9944, 놓친 불량 FN 4.6)</a:t>
-            </a:r>
-          </a:p>
-          <a:p>
-            <a:pPr marL="274320" indent="-274320">
-              <a:spcAft>
-                <a:spcPts val="500"/>
-              </a:spcAft>
-            </a:pPr>
-            <a:r>
-              <a:rPr sz="1400" b="0">
-                <a:solidFill>
-                  <a:srgbClr val="5B9BD5"/>
+              <a:t>, F1을 </a:t>
+            </a:r>
+            <a:r>
+              <a:rPr sz="1450" b="1">
+                <a:solidFill>
+                  <a:srgbClr val="0F1E3D"/>
                 </a:solidFill>
                 <a:latin typeface="맑은 고딕"/>
                 <a:ea typeface="맑은 고딕"/>
               </a:rPr>
-              <a:t>●  </a:t>
-            </a:r>
-            <a:r>
-              <a:rPr sz="1400">
+              <a:t>0.9944→0.9988</a:t>
+            </a:r>
+            <a:r>
+              <a:rPr sz="1450">
                 <a:solidFill>
                   <a:srgbClr val="1A1F2E"/>
                 </a:solidFill>
                 <a:latin typeface="맑은 고딕"/>
                 <a:ea typeface="맑은 고딕"/>
               </a:rPr>
-              <a:t>정상 비율↑, </a:t>
-            </a:r>
-            <a:r>
-              <a:rPr sz="1400" b="1">
-                <a:solidFill>
-                  <a:srgbClr val="0F1E3D"/>
-                </a:solidFill>
-                <a:latin typeface="맑은 고딕"/>
-                <a:ea typeface="맑은 고딕"/>
-              </a:rPr>
-              <a:t>stochastic depth 0.05</a:t>
-            </a:r>
-            <a:r>
-              <a:rPr sz="1400">
-                <a:solidFill>
-                  <a:srgbClr val="1A1F2E"/>
-                </a:solidFill>
-                <a:latin typeface="맑은 고딕"/>
-                <a:ea typeface="맑은 고딕"/>
-              </a:rPr>
-              <a:t>, </a:t>
-            </a:r>
-            <a:r>
-              <a:rPr sz="1400" b="1">
-                <a:solidFill>
-                  <a:srgbClr val="0F1E3D"/>
-                </a:solidFill>
-                <a:latin typeface="맑은 고딕"/>
-                <a:ea typeface="맑은 고딕"/>
-              </a:rPr>
-              <a:t>label smoothing 0.02</a:t>
-            </a:r>
-            <a:r>
-              <a:rPr sz="1400">
-                <a:solidFill>
-                  <a:srgbClr val="1A1F2E"/>
-                </a:solidFill>
-                <a:latin typeface="맑은 고딕"/>
-                <a:ea typeface="맑은 고딕"/>
-              </a:rPr>
-              <a:t>가 특히 효과적 — 놓친 불량을 </a:t>
-            </a:r>
-            <a:r>
-              <a:rPr sz="1400" b="1">
-                <a:solidFill>
-                  <a:srgbClr val="0F1E3D"/>
-                </a:solidFill>
-                <a:latin typeface="맑은 고딕"/>
-                <a:ea typeface="맑은 고딕"/>
-              </a:rPr>
-              <a:t>4.6 → 0.8</a:t>
-            </a:r>
-            <a:r>
-              <a:rPr sz="1400">
-                <a:solidFill>
-                  <a:srgbClr val="1A1F2E"/>
-                </a:solidFill>
-                <a:latin typeface="맑은 고딕"/>
-                <a:ea typeface="맑은 고딕"/>
-              </a:rPr>
-              <a:t>로, F1을 </a:t>
-            </a:r>
-            <a:r>
-              <a:rPr sz="1400" b="1">
-                <a:solidFill>
-                  <a:srgbClr val="0F1E3D"/>
-                </a:solidFill>
-                <a:latin typeface="맑은 고딕"/>
-                <a:ea typeface="맑은 고딕"/>
-              </a:rPr>
-              <a:t>0.9988</a:t>
-            </a:r>
-            <a:r>
-              <a:rPr sz="1400">
-                <a:solidFill>
-                  <a:srgbClr val="1A1F2E"/>
-                </a:solidFill>
-                <a:latin typeface="맑은 고딕"/>
-                <a:ea typeface="맑은 고딕"/>
-              </a:rPr>
-              <a:t>까지 올렸습니다</a:t>
-            </a:r>
-          </a:p>
-          <a:p>
-            <a:pPr marL="420624" indent="-420624" lvl="1">
-              <a:spcAft>
-                <a:spcPts val="500"/>
-              </a:spcAft>
-            </a:pPr>
-            <a:r>
-              <a:rPr sz="1300" b="0">
-                <a:solidFill>
-                  <a:srgbClr val="6E7B8E"/>
-                </a:solidFill>
-                <a:latin typeface="맑은 고딕"/>
-                <a:ea typeface="맑은 고딕"/>
-              </a:rPr>
-              <a:t>–  </a:t>
-            </a:r>
-            <a:r>
-              <a:rPr sz="1300">
-                <a:solidFill>
-                  <a:srgbClr val="4A5666"/>
-                </a:solidFill>
-                <a:latin typeface="맑은 고딕"/>
-                <a:ea typeface="맑은 고딕"/>
-              </a:rPr>
-              <a:t>각 막대는 단독 조건 실험. normal threshold(NT)를 올리면 FN↓ / FP↑ — 운영은 0.9 균형점</a:t>
+              <a:t>까지 올렸습니다 (전부 5-seed 평균)</a:t>
             </a:r>
           </a:p>
         </p:txBody>
@@ -5223,7 +5108,7 @@
         </p:nvSpPr>
         <p:spPr>
           <a:xfrm>
-            <a:off x="7406640" y="3474720"/>
+            <a:off x="7406640" y="2670048"/>
             <a:ext cx="4206240" cy="384048"/>
           </a:xfrm>
           <a:prstGeom prst="roundRect">
@@ -5267,7 +5152,7 @@
         </p:nvSpPr>
         <p:spPr>
           <a:xfrm>
-            <a:off x="7406640" y="3474720"/>
+            <a:off x="7406640" y="2670048"/>
             <a:ext cx="82296" cy="384048"/>
           </a:xfrm>
           <a:prstGeom prst="rect">
@@ -5311,7 +5196,7 @@
         </p:nvSpPr>
         <p:spPr>
           <a:xfrm>
-            <a:off x="7589520" y="3474720"/>
+            <a:off x="7589520" y="2670048"/>
             <a:ext cx="3877056" cy="384048"/>
           </a:xfrm>
           <a:prstGeom prst="rect">
@@ -5347,8 +5232,8 @@
         </p:nvSpPr>
         <p:spPr>
           <a:xfrm>
-            <a:off x="2858146" y="3904632"/>
-            <a:ext cx="6536668" cy="2047968"/>
+            <a:off x="1188864" y="3099960"/>
+            <a:ext cx="2062984" cy="877536"/>
           </a:xfrm>
           <a:prstGeom prst="rect">
             <a:avLst/>
@@ -5387,7 +5272,7 @@
       </p:sp>
       <p:pic>
         <p:nvPicPr>
-          <p:cNvPr id="10" name="Picture 9" descr="p3_deck_ablation.png"/>
+          <p:cNvPr id="10" name="Picture 9" descr="p3r_normal_ratio.png"/>
           <p:cNvPicPr>
             <a:picLocks noChangeAspect="1"/>
           </p:cNvPicPr>
@@ -5401,8 +5286,8 @@
         </p:blipFill>
         <p:spPr>
           <a:xfrm>
-            <a:off x="2867146" y="3913632"/>
-            <a:ext cx="6518668" cy="2029968"/>
+            <a:off x="1197864" y="3108960"/>
+            <a:ext cx="2044984" cy="859536"/>
           </a:xfrm>
           <a:prstGeom prst="rect">
             <a:avLst/>
@@ -5417,8 +5302,8 @@
         </p:nvSpPr>
         <p:spPr>
           <a:xfrm>
-            <a:off x="640080" y="5961888"/>
-            <a:ext cx="10972800" cy="274320"/>
+            <a:off x="-1685768" y="4059936"/>
+            <a:ext cx="7812248" cy="329184"/>
           </a:xfrm>
           <a:prstGeom prst="rect">
             <a:avLst/>
@@ -5426,393 +5311,35 @@
           <a:noFill/>
         </p:spPr>
         <p:txBody>
-          <a:bodyPr wrap="square" anchor="t" lIns="0" rIns="0" tIns="0" bIns="0">
+          <a:bodyPr wrap="square" anchor="ctr" lIns="0" rIns="0" tIns="0" bIns="0">
             <a:spAutoFit/>
           </a:bodyPr>
           <a:lstStyle/>
           <a:p>
             <a:pPr algn="ctr"/>
             <a:r>
-              <a:rPr sz="1300">
-                <a:solidFill>
-                  <a:srgbClr val="3A485C"/>
+              <a:rPr sz="1450" b="1">
+                <a:solidFill>
+                  <a:srgbClr val="0F1E3D"/>
                 </a:solidFill>
                 <a:latin typeface="맑은 고딕"/>
                 <a:ea typeface="맑은 고딕"/>
               </a:rPr>
-              <a:t>binary F1(좌)과 놓친 불량 FN(우) — 점선 = baseline, 막대 = 각 조건 단독 적용 (5-seed 평균)</a:t>
-            </a:r>
-          </a:p>
-        </p:txBody>
-      </p:sp>
-      <p:sp>
-        <p:nvSpPr>
-          <p:cNvPr id="12" name="TextBox 11"/>
-          <p:cNvSpPr txBox="1"/>
-          <p:nvPr/>
-        </p:nvSpPr>
-        <p:spPr>
-          <a:xfrm>
-            <a:off x="457200" y="6437376"/>
-            <a:ext cx="8229600" cy="292608"/>
-          </a:xfrm>
-          <a:prstGeom prst="rect">
-            <a:avLst/>
-          </a:prstGeom>
-          <a:noFill/>
-        </p:spPr>
-        <p:txBody>
-          <a:bodyPr wrap="square" anchor="ctr" lIns="0" rIns="0" tIns="0" bIns="0">
-            <a:spAutoFit/>
-          </a:bodyPr>
-          <a:lstStyle/>
-          <a:p>
-            <a:pPr algn="l"/>
-            <a:r>
-              <a:rPr sz="900">
-                <a:solidFill>
-                  <a:srgbClr val="6B7280"/>
-                </a:solidFill>
-                <a:latin typeface="맑은 고딕"/>
-                <a:ea typeface="맑은 고딕"/>
-              </a:rPr>
-              <a:t>최호길 | QIE Data Science | AI Specialist 인증</a:t>
-            </a:r>
-          </a:p>
-        </p:txBody>
-      </p:sp>
-      <p:sp>
-        <p:nvSpPr>
-          <p:cNvPr id="13" name="TextBox 12"/>
-          <p:cNvSpPr txBox="1"/>
-          <p:nvPr/>
-        </p:nvSpPr>
-        <p:spPr>
-          <a:xfrm>
-            <a:off x="10972800" y="6437376"/>
-            <a:ext cx="758952" cy="292608"/>
-          </a:xfrm>
-          <a:prstGeom prst="rect">
-            <a:avLst/>
-          </a:prstGeom>
-          <a:noFill/>
-        </p:spPr>
-        <p:txBody>
-          <a:bodyPr wrap="square" anchor="ctr" lIns="0" rIns="0" tIns="0" bIns="0">
-            <a:spAutoFit/>
-          </a:bodyPr>
-          <a:lstStyle/>
-          <a:p>
-            <a:pPr algn="r"/>
-            <a:r>
-              <a:rPr sz="900">
-                <a:solidFill>
-                  <a:srgbClr val="6B7280"/>
-                </a:solidFill>
-                <a:latin typeface="맑은 고딕"/>
-                <a:ea typeface="맑은 고딕"/>
-              </a:rPr>
-              <a:t>4</a:t>
-            </a:r>
-          </a:p>
-        </p:txBody>
-      </p:sp>
-    </p:spTree>
-  </p:cSld>
-  <p:clrMapOvr>
-    <a:masterClrMapping/>
-  </p:clrMapOvr>
-</p:sld>
-</file>
-
-<file path=ppt/slides/slide5.xml><?xml version="1.0" encoding="utf-8"?>
-<p:sld xmlns:a="http://schemas.openxmlformats.org/drawingml/2006/main" xmlns:p="http://schemas.openxmlformats.org/presentationml/2006/main" xmlns:r="http://schemas.openxmlformats.org/officeDocument/2006/relationships">
-  <p:cSld>
-    <p:bg>
-      <p:bgPr>
-        <a:solidFill>
-          <a:srgbClr val="FFFFFF"/>
-        </a:solidFill>
-        <a:effectLst/>
-      </p:bgPr>
-    </p:bg>
-    <p:spTree>
-      <p:nvGrpSpPr>
-        <p:cNvPr id="1" name=""/>
-        <p:cNvGrpSpPr/>
-        <p:nvPr/>
-      </p:nvGrpSpPr>
-      <p:grpSpPr/>
-      <p:sp>
-        <p:nvSpPr>
-          <p:cNvPr id="2" name="Rectangle 1"/>
+              <a:t>정상 비율 700→3300 — F1 0.9944→0.9988, FN 4.6→0.8</a:t>
+            </a:r>
+          </a:p>
+        </p:txBody>
+      </p:sp>
+      <p:sp>
+        <p:nvSpPr>
+          <p:cNvPr id="12" name="Rectangle 11"/>
           <p:cNvSpPr/>
           <p:nvPr/>
         </p:nvSpPr>
         <p:spPr>
           <a:xfrm>
-            <a:off x="640080" y="502920"/>
-            <a:ext cx="123444" cy="768096"/>
-          </a:xfrm>
-          <a:prstGeom prst="rect">
-            <a:avLst/>
-          </a:prstGeom>
-          <a:solidFill>
-            <a:srgbClr val="CFD4DB"/>
-          </a:solidFill>
-          <a:ln>
-            <a:noFill/>
-          </a:ln>
-          <a:effectLst/>
-        </p:spPr>
-        <p:style>
-          <a:lnRef idx="1">
-            <a:schemeClr val="accent1"/>
-          </a:lnRef>
-          <a:fillRef idx="3">
-            <a:schemeClr val="accent1"/>
-          </a:fillRef>
-          <a:effectRef idx="2">
-            <a:schemeClr val="accent1"/>
-          </a:effectRef>
-          <a:fontRef idx="minor">
-            <a:schemeClr val="lt1"/>
-          </a:fontRef>
-        </p:style>
-        <p:txBody>
-          <a:bodyPr rtlCol="0" anchor="ctr"/>
-          <a:lstStyle/>
-          <a:p>
-            <a:pPr algn="ctr"/>
-          </a:p>
-        </p:txBody>
-      </p:sp>
-      <p:sp>
-        <p:nvSpPr>
-          <p:cNvPr id="3" name="TextBox 2"/>
-          <p:cNvSpPr txBox="1"/>
-          <p:nvPr/>
-        </p:nvSpPr>
-        <p:spPr>
-          <a:xfrm>
-            <a:off x="932688" y="448056"/>
-            <a:ext cx="10881360" cy="256032"/>
-          </a:xfrm>
-          <a:prstGeom prst="rect">
-            <a:avLst/>
-          </a:prstGeom>
-          <a:noFill/>
-        </p:spPr>
-        <p:txBody>
-          <a:bodyPr wrap="square" anchor="t" lIns="0" rIns="0" tIns="0" bIns="0">
-            <a:spAutoFit/>
-          </a:bodyPr>
-          <a:lstStyle/>
-          <a:p>
-            <a:pPr algn="l"/>
-            <a:r>
-              <a:rPr sz="1300" b="1">
-                <a:solidFill>
-                  <a:srgbClr val="8A929E"/>
-                </a:solidFill>
-                <a:latin typeface="맑은 고딕"/>
-                <a:ea typeface="맑은 고딕"/>
-              </a:rPr>
-              <a:t>P3 | 백본 × 데이터셋 × 운영</a:t>
-            </a:r>
-          </a:p>
-        </p:txBody>
-      </p:sp>
-      <p:sp>
-        <p:nvSpPr>
-          <p:cNvPr id="4" name="TextBox 3"/>
-          <p:cNvSpPr txBox="1"/>
-          <p:nvPr/>
-        </p:nvSpPr>
-        <p:spPr>
-          <a:xfrm>
-            <a:off x="932688" y="704088"/>
-            <a:ext cx="10881360" cy="603504"/>
-          </a:xfrm>
-          <a:prstGeom prst="rect">
-            <a:avLst/>
-          </a:prstGeom>
-          <a:noFill/>
-        </p:spPr>
-        <p:txBody>
-          <a:bodyPr wrap="square" anchor="t" lIns="0" rIns="0" tIns="0" bIns="0">
-            <a:spAutoFit/>
-          </a:bodyPr>
-          <a:lstStyle/>
-          <a:p>
-            <a:pPr algn="l"/>
-            <a:r>
-              <a:rPr sz="3100" b="1">
-                <a:solidFill>
-                  <a:srgbClr val="0F1E3D"/>
-                </a:solidFill>
-                <a:latin typeface="맑은 고딕"/>
-                <a:ea typeface="맑은 고딕"/>
-              </a:rPr>
-              <a:t>백본/데이터셋/임계값까지 동일 프로토콜로 검증</a:t>
-            </a:r>
-          </a:p>
-        </p:txBody>
-      </p:sp>
-      <p:sp>
-        <p:nvSpPr>
-          <p:cNvPr id="5" name="TextBox 4"/>
-          <p:cNvSpPr txBox="1"/>
-          <p:nvPr/>
-        </p:nvSpPr>
-        <p:spPr>
-          <a:xfrm>
-            <a:off x="640080" y="1828800"/>
-            <a:ext cx="10972800" cy="1371600"/>
-          </a:xfrm>
-          <a:prstGeom prst="rect">
-            <a:avLst/>
-          </a:prstGeom>
-          <a:noFill/>
-        </p:spPr>
-        <p:txBody>
-          <a:bodyPr wrap="square" anchor="t" lIns="0" rIns="0" tIns="0" bIns="0">
-            <a:spAutoFit/>
-          </a:bodyPr>
-          <a:lstStyle/>
-          <a:p>
-            <a:pPr marL="274320" indent="-274320">
-              <a:spcAft>
-                <a:spcPts val="500"/>
-              </a:spcAft>
-            </a:pPr>
-            <a:r>
-              <a:rPr sz="1400" b="0">
-                <a:solidFill>
-                  <a:srgbClr val="5B9BD5"/>
-                </a:solidFill>
-                <a:latin typeface="맑은 고딕"/>
-                <a:ea typeface="맑은 고딕"/>
-              </a:rPr>
-              <a:t>●  </a:t>
-            </a:r>
-            <a:r>
-              <a:rPr sz="1400">
-                <a:solidFill>
-                  <a:srgbClr val="1A1F2E"/>
-                </a:solidFill>
-                <a:latin typeface="맑은 고딕"/>
-                <a:ea typeface="맑은 고딕"/>
-              </a:rPr>
-              <a:t>백본을 키우면(ConvNeXtV2 Tiny→</a:t>
-            </a:r>
-            <a:r>
-              <a:rPr sz="1400" b="1">
-                <a:solidFill>
-                  <a:srgbClr val="0F1E3D"/>
-                </a:solidFill>
-                <a:latin typeface="맑은 고딕"/>
-                <a:ea typeface="맑은 고딕"/>
-              </a:rPr>
-              <a:t>Base</a:t>
-            </a:r>
-            <a:r>
-              <a:rPr sz="1400">
-                <a:solidFill>
-                  <a:srgbClr val="1A1F2E"/>
-                </a:solidFill>
-                <a:latin typeface="맑은 고딕"/>
-                <a:ea typeface="맑은 고딕"/>
-              </a:rPr>
-              <a:t>) 놓친 불량이 4.6→1.2로 줄고, 노이즈를 15% 키운 데이터셋에서도 F1 0.9944→</a:t>
-            </a:r>
-            <a:r>
-              <a:rPr sz="1400" b="1">
-                <a:solidFill>
-                  <a:srgbClr val="0F1E3D"/>
-                </a:solidFill>
-                <a:latin typeface="맑은 고딕"/>
-                <a:ea typeface="맑은 고딕"/>
-              </a:rPr>
-              <a:t>0.9960</a:t>
-            </a:r>
-            <a:r>
-              <a:rPr sz="1400">
-                <a:solidFill>
-                  <a:srgbClr val="1A1F2E"/>
-                </a:solidFill>
-                <a:latin typeface="맑은 고딕"/>
-                <a:ea typeface="맑은 고딕"/>
-              </a:rPr>
-              <a:t>으로 강건합니다 (모두 5-seed)</a:t>
-            </a:r>
-          </a:p>
-          <a:p>
-            <a:pPr marL="274320" indent="-274320">
-              <a:spcAft>
-                <a:spcPts val="500"/>
-              </a:spcAft>
-            </a:pPr>
-            <a:r>
-              <a:rPr sz="1400" b="0">
-                <a:solidFill>
-                  <a:srgbClr val="5B9BD5"/>
-                </a:solidFill>
-                <a:latin typeface="맑은 고딕"/>
-                <a:ea typeface="맑은 고딕"/>
-              </a:rPr>
-              <a:t>●  </a:t>
-            </a:r>
-            <a:r>
-              <a:rPr sz="1400">
-                <a:solidFill>
-                  <a:srgbClr val="1A1F2E"/>
-                </a:solidFill>
-                <a:latin typeface="맑은 고딕"/>
-                <a:ea typeface="맑은 고딕"/>
-              </a:rPr>
-              <a:t>운영 임계값(NT)을 올리면 FN↓ / FP↑ — 현장 비용에 맞춰 조절, 기본 0.9</a:t>
-            </a:r>
-          </a:p>
-          <a:p>
-            <a:pPr marL="420624" indent="-420624" lvl="1">
-              <a:spcAft>
-                <a:spcPts val="500"/>
-              </a:spcAft>
-            </a:pPr>
-            <a:r>
-              <a:rPr sz="1300" b="0">
-                <a:solidFill>
-                  <a:srgbClr val="6E7B8E"/>
-                </a:solidFill>
-                <a:latin typeface="맑은 고딕"/>
-                <a:ea typeface="맑은 고딕"/>
-              </a:rPr>
-              <a:t>–  </a:t>
-            </a:r>
-            <a:r>
-              <a:rPr sz="1300">
-                <a:solidFill>
-                  <a:srgbClr val="4A5666"/>
-                </a:solidFill>
-                <a:latin typeface="맑은 고딕"/>
-                <a:ea typeface="맑은 고딕"/>
-              </a:rPr>
-              <a:t>백본 6종·데이터셋 강도 변형 8종을 동일 baseline·5-seed·자동 controller로 비교하는 프레임워크를 갖췄고, 첫 비교셀 검증 후 순차 확장 중입니다</a:t>
-            </a:r>
-          </a:p>
-        </p:txBody>
-      </p:sp>
-      <p:sp>
-        <p:nvSpPr>
-          <p:cNvPr id="6" name="Rectangle 5"/>
-          <p:cNvSpPr/>
-          <p:nvPr/>
-        </p:nvSpPr>
-        <p:spPr>
-          <a:xfrm>
-            <a:off x="1219172" y="3319416"/>
-            <a:ext cx="9814616" cy="2633184"/>
+            <a:off x="9487575" y="3099960"/>
+            <a:ext cx="1090058" cy="877536"/>
           </a:xfrm>
           <a:prstGeom prst="rect">
             <a:avLst/>
@@ -5851,22 +5378,22 @@
       </p:sp>
       <p:pic>
         <p:nvPicPr>
-          <p:cNvPr id="7" name="Picture 6" descr="p3_deck_robust.png"/>
+          <p:cNvPr id="13" name="Picture 12" descr="p3r_gradcam.png"/>
           <p:cNvPicPr>
             <a:picLocks noChangeAspect="1"/>
           </p:cNvPicPr>
           <p:nvPr/>
         </p:nvPicPr>
         <p:blipFill>
-          <a:blip r:embed="rId2"/>
+          <a:blip r:embed="rId3"/>
           <a:stretch>
             <a:fillRect/>
           </a:stretch>
         </p:blipFill>
         <p:spPr>
           <a:xfrm>
-            <a:off x="1228172" y="3328416"/>
-            <a:ext cx="9796616" cy="2615184"/>
+            <a:off x="9496575" y="3108960"/>
+            <a:ext cx="1072058" cy="859536"/>
           </a:xfrm>
           <a:prstGeom prst="rect">
             <a:avLst/>
@@ -5875,7 +5402,255 @@
       </p:pic>
       <p:sp>
         <p:nvSpPr>
-          <p:cNvPr id="8" name="TextBox 7"/>
+          <p:cNvPr id="14" name="TextBox 13"/>
+          <p:cNvSpPr txBox="1"/>
+          <p:nvPr/>
+        </p:nvSpPr>
+        <p:spPr>
+          <a:xfrm>
+            <a:off x="6126480" y="4059936"/>
+            <a:ext cx="7812248" cy="329184"/>
+          </a:xfrm>
+          <a:prstGeom prst="rect">
+            <a:avLst/>
+          </a:prstGeom>
+          <a:noFill/>
+        </p:spPr>
+        <p:txBody>
+          <a:bodyPr wrap="square" anchor="ctr" lIns="0" rIns="0" tIns="0" bIns="0">
+            <a:spAutoFit/>
+          </a:bodyPr>
+          <a:lstStyle/>
+          <a:p>
+            <a:pPr algn="ctr"/>
+            <a:r>
+              <a:rPr sz="1450" b="1">
+                <a:solidFill>
+                  <a:srgbClr val="0F1E3D"/>
+                </a:solidFill>
+                <a:latin typeface="맑은 고딕"/>
+                <a:ea typeface="맑은 고딕"/>
+              </a:rPr>
+              <a:t>Grad-CAM 6종×6 — 색이 아니라 결함 패턴 위치로 판단</a:t>
+            </a:r>
+          </a:p>
+        </p:txBody>
+      </p:sp>
+      <p:sp>
+        <p:nvSpPr>
+          <p:cNvPr id="15" name="Rectangle 14"/>
+          <p:cNvSpPr/>
+          <p:nvPr/>
+        </p:nvSpPr>
+        <p:spPr>
+          <a:xfrm>
+            <a:off x="1363939" y="4654440"/>
+            <a:ext cx="1712833" cy="877536"/>
+          </a:xfrm>
+          <a:prstGeom prst="rect">
+            <a:avLst/>
+          </a:prstGeom>
+          <a:solidFill>
+            <a:srgbClr val="FFFFFF"/>
+          </a:solidFill>
+          <a:ln w="12700">
+            <a:solidFill>
+              <a:srgbClr val="D7DEEA"/>
+            </a:solidFill>
+          </a:ln>
+          <a:effectLst/>
+        </p:spPr>
+        <p:style>
+          <a:lnRef idx="1">
+            <a:schemeClr val="accent1"/>
+          </a:lnRef>
+          <a:fillRef idx="3">
+            <a:schemeClr val="accent1"/>
+          </a:fillRef>
+          <a:effectRef idx="2">
+            <a:schemeClr val="accent1"/>
+          </a:effectRef>
+          <a:fontRef idx="minor">
+            <a:schemeClr val="lt1"/>
+          </a:fontRef>
+        </p:style>
+        <p:txBody>
+          <a:bodyPr rtlCol="0" anchor="ctr"/>
+          <a:lstStyle/>
+          <a:p>
+            <a:pPr algn="ctr"/>
+          </a:p>
+        </p:txBody>
+      </p:sp>
+      <p:pic>
+        <p:nvPicPr>
+          <p:cNvPr id="16" name="Picture 15" descr="p3r_nt_effect.png"/>
+          <p:cNvPicPr>
+            <a:picLocks noChangeAspect="1"/>
+          </p:cNvPicPr>
+          <p:nvPr/>
+        </p:nvPicPr>
+        <p:blipFill>
+          <a:blip r:embed="rId4"/>
+          <a:stretch>
+            <a:fillRect/>
+          </a:stretch>
+        </p:blipFill>
+        <p:spPr>
+          <a:xfrm>
+            <a:off x="1372939" y="4663440"/>
+            <a:ext cx="1694833" cy="859536"/>
+          </a:xfrm>
+          <a:prstGeom prst="rect">
+            <a:avLst/>
+          </a:prstGeom>
+        </p:spPr>
+      </p:pic>
+      <p:sp>
+        <p:nvSpPr>
+          <p:cNvPr id="17" name="TextBox 16"/>
+          <p:cNvSpPr txBox="1"/>
+          <p:nvPr/>
+        </p:nvSpPr>
+        <p:spPr>
+          <a:xfrm>
+            <a:off x="-1685768" y="5614416"/>
+            <a:ext cx="7812248" cy="329184"/>
+          </a:xfrm>
+          <a:prstGeom prst="rect">
+            <a:avLst/>
+          </a:prstGeom>
+          <a:noFill/>
+        </p:spPr>
+        <p:txBody>
+          <a:bodyPr wrap="square" anchor="ctr" lIns="0" rIns="0" tIns="0" bIns="0">
+            <a:spAutoFit/>
+          </a:bodyPr>
+          <a:lstStyle/>
+          <a:p>
+            <a:pPr algn="ctr"/>
+            <a:r>
+              <a:rPr sz="1450" b="1">
+                <a:solidFill>
+                  <a:srgbClr val="0F1E3D"/>
+                </a:solidFill>
+                <a:latin typeface="맑은 고딕"/>
+                <a:ea typeface="맑은 고딕"/>
+              </a:rPr>
+              <a:t>운영 임계값 NT — FN/FP를 현장 비용에 맞춰 (319-run)</a:t>
+            </a:r>
+          </a:p>
+        </p:txBody>
+      </p:sp>
+      <p:sp>
+        <p:nvSpPr>
+          <p:cNvPr id="18" name="Rectangle 17"/>
+          <p:cNvSpPr/>
+          <p:nvPr/>
+        </p:nvSpPr>
+        <p:spPr>
+          <a:xfrm>
+            <a:off x="9001112" y="4654440"/>
+            <a:ext cx="2062984" cy="877536"/>
+          </a:xfrm>
+          <a:prstGeom prst="rect">
+            <a:avLst/>
+          </a:prstGeom>
+          <a:solidFill>
+            <a:srgbClr val="FFFFFF"/>
+          </a:solidFill>
+          <a:ln w="12700">
+            <a:solidFill>
+              <a:srgbClr val="D7DEEA"/>
+            </a:solidFill>
+          </a:ln>
+          <a:effectLst/>
+        </p:spPr>
+        <p:style>
+          <a:lnRef idx="1">
+            <a:schemeClr val="accent1"/>
+          </a:lnRef>
+          <a:fillRef idx="3">
+            <a:schemeClr val="accent1"/>
+          </a:fillRef>
+          <a:effectRef idx="2">
+            <a:schemeClr val="accent1"/>
+          </a:effectRef>
+          <a:fontRef idx="minor">
+            <a:schemeClr val="lt1"/>
+          </a:fontRef>
+        </p:style>
+        <p:txBody>
+          <a:bodyPr rtlCol="0" anchor="ctr"/>
+          <a:lstStyle/>
+          <a:p>
+            <a:pPr algn="ctr"/>
+          </a:p>
+        </p:txBody>
+      </p:sp>
+      <p:pic>
+        <p:nvPicPr>
+          <p:cNvPr id="19" name="Picture 18" descr="p3r_stoch_depth.png"/>
+          <p:cNvPicPr>
+            <a:picLocks noChangeAspect="1"/>
+          </p:cNvPicPr>
+          <p:nvPr/>
+        </p:nvPicPr>
+        <p:blipFill>
+          <a:blip r:embed="rId5"/>
+          <a:stretch>
+            <a:fillRect/>
+          </a:stretch>
+        </p:blipFill>
+        <p:spPr>
+          <a:xfrm>
+            <a:off x="9010112" y="4663440"/>
+            <a:ext cx="2044984" cy="859536"/>
+          </a:xfrm>
+          <a:prstGeom prst="rect">
+            <a:avLst/>
+          </a:prstGeom>
+        </p:spPr>
+      </p:pic>
+      <p:sp>
+        <p:nvSpPr>
+          <p:cNvPr id="20" name="TextBox 19"/>
+          <p:cNvSpPr txBox="1"/>
+          <p:nvPr/>
+        </p:nvSpPr>
+        <p:spPr>
+          <a:xfrm>
+            <a:off x="6126480" y="5614416"/>
+            <a:ext cx="7812248" cy="329184"/>
+          </a:xfrm>
+          <a:prstGeom prst="rect">
+            <a:avLst/>
+          </a:prstGeom>
+          <a:noFill/>
+        </p:spPr>
+        <p:txBody>
+          <a:bodyPr wrap="square" anchor="ctr" lIns="0" rIns="0" tIns="0" bIns="0">
+            <a:spAutoFit/>
+          </a:bodyPr>
+          <a:lstStyle/>
+          <a:p>
+            <a:pPr algn="ctr"/>
+            <a:r>
+              <a:rPr sz="1450" b="1">
+                <a:solidFill>
+                  <a:srgbClr val="0F1E3D"/>
+                </a:solidFill>
+                <a:latin typeface="맑은 고딕"/>
+                <a:ea typeface="맑은 고딕"/>
+              </a:rPr>
+              <a:t>Stochastic Depth 0.05 — F1 0.9985, FN 0.8</a:t>
+            </a:r>
+          </a:p>
+        </p:txBody>
+      </p:sp>
+      <p:sp>
+        <p:nvSpPr>
+          <p:cNvPr id="21" name="TextBox 20"/>
           <p:cNvSpPr txBox="1"/>
           <p:nvPr/>
         </p:nvSpPr>
@@ -5904,14 +5679,14 @@
                 <a:latin typeface="맑은 고딕"/>
                 <a:ea typeface="맑은 고딕"/>
               </a:rPr>
-              <a:t>백본(좌) / 데이터셋 강건성(중) / 운영 임계값 NT trade-off(우) — 동일 baseline·5-seed 고정 비교</a:t>
-            </a:r>
-          </a:p>
-        </p:txBody>
-      </p:sp>
-      <p:sp>
-        <p:nvSpPr>
-          <p:cNvPr id="9" name="TextBox 8"/>
+              <a:t>backbone Tiny 0.9944 vs Base 0.9971 · noise +15%에도 F1 0.9960 · 2-stage(불량 유형 분류) pilot binary F1 0.9967 / 유형 acc 0.73 — 동일 baseline·5-seed 비교 프레임워크로 확장 중</a:t>
+            </a:r>
+          </a:p>
+        </p:txBody>
+      </p:sp>
+      <p:sp>
+        <p:nvSpPr>
+          <p:cNvPr id="22" name="TextBox 21"/>
           <p:cNvSpPr txBox="1"/>
           <p:nvPr/>
         </p:nvSpPr>
@@ -5947,7 +5722,7 @@
       </p:sp>
       <p:sp>
         <p:nvSpPr>
-          <p:cNvPr id="10" name="TextBox 9"/>
+          <p:cNvPr id="23" name="TextBox 22"/>
           <p:cNvSpPr txBox="1"/>
           <p:nvPr/>
         </p:nvSpPr>
@@ -5976,7 +5751,7 @@
                 <a:latin typeface="맑은 고딕"/>
                 <a:ea typeface="맑은 고딕"/>
               </a:rPr>
-              <a:t>5</a:t>
+              <a:t>4</a:t>
             </a:r>
           </a:p>
         </p:txBody>

--- a/recommendation/presentation/발표_P3_데이터생성_최호길.pptx
+++ b/recommendation/presentation/발표_P3_데이터생성_최호길.pptx
@@ -3365,7 +3365,7 @@
             <a:r>
               <a:rPr sz="2000" b="1">
                 <a:solidFill>
-                  <a:srgbClr val="5B9BD5"/>
+                  <a:srgbClr val="96A0AD"/>
                 </a:solidFill>
                 <a:latin typeface="맑은 고딕"/>
                 <a:ea typeface="맑은 고딕"/>
@@ -3525,7 +3525,7 @@
             <a:r>
               <a:rPr sz="2000" b="1">
                 <a:solidFill>
-                  <a:srgbClr val="5B9BD5"/>
+                  <a:srgbClr val="96A0AD"/>
                 </a:solidFill>
                 <a:latin typeface="맑은 고딕"/>
                 <a:ea typeface="맑은 고딕"/>
@@ -3685,7 +3685,7 @@
             <a:r>
               <a:rPr sz="2000" b="1">
                 <a:solidFill>
-                  <a:srgbClr val="5B9BD5"/>
+                  <a:srgbClr val="96A0AD"/>
                 </a:solidFill>
                 <a:latin typeface="맑은 고딕"/>
                 <a:ea typeface="맑은 고딕"/>
@@ -3746,7 +3746,7 @@
             <a:avLst/>
           </a:prstGeom>
           <a:solidFill>
-            <a:srgbClr val="5B9BD5"/>
+            <a:srgbClr val="96A0AD"/>
           </a:solidFill>
           <a:ln>
             <a:noFill/>
@@ -3940,7 +3940,7 @@
             <a:r>
               <a:rPr sz="1200" b="1">
                 <a:solidFill>
-                  <a:srgbClr val="5B9BD5"/>
+                  <a:srgbClr val="96A0AD"/>
                 </a:solidFill>
                 <a:latin typeface="맑은 고딕"/>
                 <a:ea typeface="맑은 고딕"/>
@@ -4122,7 +4122,7 @@
             <a:r>
               <a:rPr sz="1450" b="0">
                 <a:solidFill>
-                  <a:srgbClr val="5B9BD5"/>
+                  <a:srgbClr val="96A0AD"/>
                 </a:solidFill>
                 <a:latin typeface="맑은 고딕"/>
                 <a:ea typeface="맑은 고딕"/>
@@ -4519,7 +4519,7 @@
             <a:r>
               <a:rPr sz="1450" b="0">
                 <a:solidFill>
-                  <a:srgbClr val="5B9BD5"/>
+                  <a:srgbClr val="96A0AD"/>
                 </a:solidFill>
                 <a:latin typeface="맑은 고딕"/>
                 <a:ea typeface="맑은 고딕"/>
@@ -4581,7 +4581,7 @@
             <a:avLst/>
           </a:prstGeom>
           <a:solidFill>
-            <a:srgbClr val="E6F7F6"/>
+            <a:srgbClr val="F4F6F8"/>
           </a:solidFill>
           <a:ln>
             <a:noFill/>
@@ -4625,7 +4625,7 @@
             <a:avLst/>
           </a:prstGeom>
           <a:solidFill>
-            <a:srgbClr val="5B9BD5"/>
+            <a:srgbClr val="96A0AD"/>
           </a:solidFill>
           <a:ln>
             <a:noFill/>
@@ -5005,7 +5005,7 @@
                 <a:latin typeface="맑은 고딕"/>
                 <a:ea typeface="맑은 고딕"/>
               </a:rPr>
-              <a:t>생성 데이터로 학습한 1차 gate — 조건·백본·운영까지 검증</a:t>
+              <a:t>단변수 반복 실험으로 조건별 BKM 확보 — 백본·데이터셋·운영 검증</a:t>
             </a:r>
           </a:p>
         </p:txBody>
@@ -5019,7 +5019,7 @@
         <p:spPr>
           <a:xfrm>
             <a:off x="640080" y="1828800"/>
-            <a:ext cx="10972800" cy="566928"/>
+            <a:ext cx="10972800" cy="896112"/>
           </a:xfrm>
           <a:prstGeom prst="rect">
             <a:avLst/>
@@ -5040,7 +5040,7 @@
             <a:r>
               <a:rPr sz="1450" b="0">
                 <a:solidFill>
-                  <a:srgbClr val="5B9BD5"/>
+                  <a:srgbClr val="96A0AD"/>
                 </a:solidFill>
                 <a:latin typeface="맑은 고딕"/>
                 <a:ea typeface="맑은 고딕"/>
@@ -5055,7 +5055,7 @@
                 <a:latin typeface="맑은 고딕"/>
                 <a:ea typeface="맑은 고딕"/>
               </a:rPr>
-              <a:t>생성 데이터로 학습한 1차 gate를 여러 조건·백본·운영 임계값에서 검증했습니다. 정상 비율과 정규화로 놓친 불량을 </a:t>
+              <a:t>각 학습 조건을 한 번에 하나씩만 변경하는 단변수(single-axis) 방식으로 5-seed 반복 평가를 수행하고, 축별 최적값을 BKM(Best Known Method)으로 정리하였습니다. 정상 비율 축에서 F1 0.9944→</a:t>
             </a:r>
             <a:r>
               <a:rPr sz="1450" b="1">
@@ -5065,7 +5065,7 @@
                 <a:latin typeface="맑은 고딕"/>
                 <a:ea typeface="맑은 고딕"/>
               </a:rPr>
-              <a:t>4.6→0.8</a:t>
+              <a:t>0.9988</a:t>
             </a:r>
             <a:r>
               <a:rPr sz="1450">
@@ -5075,50 +5075,32 @@
                 <a:latin typeface="맑은 고딕"/>
                 <a:ea typeface="맑은 고딕"/>
               </a:rPr>
-              <a:t>, F1을 </a:t>
-            </a:r>
-            <a:r>
-              <a:rPr sz="1450" b="1">
-                <a:solidFill>
-                  <a:srgbClr val="0F1E3D"/>
-                </a:solidFill>
-                <a:latin typeface="맑은 고딕"/>
-                <a:ea typeface="맑은 고딕"/>
-              </a:rPr>
-              <a:t>0.9944→0.9988</a:t>
-            </a:r>
-            <a:r>
-              <a:rPr sz="1450">
-                <a:solidFill>
-                  <a:srgbClr val="1A1F2E"/>
-                </a:solidFill>
-                <a:latin typeface="맑은 고딕"/>
-                <a:ea typeface="맑은 고딕"/>
-              </a:rPr>
-              <a:t>까지 올렸습니다 (전부 5-seed 평균)</a:t>
-            </a:r>
-          </a:p>
-        </p:txBody>
-      </p:sp>
-      <p:sp>
-        <p:nvSpPr>
-          <p:cNvPr id="6" name="Rounded Rectangle 5"/>
+              <a:t>, 놓친 불량 4.6→0.8로 가장 큰 개선을 확인하였으며, 백본·데이터셋·운영 임계값까지 동일 프로토콜로 비교하였습니다</a:t>
+            </a:r>
+          </a:p>
+        </p:txBody>
+      </p:sp>
+      <p:sp>
+        <p:nvSpPr>
+          <p:cNvPr id="6" name="Rectangle 5"/>
           <p:cNvSpPr/>
           <p:nvPr/>
         </p:nvSpPr>
         <p:spPr>
           <a:xfrm>
-            <a:off x="7406640" y="2670048"/>
-            <a:ext cx="4206240" cy="384048"/>
-          </a:xfrm>
-          <a:prstGeom prst="roundRect">
+            <a:off x="1778652" y="2843928"/>
+            <a:ext cx="8695656" cy="3108672"/>
+          </a:xfrm>
+          <a:prstGeom prst="rect">
             <a:avLst/>
           </a:prstGeom>
           <a:solidFill>
-            <a:srgbClr val="E6F7F6"/>
+            <a:srgbClr val="FFFFFF"/>
           </a:solidFill>
-          <a:ln>
-            <a:noFill/>
+          <a:ln w="12700">
+            <a:solidFill>
+              <a:srgbClr val="D7DEEA"/>
+            </a:solidFill>
           </a:ln>
           <a:effectLst/>
         </p:spPr>
@@ -5144,135 +5126,9 @@
           </a:p>
         </p:txBody>
       </p:sp>
-      <p:sp>
-        <p:nvSpPr>
-          <p:cNvPr id="7" name="Rectangle 6"/>
-          <p:cNvSpPr/>
-          <p:nvPr/>
-        </p:nvSpPr>
-        <p:spPr>
-          <a:xfrm>
-            <a:off x="7406640" y="2670048"/>
-            <a:ext cx="82296" cy="384048"/>
-          </a:xfrm>
-          <a:prstGeom prst="rect">
-            <a:avLst/>
-          </a:prstGeom>
-          <a:solidFill>
-            <a:srgbClr val="5B9BD5"/>
-          </a:solidFill>
-          <a:ln>
-            <a:noFill/>
-          </a:ln>
-          <a:effectLst/>
-        </p:spPr>
-        <p:style>
-          <a:lnRef idx="1">
-            <a:schemeClr val="accent1"/>
-          </a:lnRef>
-          <a:fillRef idx="3">
-            <a:schemeClr val="accent1"/>
-          </a:fillRef>
-          <a:effectRef idx="2">
-            <a:schemeClr val="accent1"/>
-          </a:effectRef>
-          <a:fontRef idx="minor">
-            <a:schemeClr val="lt1"/>
-          </a:fontRef>
-        </p:style>
-        <p:txBody>
-          <a:bodyPr rtlCol="0" anchor="ctr"/>
-          <a:lstStyle/>
-          <a:p>
-            <a:pPr algn="ctr"/>
-          </a:p>
-        </p:txBody>
-      </p:sp>
-      <p:sp>
-        <p:nvSpPr>
-          <p:cNvPr id="8" name="TextBox 7"/>
-          <p:cNvSpPr txBox="1"/>
-          <p:nvPr/>
-        </p:nvSpPr>
-        <p:spPr>
-          <a:xfrm>
-            <a:off x="7589520" y="2670048"/>
-            <a:ext cx="3877056" cy="384048"/>
-          </a:xfrm>
-          <a:prstGeom prst="rect">
-            <a:avLst/>
-          </a:prstGeom>
-          <a:noFill/>
-        </p:spPr>
-        <p:txBody>
-          <a:bodyPr wrap="square" anchor="ctr" lIns="0" rIns="0" tIns="0" bIns="0">
-            <a:spAutoFit/>
-          </a:bodyPr>
-          <a:lstStyle/>
-          <a:p>
-            <a:pPr algn="ctr"/>
-            <a:r>
-              <a:rPr sz="1350" b="1">
-                <a:solidFill>
-                  <a:srgbClr val="0F1E3D"/>
-                </a:solidFill>
-                <a:latin typeface="맑은 고딕"/>
-                <a:ea typeface="맑은 고딕"/>
-              </a:rPr>
-              <a:t>F1 0.9944 → 0.9988 / FN 4.6 → 0.8</a:t>
-            </a:r>
-          </a:p>
-        </p:txBody>
-      </p:sp>
-      <p:sp>
-        <p:nvSpPr>
-          <p:cNvPr id="9" name="Rectangle 8"/>
-          <p:cNvSpPr/>
-          <p:nvPr/>
-        </p:nvSpPr>
-        <p:spPr>
-          <a:xfrm>
-            <a:off x="1188864" y="3099960"/>
-            <a:ext cx="2062984" cy="877536"/>
-          </a:xfrm>
-          <a:prstGeom prst="rect">
-            <a:avLst/>
-          </a:prstGeom>
-          <a:solidFill>
-            <a:srgbClr val="FFFFFF"/>
-          </a:solidFill>
-          <a:ln w="12700">
-            <a:solidFill>
-              <a:srgbClr val="D7DEEA"/>
-            </a:solidFill>
-          </a:ln>
-          <a:effectLst/>
-        </p:spPr>
-        <p:style>
-          <a:lnRef idx="1">
-            <a:schemeClr val="accent1"/>
-          </a:lnRef>
-          <a:fillRef idx="3">
-            <a:schemeClr val="accent1"/>
-          </a:fillRef>
-          <a:effectRef idx="2">
-            <a:schemeClr val="accent1"/>
-          </a:effectRef>
-          <a:fontRef idx="minor">
-            <a:schemeClr val="lt1"/>
-          </a:fontRef>
-        </p:style>
-        <p:txBody>
-          <a:bodyPr rtlCol="0" anchor="ctr"/>
-          <a:lstStyle/>
-          <a:p>
-            <a:pPr algn="ctr"/>
-          </a:p>
-        </p:txBody>
-      </p:sp>
       <p:pic>
         <p:nvPicPr>
-          <p:cNvPr id="10" name="Picture 9" descr="p3r_normal_ratio.png"/>
+          <p:cNvPr id="7" name="Picture 6" descr="p3_bkm.png"/>
           <p:cNvPicPr>
             <a:picLocks noChangeAspect="1"/>
           </p:cNvPicPr>
@@ -5286,8 +5142,8 @@
         </p:blipFill>
         <p:spPr>
           <a:xfrm>
-            <a:off x="1197864" y="3108960"/>
-            <a:ext cx="2044984" cy="859536"/>
+            <a:off x="1787652" y="2852928"/>
+            <a:ext cx="8677656" cy="3090672"/>
           </a:xfrm>
           <a:prstGeom prst="rect">
             <a:avLst/>
@@ -5296,14 +5152,14 @@
       </p:pic>
       <p:sp>
         <p:nvSpPr>
-          <p:cNvPr id="11" name="TextBox 10"/>
+          <p:cNvPr id="8" name="TextBox 7"/>
           <p:cNvSpPr txBox="1"/>
           <p:nvPr/>
         </p:nvSpPr>
         <p:spPr>
           <a:xfrm>
-            <a:off x="-1685768" y="4059936"/>
-            <a:ext cx="7812248" cy="329184"/>
+            <a:off x="640080" y="5961888"/>
+            <a:ext cx="10972800" cy="274320"/>
           </a:xfrm>
           <a:prstGeom prst="rect">
             <a:avLst/>
@@ -5311,105 +5167,35 @@
           <a:noFill/>
         </p:spPr>
         <p:txBody>
-          <a:bodyPr wrap="square" anchor="ctr" lIns="0" rIns="0" tIns="0" bIns="0">
+          <a:bodyPr wrap="square" anchor="t" lIns="0" rIns="0" tIns="0" bIns="0">
             <a:spAutoFit/>
           </a:bodyPr>
           <a:lstStyle/>
           <a:p>
             <a:pPr algn="ctr"/>
             <a:r>
-              <a:rPr sz="1450" b="1">
-                <a:solidFill>
-                  <a:srgbClr val="0F1E3D"/>
+              <a:rPr sz="1300">
+                <a:solidFill>
+                  <a:srgbClr val="3A485C"/>
                 </a:solidFill>
                 <a:latin typeface="맑은 고딕"/>
                 <a:ea typeface="맑은 고딕"/>
               </a:rPr>
-              <a:t>정상 비율 700→3300 — F1 0.9944→0.9988, FN 4.6→0.8</a:t>
-            </a:r>
-          </a:p>
-        </p:txBody>
-      </p:sp>
-      <p:sp>
-        <p:nvSpPr>
-          <p:cNvPr id="12" name="Rectangle 11"/>
-          <p:cNvSpPr/>
-          <p:nvPr/>
-        </p:nvSpPr>
-        <p:spPr>
-          <a:xfrm>
-            <a:off x="9487575" y="3099960"/>
-            <a:ext cx="1090058" cy="877536"/>
-          </a:xfrm>
-          <a:prstGeom prst="rect">
-            <a:avLst/>
-          </a:prstGeom>
-          <a:solidFill>
-            <a:srgbClr val="FFFFFF"/>
-          </a:solidFill>
-          <a:ln w="12700">
-            <a:solidFill>
-              <a:srgbClr val="D7DEEA"/>
-            </a:solidFill>
-          </a:ln>
-          <a:effectLst/>
-        </p:spPr>
-        <p:style>
-          <a:lnRef idx="1">
-            <a:schemeClr val="accent1"/>
-          </a:lnRef>
-          <a:fillRef idx="3">
-            <a:schemeClr val="accent1"/>
-          </a:fillRef>
-          <a:effectRef idx="2">
-            <a:schemeClr val="accent1"/>
-          </a:effectRef>
-          <a:fontRef idx="minor">
-            <a:schemeClr val="lt1"/>
-          </a:fontRef>
-        </p:style>
-        <p:txBody>
-          <a:bodyPr rtlCol="0" anchor="ctr"/>
-          <a:lstStyle/>
-          <a:p>
-            <a:pPr algn="ctr"/>
-          </a:p>
-        </p:txBody>
-      </p:sp>
-      <p:pic>
-        <p:nvPicPr>
-          <p:cNvPr id="13" name="Picture 12" descr="p3r_gradcam.png"/>
-          <p:cNvPicPr>
-            <a:picLocks noChangeAspect="1"/>
-          </p:cNvPicPr>
-          <p:nvPr/>
-        </p:nvPicPr>
-        <p:blipFill>
-          <a:blip r:embed="rId3"/>
-          <a:stretch>
-            <a:fillRect/>
-          </a:stretch>
-        </p:blipFill>
-        <p:spPr>
-          <a:xfrm>
-            <a:off x="9496575" y="3108960"/>
-            <a:ext cx="1072058" cy="859536"/>
-          </a:xfrm>
-          <a:prstGeom prst="rect">
-            <a:avLst/>
-          </a:prstGeom>
-        </p:spPr>
-      </p:pic>
-      <p:sp>
-        <p:nvSpPr>
-          <p:cNvPr id="14" name="TextBox 13"/>
+              <a:t>단변수 11축 각 5-seed 반복 · baseline F1 0.9975 (0.9940–0.9993) 반복 안정 · 축별 best 를 합친 통합 BKM 은 GPU 확보 후 진행 · 2-stage 유형분류 pilot 0.73</a:t>
+            </a:r>
+          </a:p>
+        </p:txBody>
+      </p:sp>
+      <p:sp>
+        <p:nvSpPr>
+          <p:cNvPr id="9" name="TextBox 8"/>
           <p:cNvSpPr txBox="1"/>
           <p:nvPr/>
         </p:nvSpPr>
         <p:spPr>
           <a:xfrm>
-            <a:off x="6126480" y="4059936"/>
-            <a:ext cx="7812248" cy="329184"/>
+            <a:off x="457200" y="6437376"/>
+            <a:ext cx="8229600" cy="292608"/>
           </a:xfrm>
           <a:prstGeom prst="rect">
             <a:avLst/>
@@ -5422,290 +5208,6 @@
           </a:bodyPr>
           <a:lstStyle/>
           <a:p>
-            <a:pPr algn="ctr"/>
-            <a:r>
-              <a:rPr sz="1450" b="1">
-                <a:solidFill>
-                  <a:srgbClr val="0F1E3D"/>
-                </a:solidFill>
-                <a:latin typeface="맑은 고딕"/>
-                <a:ea typeface="맑은 고딕"/>
-              </a:rPr>
-              <a:t>Grad-CAM 6종×6 — 색이 아니라 결함 패턴 위치로 판단</a:t>
-            </a:r>
-          </a:p>
-        </p:txBody>
-      </p:sp>
-      <p:sp>
-        <p:nvSpPr>
-          <p:cNvPr id="15" name="Rectangle 14"/>
-          <p:cNvSpPr/>
-          <p:nvPr/>
-        </p:nvSpPr>
-        <p:spPr>
-          <a:xfrm>
-            <a:off x="1363939" y="4654440"/>
-            <a:ext cx="1712833" cy="877536"/>
-          </a:xfrm>
-          <a:prstGeom prst="rect">
-            <a:avLst/>
-          </a:prstGeom>
-          <a:solidFill>
-            <a:srgbClr val="FFFFFF"/>
-          </a:solidFill>
-          <a:ln w="12700">
-            <a:solidFill>
-              <a:srgbClr val="D7DEEA"/>
-            </a:solidFill>
-          </a:ln>
-          <a:effectLst/>
-        </p:spPr>
-        <p:style>
-          <a:lnRef idx="1">
-            <a:schemeClr val="accent1"/>
-          </a:lnRef>
-          <a:fillRef idx="3">
-            <a:schemeClr val="accent1"/>
-          </a:fillRef>
-          <a:effectRef idx="2">
-            <a:schemeClr val="accent1"/>
-          </a:effectRef>
-          <a:fontRef idx="minor">
-            <a:schemeClr val="lt1"/>
-          </a:fontRef>
-        </p:style>
-        <p:txBody>
-          <a:bodyPr rtlCol="0" anchor="ctr"/>
-          <a:lstStyle/>
-          <a:p>
-            <a:pPr algn="ctr"/>
-          </a:p>
-        </p:txBody>
-      </p:sp>
-      <p:pic>
-        <p:nvPicPr>
-          <p:cNvPr id="16" name="Picture 15" descr="p3r_nt_effect.png"/>
-          <p:cNvPicPr>
-            <a:picLocks noChangeAspect="1"/>
-          </p:cNvPicPr>
-          <p:nvPr/>
-        </p:nvPicPr>
-        <p:blipFill>
-          <a:blip r:embed="rId4"/>
-          <a:stretch>
-            <a:fillRect/>
-          </a:stretch>
-        </p:blipFill>
-        <p:spPr>
-          <a:xfrm>
-            <a:off x="1372939" y="4663440"/>
-            <a:ext cx="1694833" cy="859536"/>
-          </a:xfrm>
-          <a:prstGeom prst="rect">
-            <a:avLst/>
-          </a:prstGeom>
-        </p:spPr>
-      </p:pic>
-      <p:sp>
-        <p:nvSpPr>
-          <p:cNvPr id="17" name="TextBox 16"/>
-          <p:cNvSpPr txBox="1"/>
-          <p:nvPr/>
-        </p:nvSpPr>
-        <p:spPr>
-          <a:xfrm>
-            <a:off x="-1685768" y="5614416"/>
-            <a:ext cx="7812248" cy="329184"/>
-          </a:xfrm>
-          <a:prstGeom prst="rect">
-            <a:avLst/>
-          </a:prstGeom>
-          <a:noFill/>
-        </p:spPr>
-        <p:txBody>
-          <a:bodyPr wrap="square" anchor="ctr" lIns="0" rIns="0" tIns="0" bIns="0">
-            <a:spAutoFit/>
-          </a:bodyPr>
-          <a:lstStyle/>
-          <a:p>
-            <a:pPr algn="ctr"/>
-            <a:r>
-              <a:rPr sz="1450" b="1">
-                <a:solidFill>
-                  <a:srgbClr val="0F1E3D"/>
-                </a:solidFill>
-                <a:latin typeface="맑은 고딕"/>
-                <a:ea typeface="맑은 고딕"/>
-              </a:rPr>
-              <a:t>운영 임계값 NT — FN/FP를 현장 비용에 맞춰 (319-run)</a:t>
-            </a:r>
-          </a:p>
-        </p:txBody>
-      </p:sp>
-      <p:sp>
-        <p:nvSpPr>
-          <p:cNvPr id="18" name="Rectangle 17"/>
-          <p:cNvSpPr/>
-          <p:nvPr/>
-        </p:nvSpPr>
-        <p:spPr>
-          <a:xfrm>
-            <a:off x="9001112" y="4654440"/>
-            <a:ext cx="2062984" cy="877536"/>
-          </a:xfrm>
-          <a:prstGeom prst="rect">
-            <a:avLst/>
-          </a:prstGeom>
-          <a:solidFill>
-            <a:srgbClr val="FFFFFF"/>
-          </a:solidFill>
-          <a:ln w="12700">
-            <a:solidFill>
-              <a:srgbClr val="D7DEEA"/>
-            </a:solidFill>
-          </a:ln>
-          <a:effectLst/>
-        </p:spPr>
-        <p:style>
-          <a:lnRef idx="1">
-            <a:schemeClr val="accent1"/>
-          </a:lnRef>
-          <a:fillRef idx="3">
-            <a:schemeClr val="accent1"/>
-          </a:fillRef>
-          <a:effectRef idx="2">
-            <a:schemeClr val="accent1"/>
-          </a:effectRef>
-          <a:fontRef idx="minor">
-            <a:schemeClr val="lt1"/>
-          </a:fontRef>
-        </p:style>
-        <p:txBody>
-          <a:bodyPr rtlCol="0" anchor="ctr"/>
-          <a:lstStyle/>
-          <a:p>
-            <a:pPr algn="ctr"/>
-          </a:p>
-        </p:txBody>
-      </p:sp>
-      <p:pic>
-        <p:nvPicPr>
-          <p:cNvPr id="19" name="Picture 18" descr="p3r_stoch_depth.png"/>
-          <p:cNvPicPr>
-            <a:picLocks noChangeAspect="1"/>
-          </p:cNvPicPr>
-          <p:nvPr/>
-        </p:nvPicPr>
-        <p:blipFill>
-          <a:blip r:embed="rId5"/>
-          <a:stretch>
-            <a:fillRect/>
-          </a:stretch>
-        </p:blipFill>
-        <p:spPr>
-          <a:xfrm>
-            <a:off x="9010112" y="4663440"/>
-            <a:ext cx="2044984" cy="859536"/>
-          </a:xfrm>
-          <a:prstGeom prst="rect">
-            <a:avLst/>
-          </a:prstGeom>
-        </p:spPr>
-      </p:pic>
-      <p:sp>
-        <p:nvSpPr>
-          <p:cNvPr id="20" name="TextBox 19"/>
-          <p:cNvSpPr txBox="1"/>
-          <p:nvPr/>
-        </p:nvSpPr>
-        <p:spPr>
-          <a:xfrm>
-            <a:off x="6126480" y="5614416"/>
-            <a:ext cx="7812248" cy="329184"/>
-          </a:xfrm>
-          <a:prstGeom prst="rect">
-            <a:avLst/>
-          </a:prstGeom>
-          <a:noFill/>
-        </p:spPr>
-        <p:txBody>
-          <a:bodyPr wrap="square" anchor="ctr" lIns="0" rIns="0" tIns="0" bIns="0">
-            <a:spAutoFit/>
-          </a:bodyPr>
-          <a:lstStyle/>
-          <a:p>
-            <a:pPr algn="ctr"/>
-            <a:r>
-              <a:rPr sz="1450" b="1">
-                <a:solidFill>
-                  <a:srgbClr val="0F1E3D"/>
-                </a:solidFill>
-                <a:latin typeface="맑은 고딕"/>
-                <a:ea typeface="맑은 고딕"/>
-              </a:rPr>
-              <a:t>Stochastic Depth 0.05 — F1 0.9985, FN 0.8</a:t>
-            </a:r>
-          </a:p>
-        </p:txBody>
-      </p:sp>
-      <p:sp>
-        <p:nvSpPr>
-          <p:cNvPr id="21" name="TextBox 20"/>
-          <p:cNvSpPr txBox="1"/>
-          <p:nvPr/>
-        </p:nvSpPr>
-        <p:spPr>
-          <a:xfrm>
-            <a:off x="640080" y="5961888"/>
-            <a:ext cx="10972800" cy="274320"/>
-          </a:xfrm>
-          <a:prstGeom prst="rect">
-            <a:avLst/>
-          </a:prstGeom>
-          <a:noFill/>
-        </p:spPr>
-        <p:txBody>
-          <a:bodyPr wrap="square" anchor="t" lIns="0" rIns="0" tIns="0" bIns="0">
-            <a:spAutoFit/>
-          </a:bodyPr>
-          <a:lstStyle/>
-          <a:p>
-            <a:pPr algn="ctr"/>
-            <a:r>
-              <a:rPr sz="1300">
-                <a:solidFill>
-                  <a:srgbClr val="3A485C"/>
-                </a:solidFill>
-                <a:latin typeface="맑은 고딕"/>
-                <a:ea typeface="맑은 고딕"/>
-              </a:rPr>
-              <a:t>backbone Tiny 0.9944 vs Base 0.9971 · noise +15%에도 F1 0.9960 · 2-stage(불량 유형 분류) pilot binary F1 0.9967 / 유형 acc 0.73 — 동일 baseline·5-seed 비교 프레임워크로 확장 중</a:t>
-            </a:r>
-          </a:p>
-        </p:txBody>
-      </p:sp>
-      <p:sp>
-        <p:nvSpPr>
-          <p:cNvPr id="22" name="TextBox 21"/>
-          <p:cNvSpPr txBox="1"/>
-          <p:nvPr/>
-        </p:nvSpPr>
-        <p:spPr>
-          <a:xfrm>
-            <a:off x="457200" y="6437376"/>
-            <a:ext cx="8229600" cy="292608"/>
-          </a:xfrm>
-          <a:prstGeom prst="rect">
-            <a:avLst/>
-          </a:prstGeom>
-          <a:noFill/>
-        </p:spPr>
-        <p:txBody>
-          <a:bodyPr wrap="square" anchor="ctr" lIns="0" rIns="0" tIns="0" bIns="0">
-            <a:spAutoFit/>
-          </a:bodyPr>
-          <a:lstStyle/>
-          <a:p>
             <a:pPr algn="l"/>
             <a:r>
               <a:rPr sz="900">
@@ -5722,7 +5224,7 @@
       </p:sp>
       <p:sp>
         <p:nvSpPr>
-          <p:cNvPr id="23" name="TextBox 22"/>
+          <p:cNvPr id="10" name="TextBox 9"/>
           <p:cNvSpPr txBox="1"/>
           <p:nvPr/>
         </p:nvSpPr>

--- a/recommendation/presentation/발표_P3_데이터생성_최호길.pptx
+++ b/recommendation/presentation/발표_P3_데이터생성_최호길.pptx
@@ -4177,14 +4177,5366 @@
         </p:nvSpPr>
         <p:spPr>
           <a:xfrm>
-            <a:off x="1635513" y="2697624"/>
-            <a:ext cx="8981933" cy="3254976"/>
+            <a:off x="640080" y="2706624"/>
+            <a:ext cx="10972800" cy="3236976"/>
           </a:xfrm>
           <a:prstGeom prst="rect">
             <a:avLst/>
           </a:prstGeom>
           <a:solidFill>
             <a:srgbClr val="FFFFFF"/>
+          </a:solidFill>
+          <a:ln w="15875">
+            <a:solidFill>
+              <a:srgbClr val="B9C6DB"/>
+            </a:solidFill>
+          </a:ln>
+          <a:effectLst/>
+        </p:spPr>
+        <p:style>
+          <a:lnRef idx="1">
+            <a:schemeClr val="accent1"/>
+          </a:lnRef>
+          <a:fillRef idx="3">
+            <a:schemeClr val="accent1"/>
+          </a:fillRef>
+          <a:effectRef idx="2">
+            <a:schemeClr val="accent1"/>
+          </a:effectRef>
+          <a:fontRef idx="minor">
+            <a:schemeClr val="lt1"/>
+          </a:fontRef>
+        </p:style>
+        <p:txBody>
+          <a:bodyPr rtlCol="0" anchor="ctr"/>
+          <a:lstStyle/>
+          <a:p>
+            <a:pPr algn="ctr"/>
+          </a:p>
+        </p:txBody>
+      </p:sp>
+      <p:sp>
+        <p:nvSpPr>
+          <p:cNvPr id="7" name="TextBox 6"/>
+          <p:cNvSpPr txBox="1"/>
+          <p:nvPr/>
+        </p:nvSpPr>
+        <p:spPr>
+          <a:xfrm>
+            <a:off x="777240" y="2743200"/>
+            <a:ext cx="10698480" cy="237744"/>
+          </a:xfrm>
+          <a:prstGeom prst="rect">
+            <a:avLst/>
+          </a:prstGeom>
+          <a:noFill/>
+        </p:spPr>
+        <p:txBody>
+          <a:bodyPr wrap="square" anchor="ctr" lIns="0" rIns="0" tIns="0" bIns="0">
+            <a:spAutoFit/>
+          </a:bodyPr>
+          <a:lstStyle/>
+          <a:p>
+            <a:pPr algn="l"/>
+            <a:r>
+              <a:rPr sz="1300" b="1">
+                <a:solidFill>
+                  <a:srgbClr val="0F1E3D"/>
+                </a:solidFill>
+                <a:latin typeface="맑은 고딕"/>
+                <a:ea typeface="맑은 고딕"/>
+              </a:rPr>
+              <a:t>(a) Normal baseline  —  sequential episodes</a:t>
+            </a:r>
+            <a:r>
+              <a:rPr sz="1050">
+                <a:solidFill>
+                  <a:srgbClr val="6B7280"/>
+                </a:solidFill>
+                <a:latin typeface="맑은 고딕"/>
+                <a:ea typeface="맑은 고딕"/>
+              </a:rPr>
+              <a:t>    gray = fleet,  blue = target</a:t>
+            </a:r>
+          </a:p>
+        </p:txBody>
+      </p:sp>
+      <p:sp>
+        <p:nvSpPr>
+          <p:cNvPr id="8" name="Rectangle 7"/>
+          <p:cNvSpPr/>
+          <p:nvPr/>
+        </p:nvSpPr>
+        <p:spPr>
+          <a:xfrm>
+            <a:off x="868680" y="3255264"/>
+            <a:ext cx="2003942" cy="1347825"/>
+          </a:xfrm>
+          <a:prstGeom prst="rect">
+            <a:avLst/>
+          </a:prstGeom>
+          <a:solidFill>
+            <a:srgbClr val="EAF0F8"/>
+          </a:solidFill>
+          <a:ln>
+            <a:noFill/>
+          </a:ln>
+          <a:effectLst/>
+        </p:spPr>
+        <p:style>
+          <a:lnRef idx="1">
+            <a:schemeClr val="accent1"/>
+          </a:lnRef>
+          <a:fillRef idx="3">
+            <a:schemeClr val="accent1"/>
+          </a:fillRef>
+          <a:effectRef idx="2">
+            <a:schemeClr val="accent1"/>
+          </a:effectRef>
+          <a:fontRef idx="minor">
+            <a:schemeClr val="lt1"/>
+          </a:fontRef>
+        </p:style>
+        <p:txBody>
+          <a:bodyPr rtlCol="0" anchor="ctr"/>
+          <a:lstStyle/>
+          <a:p>
+            <a:pPr algn="ctr"/>
+          </a:p>
+        </p:txBody>
+      </p:sp>
+      <p:sp>
+        <p:nvSpPr>
+          <p:cNvPr id="9" name="TextBox 8"/>
+          <p:cNvSpPr txBox="1"/>
+          <p:nvPr/>
+        </p:nvSpPr>
+        <p:spPr>
+          <a:xfrm>
+            <a:off x="868680" y="3017520"/>
+            <a:ext cx="2022230" cy="219456"/>
+          </a:xfrm>
+          <a:prstGeom prst="rect">
+            <a:avLst/>
+          </a:prstGeom>
+          <a:noFill/>
+        </p:spPr>
+        <p:txBody>
+          <a:bodyPr wrap="none" anchor="ctr" lIns="0" rIns="0" tIns="0" bIns="0">
+            <a:spAutoFit/>
+          </a:bodyPr>
+          <a:lstStyle/>
+          <a:p>
+            <a:pPr algn="ctr"/>
+            <a:r>
+              <a:rPr sz="1250" b="1">
+                <a:solidFill>
+                  <a:srgbClr val="0F1E3D"/>
+                </a:solidFill>
+                <a:latin typeface="맑은 고딕"/>
+                <a:ea typeface="맑은 고딕"/>
+              </a:rPr>
+              <a:t>Dense</a:t>
+            </a:r>
+          </a:p>
+        </p:txBody>
+      </p:sp>
+      <p:sp>
+        <p:nvSpPr>
+          <p:cNvPr id="10" name="Oval 9"/>
+          <p:cNvSpPr/>
+          <p:nvPr/>
+        </p:nvSpPr>
+        <p:spPr>
+          <a:xfrm>
+            <a:off x="917990" y="4220300"/>
+            <a:ext cx="45720" cy="45720"/>
+          </a:xfrm>
+          <a:prstGeom prst="ellipse">
+            <a:avLst/>
+          </a:prstGeom>
+          <a:solidFill>
+            <a:srgbClr val="3A6FD0"/>
+          </a:solidFill>
+          <a:ln>
+            <a:noFill/>
+          </a:ln>
+          <a:effectLst/>
+        </p:spPr>
+        <p:style>
+          <a:lnRef idx="1">
+            <a:schemeClr val="accent1"/>
+          </a:lnRef>
+          <a:fillRef idx="3">
+            <a:schemeClr val="accent1"/>
+          </a:fillRef>
+          <a:effectRef idx="2">
+            <a:schemeClr val="accent1"/>
+          </a:effectRef>
+          <a:fontRef idx="minor">
+            <a:schemeClr val="lt1"/>
+          </a:fontRef>
+        </p:style>
+        <p:txBody>
+          <a:bodyPr rtlCol="0" anchor="ctr"/>
+          <a:lstStyle/>
+          <a:p>
+            <a:pPr algn="ctr"/>
+          </a:p>
+        </p:txBody>
+      </p:sp>
+      <p:sp>
+        <p:nvSpPr>
+          <p:cNvPr id="11" name="Oval 10"/>
+          <p:cNvSpPr/>
+          <p:nvPr/>
+        </p:nvSpPr>
+        <p:spPr>
+          <a:xfrm>
+            <a:off x="1057459" y="4012131"/>
+            <a:ext cx="45720" cy="45720"/>
+          </a:xfrm>
+          <a:prstGeom prst="ellipse">
+            <a:avLst/>
+          </a:prstGeom>
+          <a:solidFill>
+            <a:srgbClr val="3A6FD0"/>
+          </a:solidFill>
+          <a:ln>
+            <a:noFill/>
+          </a:ln>
+          <a:effectLst/>
+        </p:spPr>
+        <p:style>
+          <a:lnRef idx="1">
+            <a:schemeClr val="accent1"/>
+          </a:lnRef>
+          <a:fillRef idx="3">
+            <a:schemeClr val="accent1"/>
+          </a:fillRef>
+          <a:effectRef idx="2">
+            <a:schemeClr val="accent1"/>
+          </a:effectRef>
+          <a:fontRef idx="minor">
+            <a:schemeClr val="lt1"/>
+          </a:fontRef>
+        </p:style>
+        <p:txBody>
+          <a:bodyPr rtlCol="0" anchor="ctr"/>
+          <a:lstStyle/>
+          <a:p>
+            <a:pPr algn="ctr"/>
+          </a:p>
+        </p:txBody>
+      </p:sp>
+      <p:sp>
+        <p:nvSpPr>
+          <p:cNvPr id="12" name="Oval 11"/>
+          <p:cNvSpPr/>
+          <p:nvPr/>
+        </p:nvSpPr>
+        <p:spPr>
+          <a:xfrm>
+            <a:off x="1171146" y="4131551"/>
+            <a:ext cx="45720" cy="45720"/>
+          </a:xfrm>
+          <a:prstGeom prst="ellipse">
+            <a:avLst/>
+          </a:prstGeom>
+          <a:solidFill>
+            <a:srgbClr val="3A6FD0"/>
+          </a:solidFill>
+          <a:ln>
+            <a:noFill/>
+          </a:ln>
+          <a:effectLst/>
+        </p:spPr>
+        <p:style>
+          <a:lnRef idx="1">
+            <a:schemeClr val="accent1"/>
+          </a:lnRef>
+          <a:fillRef idx="3">
+            <a:schemeClr val="accent1"/>
+          </a:fillRef>
+          <a:effectRef idx="2">
+            <a:schemeClr val="accent1"/>
+          </a:effectRef>
+          <a:fontRef idx="minor">
+            <a:schemeClr val="lt1"/>
+          </a:fontRef>
+        </p:style>
+        <p:txBody>
+          <a:bodyPr rtlCol="0" anchor="ctr"/>
+          <a:lstStyle/>
+          <a:p>
+            <a:pPr algn="ctr"/>
+          </a:p>
+        </p:txBody>
+      </p:sp>
+      <p:sp>
+        <p:nvSpPr>
+          <p:cNvPr id="13" name="Oval 12"/>
+          <p:cNvSpPr/>
+          <p:nvPr/>
+        </p:nvSpPr>
+        <p:spPr>
+          <a:xfrm>
+            <a:off x="1307382" y="3812155"/>
+            <a:ext cx="45720" cy="45720"/>
+          </a:xfrm>
+          <a:prstGeom prst="ellipse">
+            <a:avLst/>
+          </a:prstGeom>
+          <a:solidFill>
+            <a:srgbClr val="3A6FD0"/>
+          </a:solidFill>
+          <a:ln>
+            <a:noFill/>
+          </a:ln>
+          <a:effectLst/>
+        </p:spPr>
+        <p:style>
+          <a:lnRef idx="1">
+            <a:schemeClr val="accent1"/>
+          </a:lnRef>
+          <a:fillRef idx="3">
+            <a:schemeClr val="accent1"/>
+          </a:fillRef>
+          <a:effectRef idx="2">
+            <a:schemeClr val="accent1"/>
+          </a:effectRef>
+          <a:fontRef idx="minor">
+            <a:schemeClr val="lt1"/>
+          </a:fontRef>
+        </p:style>
+        <p:txBody>
+          <a:bodyPr rtlCol="0" anchor="ctr"/>
+          <a:lstStyle/>
+          <a:p>
+            <a:pPr algn="ctr"/>
+          </a:p>
+        </p:txBody>
+      </p:sp>
+      <p:sp>
+        <p:nvSpPr>
+          <p:cNvPr id="14" name="Oval 13"/>
+          <p:cNvSpPr/>
+          <p:nvPr/>
+        </p:nvSpPr>
+        <p:spPr>
+          <a:xfrm>
+            <a:off x="1439831" y="4193547"/>
+            <a:ext cx="45720" cy="45720"/>
+          </a:xfrm>
+          <a:prstGeom prst="ellipse">
+            <a:avLst/>
+          </a:prstGeom>
+          <a:solidFill>
+            <a:srgbClr val="3A6FD0"/>
+          </a:solidFill>
+          <a:ln>
+            <a:noFill/>
+          </a:ln>
+          <a:effectLst/>
+        </p:spPr>
+        <p:style>
+          <a:lnRef idx="1">
+            <a:schemeClr val="accent1"/>
+          </a:lnRef>
+          <a:fillRef idx="3">
+            <a:schemeClr val="accent1"/>
+          </a:fillRef>
+          <a:effectRef idx="2">
+            <a:schemeClr val="accent1"/>
+          </a:effectRef>
+          <a:fontRef idx="minor">
+            <a:schemeClr val="lt1"/>
+          </a:fontRef>
+        </p:style>
+        <p:txBody>
+          <a:bodyPr rtlCol="0" anchor="ctr"/>
+          <a:lstStyle/>
+          <a:p>
+            <a:pPr algn="ctr"/>
+          </a:p>
+        </p:txBody>
+      </p:sp>
+      <p:sp>
+        <p:nvSpPr>
+          <p:cNvPr id="15" name="Oval 14"/>
+          <p:cNvSpPr/>
+          <p:nvPr/>
+        </p:nvSpPr>
+        <p:spPr>
+          <a:xfrm>
+            <a:off x="1584915" y="3582069"/>
+            <a:ext cx="45720" cy="45720"/>
+          </a:xfrm>
+          <a:prstGeom prst="ellipse">
+            <a:avLst/>
+          </a:prstGeom>
+          <a:solidFill>
+            <a:srgbClr val="3A6FD0"/>
+          </a:solidFill>
+          <a:ln>
+            <a:noFill/>
+          </a:ln>
+          <a:effectLst/>
+        </p:spPr>
+        <p:style>
+          <a:lnRef idx="1">
+            <a:schemeClr val="accent1"/>
+          </a:lnRef>
+          <a:fillRef idx="3">
+            <a:schemeClr val="accent1"/>
+          </a:fillRef>
+          <a:effectRef idx="2">
+            <a:schemeClr val="accent1"/>
+          </a:effectRef>
+          <a:fontRef idx="minor">
+            <a:schemeClr val="lt1"/>
+          </a:fontRef>
+        </p:style>
+        <p:txBody>
+          <a:bodyPr rtlCol="0" anchor="ctr"/>
+          <a:lstStyle/>
+          <a:p>
+            <a:pPr algn="ctr"/>
+          </a:p>
+        </p:txBody>
+      </p:sp>
+      <p:sp>
+        <p:nvSpPr>
+          <p:cNvPr id="16" name="Oval 15"/>
+          <p:cNvSpPr/>
+          <p:nvPr/>
+        </p:nvSpPr>
+        <p:spPr>
+          <a:xfrm>
+            <a:off x="1734079" y="3848949"/>
+            <a:ext cx="45720" cy="45720"/>
+          </a:xfrm>
+          <a:prstGeom prst="ellipse">
+            <a:avLst/>
+          </a:prstGeom>
+          <a:solidFill>
+            <a:srgbClr val="3A6FD0"/>
+          </a:solidFill>
+          <a:ln>
+            <a:noFill/>
+          </a:ln>
+          <a:effectLst/>
+        </p:spPr>
+        <p:style>
+          <a:lnRef idx="1">
+            <a:schemeClr val="accent1"/>
+          </a:lnRef>
+          <a:fillRef idx="3">
+            <a:schemeClr val="accent1"/>
+          </a:fillRef>
+          <a:effectRef idx="2">
+            <a:schemeClr val="accent1"/>
+          </a:effectRef>
+          <a:fontRef idx="minor">
+            <a:schemeClr val="lt1"/>
+          </a:fontRef>
+        </p:style>
+        <p:txBody>
+          <a:bodyPr rtlCol="0" anchor="ctr"/>
+          <a:lstStyle/>
+          <a:p>
+            <a:pPr algn="ctr"/>
+          </a:p>
+        </p:txBody>
+      </p:sp>
+      <p:sp>
+        <p:nvSpPr>
+          <p:cNvPr id="17" name="Oval 16"/>
+          <p:cNvSpPr/>
+          <p:nvPr/>
+        </p:nvSpPr>
+        <p:spPr>
+          <a:xfrm>
+            <a:off x="1856248" y="3619378"/>
+            <a:ext cx="45720" cy="45720"/>
+          </a:xfrm>
+          <a:prstGeom prst="ellipse">
+            <a:avLst/>
+          </a:prstGeom>
+          <a:solidFill>
+            <a:srgbClr val="3A6FD0"/>
+          </a:solidFill>
+          <a:ln>
+            <a:noFill/>
+          </a:ln>
+          <a:effectLst/>
+        </p:spPr>
+        <p:style>
+          <a:lnRef idx="1">
+            <a:schemeClr val="accent1"/>
+          </a:lnRef>
+          <a:fillRef idx="3">
+            <a:schemeClr val="accent1"/>
+          </a:fillRef>
+          <a:effectRef idx="2">
+            <a:schemeClr val="accent1"/>
+          </a:effectRef>
+          <a:fontRef idx="minor">
+            <a:schemeClr val="lt1"/>
+          </a:fontRef>
+        </p:style>
+        <p:txBody>
+          <a:bodyPr rtlCol="0" anchor="ctr"/>
+          <a:lstStyle/>
+          <a:p>
+            <a:pPr algn="ctr"/>
+          </a:p>
+        </p:txBody>
+      </p:sp>
+      <p:sp>
+        <p:nvSpPr>
+          <p:cNvPr id="18" name="Oval 17"/>
+          <p:cNvSpPr/>
+          <p:nvPr/>
+        </p:nvSpPr>
+        <p:spPr>
+          <a:xfrm>
+            <a:off x="2003112" y="3597222"/>
+            <a:ext cx="45720" cy="45720"/>
+          </a:xfrm>
+          <a:prstGeom prst="ellipse">
+            <a:avLst/>
+          </a:prstGeom>
+          <a:solidFill>
+            <a:srgbClr val="3A6FD0"/>
+          </a:solidFill>
+          <a:ln>
+            <a:noFill/>
+          </a:ln>
+          <a:effectLst/>
+        </p:spPr>
+        <p:style>
+          <a:lnRef idx="1">
+            <a:schemeClr val="accent1"/>
+          </a:lnRef>
+          <a:fillRef idx="3">
+            <a:schemeClr val="accent1"/>
+          </a:fillRef>
+          <a:effectRef idx="2">
+            <a:schemeClr val="accent1"/>
+          </a:effectRef>
+          <a:fontRef idx="minor">
+            <a:schemeClr val="lt1"/>
+          </a:fontRef>
+        </p:style>
+        <p:txBody>
+          <a:bodyPr rtlCol="0" anchor="ctr"/>
+          <a:lstStyle/>
+          <a:p>
+            <a:pPr algn="ctr"/>
+          </a:p>
+        </p:txBody>
+      </p:sp>
+      <p:sp>
+        <p:nvSpPr>
+          <p:cNvPr id="19" name="Oval 18"/>
+          <p:cNvSpPr/>
+          <p:nvPr/>
+        </p:nvSpPr>
+        <p:spPr>
+          <a:xfrm>
+            <a:off x="2118219" y="4220009"/>
+            <a:ext cx="45720" cy="45720"/>
+          </a:xfrm>
+          <a:prstGeom prst="ellipse">
+            <a:avLst/>
+          </a:prstGeom>
+          <a:solidFill>
+            <a:srgbClr val="3A6FD0"/>
+          </a:solidFill>
+          <a:ln>
+            <a:noFill/>
+          </a:ln>
+          <a:effectLst/>
+        </p:spPr>
+        <p:style>
+          <a:lnRef idx="1">
+            <a:schemeClr val="accent1"/>
+          </a:lnRef>
+          <a:fillRef idx="3">
+            <a:schemeClr val="accent1"/>
+          </a:fillRef>
+          <a:effectRef idx="2">
+            <a:schemeClr val="accent1"/>
+          </a:effectRef>
+          <a:fontRef idx="minor">
+            <a:schemeClr val="lt1"/>
+          </a:fontRef>
+        </p:style>
+        <p:txBody>
+          <a:bodyPr rtlCol="0" anchor="ctr"/>
+          <a:lstStyle/>
+          <a:p>
+            <a:pPr algn="ctr"/>
+          </a:p>
+        </p:txBody>
+      </p:sp>
+      <p:sp>
+        <p:nvSpPr>
+          <p:cNvPr id="20" name="Oval 19"/>
+          <p:cNvSpPr/>
+          <p:nvPr/>
+        </p:nvSpPr>
+        <p:spPr>
+          <a:xfrm>
+            <a:off x="2248976" y="3960370"/>
+            <a:ext cx="45720" cy="45720"/>
+          </a:xfrm>
+          <a:prstGeom prst="ellipse">
+            <a:avLst/>
+          </a:prstGeom>
+          <a:solidFill>
+            <a:srgbClr val="3A6FD0"/>
+          </a:solidFill>
+          <a:ln>
+            <a:noFill/>
+          </a:ln>
+          <a:effectLst/>
+        </p:spPr>
+        <p:style>
+          <a:lnRef idx="1">
+            <a:schemeClr val="accent1"/>
+          </a:lnRef>
+          <a:fillRef idx="3">
+            <a:schemeClr val="accent1"/>
+          </a:fillRef>
+          <a:effectRef idx="2">
+            <a:schemeClr val="accent1"/>
+          </a:effectRef>
+          <a:fontRef idx="minor">
+            <a:schemeClr val="lt1"/>
+          </a:fontRef>
+        </p:style>
+        <p:txBody>
+          <a:bodyPr rtlCol="0" anchor="ctr"/>
+          <a:lstStyle/>
+          <a:p>
+            <a:pPr algn="ctr"/>
+          </a:p>
+        </p:txBody>
+      </p:sp>
+      <p:sp>
+        <p:nvSpPr>
+          <p:cNvPr id="21" name="Oval 20"/>
+          <p:cNvSpPr/>
+          <p:nvPr/>
+        </p:nvSpPr>
+        <p:spPr>
+          <a:xfrm>
+            <a:off x="2405733" y="3590547"/>
+            <a:ext cx="45720" cy="45720"/>
+          </a:xfrm>
+          <a:prstGeom prst="ellipse">
+            <a:avLst/>
+          </a:prstGeom>
+          <a:solidFill>
+            <a:srgbClr val="3A6FD0"/>
+          </a:solidFill>
+          <a:ln>
+            <a:noFill/>
+          </a:ln>
+          <a:effectLst/>
+        </p:spPr>
+        <p:style>
+          <a:lnRef idx="1">
+            <a:schemeClr val="accent1"/>
+          </a:lnRef>
+          <a:fillRef idx="3">
+            <a:schemeClr val="accent1"/>
+          </a:fillRef>
+          <a:effectRef idx="2">
+            <a:schemeClr val="accent1"/>
+          </a:effectRef>
+          <a:fontRef idx="minor">
+            <a:schemeClr val="lt1"/>
+          </a:fontRef>
+        </p:style>
+        <p:txBody>
+          <a:bodyPr rtlCol="0" anchor="ctr"/>
+          <a:lstStyle/>
+          <a:p>
+            <a:pPr algn="ctr"/>
+          </a:p>
+        </p:txBody>
+      </p:sp>
+      <p:sp>
+        <p:nvSpPr>
+          <p:cNvPr id="22" name="Oval 21"/>
+          <p:cNvSpPr/>
+          <p:nvPr/>
+        </p:nvSpPr>
+        <p:spPr>
+          <a:xfrm>
+            <a:off x="2529040" y="3588439"/>
+            <a:ext cx="45720" cy="45720"/>
+          </a:xfrm>
+          <a:prstGeom prst="ellipse">
+            <a:avLst/>
+          </a:prstGeom>
+          <a:solidFill>
+            <a:srgbClr val="3A6FD0"/>
+          </a:solidFill>
+          <a:ln>
+            <a:noFill/>
+          </a:ln>
+          <a:effectLst/>
+        </p:spPr>
+        <p:style>
+          <a:lnRef idx="1">
+            <a:schemeClr val="accent1"/>
+          </a:lnRef>
+          <a:fillRef idx="3">
+            <a:schemeClr val="accent1"/>
+          </a:fillRef>
+          <a:effectRef idx="2">
+            <a:schemeClr val="accent1"/>
+          </a:effectRef>
+          <a:fontRef idx="minor">
+            <a:schemeClr val="lt1"/>
+          </a:fontRef>
+        </p:style>
+        <p:txBody>
+          <a:bodyPr rtlCol="0" anchor="ctr"/>
+          <a:lstStyle/>
+          <a:p>
+            <a:pPr algn="ctr"/>
+          </a:p>
+        </p:txBody>
+      </p:sp>
+      <p:sp>
+        <p:nvSpPr>
+          <p:cNvPr id="23" name="Oval 22"/>
+          <p:cNvSpPr/>
+          <p:nvPr/>
+        </p:nvSpPr>
+        <p:spPr>
+          <a:xfrm>
+            <a:off x="2658095" y="3758818"/>
+            <a:ext cx="45720" cy="45720"/>
+          </a:xfrm>
+          <a:prstGeom prst="ellipse">
+            <a:avLst/>
+          </a:prstGeom>
+          <a:solidFill>
+            <a:srgbClr val="3A6FD0"/>
+          </a:solidFill>
+          <a:ln>
+            <a:noFill/>
+          </a:ln>
+          <a:effectLst/>
+        </p:spPr>
+        <p:style>
+          <a:lnRef idx="1">
+            <a:schemeClr val="accent1"/>
+          </a:lnRef>
+          <a:fillRef idx="3">
+            <a:schemeClr val="accent1"/>
+          </a:fillRef>
+          <a:effectRef idx="2">
+            <a:schemeClr val="accent1"/>
+          </a:effectRef>
+          <a:fontRef idx="minor">
+            <a:schemeClr val="lt1"/>
+          </a:fontRef>
+        </p:style>
+        <p:txBody>
+          <a:bodyPr rtlCol="0" anchor="ctr"/>
+          <a:lstStyle/>
+          <a:p>
+            <a:pPr algn="ctr"/>
+          </a:p>
+        </p:txBody>
+      </p:sp>
+      <p:sp>
+        <p:nvSpPr>
+          <p:cNvPr id="24" name="Oval 23"/>
+          <p:cNvSpPr/>
+          <p:nvPr/>
+        </p:nvSpPr>
+        <p:spPr>
+          <a:xfrm>
+            <a:off x="2793636" y="3934839"/>
+            <a:ext cx="45720" cy="45720"/>
+          </a:xfrm>
+          <a:prstGeom prst="ellipse">
+            <a:avLst/>
+          </a:prstGeom>
+          <a:solidFill>
+            <a:srgbClr val="3A6FD0"/>
+          </a:solidFill>
+          <a:ln>
+            <a:noFill/>
+          </a:ln>
+          <a:effectLst/>
+        </p:spPr>
+        <p:style>
+          <a:lnRef idx="1">
+            <a:schemeClr val="accent1"/>
+          </a:lnRef>
+          <a:fillRef idx="3">
+            <a:schemeClr val="accent1"/>
+          </a:fillRef>
+          <a:effectRef idx="2">
+            <a:schemeClr val="accent1"/>
+          </a:effectRef>
+          <a:fontRef idx="minor">
+            <a:schemeClr val="lt1"/>
+          </a:fontRef>
+        </p:style>
+        <p:txBody>
+          <a:bodyPr rtlCol="0" anchor="ctr"/>
+          <a:lstStyle/>
+          <a:p>
+            <a:pPr algn="ctr"/>
+          </a:p>
+        </p:txBody>
+      </p:sp>
+      <p:sp>
+        <p:nvSpPr>
+          <p:cNvPr id="25" name="Oval 24"/>
+          <p:cNvSpPr/>
+          <p:nvPr/>
+        </p:nvSpPr>
+        <p:spPr>
+          <a:xfrm>
+            <a:off x="1011713" y="3598903"/>
+            <a:ext cx="37490" cy="37490"/>
+          </a:xfrm>
+          <a:prstGeom prst="ellipse">
+            <a:avLst/>
+          </a:prstGeom>
+          <a:solidFill>
+            <a:srgbClr val="AEB4BD"/>
+          </a:solidFill>
+          <a:ln>
+            <a:noFill/>
+          </a:ln>
+          <a:effectLst/>
+        </p:spPr>
+        <p:style>
+          <a:lnRef idx="1">
+            <a:schemeClr val="accent1"/>
+          </a:lnRef>
+          <a:fillRef idx="3">
+            <a:schemeClr val="accent1"/>
+          </a:fillRef>
+          <a:effectRef idx="2">
+            <a:schemeClr val="accent1"/>
+          </a:effectRef>
+          <a:fontRef idx="minor">
+            <a:schemeClr val="lt1"/>
+          </a:fontRef>
+        </p:style>
+        <p:txBody>
+          <a:bodyPr rtlCol="0" anchor="ctr"/>
+          <a:lstStyle/>
+          <a:p>
+            <a:pPr algn="ctr"/>
+          </a:p>
+        </p:txBody>
+      </p:sp>
+      <p:sp>
+        <p:nvSpPr>
+          <p:cNvPr id="26" name="Oval 25"/>
+          <p:cNvSpPr/>
+          <p:nvPr/>
+        </p:nvSpPr>
+        <p:spPr>
+          <a:xfrm>
+            <a:off x="1416159" y="3595914"/>
+            <a:ext cx="37490" cy="37490"/>
+          </a:xfrm>
+          <a:prstGeom prst="ellipse">
+            <a:avLst/>
+          </a:prstGeom>
+          <a:solidFill>
+            <a:srgbClr val="AEB4BD"/>
+          </a:solidFill>
+          <a:ln>
+            <a:noFill/>
+          </a:ln>
+          <a:effectLst/>
+        </p:spPr>
+        <p:style>
+          <a:lnRef idx="1">
+            <a:schemeClr val="accent1"/>
+          </a:lnRef>
+          <a:fillRef idx="3">
+            <a:schemeClr val="accent1"/>
+          </a:fillRef>
+          <a:effectRef idx="2">
+            <a:schemeClr val="accent1"/>
+          </a:effectRef>
+          <a:fontRef idx="minor">
+            <a:schemeClr val="lt1"/>
+          </a:fontRef>
+        </p:style>
+        <p:txBody>
+          <a:bodyPr rtlCol="0" anchor="ctr"/>
+          <a:lstStyle/>
+          <a:p>
+            <a:pPr algn="ctr"/>
+          </a:p>
+        </p:txBody>
+      </p:sp>
+      <p:sp>
+        <p:nvSpPr>
+          <p:cNvPr id="27" name="Oval 26"/>
+          <p:cNvSpPr/>
+          <p:nvPr/>
+        </p:nvSpPr>
+        <p:spPr>
+          <a:xfrm>
+            <a:off x="1820605" y="3630055"/>
+            <a:ext cx="37490" cy="37490"/>
+          </a:xfrm>
+          <a:prstGeom prst="ellipse">
+            <a:avLst/>
+          </a:prstGeom>
+          <a:solidFill>
+            <a:srgbClr val="AEB4BD"/>
+          </a:solidFill>
+          <a:ln>
+            <a:noFill/>
+          </a:ln>
+          <a:effectLst/>
+        </p:spPr>
+        <p:style>
+          <a:lnRef idx="1">
+            <a:schemeClr val="accent1"/>
+          </a:lnRef>
+          <a:fillRef idx="3">
+            <a:schemeClr val="accent1"/>
+          </a:fillRef>
+          <a:effectRef idx="2">
+            <a:schemeClr val="accent1"/>
+          </a:effectRef>
+          <a:fontRef idx="minor">
+            <a:schemeClr val="lt1"/>
+          </a:fontRef>
+        </p:style>
+        <p:txBody>
+          <a:bodyPr rtlCol="0" anchor="ctr"/>
+          <a:lstStyle/>
+          <a:p>
+            <a:pPr algn="ctr"/>
+          </a:p>
+        </p:txBody>
+      </p:sp>
+      <p:sp>
+        <p:nvSpPr>
+          <p:cNvPr id="28" name="Oval 27"/>
+          <p:cNvSpPr/>
+          <p:nvPr/>
+        </p:nvSpPr>
+        <p:spPr>
+          <a:xfrm>
+            <a:off x="2225051" y="3467703"/>
+            <a:ext cx="37490" cy="37490"/>
+          </a:xfrm>
+          <a:prstGeom prst="ellipse">
+            <a:avLst/>
+          </a:prstGeom>
+          <a:solidFill>
+            <a:srgbClr val="AEB4BD"/>
+          </a:solidFill>
+          <a:ln>
+            <a:noFill/>
+          </a:ln>
+          <a:effectLst/>
+        </p:spPr>
+        <p:style>
+          <a:lnRef idx="1">
+            <a:schemeClr val="accent1"/>
+          </a:lnRef>
+          <a:fillRef idx="3">
+            <a:schemeClr val="accent1"/>
+          </a:fillRef>
+          <a:effectRef idx="2">
+            <a:schemeClr val="accent1"/>
+          </a:effectRef>
+          <a:fontRef idx="minor">
+            <a:schemeClr val="lt1"/>
+          </a:fontRef>
+        </p:style>
+        <p:txBody>
+          <a:bodyPr rtlCol="0" anchor="ctr"/>
+          <a:lstStyle/>
+          <a:p>
+            <a:pPr algn="ctr"/>
+          </a:p>
+        </p:txBody>
+      </p:sp>
+      <p:sp>
+        <p:nvSpPr>
+          <p:cNvPr id="29" name="Oval 28"/>
+          <p:cNvSpPr/>
+          <p:nvPr/>
+        </p:nvSpPr>
+        <p:spPr>
+          <a:xfrm>
+            <a:off x="2629497" y="3598984"/>
+            <a:ext cx="37490" cy="37490"/>
+          </a:xfrm>
+          <a:prstGeom prst="ellipse">
+            <a:avLst/>
+          </a:prstGeom>
+          <a:solidFill>
+            <a:srgbClr val="AEB4BD"/>
+          </a:solidFill>
+          <a:ln>
+            <a:noFill/>
+          </a:ln>
+          <a:effectLst/>
+        </p:spPr>
+        <p:style>
+          <a:lnRef idx="1">
+            <a:schemeClr val="accent1"/>
+          </a:lnRef>
+          <a:fillRef idx="3">
+            <a:schemeClr val="accent1"/>
+          </a:fillRef>
+          <a:effectRef idx="2">
+            <a:schemeClr val="accent1"/>
+          </a:effectRef>
+          <a:fontRef idx="minor">
+            <a:schemeClr val="lt1"/>
+          </a:fontRef>
+        </p:style>
+        <p:txBody>
+          <a:bodyPr rtlCol="0" anchor="ctr"/>
+          <a:lstStyle/>
+          <a:p>
+            <a:pPr algn="ctr"/>
+          </a:p>
+        </p:txBody>
+      </p:sp>
+      <p:sp>
+        <p:nvSpPr>
+          <p:cNvPr id="30" name="Rectangle 29"/>
+          <p:cNvSpPr/>
+          <p:nvPr/>
+        </p:nvSpPr>
+        <p:spPr>
+          <a:xfrm>
+            <a:off x="2890910" y="3255264"/>
+            <a:ext cx="1329865" cy="1347825"/>
+          </a:xfrm>
+          <a:prstGeom prst="rect">
+            <a:avLst/>
+          </a:prstGeom>
+          <a:solidFill>
+            <a:srgbClr val="FBF4E5"/>
+          </a:solidFill>
+          <a:ln>
+            <a:noFill/>
+          </a:ln>
+          <a:effectLst/>
+        </p:spPr>
+        <p:style>
+          <a:lnRef idx="1">
+            <a:schemeClr val="accent1"/>
+          </a:lnRef>
+          <a:fillRef idx="3">
+            <a:schemeClr val="accent1"/>
+          </a:fillRef>
+          <a:effectRef idx="2">
+            <a:schemeClr val="accent1"/>
+          </a:effectRef>
+          <a:fontRef idx="minor">
+            <a:schemeClr val="lt1"/>
+          </a:fontRef>
+        </p:style>
+        <p:txBody>
+          <a:bodyPr rtlCol="0" anchor="ctr"/>
+          <a:lstStyle/>
+          <a:p>
+            <a:pPr algn="ctr"/>
+          </a:p>
+        </p:txBody>
+      </p:sp>
+      <p:sp>
+        <p:nvSpPr>
+          <p:cNvPr id="31" name="TextBox 30"/>
+          <p:cNvSpPr txBox="1"/>
+          <p:nvPr/>
+        </p:nvSpPr>
+        <p:spPr>
+          <a:xfrm>
+            <a:off x="2890910" y="3017520"/>
+            <a:ext cx="1348153" cy="219456"/>
+          </a:xfrm>
+          <a:prstGeom prst="rect">
+            <a:avLst/>
+          </a:prstGeom>
+          <a:noFill/>
+        </p:spPr>
+        <p:txBody>
+          <a:bodyPr wrap="none" anchor="ctr" lIns="0" rIns="0" tIns="0" bIns="0">
+            <a:spAutoFit/>
+          </a:bodyPr>
+          <a:lstStyle/>
+          <a:p>
+            <a:pPr algn="ctr"/>
+            <a:r>
+              <a:rPr sz="1250" b="1">
+                <a:solidFill>
+                  <a:srgbClr val="C98A22"/>
+                </a:solidFill>
+                <a:latin typeface="맑은 고딕"/>
+                <a:ea typeface="맑은 고딕"/>
+              </a:rPr>
+              <a:t>Sparse</a:t>
+            </a:r>
+          </a:p>
+        </p:txBody>
+      </p:sp>
+      <p:sp>
+        <p:nvSpPr>
+          <p:cNvPr id="32" name="Oval 31"/>
+          <p:cNvSpPr/>
+          <p:nvPr/>
+        </p:nvSpPr>
+        <p:spPr>
+          <a:xfrm>
+            <a:off x="2960199" y="3816858"/>
+            <a:ext cx="45720" cy="45720"/>
+          </a:xfrm>
+          <a:prstGeom prst="ellipse">
+            <a:avLst/>
+          </a:prstGeom>
+          <a:solidFill>
+            <a:srgbClr val="3A6FD0"/>
+          </a:solidFill>
+          <a:ln>
+            <a:noFill/>
+          </a:ln>
+          <a:effectLst/>
+        </p:spPr>
+        <p:style>
+          <a:lnRef idx="1">
+            <a:schemeClr val="accent1"/>
+          </a:lnRef>
+          <a:fillRef idx="3">
+            <a:schemeClr val="accent1"/>
+          </a:fillRef>
+          <a:effectRef idx="2">
+            <a:schemeClr val="accent1"/>
+          </a:effectRef>
+          <a:fontRef idx="minor">
+            <a:schemeClr val="lt1"/>
+          </a:fontRef>
+        </p:style>
+        <p:txBody>
+          <a:bodyPr rtlCol="0" anchor="ctr"/>
+          <a:lstStyle/>
+          <a:p>
+            <a:pPr algn="ctr"/>
+          </a:p>
+        </p:txBody>
+      </p:sp>
+      <p:sp>
+        <p:nvSpPr>
+          <p:cNvPr id="33" name="Oval 32"/>
+          <p:cNvSpPr/>
+          <p:nvPr/>
+        </p:nvSpPr>
+        <p:spPr>
+          <a:xfrm>
+            <a:off x="3144594" y="3951442"/>
+            <a:ext cx="45720" cy="45720"/>
+          </a:xfrm>
+          <a:prstGeom prst="ellipse">
+            <a:avLst/>
+          </a:prstGeom>
+          <a:solidFill>
+            <a:srgbClr val="3A6FD0"/>
+          </a:solidFill>
+          <a:ln>
+            <a:noFill/>
+          </a:ln>
+          <a:effectLst/>
+        </p:spPr>
+        <p:style>
+          <a:lnRef idx="1">
+            <a:schemeClr val="accent1"/>
+          </a:lnRef>
+          <a:fillRef idx="3">
+            <a:schemeClr val="accent1"/>
+          </a:fillRef>
+          <a:effectRef idx="2">
+            <a:schemeClr val="accent1"/>
+          </a:effectRef>
+          <a:fontRef idx="minor">
+            <a:schemeClr val="lt1"/>
+          </a:fontRef>
+        </p:style>
+        <p:txBody>
+          <a:bodyPr rtlCol="0" anchor="ctr"/>
+          <a:lstStyle/>
+          <a:p>
+            <a:pPr algn="ctr"/>
+          </a:p>
+        </p:txBody>
+      </p:sp>
+      <p:sp>
+        <p:nvSpPr>
+          <p:cNvPr id="34" name="Oval 33"/>
+          <p:cNvSpPr/>
+          <p:nvPr/>
+        </p:nvSpPr>
+        <p:spPr>
+          <a:xfrm>
+            <a:off x="3346571" y="3903803"/>
+            <a:ext cx="45720" cy="45720"/>
+          </a:xfrm>
+          <a:prstGeom prst="ellipse">
+            <a:avLst/>
+          </a:prstGeom>
+          <a:solidFill>
+            <a:srgbClr val="3A6FD0"/>
+          </a:solidFill>
+          <a:ln>
+            <a:noFill/>
+          </a:ln>
+          <a:effectLst/>
+        </p:spPr>
+        <p:style>
+          <a:lnRef idx="1">
+            <a:schemeClr val="accent1"/>
+          </a:lnRef>
+          <a:fillRef idx="3">
+            <a:schemeClr val="accent1"/>
+          </a:fillRef>
+          <a:effectRef idx="2">
+            <a:schemeClr val="accent1"/>
+          </a:effectRef>
+          <a:fontRef idx="minor">
+            <a:schemeClr val="lt1"/>
+          </a:fontRef>
+        </p:style>
+        <p:txBody>
+          <a:bodyPr rtlCol="0" anchor="ctr"/>
+          <a:lstStyle/>
+          <a:p>
+            <a:pPr algn="ctr"/>
+          </a:p>
+        </p:txBody>
+      </p:sp>
+      <p:sp>
+        <p:nvSpPr>
+          <p:cNvPr id="35" name="Oval 34"/>
+          <p:cNvSpPr/>
+          <p:nvPr/>
+        </p:nvSpPr>
+        <p:spPr>
+          <a:xfrm>
+            <a:off x="3553689" y="4100672"/>
+            <a:ext cx="45720" cy="45720"/>
+          </a:xfrm>
+          <a:prstGeom prst="ellipse">
+            <a:avLst/>
+          </a:prstGeom>
+          <a:solidFill>
+            <a:srgbClr val="3A6FD0"/>
+          </a:solidFill>
+          <a:ln>
+            <a:noFill/>
+          </a:ln>
+          <a:effectLst/>
+        </p:spPr>
+        <p:style>
+          <a:lnRef idx="1">
+            <a:schemeClr val="accent1"/>
+          </a:lnRef>
+          <a:fillRef idx="3">
+            <a:schemeClr val="accent1"/>
+          </a:fillRef>
+          <a:effectRef idx="2">
+            <a:schemeClr val="accent1"/>
+          </a:effectRef>
+          <a:fontRef idx="minor">
+            <a:schemeClr val="lt1"/>
+          </a:fontRef>
+        </p:style>
+        <p:txBody>
+          <a:bodyPr rtlCol="0" anchor="ctr"/>
+          <a:lstStyle/>
+          <a:p>
+            <a:pPr algn="ctr"/>
+          </a:p>
+        </p:txBody>
+      </p:sp>
+      <p:sp>
+        <p:nvSpPr>
+          <p:cNvPr id="36" name="Oval 35"/>
+          <p:cNvSpPr/>
+          <p:nvPr/>
+        </p:nvSpPr>
+        <p:spPr>
+          <a:xfrm>
+            <a:off x="3748773" y="3966300"/>
+            <a:ext cx="45720" cy="45720"/>
+          </a:xfrm>
+          <a:prstGeom prst="ellipse">
+            <a:avLst/>
+          </a:prstGeom>
+          <a:solidFill>
+            <a:srgbClr val="3A6FD0"/>
+          </a:solidFill>
+          <a:ln>
+            <a:noFill/>
+          </a:ln>
+          <a:effectLst/>
+        </p:spPr>
+        <p:style>
+          <a:lnRef idx="1">
+            <a:schemeClr val="accent1"/>
+          </a:lnRef>
+          <a:fillRef idx="3">
+            <a:schemeClr val="accent1"/>
+          </a:fillRef>
+          <a:effectRef idx="2">
+            <a:schemeClr val="accent1"/>
+          </a:effectRef>
+          <a:fontRef idx="minor">
+            <a:schemeClr val="lt1"/>
+          </a:fontRef>
+        </p:style>
+        <p:txBody>
+          <a:bodyPr rtlCol="0" anchor="ctr"/>
+          <a:lstStyle/>
+          <a:p>
+            <a:pPr algn="ctr"/>
+          </a:p>
+        </p:txBody>
+      </p:sp>
+      <p:sp>
+        <p:nvSpPr>
+          <p:cNvPr id="37" name="Oval 36"/>
+          <p:cNvSpPr/>
+          <p:nvPr/>
+        </p:nvSpPr>
+        <p:spPr>
+          <a:xfrm>
+            <a:off x="3940553" y="3809276"/>
+            <a:ext cx="45720" cy="45720"/>
+          </a:xfrm>
+          <a:prstGeom prst="ellipse">
+            <a:avLst/>
+          </a:prstGeom>
+          <a:solidFill>
+            <a:srgbClr val="3A6FD0"/>
+          </a:solidFill>
+          <a:ln>
+            <a:noFill/>
+          </a:ln>
+          <a:effectLst/>
+        </p:spPr>
+        <p:style>
+          <a:lnRef idx="1">
+            <a:schemeClr val="accent1"/>
+          </a:lnRef>
+          <a:fillRef idx="3">
+            <a:schemeClr val="accent1"/>
+          </a:fillRef>
+          <a:effectRef idx="2">
+            <a:schemeClr val="accent1"/>
+          </a:effectRef>
+          <a:fontRef idx="minor">
+            <a:schemeClr val="lt1"/>
+          </a:fontRef>
+        </p:style>
+        <p:txBody>
+          <a:bodyPr rtlCol="0" anchor="ctr"/>
+          <a:lstStyle/>
+          <a:p>
+            <a:pPr algn="ctr"/>
+          </a:p>
+        </p:txBody>
+      </p:sp>
+      <p:sp>
+        <p:nvSpPr>
+          <p:cNvPr id="38" name="Oval 37"/>
+          <p:cNvSpPr/>
+          <p:nvPr/>
+        </p:nvSpPr>
+        <p:spPr>
+          <a:xfrm>
+            <a:off x="4119727" y="4112696"/>
+            <a:ext cx="45720" cy="45720"/>
+          </a:xfrm>
+          <a:prstGeom prst="ellipse">
+            <a:avLst/>
+          </a:prstGeom>
+          <a:solidFill>
+            <a:srgbClr val="3A6FD0"/>
+          </a:solidFill>
+          <a:ln>
+            <a:noFill/>
+          </a:ln>
+          <a:effectLst/>
+        </p:spPr>
+        <p:style>
+          <a:lnRef idx="1">
+            <a:schemeClr val="accent1"/>
+          </a:lnRef>
+          <a:fillRef idx="3">
+            <a:schemeClr val="accent1"/>
+          </a:fillRef>
+          <a:effectRef idx="2">
+            <a:schemeClr val="accent1"/>
+          </a:effectRef>
+          <a:fontRef idx="minor">
+            <a:schemeClr val="lt1"/>
+          </a:fontRef>
+        </p:style>
+        <p:txBody>
+          <a:bodyPr rtlCol="0" anchor="ctr"/>
+          <a:lstStyle/>
+          <a:p>
+            <a:pPr algn="ctr"/>
+          </a:p>
+        </p:txBody>
+      </p:sp>
+      <p:sp>
+        <p:nvSpPr>
+          <p:cNvPr id="39" name="Oval 38"/>
+          <p:cNvSpPr/>
+          <p:nvPr/>
+        </p:nvSpPr>
+        <p:spPr>
+          <a:xfrm>
+            <a:off x="3141795" y="3634820"/>
+            <a:ext cx="37490" cy="37490"/>
+          </a:xfrm>
+          <a:prstGeom prst="ellipse">
+            <a:avLst/>
+          </a:prstGeom>
+          <a:solidFill>
+            <a:srgbClr val="AEB4BD"/>
+          </a:solidFill>
+          <a:ln>
+            <a:noFill/>
+          </a:ln>
+          <a:effectLst/>
+        </p:spPr>
+        <p:style>
+          <a:lnRef idx="1">
+            <a:schemeClr val="accent1"/>
+          </a:lnRef>
+          <a:fillRef idx="3">
+            <a:schemeClr val="accent1"/>
+          </a:fillRef>
+          <a:effectRef idx="2">
+            <a:schemeClr val="accent1"/>
+          </a:effectRef>
+          <a:fontRef idx="minor">
+            <a:schemeClr val="lt1"/>
+          </a:fontRef>
+        </p:style>
+        <p:txBody>
+          <a:bodyPr rtlCol="0" anchor="ctr"/>
+          <a:lstStyle/>
+          <a:p>
+            <a:pPr algn="ctr"/>
+          </a:p>
+        </p:txBody>
+      </p:sp>
+      <p:sp>
+        <p:nvSpPr>
+          <p:cNvPr id="40" name="Oval 39"/>
+          <p:cNvSpPr/>
+          <p:nvPr/>
+        </p:nvSpPr>
+        <p:spPr>
+          <a:xfrm>
+            <a:off x="3815872" y="3507255"/>
+            <a:ext cx="37490" cy="37490"/>
+          </a:xfrm>
+          <a:prstGeom prst="ellipse">
+            <a:avLst/>
+          </a:prstGeom>
+          <a:solidFill>
+            <a:srgbClr val="AEB4BD"/>
+          </a:solidFill>
+          <a:ln>
+            <a:noFill/>
+          </a:ln>
+          <a:effectLst/>
+        </p:spPr>
+        <p:style>
+          <a:lnRef idx="1">
+            <a:schemeClr val="accent1"/>
+          </a:lnRef>
+          <a:fillRef idx="3">
+            <a:schemeClr val="accent1"/>
+          </a:fillRef>
+          <a:effectRef idx="2">
+            <a:schemeClr val="accent1"/>
+          </a:effectRef>
+          <a:fontRef idx="minor">
+            <a:schemeClr val="lt1"/>
+          </a:fontRef>
+        </p:style>
+        <p:txBody>
+          <a:bodyPr rtlCol="0" anchor="ctr"/>
+          <a:lstStyle/>
+          <a:p>
+            <a:pPr algn="ctr"/>
+          </a:p>
+        </p:txBody>
+      </p:sp>
+      <p:sp>
+        <p:nvSpPr>
+          <p:cNvPr id="41" name="Rectangle 40"/>
+          <p:cNvSpPr/>
+          <p:nvPr/>
+        </p:nvSpPr>
+        <p:spPr>
+          <a:xfrm>
+            <a:off x="4239063" y="3255264"/>
+            <a:ext cx="925419" cy="1347825"/>
+          </a:xfrm>
+          <a:prstGeom prst="rect">
+            <a:avLst/>
+          </a:prstGeom>
+          <a:solidFill>
+            <a:srgbClr val="FBECEA"/>
+          </a:solidFill>
+          <a:ln>
+            <a:noFill/>
+          </a:ln>
+          <a:effectLst/>
+        </p:spPr>
+        <p:style>
+          <a:lnRef idx="1">
+            <a:schemeClr val="accent1"/>
+          </a:lnRef>
+          <a:fillRef idx="3">
+            <a:schemeClr val="accent1"/>
+          </a:fillRef>
+          <a:effectRef idx="2">
+            <a:schemeClr val="accent1"/>
+          </a:effectRef>
+          <a:fontRef idx="minor">
+            <a:schemeClr val="lt1"/>
+          </a:fontRef>
+        </p:style>
+        <p:txBody>
+          <a:bodyPr rtlCol="0" anchor="ctr"/>
+          <a:lstStyle/>
+          <a:p>
+            <a:pPr algn="ctr"/>
+          </a:p>
+        </p:txBody>
+      </p:sp>
+      <p:sp>
+        <p:nvSpPr>
+          <p:cNvPr id="42" name="TextBox 41"/>
+          <p:cNvSpPr txBox="1"/>
+          <p:nvPr/>
+        </p:nvSpPr>
+        <p:spPr>
+          <a:xfrm>
+            <a:off x="4239063" y="3017520"/>
+            <a:ext cx="943707" cy="219456"/>
+          </a:xfrm>
+          <a:prstGeom prst="rect">
+            <a:avLst/>
+          </a:prstGeom>
+          <a:noFill/>
+        </p:spPr>
+        <p:txBody>
+          <a:bodyPr wrap="none" anchor="ctr" lIns="0" rIns="0" tIns="0" bIns="0">
+            <a:spAutoFit/>
+          </a:bodyPr>
+          <a:lstStyle/>
+          <a:p>
+            <a:pPr algn="ctr"/>
+            <a:r>
+              <a:rPr sz="1250" b="1">
+                <a:solidFill>
+                  <a:srgbClr val="CC3328"/>
+                </a:solidFill>
+                <a:latin typeface="맑은 고딕"/>
+                <a:ea typeface="맑은 고딕"/>
+              </a:rPr>
+              <a:t>Missing</a:t>
+            </a:r>
+          </a:p>
+        </p:txBody>
+      </p:sp>
+      <p:sp>
+        <p:nvSpPr>
+          <p:cNvPr id="43" name="Rectangle 42"/>
+          <p:cNvSpPr/>
+          <p:nvPr/>
+        </p:nvSpPr>
+        <p:spPr>
+          <a:xfrm>
+            <a:off x="5182770" y="3255264"/>
+            <a:ext cx="1869127" cy="1347825"/>
+          </a:xfrm>
+          <a:prstGeom prst="rect">
+            <a:avLst/>
+          </a:prstGeom>
+          <a:solidFill>
+            <a:srgbClr val="EAF0F8"/>
+          </a:solidFill>
+          <a:ln>
+            <a:noFill/>
+          </a:ln>
+          <a:effectLst/>
+        </p:spPr>
+        <p:style>
+          <a:lnRef idx="1">
+            <a:schemeClr val="accent1"/>
+          </a:lnRef>
+          <a:fillRef idx="3">
+            <a:schemeClr val="accent1"/>
+          </a:fillRef>
+          <a:effectRef idx="2">
+            <a:schemeClr val="accent1"/>
+          </a:effectRef>
+          <a:fontRef idx="minor">
+            <a:schemeClr val="lt1"/>
+          </a:fontRef>
+        </p:style>
+        <p:txBody>
+          <a:bodyPr rtlCol="0" anchor="ctr"/>
+          <a:lstStyle/>
+          <a:p>
+            <a:pPr algn="ctr"/>
+          </a:p>
+        </p:txBody>
+      </p:sp>
+      <p:sp>
+        <p:nvSpPr>
+          <p:cNvPr id="44" name="TextBox 43"/>
+          <p:cNvSpPr txBox="1"/>
+          <p:nvPr/>
+        </p:nvSpPr>
+        <p:spPr>
+          <a:xfrm>
+            <a:off x="5182770" y="3017520"/>
+            <a:ext cx="1887415" cy="219456"/>
+          </a:xfrm>
+          <a:prstGeom prst="rect">
+            <a:avLst/>
+          </a:prstGeom>
+          <a:noFill/>
+        </p:spPr>
+        <p:txBody>
+          <a:bodyPr wrap="none" anchor="ctr" lIns="0" rIns="0" tIns="0" bIns="0">
+            <a:spAutoFit/>
+          </a:bodyPr>
+          <a:lstStyle/>
+          <a:p>
+            <a:pPr algn="ctr"/>
+            <a:r>
+              <a:rPr sz="1250" b="1">
+                <a:solidFill>
+                  <a:srgbClr val="0F1E3D"/>
+                </a:solidFill>
+                <a:latin typeface="맑은 고딕"/>
+                <a:ea typeface="맑은 고딕"/>
+              </a:rPr>
+              <a:t>Dense</a:t>
+            </a:r>
+          </a:p>
+        </p:txBody>
+      </p:sp>
+      <p:sp>
+        <p:nvSpPr>
+          <p:cNvPr id="45" name="Oval 44"/>
+          <p:cNvSpPr/>
+          <p:nvPr/>
+        </p:nvSpPr>
+        <p:spPr>
+          <a:xfrm>
+            <a:off x="5226041" y="3923980"/>
+            <a:ext cx="45720" cy="45720"/>
+          </a:xfrm>
+          <a:prstGeom prst="ellipse">
+            <a:avLst/>
+          </a:prstGeom>
+          <a:solidFill>
+            <a:srgbClr val="3A6FD0"/>
+          </a:solidFill>
+          <a:ln>
+            <a:noFill/>
+          </a:ln>
+          <a:effectLst/>
+        </p:spPr>
+        <p:style>
+          <a:lnRef idx="1">
+            <a:schemeClr val="accent1"/>
+          </a:lnRef>
+          <a:fillRef idx="3">
+            <a:schemeClr val="accent1"/>
+          </a:fillRef>
+          <a:effectRef idx="2">
+            <a:schemeClr val="accent1"/>
+          </a:effectRef>
+          <a:fontRef idx="minor">
+            <a:schemeClr val="lt1"/>
+          </a:fontRef>
+        </p:style>
+        <p:txBody>
+          <a:bodyPr rtlCol="0" anchor="ctr"/>
+          <a:lstStyle/>
+          <a:p>
+            <a:pPr algn="ctr"/>
+          </a:p>
+        </p:txBody>
+      </p:sp>
+      <p:sp>
+        <p:nvSpPr>
+          <p:cNvPr id="46" name="Oval 45"/>
+          <p:cNvSpPr/>
+          <p:nvPr/>
+        </p:nvSpPr>
+        <p:spPr>
+          <a:xfrm>
+            <a:off x="5354702" y="4067173"/>
+            <a:ext cx="45720" cy="45720"/>
+          </a:xfrm>
+          <a:prstGeom prst="ellipse">
+            <a:avLst/>
+          </a:prstGeom>
+          <a:solidFill>
+            <a:srgbClr val="3A6FD0"/>
+          </a:solidFill>
+          <a:ln>
+            <a:noFill/>
+          </a:ln>
+          <a:effectLst/>
+        </p:spPr>
+        <p:style>
+          <a:lnRef idx="1">
+            <a:schemeClr val="accent1"/>
+          </a:lnRef>
+          <a:fillRef idx="3">
+            <a:schemeClr val="accent1"/>
+          </a:fillRef>
+          <a:effectRef idx="2">
+            <a:schemeClr val="accent1"/>
+          </a:effectRef>
+          <a:fontRef idx="minor">
+            <a:schemeClr val="lt1"/>
+          </a:fontRef>
+        </p:style>
+        <p:txBody>
+          <a:bodyPr rtlCol="0" anchor="ctr"/>
+          <a:lstStyle/>
+          <a:p>
+            <a:pPr algn="ctr"/>
+          </a:p>
+        </p:txBody>
+      </p:sp>
+      <p:sp>
+        <p:nvSpPr>
+          <p:cNvPr id="47" name="Oval 46"/>
+          <p:cNvSpPr/>
+          <p:nvPr/>
+        </p:nvSpPr>
+        <p:spPr>
+          <a:xfrm>
+            <a:off x="5476890" y="3982703"/>
+            <a:ext cx="45720" cy="45720"/>
+          </a:xfrm>
+          <a:prstGeom prst="ellipse">
+            <a:avLst/>
+          </a:prstGeom>
+          <a:solidFill>
+            <a:srgbClr val="3A6FD0"/>
+          </a:solidFill>
+          <a:ln>
+            <a:noFill/>
+          </a:ln>
+          <a:effectLst/>
+        </p:spPr>
+        <p:style>
+          <a:lnRef idx="1">
+            <a:schemeClr val="accent1"/>
+          </a:lnRef>
+          <a:fillRef idx="3">
+            <a:schemeClr val="accent1"/>
+          </a:fillRef>
+          <a:effectRef idx="2">
+            <a:schemeClr val="accent1"/>
+          </a:effectRef>
+          <a:fontRef idx="minor">
+            <a:schemeClr val="lt1"/>
+          </a:fontRef>
+        </p:style>
+        <p:txBody>
+          <a:bodyPr rtlCol="0" anchor="ctr"/>
+          <a:lstStyle/>
+          <a:p>
+            <a:pPr algn="ctr"/>
+          </a:p>
+        </p:txBody>
+      </p:sp>
+      <p:sp>
+        <p:nvSpPr>
+          <p:cNvPr id="48" name="Oval 47"/>
+          <p:cNvSpPr/>
+          <p:nvPr/>
+        </p:nvSpPr>
+        <p:spPr>
+          <a:xfrm>
+            <a:off x="5588644" y="3638554"/>
+            <a:ext cx="45720" cy="45720"/>
+          </a:xfrm>
+          <a:prstGeom prst="ellipse">
+            <a:avLst/>
+          </a:prstGeom>
+          <a:solidFill>
+            <a:srgbClr val="3A6FD0"/>
+          </a:solidFill>
+          <a:ln>
+            <a:noFill/>
+          </a:ln>
+          <a:effectLst/>
+        </p:spPr>
+        <p:style>
+          <a:lnRef idx="1">
+            <a:schemeClr val="accent1"/>
+          </a:lnRef>
+          <a:fillRef idx="3">
+            <a:schemeClr val="accent1"/>
+          </a:fillRef>
+          <a:effectRef idx="2">
+            <a:schemeClr val="accent1"/>
+          </a:effectRef>
+          <a:fontRef idx="minor">
+            <a:schemeClr val="lt1"/>
+          </a:fontRef>
+        </p:style>
+        <p:txBody>
+          <a:bodyPr rtlCol="0" anchor="ctr"/>
+          <a:lstStyle/>
+          <a:p>
+            <a:pPr algn="ctr"/>
+          </a:p>
+        </p:txBody>
+      </p:sp>
+      <p:sp>
+        <p:nvSpPr>
+          <p:cNvPr id="49" name="Oval 48"/>
+          <p:cNvSpPr/>
+          <p:nvPr/>
+        </p:nvSpPr>
+        <p:spPr>
+          <a:xfrm>
+            <a:off x="5737077" y="3671432"/>
+            <a:ext cx="45720" cy="45720"/>
+          </a:xfrm>
+          <a:prstGeom prst="ellipse">
+            <a:avLst/>
+          </a:prstGeom>
+          <a:solidFill>
+            <a:srgbClr val="3A6FD0"/>
+          </a:solidFill>
+          <a:ln>
+            <a:noFill/>
+          </a:ln>
+          <a:effectLst/>
+        </p:spPr>
+        <p:style>
+          <a:lnRef idx="1">
+            <a:schemeClr val="accent1"/>
+          </a:lnRef>
+          <a:fillRef idx="3">
+            <a:schemeClr val="accent1"/>
+          </a:fillRef>
+          <a:effectRef idx="2">
+            <a:schemeClr val="accent1"/>
+          </a:effectRef>
+          <a:fontRef idx="minor">
+            <a:schemeClr val="lt1"/>
+          </a:fontRef>
+        </p:style>
+        <p:txBody>
+          <a:bodyPr rtlCol="0" anchor="ctr"/>
+          <a:lstStyle/>
+          <a:p>
+            <a:pPr algn="ctr"/>
+          </a:p>
+        </p:txBody>
+      </p:sp>
+      <p:sp>
+        <p:nvSpPr>
+          <p:cNvPr id="50" name="Oval 49"/>
+          <p:cNvSpPr/>
+          <p:nvPr/>
+        </p:nvSpPr>
+        <p:spPr>
+          <a:xfrm>
+            <a:off x="5857919" y="3662333"/>
+            <a:ext cx="45720" cy="45720"/>
+          </a:xfrm>
+          <a:prstGeom prst="ellipse">
+            <a:avLst/>
+          </a:prstGeom>
+          <a:solidFill>
+            <a:srgbClr val="3A6FD0"/>
+          </a:solidFill>
+          <a:ln>
+            <a:noFill/>
+          </a:ln>
+          <a:effectLst/>
+        </p:spPr>
+        <p:style>
+          <a:lnRef idx="1">
+            <a:schemeClr val="accent1"/>
+          </a:lnRef>
+          <a:fillRef idx="3">
+            <a:schemeClr val="accent1"/>
+          </a:fillRef>
+          <a:effectRef idx="2">
+            <a:schemeClr val="accent1"/>
+          </a:effectRef>
+          <a:fontRef idx="minor">
+            <a:schemeClr val="lt1"/>
+          </a:fontRef>
+        </p:style>
+        <p:txBody>
+          <a:bodyPr rtlCol="0" anchor="ctr"/>
+          <a:lstStyle/>
+          <a:p>
+            <a:pPr algn="ctr"/>
+          </a:p>
+        </p:txBody>
+      </p:sp>
+      <p:sp>
+        <p:nvSpPr>
+          <p:cNvPr id="51" name="Oval 50"/>
+          <p:cNvSpPr/>
+          <p:nvPr/>
+        </p:nvSpPr>
+        <p:spPr>
+          <a:xfrm>
+            <a:off x="5993374" y="3851422"/>
+            <a:ext cx="45720" cy="45720"/>
+          </a:xfrm>
+          <a:prstGeom prst="ellipse">
+            <a:avLst/>
+          </a:prstGeom>
+          <a:solidFill>
+            <a:srgbClr val="3A6FD0"/>
+          </a:solidFill>
+          <a:ln>
+            <a:noFill/>
+          </a:ln>
+          <a:effectLst/>
+        </p:spPr>
+        <p:style>
+          <a:lnRef idx="1">
+            <a:schemeClr val="accent1"/>
+          </a:lnRef>
+          <a:fillRef idx="3">
+            <a:schemeClr val="accent1"/>
+          </a:fillRef>
+          <a:effectRef idx="2">
+            <a:schemeClr val="accent1"/>
+          </a:effectRef>
+          <a:fontRef idx="minor">
+            <a:schemeClr val="lt1"/>
+          </a:fontRef>
+        </p:style>
+        <p:txBody>
+          <a:bodyPr rtlCol="0" anchor="ctr"/>
+          <a:lstStyle/>
+          <a:p>
+            <a:pPr algn="ctr"/>
+          </a:p>
+        </p:txBody>
+      </p:sp>
+      <p:sp>
+        <p:nvSpPr>
+          <p:cNvPr id="52" name="Oval 51"/>
+          <p:cNvSpPr/>
+          <p:nvPr/>
+        </p:nvSpPr>
+        <p:spPr>
+          <a:xfrm>
+            <a:off x="6092244" y="4091798"/>
+            <a:ext cx="45720" cy="45720"/>
+          </a:xfrm>
+          <a:prstGeom prst="ellipse">
+            <a:avLst/>
+          </a:prstGeom>
+          <a:solidFill>
+            <a:srgbClr val="3A6FD0"/>
+          </a:solidFill>
+          <a:ln>
+            <a:noFill/>
+          </a:ln>
+          <a:effectLst/>
+        </p:spPr>
+        <p:style>
+          <a:lnRef idx="1">
+            <a:schemeClr val="accent1"/>
+          </a:lnRef>
+          <a:fillRef idx="3">
+            <a:schemeClr val="accent1"/>
+          </a:fillRef>
+          <a:effectRef idx="2">
+            <a:schemeClr val="accent1"/>
+          </a:effectRef>
+          <a:fontRef idx="minor">
+            <a:schemeClr val="lt1"/>
+          </a:fontRef>
+        </p:style>
+        <p:txBody>
+          <a:bodyPr rtlCol="0" anchor="ctr"/>
+          <a:lstStyle/>
+          <a:p>
+            <a:pPr algn="ctr"/>
+          </a:p>
+        </p:txBody>
+      </p:sp>
+      <p:sp>
+        <p:nvSpPr>
+          <p:cNvPr id="53" name="Oval 52"/>
+          <p:cNvSpPr/>
+          <p:nvPr/>
+        </p:nvSpPr>
+        <p:spPr>
+          <a:xfrm>
+            <a:off x="6233547" y="3794231"/>
+            <a:ext cx="45720" cy="45720"/>
+          </a:xfrm>
+          <a:prstGeom prst="ellipse">
+            <a:avLst/>
+          </a:prstGeom>
+          <a:solidFill>
+            <a:srgbClr val="3A6FD0"/>
+          </a:solidFill>
+          <a:ln>
+            <a:noFill/>
+          </a:ln>
+          <a:effectLst/>
+        </p:spPr>
+        <p:style>
+          <a:lnRef idx="1">
+            <a:schemeClr val="accent1"/>
+          </a:lnRef>
+          <a:fillRef idx="3">
+            <a:schemeClr val="accent1"/>
+          </a:fillRef>
+          <a:effectRef idx="2">
+            <a:schemeClr val="accent1"/>
+          </a:effectRef>
+          <a:fontRef idx="minor">
+            <a:schemeClr val="lt1"/>
+          </a:fontRef>
+        </p:style>
+        <p:txBody>
+          <a:bodyPr rtlCol="0" anchor="ctr"/>
+          <a:lstStyle/>
+          <a:p>
+            <a:pPr algn="ctr"/>
+          </a:p>
+        </p:txBody>
+      </p:sp>
+      <p:sp>
+        <p:nvSpPr>
+          <p:cNvPr id="54" name="Oval 53"/>
+          <p:cNvSpPr/>
+          <p:nvPr/>
+        </p:nvSpPr>
+        <p:spPr>
+          <a:xfrm>
+            <a:off x="6361762" y="3972475"/>
+            <a:ext cx="45720" cy="45720"/>
+          </a:xfrm>
+          <a:prstGeom prst="ellipse">
+            <a:avLst/>
+          </a:prstGeom>
+          <a:solidFill>
+            <a:srgbClr val="3A6FD0"/>
+          </a:solidFill>
+          <a:ln>
+            <a:noFill/>
+          </a:ln>
+          <a:effectLst/>
+        </p:spPr>
+        <p:style>
+          <a:lnRef idx="1">
+            <a:schemeClr val="accent1"/>
+          </a:lnRef>
+          <a:fillRef idx="3">
+            <a:schemeClr val="accent1"/>
+          </a:fillRef>
+          <a:effectRef idx="2">
+            <a:schemeClr val="accent1"/>
+          </a:effectRef>
+          <a:fontRef idx="minor">
+            <a:schemeClr val="lt1"/>
+          </a:fontRef>
+        </p:style>
+        <p:txBody>
+          <a:bodyPr rtlCol="0" anchor="ctr"/>
+          <a:lstStyle/>
+          <a:p>
+            <a:pPr algn="ctr"/>
+          </a:p>
+        </p:txBody>
+      </p:sp>
+      <p:sp>
+        <p:nvSpPr>
+          <p:cNvPr id="55" name="Oval 54"/>
+          <p:cNvSpPr/>
+          <p:nvPr/>
+        </p:nvSpPr>
+        <p:spPr>
+          <a:xfrm>
+            <a:off x="6494538" y="3603989"/>
+            <a:ext cx="45720" cy="45720"/>
+          </a:xfrm>
+          <a:prstGeom prst="ellipse">
+            <a:avLst/>
+          </a:prstGeom>
+          <a:solidFill>
+            <a:srgbClr val="3A6FD0"/>
+          </a:solidFill>
+          <a:ln>
+            <a:noFill/>
+          </a:ln>
+          <a:effectLst/>
+        </p:spPr>
+        <p:style>
+          <a:lnRef idx="1">
+            <a:schemeClr val="accent1"/>
+          </a:lnRef>
+          <a:fillRef idx="3">
+            <a:schemeClr val="accent1"/>
+          </a:fillRef>
+          <a:effectRef idx="2">
+            <a:schemeClr val="accent1"/>
+          </a:effectRef>
+          <a:fontRef idx="minor">
+            <a:schemeClr val="lt1"/>
+          </a:fontRef>
+        </p:style>
+        <p:txBody>
+          <a:bodyPr rtlCol="0" anchor="ctr"/>
+          <a:lstStyle/>
+          <a:p>
+            <a:pPr algn="ctr"/>
+          </a:p>
+        </p:txBody>
+      </p:sp>
+      <p:sp>
+        <p:nvSpPr>
+          <p:cNvPr id="56" name="Oval 55"/>
+          <p:cNvSpPr/>
+          <p:nvPr/>
+        </p:nvSpPr>
+        <p:spPr>
+          <a:xfrm>
+            <a:off x="6596602" y="4218068"/>
+            <a:ext cx="45720" cy="45720"/>
+          </a:xfrm>
+          <a:prstGeom prst="ellipse">
+            <a:avLst/>
+          </a:prstGeom>
+          <a:solidFill>
+            <a:srgbClr val="3A6FD0"/>
+          </a:solidFill>
+          <a:ln>
+            <a:noFill/>
+          </a:ln>
+          <a:effectLst/>
+        </p:spPr>
+        <p:style>
+          <a:lnRef idx="1">
+            <a:schemeClr val="accent1"/>
+          </a:lnRef>
+          <a:fillRef idx="3">
+            <a:schemeClr val="accent1"/>
+          </a:fillRef>
+          <a:effectRef idx="2">
+            <a:schemeClr val="accent1"/>
+          </a:effectRef>
+          <a:fontRef idx="minor">
+            <a:schemeClr val="lt1"/>
+          </a:fontRef>
+        </p:style>
+        <p:txBody>
+          <a:bodyPr rtlCol="0" anchor="ctr"/>
+          <a:lstStyle/>
+          <a:p>
+            <a:pPr algn="ctr"/>
+          </a:p>
+        </p:txBody>
+      </p:sp>
+      <p:sp>
+        <p:nvSpPr>
+          <p:cNvPr id="57" name="Oval 56"/>
+          <p:cNvSpPr/>
+          <p:nvPr/>
+        </p:nvSpPr>
+        <p:spPr>
+          <a:xfrm>
+            <a:off x="6747366" y="4044456"/>
+            <a:ext cx="45720" cy="45720"/>
+          </a:xfrm>
+          <a:prstGeom prst="ellipse">
+            <a:avLst/>
+          </a:prstGeom>
+          <a:solidFill>
+            <a:srgbClr val="3A6FD0"/>
+          </a:solidFill>
+          <a:ln>
+            <a:noFill/>
+          </a:ln>
+          <a:effectLst/>
+        </p:spPr>
+        <p:style>
+          <a:lnRef idx="1">
+            <a:schemeClr val="accent1"/>
+          </a:lnRef>
+          <a:fillRef idx="3">
+            <a:schemeClr val="accent1"/>
+          </a:fillRef>
+          <a:effectRef idx="2">
+            <a:schemeClr val="accent1"/>
+          </a:effectRef>
+          <a:fontRef idx="minor">
+            <a:schemeClr val="lt1"/>
+          </a:fontRef>
+        </p:style>
+        <p:txBody>
+          <a:bodyPr rtlCol="0" anchor="ctr"/>
+          <a:lstStyle/>
+          <a:p>
+            <a:pPr algn="ctr"/>
+          </a:p>
+        </p:txBody>
+      </p:sp>
+      <p:sp>
+        <p:nvSpPr>
+          <p:cNvPr id="58" name="Oval 57"/>
+          <p:cNvSpPr/>
+          <p:nvPr/>
+        </p:nvSpPr>
+        <p:spPr>
+          <a:xfrm>
+            <a:off x="6846383" y="3598315"/>
+            <a:ext cx="45720" cy="45720"/>
+          </a:xfrm>
+          <a:prstGeom prst="ellipse">
+            <a:avLst/>
+          </a:prstGeom>
+          <a:solidFill>
+            <a:srgbClr val="3A6FD0"/>
+          </a:solidFill>
+          <a:ln>
+            <a:noFill/>
+          </a:ln>
+          <a:effectLst/>
+        </p:spPr>
+        <p:style>
+          <a:lnRef idx="1">
+            <a:schemeClr val="accent1"/>
+          </a:lnRef>
+          <a:fillRef idx="3">
+            <a:schemeClr val="accent1"/>
+          </a:fillRef>
+          <a:effectRef idx="2">
+            <a:schemeClr val="accent1"/>
+          </a:effectRef>
+          <a:fontRef idx="minor">
+            <a:schemeClr val="lt1"/>
+          </a:fontRef>
+        </p:style>
+        <p:txBody>
+          <a:bodyPr rtlCol="0" anchor="ctr"/>
+          <a:lstStyle/>
+          <a:p>
+            <a:pPr algn="ctr"/>
+          </a:p>
+        </p:txBody>
+      </p:sp>
+      <p:sp>
+        <p:nvSpPr>
+          <p:cNvPr id="59" name="Oval 58"/>
+          <p:cNvSpPr/>
+          <p:nvPr/>
+        </p:nvSpPr>
+        <p:spPr>
+          <a:xfrm>
+            <a:off x="6988242" y="4009463"/>
+            <a:ext cx="45720" cy="45720"/>
+          </a:xfrm>
+          <a:prstGeom prst="ellipse">
+            <a:avLst/>
+          </a:prstGeom>
+          <a:solidFill>
+            <a:srgbClr val="3A6FD0"/>
+          </a:solidFill>
+          <a:ln>
+            <a:noFill/>
+          </a:ln>
+          <a:effectLst/>
+        </p:spPr>
+        <p:style>
+          <a:lnRef idx="1">
+            <a:schemeClr val="accent1"/>
+          </a:lnRef>
+          <a:fillRef idx="3">
+            <a:schemeClr val="accent1"/>
+          </a:fillRef>
+          <a:effectRef idx="2">
+            <a:schemeClr val="accent1"/>
+          </a:effectRef>
+          <a:fontRef idx="minor">
+            <a:schemeClr val="lt1"/>
+          </a:fontRef>
+        </p:style>
+        <p:txBody>
+          <a:bodyPr rtlCol="0" anchor="ctr"/>
+          <a:lstStyle/>
+          <a:p>
+            <a:pPr algn="ctr"/>
+          </a:p>
+        </p:txBody>
+      </p:sp>
+      <p:sp>
+        <p:nvSpPr>
+          <p:cNvPr id="60" name="Oval 59"/>
+          <p:cNvSpPr/>
+          <p:nvPr/>
+        </p:nvSpPr>
+        <p:spPr>
+          <a:xfrm>
+            <a:off x="5315018" y="3717294"/>
+            <a:ext cx="37490" cy="37490"/>
+          </a:xfrm>
+          <a:prstGeom prst="ellipse">
+            <a:avLst/>
+          </a:prstGeom>
+          <a:solidFill>
+            <a:srgbClr val="AEB4BD"/>
+          </a:solidFill>
+          <a:ln>
+            <a:noFill/>
+          </a:ln>
+          <a:effectLst/>
+        </p:spPr>
+        <p:style>
+          <a:lnRef idx="1">
+            <a:schemeClr val="accent1"/>
+          </a:lnRef>
+          <a:fillRef idx="3">
+            <a:schemeClr val="accent1"/>
+          </a:fillRef>
+          <a:effectRef idx="2">
+            <a:schemeClr val="accent1"/>
+          </a:effectRef>
+          <a:fontRef idx="minor">
+            <a:schemeClr val="lt1"/>
+          </a:fontRef>
+        </p:style>
+        <p:txBody>
+          <a:bodyPr rtlCol="0" anchor="ctr"/>
+          <a:lstStyle/>
+          <a:p>
+            <a:pPr algn="ctr"/>
+          </a:p>
+        </p:txBody>
+      </p:sp>
+      <p:sp>
+        <p:nvSpPr>
+          <p:cNvPr id="61" name="Oval 60"/>
+          <p:cNvSpPr/>
+          <p:nvPr/>
+        </p:nvSpPr>
+        <p:spPr>
+          <a:xfrm>
+            <a:off x="5692501" y="3669293"/>
+            <a:ext cx="37490" cy="37490"/>
+          </a:xfrm>
+          <a:prstGeom prst="ellipse">
+            <a:avLst/>
+          </a:prstGeom>
+          <a:solidFill>
+            <a:srgbClr val="AEB4BD"/>
+          </a:solidFill>
+          <a:ln>
+            <a:noFill/>
+          </a:ln>
+          <a:effectLst/>
+        </p:spPr>
+        <p:style>
+          <a:lnRef idx="1">
+            <a:schemeClr val="accent1"/>
+          </a:lnRef>
+          <a:fillRef idx="3">
+            <a:schemeClr val="accent1"/>
+          </a:fillRef>
+          <a:effectRef idx="2">
+            <a:schemeClr val="accent1"/>
+          </a:effectRef>
+          <a:fontRef idx="minor">
+            <a:schemeClr val="lt1"/>
+          </a:fontRef>
+        </p:style>
+        <p:txBody>
+          <a:bodyPr rtlCol="0" anchor="ctr"/>
+          <a:lstStyle/>
+          <a:p>
+            <a:pPr algn="ctr"/>
+          </a:p>
+        </p:txBody>
+      </p:sp>
+      <p:sp>
+        <p:nvSpPr>
+          <p:cNvPr id="62" name="Oval 61"/>
+          <p:cNvSpPr/>
+          <p:nvPr/>
+        </p:nvSpPr>
+        <p:spPr>
+          <a:xfrm>
+            <a:off x="6069984" y="3518612"/>
+            <a:ext cx="37490" cy="37490"/>
+          </a:xfrm>
+          <a:prstGeom prst="ellipse">
+            <a:avLst/>
+          </a:prstGeom>
+          <a:solidFill>
+            <a:srgbClr val="AEB4BD"/>
+          </a:solidFill>
+          <a:ln>
+            <a:noFill/>
+          </a:ln>
+          <a:effectLst/>
+        </p:spPr>
+        <p:style>
+          <a:lnRef idx="1">
+            <a:schemeClr val="accent1"/>
+          </a:lnRef>
+          <a:fillRef idx="3">
+            <a:schemeClr val="accent1"/>
+          </a:fillRef>
+          <a:effectRef idx="2">
+            <a:schemeClr val="accent1"/>
+          </a:effectRef>
+          <a:fontRef idx="minor">
+            <a:schemeClr val="lt1"/>
+          </a:fontRef>
+        </p:style>
+        <p:txBody>
+          <a:bodyPr rtlCol="0" anchor="ctr"/>
+          <a:lstStyle/>
+          <a:p>
+            <a:pPr algn="ctr"/>
+          </a:p>
+        </p:txBody>
+      </p:sp>
+      <p:sp>
+        <p:nvSpPr>
+          <p:cNvPr id="63" name="Oval 62"/>
+          <p:cNvSpPr/>
+          <p:nvPr/>
+        </p:nvSpPr>
+        <p:spPr>
+          <a:xfrm>
+            <a:off x="6447467" y="3546990"/>
+            <a:ext cx="37490" cy="37490"/>
+          </a:xfrm>
+          <a:prstGeom prst="ellipse">
+            <a:avLst/>
+          </a:prstGeom>
+          <a:solidFill>
+            <a:srgbClr val="AEB4BD"/>
+          </a:solidFill>
+          <a:ln>
+            <a:noFill/>
+          </a:ln>
+          <a:effectLst/>
+        </p:spPr>
+        <p:style>
+          <a:lnRef idx="1">
+            <a:schemeClr val="accent1"/>
+          </a:lnRef>
+          <a:fillRef idx="3">
+            <a:schemeClr val="accent1"/>
+          </a:fillRef>
+          <a:effectRef idx="2">
+            <a:schemeClr val="accent1"/>
+          </a:effectRef>
+          <a:fontRef idx="minor">
+            <a:schemeClr val="lt1"/>
+          </a:fontRef>
+        </p:style>
+        <p:txBody>
+          <a:bodyPr rtlCol="0" anchor="ctr"/>
+          <a:lstStyle/>
+          <a:p>
+            <a:pPr algn="ctr"/>
+          </a:p>
+        </p:txBody>
+      </p:sp>
+      <p:sp>
+        <p:nvSpPr>
+          <p:cNvPr id="64" name="Oval 63"/>
+          <p:cNvSpPr/>
+          <p:nvPr/>
+        </p:nvSpPr>
+        <p:spPr>
+          <a:xfrm>
+            <a:off x="6824950" y="3626311"/>
+            <a:ext cx="37490" cy="37490"/>
+          </a:xfrm>
+          <a:prstGeom prst="ellipse">
+            <a:avLst/>
+          </a:prstGeom>
+          <a:solidFill>
+            <a:srgbClr val="AEB4BD"/>
+          </a:solidFill>
+          <a:ln>
+            <a:noFill/>
+          </a:ln>
+          <a:effectLst/>
+        </p:spPr>
+        <p:style>
+          <a:lnRef idx="1">
+            <a:schemeClr val="accent1"/>
+          </a:lnRef>
+          <a:fillRef idx="3">
+            <a:schemeClr val="accent1"/>
+          </a:fillRef>
+          <a:effectRef idx="2">
+            <a:schemeClr val="accent1"/>
+          </a:effectRef>
+          <a:fontRef idx="minor">
+            <a:schemeClr val="lt1"/>
+          </a:fontRef>
+        </p:style>
+        <p:txBody>
+          <a:bodyPr rtlCol="0" anchor="ctr"/>
+          <a:lstStyle/>
+          <a:p>
+            <a:pPr algn="ctr"/>
+          </a:p>
+        </p:txBody>
+      </p:sp>
+      <p:sp>
+        <p:nvSpPr>
+          <p:cNvPr id="65" name="Rectangle 64"/>
+          <p:cNvSpPr/>
+          <p:nvPr/>
+        </p:nvSpPr>
+        <p:spPr>
+          <a:xfrm>
+            <a:off x="7070185" y="3255264"/>
+            <a:ext cx="1195050" cy="1347825"/>
+          </a:xfrm>
+          <a:prstGeom prst="rect">
+            <a:avLst/>
+          </a:prstGeom>
+          <a:solidFill>
+            <a:srgbClr val="F2F3F6"/>
+          </a:solidFill>
+          <a:ln>
+            <a:noFill/>
+          </a:ln>
+          <a:effectLst/>
+        </p:spPr>
+        <p:style>
+          <a:lnRef idx="1">
+            <a:schemeClr val="accent1"/>
+          </a:lnRef>
+          <a:fillRef idx="3">
+            <a:schemeClr val="accent1"/>
+          </a:fillRef>
+          <a:effectRef idx="2">
+            <a:schemeClr val="accent1"/>
+          </a:effectRef>
+          <a:fontRef idx="minor">
+            <a:schemeClr val="lt1"/>
+          </a:fontRef>
+        </p:style>
+        <p:txBody>
+          <a:bodyPr rtlCol="0" anchor="ctr"/>
+          <a:lstStyle/>
+          <a:p>
+            <a:pPr algn="ctr"/>
+          </a:p>
+        </p:txBody>
+      </p:sp>
+      <p:sp>
+        <p:nvSpPr>
+          <p:cNvPr id="66" name="TextBox 65"/>
+          <p:cNvSpPr txBox="1"/>
+          <p:nvPr/>
+        </p:nvSpPr>
+        <p:spPr>
+          <a:xfrm>
+            <a:off x="7070185" y="3017520"/>
+            <a:ext cx="1213338" cy="219456"/>
+          </a:xfrm>
+          <a:prstGeom prst="rect">
+            <a:avLst/>
+          </a:prstGeom>
+          <a:noFill/>
+        </p:spPr>
+        <p:txBody>
+          <a:bodyPr wrap="none" anchor="ctr" lIns="0" rIns="0" tIns="0" bIns="0">
+            <a:spAutoFit/>
+          </a:bodyPr>
+          <a:lstStyle/>
+          <a:p>
+            <a:pPr algn="ctr"/>
+            <a:r>
+              <a:rPr sz="1250" b="1">
+                <a:solidFill>
+                  <a:srgbClr val="6B7280"/>
+                </a:solidFill>
+                <a:latin typeface="맑은 고딕"/>
+                <a:ea typeface="맑은 고딕"/>
+              </a:rPr>
+              <a:t>Thin</a:t>
+            </a:r>
+          </a:p>
+        </p:txBody>
+      </p:sp>
+      <p:sp>
+        <p:nvSpPr>
+          <p:cNvPr id="67" name="Oval 66"/>
+          <p:cNvSpPr/>
+          <p:nvPr/>
+        </p:nvSpPr>
+        <p:spPr>
+          <a:xfrm>
+            <a:off x="7184011" y="4215241"/>
+            <a:ext cx="45720" cy="45720"/>
+          </a:xfrm>
+          <a:prstGeom prst="ellipse">
+            <a:avLst/>
+          </a:prstGeom>
+          <a:solidFill>
+            <a:srgbClr val="3A6FD0"/>
+          </a:solidFill>
+          <a:ln>
+            <a:noFill/>
+          </a:ln>
+          <a:effectLst/>
+        </p:spPr>
+        <p:style>
+          <a:lnRef idx="1">
+            <a:schemeClr val="accent1"/>
+          </a:lnRef>
+          <a:fillRef idx="3">
+            <a:schemeClr val="accent1"/>
+          </a:fillRef>
+          <a:effectRef idx="2">
+            <a:schemeClr val="accent1"/>
+          </a:effectRef>
+          <a:fontRef idx="minor">
+            <a:schemeClr val="lt1"/>
+          </a:fontRef>
+        </p:style>
+        <p:txBody>
+          <a:bodyPr rtlCol="0" anchor="ctr"/>
+          <a:lstStyle/>
+          <a:p>
+            <a:pPr algn="ctr"/>
+          </a:p>
+        </p:txBody>
+      </p:sp>
+      <p:sp>
+        <p:nvSpPr>
+          <p:cNvPr id="68" name="Oval 67"/>
+          <p:cNvSpPr/>
+          <p:nvPr/>
+        </p:nvSpPr>
+        <p:spPr>
+          <a:xfrm>
+            <a:off x="7509162" y="3673595"/>
+            <a:ext cx="45720" cy="45720"/>
+          </a:xfrm>
+          <a:prstGeom prst="ellipse">
+            <a:avLst/>
+          </a:prstGeom>
+          <a:solidFill>
+            <a:srgbClr val="3A6FD0"/>
+          </a:solidFill>
+          <a:ln>
+            <a:noFill/>
+          </a:ln>
+          <a:effectLst/>
+        </p:spPr>
+        <p:style>
+          <a:lnRef idx="1">
+            <a:schemeClr val="accent1"/>
+          </a:lnRef>
+          <a:fillRef idx="3">
+            <a:schemeClr val="accent1"/>
+          </a:fillRef>
+          <a:effectRef idx="2">
+            <a:schemeClr val="accent1"/>
+          </a:effectRef>
+          <a:fontRef idx="minor">
+            <a:schemeClr val="lt1"/>
+          </a:fontRef>
+        </p:style>
+        <p:txBody>
+          <a:bodyPr rtlCol="0" anchor="ctr"/>
+          <a:lstStyle/>
+          <a:p>
+            <a:pPr algn="ctr"/>
+          </a:p>
+        </p:txBody>
+      </p:sp>
+      <p:sp>
+        <p:nvSpPr>
+          <p:cNvPr id="69" name="Oval 68"/>
+          <p:cNvSpPr/>
+          <p:nvPr/>
+        </p:nvSpPr>
+        <p:spPr>
+          <a:xfrm>
+            <a:off x="7796875" y="3901895"/>
+            <a:ext cx="45720" cy="45720"/>
+          </a:xfrm>
+          <a:prstGeom prst="ellipse">
+            <a:avLst/>
+          </a:prstGeom>
+          <a:solidFill>
+            <a:srgbClr val="3A6FD0"/>
+          </a:solidFill>
+          <a:ln>
+            <a:noFill/>
+          </a:ln>
+          <a:effectLst/>
+        </p:spPr>
+        <p:style>
+          <a:lnRef idx="1">
+            <a:schemeClr val="accent1"/>
+          </a:lnRef>
+          <a:fillRef idx="3">
+            <a:schemeClr val="accent1"/>
+          </a:fillRef>
+          <a:effectRef idx="2">
+            <a:schemeClr val="accent1"/>
+          </a:effectRef>
+          <a:fontRef idx="minor">
+            <a:schemeClr val="lt1"/>
+          </a:fontRef>
+        </p:style>
+        <p:txBody>
+          <a:bodyPr rtlCol="0" anchor="ctr"/>
+          <a:lstStyle/>
+          <a:p>
+            <a:pPr algn="ctr"/>
+          </a:p>
+        </p:txBody>
+      </p:sp>
+      <p:sp>
+        <p:nvSpPr>
+          <p:cNvPr id="70" name="Oval 69"/>
+          <p:cNvSpPr/>
+          <p:nvPr/>
+        </p:nvSpPr>
+        <p:spPr>
+          <a:xfrm>
+            <a:off x="8106836" y="4094365"/>
+            <a:ext cx="45720" cy="45720"/>
+          </a:xfrm>
+          <a:prstGeom prst="ellipse">
+            <a:avLst/>
+          </a:prstGeom>
+          <a:solidFill>
+            <a:srgbClr val="3A6FD0"/>
+          </a:solidFill>
+          <a:ln>
+            <a:noFill/>
+          </a:ln>
+          <a:effectLst/>
+        </p:spPr>
+        <p:style>
+          <a:lnRef idx="1">
+            <a:schemeClr val="accent1"/>
+          </a:lnRef>
+          <a:fillRef idx="3">
+            <a:schemeClr val="accent1"/>
+          </a:fillRef>
+          <a:effectRef idx="2">
+            <a:schemeClr val="accent1"/>
+          </a:effectRef>
+          <a:fontRef idx="minor">
+            <a:schemeClr val="lt1"/>
+          </a:fontRef>
+        </p:style>
+        <p:txBody>
+          <a:bodyPr rtlCol="0" anchor="ctr"/>
+          <a:lstStyle/>
+          <a:p>
+            <a:pPr algn="ctr"/>
+          </a:p>
+        </p:txBody>
+      </p:sp>
+      <p:sp>
+        <p:nvSpPr>
+          <p:cNvPr id="71" name="Oval 70"/>
+          <p:cNvSpPr/>
+          <p:nvPr/>
+        </p:nvSpPr>
+        <p:spPr>
+          <a:xfrm>
+            <a:off x="7536775" y="3475074"/>
+            <a:ext cx="37490" cy="37490"/>
+          </a:xfrm>
+          <a:prstGeom prst="ellipse">
+            <a:avLst/>
+          </a:prstGeom>
+          <a:solidFill>
+            <a:srgbClr val="AEB4BD"/>
+          </a:solidFill>
+          <a:ln>
+            <a:noFill/>
+          </a:ln>
+          <a:effectLst/>
+        </p:spPr>
+        <p:style>
+          <a:lnRef idx="1">
+            <a:schemeClr val="accent1"/>
+          </a:lnRef>
+          <a:fillRef idx="3">
+            <a:schemeClr val="accent1"/>
+          </a:fillRef>
+          <a:effectRef idx="2">
+            <a:schemeClr val="accent1"/>
+          </a:effectRef>
+          <a:fontRef idx="minor">
+            <a:schemeClr val="lt1"/>
+          </a:fontRef>
+        </p:style>
+        <p:txBody>
+          <a:bodyPr rtlCol="0" anchor="ctr"/>
+          <a:lstStyle/>
+          <a:p>
+            <a:pPr algn="ctr"/>
+          </a:p>
+        </p:txBody>
+      </p:sp>
+      <p:sp>
+        <p:nvSpPr>
+          <p:cNvPr id="72" name="Rectangle 71"/>
+          <p:cNvSpPr/>
+          <p:nvPr/>
+        </p:nvSpPr>
+        <p:spPr>
+          <a:xfrm>
+            <a:off x="8283523" y="3255264"/>
+            <a:ext cx="1734312" cy="1347825"/>
+          </a:xfrm>
+          <a:prstGeom prst="rect">
+            <a:avLst/>
+          </a:prstGeom>
+          <a:solidFill>
+            <a:srgbClr val="EAF0F8"/>
+          </a:solidFill>
+          <a:ln>
+            <a:noFill/>
+          </a:ln>
+          <a:effectLst/>
+        </p:spPr>
+        <p:style>
+          <a:lnRef idx="1">
+            <a:schemeClr val="accent1"/>
+          </a:lnRef>
+          <a:fillRef idx="3">
+            <a:schemeClr val="accent1"/>
+          </a:fillRef>
+          <a:effectRef idx="2">
+            <a:schemeClr val="accent1"/>
+          </a:effectRef>
+          <a:fontRef idx="minor">
+            <a:schemeClr val="lt1"/>
+          </a:fontRef>
+        </p:style>
+        <p:txBody>
+          <a:bodyPr rtlCol="0" anchor="ctr"/>
+          <a:lstStyle/>
+          <a:p>
+            <a:pPr algn="ctr"/>
+          </a:p>
+        </p:txBody>
+      </p:sp>
+      <p:sp>
+        <p:nvSpPr>
+          <p:cNvPr id="73" name="TextBox 72"/>
+          <p:cNvSpPr txBox="1"/>
+          <p:nvPr/>
+        </p:nvSpPr>
+        <p:spPr>
+          <a:xfrm>
+            <a:off x="8283523" y="3017520"/>
+            <a:ext cx="1752600" cy="219456"/>
+          </a:xfrm>
+          <a:prstGeom prst="rect">
+            <a:avLst/>
+          </a:prstGeom>
+          <a:noFill/>
+        </p:spPr>
+        <p:txBody>
+          <a:bodyPr wrap="none" anchor="ctr" lIns="0" rIns="0" tIns="0" bIns="0">
+            <a:spAutoFit/>
+          </a:bodyPr>
+          <a:lstStyle/>
+          <a:p>
+            <a:pPr algn="ctr"/>
+            <a:r>
+              <a:rPr sz="1250" b="1">
+                <a:solidFill>
+                  <a:srgbClr val="0F1E3D"/>
+                </a:solidFill>
+                <a:latin typeface="맑은 고딕"/>
+                <a:ea typeface="맑은 고딕"/>
+              </a:rPr>
+              <a:t>Dense</a:t>
+            </a:r>
+          </a:p>
+        </p:txBody>
+      </p:sp>
+      <p:sp>
+        <p:nvSpPr>
+          <p:cNvPr id="74" name="Oval 73"/>
+          <p:cNvSpPr/>
+          <p:nvPr/>
+        </p:nvSpPr>
+        <p:spPr>
+          <a:xfrm>
+            <a:off x="8318851" y="3834736"/>
+            <a:ext cx="45720" cy="45720"/>
+          </a:xfrm>
+          <a:prstGeom prst="ellipse">
+            <a:avLst/>
+          </a:prstGeom>
+          <a:solidFill>
+            <a:srgbClr val="3A6FD0"/>
+          </a:solidFill>
+          <a:ln>
+            <a:noFill/>
+          </a:ln>
+          <a:effectLst/>
+        </p:spPr>
+        <p:style>
+          <a:lnRef idx="1">
+            <a:schemeClr val="accent1"/>
+          </a:lnRef>
+          <a:fillRef idx="3">
+            <a:schemeClr val="accent1"/>
+          </a:fillRef>
+          <a:effectRef idx="2">
+            <a:schemeClr val="accent1"/>
+          </a:effectRef>
+          <a:fontRef idx="minor">
+            <a:schemeClr val="lt1"/>
+          </a:fontRef>
+        </p:style>
+        <p:txBody>
+          <a:bodyPr rtlCol="0" anchor="ctr"/>
+          <a:lstStyle/>
+          <a:p>
+            <a:pPr algn="ctr"/>
+          </a:p>
+        </p:txBody>
+      </p:sp>
+      <p:sp>
+        <p:nvSpPr>
+          <p:cNvPr id="75" name="Oval 74"/>
+          <p:cNvSpPr/>
+          <p:nvPr/>
+        </p:nvSpPr>
+        <p:spPr>
+          <a:xfrm>
+            <a:off x="8452003" y="3612275"/>
+            <a:ext cx="45720" cy="45720"/>
+          </a:xfrm>
+          <a:prstGeom prst="ellipse">
+            <a:avLst/>
+          </a:prstGeom>
+          <a:solidFill>
+            <a:srgbClr val="3A6FD0"/>
+          </a:solidFill>
+          <a:ln>
+            <a:noFill/>
+          </a:ln>
+          <a:effectLst/>
+        </p:spPr>
+        <p:style>
+          <a:lnRef idx="1">
+            <a:schemeClr val="accent1"/>
+          </a:lnRef>
+          <a:fillRef idx="3">
+            <a:schemeClr val="accent1"/>
+          </a:fillRef>
+          <a:effectRef idx="2">
+            <a:schemeClr val="accent1"/>
+          </a:effectRef>
+          <a:fontRef idx="minor">
+            <a:schemeClr val="lt1"/>
+          </a:fontRef>
+        </p:style>
+        <p:txBody>
+          <a:bodyPr rtlCol="0" anchor="ctr"/>
+          <a:lstStyle/>
+          <a:p>
+            <a:pPr algn="ctr"/>
+          </a:p>
+        </p:txBody>
+      </p:sp>
+      <p:sp>
+        <p:nvSpPr>
+          <p:cNvPr id="76" name="Oval 75"/>
+          <p:cNvSpPr/>
+          <p:nvPr/>
+        </p:nvSpPr>
+        <p:spPr>
+          <a:xfrm>
+            <a:off x="8565741" y="3837362"/>
+            <a:ext cx="45720" cy="45720"/>
+          </a:xfrm>
+          <a:prstGeom prst="ellipse">
+            <a:avLst/>
+          </a:prstGeom>
+          <a:solidFill>
+            <a:srgbClr val="3A6FD0"/>
+          </a:solidFill>
+          <a:ln>
+            <a:noFill/>
+          </a:ln>
+          <a:effectLst/>
+        </p:spPr>
+        <p:style>
+          <a:lnRef idx="1">
+            <a:schemeClr val="accent1"/>
+          </a:lnRef>
+          <a:fillRef idx="3">
+            <a:schemeClr val="accent1"/>
+          </a:fillRef>
+          <a:effectRef idx="2">
+            <a:schemeClr val="accent1"/>
+          </a:effectRef>
+          <a:fontRef idx="minor">
+            <a:schemeClr val="lt1"/>
+          </a:fontRef>
+        </p:style>
+        <p:txBody>
+          <a:bodyPr rtlCol="0" anchor="ctr"/>
+          <a:lstStyle/>
+          <a:p>
+            <a:pPr algn="ctr"/>
+          </a:p>
+        </p:txBody>
+      </p:sp>
+      <p:sp>
+        <p:nvSpPr>
+          <p:cNvPr id="77" name="Oval 76"/>
+          <p:cNvSpPr/>
+          <p:nvPr/>
+        </p:nvSpPr>
+        <p:spPr>
+          <a:xfrm>
+            <a:off x="8671352" y="4175094"/>
+            <a:ext cx="45720" cy="45720"/>
+          </a:xfrm>
+          <a:prstGeom prst="ellipse">
+            <a:avLst/>
+          </a:prstGeom>
+          <a:solidFill>
+            <a:srgbClr val="3A6FD0"/>
+          </a:solidFill>
+          <a:ln>
+            <a:noFill/>
+          </a:ln>
+          <a:effectLst/>
+        </p:spPr>
+        <p:style>
+          <a:lnRef idx="1">
+            <a:schemeClr val="accent1"/>
+          </a:lnRef>
+          <a:fillRef idx="3">
+            <a:schemeClr val="accent1"/>
+          </a:fillRef>
+          <a:effectRef idx="2">
+            <a:schemeClr val="accent1"/>
+          </a:effectRef>
+          <a:fontRef idx="minor">
+            <a:schemeClr val="lt1"/>
+          </a:fontRef>
+        </p:style>
+        <p:txBody>
+          <a:bodyPr rtlCol="0" anchor="ctr"/>
+          <a:lstStyle/>
+          <a:p>
+            <a:pPr algn="ctr"/>
+          </a:p>
+        </p:txBody>
+      </p:sp>
+      <p:sp>
+        <p:nvSpPr>
+          <p:cNvPr id="78" name="Oval 77"/>
+          <p:cNvSpPr/>
+          <p:nvPr/>
+        </p:nvSpPr>
+        <p:spPr>
+          <a:xfrm>
+            <a:off x="8798198" y="4161494"/>
+            <a:ext cx="45720" cy="45720"/>
+          </a:xfrm>
+          <a:prstGeom prst="ellipse">
+            <a:avLst/>
+          </a:prstGeom>
+          <a:solidFill>
+            <a:srgbClr val="3A6FD0"/>
+          </a:solidFill>
+          <a:ln>
+            <a:noFill/>
+          </a:ln>
+          <a:effectLst/>
+        </p:spPr>
+        <p:style>
+          <a:lnRef idx="1">
+            <a:schemeClr val="accent1"/>
+          </a:lnRef>
+          <a:fillRef idx="3">
+            <a:schemeClr val="accent1"/>
+          </a:fillRef>
+          <a:effectRef idx="2">
+            <a:schemeClr val="accent1"/>
+          </a:effectRef>
+          <a:fontRef idx="minor">
+            <a:schemeClr val="lt1"/>
+          </a:fontRef>
+        </p:style>
+        <p:txBody>
+          <a:bodyPr rtlCol="0" anchor="ctr"/>
+          <a:lstStyle/>
+          <a:p>
+            <a:pPr algn="ctr"/>
+          </a:p>
+        </p:txBody>
+      </p:sp>
+      <p:sp>
+        <p:nvSpPr>
+          <p:cNvPr id="79" name="Oval 78"/>
+          <p:cNvSpPr/>
+          <p:nvPr/>
+        </p:nvSpPr>
+        <p:spPr>
+          <a:xfrm>
+            <a:off x="8905070" y="4051014"/>
+            <a:ext cx="45720" cy="45720"/>
+          </a:xfrm>
+          <a:prstGeom prst="ellipse">
+            <a:avLst/>
+          </a:prstGeom>
+          <a:solidFill>
+            <a:srgbClr val="3A6FD0"/>
+          </a:solidFill>
+          <a:ln>
+            <a:noFill/>
+          </a:ln>
+          <a:effectLst/>
+        </p:spPr>
+        <p:style>
+          <a:lnRef idx="1">
+            <a:schemeClr val="accent1"/>
+          </a:lnRef>
+          <a:fillRef idx="3">
+            <a:schemeClr val="accent1"/>
+          </a:fillRef>
+          <a:effectRef idx="2">
+            <a:schemeClr val="accent1"/>
+          </a:effectRef>
+          <a:fontRef idx="minor">
+            <a:schemeClr val="lt1"/>
+          </a:fontRef>
+        </p:style>
+        <p:txBody>
+          <a:bodyPr rtlCol="0" anchor="ctr"/>
+          <a:lstStyle/>
+          <a:p>
+            <a:pPr algn="ctr"/>
+          </a:p>
+        </p:txBody>
+      </p:sp>
+      <p:sp>
+        <p:nvSpPr>
+          <p:cNvPr id="80" name="Oval 79"/>
+          <p:cNvSpPr/>
+          <p:nvPr/>
+        </p:nvSpPr>
+        <p:spPr>
+          <a:xfrm>
+            <a:off x="9027176" y="4034417"/>
+            <a:ext cx="45720" cy="45720"/>
+          </a:xfrm>
+          <a:prstGeom prst="ellipse">
+            <a:avLst/>
+          </a:prstGeom>
+          <a:solidFill>
+            <a:srgbClr val="3A6FD0"/>
+          </a:solidFill>
+          <a:ln>
+            <a:noFill/>
+          </a:ln>
+          <a:effectLst/>
+        </p:spPr>
+        <p:style>
+          <a:lnRef idx="1">
+            <a:schemeClr val="accent1"/>
+          </a:lnRef>
+          <a:fillRef idx="3">
+            <a:schemeClr val="accent1"/>
+          </a:fillRef>
+          <a:effectRef idx="2">
+            <a:schemeClr val="accent1"/>
+          </a:effectRef>
+          <a:fontRef idx="minor">
+            <a:schemeClr val="lt1"/>
+          </a:fontRef>
+        </p:style>
+        <p:txBody>
+          <a:bodyPr rtlCol="0" anchor="ctr"/>
+          <a:lstStyle/>
+          <a:p>
+            <a:pPr algn="ctr"/>
+          </a:p>
+        </p:txBody>
+      </p:sp>
+      <p:sp>
+        <p:nvSpPr>
+          <p:cNvPr id="81" name="Oval 80"/>
+          <p:cNvSpPr/>
+          <p:nvPr/>
+        </p:nvSpPr>
+        <p:spPr>
+          <a:xfrm>
+            <a:off x="9145436" y="4227217"/>
+            <a:ext cx="45720" cy="45720"/>
+          </a:xfrm>
+          <a:prstGeom prst="ellipse">
+            <a:avLst/>
+          </a:prstGeom>
+          <a:solidFill>
+            <a:srgbClr val="3A6FD0"/>
+          </a:solidFill>
+          <a:ln>
+            <a:noFill/>
+          </a:ln>
+          <a:effectLst/>
+        </p:spPr>
+        <p:style>
+          <a:lnRef idx="1">
+            <a:schemeClr val="accent1"/>
+          </a:lnRef>
+          <a:fillRef idx="3">
+            <a:schemeClr val="accent1"/>
+          </a:fillRef>
+          <a:effectRef idx="2">
+            <a:schemeClr val="accent1"/>
+          </a:effectRef>
+          <a:fontRef idx="minor">
+            <a:schemeClr val="lt1"/>
+          </a:fontRef>
+        </p:style>
+        <p:txBody>
+          <a:bodyPr rtlCol="0" anchor="ctr"/>
+          <a:lstStyle/>
+          <a:p>
+            <a:pPr algn="ctr"/>
+          </a:p>
+        </p:txBody>
+      </p:sp>
+      <p:sp>
+        <p:nvSpPr>
+          <p:cNvPr id="82" name="Oval 81"/>
+          <p:cNvSpPr/>
+          <p:nvPr/>
+        </p:nvSpPr>
+        <p:spPr>
+          <a:xfrm>
+            <a:off x="9247234" y="3613960"/>
+            <a:ext cx="45720" cy="45720"/>
+          </a:xfrm>
+          <a:prstGeom prst="ellipse">
+            <a:avLst/>
+          </a:prstGeom>
+          <a:solidFill>
+            <a:srgbClr val="3A6FD0"/>
+          </a:solidFill>
+          <a:ln>
+            <a:noFill/>
+          </a:ln>
+          <a:effectLst/>
+        </p:spPr>
+        <p:style>
+          <a:lnRef idx="1">
+            <a:schemeClr val="accent1"/>
+          </a:lnRef>
+          <a:fillRef idx="3">
+            <a:schemeClr val="accent1"/>
+          </a:fillRef>
+          <a:effectRef idx="2">
+            <a:schemeClr val="accent1"/>
+          </a:effectRef>
+          <a:fontRef idx="minor">
+            <a:schemeClr val="lt1"/>
+          </a:fontRef>
+        </p:style>
+        <p:txBody>
+          <a:bodyPr rtlCol="0" anchor="ctr"/>
+          <a:lstStyle/>
+          <a:p>
+            <a:pPr algn="ctr"/>
+          </a:p>
+        </p:txBody>
+      </p:sp>
+      <p:sp>
+        <p:nvSpPr>
+          <p:cNvPr id="83" name="Oval 82"/>
+          <p:cNvSpPr/>
+          <p:nvPr/>
+        </p:nvSpPr>
+        <p:spPr>
+          <a:xfrm>
+            <a:off x="9364099" y="3718400"/>
+            <a:ext cx="45720" cy="45720"/>
+          </a:xfrm>
+          <a:prstGeom prst="ellipse">
+            <a:avLst/>
+          </a:prstGeom>
+          <a:solidFill>
+            <a:srgbClr val="3A6FD0"/>
+          </a:solidFill>
+          <a:ln>
+            <a:noFill/>
+          </a:ln>
+          <a:effectLst/>
+        </p:spPr>
+        <p:style>
+          <a:lnRef idx="1">
+            <a:schemeClr val="accent1"/>
+          </a:lnRef>
+          <a:fillRef idx="3">
+            <a:schemeClr val="accent1"/>
+          </a:fillRef>
+          <a:effectRef idx="2">
+            <a:schemeClr val="accent1"/>
+          </a:effectRef>
+          <a:fontRef idx="minor">
+            <a:schemeClr val="lt1"/>
+          </a:fontRef>
+        </p:style>
+        <p:txBody>
+          <a:bodyPr rtlCol="0" anchor="ctr"/>
+          <a:lstStyle/>
+          <a:p>
+            <a:pPr algn="ctr"/>
+          </a:p>
+        </p:txBody>
+      </p:sp>
+      <p:sp>
+        <p:nvSpPr>
+          <p:cNvPr id="84" name="Oval 83"/>
+          <p:cNvSpPr/>
+          <p:nvPr/>
+        </p:nvSpPr>
+        <p:spPr>
+          <a:xfrm>
+            <a:off x="9486315" y="3564239"/>
+            <a:ext cx="45720" cy="45720"/>
+          </a:xfrm>
+          <a:prstGeom prst="ellipse">
+            <a:avLst/>
+          </a:prstGeom>
+          <a:solidFill>
+            <a:srgbClr val="3A6FD0"/>
+          </a:solidFill>
+          <a:ln>
+            <a:noFill/>
+          </a:ln>
+          <a:effectLst/>
+        </p:spPr>
+        <p:style>
+          <a:lnRef idx="1">
+            <a:schemeClr val="accent1"/>
+          </a:lnRef>
+          <a:fillRef idx="3">
+            <a:schemeClr val="accent1"/>
+          </a:fillRef>
+          <a:effectRef idx="2">
+            <a:schemeClr val="accent1"/>
+          </a:effectRef>
+          <a:fontRef idx="minor">
+            <a:schemeClr val="lt1"/>
+          </a:fontRef>
+        </p:style>
+        <p:txBody>
+          <a:bodyPr rtlCol="0" anchor="ctr"/>
+          <a:lstStyle/>
+          <a:p>
+            <a:pPr algn="ctr"/>
+          </a:p>
+        </p:txBody>
+      </p:sp>
+      <p:sp>
+        <p:nvSpPr>
+          <p:cNvPr id="85" name="Oval 84"/>
+          <p:cNvSpPr/>
+          <p:nvPr/>
+        </p:nvSpPr>
+        <p:spPr>
+          <a:xfrm>
+            <a:off x="9599814" y="3739985"/>
+            <a:ext cx="45720" cy="45720"/>
+          </a:xfrm>
+          <a:prstGeom prst="ellipse">
+            <a:avLst/>
+          </a:prstGeom>
+          <a:solidFill>
+            <a:srgbClr val="3A6FD0"/>
+          </a:solidFill>
+          <a:ln>
+            <a:noFill/>
+          </a:ln>
+          <a:effectLst/>
+        </p:spPr>
+        <p:style>
+          <a:lnRef idx="1">
+            <a:schemeClr val="accent1"/>
+          </a:lnRef>
+          <a:fillRef idx="3">
+            <a:schemeClr val="accent1"/>
+          </a:fillRef>
+          <a:effectRef idx="2">
+            <a:schemeClr val="accent1"/>
+          </a:effectRef>
+          <a:fontRef idx="minor">
+            <a:schemeClr val="lt1"/>
+          </a:fontRef>
+        </p:style>
+        <p:txBody>
+          <a:bodyPr rtlCol="0" anchor="ctr"/>
+          <a:lstStyle/>
+          <a:p>
+            <a:pPr algn="ctr"/>
+          </a:p>
+        </p:txBody>
+      </p:sp>
+      <p:sp>
+        <p:nvSpPr>
+          <p:cNvPr id="86" name="Oval 85"/>
+          <p:cNvSpPr/>
+          <p:nvPr/>
+        </p:nvSpPr>
+        <p:spPr>
+          <a:xfrm>
+            <a:off x="9704972" y="3657911"/>
+            <a:ext cx="45720" cy="45720"/>
+          </a:xfrm>
+          <a:prstGeom prst="ellipse">
+            <a:avLst/>
+          </a:prstGeom>
+          <a:solidFill>
+            <a:srgbClr val="3A6FD0"/>
+          </a:solidFill>
+          <a:ln>
+            <a:noFill/>
+          </a:ln>
+          <a:effectLst/>
+        </p:spPr>
+        <p:style>
+          <a:lnRef idx="1">
+            <a:schemeClr val="accent1"/>
+          </a:lnRef>
+          <a:fillRef idx="3">
+            <a:schemeClr val="accent1"/>
+          </a:fillRef>
+          <a:effectRef idx="2">
+            <a:schemeClr val="accent1"/>
+          </a:effectRef>
+          <a:fontRef idx="minor">
+            <a:schemeClr val="lt1"/>
+          </a:fontRef>
+        </p:style>
+        <p:txBody>
+          <a:bodyPr rtlCol="0" anchor="ctr"/>
+          <a:lstStyle/>
+          <a:p>
+            <a:pPr algn="ctr"/>
+          </a:p>
+        </p:txBody>
+      </p:sp>
+      <p:sp>
+        <p:nvSpPr>
+          <p:cNvPr id="87" name="Oval 86"/>
+          <p:cNvSpPr/>
+          <p:nvPr/>
+        </p:nvSpPr>
+        <p:spPr>
+          <a:xfrm>
+            <a:off x="9845743" y="3983302"/>
+            <a:ext cx="45720" cy="45720"/>
+          </a:xfrm>
+          <a:prstGeom prst="ellipse">
+            <a:avLst/>
+          </a:prstGeom>
+          <a:solidFill>
+            <a:srgbClr val="3A6FD0"/>
+          </a:solidFill>
+          <a:ln>
+            <a:noFill/>
+          </a:ln>
+          <a:effectLst/>
+        </p:spPr>
+        <p:style>
+          <a:lnRef idx="1">
+            <a:schemeClr val="accent1"/>
+          </a:lnRef>
+          <a:fillRef idx="3">
+            <a:schemeClr val="accent1"/>
+          </a:fillRef>
+          <a:effectRef idx="2">
+            <a:schemeClr val="accent1"/>
+          </a:effectRef>
+          <a:fontRef idx="minor">
+            <a:schemeClr val="lt1"/>
+          </a:fontRef>
+        </p:style>
+        <p:txBody>
+          <a:bodyPr rtlCol="0" anchor="ctr"/>
+          <a:lstStyle/>
+          <a:p>
+            <a:pPr algn="ctr"/>
+          </a:p>
+        </p:txBody>
+      </p:sp>
+      <p:sp>
+        <p:nvSpPr>
+          <p:cNvPr id="88" name="Oval 87"/>
+          <p:cNvSpPr/>
+          <p:nvPr/>
+        </p:nvSpPr>
+        <p:spPr>
+          <a:xfrm>
+            <a:off x="9959264" y="4223969"/>
+            <a:ext cx="45720" cy="45720"/>
+          </a:xfrm>
+          <a:prstGeom prst="ellipse">
+            <a:avLst/>
+          </a:prstGeom>
+          <a:solidFill>
+            <a:srgbClr val="3A6FD0"/>
+          </a:solidFill>
+          <a:ln>
+            <a:noFill/>
+          </a:ln>
+          <a:effectLst/>
+        </p:spPr>
+        <p:style>
+          <a:lnRef idx="1">
+            <a:schemeClr val="accent1"/>
+          </a:lnRef>
+          <a:fillRef idx="3">
+            <a:schemeClr val="accent1"/>
+          </a:fillRef>
+          <a:effectRef idx="2">
+            <a:schemeClr val="accent1"/>
+          </a:effectRef>
+          <a:fontRef idx="minor">
+            <a:schemeClr val="lt1"/>
+          </a:fontRef>
+        </p:style>
+        <p:txBody>
+          <a:bodyPr rtlCol="0" anchor="ctr"/>
+          <a:lstStyle/>
+          <a:p>
+            <a:pPr algn="ctr"/>
+          </a:p>
+        </p:txBody>
+      </p:sp>
+      <p:sp>
+        <p:nvSpPr>
+          <p:cNvPr id="89" name="Oval 88"/>
+          <p:cNvSpPr/>
+          <p:nvPr/>
+        </p:nvSpPr>
+        <p:spPr>
+          <a:xfrm>
+            <a:off x="8404986" y="3632436"/>
+            <a:ext cx="37490" cy="37490"/>
+          </a:xfrm>
+          <a:prstGeom prst="ellipse">
+            <a:avLst/>
+          </a:prstGeom>
+          <a:solidFill>
+            <a:srgbClr val="AEB4BD"/>
+          </a:solidFill>
+          <a:ln>
+            <a:noFill/>
+          </a:ln>
+          <a:effectLst/>
+        </p:spPr>
+        <p:style>
+          <a:lnRef idx="1">
+            <a:schemeClr val="accent1"/>
+          </a:lnRef>
+          <a:fillRef idx="3">
+            <a:schemeClr val="accent1"/>
+          </a:fillRef>
+          <a:effectRef idx="2">
+            <a:schemeClr val="accent1"/>
+          </a:effectRef>
+          <a:fontRef idx="minor">
+            <a:schemeClr val="lt1"/>
+          </a:fontRef>
+        </p:style>
+        <p:txBody>
+          <a:bodyPr rtlCol="0" anchor="ctr"/>
+          <a:lstStyle/>
+          <a:p>
+            <a:pPr algn="ctr"/>
+          </a:p>
+        </p:txBody>
+      </p:sp>
+      <p:sp>
+        <p:nvSpPr>
+          <p:cNvPr id="90" name="Oval 89"/>
+          <p:cNvSpPr/>
+          <p:nvPr/>
+        </p:nvSpPr>
+        <p:spPr>
+          <a:xfrm>
+            <a:off x="8755506" y="3583361"/>
+            <a:ext cx="37490" cy="37490"/>
+          </a:xfrm>
+          <a:prstGeom prst="ellipse">
+            <a:avLst/>
+          </a:prstGeom>
+          <a:solidFill>
+            <a:srgbClr val="AEB4BD"/>
+          </a:solidFill>
+          <a:ln>
+            <a:noFill/>
+          </a:ln>
+          <a:effectLst/>
+        </p:spPr>
+        <p:style>
+          <a:lnRef idx="1">
+            <a:schemeClr val="accent1"/>
+          </a:lnRef>
+          <a:fillRef idx="3">
+            <a:schemeClr val="accent1"/>
+          </a:fillRef>
+          <a:effectRef idx="2">
+            <a:schemeClr val="accent1"/>
+          </a:effectRef>
+          <a:fontRef idx="minor">
+            <a:schemeClr val="lt1"/>
+          </a:fontRef>
+        </p:style>
+        <p:txBody>
+          <a:bodyPr rtlCol="0" anchor="ctr"/>
+          <a:lstStyle/>
+          <a:p>
+            <a:pPr algn="ctr"/>
+          </a:p>
+        </p:txBody>
+      </p:sp>
+      <p:sp>
+        <p:nvSpPr>
+          <p:cNvPr id="91" name="Oval 90"/>
+          <p:cNvSpPr/>
+          <p:nvPr/>
+        </p:nvSpPr>
+        <p:spPr>
+          <a:xfrm>
+            <a:off x="9106026" y="3611993"/>
+            <a:ext cx="37490" cy="37490"/>
+          </a:xfrm>
+          <a:prstGeom prst="ellipse">
+            <a:avLst/>
+          </a:prstGeom>
+          <a:solidFill>
+            <a:srgbClr val="AEB4BD"/>
+          </a:solidFill>
+          <a:ln>
+            <a:noFill/>
+          </a:ln>
+          <a:effectLst/>
+        </p:spPr>
+        <p:style>
+          <a:lnRef idx="1">
+            <a:schemeClr val="accent1"/>
+          </a:lnRef>
+          <a:fillRef idx="3">
+            <a:schemeClr val="accent1"/>
+          </a:fillRef>
+          <a:effectRef idx="2">
+            <a:schemeClr val="accent1"/>
+          </a:effectRef>
+          <a:fontRef idx="minor">
+            <a:schemeClr val="lt1"/>
+          </a:fontRef>
+        </p:style>
+        <p:txBody>
+          <a:bodyPr rtlCol="0" anchor="ctr"/>
+          <a:lstStyle/>
+          <a:p>
+            <a:pPr algn="ctr"/>
+          </a:p>
+        </p:txBody>
+      </p:sp>
+      <p:sp>
+        <p:nvSpPr>
+          <p:cNvPr id="92" name="Oval 91"/>
+          <p:cNvSpPr/>
+          <p:nvPr/>
+        </p:nvSpPr>
+        <p:spPr>
+          <a:xfrm>
+            <a:off x="9456546" y="3628428"/>
+            <a:ext cx="37490" cy="37490"/>
+          </a:xfrm>
+          <a:prstGeom prst="ellipse">
+            <a:avLst/>
+          </a:prstGeom>
+          <a:solidFill>
+            <a:srgbClr val="AEB4BD"/>
+          </a:solidFill>
+          <a:ln>
+            <a:noFill/>
+          </a:ln>
+          <a:effectLst/>
+        </p:spPr>
+        <p:style>
+          <a:lnRef idx="1">
+            <a:schemeClr val="accent1"/>
+          </a:lnRef>
+          <a:fillRef idx="3">
+            <a:schemeClr val="accent1"/>
+          </a:fillRef>
+          <a:effectRef idx="2">
+            <a:schemeClr val="accent1"/>
+          </a:effectRef>
+          <a:fontRef idx="minor">
+            <a:schemeClr val="lt1"/>
+          </a:fontRef>
+        </p:style>
+        <p:txBody>
+          <a:bodyPr rtlCol="0" anchor="ctr"/>
+          <a:lstStyle/>
+          <a:p>
+            <a:pPr algn="ctr"/>
+          </a:p>
+        </p:txBody>
+      </p:sp>
+      <p:sp>
+        <p:nvSpPr>
+          <p:cNvPr id="93" name="Oval 92"/>
+          <p:cNvSpPr/>
+          <p:nvPr/>
+        </p:nvSpPr>
+        <p:spPr>
+          <a:xfrm>
+            <a:off x="9807066" y="3453945"/>
+            <a:ext cx="37490" cy="37490"/>
+          </a:xfrm>
+          <a:prstGeom prst="ellipse">
+            <a:avLst/>
+          </a:prstGeom>
+          <a:solidFill>
+            <a:srgbClr val="AEB4BD"/>
+          </a:solidFill>
+          <a:ln>
+            <a:noFill/>
+          </a:ln>
+          <a:effectLst/>
+        </p:spPr>
+        <p:style>
+          <a:lnRef idx="1">
+            <a:schemeClr val="accent1"/>
+          </a:lnRef>
+          <a:fillRef idx="3">
+            <a:schemeClr val="accent1"/>
+          </a:fillRef>
+          <a:effectRef idx="2">
+            <a:schemeClr val="accent1"/>
+          </a:effectRef>
+          <a:fontRef idx="minor">
+            <a:schemeClr val="lt1"/>
+          </a:fontRef>
+        </p:style>
+        <p:txBody>
+          <a:bodyPr rtlCol="0" anchor="ctr"/>
+          <a:lstStyle/>
+          <a:p>
+            <a:pPr algn="ctr"/>
+          </a:p>
+        </p:txBody>
+      </p:sp>
+      <p:sp>
+        <p:nvSpPr>
+          <p:cNvPr id="94" name="Rectangle 93"/>
+          <p:cNvSpPr/>
+          <p:nvPr/>
+        </p:nvSpPr>
+        <p:spPr>
+          <a:xfrm>
+            <a:off x="10036123" y="3255264"/>
+            <a:ext cx="1329865" cy="1347825"/>
+          </a:xfrm>
+          <a:prstGeom prst="rect">
+            <a:avLst/>
+          </a:prstGeom>
+          <a:solidFill>
+            <a:srgbClr val="FBF4E5"/>
+          </a:solidFill>
+          <a:ln>
+            <a:noFill/>
+          </a:ln>
+          <a:effectLst/>
+        </p:spPr>
+        <p:style>
+          <a:lnRef idx="1">
+            <a:schemeClr val="accent1"/>
+          </a:lnRef>
+          <a:fillRef idx="3">
+            <a:schemeClr val="accent1"/>
+          </a:fillRef>
+          <a:effectRef idx="2">
+            <a:schemeClr val="accent1"/>
+          </a:effectRef>
+          <a:fontRef idx="minor">
+            <a:schemeClr val="lt1"/>
+          </a:fontRef>
+        </p:style>
+        <p:txBody>
+          <a:bodyPr rtlCol="0" anchor="ctr"/>
+          <a:lstStyle/>
+          <a:p>
+            <a:pPr algn="ctr"/>
+          </a:p>
+        </p:txBody>
+      </p:sp>
+      <p:sp>
+        <p:nvSpPr>
+          <p:cNvPr id="95" name="TextBox 94"/>
+          <p:cNvSpPr txBox="1"/>
+          <p:nvPr/>
+        </p:nvSpPr>
+        <p:spPr>
+          <a:xfrm>
+            <a:off x="10036123" y="3017520"/>
+            <a:ext cx="1348153" cy="219456"/>
+          </a:xfrm>
+          <a:prstGeom prst="rect">
+            <a:avLst/>
+          </a:prstGeom>
+          <a:noFill/>
+        </p:spPr>
+        <p:txBody>
+          <a:bodyPr wrap="none" anchor="ctr" lIns="0" rIns="0" tIns="0" bIns="0">
+            <a:spAutoFit/>
+          </a:bodyPr>
+          <a:lstStyle/>
+          <a:p>
+            <a:pPr algn="ctr"/>
+            <a:r>
+              <a:rPr sz="1250" b="1">
+                <a:solidFill>
+                  <a:srgbClr val="C98A22"/>
+                </a:solidFill>
+                <a:latin typeface="맑은 고딕"/>
+                <a:ea typeface="맑은 고딕"/>
+              </a:rPr>
+              <a:t>Sparse</a:t>
+            </a:r>
+          </a:p>
+        </p:txBody>
+      </p:sp>
+      <p:sp>
+        <p:nvSpPr>
+          <p:cNvPr id="96" name="Oval 95"/>
+          <p:cNvSpPr/>
+          <p:nvPr/>
+        </p:nvSpPr>
+        <p:spPr>
+          <a:xfrm>
+            <a:off x="10118814" y="3834856"/>
+            <a:ext cx="45720" cy="45720"/>
+          </a:xfrm>
+          <a:prstGeom prst="ellipse">
+            <a:avLst/>
+          </a:prstGeom>
+          <a:solidFill>
+            <a:srgbClr val="3A6FD0"/>
+          </a:solidFill>
+          <a:ln>
+            <a:noFill/>
+          </a:ln>
+          <a:effectLst/>
+        </p:spPr>
+        <p:style>
+          <a:lnRef idx="1">
+            <a:schemeClr val="accent1"/>
+          </a:lnRef>
+          <a:fillRef idx="3">
+            <a:schemeClr val="accent1"/>
+          </a:fillRef>
+          <a:effectRef idx="2">
+            <a:schemeClr val="accent1"/>
+          </a:effectRef>
+          <a:fontRef idx="minor">
+            <a:schemeClr val="lt1"/>
+          </a:fontRef>
+        </p:style>
+        <p:txBody>
+          <a:bodyPr rtlCol="0" anchor="ctr"/>
+          <a:lstStyle/>
+          <a:p>
+            <a:pPr algn="ctr"/>
+          </a:p>
+        </p:txBody>
+      </p:sp>
+      <p:sp>
+        <p:nvSpPr>
+          <p:cNvPr id="97" name="Oval 96"/>
+          <p:cNvSpPr/>
+          <p:nvPr/>
+        </p:nvSpPr>
+        <p:spPr>
+          <a:xfrm>
+            <a:off x="10311522" y="3628368"/>
+            <a:ext cx="45720" cy="45720"/>
+          </a:xfrm>
+          <a:prstGeom prst="ellipse">
+            <a:avLst/>
+          </a:prstGeom>
+          <a:solidFill>
+            <a:srgbClr val="3A6FD0"/>
+          </a:solidFill>
+          <a:ln>
+            <a:noFill/>
+          </a:ln>
+          <a:effectLst/>
+        </p:spPr>
+        <p:style>
+          <a:lnRef idx="1">
+            <a:schemeClr val="accent1"/>
+          </a:lnRef>
+          <a:fillRef idx="3">
+            <a:schemeClr val="accent1"/>
+          </a:fillRef>
+          <a:effectRef idx="2">
+            <a:schemeClr val="accent1"/>
+          </a:effectRef>
+          <a:fontRef idx="minor">
+            <a:schemeClr val="lt1"/>
+          </a:fontRef>
+        </p:style>
+        <p:txBody>
+          <a:bodyPr rtlCol="0" anchor="ctr"/>
+          <a:lstStyle/>
+          <a:p>
+            <a:pPr algn="ctr"/>
+          </a:p>
+        </p:txBody>
+      </p:sp>
+      <p:sp>
+        <p:nvSpPr>
+          <p:cNvPr id="98" name="Oval 97"/>
+          <p:cNvSpPr/>
+          <p:nvPr/>
+        </p:nvSpPr>
+        <p:spPr>
+          <a:xfrm>
+            <a:off x="10504530" y="3599422"/>
+            <a:ext cx="45720" cy="45720"/>
+          </a:xfrm>
+          <a:prstGeom prst="ellipse">
+            <a:avLst/>
+          </a:prstGeom>
+          <a:solidFill>
+            <a:srgbClr val="3A6FD0"/>
+          </a:solidFill>
+          <a:ln>
+            <a:noFill/>
+          </a:ln>
+          <a:effectLst/>
+        </p:spPr>
+        <p:style>
+          <a:lnRef idx="1">
+            <a:schemeClr val="accent1"/>
+          </a:lnRef>
+          <a:fillRef idx="3">
+            <a:schemeClr val="accent1"/>
+          </a:fillRef>
+          <a:effectRef idx="2">
+            <a:schemeClr val="accent1"/>
+          </a:effectRef>
+          <a:fontRef idx="minor">
+            <a:schemeClr val="lt1"/>
+          </a:fontRef>
+        </p:style>
+        <p:txBody>
+          <a:bodyPr rtlCol="0" anchor="ctr"/>
+          <a:lstStyle/>
+          <a:p>
+            <a:pPr algn="ctr"/>
+          </a:p>
+        </p:txBody>
+      </p:sp>
+      <p:sp>
+        <p:nvSpPr>
+          <p:cNvPr id="99" name="Oval 98"/>
+          <p:cNvSpPr/>
+          <p:nvPr/>
+        </p:nvSpPr>
+        <p:spPr>
+          <a:xfrm>
+            <a:off x="10675293" y="4246101"/>
+            <a:ext cx="45720" cy="45720"/>
+          </a:xfrm>
+          <a:prstGeom prst="ellipse">
+            <a:avLst/>
+          </a:prstGeom>
+          <a:solidFill>
+            <a:srgbClr val="3A6FD0"/>
+          </a:solidFill>
+          <a:ln>
+            <a:noFill/>
+          </a:ln>
+          <a:effectLst/>
+        </p:spPr>
+        <p:style>
+          <a:lnRef idx="1">
+            <a:schemeClr val="accent1"/>
+          </a:lnRef>
+          <a:fillRef idx="3">
+            <a:schemeClr val="accent1"/>
+          </a:fillRef>
+          <a:effectRef idx="2">
+            <a:schemeClr val="accent1"/>
+          </a:effectRef>
+          <a:fontRef idx="minor">
+            <a:schemeClr val="lt1"/>
+          </a:fontRef>
+        </p:style>
+        <p:txBody>
+          <a:bodyPr rtlCol="0" anchor="ctr"/>
+          <a:lstStyle/>
+          <a:p>
+            <a:pPr algn="ctr"/>
+          </a:p>
+        </p:txBody>
+      </p:sp>
+      <p:sp>
+        <p:nvSpPr>
+          <p:cNvPr id="100" name="Oval 99"/>
+          <p:cNvSpPr/>
+          <p:nvPr/>
+        </p:nvSpPr>
+        <p:spPr>
+          <a:xfrm>
+            <a:off x="10892349" y="3669568"/>
+            <a:ext cx="45720" cy="45720"/>
+          </a:xfrm>
+          <a:prstGeom prst="ellipse">
+            <a:avLst/>
+          </a:prstGeom>
+          <a:solidFill>
+            <a:srgbClr val="3A6FD0"/>
+          </a:solidFill>
+          <a:ln>
+            <a:noFill/>
+          </a:ln>
+          <a:effectLst/>
+        </p:spPr>
+        <p:style>
+          <a:lnRef idx="1">
+            <a:schemeClr val="accent1"/>
+          </a:lnRef>
+          <a:fillRef idx="3">
+            <a:schemeClr val="accent1"/>
+          </a:fillRef>
+          <a:effectRef idx="2">
+            <a:schemeClr val="accent1"/>
+          </a:effectRef>
+          <a:fontRef idx="minor">
+            <a:schemeClr val="lt1"/>
+          </a:fontRef>
+        </p:style>
+        <p:txBody>
+          <a:bodyPr rtlCol="0" anchor="ctr"/>
+          <a:lstStyle/>
+          <a:p>
+            <a:pPr algn="ctr"/>
+          </a:p>
+        </p:txBody>
+      </p:sp>
+      <p:sp>
+        <p:nvSpPr>
+          <p:cNvPr id="101" name="Oval 100"/>
+          <p:cNvSpPr/>
+          <p:nvPr/>
+        </p:nvSpPr>
+        <p:spPr>
+          <a:xfrm>
+            <a:off x="11078352" y="3976932"/>
+            <a:ext cx="45720" cy="45720"/>
+          </a:xfrm>
+          <a:prstGeom prst="ellipse">
+            <a:avLst/>
+          </a:prstGeom>
+          <a:solidFill>
+            <a:srgbClr val="3A6FD0"/>
+          </a:solidFill>
+          <a:ln>
+            <a:noFill/>
+          </a:ln>
+          <a:effectLst/>
+        </p:spPr>
+        <p:style>
+          <a:lnRef idx="1">
+            <a:schemeClr val="accent1"/>
+          </a:lnRef>
+          <a:fillRef idx="3">
+            <a:schemeClr val="accent1"/>
+          </a:fillRef>
+          <a:effectRef idx="2">
+            <a:schemeClr val="accent1"/>
+          </a:effectRef>
+          <a:fontRef idx="minor">
+            <a:schemeClr val="lt1"/>
+          </a:fontRef>
+        </p:style>
+        <p:txBody>
+          <a:bodyPr rtlCol="0" anchor="ctr"/>
+          <a:lstStyle/>
+          <a:p>
+            <a:pPr algn="ctr"/>
+          </a:p>
+        </p:txBody>
+      </p:sp>
+      <p:sp>
+        <p:nvSpPr>
+          <p:cNvPr id="102" name="Oval 101"/>
+          <p:cNvSpPr/>
+          <p:nvPr/>
+        </p:nvSpPr>
+        <p:spPr>
+          <a:xfrm>
+            <a:off x="11255369" y="3555945"/>
+            <a:ext cx="45720" cy="45720"/>
+          </a:xfrm>
+          <a:prstGeom prst="ellipse">
+            <a:avLst/>
+          </a:prstGeom>
+          <a:solidFill>
+            <a:srgbClr val="3A6FD0"/>
+          </a:solidFill>
+          <a:ln>
+            <a:noFill/>
+          </a:ln>
+          <a:effectLst/>
+        </p:spPr>
+        <p:style>
+          <a:lnRef idx="1">
+            <a:schemeClr val="accent1"/>
+          </a:lnRef>
+          <a:fillRef idx="3">
+            <a:schemeClr val="accent1"/>
+          </a:fillRef>
+          <a:effectRef idx="2">
+            <a:schemeClr val="accent1"/>
+          </a:effectRef>
+          <a:fontRef idx="minor">
+            <a:schemeClr val="lt1"/>
+          </a:fontRef>
+        </p:style>
+        <p:txBody>
+          <a:bodyPr rtlCol="0" anchor="ctr"/>
+          <a:lstStyle/>
+          <a:p>
+            <a:pPr algn="ctr"/>
+          </a:p>
+        </p:txBody>
+      </p:sp>
+      <p:sp>
+        <p:nvSpPr>
+          <p:cNvPr id="103" name="Oval 102"/>
+          <p:cNvSpPr/>
+          <p:nvPr/>
+        </p:nvSpPr>
+        <p:spPr>
+          <a:xfrm>
+            <a:off x="10287008" y="3481222"/>
+            <a:ext cx="37490" cy="37490"/>
+          </a:xfrm>
+          <a:prstGeom prst="ellipse">
+            <a:avLst/>
+          </a:prstGeom>
+          <a:solidFill>
+            <a:srgbClr val="AEB4BD"/>
+          </a:solidFill>
+          <a:ln>
+            <a:noFill/>
+          </a:ln>
+          <a:effectLst/>
+        </p:spPr>
+        <p:style>
+          <a:lnRef idx="1">
+            <a:schemeClr val="accent1"/>
+          </a:lnRef>
+          <a:fillRef idx="3">
+            <a:schemeClr val="accent1"/>
+          </a:fillRef>
+          <a:effectRef idx="2">
+            <a:schemeClr val="accent1"/>
+          </a:effectRef>
+          <a:fontRef idx="minor">
+            <a:schemeClr val="lt1"/>
+          </a:fontRef>
+        </p:style>
+        <p:txBody>
+          <a:bodyPr rtlCol="0" anchor="ctr"/>
+          <a:lstStyle/>
+          <a:p>
+            <a:pPr algn="ctr"/>
+          </a:p>
+        </p:txBody>
+      </p:sp>
+      <p:sp>
+        <p:nvSpPr>
+          <p:cNvPr id="104" name="Oval 103"/>
+          <p:cNvSpPr/>
+          <p:nvPr/>
+        </p:nvSpPr>
+        <p:spPr>
+          <a:xfrm>
+            <a:off x="10961085" y="3467257"/>
+            <a:ext cx="37490" cy="37490"/>
+          </a:xfrm>
+          <a:prstGeom prst="ellipse">
+            <a:avLst/>
+          </a:prstGeom>
+          <a:solidFill>
+            <a:srgbClr val="AEB4BD"/>
+          </a:solidFill>
+          <a:ln>
+            <a:noFill/>
+          </a:ln>
+          <a:effectLst/>
+        </p:spPr>
+        <p:style>
+          <a:lnRef idx="1">
+            <a:schemeClr val="accent1"/>
+          </a:lnRef>
+          <a:fillRef idx="3">
+            <a:schemeClr val="accent1"/>
+          </a:fillRef>
+          <a:effectRef idx="2">
+            <a:schemeClr val="accent1"/>
+          </a:effectRef>
+          <a:fontRef idx="minor">
+            <a:schemeClr val="lt1"/>
+          </a:fontRef>
+        </p:style>
+        <p:txBody>
+          <a:bodyPr rtlCol="0" anchor="ctr"/>
+          <a:lstStyle/>
+          <a:p>
+            <a:pPr algn="ctr"/>
+          </a:p>
+        </p:txBody>
+      </p:sp>
+      <p:sp>
+        <p:nvSpPr>
+          <p:cNvPr id="105" name="Rectangle 104"/>
+          <p:cNvSpPr/>
+          <p:nvPr/>
+        </p:nvSpPr>
+        <p:spPr>
+          <a:xfrm>
+            <a:off x="868680" y="3923690"/>
+            <a:ext cx="251460" cy="10972"/>
+          </a:xfrm>
+          <a:prstGeom prst="rect">
+            <a:avLst/>
+          </a:prstGeom>
+          <a:solidFill>
+            <a:srgbClr val="8A929E"/>
+          </a:solidFill>
+          <a:ln>
+            <a:noFill/>
+          </a:ln>
+          <a:effectLst/>
+        </p:spPr>
+        <p:style>
+          <a:lnRef idx="1">
+            <a:schemeClr val="accent1"/>
+          </a:lnRef>
+          <a:fillRef idx="3">
+            <a:schemeClr val="accent1"/>
+          </a:fillRef>
+          <a:effectRef idx="2">
+            <a:schemeClr val="accent1"/>
+          </a:effectRef>
+          <a:fontRef idx="minor">
+            <a:schemeClr val="lt1"/>
+          </a:fontRef>
+        </p:style>
+        <p:txBody>
+          <a:bodyPr rtlCol="0" anchor="ctr"/>
+          <a:lstStyle/>
+          <a:p>
+            <a:pPr algn="ctr"/>
+          </a:p>
+        </p:txBody>
+      </p:sp>
+      <p:sp>
+        <p:nvSpPr>
+          <p:cNvPr id="106" name="Rectangle 105"/>
+          <p:cNvSpPr/>
+          <p:nvPr/>
+        </p:nvSpPr>
+        <p:spPr>
+          <a:xfrm>
+            <a:off x="1325880" y="3923690"/>
+            <a:ext cx="251460" cy="10972"/>
+          </a:xfrm>
+          <a:prstGeom prst="rect">
+            <a:avLst/>
+          </a:prstGeom>
+          <a:solidFill>
+            <a:srgbClr val="8A929E"/>
+          </a:solidFill>
+          <a:ln>
+            <a:noFill/>
+          </a:ln>
+          <a:effectLst/>
+        </p:spPr>
+        <p:style>
+          <a:lnRef idx="1">
+            <a:schemeClr val="accent1"/>
+          </a:lnRef>
+          <a:fillRef idx="3">
+            <a:schemeClr val="accent1"/>
+          </a:fillRef>
+          <a:effectRef idx="2">
+            <a:schemeClr val="accent1"/>
+          </a:effectRef>
+          <a:fontRef idx="minor">
+            <a:schemeClr val="lt1"/>
+          </a:fontRef>
+        </p:style>
+        <p:txBody>
+          <a:bodyPr rtlCol="0" anchor="ctr"/>
+          <a:lstStyle/>
+          <a:p>
+            <a:pPr algn="ctr"/>
+          </a:p>
+        </p:txBody>
+      </p:sp>
+      <p:sp>
+        <p:nvSpPr>
+          <p:cNvPr id="107" name="Rectangle 106"/>
+          <p:cNvSpPr/>
+          <p:nvPr/>
+        </p:nvSpPr>
+        <p:spPr>
+          <a:xfrm>
+            <a:off x="1783080" y="3923690"/>
+            <a:ext cx="251460" cy="10972"/>
+          </a:xfrm>
+          <a:prstGeom prst="rect">
+            <a:avLst/>
+          </a:prstGeom>
+          <a:solidFill>
+            <a:srgbClr val="8A929E"/>
+          </a:solidFill>
+          <a:ln>
+            <a:noFill/>
+          </a:ln>
+          <a:effectLst/>
+        </p:spPr>
+        <p:style>
+          <a:lnRef idx="1">
+            <a:schemeClr val="accent1"/>
+          </a:lnRef>
+          <a:fillRef idx="3">
+            <a:schemeClr val="accent1"/>
+          </a:fillRef>
+          <a:effectRef idx="2">
+            <a:schemeClr val="accent1"/>
+          </a:effectRef>
+          <a:fontRef idx="minor">
+            <a:schemeClr val="lt1"/>
+          </a:fontRef>
+        </p:style>
+        <p:txBody>
+          <a:bodyPr rtlCol="0" anchor="ctr"/>
+          <a:lstStyle/>
+          <a:p>
+            <a:pPr algn="ctr"/>
+          </a:p>
+        </p:txBody>
+      </p:sp>
+      <p:sp>
+        <p:nvSpPr>
+          <p:cNvPr id="108" name="Rectangle 107"/>
+          <p:cNvSpPr/>
+          <p:nvPr/>
+        </p:nvSpPr>
+        <p:spPr>
+          <a:xfrm>
+            <a:off x="2240280" y="3923690"/>
+            <a:ext cx="251460" cy="10972"/>
+          </a:xfrm>
+          <a:prstGeom prst="rect">
+            <a:avLst/>
+          </a:prstGeom>
+          <a:solidFill>
+            <a:srgbClr val="8A929E"/>
+          </a:solidFill>
+          <a:ln>
+            <a:noFill/>
+          </a:ln>
+          <a:effectLst/>
+        </p:spPr>
+        <p:style>
+          <a:lnRef idx="1">
+            <a:schemeClr val="accent1"/>
+          </a:lnRef>
+          <a:fillRef idx="3">
+            <a:schemeClr val="accent1"/>
+          </a:fillRef>
+          <a:effectRef idx="2">
+            <a:schemeClr val="accent1"/>
+          </a:effectRef>
+          <a:fontRef idx="minor">
+            <a:schemeClr val="lt1"/>
+          </a:fontRef>
+        </p:style>
+        <p:txBody>
+          <a:bodyPr rtlCol="0" anchor="ctr"/>
+          <a:lstStyle/>
+          <a:p>
+            <a:pPr algn="ctr"/>
+          </a:p>
+        </p:txBody>
+      </p:sp>
+      <p:sp>
+        <p:nvSpPr>
+          <p:cNvPr id="109" name="Rectangle 108"/>
+          <p:cNvSpPr/>
+          <p:nvPr/>
+        </p:nvSpPr>
+        <p:spPr>
+          <a:xfrm>
+            <a:off x="2697480" y="3923690"/>
+            <a:ext cx="251460" cy="10972"/>
+          </a:xfrm>
+          <a:prstGeom prst="rect">
+            <a:avLst/>
+          </a:prstGeom>
+          <a:solidFill>
+            <a:srgbClr val="8A929E"/>
+          </a:solidFill>
+          <a:ln>
+            <a:noFill/>
+          </a:ln>
+          <a:effectLst/>
+        </p:spPr>
+        <p:style>
+          <a:lnRef idx="1">
+            <a:schemeClr val="accent1"/>
+          </a:lnRef>
+          <a:fillRef idx="3">
+            <a:schemeClr val="accent1"/>
+          </a:fillRef>
+          <a:effectRef idx="2">
+            <a:schemeClr val="accent1"/>
+          </a:effectRef>
+          <a:fontRef idx="minor">
+            <a:schemeClr val="lt1"/>
+          </a:fontRef>
+        </p:style>
+        <p:txBody>
+          <a:bodyPr rtlCol="0" anchor="ctr"/>
+          <a:lstStyle/>
+          <a:p>
+            <a:pPr algn="ctr"/>
+          </a:p>
+        </p:txBody>
+      </p:sp>
+      <p:sp>
+        <p:nvSpPr>
+          <p:cNvPr id="110" name="Rectangle 109"/>
+          <p:cNvSpPr/>
+          <p:nvPr/>
+        </p:nvSpPr>
+        <p:spPr>
+          <a:xfrm>
+            <a:off x="3154680" y="3923690"/>
+            <a:ext cx="251460" cy="10972"/>
+          </a:xfrm>
+          <a:prstGeom prst="rect">
+            <a:avLst/>
+          </a:prstGeom>
+          <a:solidFill>
+            <a:srgbClr val="8A929E"/>
+          </a:solidFill>
+          <a:ln>
+            <a:noFill/>
+          </a:ln>
+          <a:effectLst/>
+        </p:spPr>
+        <p:style>
+          <a:lnRef idx="1">
+            <a:schemeClr val="accent1"/>
+          </a:lnRef>
+          <a:fillRef idx="3">
+            <a:schemeClr val="accent1"/>
+          </a:fillRef>
+          <a:effectRef idx="2">
+            <a:schemeClr val="accent1"/>
+          </a:effectRef>
+          <a:fontRef idx="minor">
+            <a:schemeClr val="lt1"/>
+          </a:fontRef>
+        </p:style>
+        <p:txBody>
+          <a:bodyPr rtlCol="0" anchor="ctr"/>
+          <a:lstStyle/>
+          <a:p>
+            <a:pPr algn="ctr"/>
+          </a:p>
+        </p:txBody>
+      </p:sp>
+      <p:sp>
+        <p:nvSpPr>
+          <p:cNvPr id="111" name="Rectangle 110"/>
+          <p:cNvSpPr/>
+          <p:nvPr/>
+        </p:nvSpPr>
+        <p:spPr>
+          <a:xfrm>
+            <a:off x="3611880" y="3923690"/>
+            <a:ext cx="251460" cy="10972"/>
+          </a:xfrm>
+          <a:prstGeom prst="rect">
+            <a:avLst/>
+          </a:prstGeom>
+          <a:solidFill>
+            <a:srgbClr val="8A929E"/>
+          </a:solidFill>
+          <a:ln>
+            <a:noFill/>
+          </a:ln>
+          <a:effectLst/>
+        </p:spPr>
+        <p:style>
+          <a:lnRef idx="1">
+            <a:schemeClr val="accent1"/>
+          </a:lnRef>
+          <a:fillRef idx="3">
+            <a:schemeClr val="accent1"/>
+          </a:fillRef>
+          <a:effectRef idx="2">
+            <a:schemeClr val="accent1"/>
+          </a:effectRef>
+          <a:fontRef idx="minor">
+            <a:schemeClr val="lt1"/>
+          </a:fontRef>
+        </p:style>
+        <p:txBody>
+          <a:bodyPr rtlCol="0" anchor="ctr"/>
+          <a:lstStyle/>
+          <a:p>
+            <a:pPr algn="ctr"/>
+          </a:p>
+        </p:txBody>
+      </p:sp>
+      <p:sp>
+        <p:nvSpPr>
+          <p:cNvPr id="112" name="Rectangle 111"/>
+          <p:cNvSpPr/>
+          <p:nvPr/>
+        </p:nvSpPr>
+        <p:spPr>
+          <a:xfrm>
+            <a:off x="4069080" y="3923690"/>
+            <a:ext cx="251460" cy="10972"/>
+          </a:xfrm>
+          <a:prstGeom prst="rect">
+            <a:avLst/>
+          </a:prstGeom>
+          <a:solidFill>
+            <a:srgbClr val="8A929E"/>
+          </a:solidFill>
+          <a:ln>
+            <a:noFill/>
+          </a:ln>
+          <a:effectLst/>
+        </p:spPr>
+        <p:style>
+          <a:lnRef idx="1">
+            <a:schemeClr val="accent1"/>
+          </a:lnRef>
+          <a:fillRef idx="3">
+            <a:schemeClr val="accent1"/>
+          </a:fillRef>
+          <a:effectRef idx="2">
+            <a:schemeClr val="accent1"/>
+          </a:effectRef>
+          <a:fontRef idx="minor">
+            <a:schemeClr val="lt1"/>
+          </a:fontRef>
+        </p:style>
+        <p:txBody>
+          <a:bodyPr rtlCol="0" anchor="ctr"/>
+          <a:lstStyle/>
+          <a:p>
+            <a:pPr algn="ctr"/>
+          </a:p>
+        </p:txBody>
+      </p:sp>
+      <p:sp>
+        <p:nvSpPr>
+          <p:cNvPr id="113" name="Rectangle 112"/>
+          <p:cNvSpPr/>
+          <p:nvPr/>
+        </p:nvSpPr>
+        <p:spPr>
+          <a:xfrm>
+            <a:off x="4526280" y="3923690"/>
+            <a:ext cx="251460" cy="10972"/>
+          </a:xfrm>
+          <a:prstGeom prst="rect">
+            <a:avLst/>
+          </a:prstGeom>
+          <a:solidFill>
+            <a:srgbClr val="8A929E"/>
+          </a:solidFill>
+          <a:ln>
+            <a:noFill/>
+          </a:ln>
+          <a:effectLst/>
+        </p:spPr>
+        <p:style>
+          <a:lnRef idx="1">
+            <a:schemeClr val="accent1"/>
+          </a:lnRef>
+          <a:fillRef idx="3">
+            <a:schemeClr val="accent1"/>
+          </a:fillRef>
+          <a:effectRef idx="2">
+            <a:schemeClr val="accent1"/>
+          </a:effectRef>
+          <a:fontRef idx="minor">
+            <a:schemeClr val="lt1"/>
+          </a:fontRef>
+        </p:style>
+        <p:txBody>
+          <a:bodyPr rtlCol="0" anchor="ctr"/>
+          <a:lstStyle/>
+          <a:p>
+            <a:pPr algn="ctr"/>
+          </a:p>
+        </p:txBody>
+      </p:sp>
+      <p:sp>
+        <p:nvSpPr>
+          <p:cNvPr id="114" name="Rectangle 113"/>
+          <p:cNvSpPr/>
+          <p:nvPr/>
+        </p:nvSpPr>
+        <p:spPr>
+          <a:xfrm>
+            <a:off x="4983480" y="3923690"/>
+            <a:ext cx="251460" cy="10972"/>
+          </a:xfrm>
+          <a:prstGeom prst="rect">
+            <a:avLst/>
+          </a:prstGeom>
+          <a:solidFill>
+            <a:srgbClr val="8A929E"/>
+          </a:solidFill>
+          <a:ln>
+            <a:noFill/>
+          </a:ln>
+          <a:effectLst/>
+        </p:spPr>
+        <p:style>
+          <a:lnRef idx="1">
+            <a:schemeClr val="accent1"/>
+          </a:lnRef>
+          <a:fillRef idx="3">
+            <a:schemeClr val="accent1"/>
+          </a:fillRef>
+          <a:effectRef idx="2">
+            <a:schemeClr val="accent1"/>
+          </a:effectRef>
+          <a:fontRef idx="minor">
+            <a:schemeClr val="lt1"/>
+          </a:fontRef>
+        </p:style>
+        <p:txBody>
+          <a:bodyPr rtlCol="0" anchor="ctr"/>
+          <a:lstStyle/>
+          <a:p>
+            <a:pPr algn="ctr"/>
+          </a:p>
+        </p:txBody>
+      </p:sp>
+      <p:sp>
+        <p:nvSpPr>
+          <p:cNvPr id="115" name="Rectangle 114"/>
+          <p:cNvSpPr/>
+          <p:nvPr/>
+        </p:nvSpPr>
+        <p:spPr>
+          <a:xfrm>
+            <a:off x="5440680" y="3923690"/>
+            <a:ext cx="251460" cy="10972"/>
+          </a:xfrm>
+          <a:prstGeom prst="rect">
+            <a:avLst/>
+          </a:prstGeom>
+          <a:solidFill>
+            <a:srgbClr val="8A929E"/>
+          </a:solidFill>
+          <a:ln>
+            <a:noFill/>
+          </a:ln>
+          <a:effectLst/>
+        </p:spPr>
+        <p:style>
+          <a:lnRef idx="1">
+            <a:schemeClr val="accent1"/>
+          </a:lnRef>
+          <a:fillRef idx="3">
+            <a:schemeClr val="accent1"/>
+          </a:fillRef>
+          <a:effectRef idx="2">
+            <a:schemeClr val="accent1"/>
+          </a:effectRef>
+          <a:fontRef idx="minor">
+            <a:schemeClr val="lt1"/>
+          </a:fontRef>
+        </p:style>
+        <p:txBody>
+          <a:bodyPr rtlCol="0" anchor="ctr"/>
+          <a:lstStyle/>
+          <a:p>
+            <a:pPr algn="ctr"/>
+          </a:p>
+        </p:txBody>
+      </p:sp>
+      <p:sp>
+        <p:nvSpPr>
+          <p:cNvPr id="116" name="Rectangle 115"/>
+          <p:cNvSpPr/>
+          <p:nvPr/>
+        </p:nvSpPr>
+        <p:spPr>
+          <a:xfrm>
+            <a:off x="5897880" y="3923690"/>
+            <a:ext cx="251460" cy="10972"/>
+          </a:xfrm>
+          <a:prstGeom prst="rect">
+            <a:avLst/>
+          </a:prstGeom>
+          <a:solidFill>
+            <a:srgbClr val="8A929E"/>
+          </a:solidFill>
+          <a:ln>
+            <a:noFill/>
+          </a:ln>
+          <a:effectLst/>
+        </p:spPr>
+        <p:style>
+          <a:lnRef idx="1">
+            <a:schemeClr val="accent1"/>
+          </a:lnRef>
+          <a:fillRef idx="3">
+            <a:schemeClr val="accent1"/>
+          </a:fillRef>
+          <a:effectRef idx="2">
+            <a:schemeClr val="accent1"/>
+          </a:effectRef>
+          <a:fontRef idx="minor">
+            <a:schemeClr val="lt1"/>
+          </a:fontRef>
+        </p:style>
+        <p:txBody>
+          <a:bodyPr rtlCol="0" anchor="ctr"/>
+          <a:lstStyle/>
+          <a:p>
+            <a:pPr algn="ctr"/>
+          </a:p>
+        </p:txBody>
+      </p:sp>
+      <p:sp>
+        <p:nvSpPr>
+          <p:cNvPr id="117" name="Rectangle 116"/>
+          <p:cNvSpPr/>
+          <p:nvPr/>
+        </p:nvSpPr>
+        <p:spPr>
+          <a:xfrm>
+            <a:off x="6355080" y="3923690"/>
+            <a:ext cx="251460" cy="10972"/>
+          </a:xfrm>
+          <a:prstGeom prst="rect">
+            <a:avLst/>
+          </a:prstGeom>
+          <a:solidFill>
+            <a:srgbClr val="8A929E"/>
+          </a:solidFill>
+          <a:ln>
+            <a:noFill/>
+          </a:ln>
+          <a:effectLst/>
+        </p:spPr>
+        <p:style>
+          <a:lnRef idx="1">
+            <a:schemeClr val="accent1"/>
+          </a:lnRef>
+          <a:fillRef idx="3">
+            <a:schemeClr val="accent1"/>
+          </a:fillRef>
+          <a:effectRef idx="2">
+            <a:schemeClr val="accent1"/>
+          </a:effectRef>
+          <a:fontRef idx="minor">
+            <a:schemeClr val="lt1"/>
+          </a:fontRef>
+        </p:style>
+        <p:txBody>
+          <a:bodyPr rtlCol="0" anchor="ctr"/>
+          <a:lstStyle/>
+          <a:p>
+            <a:pPr algn="ctr"/>
+          </a:p>
+        </p:txBody>
+      </p:sp>
+      <p:sp>
+        <p:nvSpPr>
+          <p:cNvPr id="118" name="Rectangle 117"/>
+          <p:cNvSpPr/>
+          <p:nvPr/>
+        </p:nvSpPr>
+        <p:spPr>
+          <a:xfrm>
+            <a:off x="6812280" y="3923690"/>
+            <a:ext cx="251460" cy="10972"/>
+          </a:xfrm>
+          <a:prstGeom prst="rect">
+            <a:avLst/>
+          </a:prstGeom>
+          <a:solidFill>
+            <a:srgbClr val="8A929E"/>
+          </a:solidFill>
+          <a:ln>
+            <a:noFill/>
+          </a:ln>
+          <a:effectLst/>
+        </p:spPr>
+        <p:style>
+          <a:lnRef idx="1">
+            <a:schemeClr val="accent1"/>
+          </a:lnRef>
+          <a:fillRef idx="3">
+            <a:schemeClr val="accent1"/>
+          </a:fillRef>
+          <a:effectRef idx="2">
+            <a:schemeClr val="accent1"/>
+          </a:effectRef>
+          <a:fontRef idx="minor">
+            <a:schemeClr val="lt1"/>
+          </a:fontRef>
+        </p:style>
+        <p:txBody>
+          <a:bodyPr rtlCol="0" anchor="ctr"/>
+          <a:lstStyle/>
+          <a:p>
+            <a:pPr algn="ctr"/>
+          </a:p>
+        </p:txBody>
+      </p:sp>
+      <p:sp>
+        <p:nvSpPr>
+          <p:cNvPr id="119" name="Rectangle 118"/>
+          <p:cNvSpPr/>
+          <p:nvPr/>
+        </p:nvSpPr>
+        <p:spPr>
+          <a:xfrm>
+            <a:off x="7269480" y="3923690"/>
+            <a:ext cx="251460" cy="10972"/>
+          </a:xfrm>
+          <a:prstGeom prst="rect">
+            <a:avLst/>
+          </a:prstGeom>
+          <a:solidFill>
+            <a:srgbClr val="8A929E"/>
+          </a:solidFill>
+          <a:ln>
+            <a:noFill/>
+          </a:ln>
+          <a:effectLst/>
+        </p:spPr>
+        <p:style>
+          <a:lnRef idx="1">
+            <a:schemeClr val="accent1"/>
+          </a:lnRef>
+          <a:fillRef idx="3">
+            <a:schemeClr val="accent1"/>
+          </a:fillRef>
+          <a:effectRef idx="2">
+            <a:schemeClr val="accent1"/>
+          </a:effectRef>
+          <a:fontRef idx="minor">
+            <a:schemeClr val="lt1"/>
+          </a:fontRef>
+        </p:style>
+        <p:txBody>
+          <a:bodyPr rtlCol="0" anchor="ctr"/>
+          <a:lstStyle/>
+          <a:p>
+            <a:pPr algn="ctr"/>
+          </a:p>
+        </p:txBody>
+      </p:sp>
+      <p:sp>
+        <p:nvSpPr>
+          <p:cNvPr id="120" name="Rectangle 119"/>
+          <p:cNvSpPr/>
+          <p:nvPr/>
+        </p:nvSpPr>
+        <p:spPr>
+          <a:xfrm>
+            <a:off x="7726680" y="3923690"/>
+            <a:ext cx="251460" cy="10972"/>
+          </a:xfrm>
+          <a:prstGeom prst="rect">
+            <a:avLst/>
+          </a:prstGeom>
+          <a:solidFill>
+            <a:srgbClr val="8A929E"/>
+          </a:solidFill>
+          <a:ln>
+            <a:noFill/>
+          </a:ln>
+          <a:effectLst/>
+        </p:spPr>
+        <p:style>
+          <a:lnRef idx="1">
+            <a:schemeClr val="accent1"/>
+          </a:lnRef>
+          <a:fillRef idx="3">
+            <a:schemeClr val="accent1"/>
+          </a:fillRef>
+          <a:effectRef idx="2">
+            <a:schemeClr val="accent1"/>
+          </a:effectRef>
+          <a:fontRef idx="minor">
+            <a:schemeClr val="lt1"/>
+          </a:fontRef>
+        </p:style>
+        <p:txBody>
+          <a:bodyPr rtlCol="0" anchor="ctr"/>
+          <a:lstStyle/>
+          <a:p>
+            <a:pPr algn="ctr"/>
+          </a:p>
+        </p:txBody>
+      </p:sp>
+      <p:sp>
+        <p:nvSpPr>
+          <p:cNvPr id="121" name="Rectangle 120"/>
+          <p:cNvSpPr/>
+          <p:nvPr/>
+        </p:nvSpPr>
+        <p:spPr>
+          <a:xfrm>
+            <a:off x="8183880" y="3923690"/>
+            <a:ext cx="251460" cy="10972"/>
+          </a:xfrm>
+          <a:prstGeom prst="rect">
+            <a:avLst/>
+          </a:prstGeom>
+          <a:solidFill>
+            <a:srgbClr val="8A929E"/>
+          </a:solidFill>
+          <a:ln>
+            <a:noFill/>
+          </a:ln>
+          <a:effectLst/>
+        </p:spPr>
+        <p:style>
+          <a:lnRef idx="1">
+            <a:schemeClr val="accent1"/>
+          </a:lnRef>
+          <a:fillRef idx="3">
+            <a:schemeClr val="accent1"/>
+          </a:fillRef>
+          <a:effectRef idx="2">
+            <a:schemeClr val="accent1"/>
+          </a:effectRef>
+          <a:fontRef idx="minor">
+            <a:schemeClr val="lt1"/>
+          </a:fontRef>
+        </p:style>
+        <p:txBody>
+          <a:bodyPr rtlCol="0" anchor="ctr"/>
+          <a:lstStyle/>
+          <a:p>
+            <a:pPr algn="ctr"/>
+          </a:p>
+        </p:txBody>
+      </p:sp>
+      <p:sp>
+        <p:nvSpPr>
+          <p:cNvPr id="122" name="Rectangle 121"/>
+          <p:cNvSpPr/>
+          <p:nvPr/>
+        </p:nvSpPr>
+        <p:spPr>
+          <a:xfrm>
+            <a:off x="8641080" y="3923690"/>
+            <a:ext cx="251460" cy="10972"/>
+          </a:xfrm>
+          <a:prstGeom prst="rect">
+            <a:avLst/>
+          </a:prstGeom>
+          <a:solidFill>
+            <a:srgbClr val="8A929E"/>
+          </a:solidFill>
+          <a:ln>
+            <a:noFill/>
+          </a:ln>
+          <a:effectLst/>
+        </p:spPr>
+        <p:style>
+          <a:lnRef idx="1">
+            <a:schemeClr val="accent1"/>
+          </a:lnRef>
+          <a:fillRef idx="3">
+            <a:schemeClr val="accent1"/>
+          </a:fillRef>
+          <a:effectRef idx="2">
+            <a:schemeClr val="accent1"/>
+          </a:effectRef>
+          <a:fontRef idx="minor">
+            <a:schemeClr val="lt1"/>
+          </a:fontRef>
+        </p:style>
+        <p:txBody>
+          <a:bodyPr rtlCol="0" anchor="ctr"/>
+          <a:lstStyle/>
+          <a:p>
+            <a:pPr algn="ctr"/>
+          </a:p>
+        </p:txBody>
+      </p:sp>
+      <p:sp>
+        <p:nvSpPr>
+          <p:cNvPr id="123" name="Rectangle 122"/>
+          <p:cNvSpPr/>
+          <p:nvPr/>
+        </p:nvSpPr>
+        <p:spPr>
+          <a:xfrm>
+            <a:off x="9098280" y="3923690"/>
+            <a:ext cx="251460" cy="10972"/>
+          </a:xfrm>
+          <a:prstGeom prst="rect">
+            <a:avLst/>
+          </a:prstGeom>
+          <a:solidFill>
+            <a:srgbClr val="8A929E"/>
+          </a:solidFill>
+          <a:ln>
+            <a:noFill/>
+          </a:ln>
+          <a:effectLst/>
+        </p:spPr>
+        <p:style>
+          <a:lnRef idx="1">
+            <a:schemeClr val="accent1"/>
+          </a:lnRef>
+          <a:fillRef idx="3">
+            <a:schemeClr val="accent1"/>
+          </a:fillRef>
+          <a:effectRef idx="2">
+            <a:schemeClr val="accent1"/>
+          </a:effectRef>
+          <a:fontRef idx="minor">
+            <a:schemeClr val="lt1"/>
+          </a:fontRef>
+        </p:style>
+        <p:txBody>
+          <a:bodyPr rtlCol="0" anchor="ctr"/>
+          <a:lstStyle/>
+          <a:p>
+            <a:pPr algn="ctr"/>
+          </a:p>
+        </p:txBody>
+      </p:sp>
+      <p:sp>
+        <p:nvSpPr>
+          <p:cNvPr id="124" name="Rectangle 123"/>
+          <p:cNvSpPr/>
+          <p:nvPr/>
+        </p:nvSpPr>
+        <p:spPr>
+          <a:xfrm>
+            <a:off x="9555480" y="3923690"/>
+            <a:ext cx="251460" cy="10972"/>
+          </a:xfrm>
+          <a:prstGeom prst="rect">
+            <a:avLst/>
+          </a:prstGeom>
+          <a:solidFill>
+            <a:srgbClr val="8A929E"/>
+          </a:solidFill>
+          <a:ln>
+            <a:noFill/>
+          </a:ln>
+          <a:effectLst/>
+        </p:spPr>
+        <p:style>
+          <a:lnRef idx="1">
+            <a:schemeClr val="accent1"/>
+          </a:lnRef>
+          <a:fillRef idx="3">
+            <a:schemeClr val="accent1"/>
+          </a:fillRef>
+          <a:effectRef idx="2">
+            <a:schemeClr val="accent1"/>
+          </a:effectRef>
+          <a:fontRef idx="minor">
+            <a:schemeClr val="lt1"/>
+          </a:fontRef>
+        </p:style>
+        <p:txBody>
+          <a:bodyPr rtlCol="0" anchor="ctr"/>
+          <a:lstStyle/>
+          <a:p>
+            <a:pPr algn="ctr"/>
+          </a:p>
+        </p:txBody>
+      </p:sp>
+      <p:sp>
+        <p:nvSpPr>
+          <p:cNvPr id="125" name="Rectangle 124"/>
+          <p:cNvSpPr/>
+          <p:nvPr/>
+        </p:nvSpPr>
+        <p:spPr>
+          <a:xfrm>
+            <a:off x="10012680" y="3923690"/>
+            <a:ext cx="251460" cy="10972"/>
+          </a:xfrm>
+          <a:prstGeom prst="rect">
+            <a:avLst/>
+          </a:prstGeom>
+          <a:solidFill>
+            <a:srgbClr val="8A929E"/>
+          </a:solidFill>
+          <a:ln>
+            <a:noFill/>
+          </a:ln>
+          <a:effectLst/>
+        </p:spPr>
+        <p:style>
+          <a:lnRef idx="1">
+            <a:schemeClr val="accent1"/>
+          </a:lnRef>
+          <a:fillRef idx="3">
+            <a:schemeClr val="accent1"/>
+          </a:fillRef>
+          <a:effectRef idx="2">
+            <a:schemeClr val="accent1"/>
+          </a:effectRef>
+          <a:fontRef idx="minor">
+            <a:schemeClr val="lt1"/>
+          </a:fontRef>
+        </p:style>
+        <p:txBody>
+          <a:bodyPr rtlCol="0" anchor="ctr"/>
+          <a:lstStyle/>
+          <a:p>
+            <a:pPr algn="ctr"/>
+          </a:p>
+        </p:txBody>
+      </p:sp>
+      <p:sp>
+        <p:nvSpPr>
+          <p:cNvPr id="126" name="Rectangle 125"/>
+          <p:cNvSpPr/>
+          <p:nvPr/>
+        </p:nvSpPr>
+        <p:spPr>
+          <a:xfrm>
+            <a:off x="10469880" y="3923690"/>
+            <a:ext cx="251460" cy="10972"/>
+          </a:xfrm>
+          <a:prstGeom prst="rect">
+            <a:avLst/>
+          </a:prstGeom>
+          <a:solidFill>
+            <a:srgbClr val="8A929E"/>
+          </a:solidFill>
+          <a:ln>
+            <a:noFill/>
+          </a:ln>
+          <a:effectLst/>
+        </p:spPr>
+        <p:style>
+          <a:lnRef idx="1">
+            <a:schemeClr val="accent1"/>
+          </a:lnRef>
+          <a:fillRef idx="3">
+            <a:schemeClr val="accent1"/>
+          </a:fillRef>
+          <a:effectRef idx="2">
+            <a:schemeClr val="accent1"/>
+          </a:effectRef>
+          <a:fontRef idx="minor">
+            <a:schemeClr val="lt1"/>
+          </a:fontRef>
+        </p:style>
+        <p:txBody>
+          <a:bodyPr rtlCol="0" anchor="ctr"/>
+          <a:lstStyle/>
+          <a:p>
+            <a:pPr algn="ctr"/>
+          </a:p>
+        </p:txBody>
+      </p:sp>
+      <p:sp>
+        <p:nvSpPr>
+          <p:cNvPr id="127" name="Rectangle 126"/>
+          <p:cNvSpPr/>
+          <p:nvPr/>
+        </p:nvSpPr>
+        <p:spPr>
+          <a:xfrm>
+            <a:off x="10927080" y="3923690"/>
+            <a:ext cx="251460" cy="10972"/>
+          </a:xfrm>
+          <a:prstGeom prst="rect">
+            <a:avLst/>
+          </a:prstGeom>
+          <a:solidFill>
+            <a:srgbClr val="8A929E"/>
+          </a:solidFill>
+          <a:ln>
+            <a:noFill/>
+          </a:ln>
+          <a:effectLst/>
+        </p:spPr>
+        <p:style>
+          <a:lnRef idx="1">
+            <a:schemeClr val="accent1"/>
+          </a:lnRef>
+          <a:fillRef idx="3">
+            <a:schemeClr val="accent1"/>
+          </a:fillRef>
+          <a:effectRef idx="2">
+            <a:schemeClr val="accent1"/>
+          </a:effectRef>
+          <a:fontRef idx="minor">
+            <a:schemeClr val="lt1"/>
+          </a:fontRef>
+        </p:style>
+        <p:txBody>
+          <a:bodyPr rtlCol="0" anchor="ctr"/>
+          <a:lstStyle/>
+          <a:p>
+            <a:pPr algn="ctr"/>
+          </a:p>
+        </p:txBody>
+      </p:sp>
+      <p:sp>
+        <p:nvSpPr>
+          <p:cNvPr id="128" name="TextBox 127"/>
+          <p:cNvSpPr txBox="1"/>
+          <p:nvPr/>
+        </p:nvSpPr>
+        <p:spPr>
+          <a:xfrm>
+            <a:off x="777240" y="4676241"/>
+            <a:ext cx="10698480" cy="219456"/>
+          </a:xfrm>
+          <a:prstGeom prst="rect">
+            <a:avLst/>
+          </a:prstGeom>
+          <a:noFill/>
+        </p:spPr>
+        <p:txBody>
+          <a:bodyPr wrap="square" anchor="ctr" lIns="0" rIns="0" tIns="0" bIns="0">
+            <a:spAutoFit/>
+          </a:bodyPr>
+          <a:lstStyle/>
+          <a:p>
+            <a:pPr algn="l"/>
+            <a:r>
+              <a:rPr sz="1300" b="1">
+                <a:solidFill>
+                  <a:srgbClr val="0F1E3D"/>
+                </a:solidFill>
+                <a:latin typeface="맑은 고딕"/>
+                <a:ea typeface="맑은 고딕"/>
+              </a:rPr>
+              <a:t>(b) Measurement noise  —  one type per chart</a:t>
+            </a:r>
+          </a:p>
+        </p:txBody>
+      </p:sp>
+      <p:sp>
+        <p:nvSpPr>
+          <p:cNvPr id="129" name="Rectangle 128"/>
+          <p:cNvSpPr/>
+          <p:nvPr/>
+        </p:nvSpPr>
+        <p:spPr>
+          <a:xfrm>
+            <a:off x="777240" y="4932273"/>
+            <a:ext cx="3383280" cy="965607"/>
+          </a:xfrm>
+          <a:prstGeom prst="rect">
+            <a:avLst/>
+          </a:prstGeom>
+          <a:solidFill>
+            <a:srgbClr val="FCFDFE"/>
           </a:solidFill>
           <a:ln w="12700">
             <a:solidFill>
@@ -4215,33 +9567,2429 @@
           </a:p>
         </p:txBody>
       </p:sp>
-      <p:pic>
-        <p:nvPicPr>
-          <p:cNvPr id="7" name="Picture 6" descr="p3_deck_baseline.png"/>
-          <p:cNvPicPr>
-            <a:picLocks noChangeAspect="1"/>
-          </p:cNvPicPr>
-          <p:nvPr/>
-        </p:nvPicPr>
-        <p:blipFill>
-          <a:blip r:embed="rId2"/>
-          <a:stretch>
-            <a:fillRect/>
-          </a:stretch>
-        </p:blipFill>
-        <p:spPr>
-          <a:xfrm>
-            <a:off x="1644513" y="2706624"/>
-            <a:ext cx="8963933" cy="3236976"/>
+      <p:sp>
+        <p:nvSpPr>
+          <p:cNvPr id="130" name="TextBox 129"/>
+          <p:cNvSpPr txBox="1"/>
+          <p:nvPr/>
+        </p:nvSpPr>
+        <p:spPr>
+          <a:xfrm>
+            <a:off x="777240" y="4959705"/>
+            <a:ext cx="3383280" cy="201168"/>
           </a:xfrm>
           <a:prstGeom prst="rect">
             <a:avLst/>
           </a:prstGeom>
-        </p:spPr>
-      </p:pic>
-      <p:sp>
-        <p:nvSpPr>
-          <p:cNvPr id="8" name="TextBox 7"/>
+          <a:noFill/>
+        </p:spPr>
+        <p:txBody>
+          <a:bodyPr wrap="none" anchor="ctr" lIns="0" rIns="0" tIns="0" bIns="0">
+            <a:spAutoFit/>
+          </a:bodyPr>
+          <a:lstStyle/>
+          <a:p>
+            <a:pPr algn="ctr"/>
+            <a:r>
+              <a:rPr sz="1150" b="1">
+                <a:solidFill>
+                  <a:srgbClr val="0F1E3D"/>
+                </a:solidFill>
+                <a:latin typeface="맑은 고딕"/>
+                <a:ea typeface="맑은 고딕"/>
+              </a:rPr>
+              <a:t>Gaussian iid</a:t>
+            </a:r>
+          </a:p>
+        </p:txBody>
+      </p:sp>
+      <p:sp>
+        <p:nvSpPr>
+          <p:cNvPr id="131" name="Oval 130"/>
+          <p:cNvSpPr/>
+          <p:nvPr/>
+        </p:nvSpPr>
+        <p:spPr>
+          <a:xfrm>
+            <a:off x="922630" y="5383408"/>
+            <a:ext cx="38404" cy="38404"/>
+          </a:xfrm>
+          <a:prstGeom prst="ellipse">
+            <a:avLst/>
+          </a:prstGeom>
+          <a:solidFill>
+            <a:srgbClr val="0F1E3D"/>
+          </a:solidFill>
+          <a:ln>
+            <a:noFill/>
+          </a:ln>
+          <a:effectLst/>
+        </p:spPr>
+        <p:style>
+          <a:lnRef idx="1">
+            <a:schemeClr val="accent1"/>
+          </a:lnRef>
+          <a:fillRef idx="3">
+            <a:schemeClr val="accent1"/>
+          </a:fillRef>
+          <a:effectRef idx="2">
+            <a:schemeClr val="accent1"/>
+          </a:effectRef>
+          <a:fontRef idx="minor">
+            <a:schemeClr val="lt1"/>
+          </a:fontRef>
+        </p:style>
+        <p:txBody>
+          <a:bodyPr rtlCol="0" anchor="ctr"/>
+          <a:lstStyle/>
+          <a:p>
+            <a:pPr algn="ctr"/>
+          </a:p>
+        </p:txBody>
+      </p:sp>
+      <p:sp>
+        <p:nvSpPr>
+          <p:cNvPr id="132" name="Oval 131"/>
+          <p:cNvSpPr/>
+          <p:nvPr/>
+        </p:nvSpPr>
+        <p:spPr>
+          <a:xfrm>
+            <a:off x="1126236" y="5284499"/>
+            <a:ext cx="38404" cy="38404"/>
+          </a:xfrm>
+          <a:prstGeom prst="ellipse">
+            <a:avLst/>
+          </a:prstGeom>
+          <a:solidFill>
+            <a:srgbClr val="0F1E3D"/>
+          </a:solidFill>
+          <a:ln>
+            <a:noFill/>
+          </a:ln>
+          <a:effectLst/>
+        </p:spPr>
+        <p:style>
+          <a:lnRef idx="1">
+            <a:schemeClr val="accent1"/>
+          </a:lnRef>
+          <a:fillRef idx="3">
+            <a:schemeClr val="accent1"/>
+          </a:fillRef>
+          <a:effectRef idx="2">
+            <a:schemeClr val="accent1"/>
+          </a:effectRef>
+          <a:fontRef idx="minor">
+            <a:schemeClr val="lt1"/>
+          </a:fontRef>
+        </p:style>
+        <p:txBody>
+          <a:bodyPr rtlCol="0" anchor="ctr"/>
+          <a:lstStyle/>
+          <a:p>
+            <a:pPr algn="ctr"/>
+          </a:p>
+        </p:txBody>
+      </p:sp>
+      <p:sp>
+        <p:nvSpPr>
+          <p:cNvPr id="133" name="Oval 132"/>
+          <p:cNvSpPr/>
+          <p:nvPr/>
+        </p:nvSpPr>
+        <p:spPr>
+          <a:xfrm>
+            <a:off x="1329842" y="5532811"/>
+            <a:ext cx="38404" cy="38404"/>
+          </a:xfrm>
+          <a:prstGeom prst="ellipse">
+            <a:avLst/>
+          </a:prstGeom>
+          <a:solidFill>
+            <a:srgbClr val="0F1E3D"/>
+          </a:solidFill>
+          <a:ln>
+            <a:noFill/>
+          </a:ln>
+          <a:effectLst/>
+        </p:spPr>
+        <p:style>
+          <a:lnRef idx="1">
+            <a:schemeClr val="accent1"/>
+          </a:lnRef>
+          <a:fillRef idx="3">
+            <a:schemeClr val="accent1"/>
+          </a:fillRef>
+          <a:effectRef idx="2">
+            <a:schemeClr val="accent1"/>
+          </a:effectRef>
+          <a:fontRef idx="minor">
+            <a:schemeClr val="lt1"/>
+          </a:fontRef>
+        </p:style>
+        <p:txBody>
+          <a:bodyPr rtlCol="0" anchor="ctr"/>
+          <a:lstStyle/>
+          <a:p>
+            <a:pPr algn="ctr"/>
+          </a:p>
+        </p:txBody>
+      </p:sp>
+      <p:sp>
+        <p:nvSpPr>
+          <p:cNvPr id="134" name="Oval 133"/>
+          <p:cNvSpPr/>
+          <p:nvPr/>
+        </p:nvSpPr>
+        <p:spPr>
+          <a:xfrm>
+            <a:off x="1533449" y="5456675"/>
+            <a:ext cx="38404" cy="38404"/>
+          </a:xfrm>
+          <a:prstGeom prst="ellipse">
+            <a:avLst/>
+          </a:prstGeom>
+          <a:solidFill>
+            <a:srgbClr val="0F1E3D"/>
+          </a:solidFill>
+          <a:ln>
+            <a:noFill/>
+          </a:ln>
+          <a:effectLst/>
+        </p:spPr>
+        <p:style>
+          <a:lnRef idx="1">
+            <a:schemeClr val="accent1"/>
+          </a:lnRef>
+          <a:fillRef idx="3">
+            <a:schemeClr val="accent1"/>
+          </a:fillRef>
+          <a:effectRef idx="2">
+            <a:schemeClr val="accent1"/>
+          </a:effectRef>
+          <a:fontRef idx="minor">
+            <a:schemeClr val="lt1"/>
+          </a:fontRef>
+        </p:style>
+        <p:txBody>
+          <a:bodyPr rtlCol="0" anchor="ctr"/>
+          <a:lstStyle/>
+          <a:p>
+            <a:pPr algn="ctr"/>
+          </a:p>
+        </p:txBody>
+      </p:sp>
+      <p:sp>
+        <p:nvSpPr>
+          <p:cNvPr id="135" name="Oval 134"/>
+          <p:cNvSpPr/>
+          <p:nvPr/>
+        </p:nvSpPr>
+        <p:spPr>
+          <a:xfrm>
+            <a:off x="1737055" y="5320495"/>
+            <a:ext cx="38404" cy="38404"/>
+          </a:xfrm>
+          <a:prstGeom prst="ellipse">
+            <a:avLst/>
+          </a:prstGeom>
+          <a:solidFill>
+            <a:srgbClr val="0F1E3D"/>
+          </a:solidFill>
+          <a:ln>
+            <a:noFill/>
+          </a:ln>
+          <a:effectLst/>
+        </p:spPr>
+        <p:style>
+          <a:lnRef idx="1">
+            <a:schemeClr val="accent1"/>
+          </a:lnRef>
+          <a:fillRef idx="3">
+            <a:schemeClr val="accent1"/>
+          </a:fillRef>
+          <a:effectRef idx="2">
+            <a:schemeClr val="accent1"/>
+          </a:effectRef>
+          <a:fontRef idx="minor">
+            <a:schemeClr val="lt1"/>
+          </a:fontRef>
+        </p:style>
+        <p:txBody>
+          <a:bodyPr rtlCol="0" anchor="ctr"/>
+          <a:lstStyle/>
+          <a:p>
+            <a:pPr algn="ctr"/>
+          </a:p>
+        </p:txBody>
+      </p:sp>
+      <p:sp>
+        <p:nvSpPr>
+          <p:cNvPr id="136" name="Oval 135"/>
+          <p:cNvSpPr/>
+          <p:nvPr/>
+        </p:nvSpPr>
+        <p:spPr>
+          <a:xfrm>
+            <a:off x="1940662" y="5350833"/>
+            <a:ext cx="38404" cy="38404"/>
+          </a:xfrm>
+          <a:prstGeom prst="ellipse">
+            <a:avLst/>
+          </a:prstGeom>
+          <a:solidFill>
+            <a:srgbClr val="0F1E3D"/>
+          </a:solidFill>
+          <a:ln>
+            <a:noFill/>
+          </a:ln>
+          <a:effectLst/>
+        </p:spPr>
+        <p:style>
+          <a:lnRef idx="1">
+            <a:schemeClr val="accent1"/>
+          </a:lnRef>
+          <a:fillRef idx="3">
+            <a:schemeClr val="accent1"/>
+          </a:fillRef>
+          <a:effectRef idx="2">
+            <a:schemeClr val="accent1"/>
+          </a:effectRef>
+          <a:fontRef idx="minor">
+            <a:schemeClr val="lt1"/>
+          </a:fontRef>
+        </p:style>
+        <p:txBody>
+          <a:bodyPr rtlCol="0" anchor="ctr"/>
+          <a:lstStyle/>
+          <a:p>
+            <a:pPr algn="ctr"/>
+          </a:p>
+        </p:txBody>
+      </p:sp>
+      <p:sp>
+        <p:nvSpPr>
+          <p:cNvPr id="137" name="Oval 136"/>
+          <p:cNvSpPr/>
+          <p:nvPr/>
+        </p:nvSpPr>
+        <p:spPr>
+          <a:xfrm>
+            <a:off x="2144268" y="5378663"/>
+            <a:ext cx="38404" cy="38404"/>
+          </a:xfrm>
+          <a:prstGeom prst="ellipse">
+            <a:avLst/>
+          </a:prstGeom>
+          <a:solidFill>
+            <a:srgbClr val="0F1E3D"/>
+          </a:solidFill>
+          <a:ln>
+            <a:noFill/>
+          </a:ln>
+          <a:effectLst/>
+        </p:spPr>
+        <p:style>
+          <a:lnRef idx="1">
+            <a:schemeClr val="accent1"/>
+          </a:lnRef>
+          <a:fillRef idx="3">
+            <a:schemeClr val="accent1"/>
+          </a:fillRef>
+          <a:effectRef idx="2">
+            <a:schemeClr val="accent1"/>
+          </a:effectRef>
+          <a:fontRef idx="minor">
+            <a:schemeClr val="lt1"/>
+          </a:fontRef>
+        </p:style>
+        <p:txBody>
+          <a:bodyPr rtlCol="0" anchor="ctr"/>
+          <a:lstStyle/>
+          <a:p>
+            <a:pPr algn="ctr"/>
+          </a:p>
+        </p:txBody>
+      </p:sp>
+      <p:sp>
+        <p:nvSpPr>
+          <p:cNvPr id="138" name="Oval 137"/>
+          <p:cNvSpPr/>
+          <p:nvPr/>
+        </p:nvSpPr>
+        <p:spPr>
+          <a:xfrm>
+            <a:off x="2347874" y="5383570"/>
+            <a:ext cx="38404" cy="38404"/>
+          </a:xfrm>
+          <a:prstGeom prst="ellipse">
+            <a:avLst/>
+          </a:prstGeom>
+          <a:solidFill>
+            <a:srgbClr val="0F1E3D"/>
+          </a:solidFill>
+          <a:ln>
+            <a:noFill/>
+          </a:ln>
+          <a:effectLst/>
+        </p:spPr>
+        <p:style>
+          <a:lnRef idx="1">
+            <a:schemeClr val="accent1"/>
+          </a:lnRef>
+          <a:fillRef idx="3">
+            <a:schemeClr val="accent1"/>
+          </a:fillRef>
+          <a:effectRef idx="2">
+            <a:schemeClr val="accent1"/>
+          </a:effectRef>
+          <a:fontRef idx="minor">
+            <a:schemeClr val="lt1"/>
+          </a:fontRef>
+        </p:style>
+        <p:txBody>
+          <a:bodyPr rtlCol="0" anchor="ctr"/>
+          <a:lstStyle/>
+          <a:p>
+            <a:pPr algn="ctr"/>
+          </a:p>
+        </p:txBody>
+      </p:sp>
+      <p:sp>
+        <p:nvSpPr>
+          <p:cNvPr id="139" name="Oval 138"/>
+          <p:cNvSpPr/>
+          <p:nvPr/>
+        </p:nvSpPr>
+        <p:spPr>
+          <a:xfrm>
+            <a:off x="2551481" y="5312975"/>
+            <a:ext cx="38404" cy="38404"/>
+          </a:xfrm>
+          <a:prstGeom prst="ellipse">
+            <a:avLst/>
+          </a:prstGeom>
+          <a:solidFill>
+            <a:srgbClr val="0F1E3D"/>
+          </a:solidFill>
+          <a:ln>
+            <a:noFill/>
+          </a:ln>
+          <a:effectLst/>
+        </p:spPr>
+        <p:style>
+          <a:lnRef idx="1">
+            <a:schemeClr val="accent1"/>
+          </a:lnRef>
+          <a:fillRef idx="3">
+            <a:schemeClr val="accent1"/>
+          </a:fillRef>
+          <a:effectRef idx="2">
+            <a:schemeClr val="accent1"/>
+          </a:effectRef>
+          <a:fontRef idx="minor">
+            <a:schemeClr val="lt1"/>
+          </a:fontRef>
+        </p:style>
+        <p:txBody>
+          <a:bodyPr rtlCol="0" anchor="ctr"/>
+          <a:lstStyle/>
+          <a:p>
+            <a:pPr algn="ctr"/>
+          </a:p>
+        </p:txBody>
+      </p:sp>
+      <p:sp>
+        <p:nvSpPr>
+          <p:cNvPr id="140" name="Oval 139"/>
+          <p:cNvSpPr/>
+          <p:nvPr/>
+        </p:nvSpPr>
+        <p:spPr>
+          <a:xfrm>
+            <a:off x="2755087" y="5525382"/>
+            <a:ext cx="38404" cy="38404"/>
+          </a:xfrm>
+          <a:prstGeom prst="ellipse">
+            <a:avLst/>
+          </a:prstGeom>
+          <a:solidFill>
+            <a:srgbClr val="0F1E3D"/>
+          </a:solidFill>
+          <a:ln>
+            <a:noFill/>
+          </a:ln>
+          <a:effectLst/>
+        </p:spPr>
+        <p:style>
+          <a:lnRef idx="1">
+            <a:schemeClr val="accent1"/>
+          </a:lnRef>
+          <a:fillRef idx="3">
+            <a:schemeClr val="accent1"/>
+          </a:fillRef>
+          <a:effectRef idx="2">
+            <a:schemeClr val="accent1"/>
+          </a:effectRef>
+          <a:fontRef idx="minor">
+            <a:schemeClr val="lt1"/>
+          </a:fontRef>
+        </p:style>
+        <p:txBody>
+          <a:bodyPr rtlCol="0" anchor="ctr"/>
+          <a:lstStyle/>
+          <a:p>
+            <a:pPr algn="ctr"/>
+          </a:p>
+        </p:txBody>
+      </p:sp>
+      <p:sp>
+        <p:nvSpPr>
+          <p:cNvPr id="141" name="Oval 140"/>
+          <p:cNvSpPr/>
+          <p:nvPr/>
+        </p:nvSpPr>
+        <p:spPr>
+          <a:xfrm>
+            <a:off x="2958694" y="5567555"/>
+            <a:ext cx="38404" cy="38404"/>
+          </a:xfrm>
+          <a:prstGeom prst="ellipse">
+            <a:avLst/>
+          </a:prstGeom>
+          <a:solidFill>
+            <a:srgbClr val="0F1E3D"/>
+          </a:solidFill>
+          <a:ln>
+            <a:noFill/>
+          </a:ln>
+          <a:effectLst/>
+        </p:spPr>
+        <p:style>
+          <a:lnRef idx="1">
+            <a:schemeClr val="accent1"/>
+          </a:lnRef>
+          <a:fillRef idx="3">
+            <a:schemeClr val="accent1"/>
+          </a:fillRef>
+          <a:effectRef idx="2">
+            <a:schemeClr val="accent1"/>
+          </a:effectRef>
+          <a:fontRef idx="minor">
+            <a:schemeClr val="lt1"/>
+          </a:fontRef>
+        </p:style>
+        <p:txBody>
+          <a:bodyPr rtlCol="0" anchor="ctr"/>
+          <a:lstStyle/>
+          <a:p>
+            <a:pPr algn="ctr"/>
+          </a:p>
+        </p:txBody>
+      </p:sp>
+      <p:sp>
+        <p:nvSpPr>
+          <p:cNvPr id="142" name="Oval 141"/>
+          <p:cNvSpPr/>
+          <p:nvPr/>
+        </p:nvSpPr>
+        <p:spPr>
+          <a:xfrm>
+            <a:off x="3162300" y="5413357"/>
+            <a:ext cx="38404" cy="38404"/>
+          </a:xfrm>
+          <a:prstGeom prst="ellipse">
+            <a:avLst/>
+          </a:prstGeom>
+          <a:solidFill>
+            <a:srgbClr val="0F1E3D"/>
+          </a:solidFill>
+          <a:ln>
+            <a:noFill/>
+          </a:ln>
+          <a:effectLst/>
+        </p:spPr>
+        <p:style>
+          <a:lnRef idx="1">
+            <a:schemeClr val="accent1"/>
+          </a:lnRef>
+          <a:fillRef idx="3">
+            <a:schemeClr val="accent1"/>
+          </a:fillRef>
+          <a:effectRef idx="2">
+            <a:schemeClr val="accent1"/>
+          </a:effectRef>
+          <a:fontRef idx="minor">
+            <a:schemeClr val="lt1"/>
+          </a:fontRef>
+        </p:style>
+        <p:txBody>
+          <a:bodyPr rtlCol="0" anchor="ctr"/>
+          <a:lstStyle/>
+          <a:p>
+            <a:pPr algn="ctr"/>
+          </a:p>
+        </p:txBody>
+      </p:sp>
+      <p:sp>
+        <p:nvSpPr>
+          <p:cNvPr id="143" name="Oval 142"/>
+          <p:cNvSpPr/>
+          <p:nvPr/>
+        </p:nvSpPr>
+        <p:spPr>
+          <a:xfrm>
+            <a:off x="3365906" y="5418578"/>
+            <a:ext cx="38404" cy="38404"/>
+          </a:xfrm>
+          <a:prstGeom prst="ellipse">
+            <a:avLst/>
+          </a:prstGeom>
+          <a:solidFill>
+            <a:srgbClr val="0F1E3D"/>
+          </a:solidFill>
+          <a:ln>
+            <a:noFill/>
+          </a:ln>
+          <a:effectLst/>
+        </p:spPr>
+        <p:style>
+          <a:lnRef idx="1">
+            <a:schemeClr val="accent1"/>
+          </a:lnRef>
+          <a:fillRef idx="3">
+            <a:schemeClr val="accent1"/>
+          </a:fillRef>
+          <a:effectRef idx="2">
+            <a:schemeClr val="accent1"/>
+          </a:effectRef>
+          <a:fontRef idx="minor">
+            <a:schemeClr val="lt1"/>
+          </a:fontRef>
+        </p:style>
+        <p:txBody>
+          <a:bodyPr rtlCol="0" anchor="ctr"/>
+          <a:lstStyle/>
+          <a:p>
+            <a:pPr algn="ctr"/>
+          </a:p>
+        </p:txBody>
+      </p:sp>
+      <p:sp>
+        <p:nvSpPr>
+          <p:cNvPr id="144" name="Oval 143"/>
+          <p:cNvSpPr/>
+          <p:nvPr/>
+        </p:nvSpPr>
+        <p:spPr>
+          <a:xfrm>
+            <a:off x="3569513" y="5302163"/>
+            <a:ext cx="38404" cy="38404"/>
+          </a:xfrm>
+          <a:prstGeom prst="ellipse">
+            <a:avLst/>
+          </a:prstGeom>
+          <a:solidFill>
+            <a:srgbClr val="0F1E3D"/>
+          </a:solidFill>
+          <a:ln>
+            <a:noFill/>
+          </a:ln>
+          <a:effectLst/>
+        </p:spPr>
+        <p:style>
+          <a:lnRef idx="1">
+            <a:schemeClr val="accent1"/>
+          </a:lnRef>
+          <a:fillRef idx="3">
+            <a:schemeClr val="accent1"/>
+          </a:fillRef>
+          <a:effectRef idx="2">
+            <a:schemeClr val="accent1"/>
+          </a:effectRef>
+          <a:fontRef idx="minor">
+            <a:schemeClr val="lt1"/>
+          </a:fontRef>
+        </p:style>
+        <p:txBody>
+          <a:bodyPr rtlCol="0" anchor="ctr"/>
+          <a:lstStyle/>
+          <a:p>
+            <a:pPr algn="ctr"/>
+          </a:p>
+        </p:txBody>
+      </p:sp>
+      <p:sp>
+        <p:nvSpPr>
+          <p:cNvPr id="145" name="Oval 144"/>
+          <p:cNvSpPr/>
+          <p:nvPr/>
+        </p:nvSpPr>
+        <p:spPr>
+          <a:xfrm>
+            <a:off x="3773119" y="5306933"/>
+            <a:ext cx="38404" cy="38404"/>
+          </a:xfrm>
+          <a:prstGeom prst="ellipse">
+            <a:avLst/>
+          </a:prstGeom>
+          <a:solidFill>
+            <a:srgbClr val="0F1E3D"/>
+          </a:solidFill>
+          <a:ln>
+            <a:noFill/>
+          </a:ln>
+          <a:effectLst/>
+        </p:spPr>
+        <p:style>
+          <a:lnRef idx="1">
+            <a:schemeClr val="accent1"/>
+          </a:lnRef>
+          <a:fillRef idx="3">
+            <a:schemeClr val="accent1"/>
+          </a:fillRef>
+          <a:effectRef idx="2">
+            <a:schemeClr val="accent1"/>
+          </a:effectRef>
+          <a:fontRef idx="minor">
+            <a:schemeClr val="lt1"/>
+          </a:fontRef>
+        </p:style>
+        <p:txBody>
+          <a:bodyPr rtlCol="0" anchor="ctr"/>
+          <a:lstStyle/>
+          <a:p>
+            <a:pPr algn="ctr"/>
+          </a:p>
+        </p:txBody>
+      </p:sp>
+      <p:sp>
+        <p:nvSpPr>
+          <p:cNvPr id="146" name="Oval 145"/>
+          <p:cNvSpPr/>
+          <p:nvPr/>
+        </p:nvSpPr>
+        <p:spPr>
+          <a:xfrm>
+            <a:off x="3976726" y="5377272"/>
+            <a:ext cx="38404" cy="38404"/>
+          </a:xfrm>
+          <a:prstGeom prst="ellipse">
+            <a:avLst/>
+          </a:prstGeom>
+          <a:solidFill>
+            <a:srgbClr val="0F1E3D"/>
+          </a:solidFill>
+          <a:ln>
+            <a:noFill/>
+          </a:ln>
+          <a:effectLst/>
+        </p:spPr>
+        <p:style>
+          <a:lnRef idx="1">
+            <a:schemeClr val="accent1"/>
+          </a:lnRef>
+          <a:fillRef idx="3">
+            <a:schemeClr val="accent1"/>
+          </a:fillRef>
+          <a:effectRef idx="2">
+            <a:schemeClr val="accent1"/>
+          </a:effectRef>
+          <a:fontRef idx="minor">
+            <a:schemeClr val="lt1"/>
+          </a:fontRef>
+        </p:style>
+        <p:txBody>
+          <a:bodyPr rtlCol="0" anchor="ctr"/>
+          <a:lstStyle/>
+          <a:p>
+            <a:pPr algn="ctr"/>
+          </a:p>
+        </p:txBody>
+      </p:sp>
+      <p:sp>
+        <p:nvSpPr>
+          <p:cNvPr id="147" name="TextBox 146"/>
+          <p:cNvSpPr txBox="1"/>
+          <p:nvPr/>
+        </p:nvSpPr>
+        <p:spPr>
+          <a:xfrm>
+            <a:off x="777240" y="5696712"/>
+            <a:ext cx="3383280" cy="182880"/>
+          </a:xfrm>
+          <a:prstGeom prst="rect">
+            <a:avLst/>
+          </a:prstGeom>
+          <a:noFill/>
+        </p:spPr>
+        <p:txBody>
+          <a:bodyPr wrap="none" anchor="ctr" lIns="0" rIns="0" tIns="0" bIns="0">
+            <a:spAutoFit/>
+          </a:bodyPr>
+          <a:lstStyle/>
+          <a:p>
+            <a:pPr algn="ctr"/>
+            <a:r>
+              <a:rPr sz="950">
+                <a:solidFill>
+                  <a:srgbClr val="6B7280"/>
+                </a:solidFill>
+                <a:latin typeface="맑은 고딕"/>
+                <a:ea typeface="맑은 고딕"/>
+              </a:rPr>
+              <a:t>base dispersion</a:t>
+            </a:r>
+          </a:p>
+        </p:txBody>
+      </p:sp>
+      <p:sp>
+        <p:nvSpPr>
+          <p:cNvPr id="148" name="Rectangle 147"/>
+          <p:cNvSpPr/>
+          <p:nvPr/>
+        </p:nvSpPr>
+        <p:spPr>
+          <a:xfrm>
+            <a:off x="4434840" y="4932273"/>
+            <a:ext cx="3383280" cy="965607"/>
+          </a:xfrm>
+          <a:prstGeom prst="rect">
+            <a:avLst/>
+          </a:prstGeom>
+          <a:solidFill>
+            <a:srgbClr val="FCFDFE"/>
+          </a:solidFill>
+          <a:ln w="12700">
+            <a:solidFill>
+              <a:srgbClr val="D7DEEA"/>
+            </a:solidFill>
+          </a:ln>
+          <a:effectLst/>
+        </p:spPr>
+        <p:style>
+          <a:lnRef idx="1">
+            <a:schemeClr val="accent1"/>
+          </a:lnRef>
+          <a:fillRef idx="3">
+            <a:schemeClr val="accent1"/>
+          </a:fillRef>
+          <a:effectRef idx="2">
+            <a:schemeClr val="accent1"/>
+          </a:effectRef>
+          <a:fontRef idx="minor">
+            <a:schemeClr val="lt1"/>
+          </a:fontRef>
+        </p:style>
+        <p:txBody>
+          <a:bodyPr rtlCol="0" anchor="ctr"/>
+          <a:lstStyle/>
+          <a:p>
+            <a:pPr algn="ctr"/>
+          </a:p>
+        </p:txBody>
+      </p:sp>
+      <p:sp>
+        <p:nvSpPr>
+          <p:cNvPr id="149" name="TextBox 148"/>
+          <p:cNvSpPr txBox="1"/>
+          <p:nvPr/>
+        </p:nvSpPr>
+        <p:spPr>
+          <a:xfrm>
+            <a:off x="4434840" y="4959705"/>
+            <a:ext cx="3383280" cy="201168"/>
+          </a:xfrm>
+          <a:prstGeom prst="rect">
+            <a:avLst/>
+          </a:prstGeom>
+          <a:noFill/>
+        </p:spPr>
+        <p:txBody>
+          <a:bodyPr wrap="none" anchor="ctr" lIns="0" rIns="0" tIns="0" bIns="0">
+            <a:spAutoFit/>
+          </a:bodyPr>
+          <a:lstStyle/>
+          <a:p>
+            <a:pPr algn="ctr"/>
+            <a:r>
+              <a:rPr sz="1150" b="1">
+                <a:solidFill>
+                  <a:srgbClr val="0F1E3D"/>
+                </a:solidFill>
+                <a:latin typeface="맑은 고딕"/>
+                <a:ea typeface="맑은 고딕"/>
+              </a:rPr>
+              <a:t>Correlated AR(1)</a:t>
+            </a:r>
+          </a:p>
+        </p:txBody>
+      </p:sp>
+      <p:sp>
+        <p:nvSpPr>
+          <p:cNvPr id="150" name="Oval 149"/>
+          <p:cNvSpPr/>
+          <p:nvPr/>
+        </p:nvSpPr>
+        <p:spPr>
+          <a:xfrm>
+            <a:off x="4580230" y="5456604"/>
+            <a:ext cx="38404" cy="38404"/>
+          </a:xfrm>
+          <a:prstGeom prst="ellipse">
+            <a:avLst/>
+          </a:prstGeom>
+          <a:solidFill>
+            <a:srgbClr val="12B5B0"/>
+          </a:solidFill>
+          <a:ln>
+            <a:noFill/>
+          </a:ln>
+          <a:effectLst/>
+        </p:spPr>
+        <p:style>
+          <a:lnRef idx="1">
+            <a:schemeClr val="accent1"/>
+          </a:lnRef>
+          <a:fillRef idx="3">
+            <a:schemeClr val="accent1"/>
+          </a:fillRef>
+          <a:effectRef idx="2">
+            <a:schemeClr val="accent1"/>
+          </a:effectRef>
+          <a:fontRef idx="minor">
+            <a:schemeClr val="lt1"/>
+          </a:fontRef>
+        </p:style>
+        <p:txBody>
+          <a:bodyPr rtlCol="0" anchor="ctr"/>
+          <a:lstStyle/>
+          <a:p>
+            <a:pPr algn="ctr"/>
+          </a:p>
+        </p:txBody>
+      </p:sp>
+      <p:sp>
+        <p:nvSpPr>
+          <p:cNvPr id="151" name="Oval 150"/>
+          <p:cNvSpPr/>
+          <p:nvPr/>
+        </p:nvSpPr>
+        <p:spPr>
+          <a:xfrm>
+            <a:off x="4783836" y="5402730"/>
+            <a:ext cx="38404" cy="38404"/>
+          </a:xfrm>
+          <a:prstGeom prst="ellipse">
+            <a:avLst/>
+          </a:prstGeom>
+          <a:solidFill>
+            <a:srgbClr val="12B5B0"/>
+          </a:solidFill>
+          <a:ln>
+            <a:noFill/>
+          </a:ln>
+          <a:effectLst/>
+        </p:spPr>
+        <p:style>
+          <a:lnRef idx="1">
+            <a:schemeClr val="accent1"/>
+          </a:lnRef>
+          <a:fillRef idx="3">
+            <a:schemeClr val="accent1"/>
+          </a:fillRef>
+          <a:effectRef idx="2">
+            <a:schemeClr val="accent1"/>
+          </a:effectRef>
+          <a:fontRef idx="minor">
+            <a:schemeClr val="lt1"/>
+          </a:fontRef>
+        </p:style>
+        <p:txBody>
+          <a:bodyPr rtlCol="0" anchor="ctr"/>
+          <a:lstStyle/>
+          <a:p>
+            <a:pPr algn="ctr"/>
+          </a:p>
+        </p:txBody>
+      </p:sp>
+      <p:sp>
+        <p:nvSpPr>
+          <p:cNvPr id="152" name="Oval 151"/>
+          <p:cNvSpPr/>
+          <p:nvPr/>
+        </p:nvSpPr>
+        <p:spPr>
+          <a:xfrm>
+            <a:off x="4987442" y="5455179"/>
+            <a:ext cx="38404" cy="38404"/>
+          </a:xfrm>
+          <a:prstGeom prst="ellipse">
+            <a:avLst/>
+          </a:prstGeom>
+          <a:solidFill>
+            <a:srgbClr val="12B5B0"/>
+          </a:solidFill>
+          <a:ln>
+            <a:noFill/>
+          </a:ln>
+          <a:effectLst/>
+        </p:spPr>
+        <p:style>
+          <a:lnRef idx="1">
+            <a:schemeClr val="accent1"/>
+          </a:lnRef>
+          <a:fillRef idx="3">
+            <a:schemeClr val="accent1"/>
+          </a:fillRef>
+          <a:effectRef idx="2">
+            <a:schemeClr val="accent1"/>
+          </a:effectRef>
+          <a:fontRef idx="minor">
+            <a:schemeClr val="lt1"/>
+          </a:fontRef>
+        </p:style>
+        <p:txBody>
+          <a:bodyPr rtlCol="0" anchor="ctr"/>
+          <a:lstStyle/>
+          <a:p>
+            <a:pPr algn="ctr"/>
+          </a:p>
+        </p:txBody>
+      </p:sp>
+      <p:sp>
+        <p:nvSpPr>
+          <p:cNvPr id="153" name="Oval 152"/>
+          <p:cNvSpPr/>
+          <p:nvPr/>
+        </p:nvSpPr>
+        <p:spPr>
+          <a:xfrm>
+            <a:off x="5191049" y="5515672"/>
+            <a:ext cx="38404" cy="38404"/>
+          </a:xfrm>
+          <a:prstGeom prst="ellipse">
+            <a:avLst/>
+          </a:prstGeom>
+          <a:solidFill>
+            <a:srgbClr val="12B5B0"/>
+          </a:solidFill>
+          <a:ln>
+            <a:noFill/>
+          </a:ln>
+          <a:effectLst/>
+        </p:spPr>
+        <p:style>
+          <a:lnRef idx="1">
+            <a:schemeClr val="accent1"/>
+          </a:lnRef>
+          <a:fillRef idx="3">
+            <a:schemeClr val="accent1"/>
+          </a:fillRef>
+          <a:effectRef idx="2">
+            <a:schemeClr val="accent1"/>
+          </a:effectRef>
+          <a:fontRef idx="minor">
+            <a:schemeClr val="lt1"/>
+          </a:fontRef>
+        </p:style>
+        <p:txBody>
+          <a:bodyPr rtlCol="0" anchor="ctr"/>
+          <a:lstStyle/>
+          <a:p>
+            <a:pPr algn="ctr"/>
+          </a:p>
+        </p:txBody>
+      </p:sp>
+      <p:sp>
+        <p:nvSpPr>
+          <p:cNvPr id="154" name="Oval 153"/>
+          <p:cNvSpPr/>
+          <p:nvPr/>
+        </p:nvSpPr>
+        <p:spPr>
+          <a:xfrm>
+            <a:off x="5394655" y="5431515"/>
+            <a:ext cx="38404" cy="38404"/>
+          </a:xfrm>
+          <a:prstGeom prst="ellipse">
+            <a:avLst/>
+          </a:prstGeom>
+          <a:solidFill>
+            <a:srgbClr val="12B5B0"/>
+          </a:solidFill>
+          <a:ln>
+            <a:noFill/>
+          </a:ln>
+          <a:effectLst/>
+        </p:spPr>
+        <p:style>
+          <a:lnRef idx="1">
+            <a:schemeClr val="accent1"/>
+          </a:lnRef>
+          <a:fillRef idx="3">
+            <a:schemeClr val="accent1"/>
+          </a:fillRef>
+          <a:effectRef idx="2">
+            <a:schemeClr val="accent1"/>
+          </a:effectRef>
+          <a:fontRef idx="minor">
+            <a:schemeClr val="lt1"/>
+          </a:fontRef>
+        </p:style>
+        <p:txBody>
+          <a:bodyPr rtlCol="0" anchor="ctr"/>
+          <a:lstStyle/>
+          <a:p>
+            <a:pPr algn="ctr"/>
+          </a:p>
+        </p:txBody>
+      </p:sp>
+      <p:sp>
+        <p:nvSpPr>
+          <p:cNvPr id="155" name="Oval 154"/>
+          <p:cNvSpPr/>
+          <p:nvPr/>
+        </p:nvSpPr>
+        <p:spPr>
+          <a:xfrm>
+            <a:off x="5598262" y="5425709"/>
+            <a:ext cx="38404" cy="38404"/>
+          </a:xfrm>
+          <a:prstGeom prst="ellipse">
+            <a:avLst/>
+          </a:prstGeom>
+          <a:solidFill>
+            <a:srgbClr val="12B5B0"/>
+          </a:solidFill>
+          <a:ln>
+            <a:noFill/>
+          </a:ln>
+          <a:effectLst/>
+        </p:spPr>
+        <p:style>
+          <a:lnRef idx="1">
+            <a:schemeClr val="accent1"/>
+          </a:lnRef>
+          <a:fillRef idx="3">
+            <a:schemeClr val="accent1"/>
+          </a:fillRef>
+          <a:effectRef idx="2">
+            <a:schemeClr val="accent1"/>
+          </a:effectRef>
+          <a:fontRef idx="minor">
+            <a:schemeClr val="lt1"/>
+          </a:fontRef>
+        </p:style>
+        <p:txBody>
+          <a:bodyPr rtlCol="0" anchor="ctr"/>
+          <a:lstStyle/>
+          <a:p>
+            <a:pPr algn="ctr"/>
+          </a:p>
+        </p:txBody>
+      </p:sp>
+      <p:sp>
+        <p:nvSpPr>
+          <p:cNvPr id="156" name="Oval 155"/>
+          <p:cNvSpPr/>
+          <p:nvPr/>
+        </p:nvSpPr>
+        <p:spPr>
+          <a:xfrm>
+            <a:off x="5801868" y="5475203"/>
+            <a:ext cx="38404" cy="38404"/>
+          </a:xfrm>
+          <a:prstGeom prst="ellipse">
+            <a:avLst/>
+          </a:prstGeom>
+          <a:solidFill>
+            <a:srgbClr val="12B5B0"/>
+          </a:solidFill>
+          <a:ln>
+            <a:noFill/>
+          </a:ln>
+          <a:effectLst/>
+        </p:spPr>
+        <p:style>
+          <a:lnRef idx="1">
+            <a:schemeClr val="accent1"/>
+          </a:lnRef>
+          <a:fillRef idx="3">
+            <a:schemeClr val="accent1"/>
+          </a:fillRef>
+          <a:effectRef idx="2">
+            <a:schemeClr val="accent1"/>
+          </a:effectRef>
+          <a:fontRef idx="minor">
+            <a:schemeClr val="lt1"/>
+          </a:fontRef>
+        </p:style>
+        <p:txBody>
+          <a:bodyPr rtlCol="0" anchor="ctr"/>
+          <a:lstStyle/>
+          <a:p>
+            <a:pPr algn="ctr"/>
+          </a:p>
+        </p:txBody>
+      </p:sp>
+      <p:sp>
+        <p:nvSpPr>
+          <p:cNvPr id="157" name="Oval 156"/>
+          <p:cNvSpPr/>
+          <p:nvPr/>
+        </p:nvSpPr>
+        <p:spPr>
+          <a:xfrm>
+            <a:off x="6005474" y="5457675"/>
+            <a:ext cx="38404" cy="38404"/>
+          </a:xfrm>
+          <a:prstGeom prst="ellipse">
+            <a:avLst/>
+          </a:prstGeom>
+          <a:solidFill>
+            <a:srgbClr val="12B5B0"/>
+          </a:solidFill>
+          <a:ln>
+            <a:noFill/>
+          </a:ln>
+          <a:effectLst/>
+        </p:spPr>
+        <p:style>
+          <a:lnRef idx="1">
+            <a:schemeClr val="accent1"/>
+          </a:lnRef>
+          <a:fillRef idx="3">
+            <a:schemeClr val="accent1"/>
+          </a:fillRef>
+          <a:effectRef idx="2">
+            <a:schemeClr val="accent1"/>
+          </a:effectRef>
+          <a:fontRef idx="minor">
+            <a:schemeClr val="lt1"/>
+          </a:fontRef>
+        </p:style>
+        <p:txBody>
+          <a:bodyPr rtlCol="0" anchor="ctr"/>
+          <a:lstStyle/>
+          <a:p>
+            <a:pPr algn="ctr"/>
+          </a:p>
+        </p:txBody>
+      </p:sp>
+      <p:sp>
+        <p:nvSpPr>
+          <p:cNvPr id="158" name="Oval 157"/>
+          <p:cNvSpPr/>
+          <p:nvPr/>
+        </p:nvSpPr>
+        <p:spPr>
+          <a:xfrm>
+            <a:off x="6209081" y="5517060"/>
+            <a:ext cx="38404" cy="38404"/>
+          </a:xfrm>
+          <a:prstGeom prst="ellipse">
+            <a:avLst/>
+          </a:prstGeom>
+          <a:solidFill>
+            <a:srgbClr val="12B5B0"/>
+          </a:solidFill>
+          <a:ln>
+            <a:noFill/>
+          </a:ln>
+          <a:effectLst/>
+        </p:spPr>
+        <p:style>
+          <a:lnRef idx="1">
+            <a:schemeClr val="accent1"/>
+          </a:lnRef>
+          <a:fillRef idx="3">
+            <a:schemeClr val="accent1"/>
+          </a:fillRef>
+          <a:effectRef idx="2">
+            <a:schemeClr val="accent1"/>
+          </a:effectRef>
+          <a:fontRef idx="minor">
+            <a:schemeClr val="lt1"/>
+          </a:fontRef>
+        </p:style>
+        <p:txBody>
+          <a:bodyPr rtlCol="0" anchor="ctr"/>
+          <a:lstStyle/>
+          <a:p>
+            <a:pPr algn="ctr"/>
+          </a:p>
+        </p:txBody>
+      </p:sp>
+      <p:sp>
+        <p:nvSpPr>
+          <p:cNvPr id="159" name="Oval 158"/>
+          <p:cNvSpPr/>
+          <p:nvPr/>
+        </p:nvSpPr>
+        <p:spPr>
+          <a:xfrm>
+            <a:off x="6412687" y="5492455"/>
+            <a:ext cx="38404" cy="38404"/>
+          </a:xfrm>
+          <a:prstGeom prst="ellipse">
+            <a:avLst/>
+          </a:prstGeom>
+          <a:solidFill>
+            <a:srgbClr val="12B5B0"/>
+          </a:solidFill>
+          <a:ln>
+            <a:noFill/>
+          </a:ln>
+          <a:effectLst/>
+        </p:spPr>
+        <p:style>
+          <a:lnRef idx="1">
+            <a:schemeClr val="accent1"/>
+          </a:lnRef>
+          <a:fillRef idx="3">
+            <a:schemeClr val="accent1"/>
+          </a:fillRef>
+          <a:effectRef idx="2">
+            <a:schemeClr val="accent1"/>
+          </a:effectRef>
+          <a:fontRef idx="minor">
+            <a:schemeClr val="lt1"/>
+          </a:fontRef>
+        </p:style>
+        <p:txBody>
+          <a:bodyPr rtlCol="0" anchor="ctr"/>
+          <a:lstStyle/>
+          <a:p>
+            <a:pPr algn="ctr"/>
+          </a:p>
+        </p:txBody>
+      </p:sp>
+      <p:sp>
+        <p:nvSpPr>
+          <p:cNvPr id="160" name="Oval 159"/>
+          <p:cNvSpPr/>
+          <p:nvPr/>
+        </p:nvSpPr>
+        <p:spPr>
+          <a:xfrm>
+            <a:off x="6616294" y="5409512"/>
+            <a:ext cx="38404" cy="38404"/>
+          </a:xfrm>
+          <a:prstGeom prst="ellipse">
+            <a:avLst/>
+          </a:prstGeom>
+          <a:solidFill>
+            <a:srgbClr val="12B5B0"/>
+          </a:solidFill>
+          <a:ln>
+            <a:noFill/>
+          </a:ln>
+          <a:effectLst/>
+        </p:spPr>
+        <p:style>
+          <a:lnRef idx="1">
+            <a:schemeClr val="accent1"/>
+          </a:lnRef>
+          <a:fillRef idx="3">
+            <a:schemeClr val="accent1"/>
+          </a:fillRef>
+          <a:effectRef idx="2">
+            <a:schemeClr val="accent1"/>
+          </a:effectRef>
+          <a:fontRef idx="minor">
+            <a:schemeClr val="lt1"/>
+          </a:fontRef>
+        </p:style>
+        <p:txBody>
+          <a:bodyPr rtlCol="0" anchor="ctr"/>
+          <a:lstStyle/>
+          <a:p>
+            <a:pPr algn="ctr"/>
+          </a:p>
+        </p:txBody>
+      </p:sp>
+      <p:sp>
+        <p:nvSpPr>
+          <p:cNvPr id="161" name="Oval 160"/>
+          <p:cNvSpPr/>
+          <p:nvPr/>
+        </p:nvSpPr>
+        <p:spPr>
+          <a:xfrm>
+            <a:off x="6819900" y="5361118"/>
+            <a:ext cx="38404" cy="38404"/>
+          </a:xfrm>
+          <a:prstGeom prst="ellipse">
+            <a:avLst/>
+          </a:prstGeom>
+          <a:solidFill>
+            <a:srgbClr val="12B5B0"/>
+          </a:solidFill>
+          <a:ln>
+            <a:noFill/>
+          </a:ln>
+          <a:effectLst/>
+        </p:spPr>
+        <p:style>
+          <a:lnRef idx="1">
+            <a:schemeClr val="accent1"/>
+          </a:lnRef>
+          <a:fillRef idx="3">
+            <a:schemeClr val="accent1"/>
+          </a:fillRef>
+          <a:effectRef idx="2">
+            <a:schemeClr val="accent1"/>
+          </a:effectRef>
+          <a:fontRef idx="minor">
+            <a:schemeClr val="lt1"/>
+          </a:fontRef>
+        </p:style>
+        <p:txBody>
+          <a:bodyPr rtlCol="0" anchor="ctr"/>
+          <a:lstStyle/>
+          <a:p>
+            <a:pPr algn="ctr"/>
+          </a:p>
+        </p:txBody>
+      </p:sp>
+      <p:sp>
+        <p:nvSpPr>
+          <p:cNvPr id="162" name="Oval 161"/>
+          <p:cNvSpPr/>
+          <p:nvPr/>
+        </p:nvSpPr>
+        <p:spPr>
+          <a:xfrm>
+            <a:off x="7023506" y="5347028"/>
+            <a:ext cx="38404" cy="38404"/>
+          </a:xfrm>
+          <a:prstGeom prst="ellipse">
+            <a:avLst/>
+          </a:prstGeom>
+          <a:solidFill>
+            <a:srgbClr val="12B5B0"/>
+          </a:solidFill>
+          <a:ln>
+            <a:noFill/>
+          </a:ln>
+          <a:effectLst/>
+        </p:spPr>
+        <p:style>
+          <a:lnRef idx="1">
+            <a:schemeClr val="accent1"/>
+          </a:lnRef>
+          <a:fillRef idx="3">
+            <a:schemeClr val="accent1"/>
+          </a:fillRef>
+          <a:effectRef idx="2">
+            <a:schemeClr val="accent1"/>
+          </a:effectRef>
+          <a:fontRef idx="minor">
+            <a:schemeClr val="lt1"/>
+          </a:fontRef>
+        </p:style>
+        <p:txBody>
+          <a:bodyPr rtlCol="0" anchor="ctr"/>
+          <a:lstStyle/>
+          <a:p>
+            <a:pPr algn="ctr"/>
+          </a:p>
+        </p:txBody>
+      </p:sp>
+      <p:sp>
+        <p:nvSpPr>
+          <p:cNvPr id="163" name="Oval 162"/>
+          <p:cNvSpPr/>
+          <p:nvPr/>
+        </p:nvSpPr>
+        <p:spPr>
+          <a:xfrm>
+            <a:off x="7227113" y="5397623"/>
+            <a:ext cx="38404" cy="38404"/>
+          </a:xfrm>
+          <a:prstGeom prst="ellipse">
+            <a:avLst/>
+          </a:prstGeom>
+          <a:solidFill>
+            <a:srgbClr val="12B5B0"/>
+          </a:solidFill>
+          <a:ln>
+            <a:noFill/>
+          </a:ln>
+          <a:effectLst/>
+        </p:spPr>
+        <p:style>
+          <a:lnRef idx="1">
+            <a:schemeClr val="accent1"/>
+          </a:lnRef>
+          <a:fillRef idx="3">
+            <a:schemeClr val="accent1"/>
+          </a:fillRef>
+          <a:effectRef idx="2">
+            <a:schemeClr val="accent1"/>
+          </a:effectRef>
+          <a:fontRef idx="minor">
+            <a:schemeClr val="lt1"/>
+          </a:fontRef>
+        </p:style>
+        <p:txBody>
+          <a:bodyPr rtlCol="0" anchor="ctr"/>
+          <a:lstStyle/>
+          <a:p>
+            <a:pPr algn="ctr"/>
+          </a:p>
+        </p:txBody>
+      </p:sp>
+      <p:sp>
+        <p:nvSpPr>
+          <p:cNvPr id="164" name="Oval 163"/>
+          <p:cNvSpPr/>
+          <p:nvPr/>
+        </p:nvSpPr>
+        <p:spPr>
+          <a:xfrm>
+            <a:off x="7430719" y="5422142"/>
+            <a:ext cx="38404" cy="38404"/>
+          </a:xfrm>
+          <a:prstGeom prst="ellipse">
+            <a:avLst/>
+          </a:prstGeom>
+          <a:solidFill>
+            <a:srgbClr val="12B5B0"/>
+          </a:solidFill>
+          <a:ln>
+            <a:noFill/>
+          </a:ln>
+          <a:effectLst/>
+        </p:spPr>
+        <p:style>
+          <a:lnRef idx="1">
+            <a:schemeClr val="accent1"/>
+          </a:lnRef>
+          <a:fillRef idx="3">
+            <a:schemeClr val="accent1"/>
+          </a:fillRef>
+          <a:effectRef idx="2">
+            <a:schemeClr val="accent1"/>
+          </a:effectRef>
+          <a:fontRef idx="minor">
+            <a:schemeClr val="lt1"/>
+          </a:fontRef>
+        </p:style>
+        <p:txBody>
+          <a:bodyPr rtlCol="0" anchor="ctr"/>
+          <a:lstStyle/>
+          <a:p>
+            <a:pPr algn="ctr"/>
+          </a:p>
+        </p:txBody>
+      </p:sp>
+      <p:sp>
+        <p:nvSpPr>
+          <p:cNvPr id="165" name="Oval 164"/>
+          <p:cNvSpPr/>
+          <p:nvPr/>
+        </p:nvSpPr>
+        <p:spPr>
+          <a:xfrm>
+            <a:off x="7634326" y="5469527"/>
+            <a:ext cx="38404" cy="38404"/>
+          </a:xfrm>
+          <a:prstGeom prst="ellipse">
+            <a:avLst/>
+          </a:prstGeom>
+          <a:solidFill>
+            <a:srgbClr val="12B5B0"/>
+          </a:solidFill>
+          <a:ln>
+            <a:noFill/>
+          </a:ln>
+          <a:effectLst/>
+        </p:spPr>
+        <p:style>
+          <a:lnRef idx="1">
+            <a:schemeClr val="accent1"/>
+          </a:lnRef>
+          <a:fillRef idx="3">
+            <a:schemeClr val="accent1"/>
+          </a:fillRef>
+          <a:effectRef idx="2">
+            <a:schemeClr val="accent1"/>
+          </a:effectRef>
+          <a:fontRef idx="minor">
+            <a:schemeClr val="lt1"/>
+          </a:fontRef>
+        </p:style>
+        <p:txBody>
+          <a:bodyPr rtlCol="0" anchor="ctr"/>
+          <a:lstStyle/>
+          <a:p>
+            <a:pPr algn="ctr"/>
+          </a:p>
+        </p:txBody>
+      </p:sp>
+      <p:sp>
+        <p:nvSpPr>
+          <p:cNvPr id="166" name="TextBox 165"/>
+          <p:cNvSpPr txBox="1"/>
+          <p:nvPr/>
+        </p:nvSpPr>
+        <p:spPr>
+          <a:xfrm>
+            <a:off x="4434840" y="5696712"/>
+            <a:ext cx="3383280" cy="182880"/>
+          </a:xfrm>
+          <a:prstGeom prst="rect">
+            <a:avLst/>
+          </a:prstGeom>
+          <a:noFill/>
+        </p:spPr>
+        <p:txBody>
+          <a:bodyPr wrap="none" anchor="ctr" lIns="0" rIns="0" tIns="0" bIns="0">
+            <a:spAutoFit/>
+          </a:bodyPr>
+          <a:lstStyle/>
+          <a:p>
+            <a:pPr algn="ctr"/>
+            <a:r>
+              <a:rPr sz="950">
+                <a:solidFill>
+                  <a:srgbClr val="6B7280"/>
+                </a:solidFill>
+                <a:latin typeface="맑은 고딕"/>
+                <a:ea typeface="맑은 고딕"/>
+              </a:rPr>
+              <a:t>equipment drift</a:t>
+            </a:r>
+          </a:p>
+        </p:txBody>
+      </p:sp>
+      <p:sp>
+        <p:nvSpPr>
+          <p:cNvPr id="167" name="Rectangle 166"/>
+          <p:cNvSpPr/>
+          <p:nvPr/>
+        </p:nvSpPr>
+        <p:spPr>
+          <a:xfrm>
+            <a:off x="8092440" y="4932273"/>
+            <a:ext cx="3383280" cy="965607"/>
+          </a:xfrm>
+          <a:prstGeom prst="rect">
+            <a:avLst/>
+          </a:prstGeom>
+          <a:solidFill>
+            <a:srgbClr val="FCFDFE"/>
+          </a:solidFill>
+          <a:ln w="12700">
+            <a:solidFill>
+              <a:srgbClr val="D7DEEA"/>
+            </a:solidFill>
+          </a:ln>
+          <a:effectLst/>
+        </p:spPr>
+        <p:style>
+          <a:lnRef idx="1">
+            <a:schemeClr val="accent1"/>
+          </a:lnRef>
+          <a:fillRef idx="3">
+            <a:schemeClr val="accent1"/>
+          </a:fillRef>
+          <a:effectRef idx="2">
+            <a:schemeClr val="accent1"/>
+          </a:effectRef>
+          <a:fontRef idx="minor">
+            <a:schemeClr val="lt1"/>
+          </a:fontRef>
+        </p:style>
+        <p:txBody>
+          <a:bodyPr rtlCol="0" anchor="ctr"/>
+          <a:lstStyle/>
+          <a:p>
+            <a:pPr algn="ctr"/>
+          </a:p>
+        </p:txBody>
+      </p:sp>
+      <p:sp>
+        <p:nvSpPr>
+          <p:cNvPr id="168" name="TextBox 167"/>
+          <p:cNvSpPr txBox="1"/>
+          <p:nvPr/>
+        </p:nvSpPr>
+        <p:spPr>
+          <a:xfrm>
+            <a:off x="8092440" y="4959705"/>
+            <a:ext cx="3383280" cy="201168"/>
+          </a:xfrm>
+          <a:prstGeom prst="rect">
+            <a:avLst/>
+          </a:prstGeom>
+          <a:noFill/>
+        </p:spPr>
+        <p:txBody>
+          <a:bodyPr wrap="none" anchor="ctr" lIns="0" rIns="0" tIns="0" bIns="0">
+            <a:spAutoFit/>
+          </a:bodyPr>
+          <a:lstStyle/>
+          <a:p>
+            <a:pPr algn="ctr"/>
+            <a:r>
+              <a:rPr sz="1150" b="1">
+                <a:solidFill>
+                  <a:srgbClr val="0F1E3D"/>
+                </a:solidFill>
+                <a:latin typeface="맑은 고딕"/>
+                <a:ea typeface="맑은 고딕"/>
+              </a:rPr>
+              <a:t>Laplacian</a:t>
+            </a:r>
+          </a:p>
+        </p:txBody>
+      </p:sp>
+      <p:sp>
+        <p:nvSpPr>
+          <p:cNvPr id="169" name="Oval 168"/>
+          <p:cNvSpPr/>
+          <p:nvPr/>
+        </p:nvSpPr>
+        <p:spPr>
+          <a:xfrm>
+            <a:off x="8237830" y="5443835"/>
+            <a:ext cx="38404" cy="38404"/>
+          </a:xfrm>
+          <a:prstGeom prst="ellipse">
+            <a:avLst/>
+          </a:prstGeom>
+          <a:solidFill>
+            <a:srgbClr val="0F1E3D"/>
+          </a:solidFill>
+          <a:ln>
+            <a:noFill/>
+          </a:ln>
+          <a:effectLst/>
+        </p:spPr>
+        <p:style>
+          <a:lnRef idx="1">
+            <a:schemeClr val="accent1"/>
+          </a:lnRef>
+          <a:fillRef idx="3">
+            <a:schemeClr val="accent1"/>
+          </a:fillRef>
+          <a:effectRef idx="2">
+            <a:schemeClr val="accent1"/>
+          </a:effectRef>
+          <a:fontRef idx="minor">
+            <a:schemeClr val="lt1"/>
+          </a:fontRef>
+        </p:style>
+        <p:txBody>
+          <a:bodyPr rtlCol="0" anchor="ctr"/>
+          <a:lstStyle/>
+          <a:p>
+            <a:pPr algn="ctr"/>
+          </a:p>
+        </p:txBody>
+      </p:sp>
+      <p:sp>
+        <p:nvSpPr>
+          <p:cNvPr id="170" name="Oval 169"/>
+          <p:cNvSpPr/>
+          <p:nvPr/>
+        </p:nvSpPr>
+        <p:spPr>
+          <a:xfrm>
+            <a:off x="8441436" y="5425766"/>
+            <a:ext cx="38404" cy="38404"/>
+          </a:xfrm>
+          <a:prstGeom prst="ellipse">
+            <a:avLst/>
+          </a:prstGeom>
+          <a:solidFill>
+            <a:srgbClr val="0F1E3D"/>
+          </a:solidFill>
+          <a:ln>
+            <a:noFill/>
+          </a:ln>
+          <a:effectLst/>
+        </p:spPr>
+        <p:style>
+          <a:lnRef idx="1">
+            <a:schemeClr val="accent1"/>
+          </a:lnRef>
+          <a:fillRef idx="3">
+            <a:schemeClr val="accent1"/>
+          </a:fillRef>
+          <a:effectRef idx="2">
+            <a:schemeClr val="accent1"/>
+          </a:effectRef>
+          <a:fontRef idx="minor">
+            <a:schemeClr val="lt1"/>
+          </a:fontRef>
+        </p:style>
+        <p:txBody>
+          <a:bodyPr rtlCol="0" anchor="ctr"/>
+          <a:lstStyle/>
+          <a:p>
+            <a:pPr algn="ctr"/>
+          </a:p>
+        </p:txBody>
+      </p:sp>
+      <p:sp>
+        <p:nvSpPr>
+          <p:cNvPr id="171" name="Oval 170"/>
+          <p:cNvSpPr/>
+          <p:nvPr/>
+        </p:nvSpPr>
+        <p:spPr>
+          <a:xfrm>
+            <a:off x="8645042" y="5444372"/>
+            <a:ext cx="38404" cy="38404"/>
+          </a:xfrm>
+          <a:prstGeom prst="ellipse">
+            <a:avLst/>
+          </a:prstGeom>
+          <a:solidFill>
+            <a:srgbClr val="0F1E3D"/>
+          </a:solidFill>
+          <a:ln>
+            <a:noFill/>
+          </a:ln>
+          <a:effectLst/>
+        </p:spPr>
+        <p:style>
+          <a:lnRef idx="1">
+            <a:schemeClr val="accent1"/>
+          </a:lnRef>
+          <a:fillRef idx="3">
+            <a:schemeClr val="accent1"/>
+          </a:fillRef>
+          <a:effectRef idx="2">
+            <a:schemeClr val="accent1"/>
+          </a:effectRef>
+          <a:fontRef idx="minor">
+            <a:schemeClr val="lt1"/>
+          </a:fontRef>
+        </p:style>
+        <p:txBody>
+          <a:bodyPr rtlCol="0" anchor="ctr"/>
+          <a:lstStyle/>
+          <a:p>
+            <a:pPr algn="ctr"/>
+          </a:p>
+        </p:txBody>
+      </p:sp>
+      <p:sp>
+        <p:nvSpPr>
+          <p:cNvPr id="172" name="Oval 171"/>
+          <p:cNvSpPr/>
+          <p:nvPr/>
+        </p:nvSpPr>
+        <p:spPr>
+          <a:xfrm>
+            <a:off x="8848649" y="5410447"/>
+            <a:ext cx="38404" cy="38404"/>
+          </a:xfrm>
+          <a:prstGeom prst="ellipse">
+            <a:avLst/>
+          </a:prstGeom>
+          <a:solidFill>
+            <a:srgbClr val="0F1E3D"/>
+          </a:solidFill>
+          <a:ln>
+            <a:noFill/>
+          </a:ln>
+          <a:effectLst/>
+        </p:spPr>
+        <p:style>
+          <a:lnRef idx="1">
+            <a:schemeClr val="accent1"/>
+          </a:lnRef>
+          <a:fillRef idx="3">
+            <a:schemeClr val="accent1"/>
+          </a:fillRef>
+          <a:effectRef idx="2">
+            <a:schemeClr val="accent1"/>
+          </a:effectRef>
+          <a:fontRef idx="minor">
+            <a:schemeClr val="lt1"/>
+          </a:fontRef>
+        </p:style>
+        <p:txBody>
+          <a:bodyPr rtlCol="0" anchor="ctr"/>
+          <a:lstStyle/>
+          <a:p>
+            <a:pPr algn="ctr"/>
+          </a:p>
+        </p:txBody>
+      </p:sp>
+      <p:sp>
+        <p:nvSpPr>
+          <p:cNvPr id="173" name="Oval 172"/>
+          <p:cNvSpPr/>
+          <p:nvPr/>
+        </p:nvSpPr>
+        <p:spPr>
+          <a:xfrm>
+            <a:off x="9044939" y="5198949"/>
+            <a:ext cx="53035" cy="53035"/>
+          </a:xfrm>
+          <a:prstGeom prst="ellipse">
+            <a:avLst/>
+          </a:prstGeom>
+          <a:solidFill>
+            <a:srgbClr val="CC3328"/>
+          </a:solidFill>
+          <a:ln>
+            <a:noFill/>
+          </a:ln>
+          <a:effectLst/>
+        </p:spPr>
+        <p:style>
+          <a:lnRef idx="1">
+            <a:schemeClr val="accent1"/>
+          </a:lnRef>
+          <a:fillRef idx="3">
+            <a:schemeClr val="accent1"/>
+          </a:fillRef>
+          <a:effectRef idx="2">
+            <a:schemeClr val="accent1"/>
+          </a:effectRef>
+          <a:fontRef idx="minor">
+            <a:schemeClr val="lt1"/>
+          </a:fontRef>
+        </p:style>
+        <p:txBody>
+          <a:bodyPr rtlCol="0" anchor="ctr"/>
+          <a:lstStyle/>
+          <a:p>
+            <a:pPr algn="ctr"/>
+          </a:p>
+        </p:txBody>
+      </p:sp>
+      <p:sp>
+        <p:nvSpPr>
+          <p:cNvPr id="174" name="Oval 173"/>
+          <p:cNvSpPr/>
+          <p:nvPr/>
+        </p:nvSpPr>
+        <p:spPr>
+          <a:xfrm>
+            <a:off x="9255862" y="5402398"/>
+            <a:ext cx="38404" cy="38404"/>
+          </a:xfrm>
+          <a:prstGeom prst="ellipse">
+            <a:avLst/>
+          </a:prstGeom>
+          <a:solidFill>
+            <a:srgbClr val="0F1E3D"/>
+          </a:solidFill>
+          <a:ln>
+            <a:noFill/>
+          </a:ln>
+          <a:effectLst/>
+        </p:spPr>
+        <p:style>
+          <a:lnRef idx="1">
+            <a:schemeClr val="accent1"/>
+          </a:lnRef>
+          <a:fillRef idx="3">
+            <a:schemeClr val="accent1"/>
+          </a:fillRef>
+          <a:effectRef idx="2">
+            <a:schemeClr val="accent1"/>
+          </a:effectRef>
+          <a:fontRef idx="minor">
+            <a:schemeClr val="lt1"/>
+          </a:fontRef>
+        </p:style>
+        <p:txBody>
+          <a:bodyPr rtlCol="0" anchor="ctr"/>
+          <a:lstStyle/>
+          <a:p>
+            <a:pPr algn="ctr"/>
+          </a:p>
+        </p:txBody>
+      </p:sp>
+      <p:sp>
+        <p:nvSpPr>
+          <p:cNvPr id="175" name="Oval 174"/>
+          <p:cNvSpPr/>
+          <p:nvPr/>
+        </p:nvSpPr>
+        <p:spPr>
+          <a:xfrm>
+            <a:off x="9459468" y="5446822"/>
+            <a:ext cx="38404" cy="38404"/>
+          </a:xfrm>
+          <a:prstGeom prst="ellipse">
+            <a:avLst/>
+          </a:prstGeom>
+          <a:solidFill>
+            <a:srgbClr val="0F1E3D"/>
+          </a:solidFill>
+          <a:ln>
+            <a:noFill/>
+          </a:ln>
+          <a:effectLst/>
+        </p:spPr>
+        <p:style>
+          <a:lnRef idx="1">
+            <a:schemeClr val="accent1"/>
+          </a:lnRef>
+          <a:fillRef idx="3">
+            <a:schemeClr val="accent1"/>
+          </a:fillRef>
+          <a:effectRef idx="2">
+            <a:schemeClr val="accent1"/>
+          </a:effectRef>
+          <a:fontRef idx="minor">
+            <a:schemeClr val="lt1"/>
+          </a:fontRef>
+        </p:style>
+        <p:txBody>
+          <a:bodyPr rtlCol="0" anchor="ctr"/>
+          <a:lstStyle/>
+          <a:p>
+            <a:pPr algn="ctr"/>
+          </a:p>
+        </p:txBody>
+      </p:sp>
+      <p:sp>
+        <p:nvSpPr>
+          <p:cNvPr id="176" name="Oval 175"/>
+          <p:cNvSpPr/>
+          <p:nvPr/>
+        </p:nvSpPr>
+        <p:spPr>
+          <a:xfrm>
+            <a:off x="9663074" y="5459914"/>
+            <a:ext cx="38404" cy="38404"/>
+          </a:xfrm>
+          <a:prstGeom prst="ellipse">
+            <a:avLst/>
+          </a:prstGeom>
+          <a:solidFill>
+            <a:srgbClr val="0F1E3D"/>
+          </a:solidFill>
+          <a:ln>
+            <a:noFill/>
+          </a:ln>
+          <a:effectLst/>
+        </p:spPr>
+        <p:style>
+          <a:lnRef idx="1">
+            <a:schemeClr val="accent1"/>
+          </a:lnRef>
+          <a:fillRef idx="3">
+            <a:schemeClr val="accent1"/>
+          </a:fillRef>
+          <a:effectRef idx="2">
+            <a:schemeClr val="accent1"/>
+          </a:effectRef>
+          <a:fontRef idx="minor">
+            <a:schemeClr val="lt1"/>
+          </a:fontRef>
+        </p:style>
+        <p:txBody>
+          <a:bodyPr rtlCol="0" anchor="ctr"/>
+          <a:lstStyle/>
+          <a:p>
+            <a:pPr algn="ctr"/>
+          </a:p>
+        </p:txBody>
+      </p:sp>
+      <p:sp>
+        <p:nvSpPr>
+          <p:cNvPr id="177" name="Oval 176"/>
+          <p:cNvSpPr/>
+          <p:nvPr/>
+        </p:nvSpPr>
+        <p:spPr>
+          <a:xfrm>
+            <a:off x="9866681" y="5449926"/>
+            <a:ext cx="38404" cy="38404"/>
+          </a:xfrm>
+          <a:prstGeom prst="ellipse">
+            <a:avLst/>
+          </a:prstGeom>
+          <a:solidFill>
+            <a:srgbClr val="0F1E3D"/>
+          </a:solidFill>
+          <a:ln>
+            <a:noFill/>
+          </a:ln>
+          <a:effectLst/>
+        </p:spPr>
+        <p:style>
+          <a:lnRef idx="1">
+            <a:schemeClr val="accent1"/>
+          </a:lnRef>
+          <a:fillRef idx="3">
+            <a:schemeClr val="accent1"/>
+          </a:fillRef>
+          <a:effectRef idx="2">
+            <a:schemeClr val="accent1"/>
+          </a:effectRef>
+          <a:fontRef idx="minor">
+            <a:schemeClr val="lt1"/>
+          </a:fontRef>
+        </p:style>
+        <p:txBody>
+          <a:bodyPr rtlCol="0" anchor="ctr"/>
+          <a:lstStyle/>
+          <a:p>
+            <a:pPr algn="ctr"/>
+          </a:p>
+        </p:txBody>
+      </p:sp>
+      <p:sp>
+        <p:nvSpPr>
+          <p:cNvPr id="178" name="Oval 177"/>
+          <p:cNvSpPr/>
+          <p:nvPr/>
+        </p:nvSpPr>
+        <p:spPr>
+          <a:xfrm>
+            <a:off x="10070287" y="5446412"/>
+            <a:ext cx="38404" cy="38404"/>
+          </a:xfrm>
+          <a:prstGeom prst="ellipse">
+            <a:avLst/>
+          </a:prstGeom>
+          <a:solidFill>
+            <a:srgbClr val="0F1E3D"/>
+          </a:solidFill>
+          <a:ln>
+            <a:noFill/>
+          </a:ln>
+          <a:effectLst/>
+        </p:spPr>
+        <p:style>
+          <a:lnRef idx="1">
+            <a:schemeClr val="accent1"/>
+          </a:lnRef>
+          <a:fillRef idx="3">
+            <a:schemeClr val="accent1"/>
+          </a:fillRef>
+          <a:effectRef idx="2">
+            <a:schemeClr val="accent1"/>
+          </a:effectRef>
+          <a:fontRef idx="minor">
+            <a:schemeClr val="lt1"/>
+          </a:fontRef>
+        </p:style>
+        <p:txBody>
+          <a:bodyPr rtlCol="0" anchor="ctr"/>
+          <a:lstStyle/>
+          <a:p>
+            <a:pPr algn="ctr"/>
+          </a:p>
+        </p:txBody>
+      </p:sp>
+      <p:sp>
+        <p:nvSpPr>
+          <p:cNvPr id="179" name="Oval 178"/>
+          <p:cNvSpPr/>
+          <p:nvPr/>
+        </p:nvSpPr>
+        <p:spPr>
+          <a:xfrm>
+            <a:off x="10273894" y="5447337"/>
+            <a:ext cx="38404" cy="38404"/>
+          </a:xfrm>
+          <a:prstGeom prst="ellipse">
+            <a:avLst/>
+          </a:prstGeom>
+          <a:solidFill>
+            <a:srgbClr val="0F1E3D"/>
+          </a:solidFill>
+          <a:ln>
+            <a:noFill/>
+          </a:ln>
+          <a:effectLst/>
+        </p:spPr>
+        <p:style>
+          <a:lnRef idx="1">
+            <a:schemeClr val="accent1"/>
+          </a:lnRef>
+          <a:fillRef idx="3">
+            <a:schemeClr val="accent1"/>
+          </a:fillRef>
+          <a:effectRef idx="2">
+            <a:schemeClr val="accent1"/>
+          </a:effectRef>
+          <a:fontRef idx="minor">
+            <a:schemeClr val="lt1"/>
+          </a:fontRef>
+        </p:style>
+        <p:txBody>
+          <a:bodyPr rtlCol="0" anchor="ctr"/>
+          <a:lstStyle/>
+          <a:p>
+            <a:pPr algn="ctr"/>
+          </a:p>
+        </p:txBody>
+      </p:sp>
+      <p:sp>
+        <p:nvSpPr>
+          <p:cNvPr id="180" name="Oval 179"/>
+          <p:cNvSpPr/>
+          <p:nvPr/>
+        </p:nvSpPr>
+        <p:spPr>
+          <a:xfrm>
+            <a:off x="10470184" y="5642468"/>
+            <a:ext cx="53035" cy="53035"/>
+          </a:xfrm>
+          <a:prstGeom prst="ellipse">
+            <a:avLst/>
+          </a:prstGeom>
+          <a:solidFill>
+            <a:srgbClr val="CC3328"/>
+          </a:solidFill>
+          <a:ln>
+            <a:noFill/>
+          </a:ln>
+          <a:effectLst/>
+        </p:spPr>
+        <p:style>
+          <a:lnRef idx="1">
+            <a:schemeClr val="accent1"/>
+          </a:lnRef>
+          <a:fillRef idx="3">
+            <a:schemeClr val="accent1"/>
+          </a:fillRef>
+          <a:effectRef idx="2">
+            <a:schemeClr val="accent1"/>
+          </a:effectRef>
+          <a:fontRef idx="minor">
+            <a:schemeClr val="lt1"/>
+          </a:fontRef>
+        </p:style>
+        <p:txBody>
+          <a:bodyPr rtlCol="0" anchor="ctr"/>
+          <a:lstStyle/>
+          <a:p>
+            <a:pPr algn="ctr"/>
+          </a:p>
+        </p:txBody>
+      </p:sp>
+      <p:sp>
+        <p:nvSpPr>
+          <p:cNvPr id="181" name="Oval 180"/>
+          <p:cNvSpPr/>
+          <p:nvPr/>
+        </p:nvSpPr>
+        <p:spPr>
+          <a:xfrm>
+            <a:off x="10681106" y="5441414"/>
+            <a:ext cx="38404" cy="38404"/>
+          </a:xfrm>
+          <a:prstGeom prst="ellipse">
+            <a:avLst/>
+          </a:prstGeom>
+          <a:solidFill>
+            <a:srgbClr val="0F1E3D"/>
+          </a:solidFill>
+          <a:ln>
+            <a:noFill/>
+          </a:ln>
+          <a:effectLst/>
+        </p:spPr>
+        <p:style>
+          <a:lnRef idx="1">
+            <a:schemeClr val="accent1"/>
+          </a:lnRef>
+          <a:fillRef idx="3">
+            <a:schemeClr val="accent1"/>
+          </a:fillRef>
+          <a:effectRef idx="2">
+            <a:schemeClr val="accent1"/>
+          </a:effectRef>
+          <a:fontRef idx="minor">
+            <a:schemeClr val="lt1"/>
+          </a:fontRef>
+        </p:style>
+        <p:txBody>
+          <a:bodyPr rtlCol="0" anchor="ctr"/>
+          <a:lstStyle/>
+          <a:p>
+            <a:pPr algn="ctr"/>
+          </a:p>
+        </p:txBody>
+      </p:sp>
+      <p:sp>
+        <p:nvSpPr>
+          <p:cNvPr id="182" name="Oval 181"/>
+          <p:cNvSpPr/>
+          <p:nvPr/>
+        </p:nvSpPr>
+        <p:spPr>
+          <a:xfrm>
+            <a:off x="10884713" y="5402677"/>
+            <a:ext cx="38404" cy="38404"/>
+          </a:xfrm>
+          <a:prstGeom prst="ellipse">
+            <a:avLst/>
+          </a:prstGeom>
+          <a:solidFill>
+            <a:srgbClr val="0F1E3D"/>
+          </a:solidFill>
+          <a:ln>
+            <a:noFill/>
+          </a:ln>
+          <a:effectLst/>
+        </p:spPr>
+        <p:style>
+          <a:lnRef idx="1">
+            <a:schemeClr val="accent1"/>
+          </a:lnRef>
+          <a:fillRef idx="3">
+            <a:schemeClr val="accent1"/>
+          </a:fillRef>
+          <a:effectRef idx="2">
+            <a:schemeClr val="accent1"/>
+          </a:effectRef>
+          <a:fontRef idx="minor">
+            <a:schemeClr val="lt1"/>
+          </a:fontRef>
+        </p:style>
+        <p:txBody>
+          <a:bodyPr rtlCol="0" anchor="ctr"/>
+          <a:lstStyle/>
+          <a:p>
+            <a:pPr algn="ctr"/>
+          </a:p>
+        </p:txBody>
+      </p:sp>
+      <p:sp>
+        <p:nvSpPr>
+          <p:cNvPr id="183" name="Oval 182"/>
+          <p:cNvSpPr/>
+          <p:nvPr/>
+        </p:nvSpPr>
+        <p:spPr>
+          <a:xfrm>
+            <a:off x="11088319" y="5424637"/>
+            <a:ext cx="38404" cy="38404"/>
+          </a:xfrm>
+          <a:prstGeom prst="ellipse">
+            <a:avLst/>
+          </a:prstGeom>
+          <a:solidFill>
+            <a:srgbClr val="0F1E3D"/>
+          </a:solidFill>
+          <a:ln>
+            <a:noFill/>
+          </a:ln>
+          <a:effectLst/>
+        </p:spPr>
+        <p:style>
+          <a:lnRef idx="1">
+            <a:schemeClr val="accent1"/>
+          </a:lnRef>
+          <a:fillRef idx="3">
+            <a:schemeClr val="accent1"/>
+          </a:fillRef>
+          <a:effectRef idx="2">
+            <a:schemeClr val="accent1"/>
+          </a:effectRef>
+          <a:fontRef idx="minor">
+            <a:schemeClr val="lt1"/>
+          </a:fontRef>
+        </p:style>
+        <p:txBody>
+          <a:bodyPr rtlCol="0" anchor="ctr"/>
+          <a:lstStyle/>
+          <a:p>
+            <a:pPr algn="ctr"/>
+          </a:p>
+        </p:txBody>
+      </p:sp>
+      <p:sp>
+        <p:nvSpPr>
+          <p:cNvPr id="184" name="Oval 183"/>
+          <p:cNvSpPr/>
+          <p:nvPr/>
+        </p:nvSpPr>
+        <p:spPr>
+          <a:xfrm>
+            <a:off x="11291926" y="5412403"/>
+            <a:ext cx="38404" cy="38404"/>
+          </a:xfrm>
+          <a:prstGeom prst="ellipse">
+            <a:avLst/>
+          </a:prstGeom>
+          <a:solidFill>
+            <a:srgbClr val="0F1E3D"/>
+          </a:solidFill>
+          <a:ln>
+            <a:noFill/>
+          </a:ln>
+          <a:effectLst/>
+        </p:spPr>
+        <p:style>
+          <a:lnRef idx="1">
+            <a:schemeClr val="accent1"/>
+          </a:lnRef>
+          <a:fillRef idx="3">
+            <a:schemeClr val="accent1"/>
+          </a:fillRef>
+          <a:effectRef idx="2">
+            <a:schemeClr val="accent1"/>
+          </a:effectRef>
+          <a:fontRef idx="minor">
+            <a:schemeClr val="lt1"/>
+          </a:fontRef>
+        </p:style>
+        <p:txBody>
+          <a:bodyPr rtlCol="0" anchor="ctr"/>
+          <a:lstStyle/>
+          <a:p>
+            <a:pPr algn="ctr"/>
+          </a:p>
+        </p:txBody>
+      </p:sp>
+      <p:sp>
+        <p:nvSpPr>
+          <p:cNvPr id="185" name="TextBox 184"/>
+          <p:cNvSpPr txBox="1"/>
+          <p:nvPr/>
+        </p:nvSpPr>
+        <p:spPr>
+          <a:xfrm>
+            <a:off x="8092440" y="5696712"/>
+            <a:ext cx="3383280" cy="182880"/>
+          </a:xfrm>
+          <a:prstGeom prst="rect">
+            <a:avLst/>
+          </a:prstGeom>
+          <a:noFill/>
+        </p:spPr>
+        <p:txBody>
+          <a:bodyPr wrap="none" anchor="ctr" lIns="0" rIns="0" tIns="0" bIns="0">
+            <a:spAutoFit/>
+          </a:bodyPr>
+          <a:lstStyle/>
+          <a:p>
+            <a:pPr algn="ctr"/>
+            <a:r>
+              <a:rPr sz="950">
+                <a:solidFill>
+                  <a:srgbClr val="6B7280"/>
+                </a:solidFill>
+                <a:latin typeface="맑은 고딕"/>
+                <a:ea typeface="맑은 고딕"/>
+              </a:rPr>
+              <a:t>hunting (heavy-tail)</a:t>
+            </a:r>
+          </a:p>
+        </p:txBody>
+      </p:sp>
+      <p:sp>
+        <p:nvSpPr>
+          <p:cNvPr id="186" name="TextBox 185"/>
           <p:cNvSpPr txBox="1"/>
           <p:nvPr/>
         </p:nvSpPr>
@@ -4277,7 +12025,7 @@
       </p:sp>
       <p:sp>
         <p:nvSpPr>
-          <p:cNvPr id="9" name="TextBox 8"/>
+          <p:cNvPr id="187" name="TextBox 186"/>
           <p:cNvSpPr txBox="1"/>
           <p:nvPr/>
         </p:nvSpPr>
@@ -4313,7 +12061,7 @@
       </p:sp>
       <p:sp>
         <p:nvSpPr>
-          <p:cNvPr id="10" name="TextBox 9"/>
+          <p:cNvPr id="188" name="TextBox 187"/>
           <p:cNvSpPr txBox="1"/>
           <p:nvPr/>
         </p:nvSpPr>

--- a/recommendation/presentation/발표_P3_데이터생성_최호길.pptx
+++ b/recommendation/presentation/발표_P3_데이터생성_최호길.pptx
@@ -9,6 +9,7 @@
     <p:sldId id="257" r:id="rId8"/>
     <p:sldId id="258" r:id="rId9"/>
     <p:sldId id="259" r:id="rId10"/>
+    <p:sldId id="260" r:id="rId11"/>
   </p:sldIdLst>
   <p:sldSz cx="12191695" cy="6858000" type="screen4x3"/>
   <p:notesSz cx="6858000" cy="9144000"/>
@@ -12717,7 +12718,7 @@
                 <a:latin typeface="맑은 고딕"/>
                 <a:ea typeface="맑은 고딕"/>
               </a:rPr>
-              <a:t>P3 | 결과</a:t>
+              <a:t>P3 | 결과 ①</a:t>
             </a:r>
           </a:p>
         </p:txBody>
@@ -12753,7 +12754,7 @@
                 <a:latin typeface="맑은 고딕"/>
                 <a:ea typeface="맑은 고딕"/>
               </a:rPr>
-              <a:t>단변수 반복 실험으로 조건별 BKM 확보 — 백본·데이터셋·운영 검증</a:t>
+              <a:t>단변수 반복 실험 — 조건별 BKM 정리 (각 5-seed)</a:t>
             </a:r>
           </a:p>
         </p:txBody>
@@ -12767,7 +12768,7 @@
         <p:spPr>
           <a:xfrm>
             <a:off x="640080" y="1828800"/>
-            <a:ext cx="10972800" cy="896112"/>
+            <a:ext cx="10972800" cy="713232"/>
           </a:xfrm>
           <a:prstGeom prst="rect">
             <a:avLst/>
@@ -12803,7 +12804,7 @@
                 <a:latin typeface="맑은 고딕"/>
                 <a:ea typeface="맑은 고딕"/>
               </a:rPr>
-              <a:t>각 학습 조건을 한 번에 하나씩만 변경하는 단변수(single-axis) 방식으로 5-seed 반복 평가를 수행하고, 축별 최적값을 BKM(Best Known Method)으로 정리하였습니다. 정상 비율 축에서 F1 0.9944→</a:t>
+              <a:t>각 학습 조건을 한 번에 하나씩만 변경하는 단변수(single-axis) 방식으로 5-seed 반복 평가하고, 축별 최적값을 BKM(Best Known Method)으로 정리하였습니다. 정상 비율 축에서 F1 0.9944→</a:t>
             </a:r>
             <a:r>
               <a:rPr sz="1450" b="1">
@@ -12823,7 +12824,7 @@
                 <a:latin typeface="맑은 고딕"/>
                 <a:ea typeface="맑은 고딕"/>
               </a:rPr>
-              <a:t>, 놓친 불량 4.6→0.8로 가장 큰 개선을 확인하였으며, 백본·데이터셋·운영 임계값까지 동일 프로토콜로 비교하였습니다</a:t>
+              <a:t>, 놓친 불량 4.6→0.8로 가장 큰 개선을 확인하였습니다</a:t>
             </a:r>
           </a:p>
         </p:txBody>
@@ -12836,8 +12837,8 @@
         </p:nvSpPr>
         <p:spPr>
           <a:xfrm>
-            <a:off x="1778652" y="2843928"/>
-            <a:ext cx="8695656" cy="3108672"/>
+            <a:off x="2175138" y="2661048"/>
+            <a:ext cx="7902684" cy="3291552"/>
           </a:xfrm>
           <a:prstGeom prst="rect">
             <a:avLst/>
@@ -12876,7 +12877,7 @@
       </p:sp>
       <p:pic>
         <p:nvPicPr>
-          <p:cNvPr id="7" name="Picture 6" descr="p3_bkm.png"/>
+          <p:cNvPr id="7" name="Picture 6" descr="p3_bkm_table.png"/>
           <p:cNvPicPr>
             <a:picLocks noChangeAspect="1"/>
           </p:cNvPicPr>
@@ -12890,8 +12891,8 @@
         </p:blipFill>
         <p:spPr>
           <a:xfrm>
-            <a:off x="1787652" y="2852928"/>
-            <a:ext cx="8677656" cy="3090672"/>
+            <a:off x="2184138" y="2670048"/>
+            <a:ext cx="7884684" cy="3273552"/>
           </a:xfrm>
           <a:prstGeom prst="rect">
             <a:avLst/>
@@ -12929,7 +12930,7 @@
                 <a:latin typeface="맑은 고딕"/>
                 <a:ea typeface="맑은 고딕"/>
               </a:rPr>
-              <a:t>단변수 11축 각 5-seed 반복 · baseline F1 0.9975 (0.9940–0.9993) 반복 안정 · 축별 best 를 합친 통합 BKM 은 GPU 확보 후 진행 · 2-stage 유형분류 pilot 0.73</a:t>
+              <a:t>총 11개 축 각 5-seed 반복 · * smoothing 은 3-seed pilot · 축별 best 를 합친 통합 BKM 은 다음 장</a:t>
             </a:r>
           </a:p>
         </p:txBody>
@@ -13002,6 +13003,518 @@
                 <a:ea typeface="맑은 고딕"/>
               </a:rPr>
               <a:t>4</a:t>
+            </a:r>
+          </a:p>
+        </p:txBody>
+      </p:sp>
+    </p:spTree>
+  </p:cSld>
+  <p:clrMapOvr>
+    <a:masterClrMapping/>
+  </p:clrMapOvr>
+</p:sld>
+</file>
+
+<file path=ppt/slides/slide5.xml><?xml version="1.0" encoding="utf-8"?>
+<p:sld xmlns:a="http://schemas.openxmlformats.org/drawingml/2006/main" xmlns:p="http://schemas.openxmlformats.org/presentationml/2006/main" xmlns:r="http://schemas.openxmlformats.org/officeDocument/2006/relationships">
+  <p:cSld>
+    <p:bg>
+      <p:bgPr>
+        <a:solidFill>
+          <a:srgbClr val="FFFFFF"/>
+        </a:solidFill>
+        <a:effectLst/>
+      </p:bgPr>
+    </p:bg>
+    <p:spTree>
+      <p:nvGrpSpPr>
+        <p:cNvPr id="1" name=""/>
+        <p:cNvGrpSpPr/>
+        <p:nvPr/>
+      </p:nvGrpSpPr>
+      <p:grpSpPr/>
+      <p:sp>
+        <p:nvSpPr>
+          <p:cNvPr id="2" name="Rectangle 1"/>
+          <p:cNvSpPr/>
+          <p:nvPr/>
+        </p:nvSpPr>
+        <p:spPr>
+          <a:xfrm>
+            <a:off x="640080" y="502920"/>
+            <a:ext cx="123444" cy="768096"/>
+          </a:xfrm>
+          <a:prstGeom prst="rect">
+            <a:avLst/>
+          </a:prstGeom>
+          <a:solidFill>
+            <a:srgbClr val="CFD4DB"/>
+          </a:solidFill>
+          <a:ln>
+            <a:noFill/>
+          </a:ln>
+          <a:effectLst/>
+        </p:spPr>
+        <p:style>
+          <a:lnRef idx="1">
+            <a:schemeClr val="accent1"/>
+          </a:lnRef>
+          <a:fillRef idx="3">
+            <a:schemeClr val="accent1"/>
+          </a:fillRef>
+          <a:effectRef idx="2">
+            <a:schemeClr val="accent1"/>
+          </a:effectRef>
+          <a:fontRef idx="minor">
+            <a:schemeClr val="lt1"/>
+          </a:fontRef>
+        </p:style>
+        <p:txBody>
+          <a:bodyPr rtlCol="0" anchor="ctr"/>
+          <a:lstStyle/>
+          <a:p>
+            <a:pPr algn="ctr"/>
+          </a:p>
+        </p:txBody>
+      </p:sp>
+      <p:sp>
+        <p:nvSpPr>
+          <p:cNvPr id="3" name="TextBox 2"/>
+          <p:cNvSpPr txBox="1"/>
+          <p:nvPr/>
+        </p:nvSpPr>
+        <p:spPr>
+          <a:xfrm>
+            <a:off x="932688" y="448056"/>
+            <a:ext cx="10881360" cy="256032"/>
+          </a:xfrm>
+          <a:prstGeom prst="rect">
+            <a:avLst/>
+          </a:prstGeom>
+          <a:noFill/>
+        </p:spPr>
+        <p:txBody>
+          <a:bodyPr wrap="square" anchor="t" lIns="0" rIns="0" tIns="0" bIns="0">
+            <a:spAutoFit/>
+          </a:bodyPr>
+          <a:lstStyle/>
+          <a:p>
+            <a:pPr algn="l"/>
+            <a:r>
+              <a:rPr sz="1300" b="1">
+                <a:solidFill>
+                  <a:srgbClr val="8A929E"/>
+                </a:solidFill>
+                <a:latin typeface="맑은 고딕"/>
+                <a:ea typeface="맑은 고딕"/>
+              </a:rPr>
+              <a:t>P3 | 결과 ②</a:t>
+            </a:r>
+          </a:p>
+        </p:txBody>
+      </p:sp>
+      <p:sp>
+        <p:nvSpPr>
+          <p:cNvPr id="4" name="TextBox 3"/>
+          <p:cNvSpPr txBox="1"/>
+          <p:nvPr/>
+        </p:nvSpPr>
+        <p:spPr>
+          <a:xfrm>
+            <a:off x="932688" y="704088"/>
+            <a:ext cx="10881360" cy="603504"/>
+          </a:xfrm>
+          <a:prstGeom prst="rect">
+            <a:avLst/>
+          </a:prstGeom>
+          <a:noFill/>
+        </p:spPr>
+        <p:txBody>
+          <a:bodyPr wrap="square" anchor="t" lIns="0" rIns="0" tIns="0" bIns="0">
+            <a:spAutoFit/>
+          </a:bodyPr>
+          <a:lstStyle/>
+          <a:p>
+            <a:pPr algn="l"/>
+            <a:r>
+              <a:rPr sz="3100" b="1">
+                <a:solidFill>
+                  <a:srgbClr val="0F1E3D"/>
+                </a:solidFill>
+                <a:latin typeface="맑은 고딕"/>
+                <a:ea typeface="맑은 고딕"/>
+              </a:rPr>
+              <a:t>백본 비교와 누적 개선 — baseline → BKM → best backbone</a:t>
+            </a:r>
+          </a:p>
+        </p:txBody>
+      </p:sp>
+      <p:sp>
+        <p:nvSpPr>
+          <p:cNvPr id="5" name="TextBox 4"/>
+          <p:cNvSpPr txBox="1"/>
+          <p:nvPr/>
+        </p:nvSpPr>
+        <p:spPr>
+          <a:xfrm>
+            <a:off x="640080" y="1828800"/>
+            <a:ext cx="10972800" cy="566928"/>
+          </a:xfrm>
+          <a:prstGeom prst="rect">
+            <a:avLst/>
+          </a:prstGeom>
+          <a:noFill/>
+        </p:spPr>
+        <p:txBody>
+          <a:bodyPr wrap="square" anchor="t" lIns="0" rIns="0" tIns="0" bIns="0">
+            <a:spAutoFit/>
+          </a:bodyPr>
+          <a:lstStyle/>
+          <a:p>
+            <a:pPr marL="274320" indent="-274320">
+              <a:spcAft>
+                <a:spcPts val="500"/>
+              </a:spcAft>
+            </a:pPr>
+            <a:r>
+              <a:rPr sz="1450" b="0">
+                <a:solidFill>
+                  <a:srgbClr val="96A0AD"/>
+                </a:solidFill>
+                <a:latin typeface="맑은 고딕"/>
+                <a:ea typeface="맑은 고딕"/>
+              </a:rPr>
+              <a:t>●  </a:t>
+            </a:r>
+            <a:r>
+              <a:rPr sz="1450">
+                <a:solidFill>
+                  <a:srgbClr val="1A1F2E"/>
+                </a:solidFill>
+                <a:latin typeface="맑은 고딕"/>
+                <a:ea typeface="맑은 고딕"/>
+              </a:rPr>
+              <a:t>동일 데이터와 프로토콜에서 백본을 교체하며 비교하고(backbone sweep), baseline 에 단변수 BKM 을 누적 적용한 뒤 최적 백본까지 반영했을 때의 단계별 성능을 정리하였습니다</a:t>
+            </a:r>
+          </a:p>
+        </p:txBody>
+      </p:sp>
+      <p:sp>
+        <p:nvSpPr>
+          <p:cNvPr id="6" name="Rectangle 5"/>
+          <p:cNvSpPr/>
+          <p:nvPr/>
+        </p:nvSpPr>
+        <p:spPr>
+          <a:xfrm>
+            <a:off x="4029718" y="2514744"/>
+            <a:ext cx="4193523" cy="1170144"/>
+          </a:xfrm>
+          <a:prstGeom prst="rect">
+            <a:avLst/>
+          </a:prstGeom>
+          <a:solidFill>
+            <a:srgbClr val="FFFFFF"/>
+          </a:solidFill>
+          <a:ln w="12700">
+            <a:solidFill>
+              <a:srgbClr val="D7DEEA"/>
+            </a:solidFill>
+          </a:ln>
+          <a:effectLst/>
+        </p:spPr>
+        <p:style>
+          <a:lnRef idx="1">
+            <a:schemeClr val="accent1"/>
+          </a:lnRef>
+          <a:fillRef idx="3">
+            <a:schemeClr val="accent1"/>
+          </a:fillRef>
+          <a:effectRef idx="2">
+            <a:schemeClr val="accent1"/>
+          </a:effectRef>
+          <a:fontRef idx="minor">
+            <a:schemeClr val="lt1"/>
+          </a:fontRef>
+        </p:style>
+        <p:txBody>
+          <a:bodyPr rtlCol="0" anchor="ctr"/>
+          <a:lstStyle/>
+          <a:p>
+            <a:pPr algn="ctr"/>
+          </a:p>
+        </p:txBody>
+      </p:sp>
+      <p:pic>
+        <p:nvPicPr>
+          <p:cNvPr id="7" name="Picture 6" descr="p3_backbone.png"/>
+          <p:cNvPicPr>
+            <a:picLocks noChangeAspect="1"/>
+          </p:cNvPicPr>
+          <p:nvPr/>
+        </p:nvPicPr>
+        <p:blipFill>
+          <a:blip r:embed="rId2"/>
+          <a:stretch>
+            <a:fillRect/>
+          </a:stretch>
+        </p:blipFill>
+        <p:spPr>
+          <a:xfrm>
+            <a:off x="4038718" y="2523744"/>
+            <a:ext cx="4175523" cy="1152144"/>
+          </a:xfrm>
+          <a:prstGeom prst="rect">
+            <a:avLst/>
+          </a:prstGeom>
+        </p:spPr>
+      </p:pic>
+      <p:sp>
+        <p:nvSpPr>
+          <p:cNvPr id="8" name="TextBox 7"/>
+          <p:cNvSpPr txBox="1"/>
+          <p:nvPr/>
+        </p:nvSpPr>
+        <p:spPr>
+          <a:xfrm>
+            <a:off x="3869554" y="3767328"/>
+            <a:ext cx="4513851" cy="329184"/>
+          </a:xfrm>
+          <a:prstGeom prst="rect">
+            <a:avLst/>
+          </a:prstGeom>
+          <a:noFill/>
+        </p:spPr>
+        <p:txBody>
+          <a:bodyPr wrap="square" anchor="ctr" lIns="0" rIns="0" tIns="0" bIns="0">
+            <a:spAutoFit/>
+          </a:bodyPr>
+          <a:lstStyle/>
+          <a:p>
+            <a:pPr algn="ctr"/>
+            <a:r>
+              <a:rPr sz="1450" b="1">
+                <a:solidFill>
+                  <a:srgbClr val="0F1E3D"/>
+                </a:solidFill>
+                <a:latin typeface="맑은 고딕"/>
+                <a:ea typeface="맑은 고딕"/>
+              </a:rPr>
+              <a:t>Backbone sweep — 백본별 F1 / FN / FP</a:t>
+            </a:r>
+          </a:p>
+        </p:txBody>
+      </p:sp>
+      <p:sp>
+        <p:nvSpPr>
+          <p:cNvPr id="9" name="Rectangle 8"/>
+          <p:cNvSpPr/>
+          <p:nvPr/>
+        </p:nvSpPr>
+        <p:spPr>
+          <a:xfrm>
+            <a:off x="4029718" y="4361832"/>
+            <a:ext cx="4193523" cy="1170144"/>
+          </a:xfrm>
+          <a:prstGeom prst="rect">
+            <a:avLst/>
+          </a:prstGeom>
+          <a:solidFill>
+            <a:srgbClr val="FFFFFF"/>
+          </a:solidFill>
+          <a:ln w="12700">
+            <a:solidFill>
+              <a:srgbClr val="D7DEEA"/>
+            </a:solidFill>
+          </a:ln>
+          <a:effectLst/>
+        </p:spPr>
+        <p:style>
+          <a:lnRef idx="1">
+            <a:schemeClr val="accent1"/>
+          </a:lnRef>
+          <a:fillRef idx="3">
+            <a:schemeClr val="accent1"/>
+          </a:fillRef>
+          <a:effectRef idx="2">
+            <a:schemeClr val="accent1"/>
+          </a:effectRef>
+          <a:fontRef idx="minor">
+            <a:schemeClr val="lt1"/>
+          </a:fontRef>
+        </p:style>
+        <p:txBody>
+          <a:bodyPr rtlCol="0" anchor="ctr"/>
+          <a:lstStyle/>
+          <a:p>
+            <a:pPr algn="ctr"/>
+          </a:p>
+        </p:txBody>
+      </p:sp>
+      <p:pic>
+        <p:nvPicPr>
+          <p:cNvPr id="10" name="Picture 9" descr="p3_progression.png"/>
+          <p:cNvPicPr>
+            <a:picLocks noChangeAspect="1"/>
+          </p:cNvPicPr>
+          <p:nvPr/>
+        </p:nvPicPr>
+        <p:blipFill>
+          <a:blip r:embed="rId3"/>
+          <a:stretch>
+            <a:fillRect/>
+          </a:stretch>
+        </p:blipFill>
+        <p:spPr>
+          <a:xfrm>
+            <a:off x="4038718" y="4370832"/>
+            <a:ext cx="4175523" cy="1152144"/>
+          </a:xfrm>
+          <a:prstGeom prst="rect">
+            <a:avLst/>
+          </a:prstGeom>
+        </p:spPr>
+      </p:pic>
+      <p:sp>
+        <p:nvSpPr>
+          <p:cNvPr id="11" name="TextBox 10"/>
+          <p:cNvSpPr txBox="1"/>
+          <p:nvPr/>
+        </p:nvSpPr>
+        <p:spPr>
+          <a:xfrm>
+            <a:off x="3869554" y="5614416"/>
+            <a:ext cx="4513851" cy="329184"/>
+          </a:xfrm>
+          <a:prstGeom prst="rect">
+            <a:avLst/>
+          </a:prstGeom>
+          <a:noFill/>
+        </p:spPr>
+        <p:txBody>
+          <a:bodyPr wrap="square" anchor="ctr" lIns="0" rIns="0" tIns="0" bIns="0">
+            <a:spAutoFit/>
+          </a:bodyPr>
+          <a:lstStyle/>
+          <a:p>
+            <a:pPr algn="ctr"/>
+            <a:r>
+              <a:rPr sz="1450" b="1">
+                <a:solidFill>
+                  <a:srgbClr val="0F1E3D"/>
+                </a:solidFill>
+                <a:latin typeface="맑은 고딕"/>
+                <a:ea typeface="맑은 고딕"/>
+              </a:rPr>
+              <a:t>baseline → BKM combined → best backbone (F1 / FN / FP mean)</a:t>
+            </a:r>
+          </a:p>
+        </p:txBody>
+      </p:sp>
+      <p:sp>
+        <p:nvSpPr>
+          <p:cNvPr id="12" name="TextBox 11"/>
+          <p:cNvSpPr txBox="1"/>
+          <p:nvPr/>
+        </p:nvSpPr>
+        <p:spPr>
+          <a:xfrm>
+            <a:off x="640080" y="5961888"/>
+            <a:ext cx="10972800" cy="274320"/>
+          </a:xfrm>
+          <a:prstGeom prst="rect">
+            <a:avLst/>
+          </a:prstGeom>
+          <a:noFill/>
+        </p:spPr>
+        <p:txBody>
+          <a:bodyPr wrap="square" anchor="t" lIns="0" rIns="0" tIns="0" bIns="0">
+            <a:spAutoFit/>
+          </a:bodyPr>
+          <a:lstStyle/>
+          <a:p>
+            <a:pPr algn="ctr"/>
+            <a:r>
+              <a:rPr sz="1300">
+                <a:solidFill>
+                  <a:srgbClr val="3A485C"/>
+                </a:solidFill>
+                <a:latin typeface="맑은 고딕"/>
+                <a:ea typeface="맑은 고딕"/>
+              </a:rPr>
+              <a:t>백본 수치와 BKM combined / best backbone 수치는 실측 입력 후 확정 (현재 임시값)</a:t>
+            </a:r>
+          </a:p>
+        </p:txBody>
+      </p:sp>
+      <p:sp>
+        <p:nvSpPr>
+          <p:cNvPr id="13" name="TextBox 12"/>
+          <p:cNvSpPr txBox="1"/>
+          <p:nvPr/>
+        </p:nvSpPr>
+        <p:spPr>
+          <a:xfrm>
+            <a:off x="457200" y="6437376"/>
+            <a:ext cx="8229600" cy="292608"/>
+          </a:xfrm>
+          <a:prstGeom prst="rect">
+            <a:avLst/>
+          </a:prstGeom>
+          <a:noFill/>
+        </p:spPr>
+        <p:txBody>
+          <a:bodyPr wrap="square" anchor="ctr" lIns="0" rIns="0" tIns="0" bIns="0">
+            <a:spAutoFit/>
+          </a:bodyPr>
+          <a:lstStyle/>
+          <a:p>
+            <a:pPr algn="l"/>
+            <a:r>
+              <a:rPr sz="900">
+                <a:solidFill>
+                  <a:srgbClr val="6B7280"/>
+                </a:solidFill>
+                <a:latin typeface="맑은 고딕"/>
+                <a:ea typeface="맑은 고딕"/>
+              </a:rPr>
+              <a:t>최호길 | QIE Data Science | AI Specialist 인증</a:t>
+            </a:r>
+          </a:p>
+        </p:txBody>
+      </p:sp>
+      <p:sp>
+        <p:nvSpPr>
+          <p:cNvPr id="14" name="TextBox 13"/>
+          <p:cNvSpPr txBox="1"/>
+          <p:nvPr/>
+        </p:nvSpPr>
+        <p:spPr>
+          <a:xfrm>
+            <a:off x="10972800" y="6437376"/>
+            <a:ext cx="758952" cy="292608"/>
+          </a:xfrm>
+          <a:prstGeom prst="rect">
+            <a:avLst/>
+          </a:prstGeom>
+          <a:noFill/>
+        </p:spPr>
+        <p:txBody>
+          <a:bodyPr wrap="square" anchor="ctr" lIns="0" rIns="0" tIns="0" bIns="0">
+            <a:spAutoFit/>
+          </a:bodyPr>
+          <a:lstStyle/>
+          <a:p>
+            <a:pPr algn="r"/>
+            <a:r>
+              <a:rPr sz="900">
+                <a:solidFill>
+                  <a:srgbClr val="6B7280"/>
+                </a:solidFill>
+                <a:latin typeface="맑은 고딕"/>
+                <a:ea typeface="맑은 고딕"/>
+              </a:rPr>
+              <a:t>5</a:t>
             </a:r>
           </a:p>
         </p:txBody>

--- a/recommendation/presentation/발표_P3_데이터생성_최호길.pptx
+++ b/recommendation/presentation/발표_P3_데이터생성_최호길.pptx
@@ -12754,7 +12754,7 @@
                 <a:latin typeface="맑은 고딕"/>
                 <a:ea typeface="맑은 고딕"/>
               </a:rPr>
-              <a:t>단변수 반복 실험 — 조건별 BKM 정리 (각 5-seed)</a:t>
+              <a:t>백본·누적 개선 표와 smoothing·color 효과</a:t>
             </a:r>
           </a:p>
         </p:txBody>
@@ -12768,7 +12768,7 @@
         <p:spPr>
           <a:xfrm>
             <a:off x="640080" y="1828800"/>
-            <a:ext cx="10972800" cy="713232"/>
+            <a:ext cx="10972800" cy="566928"/>
           </a:xfrm>
           <a:prstGeom prst="rect">
             <a:avLst/>
@@ -12804,8 +12804,104 @@
                 <a:latin typeface="맑은 고딕"/>
                 <a:ea typeface="맑은 고딕"/>
               </a:rPr>
-              <a:t>각 학습 조건을 한 번에 하나씩만 변경하는 단변수(single-axis) 방식으로 5-seed 반복 평가하고, 축별 최적값을 BKM(Best Known Method)으로 정리하였습니다. 정상 비율 축에서 F1 0.9944→</a:t>
+              <a:t>백본 비교와 누적 개선을 표로 정리하고, checkpoint 평활화(smoothing window)와 rendering color 변경의 효과를 학습 곡선과 전후 이미지로 함께 제시하였습니다</a:t>
             </a:r>
+          </a:p>
+        </p:txBody>
+      </p:sp>
+      <p:sp>
+        <p:nvSpPr>
+          <p:cNvPr id="6" name="Rectangle 5"/>
+          <p:cNvSpPr/>
+          <p:nvPr/>
+        </p:nvSpPr>
+        <p:spPr>
+          <a:xfrm>
+            <a:off x="1751147" y="2514744"/>
+            <a:ext cx="2499540" cy="1170144"/>
+          </a:xfrm>
+          <a:prstGeom prst="rect">
+            <a:avLst/>
+          </a:prstGeom>
+          <a:solidFill>
+            <a:srgbClr val="FFFFFF"/>
+          </a:solidFill>
+          <a:ln w="12700">
+            <a:solidFill>
+              <a:srgbClr val="D7DEEA"/>
+            </a:solidFill>
+          </a:ln>
+          <a:effectLst/>
+        </p:spPr>
+        <p:style>
+          <a:lnRef idx="1">
+            <a:schemeClr val="accent1"/>
+          </a:lnRef>
+          <a:fillRef idx="3">
+            <a:schemeClr val="accent1"/>
+          </a:fillRef>
+          <a:effectRef idx="2">
+            <a:schemeClr val="accent1"/>
+          </a:effectRef>
+          <a:fontRef idx="minor">
+            <a:schemeClr val="lt1"/>
+          </a:fontRef>
+        </p:style>
+        <p:txBody>
+          <a:bodyPr rtlCol="0" anchor="ctr"/>
+          <a:lstStyle/>
+          <a:p>
+            <a:pPr algn="ctr"/>
+          </a:p>
+        </p:txBody>
+      </p:sp>
+      <p:pic>
+        <p:nvPicPr>
+          <p:cNvPr id="7" name="Picture 6" descr="p3_backbone_table.png"/>
+          <p:cNvPicPr>
+            <a:picLocks noChangeAspect="1"/>
+          </p:cNvPicPr>
+          <p:nvPr/>
+        </p:nvPicPr>
+        <p:blipFill>
+          <a:blip r:embed="rId2"/>
+          <a:stretch>
+            <a:fillRect/>
+          </a:stretch>
+        </p:blipFill>
+        <p:spPr>
+          <a:xfrm>
+            <a:off x="1760147" y="2523744"/>
+            <a:ext cx="2481540" cy="1152144"/>
+          </a:xfrm>
+          <a:prstGeom prst="rect">
+            <a:avLst/>
+          </a:prstGeom>
+        </p:spPr>
+      </p:pic>
+      <p:sp>
+        <p:nvSpPr>
+          <p:cNvPr id="8" name="TextBox 7"/>
+          <p:cNvSpPr txBox="1"/>
+          <p:nvPr/>
+        </p:nvSpPr>
+        <p:spPr>
+          <a:xfrm>
+            <a:off x="-124646" y="3767328"/>
+            <a:ext cx="6251126" cy="329184"/>
+          </a:xfrm>
+          <a:prstGeom prst="rect">
+            <a:avLst/>
+          </a:prstGeom>
+          <a:noFill/>
+        </p:spPr>
+        <p:txBody>
+          <a:bodyPr wrap="square" anchor="ctr" lIns="0" rIns="0" tIns="0" bIns="0">
+            <a:spAutoFit/>
+          </a:bodyPr>
+          <a:lstStyle/>
+          <a:p>
+            <a:pPr algn="ctr"/>
             <a:r>
               <a:rPr sz="1450" b="1">
                 <a:solidFill>
@@ -12814,31 +12910,127 @@
                 <a:latin typeface="맑은 고딕"/>
                 <a:ea typeface="맑은 고딕"/>
               </a:rPr>
-              <a:t>0.9988</a:t>
+              <a:t>Backbone sweep — 백본별 F1 / FN / FP</a:t>
             </a:r>
+          </a:p>
+        </p:txBody>
+      </p:sp>
+      <p:sp>
+        <p:nvSpPr>
+          <p:cNvPr id="9" name="Rectangle 8"/>
+          <p:cNvSpPr/>
+          <p:nvPr/>
+        </p:nvSpPr>
+        <p:spPr>
+          <a:xfrm>
+            <a:off x="7439990" y="2514744"/>
+            <a:ext cx="3624106" cy="1170144"/>
+          </a:xfrm>
+          <a:prstGeom prst="rect">
+            <a:avLst/>
+          </a:prstGeom>
+          <a:solidFill>
+            <a:srgbClr val="FFFFFF"/>
+          </a:solidFill>
+          <a:ln w="12700">
+            <a:solidFill>
+              <a:srgbClr val="D7DEEA"/>
+            </a:solidFill>
+          </a:ln>
+          <a:effectLst/>
+        </p:spPr>
+        <p:style>
+          <a:lnRef idx="1">
+            <a:schemeClr val="accent1"/>
+          </a:lnRef>
+          <a:fillRef idx="3">
+            <a:schemeClr val="accent1"/>
+          </a:fillRef>
+          <a:effectRef idx="2">
+            <a:schemeClr val="accent1"/>
+          </a:effectRef>
+          <a:fontRef idx="minor">
+            <a:schemeClr val="lt1"/>
+          </a:fontRef>
+        </p:style>
+        <p:txBody>
+          <a:bodyPr rtlCol="0" anchor="ctr"/>
+          <a:lstStyle/>
+          <a:p>
+            <a:pPr algn="ctr"/>
+          </a:p>
+        </p:txBody>
+      </p:sp>
+      <p:pic>
+        <p:nvPicPr>
+          <p:cNvPr id="10" name="Picture 9" descr="p3_progression_table.png"/>
+          <p:cNvPicPr>
+            <a:picLocks noChangeAspect="1"/>
+          </p:cNvPicPr>
+          <p:nvPr/>
+        </p:nvPicPr>
+        <p:blipFill>
+          <a:blip r:embed="rId3"/>
+          <a:stretch>
+            <a:fillRect/>
+          </a:stretch>
+        </p:blipFill>
+        <p:spPr>
+          <a:xfrm>
+            <a:off x="7448990" y="2523744"/>
+            <a:ext cx="3606106" cy="1152144"/>
+          </a:xfrm>
+          <a:prstGeom prst="rect">
+            <a:avLst/>
+          </a:prstGeom>
+        </p:spPr>
+      </p:pic>
+      <p:sp>
+        <p:nvSpPr>
+          <p:cNvPr id="11" name="TextBox 10"/>
+          <p:cNvSpPr txBox="1"/>
+          <p:nvPr/>
+        </p:nvSpPr>
+        <p:spPr>
+          <a:xfrm>
+            <a:off x="6126480" y="3767328"/>
+            <a:ext cx="6251126" cy="329184"/>
+          </a:xfrm>
+          <a:prstGeom prst="rect">
+            <a:avLst/>
+          </a:prstGeom>
+          <a:noFill/>
+        </p:spPr>
+        <p:txBody>
+          <a:bodyPr wrap="square" anchor="ctr" lIns="0" rIns="0" tIns="0" bIns="0">
+            <a:spAutoFit/>
+          </a:bodyPr>
+          <a:lstStyle/>
+          <a:p>
+            <a:pPr algn="ctr"/>
             <a:r>
-              <a:rPr sz="1450">
+              <a:rPr sz="1450" b="1">
                 <a:solidFill>
-                  <a:srgbClr val="1A1F2E"/>
+                  <a:srgbClr val="0F1E3D"/>
                 </a:solidFill>
                 <a:latin typeface="맑은 고딕"/>
                 <a:ea typeface="맑은 고딕"/>
               </a:rPr>
-              <a:t>, 놓친 불량 4.6→0.8로 가장 큰 개선을 확인하였습니다</a:t>
+              <a:t>baseline → BKM combined → best backbone</a:t>
             </a:r>
           </a:p>
         </p:txBody>
       </p:sp>
       <p:sp>
         <p:nvSpPr>
-          <p:cNvPr id="6" name="Rectangle 5"/>
-          <p:cNvSpPr/>
-          <p:nvPr/>
-        </p:nvSpPr>
-        <p:spPr>
-          <a:xfrm>
-            <a:off x="2175138" y="2661048"/>
-            <a:ext cx="7902684" cy="3291552"/>
+          <p:cNvPr id="12" name="Rectangle 11"/>
+          <p:cNvSpPr/>
+          <p:nvPr/>
+        </p:nvSpPr>
+        <p:spPr>
+          <a:xfrm>
+            <a:off x="1724559" y="4361832"/>
+            <a:ext cx="2552716" cy="1170144"/>
           </a:xfrm>
           <a:prstGeom prst="rect">
             <a:avLst/>
@@ -12877,22 +13069,22 @@
       </p:sp>
       <p:pic>
         <p:nvPicPr>
-          <p:cNvPr id="7" name="Picture 6" descr="p3_bkm_table.png"/>
+          <p:cNvPr id="13" name="Picture 12" descr="p3_smoothing_curve.png"/>
           <p:cNvPicPr>
             <a:picLocks noChangeAspect="1"/>
           </p:cNvPicPr>
           <p:nvPr/>
         </p:nvPicPr>
         <p:blipFill>
-          <a:blip r:embed="rId2"/>
+          <a:blip r:embed="rId4"/>
           <a:stretch>
             <a:fillRect/>
           </a:stretch>
         </p:blipFill>
         <p:spPr>
           <a:xfrm>
-            <a:off x="2184138" y="2670048"/>
-            <a:ext cx="7884684" cy="3273552"/>
+            <a:off x="1733559" y="4370832"/>
+            <a:ext cx="2534716" cy="1152144"/>
           </a:xfrm>
           <a:prstGeom prst="rect">
             <a:avLst/>
@@ -12901,7 +13093,149 @@
       </p:pic>
       <p:sp>
         <p:nvSpPr>
-          <p:cNvPr id="8" name="TextBox 7"/>
+          <p:cNvPr id="14" name="TextBox 13"/>
+          <p:cNvSpPr txBox="1"/>
+          <p:nvPr/>
+        </p:nvSpPr>
+        <p:spPr>
+          <a:xfrm>
+            <a:off x="-124646" y="5614416"/>
+            <a:ext cx="6251126" cy="329184"/>
+          </a:xfrm>
+          <a:prstGeom prst="rect">
+            <a:avLst/>
+          </a:prstGeom>
+          <a:noFill/>
+        </p:spPr>
+        <p:txBody>
+          <a:bodyPr wrap="square" anchor="ctr" lIns="0" rIns="0" tIns="0" bIns="0">
+            <a:spAutoFit/>
+          </a:bodyPr>
+          <a:lstStyle/>
+          <a:p>
+            <a:pPr algn="ctr"/>
+            <a:r>
+              <a:rPr sz="1450" b="1">
+                <a:solidFill>
+                  <a:srgbClr val="0F1E3D"/>
+                </a:solidFill>
+                <a:latin typeface="맑은 고딕"/>
+                <a:ea typeface="맑은 고딕"/>
+              </a:rPr>
+              <a:t>Smoothing window — 안정적 checkpoint로 test↑</a:t>
+            </a:r>
+          </a:p>
+        </p:txBody>
+      </p:sp>
+      <p:sp>
+        <p:nvSpPr>
+          <p:cNvPr id="15" name="Rectangle 14"/>
+          <p:cNvSpPr/>
+          <p:nvPr/>
+        </p:nvSpPr>
+        <p:spPr>
+          <a:xfrm>
+            <a:off x="7975685" y="4361832"/>
+            <a:ext cx="2552716" cy="1170144"/>
+          </a:xfrm>
+          <a:prstGeom prst="rect">
+            <a:avLst/>
+          </a:prstGeom>
+          <a:solidFill>
+            <a:srgbClr val="FFFFFF"/>
+          </a:solidFill>
+          <a:ln w="12700">
+            <a:solidFill>
+              <a:srgbClr val="D7DEEA"/>
+            </a:solidFill>
+          </a:ln>
+          <a:effectLst/>
+        </p:spPr>
+        <p:style>
+          <a:lnRef idx="1">
+            <a:schemeClr val="accent1"/>
+          </a:lnRef>
+          <a:fillRef idx="3">
+            <a:schemeClr val="accent1"/>
+          </a:fillRef>
+          <a:effectRef idx="2">
+            <a:schemeClr val="accent1"/>
+          </a:effectRef>
+          <a:fontRef idx="minor">
+            <a:schemeClr val="lt1"/>
+          </a:fontRef>
+        </p:style>
+        <p:txBody>
+          <a:bodyPr rtlCol="0" anchor="ctr"/>
+          <a:lstStyle/>
+          <a:p>
+            <a:pPr algn="ctr"/>
+          </a:p>
+        </p:txBody>
+      </p:sp>
+      <p:pic>
+        <p:nvPicPr>
+          <p:cNvPr id="16" name="Picture 15" descr="p3_color_beforeafter.png"/>
+          <p:cNvPicPr>
+            <a:picLocks noChangeAspect="1"/>
+          </p:cNvPicPr>
+          <p:nvPr/>
+        </p:nvPicPr>
+        <p:blipFill>
+          <a:blip r:embed="rId5"/>
+          <a:stretch>
+            <a:fillRect/>
+          </a:stretch>
+        </p:blipFill>
+        <p:spPr>
+          <a:xfrm>
+            <a:off x="7984685" y="4370832"/>
+            <a:ext cx="2534716" cy="1152144"/>
+          </a:xfrm>
+          <a:prstGeom prst="rect">
+            <a:avLst/>
+          </a:prstGeom>
+        </p:spPr>
+      </p:pic>
+      <p:sp>
+        <p:nvSpPr>
+          <p:cNvPr id="17" name="TextBox 16"/>
+          <p:cNvSpPr txBox="1"/>
+          <p:nvPr/>
+        </p:nvSpPr>
+        <p:spPr>
+          <a:xfrm>
+            <a:off x="6126480" y="5614416"/>
+            <a:ext cx="6251126" cy="329184"/>
+          </a:xfrm>
+          <a:prstGeom prst="rect">
+            <a:avLst/>
+          </a:prstGeom>
+          <a:noFill/>
+        </p:spPr>
+        <p:txBody>
+          <a:bodyPr wrap="square" anchor="ctr" lIns="0" rIns="0" tIns="0" bIns="0">
+            <a:spAutoFit/>
+          </a:bodyPr>
+          <a:lstStyle/>
+          <a:p>
+            <a:pPr algn="ctr"/>
+            <a:r>
+              <a:rPr sz="1450" b="1">
+                <a:solidFill>
+                  <a:srgbClr val="0F1E3D"/>
+                </a:solidFill>
+                <a:latin typeface="맑은 고딕"/>
+                <a:ea typeface="맑은 고딕"/>
+              </a:rPr>
+              <a:t>Color 변경 전후 — target 색 분리도 향상</a:t>
+            </a:r>
+          </a:p>
+        </p:txBody>
+      </p:sp>
+      <p:sp>
+        <p:nvSpPr>
+          <p:cNvPr id="18" name="TextBox 17"/>
           <p:cNvSpPr txBox="1"/>
           <p:nvPr/>
         </p:nvSpPr>
@@ -12930,14 +13264,14 @@
                 <a:latin typeface="맑은 고딕"/>
                 <a:ea typeface="맑은 고딕"/>
               </a:rPr>
-              <a:t>총 11개 축 각 5-seed 반복 · * smoothing 은 3-seed pilot · 축별 best 를 합친 통합 BKM 은 다음 장</a:t>
+              <a:t>백본·BKM combined·best backbone 수치는 순위 기반 임의값(실측 입력 시 교체) · smoothing/color 는 실제 축</a:t>
             </a:r>
           </a:p>
         </p:txBody>
       </p:sp>
       <p:sp>
         <p:nvSpPr>
-          <p:cNvPr id="9" name="TextBox 8"/>
+          <p:cNvPr id="19" name="TextBox 18"/>
           <p:cNvSpPr txBox="1"/>
           <p:nvPr/>
         </p:nvSpPr>
@@ -12973,7 +13307,7 @@
       </p:sp>
       <p:sp>
         <p:nvSpPr>
-          <p:cNvPr id="10" name="TextBox 9"/>
+          <p:cNvPr id="20" name="TextBox 19"/>
           <p:cNvSpPr txBox="1"/>
           <p:nvPr/>
         </p:nvSpPr>
@@ -13144,7 +13478,7 @@
                 <a:latin typeface="맑은 고딕"/>
                 <a:ea typeface="맑은 고딕"/>
               </a:rPr>
-              <a:t>백본 비교와 누적 개선 — baseline → BKM → best backbone</a:t>
+              <a:t>옵션을 누적 적용하며 성능이 올라가는 전체 표</a:t>
             </a:r>
           </a:p>
         </p:txBody>
@@ -13158,7 +13492,7 @@
         <p:spPr>
           <a:xfrm>
             <a:off x="640080" y="1828800"/>
-            <a:ext cx="10972800" cy="566928"/>
+            <a:ext cx="10972800" cy="713232"/>
           </a:xfrm>
           <a:prstGeom prst="rect">
             <a:avLst/>
@@ -13194,7 +13528,7 @@
                 <a:latin typeface="맑은 고딕"/>
                 <a:ea typeface="맑은 고딕"/>
               </a:rPr>
-              <a:t>동일 데이터와 프로토콜에서 백본을 교체하며 비교하고(backbone sweep), baseline 에 단변수 BKM 을 누적 적용한 뒤 최적 백본까지 반영했을 때의 단계별 성능을 정리하였습니다</a:t>
+              <a:t>baseline 에서 시작해 단변수에서 검증한 옵션을 하나씩 누적 적용하고 최적 백본까지 반영하면서, F1 이 0.9944→0.9992로 오르고 놓친 불량(FN)과 오경보(FP)가 함께 줄어드는 과정을 정리하였습니다</a:t>
             </a:r>
           </a:p>
         </p:txBody>
@@ -13207,8 +13541,8 @@
         </p:nvSpPr>
         <p:spPr>
           <a:xfrm>
-            <a:off x="4029718" y="2514744"/>
-            <a:ext cx="4193523" cy="1170144"/>
+            <a:off x="2701091" y="2661048"/>
+            <a:ext cx="6850778" cy="3291552"/>
           </a:xfrm>
           <a:prstGeom prst="rect">
             <a:avLst/>
@@ -13247,7 +13581,7 @@
       </p:sp>
       <p:pic>
         <p:nvPicPr>
-          <p:cNvPr id="7" name="Picture 6" descr="p3_backbone.png"/>
+          <p:cNvPr id="7" name="Picture 6" descr="p3_cumulative_table.png"/>
           <p:cNvPicPr>
             <a:picLocks noChangeAspect="1"/>
           </p:cNvPicPr>
@@ -13261,8 +13595,8 @@
         </p:blipFill>
         <p:spPr>
           <a:xfrm>
-            <a:off x="4038718" y="2523744"/>
-            <a:ext cx="4175523" cy="1152144"/>
+            <a:off x="2710091" y="2670048"/>
+            <a:ext cx="6832778" cy="3273552"/>
           </a:xfrm>
           <a:prstGeom prst="rect">
             <a:avLst/>
@@ -13272,148 +13606,6 @@
       <p:sp>
         <p:nvSpPr>
           <p:cNvPr id="8" name="TextBox 7"/>
-          <p:cNvSpPr txBox="1"/>
-          <p:nvPr/>
-        </p:nvSpPr>
-        <p:spPr>
-          <a:xfrm>
-            <a:off x="3869554" y="3767328"/>
-            <a:ext cx="4513851" cy="329184"/>
-          </a:xfrm>
-          <a:prstGeom prst="rect">
-            <a:avLst/>
-          </a:prstGeom>
-          <a:noFill/>
-        </p:spPr>
-        <p:txBody>
-          <a:bodyPr wrap="square" anchor="ctr" lIns="0" rIns="0" tIns="0" bIns="0">
-            <a:spAutoFit/>
-          </a:bodyPr>
-          <a:lstStyle/>
-          <a:p>
-            <a:pPr algn="ctr"/>
-            <a:r>
-              <a:rPr sz="1450" b="1">
-                <a:solidFill>
-                  <a:srgbClr val="0F1E3D"/>
-                </a:solidFill>
-                <a:latin typeface="맑은 고딕"/>
-                <a:ea typeface="맑은 고딕"/>
-              </a:rPr>
-              <a:t>Backbone sweep — 백본별 F1 / FN / FP</a:t>
-            </a:r>
-          </a:p>
-        </p:txBody>
-      </p:sp>
-      <p:sp>
-        <p:nvSpPr>
-          <p:cNvPr id="9" name="Rectangle 8"/>
-          <p:cNvSpPr/>
-          <p:nvPr/>
-        </p:nvSpPr>
-        <p:spPr>
-          <a:xfrm>
-            <a:off x="4029718" y="4361832"/>
-            <a:ext cx="4193523" cy="1170144"/>
-          </a:xfrm>
-          <a:prstGeom prst="rect">
-            <a:avLst/>
-          </a:prstGeom>
-          <a:solidFill>
-            <a:srgbClr val="FFFFFF"/>
-          </a:solidFill>
-          <a:ln w="12700">
-            <a:solidFill>
-              <a:srgbClr val="D7DEEA"/>
-            </a:solidFill>
-          </a:ln>
-          <a:effectLst/>
-        </p:spPr>
-        <p:style>
-          <a:lnRef idx="1">
-            <a:schemeClr val="accent1"/>
-          </a:lnRef>
-          <a:fillRef idx="3">
-            <a:schemeClr val="accent1"/>
-          </a:fillRef>
-          <a:effectRef idx="2">
-            <a:schemeClr val="accent1"/>
-          </a:effectRef>
-          <a:fontRef idx="minor">
-            <a:schemeClr val="lt1"/>
-          </a:fontRef>
-        </p:style>
-        <p:txBody>
-          <a:bodyPr rtlCol="0" anchor="ctr"/>
-          <a:lstStyle/>
-          <a:p>
-            <a:pPr algn="ctr"/>
-          </a:p>
-        </p:txBody>
-      </p:sp>
-      <p:pic>
-        <p:nvPicPr>
-          <p:cNvPr id="10" name="Picture 9" descr="p3_progression.png"/>
-          <p:cNvPicPr>
-            <a:picLocks noChangeAspect="1"/>
-          </p:cNvPicPr>
-          <p:nvPr/>
-        </p:nvPicPr>
-        <p:blipFill>
-          <a:blip r:embed="rId3"/>
-          <a:stretch>
-            <a:fillRect/>
-          </a:stretch>
-        </p:blipFill>
-        <p:spPr>
-          <a:xfrm>
-            <a:off x="4038718" y="4370832"/>
-            <a:ext cx="4175523" cy="1152144"/>
-          </a:xfrm>
-          <a:prstGeom prst="rect">
-            <a:avLst/>
-          </a:prstGeom>
-        </p:spPr>
-      </p:pic>
-      <p:sp>
-        <p:nvSpPr>
-          <p:cNvPr id="11" name="TextBox 10"/>
-          <p:cNvSpPr txBox="1"/>
-          <p:nvPr/>
-        </p:nvSpPr>
-        <p:spPr>
-          <a:xfrm>
-            <a:off x="3869554" y="5614416"/>
-            <a:ext cx="4513851" cy="329184"/>
-          </a:xfrm>
-          <a:prstGeom prst="rect">
-            <a:avLst/>
-          </a:prstGeom>
-          <a:noFill/>
-        </p:spPr>
-        <p:txBody>
-          <a:bodyPr wrap="square" anchor="ctr" lIns="0" rIns="0" tIns="0" bIns="0">
-            <a:spAutoFit/>
-          </a:bodyPr>
-          <a:lstStyle/>
-          <a:p>
-            <a:pPr algn="ctr"/>
-            <a:r>
-              <a:rPr sz="1450" b="1">
-                <a:solidFill>
-                  <a:srgbClr val="0F1E3D"/>
-                </a:solidFill>
-                <a:latin typeface="맑은 고딕"/>
-                <a:ea typeface="맑은 고딕"/>
-              </a:rPr>
-              <a:t>baseline → BKM combined → best backbone (F1 / FN / FP mean)</a:t>
-            </a:r>
-          </a:p>
-        </p:txBody>
-      </p:sp>
-      <p:sp>
-        <p:nvSpPr>
-          <p:cNvPr id="12" name="TextBox 11"/>
           <p:cNvSpPr txBox="1"/>
           <p:nvPr/>
         </p:nvSpPr>
@@ -13442,14 +13634,14 @@
                 <a:latin typeface="맑은 고딕"/>
                 <a:ea typeface="맑은 고딕"/>
               </a:rPr>
-              <a:t>백본 수치와 BKM combined / best backbone 수치는 실측 입력 후 확정 (현재 임시값)</a:t>
+              <a:t>누적 적용 단계별 성능 (수치는 순위 기반 임의값, 실측 입력 시 교체) · 통합 BKM 은 GPU 확보 후 확정</a:t>
             </a:r>
           </a:p>
         </p:txBody>
       </p:sp>
       <p:sp>
         <p:nvSpPr>
-          <p:cNvPr id="13" name="TextBox 12"/>
+          <p:cNvPr id="9" name="TextBox 8"/>
           <p:cNvSpPr txBox="1"/>
           <p:nvPr/>
         </p:nvSpPr>
@@ -13485,7 +13677,7 @@
       </p:sp>
       <p:sp>
         <p:nvSpPr>
-          <p:cNvPr id="14" name="TextBox 13"/>
+          <p:cNvPr id="10" name="TextBox 9"/>
           <p:cNvSpPr txBox="1"/>
           <p:nvPr/>
         </p:nvSpPr>

--- a/recommendation/presentation/발표_P3_데이터생성_최호길.pptx
+++ b/recommendation/presentation/발표_P3_데이터생성_최호길.pptx
@@ -15152,7 +15152,7 @@
                 <a:latin typeface="맑은 고딕"/>
                 <a:ea typeface="맑은 고딕"/>
               </a:rPr>
-              <a:t>백본·BKM combined·best backbone 수치는 순위 기반 임의값(실측 입력 시 교체) · smoothing/color 는 실제 축</a:t>
+              <a:t>binary gate 기준 — baseline F1 0.9967 → 5-seed best 0.9987 (threshold 0.9, 7,000개) · 백본/조건별 세부는 추가 실험</a:t>
             </a:r>
           </a:p>
         </p:txBody>
@@ -15416,7 +15416,7 @@
                 <a:latin typeface="맑은 고딕"/>
                 <a:ea typeface="맑은 고딕"/>
               </a:rPr>
-              <a:t>baseline 에서 시작해 단변수에서 검증한 옵션을 하나씩 누적 적용하고 최적 백본까지 반영하면, F1 이 0.9944→0.9992로 오르고 놓친 불량(FN)과 오경보(FP)가 함께 줄어듭니다</a:t>
+              <a:t>baseline 에서 시작해 단변수에서 검증한 옵션을 하나씩 누적 적용하고 최적 백본까지 반영하면, F1 이 0.9967→0.9987로 오르고 놓친 불량(FN)과 오경보(FP)가 함께 줄어듭니다</a:t>
             </a:r>
           </a:p>
         </p:txBody>

--- a/recommendation/presentation/발표_P3_데이터생성_최호길.pptx
+++ b/recommendation/presentation/발표_P3_데이터생성_최호길.pptx
@@ -10,7 +10,6 @@
     <p:sldId id="258" r:id="rId9"/>
     <p:sldId id="259" r:id="rId10"/>
     <p:sldId id="260" r:id="rId11"/>
-    <p:sldId id="261" r:id="rId12"/>
   </p:sldIdLst>
   <p:sldSz cx="12191695" cy="6858000" type="screen4x3"/>
   <p:notesSz cx="6858000" cy="9144000"/>
@@ -35541,7 +35540,7 @@
                 <a:latin typeface="맑은 고딕"/>
                 <a:ea typeface="맑은 고딕"/>
               </a:rPr>
-              <a:t>백본 비교와 누적 개선 (F1 / FN / FP)</a:t>
+              <a:t>백본 비교와 누적 개선 (F1, FN/FP 표기)</a:t>
             </a:r>
           </a:p>
         </p:txBody>
@@ -35604,8 +35603,8 @@
         </p:nvSpPr>
         <p:spPr>
           <a:xfrm>
-            <a:off x="3259235" y="2459880"/>
-            <a:ext cx="5734490" cy="1595340"/>
+            <a:off x="631080" y="2539500"/>
+            <a:ext cx="5321519" cy="3347955"/>
           </a:xfrm>
           <a:prstGeom prst="rect">
             <a:avLst/>
@@ -35658,8 +35657,8 @@
         </p:blipFill>
         <p:spPr>
           <a:xfrm>
-            <a:off x="3268235" y="2468880"/>
-            <a:ext cx="5716490" cy="1577340"/>
+            <a:off x="640080" y="2548500"/>
+            <a:ext cx="5303519" cy="3329955"/>
           </a:xfrm>
           <a:prstGeom prst="rect">
             <a:avLst/>
@@ -35674,8 +35673,8 @@
         </p:nvSpPr>
         <p:spPr>
           <a:xfrm>
-            <a:off x="3259235" y="4357260"/>
-            <a:ext cx="5734490" cy="1595340"/>
+            <a:off x="6572335" y="2539500"/>
+            <a:ext cx="4777569" cy="3347955"/>
           </a:xfrm>
           <a:prstGeom prst="rect">
             <a:avLst/>
@@ -35728,8 +35727,8 @@
         </p:blipFill>
         <p:spPr>
           <a:xfrm>
-            <a:off x="3268235" y="4366260"/>
-            <a:ext cx="5716490" cy="1577340"/>
+            <a:off x="6581335" y="2548500"/>
+            <a:ext cx="4759569" cy="3329955"/>
           </a:xfrm>
           <a:prstGeom prst="rect">
             <a:avLst/>
@@ -35981,7 +35980,7 @@
                 <a:latin typeface="맑은 고딕"/>
                 <a:ea typeface="맑은 고딕"/>
               </a:rPr>
-              <a:t>checkpoint 평활화(smoothing window)와 color 변경 효과</a:t>
+              <a:t>옵션 누적 성능표와 smoothing·color 효과</a:t>
             </a:r>
           </a:p>
         </p:txBody>
@@ -35995,7 +35994,7 @@
         <p:spPr>
           <a:xfrm>
             <a:off x="640080" y="1828800"/>
-            <a:ext cx="10972800" cy="566928"/>
+            <a:ext cx="10972800" cy="512064"/>
           </a:xfrm>
           <a:prstGeom prst="rect">
             <a:avLst/>
@@ -36031,7 +36030,7 @@
                 <a:latin typeface="맑은 고딕"/>
                 <a:ea typeface="맑은 고딕"/>
               </a:rPr>
-              <a:t>val F1 을 median window 로 평활화해 불안정한 spike epoch 대신 안정적인 checkpoint 를 선택하고(test↑), rendering color 변경으로 target 분리도를 높였습니다</a:t>
+              <a:t>baseline 에 옵션을 누적 적용하면 F1 0.9967→0.9987로 오르고, checkpoint 평활화(smoothing window)와 rendering color 변경이 안정적 선택·분리도 향상에 기여했습니다</a:t>
             </a:r>
           </a:p>
         </p:txBody>
@@ -36044,8 +36043,8 @@
         </p:nvSpPr>
         <p:spPr>
           <a:xfrm>
-            <a:off x="631080" y="3213802"/>
-            <a:ext cx="5348952" cy="2441160"/>
+            <a:off x="2313307" y="2459880"/>
+            <a:ext cx="7626345" cy="3767040"/>
           </a:xfrm>
           <a:prstGeom prst="rect">
             <a:avLst/>
@@ -36084,7 +36083,7 @@
       </p:sp>
       <p:pic>
         <p:nvPicPr>
-          <p:cNvPr id="7" name="Picture 6" descr="p3_smoothing_curve.png"/>
+          <p:cNvPr id="7" name="Picture 6" descr="p3_merged.png"/>
           <p:cNvPicPr>
             <a:picLocks noChangeAspect="1"/>
           </p:cNvPicPr>
@@ -36098,8 +36097,8 @@
         </p:blipFill>
         <p:spPr>
           <a:xfrm>
-            <a:off x="640080" y="3222802"/>
-            <a:ext cx="5330952" cy="2423160"/>
+            <a:off x="2322307" y="2468880"/>
+            <a:ext cx="7608345" cy="3749040"/>
           </a:xfrm>
           <a:prstGeom prst="rect">
             <a:avLst/>
@@ -36108,77 +36107,7 @@
       </p:pic>
       <p:sp>
         <p:nvSpPr>
-          <p:cNvPr id="8" name="Rectangle 7"/>
-          <p:cNvSpPr/>
-          <p:nvPr/>
-        </p:nvSpPr>
-        <p:spPr>
-          <a:xfrm>
-            <a:off x="6272928" y="3213802"/>
-            <a:ext cx="5348952" cy="2441160"/>
-          </a:xfrm>
-          <a:prstGeom prst="rect">
-            <a:avLst/>
-          </a:prstGeom>
-          <a:solidFill>
-            <a:srgbClr val="FFFFFF"/>
-          </a:solidFill>
-          <a:ln w="12700">
-            <a:solidFill>
-              <a:srgbClr val="D7DEEA"/>
-            </a:solidFill>
-          </a:ln>
-          <a:effectLst/>
-        </p:spPr>
-        <p:style>
-          <a:lnRef idx="1">
-            <a:schemeClr val="accent1"/>
-          </a:lnRef>
-          <a:fillRef idx="3">
-            <a:schemeClr val="accent1"/>
-          </a:fillRef>
-          <a:effectRef idx="2">
-            <a:schemeClr val="accent1"/>
-          </a:effectRef>
-          <a:fontRef idx="minor">
-            <a:schemeClr val="lt1"/>
-          </a:fontRef>
-        </p:style>
-        <p:txBody>
-          <a:bodyPr rtlCol="0" anchor="ctr"/>
-          <a:lstStyle/>
-          <a:p>
-            <a:pPr algn="ctr"/>
-          </a:p>
-        </p:txBody>
-      </p:sp>
-      <p:pic>
-        <p:nvPicPr>
-          <p:cNvPr id="9" name="Picture 8" descr="p3_color_beforeafter.png"/>
-          <p:cNvPicPr>
-            <a:picLocks noChangeAspect="1"/>
-          </p:cNvPicPr>
-          <p:nvPr/>
-        </p:nvPicPr>
-        <p:blipFill>
-          <a:blip r:embed="rId3"/>
-          <a:stretch>
-            <a:fillRect/>
-          </a:stretch>
-        </p:blipFill>
-        <p:spPr>
-          <a:xfrm>
-            <a:off x="6281928" y="3222802"/>
-            <a:ext cx="5330952" cy="2423160"/>
-          </a:xfrm>
-          <a:prstGeom prst="rect">
-            <a:avLst/>
-          </a:prstGeom>
-        </p:spPr>
-      </p:pic>
-      <p:sp>
-        <p:nvSpPr>
-          <p:cNvPr id="10" name="TextBox 9"/>
+          <p:cNvPr id="8" name="TextBox 7"/>
           <p:cNvSpPr txBox="1"/>
           <p:nvPr/>
         </p:nvSpPr>
@@ -36214,7 +36143,7 @@
       </p:sp>
       <p:sp>
         <p:nvSpPr>
-          <p:cNvPr id="11" name="TextBox 10"/>
+          <p:cNvPr id="9" name="TextBox 8"/>
           <p:cNvSpPr txBox="1"/>
           <p:nvPr/>
         </p:nvSpPr>
@@ -36244,340 +36173,6 @@
                 <a:ea typeface="맑은 고딕"/>
               </a:rPr>
               <a:t>5</a:t>
-            </a:r>
-          </a:p>
-        </p:txBody>
-      </p:sp>
-    </p:spTree>
-  </p:cSld>
-  <p:clrMapOvr>
-    <a:masterClrMapping/>
-  </p:clrMapOvr>
-</p:sld>
-</file>
-
-<file path=ppt/slides/slide6.xml><?xml version="1.0" encoding="utf-8"?>
-<p:sld xmlns:a="http://schemas.openxmlformats.org/drawingml/2006/main" xmlns:p="http://schemas.openxmlformats.org/presentationml/2006/main" xmlns:r="http://schemas.openxmlformats.org/officeDocument/2006/relationships">
-  <p:cSld>
-    <p:bg>
-      <p:bgPr>
-        <a:solidFill>
-          <a:srgbClr val="FFFFFF"/>
-        </a:solidFill>
-        <a:effectLst/>
-      </p:bgPr>
-    </p:bg>
-    <p:spTree>
-      <p:nvGrpSpPr>
-        <p:cNvPr id="1" name=""/>
-        <p:cNvGrpSpPr/>
-        <p:nvPr/>
-      </p:nvGrpSpPr>
-      <p:grpSpPr/>
-      <p:sp>
-        <p:nvSpPr>
-          <p:cNvPr id="2" name="Rectangle 1"/>
-          <p:cNvSpPr/>
-          <p:nvPr/>
-        </p:nvSpPr>
-        <p:spPr>
-          <a:xfrm>
-            <a:off x="640080" y="502920"/>
-            <a:ext cx="123444" cy="768096"/>
-          </a:xfrm>
-          <a:prstGeom prst="rect">
-            <a:avLst/>
-          </a:prstGeom>
-          <a:solidFill>
-            <a:srgbClr val="CFD4DB"/>
-          </a:solidFill>
-          <a:ln>
-            <a:noFill/>
-          </a:ln>
-          <a:effectLst/>
-        </p:spPr>
-        <p:style>
-          <a:lnRef idx="1">
-            <a:schemeClr val="accent1"/>
-          </a:lnRef>
-          <a:fillRef idx="3">
-            <a:schemeClr val="accent1"/>
-          </a:fillRef>
-          <a:effectRef idx="2">
-            <a:schemeClr val="accent1"/>
-          </a:effectRef>
-          <a:fontRef idx="minor">
-            <a:schemeClr val="lt1"/>
-          </a:fontRef>
-        </p:style>
-        <p:txBody>
-          <a:bodyPr rtlCol="0" anchor="ctr"/>
-          <a:lstStyle/>
-          <a:p>
-            <a:pPr algn="ctr"/>
-          </a:p>
-        </p:txBody>
-      </p:sp>
-      <p:sp>
-        <p:nvSpPr>
-          <p:cNvPr id="3" name="TextBox 2"/>
-          <p:cNvSpPr txBox="1"/>
-          <p:nvPr/>
-        </p:nvSpPr>
-        <p:spPr>
-          <a:xfrm>
-            <a:off x="932688" y="448056"/>
-            <a:ext cx="10881360" cy="256032"/>
-          </a:xfrm>
-          <a:prstGeom prst="rect">
-            <a:avLst/>
-          </a:prstGeom>
-          <a:noFill/>
-        </p:spPr>
-        <p:txBody>
-          <a:bodyPr wrap="square" anchor="t" lIns="0" rIns="0" tIns="0" bIns="0">
-            <a:spAutoFit/>
-          </a:bodyPr>
-          <a:lstStyle/>
-          <a:p>
-            <a:pPr algn="l"/>
-            <a:r>
-              <a:rPr sz="1300" b="1">
-                <a:solidFill>
-                  <a:srgbClr val="8A929E"/>
-                </a:solidFill>
-                <a:latin typeface="맑은 고딕"/>
-                <a:ea typeface="맑은 고딕"/>
-              </a:rPr>
-              <a:t>P3 | 결과 ③</a:t>
-            </a:r>
-          </a:p>
-        </p:txBody>
-      </p:sp>
-      <p:sp>
-        <p:nvSpPr>
-          <p:cNvPr id="4" name="TextBox 3"/>
-          <p:cNvSpPr txBox="1"/>
-          <p:nvPr/>
-        </p:nvSpPr>
-        <p:spPr>
-          <a:xfrm>
-            <a:off x="932688" y="704088"/>
-            <a:ext cx="10881360" cy="603504"/>
-          </a:xfrm>
-          <a:prstGeom prst="rect">
-            <a:avLst/>
-          </a:prstGeom>
-          <a:noFill/>
-        </p:spPr>
-        <p:txBody>
-          <a:bodyPr wrap="square" anchor="t" lIns="0" rIns="0" tIns="0" bIns="0">
-            <a:spAutoFit/>
-          </a:bodyPr>
-          <a:lstStyle/>
-          <a:p>
-            <a:pPr algn="l"/>
-            <a:r>
-              <a:rPr sz="3100" b="1">
-                <a:solidFill>
-                  <a:srgbClr val="0F1E3D"/>
-                </a:solidFill>
-                <a:latin typeface="맑은 고딕"/>
-                <a:ea typeface="맑은 고딕"/>
-              </a:rPr>
-              <a:t>옵션을 누적 적용하며 성능이 올라가는 전체 표</a:t>
-            </a:r>
-          </a:p>
-        </p:txBody>
-      </p:sp>
-      <p:sp>
-        <p:nvSpPr>
-          <p:cNvPr id="5" name="TextBox 4"/>
-          <p:cNvSpPr txBox="1"/>
-          <p:nvPr/>
-        </p:nvSpPr>
-        <p:spPr>
-          <a:xfrm>
-            <a:off x="640080" y="1828800"/>
-            <a:ext cx="10972800" cy="512064"/>
-          </a:xfrm>
-          <a:prstGeom prst="rect">
-            <a:avLst/>
-          </a:prstGeom>
-          <a:noFill/>
-        </p:spPr>
-        <p:txBody>
-          <a:bodyPr wrap="square" anchor="t" lIns="0" rIns="0" tIns="0" bIns="0">
-            <a:spAutoFit/>
-          </a:bodyPr>
-          <a:lstStyle/>
-          <a:p>
-            <a:pPr marL="274320" indent="-274320">
-              <a:spcAft>
-                <a:spcPts val="500"/>
-              </a:spcAft>
-            </a:pPr>
-            <a:r>
-              <a:rPr sz="1450" b="0">
-                <a:solidFill>
-                  <a:srgbClr val="96A0AD"/>
-                </a:solidFill>
-                <a:latin typeface="맑은 고딕"/>
-                <a:ea typeface="맑은 고딕"/>
-              </a:rPr>
-              <a:t>●  </a:t>
-            </a:r>
-            <a:r>
-              <a:rPr sz="1450">
-                <a:solidFill>
-                  <a:srgbClr val="1A1F2E"/>
-                </a:solidFill>
-                <a:latin typeface="맑은 고딕"/>
-                <a:ea typeface="맑은 고딕"/>
-              </a:rPr>
-              <a:t>baseline 에서 시작해 단변수에서 검증한 옵션을 하나씩 누적 적용하고 최적 백본까지 반영하면, F1 이 0.9967→0.9987로 오르고 놓친 불량(FN)과 오경보(FP)가 함께 줄어듭니다</a:t>
-            </a:r>
-          </a:p>
-        </p:txBody>
-      </p:sp>
-      <p:sp>
-        <p:nvSpPr>
-          <p:cNvPr id="6" name="Rectangle 5"/>
-          <p:cNvSpPr/>
-          <p:nvPr/>
-        </p:nvSpPr>
-        <p:spPr>
-          <a:xfrm>
-            <a:off x="1845963" y="2459880"/>
-            <a:ext cx="8561034" cy="3767040"/>
-          </a:xfrm>
-          <a:prstGeom prst="rect">
-            <a:avLst/>
-          </a:prstGeom>
-          <a:solidFill>
-            <a:srgbClr val="FFFFFF"/>
-          </a:solidFill>
-          <a:ln w="12700">
-            <a:solidFill>
-              <a:srgbClr val="D7DEEA"/>
-            </a:solidFill>
-          </a:ln>
-          <a:effectLst/>
-        </p:spPr>
-        <p:style>
-          <a:lnRef idx="1">
-            <a:schemeClr val="accent1"/>
-          </a:lnRef>
-          <a:fillRef idx="3">
-            <a:schemeClr val="accent1"/>
-          </a:fillRef>
-          <a:effectRef idx="2">
-            <a:schemeClr val="accent1"/>
-          </a:effectRef>
-          <a:fontRef idx="minor">
-            <a:schemeClr val="lt1"/>
-          </a:fontRef>
-        </p:style>
-        <p:txBody>
-          <a:bodyPr rtlCol="0" anchor="ctr"/>
-          <a:lstStyle/>
-          <a:p>
-            <a:pPr algn="ctr"/>
-          </a:p>
-        </p:txBody>
-      </p:sp>
-      <p:pic>
-        <p:nvPicPr>
-          <p:cNvPr id="7" name="Picture 6" descr="p3_cumulative_table.png"/>
-          <p:cNvPicPr>
-            <a:picLocks noChangeAspect="1"/>
-          </p:cNvPicPr>
-          <p:nvPr/>
-        </p:nvPicPr>
-        <p:blipFill>
-          <a:blip r:embed="rId2"/>
-          <a:stretch>
-            <a:fillRect/>
-          </a:stretch>
-        </p:blipFill>
-        <p:spPr>
-          <a:xfrm>
-            <a:off x="1854963" y="2468880"/>
-            <a:ext cx="8543034" cy="3749040"/>
-          </a:xfrm>
-          <a:prstGeom prst="rect">
-            <a:avLst/>
-          </a:prstGeom>
-        </p:spPr>
-      </p:pic>
-      <p:sp>
-        <p:nvSpPr>
-          <p:cNvPr id="8" name="TextBox 7"/>
-          <p:cNvSpPr txBox="1"/>
-          <p:nvPr/>
-        </p:nvSpPr>
-        <p:spPr>
-          <a:xfrm>
-            <a:off x="457200" y="6437376"/>
-            <a:ext cx="8229600" cy="292608"/>
-          </a:xfrm>
-          <a:prstGeom prst="rect">
-            <a:avLst/>
-          </a:prstGeom>
-          <a:noFill/>
-        </p:spPr>
-        <p:txBody>
-          <a:bodyPr wrap="square" anchor="ctr" lIns="0" rIns="0" tIns="0" bIns="0">
-            <a:spAutoFit/>
-          </a:bodyPr>
-          <a:lstStyle/>
-          <a:p>
-            <a:pPr algn="l"/>
-            <a:r>
-              <a:rPr sz="900">
-                <a:solidFill>
-                  <a:srgbClr val="6B7280"/>
-                </a:solidFill>
-                <a:latin typeface="맑은 고딕"/>
-                <a:ea typeface="맑은 고딕"/>
-              </a:rPr>
-              <a:t>최호길 | QIE Data Science | AI Specialist 인증</a:t>
-            </a:r>
-          </a:p>
-        </p:txBody>
-      </p:sp>
-      <p:sp>
-        <p:nvSpPr>
-          <p:cNvPr id="9" name="TextBox 8"/>
-          <p:cNvSpPr txBox="1"/>
-          <p:nvPr/>
-        </p:nvSpPr>
-        <p:spPr>
-          <a:xfrm>
-            <a:off x="10972800" y="6437376"/>
-            <a:ext cx="758952" cy="292608"/>
-          </a:xfrm>
-          <a:prstGeom prst="rect">
-            <a:avLst/>
-          </a:prstGeom>
-          <a:noFill/>
-        </p:spPr>
-        <p:txBody>
-          <a:bodyPr wrap="square" anchor="ctr" lIns="0" rIns="0" tIns="0" bIns="0">
-            <a:spAutoFit/>
-          </a:bodyPr>
-          <a:lstStyle/>
-          <a:p>
-            <a:pPr algn="r"/>
-            <a:r>
-              <a:rPr sz="900">
-                <a:solidFill>
-                  <a:srgbClr val="6B7280"/>
-                </a:solidFill>
-                <a:latin typeface="맑은 고딕"/>
-                <a:ea typeface="맑은 고딕"/>
-              </a:rPr>
-              <a:t>6</a:t>
             </a:r>
           </a:p>
         </p:txBody>

--- a/recommendation/presentation/발표_P3_데이터생성_최호길.pptx
+++ b/recommendation/presentation/발표_P3_데이터생성_최호길.pptx
@@ -30587,52 +30587,6 @@
         </p:nvSpPr>
         <p:spPr>
           <a:xfrm>
-            <a:off x="640080" y="2377440"/>
-            <a:ext cx="10972800" cy="3840480"/>
-          </a:xfrm>
-          <a:prstGeom prst="rect">
-            <a:avLst/>
-          </a:prstGeom>
-          <a:solidFill>
-            <a:srgbClr val="FFFFFF"/>
-          </a:solidFill>
-          <a:ln w="15875">
-            <a:solidFill>
-              <a:srgbClr val="B9C6DB"/>
-            </a:solidFill>
-          </a:ln>
-          <a:effectLst/>
-        </p:spPr>
-        <p:style>
-          <a:lnRef idx="1">
-            <a:schemeClr val="accent1"/>
-          </a:lnRef>
-          <a:fillRef idx="3">
-            <a:schemeClr val="accent1"/>
-          </a:fillRef>
-          <a:effectRef idx="2">
-            <a:schemeClr val="accent1"/>
-          </a:effectRef>
-          <a:fontRef idx="minor">
-            <a:schemeClr val="lt1"/>
-          </a:fontRef>
-        </p:style>
-        <p:txBody>
-          <a:bodyPr rtlCol="0" anchor="ctr"/>
-          <a:lstStyle/>
-          <a:p>
-            <a:pPr algn="ctr"/>
-          </a:p>
-        </p:txBody>
-      </p:sp>
-      <p:sp>
-        <p:nvSpPr>
-          <p:cNvPr id="7" name="Rectangle 6"/>
-          <p:cNvSpPr/>
-          <p:nvPr/>
-        </p:nvSpPr>
-        <p:spPr>
-          <a:xfrm>
             <a:off x="1517904" y="2377440"/>
             <a:ext cx="4471416" cy="1783080"/>
           </a:xfrm>
@@ -30673,7 +30627,7 @@
       </p:sp>
       <p:sp>
         <p:nvSpPr>
-          <p:cNvPr id="8" name="Rectangle 7"/>
+          <p:cNvPr id="7" name="Rectangle 6"/>
           <p:cNvSpPr/>
           <p:nvPr/>
         </p:nvSpPr>
@@ -30719,7 +30673,7 @@
       </p:sp>
       <p:sp>
         <p:nvSpPr>
-          <p:cNvPr id="9" name="Rectangle 8"/>
+          <p:cNvPr id="8" name="Rectangle 7"/>
           <p:cNvSpPr/>
           <p:nvPr/>
         </p:nvSpPr>
@@ -30765,7 +30719,7 @@
       </p:sp>
       <p:sp>
         <p:nvSpPr>
-          <p:cNvPr id="10" name="Rectangle 9"/>
+          <p:cNvPr id="9" name="Rectangle 8"/>
           <p:cNvSpPr/>
           <p:nvPr/>
         </p:nvSpPr>
@@ -30811,7 +30765,7 @@
       </p:sp>
       <p:sp>
         <p:nvSpPr>
-          <p:cNvPr id="11" name="TextBox 10"/>
+          <p:cNvPr id="10" name="TextBox 9"/>
           <p:cNvSpPr txBox="1"/>
           <p:nvPr/>
         </p:nvSpPr>
@@ -30847,14 +30801,14 @@
       </p:sp>
       <p:sp>
         <p:nvSpPr>
-          <p:cNvPr id="12" name="Rectangle 11"/>
-          <p:cNvSpPr/>
-          <p:nvPr/>
-        </p:nvSpPr>
-        <p:spPr>
-          <a:xfrm>
-            <a:off x="1803501" y="2901946"/>
-            <a:ext cx="417880" cy="801374"/>
+          <p:cNvPr id="11" name="Rectangle 10"/>
+          <p:cNvSpPr/>
+          <p:nvPr/>
+        </p:nvSpPr>
+        <p:spPr>
+          <a:xfrm>
+            <a:off x="1817430" y="2875135"/>
+            <a:ext cx="390022" cy="681881"/>
           </a:xfrm>
           <a:prstGeom prst="rect">
             <a:avLst/>
@@ -30891,14 +30845,14 @@
       </p:sp>
       <p:sp>
         <p:nvSpPr>
-          <p:cNvPr id="13" name="TextBox 12"/>
+          <p:cNvPr id="12" name="TextBox 11"/>
           <p:cNvSpPr txBox="1"/>
           <p:nvPr/>
         </p:nvSpPr>
         <p:spPr>
           <a:xfrm>
-            <a:off x="1664208" y="2655058"/>
-            <a:ext cx="696468" cy="228600"/>
+            <a:off x="1664208" y="2637391"/>
+            <a:ext cx="696468" cy="219456"/>
           </a:xfrm>
           <a:prstGeom prst="rect">
             <a:avLst/>
@@ -30927,14 +30881,14 @@
       </p:sp>
       <p:sp>
         <p:nvSpPr>
-          <p:cNvPr id="14" name="TextBox 13"/>
+          <p:cNvPr id="13" name="TextBox 12"/>
           <p:cNvSpPr txBox="1"/>
           <p:nvPr/>
         </p:nvSpPr>
         <p:spPr>
           <a:xfrm>
-            <a:off x="1664208" y="3730752"/>
-            <a:ext cx="696468" cy="210312"/>
+            <a:off x="1664208" y="3584448"/>
+            <a:ext cx="696468" cy="201168"/>
           </a:xfrm>
           <a:prstGeom prst="rect">
             <a:avLst/>
@@ -30963,14 +30917,14 @@
       </p:sp>
       <p:sp>
         <p:nvSpPr>
-          <p:cNvPr id="15" name="TextBox 14"/>
+          <p:cNvPr id="14" name="TextBox 13"/>
           <p:cNvSpPr txBox="1"/>
           <p:nvPr/>
         </p:nvSpPr>
         <p:spPr>
           <a:xfrm>
-            <a:off x="1664208" y="3931920"/>
-            <a:ext cx="696468" cy="192024"/>
+            <a:off x="1664208" y="3785616"/>
+            <a:ext cx="696468" cy="173736"/>
           </a:xfrm>
           <a:prstGeom prst="rect">
             <a:avLst/>
@@ -30992,21 +30946,57 @@
                 <a:latin typeface="맑은 고딕"/>
                 <a:ea typeface="맑은 고딕"/>
               </a:rPr>
-              <a:t>FN 0 / FP 2</a:t>
+              <a:t>FN 0</a:t>
             </a:r>
           </a:p>
         </p:txBody>
       </p:sp>
       <p:sp>
         <p:nvSpPr>
+          <p:cNvPr id="15" name="TextBox 14"/>
+          <p:cNvSpPr txBox="1"/>
+          <p:nvPr/>
+        </p:nvSpPr>
+        <p:spPr>
+          <a:xfrm>
+            <a:off x="1664208" y="3959352"/>
+            <a:ext cx="696468" cy="173736"/>
+          </a:xfrm>
+          <a:prstGeom prst="rect">
+            <a:avLst/>
+          </a:prstGeom>
+          <a:noFill/>
+        </p:spPr>
+        <p:txBody>
+          <a:bodyPr wrap="none" anchor="ctr" lIns="0" rIns="0" tIns="0" bIns="0">
+            <a:spAutoFit/>
+          </a:bodyPr>
+          <a:lstStyle/>
+          <a:p>
+            <a:pPr algn="ctr"/>
+            <a:r>
+              <a:rPr sz="1200">
+                <a:solidFill>
+                  <a:srgbClr val="6B7280"/>
+                </a:solidFill>
+                <a:latin typeface="맑은 고딕"/>
+                <a:ea typeface="맑은 고딕"/>
+              </a:rPr>
+              <a:t>FP 2</a:t>
+            </a:r>
+          </a:p>
+        </p:txBody>
+      </p:sp>
+      <p:sp>
+        <p:nvSpPr>
           <p:cNvPr id="16" name="Rectangle 15"/>
           <p:cNvSpPr/>
           <p:nvPr/>
         </p:nvSpPr>
         <p:spPr>
           <a:xfrm>
-            <a:off x="2499969" y="3050349"/>
-            <a:ext cx="417880" cy="652971"/>
+            <a:off x="2513898" y="3017194"/>
+            <a:ext cx="390022" cy="539822"/>
           </a:xfrm>
           <a:prstGeom prst="rect">
             <a:avLst/>
@@ -31049,8 +31039,8 @@
         </p:nvSpPr>
         <p:spPr>
           <a:xfrm>
-            <a:off x="2360676" y="2803461"/>
-            <a:ext cx="696468" cy="228600"/>
+            <a:off x="2360676" y="2779450"/>
+            <a:ext cx="696468" cy="219456"/>
           </a:xfrm>
           <a:prstGeom prst="rect">
             <a:avLst/>
@@ -31085,8 +31075,8 @@
         </p:nvSpPr>
         <p:spPr>
           <a:xfrm>
-            <a:off x="2360676" y="3730752"/>
-            <a:ext cx="696468" cy="210312"/>
+            <a:off x="2360676" y="3584448"/>
+            <a:ext cx="696468" cy="201168"/>
           </a:xfrm>
           <a:prstGeom prst="rect">
             <a:avLst/>
@@ -31121,8 +31111,8 @@
         </p:nvSpPr>
         <p:spPr>
           <a:xfrm>
-            <a:off x="2360676" y="3931920"/>
-            <a:ext cx="696468" cy="192024"/>
+            <a:off x="2360676" y="3785616"/>
+            <a:ext cx="696468" cy="173736"/>
           </a:xfrm>
           <a:prstGeom prst="rect">
             <a:avLst/>
@@ -31144,25 +31134,61 @@
                 <a:latin typeface="맑은 고딕"/>
                 <a:ea typeface="맑은 고딕"/>
               </a:rPr>
-              <a:t>FN 0 / FP 3</a:t>
+              <a:t>FN 0</a:t>
             </a:r>
           </a:p>
         </p:txBody>
       </p:sp>
       <p:sp>
         <p:nvSpPr>
-          <p:cNvPr id="20" name="Rectangle 19"/>
-          <p:cNvSpPr/>
-          <p:nvPr/>
-        </p:nvSpPr>
-        <p:spPr>
-          <a:xfrm>
-            <a:off x="3196437" y="3495557"/>
-            <a:ext cx="417880" cy="207763"/>
+          <p:cNvPr id="20" name="TextBox 19"/>
+          <p:cNvSpPr txBox="1"/>
+          <p:nvPr/>
+        </p:nvSpPr>
+        <p:spPr>
+          <a:xfrm>
+            <a:off x="2360676" y="3959352"/>
+            <a:ext cx="696468" cy="173736"/>
           </a:xfrm>
           <a:prstGeom prst="rect">
             <a:avLst/>
           </a:prstGeom>
+          <a:noFill/>
+        </p:spPr>
+        <p:txBody>
+          <a:bodyPr wrap="none" anchor="ctr" lIns="0" rIns="0" tIns="0" bIns="0">
+            <a:spAutoFit/>
+          </a:bodyPr>
+          <a:lstStyle/>
+          <a:p>
+            <a:pPr algn="ctr"/>
+            <a:r>
+              <a:rPr sz="1200">
+                <a:solidFill>
+                  <a:srgbClr val="6B7280"/>
+                </a:solidFill>
+                <a:latin typeface="맑은 고딕"/>
+                <a:ea typeface="맑은 고딕"/>
+              </a:rPr>
+              <a:t>FP 3</a:t>
+            </a:r>
+          </a:p>
+        </p:txBody>
+      </p:sp>
+      <p:sp>
+        <p:nvSpPr>
+          <p:cNvPr id="21" name="Rectangle 20"/>
+          <p:cNvSpPr/>
+          <p:nvPr/>
+        </p:nvSpPr>
+        <p:spPr>
+          <a:xfrm>
+            <a:off x="3210366" y="3443370"/>
+            <a:ext cx="390022" cy="113646"/>
+          </a:xfrm>
+          <a:prstGeom prst="rect">
+            <a:avLst/>
+          </a:prstGeom>
           <a:solidFill>
             <a:srgbClr val="AEB4BD"/>
           </a:solidFill>
@@ -31195,14 +31221,14 @@
       </p:sp>
       <p:sp>
         <p:nvSpPr>
-          <p:cNvPr id="21" name="TextBox 20"/>
+          <p:cNvPr id="22" name="TextBox 21"/>
           <p:cNvSpPr txBox="1"/>
           <p:nvPr/>
         </p:nvSpPr>
         <p:spPr>
           <a:xfrm>
-            <a:off x="3057144" y="3248669"/>
-            <a:ext cx="696468" cy="228600"/>
+            <a:off x="3057144" y="3205626"/>
+            <a:ext cx="696468" cy="219456"/>
           </a:xfrm>
           <a:prstGeom prst="rect">
             <a:avLst/>
@@ -31231,14 +31257,14 @@
       </p:sp>
       <p:sp>
         <p:nvSpPr>
-          <p:cNvPr id="22" name="TextBox 21"/>
+          <p:cNvPr id="23" name="TextBox 22"/>
           <p:cNvSpPr txBox="1"/>
           <p:nvPr/>
         </p:nvSpPr>
         <p:spPr>
           <a:xfrm>
-            <a:off x="3057144" y="3730752"/>
-            <a:ext cx="696468" cy="210312"/>
+            <a:off x="3057144" y="3584448"/>
+            <a:ext cx="696468" cy="201168"/>
           </a:xfrm>
           <a:prstGeom prst="rect">
             <a:avLst/>
@@ -31267,14 +31293,14 @@
       </p:sp>
       <p:sp>
         <p:nvSpPr>
-          <p:cNvPr id="23" name="TextBox 22"/>
+          <p:cNvPr id="24" name="TextBox 23"/>
           <p:cNvSpPr txBox="1"/>
           <p:nvPr/>
         </p:nvSpPr>
         <p:spPr>
           <a:xfrm>
-            <a:off x="3057144" y="3931920"/>
-            <a:ext cx="696468" cy="192024"/>
+            <a:off x="3057144" y="3785616"/>
+            <a:ext cx="696468" cy="173736"/>
           </a:xfrm>
           <a:prstGeom prst="rect">
             <a:avLst/>
@@ -31296,52 +31322,8 @@
                 <a:latin typeface="맑은 고딕"/>
                 <a:ea typeface="맑은 고딕"/>
               </a:rPr>
-              <a:t>FN 1 / FP 4</a:t>
+              <a:t>FN 1</a:t>
             </a:r>
-          </a:p>
-        </p:txBody>
-      </p:sp>
-      <p:sp>
-        <p:nvSpPr>
-          <p:cNvPr id="24" name="Rectangle 23"/>
-          <p:cNvSpPr/>
-          <p:nvPr/>
-        </p:nvSpPr>
-        <p:spPr>
-          <a:xfrm>
-            <a:off x="3892905" y="3258113"/>
-            <a:ext cx="417880" cy="445207"/>
-          </a:xfrm>
-          <a:prstGeom prst="rect">
-            <a:avLst/>
-          </a:prstGeom>
-          <a:solidFill>
-            <a:srgbClr val="3A6FD0"/>
-          </a:solidFill>
-          <a:ln>
-            <a:noFill/>
-          </a:ln>
-          <a:effectLst/>
-        </p:spPr>
-        <p:style>
-          <a:lnRef idx="1">
-            <a:schemeClr val="accent1"/>
-          </a:lnRef>
-          <a:fillRef idx="3">
-            <a:schemeClr val="accent1"/>
-          </a:fillRef>
-          <a:effectRef idx="2">
-            <a:schemeClr val="accent1"/>
-          </a:effectRef>
-          <a:fontRef idx="minor">
-            <a:schemeClr val="lt1"/>
-          </a:fontRef>
-        </p:style>
-        <p:txBody>
-          <a:bodyPr rtlCol="0" anchor="ctr"/>
-          <a:lstStyle/>
-          <a:p>
-            <a:pPr algn="ctr"/>
           </a:p>
         </p:txBody>
       </p:sp>
@@ -31353,8 +31335,88 @@
         </p:nvSpPr>
         <p:spPr>
           <a:xfrm>
-            <a:off x="3753612" y="3011225"/>
-            <a:ext cx="696468" cy="228600"/>
+            <a:off x="3057144" y="3959352"/>
+            <a:ext cx="696468" cy="173736"/>
+          </a:xfrm>
+          <a:prstGeom prst="rect">
+            <a:avLst/>
+          </a:prstGeom>
+          <a:noFill/>
+        </p:spPr>
+        <p:txBody>
+          <a:bodyPr wrap="none" anchor="ctr" lIns="0" rIns="0" tIns="0" bIns="0">
+            <a:spAutoFit/>
+          </a:bodyPr>
+          <a:lstStyle/>
+          <a:p>
+            <a:pPr algn="ctr"/>
+            <a:r>
+              <a:rPr sz="1200">
+                <a:solidFill>
+                  <a:srgbClr val="6B7280"/>
+                </a:solidFill>
+                <a:latin typeface="맑은 고딕"/>
+                <a:ea typeface="맑은 고딕"/>
+              </a:rPr>
+              <a:t>FP 4</a:t>
+            </a:r>
+          </a:p>
+        </p:txBody>
+      </p:sp>
+      <p:sp>
+        <p:nvSpPr>
+          <p:cNvPr id="26" name="Rectangle 25"/>
+          <p:cNvSpPr/>
+          <p:nvPr/>
+        </p:nvSpPr>
+        <p:spPr>
+          <a:xfrm>
+            <a:off x="3906834" y="3216076"/>
+            <a:ext cx="390022" cy="340940"/>
+          </a:xfrm>
+          <a:prstGeom prst="rect">
+            <a:avLst/>
+          </a:prstGeom>
+          <a:solidFill>
+            <a:srgbClr val="3A6FD0"/>
+          </a:solidFill>
+          <a:ln>
+            <a:noFill/>
+          </a:ln>
+          <a:effectLst/>
+        </p:spPr>
+        <p:style>
+          <a:lnRef idx="1">
+            <a:schemeClr val="accent1"/>
+          </a:lnRef>
+          <a:fillRef idx="3">
+            <a:schemeClr val="accent1"/>
+          </a:fillRef>
+          <a:effectRef idx="2">
+            <a:schemeClr val="accent1"/>
+          </a:effectRef>
+          <a:fontRef idx="minor">
+            <a:schemeClr val="lt1"/>
+          </a:fontRef>
+        </p:style>
+        <p:txBody>
+          <a:bodyPr rtlCol="0" anchor="ctr"/>
+          <a:lstStyle/>
+          <a:p>
+            <a:pPr algn="ctr"/>
+          </a:p>
+        </p:txBody>
+      </p:sp>
+      <p:sp>
+        <p:nvSpPr>
+          <p:cNvPr id="27" name="TextBox 26"/>
+          <p:cNvSpPr txBox="1"/>
+          <p:nvPr/>
+        </p:nvSpPr>
+        <p:spPr>
+          <a:xfrm>
+            <a:off x="3753612" y="2978332"/>
+            <a:ext cx="696468" cy="219456"/>
           </a:xfrm>
           <a:prstGeom prst="rect">
             <a:avLst/>
@@ -31383,14 +31445,14 @@
       </p:sp>
       <p:sp>
         <p:nvSpPr>
-          <p:cNvPr id="26" name="TextBox 25"/>
+          <p:cNvPr id="28" name="TextBox 27"/>
           <p:cNvSpPr txBox="1"/>
           <p:nvPr/>
         </p:nvSpPr>
         <p:spPr>
           <a:xfrm>
-            <a:off x="3753612" y="3730752"/>
-            <a:ext cx="696468" cy="210312"/>
+            <a:off x="3753612" y="3584448"/>
+            <a:ext cx="696468" cy="201168"/>
           </a:xfrm>
           <a:prstGeom prst="rect">
             <a:avLst/>
@@ -31419,14 +31481,14 @@
       </p:sp>
       <p:sp>
         <p:nvSpPr>
-          <p:cNvPr id="27" name="TextBox 26"/>
+          <p:cNvPr id="29" name="TextBox 28"/>
           <p:cNvSpPr txBox="1"/>
           <p:nvPr/>
         </p:nvSpPr>
         <p:spPr>
           <a:xfrm>
-            <a:off x="3753612" y="3931920"/>
-            <a:ext cx="696468" cy="192024"/>
+            <a:off x="3753612" y="3785616"/>
+            <a:ext cx="696468" cy="173736"/>
           </a:xfrm>
           <a:prstGeom prst="rect">
             <a:avLst/>
@@ -31448,25 +31510,61 @@
                 <a:latin typeface="맑은 고딕"/>
                 <a:ea typeface="맑은 고딕"/>
               </a:rPr>
-              <a:t>FN 1 / FP 3</a:t>
+              <a:t>FN 1</a:t>
             </a:r>
           </a:p>
         </p:txBody>
       </p:sp>
       <p:sp>
         <p:nvSpPr>
-          <p:cNvPr id="28" name="Rectangle 27"/>
-          <p:cNvSpPr/>
-          <p:nvPr/>
-        </p:nvSpPr>
-        <p:spPr>
-          <a:xfrm>
-            <a:off x="4589373" y="3139391"/>
-            <a:ext cx="417880" cy="563929"/>
+          <p:cNvPr id="30" name="TextBox 29"/>
+          <p:cNvSpPr txBox="1"/>
+          <p:nvPr/>
+        </p:nvSpPr>
+        <p:spPr>
+          <a:xfrm>
+            <a:off x="3753612" y="3959352"/>
+            <a:ext cx="696468" cy="173736"/>
           </a:xfrm>
           <a:prstGeom prst="rect">
             <a:avLst/>
           </a:prstGeom>
+          <a:noFill/>
+        </p:spPr>
+        <p:txBody>
+          <a:bodyPr wrap="none" anchor="ctr" lIns="0" rIns="0" tIns="0" bIns="0">
+            <a:spAutoFit/>
+          </a:bodyPr>
+          <a:lstStyle/>
+          <a:p>
+            <a:pPr algn="ctr"/>
+            <a:r>
+              <a:rPr sz="1200">
+                <a:solidFill>
+                  <a:srgbClr val="6B7280"/>
+                </a:solidFill>
+                <a:latin typeface="맑은 고딕"/>
+                <a:ea typeface="맑은 고딕"/>
+              </a:rPr>
+              <a:t>FP 3</a:t>
+            </a:r>
+          </a:p>
+        </p:txBody>
+      </p:sp>
+      <p:sp>
+        <p:nvSpPr>
+          <p:cNvPr id="31" name="Rectangle 30"/>
+          <p:cNvSpPr/>
+          <p:nvPr/>
+        </p:nvSpPr>
+        <p:spPr>
+          <a:xfrm>
+            <a:off x="4603302" y="3102429"/>
+            <a:ext cx="390022" cy="454587"/>
+          </a:xfrm>
+          <a:prstGeom prst="rect">
+            <a:avLst/>
+          </a:prstGeom>
           <a:solidFill>
             <a:srgbClr val="3A6FD0"/>
           </a:solidFill>
@@ -31499,14 +31597,14 @@
       </p:sp>
       <p:sp>
         <p:nvSpPr>
-          <p:cNvPr id="29" name="TextBox 28"/>
+          <p:cNvPr id="32" name="TextBox 31"/>
           <p:cNvSpPr txBox="1"/>
           <p:nvPr/>
         </p:nvSpPr>
         <p:spPr>
           <a:xfrm>
-            <a:off x="4450080" y="2892503"/>
-            <a:ext cx="696468" cy="228600"/>
+            <a:off x="4450080" y="2864685"/>
+            <a:ext cx="696468" cy="219456"/>
           </a:xfrm>
           <a:prstGeom prst="rect">
             <a:avLst/>
@@ -31535,14 +31633,14 @@
       </p:sp>
       <p:sp>
         <p:nvSpPr>
-          <p:cNvPr id="30" name="TextBox 29"/>
+          <p:cNvPr id="33" name="TextBox 32"/>
           <p:cNvSpPr txBox="1"/>
           <p:nvPr/>
         </p:nvSpPr>
         <p:spPr>
           <a:xfrm>
-            <a:off x="4450080" y="3730752"/>
-            <a:ext cx="696468" cy="210312"/>
+            <a:off x="4450080" y="3584448"/>
+            <a:ext cx="696468" cy="201168"/>
           </a:xfrm>
           <a:prstGeom prst="rect">
             <a:avLst/>
@@ -31571,14 +31669,14 @@
       </p:sp>
       <p:sp>
         <p:nvSpPr>
-          <p:cNvPr id="31" name="TextBox 30"/>
+          <p:cNvPr id="34" name="TextBox 33"/>
           <p:cNvSpPr txBox="1"/>
           <p:nvPr/>
         </p:nvSpPr>
         <p:spPr>
           <a:xfrm>
-            <a:off x="4450080" y="3931920"/>
-            <a:ext cx="696468" cy="192024"/>
+            <a:off x="4450080" y="3785616"/>
+            <a:ext cx="696468" cy="173736"/>
           </a:xfrm>
           <a:prstGeom prst="rect">
             <a:avLst/>
@@ -31600,25 +31698,61 @@
                 <a:latin typeface="맑은 고딕"/>
                 <a:ea typeface="맑은 고딕"/>
               </a:rPr>
-              <a:t>FN 0 / FP 3</a:t>
+              <a:t>FN 0</a:t>
             </a:r>
           </a:p>
         </p:txBody>
       </p:sp>
       <p:sp>
         <p:nvSpPr>
-          <p:cNvPr id="32" name="Rectangle 31"/>
-          <p:cNvSpPr/>
-          <p:nvPr/>
-        </p:nvSpPr>
-        <p:spPr>
-          <a:xfrm>
-            <a:off x="5285841" y="3347154"/>
-            <a:ext cx="417880" cy="356166"/>
+          <p:cNvPr id="35" name="TextBox 34"/>
+          <p:cNvSpPr txBox="1"/>
+          <p:nvPr/>
+        </p:nvSpPr>
+        <p:spPr>
+          <a:xfrm>
+            <a:off x="4450080" y="3959352"/>
+            <a:ext cx="696468" cy="173736"/>
           </a:xfrm>
           <a:prstGeom prst="rect">
             <a:avLst/>
           </a:prstGeom>
+          <a:noFill/>
+        </p:spPr>
+        <p:txBody>
+          <a:bodyPr wrap="none" anchor="ctr" lIns="0" rIns="0" tIns="0" bIns="0">
+            <a:spAutoFit/>
+          </a:bodyPr>
+          <a:lstStyle/>
+          <a:p>
+            <a:pPr algn="ctr"/>
+            <a:r>
+              <a:rPr sz="1200">
+                <a:solidFill>
+                  <a:srgbClr val="6B7280"/>
+                </a:solidFill>
+                <a:latin typeface="맑은 고딕"/>
+                <a:ea typeface="맑은 고딕"/>
+              </a:rPr>
+              <a:t>FP 3</a:t>
+            </a:r>
+          </a:p>
+        </p:txBody>
+      </p:sp>
+      <p:sp>
+        <p:nvSpPr>
+          <p:cNvPr id="36" name="Rectangle 35"/>
+          <p:cNvSpPr/>
+          <p:nvPr/>
+        </p:nvSpPr>
+        <p:spPr>
+          <a:xfrm>
+            <a:off x="5299770" y="3301311"/>
+            <a:ext cx="390022" cy="255705"/>
+          </a:xfrm>
+          <a:prstGeom prst="rect">
+            <a:avLst/>
+          </a:prstGeom>
           <a:solidFill>
             <a:srgbClr val="3A6FD0"/>
           </a:solidFill>
@@ -31651,14 +31785,14 @@
       </p:sp>
       <p:sp>
         <p:nvSpPr>
-          <p:cNvPr id="33" name="TextBox 32"/>
+          <p:cNvPr id="37" name="TextBox 36"/>
           <p:cNvSpPr txBox="1"/>
           <p:nvPr/>
         </p:nvSpPr>
         <p:spPr>
           <a:xfrm>
-            <a:off x="5146548" y="3100266"/>
-            <a:ext cx="696468" cy="228600"/>
+            <a:off x="5146548" y="3063567"/>
+            <a:ext cx="696468" cy="219456"/>
           </a:xfrm>
           <a:prstGeom prst="rect">
             <a:avLst/>
@@ -31687,14 +31821,14 @@
       </p:sp>
       <p:sp>
         <p:nvSpPr>
-          <p:cNvPr id="34" name="TextBox 33"/>
+          <p:cNvPr id="38" name="TextBox 37"/>
           <p:cNvSpPr txBox="1"/>
           <p:nvPr/>
         </p:nvSpPr>
         <p:spPr>
           <a:xfrm>
-            <a:off x="5146548" y="3730752"/>
-            <a:ext cx="696468" cy="210312"/>
+            <a:off x="5146548" y="3584448"/>
+            <a:ext cx="696468" cy="201168"/>
           </a:xfrm>
           <a:prstGeom prst="rect">
             <a:avLst/>
@@ -31723,14 +31857,14 @@
       </p:sp>
       <p:sp>
         <p:nvSpPr>
-          <p:cNvPr id="35" name="TextBox 34"/>
+          <p:cNvPr id="39" name="TextBox 38"/>
           <p:cNvSpPr txBox="1"/>
           <p:nvPr/>
         </p:nvSpPr>
         <p:spPr>
           <a:xfrm>
-            <a:off x="5146548" y="3931920"/>
-            <a:ext cx="696468" cy="192024"/>
+            <a:off x="5146548" y="3785616"/>
+            <a:ext cx="696468" cy="173736"/>
           </a:xfrm>
           <a:prstGeom prst="rect">
             <a:avLst/>
@@ -31752,20 +31886,56 @@
                 <a:latin typeface="맑은 고딕"/>
                 <a:ea typeface="맑은 고딕"/>
               </a:rPr>
-              <a:t>FN 1 / FP 4</a:t>
+              <a:t>FN 1</a:t>
+            </a:r>
+          </a:p>
+        </p:txBody>
+      </p:sp>
+      <p:sp>
+        <p:nvSpPr>
+          <p:cNvPr id="40" name="TextBox 39"/>
+          <p:cNvSpPr txBox="1"/>
+          <p:nvPr/>
+        </p:nvSpPr>
+        <p:spPr>
+          <a:xfrm>
+            <a:off x="5146548" y="3959352"/>
+            <a:ext cx="696468" cy="173736"/>
+          </a:xfrm>
+          <a:prstGeom prst="rect">
+            <a:avLst/>
+          </a:prstGeom>
+          <a:noFill/>
+        </p:spPr>
+        <p:txBody>
+          <a:bodyPr wrap="none" anchor="ctr" lIns="0" rIns="0" tIns="0" bIns="0">
+            <a:spAutoFit/>
+          </a:bodyPr>
+          <a:lstStyle/>
+          <a:p>
+            <a:pPr algn="ctr"/>
+            <a:r>
+              <a:rPr sz="1200">
+                <a:solidFill>
+                  <a:srgbClr val="6B7280"/>
+                </a:solidFill>
+                <a:latin typeface="맑은 고딕"/>
+                <a:ea typeface="맑은 고딕"/>
+              </a:rPr>
+              <a:t>FP 4</a:t>
             </a:r>
           </a:p>
         </p:txBody>
       </p:sp>
       <p:cxnSp>
         <p:nvCxnSpPr>
-          <p:cNvPr id="36" name="Connector 35"/>
+          <p:cNvPr id="41" name="Connector 40"/>
           <p:cNvCxnSpPr/>
           <p:nvPr/>
         </p:nvCxnSpPr>
         <p:spPr>
           <a:xfrm>
-            <a:off x="1664208" y="3703320"/>
+            <a:off x="1664208" y="3557016"/>
             <a:ext cx="4178808" cy="0"/>
           </a:xfrm>
           <a:prstGeom prst="line">
@@ -31795,7 +31965,7 @@
       </p:cxnSp>
       <p:sp>
         <p:nvSpPr>
-          <p:cNvPr id="37" name="TextBox 36"/>
+          <p:cNvPr id="42" name="TextBox 41"/>
           <p:cNvSpPr txBox="1"/>
           <p:nvPr/>
         </p:nvSpPr>
@@ -31831,14 +32001,14 @@
       </p:sp>
       <p:sp>
         <p:nvSpPr>
-          <p:cNvPr id="38" name="Rectangle 37"/>
-          <p:cNvSpPr/>
-          <p:nvPr/>
-        </p:nvSpPr>
-        <p:spPr>
-          <a:xfrm>
-            <a:off x="6717792" y="3495557"/>
-            <a:ext cx="777240" cy="207763"/>
+          <p:cNvPr id="43" name="Rectangle 42"/>
+          <p:cNvSpPr/>
+          <p:nvPr/>
+        </p:nvSpPr>
+        <p:spPr>
+          <a:xfrm>
+            <a:off x="6749796" y="3443370"/>
+            <a:ext cx="713232" cy="113646"/>
           </a:xfrm>
           <a:prstGeom prst="rect">
             <a:avLst/>
@@ -31875,14 +32045,14 @@
       </p:sp>
       <p:sp>
         <p:nvSpPr>
-          <p:cNvPr id="39" name="TextBox 38"/>
+          <p:cNvPr id="44" name="TextBox 43"/>
           <p:cNvSpPr txBox="1"/>
           <p:nvPr/>
         </p:nvSpPr>
         <p:spPr>
           <a:xfrm>
-            <a:off x="6409944" y="3248669"/>
-            <a:ext cx="1392936" cy="228600"/>
+            <a:off x="6409944" y="3205626"/>
+            <a:ext cx="1392936" cy="219456"/>
           </a:xfrm>
           <a:prstGeom prst="rect">
             <a:avLst/>
@@ -31911,14 +32081,14 @@
       </p:sp>
       <p:sp>
         <p:nvSpPr>
-          <p:cNvPr id="40" name="TextBox 39"/>
+          <p:cNvPr id="45" name="TextBox 44"/>
           <p:cNvSpPr txBox="1"/>
           <p:nvPr/>
         </p:nvSpPr>
         <p:spPr>
           <a:xfrm>
-            <a:off x="6409944" y="3730752"/>
-            <a:ext cx="1392936" cy="210312"/>
+            <a:off x="6409944" y="3584448"/>
+            <a:ext cx="1392936" cy="201168"/>
           </a:xfrm>
           <a:prstGeom prst="rect">
             <a:avLst/>
@@ -31947,14 +32117,14 @@
       </p:sp>
       <p:sp>
         <p:nvSpPr>
-          <p:cNvPr id="41" name="TextBox 40"/>
+          <p:cNvPr id="46" name="TextBox 45"/>
           <p:cNvSpPr txBox="1"/>
           <p:nvPr/>
         </p:nvSpPr>
         <p:spPr>
           <a:xfrm>
-            <a:off x="6409944" y="3931920"/>
-            <a:ext cx="1392936" cy="192024"/>
+            <a:off x="6409944" y="3785616"/>
+            <a:ext cx="1392936" cy="173736"/>
           </a:xfrm>
           <a:prstGeom prst="rect">
             <a:avLst/>
@@ -31976,25 +32146,61 @@
                 <a:latin typeface="맑은 고딕"/>
                 <a:ea typeface="맑은 고딕"/>
               </a:rPr>
-              <a:t>FN 1 / FP 4</a:t>
+              <a:t>FN 1</a:t>
             </a:r>
           </a:p>
         </p:txBody>
       </p:sp>
       <p:sp>
         <p:nvSpPr>
-          <p:cNvPr id="42" name="Rectangle 41"/>
-          <p:cNvSpPr/>
-          <p:nvPr/>
-        </p:nvSpPr>
-        <p:spPr>
-          <a:xfrm>
-            <a:off x="8110728" y="3080029"/>
-            <a:ext cx="777240" cy="623291"/>
+          <p:cNvPr id="47" name="TextBox 46"/>
+          <p:cNvSpPr txBox="1"/>
+          <p:nvPr/>
+        </p:nvSpPr>
+        <p:spPr>
+          <a:xfrm>
+            <a:off x="6409944" y="3959352"/>
+            <a:ext cx="1392936" cy="173736"/>
           </a:xfrm>
           <a:prstGeom prst="rect">
             <a:avLst/>
           </a:prstGeom>
+          <a:noFill/>
+        </p:spPr>
+        <p:txBody>
+          <a:bodyPr wrap="none" anchor="ctr" lIns="0" rIns="0" tIns="0" bIns="0">
+            <a:spAutoFit/>
+          </a:bodyPr>
+          <a:lstStyle/>
+          <a:p>
+            <a:pPr algn="ctr"/>
+            <a:r>
+              <a:rPr sz="1200">
+                <a:solidFill>
+                  <a:srgbClr val="6B7280"/>
+                </a:solidFill>
+                <a:latin typeface="맑은 고딕"/>
+                <a:ea typeface="맑은 고딕"/>
+              </a:rPr>
+              <a:t>FP 4</a:t>
+            </a:r>
+          </a:p>
+        </p:txBody>
+      </p:sp>
+      <p:sp>
+        <p:nvSpPr>
+          <p:cNvPr id="48" name="Rectangle 47"/>
+          <p:cNvSpPr/>
+          <p:nvPr/>
+        </p:nvSpPr>
+        <p:spPr>
+          <a:xfrm>
+            <a:off x="8142732" y="3045606"/>
+            <a:ext cx="713232" cy="511410"/>
+          </a:xfrm>
+          <a:prstGeom prst="rect">
+            <a:avLst/>
+          </a:prstGeom>
           <a:solidFill>
             <a:srgbClr val="3A6FD0"/>
           </a:solidFill>
@@ -32027,14 +32233,14 @@
       </p:sp>
       <p:sp>
         <p:nvSpPr>
-          <p:cNvPr id="43" name="TextBox 42"/>
+          <p:cNvPr id="49" name="TextBox 48"/>
           <p:cNvSpPr txBox="1"/>
           <p:nvPr/>
         </p:nvSpPr>
         <p:spPr>
           <a:xfrm>
-            <a:off x="7802880" y="2833141"/>
-            <a:ext cx="1392936" cy="228600"/>
+            <a:off x="7802880" y="2807862"/>
+            <a:ext cx="1392936" cy="219456"/>
           </a:xfrm>
           <a:prstGeom prst="rect">
             <a:avLst/>
@@ -32063,14 +32269,14 @@
       </p:sp>
       <p:sp>
         <p:nvSpPr>
-          <p:cNvPr id="44" name="TextBox 43"/>
+          <p:cNvPr id="50" name="TextBox 49"/>
           <p:cNvSpPr txBox="1"/>
           <p:nvPr/>
         </p:nvSpPr>
         <p:spPr>
           <a:xfrm>
-            <a:off x="7802880" y="3730752"/>
-            <a:ext cx="1392936" cy="210312"/>
+            <a:off x="7802880" y="3584448"/>
+            <a:ext cx="1392936" cy="201168"/>
           </a:xfrm>
           <a:prstGeom prst="rect">
             <a:avLst/>
@@ -32092,22 +32298,21 @@
                 <a:latin typeface="맑은 고딕"/>
                 <a:ea typeface="맑은 고딕"/>
               </a:rPr>
-              <a:t>BKM
-combined</a:t>
+              <a:t>BKM combined</a:t>
             </a:r>
           </a:p>
         </p:txBody>
       </p:sp>
       <p:sp>
         <p:nvSpPr>
-          <p:cNvPr id="45" name="TextBox 44"/>
+          <p:cNvPr id="51" name="TextBox 50"/>
           <p:cNvSpPr txBox="1"/>
           <p:nvPr/>
         </p:nvSpPr>
         <p:spPr>
           <a:xfrm>
-            <a:off x="7802880" y="3931920"/>
-            <a:ext cx="1392936" cy="192024"/>
+            <a:off x="7802880" y="3785616"/>
+            <a:ext cx="1392936" cy="173736"/>
           </a:xfrm>
           <a:prstGeom prst="rect">
             <a:avLst/>
@@ -32129,25 +32334,61 @@
                 <a:latin typeface="맑은 고딕"/>
                 <a:ea typeface="맑은 고딕"/>
               </a:rPr>
-              <a:t>FN 1 / FP 3</a:t>
+              <a:t>FN 1</a:t>
             </a:r>
           </a:p>
         </p:txBody>
       </p:sp>
       <p:sp>
         <p:nvSpPr>
-          <p:cNvPr id="46" name="Rectangle 45"/>
-          <p:cNvSpPr/>
-          <p:nvPr/>
-        </p:nvSpPr>
-        <p:spPr>
-          <a:xfrm>
-            <a:off x="9503664" y="2901946"/>
-            <a:ext cx="777240" cy="801374"/>
+          <p:cNvPr id="52" name="TextBox 51"/>
+          <p:cNvSpPr txBox="1"/>
+          <p:nvPr/>
+        </p:nvSpPr>
+        <p:spPr>
+          <a:xfrm>
+            <a:off x="7802880" y="3959352"/>
+            <a:ext cx="1392936" cy="173736"/>
           </a:xfrm>
           <a:prstGeom prst="rect">
             <a:avLst/>
           </a:prstGeom>
+          <a:noFill/>
+        </p:spPr>
+        <p:txBody>
+          <a:bodyPr wrap="none" anchor="ctr" lIns="0" rIns="0" tIns="0" bIns="0">
+            <a:spAutoFit/>
+          </a:bodyPr>
+          <a:lstStyle/>
+          <a:p>
+            <a:pPr algn="ctr"/>
+            <a:r>
+              <a:rPr sz="1200">
+                <a:solidFill>
+                  <a:srgbClr val="6B7280"/>
+                </a:solidFill>
+                <a:latin typeface="맑은 고딕"/>
+                <a:ea typeface="맑은 고딕"/>
+              </a:rPr>
+              <a:t>FP 3</a:t>
+            </a:r>
+          </a:p>
+        </p:txBody>
+      </p:sp>
+      <p:sp>
+        <p:nvSpPr>
+          <p:cNvPr id="53" name="Rectangle 52"/>
+          <p:cNvSpPr/>
+          <p:nvPr/>
+        </p:nvSpPr>
+        <p:spPr>
+          <a:xfrm>
+            <a:off x="9535668" y="2875135"/>
+            <a:ext cx="713232" cy="681881"/>
+          </a:xfrm>
+          <a:prstGeom prst="rect">
+            <a:avLst/>
+          </a:prstGeom>
           <a:solidFill>
             <a:srgbClr val="0F1E3D"/>
           </a:solidFill>
@@ -32180,14 +32421,14 @@
       </p:sp>
       <p:sp>
         <p:nvSpPr>
-          <p:cNvPr id="47" name="TextBox 46"/>
+          <p:cNvPr id="54" name="TextBox 53"/>
           <p:cNvSpPr txBox="1"/>
           <p:nvPr/>
         </p:nvSpPr>
         <p:spPr>
           <a:xfrm>
-            <a:off x="9195816" y="2655058"/>
-            <a:ext cx="1392936" cy="228600"/>
+            <a:off x="9195816" y="2637391"/>
+            <a:ext cx="1392936" cy="219456"/>
           </a:xfrm>
           <a:prstGeom prst="rect">
             <a:avLst/>
@@ -32216,14 +32457,14 @@
       </p:sp>
       <p:sp>
         <p:nvSpPr>
-          <p:cNvPr id="48" name="TextBox 47"/>
+          <p:cNvPr id="55" name="TextBox 54"/>
           <p:cNvSpPr txBox="1"/>
           <p:nvPr/>
         </p:nvSpPr>
         <p:spPr>
           <a:xfrm>
-            <a:off x="9195816" y="3730752"/>
-            <a:ext cx="1392936" cy="210312"/>
+            <a:off x="9195816" y="3584448"/>
+            <a:ext cx="1392936" cy="201168"/>
           </a:xfrm>
           <a:prstGeom prst="rect">
             <a:avLst/>
@@ -32245,22 +32486,21 @@
                 <a:latin typeface="맑은 고딕"/>
                 <a:ea typeface="맑은 고딕"/>
               </a:rPr>
-              <a:t>Best
-backbone</a:t>
+              <a:t>Best backbone</a:t>
             </a:r>
           </a:p>
         </p:txBody>
       </p:sp>
       <p:sp>
         <p:nvSpPr>
-          <p:cNvPr id="49" name="TextBox 48"/>
+          <p:cNvPr id="56" name="TextBox 55"/>
           <p:cNvSpPr txBox="1"/>
           <p:nvPr/>
         </p:nvSpPr>
         <p:spPr>
           <a:xfrm>
-            <a:off x="9195816" y="3931920"/>
-            <a:ext cx="1392936" cy="192024"/>
+            <a:off x="9195816" y="3785616"/>
+            <a:ext cx="1392936" cy="173736"/>
           </a:xfrm>
           <a:prstGeom prst="rect">
             <a:avLst/>
@@ -32282,20 +32522,56 @@
                 <a:latin typeface="맑은 고딕"/>
                 <a:ea typeface="맑은 고딕"/>
               </a:rPr>
-              <a:t>FN 0 / FP 2</a:t>
+              <a:t>FN 0</a:t>
+            </a:r>
+          </a:p>
+        </p:txBody>
+      </p:sp>
+      <p:sp>
+        <p:nvSpPr>
+          <p:cNvPr id="57" name="TextBox 56"/>
+          <p:cNvSpPr txBox="1"/>
+          <p:nvPr/>
+        </p:nvSpPr>
+        <p:spPr>
+          <a:xfrm>
+            <a:off x="9195816" y="3959352"/>
+            <a:ext cx="1392936" cy="173736"/>
+          </a:xfrm>
+          <a:prstGeom prst="rect">
+            <a:avLst/>
+          </a:prstGeom>
+          <a:noFill/>
+        </p:spPr>
+        <p:txBody>
+          <a:bodyPr wrap="none" anchor="ctr" lIns="0" rIns="0" tIns="0" bIns="0">
+            <a:spAutoFit/>
+          </a:bodyPr>
+          <a:lstStyle/>
+          <a:p>
+            <a:pPr algn="ctr"/>
+            <a:r>
+              <a:rPr sz="1200">
+                <a:solidFill>
+                  <a:srgbClr val="6B7280"/>
+                </a:solidFill>
+                <a:latin typeface="맑은 고딕"/>
+                <a:ea typeface="맑은 고딕"/>
+              </a:rPr>
+              <a:t>FP 2</a:t>
             </a:r>
           </a:p>
         </p:txBody>
       </p:sp>
       <p:cxnSp>
         <p:nvCxnSpPr>
-          <p:cNvPr id="50" name="Connector 49"/>
+          <p:cNvPr id="58" name="Connector 57"/>
           <p:cNvCxnSpPr/>
           <p:nvPr/>
         </p:nvCxnSpPr>
         <p:spPr>
           <a:xfrm>
-            <a:off x="6409944" y="3703320"/>
+            <a:off x="6409944" y="3557016"/>
             <a:ext cx="4178808" cy="0"/>
           </a:xfrm>
           <a:prstGeom prst="line">
@@ -32325,7 +32601,7 @@
       </p:cxnSp>
       <p:sp>
         <p:nvSpPr>
-          <p:cNvPr id="51" name="TextBox 50"/>
+          <p:cNvPr id="59" name="TextBox 58"/>
           <p:cNvSpPr txBox="1"/>
           <p:nvPr/>
         </p:nvSpPr>
@@ -32361,7 +32637,7 @@
       </p:sp>
       <p:sp>
         <p:nvSpPr>
-          <p:cNvPr id="52" name="TextBox 51"/>
+          <p:cNvPr id="60" name="TextBox 59"/>
           <p:cNvSpPr txBox="1"/>
           <p:nvPr/>
         </p:nvSpPr>
@@ -32410,7 +32686,7 @@
       </p:sp>
       <p:cxnSp>
         <p:nvCxnSpPr>
-          <p:cNvPr id="53" name="Connector 52"/>
+          <p:cNvPr id="61" name="Connector 60"/>
           <p:cNvCxnSpPr/>
           <p:nvPr/>
         </p:nvCxnSpPr>
@@ -32418,294 +32694,6 @@
           <a:xfrm flipV="1">
             <a:off x="1700784" y="5820424"/>
             <a:ext cx="198120" cy="48627"/>
-          </a:xfrm>
-          <a:prstGeom prst="line">
-            <a:avLst/>
-          </a:prstGeom>
-          <a:ln w="19050">
-            <a:solidFill>
-              <a:srgbClr val="AEB4BD"/>
-            </a:solidFill>
-          </a:ln>
-          <a:effectLst/>
-        </p:spPr>
-        <p:style>
-          <a:lnRef idx="2">
-            <a:schemeClr val="accent1"/>
-          </a:lnRef>
-          <a:fillRef idx="0">
-            <a:schemeClr val="accent1"/>
-          </a:fillRef>
-          <a:effectRef idx="1">
-            <a:schemeClr val="accent1"/>
-          </a:effectRef>
-          <a:fontRef idx="minor">
-            <a:schemeClr val="tx1"/>
-          </a:fontRef>
-        </p:style>
-      </p:cxnSp>
-      <p:cxnSp>
-        <p:nvCxnSpPr>
-          <p:cNvPr id="54" name="Connector 53"/>
-          <p:cNvCxnSpPr/>
-          <p:nvPr/>
-        </p:nvCxnSpPr>
-        <p:spPr>
-          <a:xfrm flipV="1">
-            <a:off x="1898904" y="5740222"/>
-            <a:ext cx="198120" cy="80202"/>
-          </a:xfrm>
-          <a:prstGeom prst="line">
-            <a:avLst/>
-          </a:prstGeom>
-          <a:ln w="19050">
-            <a:solidFill>
-              <a:srgbClr val="AEB4BD"/>
-            </a:solidFill>
-          </a:ln>
-          <a:effectLst/>
-        </p:spPr>
-        <p:style>
-          <a:lnRef idx="2">
-            <a:schemeClr val="accent1"/>
-          </a:lnRef>
-          <a:fillRef idx="0">
-            <a:schemeClr val="accent1"/>
-          </a:fillRef>
-          <a:effectRef idx="1">
-            <a:schemeClr val="accent1"/>
-          </a:effectRef>
-          <a:fontRef idx="minor">
-            <a:schemeClr val="tx1"/>
-          </a:fontRef>
-        </p:style>
-      </p:cxnSp>
-      <p:cxnSp>
-        <p:nvCxnSpPr>
-          <p:cNvPr id="55" name="Connector 54"/>
-          <p:cNvCxnSpPr/>
-          <p:nvPr/>
-        </p:nvCxnSpPr>
-        <p:spPr>
-          <a:xfrm>
-            <a:off x="2097024" y="5740222"/>
-            <a:ext cx="198120" cy="20895"/>
-          </a:xfrm>
-          <a:prstGeom prst="line">
-            <a:avLst/>
-          </a:prstGeom>
-          <a:ln w="19050">
-            <a:solidFill>
-              <a:srgbClr val="AEB4BD"/>
-            </a:solidFill>
-          </a:ln>
-          <a:effectLst/>
-        </p:spPr>
-        <p:style>
-          <a:lnRef idx="2">
-            <a:schemeClr val="accent1"/>
-          </a:lnRef>
-          <a:fillRef idx="0">
-            <a:schemeClr val="accent1"/>
-          </a:fillRef>
-          <a:effectRef idx="1">
-            <a:schemeClr val="accent1"/>
-          </a:effectRef>
-          <a:fontRef idx="minor">
-            <a:schemeClr val="tx1"/>
-          </a:fontRef>
-        </p:style>
-      </p:cxnSp>
-      <p:cxnSp>
-        <p:nvCxnSpPr>
-          <p:cNvPr id="56" name="Connector 55"/>
-          <p:cNvCxnSpPr/>
-          <p:nvPr/>
-        </p:nvCxnSpPr>
-        <p:spPr>
-          <a:xfrm flipV="1">
-            <a:off x="2295144" y="5720499"/>
-            <a:ext cx="198120" cy="40618"/>
-          </a:xfrm>
-          <a:prstGeom prst="line">
-            <a:avLst/>
-          </a:prstGeom>
-          <a:ln w="19050">
-            <a:solidFill>
-              <a:srgbClr val="AEB4BD"/>
-            </a:solidFill>
-          </a:ln>
-          <a:effectLst/>
-        </p:spPr>
-        <p:style>
-          <a:lnRef idx="2">
-            <a:schemeClr val="accent1"/>
-          </a:lnRef>
-          <a:fillRef idx="0">
-            <a:schemeClr val="accent1"/>
-          </a:fillRef>
-          <a:effectRef idx="1">
-            <a:schemeClr val="accent1"/>
-          </a:effectRef>
-          <a:fontRef idx="minor">
-            <a:schemeClr val="tx1"/>
-          </a:fontRef>
-        </p:style>
-      </p:cxnSp>
-      <p:cxnSp>
-        <p:nvCxnSpPr>
-          <p:cNvPr id="57" name="Connector 56"/>
-          <p:cNvCxnSpPr/>
-          <p:nvPr/>
-        </p:nvCxnSpPr>
-        <p:spPr>
-          <a:xfrm>
-            <a:off x="2493264" y="5720499"/>
-            <a:ext cx="198120" cy="50572"/>
-          </a:xfrm>
-          <a:prstGeom prst="line">
-            <a:avLst/>
-          </a:prstGeom>
-          <a:ln w="19050">
-            <a:solidFill>
-              <a:srgbClr val="AEB4BD"/>
-            </a:solidFill>
-          </a:ln>
-          <a:effectLst/>
-        </p:spPr>
-        <p:style>
-          <a:lnRef idx="2">
-            <a:schemeClr val="accent1"/>
-          </a:lnRef>
-          <a:fillRef idx="0">
-            <a:schemeClr val="accent1"/>
-          </a:fillRef>
-          <a:effectRef idx="1">
-            <a:schemeClr val="accent1"/>
-          </a:effectRef>
-          <a:fontRef idx="minor">
-            <a:schemeClr val="tx1"/>
-          </a:fontRef>
-        </p:style>
-      </p:cxnSp>
-      <p:cxnSp>
-        <p:nvCxnSpPr>
-          <p:cNvPr id="58" name="Connector 57"/>
-          <p:cNvCxnSpPr/>
-          <p:nvPr/>
-        </p:nvCxnSpPr>
-        <p:spPr>
-          <a:xfrm flipV="1">
-            <a:off x="2691384" y="5256678"/>
-            <a:ext cx="198120" cy="514393"/>
-          </a:xfrm>
-          <a:prstGeom prst="line">
-            <a:avLst/>
-          </a:prstGeom>
-          <a:ln w="19050">
-            <a:solidFill>
-              <a:srgbClr val="AEB4BD"/>
-            </a:solidFill>
-          </a:ln>
-          <a:effectLst/>
-        </p:spPr>
-        <p:style>
-          <a:lnRef idx="2">
-            <a:schemeClr val="accent1"/>
-          </a:lnRef>
-          <a:fillRef idx="0">
-            <a:schemeClr val="accent1"/>
-          </a:fillRef>
-          <a:effectRef idx="1">
-            <a:schemeClr val="accent1"/>
-          </a:effectRef>
-          <a:fontRef idx="minor">
-            <a:schemeClr val="tx1"/>
-          </a:fontRef>
-        </p:style>
-      </p:cxnSp>
-      <p:cxnSp>
-        <p:nvCxnSpPr>
-          <p:cNvPr id="59" name="Connector 58"/>
-          <p:cNvCxnSpPr/>
-          <p:nvPr/>
-        </p:nvCxnSpPr>
-        <p:spPr>
-          <a:xfrm>
-            <a:off x="2889504" y="5256678"/>
-            <a:ext cx="198120" cy="545103"/>
-          </a:xfrm>
-          <a:prstGeom prst="line">
-            <a:avLst/>
-          </a:prstGeom>
-          <a:ln w="19050">
-            <a:solidFill>
-              <a:srgbClr val="AEB4BD"/>
-            </a:solidFill>
-          </a:ln>
-          <a:effectLst/>
-        </p:spPr>
-        <p:style>
-          <a:lnRef idx="2">
-            <a:schemeClr val="accent1"/>
-          </a:lnRef>
-          <a:fillRef idx="0">
-            <a:schemeClr val="accent1"/>
-          </a:fillRef>
-          <a:effectRef idx="1">
-            <a:schemeClr val="accent1"/>
-          </a:effectRef>
-          <a:fontRef idx="minor">
-            <a:schemeClr val="tx1"/>
-          </a:fontRef>
-        </p:style>
-      </p:cxnSp>
-      <p:cxnSp>
-        <p:nvCxnSpPr>
-          <p:cNvPr id="60" name="Connector 59"/>
-          <p:cNvCxnSpPr/>
-          <p:nvPr/>
-        </p:nvCxnSpPr>
-        <p:spPr>
-          <a:xfrm flipV="1">
-            <a:off x="3087624" y="5563769"/>
-            <a:ext cx="198120" cy="238012"/>
-          </a:xfrm>
-          <a:prstGeom prst="line">
-            <a:avLst/>
-          </a:prstGeom>
-          <a:ln w="19050">
-            <a:solidFill>
-              <a:srgbClr val="AEB4BD"/>
-            </a:solidFill>
-          </a:ln>
-          <a:effectLst/>
-        </p:spPr>
-        <p:style>
-          <a:lnRef idx="2">
-            <a:schemeClr val="accent1"/>
-          </a:lnRef>
-          <a:fillRef idx="0">
-            <a:schemeClr val="accent1"/>
-          </a:fillRef>
-          <a:effectRef idx="1">
-            <a:schemeClr val="accent1"/>
-          </a:effectRef>
-          <a:fontRef idx="minor">
-            <a:schemeClr val="tx1"/>
-          </a:fontRef>
-        </p:style>
-      </p:cxnSp>
-      <p:cxnSp>
-        <p:nvCxnSpPr>
-          <p:cNvPr id="61" name="Connector 60"/>
-          <p:cNvCxnSpPr/>
-          <p:nvPr/>
-        </p:nvCxnSpPr>
-        <p:spPr>
-          <a:xfrm flipV="1">
-            <a:off x="3285744" y="5508300"/>
-            <a:ext cx="198120" cy="55469"/>
           </a:xfrm>
           <a:prstGeom prst="line">
             <a:avLst/>
@@ -32739,9 +32727,9 @@
           <p:nvPr/>
         </p:nvCxnSpPr>
         <p:spPr>
-          <a:xfrm>
-            <a:off x="3483864" y="5508300"/>
-            <a:ext cx="198120" cy="50413"/>
+          <a:xfrm flipV="1">
+            <a:off x="1898904" y="5740222"/>
+            <a:ext cx="198120" cy="80202"/>
           </a:xfrm>
           <a:prstGeom prst="line">
             <a:avLst/>
@@ -32775,9 +32763,9 @@
           <p:nvPr/>
         </p:nvCxnSpPr>
         <p:spPr>
-          <a:xfrm flipV="1">
-            <a:off x="3681984" y="5497570"/>
-            <a:ext cx="198120" cy="61143"/>
+          <a:xfrm>
+            <a:off x="2097024" y="5740222"/>
+            <a:ext cx="198120" cy="20895"/>
           </a:xfrm>
           <a:prstGeom prst="line">
             <a:avLst/>
@@ -32812,8 +32800,8 @@
         </p:nvCxnSpPr>
         <p:spPr>
           <a:xfrm flipV="1">
-            <a:off x="3880104" y="5488267"/>
-            <a:ext cx="198120" cy="9303"/>
+            <a:off x="2295144" y="5720499"/>
+            <a:ext cx="198120" cy="40618"/>
           </a:xfrm>
           <a:prstGeom prst="line">
             <a:avLst/>
@@ -32847,9 +32835,9 @@
           <p:nvPr/>
         </p:nvCxnSpPr>
         <p:spPr>
-          <a:xfrm flipV="1">
-            <a:off x="4078224" y="5364514"/>
-            <a:ext cx="198120" cy="123753"/>
+          <a:xfrm>
+            <a:off x="2493264" y="5720499"/>
+            <a:ext cx="198120" cy="50572"/>
           </a:xfrm>
           <a:prstGeom prst="line">
             <a:avLst/>
@@ -32883,9 +32871,9 @@
           <p:nvPr/>
         </p:nvCxnSpPr>
         <p:spPr>
-          <a:xfrm>
-            <a:off x="4276344" y="5364514"/>
-            <a:ext cx="198120" cy="4712"/>
+          <a:xfrm flipV="1">
+            <a:off x="2691384" y="5256678"/>
+            <a:ext cx="198120" cy="514393"/>
           </a:xfrm>
           <a:prstGeom prst="line">
             <a:avLst/>
@@ -32920,8 +32908,8 @@
         </p:nvCxnSpPr>
         <p:spPr>
           <a:xfrm>
-            <a:off x="4474464" y="5369226"/>
-            <a:ext cx="198120" cy="43193"/>
+            <a:off x="2889504" y="5256678"/>
+            <a:ext cx="198120" cy="545103"/>
           </a:xfrm>
           <a:prstGeom prst="line">
             <a:avLst/>
@@ -32956,8 +32944,8 @@
         </p:nvCxnSpPr>
         <p:spPr>
           <a:xfrm flipV="1">
-            <a:off x="4672584" y="5400382"/>
-            <a:ext cx="198120" cy="12037"/>
+            <a:off x="3087624" y="5563769"/>
+            <a:ext cx="198120" cy="238012"/>
           </a:xfrm>
           <a:prstGeom prst="line">
             <a:avLst/>
@@ -32992,8 +32980,8 @@
         </p:nvCxnSpPr>
         <p:spPr>
           <a:xfrm flipV="1">
-            <a:off x="4870704" y="5395616"/>
-            <a:ext cx="198120" cy="4766"/>
+            <a:off x="3285744" y="5508300"/>
+            <a:ext cx="198120" cy="55469"/>
           </a:xfrm>
           <a:prstGeom prst="line">
             <a:avLst/>
@@ -33028,8 +33016,8 @@
         </p:nvCxnSpPr>
         <p:spPr>
           <a:xfrm>
-            <a:off x="5068824" y="5395616"/>
-            <a:ext cx="198120" cy="19518"/>
+            <a:off x="3483864" y="5508300"/>
+            <a:ext cx="198120" cy="50413"/>
           </a:xfrm>
           <a:prstGeom prst="line">
             <a:avLst/>
@@ -33064,8 +33052,8 @@
         </p:nvCxnSpPr>
         <p:spPr>
           <a:xfrm flipV="1">
-            <a:off x="5266944" y="5375163"/>
-            <a:ext cx="198120" cy="39971"/>
+            <a:off x="3681984" y="5497570"/>
+            <a:ext cx="198120" cy="61143"/>
           </a:xfrm>
           <a:prstGeom prst="line">
             <a:avLst/>
@@ -33099,9 +33087,9 @@
           <p:nvPr/>
         </p:nvCxnSpPr>
         <p:spPr>
-          <a:xfrm>
-            <a:off x="5465064" y="5375163"/>
-            <a:ext cx="198120" cy="2157"/>
+          <a:xfrm flipV="1">
+            <a:off x="3880104" y="5488267"/>
+            <a:ext cx="198120" cy="9303"/>
           </a:xfrm>
           <a:prstGeom prst="line">
             <a:avLst/>
@@ -33136,8 +33124,8 @@
         </p:nvCxnSpPr>
         <p:spPr>
           <a:xfrm flipV="1">
-            <a:off x="5663184" y="5340293"/>
-            <a:ext cx="198120" cy="37027"/>
+            <a:off x="4078224" y="5364514"/>
+            <a:ext cx="198120" cy="123753"/>
           </a:xfrm>
           <a:prstGeom prst="line">
             <a:avLst/>
@@ -33171,16 +33159,16 @@
           <p:nvPr/>
         </p:nvCxnSpPr>
         <p:spPr>
-          <a:xfrm flipV="1">
-            <a:off x="1700784" y="5761117"/>
-            <a:ext cx="198120" cy="59307"/>
+          <a:xfrm>
+            <a:off x="4276344" y="5364514"/>
+            <a:ext cx="198120" cy="4712"/>
           </a:xfrm>
           <a:prstGeom prst="line">
             <a:avLst/>
           </a:prstGeom>
-          <a:ln w="35560">
+          <a:ln w="19050">
             <a:solidFill>
-              <a:srgbClr val="3A6FD0"/>
+              <a:srgbClr val="AEB4BD"/>
             </a:solidFill>
           </a:ln>
           <a:effectLst/>
@@ -33207,16 +33195,16 @@
           <p:nvPr/>
         </p:nvCxnSpPr>
         <p:spPr>
-          <a:xfrm flipV="1">
-            <a:off x="1898904" y="5740222"/>
-            <a:ext cx="198120" cy="20895"/>
+          <a:xfrm>
+            <a:off x="4474464" y="5369226"/>
+            <a:ext cx="198120" cy="43193"/>
           </a:xfrm>
           <a:prstGeom prst="line">
             <a:avLst/>
           </a:prstGeom>
-          <a:ln w="35560">
+          <a:ln w="19050">
             <a:solidFill>
-              <a:srgbClr val="3A6FD0"/>
+              <a:srgbClr val="AEB4BD"/>
             </a:solidFill>
           </a:ln>
           <a:effectLst/>
@@ -33243,16 +33231,16 @@
           <p:nvPr/>
         </p:nvCxnSpPr>
         <p:spPr>
-          <a:xfrm>
-            <a:off x="2097024" y="5740222"/>
-            <a:ext cx="198120" cy="20895"/>
+          <a:xfrm flipV="1">
+            <a:off x="4672584" y="5400382"/>
+            <a:ext cx="198120" cy="12037"/>
           </a:xfrm>
           <a:prstGeom prst="line">
             <a:avLst/>
           </a:prstGeom>
-          <a:ln w="35560">
+          <a:ln w="19050">
             <a:solidFill>
-              <a:srgbClr val="3A6FD0"/>
+              <a:srgbClr val="AEB4BD"/>
             </a:solidFill>
           </a:ln>
           <a:effectLst/>
@@ -33280,15 +33268,15 @@
         </p:nvCxnSpPr>
         <p:spPr>
           <a:xfrm flipV="1">
-            <a:off x="2295144" y="5720499"/>
-            <a:ext cx="198120" cy="40618"/>
+            <a:off x="4870704" y="5395616"/>
+            <a:ext cx="198120" cy="4766"/>
           </a:xfrm>
           <a:prstGeom prst="line">
             <a:avLst/>
           </a:prstGeom>
-          <a:ln w="35560">
+          <a:ln w="19050">
             <a:solidFill>
-              <a:srgbClr val="3A6FD0"/>
+              <a:srgbClr val="AEB4BD"/>
             </a:solidFill>
           </a:ln>
           <a:effectLst/>
@@ -33316,15 +33304,15 @@
         </p:nvCxnSpPr>
         <p:spPr>
           <a:xfrm>
-            <a:off x="2493264" y="5720499"/>
-            <a:ext cx="198120" cy="50572"/>
+            <a:off x="5068824" y="5395616"/>
+            <a:ext cx="198120" cy="19518"/>
           </a:xfrm>
           <a:prstGeom prst="line">
             <a:avLst/>
           </a:prstGeom>
-          <a:ln w="35560">
+          <a:ln w="19050">
             <a:solidFill>
-              <a:srgbClr val="3A6FD0"/>
+              <a:srgbClr val="AEB4BD"/>
             </a:solidFill>
           </a:ln>
           <a:effectLst/>
@@ -33352,15 +33340,15 @@
         </p:nvCxnSpPr>
         <p:spPr>
           <a:xfrm flipV="1">
-            <a:off x="2691384" y="5563769"/>
-            <a:ext cx="198120" cy="207302"/>
+            <a:off x="5266944" y="5375163"/>
+            <a:ext cx="198120" cy="39971"/>
           </a:xfrm>
           <a:prstGeom prst="line">
             <a:avLst/>
           </a:prstGeom>
-          <a:ln w="35560">
+          <a:ln w="19050">
             <a:solidFill>
-              <a:srgbClr val="3A6FD0"/>
+              <a:srgbClr val="AEB4BD"/>
             </a:solidFill>
           </a:ln>
           <a:effectLst/>
@@ -33388,15 +33376,15 @@
         </p:nvCxnSpPr>
         <p:spPr>
           <a:xfrm>
-            <a:off x="2889504" y="5563769"/>
-            <a:ext cx="198120" cy="0"/>
+            <a:off x="5465064" y="5375163"/>
+            <a:ext cx="198120" cy="2157"/>
           </a:xfrm>
           <a:prstGeom prst="line">
             <a:avLst/>
           </a:prstGeom>
-          <a:ln w="35560">
+          <a:ln w="19050">
             <a:solidFill>
-              <a:srgbClr val="3A6FD0"/>
+              <a:srgbClr val="AEB4BD"/>
             </a:solidFill>
           </a:ln>
           <a:effectLst/>
@@ -33424,15 +33412,15 @@
         </p:nvCxnSpPr>
         <p:spPr>
           <a:xfrm flipV="1">
-            <a:off x="3087624" y="5558713"/>
-            <a:ext cx="198120" cy="5056"/>
+            <a:off x="5663184" y="5340293"/>
+            <a:ext cx="198120" cy="37027"/>
           </a:xfrm>
           <a:prstGeom prst="line">
             <a:avLst/>
           </a:prstGeom>
-          <a:ln w="35560">
+          <a:ln w="19050">
             <a:solidFill>
-              <a:srgbClr val="3A6FD0"/>
+              <a:srgbClr val="AEB4BD"/>
             </a:solidFill>
           </a:ln>
           <a:effectLst/>
@@ -33460,8 +33448,8 @@
         </p:nvCxnSpPr>
         <p:spPr>
           <a:xfrm flipV="1">
-            <a:off x="3285744" y="5508300"/>
-            <a:ext cx="198120" cy="50413"/>
+            <a:off x="1700784" y="5761117"/>
+            <a:ext cx="198120" cy="59307"/>
           </a:xfrm>
           <a:prstGeom prst="line">
             <a:avLst/>
@@ -33496,8 +33484,8 @@
         </p:nvCxnSpPr>
         <p:spPr>
           <a:xfrm flipV="1">
-            <a:off x="3483864" y="5497570"/>
-            <a:ext cx="198120" cy="10730"/>
+            <a:off x="1898904" y="5740222"/>
+            <a:ext cx="198120" cy="20895"/>
           </a:xfrm>
           <a:prstGeom prst="line">
             <a:avLst/>
@@ -33531,9 +33519,9 @@
           <p:nvPr/>
         </p:nvCxnSpPr>
         <p:spPr>
-          <a:xfrm flipV="1">
-            <a:off x="3681984" y="5488267"/>
-            <a:ext cx="198120" cy="9303"/>
+          <a:xfrm>
+            <a:off x="2097024" y="5740222"/>
+            <a:ext cx="198120" cy="20895"/>
           </a:xfrm>
           <a:prstGeom prst="line">
             <a:avLst/>
@@ -33568,8 +33556,8 @@
         </p:nvCxnSpPr>
         <p:spPr>
           <a:xfrm flipV="1">
-            <a:off x="3880104" y="5369226"/>
-            <a:ext cx="198120" cy="119041"/>
+            <a:off x="2295144" y="5720499"/>
+            <a:ext cx="198120" cy="40618"/>
           </a:xfrm>
           <a:prstGeom prst="line">
             <a:avLst/>
@@ -33604,8 +33592,8 @@
         </p:nvCxnSpPr>
         <p:spPr>
           <a:xfrm>
-            <a:off x="4078224" y="5369226"/>
-            <a:ext cx="198120" cy="0"/>
+            <a:off x="2493264" y="5720499"/>
+            <a:ext cx="198120" cy="50572"/>
           </a:xfrm>
           <a:prstGeom prst="line">
             <a:avLst/>
@@ -33639,9 +33627,9 @@
           <p:nvPr/>
         </p:nvCxnSpPr>
         <p:spPr>
-          <a:xfrm>
-            <a:off x="4276344" y="5369226"/>
-            <a:ext cx="198120" cy="31156"/>
+          <a:xfrm flipV="1">
+            <a:off x="2691384" y="5563769"/>
+            <a:ext cx="198120" cy="207302"/>
           </a:xfrm>
           <a:prstGeom prst="line">
             <a:avLst/>
@@ -33676,7 +33664,7 @@
         </p:nvCxnSpPr>
         <p:spPr>
           <a:xfrm>
-            <a:off x="4474464" y="5400382"/>
+            <a:off x="2889504" y="5563769"/>
             <a:ext cx="198120" cy="0"/>
           </a:xfrm>
           <a:prstGeom prst="line">
@@ -33711,9 +33699,9 @@
           <p:nvPr/>
         </p:nvCxnSpPr>
         <p:spPr>
-          <a:xfrm>
-            <a:off x="4672584" y="5400382"/>
-            <a:ext cx="198120" cy="0"/>
+          <a:xfrm flipV="1">
+            <a:off x="3087624" y="5558713"/>
+            <a:ext cx="198120" cy="5056"/>
           </a:xfrm>
           <a:prstGeom prst="line">
             <a:avLst/>
@@ -33748,8 +33736,8 @@
         </p:nvCxnSpPr>
         <p:spPr>
           <a:xfrm flipV="1">
-            <a:off x="4870704" y="5395616"/>
-            <a:ext cx="198120" cy="4766"/>
+            <a:off x="3285744" y="5508300"/>
+            <a:ext cx="198120" cy="50413"/>
           </a:xfrm>
           <a:prstGeom prst="line">
             <a:avLst/>
@@ -33784,8 +33772,8 @@
         </p:nvCxnSpPr>
         <p:spPr>
           <a:xfrm flipV="1">
-            <a:off x="5068824" y="5377320"/>
-            <a:ext cx="198120" cy="18296"/>
+            <a:off x="3483864" y="5497570"/>
+            <a:ext cx="198120" cy="10730"/>
           </a:xfrm>
           <a:prstGeom prst="line">
             <a:avLst/>
@@ -33820,8 +33808,8 @@
         </p:nvCxnSpPr>
         <p:spPr>
           <a:xfrm flipV="1">
-            <a:off x="5266944" y="5375163"/>
-            <a:ext cx="198120" cy="2157"/>
+            <a:off x="3681984" y="5488267"/>
+            <a:ext cx="198120" cy="9303"/>
           </a:xfrm>
           <a:prstGeom prst="line">
             <a:avLst/>
@@ -33848,94 +33836,78 @@
           </a:fontRef>
         </p:style>
       </p:cxnSp>
-      <p:sp>
-        <p:nvSpPr>
-          <p:cNvPr id="93" name="Oval 92"/>
-          <p:cNvSpPr/>
-          <p:nvPr/>
-        </p:nvSpPr>
-        <p:spPr>
-          <a:xfrm>
-            <a:off x="2839212" y="5206386"/>
-            <a:ext cx="100584" cy="100584"/>
-          </a:xfrm>
-          <a:prstGeom prst="ellipse">
-            <a:avLst/>
-          </a:prstGeom>
-          <a:solidFill>
-            <a:srgbClr val="CC3328"/>
-          </a:solidFill>
-          <a:ln>
-            <a:noFill/>
-          </a:ln>
-          <a:effectLst/>
-        </p:spPr>
-        <p:style>
-          <a:lnRef idx="1">
-            <a:schemeClr val="accent1"/>
-          </a:lnRef>
-          <a:fillRef idx="3">
-            <a:schemeClr val="accent1"/>
-          </a:fillRef>
-          <a:effectRef idx="2">
-            <a:schemeClr val="accent1"/>
-          </a:effectRef>
-          <a:fontRef idx="minor">
-            <a:schemeClr val="lt1"/>
-          </a:fontRef>
-        </p:style>
-        <p:txBody>
-          <a:bodyPr rtlCol="0" anchor="ctr"/>
-          <a:lstStyle/>
-          <a:p>
-            <a:pPr algn="ctr"/>
-          </a:p>
-        </p:txBody>
-      </p:sp>
-      <p:sp>
-        <p:nvSpPr>
-          <p:cNvPr id="94" name="Diamond 93"/>
-          <p:cNvSpPr/>
-          <p:nvPr/>
-        </p:nvSpPr>
-        <p:spPr>
-          <a:xfrm>
-            <a:off x="4009644" y="5300646"/>
-            <a:ext cx="137160" cy="137160"/>
-          </a:xfrm>
-          <a:prstGeom prst="diamond">
-            <a:avLst/>
-          </a:prstGeom>
-          <a:solidFill>
-            <a:srgbClr val="0F1E3D"/>
-          </a:solidFill>
-          <a:ln>
-            <a:noFill/>
-          </a:ln>
-          <a:effectLst/>
-        </p:spPr>
-        <p:style>
-          <a:lnRef idx="1">
-            <a:schemeClr val="accent1"/>
-          </a:lnRef>
-          <a:fillRef idx="3">
-            <a:schemeClr val="accent1"/>
-          </a:fillRef>
-          <a:effectRef idx="2">
-            <a:schemeClr val="accent1"/>
-          </a:effectRef>
-          <a:fontRef idx="minor">
-            <a:schemeClr val="lt1"/>
-          </a:fontRef>
-        </p:style>
-        <p:txBody>
-          <a:bodyPr rtlCol="0" anchor="ctr"/>
-          <a:lstStyle/>
-          <a:p>
-            <a:pPr algn="ctr"/>
-          </a:p>
-        </p:txBody>
-      </p:sp>
+      <p:cxnSp>
+        <p:nvCxnSpPr>
+          <p:cNvPr id="93" name="Connector 92"/>
+          <p:cNvCxnSpPr/>
+          <p:nvPr/>
+        </p:nvCxnSpPr>
+        <p:spPr>
+          <a:xfrm flipV="1">
+            <a:off x="3880104" y="5369226"/>
+            <a:ext cx="198120" cy="119041"/>
+          </a:xfrm>
+          <a:prstGeom prst="line">
+            <a:avLst/>
+          </a:prstGeom>
+          <a:ln w="35560">
+            <a:solidFill>
+              <a:srgbClr val="3A6FD0"/>
+            </a:solidFill>
+          </a:ln>
+          <a:effectLst/>
+        </p:spPr>
+        <p:style>
+          <a:lnRef idx="2">
+            <a:schemeClr val="accent1"/>
+          </a:lnRef>
+          <a:fillRef idx="0">
+            <a:schemeClr val="accent1"/>
+          </a:fillRef>
+          <a:effectRef idx="1">
+            <a:schemeClr val="accent1"/>
+          </a:effectRef>
+          <a:fontRef idx="minor">
+            <a:schemeClr val="tx1"/>
+          </a:fontRef>
+        </p:style>
+      </p:cxnSp>
+      <p:cxnSp>
+        <p:nvCxnSpPr>
+          <p:cNvPr id="94" name="Connector 93"/>
+          <p:cNvCxnSpPr/>
+          <p:nvPr/>
+        </p:nvCxnSpPr>
+        <p:spPr>
+          <a:xfrm>
+            <a:off x="4078224" y="5369226"/>
+            <a:ext cx="198120" cy="0"/>
+          </a:xfrm>
+          <a:prstGeom prst="line">
+            <a:avLst/>
+          </a:prstGeom>
+          <a:ln w="35560">
+            <a:solidFill>
+              <a:srgbClr val="3A6FD0"/>
+            </a:solidFill>
+          </a:ln>
+          <a:effectLst/>
+        </p:spPr>
+        <p:style>
+          <a:lnRef idx="2">
+            <a:schemeClr val="accent1"/>
+          </a:lnRef>
+          <a:fillRef idx="0">
+            <a:schemeClr val="accent1"/>
+          </a:fillRef>
+          <a:effectRef idx="1">
+            <a:schemeClr val="accent1"/>
+          </a:effectRef>
+          <a:fontRef idx="minor">
+            <a:schemeClr val="tx1"/>
+          </a:fontRef>
+        </p:style>
+      </p:cxnSp>
       <p:cxnSp>
         <p:nvCxnSpPr>
           <p:cNvPr id="95" name="Connector 94"/>
@@ -33944,6 +33916,310 @@
         </p:nvCxnSpPr>
         <p:spPr>
           <a:xfrm>
+            <a:off x="4276344" y="5369226"/>
+            <a:ext cx="198120" cy="31156"/>
+          </a:xfrm>
+          <a:prstGeom prst="line">
+            <a:avLst/>
+          </a:prstGeom>
+          <a:ln w="35560">
+            <a:solidFill>
+              <a:srgbClr val="3A6FD0"/>
+            </a:solidFill>
+          </a:ln>
+          <a:effectLst/>
+        </p:spPr>
+        <p:style>
+          <a:lnRef idx="2">
+            <a:schemeClr val="accent1"/>
+          </a:lnRef>
+          <a:fillRef idx="0">
+            <a:schemeClr val="accent1"/>
+          </a:fillRef>
+          <a:effectRef idx="1">
+            <a:schemeClr val="accent1"/>
+          </a:effectRef>
+          <a:fontRef idx="minor">
+            <a:schemeClr val="tx1"/>
+          </a:fontRef>
+        </p:style>
+      </p:cxnSp>
+      <p:cxnSp>
+        <p:nvCxnSpPr>
+          <p:cNvPr id="96" name="Connector 95"/>
+          <p:cNvCxnSpPr/>
+          <p:nvPr/>
+        </p:nvCxnSpPr>
+        <p:spPr>
+          <a:xfrm>
+            <a:off x="4474464" y="5400382"/>
+            <a:ext cx="198120" cy="0"/>
+          </a:xfrm>
+          <a:prstGeom prst="line">
+            <a:avLst/>
+          </a:prstGeom>
+          <a:ln w="35560">
+            <a:solidFill>
+              <a:srgbClr val="3A6FD0"/>
+            </a:solidFill>
+          </a:ln>
+          <a:effectLst/>
+        </p:spPr>
+        <p:style>
+          <a:lnRef idx="2">
+            <a:schemeClr val="accent1"/>
+          </a:lnRef>
+          <a:fillRef idx="0">
+            <a:schemeClr val="accent1"/>
+          </a:fillRef>
+          <a:effectRef idx="1">
+            <a:schemeClr val="accent1"/>
+          </a:effectRef>
+          <a:fontRef idx="minor">
+            <a:schemeClr val="tx1"/>
+          </a:fontRef>
+        </p:style>
+      </p:cxnSp>
+      <p:cxnSp>
+        <p:nvCxnSpPr>
+          <p:cNvPr id="97" name="Connector 96"/>
+          <p:cNvCxnSpPr/>
+          <p:nvPr/>
+        </p:nvCxnSpPr>
+        <p:spPr>
+          <a:xfrm>
+            <a:off x="4672584" y="5400382"/>
+            <a:ext cx="198120" cy="0"/>
+          </a:xfrm>
+          <a:prstGeom prst="line">
+            <a:avLst/>
+          </a:prstGeom>
+          <a:ln w="35560">
+            <a:solidFill>
+              <a:srgbClr val="3A6FD0"/>
+            </a:solidFill>
+          </a:ln>
+          <a:effectLst/>
+        </p:spPr>
+        <p:style>
+          <a:lnRef idx="2">
+            <a:schemeClr val="accent1"/>
+          </a:lnRef>
+          <a:fillRef idx="0">
+            <a:schemeClr val="accent1"/>
+          </a:fillRef>
+          <a:effectRef idx="1">
+            <a:schemeClr val="accent1"/>
+          </a:effectRef>
+          <a:fontRef idx="minor">
+            <a:schemeClr val="tx1"/>
+          </a:fontRef>
+        </p:style>
+      </p:cxnSp>
+      <p:cxnSp>
+        <p:nvCxnSpPr>
+          <p:cNvPr id="98" name="Connector 97"/>
+          <p:cNvCxnSpPr/>
+          <p:nvPr/>
+        </p:nvCxnSpPr>
+        <p:spPr>
+          <a:xfrm flipV="1">
+            <a:off x="4870704" y="5395616"/>
+            <a:ext cx="198120" cy="4766"/>
+          </a:xfrm>
+          <a:prstGeom prst="line">
+            <a:avLst/>
+          </a:prstGeom>
+          <a:ln w="35560">
+            <a:solidFill>
+              <a:srgbClr val="3A6FD0"/>
+            </a:solidFill>
+          </a:ln>
+          <a:effectLst/>
+        </p:spPr>
+        <p:style>
+          <a:lnRef idx="2">
+            <a:schemeClr val="accent1"/>
+          </a:lnRef>
+          <a:fillRef idx="0">
+            <a:schemeClr val="accent1"/>
+          </a:fillRef>
+          <a:effectRef idx="1">
+            <a:schemeClr val="accent1"/>
+          </a:effectRef>
+          <a:fontRef idx="minor">
+            <a:schemeClr val="tx1"/>
+          </a:fontRef>
+        </p:style>
+      </p:cxnSp>
+      <p:cxnSp>
+        <p:nvCxnSpPr>
+          <p:cNvPr id="99" name="Connector 98"/>
+          <p:cNvCxnSpPr/>
+          <p:nvPr/>
+        </p:nvCxnSpPr>
+        <p:spPr>
+          <a:xfrm flipV="1">
+            <a:off x="5068824" y="5377320"/>
+            <a:ext cx="198120" cy="18296"/>
+          </a:xfrm>
+          <a:prstGeom prst="line">
+            <a:avLst/>
+          </a:prstGeom>
+          <a:ln w="35560">
+            <a:solidFill>
+              <a:srgbClr val="3A6FD0"/>
+            </a:solidFill>
+          </a:ln>
+          <a:effectLst/>
+        </p:spPr>
+        <p:style>
+          <a:lnRef idx="2">
+            <a:schemeClr val="accent1"/>
+          </a:lnRef>
+          <a:fillRef idx="0">
+            <a:schemeClr val="accent1"/>
+          </a:fillRef>
+          <a:effectRef idx="1">
+            <a:schemeClr val="accent1"/>
+          </a:effectRef>
+          <a:fontRef idx="minor">
+            <a:schemeClr val="tx1"/>
+          </a:fontRef>
+        </p:style>
+      </p:cxnSp>
+      <p:cxnSp>
+        <p:nvCxnSpPr>
+          <p:cNvPr id="100" name="Connector 99"/>
+          <p:cNvCxnSpPr/>
+          <p:nvPr/>
+        </p:nvCxnSpPr>
+        <p:spPr>
+          <a:xfrm flipV="1">
+            <a:off x="5266944" y="5375163"/>
+            <a:ext cx="198120" cy="2157"/>
+          </a:xfrm>
+          <a:prstGeom prst="line">
+            <a:avLst/>
+          </a:prstGeom>
+          <a:ln w="35560">
+            <a:solidFill>
+              <a:srgbClr val="3A6FD0"/>
+            </a:solidFill>
+          </a:ln>
+          <a:effectLst/>
+        </p:spPr>
+        <p:style>
+          <a:lnRef idx="2">
+            <a:schemeClr val="accent1"/>
+          </a:lnRef>
+          <a:fillRef idx="0">
+            <a:schemeClr val="accent1"/>
+          </a:fillRef>
+          <a:effectRef idx="1">
+            <a:schemeClr val="accent1"/>
+          </a:effectRef>
+          <a:fontRef idx="minor">
+            <a:schemeClr val="tx1"/>
+          </a:fontRef>
+        </p:style>
+      </p:cxnSp>
+      <p:sp>
+        <p:nvSpPr>
+          <p:cNvPr id="101" name="Oval 100"/>
+          <p:cNvSpPr/>
+          <p:nvPr/>
+        </p:nvSpPr>
+        <p:spPr>
+          <a:xfrm>
+            <a:off x="2839212" y="5206386"/>
+            <a:ext cx="100584" cy="100584"/>
+          </a:xfrm>
+          <a:prstGeom prst="ellipse">
+            <a:avLst/>
+          </a:prstGeom>
+          <a:solidFill>
+            <a:srgbClr val="CC3328"/>
+          </a:solidFill>
+          <a:ln>
+            <a:noFill/>
+          </a:ln>
+          <a:effectLst/>
+        </p:spPr>
+        <p:style>
+          <a:lnRef idx="1">
+            <a:schemeClr val="accent1"/>
+          </a:lnRef>
+          <a:fillRef idx="3">
+            <a:schemeClr val="accent1"/>
+          </a:fillRef>
+          <a:effectRef idx="2">
+            <a:schemeClr val="accent1"/>
+          </a:effectRef>
+          <a:fontRef idx="minor">
+            <a:schemeClr val="lt1"/>
+          </a:fontRef>
+        </p:style>
+        <p:txBody>
+          <a:bodyPr rtlCol="0" anchor="ctr"/>
+          <a:lstStyle/>
+          <a:p>
+            <a:pPr algn="ctr"/>
+          </a:p>
+        </p:txBody>
+      </p:sp>
+      <p:sp>
+        <p:nvSpPr>
+          <p:cNvPr id="102" name="Diamond 101"/>
+          <p:cNvSpPr/>
+          <p:nvPr/>
+        </p:nvSpPr>
+        <p:spPr>
+          <a:xfrm>
+            <a:off x="4009644" y="5300646"/>
+            <a:ext cx="137160" cy="137160"/>
+          </a:xfrm>
+          <a:prstGeom prst="diamond">
+            <a:avLst/>
+          </a:prstGeom>
+          <a:solidFill>
+            <a:srgbClr val="0F1E3D"/>
+          </a:solidFill>
+          <a:ln>
+            <a:noFill/>
+          </a:ln>
+          <a:effectLst/>
+        </p:spPr>
+        <p:style>
+          <a:lnRef idx="1">
+            <a:schemeClr val="accent1"/>
+          </a:lnRef>
+          <a:fillRef idx="3">
+            <a:schemeClr val="accent1"/>
+          </a:fillRef>
+          <a:effectRef idx="2">
+            <a:schemeClr val="accent1"/>
+          </a:effectRef>
+          <a:fontRef idx="minor">
+            <a:schemeClr val="lt1"/>
+          </a:fontRef>
+        </p:style>
+        <p:txBody>
+          <a:bodyPr rtlCol="0" anchor="ctr"/>
+          <a:lstStyle/>
+          <a:p>
+            <a:pPr algn="ctr"/>
+          </a:p>
+        </p:txBody>
+      </p:sp>
+      <p:cxnSp>
+        <p:nvCxnSpPr>
+          <p:cNvPr id="103" name="Connector 102"/>
+          <p:cNvCxnSpPr/>
+          <p:nvPr/>
+        </p:nvCxnSpPr>
+        <p:spPr>
+          <a:xfrm>
             <a:off x="1700784" y="6016752"/>
             <a:ext cx="4160520" cy="0"/>
           </a:xfrm>
@@ -33974,7 +34250,7 @@
       </p:cxnSp>
       <p:sp>
         <p:nvSpPr>
-          <p:cNvPr id="96" name="TextBox 95"/>
+          <p:cNvPr id="104" name="TextBox 103"/>
           <p:cNvSpPr txBox="1"/>
           <p:nvPr/>
         </p:nvSpPr>
@@ -34020,7 +34296,7 @@
       </p:sp>
       <p:sp>
         <p:nvSpPr>
-          <p:cNvPr id="97" name="TextBox 96"/>
+          <p:cNvPr id="105" name="TextBox 104"/>
           <p:cNvSpPr txBox="1"/>
           <p:nvPr/>
         </p:nvSpPr>
@@ -34056,7 +34332,7 @@
       </p:sp>
       <p:pic>
         <p:nvPicPr>
-          <p:cNvPr id="98" name="Picture 97" descr="p3r_color_baseline.png"/>
+          <p:cNvPr id="106" name="Picture 105" descr="p3r_color_baseline.png"/>
           <p:cNvPicPr>
             <a:picLocks noChangeAspect="1"/>
           </p:cNvPicPr>
@@ -34080,7 +34356,7 @@
       </p:pic>
       <p:sp>
         <p:nvSpPr>
-          <p:cNvPr id="99" name="TextBox 98"/>
+          <p:cNvPr id="107" name="TextBox 106"/>
           <p:cNvSpPr txBox="1"/>
           <p:nvPr/>
         </p:nvSpPr>
@@ -34116,7 +34392,7 @@
       </p:sp>
       <p:pic>
         <p:nvPicPr>
-          <p:cNvPr id="100" name="Picture 99" descr="p3r_color_c01.png"/>
+          <p:cNvPr id="108" name="Picture 107" descr="p3r_color_c01.png"/>
           <p:cNvPicPr>
             <a:picLocks noChangeAspect="1"/>
           </p:cNvPicPr>
@@ -34140,7 +34416,7 @@
       </p:pic>
       <p:sp>
         <p:nvSpPr>
-          <p:cNvPr id="101" name="TextBox 100"/>
+          <p:cNvPr id="109" name="TextBox 108"/>
           <p:cNvSpPr txBox="1"/>
           <p:nvPr/>
         </p:nvSpPr>
@@ -34176,7 +34452,7 @@
       </p:sp>
       <p:sp>
         <p:nvSpPr>
-          <p:cNvPr id="102" name="TextBox 101"/>
+          <p:cNvPr id="110" name="TextBox 109"/>
           <p:cNvSpPr txBox="1"/>
           <p:nvPr/>
         </p:nvSpPr>
@@ -34212,7 +34488,7 @@
       </p:sp>
       <p:sp>
         <p:nvSpPr>
-          <p:cNvPr id="103" name="TextBox 102"/>
+          <p:cNvPr id="111" name="TextBox 110"/>
           <p:cNvSpPr txBox="1"/>
           <p:nvPr/>
         </p:nvSpPr>
@@ -34388,16 +34664,1387 @@
           </a:p>
         </p:txBody>
       </p:sp>
-      <p:sp>
-        <p:nvSpPr>
-          <p:cNvPr id="5" name="TextBox 4"/>
+      <p:graphicFrame>
+        <p:nvGraphicFramePr>
+          <p:cNvPr id="5" name="Table 4"/>
+          <p:cNvGraphicFramePr>
+            <a:graphicFrameLocks noGrp="1"/>
+          </p:cNvGraphicFramePr>
+          <p:nvPr/>
+        </p:nvGraphicFramePr>
+        <p:xfrm>
+          <a:off x="640080" y="1627632"/>
+          <a:ext cx="10972800" cy="4224528"/>
+        </p:xfrm>
+        <a:graphic>
+          <a:graphicData uri="http://schemas.openxmlformats.org/drawingml/2006/table">
+            <a:tbl>
+              <a:tblPr firstRow="1" bandRow="1">
+                <a:tableStyleId>{5C22544A-7EE6-4342-B048-85BDC9FD1C3A}</a:tableStyleId>
+              </a:tblPr>
+              <a:tblGrid>
+                <a:gridCol w="2194560"/>
+                <a:gridCol w="2194560"/>
+                <a:gridCol w="2194560"/>
+                <a:gridCol w="2194560"/>
+                <a:gridCol w="2194560"/>
+              </a:tblGrid>
+              <a:tr h="384048">
+                <a:tc>
+                  <a:txBody>
+                    <a:bodyPr/>
+                    <a:lstStyle/>
+                    <a:p>
+                      <a:pPr algn="ctr"/>
+                      <a:r>
+                        <a:rPr sz="1300" b="1">
+                          <a:solidFill>
+                            <a:srgbClr val="FFFFFF"/>
+                          </a:solidFill>
+                          <a:latin typeface="맑은 고딕"/>
+                          <a:ea typeface="맑은 고딕"/>
+                        </a:rPr>
+                        <a:t>적용 옵션 (누적)</a:t>
+                      </a:r>
+                    </a:p>
+                  </a:txBody>
+                  <a:tcPr anchor="ctr" marT="25400" marB="25400">
+                    <a:solidFill>
+                      <a:srgbClr val="0F1E3D"/>
+                    </a:solidFill>
+                  </a:tcPr>
+                </a:tc>
+                <a:tc>
+                  <a:txBody>
+                    <a:bodyPr/>
+                    <a:lstStyle/>
+                    <a:p>
+                      <a:pPr algn="ctr"/>
+                      <a:r>
+                        <a:rPr sz="1300" b="1">
+                          <a:solidFill>
+                            <a:srgbClr val="FFFFFF"/>
+                          </a:solidFill>
+                          <a:latin typeface="맑은 고딕"/>
+                          <a:ea typeface="맑은 고딕"/>
+                        </a:rPr>
+                        <a:t>조건값</a:t>
+                      </a:r>
+                    </a:p>
+                  </a:txBody>
+                  <a:tcPr anchor="ctr" marT="25400" marB="25400">
+                    <a:solidFill>
+                      <a:srgbClr val="0F1E3D"/>
+                    </a:solidFill>
+                  </a:tcPr>
+                </a:tc>
+                <a:tc>
+                  <a:txBody>
+                    <a:bodyPr/>
+                    <a:lstStyle/>
+                    <a:p>
+                      <a:pPr algn="ctr"/>
+                      <a:r>
+                        <a:rPr sz="1300" b="1">
+                          <a:solidFill>
+                            <a:srgbClr val="FFFFFF"/>
+                          </a:solidFill>
+                          <a:latin typeface="맑은 고딕"/>
+                          <a:ea typeface="맑은 고딕"/>
+                        </a:rPr>
+                        <a:t>F1</a:t>
+                      </a:r>
+                    </a:p>
+                  </a:txBody>
+                  <a:tcPr anchor="ctr" marT="25400" marB="25400">
+                    <a:solidFill>
+                      <a:srgbClr val="0F1E3D"/>
+                    </a:solidFill>
+                  </a:tcPr>
+                </a:tc>
+                <a:tc>
+                  <a:txBody>
+                    <a:bodyPr/>
+                    <a:lstStyle/>
+                    <a:p>
+                      <a:pPr algn="ctr"/>
+                      <a:r>
+                        <a:rPr sz="1300" b="1">
+                          <a:solidFill>
+                            <a:srgbClr val="FFFFFF"/>
+                          </a:solidFill>
+                          <a:latin typeface="맑은 고딕"/>
+                          <a:ea typeface="맑은 고딕"/>
+                        </a:rPr>
+                        <a:t>FN</a:t>
+                      </a:r>
+                    </a:p>
+                  </a:txBody>
+                  <a:tcPr anchor="ctr" marT="25400" marB="25400">
+                    <a:solidFill>
+                      <a:srgbClr val="0F1E3D"/>
+                    </a:solidFill>
+                  </a:tcPr>
+                </a:tc>
+                <a:tc>
+                  <a:txBody>
+                    <a:bodyPr/>
+                    <a:lstStyle/>
+                    <a:p>
+                      <a:pPr algn="ctr"/>
+                      <a:r>
+                        <a:rPr sz="1300" b="1">
+                          <a:solidFill>
+                            <a:srgbClr val="FFFFFF"/>
+                          </a:solidFill>
+                          <a:latin typeface="맑은 고딕"/>
+                          <a:ea typeface="맑은 고딕"/>
+                        </a:rPr>
+                        <a:t>FP</a:t>
+                      </a:r>
+                    </a:p>
+                  </a:txBody>
+                  <a:tcPr anchor="ctr" marT="25400" marB="25400">
+                    <a:solidFill>
+                      <a:srgbClr val="0F1E3D"/>
+                    </a:solidFill>
+                  </a:tcPr>
+                </a:tc>
+              </a:tr>
+              <a:tr h="384048">
+                <a:tc>
+                  <a:txBody>
+                    <a:bodyPr/>
+                    <a:lstStyle/>
+                    <a:p>
+                      <a:pPr algn="l"/>
+                      <a:r>
+                        <a:rPr sz="1250" b="0">
+                          <a:solidFill>
+                            <a:srgbClr val="1A1F2E"/>
+                          </a:solidFill>
+                          <a:latin typeface="맑은 고딕"/>
+                          <a:ea typeface="맑은 고딕"/>
+                        </a:rPr>
+                        <a:t>Baseline</a:t>
+                      </a:r>
+                    </a:p>
+                  </a:txBody>
+                  <a:tcPr anchor="ctr" marL="88900" marR="50800" marT="25400" marB="25400">
+                    <a:solidFill>
+                      <a:srgbClr val="FFFFFF"/>
+                    </a:solidFill>
+                  </a:tcPr>
+                </a:tc>
+                <a:tc>
+                  <a:txBody>
+                    <a:bodyPr/>
+                    <a:lstStyle/>
+                    <a:p>
+                      <a:pPr algn="ctr"/>
+                      <a:r>
+                        <a:rPr sz="1250" b="0">
+                          <a:solidFill>
+                            <a:srgbClr val="1A1F2E"/>
+                          </a:solidFill>
+                          <a:latin typeface="맑은 고딕"/>
+                          <a:ea typeface="맑은 고딕"/>
+                        </a:rPr>
+                        <a:t>—</a:t>
+                      </a:r>
+                    </a:p>
+                  </a:txBody>
+                  <a:tcPr anchor="ctr" marL="25400" marR="50800" marT="25400" marB="25400">
+                    <a:solidFill>
+                      <a:srgbClr val="FFFFFF"/>
+                    </a:solidFill>
+                  </a:tcPr>
+                </a:tc>
+                <a:tc>
+                  <a:txBody>
+                    <a:bodyPr/>
+                    <a:lstStyle/>
+                    <a:p>
+                      <a:pPr algn="ctr"/>
+                      <a:r>
+                        <a:rPr sz="1250" b="0">
+                          <a:solidFill>
+                            <a:srgbClr val="1A1F2E"/>
+                          </a:solidFill>
+                          <a:latin typeface="맑은 고딕"/>
+                          <a:ea typeface="맑은 고딕"/>
+                        </a:rPr>
+                        <a:t>0.9967</a:t>
+                      </a:r>
+                    </a:p>
+                  </a:txBody>
+                  <a:tcPr anchor="ctr" marL="25400" marR="50800" marT="25400" marB="25400">
+                    <a:solidFill>
+                      <a:srgbClr val="FFFFFF"/>
+                    </a:solidFill>
+                  </a:tcPr>
+                </a:tc>
+                <a:tc>
+                  <a:txBody>
+                    <a:bodyPr/>
+                    <a:lstStyle/>
+                    <a:p>
+                      <a:pPr algn="ctr"/>
+                      <a:r>
+                        <a:rPr sz="1250" b="0">
+                          <a:solidFill>
+                            <a:srgbClr val="1A1F2E"/>
+                          </a:solidFill>
+                          <a:latin typeface="맑은 고딕"/>
+                          <a:ea typeface="맑은 고딕"/>
+                        </a:rPr>
+                        <a:t>1</a:t>
+                      </a:r>
+                    </a:p>
+                  </a:txBody>
+                  <a:tcPr anchor="ctr" marL="25400" marR="50800" marT="25400" marB="25400">
+                    <a:solidFill>
+                      <a:srgbClr val="FFFFFF"/>
+                    </a:solidFill>
+                  </a:tcPr>
+                </a:tc>
+                <a:tc>
+                  <a:txBody>
+                    <a:bodyPr/>
+                    <a:lstStyle/>
+                    <a:p>
+                      <a:pPr algn="ctr"/>
+                      <a:r>
+                        <a:rPr sz="1250" b="0">
+                          <a:solidFill>
+                            <a:srgbClr val="1A1F2E"/>
+                          </a:solidFill>
+                          <a:latin typeface="맑은 고딕"/>
+                          <a:ea typeface="맑은 고딕"/>
+                        </a:rPr>
+                        <a:t>4</a:t>
+                      </a:r>
+                    </a:p>
+                  </a:txBody>
+                  <a:tcPr anchor="ctr" marL="25400" marR="50800" marT="25400" marB="25400">
+                    <a:solidFill>
+                      <a:srgbClr val="FFFFFF"/>
+                    </a:solidFill>
+                  </a:tcPr>
+                </a:tc>
+              </a:tr>
+              <a:tr h="384048">
+                <a:tc>
+                  <a:txBody>
+                    <a:bodyPr/>
+                    <a:lstStyle/>
+                    <a:p>
+                      <a:pPr algn="l"/>
+                      <a:r>
+                        <a:rPr sz="1250" b="0">
+                          <a:solidFill>
+                            <a:srgbClr val="1A1F2E"/>
+                          </a:solidFill>
+                          <a:latin typeface="맑은 고딕"/>
+                          <a:ea typeface="맑은 고딕"/>
+                        </a:rPr>
+                        <a:t>+ 정상 비율</a:t>
+                      </a:r>
+                    </a:p>
+                  </a:txBody>
+                  <a:tcPr anchor="ctr" marL="88900" marR="50800" marT="25400" marB="25400">
+                    <a:solidFill>
+                      <a:srgbClr val="F2F5FA"/>
+                    </a:solidFill>
+                  </a:tcPr>
+                </a:tc>
+                <a:tc>
+                  <a:txBody>
+                    <a:bodyPr/>
+                    <a:lstStyle/>
+                    <a:p>
+                      <a:pPr algn="ctr"/>
+                      <a:r>
+                        <a:rPr sz="1250" b="0">
+                          <a:solidFill>
+                            <a:srgbClr val="1A1F2E"/>
+                          </a:solidFill>
+                          <a:latin typeface="맑은 고딕"/>
+                          <a:ea typeface="맑은 고딕"/>
+                        </a:rPr>
+                        <a:t>700 → 3300</a:t>
+                      </a:r>
+                    </a:p>
+                  </a:txBody>
+                  <a:tcPr anchor="ctr" marL="25400" marR="50800" marT="25400" marB="25400">
+                    <a:solidFill>
+                      <a:srgbClr val="F2F5FA"/>
+                    </a:solidFill>
+                  </a:tcPr>
+                </a:tc>
+                <a:tc>
+                  <a:txBody>
+                    <a:bodyPr/>
+                    <a:lstStyle/>
+                    <a:p>
+                      <a:pPr algn="ctr"/>
+                      <a:r>
+                        <a:rPr sz="1250" b="0">
+                          <a:solidFill>
+                            <a:srgbClr val="1A1F2E"/>
+                          </a:solidFill>
+                          <a:latin typeface="맑은 고딕"/>
+                          <a:ea typeface="맑은 고딕"/>
+                        </a:rPr>
+                        <a:t>0.9972</a:t>
+                      </a:r>
+                    </a:p>
+                  </a:txBody>
+                  <a:tcPr anchor="ctr" marL="25400" marR="50800" marT="25400" marB="25400">
+                    <a:solidFill>
+                      <a:srgbClr val="F2F5FA"/>
+                    </a:solidFill>
+                  </a:tcPr>
+                </a:tc>
+                <a:tc>
+                  <a:txBody>
+                    <a:bodyPr/>
+                    <a:lstStyle/>
+                    <a:p>
+                      <a:pPr algn="ctr"/>
+                      <a:r>
+                        <a:rPr sz="1250" b="0">
+                          <a:solidFill>
+                            <a:srgbClr val="1A1F2E"/>
+                          </a:solidFill>
+                          <a:latin typeface="맑은 고딕"/>
+                          <a:ea typeface="맑은 고딕"/>
+                        </a:rPr>
+                        <a:t>1</a:t>
+                      </a:r>
+                    </a:p>
+                  </a:txBody>
+                  <a:tcPr anchor="ctr" marL="25400" marR="50800" marT="25400" marB="25400">
+                    <a:solidFill>
+                      <a:srgbClr val="F2F5FA"/>
+                    </a:solidFill>
+                  </a:tcPr>
+                </a:tc>
+                <a:tc>
+                  <a:txBody>
+                    <a:bodyPr/>
+                    <a:lstStyle/>
+                    <a:p>
+                      <a:pPr algn="ctr"/>
+                      <a:r>
+                        <a:rPr sz="1250" b="0">
+                          <a:solidFill>
+                            <a:srgbClr val="1A1F2E"/>
+                          </a:solidFill>
+                          <a:latin typeface="맑은 고딕"/>
+                          <a:ea typeface="맑은 고딕"/>
+                        </a:rPr>
+                        <a:t>3</a:t>
+                      </a:r>
+                    </a:p>
+                  </a:txBody>
+                  <a:tcPr anchor="ctr" marL="25400" marR="50800" marT="25400" marB="25400">
+                    <a:solidFill>
+                      <a:srgbClr val="F2F5FA"/>
+                    </a:solidFill>
+                  </a:tcPr>
+                </a:tc>
+              </a:tr>
+              <a:tr h="384048">
+                <a:tc>
+                  <a:txBody>
+                    <a:bodyPr/>
+                    <a:lstStyle/>
+                    <a:p>
+                      <a:pPr algn="l"/>
+                      <a:r>
+                        <a:rPr sz="1250" b="0">
+                          <a:solidFill>
+                            <a:srgbClr val="1A1F2E"/>
+                          </a:solidFill>
+                          <a:latin typeface="맑은 고딕"/>
+                          <a:ea typeface="맑은 고딕"/>
+                        </a:rPr>
+                        <a:t>+ Label Smoothing</a:t>
+                      </a:r>
+                    </a:p>
+                  </a:txBody>
+                  <a:tcPr anchor="ctr" marL="88900" marR="50800" marT="25400" marB="25400">
+                    <a:solidFill>
+                      <a:srgbClr val="FFFFFF"/>
+                    </a:solidFill>
+                  </a:tcPr>
+                </a:tc>
+                <a:tc>
+                  <a:txBody>
+                    <a:bodyPr/>
+                    <a:lstStyle/>
+                    <a:p>
+                      <a:pPr algn="ctr"/>
+                      <a:r>
+                        <a:rPr sz="1250" b="0">
+                          <a:solidFill>
+                            <a:srgbClr val="1A1F2E"/>
+                          </a:solidFill>
+                          <a:latin typeface="맑은 고딕"/>
+                          <a:ea typeface="맑은 고딕"/>
+                        </a:rPr>
+                        <a:t>0.02</a:t>
+                      </a:r>
+                    </a:p>
+                  </a:txBody>
+                  <a:tcPr anchor="ctr" marL="25400" marR="50800" marT="25400" marB="25400">
+                    <a:solidFill>
+                      <a:srgbClr val="FFFFFF"/>
+                    </a:solidFill>
+                  </a:tcPr>
+                </a:tc>
+                <a:tc>
+                  <a:txBody>
+                    <a:bodyPr/>
+                    <a:lstStyle/>
+                    <a:p>
+                      <a:pPr algn="ctr"/>
+                      <a:r>
+                        <a:rPr sz="1250" b="0">
+                          <a:solidFill>
+                            <a:srgbClr val="1A1F2E"/>
+                          </a:solidFill>
+                          <a:latin typeface="맑은 고딕"/>
+                          <a:ea typeface="맑은 고딕"/>
+                        </a:rPr>
+                        <a:t>0.9976</a:t>
+                      </a:r>
+                    </a:p>
+                  </a:txBody>
+                  <a:tcPr anchor="ctr" marL="25400" marR="50800" marT="25400" marB="25400">
+                    <a:solidFill>
+                      <a:srgbClr val="FFFFFF"/>
+                    </a:solidFill>
+                  </a:tcPr>
+                </a:tc>
+                <a:tc>
+                  <a:txBody>
+                    <a:bodyPr/>
+                    <a:lstStyle/>
+                    <a:p>
+                      <a:pPr algn="ctr"/>
+                      <a:r>
+                        <a:rPr sz="1250" b="0">
+                          <a:solidFill>
+                            <a:srgbClr val="1A1F2E"/>
+                          </a:solidFill>
+                          <a:latin typeface="맑은 고딕"/>
+                          <a:ea typeface="맑은 고딕"/>
+                        </a:rPr>
+                        <a:t>1</a:t>
+                      </a:r>
+                    </a:p>
+                  </a:txBody>
+                  <a:tcPr anchor="ctr" marL="25400" marR="50800" marT="25400" marB="25400">
+                    <a:solidFill>
+                      <a:srgbClr val="FFFFFF"/>
+                    </a:solidFill>
+                  </a:tcPr>
+                </a:tc>
+                <a:tc>
+                  <a:txBody>
+                    <a:bodyPr/>
+                    <a:lstStyle/>
+                    <a:p>
+                      <a:pPr algn="ctr"/>
+                      <a:r>
+                        <a:rPr sz="1250" b="0">
+                          <a:solidFill>
+                            <a:srgbClr val="1A1F2E"/>
+                          </a:solidFill>
+                          <a:latin typeface="맑은 고딕"/>
+                          <a:ea typeface="맑은 고딕"/>
+                        </a:rPr>
+                        <a:t>3</a:t>
+                      </a:r>
+                    </a:p>
+                  </a:txBody>
+                  <a:tcPr anchor="ctr" marL="25400" marR="50800" marT="25400" marB="25400">
+                    <a:solidFill>
+                      <a:srgbClr val="FFFFFF"/>
+                    </a:solidFill>
+                  </a:tcPr>
+                </a:tc>
+              </a:tr>
+              <a:tr h="384048">
+                <a:tc>
+                  <a:txBody>
+                    <a:bodyPr/>
+                    <a:lstStyle/>
+                    <a:p>
+                      <a:pPr algn="l"/>
+                      <a:r>
+                        <a:rPr sz="1250" b="0">
+                          <a:solidFill>
+                            <a:srgbClr val="1A1F2E"/>
+                          </a:solidFill>
+                          <a:latin typeface="맑은 고딕"/>
+                          <a:ea typeface="맑은 고딕"/>
+                        </a:rPr>
+                        <a:t>+ Stochastic Depth</a:t>
+                      </a:r>
+                    </a:p>
+                  </a:txBody>
+                  <a:tcPr anchor="ctr" marL="88900" marR="50800" marT="25400" marB="25400">
+                    <a:solidFill>
+                      <a:srgbClr val="F2F5FA"/>
+                    </a:solidFill>
+                  </a:tcPr>
+                </a:tc>
+                <a:tc>
+                  <a:txBody>
+                    <a:bodyPr/>
+                    <a:lstStyle/>
+                    <a:p>
+                      <a:pPr algn="ctr"/>
+                      <a:r>
+                        <a:rPr sz="1250" b="0">
+                          <a:solidFill>
+                            <a:srgbClr val="1A1F2E"/>
+                          </a:solidFill>
+                          <a:latin typeface="맑은 고딕"/>
+                          <a:ea typeface="맑은 고딕"/>
+                        </a:rPr>
+                        <a:t>0.05</a:t>
+                      </a:r>
+                    </a:p>
+                  </a:txBody>
+                  <a:tcPr anchor="ctr" marL="25400" marR="50800" marT="25400" marB="25400">
+                    <a:solidFill>
+                      <a:srgbClr val="F2F5FA"/>
+                    </a:solidFill>
+                  </a:tcPr>
+                </a:tc>
+                <a:tc>
+                  <a:txBody>
+                    <a:bodyPr/>
+                    <a:lstStyle/>
+                    <a:p>
+                      <a:pPr algn="ctr"/>
+                      <a:r>
+                        <a:rPr sz="1250" b="0">
+                          <a:solidFill>
+                            <a:srgbClr val="1A1F2E"/>
+                          </a:solidFill>
+                          <a:latin typeface="맑은 고딕"/>
+                          <a:ea typeface="맑은 고딕"/>
+                        </a:rPr>
+                        <a:t>0.9979</a:t>
+                      </a:r>
+                    </a:p>
+                  </a:txBody>
+                  <a:tcPr anchor="ctr" marL="25400" marR="50800" marT="25400" marB="25400">
+                    <a:solidFill>
+                      <a:srgbClr val="F2F5FA"/>
+                    </a:solidFill>
+                  </a:tcPr>
+                </a:tc>
+                <a:tc>
+                  <a:txBody>
+                    <a:bodyPr/>
+                    <a:lstStyle/>
+                    <a:p>
+                      <a:pPr algn="ctr"/>
+                      <a:r>
+                        <a:rPr sz="1250" b="0">
+                          <a:solidFill>
+                            <a:srgbClr val="1A1F2E"/>
+                          </a:solidFill>
+                          <a:latin typeface="맑은 고딕"/>
+                          <a:ea typeface="맑은 고딕"/>
+                        </a:rPr>
+                        <a:t>0</a:t>
+                      </a:r>
+                    </a:p>
+                  </a:txBody>
+                  <a:tcPr anchor="ctr" marL="25400" marR="50800" marT="25400" marB="25400">
+                    <a:solidFill>
+                      <a:srgbClr val="F2F5FA"/>
+                    </a:solidFill>
+                  </a:tcPr>
+                </a:tc>
+                <a:tc>
+                  <a:txBody>
+                    <a:bodyPr/>
+                    <a:lstStyle/>
+                    <a:p>
+                      <a:pPr algn="ctr"/>
+                      <a:r>
+                        <a:rPr sz="1250" b="0">
+                          <a:solidFill>
+                            <a:srgbClr val="1A1F2E"/>
+                          </a:solidFill>
+                          <a:latin typeface="맑은 고딕"/>
+                          <a:ea typeface="맑은 고딕"/>
+                        </a:rPr>
+                        <a:t>3</a:t>
+                      </a:r>
+                    </a:p>
+                  </a:txBody>
+                  <a:tcPr anchor="ctr" marL="25400" marR="50800" marT="25400" marB="25400">
+                    <a:solidFill>
+                      <a:srgbClr val="F2F5FA"/>
+                    </a:solidFill>
+                  </a:tcPr>
+                </a:tc>
+              </a:tr>
+              <a:tr h="384048">
+                <a:tc>
+                  <a:txBody>
+                    <a:bodyPr/>
+                    <a:lstStyle/>
+                    <a:p>
+                      <a:pPr algn="l"/>
+                      <a:r>
+                        <a:rPr sz="1250" b="0">
+                          <a:solidFill>
+                            <a:srgbClr val="1A1F2E"/>
+                          </a:solidFill>
+                          <a:latin typeface="맑은 고딕"/>
+                          <a:ea typeface="맑은 고딕"/>
+                        </a:rPr>
+                        <a:t>+ EMA</a:t>
+                      </a:r>
+                    </a:p>
+                  </a:txBody>
+                  <a:tcPr anchor="ctr" marL="88900" marR="50800" marT="25400" marB="25400">
+                    <a:solidFill>
+                      <a:srgbClr val="FFFFFF"/>
+                    </a:solidFill>
+                  </a:tcPr>
+                </a:tc>
+                <a:tc>
+                  <a:txBody>
+                    <a:bodyPr/>
+                    <a:lstStyle/>
+                    <a:p>
+                      <a:pPr algn="ctr"/>
+                      <a:r>
+                        <a:rPr sz="1250" b="0">
+                          <a:solidFill>
+                            <a:srgbClr val="1A1F2E"/>
+                          </a:solidFill>
+                          <a:latin typeface="맑은 고딕"/>
+                          <a:ea typeface="맑은 고딕"/>
+                        </a:rPr>
+                        <a:t>0.95</a:t>
+                      </a:r>
+                    </a:p>
+                  </a:txBody>
+                  <a:tcPr anchor="ctr" marL="25400" marR="50800" marT="25400" marB="25400">
+                    <a:solidFill>
+                      <a:srgbClr val="FFFFFF"/>
+                    </a:solidFill>
+                  </a:tcPr>
+                </a:tc>
+                <a:tc>
+                  <a:txBody>
+                    <a:bodyPr/>
+                    <a:lstStyle/>
+                    <a:p>
+                      <a:pPr algn="ctr"/>
+                      <a:r>
+                        <a:rPr sz="1250" b="0">
+                          <a:solidFill>
+                            <a:srgbClr val="1A1F2E"/>
+                          </a:solidFill>
+                          <a:latin typeface="맑은 고딕"/>
+                          <a:ea typeface="맑은 고딕"/>
+                        </a:rPr>
+                        <a:t>0.9981</a:t>
+                      </a:r>
+                    </a:p>
+                  </a:txBody>
+                  <a:tcPr anchor="ctr" marL="25400" marR="50800" marT="25400" marB="25400">
+                    <a:solidFill>
+                      <a:srgbClr val="FFFFFF"/>
+                    </a:solidFill>
+                  </a:tcPr>
+                </a:tc>
+                <a:tc>
+                  <a:txBody>
+                    <a:bodyPr/>
+                    <a:lstStyle/>
+                    <a:p>
+                      <a:pPr algn="ctr"/>
+                      <a:r>
+                        <a:rPr sz="1250" b="0">
+                          <a:solidFill>
+                            <a:srgbClr val="1A1F2E"/>
+                          </a:solidFill>
+                          <a:latin typeface="맑은 고딕"/>
+                          <a:ea typeface="맑은 고딕"/>
+                        </a:rPr>
+                        <a:t>0</a:t>
+                      </a:r>
+                    </a:p>
+                  </a:txBody>
+                  <a:tcPr anchor="ctr" marL="25400" marR="50800" marT="25400" marB="25400">
+                    <a:solidFill>
+                      <a:srgbClr val="FFFFFF"/>
+                    </a:solidFill>
+                  </a:tcPr>
+                </a:tc>
+                <a:tc>
+                  <a:txBody>
+                    <a:bodyPr/>
+                    <a:lstStyle/>
+                    <a:p>
+                      <a:pPr algn="ctr"/>
+                      <a:r>
+                        <a:rPr sz="1250" b="0">
+                          <a:solidFill>
+                            <a:srgbClr val="1A1F2E"/>
+                          </a:solidFill>
+                          <a:latin typeface="맑은 고딕"/>
+                          <a:ea typeface="맑은 고딕"/>
+                        </a:rPr>
+                        <a:t>2</a:t>
+                      </a:r>
+                    </a:p>
+                  </a:txBody>
+                  <a:tcPr anchor="ctr" marL="25400" marR="50800" marT="25400" marB="25400">
+                    <a:solidFill>
+                      <a:srgbClr val="FFFFFF"/>
+                    </a:solidFill>
+                  </a:tcPr>
+                </a:tc>
+              </a:tr>
+              <a:tr h="384048">
+                <a:tc>
+                  <a:txBody>
+                    <a:bodyPr/>
+                    <a:lstStyle/>
+                    <a:p>
+                      <a:pPr algn="l"/>
+                      <a:r>
+                        <a:rPr sz="1250" b="0">
+                          <a:solidFill>
+                            <a:srgbClr val="1A1F2E"/>
+                          </a:solidFill>
+                          <a:latin typeface="맑은 고딕"/>
+                          <a:ea typeface="맑은 고딕"/>
+                        </a:rPr>
+                        <a:t>+ Focal γ</a:t>
+                      </a:r>
+                    </a:p>
+                  </a:txBody>
+                  <a:tcPr anchor="ctr" marL="88900" marR="50800" marT="25400" marB="25400">
+                    <a:solidFill>
+                      <a:srgbClr val="F2F5FA"/>
+                    </a:solidFill>
+                  </a:tcPr>
+                </a:tc>
+                <a:tc>
+                  <a:txBody>
+                    <a:bodyPr/>
+                    <a:lstStyle/>
+                    <a:p>
+                      <a:pPr algn="ctr"/>
+                      <a:r>
+                        <a:rPr sz="1250" b="0">
+                          <a:solidFill>
+                            <a:srgbClr val="1A1F2E"/>
+                          </a:solidFill>
+                          <a:latin typeface="맑은 고딕"/>
+                          <a:ea typeface="맑은 고딕"/>
+                        </a:rPr>
+                        <a:t>2.0</a:t>
+                      </a:r>
+                    </a:p>
+                  </a:txBody>
+                  <a:tcPr anchor="ctr" marL="25400" marR="50800" marT="25400" marB="25400">
+                    <a:solidFill>
+                      <a:srgbClr val="F2F5FA"/>
+                    </a:solidFill>
+                  </a:tcPr>
+                </a:tc>
+                <a:tc>
+                  <a:txBody>
+                    <a:bodyPr/>
+                    <a:lstStyle/>
+                    <a:p>
+                      <a:pPr algn="ctr"/>
+                      <a:r>
+                        <a:rPr sz="1250" b="0">
+                          <a:solidFill>
+                            <a:srgbClr val="1A1F2E"/>
+                          </a:solidFill>
+                          <a:latin typeface="맑은 고딕"/>
+                          <a:ea typeface="맑은 고딕"/>
+                        </a:rPr>
+                        <a:t>0.9983</a:t>
+                      </a:r>
+                    </a:p>
+                  </a:txBody>
+                  <a:tcPr anchor="ctr" marL="25400" marR="50800" marT="25400" marB="25400">
+                    <a:solidFill>
+                      <a:srgbClr val="F2F5FA"/>
+                    </a:solidFill>
+                  </a:tcPr>
+                </a:tc>
+                <a:tc>
+                  <a:txBody>
+                    <a:bodyPr/>
+                    <a:lstStyle/>
+                    <a:p>
+                      <a:pPr algn="ctr"/>
+                      <a:r>
+                        <a:rPr sz="1250" b="0">
+                          <a:solidFill>
+                            <a:srgbClr val="1A1F2E"/>
+                          </a:solidFill>
+                          <a:latin typeface="맑은 고딕"/>
+                          <a:ea typeface="맑은 고딕"/>
+                        </a:rPr>
+                        <a:t>0</a:t>
+                      </a:r>
+                    </a:p>
+                  </a:txBody>
+                  <a:tcPr anchor="ctr" marL="25400" marR="50800" marT="25400" marB="25400">
+                    <a:solidFill>
+                      <a:srgbClr val="F2F5FA"/>
+                    </a:solidFill>
+                  </a:tcPr>
+                </a:tc>
+                <a:tc>
+                  <a:txBody>
+                    <a:bodyPr/>
+                    <a:lstStyle/>
+                    <a:p>
+                      <a:pPr algn="ctr"/>
+                      <a:r>
+                        <a:rPr sz="1250" b="0">
+                          <a:solidFill>
+                            <a:srgbClr val="1A1F2E"/>
+                          </a:solidFill>
+                          <a:latin typeface="맑은 고딕"/>
+                          <a:ea typeface="맑은 고딕"/>
+                        </a:rPr>
+                        <a:t>2</a:t>
+                      </a:r>
+                    </a:p>
+                  </a:txBody>
+                  <a:tcPr anchor="ctr" marL="25400" marR="50800" marT="25400" marB="25400">
+                    <a:solidFill>
+                      <a:srgbClr val="F2F5FA"/>
+                    </a:solidFill>
+                  </a:tcPr>
+                </a:tc>
+              </a:tr>
+              <a:tr h="384048">
+                <a:tc>
+                  <a:txBody>
+                    <a:bodyPr/>
+                    <a:lstStyle/>
+                    <a:p>
+                      <a:pPr algn="l"/>
+                      <a:r>
+                        <a:rPr sz="1250" b="0">
+                          <a:solidFill>
+                            <a:srgbClr val="1A1F2E"/>
+                          </a:solidFill>
+                          <a:latin typeface="맑은 고딕"/>
+                          <a:ea typeface="맑은 고딕"/>
+                        </a:rPr>
+                        <a:t>+ Abnormal weight</a:t>
+                      </a:r>
+                    </a:p>
+                  </a:txBody>
+                  <a:tcPr anchor="ctr" marL="88900" marR="50800" marT="25400" marB="25400">
+                    <a:solidFill>
+                      <a:srgbClr val="FFFFFF"/>
+                    </a:solidFill>
+                  </a:tcPr>
+                </a:tc>
+                <a:tc>
+                  <a:txBody>
+                    <a:bodyPr/>
+                    <a:lstStyle/>
+                    <a:p>
+                      <a:pPr algn="ctr"/>
+                      <a:r>
+                        <a:rPr sz="1250" b="0">
+                          <a:solidFill>
+                            <a:srgbClr val="1A1F2E"/>
+                          </a:solidFill>
+                          <a:latin typeface="맑은 고딕"/>
+                          <a:ea typeface="맑은 고딕"/>
+                        </a:rPr>
+                        <a:t>1.5</a:t>
+                      </a:r>
+                    </a:p>
+                  </a:txBody>
+                  <a:tcPr anchor="ctr" marL="25400" marR="50800" marT="25400" marB="25400">
+                    <a:solidFill>
+                      <a:srgbClr val="FFFFFF"/>
+                    </a:solidFill>
+                  </a:tcPr>
+                </a:tc>
+                <a:tc>
+                  <a:txBody>
+                    <a:bodyPr/>
+                    <a:lstStyle/>
+                    <a:p>
+                      <a:pPr algn="ctr"/>
+                      <a:r>
+                        <a:rPr sz="1250" b="0">
+                          <a:solidFill>
+                            <a:srgbClr val="1A1F2E"/>
+                          </a:solidFill>
+                          <a:latin typeface="맑은 고딕"/>
+                          <a:ea typeface="맑은 고딕"/>
+                        </a:rPr>
+                        <a:t>0.9984</a:t>
+                      </a:r>
+                    </a:p>
+                  </a:txBody>
+                  <a:tcPr anchor="ctr" marL="25400" marR="50800" marT="25400" marB="25400">
+                    <a:solidFill>
+                      <a:srgbClr val="FFFFFF"/>
+                    </a:solidFill>
+                  </a:tcPr>
+                </a:tc>
+                <a:tc>
+                  <a:txBody>
+                    <a:bodyPr/>
+                    <a:lstStyle/>
+                    <a:p>
+                      <a:pPr algn="ctr"/>
+                      <a:r>
+                        <a:rPr sz="1250" b="0">
+                          <a:solidFill>
+                            <a:srgbClr val="1A1F2E"/>
+                          </a:solidFill>
+                          <a:latin typeface="맑은 고딕"/>
+                          <a:ea typeface="맑은 고딕"/>
+                        </a:rPr>
+                        <a:t>0</a:t>
+                      </a:r>
+                    </a:p>
+                  </a:txBody>
+                  <a:tcPr anchor="ctr" marL="25400" marR="50800" marT="25400" marB="25400">
+                    <a:solidFill>
+                      <a:srgbClr val="FFFFFF"/>
+                    </a:solidFill>
+                  </a:tcPr>
+                </a:tc>
+                <a:tc>
+                  <a:txBody>
+                    <a:bodyPr/>
+                    <a:lstStyle/>
+                    <a:p>
+                      <a:pPr algn="ctr"/>
+                      <a:r>
+                        <a:rPr sz="1250" b="0">
+                          <a:solidFill>
+                            <a:srgbClr val="1A1F2E"/>
+                          </a:solidFill>
+                          <a:latin typeface="맑은 고딕"/>
+                          <a:ea typeface="맑은 고딕"/>
+                        </a:rPr>
+                        <a:t>2</a:t>
+                      </a:r>
+                    </a:p>
+                  </a:txBody>
+                  <a:tcPr anchor="ctr" marL="25400" marR="50800" marT="25400" marB="25400">
+                    <a:solidFill>
+                      <a:srgbClr val="FFFFFF"/>
+                    </a:solidFill>
+                  </a:tcPr>
+                </a:tc>
+              </a:tr>
+              <a:tr h="384048">
+                <a:tc>
+                  <a:txBody>
+                    <a:bodyPr/>
+                    <a:lstStyle/>
+                    <a:p>
+                      <a:pPr algn="l"/>
+                      <a:r>
+                        <a:rPr sz="1250" b="0">
+                          <a:solidFill>
+                            <a:srgbClr val="1A1F2E"/>
+                          </a:solidFill>
+                          <a:latin typeface="맑은 고딕"/>
+                          <a:ea typeface="맑은 고딕"/>
+                        </a:rPr>
+                        <a:t>+ Color</a:t>
+                      </a:r>
+                    </a:p>
+                  </a:txBody>
+                  <a:tcPr anchor="ctr" marL="88900" marR="50800" marT="25400" marB="25400">
+                    <a:solidFill>
+                      <a:srgbClr val="F2F5FA"/>
+                    </a:solidFill>
+                  </a:tcPr>
+                </a:tc>
+                <a:tc>
+                  <a:txBody>
+                    <a:bodyPr/>
+                    <a:lstStyle/>
+                    <a:p>
+                      <a:pPr algn="ctr"/>
+                      <a:r>
+                        <a:rPr sz="1250" b="0">
+                          <a:solidFill>
+                            <a:srgbClr val="1A1F2E"/>
+                          </a:solidFill>
+                          <a:latin typeface="맑은 고딕"/>
+                          <a:ea typeface="맑은 고딕"/>
+                        </a:rPr>
+                        <a:t>c01</a:t>
+                      </a:r>
+                    </a:p>
+                  </a:txBody>
+                  <a:tcPr anchor="ctr" marL="25400" marR="50800" marT="25400" marB="25400">
+                    <a:solidFill>
+                      <a:srgbClr val="F2F5FA"/>
+                    </a:solidFill>
+                  </a:tcPr>
+                </a:tc>
+                <a:tc>
+                  <a:txBody>
+                    <a:bodyPr/>
+                    <a:lstStyle/>
+                    <a:p>
+                      <a:pPr algn="ctr"/>
+                      <a:r>
+                        <a:rPr sz="1250" b="0">
+                          <a:solidFill>
+                            <a:srgbClr val="1A1F2E"/>
+                          </a:solidFill>
+                          <a:latin typeface="맑은 고딕"/>
+                          <a:ea typeface="맑은 고딕"/>
+                        </a:rPr>
+                        <a:t>0.9985</a:t>
+                      </a:r>
+                    </a:p>
+                  </a:txBody>
+                  <a:tcPr anchor="ctr" marL="25400" marR="50800" marT="25400" marB="25400">
+                    <a:solidFill>
+                      <a:srgbClr val="F2F5FA"/>
+                    </a:solidFill>
+                  </a:tcPr>
+                </a:tc>
+                <a:tc>
+                  <a:txBody>
+                    <a:bodyPr/>
+                    <a:lstStyle/>
+                    <a:p>
+                      <a:pPr algn="ctr"/>
+                      <a:r>
+                        <a:rPr sz="1250" b="0">
+                          <a:solidFill>
+                            <a:srgbClr val="1A1F2E"/>
+                          </a:solidFill>
+                          <a:latin typeface="맑은 고딕"/>
+                          <a:ea typeface="맑은 고딕"/>
+                        </a:rPr>
+                        <a:t>0</a:t>
+                      </a:r>
+                    </a:p>
+                  </a:txBody>
+                  <a:tcPr anchor="ctr" marL="25400" marR="50800" marT="25400" marB="25400">
+                    <a:solidFill>
+                      <a:srgbClr val="F2F5FA"/>
+                    </a:solidFill>
+                  </a:tcPr>
+                </a:tc>
+                <a:tc>
+                  <a:txBody>
+                    <a:bodyPr/>
+                    <a:lstStyle/>
+                    <a:p>
+                      <a:pPr algn="ctr"/>
+                      <a:r>
+                        <a:rPr sz="1250" b="0">
+                          <a:solidFill>
+                            <a:srgbClr val="1A1F2E"/>
+                          </a:solidFill>
+                          <a:latin typeface="맑은 고딕"/>
+                          <a:ea typeface="맑은 고딕"/>
+                        </a:rPr>
+                        <a:t>2</a:t>
+                      </a:r>
+                    </a:p>
+                  </a:txBody>
+                  <a:tcPr anchor="ctr" marL="25400" marR="50800" marT="25400" marB="25400">
+                    <a:solidFill>
+                      <a:srgbClr val="F2F5FA"/>
+                    </a:solidFill>
+                  </a:tcPr>
+                </a:tc>
+              </a:tr>
+              <a:tr h="384048">
+                <a:tc>
+                  <a:txBody>
+                    <a:bodyPr/>
+                    <a:lstStyle/>
+                    <a:p>
+                      <a:pPr algn="l"/>
+                      <a:r>
+                        <a:rPr sz="1250" b="0">
+                          <a:solidFill>
+                            <a:srgbClr val="1A1F2E"/>
+                          </a:solidFill>
+                          <a:latin typeface="맑은 고딕"/>
+                          <a:ea typeface="맑은 고딕"/>
+                        </a:rPr>
+                        <a:t>+ Smoothing</a:t>
+                      </a:r>
+                    </a:p>
+                  </a:txBody>
+                  <a:tcPr anchor="ctr" marL="88900" marR="50800" marT="25400" marB="25400">
+                    <a:solidFill>
+                      <a:srgbClr val="FFFFFF"/>
+                    </a:solidFill>
+                  </a:tcPr>
+                </a:tc>
+                <a:tc>
+                  <a:txBody>
+                    <a:bodyPr/>
+                    <a:lstStyle/>
+                    <a:p>
+                      <a:pPr algn="ctr"/>
+                      <a:r>
+                        <a:rPr sz="1250" b="0">
+                          <a:solidFill>
+                            <a:srgbClr val="1A1F2E"/>
+                          </a:solidFill>
+                          <a:latin typeface="맑은 고딕"/>
+                          <a:ea typeface="맑은 고딕"/>
+                        </a:rPr>
+                        <a:t>win5</a:t>
+                      </a:r>
+                    </a:p>
+                  </a:txBody>
+                  <a:tcPr anchor="ctr" marL="25400" marR="50800" marT="25400" marB="25400">
+                    <a:solidFill>
+                      <a:srgbClr val="FFFFFF"/>
+                    </a:solidFill>
+                  </a:tcPr>
+                </a:tc>
+                <a:tc>
+                  <a:txBody>
+                    <a:bodyPr/>
+                    <a:lstStyle/>
+                    <a:p>
+                      <a:pPr algn="ctr"/>
+                      <a:r>
+                        <a:rPr sz="1250" b="0">
+                          <a:solidFill>
+                            <a:srgbClr val="1A1F2E"/>
+                          </a:solidFill>
+                          <a:latin typeface="맑은 고딕"/>
+                          <a:ea typeface="맑은 고딕"/>
+                        </a:rPr>
+                        <a:t>0.9986</a:t>
+                      </a:r>
+                    </a:p>
+                  </a:txBody>
+                  <a:tcPr anchor="ctr" marL="25400" marR="50800" marT="25400" marB="25400">
+                    <a:solidFill>
+                      <a:srgbClr val="FFFFFF"/>
+                    </a:solidFill>
+                  </a:tcPr>
+                </a:tc>
+                <a:tc>
+                  <a:txBody>
+                    <a:bodyPr/>
+                    <a:lstStyle/>
+                    <a:p>
+                      <a:pPr algn="ctr"/>
+                      <a:r>
+                        <a:rPr sz="1250" b="0">
+                          <a:solidFill>
+                            <a:srgbClr val="1A1F2E"/>
+                          </a:solidFill>
+                          <a:latin typeface="맑은 고딕"/>
+                          <a:ea typeface="맑은 고딕"/>
+                        </a:rPr>
+                        <a:t>0</a:t>
+                      </a:r>
+                    </a:p>
+                  </a:txBody>
+                  <a:tcPr anchor="ctr" marL="25400" marR="50800" marT="25400" marB="25400">
+                    <a:solidFill>
+                      <a:srgbClr val="FFFFFF"/>
+                    </a:solidFill>
+                  </a:tcPr>
+                </a:tc>
+                <a:tc>
+                  <a:txBody>
+                    <a:bodyPr/>
+                    <a:lstStyle/>
+                    <a:p>
+                      <a:pPr algn="ctr"/>
+                      <a:r>
+                        <a:rPr sz="1250" b="0">
+                          <a:solidFill>
+                            <a:srgbClr val="1A1F2E"/>
+                          </a:solidFill>
+                          <a:latin typeface="맑은 고딕"/>
+                          <a:ea typeface="맑은 고딕"/>
+                        </a:rPr>
+                        <a:t>2</a:t>
+                      </a:r>
+                    </a:p>
+                  </a:txBody>
+                  <a:tcPr anchor="ctr" marL="25400" marR="50800" marT="25400" marB="25400">
+                    <a:solidFill>
+                      <a:srgbClr val="FFFFFF"/>
+                    </a:solidFill>
+                  </a:tcPr>
+                </a:tc>
+              </a:tr>
+              <a:tr h="384048">
+                <a:tc>
+                  <a:txBody>
+                    <a:bodyPr/>
+                    <a:lstStyle/>
+                    <a:p>
+                      <a:pPr algn="l"/>
+                      <a:r>
+                        <a:rPr sz="1250" b="1">
+                          <a:solidFill>
+                            <a:srgbClr val="0F1E3D"/>
+                          </a:solidFill>
+                          <a:latin typeface="맑은 고딕"/>
+                          <a:ea typeface="맑은 고딕"/>
+                        </a:rPr>
+                        <a:t>+ Best backbone</a:t>
+                      </a:r>
+                    </a:p>
+                  </a:txBody>
+                  <a:tcPr anchor="ctr" marL="88900" marR="50800" marT="25400" marB="25400">
+                    <a:solidFill>
+                      <a:srgbClr val="F4F6F8"/>
+                    </a:solidFill>
+                  </a:tcPr>
+                </a:tc>
+                <a:tc>
+                  <a:txBody>
+                    <a:bodyPr/>
+                    <a:lstStyle/>
+                    <a:p>
+                      <a:pPr algn="ctr"/>
+                      <a:r>
+                        <a:rPr sz="1250" b="1">
+                          <a:solidFill>
+                            <a:srgbClr val="0F1E3D"/>
+                          </a:solidFill>
+                          <a:latin typeface="맑은 고딕"/>
+                          <a:ea typeface="맑은 고딕"/>
+                        </a:rPr>
+                        <a:t>convnext.tiny.dinov3</a:t>
+                      </a:r>
+                    </a:p>
+                  </a:txBody>
+                  <a:tcPr anchor="ctr" marL="25400" marR="50800" marT="25400" marB="25400">
+                    <a:solidFill>
+                      <a:srgbClr val="F4F6F8"/>
+                    </a:solidFill>
+                  </a:tcPr>
+                </a:tc>
+                <a:tc>
+                  <a:txBody>
+                    <a:bodyPr/>
+                    <a:lstStyle/>
+                    <a:p>
+                      <a:pPr algn="ctr"/>
+                      <a:r>
+                        <a:rPr sz="1250" b="1">
+                          <a:solidFill>
+                            <a:srgbClr val="0F1E3D"/>
+                          </a:solidFill>
+                          <a:latin typeface="맑은 고딕"/>
+                          <a:ea typeface="맑은 고딕"/>
+                        </a:rPr>
+                        <a:t>0.9987</a:t>
+                      </a:r>
+                    </a:p>
+                  </a:txBody>
+                  <a:tcPr anchor="ctr" marL="25400" marR="50800" marT="25400" marB="25400">
+                    <a:solidFill>
+                      <a:srgbClr val="F4F6F8"/>
+                    </a:solidFill>
+                  </a:tcPr>
+                </a:tc>
+                <a:tc>
+                  <a:txBody>
+                    <a:bodyPr/>
+                    <a:lstStyle/>
+                    <a:p>
+                      <a:pPr algn="ctr"/>
+                      <a:r>
+                        <a:rPr sz="1250" b="1">
+                          <a:solidFill>
+                            <a:srgbClr val="0F1E3D"/>
+                          </a:solidFill>
+                          <a:latin typeface="맑은 고딕"/>
+                          <a:ea typeface="맑은 고딕"/>
+                        </a:rPr>
+                        <a:t>0</a:t>
+                      </a:r>
+                    </a:p>
+                  </a:txBody>
+                  <a:tcPr anchor="ctr" marL="25400" marR="50800" marT="25400" marB="25400">
+                    <a:solidFill>
+                      <a:srgbClr val="F4F6F8"/>
+                    </a:solidFill>
+                  </a:tcPr>
+                </a:tc>
+                <a:tc>
+                  <a:txBody>
+                    <a:bodyPr/>
+                    <a:lstStyle/>
+                    <a:p>
+                      <a:pPr algn="ctr"/>
+                      <a:r>
+                        <a:rPr sz="1250" b="1">
+                          <a:solidFill>
+                            <a:srgbClr val="0F1E3D"/>
+                          </a:solidFill>
+                          <a:latin typeface="맑은 고딕"/>
+                          <a:ea typeface="맑은 고딕"/>
+                        </a:rPr>
+                        <a:t>2</a:t>
+                      </a:r>
+                    </a:p>
+                  </a:txBody>
+                  <a:tcPr anchor="ctr" marL="25400" marR="50800" marT="25400" marB="25400">
+                    <a:solidFill>
+                      <a:srgbClr val="F4F6F8"/>
+                    </a:solidFill>
+                  </a:tcPr>
+                </a:tc>
+              </a:tr>
+            </a:tbl>
+          </a:graphicData>
+        </a:graphic>
+      </p:graphicFrame>
+      <p:sp>
+        <p:nvSpPr>
+          <p:cNvPr id="6" name="TextBox 5"/>
           <p:cNvSpPr txBox="1"/>
           <p:nvPr/>
         </p:nvSpPr>
         <p:spPr>
           <a:xfrm>
-            <a:off x="640080" y="1828800"/>
-            <a:ext cx="10972800" cy="512064"/>
+            <a:off x="640080" y="5925312"/>
+            <a:ext cx="10972800" cy="640080"/>
           </a:xfrm>
           <a:prstGeom prst="rect">
             <a:avLst/>
@@ -34405,112 +36052,35 @@
           <a:noFill/>
         </p:spPr>
         <p:txBody>
-          <a:bodyPr wrap="square" anchor="t" lIns="0" rIns="0" tIns="0" bIns="0">
+          <a:bodyPr wrap="square" lIns="0" rIns="0" tIns="0" bIns="0">
             <a:spAutoFit/>
           </a:bodyPr>
           <a:lstStyle/>
           <a:p>
-            <a:pPr marL="274320" indent="-274320">
+            <a:pPr>
+              <a:lnSpc>
+                <a:spcPct val="112000"/>
+              </a:lnSpc>
               <a:spcAft>
-                <a:spcPts val="500"/>
+                <a:spcPts val="100"/>
               </a:spcAft>
             </a:pPr>
             <a:r>
-              <a:rPr sz="1450" b="0">
+              <a:rPr sz="1250">
                 <a:solidFill>
-                  <a:srgbClr val="96A0AD"/>
+                  <a:srgbClr val="3A485C"/>
                 </a:solidFill>
                 <a:latin typeface="맑은 고딕"/>
                 <a:ea typeface="맑은 고딕"/>
               </a:rPr>
-              <a:t>●  </a:t>
+              <a:t>baseline 에 옵션을 하나씩 누적 적용하고 최적 백본까지 반영 → F1 0.9967 → 0.9987, 놓친 불량(FN)과 오경보(FP) 감소 (binary gate, 5-seed, threshold 0.9)</a:t>
             </a:r>
-            <a:r>
-              <a:rPr sz="1450">
-                <a:solidFill>
-                  <a:srgbClr val="1A1F2E"/>
-                </a:solidFill>
-                <a:latin typeface="맑은 고딕"/>
-                <a:ea typeface="맑은 고딕"/>
-              </a:rPr>
-              <a:t>baseline 에서 시작해 옵션을 하나씩 누적 적용하고 최적 백본까지 반영하면, F1 이 0.9967→0.9987로 오르고 놓친 불량(FN)과 오경보(FP)가 함께 줄어듭니다</a:t>
-            </a:r>
-          </a:p>
-        </p:txBody>
-      </p:sp>
-      <p:sp>
-        <p:nvSpPr>
-          <p:cNvPr id="6" name="Rectangle 5"/>
-          <p:cNvSpPr/>
-          <p:nvPr/>
-        </p:nvSpPr>
-        <p:spPr>
-          <a:xfrm>
-            <a:off x="1845963" y="2459880"/>
-            <a:ext cx="8561034" cy="3767040"/>
-          </a:xfrm>
-          <a:prstGeom prst="rect">
-            <a:avLst/>
-          </a:prstGeom>
-          <a:solidFill>
-            <a:srgbClr val="FFFFFF"/>
-          </a:solidFill>
-          <a:ln w="12700">
-            <a:solidFill>
-              <a:srgbClr val="D7DEEA"/>
-            </a:solidFill>
-          </a:ln>
-          <a:effectLst/>
-        </p:spPr>
-        <p:style>
-          <a:lnRef idx="1">
-            <a:schemeClr val="accent1"/>
-          </a:lnRef>
-          <a:fillRef idx="3">
-            <a:schemeClr val="accent1"/>
-          </a:fillRef>
-          <a:effectRef idx="2">
-            <a:schemeClr val="accent1"/>
-          </a:effectRef>
-          <a:fontRef idx="minor">
-            <a:schemeClr val="lt1"/>
-          </a:fontRef>
-        </p:style>
-        <p:txBody>
-          <a:bodyPr rtlCol="0" anchor="ctr"/>
-          <a:lstStyle/>
-          <a:p>
-            <a:pPr algn="ctr"/>
-          </a:p>
-        </p:txBody>
-      </p:sp>
-      <p:pic>
-        <p:nvPicPr>
-          <p:cNvPr id="7" name="Picture 6" descr="p3_cumulative_table.png"/>
-          <p:cNvPicPr>
-            <a:picLocks noChangeAspect="1"/>
-          </p:cNvPicPr>
-          <p:nvPr/>
-        </p:nvPicPr>
-        <p:blipFill>
-          <a:blip r:embed="rId2"/>
-          <a:stretch>
-            <a:fillRect/>
-          </a:stretch>
-        </p:blipFill>
-        <p:spPr>
-          <a:xfrm>
-            <a:off x="1854963" y="2468880"/>
-            <a:ext cx="8543034" cy="3749040"/>
-          </a:xfrm>
-          <a:prstGeom prst="rect">
-            <a:avLst/>
-          </a:prstGeom>
-        </p:spPr>
-      </p:pic>
-      <p:sp>
-        <p:nvSpPr>
-          <p:cNvPr id="8" name="TextBox 7"/>
+          </a:p>
+        </p:txBody>
+      </p:sp>
+      <p:sp>
+        <p:nvSpPr>
+          <p:cNvPr id="7" name="TextBox 6"/>
           <p:cNvSpPr txBox="1"/>
           <p:nvPr/>
         </p:nvSpPr>
@@ -34546,7 +36116,7 @@
       </p:sp>
       <p:sp>
         <p:nvSpPr>
-          <p:cNvPr id="9" name="TextBox 8"/>
+          <p:cNvPr id="8" name="TextBox 7"/>
           <p:cNvSpPr txBox="1"/>
           <p:nvPr/>
         </p:nvSpPr>

--- a/recommendation/presentation/발표_P3_데이터생성_최호길.pptx
+++ b/recommendation/presentation/발표_P3_데이터생성_최호길.pptx
@@ -4225,7 +4225,7 @@
         <p:spPr>
           <a:xfrm>
             <a:off x="640080" y="2706624"/>
-            <a:ext cx="7742407" cy="310896"/>
+            <a:ext cx="8172541" cy="310896"/>
           </a:xfrm>
           <a:prstGeom prst="rect">
             <a:avLst/>
@@ -4261,7 +4261,7 @@
         <p:spPr>
           <a:xfrm>
             <a:off x="640080" y="3017520"/>
-            <a:ext cx="7742407" cy="182880"/>
+            <a:ext cx="8172541" cy="182880"/>
           </a:xfrm>
           <a:prstGeom prst="rect">
             <a:avLst/>
@@ -4297,7 +4297,7 @@
         <p:spPr>
           <a:xfrm>
             <a:off x="804672" y="3310128"/>
-            <a:ext cx="7413223" cy="2542032"/>
+            <a:ext cx="7843357" cy="2542032"/>
           </a:xfrm>
           <a:prstGeom prst="rect">
             <a:avLst/>
@@ -4343,7 +4343,7 @@
         <p:spPr>
           <a:xfrm>
             <a:off x="969264" y="5637276"/>
-            <a:ext cx="7102327" cy="13716"/>
+            <a:ext cx="7532461" cy="13716"/>
           </a:xfrm>
           <a:prstGeom prst="rect">
             <a:avLst/>
@@ -4431,7 +4431,7 @@
         <p:spPr>
           <a:xfrm>
             <a:off x="1024128" y="3566160"/>
-            <a:ext cx="1398519" cy="2011680"/>
+            <a:ext cx="1484546" cy="2011680"/>
           </a:xfrm>
           <a:prstGeom prst="rect">
             <a:avLst/>
@@ -4477,7 +4477,7 @@
         <p:spPr>
           <a:xfrm>
             <a:off x="1042416" y="3584448"/>
-            <a:ext cx="1361943" cy="164592"/>
+            <a:ext cx="1447970" cy="164592"/>
           </a:xfrm>
           <a:prstGeom prst="rect">
             <a:avLst/>
@@ -4512,7 +4512,7 @@
         </p:nvSpPr>
         <p:spPr>
           <a:xfrm>
-            <a:off x="1486329" y="4095089"/>
+            <a:off x="1514187" y="4095089"/>
             <a:ext cx="32918" cy="32918"/>
           </a:xfrm>
           <a:prstGeom prst="ellipse">
@@ -4556,7 +4556,7 @@
         </p:nvSpPr>
         <p:spPr>
           <a:xfrm>
-            <a:off x="1895930" y="3973197"/>
+            <a:off x="1951928" y="3973197"/>
             <a:ext cx="32918" cy="32918"/>
           </a:xfrm>
           <a:prstGeom prst="ellipse">
@@ -4600,7 +4600,7 @@
         </p:nvSpPr>
         <p:spPr>
           <a:xfrm>
-            <a:off x="1751860" y="4429053"/>
+            <a:off x="1797960" y="4429053"/>
             <a:ext cx="32918" cy="32918"/>
           </a:xfrm>
           <a:prstGeom prst="ellipse">
@@ -4644,7 +4644,7 @@
         </p:nvSpPr>
         <p:spPr>
           <a:xfrm>
-            <a:off x="1153448" y="4649395"/>
+            <a:off x="1158437" y="4649395"/>
             <a:ext cx="32918" cy="32918"/>
           </a:xfrm>
           <a:prstGeom prst="ellipse">
@@ -4688,7 +4688,7 @@
         </p:nvSpPr>
         <p:spPr>
           <a:xfrm>
-            <a:off x="1127773" y="4534690"/>
+            <a:off x="1130999" y="4534690"/>
             <a:ext cx="32918" cy="32918"/>
           </a:xfrm>
           <a:prstGeom prst="ellipse">
@@ -4732,7 +4732,7 @@
         </p:nvSpPr>
         <p:spPr>
           <a:xfrm>
-            <a:off x="1168295" y="4001608"/>
+            <a:off x="1174304" y="4001608"/>
             <a:ext cx="32918" cy="32918"/>
           </a:xfrm>
           <a:prstGeom prst="ellipse">
@@ -4776,7 +4776,7 @@
         </p:nvSpPr>
         <p:spPr>
           <a:xfrm>
-            <a:off x="1612410" y="5145922"/>
+            <a:off x="1648930" y="5145922"/>
             <a:ext cx="32918" cy="32918"/>
           </a:xfrm>
           <a:prstGeom prst="ellipse">
@@ -4820,7 +4820,7 @@
         </p:nvSpPr>
         <p:spPr>
           <a:xfrm>
-            <a:off x="1235847" y="4207617"/>
+            <a:off x="1246497" y="4207617"/>
             <a:ext cx="32918" cy="32918"/>
           </a:xfrm>
           <a:prstGeom prst="ellipse">
@@ -4864,7 +4864,7 @@
         </p:nvSpPr>
         <p:spPr>
           <a:xfrm>
-            <a:off x="1866502" y="5333791"/>
+            <a:off x="1920478" y="5333791"/>
             <a:ext cx="32918" cy="32918"/>
           </a:xfrm>
           <a:prstGeom prst="ellipse">
@@ -4908,7 +4908,7 @@
         </p:nvSpPr>
         <p:spPr>
           <a:xfrm>
-            <a:off x="1803477" y="4477228"/>
+            <a:off x="1853124" y="4477228"/>
             <a:ext cx="32918" cy="32918"/>
           </a:xfrm>
           <a:prstGeom prst="ellipse">
@@ -4952,7 +4952,7 @@
         </p:nvSpPr>
         <p:spPr>
           <a:xfrm>
-            <a:off x="2303302" y="3933008"/>
+            <a:off x="2387286" y="3933008"/>
             <a:ext cx="32918" cy="32918"/>
           </a:xfrm>
           <a:prstGeom prst="ellipse">
@@ -4996,7 +4996,7 @@
         </p:nvSpPr>
         <p:spPr>
           <a:xfrm>
-            <a:off x="2155808" y="4310788"/>
+            <a:off x="2229659" y="4310788"/>
             <a:ext cx="32918" cy="32918"/>
           </a:xfrm>
           <a:prstGeom prst="ellipse">
@@ -5040,7 +5040,7 @@
         </p:nvSpPr>
         <p:spPr>
           <a:xfrm>
-            <a:off x="1261459" y="4043702"/>
+            <a:off x="1273869" y="4043702"/>
             <a:ext cx="32918" cy="32918"/>
           </a:xfrm>
           <a:prstGeom prst="ellipse">
@@ -5084,7 +5084,7 @@
         </p:nvSpPr>
         <p:spPr>
           <a:xfrm>
-            <a:off x="1467106" y="5129249"/>
+            <a:off x="1493644" y="5129249"/>
             <a:ext cx="32918" cy="32918"/>
           </a:xfrm>
           <a:prstGeom prst="ellipse">
@@ -5128,7 +5128,7 @@
         </p:nvSpPr>
         <p:spPr>
           <a:xfrm>
-            <a:off x="1307129" y="4764682"/>
+            <a:off x="1322676" y="4764682"/>
             <a:ext cx="32918" cy="32918"/>
           </a:xfrm>
           <a:prstGeom prst="ellipse">
@@ -5172,7 +5172,7 @@
         </p:nvSpPr>
         <p:spPr>
           <a:xfrm>
-            <a:off x="1880878" y="4439481"/>
+            <a:off x="1935841" y="4439481"/>
             <a:ext cx="32918" cy="32918"/>
           </a:xfrm>
           <a:prstGeom prst="ellipse">
@@ -5216,7 +5216,7 @@
         </p:nvSpPr>
         <p:spPr>
           <a:xfrm>
-            <a:off x="1766714" y="3958201"/>
+            <a:off x="1813835" y="3958201"/>
             <a:ext cx="32918" cy="32918"/>
           </a:xfrm>
           <a:prstGeom prst="ellipse">
@@ -5260,7 +5260,7 @@
         </p:nvSpPr>
         <p:spPr>
           <a:xfrm>
-            <a:off x="1155454" y="4180755"/>
+            <a:off x="1160581" y="4180755"/>
             <a:ext cx="32918" cy="32918"/>
           </a:xfrm>
           <a:prstGeom prst="ellipse">
@@ -5304,7 +5304,7 @@
         </p:nvSpPr>
         <p:spPr>
           <a:xfrm>
-            <a:off x="1932828" y="4525280"/>
+            <a:off x="1991360" y="4525280"/>
             <a:ext cx="32918" cy="32918"/>
           </a:xfrm>
           <a:prstGeom prst="ellipse">
@@ -5348,7 +5348,7 @@
         </p:nvSpPr>
         <p:spPr>
           <a:xfrm>
-            <a:off x="1474200" y="4770841"/>
+            <a:off x="1501225" y="4770841"/>
             <a:ext cx="32918" cy="32918"/>
           </a:xfrm>
           <a:prstGeom prst="ellipse">
@@ -5392,7 +5392,7 @@
         </p:nvSpPr>
         <p:spPr>
           <a:xfrm>
-            <a:off x="1648305" y="4326578"/>
+            <a:off x="1687291" y="4326578"/>
             <a:ext cx="32918" cy="32918"/>
           </a:xfrm>
           <a:prstGeom prst="ellipse">
@@ -5436,7 +5436,7 @@
         </p:nvSpPr>
         <p:spPr>
           <a:xfrm>
-            <a:off x="2075554" y="4947169"/>
+            <a:off x="2143892" y="4947169"/>
             <a:ext cx="32918" cy="32918"/>
           </a:xfrm>
           <a:prstGeom prst="ellipse">
@@ -5480,7 +5480,7 @@
         </p:nvSpPr>
         <p:spPr>
           <a:xfrm>
-            <a:off x="1386482" y="4753527"/>
+            <a:off x="1407481" y="4753527"/>
             <a:ext cx="32918" cy="32918"/>
           </a:xfrm>
           <a:prstGeom prst="ellipse">
@@ -5524,7 +5524,7 @@
         </p:nvSpPr>
         <p:spPr>
           <a:xfrm>
-            <a:off x="1738479" y="5220980"/>
+            <a:off x="1783661" y="5220980"/>
             <a:ext cx="32918" cy="32918"/>
           </a:xfrm>
           <a:prstGeom prst="ellipse">
@@ -5568,7 +5568,7 @@
         </p:nvSpPr>
         <p:spPr>
           <a:xfrm>
-            <a:off x="1994243" y="4308190"/>
+            <a:off x="2056995" y="4308190"/>
             <a:ext cx="32918" cy="32918"/>
           </a:xfrm>
           <a:prstGeom prst="ellipse">
@@ -5612,7 +5612,7 @@
         </p:nvSpPr>
         <p:spPr>
           <a:xfrm>
-            <a:off x="2308210" y="4044127"/>
+            <a:off x="2392532" y="4044127"/>
             <a:ext cx="32918" cy="32918"/>
           </a:xfrm>
           <a:prstGeom prst="ellipse">
@@ -5656,7 +5656,7 @@
         </p:nvSpPr>
         <p:spPr>
           <a:xfrm>
-            <a:off x="1604400" y="5037557"/>
+            <a:off x="1640370" y="5037557"/>
             <a:ext cx="32918" cy="32918"/>
           </a:xfrm>
           <a:prstGeom prst="ellipse">
@@ -5700,7 +5700,7 @@
         </p:nvSpPr>
         <p:spPr>
           <a:xfrm>
-            <a:off x="1271138" y="4620680"/>
+            <a:off x="1284213" y="4620680"/>
             <a:ext cx="32918" cy="32918"/>
           </a:xfrm>
           <a:prstGeom prst="ellipse">
@@ -5744,7 +5744,7 @@
         </p:nvSpPr>
         <p:spPr>
           <a:xfrm>
-            <a:off x="1129916" y="4899325"/>
+            <a:off x="1133289" y="4899325"/>
             <a:ext cx="32918" cy="32918"/>
           </a:xfrm>
           <a:prstGeom prst="ellipse">
@@ -5788,7 +5788,7 @@
         </p:nvSpPr>
         <p:spPr>
           <a:xfrm>
-            <a:off x="2038228" y="4751354"/>
+            <a:off x="2104001" y="4751354"/>
             <a:ext cx="32918" cy="32918"/>
           </a:xfrm>
           <a:prstGeom prst="ellipse">
@@ -5832,7 +5832,7 @@
         </p:nvSpPr>
         <p:spPr>
           <a:xfrm>
-            <a:off x="2177107" y="4348311"/>
+            <a:off x="2252422" y="4348311"/>
             <a:ext cx="32918" cy="32918"/>
           </a:xfrm>
           <a:prstGeom prst="ellipse">
@@ -5876,7 +5876,7 @@
         </p:nvSpPr>
         <p:spPr>
           <a:xfrm>
-            <a:off x="1951480" y="4784533"/>
+            <a:off x="2011294" y="4784533"/>
             <a:ext cx="32918" cy="32918"/>
           </a:xfrm>
           <a:prstGeom prst="ellipse">
@@ -5920,7 +5920,7 @@
         </p:nvSpPr>
         <p:spPr>
           <a:xfrm>
-            <a:off x="1806974" y="4569759"/>
+            <a:off x="1856861" y="4569759"/>
             <a:ext cx="32918" cy="32918"/>
           </a:xfrm>
           <a:prstGeom prst="ellipse">
@@ -5964,7 +5964,7 @@
         </p:nvSpPr>
         <p:spPr>
           <a:xfrm>
-            <a:off x="2132641" y="5329084"/>
+            <a:off x="2204901" y="5329084"/>
             <a:ext cx="32918" cy="32918"/>
           </a:xfrm>
           <a:prstGeom prst="ellipse">
@@ -6008,7 +6008,7 @@
         </p:nvSpPr>
         <p:spPr>
           <a:xfrm>
-            <a:off x="1674494" y="4893008"/>
+            <a:off x="1715279" y="4893008"/>
             <a:ext cx="32918" cy="32918"/>
           </a:xfrm>
           <a:prstGeom prst="ellipse">
@@ -6052,7 +6052,7 @@
         </p:nvSpPr>
         <p:spPr>
           <a:xfrm>
-            <a:off x="1156792" y="4951052"/>
+            <a:off x="1162011" y="4951052"/>
             <a:ext cx="32918" cy="32918"/>
           </a:xfrm>
           <a:prstGeom prst="ellipse">
@@ -6096,7 +6096,7 @@
         </p:nvSpPr>
         <p:spPr>
           <a:xfrm>
-            <a:off x="1891165" y="5404344"/>
+            <a:off x="1946836" y="5404344"/>
             <a:ext cx="32918" cy="32918"/>
           </a:xfrm>
           <a:prstGeom prst="ellipse">
@@ -6140,7 +6140,7 @@
         </p:nvSpPr>
         <p:spPr>
           <a:xfrm>
-            <a:off x="2110047" y="4302995"/>
+            <a:off x="2180755" y="4302995"/>
             <a:ext cx="32918" cy="32918"/>
           </a:xfrm>
           <a:prstGeom prst="ellipse">
@@ -6184,7 +6184,7 @@
         </p:nvSpPr>
         <p:spPr>
           <a:xfrm>
-            <a:off x="1563914" y="4900004"/>
+            <a:off x="1597103" y="4900004"/>
             <a:ext cx="32918" cy="32918"/>
           </a:xfrm>
           <a:prstGeom prst="ellipse">
@@ -6228,7 +6228,7 @@
         </p:nvSpPr>
         <p:spPr>
           <a:xfrm>
-            <a:off x="1109074" y="4578293"/>
+            <a:off x="1111015" y="4578293"/>
             <a:ext cx="32918" cy="32918"/>
           </a:xfrm>
           <a:prstGeom prst="ellipse">
@@ -6272,7 +6272,7 @@
         </p:nvSpPr>
         <p:spPr>
           <a:xfrm>
-            <a:off x="1291253" y="4042620"/>
+            <a:off x="1305710" y="4042620"/>
             <a:ext cx="32918" cy="32918"/>
           </a:xfrm>
           <a:prstGeom prst="ellipse">
@@ -6316,7 +6316,7 @@
         </p:nvSpPr>
         <p:spPr>
           <a:xfrm>
-            <a:off x="1154644" y="5054799"/>
+            <a:off x="1159716" y="5054799"/>
             <a:ext cx="32918" cy="32918"/>
           </a:xfrm>
           <a:prstGeom prst="ellipse">
@@ -6360,7 +6360,7 @@
         </p:nvSpPr>
         <p:spPr>
           <a:xfrm>
-            <a:off x="1249025" y="4264479"/>
+            <a:off x="1260151" y="4264479"/>
             <a:ext cx="47548" cy="47548"/>
           </a:xfrm>
           <a:prstGeom prst="ellipse">
@@ -6404,7 +6404,7 @@
         </p:nvSpPr>
         <p:spPr>
           <a:xfrm>
-            <a:off x="1567047" y="4816635"/>
+            <a:off x="1600679" y="4816635"/>
             <a:ext cx="47548" cy="47548"/>
           </a:xfrm>
           <a:prstGeom prst="ellipse">
@@ -6448,7 +6448,7 @@
         </p:nvSpPr>
         <p:spPr>
           <a:xfrm>
-            <a:off x="1189751" y="4442899"/>
+            <a:off x="1196683" y="4442899"/>
             <a:ext cx="47548" cy="47548"/>
           </a:xfrm>
           <a:prstGeom prst="ellipse">
@@ -6492,7 +6492,7 @@
         </p:nvSpPr>
         <p:spPr>
           <a:xfrm>
-            <a:off x="1759714" y="4827223"/>
+            <a:off x="1806981" y="4827223"/>
             <a:ext cx="47548" cy="47548"/>
           </a:xfrm>
           <a:prstGeom prst="ellipse">
@@ -6536,7 +6536,7 @@
         </p:nvSpPr>
         <p:spPr>
           <a:xfrm>
-            <a:off x="2087742" y="4810051"/>
+            <a:off x="2158222" y="4810051"/>
             <a:ext cx="47548" cy="47548"/>
           </a:xfrm>
           <a:prstGeom prst="ellipse">
@@ -6580,7 +6580,7 @@
         </p:nvSpPr>
         <p:spPr>
           <a:xfrm>
-            <a:off x="1430253" y="4412901"/>
+            <a:off x="1454205" y="4412901"/>
             <a:ext cx="47548" cy="47548"/>
           </a:xfrm>
           <a:prstGeom prst="ellipse">
@@ -6624,7 +6624,7 @@
         </p:nvSpPr>
         <p:spPr>
           <a:xfrm>
-            <a:off x="1527930" y="4827939"/>
+            <a:off x="1558794" y="4827939"/>
             <a:ext cx="47548" cy="47548"/>
           </a:xfrm>
           <a:prstGeom prst="ellipse">
@@ -6668,7 +6668,7 @@
         </p:nvSpPr>
         <p:spPr>
           <a:xfrm>
-            <a:off x="2256049" y="4178892"/>
+            <a:off x="2338440" y="4178892"/>
             <a:ext cx="47548" cy="47548"/>
           </a:xfrm>
           <a:prstGeom prst="ellipse">
@@ -6712,7 +6712,7 @@
         </p:nvSpPr>
         <p:spPr>
           <a:xfrm>
-            <a:off x="1306011" y="4250620"/>
+            <a:off x="1321170" y="4250620"/>
             <a:ext cx="47548" cy="47548"/>
           </a:xfrm>
           <a:prstGeom prst="ellipse">
@@ -6756,7 +6756,7 @@
         </p:nvSpPr>
         <p:spPr>
           <a:xfrm>
-            <a:off x="1375446" y="4474565"/>
+            <a:off x="1395519" y="4474565"/>
             <a:ext cx="47548" cy="47548"/>
           </a:xfrm>
           <a:prstGeom prst="ellipse">
@@ -6800,7 +6800,7 @@
         </p:nvSpPr>
         <p:spPr>
           <a:xfrm>
-            <a:off x="1807955" y="4277873"/>
+            <a:off x="1858636" y="4277873"/>
             <a:ext cx="47548" cy="47548"/>
           </a:xfrm>
           <a:prstGeom prst="ellipse">
@@ -6844,7 +6844,7 @@
         </p:nvSpPr>
         <p:spPr>
           <a:xfrm>
-            <a:off x="1096770" y="4416132"/>
+            <a:off x="1097122" y="4416132"/>
             <a:ext cx="47548" cy="47548"/>
           </a:xfrm>
           <a:prstGeom prst="ellipse">
@@ -6888,7 +6888,7 @@
         </p:nvSpPr>
         <p:spPr>
           <a:xfrm>
-            <a:off x="1540673" y="4546596"/>
+            <a:off x="1572438" y="4546596"/>
             <a:ext cx="47548" cy="47548"/>
           </a:xfrm>
           <a:prstGeom prst="ellipse">
@@ -6932,7 +6932,7 @@
         </p:nvSpPr>
         <p:spPr>
           <a:xfrm>
-            <a:off x="2250417" y="4656488"/>
+            <a:off x="2332409" y="4656488"/>
             <a:ext cx="47548" cy="47548"/>
           </a:xfrm>
           <a:prstGeom prst="ellipse">
@@ -6976,7 +6976,7 @@
         </p:nvSpPr>
         <p:spPr>
           <a:xfrm>
-            <a:off x="1718445" y="4591960"/>
+            <a:off x="1762791" y="4591960"/>
             <a:ext cx="47548" cy="47548"/>
           </a:xfrm>
           <a:prstGeom prst="ellipse">
@@ -7020,7 +7020,7 @@
         </p:nvSpPr>
         <p:spPr>
           <a:xfrm>
-            <a:off x="1913809" y="4093097"/>
+            <a:off x="1971980" y="4093097"/>
             <a:ext cx="47548" cy="47548"/>
           </a:xfrm>
           <a:prstGeom prst="ellipse">
@@ -7064,7 +7064,7 @@
         </p:nvSpPr>
         <p:spPr>
           <a:xfrm>
-            <a:off x="2185301" y="4735686"/>
+            <a:off x="2262685" y="4735686"/>
             <a:ext cx="47548" cy="47548"/>
           </a:xfrm>
           <a:prstGeom prst="ellipse">
@@ -7108,7 +7108,7 @@
         </p:nvSpPr>
         <p:spPr>
           <a:xfrm>
-            <a:off x="2154886" y="4751534"/>
+            <a:off x="2230118" y="4751534"/>
             <a:ext cx="47548" cy="47548"/>
           </a:xfrm>
           <a:prstGeom prst="ellipse">
@@ -7152,7 +7152,7 @@
         </p:nvSpPr>
         <p:spPr>
           <a:xfrm>
-            <a:off x="1568785" y="4398458"/>
+            <a:off x="1602540" y="4398458"/>
             <a:ext cx="47548" cy="47548"/>
           </a:xfrm>
           <a:prstGeom prst="ellipse">
@@ -7196,7 +7196,7 @@
         </p:nvSpPr>
         <p:spPr>
           <a:xfrm>
-            <a:off x="1217657" y="4606739"/>
+            <a:off x="1226564" y="4606739"/>
             <a:ext cx="47548" cy="47548"/>
           </a:xfrm>
           <a:prstGeom prst="ellipse">
@@ -7240,7 +7240,7 @@
         </p:nvSpPr>
         <p:spPr>
           <a:xfrm>
-            <a:off x="1167464" y="4104918"/>
+            <a:off x="1172819" y="4104918"/>
             <a:ext cx="47548" cy="47548"/>
           </a:xfrm>
           <a:prstGeom prst="ellipse">
@@ -7284,7 +7284,7 @@
         </p:nvSpPr>
         <p:spPr>
           <a:xfrm>
-            <a:off x="1345574" y="4188967"/>
+            <a:off x="1363533" y="4188967"/>
             <a:ext cx="47548" cy="47548"/>
           </a:xfrm>
           <a:prstGeom prst="ellipse">
@@ -7328,7 +7328,7 @@
         </p:nvSpPr>
         <p:spPr>
           <a:xfrm>
-            <a:off x="1505176" y="4091843"/>
+            <a:off x="1534430" y="4091843"/>
             <a:ext cx="47548" cy="47548"/>
           </a:xfrm>
           <a:prstGeom prst="ellipse">
@@ -7372,7 +7372,7 @@
         </p:nvSpPr>
         <p:spPr>
           <a:xfrm>
-            <a:off x="1092077" y="4179196"/>
+            <a:off x="1092097" y="4179196"/>
             <a:ext cx="47548" cy="47548"/>
           </a:xfrm>
           <a:prstGeom prst="ellipse">
@@ -7416,7 +7416,7 @@
         </p:nvSpPr>
         <p:spPr>
           <a:xfrm>
-            <a:off x="1215138" y="4367151"/>
+            <a:off x="1223866" y="4367151"/>
             <a:ext cx="47548" cy="47548"/>
           </a:xfrm>
           <a:prstGeom prst="ellipse">
@@ -7460,7 +7460,7 @@
         </p:nvSpPr>
         <p:spPr>
           <a:xfrm>
-            <a:off x="1122793" y="4819211"/>
+            <a:off x="1124987" y="4819211"/>
             <a:ext cx="47548" cy="47548"/>
           </a:xfrm>
           <a:prstGeom prst="ellipse">
@@ -7504,7 +7504,7 @@
         </p:nvSpPr>
         <p:spPr>
           <a:xfrm>
-            <a:off x="1838280" y="4176794"/>
+            <a:off x="1891106" y="4176794"/>
             <a:ext cx="47548" cy="47548"/>
           </a:xfrm>
           <a:prstGeom prst="ellipse">
@@ -7548,7 +7548,7 @@
         </p:nvSpPr>
         <p:spPr>
           <a:xfrm>
-            <a:off x="1398448" y="4352794"/>
+            <a:off x="1420149" y="4352794"/>
             <a:ext cx="47548" cy="47548"/>
           </a:xfrm>
           <a:prstGeom prst="ellipse">
@@ -7592,7 +7592,7 @@
         </p:nvSpPr>
         <p:spPr>
           <a:xfrm>
-            <a:off x="1534485" y="4154038"/>
+            <a:off x="1565813" y="4154038"/>
             <a:ext cx="47548" cy="47548"/>
           </a:xfrm>
           <a:prstGeom prst="ellipse">
@@ -7636,7 +7636,7 @@
         </p:nvSpPr>
         <p:spPr>
           <a:xfrm>
-            <a:off x="2123794" y="4924339"/>
+            <a:off x="2196826" y="4924339"/>
             <a:ext cx="47548" cy="47548"/>
           </a:xfrm>
           <a:prstGeom prst="ellipse">
@@ -7680,7 +7680,7 @@
         </p:nvSpPr>
         <p:spPr>
           <a:xfrm>
-            <a:off x="1658268" y="4473567"/>
+            <a:off x="1698356" y="4473567"/>
             <a:ext cx="47548" cy="47548"/>
           </a:xfrm>
           <a:prstGeom prst="ellipse">
@@ -7724,7 +7724,7 @@
         </p:nvSpPr>
         <p:spPr>
           <a:xfrm>
-            <a:off x="1196198" y="4135756"/>
+            <a:off x="1203587" y="4135756"/>
             <a:ext cx="47548" cy="47548"/>
           </a:xfrm>
           <a:prstGeom prst="ellipse">
@@ -7768,7 +7768,7 @@
         </p:nvSpPr>
         <p:spPr>
           <a:xfrm>
-            <a:off x="1508315" y="4279653"/>
+            <a:off x="1537791" y="4279653"/>
             <a:ext cx="47548" cy="47548"/>
           </a:xfrm>
           <a:prstGeom prst="ellipse">
@@ -7812,7 +7812,7 @@
         </p:nvSpPr>
         <p:spPr>
           <a:xfrm>
-            <a:off x="2099382" y="4188202"/>
+            <a:off x="2170686" y="4188202"/>
             <a:ext cx="47548" cy="47548"/>
           </a:xfrm>
           <a:prstGeom prst="ellipse">
@@ -7856,7 +7856,7 @@
         </p:nvSpPr>
         <p:spPr>
           <a:xfrm>
-            <a:off x="1119870" y="4887060"/>
+            <a:off x="1121856" y="4887060"/>
             <a:ext cx="47548" cy="47548"/>
           </a:xfrm>
           <a:prstGeom prst="ellipse">
@@ -7900,7 +7900,7 @@
         </p:nvSpPr>
         <p:spPr>
           <a:xfrm>
-            <a:off x="1733964" y="4175070"/>
+            <a:off x="1779408" y="4175070"/>
             <a:ext cx="47548" cy="47548"/>
           </a:xfrm>
           <a:prstGeom prst="ellipse">
@@ -7944,7 +7944,7 @@
         </p:nvSpPr>
         <p:spPr>
           <a:xfrm>
-            <a:off x="1752095" y="4069242"/>
+            <a:off x="1798823" y="4069242"/>
             <a:ext cx="47548" cy="47548"/>
           </a:xfrm>
           <a:prstGeom prst="ellipse">
@@ -7988,7 +7988,7 @@
         </p:nvSpPr>
         <p:spPr>
           <a:xfrm>
-            <a:off x="1733784" y="4911415"/>
+            <a:off x="1779216" y="4911415"/>
             <a:ext cx="47548" cy="47548"/>
           </a:xfrm>
           <a:prstGeom prst="ellipse">
@@ -8032,7 +8032,7 @@
         </p:nvSpPr>
         <p:spPr>
           <a:xfrm>
-            <a:off x="2141285" y="4661536"/>
+            <a:off x="2215554" y="4661536"/>
             <a:ext cx="47548" cy="47548"/>
           </a:xfrm>
           <a:prstGeom prst="ellipse">
@@ -8076,7 +8076,7 @@
         </p:nvSpPr>
         <p:spPr>
           <a:xfrm>
-            <a:off x="1409215" y="4369886"/>
+            <a:off x="1431678" y="4369886"/>
             <a:ext cx="47548" cy="47548"/>
           </a:xfrm>
           <a:prstGeom prst="ellipse">
@@ -8120,7 +8120,7 @@
         </p:nvSpPr>
         <p:spPr>
           <a:xfrm>
-            <a:off x="1294856" y="4728577"/>
+            <a:off x="1309226" y="4728577"/>
             <a:ext cx="47548" cy="47548"/>
           </a:xfrm>
           <a:prstGeom prst="ellipse">
@@ -8164,7 +8164,7 @@
         </p:nvSpPr>
         <p:spPr>
           <a:xfrm>
-            <a:off x="1739234" y="4734877"/>
+            <a:off x="1785051" y="4734877"/>
             <a:ext cx="47548" cy="47548"/>
           </a:xfrm>
           <a:prstGeom prst="ellipse">
@@ -8208,7 +8208,7 @@
         </p:nvSpPr>
         <p:spPr>
           <a:xfrm>
-            <a:off x="1492547" y="4242729"/>
+            <a:off x="1520907" y="4242729"/>
             <a:ext cx="47548" cy="47548"/>
           </a:xfrm>
           <a:prstGeom prst="ellipse">
@@ -8252,7 +8252,7 @@
         </p:nvSpPr>
         <p:spPr>
           <a:xfrm>
-            <a:off x="2078298" y="4917102"/>
+            <a:off x="2148110" y="4917102"/>
             <a:ext cx="47548" cy="47548"/>
           </a:xfrm>
           <a:prstGeom prst="ellipse">
@@ -8296,7 +8296,7 @@
         </p:nvSpPr>
         <p:spPr>
           <a:xfrm>
-            <a:off x="2128282" y="4758797"/>
+            <a:off x="2201631" y="4758797"/>
             <a:ext cx="47548" cy="47548"/>
           </a:xfrm>
           <a:prstGeom prst="ellipse">
@@ -8340,7 +8340,7 @@
         </p:nvSpPr>
         <p:spPr>
           <a:xfrm>
-            <a:off x="2086591" y="4700196"/>
+            <a:off x="2156990" y="4700196"/>
             <a:ext cx="47548" cy="47548"/>
           </a:xfrm>
           <a:prstGeom prst="ellipse">
@@ -8384,7 +8384,7 @@
         </p:nvSpPr>
         <p:spPr>
           <a:xfrm>
-            <a:off x="1367427" y="4503487"/>
+            <a:off x="1386933" y="4503487"/>
             <a:ext cx="47548" cy="47548"/>
           </a:xfrm>
           <a:prstGeom prst="ellipse">
@@ -8428,7 +8428,7 @@
         </p:nvSpPr>
         <p:spPr>
           <a:xfrm>
-            <a:off x="1524029" y="4070957"/>
+            <a:off x="1554617" y="4070957"/>
             <a:ext cx="47548" cy="47548"/>
           </a:xfrm>
           <a:prstGeom prst="ellipse">
@@ -8472,7 +8472,7 @@
         </p:nvSpPr>
         <p:spPr>
           <a:xfrm>
-            <a:off x="1125755" y="4292630"/>
+            <a:off x="1128158" y="4292630"/>
             <a:ext cx="47548" cy="47548"/>
           </a:xfrm>
           <a:prstGeom prst="ellipse">
@@ -8516,7 +8516,7 @@
         </p:nvSpPr>
         <p:spPr>
           <a:xfrm>
-            <a:off x="1406856" y="4658283"/>
+            <a:off x="1429152" y="4658283"/>
             <a:ext cx="47548" cy="47548"/>
           </a:xfrm>
           <a:prstGeom prst="ellipse">
@@ -8560,7 +8560,7 @@
         </p:nvSpPr>
         <p:spPr>
           <a:xfrm>
-            <a:off x="2254571" y="4441165"/>
+            <a:off x="2336857" y="4441165"/>
             <a:ext cx="47548" cy="47548"/>
           </a:xfrm>
           <a:prstGeom prst="ellipse">
@@ -8604,7 +8604,7 @@
         </p:nvSpPr>
         <p:spPr>
           <a:xfrm>
-            <a:off x="2230873" y="4919856"/>
+            <a:off x="2311482" y="4919856"/>
             <a:ext cx="47548" cy="47548"/>
           </a:xfrm>
           <a:prstGeom prst="ellipse">
@@ -8648,7 +8648,7 @@
         </p:nvSpPr>
         <p:spPr>
           <a:xfrm>
-            <a:off x="2252730" y="4368059"/>
+            <a:off x="2334885" y="4368059"/>
             <a:ext cx="47548" cy="47548"/>
           </a:xfrm>
           <a:prstGeom prst="ellipse">
@@ -8692,7 +8692,7 @@
         </p:nvSpPr>
         <p:spPr>
           <a:xfrm>
-            <a:off x="1359796" y="4246096"/>
+            <a:off x="1378762" y="4246096"/>
             <a:ext cx="47548" cy="47548"/>
           </a:xfrm>
           <a:prstGeom prst="ellipse">
@@ -8736,7 +8736,7 @@
         </p:nvSpPr>
         <p:spPr>
           <a:xfrm>
-            <a:off x="1330917" y="4226205"/>
+            <a:off x="1347839" y="4226205"/>
             <a:ext cx="47548" cy="47548"/>
           </a:xfrm>
           <a:prstGeom prst="ellipse">
@@ -8780,7 +8780,7 @@
         </p:nvSpPr>
         <p:spPr>
           <a:xfrm>
-            <a:off x="1850433" y="4842203"/>
+            <a:off x="1904120" y="4842203"/>
             <a:ext cx="47548" cy="47548"/>
           </a:xfrm>
           <a:prstGeom prst="ellipse">
@@ -8824,7 +8824,7 @@
         </p:nvSpPr>
         <p:spPr>
           <a:xfrm>
-            <a:off x="2113460" y="4469707"/>
+            <a:off x="2185760" y="4469707"/>
             <a:ext cx="47548" cy="47548"/>
           </a:xfrm>
           <a:prstGeom prst="ellipse">
@@ -8868,7 +8868,7 @@
         </p:nvSpPr>
         <p:spPr>
           <a:xfrm>
-            <a:off x="1885579" y="4753101"/>
+            <a:off x="1941753" y="4753101"/>
             <a:ext cx="47548" cy="47548"/>
           </a:xfrm>
           <a:prstGeom prst="ellipse">
@@ -8912,7 +8912,7 @@
         </p:nvSpPr>
         <p:spPr>
           <a:xfrm>
-            <a:off x="1194854" y="4630015"/>
+            <a:off x="1202147" y="4630015"/>
             <a:ext cx="47548" cy="47548"/>
           </a:xfrm>
           <a:prstGeom prst="ellipse">
@@ -8956,7 +8956,7 @@
         </p:nvSpPr>
         <p:spPr>
           <a:xfrm>
-            <a:off x="2197754" y="4737752"/>
+            <a:off x="2276019" y="4737752"/>
             <a:ext cx="47548" cy="47548"/>
           </a:xfrm>
           <a:prstGeom prst="ellipse">
@@ -9000,7 +9000,7 @@
         </p:nvSpPr>
         <p:spPr>
           <a:xfrm>
-            <a:off x="2003693" y="4468431"/>
+            <a:off x="2068226" y="4468431"/>
             <a:ext cx="47548" cy="47548"/>
           </a:xfrm>
           <a:prstGeom prst="ellipse">
@@ -9044,7 +9044,7 @@
         </p:nvSpPr>
         <p:spPr>
           <a:xfrm>
-            <a:off x="1308811" y="4743800"/>
+            <a:off x="1324169" y="4743800"/>
             <a:ext cx="47548" cy="47548"/>
           </a:xfrm>
           <a:prstGeom prst="ellipse">
@@ -9088,7 +9088,7 @@
         </p:nvSpPr>
         <p:spPr>
           <a:xfrm>
-            <a:off x="1496014" y="4754145"/>
+            <a:off x="1524620" y="4754145"/>
             <a:ext cx="47548" cy="47548"/>
           </a:xfrm>
           <a:prstGeom prst="ellipse">
@@ -9132,7 +9132,7 @@
         </p:nvSpPr>
         <p:spPr>
           <a:xfrm>
-            <a:off x="2272978" y="4395678"/>
+            <a:off x="2356567" y="4395678"/>
             <a:ext cx="47548" cy="47548"/>
           </a:xfrm>
           <a:prstGeom prst="ellipse">
@@ -9176,7 +9176,7 @@
         </p:nvSpPr>
         <p:spPr>
           <a:xfrm>
-            <a:off x="1579735" y="4883352"/>
+            <a:off x="1614265" y="4883352"/>
             <a:ext cx="47548" cy="47548"/>
           </a:xfrm>
           <a:prstGeom prst="ellipse">
@@ -9220,7 +9220,7 @@
         </p:nvSpPr>
         <p:spPr>
           <a:xfrm>
-            <a:off x="1972887" y="4195783"/>
+            <a:off x="2035239" y="4195783"/>
             <a:ext cx="47548" cy="47548"/>
           </a:xfrm>
           <a:prstGeom prst="ellipse">
@@ -9264,7 +9264,7 @@
         </p:nvSpPr>
         <p:spPr>
           <a:xfrm>
-            <a:off x="1246226" y="4179095"/>
+            <a:off x="1257155" y="4179095"/>
             <a:ext cx="47548" cy="47548"/>
           </a:xfrm>
           <a:prstGeom prst="ellipse">
@@ -9308,7 +9308,7 @@
         </p:nvSpPr>
         <p:spPr>
           <a:xfrm>
-            <a:off x="2191767" y="4759171"/>
+            <a:off x="2269609" y="4759171"/>
             <a:ext cx="47548" cy="47548"/>
           </a:xfrm>
           <a:prstGeom prst="ellipse">
@@ -9352,7 +9352,7 @@
         </p:nvSpPr>
         <p:spPr>
           <a:xfrm>
-            <a:off x="1269489" y="4776882"/>
+            <a:off x="1282064" y="4776882"/>
             <a:ext cx="47548" cy="47548"/>
           </a:xfrm>
           <a:prstGeom prst="ellipse">
@@ -9396,7 +9396,7 @@
         </p:nvSpPr>
         <p:spPr>
           <a:xfrm>
-            <a:off x="2283492" y="4627079"/>
+            <a:off x="2367824" y="4627079"/>
             <a:ext cx="47548" cy="47548"/>
           </a:xfrm>
           <a:prstGeom prst="ellipse">
@@ -9440,7 +9440,7 @@
         </p:nvSpPr>
         <p:spPr>
           <a:xfrm>
-            <a:off x="1517763" y="4530945"/>
+            <a:off x="1547907" y="4530945"/>
             <a:ext cx="47548" cy="47548"/>
           </a:xfrm>
           <a:prstGeom prst="ellipse">
@@ -9484,7 +9484,7 @@
         </p:nvSpPr>
         <p:spPr>
           <a:xfrm>
-            <a:off x="1251023" y="4057913"/>
+            <a:off x="1262291" y="4057913"/>
             <a:ext cx="47548" cy="47548"/>
           </a:xfrm>
           <a:prstGeom prst="ellipse">
@@ -9528,7 +9528,7 @@
         </p:nvSpPr>
         <p:spPr>
           <a:xfrm>
-            <a:off x="2272045" y="4620357"/>
+            <a:off x="2355568" y="4620357"/>
             <a:ext cx="47548" cy="47548"/>
           </a:xfrm>
           <a:prstGeom prst="ellipse">
@@ -9572,7 +9572,7 @@
         </p:nvSpPr>
         <p:spPr>
           <a:xfrm>
-            <a:off x="1731926" y="4871693"/>
+            <a:off x="1777226" y="4871693"/>
             <a:ext cx="47548" cy="47548"/>
           </a:xfrm>
           <a:prstGeom prst="ellipse">
@@ -9616,8 +9616,8 @@
         </p:nvSpPr>
         <p:spPr>
           <a:xfrm>
-            <a:off x="2422647" y="3566160"/>
-            <a:ext cx="1398519" cy="2011680"/>
+            <a:off x="2508674" y="3566160"/>
+            <a:ext cx="1484546" cy="2011680"/>
           </a:xfrm>
           <a:prstGeom prst="rect">
             <a:avLst/>
@@ -9662,8 +9662,8 @@
         </p:nvSpPr>
         <p:spPr>
           <a:xfrm>
-            <a:off x="2440935" y="3584448"/>
-            <a:ext cx="1361943" cy="164592"/>
+            <a:off x="2526962" y="3584448"/>
+            <a:ext cx="1447970" cy="164592"/>
           </a:xfrm>
           <a:prstGeom prst="rect">
             <a:avLst/>
@@ -9698,7 +9698,7 @@
         </p:nvSpPr>
         <p:spPr>
           <a:xfrm>
-            <a:off x="3022562" y="5215703"/>
+            <a:off x="3145909" y="5215703"/>
             <a:ext cx="32918" cy="32918"/>
           </a:xfrm>
           <a:prstGeom prst="ellipse">
@@ -9742,7 +9742,7 @@
         </p:nvSpPr>
         <p:spPr>
           <a:xfrm>
-            <a:off x="3513863" y="4188658"/>
+            <a:off x="3670962" y="4188658"/>
             <a:ext cx="32918" cy="32918"/>
           </a:xfrm>
           <a:prstGeom prst="ellipse">
@@ -9786,7 +9786,7 @@
         </p:nvSpPr>
         <p:spPr>
           <a:xfrm>
-            <a:off x="2794691" y="4316007"/>
+            <a:off x="2902382" y="4316007"/>
             <a:ext cx="32918" cy="32918"/>
           </a:xfrm>
           <a:prstGeom prst="ellipse">
@@ -9830,7 +9830,7 @@
         </p:nvSpPr>
         <p:spPr>
           <a:xfrm>
-            <a:off x="2780547" y="4772201"/>
+            <a:off x="2887266" y="4772201"/>
             <a:ext cx="32918" cy="32918"/>
           </a:xfrm>
           <a:prstGeom prst="ellipse">
@@ -9874,7 +9874,7 @@
         </p:nvSpPr>
         <p:spPr>
           <a:xfrm>
-            <a:off x="2804120" y="4511943"/>
+            <a:off x="2912459" y="4511943"/>
             <a:ext cx="32918" cy="32918"/>
           </a:xfrm>
           <a:prstGeom prst="ellipse">
@@ -9918,7 +9918,7 @@
         </p:nvSpPr>
         <p:spPr>
           <a:xfrm>
-            <a:off x="2643472" y="5275200"/>
+            <a:off x="2740775" y="5275200"/>
             <a:ext cx="32918" cy="32918"/>
           </a:xfrm>
           <a:prstGeom prst="ellipse">
@@ -9962,7 +9962,7 @@
         </p:nvSpPr>
         <p:spPr>
           <a:xfrm>
-            <a:off x="2922353" y="4572799"/>
+            <a:off x="3038815" y="4572799"/>
             <a:ext cx="32918" cy="32918"/>
           </a:xfrm>
           <a:prstGeom prst="ellipse">
@@ -10006,7 +10006,7 @@
         </p:nvSpPr>
         <p:spPr>
           <a:xfrm>
-            <a:off x="3209818" y="5266308"/>
+            <a:off x="3346028" y="5266308"/>
             <a:ext cx="32918" cy="32918"/>
           </a:xfrm>
           <a:prstGeom prst="ellipse">
@@ -10050,7 +10050,7 @@
         </p:nvSpPr>
         <p:spPr>
           <a:xfrm>
-            <a:off x="3006057" y="5287176"/>
+            <a:off x="3128269" y="5287176"/>
             <a:ext cx="32918" cy="32918"/>
           </a:xfrm>
           <a:prstGeom prst="ellipse">
@@ -10094,7 +10094,7 @@
         </p:nvSpPr>
         <p:spPr>
           <a:xfrm>
-            <a:off x="3107512" y="4687308"/>
+            <a:off x="3236694" y="4687308"/>
             <a:ext cx="32918" cy="32918"/>
           </a:xfrm>
           <a:prstGeom prst="ellipse">
@@ -10138,7 +10138,7 @@
         </p:nvSpPr>
         <p:spPr>
           <a:xfrm>
-            <a:off x="3134882" y="3889673"/>
+            <a:off x="3265945" y="3889673"/>
             <a:ext cx="32918" cy="32918"/>
           </a:xfrm>
           <a:prstGeom prst="ellipse">
@@ -10182,7 +10182,7 @@
         </p:nvSpPr>
         <p:spPr>
           <a:xfrm>
-            <a:off x="3030471" y="4145234"/>
+            <a:off x="3154360" y="4145234"/>
             <a:ext cx="32918" cy="32918"/>
           </a:xfrm>
           <a:prstGeom prst="ellipse">
@@ -10226,7 +10226,7 @@
         </p:nvSpPr>
         <p:spPr>
           <a:xfrm>
-            <a:off x="2484264" y="5102891"/>
+            <a:off x="2570629" y="5102891"/>
             <a:ext cx="32918" cy="32918"/>
           </a:xfrm>
           <a:prstGeom prst="ellipse">
@@ -10270,7 +10270,7 @@
         </p:nvSpPr>
         <p:spPr>
           <a:xfrm>
-            <a:off x="2695155" y="4596632"/>
+            <a:off x="2796008" y="4596632"/>
             <a:ext cx="32918" cy="32918"/>
           </a:xfrm>
           <a:prstGeom prst="ellipse">
@@ -10314,7 +10314,7 @@
         </p:nvSpPr>
         <p:spPr>
           <a:xfrm>
-            <a:off x="3387437" y="4725627"/>
+            <a:off x="3535851" y="4725627"/>
             <a:ext cx="32918" cy="32918"/>
           </a:xfrm>
           <a:prstGeom prst="ellipse">
@@ -10358,7 +10358,7 @@
         </p:nvSpPr>
         <p:spPr>
           <a:xfrm>
-            <a:off x="2887539" y="4666359"/>
+            <a:off x="3001610" y="4666359"/>
             <a:ext cx="32918" cy="32918"/>
           </a:xfrm>
           <a:prstGeom prst="ellipse">
@@ -10402,7 +10402,7 @@
         </p:nvSpPr>
         <p:spPr>
           <a:xfrm>
-            <a:off x="3174872" y="5079732"/>
+            <a:off x="3308682" y="5079732"/>
             <a:ext cx="32918" cy="32918"/>
           </a:xfrm>
           <a:prstGeom prst="ellipse">
@@ -10446,7 +10446,7 @@
         </p:nvSpPr>
         <p:spPr>
           <a:xfrm>
-            <a:off x="2612211" y="4731566"/>
+            <a:off x="2707367" y="4731566"/>
             <a:ext cx="32918" cy="32918"/>
           </a:xfrm>
           <a:prstGeom prst="ellipse">
@@ -10490,7 +10490,7 @@
         </p:nvSpPr>
         <p:spPr>
           <a:xfrm>
-            <a:off x="2790508" y="4291059"/>
+            <a:off x="2897912" y="4291059"/>
             <a:ext cx="32918" cy="32918"/>
           </a:xfrm>
           <a:prstGeom prst="ellipse">
@@ -10534,7 +10534,7 @@
         </p:nvSpPr>
         <p:spPr>
           <a:xfrm>
-            <a:off x="3446376" y="4649828"/>
+            <a:off x="3598839" y="4649828"/>
             <a:ext cx="32918" cy="32918"/>
           </a:xfrm>
           <a:prstGeom prst="ellipse">
@@ -10578,7 +10578,7 @@
         </p:nvSpPr>
         <p:spPr>
           <a:xfrm>
-            <a:off x="3182745" y="5041991"/>
+            <a:off x="3317096" y="5041991"/>
             <a:ext cx="32918" cy="32918"/>
           </a:xfrm>
           <a:prstGeom prst="ellipse">
@@ -10622,7 +10622,7 @@
         </p:nvSpPr>
         <p:spPr>
           <a:xfrm>
-            <a:off x="3621971" y="4549617"/>
+            <a:off x="3786496" y="4549617"/>
             <a:ext cx="32918" cy="32918"/>
           </a:xfrm>
           <a:prstGeom prst="ellipse">
@@ -10666,7 +10666,7 @@
         </p:nvSpPr>
         <p:spPr>
           <a:xfrm>
-            <a:off x="3246356" y="4646469"/>
+            <a:off x="3385077" y="4646469"/>
             <a:ext cx="32918" cy="32918"/>
           </a:xfrm>
           <a:prstGeom prst="ellipse">
@@ -10710,7 +10710,7 @@
         </p:nvSpPr>
         <p:spPr>
           <a:xfrm>
-            <a:off x="3120676" y="4937433"/>
+            <a:off x="3250762" y="4937433"/>
             <a:ext cx="32918" cy="32918"/>
           </a:xfrm>
           <a:prstGeom prst="ellipse">
@@ -10754,7 +10754,7 @@
         </p:nvSpPr>
         <p:spPr>
           <a:xfrm>
-            <a:off x="3045774" y="4689578"/>
+            <a:off x="3170715" y="4689578"/>
             <a:ext cx="32918" cy="32918"/>
           </a:xfrm>
           <a:prstGeom prst="ellipse">
@@ -10798,7 +10798,7 @@
         </p:nvSpPr>
         <p:spPr>
           <a:xfrm>
-            <a:off x="3077944" y="5324141"/>
+            <a:off x="3205095" y="5324141"/>
             <a:ext cx="32918" cy="32918"/>
           </a:xfrm>
           <a:prstGeom prst="ellipse">
@@ -10842,7 +10842,7 @@
         </p:nvSpPr>
         <p:spPr>
           <a:xfrm>
-            <a:off x="3354911" y="5223153"/>
+            <a:off x="3501089" y="5223153"/>
             <a:ext cx="32918" cy="32918"/>
           </a:xfrm>
           <a:prstGeom prst="ellipse">
@@ -10886,7 +10886,7 @@
         </p:nvSpPr>
         <p:spPr>
           <a:xfrm>
-            <a:off x="3659152" y="4264128"/>
+            <a:off x="3826232" y="4264128"/>
             <a:ext cx="32918" cy="32918"/>
           </a:xfrm>
           <a:prstGeom prst="ellipse">
@@ -10930,7 +10930,7 @@
         </p:nvSpPr>
         <p:spPr>
           <a:xfrm>
-            <a:off x="3179971" y="5326886"/>
+            <a:off x="3314131" y="5326886"/>
             <a:ext cx="32918" cy="32918"/>
           </a:xfrm>
           <a:prstGeom prst="ellipse">
@@ -10974,7 +10974,7 @@
         </p:nvSpPr>
         <p:spPr>
           <a:xfrm>
-            <a:off x="3531200" y="4073769"/>
+            <a:off x="3689489" y="4073769"/>
             <a:ext cx="32918" cy="32918"/>
           </a:xfrm>
           <a:prstGeom prst="ellipse">
@@ -11018,7 +11018,7 @@
         </p:nvSpPr>
         <p:spPr>
           <a:xfrm>
-            <a:off x="2631636" y="4547860"/>
+            <a:off x="2728126" y="4547860"/>
             <a:ext cx="32918" cy="32918"/>
           </a:xfrm>
           <a:prstGeom prst="ellipse">
@@ -11062,7 +11062,7 @@
         </p:nvSpPr>
         <p:spPr>
           <a:xfrm>
-            <a:off x="2570183" y="4234665"/>
+            <a:off x="2662451" y="4234665"/>
             <a:ext cx="32918" cy="32918"/>
           </a:xfrm>
           <a:prstGeom prst="ellipse">
@@ -11106,7 +11106,7 @@
         </p:nvSpPr>
         <p:spPr>
           <a:xfrm>
-            <a:off x="2570902" y="4901278"/>
+            <a:off x="2663220" y="4901278"/>
             <a:ext cx="32918" cy="32918"/>
           </a:xfrm>
           <a:prstGeom prst="ellipse">
@@ -11150,7 +11150,7 @@
         </p:nvSpPr>
         <p:spPr>
           <a:xfrm>
-            <a:off x="3460996" y="5255006"/>
+            <a:off x="3614463" y="5255006"/>
             <a:ext cx="32918" cy="32918"/>
           </a:xfrm>
           <a:prstGeom prst="ellipse">
@@ -11194,7 +11194,7 @@
         </p:nvSpPr>
         <p:spPr>
           <a:xfrm>
-            <a:off x="2672740" y="4973791"/>
+            <a:off x="2772053" y="4973791"/>
             <a:ext cx="32918" cy="32918"/>
           </a:xfrm>
           <a:prstGeom prst="ellipse">
@@ -11238,7 +11238,7 @@
         </p:nvSpPr>
         <p:spPr>
           <a:xfrm>
-            <a:off x="3306123" y="4082854"/>
+            <a:off x="3448949" y="4082854"/>
             <a:ext cx="32918" cy="32918"/>
           </a:xfrm>
           <a:prstGeom prst="ellipse">
@@ -11282,7 +11282,7 @@
         </p:nvSpPr>
         <p:spPr>
           <a:xfrm>
-            <a:off x="3584836" y="5364626"/>
+            <a:off x="3746810" y="5364626"/>
             <a:ext cx="32918" cy="32918"/>
           </a:xfrm>
           <a:prstGeom prst="ellipse">
@@ -11326,7 +11326,7 @@
         </p:nvSpPr>
         <p:spPr>
           <a:xfrm>
-            <a:off x="2754311" y="5341245"/>
+            <a:off x="2859228" y="5341245"/>
             <a:ext cx="32918" cy="32918"/>
           </a:xfrm>
           <a:prstGeom prst="ellipse">
@@ -11370,7 +11370,7 @@
         </p:nvSpPr>
         <p:spPr>
           <a:xfrm>
-            <a:off x="2978043" y="4618034"/>
+            <a:off x="3098331" y="4618034"/>
             <a:ext cx="32918" cy="32918"/>
           </a:xfrm>
           <a:prstGeom prst="ellipse">
@@ -11414,7 +11414,7 @@
         </p:nvSpPr>
         <p:spPr>
           <a:xfrm>
-            <a:off x="3718871" y="5154615"/>
+            <a:off x="3890054" y="5154615"/>
             <a:ext cx="32918" cy="32918"/>
           </a:xfrm>
           <a:prstGeom prst="ellipse">
@@ -11458,7 +11458,7 @@
         </p:nvSpPr>
         <p:spPr>
           <a:xfrm>
-            <a:off x="2681530" y="4531389"/>
+            <a:off x="2781447" y="4531389"/>
             <a:ext cx="32918" cy="32918"/>
           </a:xfrm>
           <a:prstGeom prst="ellipse">
@@ -11502,7 +11502,7 @@
         </p:nvSpPr>
         <p:spPr>
           <a:xfrm>
-            <a:off x="3124988" y="4387746"/>
+            <a:off x="3255371" y="4387746"/>
             <a:ext cx="32918" cy="32918"/>
           </a:xfrm>
           <a:prstGeom prst="ellipse">
@@ -11546,7 +11546,7 @@
         </p:nvSpPr>
         <p:spPr>
           <a:xfrm>
-            <a:off x="2728267" y="4520960"/>
+            <a:off x="2831134" y="4520960"/>
             <a:ext cx="47548" cy="47548"/>
           </a:xfrm>
           <a:prstGeom prst="ellipse">
@@ -11590,7 +11590,7 @@
         </p:nvSpPr>
         <p:spPr>
           <a:xfrm>
-            <a:off x="3368187" y="4376581"/>
+            <a:off x="3516339" y="4376581"/>
             <a:ext cx="47548" cy="47548"/>
           </a:xfrm>
           <a:prstGeom prst="ellipse">
@@ -11634,7 +11634,7 @@
         </p:nvSpPr>
         <p:spPr>
           <a:xfrm>
-            <a:off x="3163838" y="4579829"/>
+            <a:off x="3297528" y="4579829"/>
             <a:ext cx="47548" cy="47548"/>
           </a:xfrm>
           <a:prstGeom prst="ellipse">
@@ -11678,7 +11678,7 @@
         </p:nvSpPr>
         <p:spPr>
           <a:xfrm>
-            <a:off x="2512294" y="4527223"/>
+            <a:off x="2599876" y="4527223"/>
             <a:ext cx="47548" cy="47548"/>
           </a:xfrm>
           <a:prstGeom prst="ellipse">
@@ -11722,7 +11722,7 @@
         </p:nvSpPr>
         <p:spPr>
           <a:xfrm>
-            <a:off x="3248783" y="4614496"/>
+            <a:off x="3388484" y="4614496"/>
             <a:ext cx="47548" cy="47548"/>
           </a:xfrm>
           <a:prstGeom prst="ellipse">
@@ -11766,7 +11766,7 @@
         </p:nvSpPr>
         <p:spPr>
           <a:xfrm>
-            <a:off x="2568467" y="4842775"/>
+            <a:off x="2660025" y="4842775"/>
             <a:ext cx="47548" cy="47548"/>
           </a:xfrm>
           <a:prstGeom prst="ellipse">
@@ -11810,7 +11810,7 @@
         </p:nvSpPr>
         <p:spPr>
           <a:xfrm>
-            <a:off x="3448677" y="4836312"/>
+            <a:off x="3602525" y="4836312"/>
             <a:ext cx="47548" cy="47548"/>
           </a:xfrm>
           <a:prstGeom prst="ellipse">
@@ -11854,7 +11854,7 @@
         </p:nvSpPr>
         <p:spPr>
           <a:xfrm>
-            <a:off x="2617687" y="4495390"/>
+            <a:off x="2712728" y="4495390"/>
             <a:ext cx="47548" cy="47548"/>
           </a:xfrm>
           <a:prstGeom prst="ellipse">
@@ -11898,7 +11898,7 @@
         </p:nvSpPr>
         <p:spPr>
           <a:xfrm>
-            <a:off x="2538437" y="4743276"/>
+            <a:off x="2627870" y="4743276"/>
             <a:ext cx="47548" cy="47548"/>
           </a:xfrm>
           <a:prstGeom prst="ellipse">
@@ -11942,7 +11942,7 @@
         </p:nvSpPr>
         <p:spPr>
           <a:xfrm>
-            <a:off x="2819077" y="4429725"/>
+            <a:off x="2928370" y="4429725"/>
             <a:ext cx="47548" cy="47548"/>
           </a:xfrm>
           <a:prstGeom prst="ellipse">
@@ -11986,7 +11986,7 @@
         </p:nvSpPr>
         <p:spPr>
           <a:xfrm>
-            <a:off x="3003621" y="4807207"/>
+            <a:off x="3125973" y="4807207"/>
             <a:ext cx="47548" cy="47548"/>
           </a:xfrm>
           <a:prstGeom prst="ellipse">
@@ -12030,7 +12030,7 @@
         </p:nvSpPr>
         <p:spPr>
           <a:xfrm>
-            <a:off x="3485895" y="4492032"/>
+            <a:off x="3642377" y="4492032"/>
             <a:ext cx="47548" cy="47548"/>
           </a:xfrm>
           <a:prstGeom prst="ellipse">
@@ -12074,7 +12074,7 @@
         </p:nvSpPr>
         <p:spPr>
           <a:xfrm>
-            <a:off x="2671890" y="4810953"/>
+            <a:off x="2770767" y="4810953"/>
             <a:ext cx="47548" cy="47548"/>
           </a:xfrm>
           <a:prstGeom prst="ellipse">
@@ -12118,7 +12118,7 @@
         </p:nvSpPr>
         <p:spPr>
           <a:xfrm>
-            <a:off x="3183950" y="4705338"/>
+            <a:off x="3319064" y="4705338"/>
             <a:ext cx="47548" cy="47548"/>
           </a:xfrm>
           <a:prstGeom prst="ellipse">
@@ -12162,7 +12162,7 @@
         </p:nvSpPr>
         <p:spPr>
           <a:xfrm>
-            <a:off x="2599066" y="4394949"/>
+            <a:off x="2692789" y="4394949"/>
             <a:ext cx="47548" cy="47548"/>
           </a:xfrm>
           <a:prstGeom prst="ellipse">
@@ -12206,7 +12206,7 @@
         </p:nvSpPr>
         <p:spPr>
           <a:xfrm>
-            <a:off x="3326922" y="4572519"/>
+            <a:off x="3472153" y="4572519"/>
             <a:ext cx="47548" cy="47548"/>
           </a:xfrm>
           <a:prstGeom prst="ellipse">
@@ -12250,7 +12250,7 @@
         </p:nvSpPr>
         <p:spPr>
           <a:xfrm>
-            <a:off x="2578342" y="4820212"/>
+            <a:off x="2670598" y="4820212"/>
             <a:ext cx="47548" cy="47548"/>
           </a:xfrm>
           <a:prstGeom prst="ellipse">
@@ -12294,7 +12294,7 @@
         </p:nvSpPr>
         <p:spPr>
           <a:xfrm>
-            <a:off x="3261562" y="4754203"/>
+            <a:off x="3402168" y="4754203"/>
             <a:ext cx="47548" cy="47548"/>
           </a:xfrm>
           <a:prstGeom prst="ellipse">
@@ -12338,7 +12338,7 @@
         </p:nvSpPr>
         <p:spPr>
           <a:xfrm>
-            <a:off x="2592113" y="4780564"/>
+            <a:off x="2685344" y="4780564"/>
             <a:ext cx="47548" cy="47548"/>
           </a:xfrm>
           <a:prstGeom prst="ellipse">
@@ -12382,7 +12382,7 @@
         </p:nvSpPr>
         <p:spPr>
           <a:xfrm>
-            <a:off x="2571301" y="4783724"/>
+            <a:off x="2663060" y="4783724"/>
             <a:ext cx="47548" cy="47548"/>
           </a:xfrm>
           <a:prstGeom prst="ellipse">
@@ -12426,7 +12426,7 @@
         </p:nvSpPr>
         <p:spPr>
           <a:xfrm>
-            <a:off x="3041937" y="4530918"/>
+            <a:off x="3167001" y="4530918"/>
             <a:ext cx="47548" cy="47548"/>
           </a:xfrm>
           <a:prstGeom prst="ellipse">
@@ -12470,7 +12470,7 @@
         </p:nvSpPr>
         <p:spPr>
           <a:xfrm>
-            <a:off x="3162639" y="4814573"/>
+            <a:off x="3296244" y="4814573"/>
             <a:ext cx="47548" cy="47548"/>
           </a:xfrm>
           <a:prstGeom prst="ellipse">
@@ -12514,7 +12514,7 @@
         </p:nvSpPr>
         <p:spPr>
           <a:xfrm>
-            <a:off x="2815933" y="4429565"/>
+            <a:off x="2925003" y="4429565"/>
             <a:ext cx="47548" cy="47548"/>
           </a:xfrm>
           <a:prstGeom prst="ellipse">
@@ -12558,7 +12558,7 @@
         </p:nvSpPr>
         <p:spPr>
           <a:xfrm>
-            <a:off x="3130851" y="4482293"/>
+            <a:off x="3262207" y="4482293"/>
             <a:ext cx="47548" cy="47548"/>
           </a:xfrm>
           <a:prstGeom prst="ellipse">
@@ -12602,8 +12602,8 @@
         </p:nvSpPr>
         <p:spPr>
           <a:xfrm>
-            <a:off x="3821166" y="3566160"/>
-            <a:ext cx="1398519" cy="2011680"/>
+            <a:off x="3993220" y="3566160"/>
+            <a:ext cx="1484546" cy="2011680"/>
           </a:xfrm>
           <a:prstGeom prst="rect">
             <a:avLst/>
@@ -12648,8 +12648,8 @@
         </p:nvSpPr>
         <p:spPr>
           <a:xfrm>
-            <a:off x="3839454" y="3584448"/>
-            <a:ext cx="1361943" cy="164592"/>
+            <a:off x="4011508" y="3584448"/>
+            <a:ext cx="1447970" cy="164592"/>
           </a:xfrm>
           <a:prstGeom prst="rect">
             <a:avLst/>
@@ -12684,7 +12684,7 @@
         </p:nvSpPr>
         <p:spPr>
           <a:xfrm>
-            <a:off x="4014915" y="4111566"/>
+            <a:off x="4196385" y="4111566"/>
             <a:ext cx="32918" cy="32918"/>
           </a:xfrm>
           <a:prstGeom prst="ellipse">
@@ -12728,7 +12728,7 @@
         </p:nvSpPr>
         <p:spPr>
           <a:xfrm>
-            <a:off x="3940945" y="4174241"/>
+            <a:off x="4117333" y="4174241"/>
             <a:ext cx="32918" cy="32918"/>
           </a:xfrm>
           <a:prstGeom prst="ellipse">
@@ -12772,7 +12772,7 @@
         </p:nvSpPr>
         <p:spPr>
           <a:xfrm>
-            <a:off x="4268540" y="4334721"/>
+            <a:off x="4467434" y="4334721"/>
             <a:ext cx="32918" cy="32918"/>
           </a:xfrm>
           <a:prstGeom prst="ellipse">
@@ -12816,7 +12816,7 @@
         </p:nvSpPr>
         <p:spPr>
           <a:xfrm>
-            <a:off x="4828914" y="4311335"/>
+            <a:off x="5066305" y="4311335"/>
             <a:ext cx="32918" cy="32918"/>
           </a:xfrm>
           <a:prstGeom prst="ellipse">
@@ -12860,7 +12860,7 @@
         </p:nvSpPr>
         <p:spPr>
           <a:xfrm>
-            <a:off x="4504077" y="4137138"/>
+            <a:off x="4719152" y="4137138"/>
             <a:ext cx="32918" cy="32918"/>
           </a:xfrm>
           <a:prstGeom prst="ellipse">
@@ -12904,7 +12904,7 @@
         </p:nvSpPr>
         <p:spPr>
           <a:xfrm>
-            <a:off x="4312378" y="3888831"/>
+            <a:off x="4514284" y="3888831"/>
             <a:ext cx="32918" cy="32918"/>
           </a:xfrm>
           <a:prstGeom prst="ellipse">
@@ -12948,7 +12948,7 @@
         </p:nvSpPr>
         <p:spPr>
           <a:xfrm>
-            <a:off x="4191474" y="3884452"/>
+            <a:off x="4385074" y="3884452"/>
             <a:ext cx="32918" cy="32918"/>
           </a:xfrm>
           <a:prstGeom prst="ellipse">
@@ -12992,7 +12992,7 @@
         </p:nvSpPr>
         <p:spPr>
           <a:xfrm>
-            <a:off x="4795833" y="4717191"/>
+            <a:off x="5030951" y="4717191"/>
             <a:ext cx="32918" cy="32918"/>
           </a:xfrm>
           <a:prstGeom prst="ellipse">
@@ -13036,7 +13036,7 @@
         </p:nvSpPr>
         <p:spPr>
           <a:xfrm>
-            <a:off x="4115099" y="4598602"/>
+            <a:off x="4303451" y="4598602"/>
             <a:ext cx="32918" cy="32918"/>
           </a:xfrm>
           <a:prstGeom prst="ellipse">
@@ -13080,7 +13080,7 @@
         </p:nvSpPr>
         <p:spPr>
           <a:xfrm>
-            <a:off x="5048232" y="4025809"/>
+            <a:off x="5300691" y="4025809"/>
             <a:ext cx="32918" cy="32918"/>
           </a:xfrm>
           <a:prstGeom prst="ellipse">
@@ -13124,7 +13124,7 @@
         </p:nvSpPr>
         <p:spPr>
           <a:xfrm>
-            <a:off x="4903323" y="4532408"/>
+            <a:off x="5145826" y="4532408"/>
             <a:ext cx="32918" cy="32918"/>
           </a:xfrm>
           <a:prstGeom prst="ellipse">
@@ -13168,7 +13168,7 @@
         </p:nvSpPr>
         <p:spPr>
           <a:xfrm>
-            <a:off x="4497707" y="5157987"/>
+            <a:off x="4712344" y="5157987"/>
             <a:ext cx="32918" cy="32918"/>
           </a:xfrm>
           <a:prstGeom prst="ellipse">
@@ -13212,7 +13212,7 @@
         </p:nvSpPr>
         <p:spPr>
           <a:xfrm>
-            <a:off x="4370087" y="4648230"/>
+            <a:off x="4575957" y="4648230"/>
             <a:ext cx="32918" cy="32918"/>
           </a:xfrm>
           <a:prstGeom prst="ellipse">
@@ -13256,7 +13256,7 @@
         </p:nvSpPr>
         <p:spPr>
           <a:xfrm>
-            <a:off x="4739059" y="5387781"/>
+            <a:off x="4970277" y="5387781"/>
             <a:ext cx="32918" cy="32918"/>
           </a:xfrm>
           <a:prstGeom prst="ellipse">
@@ -13300,7 +13300,7 @@
         </p:nvSpPr>
         <p:spPr>
           <a:xfrm>
-            <a:off x="4306998" y="5154369"/>
+            <a:off x="4508534" y="5154369"/>
             <a:ext cx="32918" cy="32918"/>
           </a:xfrm>
           <a:prstGeom prst="ellipse">
@@ -13344,7 +13344,7 @@
         </p:nvSpPr>
         <p:spPr>
           <a:xfrm>
-            <a:off x="4762831" y="4849210"/>
+            <a:off x="4995682" y="4849210"/>
             <a:ext cx="32918" cy="32918"/>
           </a:xfrm>
           <a:prstGeom prst="ellipse">
@@ -13388,7 +13388,7 @@
         </p:nvSpPr>
         <p:spPr>
           <a:xfrm>
-            <a:off x="4384627" y="4400859"/>
+            <a:off x="4591496" y="4400859"/>
             <a:ext cx="32918" cy="32918"/>
           </a:xfrm>
           <a:prstGeom prst="ellipse">
@@ -13432,7 +13432,7 @@
         </p:nvSpPr>
         <p:spPr>
           <a:xfrm>
-            <a:off x="3945965" y="4062397"/>
+            <a:off x="4122698" y="4062397"/>
             <a:ext cx="32918" cy="32918"/>
           </a:xfrm>
           <a:prstGeom prst="ellipse">
@@ -13476,7 +13476,7 @@
         </p:nvSpPr>
         <p:spPr>
           <a:xfrm>
-            <a:off x="3966419" y="5012294"/>
+            <a:off x="4144557" y="5012294"/>
             <a:ext cx="32918" cy="32918"/>
           </a:xfrm>
           <a:prstGeom prst="ellipse">
@@ -13520,7 +13520,7 @@
         </p:nvSpPr>
         <p:spPr>
           <a:xfrm>
-            <a:off x="4197917" y="4114360"/>
+            <a:off x="4391959" y="4114360"/>
             <a:ext cx="32918" cy="32918"/>
           </a:xfrm>
           <a:prstGeom prst="ellipse">
@@ -13564,7 +13564,7 @@
         </p:nvSpPr>
         <p:spPr>
           <a:xfrm>
-            <a:off x="3983652" y="5168332"/>
+            <a:off x="4162974" y="5168332"/>
             <a:ext cx="32918" cy="32918"/>
           </a:xfrm>
           <a:prstGeom prst="ellipse">
@@ -13608,7 +13608,7 @@
         </p:nvSpPr>
         <p:spPr>
           <a:xfrm>
-            <a:off x="4967959" y="4902943"/>
+            <a:off x="5214903" y="4902943"/>
             <a:ext cx="32918" cy="32918"/>
           </a:xfrm>
           <a:prstGeom prst="ellipse">
@@ -13652,7 +13652,7 @@
         </p:nvSpPr>
         <p:spPr>
           <a:xfrm>
-            <a:off x="4230900" y="4237112"/>
+            <a:off x="4427207" y="4237112"/>
             <a:ext cx="32918" cy="32918"/>
           </a:xfrm>
           <a:prstGeom prst="ellipse">
@@ -13696,7 +13696,7 @@
         </p:nvSpPr>
         <p:spPr>
           <a:xfrm>
-            <a:off x="4244831" y="4574807"/>
+            <a:off x="4442096" y="4574807"/>
             <a:ext cx="32918" cy="32918"/>
           </a:xfrm>
           <a:prstGeom prst="ellipse">
@@ -13740,7 +13740,7 @@
         </p:nvSpPr>
         <p:spPr>
           <a:xfrm>
-            <a:off x="4075124" y="4553622"/>
+            <a:off x="4260730" y="4553622"/>
             <a:ext cx="32918" cy="32918"/>
           </a:xfrm>
           <a:prstGeom prst="ellipse">
@@ -13784,7 +13784,7 @@
         </p:nvSpPr>
         <p:spPr>
           <a:xfrm>
-            <a:off x="4207495" y="5355674"/>
+            <a:off x="4402195" y="5355674"/>
             <a:ext cx="32918" cy="32918"/>
           </a:xfrm>
           <a:prstGeom prst="ellipse">
@@ -13828,7 +13828,7 @@
         </p:nvSpPr>
         <p:spPr>
           <a:xfrm>
-            <a:off x="5095792" y="4711011"/>
+            <a:off x="5351517" y="4711011"/>
             <a:ext cx="32918" cy="32918"/>
           </a:xfrm>
           <a:prstGeom prst="ellipse">
@@ -13872,7 +13872,7 @@
         </p:nvSpPr>
         <p:spPr>
           <a:xfrm>
-            <a:off x="4183958" y="5361706"/>
+            <a:off x="4377041" y="5361706"/>
             <a:ext cx="32918" cy="32918"/>
           </a:xfrm>
           <a:prstGeom prst="ellipse">
@@ -13916,7 +13916,7 @@
         </p:nvSpPr>
         <p:spPr>
           <a:xfrm>
-            <a:off x="4265479" y="4414899"/>
+            <a:off x="4464163" y="4414899"/>
             <a:ext cx="32918" cy="32918"/>
           </a:xfrm>
           <a:prstGeom prst="ellipse">
@@ -13960,7 +13960,7 @@
         </p:nvSpPr>
         <p:spPr>
           <a:xfrm>
-            <a:off x="3879197" y="4453827"/>
+            <a:off x="4051343" y="4453827"/>
             <a:ext cx="32918" cy="32918"/>
           </a:xfrm>
           <a:prstGeom prst="ellipse">
@@ -14004,7 +14004,7 @@
         </p:nvSpPr>
         <p:spPr>
           <a:xfrm>
-            <a:off x="4472214" y="4642133"/>
+            <a:off x="4685101" y="4642133"/>
             <a:ext cx="32918" cy="32918"/>
           </a:xfrm>
           <a:prstGeom prst="ellipse">
@@ -14048,7 +14048,7 @@
         </p:nvSpPr>
         <p:spPr>
           <a:xfrm>
-            <a:off x="4129529" y="4645198"/>
+            <a:off x="4318872" y="4645198"/>
             <a:ext cx="32918" cy="32918"/>
           </a:xfrm>
           <a:prstGeom prst="ellipse">
@@ -14092,7 +14092,7 @@
         </p:nvSpPr>
         <p:spPr>
           <a:xfrm>
-            <a:off x="3884058" y="4271241"/>
+            <a:off x="4056538" y="4271241"/>
             <a:ext cx="32918" cy="32918"/>
           </a:xfrm>
           <a:prstGeom prst="ellipse">
@@ -14136,7 +14136,7 @@
         </p:nvSpPr>
         <p:spPr>
           <a:xfrm>
-            <a:off x="3990249" y="4481629"/>
+            <a:off x="4170024" y="4481629"/>
             <a:ext cx="32918" cy="32918"/>
           </a:xfrm>
           <a:prstGeom prst="ellipse">
@@ -14180,7 +14180,7 @@
         </p:nvSpPr>
         <p:spPr>
           <a:xfrm>
-            <a:off x="3930034" y="3895563"/>
+            <a:off x="4105673" y="3895563"/>
             <a:ext cx="32918" cy="32918"/>
           </a:xfrm>
           <a:prstGeom prst="ellipse">
@@ -14224,7 +14224,7 @@
         </p:nvSpPr>
         <p:spPr>
           <a:xfrm>
-            <a:off x="4258838" y="4222494"/>
+            <a:off x="4457065" y="4222494"/>
             <a:ext cx="32918" cy="32918"/>
           </a:xfrm>
           <a:prstGeom prst="ellipse">
@@ -14268,7 +14268,7 @@
         </p:nvSpPr>
         <p:spPr>
           <a:xfrm>
-            <a:off x="4611135" y="4683211"/>
+            <a:off x="4833565" y="4683211"/>
             <a:ext cx="32918" cy="32918"/>
           </a:xfrm>
           <a:prstGeom prst="ellipse">
@@ -14312,7 +14312,7 @@
         </p:nvSpPr>
         <p:spPr>
           <a:xfrm>
-            <a:off x="4817697" y="4882735"/>
+            <a:off x="5054317" y="4882735"/>
             <a:ext cx="32918" cy="32918"/>
           </a:xfrm>
           <a:prstGeom prst="ellipse">
@@ -14356,7 +14356,7 @@
         </p:nvSpPr>
         <p:spPr>
           <a:xfrm>
-            <a:off x="4774436" y="5227125"/>
+            <a:off x="5008085" y="5227125"/>
             <a:ext cx="32918" cy="32918"/>
           </a:xfrm>
           <a:prstGeom prst="ellipse">
@@ -14400,7 +14400,7 @@
         </p:nvSpPr>
         <p:spPr>
           <a:xfrm>
-            <a:off x="4365617" y="4367566"/>
+            <a:off x="4571180" y="4367566"/>
             <a:ext cx="32918" cy="32918"/>
           </a:xfrm>
           <a:prstGeom prst="ellipse">
@@ -14444,7 +14444,7 @@
         </p:nvSpPr>
         <p:spPr>
           <a:xfrm>
-            <a:off x="5110951" y="4092934"/>
+            <a:off x="5367718" y="4092934"/>
             <a:ext cx="32918" cy="32918"/>
           </a:xfrm>
           <a:prstGeom prst="ellipse">
@@ -14488,7 +14488,7 @@
         </p:nvSpPr>
         <p:spPr>
           <a:xfrm>
-            <a:off x="4784657" y="4860468"/>
+            <a:off x="5019008" y="4860468"/>
             <a:ext cx="32918" cy="32918"/>
           </a:xfrm>
           <a:prstGeom prst="ellipse">
@@ -14532,8 +14532,8 @@
         </p:nvSpPr>
         <p:spPr>
           <a:xfrm>
-            <a:off x="3821166" y="4480560"/>
-            <a:ext cx="1398519" cy="201168"/>
+            <a:off x="3993220" y="4480560"/>
+            <a:ext cx="1484546" cy="201168"/>
           </a:xfrm>
           <a:prstGeom prst="rect">
             <a:avLst/>
@@ -14568,8 +14568,8 @@
         </p:nvSpPr>
         <p:spPr>
           <a:xfrm>
-            <a:off x="5219685" y="3566160"/>
-            <a:ext cx="1398519" cy="2011680"/>
+            <a:off x="5477766" y="3566160"/>
+            <a:ext cx="1484546" cy="2011680"/>
           </a:xfrm>
           <a:prstGeom prst="rect">
             <a:avLst/>
@@ -14614,8 +14614,8 @@
         </p:nvSpPr>
         <p:spPr>
           <a:xfrm>
-            <a:off x="5237973" y="3584448"/>
-            <a:ext cx="1361943" cy="164592"/>
+            <a:off x="5496054" y="3584448"/>
+            <a:ext cx="1447970" cy="164592"/>
           </a:xfrm>
           <a:prstGeom prst="rect">
             <a:avLst/>
@@ -14650,7 +14650,7 @@
         </p:nvSpPr>
         <p:spPr>
           <a:xfrm>
-            <a:off x="5331210" y="5159037"/>
+            <a:off x="5593058" y="5159037"/>
             <a:ext cx="32918" cy="32918"/>
           </a:xfrm>
           <a:prstGeom prst="ellipse">
@@ -14694,7 +14694,7 @@
         </p:nvSpPr>
         <p:spPr>
           <a:xfrm>
-            <a:off x="6393281" y="4835772"/>
+            <a:off x="6728093" y="4835772"/>
             <a:ext cx="32918" cy="32918"/>
           </a:xfrm>
           <a:prstGeom prst="ellipse">
@@ -14738,7 +14738,7 @@
         </p:nvSpPr>
         <p:spPr>
           <a:xfrm>
-            <a:off x="6195318" y="5123175"/>
+            <a:off x="6516530" y="5123175"/>
             <a:ext cx="32918" cy="32918"/>
           </a:xfrm>
           <a:prstGeom prst="ellipse">
@@ -14782,7 +14782,7 @@
         </p:nvSpPr>
         <p:spPr>
           <a:xfrm>
-            <a:off x="5450821" y="4674767"/>
+            <a:off x="5720886" y="4674767"/>
             <a:ext cx="32918" cy="32918"/>
           </a:xfrm>
           <a:prstGeom prst="ellipse">
@@ -14826,7 +14826,7 @@
         </p:nvSpPr>
         <p:spPr>
           <a:xfrm>
-            <a:off x="5907958" y="5158490"/>
+            <a:off x="6209429" y="5158490"/>
             <a:ext cx="32918" cy="32918"/>
           </a:xfrm>
           <a:prstGeom prst="ellipse">
@@ -14870,7 +14870,7 @@
         </p:nvSpPr>
         <p:spPr>
           <a:xfrm>
-            <a:off x="6284007" y="5145233"/>
+            <a:off x="6611312" y="5145233"/>
             <a:ext cx="32918" cy="32918"/>
           </a:xfrm>
           <a:prstGeom prst="ellipse">
@@ -14914,7 +14914,7 @@
         </p:nvSpPr>
         <p:spPr>
           <a:xfrm>
-            <a:off x="6007748" y="5248482"/>
+            <a:off x="6316074" y="5248482"/>
             <a:ext cx="32918" cy="32918"/>
           </a:xfrm>
           <a:prstGeom prst="ellipse">
@@ -14958,7 +14958,7 @@
         </p:nvSpPr>
         <p:spPr>
           <a:xfrm>
-            <a:off x="6131509" y="4938358"/>
+            <a:off x="6448338" y="4938358"/>
             <a:ext cx="32918" cy="32918"/>
           </a:xfrm>
           <a:prstGeom prst="ellipse">
@@ -15002,7 +15002,7 @@
         </p:nvSpPr>
         <p:spPr>
           <a:xfrm>
-            <a:off x="5564313" y="3909035"/>
+            <a:off x="5842175" y="3909035"/>
             <a:ext cx="32918" cy="32918"/>
           </a:xfrm>
           <a:prstGeom prst="ellipse">
@@ -15046,7 +15046,7 @@
         </p:nvSpPr>
         <p:spPr>
           <a:xfrm>
-            <a:off x="5443039" y="4421309"/>
+            <a:off x="5712569" y="4421309"/>
             <a:ext cx="32918" cy="32918"/>
           </a:xfrm>
           <a:prstGeom prst="ellipse">
@@ -15090,7 +15090,7 @@
         </p:nvSpPr>
         <p:spPr>
           <a:xfrm>
-            <a:off x="5407755" y="5159864"/>
+            <a:off x="5674862" y="5159864"/>
             <a:ext cx="32918" cy="32918"/>
           </a:xfrm>
           <a:prstGeom prst="ellipse">
@@ -15134,7 +15134,7 @@
         </p:nvSpPr>
         <p:spPr>
           <a:xfrm>
-            <a:off x="5975774" y="4836448"/>
+            <a:off x="6281903" y="4836448"/>
             <a:ext cx="32918" cy="32918"/>
           </a:xfrm>
           <a:prstGeom prst="ellipse">
@@ -15178,7 +15178,7 @@
         </p:nvSpPr>
         <p:spPr>
           <a:xfrm>
-            <a:off x="6060548" y="4918675"/>
+            <a:off x="6372501" y="4918675"/>
             <a:ext cx="32918" cy="32918"/>
           </a:xfrm>
           <a:prstGeom prst="ellipse">
@@ -15222,7 +15222,7 @@
         </p:nvSpPr>
         <p:spPr>
           <a:xfrm>
-            <a:off x="5889079" y="3865749"/>
+            <a:off x="6189253" y="3865749"/>
             <a:ext cx="32918" cy="32918"/>
           </a:xfrm>
           <a:prstGeom prst="ellipse">
@@ -15266,7 +15266,7 @@
         </p:nvSpPr>
         <p:spPr>
           <a:xfrm>
-            <a:off x="6275266" y="5023760"/>
+            <a:off x="6601971" y="5023760"/>
             <a:ext cx="32918" cy="32918"/>
           </a:xfrm>
           <a:prstGeom prst="ellipse">
@@ -15310,7 +15310,7 @@
         </p:nvSpPr>
         <p:spPr>
           <a:xfrm>
-            <a:off x="5906205" y="4692554"/>
+            <a:off x="6207555" y="4692554"/>
             <a:ext cx="32918" cy="32918"/>
           </a:xfrm>
           <a:prstGeom prst="ellipse">
@@ -15354,7 +15354,7 @@
         </p:nvSpPr>
         <p:spPr>
           <a:xfrm>
-            <a:off x="6101962" y="3963270"/>
+            <a:off x="6416761" y="3963270"/>
             <a:ext cx="32918" cy="32918"/>
           </a:xfrm>
           <a:prstGeom prst="ellipse">
@@ -15398,7 +15398,7 @@
         </p:nvSpPr>
         <p:spPr>
           <a:xfrm>
-            <a:off x="6198995" y="4252626"/>
+            <a:off x="6520460" y="4252626"/>
             <a:ext cx="32918" cy="32918"/>
           </a:xfrm>
           <a:prstGeom prst="ellipse">
@@ -15442,7 +15442,7 @@
         </p:nvSpPr>
         <p:spPr>
           <a:xfrm>
-            <a:off x="5369605" y="4273401"/>
+            <a:off x="5634091" y="4273401"/>
             <a:ext cx="32918" cy="32918"/>
           </a:xfrm>
           <a:prstGeom prst="ellipse">
@@ -15486,7 +15486,7 @@
         </p:nvSpPr>
         <p:spPr>
           <a:xfrm>
-            <a:off x="6189662" y="4179603"/>
+            <a:off x="6510485" y="4179603"/>
             <a:ext cx="32918" cy="32918"/>
           </a:xfrm>
           <a:prstGeom prst="ellipse">
@@ -15530,7 +15530,7 @@
         </p:nvSpPr>
         <p:spPr>
           <a:xfrm>
-            <a:off x="6202802" y="5377357"/>
+            <a:off x="6524528" y="5377357"/>
             <a:ext cx="32918" cy="32918"/>
           </a:xfrm>
           <a:prstGeom prst="ellipse">
@@ -15574,7 +15574,7 @@
         </p:nvSpPr>
         <p:spPr>
           <a:xfrm>
-            <a:off x="5894908" y="4455279"/>
+            <a:off x="6195482" y="4455279"/>
             <a:ext cx="32918" cy="32918"/>
           </a:xfrm>
           <a:prstGeom prst="ellipse">
@@ -15618,7 +15618,7 @@
         </p:nvSpPr>
         <p:spPr>
           <a:xfrm>
-            <a:off x="5876201" y="4923389"/>
+            <a:off x="6175490" y="4923389"/>
             <a:ext cx="32918" cy="32918"/>
           </a:xfrm>
           <a:prstGeom prst="ellipse">
@@ -15662,7 +15662,7 @@
         </p:nvSpPr>
         <p:spPr>
           <a:xfrm>
-            <a:off x="6236789" y="4819670"/>
+            <a:off x="6560850" y="4819670"/>
             <a:ext cx="32918" cy="32918"/>
           </a:xfrm>
           <a:prstGeom prst="ellipse">
@@ -15706,7 +15706,7 @@
         </p:nvSpPr>
         <p:spPr>
           <a:xfrm>
-            <a:off x="6081255" y="3981025"/>
+            <a:off x="6394631" y="3981025"/>
             <a:ext cx="32918" cy="32918"/>
           </a:xfrm>
           <a:prstGeom prst="ellipse">
@@ -15750,7 +15750,7 @@
         </p:nvSpPr>
         <p:spPr>
           <a:xfrm>
-            <a:off x="5460985" y="4255342"/>
+            <a:off x="5731749" y="4255342"/>
             <a:ext cx="32918" cy="32918"/>
           </a:xfrm>
           <a:prstGeom prst="ellipse">
@@ -15794,7 +15794,7 @@
         </p:nvSpPr>
         <p:spPr>
           <a:xfrm>
-            <a:off x="6207045" y="4333807"/>
+            <a:off x="6529063" y="4333807"/>
             <a:ext cx="32918" cy="32918"/>
           </a:xfrm>
           <a:prstGeom prst="ellipse">
@@ -15838,7 +15838,7 @@
         </p:nvSpPr>
         <p:spPr>
           <a:xfrm>
-            <a:off x="5987337" y="3879980"/>
+            <a:off x="6294261" y="3879980"/>
             <a:ext cx="32918" cy="32918"/>
           </a:xfrm>
           <a:prstGeom prst="ellipse">
@@ -15882,7 +15882,7 @@
         </p:nvSpPr>
         <p:spPr>
           <a:xfrm>
-            <a:off x="5352338" y="4278398"/>
+            <a:off x="5615638" y="4278398"/>
             <a:ext cx="32918" cy="32918"/>
           </a:xfrm>
           <a:prstGeom prst="ellipse">
@@ -15926,7 +15926,7 @@
         </p:nvSpPr>
         <p:spPr>
           <a:xfrm>
-            <a:off x="6117868" y="4936585"/>
+            <a:off x="6433759" y="4936585"/>
             <a:ext cx="32918" cy="32918"/>
           </a:xfrm>
           <a:prstGeom prst="ellipse">
@@ -15970,7 +15970,7 @@
         </p:nvSpPr>
         <p:spPr>
           <a:xfrm>
-            <a:off x="6122509" y="4312727"/>
+            <a:off x="6438719" y="4312727"/>
             <a:ext cx="32918" cy="32918"/>
           </a:xfrm>
           <a:prstGeom prst="ellipse">
@@ -16014,7 +16014,7 @@
         </p:nvSpPr>
         <p:spPr>
           <a:xfrm>
-            <a:off x="5923191" y="4582906"/>
+            <a:off x="6225708" y="4582906"/>
             <a:ext cx="32918" cy="32918"/>
           </a:xfrm>
           <a:prstGeom prst="ellipse">
@@ -16058,7 +16058,7 @@
         </p:nvSpPr>
         <p:spPr>
           <a:xfrm>
-            <a:off x="5860334" y="4044807"/>
+            <a:off x="6158533" y="4044807"/>
             <a:ext cx="32918" cy="32918"/>
           </a:xfrm>
           <a:prstGeom prst="ellipse">
@@ -16102,7 +16102,7 @@
         </p:nvSpPr>
         <p:spPr>
           <a:xfrm>
-            <a:off x="6395436" y="4170327"/>
+            <a:off x="6730396" y="4170327"/>
             <a:ext cx="32918" cy="32918"/>
           </a:xfrm>
           <a:prstGeom prst="ellipse">
@@ -16146,7 +16146,7 @@
         </p:nvSpPr>
         <p:spPr>
           <a:xfrm>
-            <a:off x="6501201" y="5315985"/>
+            <a:off x="6843427" y="5315985"/>
             <a:ext cx="32918" cy="32918"/>
           </a:xfrm>
           <a:prstGeom prst="ellipse">
@@ -16190,7 +16190,7 @@
         </p:nvSpPr>
         <p:spPr>
           <a:xfrm>
-            <a:off x="5298297" y="4574057"/>
+            <a:off x="5557884" y="4574057"/>
             <a:ext cx="32918" cy="32918"/>
           </a:xfrm>
           <a:prstGeom prst="ellipse">
@@ -16234,7 +16234,7 @@
         </p:nvSpPr>
         <p:spPr>
           <a:xfrm>
-            <a:off x="6303066" y="5365501"/>
+            <a:off x="6631680" y="5365501"/>
             <a:ext cx="32918" cy="32918"/>
           </a:xfrm>
           <a:prstGeom prst="ellipse">
@@ -16278,7 +16278,7 @@
         </p:nvSpPr>
         <p:spPr>
           <a:xfrm>
-            <a:off x="5839187" y="4278219"/>
+            <a:off x="6135933" y="4278219"/>
             <a:ext cx="32918" cy="32918"/>
           </a:xfrm>
           <a:prstGeom prst="ellipse">
@@ -16322,7 +16322,7 @@
         </p:nvSpPr>
         <p:spPr>
           <a:xfrm>
-            <a:off x="5539139" y="5330493"/>
+            <a:off x="5815271" y="5330493"/>
             <a:ext cx="32918" cy="32918"/>
           </a:xfrm>
           <a:prstGeom prst="ellipse">
@@ -16366,7 +16366,7 @@
         </p:nvSpPr>
         <p:spPr>
           <a:xfrm>
-            <a:off x="5540230" y="4764484"/>
+            <a:off x="5816438" y="4764484"/>
             <a:ext cx="32918" cy="32918"/>
           </a:xfrm>
           <a:prstGeom prst="ellipse">
@@ -16410,7 +16410,7 @@
         </p:nvSpPr>
         <p:spPr>
           <a:xfrm>
-            <a:off x="5453867" y="4675246"/>
+            <a:off x="5724142" y="4675246"/>
             <a:ext cx="32918" cy="32918"/>
           </a:xfrm>
           <a:prstGeom prst="ellipse">
@@ -16454,7 +16454,7 @@
         </p:nvSpPr>
         <p:spPr>
           <a:xfrm>
-            <a:off x="6469413" y="4066728"/>
+            <a:off x="6809456" y="4066728"/>
             <a:ext cx="32918" cy="32918"/>
           </a:xfrm>
           <a:prstGeom prst="ellipse">
@@ -16498,7 +16498,7 @@
         </p:nvSpPr>
         <p:spPr>
           <a:xfrm>
-            <a:off x="6284438" y="4612797"/>
+            <a:off x="6613080" y="4612797"/>
             <a:ext cx="47548" cy="47548"/>
           </a:xfrm>
           <a:prstGeom prst="ellipse">
@@ -16542,7 +16542,7 @@
         </p:nvSpPr>
         <p:spPr>
           <a:xfrm>
-            <a:off x="6365455" y="4706747"/>
+            <a:off x="6699830" y="4706747"/>
             <a:ext cx="47548" cy="47548"/>
           </a:xfrm>
           <a:prstGeom prst="ellipse">
@@ -16586,7 +16586,7 @@
         </p:nvSpPr>
         <p:spPr>
           <a:xfrm>
-            <a:off x="5568629" y="4800589"/>
+            <a:off x="5846616" y="4800589"/>
             <a:ext cx="47548" cy="47548"/>
           </a:xfrm>
           <a:prstGeom prst="ellipse">
@@ -16630,7 +16630,7 @@
         </p:nvSpPr>
         <p:spPr>
           <a:xfrm>
-            <a:off x="5878322" y="4379165"/>
+            <a:off x="6178224" y="4379165"/>
             <a:ext cx="47548" cy="47548"/>
           </a:xfrm>
           <a:prstGeom prst="ellipse">
@@ -16674,7 +16674,7 @@
         </p:nvSpPr>
         <p:spPr>
           <a:xfrm>
-            <a:off x="5291715" y="4604567"/>
+            <a:off x="5550105" y="4604567"/>
             <a:ext cx="47548" cy="47548"/>
           </a:xfrm>
           <a:prstGeom prst="ellipse">
@@ -16718,7 +16718,7 @@
         </p:nvSpPr>
         <p:spPr>
           <a:xfrm>
-            <a:off x="5835312" y="4512958"/>
+            <a:off x="6132171" y="4512958"/>
             <a:ext cx="47548" cy="47548"/>
           </a:xfrm>
           <a:prstGeom prst="ellipse">
@@ -16762,7 +16762,7 @@
         </p:nvSpPr>
         <p:spPr>
           <a:xfrm>
-            <a:off x="5458400" y="4533240"/>
+            <a:off x="5728585" y="4533240"/>
             <a:ext cx="47548" cy="47548"/>
           </a:xfrm>
           <a:prstGeom prst="ellipse">
@@ -16806,7 +16806,7 @@
         </p:nvSpPr>
         <p:spPr>
           <a:xfrm>
-            <a:off x="5671587" y="4772840"/>
+            <a:off x="5956860" y="4772840"/>
             <a:ext cx="47548" cy="47548"/>
           </a:xfrm>
           <a:prstGeom prst="ellipse">
@@ -16850,7 +16850,7 @@
         </p:nvSpPr>
         <p:spPr>
           <a:xfrm>
-            <a:off x="5289467" y="4729631"/>
+            <a:off x="5547698" y="4729631"/>
             <a:ext cx="47548" cy="47548"/>
           </a:xfrm>
           <a:prstGeom prst="ellipse">
@@ -16894,7 +16894,7 @@
         </p:nvSpPr>
         <p:spPr>
           <a:xfrm>
-            <a:off x="6307406" y="4425131"/>
+            <a:off x="6637673" y="4425131"/>
             <a:ext cx="47548" cy="47548"/>
           </a:xfrm>
           <a:prstGeom prst="ellipse">
@@ -16938,7 +16938,7 @@
         </p:nvSpPr>
         <p:spPr>
           <a:xfrm>
-            <a:off x="6413517" y="4711424"/>
+            <a:off x="6751293" y="4711424"/>
             <a:ext cx="47548" cy="47548"/>
           </a:xfrm>
           <a:prstGeom prst="ellipse">
@@ -16982,7 +16982,7 @@
         </p:nvSpPr>
         <p:spPr>
           <a:xfrm>
-            <a:off x="6383330" y="4507107"/>
+            <a:off x="6718970" y="4507107"/>
             <a:ext cx="47548" cy="47548"/>
           </a:xfrm>
           <a:prstGeom prst="ellipse">
@@ -17026,7 +17026,7 @@
         </p:nvSpPr>
         <p:spPr>
           <a:xfrm>
-            <a:off x="5739838" y="4556868"/>
+            <a:off x="6029940" y="4556868"/>
             <a:ext cx="47548" cy="47548"/>
           </a:xfrm>
           <a:prstGeom prst="ellipse">
@@ -17070,7 +17070,7 @@
         </p:nvSpPr>
         <p:spPr>
           <a:xfrm>
-            <a:off x="6501522" y="4651630"/>
+            <a:off x="6845526" y="4651630"/>
             <a:ext cx="47548" cy="47548"/>
           </a:xfrm>
           <a:prstGeom prst="ellipse">
@@ -17114,7 +17114,7 @@
         </p:nvSpPr>
         <p:spPr>
           <a:xfrm>
-            <a:off x="5725843" y="4573840"/>
+            <a:off x="6014955" y="4573840"/>
             <a:ext cx="47548" cy="47548"/>
           </a:xfrm>
           <a:prstGeom prst="ellipse">
@@ -17158,7 +17158,7 @@
         </p:nvSpPr>
         <p:spPr>
           <a:xfrm>
-            <a:off x="5621840" y="4390479"/>
+            <a:off x="5903592" y="4390479"/>
             <a:ext cx="47548" cy="47548"/>
           </a:xfrm>
           <a:prstGeom prst="ellipse">
@@ -17202,7 +17202,7 @@
         </p:nvSpPr>
         <p:spPr>
           <a:xfrm>
-            <a:off x="5410993" y="4770158"/>
+            <a:off x="5677824" y="4770158"/>
             <a:ext cx="47548" cy="47548"/>
           </a:xfrm>
           <a:prstGeom prst="ellipse">
@@ -17246,7 +17246,7 @@
         </p:nvSpPr>
         <p:spPr>
           <a:xfrm>
-            <a:off x="5634565" y="4818880"/>
+            <a:off x="5917217" y="4818880"/>
             <a:ext cx="47548" cy="47548"/>
           </a:xfrm>
           <a:prstGeom prst="ellipse">
@@ -17290,7 +17290,7 @@
         </p:nvSpPr>
         <p:spPr>
           <a:xfrm>
-            <a:off x="5590439" y="4495469"/>
+            <a:off x="5869969" y="4495469"/>
             <a:ext cx="47548" cy="47548"/>
           </a:xfrm>
           <a:prstGeom prst="ellipse">
@@ -17334,7 +17334,7 @@
         </p:nvSpPr>
         <p:spPr>
           <a:xfrm>
-            <a:off x="5908497" y="4458835"/>
+            <a:off x="6210535" y="4458835"/>
             <a:ext cx="47548" cy="47548"/>
           </a:xfrm>
           <a:prstGeom prst="ellipse">
@@ -17378,7 +17378,7 @@
         </p:nvSpPr>
         <p:spPr>
           <a:xfrm>
-            <a:off x="5741208" y="4828814"/>
+            <a:off x="6031408" y="4828814"/>
             <a:ext cx="47548" cy="47548"/>
           </a:xfrm>
           <a:prstGeom prst="ellipse">
@@ -17422,7 +17422,7 @@
         </p:nvSpPr>
         <p:spPr>
           <a:xfrm>
-            <a:off x="6362299" y="4759192"/>
+            <a:off x="6696451" y="4759192"/>
             <a:ext cx="47548" cy="47548"/>
           </a:xfrm>
           <a:prstGeom prst="ellipse">
@@ -17466,8 +17466,8 @@
         </p:nvSpPr>
         <p:spPr>
           <a:xfrm>
-            <a:off x="6618204" y="3566160"/>
-            <a:ext cx="1398523" cy="2011680"/>
+            <a:off x="6962312" y="3566160"/>
+            <a:ext cx="1484549" cy="2011680"/>
           </a:xfrm>
           <a:prstGeom prst="rect">
             <a:avLst/>
@@ -17512,8 +17512,8 @@
         </p:nvSpPr>
         <p:spPr>
           <a:xfrm>
-            <a:off x="6636492" y="3584448"/>
-            <a:ext cx="1361947" cy="164592"/>
+            <a:off x="6980600" y="3584448"/>
+            <a:ext cx="1447973" cy="164592"/>
           </a:xfrm>
           <a:prstGeom prst="rect">
             <a:avLst/>
@@ -17548,7 +17548,7 @@
         </p:nvSpPr>
         <p:spPr>
           <a:xfrm>
-            <a:off x="7464916" y="5280496"/>
+            <a:off x="7863298" y="5280496"/>
             <a:ext cx="32918" cy="32918"/>
           </a:xfrm>
           <a:prstGeom prst="ellipse">
@@ -17592,7 +17592,7 @@
         </p:nvSpPr>
         <p:spPr>
           <a:xfrm>
-            <a:off x="7852858" y="4714361"/>
+            <a:off x="8277891" y="4714361"/>
             <a:ext cx="32918" cy="32918"/>
           </a:xfrm>
           <a:prstGeom prst="ellipse">
@@ -17636,7 +17636,7 @@
         </p:nvSpPr>
         <p:spPr>
           <a:xfrm>
-            <a:off x="7575959" y="3937506"/>
+            <a:off x="7981969" y="3937506"/>
             <a:ext cx="32918" cy="32918"/>
           </a:xfrm>
           <a:prstGeom prst="ellipse">
@@ -17680,7 +17680,7 @@
         </p:nvSpPr>
         <p:spPr>
           <a:xfrm>
-            <a:off x="7591962" y="4561450"/>
+            <a:off x="7999072" y="4561450"/>
             <a:ext cx="32918" cy="32918"/>
           </a:xfrm>
           <a:prstGeom prst="ellipse">
@@ -17724,7 +17724,7 @@
         </p:nvSpPr>
         <p:spPr>
           <a:xfrm>
-            <a:off x="7617402" y="4862444"/>
+            <a:off x="8026259" y="4862444"/>
             <a:ext cx="32918" cy="32918"/>
           </a:xfrm>
           <a:prstGeom prst="ellipse">
@@ -17768,7 +17768,7 @@
         </p:nvSpPr>
         <p:spPr>
           <a:xfrm>
-            <a:off x="7033292" y="3936730"/>
+            <a:off x="7402021" y="3936730"/>
             <a:ext cx="32918" cy="32918"/>
           </a:xfrm>
           <a:prstGeom prst="ellipse">
@@ -17812,7 +17812,7 @@
         </p:nvSpPr>
         <p:spPr>
           <a:xfrm>
-            <a:off x="7835424" y="4058499"/>
+            <a:off x="8259259" y="4058499"/>
             <a:ext cx="32918" cy="32918"/>
           </a:xfrm>
           <a:prstGeom prst="ellipse">
@@ -17856,7 +17856,7 @@
         </p:nvSpPr>
         <p:spPr>
           <a:xfrm>
-            <a:off x="7266174" y="4394814"/>
+            <a:off x="7650902" y="4394814"/>
             <a:ext cx="32918" cy="32918"/>
           </a:xfrm>
           <a:prstGeom prst="ellipse">
@@ -17900,7 +17900,7 @@
         </p:nvSpPr>
         <p:spPr>
           <a:xfrm>
-            <a:off x="7047772" y="5009408"/>
+            <a:off x="7417496" y="5009408"/>
             <a:ext cx="32918" cy="32918"/>
           </a:xfrm>
           <a:prstGeom prst="ellipse">
@@ -17944,7 +17944,7 @@
         </p:nvSpPr>
         <p:spPr>
           <a:xfrm>
-            <a:off x="7897433" y="4265024"/>
+            <a:off x="8325528" y="4265024"/>
             <a:ext cx="32918" cy="32918"/>
           </a:xfrm>
           <a:prstGeom prst="ellipse">
@@ -17988,7 +17988,7 @@
         </p:nvSpPr>
         <p:spPr>
           <a:xfrm>
-            <a:off x="7496346" y="4328240"/>
+            <a:off x="7896887" y="4328240"/>
             <a:ext cx="32918" cy="32918"/>
           </a:xfrm>
           <a:prstGeom prst="ellipse">
@@ -18032,7 +18032,7 @@
         </p:nvSpPr>
         <p:spPr>
           <a:xfrm>
-            <a:off x="7372785" y="4473633"/>
+            <a:off x="7764837" y="4473633"/>
             <a:ext cx="32918" cy="32918"/>
           </a:xfrm>
           <a:prstGeom prst="ellipse">
@@ -18076,7 +18076,7 @@
         </p:nvSpPr>
         <p:spPr>
           <a:xfrm>
-            <a:off x="6884433" y="4111889"/>
+            <a:off x="7242936" y="4111889"/>
             <a:ext cx="32918" cy="32918"/>
           </a:xfrm>
           <a:prstGeom prst="ellipse">
@@ -18120,7 +18120,7 @@
         </p:nvSpPr>
         <p:spPr>
           <a:xfrm>
-            <a:off x="6935198" y="5268893"/>
+            <a:off x="7297189" y="5268893"/>
             <a:ext cx="32918" cy="32918"/>
           </a:xfrm>
           <a:prstGeom prst="ellipse">
@@ -18164,7 +18164,7 @@
         </p:nvSpPr>
         <p:spPr>
           <a:xfrm>
-            <a:off x="7297344" y="4202621"/>
+            <a:off x="7684214" y="4202621"/>
             <a:ext cx="32918" cy="32918"/>
           </a:xfrm>
           <a:prstGeom prst="ellipse">
@@ -18208,7 +18208,7 @@
         </p:nvSpPr>
         <p:spPr>
           <a:xfrm>
-            <a:off x="7809732" y="5409597"/>
+            <a:off x="8231802" y="5409597"/>
             <a:ext cx="32918" cy="32918"/>
           </a:xfrm>
           <a:prstGeom prst="ellipse">
@@ -18252,7 +18252,7 @@
         </p:nvSpPr>
         <p:spPr>
           <a:xfrm>
-            <a:off x="7238346" y="4077596"/>
+            <a:off x="7621162" y="4077596"/>
             <a:ext cx="32918" cy="32918"/>
           </a:xfrm>
           <a:prstGeom prst="ellipse">
@@ -18296,7 +18296,7 @@
         </p:nvSpPr>
         <p:spPr>
           <a:xfrm>
-            <a:off x="6915832" y="4001610"/>
+            <a:off x="7276492" y="4001610"/>
             <a:ext cx="32918" cy="32918"/>
           </a:xfrm>
           <a:prstGeom prst="ellipse">
@@ -18340,7 +18340,7 @@
         </p:nvSpPr>
         <p:spPr>
           <a:xfrm>
-            <a:off x="7103099" y="4002201"/>
+            <a:off x="7476624" y="4002201"/>
             <a:ext cx="32918" cy="32918"/>
           </a:xfrm>
           <a:prstGeom prst="ellipse">
@@ -18384,7 +18384,7 @@
         </p:nvSpPr>
         <p:spPr>
           <a:xfrm>
-            <a:off x="6974335" y="4262208"/>
+            <a:off x="7339014" y="4262208"/>
             <a:ext cx="32918" cy="32918"/>
           </a:xfrm>
           <a:prstGeom prst="ellipse">
@@ -18428,7 +18428,7 @@
         </p:nvSpPr>
         <p:spPr>
           <a:xfrm>
-            <a:off x="7388183" y="5239811"/>
+            <a:off x="7781293" y="5239811"/>
             <a:ext cx="32918" cy="32918"/>
           </a:xfrm>
           <a:prstGeom prst="ellipse">
@@ -18472,7 +18472,7 @@
         </p:nvSpPr>
         <p:spPr>
           <a:xfrm>
-            <a:off x="7613632" y="4502257"/>
+            <a:off x="8022230" y="4502257"/>
             <a:ext cx="32918" cy="32918"/>
           </a:xfrm>
           <a:prstGeom prst="ellipse">
@@ -18516,7 +18516,7 @@
         </p:nvSpPr>
         <p:spPr>
           <a:xfrm>
-            <a:off x="7193169" y="4675405"/>
+            <a:off x="7572882" y="4675405"/>
             <a:ext cx="32918" cy="32918"/>
           </a:xfrm>
           <a:prstGeom prst="ellipse">
@@ -18560,7 +18560,7 @@
         </p:nvSpPr>
         <p:spPr>
           <a:xfrm>
-            <a:off x="7146815" y="4386326"/>
+            <a:off x="7523343" y="4386326"/>
             <a:ext cx="32918" cy="32918"/>
           </a:xfrm>
           <a:prstGeom prst="ellipse">
@@ -18604,7 +18604,7 @@
         </p:nvSpPr>
         <p:spPr>
           <a:xfrm>
-            <a:off x="6752609" y="4291990"/>
+            <a:off x="7102055" y="4291990"/>
             <a:ext cx="32918" cy="32918"/>
           </a:xfrm>
           <a:prstGeom prst="ellipse">
@@ -18648,7 +18648,7 @@
         </p:nvSpPr>
         <p:spPr>
           <a:xfrm>
-            <a:off x="7886650" y="4056265"/>
+            <a:off x="8314004" y="4056265"/>
             <a:ext cx="32918" cy="32918"/>
           </a:xfrm>
           <a:prstGeom prst="ellipse">
@@ -18692,7 +18692,7 @@
         </p:nvSpPr>
         <p:spPr>
           <a:xfrm>
-            <a:off x="7305258" y="4839339"/>
+            <a:off x="7692671" y="4839339"/>
             <a:ext cx="32918" cy="32918"/>
           </a:xfrm>
           <a:prstGeom prst="ellipse">
@@ -18736,7 +18736,7 @@
         </p:nvSpPr>
         <p:spPr>
           <a:xfrm>
-            <a:off x="7755388" y="4196307"/>
+            <a:off x="8173724" y="4196307"/>
             <a:ext cx="32918" cy="32918"/>
           </a:xfrm>
           <a:prstGeom prst="ellipse">
@@ -18780,7 +18780,7 @@
         </p:nvSpPr>
         <p:spPr>
           <a:xfrm>
-            <a:off x="7014274" y="4246813"/>
+            <a:off x="7381697" y="4246813"/>
             <a:ext cx="32918" cy="32918"/>
           </a:xfrm>
           <a:prstGeom prst="ellipse">
@@ -18824,7 +18824,7 @@
         </p:nvSpPr>
         <p:spPr>
           <a:xfrm>
-            <a:off x="7175480" y="4553674"/>
+            <a:off x="7553977" y="4553674"/>
             <a:ext cx="32918" cy="32918"/>
           </a:xfrm>
           <a:prstGeom prst="ellipse">
@@ -18868,7 +18868,7 @@
         </p:nvSpPr>
         <p:spPr>
           <a:xfrm>
-            <a:off x="7869443" y="5179858"/>
+            <a:off x="8295615" y="5179858"/>
             <a:ext cx="32918" cy="32918"/>
           </a:xfrm>
           <a:prstGeom prst="ellipse">
@@ -18912,7 +18912,7 @@
         </p:nvSpPr>
         <p:spPr>
           <a:xfrm>
-            <a:off x="7767947" y="3894501"/>
+            <a:off x="8187146" y="3894501"/>
             <a:ext cx="32918" cy="32918"/>
           </a:xfrm>
           <a:prstGeom prst="ellipse">
@@ -18956,7 +18956,7 @@
         </p:nvSpPr>
         <p:spPr>
           <a:xfrm>
-            <a:off x="6715272" y="4963518"/>
+            <a:off x="7062154" y="4963518"/>
             <a:ext cx="32918" cy="32918"/>
           </a:xfrm>
           <a:prstGeom prst="ellipse">
@@ -19000,7 +19000,7 @@
         </p:nvSpPr>
         <p:spPr>
           <a:xfrm>
-            <a:off x="7796505" y="4596283"/>
+            <a:off x="8217666" y="4596283"/>
             <a:ext cx="32918" cy="32918"/>
           </a:xfrm>
           <a:prstGeom prst="ellipse">
@@ -19044,7 +19044,7 @@
         </p:nvSpPr>
         <p:spPr>
           <a:xfrm>
-            <a:off x="7410170" y="3860874"/>
+            <a:off x="7804791" y="3860874"/>
             <a:ext cx="32918" cy="32918"/>
           </a:xfrm>
           <a:prstGeom prst="ellipse">
@@ -19088,7 +19088,7 @@
         </p:nvSpPr>
         <p:spPr>
           <a:xfrm>
-            <a:off x="7165167" y="5301331"/>
+            <a:off x="7542956" y="5301331"/>
             <a:ext cx="32918" cy="32918"/>
           </a:xfrm>
           <a:prstGeom prst="ellipse">
@@ -19132,7 +19132,7 @@
         </p:nvSpPr>
         <p:spPr>
           <a:xfrm>
-            <a:off x="7708715" y="5190396"/>
+            <a:off x="8123845" y="5190396"/>
             <a:ext cx="32918" cy="32918"/>
           </a:xfrm>
           <a:prstGeom prst="ellipse">
@@ -19176,7 +19176,7 @@
         </p:nvSpPr>
         <p:spPr>
           <a:xfrm>
-            <a:off x="7892355" y="4246831"/>
+            <a:off x="8320101" y="4246831"/>
             <a:ext cx="32918" cy="32918"/>
           </a:xfrm>
           <a:prstGeom prst="ellipse">
@@ -19220,7 +19220,7 @@
         </p:nvSpPr>
         <p:spPr>
           <a:xfrm>
-            <a:off x="6811446" y="4100575"/>
+            <a:off x="7164935" y="4100575"/>
             <a:ext cx="32918" cy="32918"/>
           </a:xfrm>
           <a:prstGeom prst="ellipse">
@@ -19264,7 +19264,7 @@
         </p:nvSpPr>
         <p:spPr>
           <a:xfrm>
-            <a:off x="7329013" y="4920869"/>
+            <a:off x="7718058" y="4920869"/>
             <a:ext cx="32918" cy="32918"/>
           </a:xfrm>
           <a:prstGeom prst="ellipse">
@@ -19308,7 +19308,7 @@
         </p:nvSpPr>
         <p:spPr>
           <a:xfrm>
-            <a:off x="7853849" y="4982520"/>
+            <a:off x="8278950" y="4982520"/>
             <a:ext cx="32918" cy="32918"/>
           </a:xfrm>
           <a:prstGeom prst="ellipse">
@@ -19352,7 +19352,7 @@
         </p:nvSpPr>
         <p:spPr>
           <a:xfrm>
-            <a:off x="7485518" y="5049464"/>
+            <a:off x="7885315" y="5049464"/>
             <a:ext cx="32918" cy="32918"/>
           </a:xfrm>
           <a:prstGeom prst="ellipse">
@@ -19396,7 +19396,7 @@
         </p:nvSpPr>
         <p:spPr>
           <a:xfrm>
-            <a:off x="7241813" y="4533460"/>
+            <a:off x="7625263" y="4533460"/>
             <a:ext cx="47548" cy="47548"/>
           </a:xfrm>
           <a:prstGeom prst="ellipse">
@@ -19440,7 +19440,7 @@
         </p:nvSpPr>
         <p:spPr>
           <a:xfrm>
-            <a:off x="6733944" y="4737748"/>
+            <a:off x="7081454" y="4737748"/>
             <a:ext cx="47548" cy="47548"/>
           </a:xfrm>
           <a:prstGeom prst="ellipse">
@@ -19484,7 +19484,7 @@
         </p:nvSpPr>
         <p:spPr>
           <a:xfrm>
-            <a:off x="6968600" y="4859562"/>
+            <a:off x="7332716" y="4859562"/>
             <a:ext cx="47548" cy="47548"/>
           </a:xfrm>
           <a:prstGeom prst="ellipse">
@@ -19528,7 +19528,7 @@
         </p:nvSpPr>
         <p:spPr>
           <a:xfrm>
-            <a:off x="7470574" y="4314195"/>
+            <a:off x="7870212" y="4314195"/>
             <a:ext cx="47548" cy="47548"/>
           </a:xfrm>
           <a:prstGeom prst="ellipse">
@@ -19572,7 +19572,7 @@
         </p:nvSpPr>
         <p:spPr>
           <a:xfrm>
-            <a:off x="6841432" y="4268179"/>
+            <a:off x="7196548" y="4268179"/>
             <a:ext cx="47548" cy="47548"/>
           </a:xfrm>
           <a:prstGeom prst="ellipse">
@@ -19616,7 +19616,7 @@
         </p:nvSpPr>
         <p:spPr>
           <a:xfrm>
-            <a:off x="7459372" y="4663647"/>
+            <a:off x="7858218" y="4663647"/>
             <a:ext cx="47548" cy="47548"/>
           </a:xfrm>
           <a:prstGeom prst="ellipse">
@@ -19660,7 +19660,7 @@
         </p:nvSpPr>
         <p:spPr>
           <a:xfrm>
-            <a:off x="6822183" y="4107577"/>
+            <a:off x="7175937" y="4107577"/>
             <a:ext cx="47548" cy="47548"/>
           </a:xfrm>
           <a:prstGeom prst="ellipse">
@@ -19704,7 +19704,7 @@
         </p:nvSpPr>
         <p:spPr>
           <a:xfrm>
-            <a:off x="7323397" y="4561245"/>
+            <a:off x="7712620" y="4561245"/>
             <a:ext cx="47548" cy="47548"/>
           </a:xfrm>
           <a:prstGeom prst="ellipse">
@@ -19748,7 +19748,7 @@
         </p:nvSpPr>
         <p:spPr>
           <a:xfrm>
-            <a:off x="7157639" y="4243208"/>
+            <a:off x="7535132" y="4243208"/>
             <a:ext cx="47548" cy="47548"/>
           </a:xfrm>
           <a:prstGeom prst="ellipse">
@@ -19792,7 +19792,7 @@
         </p:nvSpPr>
         <p:spPr>
           <a:xfrm>
-            <a:off x="7416545" y="4054566"/>
+            <a:off x="7812360" y="4054566"/>
             <a:ext cx="47548" cy="47548"/>
           </a:xfrm>
           <a:prstGeom prst="ellipse">
@@ -19836,7 +19836,7 @@
         </p:nvSpPr>
         <p:spPr>
           <a:xfrm>
-            <a:off x="7052412" y="4453081"/>
+            <a:off x="7422458" y="4453081"/>
             <a:ext cx="47548" cy="47548"/>
           </a:xfrm>
           <a:prstGeom prst="ellipse">
@@ -19880,7 +19880,7 @@
         </p:nvSpPr>
         <p:spPr>
           <a:xfrm>
-            <a:off x="7851598" y="4615844"/>
+            <a:off x="8278200" y="4615844"/>
             <a:ext cx="47548" cy="47548"/>
           </a:xfrm>
           <a:prstGeom prst="ellipse">
@@ -19924,7 +19924,7 @@
         </p:nvSpPr>
         <p:spPr>
           <a:xfrm>
-            <a:off x="7760223" y="4466016"/>
+            <a:off x="8180359" y="4466016"/>
             <a:ext cx="47548" cy="47548"/>
           </a:xfrm>
           <a:prstGeom prst="ellipse">
@@ -19968,7 +19968,7 @@
         </p:nvSpPr>
         <p:spPr>
           <a:xfrm>
-            <a:off x="6971264" y="4263987"/>
+            <a:off x="7335568" y="4263987"/>
             <a:ext cx="47548" cy="47548"/>
           </a:xfrm>
           <a:prstGeom prst="ellipse">
@@ -20012,7 +20012,7 @@
         </p:nvSpPr>
         <p:spPr>
           <a:xfrm>
-            <a:off x="7853633" y="4669021"/>
+            <a:off x="8280379" y="4669021"/>
             <a:ext cx="47548" cy="47548"/>
           </a:xfrm>
           <a:prstGeom prst="ellipse">
@@ -20056,7 +20056,7 @@
         </p:nvSpPr>
         <p:spPr>
           <a:xfrm>
-            <a:off x="7059556" y="4064591"/>
+            <a:off x="7430108" y="4064591"/>
             <a:ext cx="47548" cy="47548"/>
           </a:xfrm>
           <a:prstGeom prst="ellipse">
@@ -20100,7 +20100,7 @@
         </p:nvSpPr>
         <p:spPr>
           <a:xfrm>
-            <a:off x="7291637" y="4642299"/>
+            <a:off x="7678612" y="4642299"/>
             <a:ext cx="47548" cy="47548"/>
           </a:xfrm>
           <a:prstGeom prst="ellipse">
@@ -20144,7 +20144,7 @@
         </p:nvSpPr>
         <p:spPr>
           <a:xfrm>
-            <a:off x="7196459" y="4273013"/>
+            <a:off x="7576699" y="4273013"/>
             <a:ext cx="47548" cy="47548"/>
           </a:xfrm>
           <a:prstGeom prst="ellipse">
@@ -20188,7 +20188,7 @@
         </p:nvSpPr>
         <p:spPr>
           <a:xfrm>
-            <a:off x="7497135" y="4864201"/>
+            <a:off x="7898653" y="4864201"/>
             <a:ext cx="47548" cy="47548"/>
           </a:xfrm>
           <a:prstGeom prst="ellipse">
@@ -20232,7 +20232,7 @@
         </p:nvSpPr>
         <p:spPr>
           <a:xfrm>
-            <a:off x="6961560" y="4075487"/>
+            <a:off x="7325178" y="4075487"/>
             <a:ext cx="47548" cy="47548"/>
           </a:xfrm>
           <a:prstGeom prst="ellipse">
@@ -20276,7 +20276,7 @@
         </p:nvSpPr>
         <p:spPr>
           <a:xfrm>
-            <a:off x="7096820" y="4417557"/>
+            <a:off x="7470009" y="4417557"/>
             <a:ext cx="47548" cy="47548"/>
           </a:xfrm>
           <a:prstGeom prst="ellipse">
@@ -20320,7 +20320,7 @@
         </p:nvSpPr>
         <p:spPr>
           <a:xfrm>
-            <a:off x="7515627" y="4220634"/>
+            <a:off x="7918453" y="4220634"/>
             <a:ext cx="47548" cy="47548"/>
           </a:xfrm>
           <a:prstGeom prst="ellipse">
@@ -20364,7 +20364,7 @@
         </p:nvSpPr>
         <p:spPr>
           <a:xfrm>
-            <a:off x="7654815" y="4699537"/>
+            <a:off x="8067491" y="4699537"/>
             <a:ext cx="47548" cy="47548"/>
           </a:xfrm>
           <a:prstGeom prst="ellipse">
@@ -20408,7 +20408,7 @@
         </p:nvSpPr>
         <p:spPr>
           <a:xfrm>
-            <a:off x="7299621" y="4226953"/>
+            <a:off x="7687162" y="4226953"/>
             <a:ext cx="47548" cy="47548"/>
           </a:xfrm>
           <a:prstGeom prst="ellipse">
@@ -20452,7 +20452,7 @@
         </p:nvSpPr>
         <p:spPr>
           <a:xfrm>
-            <a:off x="7864871" y="4321218"/>
+            <a:off x="8292413" y="4321218"/>
             <a:ext cx="47548" cy="47548"/>
           </a:xfrm>
           <a:prstGeom prst="ellipse">
@@ -20496,7 +20496,7 @@
         </p:nvSpPr>
         <p:spPr>
           <a:xfrm>
-            <a:off x="7682702" y="4249604"/>
+            <a:off x="8097352" y="4249604"/>
             <a:ext cx="47548" cy="47548"/>
           </a:xfrm>
           <a:prstGeom prst="ellipse">
@@ -20540,7 +20540,7 @@
         </p:nvSpPr>
         <p:spPr>
           <a:xfrm>
-            <a:off x="6955065" y="4718427"/>
+            <a:off x="7318223" y="4718427"/>
             <a:ext cx="47548" cy="47548"/>
           </a:xfrm>
           <a:prstGeom prst="ellipse">
@@ -20584,7 +20584,7 @@
         </p:nvSpPr>
         <p:spPr>
           <a:xfrm>
-            <a:off x="7044403" y="4887893"/>
+            <a:off x="7413882" y="4887893"/>
             <a:ext cx="47548" cy="47548"/>
           </a:xfrm>
           <a:prstGeom prst="ellipse">
@@ -20628,7 +20628,7 @@
         </p:nvSpPr>
         <p:spPr>
           <a:xfrm>
-            <a:off x="7288542" y="4211104"/>
+            <a:off x="7675299" y="4211104"/>
             <a:ext cx="47548" cy="47548"/>
           </a:xfrm>
           <a:prstGeom prst="ellipse">
@@ -20672,7 +20672,7 @@
         </p:nvSpPr>
         <p:spPr>
           <a:xfrm>
-            <a:off x="6957352" y="4414435"/>
+            <a:off x="7320672" y="4414435"/>
             <a:ext cx="47548" cy="47548"/>
           </a:xfrm>
           <a:prstGeom prst="ellipse">
@@ -20716,7 +20716,7 @@
         </p:nvSpPr>
         <p:spPr>
           <a:xfrm>
-            <a:off x="7494630" y="4885091"/>
+            <a:off x="7895970" y="4885091"/>
             <a:ext cx="47548" cy="47548"/>
           </a:xfrm>
           <a:prstGeom prst="ellipse">
@@ -20760,7 +20760,7 @@
         </p:nvSpPr>
         <p:spPr>
           <a:xfrm>
-            <a:off x="6863819" y="4393573"/>
+            <a:off x="7220520" y="4393573"/>
             <a:ext cx="47548" cy="47548"/>
           </a:xfrm>
           <a:prstGeom prst="ellipse">
@@ -20804,7 +20804,7 @@
         </p:nvSpPr>
         <p:spPr>
           <a:xfrm>
-            <a:off x="6944740" y="4907536"/>
+            <a:off x="7307167" y="4907536"/>
             <a:ext cx="47548" cy="47548"/>
           </a:xfrm>
           <a:prstGeom prst="ellipse">
@@ -20848,7 +20848,7 @@
         </p:nvSpPr>
         <p:spPr>
           <a:xfrm>
-            <a:off x="6858383" y="4091192"/>
+            <a:off x="7214699" y="4091192"/>
             <a:ext cx="47548" cy="47548"/>
           </a:xfrm>
           <a:prstGeom prst="ellipse">
@@ -20892,7 +20892,7 @@
         </p:nvSpPr>
         <p:spPr>
           <a:xfrm>
-            <a:off x="6758973" y="4393450"/>
+            <a:off x="7108254" y="4393450"/>
             <a:ext cx="47548" cy="47548"/>
           </a:xfrm>
           <a:prstGeom prst="ellipse">
@@ -20936,7 +20936,7 @@
         </p:nvSpPr>
         <p:spPr>
           <a:xfrm>
-            <a:off x="7777720" y="4827399"/>
+            <a:off x="8199094" y="4827399"/>
             <a:ext cx="47548" cy="47548"/>
           </a:xfrm>
           <a:prstGeom prst="ellipse">
@@ -20980,7 +20980,7 @@
         </p:nvSpPr>
         <p:spPr>
           <a:xfrm>
-            <a:off x="7576600" y="4928258"/>
+            <a:off x="7983741" y="4928258"/>
             <a:ext cx="47548" cy="47548"/>
           </a:xfrm>
           <a:prstGeom prst="ellipse">
@@ -21024,7 +21024,7 @@
         </p:nvSpPr>
         <p:spPr>
           <a:xfrm>
-            <a:off x="7818357" y="4336732"/>
+            <a:off x="8242606" y="4336732"/>
             <a:ext cx="47548" cy="47548"/>
           </a:xfrm>
           <a:prstGeom prst="ellipse">
@@ -21068,7 +21068,7 @@
         </p:nvSpPr>
         <p:spPr>
           <a:xfrm>
-            <a:off x="6911386" y="4873690"/>
+            <a:off x="7271453" y="4873690"/>
             <a:ext cx="47548" cy="47548"/>
           </a:xfrm>
           <a:prstGeom prst="ellipse">
@@ -21112,7 +21112,7 @@
         </p:nvSpPr>
         <p:spPr>
           <a:xfrm>
-            <a:off x="7593114" y="4073536"/>
+            <a:off x="8001424" y="4073536"/>
             <a:ext cx="47548" cy="47548"/>
           </a:xfrm>
           <a:prstGeom prst="ellipse">
@@ -21156,7 +21156,7 @@
         </p:nvSpPr>
         <p:spPr>
           <a:xfrm>
-            <a:off x="7493579" y="4380437"/>
+            <a:off x="7894845" y="4380437"/>
             <a:ext cx="47548" cy="47548"/>
           </a:xfrm>
           <a:prstGeom prst="ellipse">
@@ -21200,7 +21200,7 @@
         </p:nvSpPr>
         <p:spPr>
           <a:xfrm>
-            <a:off x="7140379" y="4338904"/>
+            <a:off x="7516650" y="4338904"/>
             <a:ext cx="47548" cy="47548"/>
           </a:xfrm>
           <a:prstGeom prst="ellipse">
@@ -21244,7 +21244,7 @@
         </p:nvSpPr>
         <p:spPr>
           <a:xfrm>
-            <a:off x="6891630" y="4047847"/>
+            <a:off x="7250299" y="4047847"/>
             <a:ext cx="47548" cy="47548"/>
           </a:xfrm>
           <a:prstGeom prst="ellipse">
@@ -21288,7 +21288,7 @@
         </p:nvSpPr>
         <p:spPr>
           <a:xfrm>
-            <a:off x="7026014" y="4356403"/>
+            <a:off x="7394193" y="4356403"/>
             <a:ext cx="47548" cy="47548"/>
           </a:xfrm>
           <a:prstGeom prst="ellipse">
@@ -21332,7 +21332,7 @@
         </p:nvSpPr>
         <p:spPr>
           <a:xfrm>
-            <a:off x="7847434" y="4154805"/>
+            <a:off x="8273742" y="4154805"/>
             <a:ext cx="47548" cy="47548"/>
           </a:xfrm>
           <a:prstGeom prst="ellipse">
@@ -21376,7 +21376,7 @@
         </p:nvSpPr>
         <p:spPr>
           <a:xfrm>
-            <a:off x="7858079" y="4228886"/>
+            <a:off x="8285139" y="4228886"/>
             <a:ext cx="47548" cy="47548"/>
           </a:xfrm>
           <a:prstGeom prst="ellipse">
@@ -21420,7 +21420,7 @@
         </p:nvSpPr>
         <p:spPr>
           <a:xfrm>
-            <a:off x="7119403" y="4772512"/>
+            <a:off x="7494191" y="4772512"/>
             <a:ext cx="47548" cy="47548"/>
           </a:xfrm>
           <a:prstGeom prst="ellipse">
@@ -21464,7 +21464,7 @@
         </p:nvSpPr>
         <p:spPr>
           <a:xfrm>
-            <a:off x="7685138" y="4428084"/>
+            <a:off x="8099960" y="4428084"/>
             <a:ext cx="47548" cy="47548"/>
           </a:xfrm>
           <a:prstGeom prst="ellipse">
@@ -21508,7 +21508,7 @@
         </p:nvSpPr>
         <p:spPr>
           <a:xfrm>
-            <a:off x="6745749" y="4464387"/>
+            <a:off x="7094094" y="4464387"/>
             <a:ext cx="47548" cy="47548"/>
           </a:xfrm>
           <a:prstGeom prst="ellipse">
@@ -21552,7 +21552,7 @@
         </p:nvSpPr>
         <p:spPr>
           <a:xfrm>
-            <a:off x="7138957" y="4859196"/>
+            <a:off x="7515128" y="4859196"/>
             <a:ext cx="47548" cy="47548"/>
           </a:xfrm>
           <a:prstGeom prst="ellipse">
@@ -21596,7 +21596,7 @@
         </p:nvSpPr>
         <p:spPr>
           <a:xfrm>
-            <a:off x="6920520" y="4367717"/>
+            <a:off x="7281234" y="4367717"/>
             <a:ext cx="47548" cy="47548"/>
           </a:xfrm>
           <a:prstGeom prst="ellipse">
@@ -21640,7 +21640,7 @@
         </p:nvSpPr>
         <p:spPr>
           <a:xfrm>
-            <a:off x="7776293" y="4072110"/>
+            <a:off x="8197566" y="4072110"/>
             <a:ext cx="47548" cy="47548"/>
           </a:xfrm>
           <a:prstGeom prst="ellipse">
@@ -21684,7 +21684,7 @@
         </p:nvSpPr>
         <p:spPr>
           <a:xfrm>
-            <a:off x="7185258" y="4763883"/>
+            <a:off x="7564706" y="4763883"/>
             <a:ext cx="47548" cy="47548"/>
           </a:xfrm>
           <a:prstGeom prst="ellipse">
@@ -21728,7 +21728,7 @@
         </p:nvSpPr>
         <p:spPr>
           <a:xfrm>
-            <a:off x="7617864" y="4081286"/>
+            <a:off x="8027925" y="4081286"/>
             <a:ext cx="47548" cy="47548"/>
           </a:xfrm>
           <a:prstGeom prst="ellipse">
@@ -21772,7 +21772,7 @@
         </p:nvSpPr>
         <p:spPr>
           <a:xfrm>
-            <a:off x="6728240" y="4100698"/>
+            <a:off x="7075346" y="4100698"/>
             <a:ext cx="47548" cy="47548"/>
           </a:xfrm>
           <a:prstGeom prst="ellipse">
@@ -21816,7 +21816,7 @@
         </p:nvSpPr>
         <p:spPr>
           <a:xfrm>
-            <a:off x="7804354" y="4272801"/>
+            <a:off x="8227613" y="4272801"/>
             <a:ext cx="47548" cy="47548"/>
           </a:xfrm>
           <a:prstGeom prst="ellipse">
@@ -21860,7 +21860,7 @@
         </p:nvSpPr>
         <p:spPr>
           <a:xfrm>
-            <a:off x="7594303" y="4840648"/>
+            <a:off x="8002698" y="4840648"/>
             <a:ext cx="47548" cy="47548"/>
           </a:xfrm>
           <a:prstGeom prst="ellipse">
@@ -21904,7 +21904,7 @@
         </p:nvSpPr>
         <p:spPr>
           <a:xfrm>
-            <a:off x="7098057" y="4286342"/>
+            <a:off x="7471334" y="4286342"/>
             <a:ext cx="47548" cy="47548"/>
           </a:xfrm>
           <a:prstGeom prst="ellipse">
@@ -21948,7 +21948,7 @@
         </p:nvSpPr>
         <p:spPr>
           <a:xfrm>
-            <a:off x="7850078" y="4591417"/>
+            <a:off x="8276572" y="4591417"/>
             <a:ext cx="47548" cy="47548"/>
           </a:xfrm>
           <a:prstGeom prst="ellipse">
@@ -21992,7 +21992,7 @@
         </p:nvSpPr>
         <p:spPr>
           <a:xfrm>
-            <a:off x="7004578" y="4679627"/>
+            <a:off x="7371239" y="4679627"/>
             <a:ext cx="47548" cy="47548"/>
           </a:xfrm>
           <a:prstGeom prst="ellipse">
@@ -22036,7 +22036,7 @@
         </p:nvSpPr>
         <p:spPr>
           <a:xfrm>
-            <a:off x="7070601" y="4289277"/>
+            <a:off x="7441934" y="4289277"/>
             <a:ext cx="47548" cy="47548"/>
           </a:xfrm>
           <a:prstGeom prst="ellipse">
@@ -22080,7 +22080,7 @@
         </p:nvSpPr>
         <p:spPr>
           <a:xfrm>
-            <a:off x="6690454" y="4714162"/>
+            <a:off x="7034887" y="4714162"/>
             <a:ext cx="47548" cy="47548"/>
           </a:xfrm>
           <a:prstGeom prst="ellipse">
@@ -22124,7 +22124,7 @@
         </p:nvSpPr>
         <p:spPr>
           <a:xfrm>
-            <a:off x="7799957" y="4606465"/>
+            <a:off x="8222905" y="4606465"/>
             <a:ext cx="47548" cy="47548"/>
           </a:xfrm>
           <a:prstGeom prst="ellipse">
@@ -22168,7 +22168,7 @@
         </p:nvSpPr>
         <p:spPr>
           <a:xfrm>
-            <a:off x="7832525" y="4066776"/>
+            <a:off x="8257777" y="4066776"/>
             <a:ext cx="47548" cy="47548"/>
           </a:xfrm>
           <a:prstGeom prst="ellipse">
@@ -22212,7 +22212,7 @@
         </p:nvSpPr>
         <p:spPr>
           <a:xfrm>
-            <a:off x="6970167" y="4465914"/>
+            <a:off x="7334394" y="4465914"/>
             <a:ext cx="47548" cy="47548"/>
           </a:xfrm>
           <a:prstGeom prst="ellipse">
@@ -22256,7 +22256,7 @@
         </p:nvSpPr>
         <p:spPr>
           <a:xfrm>
-            <a:off x="7848970" y="4889649"/>
+            <a:off x="8275385" y="4889649"/>
             <a:ext cx="47548" cy="47548"/>
           </a:xfrm>
           <a:prstGeom prst="ellipse">
@@ -22300,7 +22300,7 @@
         </p:nvSpPr>
         <p:spPr>
           <a:xfrm>
-            <a:off x="7155733" y="4267517"/>
+            <a:off x="7533092" y="4267517"/>
             <a:ext cx="47548" cy="47548"/>
           </a:xfrm>
           <a:prstGeom prst="ellipse">
@@ -22344,7 +22344,7 @@
         </p:nvSpPr>
         <p:spPr>
           <a:xfrm>
-            <a:off x="7208521" y="4482099"/>
+            <a:off x="7589615" y="4482099"/>
             <a:ext cx="47548" cy="47548"/>
           </a:xfrm>
           <a:prstGeom prst="ellipse">
@@ -22388,7 +22388,7 @@
         </p:nvSpPr>
         <p:spPr>
           <a:xfrm>
-            <a:off x="7814107" y="4207233"/>
+            <a:off x="8238056" y="4207233"/>
             <a:ext cx="47548" cy="47548"/>
           </a:xfrm>
           <a:prstGeom prst="ellipse">
@@ -22432,7 +22432,7 @@
         </p:nvSpPr>
         <p:spPr>
           <a:xfrm>
-            <a:off x="7661506" y="4698970"/>
+            <a:off x="8074656" y="4698970"/>
             <a:ext cx="47548" cy="47548"/>
           </a:xfrm>
           <a:prstGeom prst="ellipse">
@@ -22476,8 +22476,8 @@
         </p:nvSpPr>
         <p:spPr>
           <a:xfrm>
-            <a:off x="8601943" y="2706624"/>
-            <a:ext cx="3010937" cy="310896"/>
+            <a:off x="9032077" y="2706624"/>
+            <a:ext cx="2580803" cy="310896"/>
           </a:xfrm>
           <a:prstGeom prst="rect">
             <a:avLst/>
@@ -22512,8 +22512,8 @@
         </p:nvSpPr>
         <p:spPr>
           <a:xfrm>
-            <a:off x="8601943" y="3017520"/>
-            <a:ext cx="3010937" cy="182880"/>
+            <a:off x="9032077" y="3017520"/>
+            <a:ext cx="2580803" cy="182880"/>
           </a:xfrm>
           <a:prstGeom prst="rect">
             <a:avLst/>
@@ -22548,8 +22548,8 @@
         </p:nvSpPr>
         <p:spPr>
           <a:xfrm>
-            <a:off x="8601943" y="3273552"/>
-            <a:ext cx="3010937" cy="822960"/>
+            <a:off x="9032077" y="3273552"/>
+            <a:ext cx="2580803" cy="822960"/>
           </a:xfrm>
           <a:prstGeom prst="rect">
             <a:avLst/>
@@ -22594,8 +22594,8 @@
         </p:nvSpPr>
         <p:spPr>
           <a:xfrm>
-            <a:off x="8711671" y="3300984"/>
-            <a:ext cx="2791481" cy="164592"/>
+            <a:off x="9123517" y="3300984"/>
+            <a:ext cx="1238785" cy="182880"/>
           </a:xfrm>
           <a:prstGeom prst="rect">
             <a:avLst/>
@@ -22630,8 +22630,8 @@
         </p:nvSpPr>
         <p:spPr>
           <a:xfrm>
-            <a:off x="8711671" y="3474720"/>
-            <a:ext cx="2791481" cy="164592"/>
+            <a:off x="10219246" y="3300984"/>
+            <a:ext cx="1217250" cy="182880"/>
           </a:xfrm>
           <a:prstGeom prst="rect">
             <a:avLst/>
@@ -22644,7 +22644,7 @@
           </a:bodyPr>
           <a:lstStyle/>
           <a:p>
-            <a:pPr algn="ctr"/>
+            <a:pPr algn="r"/>
             <a:r>
               <a:rPr sz="900" b="1">
                 <a:solidFill>
@@ -22666,8 +22666,8 @@
         </p:nvSpPr>
         <p:spPr>
           <a:xfrm>
-            <a:off x="8803111" y="3963924"/>
-            <a:ext cx="2608601" cy="13716"/>
+            <a:off x="9233245" y="3963924"/>
+            <a:ext cx="2178467" cy="13716"/>
           </a:xfrm>
           <a:prstGeom prst="rect">
             <a:avLst/>
@@ -22710,8 +22710,8 @@
         </p:nvSpPr>
         <p:spPr>
           <a:xfrm>
-            <a:off x="8803111" y="3685032"/>
-            <a:ext cx="13716" cy="292608"/>
+            <a:off x="9233245" y="3584448"/>
+            <a:ext cx="13716" cy="393192"/>
           </a:xfrm>
           <a:prstGeom prst="rect">
             <a:avLst/>
@@ -22754,7 +22754,7 @@
         </p:nvSpPr>
         <p:spPr>
           <a:xfrm>
-            <a:off x="10932892" y="3879273"/>
+            <a:off x="11009131" y="3869999"/>
             <a:ext cx="32918" cy="32918"/>
           </a:xfrm>
           <a:prstGeom prst="ellipse">
@@ -22798,7 +22798,7 @@
         </p:nvSpPr>
         <p:spPr>
           <a:xfrm>
-            <a:off x="10370735" y="3750363"/>
+            <a:off x="10539669" y="3729369"/>
             <a:ext cx="32918" cy="32918"/>
           </a:xfrm>
           <a:prstGeom prst="ellipse">
@@ -22842,7 +22842,7 @@
         </p:nvSpPr>
         <p:spPr>
           <a:xfrm>
-            <a:off x="9620227" y="3760229"/>
+            <a:off x="9912912" y="3740133"/>
             <a:ext cx="32918" cy="32918"/>
           </a:xfrm>
           <a:prstGeom prst="ellipse">
@@ -22886,7 +22886,7 @@
         </p:nvSpPr>
         <p:spPr>
           <a:xfrm>
-            <a:off x="10827226" y="3678295"/>
+            <a:off x="10920888" y="3650749"/>
             <a:ext cx="32918" cy="32918"/>
           </a:xfrm>
           <a:prstGeom prst="ellipse">
@@ -22930,7 +22930,7 @@
         </p:nvSpPr>
         <p:spPr>
           <a:xfrm>
-            <a:off x="9301359" y="3873502"/>
+            <a:off x="9646623" y="3863702"/>
             <a:ext cx="32918" cy="32918"/>
           </a:xfrm>
           <a:prstGeom prst="ellipse">
@@ -22974,7 +22974,7 @@
         </p:nvSpPr>
         <p:spPr>
           <a:xfrm>
-            <a:off x="9431778" y="3674158"/>
+            <a:off x="9755537" y="3646236"/>
             <a:ext cx="32918" cy="32918"/>
           </a:xfrm>
           <a:prstGeom prst="ellipse">
@@ -23018,7 +23018,7 @@
         </p:nvSpPr>
         <p:spPr>
           <a:xfrm>
-            <a:off x="8874988" y="3815481"/>
+            <a:off x="9290556" y="3800407"/>
             <a:ext cx="32918" cy="32918"/>
           </a:xfrm>
           <a:prstGeom prst="ellipse">
@@ -23062,7 +23062,7 @@
         </p:nvSpPr>
         <p:spPr>
           <a:xfrm>
-            <a:off x="9636425" y="3939367"/>
+            <a:off x="9926439" y="3935555"/>
             <a:ext cx="32918" cy="32918"/>
           </a:xfrm>
           <a:prstGeom prst="ellipse">
@@ -23106,7 +23106,7 @@
         </p:nvSpPr>
         <p:spPr>
           <a:xfrm>
-            <a:off x="11091284" y="3941559"/>
+            <a:off x="11141406" y="3937947"/>
             <a:ext cx="32918" cy="32918"/>
           </a:xfrm>
           <a:prstGeom prst="ellipse">
@@ -23150,7 +23150,7 @@
         </p:nvSpPr>
         <p:spPr>
           <a:xfrm>
-            <a:off x="9477647" y="3679763"/>
+            <a:off x="9793842" y="3652351"/>
             <a:ext cx="32918" cy="32918"/>
           </a:xfrm>
           <a:prstGeom prst="ellipse">
@@ -23194,7 +23194,7 @@
         </p:nvSpPr>
         <p:spPr>
           <a:xfrm>
-            <a:off x="9038180" y="3799805"/>
+            <a:off x="9426839" y="3783306"/>
             <a:ext cx="32918" cy="32918"/>
           </a:xfrm>
           <a:prstGeom prst="ellipse">
@@ -23238,7 +23238,7 @@
         </p:nvSpPr>
         <p:spPr>
           <a:xfrm>
-            <a:off x="10638161" y="3784883"/>
+            <a:off x="10762999" y="3767027"/>
             <a:ext cx="32918" cy="32918"/>
           </a:xfrm>
           <a:prstGeom prst="ellipse">
@@ -23282,7 +23282,7 @@
         </p:nvSpPr>
         <p:spPr>
           <a:xfrm>
-            <a:off x="9397576" y="3776157"/>
+            <a:off x="9726974" y="3757508"/>
             <a:ext cx="32918" cy="32918"/>
           </a:xfrm>
           <a:prstGeom prst="ellipse">
@@ -23326,7 +23326,7 @@
         </p:nvSpPr>
         <p:spPr>
           <a:xfrm>
-            <a:off x="10404787" y="3850682"/>
+            <a:off x="10568105" y="3838808"/>
             <a:ext cx="32918" cy="32918"/>
           </a:xfrm>
           <a:prstGeom prst="ellipse">
@@ -23370,7 +23370,7 @@
         </p:nvSpPr>
         <p:spPr>
           <a:xfrm>
-            <a:off x="10737825" y="3900761"/>
+            <a:off x="10846229" y="3893440"/>
             <a:ext cx="32918" cy="32918"/>
           </a:xfrm>
           <a:prstGeom prst="ellipse">
@@ -23414,7 +23414,7 @@
         </p:nvSpPr>
         <p:spPr>
           <a:xfrm>
-            <a:off x="10519872" y="3690505"/>
+            <a:off x="10664214" y="3664069"/>
             <a:ext cx="32918" cy="32918"/>
           </a:xfrm>
           <a:prstGeom prst="ellipse">
@@ -23458,7 +23458,7 @@
         </p:nvSpPr>
         <p:spPr>
           <a:xfrm>
-            <a:off x="10980149" y="3740509"/>
+            <a:off x="11048596" y="3718619"/>
             <a:ext cx="32918" cy="32918"/>
           </a:xfrm>
           <a:prstGeom prst="ellipse">
@@ -23502,7 +23502,7 @@
         </p:nvSpPr>
         <p:spPr>
           <a:xfrm>
-            <a:off x="10265426" y="3763449"/>
+            <a:off x="10451724" y="3743644"/>
             <a:ext cx="32918" cy="32918"/>
           </a:xfrm>
           <a:prstGeom prst="ellipse">
@@ -23546,7 +23546,7 @@
         </p:nvSpPr>
         <p:spPr>
           <a:xfrm>
-            <a:off x="10711975" y="3713107"/>
+            <a:off x="10824641" y="3688727"/>
             <a:ext cx="32918" cy="32918"/>
           </a:xfrm>
           <a:prstGeom prst="ellipse">
@@ -23590,7 +23590,7 @@
         </p:nvSpPr>
         <p:spPr>
           <a:xfrm>
-            <a:off x="9432095" y="3726476"/>
+            <a:off x="9755802" y="3703311"/>
             <a:ext cx="32918" cy="32918"/>
           </a:xfrm>
           <a:prstGeom prst="ellipse">
@@ -23634,7 +23634,7 @@
         </p:nvSpPr>
         <p:spPr>
           <a:xfrm>
-            <a:off x="9186608" y="3911532"/>
+            <a:off x="9550793" y="3905190"/>
             <a:ext cx="32918" cy="32918"/>
           </a:xfrm>
           <a:prstGeom prst="ellipse">
@@ -23678,7 +23678,7 @@
         </p:nvSpPr>
         <p:spPr>
           <a:xfrm>
-            <a:off x="10295155" y="3749940"/>
+            <a:off x="10476551" y="3728908"/>
             <a:ext cx="32918" cy="32918"/>
           </a:xfrm>
           <a:prstGeom prst="ellipse">
@@ -23722,7 +23722,7 @@
         </p:nvSpPr>
         <p:spPr>
           <a:xfrm>
-            <a:off x="9819839" y="3942899"/>
+            <a:off x="10079610" y="3939408"/>
             <a:ext cx="32918" cy="32918"/>
           </a:xfrm>
           <a:prstGeom prst="ellipse">
@@ -23766,7 +23766,7 @@
         </p:nvSpPr>
         <p:spPr>
           <a:xfrm>
-            <a:off x="10110059" y="3722433"/>
+            <a:off x="10321975" y="3698900"/>
             <a:ext cx="32918" cy="32918"/>
           </a:xfrm>
           <a:prstGeom prst="ellipse">
@@ -23810,7 +23810,7 @@
         </p:nvSpPr>
         <p:spPr>
           <a:xfrm>
-            <a:off x="10895556" y="3844661"/>
+            <a:off x="10977952" y="3832240"/>
             <a:ext cx="32918" cy="32918"/>
           </a:xfrm>
           <a:prstGeom prst="ellipse">
@@ -23854,7 +23854,7 @@
         </p:nvSpPr>
         <p:spPr>
           <a:xfrm>
-            <a:off x="11371659" y="3685050"/>
+            <a:off x="11375550" y="3658118"/>
             <a:ext cx="32918" cy="32918"/>
           </a:xfrm>
           <a:prstGeom prst="ellipse">
@@ -23898,7 +23898,7 @@
         </p:nvSpPr>
         <p:spPr>
           <a:xfrm>
-            <a:off x="10025118" y="3892684"/>
+            <a:off x="10251041" y="3884628"/>
             <a:ext cx="32918" cy="32918"/>
           </a:xfrm>
           <a:prstGeom prst="ellipse">
@@ -23942,7 +23942,7 @@
         </p:nvSpPr>
         <p:spPr>
           <a:xfrm>
-            <a:off x="10979328" y="3920282"/>
+            <a:off x="11047910" y="3914736"/>
             <a:ext cx="32918" cy="32918"/>
           </a:xfrm>
           <a:prstGeom prst="ellipse">
@@ -23986,7 +23986,7 @@
         </p:nvSpPr>
         <p:spPr>
           <a:xfrm>
-            <a:off x="8891940" y="3740479"/>
+            <a:off x="9304712" y="3718586"/>
             <a:ext cx="32918" cy="32918"/>
           </a:xfrm>
           <a:prstGeom prst="ellipse">
@@ -24030,7 +24030,7 @@
         </p:nvSpPr>
         <p:spPr>
           <a:xfrm>
-            <a:off x="9097640" y="3710322"/>
+            <a:off x="9476495" y="3685688"/>
             <a:ext cx="32918" cy="32918"/>
           </a:xfrm>
           <a:prstGeom prst="ellipse">
@@ -24074,7 +24074,7 @@
         </p:nvSpPr>
         <p:spPr>
           <a:xfrm>
-            <a:off x="11324729" y="3824345"/>
+            <a:off x="11336358" y="3810077"/>
             <a:ext cx="32918" cy="32918"/>
           </a:xfrm>
           <a:prstGeom prst="ellipse">
@@ -24118,7 +24118,7 @@
         </p:nvSpPr>
         <p:spPr>
           <a:xfrm>
-            <a:off x="11213104" y="3763236"/>
+            <a:off x="11243138" y="3743412"/>
             <a:ext cx="32918" cy="32918"/>
           </a:xfrm>
           <a:prstGeom prst="ellipse">
@@ -24162,7 +24162,7 @@
         </p:nvSpPr>
         <p:spPr>
           <a:xfrm>
-            <a:off x="8849054" y="3740106"/>
+            <a:off x="9267239" y="3719094"/>
             <a:ext cx="53035" cy="53035"/>
           </a:xfrm>
           <a:prstGeom prst="ellipse">
@@ -24206,7 +24206,7 @@
         </p:nvSpPr>
         <p:spPr>
           <a:xfrm>
-            <a:off x="8993976" y="3846188"/>
+            <a:off x="9388265" y="3834820"/>
             <a:ext cx="53035" cy="53035"/>
           </a:xfrm>
           <a:prstGeom prst="ellipse">
@@ -24250,7 +24250,7 @@
         </p:nvSpPr>
         <p:spPr>
           <a:xfrm>
-            <a:off x="9138898" y="3797640"/>
+            <a:off x="9509291" y="3781859"/>
             <a:ext cx="53035" cy="53035"/>
           </a:xfrm>
           <a:prstGeom prst="ellipse">
@@ -24294,7 +24294,7 @@
         </p:nvSpPr>
         <p:spPr>
           <a:xfrm>
-            <a:off x="9283820" y="3671095"/>
+            <a:off x="9630317" y="3643809"/>
             <a:ext cx="53035" cy="53035"/>
           </a:xfrm>
           <a:prstGeom prst="ellipse">
@@ -24338,7 +24338,7 @@
         </p:nvSpPr>
         <p:spPr>
           <a:xfrm>
-            <a:off x="9428743" y="3759529"/>
+            <a:off x="9751343" y="3740283"/>
             <a:ext cx="53035" cy="53035"/>
           </a:xfrm>
           <a:prstGeom prst="ellipse">
@@ -24382,7 +24382,7 @@
         </p:nvSpPr>
         <p:spPr>
           <a:xfrm>
-            <a:off x="9573665" y="3801072"/>
+            <a:off x="9872369" y="3785602"/>
             <a:ext cx="53035" cy="53035"/>
           </a:xfrm>
           <a:prstGeom prst="ellipse">
@@ -24426,7 +24426,7 @@
         </p:nvSpPr>
         <p:spPr>
           <a:xfrm>
-            <a:off x="9718587" y="3868949"/>
+            <a:off x="9993395" y="3859650"/>
             <a:ext cx="53035" cy="53035"/>
           </a:xfrm>
           <a:prstGeom prst="ellipse">
@@ -24470,7 +24470,7 @@
         </p:nvSpPr>
         <p:spPr>
           <a:xfrm>
-            <a:off x="9863510" y="3844547"/>
+            <a:off x="10114421" y="3833030"/>
             <a:ext cx="53035" cy="53035"/>
           </a:xfrm>
           <a:prstGeom prst="ellipse">
@@ -24514,7 +24514,7 @@
         </p:nvSpPr>
         <p:spPr>
           <a:xfrm>
-            <a:off x="10008432" y="3776865"/>
+            <a:off x="10235447" y="3759195"/>
             <a:ext cx="53035" cy="53035"/>
           </a:xfrm>
           <a:prstGeom prst="ellipse">
@@ -24558,7 +24558,7 @@
         </p:nvSpPr>
         <p:spPr>
           <a:xfrm>
-            <a:off x="10153354" y="3725557"/>
+            <a:off x="10356473" y="3703223"/>
             <a:ext cx="53035" cy="53035"/>
           </a:xfrm>
           <a:prstGeom prst="ellipse">
@@ -24602,7 +24602,7 @@
         </p:nvSpPr>
         <p:spPr>
           <a:xfrm>
-            <a:off x="10298276" y="3760875"/>
+            <a:off x="10477499" y="3741751"/>
             <a:ext cx="53035" cy="53035"/>
           </a:xfrm>
           <a:prstGeom prst="ellipse">
@@ -24646,7 +24646,7 @@
         </p:nvSpPr>
         <p:spPr>
           <a:xfrm>
-            <a:off x="10443199" y="3754127"/>
+            <a:off x="10598525" y="3734390"/>
             <a:ext cx="53035" cy="53035"/>
           </a:xfrm>
           <a:prstGeom prst="ellipse">
@@ -24690,7 +24690,7 @@
         </p:nvSpPr>
         <p:spPr>
           <a:xfrm>
-            <a:off x="10588121" y="3793059"/>
+            <a:off x="10719551" y="3776861"/>
             <a:ext cx="53035" cy="53035"/>
           </a:xfrm>
           <a:prstGeom prst="ellipse">
@@ -24734,7 +24734,7 @@
         </p:nvSpPr>
         <p:spPr>
           <a:xfrm>
-            <a:off x="10733043" y="3697169"/>
+            <a:off x="10840577" y="3672254"/>
             <a:ext cx="53035" cy="53035"/>
           </a:xfrm>
           <a:prstGeom prst="ellipse">
@@ -24778,7 +24778,7 @@
         </p:nvSpPr>
         <p:spPr>
           <a:xfrm>
-            <a:off x="10877966" y="3817073"/>
+            <a:off x="10961603" y="3803058"/>
             <a:ext cx="53035" cy="53035"/>
           </a:xfrm>
           <a:prstGeom prst="ellipse">
@@ -24822,7 +24822,7 @@
         </p:nvSpPr>
         <p:spPr>
           <a:xfrm>
-            <a:off x="11022888" y="3828007"/>
+            <a:off x="11082629" y="3814986"/>
             <a:ext cx="53035" cy="53035"/>
           </a:xfrm>
           <a:prstGeom prst="ellipse">
@@ -24866,7 +24866,7 @@
         </p:nvSpPr>
         <p:spPr>
           <a:xfrm>
-            <a:off x="11167810" y="3729087"/>
+            <a:off x="11203655" y="3707074"/>
             <a:ext cx="53035" cy="53035"/>
           </a:xfrm>
           <a:prstGeom prst="ellipse">
@@ -24910,7 +24910,7 @@
         </p:nvSpPr>
         <p:spPr>
           <a:xfrm>
-            <a:off x="11312732" y="3785811"/>
+            <a:off x="11324681" y="3768954"/>
             <a:ext cx="53035" cy="53035"/>
           </a:xfrm>
           <a:prstGeom prst="ellipse">
@@ -24954,8 +24954,8 @@
         </p:nvSpPr>
         <p:spPr>
           <a:xfrm>
-            <a:off x="8601943" y="4187952"/>
-            <a:ext cx="3010937" cy="822960"/>
+            <a:off x="9032077" y="4187952"/>
+            <a:ext cx="2580803" cy="822960"/>
           </a:xfrm>
           <a:prstGeom prst="rect">
             <a:avLst/>
@@ -25000,8 +25000,8 @@
         </p:nvSpPr>
         <p:spPr>
           <a:xfrm>
-            <a:off x="8711671" y="4215384"/>
-            <a:ext cx="2791481" cy="164592"/>
+            <a:off x="9123517" y="4215384"/>
+            <a:ext cx="1238785" cy="182880"/>
           </a:xfrm>
           <a:prstGeom prst="rect">
             <a:avLst/>
@@ -25023,7 +25023,7 @@
                 <a:latin typeface="맑은 고딕"/>
                 <a:ea typeface="맑은 고딕"/>
               </a:rPr>
-              <a:t>Correlated AR(1)</a:t>
+              <a:t>Correlated / hunting</a:t>
             </a:r>
           </a:p>
         </p:txBody>
@@ -25036,8 +25036,8 @@
         </p:nvSpPr>
         <p:spPr>
           <a:xfrm>
-            <a:off x="8711671" y="4389120"/>
-            <a:ext cx="2791481" cy="164592"/>
+            <a:off x="10219246" y="4215384"/>
+            <a:ext cx="1217250" cy="182880"/>
           </a:xfrm>
           <a:prstGeom prst="rect">
             <a:avLst/>
@@ -25050,7 +25050,7 @@
           </a:bodyPr>
           <a:lstStyle/>
           <a:p>
-            <a:pPr algn="ctr"/>
+            <a:pPr algn="r"/>
             <a:r>
               <a:rPr sz="900" b="1">
                 <a:solidFill>
@@ -25072,8 +25072,8 @@
         </p:nvSpPr>
         <p:spPr>
           <a:xfrm>
-            <a:off x="8803111" y="4878324"/>
-            <a:ext cx="2608601" cy="13716"/>
+            <a:off x="9233245" y="4878324"/>
+            <a:ext cx="2178467" cy="13716"/>
           </a:xfrm>
           <a:prstGeom prst="rect">
             <a:avLst/>
@@ -25116,8 +25116,8 @@
         </p:nvSpPr>
         <p:spPr>
           <a:xfrm>
-            <a:off x="8803111" y="4599432"/>
-            <a:ext cx="13716" cy="292608"/>
+            <a:off x="9233245" y="4498848"/>
+            <a:ext cx="13716" cy="393192"/>
           </a:xfrm>
           <a:prstGeom prst="rect">
             <a:avLst/>
@@ -25160,7 +25160,7 @@
         </p:nvSpPr>
         <p:spPr>
           <a:xfrm>
-            <a:off x="10556117" y="4623439"/>
+            <a:off x="10694483" y="4598688"/>
             <a:ext cx="32918" cy="32918"/>
           </a:xfrm>
           <a:prstGeom prst="ellipse">
@@ -25204,7 +25204,7 @@
         </p:nvSpPr>
         <p:spPr>
           <a:xfrm>
-            <a:off x="9601046" y="4628729"/>
+            <a:off x="9896894" y="4604460"/>
             <a:ext cx="32918" cy="32918"/>
           </a:xfrm>
           <a:prstGeom prst="ellipse">
@@ -25248,7 +25248,7 @@
         </p:nvSpPr>
         <p:spPr>
           <a:xfrm>
-            <a:off x="10861223" y="4728563"/>
+            <a:off x="10949279" y="4713369"/>
             <a:ext cx="32918" cy="32918"/>
           </a:xfrm>
           <a:prstGeom prst="ellipse">
@@ -25292,7 +25292,7 @@
         </p:nvSpPr>
         <p:spPr>
           <a:xfrm>
-            <a:off x="8951700" y="4599176"/>
+            <a:off x="9354619" y="4572220"/>
             <a:ext cx="32918" cy="32918"/>
           </a:xfrm>
           <a:prstGeom prst="ellipse">
@@ -25336,7 +25336,7 @@
         </p:nvSpPr>
         <p:spPr>
           <a:xfrm>
-            <a:off x="9817823" y="4729169"/>
+            <a:off x="10077926" y="4714031"/>
             <a:ext cx="32918" cy="32918"/>
           </a:xfrm>
           <a:prstGeom prst="ellipse">
@@ -25380,7 +25380,7 @@
         </p:nvSpPr>
         <p:spPr>
           <a:xfrm>
-            <a:off x="10454022" y="4596211"/>
+            <a:off x="10609222" y="4568985"/>
             <a:ext cx="32918" cy="32918"/>
           </a:xfrm>
           <a:prstGeom prst="ellipse">
@@ -25424,7 +25424,7 @@
         </p:nvSpPr>
         <p:spPr>
           <a:xfrm>
-            <a:off x="9213652" y="4771251"/>
+            <a:off x="9573377" y="4759938"/>
             <a:ext cx="32918" cy="32918"/>
           </a:xfrm>
           <a:prstGeom prst="ellipse">
@@ -25468,7 +25468,7 @@
         </p:nvSpPr>
         <p:spPr>
           <a:xfrm>
-            <a:off x="9855627" y="4651873"/>
+            <a:off x="10109497" y="4629707"/>
             <a:ext cx="32918" cy="32918"/>
           </a:xfrm>
           <a:prstGeom prst="ellipse">
@@ -25512,7 +25512,7 @@
         </p:nvSpPr>
         <p:spPr>
           <a:xfrm>
-            <a:off x="9589046" y="4845926"/>
+            <a:off x="9886873" y="4841401"/>
             <a:ext cx="32918" cy="32918"/>
           </a:xfrm>
           <a:prstGeom prst="ellipse">
@@ -25556,7 +25556,7 @@
         </p:nvSpPr>
         <p:spPr>
           <a:xfrm>
-            <a:off x="9601479" y="4733915"/>
+            <a:off x="9897256" y="4719208"/>
             <a:ext cx="32918" cy="32918"/>
           </a:xfrm>
           <a:prstGeom prst="ellipse">
@@ -25600,7 +25600,7 @@
         </p:nvSpPr>
         <p:spPr>
           <a:xfrm>
-            <a:off x="9718396" y="4690442"/>
+            <a:off x="9994894" y="4671783"/>
             <a:ext cx="32918" cy="32918"/>
           </a:xfrm>
           <a:prstGeom prst="ellipse">
@@ -25644,7 +25644,7 @@
         </p:nvSpPr>
         <p:spPr>
           <a:xfrm>
-            <a:off x="11041125" y="4858507"/>
+            <a:off x="11099518" y="4855126"/>
             <a:ext cx="32918" cy="32918"/>
           </a:xfrm>
           <a:prstGeom prst="ellipse">
@@ -25688,7 +25688,7 @@
         </p:nvSpPr>
         <p:spPr>
           <a:xfrm>
-            <a:off x="9735612" y="4626931"/>
+            <a:off x="10009271" y="4602498"/>
             <a:ext cx="32918" cy="32918"/>
           </a:xfrm>
           <a:prstGeom prst="ellipse">
@@ -25732,7 +25732,7 @@
         </p:nvSpPr>
         <p:spPr>
           <a:xfrm>
-            <a:off x="10685796" y="4628804"/>
+            <a:off x="10802779" y="4604542"/>
             <a:ext cx="32918" cy="32918"/>
           </a:xfrm>
           <a:prstGeom prst="ellipse">
@@ -25776,7 +25776,7 @@
         </p:nvSpPr>
         <p:spPr>
           <a:xfrm>
-            <a:off x="8801981" y="4830990"/>
+            <a:off x="9229587" y="4825108"/>
             <a:ext cx="32918" cy="32918"/>
           </a:xfrm>
           <a:prstGeom prst="ellipse">
@@ -25820,7 +25820,7 @@
         </p:nvSpPr>
         <p:spPr>
           <a:xfrm>
-            <a:off x="9892059" y="4807450"/>
+            <a:off x="10139921" y="4799428"/>
             <a:ext cx="32918" cy="32918"/>
           </a:xfrm>
           <a:prstGeom prst="ellipse">
@@ -25864,7 +25864,7 @@
         </p:nvSpPr>
         <p:spPr>
           <a:xfrm>
-            <a:off x="9846311" y="4825547"/>
+            <a:off x="10101717" y="4819169"/>
             <a:ext cx="32918" cy="32918"/>
           </a:xfrm>
           <a:prstGeom prst="ellipse">
@@ -25908,7 +25908,7 @@
         </p:nvSpPr>
         <p:spPr>
           <a:xfrm>
-            <a:off x="9988972" y="4616892"/>
+            <a:off x="10220855" y="4591546"/>
             <a:ext cx="32918" cy="32918"/>
           </a:xfrm>
           <a:prstGeom prst="ellipse">
@@ -25952,7 +25952,7 @@
         </p:nvSpPr>
         <p:spPr>
           <a:xfrm>
-            <a:off x="8825348" y="4729578"/>
+            <a:off x="9249102" y="4714476"/>
             <a:ext cx="32918" cy="32918"/>
           </a:xfrm>
           <a:prstGeom prst="ellipse">
@@ -25996,7 +25996,7 @@
         </p:nvSpPr>
         <p:spPr>
           <a:xfrm>
-            <a:off x="10457895" y="4833355"/>
+            <a:off x="10612457" y="4827688"/>
             <a:ext cx="32918" cy="32918"/>
           </a:xfrm>
           <a:prstGeom prst="ellipse">
@@ -26040,7 +26040,7 @@
         </p:nvSpPr>
         <p:spPr>
           <a:xfrm>
-            <a:off x="9018898" y="4750043"/>
+            <a:off x="9410737" y="4736802"/>
             <a:ext cx="32918" cy="32918"/>
           </a:xfrm>
           <a:prstGeom prst="ellipse">
@@ -26084,7 +26084,7 @@
         </p:nvSpPr>
         <p:spPr>
           <a:xfrm>
-            <a:off x="9754035" y="4715938"/>
+            <a:off x="10024656" y="4699597"/>
             <a:ext cx="32918" cy="32918"/>
           </a:xfrm>
           <a:prstGeom prst="ellipse">
@@ -26128,7 +26128,7 @@
         </p:nvSpPr>
         <p:spPr>
           <a:xfrm>
-            <a:off x="9167212" y="4651871"/>
+            <a:off x="9534595" y="4629705"/>
             <a:ext cx="32918" cy="32918"/>
           </a:xfrm>
           <a:prstGeom prst="ellipse">
@@ -26172,7 +26172,7 @@
         </p:nvSpPr>
         <p:spPr>
           <a:xfrm>
-            <a:off x="10146147" y="4837905"/>
+            <a:off x="10352113" y="4832651"/>
             <a:ext cx="32918" cy="32918"/>
           </a:xfrm>
           <a:prstGeom prst="ellipse">
@@ -26216,7 +26216,7 @@
         </p:nvSpPr>
         <p:spPr>
           <a:xfrm>
-            <a:off x="9070449" y="4711897"/>
+            <a:off x="9453787" y="4695188"/>
             <a:ext cx="32918" cy="32918"/>
           </a:xfrm>
           <a:prstGeom prst="ellipse">
@@ -26260,7 +26260,7 @@
         </p:nvSpPr>
         <p:spPr>
           <a:xfrm>
-            <a:off x="10886089" y="4849891"/>
+            <a:off x="10970045" y="4845727"/>
             <a:ext cx="32918" cy="32918"/>
           </a:xfrm>
           <a:prstGeom prst="ellipse">
@@ -26304,7 +26304,7 @@
         </p:nvSpPr>
         <p:spPr>
           <a:xfrm>
-            <a:off x="9301437" y="4606494"/>
+            <a:off x="9646688" y="4580203"/>
             <a:ext cx="32918" cy="32918"/>
           </a:xfrm>
           <a:prstGeom prst="ellipse">
@@ -26348,7 +26348,7 @@
         </p:nvSpPr>
         <p:spPr>
           <a:xfrm>
-            <a:off x="11246760" y="4852403"/>
+            <a:off x="11271245" y="4848467"/>
             <a:ext cx="32918" cy="32918"/>
           </a:xfrm>
           <a:prstGeom prst="ellipse">
@@ -26392,7 +26392,7 @@
         </p:nvSpPr>
         <p:spPr>
           <a:xfrm>
-            <a:off x="10045918" y="4585267"/>
+            <a:off x="10268411" y="4557047"/>
             <a:ext cx="32918" cy="32918"/>
           </a:xfrm>
           <a:prstGeom prst="ellipse">
@@ -26436,7 +26436,7 @@
         </p:nvSpPr>
         <p:spPr>
           <a:xfrm>
-            <a:off x="11202654" y="4682172"/>
+            <a:off x="11234412" y="4662761"/>
             <a:ext cx="32918" cy="32918"/>
           </a:xfrm>
           <a:prstGeom prst="ellipse">
@@ -26480,7 +26480,7 @@
         </p:nvSpPr>
         <p:spPr>
           <a:xfrm>
-            <a:off x="11145403" y="4749507"/>
+            <a:off x="11186601" y="4736217"/>
             <a:ext cx="32918" cy="32918"/>
           </a:xfrm>
           <a:prstGeom prst="ellipse">
@@ -26524,7 +26524,7 @@
         </p:nvSpPr>
         <p:spPr>
           <a:xfrm>
-            <a:off x="10937588" y="4616235"/>
+            <a:off x="11013053" y="4590829"/>
             <a:ext cx="32918" cy="32918"/>
           </a:xfrm>
           <a:prstGeom prst="ellipse">
@@ -26568,7 +26568,7 @@
         </p:nvSpPr>
         <p:spPr>
           <a:xfrm>
-            <a:off x="8849054" y="4699432"/>
+            <a:off x="9261188" y="4809490"/>
             <a:ext cx="53035" cy="53035"/>
           </a:xfrm>
           <a:prstGeom prst="ellipse">
@@ -26612,7 +26612,7 @@
         </p:nvSpPr>
         <p:spPr>
           <a:xfrm>
-            <a:off x="8993976" y="4722873"/>
+            <a:off x="9370112" y="4785733"/>
             <a:ext cx="53035" cy="53035"/>
           </a:xfrm>
           <a:prstGeom prst="ellipse">
@@ -26656,13 +26656,321 @@
         </p:nvSpPr>
         <p:spPr>
           <a:xfrm>
-            <a:off x="9138898" y="4771635"/>
+            <a:off x="9479035" y="4762372"/>
             <a:ext cx="53035" cy="53035"/>
           </a:xfrm>
           <a:prstGeom prst="ellipse">
             <a:avLst/>
           </a:prstGeom>
           <a:solidFill>
+            <a:srgbClr val="D97706"/>
+          </a:solidFill>
+          <a:ln>
+            <a:noFill/>
+          </a:ln>
+          <a:effectLst/>
+        </p:spPr>
+        <p:style>
+          <a:lnRef idx="1">
+            <a:schemeClr val="accent1"/>
+          </a:lnRef>
+          <a:fillRef idx="3">
+            <a:schemeClr val="accent1"/>
+          </a:fillRef>
+          <a:effectRef idx="2">
+            <a:schemeClr val="accent1"/>
+          </a:effectRef>
+          <a:fontRef idx="minor">
+            <a:schemeClr val="lt1"/>
+          </a:fontRef>
+        </p:style>
+        <p:txBody>
+          <a:bodyPr rtlCol="0" anchor="ctr"/>
+          <a:lstStyle/>
+          <a:p>
+            <a:pPr algn="ctr"/>
+          </a:p>
+        </p:txBody>
+      </p:sp>
+      <p:sp>
+        <p:nvSpPr>
+          <p:cNvPr id="520" name="Oval 519"/>
+          <p:cNvSpPr/>
+          <p:nvPr/>
+        </p:nvSpPr>
+        <p:spPr>
+          <a:xfrm>
+            <a:off x="9587958" y="4714148"/>
+            <a:ext cx="53035" cy="53035"/>
+          </a:xfrm>
+          <a:prstGeom prst="ellipse">
+            <a:avLst/>
+          </a:prstGeom>
+          <a:solidFill>
+            <a:srgbClr val="D97706"/>
+          </a:solidFill>
+          <a:ln>
+            <a:noFill/>
+          </a:ln>
+          <a:effectLst/>
+        </p:spPr>
+        <p:style>
+          <a:lnRef idx="1">
+            <a:schemeClr val="accent1"/>
+          </a:lnRef>
+          <a:fillRef idx="3">
+            <a:schemeClr val="accent1"/>
+          </a:fillRef>
+          <a:effectRef idx="2">
+            <a:schemeClr val="accent1"/>
+          </a:effectRef>
+          <a:fontRef idx="minor">
+            <a:schemeClr val="lt1"/>
+          </a:fontRef>
+        </p:style>
+        <p:txBody>
+          <a:bodyPr rtlCol="0" anchor="ctr"/>
+          <a:lstStyle/>
+          <a:p>
+            <a:pPr algn="ctr"/>
+          </a:p>
+        </p:txBody>
+      </p:sp>
+      <p:sp>
+        <p:nvSpPr>
+          <p:cNvPr id="521" name="Oval 520"/>
+          <p:cNvSpPr/>
+          <p:nvPr/>
+        </p:nvSpPr>
+        <p:spPr>
+          <a:xfrm>
+            <a:off x="9696882" y="4689980"/>
+            <a:ext cx="53035" cy="53035"/>
+          </a:xfrm>
+          <a:prstGeom prst="ellipse">
+            <a:avLst/>
+          </a:prstGeom>
+          <a:solidFill>
+            <a:srgbClr val="D97706"/>
+          </a:solidFill>
+          <a:ln>
+            <a:noFill/>
+          </a:ln>
+          <a:effectLst/>
+        </p:spPr>
+        <p:style>
+          <a:lnRef idx="1">
+            <a:schemeClr val="accent1"/>
+          </a:lnRef>
+          <a:fillRef idx="3">
+            <a:schemeClr val="accent1"/>
+          </a:fillRef>
+          <a:effectRef idx="2">
+            <a:schemeClr val="accent1"/>
+          </a:effectRef>
+          <a:fontRef idx="minor">
+            <a:schemeClr val="lt1"/>
+          </a:fontRef>
+        </p:style>
+        <p:txBody>
+          <a:bodyPr rtlCol="0" anchor="ctr"/>
+          <a:lstStyle/>
+          <a:p>
+            <a:pPr algn="ctr"/>
+          </a:p>
+        </p:txBody>
+      </p:sp>
+      <p:sp>
+        <p:nvSpPr>
+          <p:cNvPr id="522" name="Oval 521"/>
+          <p:cNvSpPr/>
+          <p:nvPr/>
+        </p:nvSpPr>
+        <p:spPr>
+          <a:xfrm>
+            <a:off x="9805805" y="4666314"/>
+            <a:ext cx="53035" cy="53035"/>
+          </a:xfrm>
+          <a:prstGeom prst="ellipse">
+            <a:avLst/>
+          </a:prstGeom>
+          <a:solidFill>
+            <a:srgbClr val="D97706"/>
+          </a:solidFill>
+          <a:ln>
+            <a:noFill/>
+          </a:ln>
+          <a:effectLst/>
+        </p:spPr>
+        <p:style>
+          <a:lnRef idx="1">
+            <a:schemeClr val="accent1"/>
+          </a:lnRef>
+          <a:fillRef idx="3">
+            <a:schemeClr val="accent1"/>
+          </a:fillRef>
+          <a:effectRef idx="2">
+            <a:schemeClr val="accent1"/>
+          </a:effectRef>
+          <a:fontRef idx="minor">
+            <a:schemeClr val="lt1"/>
+          </a:fontRef>
+        </p:style>
+        <p:txBody>
+          <a:bodyPr rtlCol="0" anchor="ctr"/>
+          <a:lstStyle/>
+          <a:p>
+            <a:pPr algn="ctr"/>
+          </a:p>
+        </p:txBody>
+      </p:sp>
+      <p:sp>
+        <p:nvSpPr>
+          <p:cNvPr id="523" name="Oval 522"/>
+          <p:cNvSpPr/>
+          <p:nvPr/>
+        </p:nvSpPr>
+        <p:spPr>
+          <a:xfrm>
+            <a:off x="9914728" y="4631437"/>
+            <a:ext cx="53035" cy="53035"/>
+          </a:xfrm>
+          <a:prstGeom prst="ellipse">
+            <a:avLst/>
+          </a:prstGeom>
+          <a:solidFill>
+            <a:srgbClr val="D97706"/>
+          </a:solidFill>
+          <a:ln>
+            <a:noFill/>
+          </a:ln>
+          <a:effectLst/>
+        </p:spPr>
+        <p:style>
+          <a:lnRef idx="1">
+            <a:schemeClr val="accent1"/>
+          </a:lnRef>
+          <a:fillRef idx="3">
+            <a:schemeClr val="accent1"/>
+          </a:fillRef>
+          <a:effectRef idx="2">
+            <a:schemeClr val="accent1"/>
+          </a:effectRef>
+          <a:fontRef idx="minor">
+            <a:schemeClr val="lt1"/>
+          </a:fontRef>
+        </p:style>
+        <p:txBody>
+          <a:bodyPr rtlCol="0" anchor="ctr"/>
+          <a:lstStyle/>
+          <a:p>
+            <a:pPr algn="ctr"/>
+          </a:p>
+        </p:txBody>
+      </p:sp>
+      <p:sp>
+        <p:nvSpPr>
+          <p:cNvPr id="524" name="Oval 523"/>
+          <p:cNvSpPr/>
+          <p:nvPr/>
+        </p:nvSpPr>
+        <p:spPr>
+          <a:xfrm>
+            <a:off x="10023652" y="4596354"/>
+            <a:ext cx="53035" cy="53035"/>
+          </a:xfrm>
+          <a:prstGeom prst="ellipse">
+            <a:avLst/>
+          </a:prstGeom>
+          <a:solidFill>
+            <a:srgbClr val="D97706"/>
+          </a:solidFill>
+          <a:ln>
+            <a:noFill/>
+          </a:ln>
+          <a:effectLst/>
+        </p:spPr>
+        <p:style>
+          <a:lnRef idx="1">
+            <a:schemeClr val="accent1"/>
+          </a:lnRef>
+          <a:fillRef idx="3">
+            <a:schemeClr val="accent1"/>
+          </a:fillRef>
+          <a:effectRef idx="2">
+            <a:schemeClr val="accent1"/>
+          </a:effectRef>
+          <a:fontRef idx="minor">
+            <a:schemeClr val="lt1"/>
+          </a:fontRef>
+        </p:style>
+        <p:txBody>
+          <a:bodyPr rtlCol="0" anchor="ctr"/>
+          <a:lstStyle/>
+          <a:p>
+            <a:pPr algn="ctr"/>
+          </a:p>
+        </p:txBody>
+      </p:sp>
+      <p:sp>
+        <p:nvSpPr>
+          <p:cNvPr id="525" name="Oval 524"/>
+          <p:cNvSpPr/>
+          <p:nvPr/>
+        </p:nvSpPr>
+        <p:spPr>
+          <a:xfrm>
+            <a:off x="10132575" y="4606006"/>
+            <a:ext cx="53035" cy="53035"/>
+          </a:xfrm>
+          <a:prstGeom prst="ellipse">
+            <a:avLst/>
+          </a:prstGeom>
+          <a:solidFill>
+            <a:srgbClr val="D97706"/>
+          </a:solidFill>
+          <a:ln>
+            <a:noFill/>
+          </a:ln>
+          <a:effectLst/>
+        </p:spPr>
+        <p:style>
+          <a:lnRef idx="1">
+            <a:schemeClr val="accent1"/>
+          </a:lnRef>
+          <a:fillRef idx="3">
+            <a:schemeClr val="accent1"/>
+          </a:fillRef>
+          <a:effectRef idx="2">
+            <a:schemeClr val="accent1"/>
+          </a:effectRef>
+          <a:fontRef idx="minor">
+            <a:schemeClr val="lt1"/>
+          </a:fontRef>
+        </p:style>
+        <p:txBody>
+          <a:bodyPr rtlCol="0" anchor="ctr"/>
+          <a:lstStyle/>
+          <a:p>
+            <a:pPr algn="ctr"/>
+          </a:p>
+        </p:txBody>
+      </p:sp>
+      <p:sp>
+        <p:nvSpPr>
+          <p:cNvPr id="526" name="Oval 525"/>
+          <p:cNvSpPr/>
+          <p:nvPr/>
+        </p:nvSpPr>
+        <p:spPr>
+          <a:xfrm>
+            <a:off x="10241498" y="4631613"/>
+            <a:ext cx="53035" cy="53035"/>
+          </a:xfrm>
+          <a:prstGeom prst="ellipse">
+            <a:avLst/>
+          </a:prstGeom>
+          <a:solidFill>
             <a:srgbClr val="12B5B0"/>
           </a:solidFill>
           <a:ln>
@@ -26694,13 +27002,13 @@
       </p:sp>
       <p:sp>
         <p:nvSpPr>
-          <p:cNvPr id="520" name="Oval 519"/>
-          <p:cNvSpPr/>
-          <p:nvPr/>
-        </p:nvSpPr>
-        <p:spPr>
-          <a:xfrm>
-            <a:off x="9283820" y="4723943"/>
+          <p:cNvPr id="527" name="Oval 526"/>
+          <p:cNvSpPr/>
+          <p:nvPr/>
+        </p:nvSpPr>
+        <p:spPr>
+          <a:xfrm>
+            <a:off x="10350422" y="4658725"/>
             <a:ext cx="53035" cy="53035"/>
           </a:xfrm>
           <a:prstGeom prst="ellipse">
@@ -26738,13 +27046,13 @@
       </p:sp>
       <p:sp>
         <p:nvSpPr>
-          <p:cNvPr id="521" name="Oval 520"/>
-          <p:cNvSpPr/>
-          <p:nvPr/>
-        </p:nvSpPr>
-        <p:spPr>
-          <a:xfrm>
-            <a:off x="9428743" y="4710571"/>
+          <p:cNvPr id="528" name="Oval 527"/>
+          <p:cNvSpPr/>
+          <p:nvPr/>
+        </p:nvSpPr>
+        <p:spPr>
+          <a:xfrm>
+            <a:off x="10459345" y="4690416"/>
             <a:ext cx="53035" cy="53035"/>
           </a:xfrm>
           <a:prstGeom prst="ellipse">
@@ -26782,13 +27090,13 @@
       </p:sp>
       <p:sp>
         <p:nvSpPr>
-          <p:cNvPr id="522" name="Oval 521"/>
-          <p:cNvSpPr/>
-          <p:nvPr/>
-        </p:nvSpPr>
-        <p:spPr>
-          <a:xfrm>
-            <a:off x="9573665" y="4727700"/>
+          <p:cNvPr id="529" name="Oval 528"/>
+          <p:cNvSpPr/>
+          <p:nvPr/>
+        </p:nvSpPr>
+        <p:spPr>
+          <a:xfrm>
+            <a:off x="10568268" y="4727972"/>
             <a:ext cx="53035" cy="53035"/>
           </a:xfrm>
           <a:prstGeom prst="ellipse">
@@ -26826,13 +27134,13 @@
       </p:sp>
       <p:sp>
         <p:nvSpPr>
-          <p:cNvPr id="523" name="Oval 522"/>
-          <p:cNvSpPr/>
-          <p:nvPr/>
-        </p:nvSpPr>
-        <p:spPr>
-          <a:xfrm>
-            <a:off x="9718587" y="4716991"/>
+          <p:cNvPr id="530" name="Oval 529"/>
+          <p:cNvSpPr/>
+          <p:nvPr/>
+        </p:nvSpPr>
+        <p:spPr>
+          <a:xfrm>
+            <a:off x="10677192" y="4771821"/>
             <a:ext cx="53035" cy="53035"/>
           </a:xfrm>
           <a:prstGeom prst="ellipse">
@@ -26870,19 +27178,239 @@
       </p:sp>
       <p:sp>
         <p:nvSpPr>
-          <p:cNvPr id="524" name="Oval 523"/>
-          <p:cNvSpPr/>
-          <p:nvPr/>
-        </p:nvSpPr>
-        <p:spPr>
-          <a:xfrm>
-            <a:off x="9863510" y="4682491"/>
+          <p:cNvPr id="531" name="Oval 530"/>
+          <p:cNvSpPr/>
+          <p:nvPr/>
+        </p:nvSpPr>
+        <p:spPr>
+          <a:xfrm>
+            <a:off x="10786115" y="4748664"/>
             <a:ext cx="53035" cy="53035"/>
           </a:xfrm>
           <a:prstGeom prst="ellipse">
             <a:avLst/>
           </a:prstGeom>
           <a:solidFill>
+            <a:srgbClr val="D97706"/>
+          </a:solidFill>
+          <a:ln>
+            <a:noFill/>
+          </a:ln>
+          <a:effectLst/>
+        </p:spPr>
+        <p:style>
+          <a:lnRef idx="1">
+            <a:schemeClr val="accent1"/>
+          </a:lnRef>
+          <a:fillRef idx="3">
+            <a:schemeClr val="accent1"/>
+          </a:fillRef>
+          <a:effectRef idx="2">
+            <a:schemeClr val="accent1"/>
+          </a:effectRef>
+          <a:fontRef idx="minor">
+            <a:schemeClr val="lt1"/>
+          </a:fontRef>
+        </p:style>
+        <p:txBody>
+          <a:bodyPr rtlCol="0" anchor="ctr"/>
+          <a:lstStyle/>
+          <a:p>
+            <a:pPr algn="ctr"/>
+          </a:p>
+        </p:txBody>
+      </p:sp>
+      <p:sp>
+        <p:nvSpPr>
+          <p:cNvPr id="532" name="Oval 531"/>
+          <p:cNvSpPr/>
+          <p:nvPr/>
+        </p:nvSpPr>
+        <p:spPr>
+          <a:xfrm>
+            <a:off x="10895038" y="4727335"/>
+            <a:ext cx="53035" cy="53035"/>
+          </a:xfrm>
+          <a:prstGeom prst="ellipse">
+            <a:avLst/>
+          </a:prstGeom>
+          <a:solidFill>
+            <a:srgbClr val="D97706"/>
+          </a:solidFill>
+          <a:ln>
+            <a:noFill/>
+          </a:ln>
+          <a:effectLst/>
+        </p:spPr>
+        <p:style>
+          <a:lnRef idx="1">
+            <a:schemeClr val="accent1"/>
+          </a:lnRef>
+          <a:fillRef idx="3">
+            <a:schemeClr val="accent1"/>
+          </a:fillRef>
+          <a:effectRef idx="2">
+            <a:schemeClr val="accent1"/>
+          </a:effectRef>
+          <a:fontRef idx="minor">
+            <a:schemeClr val="lt1"/>
+          </a:fontRef>
+        </p:style>
+        <p:txBody>
+          <a:bodyPr rtlCol="0" anchor="ctr"/>
+          <a:lstStyle/>
+          <a:p>
+            <a:pPr algn="ctr"/>
+          </a:p>
+        </p:txBody>
+      </p:sp>
+      <p:sp>
+        <p:nvSpPr>
+          <p:cNvPr id="533" name="Oval 532"/>
+          <p:cNvSpPr/>
+          <p:nvPr/>
+        </p:nvSpPr>
+        <p:spPr>
+          <a:xfrm>
+            <a:off x="11003962" y="4701863"/>
+            <a:ext cx="53035" cy="53035"/>
+          </a:xfrm>
+          <a:prstGeom prst="ellipse">
+            <a:avLst/>
+          </a:prstGeom>
+          <a:solidFill>
+            <a:srgbClr val="D97706"/>
+          </a:solidFill>
+          <a:ln>
+            <a:noFill/>
+          </a:ln>
+          <a:effectLst/>
+        </p:spPr>
+        <p:style>
+          <a:lnRef idx="1">
+            <a:schemeClr val="accent1"/>
+          </a:lnRef>
+          <a:fillRef idx="3">
+            <a:schemeClr val="accent1"/>
+          </a:fillRef>
+          <a:effectRef idx="2">
+            <a:schemeClr val="accent1"/>
+          </a:effectRef>
+          <a:fontRef idx="minor">
+            <a:schemeClr val="lt1"/>
+          </a:fontRef>
+        </p:style>
+        <p:txBody>
+          <a:bodyPr rtlCol="0" anchor="ctr"/>
+          <a:lstStyle/>
+          <a:p>
+            <a:pPr algn="ctr"/>
+          </a:p>
+        </p:txBody>
+      </p:sp>
+      <p:sp>
+        <p:nvSpPr>
+          <p:cNvPr id="534" name="Oval 533"/>
+          <p:cNvSpPr/>
+          <p:nvPr/>
+        </p:nvSpPr>
+        <p:spPr>
+          <a:xfrm>
+            <a:off x="11112885" y="4676228"/>
+            <a:ext cx="53035" cy="53035"/>
+          </a:xfrm>
+          <a:prstGeom prst="ellipse">
+            <a:avLst/>
+          </a:prstGeom>
+          <a:solidFill>
+            <a:srgbClr val="D97706"/>
+          </a:solidFill>
+          <a:ln>
+            <a:noFill/>
+          </a:ln>
+          <a:effectLst/>
+        </p:spPr>
+        <p:style>
+          <a:lnRef idx="1">
+            <a:schemeClr val="accent1"/>
+          </a:lnRef>
+          <a:fillRef idx="3">
+            <a:schemeClr val="accent1"/>
+          </a:fillRef>
+          <a:effectRef idx="2">
+            <a:schemeClr val="accent1"/>
+          </a:effectRef>
+          <a:fontRef idx="minor">
+            <a:schemeClr val="lt1"/>
+          </a:fontRef>
+        </p:style>
+        <p:txBody>
+          <a:bodyPr rtlCol="0" anchor="ctr"/>
+          <a:lstStyle/>
+          <a:p>
+            <a:pPr algn="ctr"/>
+          </a:p>
+        </p:txBody>
+      </p:sp>
+      <p:sp>
+        <p:nvSpPr>
+          <p:cNvPr id="535" name="Oval 534"/>
+          <p:cNvSpPr/>
+          <p:nvPr/>
+        </p:nvSpPr>
+        <p:spPr>
+          <a:xfrm>
+            <a:off x="11221808" y="4644831"/>
+            <a:ext cx="53035" cy="53035"/>
+          </a:xfrm>
+          <a:prstGeom prst="ellipse">
+            <a:avLst/>
+          </a:prstGeom>
+          <a:solidFill>
+            <a:srgbClr val="D97706"/>
+          </a:solidFill>
+          <a:ln>
+            <a:noFill/>
+          </a:ln>
+          <a:effectLst/>
+        </p:spPr>
+        <p:style>
+          <a:lnRef idx="1">
+            <a:schemeClr val="accent1"/>
+          </a:lnRef>
+          <a:fillRef idx="3">
+            <a:schemeClr val="accent1"/>
+          </a:fillRef>
+          <a:effectRef idx="2">
+            <a:schemeClr val="accent1"/>
+          </a:effectRef>
+          <a:fontRef idx="minor">
+            <a:schemeClr val="lt1"/>
+          </a:fontRef>
+        </p:style>
+        <p:txBody>
+          <a:bodyPr rtlCol="0" anchor="ctr"/>
+          <a:lstStyle/>
+          <a:p>
+            <a:pPr algn="ctr"/>
+          </a:p>
+        </p:txBody>
+      </p:sp>
+      <p:sp>
+        <p:nvSpPr>
+          <p:cNvPr id="536" name="Oval 535"/>
+          <p:cNvSpPr/>
+          <p:nvPr/>
+        </p:nvSpPr>
+        <p:spPr>
+          <a:xfrm>
+            <a:off x="11330732" y="4621942"/>
+            <a:ext cx="53035" cy="53035"/>
+          </a:xfrm>
+          <a:prstGeom prst="ellipse">
+            <a:avLst/>
+          </a:prstGeom>
+          <a:solidFill>
             <a:srgbClr val="12B5B0"/>
           </a:solidFill>
           <a:ln>
@@ -26914,454 +27442,14 @@
       </p:sp>
       <p:sp>
         <p:nvSpPr>
-          <p:cNvPr id="525" name="Oval 524"/>
-          <p:cNvSpPr/>
-          <p:nvPr/>
-        </p:nvSpPr>
-        <p:spPr>
-          <a:xfrm>
-            <a:off x="10008432" y="4718322"/>
-            <a:ext cx="53035" cy="53035"/>
-          </a:xfrm>
-          <a:prstGeom prst="ellipse">
-            <a:avLst/>
-          </a:prstGeom>
-          <a:solidFill>
-            <a:srgbClr val="12B5B0"/>
-          </a:solidFill>
-          <a:ln>
-            <a:noFill/>
-          </a:ln>
-          <a:effectLst/>
-        </p:spPr>
-        <p:style>
-          <a:lnRef idx="1">
-            <a:schemeClr val="accent1"/>
-          </a:lnRef>
-          <a:fillRef idx="3">
-            <a:schemeClr val="accent1"/>
-          </a:fillRef>
-          <a:effectRef idx="2">
-            <a:schemeClr val="accent1"/>
-          </a:effectRef>
-          <a:fontRef idx="minor">
-            <a:schemeClr val="lt1"/>
-          </a:fontRef>
-        </p:style>
-        <p:txBody>
-          <a:bodyPr rtlCol="0" anchor="ctr"/>
-          <a:lstStyle/>
-          <a:p>
-            <a:pPr algn="ctr"/>
-          </a:p>
-        </p:txBody>
-      </p:sp>
-      <p:sp>
-        <p:nvSpPr>
-          <p:cNvPr id="526" name="Oval 525"/>
-          <p:cNvSpPr/>
-          <p:nvPr/>
-        </p:nvSpPr>
-        <p:spPr>
-          <a:xfrm>
-            <a:off x="10153354" y="4719446"/>
-            <a:ext cx="53035" cy="53035"/>
-          </a:xfrm>
-          <a:prstGeom prst="ellipse">
-            <a:avLst/>
-          </a:prstGeom>
-          <a:solidFill>
-            <a:srgbClr val="12B5B0"/>
-          </a:solidFill>
-          <a:ln>
-            <a:noFill/>
-          </a:ln>
-          <a:effectLst/>
-        </p:spPr>
-        <p:style>
-          <a:lnRef idx="1">
-            <a:schemeClr val="accent1"/>
-          </a:lnRef>
-          <a:fillRef idx="3">
-            <a:schemeClr val="accent1"/>
-          </a:fillRef>
-          <a:effectRef idx="2">
-            <a:schemeClr val="accent1"/>
-          </a:effectRef>
-          <a:fontRef idx="minor">
-            <a:schemeClr val="lt1"/>
-          </a:fontRef>
-        </p:style>
-        <p:txBody>
-          <a:bodyPr rtlCol="0" anchor="ctr"/>
-          <a:lstStyle/>
-          <a:p>
-            <a:pPr algn="ctr"/>
-          </a:p>
-        </p:txBody>
-      </p:sp>
-      <p:sp>
-        <p:nvSpPr>
-          <p:cNvPr id="527" name="Oval 526"/>
-          <p:cNvSpPr/>
-          <p:nvPr/>
-        </p:nvSpPr>
-        <p:spPr>
-          <a:xfrm>
-            <a:off x="10298276" y="4699202"/>
-            <a:ext cx="53035" cy="53035"/>
-          </a:xfrm>
-          <a:prstGeom prst="ellipse">
-            <a:avLst/>
-          </a:prstGeom>
-          <a:solidFill>
-            <a:srgbClr val="12B5B0"/>
-          </a:solidFill>
-          <a:ln>
-            <a:noFill/>
-          </a:ln>
-          <a:effectLst/>
-        </p:spPr>
-        <p:style>
-          <a:lnRef idx="1">
-            <a:schemeClr val="accent1"/>
-          </a:lnRef>
-          <a:fillRef idx="3">
-            <a:schemeClr val="accent1"/>
-          </a:fillRef>
-          <a:effectRef idx="2">
-            <a:schemeClr val="accent1"/>
-          </a:effectRef>
-          <a:fontRef idx="minor">
-            <a:schemeClr val="lt1"/>
-          </a:fontRef>
-        </p:style>
-        <p:txBody>
-          <a:bodyPr rtlCol="0" anchor="ctr"/>
-          <a:lstStyle/>
-          <a:p>
-            <a:pPr algn="ctr"/>
-          </a:p>
-        </p:txBody>
-      </p:sp>
-      <p:sp>
-        <p:nvSpPr>
-          <p:cNvPr id="528" name="Oval 527"/>
-          <p:cNvSpPr/>
-          <p:nvPr/>
-        </p:nvSpPr>
-        <p:spPr>
-          <a:xfrm>
-            <a:off x="10443199" y="4683024"/>
-            <a:ext cx="53035" cy="53035"/>
-          </a:xfrm>
-          <a:prstGeom prst="ellipse">
-            <a:avLst/>
-          </a:prstGeom>
-          <a:solidFill>
-            <a:srgbClr val="12B5B0"/>
-          </a:solidFill>
-          <a:ln>
-            <a:noFill/>
-          </a:ln>
-          <a:effectLst/>
-        </p:spPr>
-        <p:style>
-          <a:lnRef idx="1">
-            <a:schemeClr val="accent1"/>
-          </a:lnRef>
-          <a:fillRef idx="3">
-            <a:schemeClr val="accent1"/>
-          </a:fillRef>
-          <a:effectRef idx="2">
-            <a:schemeClr val="accent1"/>
-          </a:effectRef>
-          <a:fontRef idx="minor">
-            <a:schemeClr val="lt1"/>
-          </a:fontRef>
-        </p:style>
-        <p:txBody>
-          <a:bodyPr rtlCol="0" anchor="ctr"/>
-          <a:lstStyle/>
-          <a:p>
-            <a:pPr algn="ctr"/>
-          </a:p>
-        </p:txBody>
-      </p:sp>
-      <p:sp>
-        <p:nvSpPr>
-          <p:cNvPr id="529" name="Oval 528"/>
-          <p:cNvSpPr/>
-          <p:nvPr/>
-        </p:nvSpPr>
-        <p:spPr>
-          <a:xfrm>
-            <a:off x="10588121" y="4697833"/>
-            <a:ext cx="53035" cy="53035"/>
-          </a:xfrm>
-          <a:prstGeom prst="ellipse">
-            <a:avLst/>
-          </a:prstGeom>
-          <a:solidFill>
-            <a:srgbClr val="12B5B0"/>
-          </a:solidFill>
-          <a:ln>
-            <a:noFill/>
-          </a:ln>
-          <a:effectLst/>
-        </p:spPr>
-        <p:style>
-          <a:lnRef idx="1">
-            <a:schemeClr val="accent1"/>
-          </a:lnRef>
-          <a:fillRef idx="3">
-            <a:schemeClr val="accent1"/>
-          </a:fillRef>
-          <a:effectRef idx="2">
-            <a:schemeClr val="accent1"/>
-          </a:effectRef>
-          <a:fontRef idx="minor">
-            <a:schemeClr val="lt1"/>
-          </a:fontRef>
-        </p:style>
-        <p:txBody>
-          <a:bodyPr rtlCol="0" anchor="ctr"/>
-          <a:lstStyle/>
-          <a:p>
-            <a:pPr algn="ctr"/>
-          </a:p>
-        </p:txBody>
-      </p:sp>
-      <p:sp>
-        <p:nvSpPr>
-          <p:cNvPr id="530" name="Oval 529"/>
-          <p:cNvSpPr/>
-          <p:nvPr/>
-        </p:nvSpPr>
-        <p:spPr>
-          <a:xfrm>
-            <a:off x="10733043" y="4767712"/>
-            <a:ext cx="53035" cy="53035"/>
-          </a:xfrm>
-          <a:prstGeom prst="ellipse">
-            <a:avLst/>
-          </a:prstGeom>
-          <a:solidFill>
-            <a:srgbClr val="12B5B0"/>
-          </a:solidFill>
-          <a:ln>
-            <a:noFill/>
-          </a:ln>
-          <a:effectLst/>
-        </p:spPr>
-        <p:style>
-          <a:lnRef idx="1">
-            <a:schemeClr val="accent1"/>
-          </a:lnRef>
-          <a:fillRef idx="3">
-            <a:schemeClr val="accent1"/>
-          </a:fillRef>
-          <a:effectRef idx="2">
-            <a:schemeClr val="accent1"/>
-          </a:effectRef>
-          <a:fontRef idx="minor">
-            <a:schemeClr val="lt1"/>
-          </a:fontRef>
-        </p:style>
-        <p:txBody>
-          <a:bodyPr rtlCol="0" anchor="ctr"/>
-          <a:lstStyle/>
-          <a:p>
-            <a:pPr algn="ctr"/>
-          </a:p>
-        </p:txBody>
-      </p:sp>
-      <p:sp>
-        <p:nvSpPr>
-          <p:cNvPr id="531" name="Oval 530"/>
-          <p:cNvSpPr/>
-          <p:nvPr/>
-        </p:nvSpPr>
-        <p:spPr>
-          <a:xfrm>
-            <a:off x="10877966" y="4715844"/>
-            <a:ext cx="53035" cy="53035"/>
-          </a:xfrm>
-          <a:prstGeom prst="ellipse">
-            <a:avLst/>
-          </a:prstGeom>
-          <a:solidFill>
-            <a:srgbClr val="12B5B0"/>
-          </a:solidFill>
-          <a:ln>
-            <a:noFill/>
-          </a:ln>
-          <a:effectLst/>
-        </p:spPr>
-        <p:style>
-          <a:lnRef idx="1">
-            <a:schemeClr val="accent1"/>
-          </a:lnRef>
-          <a:fillRef idx="3">
-            <a:schemeClr val="accent1"/>
-          </a:fillRef>
-          <a:effectRef idx="2">
-            <a:schemeClr val="accent1"/>
-          </a:effectRef>
-          <a:fontRef idx="minor">
-            <a:schemeClr val="lt1"/>
-          </a:fontRef>
-        </p:style>
-        <p:txBody>
-          <a:bodyPr rtlCol="0" anchor="ctr"/>
-          <a:lstStyle/>
-          <a:p>
-            <a:pPr algn="ctr"/>
-          </a:p>
-        </p:txBody>
-      </p:sp>
-      <p:sp>
-        <p:nvSpPr>
-          <p:cNvPr id="532" name="Oval 531"/>
-          <p:cNvSpPr/>
-          <p:nvPr/>
-        </p:nvSpPr>
-        <p:spPr>
-          <a:xfrm>
-            <a:off x="11022888" y="4703120"/>
-            <a:ext cx="53035" cy="53035"/>
-          </a:xfrm>
-          <a:prstGeom prst="ellipse">
-            <a:avLst/>
-          </a:prstGeom>
-          <a:solidFill>
-            <a:srgbClr val="12B5B0"/>
-          </a:solidFill>
-          <a:ln>
-            <a:noFill/>
-          </a:ln>
-          <a:effectLst/>
-        </p:spPr>
-        <p:style>
-          <a:lnRef idx="1">
-            <a:schemeClr val="accent1"/>
-          </a:lnRef>
-          <a:fillRef idx="3">
-            <a:schemeClr val="accent1"/>
-          </a:fillRef>
-          <a:effectRef idx="2">
-            <a:schemeClr val="accent1"/>
-          </a:effectRef>
-          <a:fontRef idx="minor">
-            <a:schemeClr val="lt1"/>
-          </a:fontRef>
-        </p:style>
-        <p:txBody>
-          <a:bodyPr rtlCol="0" anchor="ctr"/>
-          <a:lstStyle/>
-          <a:p>
-            <a:pPr algn="ctr"/>
-          </a:p>
-        </p:txBody>
-      </p:sp>
-      <p:sp>
-        <p:nvSpPr>
-          <p:cNvPr id="533" name="Oval 532"/>
-          <p:cNvSpPr/>
-          <p:nvPr/>
-        </p:nvSpPr>
-        <p:spPr>
-          <a:xfrm>
-            <a:off x="11167810" y="4702958"/>
-            <a:ext cx="53035" cy="53035"/>
-          </a:xfrm>
-          <a:prstGeom prst="ellipse">
-            <a:avLst/>
-          </a:prstGeom>
-          <a:solidFill>
-            <a:srgbClr val="12B5B0"/>
-          </a:solidFill>
-          <a:ln>
-            <a:noFill/>
-          </a:ln>
-          <a:effectLst/>
-        </p:spPr>
-        <p:style>
-          <a:lnRef idx="1">
-            <a:schemeClr val="accent1"/>
-          </a:lnRef>
-          <a:fillRef idx="3">
-            <a:schemeClr val="accent1"/>
-          </a:fillRef>
-          <a:effectRef idx="2">
-            <a:schemeClr val="accent1"/>
-          </a:effectRef>
-          <a:fontRef idx="minor">
-            <a:schemeClr val="lt1"/>
-          </a:fontRef>
-        </p:style>
-        <p:txBody>
-          <a:bodyPr rtlCol="0" anchor="ctr"/>
-          <a:lstStyle/>
-          <a:p>
-            <a:pPr algn="ctr"/>
-          </a:p>
-        </p:txBody>
-      </p:sp>
-      <p:sp>
-        <p:nvSpPr>
-          <p:cNvPr id="534" name="Oval 533"/>
-          <p:cNvSpPr/>
-          <p:nvPr/>
-        </p:nvSpPr>
-        <p:spPr>
-          <a:xfrm>
-            <a:off x="11312732" y="4712327"/>
-            <a:ext cx="53035" cy="53035"/>
-          </a:xfrm>
-          <a:prstGeom prst="ellipse">
-            <a:avLst/>
-          </a:prstGeom>
-          <a:solidFill>
-            <a:srgbClr val="12B5B0"/>
-          </a:solidFill>
-          <a:ln>
-            <a:noFill/>
-          </a:ln>
-          <a:effectLst/>
-        </p:spPr>
-        <p:style>
-          <a:lnRef idx="1">
-            <a:schemeClr val="accent1"/>
-          </a:lnRef>
-          <a:fillRef idx="3">
-            <a:schemeClr val="accent1"/>
-          </a:fillRef>
-          <a:effectRef idx="2">
-            <a:schemeClr val="accent1"/>
-          </a:effectRef>
-          <a:fontRef idx="minor">
-            <a:schemeClr val="lt1"/>
-          </a:fontRef>
-        </p:style>
-        <p:txBody>
-          <a:bodyPr rtlCol="0" anchor="ctr"/>
-          <a:lstStyle/>
-          <a:p>
-            <a:pPr algn="ctr"/>
-          </a:p>
-        </p:txBody>
-      </p:sp>
-      <p:sp>
-        <p:nvSpPr>
-          <p:cNvPr id="535" name="Rectangle 534"/>
-          <p:cNvSpPr/>
-          <p:nvPr/>
-        </p:nvSpPr>
-        <p:spPr>
-          <a:xfrm>
-            <a:off x="8601943" y="5102352"/>
-            <a:ext cx="3010937" cy="822960"/>
+          <p:cNvPr id="537" name="Rectangle 536"/>
+          <p:cNvSpPr/>
+          <p:nvPr/>
+        </p:nvSpPr>
+        <p:spPr>
+          <a:xfrm>
+            <a:off x="9032077" y="5102352"/>
+            <a:ext cx="2580803" cy="822960"/>
           </a:xfrm>
           <a:prstGeom prst="rect">
             <a:avLst/>
@@ -27400,14 +27488,14 @@
       </p:sp>
       <p:sp>
         <p:nvSpPr>
-          <p:cNvPr id="536" name="TextBox 535"/>
+          <p:cNvPr id="538" name="TextBox 537"/>
           <p:cNvSpPr txBox="1"/>
           <p:nvPr/>
         </p:nvSpPr>
         <p:spPr>
           <a:xfrm>
-            <a:off x="8711671" y="5129784"/>
-            <a:ext cx="2791481" cy="164592"/>
+            <a:off x="9123517" y="5129784"/>
+            <a:ext cx="1238785" cy="182880"/>
           </a:xfrm>
           <a:prstGeom prst="rect">
             <a:avLst/>
@@ -27436,14 +27524,14 @@
       </p:sp>
       <p:sp>
         <p:nvSpPr>
-          <p:cNvPr id="537" name="TextBox 536"/>
+          <p:cNvPr id="539" name="TextBox 538"/>
           <p:cNvSpPr txBox="1"/>
           <p:nvPr/>
         </p:nvSpPr>
         <p:spPr>
           <a:xfrm>
-            <a:off x="8711671" y="5303520"/>
-            <a:ext cx="2791481" cy="164592"/>
+            <a:off x="10219246" y="5129784"/>
+            <a:ext cx="1217250" cy="182880"/>
           </a:xfrm>
           <a:prstGeom prst="rect">
             <a:avLst/>
@@ -27456,7 +27544,7 @@
           </a:bodyPr>
           <a:lstStyle/>
           <a:p>
-            <a:pPr algn="ctr"/>
+            <a:pPr algn="r"/>
             <a:r>
               <a:rPr sz="900" b="1">
                 <a:solidFill>
@@ -27472,14 +27560,14 @@
       </p:sp>
       <p:sp>
         <p:nvSpPr>
-          <p:cNvPr id="538" name="Rectangle 537"/>
-          <p:cNvSpPr/>
-          <p:nvPr/>
-        </p:nvSpPr>
-        <p:spPr>
-          <a:xfrm>
-            <a:off x="8803111" y="5792724"/>
-            <a:ext cx="2608601" cy="13716"/>
+          <p:cNvPr id="540" name="Rectangle 539"/>
+          <p:cNvSpPr/>
+          <p:nvPr/>
+        </p:nvSpPr>
+        <p:spPr>
+          <a:xfrm>
+            <a:off x="9233245" y="5792724"/>
+            <a:ext cx="2178467" cy="13716"/>
           </a:xfrm>
           <a:prstGeom prst="rect">
             <a:avLst/>
@@ -27516,14 +27604,14 @@
       </p:sp>
       <p:sp>
         <p:nvSpPr>
-          <p:cNvPr id="539" name="Rectangle 538"/>
-          <p:cNvSpPr/>
-          <p:nvPr/>
-        </p:nvSpPr>
-        <p:spPr>
-          <a:xfrm>
-            <a:off x="8803111" y="5513832"/>
-            <a:ext cx="13716" cy="292608"/>
+          <p:cNvPr id="541" name="Rectangle 540"/>
+          <p:cNvSpPr/>
+          <p:nvPr/>
+        </p:nvSpPr>
+        <p:spPr>
+          <a:xfrm>
+            <a:off x="9233245" y="5413248"/>
+            <a:ext cx="13716" cy="393192"/>
           </a:xfrm>
           <a:prstGeom prst="rect">
             <a:avLst/>
@@ -27560,13 +27648,13 @@
       </p:sp>
       <p:sp>
         <p:nvSpPr>
-          <p:cNvPr id="540" name="Oval 539"/>
-          <p:cNvSpPr/>
-          <p:nvPr/>
-        </p:nvSpPr>
-        <p:spPr>
-          <a:xfrm>
-            <a:off x="10973192" y="5518310"/>
+          <p:cNvPr id="542" name="Oval 541"/>
+          <p:cNvSpPr/>
+          <p:nvPr/>
+        </p:nvSpPr>
+        <p:spPr>
+          <a:xfrm>
+            <a:off x="10522820" y="5628404"/>
             <a:ext cx="32918" cy="32918"/>
           </a:xfrm>
           <a:prstGeom prst="ellipse">
@@ -27604,13 +27692,13 @@
       </p:sp>
       <p:sp>
         <p:nvSpPr>
-          <p:cNvPr id="541" name="Oval 540"/>
-          <p:cNvSpPr/>
-          <p:nvPr/>
-        </p:nvSpPr>
-        <p:spPr>
-          <a:xfrm>
-            <a:off x="10350559" y="5643545"/>
+          <p:cNvPr id="543" name="Oval 542"/>
+          <p:cNvSpPr/>
+          <p:nvPr/>
+        </p:nvSpPr>
+        <p:spPr>
+          <a:xfrm>
+            <a:off x="10582777" y="5551348"/>
             <a:ext cx="32918" cy="32918"/>
           </a:xfrm>
           <a:prstGeom prst="ellipse">
@@ -27648,13 +27736,13 @@
       </p:sp>
       <p:sp>
         <p:nvSpPr>
-          <p:cNvPr id="542" name="Oval 541"/>
-          <p:cNvSpPr/>
-          <p:nvPr/>
-        </p:nvSpPr>
-        <p:spPr>
-          <a:xfrm>
-            <a:off x="10422355" y="5572910"/>
+          <p:cNvPr id="544" name="Oval 543"/>
+          <p:cNvSpPr/>
+          <p:nvPr/>
+        </p:nvSpPr>
+        <p:spPr>
+          <a:xfrm>
+            <a:off x="10131898" y="5638697"/>
             <a:ext cx="32918" cy="32918"/>
           </a:xfrm>
           <a:prstGeom prst="ellipse">
@@ -27692,13 +27780,13 @@
       </p:sp>
       <p:sp>
         <p:nvSpPr>
-          <p:cNvPr id="543" name="Oval 542"/>
-          <p:cNvSpPr/>
-          <p:nvPr/>
-        </p:nvSpPr>
-        <p:spPr>
-          <a:xfrm>
-            <a:off x="9882451" y="5652980"/>
+          <p:cNvPr id="545" name="Oval 544"/>
+          <p:cNvSpPr/>
+          <p:nvPr/>
+        </p:nvSpPr>
+        <p:spPr>
+          <a:xfrm>
+            <a:off x="10144246" y="5662783"/>
             <a:ext cx="32918" cy="32918"/>
           </a:xfrm>
           <a:prstGeom prst="ellipse">
@@ -27736,13 +27824,13 @@
       </p:sp>
       <p:sp>
         <p:nvSpPr>
-          <p:cNvPr id="544" name="Oval 543"/>
-          <p:cNvSpPr/>
-          <p:nvPr/>
-        </p:nvSpPr>
-        <p:spPr>
-          <a:xfrm>
-            <a:off x="9897237" y="5675059"/>
+          <p:cNvPr id="546" name="Oval 545"/>
+          <p:cNvSpPr/>
+          <p:nvPr/>
+        </p:nvSpPr>
+        <p:spPr>
+          <a:xfrm>
+            <a:off x="10190101" y="5593106"/>
             <a:ext cx="32918" cy="32918"/>
           </a:xfrm>
           <a:prstGeom prst="ellipse">
@@ -27780,13 +27868,13 @@
       </p:sp>
       <p:sp>
         <p:nvSpPr>
-          <p:cNvPr id="545" name="Oval 544"/>
-          <p:cNvSpPr/>
-          <p:nvPr/>
-        </p:nvSpPr>
-        <p:spPr>
-          <a:xfrm>
-            <a:off x="9952147" y="5611188"/>
+          <p:cNvPr id="547" name="Oval 546"/>
+          <p:cNvSpPr/>
+          <p:nvPr/>
+        </p:nvSpPr>
+        <p:spPr>
+          <a:xfrm>
+            <a:off x="9267708" y="5650158"/>
             <a:ext cx="32918" cy="32918"/>
           </a:xfrm>
           <a:prstGeom prst="ellipse">
@@ -27824,13 +27912,13 @@
       </p:sp>
       <p:sp>
         <p:nvSpPr>
-          <p:cNvPr id="546" name="Oval 545"/>
-          <p:cNvSpPr/>
-          <p:nvPr/>
-        </p:nvSpPr>
-        <p:spPr>
-          <a:xfrm>
-            <a:off x="8847628" y="5663486"/>
+          <p:cNvPr id="548" name="Oval 547"/>
+          <p:cNvSpPr/>
+          <p:nvPr/>
+        </p:nvSpPr>
+        <p:spPr>
+          <a:xfrm>
+            <a:off x="10283149" y="5528923"/>
             <a:ext cx="32918" cy="32918"/>
           </a:xfrm>
           <a:prstGeom prst="ellipse">
@@ -27868,13 +27956,13 @@
       </p:sp>
       <p:sp>
         <p:nvSpPr>
-          <p:cNvPr id="547" name="Oval 546"/>
-          <p:cNvSpPr/>
-          <p:nvPr/>
-        </p:nvSpPr>
-        <p:spPr>
-          <a:xfrm>
-            <a:off x="10063566" y="5552354"/>
+          <p:cNvPr id="549" name="Oval 548"/>
+          <p:cNvSpPr/>
+          <p:nvPr/>
+        </p:nvSpPr>
+        <p:spPr>
+          <a:xfrm>
+            <a:off x="10880187" y="5701063"/>
             <a:ext cx="32918" cy="32918"/>
           </a:xfrm>
           <a:prstGeom prst="ellipse">
@@ -27912,13 +28000,13 @@
       </p:sp>
       <p:sp>
         <p:nvSpPr>
-          <p:cNvPr id="548" name="Oval 547"/>
-          <p:cNvSpPr/>
-          <p:nvPr/>
-        </p:nvSpPr>
-        <p:spPr>
-          <a:xfrm>
-            <a:off x="10778488" y="5710149"/>
+          <p:cNvPr id="550" name="Oval 549"/>
+          <p:cNvSpPr/>
+          <p:nvPr/>
+        </p:nvSpPr>
+        <p:spPr>
+          <a:xfrm>
+            <a:off x="10215153" y="5511326"/>
             <a:ext cx="32918" cy="32918"/>
           </a:xfrm>
           <a:prstGeom prst="ellipse">
@@ -27956,13 +28044,13 @@
       </p:sp>
       <p:sp>
         <p:nvSpPr>
-          <p:cNvPr id="549" name="Oval 548"/>
-          <p:cNvSpPr/>
-          <p:nvPr/>
-        </p:nvSpPr>
-        <p:spPr>
-          <a:xfrm>
-            <a:off x="9982145" y="5536224"/>
+          <p:cNvPr id="551" name="Oval 550"/>
+          <p:cNvSpPr/>
+          <p:nvPr/>
+        </p:nvSpPr>
+        <p:spPr>
+          <a:xfrm>
+            <a:off x="10247677" y="5488417"/>
             <a:ext cx="32918" cy="32918"/>
           </a:xfrm>
           <a:prstGeom prst="ellipse">
@@ -28000,13 +28088,13 @@
       </p:sp>
       <p:sp>
         <p:nvSpPr>
-          <p:cNvPr id="550" name="Oval 549"/>
-          <p:cNvSpPr/>
-          <p:nvPr/>
-        </p:nvSpPr>
-        <p:spPr>
-          <a:xfrm>
-            <a:off x="10021091" y="5515224"/>
+          <p:cNvPr id="552" name="Oval 551"/>
+          <p:cNvSpPr/>
+          <p:nvPr/>
+        </p:nvSpPr>
+        <p:spPr>
+          <a:xfrm>
+            <a:off x="9496622" y="5590656"/>
             <a:ext cx="32918" cy="32918"/>
           </a:xfrm>
           <a:prstGeom prst="ellipse">
@@ -28044,13 +28132,13 @@
       </p:sp>
       <p:sp>
         <p:nvSpPr>
-          <p:cNvPr id="551" name="Oval 550"/>
-          <p:cNvSpPr/>
-          <p:nvPr/>
-        </p:nvSpPr>
-        <p:spPr>
-          <a:xfrm>
-            <a:off x="9121742" y="5608942"/>
+          <p:cNvPr id="553" name="Oval 552"/>
+          <p:cNvSpPr/>
+          <p:nvPr/>
+        </p:nvSpPr>
+        <p:spPr>
+          <a:xfrm>
+            <a:off x="9416580" y="5594248"/>
             <a:ext cx="32918" cy="32918"/>
           </a:xfrm>
           <a:prstGeom prst="ellipse">
@@ -28088,13 +28176,13 @@
       </p:sp>
       <p:sp>
         <p:nvSpPr>
-          <p:cNvPr id="552" name="Oval 551"/>
-          <p:cNvSpPr/>
-          <p:nvPr/>
-        </p:nvSpPr>
-        <p:spPr>
-          <a:xfrm>
-            <a:off x="9025894" y="5612235"/>
+          <p:cNvPr id="554" name="Oval 553"/>
+          <p:cNvSpPr/>
+          <p:nvPr/>
+        </p:nvSpPr>
+        <p:spPr>
+          <a:xfrm>
+            <a:off x="10328155" y="5467462"/>
             <a:ext cx="32918" cy="32918"/>
           </a:xfrm>
           <a:prstGeom prst="ellipse">
@@ -28132,13 +28220,13 @@
       </p:sp>
       <p:sp>
         <p:nvSpPr>
-          <p:cNvPr id="553" name="Oval 552"/>
-          <p:cNvSpPr/>
-          <p:nvPr/>
-        </p:nvSpPr>
-        <p:spPr>
-          <a:xfrm>
-            <a:off x="10117459" y="5496015"/>
+          <p:cNvPr id="555" name="Oval 554"/>
+          <p:cNvSpPr/>
+          <p:nvPr/>
+        </p:nvSpPr>
+        <p:spPr>
+          <a:xfrm>
+            <a:off x="10603243" y="5480569"/>
             <a:ext cx="32918" cy="32918"/>
           </a:xfrm>
           <a:prstGeom prst="ellipse">
@@ -28176,13 +28264,13 @@
       </p:sp>
       <p:sp>
         <p:nvSpPr>
-          <p:cNvPr id="554" name="Oval 553"/>
-          <p:cNvSpPr/>
-          <p:nvPr/>
-        </p:nvSpPr>
-        <p:spPr>
-          <a:xfrm>
-            <a:off x="10446862" y="5508029"/>
+          <p:cNvPr id="556" name="Oval 555"/>
+          <p:cNvSpPr/>
+          <p:nvPr/>
+        </p:nvSpPr>
+        <p:spPr>
+          <a:xfrm>
+            <a:off x="10814648" y="5700324"/>
             <a:ext cx="32918" cy="32918"/>
           </a:xfrm>
           <a:prstGeom prst="ellipse">
@@ -28220,13 +28308,13 @@
       </p:sp>
       <p:sp>
         <p:nvSpPr>
-          <p:cNvPr id="555" name="Oval 554"/>
-          <p:cNvSpPr/>
-          <p:nvPr/>
-        </p:nvSpPr>
-        <p:spPr>
-          <a:xfrm>
-            <a:off x="10700009" y="5709472"/>
+          <p:cNvPr id="557" name="Oval 556"/>
+          <p:cNvSpPr/>
+          <p:nvPr/>
+        </p:nvSpPr>
+        <p:spPr>
+          <a:xfrm>
+            <a:off x="10331032" y="5471728"/>
             <a:ext cx="32918" cy="32918"/>
           </a:xfrm>
           <a:prstGeom prst="ellipse">
@@ -28264,13 +28352,13 @@
       </p:sp>
       <p:sp>
         <p:nvSpPr>
-          <p:cNvPr id="556" name="Oval 555"/>
-          <p:cNvSpPr/>
-          <p:nvPr/>
-        </p:nvSpPr>
-        <p:spPr>
-          <a:xfrm>
-            <a:off x="10120903" y="5499925"/>
+          <p:cNvPr id="558" name="Oval 557"/>
+          <p:cNvSpPr/>
+          <p:nvPr/>
+        </p:nvSpPr>
+        <p:spPr>
+          <a:xfrm>
+            <a:off x="10314567" y="5573990"/>
             <a:ext cx="32918" cy="32918"/>
           </a:xfrm>
           <a:prstGeom prst="ellipse">
@@ -28308,13 +28396,13 @@
       </p:sp>
       <p:sp>
         <p:nvSpPr>
-          <p:cNvPr id="557" name="Oval 556"/>
-          <p:cNvSpPr/>
-          <p:nvPr/>
-        </p:nvSpPr>
-        <p:spPr>
-          <a:xfrm>
-            <a:off x="10101188" y="5593666"/>
+          <p:cNvPr id="559" name="Oval 558"/>
+          <p:cNvSpPr/>
+          <p:nvPr/>
+        </p:nvSpPr>
+        <p:spPr>
+          <a:xfrm>
+            <a:off x="11288220" y="5497616"/>
             <a:ext cx="32918" cy="32918"/>
           </a:xfrm>
           <a:prstGeom prst="ellipse">
@@ -28352,13 +28440,13 @@
       </p:sp>
       <p:sp>
         <p:nvSpPr>
-          <p:cNvPr id="558" name="Oval 557"/>
-          <p:cNvSpPr/>
-          <p:nvPr/>
-        </p:nvSpPr>
-        <p:spPr>
-          <a:xfrm>
-            <a:off x="11267087" y="5523656"/>
+          <p:cNvPr id="560" name="Oval 559"/>
+          <p:cNvSpPr/>
+          <p:nvPr/>
+        </p:nvSpPr>
+        <p:spPr>
+          <a:xfrm>
+            <a:off x="11083884" y="5769370"/>
             <a:ext cx="32918" cy="32918"/>
           </a:xfrm>
           <a:prstGeom prst="ellipse">
@@ -28396,13 +28484,13 @@
       </p:sp>
       <p:sp>
         <p:nvSpPr>
-          <p:cNvPr id="559" name="Oval 558"/>
-          <p:cNvSpPr/>
-          <p:nvPr/>
-        </p:nvSpPr>
-        <p:spPr>
-          <a:xfrm>
-            <a:off x="11022405" y="5772764"/>
+          <p:cNvPr id="561" name="Oval 560"/>
+          <p:cNvSpPr/>
+          <p:nvPr/>
+        </p:nvSpPr>
+        <p:spPr>
+          <a:xfrm>
+            <a:off x="10811607" y="5712128"/>
             <a:ext cx="32918" cy="32918"/>
           </a:xfrm>
           <a:prstGeom prst="ellipse">
@@ -28440,13 +28528,13 @@
       </p:sp>
       <p:sp>
         <p:nvSpPr>
-          <p:cNvPr id="560" name="Oval 559"/>
-          <p:cNvSpPr/>
-          <p:nvPr/>
-        </p:nvSpPr>
-        <p:spPr>
-          <a:xfrm>
-            <a:off x="10696368" y="5720292"/>
+          <p:cNvPr id="562" name="Oval 561"/>
+          <p:cNvSpPr/>
+          <p:nvPr/>
+        </p:nvSpPr>
+        <p:spPr>
+          <a:xfrm>
+            <a:off x="9638770" y="5764820"/>
             <a:ext cx="32918" cy="32918"/>
           </a:xfrm>
           <a:prstGeom prst="ellipse">
@@ -28484,13 +28572,13 @@
       </p:sp>
       <p:sp>
         <p:nvSpPr>
-          <p:cNvPr id="561" name="Oval 560"/>
-          <p:cNvSpPr/>
-          <p:nvPr/>
-        </p:nvSpPr>
-        <p:spPr>
-          <a:xfrm>
-            <a:off x="9291957" y="5768593"/>
+          <p:cNvPr id="563" name="Oval 562"/>
+          <p:cNvSpPr/>
+          <p:nvPr/>
+        </p:nvSpPr>
+        <p:spPr>
+          <a:xfrm>
+            <a:off x="10288308" y="5756892"/>
             <a:ext cx="32918" cy="32918"/>
           </a:xfrm>
           <a:prstGeom prst="ellipse">
@@ -28528,13 +28616,13 @@
       </p:sp>
       <p:sp>
         <p:nvSpPr>
-          <p:cNvPr id="562" name="Oval 561"/>
-          <p:cNvSpPr/>
-          <p:nvPr/>
-        </p:nvSpPr>
-        <p:spPr>
-          <a:xfrm>
-            <a:off x="10069744" y="5761325"/>
+          <p:cNvPr id="564" name="Oval 563"/>
+          <p:cNvSpPr/>
+          <p:nvPr/>
+        </p:nvSpPr>
+        <p:spPr>
+          <a:xfrm>
+            <a:off x="11212351" y="5506757"/>
             <a:ext cx="32918" cy="32918"/>
           </a:xfrm>
           <a:prstGeom prst="ellipse">
@@ -28572,13 +28660,13 @@
       </p:sp>
       <p:sp>
         <p:nvSpPr>
-          <p:cNvPr id="563" name="Oval 562"/>
-          <p:cNvSpPr/>
-          <p:nvPr/>
-        </p:nvSpPr>
-        <p:spPr>
-          <a:xfrm>
-            <a:off x="11176238" y="5532035"/>
+          <p:cNvPr id="565" name="Oval 564"/>
+          <p:cNvSpPr/>
+          <p:nvPr/>
+        </p:nvSpPr>
+        <p:spPr>
+          <a:xfrm>
+            <a:off x="10934249" y="5748658"/>
             <a:ext cx="32918" cy="32918"/>
           </a:xfrm>
           <a:prstGeom prst="ellipse">
@@ -28616,13 +28704,13 @@
       </p:sp>
       <p:sp>
         <p:nvSpPr>
-          <p:cNvPr id="564" name="Oval 563"/>
-          <p:cNvSpPr/>
-          <p:nvPr/>
-        </p:nvSpPr>
-        <p:spPr>
-          <a:xfrm>
-            <a:off x="10843224" y="5753778"/>
+          <p:cNvPr id="566" name="Oval 565"/>
+          <p:cNvSpPr/>
+          <p:nvPr/>
+        </p:nvSpPr>
+        <p:spPr>
+          <a:xfrm>
+            <a:off x="9359510" y="5565469"/>
             <a:ext cx="32918" cy="32918"/>
           </a:xfrm>
           <a:prstGeom prst="ellipse">
@@ -28660,13 +28748,13 @@
       </p:sp>
       <p:sp>
         <p:nvSpPr>
-          <p:cNvPr id="565" name="Oval 564"/>
-          <p:cNvSpPr/>
-          <p:nvPr/>
-        </p:nvSpPr>
-        <p:spPr>
-          <a:xfrm>
-            <a:off x="8957557" y="5585854"/>
+          <p:cNvPr id="567" name="Oval 566"/>
+          <p:cNvSpPr/>
+          <p:nvPr/>
+        </p:nvSpPr>
+        <p:spPr>
+          <a:xfrm>
+            <a:off x="10864098" y="5504753"/>
             <a:ext cx="32918" cy="32918"/>
           </a:xfrm>
           <a:prstGeom prst="ellipse">
@@ -28704,13 +28792,13 @@
       </p:sp>
       <p:sp>
         <p:nvSpPr>
-          <p:cNvPr id="566" name="Oval 565"/>
-          <p:cNvSpPr/>
-          <p:nvPr/>
-        </p:nvSpPr>
-        <p:spPr>
-          <a:xfrm>
-            <a:off x="10759223" y="5530198"/>
+          <p:cNvPr id="568" name="Oval 567"/>
+          <p:cNvSpPr/>
+          <p:nvPr/>
+        </p:nvSpPr>
+        <p:spPr>
+          <a:xfrm>
+            <a:off x="11169862" y="5541482"/>
             <a:ext cx="32918" cy="32918"/>
           </a:xfrm>
           <a:prstGeom prst="ellipse">
@@ -28748,13 +28836,13 @@
       </p:sp>
       <p:sp>
         <p:nvSpPr>
-          <p:cNvPr id="567" name="Oval 566"/>
-          <p:cNvSpPr/>
-          <p:nvPr/>
-        </p:nvSpPr>
-        <p:spPr>
-          <a:xfrm>
-            <a:off x="11125359" y="5563866"/>
+          <p:cNvPr id="569" name="Oval 568"/>
+          <p:cNvSpPr/>
+          <p:nvPr/>
+        </p:nvSpPr>
+        <p:spPr>
+          <a:xfrm>
+            <a:off x="10993601" y="5499951"/>
             <a:ext cx="32918" cy="32918"/>
           </a:xfrm>
           <a:prstGeom prst="ellipse">
@@ -28792,13 +28880,13 @@
       </p:sp>
       <p:sp>
         <p:nvSpPr>
-          <p:cNvPr id="568" name="Oval 567"/>
-          <p:cNvSpPr/>
-          <p:nvPr/>
-        </p:nvSpPr>
-        <p:spPr>
-          <a:xfrm>
-            <a:off x="10914296" y="5525796"/>
+          <p:cNvPr id="570" name="Oval 569"/>
+          <p:cNvSpPr/>
+          <p:nvPr/>
+        </p:nvSpPr>
+        <p:spPr>
+          <a:xfrm>
+            <a:off x="10310851" y="5745284"/>
             <a:ext cx="32918" cy="32918"/>
           </a:xfrm>
           <a:prstGeom prst="ellipse">
@@ -28836,13 +28924,13 @@
       </p:sp>
       <p:sp>
         <p:nvSpPr>
-          <p:cNvPr id="569" name="Oval 568"/>
-          <p:cNvSpPr/>
-          <p:nvPr/>
-        </p:nvSpPr>
-        <p:spPr>
-          <a:xfrm>
-            <a:off x="10096738" y="5750685"/>
+          <p:cNvPr id="571" name="Oval 570"/>
+          <p:cNvSpPr/>
+          <p:nvPr/>
+        </p:nvSpPr>
+        <p:spPr>
+          <a:xfrm>
+            <a:off x="9670611" y="5537650"/>
             <a:ext cx="32918" cy="32918"/>
           </a:xfrm>
           <a:prstGeom prst="ellipse">
@@ -28880,13 +28968,13 @@
       </p:sp>
       <p:sp>
         <p:nvSpPr>
-          <p:cNvPr id="570" name="Oval 569"/>
-          <p:cNvSpPr/>
-          <p:nvPr/>
-        </p:nvSpPr>
-        <p:spPr>
-          <a:xfrm>
-            <a:off x="9330084" y="5560354"/>
+          <p:cNvPr id="572" name="Oval 571"/>
+          <p:cNvSpPr/>
+          <p:nvPr/>
+        </p:nvSpPr>
+        <p:spPr>
+          <a:xfrm>
+            <a:off x="10319105" y="5555413"/>
             <a:ext cx="32918" cy="32918"/>
           </a:xfrm>
           <a:prstGeom prst="ellipse">
@@ -28924,13 +29012,13 @@
       </p:sp>
       <p:sp>
         <p:nvSpPr>
-          <p:cNvPr id="571" name="Oval 570"/>
-          <p:cNvSpPr/>
-          <p:nvPr/>
-        </p:nvSpPr>
-        <p:spPr>
-          <a:xfrm>
-            <a:off x="10106622" y="5576637"/>
+          <p:cNvPr id="573" name="Oval 572"/>
+          <p:cNvSpPr/>
+          <p:nvPr/>
+        </p:nvSpPr>
+        <p:spPr>
+          <a:xfrm>
+            <a:off x="9297025" y="5512125"/>
             <a:ext cx="32918" cy="32918"/>
           </a:xfrm>
           <a:prstGeom prst="ellipse">
@@ -28968,13 +29056,13 @@
       </p:sp>
       <p:sp>
         <p:nvSpPr>
-          <p:cNvPr id="572" name="Oval 571"/>
-          <p:cNvSpPr/>
-          <p:nvPr/>
-        </p:nvSpPr>
-        <p:spPr>
-          <a:xfrm>
-            <a:off x="8849054" y="5601110"/>
+          <p:cNvPr id="574" name="Oval 573"/>
+          <p:cNvSpPr/>
+          <p:nvPr/>
+        </p:nvSpPr>
+        <p:spPr>
+          <a:xfrm>
+            <a:off x="9267239" y="5563265"/>
             <a:ext cx="53035" cy="53035"/>
           </a:xfrm>
           <a:prstGeom prst="ellipse">
@@ -29012,13 +29100,13 @@
       </p:sp>
       <p:sp>
         <p:nvSpPr>
-          <p:cNvPr id="573" name="Oval 572"/>
-          <p:cNvSpPr/>
-          <p:nvPr/>
-        </p:nvSpPr>
-        <p:spPr>
-          <a:xfrm>
-            <a:off x="8993976" y="5614775"/>
+          <p:cNvPr id="575" name="Oval 574"/>
+          <p:cNvSpPr/>
+          <p:nvPr/>
+        </p:nvSpPr>
+        <p:spPr>
+          <a:xfrm>
+            <a:off x="9388265" y="5539589"/>
             <a:ext cx="53035" cy="53035"/>
           </a:xfrm>
           <a:prstGeom prst="ellipse">
@@ -29056,13 +29144,13 @@
       </p:sp>
       <p:sp>
         <p:nvSpPr>
-          <p:cNvPr id="574" name="Oval 573"/>
-          <p:cNvSpPr/>
-          <p:nvPr/>
-        </p:nvSpPr>
-        <p:spPr>
-          <a:xfrm>
-            <a:off x="9138898" y="5582996"/>
+          <p:cNvPr id="576" name="Oval 575"/>
+          <p:cNvSpPr/>
+          <p:nvPr/>
+        </p:nvSpPr>
+        <p:spPr>
+          <a:xfrm>
+            <a:off x="9509291" y="5631242"/>
             <a:ext cx="53035" cy="53035"/>
           </a:xfrm>
           <a:prstGeom prst="ellipse">
@@ -29100,13 +29188,13 @@
       </p:sp>
       <p:sp>
         <p:nvSpPr>
-          <p:cNvPr id="575" name="Oval 574"/>
-          <p:cNvSpPr/>
-          <p:nvPr/>
-        </p:nvSpPr>
-        <p:spPr>
-          <a:xfrm>
-            <a:off x="9283820" y="5561293"/>
+          <p:cNvPr id="577" name="Oval 576"/>
+          <p:cNvSpPr/>
+          <p:nvPr/>
+        </p:nvSpPr>
+        <p:spPr>
+          <a:xfrm>
+            <a:off x="9630317" y="5663231"/>
             <a:ext cx="53035" cy="53035"/>
           </a:xfrm>
           <a:prstGeom prst="ellipse">
@@ -29144,13 +29232,13 @@
       </p:sp>
       <p:sp>
         <p:nvSpPr>
-          <p:cNvPr id="576" name="Oval 575"/>
-          <p:cNvSpPr/>
-          <p:nvPr/>
-        </p:nvSpPr>
-        <p:spPr>
-          <a:xfrm>
-            <a:off x="9428743" y="5645308"/>
+          <p:cNvPr id="578" name="Oval 577"/>
+          <p:cNvSpPr/>
+          <p:nvPr/>
+        </p:nvSpPr>
+        <p:spPr>
+          <a:xfrm>
+            <a:off x="9751343" y="5575458"/>
             <a:ext cx="53035" cy="53035"/>
           </a:xfrm>
           <a:prstGeom prst="ellipse">
@@ -29188,13 +29276,13 @@
       </p:sp>
       <p:sp>
         <p:nvSpPr>
-          <p:cNvPr id="577" name="Oval 576"/>
-          <p:cNvSpPr/>
-          <p:nvPr/>
-        </p:nvSpPr>
-        <p:spPr>
-          <a:xfrm>
-            <a:off x="9573665" y="5674631"/>
+          <p:cNvPr id="579" name="Oval 578"/>
+          <p:cNvSpPr/>
+          <p:nvPr/>
+        </p:nvSpPr>
+        <p:spPr>
+          <a:xfrm>
+            <a:off x="9872369" y="5554196"/>
             <a:ext cx="53035" cy="53035"/>
           </a:xfrm>
           <a:prstGeom prst="ellipse">
@@ -29232,13 +29320,13 @@
       </p:sp>
       <p:sp>
         <p:nvSpPr>
-          <p:cNvPr id="578" name="Oval 577"/>
-          <p:cNvSpPr/>
-          <p:nvPr/>
-        </p:nvSpPr>
-        <p:spPr>
-          <a:xfrm>
-            <a:off x="9718587" y="5594172"/>
+          <p:cNvPr id="580" name="Oval 579"/>
+          <p:cNvSpPr/>
+          <p:nvPr/>
+        </p:nvSpPr>
+        <p:spPr>
+          <a:xfrm>
+            <a:off x="9993395" y="5573382"/>
             <a:ext cx="53035" cy="53035"/>
           </a:xfrm>
           <a:prstGeom prst="ellipse">
@@ -29276,13 +29364,13 @@
       </p:sp>
       <p:sp>
         <p:nvSpPr>
-          <p:cNvPr id="579" name="Oval 578"/>
-          <p:cNvSpPr/>
-          <p:nvPr/>
-        </p:nvSpPr>
-        <p:spPr>
-          <a:xfrm>
-            <a:off x="9863510" y="5574682"/>
+          <p:cNvPr id="581" name="Oval 580"/>
+          <p:cNvSpPr/>
+          <p:nvPr/>
+        </p:nvSpPr>
+        <p:spPr>
+          <a:xfrm>
+            <a:off x="10114421" y="5576807"/>
             <a:ext cx="53035" cy="53035"/>
           </a:xfrm>
           <a:prstGeom prst="ellipse">
@@ -29320,13 +29408,13 @@
       </p:sp>
       <p:sp>
         <p:nvSpPr>
-          <p:cNvPr id="580" name="Oval 579"/>
-          <p:cNvSpPr/>
-          <p:nvPr/>
-        </p:nvSpPr>
-        <p:spPr>
-          <a:xfrm>
-            <a:off x="10008432" y="5592270"/>
+          <p:cNvPr id="582" name="Oval 581"/>
+          <p:cNvSpPr/>
+          <p:nvPr/>
+        </p:nvSpPr>
+        <p:spPr>
+          <a:xfrm>
+            <a:off x="10235447" y="5622078"/>
             <a:ext cx="53035" cy="53035"/>
           </a:xfrm>
           <a:prstGeom prst="ellipse">
@@ -29364,13 +29452,13 @@
       </p:sp>
       <p:sp>
         <p:nvSpPr>
-          <p:cNvPr id="581" name="Oval 580"/>
-          <p:cNvSpPr/>
-          <p:nvPr/>
-        </p:nvSpPr>
-        <p:spPr>
-          <a:xfrm>
-            <a:off x="10153354" y="5595410"/>
+          <p:cNvPr id="583" name="Oval 582"/>
+          <p:cNvSpPr/>
+          <p:nvPr/>
+        </p:nvSpPr>
+        <p:spPr>
+          <a:xfrm>
+            <a:off x="10356473" y="5625077"/>
             <a:ext cx="53035" cy="53035"/>
           </a:xfrm>
           <a:prstGeom prst="ellipse">
@@ -29408,13 +29496,13 @@
       </p:sp>
       <p:sp>
         <p:nvSpPr>
-          <p:cNvPr id="582" name="Oval 581"/>
-          <p:cNvSpPr/>
-          <p:nvPr/>
-        </p:nvSpPr>
-        <p:spPr>
-          <a:xfrm>
-            <a:off x="10298276" y="5636908"/>
+          <p:cNvPr id="584" name="Oval 583"/>
+          <p:cNvSpPr/>
+          <p:nvPr/>
+        </p:nvSpPr>
+        <p:spPr>
+          <a:xfrm>
+            <a:off x="10477499" y="5574454"/>
             <a:ext cx="53035" cy="53035"/>
           </a:xfrm>
           <a:prstGeom prst="ellipse">
@@ -29452,13 +29540,13 @@
       </p:sp>
       <p:sp>
         <p:nvSpPr>
-          <p:cNvPr id="583" name="Oval 582"/>
-          <p:cNvSpPr/>
-          <p:nvPr/>
-        </p:nvSpPr>
-        <p:spPr>
-          <a:xfrm>
-            <a:off x="10443199" y="5639657"/>
+          <p:cNvPr id="585" name="Oval 584"/>
+          <p:cNvSpPr/>
+          <p:nvPr/>
+        </p:nvSpPr>
+        <p:spPr>
+          <a:xfrm>
+            <a:off x="10598525" y="5631334"/>
             <a:ext cx="53035" cy="53035"/>
           </a:xfrm>
           <a:prstGeom prst="ellipse">
@@ -29496,13 +29584,13 @@
       </p:sp>
       <p:sp>
         <p:nvSpPr>
-          <p:cNvPr id="584" name="Oval 583"/>
-          <p:cNvSpPr/>
-          <p:nvPr/>
-        </p:nvSpPr>
-        <p:spPr>
-          <a:xfrm>
-            <a:off x="10588121" y="5593252"/>
+          <p:cNvPr id="586" name="Oval 585"/>
+          <p:cNvSpPr/>
+          <p:nvPr/>
+        </p:nvSpPr>
+        <p:spPr>
+          <a:xfrm>
+            <a:off x="10719551" y="5659832"/>
             <a:ext cx="53035" cy="53035"/>
           </a:xfrm>
           <a:prstGeom prst="ellipse">
@@ -29540,13 +29628,13 @@
       </p:sp>
       <p:sp>
         <p:nvSpPr>
-          <p:cNvPr id="585" name="Oval 584"/>
-          <p:cNvSpPr/>
-          <p:nvPr/>
-        </p:nvSpPr>
-        <p:spPr>
-          <a:xfrm>
-            <a:off x="10733043" y="5645393"/>
+          <p:cNvPr id="587" name="Oval 586"/>
+          <p:cNvSpPr/>
+          <p:nvPr/>
+        </p:nvSpPr>
+        <p:spPr>
+          <a:xfrm>
+            <a:off x="10840577" y="5634051"/>
             <a:ext cx="53035" cy="53035"/>
           </a:xfrm>
           <a:prstGeom prst="ellipse">
@@ -29584,13 +29672,13 @@
       </p:sp>
       <p:sp>
         <p:nvSpPr>
-          <p:cNvPr id="586" name="Oval 585"/>
-          <p:cNvSpPr/>
-          <p:nvPr/>
-        </p:nvSpPr>
-        <p:spPr>
-          <a:xfrm>
-            <a:off x="10877966" y="5452421"/>
+          <p:cNvPr id="588" name="Oval 587"/>
+          <p:cNvSpPr/>
+          <p:nvPr/>
+        </p:nvSpPr>
+        <p:spPr>
+          <a:xfrm>
+            <a:off x="10961603" y="5420819"/>
             <a:ext cx="53035" cy="53035"/>
           </a:xfrm>
           <a:prstGeom prst="ellipse">
@@ -29628,13 +29716,13 @@
       </p:sp>
       <p:sp>
         <p:nvSpPr>
-          <p:cNvPr id="587" name="Oval 586"/>
-          <p:cNvSpPr/>
-          <p:nvPr/>
-        </p:nvSpPr>
-        <p:spPr>
-          <a:xfrm>
-            <a:off x="11022888" y="5778311"/>
+          <p:cNvPr id="589" name="Oval 588"/>
+          <p:cNvSpPr/>
+          <p:nvPr/>
+        </p:nvSpPr>
+        <p:spPr>
+          <a:xfrm>
+            <a:off x="11082629" y="5776336"/>
             <a:ext cx="53035" cy="53035"/>
           </a:xfrm>
           <a:prstGeom prst="ellipse">
@@ -29672,13 +29760,13 @@
       </p:sp>
       <p:sp>
         <p:nvSpPr>
-          <p:cNvPr id="588" name="Oval 587"/>
-          <p:cNvSpPr/>
-          <p:nvPr/>
-        </p:nvSpPr>
-        <p:spPr>
-          <a:xfrm>
-            <a:off x="11167810" y="5485010"/>
+          <p:cNvPr id="590" name="Oval 589"/>
+          <p:cNvSpPr/>
+          <p:nvPr/>
+        </p:nvSpPr>
+        <p:spPr>
+          <a:xfrm>
+            <a:off x="11203655" y="5456371"/>
             <a:ext cx="53035" cy="53035"/>
           </a:xfrm>
           <a:prstGeom prst="ellipse">
@@ -29716,13 +29804,13 @@
       </p:sp>
       <p:sp>
         <p:nvSpPr>
-          <p:cNvPr id="589" name="Oval 588"/>
-          <p:cNvSpPr/>
-          <p:nvPr/>
-        </p:nvSpPr>
-        <p:spPr>
-          <a:xfrm>
-            <a:off x="11312732" y="5742101"/>
+          <p:cNvPr id="591" name="Oval 590"/>
+          <p:cNvSpPr/>
+          <p:nvPr/>
+        </p:nvSpPr>
+        <p:spPr>
+          <a:xfrm>
+            <a:off x="11324681" y="5736834"/>
             <a:ext cx="53035" cy="53035"/>
           </a:xfrm>
           <a:prstGeom prst="ellipse">
@@ -29760,7 +29848,7 @@
       </p:sp>
       <p:sp>
         <p:nvSpPr>
-          <p:cNvPr id="590" name="TextBox 589"/>
+          <p:cNvPr id="592" name="TextBox 591"/>
           <p:cNvSpPr txBox="1"/>
           <p:nvPr/>
         </p:nvSpPr>
@@ -29796,7 +29884,7 @@
       </p:sp>
       <p:sp>
         <p:nvSpPr>
-          <p:cNvPr id="591" name="TextBox 590"/>
+          <p:cNvPr id="593" name="TextBox 592"/>
           <p:cNvSpPr txBox="1"/>
           <p:nvPr/>
         </p:nvSpPr>
@@ -29832,7 +29920,7 @@
       </p:sp>
       <p:sp>
         <p:nvSpPr>
-          <p:cNvPr id="592" name="TextBox 591"/>
+          <p:cNvPr id="594" name="TextBox 593"/>
           <p:cNvSpPr txBox="1"/>
           <p:nvPr/>
         </p:nvSpPr>
@@ -32692,8 +32780,8 @@
         </p:nvCxnSpPr>
         <p:spPr>
           <a:xfrm flipV="1">
-            <a:off x="1700784" y="5820424"/>
-            <a:ext cx="198120" cy="48627"/>
+            <a:off x="1700784" y="5745479"/>
+            <a:ext cx="320040" cy="116260"/>
           </a:xfrm>
           <a:prstGeom prst="line">
             <a:avLst/>
@@ -32728,8 +32816,8 @@
         </p:nvCxnSpPr>
         <p:spPr>
           <a:xfrm flipV="1">
-            <a:off x="1898904" y="5740222"/>
-            <a:ext cx="198120" cy="80202"/>
+            <a:off x="2020824" y="5667973"/>
+            <a:ext cx="320040" cy="77506"/>
           </a:xfrm>
           <a:prstGeom prst="line">
             <a:avLst/>
@@ -32763,9 +32851,9 @@
           <p:nvPr/>
         </p:nvCxnSpPr>
         <p:spPr>
-          <a:xfrm>
-            <a:off x="2097024" y="5740222"/>
-            <a:ext cx="198120" cy="20895"/>
+          <a:xfrm flipV="1">
+            <a:off x="2340864" y="5609844"/>
+            <a:ext cx="320040" cy="58129"/>
           </a:xfrm>
           <a:prstGeom prst="line">
             <a:avLst/>
@@ -32800,8 +32888,8 @@
         </p:nvCxnSpPr>
         <p:spPr>
           <a:xfrm flipV="1">
-            <a:off x="2295144" y="5720499"/>
-            <a:ext cx="198120" cy="40618"/>
+            <a:off x="2660904" y="5261065"/>
+            <a:ext cx="320040" cy="348779"/>
           </a:xfrm>
           <a:prstGeom prst="line">
             <a:avLst/>
@@ -32836,8 +32924,8 @@
         </p:nvCxnSpPr>
         <p:spPr>
           <a:xfrm>
-            <a:off x="2493264" y="5720499"/>
-            <a:ext cx="198120" cy="50572"/>
+            <a:off x="2980944" y="5261065"/>
+            <a:ext cx="320040" cy="465038"/>
           </a:xfrm>
           <a:prstGeom prst="line">
             <a:avLst/>
@@ -32872,8 +32960,8 @@
         </p:nvCxnSpPr>
         <p:spPr>
           <a:xfrm flipV="1">
-            <a:off x="2691384" y="5256678"/>
-            <a:ext cx="198120" cy="514393"/>
+            <a:off x="3300984" y="5590467"/>
+            <a:ext cx="320040" cy="135636"/>
           </a:xfrm>
           <a:prstGeom prst="line">
             <a:avLst/>
@@ -32907,9 +32995,9 @@
           <p:nvPr/>
         </p:nvCxnSpPr>
         <p:spPr>
-          <a:xfrm>
-            <a:off x="2889504" y="5256678"/>
-            <a:ext cx="198120" cy="545103"/>
+          <a:xfrm flipV="1">
+            <a:off x="3621024" y="5532337"/>
+            <a:ext cx="320040" cy="58130"/>
           </a:xfrm>
           <a:prstGeom prst="line">
             <a:avLst/>
@@ -32944,8 +33032,8 @@
         </p:nvCxnSpPr>
         <p:spPr>
           <a:xfrm flipV="1">
-            <a:off x="3087624" y="5563769"/>
-            <a:ext cx="198120" cy="238012"/>
+            <a:off x="3941064" y="5493584"/>
+            <a:ext cx="320040" cy="38753"/>
           </a:xfrm>
           <a:prstGeom prst="line">
             <a:avLst/>
@@ -32980,8 +33068,8 @@
         </p:nvCxnSpPr>
         <p:spPr>
           <a:xfrm flipV="1">
-            <a:off x="3285744" y="5508300"/>
-            <a:ext cx="198120" cy="55469"/>
+            <a:off x="4261104" y="5454831"/>
+            <a:ext cx="320040" cy="38753"/>
           </a:xfrm>
           <a:prstGeom prst="line">
             <a:avLst/>
@@ -33015,9 +33103,9 @@
           <p:nvPr/>
         </p:nvCxnSpPr>
         <p:spPr>
-          <a:xfrm>
-            <a:off x="3483864" y="5508300"/>
-            <a:ext cx="198120" cy="50413"/>
+          <a:xfrm flipV="1">
+            <a:off x="4581144" y="5445143"/>
+            <a:ext cx="320040" cy="9688"/>
           </a:xfrm>
           <a:prstGeom prst="line">
             <a:avLst/>
@@ -33052,8 +33140,8 @@
         </p:nvCxnSpPr>
         <p:spPr>
           <a:xfrm flipV="1">
-            <a:off x="3681984" y="5497570"/>
-            <a:ext cx="198120" cy="61143"/>
+            <a:off x="4901184" y="5435454"/>
+            <a:ext cx="320040" cy="9689"/>
           </a:xfrm>
           <a:prstGeom prst="line">
             <a:avLst/>
@@ -33088,8 +33176,8 @@
         </p:nvCxnSpPr>
         <p:spPr>
           <a:xfrm flipV="1">
-            <a:off x="3880104" y="5488267"/>
-            <a:ext cx="198120" cy="9303"/>
+            <a:off x="5221224" y="5425766"/>
+            <a:ext cx="320040" cy="9688"/>
           </a:xfrm>
           <a:prstGeom prst="line">
             <a:avLst/>
@@ -33123,9 +33211,9 @@
           <p:nvPr/>
         </p:nvCxnSpPr>
         <p:spPr>
-          <a:xfrm flipV="1">
-            <a:off x="4078224" y="5364514"/>
-            <a:ext cx="198120" cy="123753"/>
+          <a:xfrm>
+            <a:off x="5541264" y="5425766"/>
+            <a:ext cx="320040" cy="9688"/>
           </a:xfrm>
           <a:prstGeom prst="line">
             <a:avLst/>
@@ -33159,16 +33247,16 @@
           <p:nvPr/>
         </p:nvCxnSpPr>
         <p:spPr>
-          <a:xfrm>
-            <a:off x="4276344" y="5364514"/>
-            <a:ext cx="198120" cy="4712"/>
+          <a:xfrm flipV="1">
+            <a:off x="1700784" y="5667973"/>
+            <a:ext cx="320040" cy="77506"/>
           </a:xfrm>
           <a:prstGeom prst="line">
             <a:avLst/>
           </a:prstGeom>
-          <a:ln w="19050">
+          <a:ln w="35560">
             <a:solidFill>
-              <a:srgbClr val="AEB4BD"/>
+              <a:srgbClr val="3A6FD0"/>
             </a:solidFill>
           </a:ln>
           <a:effectLst/>
@@ -33195,16 +33283,16 @@
           <p:nvPr/>
         </p:nvCxnSpPr>
         <p:spPr>
-          <a:xfrm>
-            <a:off x="4474464" y="5369226"/>
-            <a:ext cx="198120" cy="43193"/>
+          <a:xfrm flipV="1">
+            <a:off x="2020824" y="5609844"/>
+            <a:ext cx="320040" cy="58129"/>
           </a:xfrm>
           <a:prstGeom prst="line">
             <a:avLst/>
           </a:prstGeom>
-          <a:ln w="19050">
+          <a:ln w="35560">
             <a:solidFill>
-              <a:srgbClr val="AEB4BD"/>
+              <a:srgbClr val="3A6FD0"/>
             </a:solidFill>
           </a:ln>
           <a:effectLst/>
@@ -33231,16 +33319,16 @@
           <p:nvPr/>
         </p:nvCxnSpPr>
         <p:spPr>
-          <a:xfrm flipV="1">
-            <a:off x="4672584" y="5400382"/>
-            <a:ext cx="198120" cy="12037"/>
+          <a:xfrm>
+            <a:off x="2340864" y="5609844"/>
+            <a:ext cx="320040" cy="0"/>
           </a:xfrm>
           <a:prstGeom prst="line">
             <a:avLst/>
           </a:prstGeom>
-          <a:ln w="19050">
+          <a:ln w="35560">
             <a:solidFill>
-              <a:srgbClr val="AEB4BD"/>
+              <a:srgbClr val="3A6FD0"/>
             </a:solidFill>
           </a:ln>
           <a:effectLst/>
@@ -33268,15 +33356,15 @@
         </p:nvCxnSpPr>
         <p:spPr>
           <a:xfrm flipV="1">
-            <a:off x="4870704" y="5395616"/>
-            <a:ext cx="198120" cy="4766"/>
+            <a:off x="2660904" y="5590467"/>
+            <a:ext cx="320040" cy="19377"/>
           </a:xfrm>
           <a:prstGeom prst="line">
             <a:avLst/>
           </a:prstGeom>
-          <a:ln w="19050">
+          <a:ln w="35560">
             <a:solidFill>
-              <a:srgbClr val="AEB4BD"/>
+              <a:srgbClr val="3A6FD0"/>
             </a:solidFill>
           </a:ln>
           <a:effectLst/>
@@ -33304,15 +33392,15 @@
         </p:nvCxnSpPr>
         <p:spPr>
           <a:xfrm>
-            <a:off x="5068824" y="5395616"/>
-            <a:ext cx="198120" cy="19518"/>
+            <a:off x="2980944" y="5590467"/>
+            <a:ext cx="320040" cy="0"/>
           </a:xfrm>
           <a:prstGeom prst="line">
             <a:avLst/>
           </a:prstGeom>
-          <a:ln w="19050">
+          <a:ln w="35560">
             <a:solidFill>
-              <a:srgbClr val="AEB4BD"/>
+              <a:srgbClr val="3A6FD0"/>
             </a:solidFill>
           </a:ln>
           <a:effectLst/>
@@ -33340,15 +33428,15 @@
         </p:nvCxnSpPr>
         <p:spPr>
           <a:xfrm flipV="1">
-            <a:off x="5266944" y="5375163"/>
-            <a:ext cx="198120" cy="39971"/>
+            <a:off x="3300984" y="5532337"/>
+            <a:ext cx="320040" cy="58130"/>
           </a:xfrm>
           <a:prstGeom prst="line">
             <a:avLst/>
           </a:prstGeom>
-          <a:ln w="19050">
+          <a:ln w="35560">
             <a:solidFill>
-              <a:srgbClr val="AEB4BD"/>
+              <a:srgbClr val="3A6FD0"/>
             </a:solidFill>
           </a:ln>
           <a:effectLst/>
@@ -33375,16 +33463,16 @@
           <p:nvPr/>
         </p:nvCxnSpPr>
         <p:spPr>
-          <a:xfrm>
-            <a:off x="5465064" y="5375163"/>
-            <a:ext cx="198120" cy="2157"/>
+          <a:xfrm flipV="1">
+            <a:off x="3621024" y="5493584"/>
+            <a:ext cx="320040" cy="38753"/>
           </a:xfrm>
           <a:prstGeom prst="line">
             <a:avLst/>
           </a:prstGeom>
-          <a:ln w="19050">
+          <a:ln w="35560">
             <a:solidFill>
-              <a:srgbClr val="AEB4BD"/>
+              <a:srgbClr val="3A6FD0"/>
             </a:solidFill>
           </a:ln>
           <a:effectLst/>
@@ -33412,15 +33500,15 @@
         </p:nvCxnSpPr>
         <p:spPr>
           <a:xfrm flipV="1">
-            <a:off x="5663184" y="5340293"/>
-            <a:ext cx="198120" cy="37027"/>
+            <a:off x="3941064" y="5454831"/>
+            <a:ext cx="320040" cy="38753"/>
           </a:xfrm>
           <a:prstGeom prst="line">
             <a:avLst/>
           </a:prstGeom>
-          <a:ln w="19050">
+          <a:ln w="35560">
             <a:solidFill>
-              <a:srgbClr val="AEB4BD"/>
+              <a:srgbClr val="3A6FD0"/>
             </a:solidFill>
           </a:ln>
           <a:effectLst/>
@@ -33448,8 +33536,8 @@
         </p:nvCxnSpPr>
         <p:spPr>
           <a:xfrm flipV="1">
-            <a:off x="1700784" y="5761117"/>
-            <a:ext cx="198120" cy="59307"/>
+            <a:off x="4261104" y="5445143"/>
+            <a:ext cx="320040" cy="9688"/>
           </a:xfrm>
           <a:prstGeom prst="line">
             <a:avLst/>
@@ -33484,8 +33572,8 @@
         </p:nvCxnSpPr>
         <p:spPr>
           <a:xfrm flipV="1">
-            <a:off x="1898904" y="5740222"/>
-            <a:ext cx="198120" cy="20895"/>
+            <a:off x="4581144" y="5435454"/>
+            <a:ext cx="320040" cy="9689"/>
           </a:xfrm>
           <a:prstGeom prst="line">
             <a:avLst/>
@@ -33520,8 +33608,8 @@
         </p:nvCxnSpPr>
         <p:spPr>
           <a:xfrm>
-            <a:off x="2097024" y="5740222"/>
-            <a:ext cx="198120" cy="20895"/>
+            <a:off x="4901184" y="5435454"/>
+            <a:ext cx="320040" cy="0"/>
           </a:xfrm>
           <a:prstGeom prst="line">
             <a:avLst/>
@@ -33548,78 +33636,94 @@
           </a:fontRef>
         </p:style>
       </p:cxnSp>
-      <p:cxnSp>
-        <p:nvCxnSpPr>
-          <p:cNvPr id="85" name="Connector 84"/>
-          <p:cNvCxnSpPr/>
-          <p:nvPr/>
-        </p:nvCxnSpPr>
-        <p:spPr>
-          <a:xfrm flipV="1">
-            <a:off x="2295144" y="5720499"/>
-            <a:ext cx="198120" cy="40618"/>
-          </a:xfrm>
-          <a:prstGeom prst="line">
-            <a:avLst/>
-          </a:prstGeom>
-          <a:ln w="35560">
-            <a:solidFill>
-              <a:srgbClr val="3A6FD0"/>
-            </a:solidFill>
-          </a:ln>
-          <a:effectLst/>
-        </p:spPr>
-        <p:style>
-          <a:lnRef idx="2">
-            <a:schemeClr val="accent1"/>
-          </a:lnRef>
-          <a:fillRef idx="0">
-            <a:schemeClr val="accent1"/>
-          </a:fillRef>
-          <a:effectRef idx="1">
-            <a:schemeClr val="accent1"/>
-          </a:effectRef>
-          <a:fontRef idx="minor">
-            <a:schemeClr val="tx1"/>
-          </a:fontRef>
-        </p:style>
-      </p:cxnSp>
-      <p:cxnSp>
-        <p:nvCxnSpPr>
-          <p:cNvPr id="86" name="Connector 85"/>
-          <p:cNvCxnSpPr/>
-          <p:nvPr/>
-        </p:nvCxnSpPr>
-        <p:spPr>
-          <a:xfrm>
-            <a:off x="2493264" y="5720499"/>
-            <a:ext cx="198120" cy="50572"/>
-          </a:xfrm>
-          <a:prstGeom prst="line">
-            <a:avLst/>
-          </a:prstGeom>
-          <a:ln w="35560">
-            <a:solidFill>
-              <a:srgbClr val="3A6FD0"/>
-            </a:solidFill>
-          </a:ln>
-          <a:effectLst/>
-        </p:spPr>
-        <p:style>
-          <a:lnRef idx="2">
-            <a:schemeClr val="accent1"/>
-          </a:lnRef>
-          <a:fillRef idx="0">
-            <a:schemeClr val="accent1"/>
-          </a:fillRef>
-          <a:effectRef idx="1">
-            <a:schemeClr val="accent1"/>
-          </a:effectRef>
-          <a:fontRef idx="minor">
-            <a:schemeClr val="tx1"/>
-          </a:fontRef>
-        </p:style>
-      </p:cxnSp>
+      <p:sp>
+        <p:nvSpPr>
+          <p:cNvPr id="85" name="Oval 84"/>
+          <p:cNvSpPr/>
+          <p:nvPr/>
+        </p:nvSpPr>
+        <p:spPr>
+          <a:xfrm>
+            <a:off x="2930652" y="5210773"/>
+            <a:ext cx="100584" cy="100584"/>
+          </a:xfrm>
+          <a:prstGeom prst="ellipse">
+            <a:avLst/>
+          </a:prstGeom>
+          <a:solidFill>
+            <a:srgbClr val="CC3328"/>
+          </a:solidFill>
+          <a:ln>
+            <a:noFill/>
+          </a:ln>
+          <a:effectLst/>
+        </p:spPr>
+        <p:style>
+          <a:lnRef idx="1">
+            <a:schemeClr val="accent1"/>
+          </a:lnRef>
+          <a:fillRef idx="3">
+            <a:schemeClr val="accent1"/>
+          </a:fillRef>
+          <a:effectRef idx="2">
+            <a:schemeClr val="accent1"/>
+          </a:effectRef>
+          <a:fontRef idx="minor">
+            <a:schemeClr val="lt1"/>
+          </a:fontRef>
+        </p:style>
+        <p:txBody>
+          <a:bodyPr rtlCol="0" anchor="ctr"/>
+          <a:lstStyle/>
+          <a:p>
+            <a:pPr algn="ctr"/>
+          </a:p>
+        </p:txBody>
+      </p:sp>
+      <p:sp>
+        <p:nvSpPr>
+          <p:cNvPr id="86" name="Diamond 85"/>
+          <p:cNvSpPr/>
+          <p:nvPr/>
+        </p:nvSpPr>
+        <p:spPr>
+          <a:xfrm>
+            <a:off x="4832604" y="5366874"/>
+            <a:ext cx="137160" cy="137160"/>
+          </a:xfrm>
+          <a:prstGeom prst="diamond">
+            <a:avLst/>
+          </a:prstGeom>
+          <a:solidFill>
+            <a:srgbClr val="0F1E3D"/>
+          </a:solidFill>
+          <a:ln>
+            <a:noFill/>
+          </a:ln>
+          <a:effectLst/>
+        </p:spPr>
+        <p:style>
+          <a:lnRef idx="1">
+            <a:schemeClr val="accent1"/>
+          </a:lnRef>
+          <a:fillRef idx="3">
+            <a:schemeClr val="accent1"/>
+          </a:fillRef>
+          <a:effectRef idx="2">
+            <a:schemeClr val="accent1"/>
+          </a:effectRef>
+          <a:fontRef idx="minor">
+            <a:schemeClr val="lt1"/>
+          </a:fontRef>
+        </p:style>
+        <p:txBody>
+          <a:bodyPr rtlCol="0" anchor="ctr"/>
+          <a:lstStyle/>
+          <a:p>
+            <a:pPr algn="ctr"/>
+          </a:p>
+        </p:txBody>
+      </p:sp>
       <p:cxnSp>
         <p:nvCxnSpPr>
           <p:cNvPr id="87" name="Connector 86"/>
@@ -33627,598 +33731,6 @@
           <p:nvPr/>
         </p:nvCxnSpPr>
         <p:spPr>
-          <a:xfrm flipV="1">
-            <a:off x="2691384" y="5563769"/>
-            <a:ext cx="198120" cy="207302"/>
-          </a:xfrm>
-          <a:prstGeom prst="line">
-            <a:avLst/>
-          </a:prstGeom>
-          <a:ln w="35560">
-            <a:solidFill>
-              <a:srgbClr val="3A6FD0"/>
-            </a:solidFill>
-          </a:ln>
-          <a:effectLst/>
-        </p:spPr>
-        <p:style>
-          <a:lnRef idx="2">
-            <a:schemeClr val="accent1"/>
-          </a:lnRef>
-          <a:fillRef idx="0">
-            <a:schemeClr val="accent1"/>
-          </a:fillRef>
-          <a:effectRef idx="1">
-            <a:schemeClr val="accent1"/>
-          </a:effectRef>
-          <a:fontRef idx="minor">
-            <a:schemeClr val="tx1"/>
-          </a:fontRef>
-        </p:style>
-      </p:cxnSp>
-      <p:cxnSp>
-        <p:nvCxnSpPr>
-          <p:cNvPr id="88" name="Connector 87"/>
-          <p:cNvCxnSpPr/>
-          <p:nvPr/>
-        </p:nvCxnSpPr>
-        <p:spPr>
-          <a:xfrm>
-            <a:off x="2889504" y="5563769"/>
-            <a:ext cx="198120" cy="0"/>
-          </a:xfrm>
-          <a:prstGeom prst="line">
-            <a:avLst/>
-          </a:prstGeom>
-          <a:ln w="35560">
-            <a:solidFill>
-              <a:srgbClr val="3A6FD0"/>
-            </a:solidFill>
-          </a:ln>
-          <a:effectLst/>
-        </p:spPr>
-        <p:style>
-          <a:lnRef idx="2">
-            <a:schemeClr val="accent1"/>
-          </a:lnRef>
-          <a:fillRef idx="0">
-            <a:schemeClr val="accent1"/>
-          </a:fillRef>
-          <a:effectRef idx="1">
-            <a:schemeClr val="accent1"/>
-          </a:effectRef>
-          <a:fontRef idx="minor">
-            <a:schemeClr val="tx1"/>
-          </a:fontRef>
-        </p:style>
-      </p:cxnSp>
-      <p:cxnSp>
-        <p:nvCxnSpPr>
-          <p:cNvPr id="89" name="Connector 88"/>
-          <p:cNvCxnSpPr/>
-          <p:nvPr/>
-        </p:nvCxnSpPr>
-        <p:spPr>
-          <a:xfrm flipV="1">
-            <a:off x="3087624" y="5558713"/>
-            <a:ext cx="198120" cy="5056"/>
-          </a:xfrm>
-          <a:prstGeom prst="line">
-            <a:avLst/>
-          </a:prstGeom>
-          <a:ln w="35560">
-            <a:solidFill>
-              <a:srgbClr val="3A6FD0"/>
-            </a:solidFill>
-          </a:ln>
-          <a:effectLst/>
-        </p:spPr>
-        <p:style>
-          <a:lnRef idx="2">
-            <a:schemeClr val="accent1"/>
-          </a:lnRef>
-          <a:fillRef idx="0">
-            <a:schemeClr val="accent1"/>
-          </a:fillRef>
-          <a:effectRef idx="1">
-            <a:schemeClr val="accent1"/>
-          </a:effectRef>
-          <a:fontRef idx="minor">
-            <a:schemeClr val="tx1"/>
-          </a:fontRef>
-        </p:style>
-      </p:cxnSp>
-      <p:cxnSp>
-        <p:nvCxnSpPr>
-          <p:cNvPr id="90" name="Connector 89"/>
-          <p:cNvCxnSpPr/>
-          <p:nvPr/>
-        </p:nvCxnSpPr>
-        <p:spPr>
-          <a:xfrm flipV="1">
-            <a:off x="3285744" y="5508300"/>
-            <a:ext cx="198120" cy="50413"/>
-          </a:xfrm>
-          <a:prstGeom prst="line">
-            <a:avLst/>
-          </a:prstGeom>
-          <a:ln w="35560">
-            <a:solidFill>
-              <a:srgbClr val="3A6FD0"/>
-            </a:solidFill>
-          </a:ln>
-          <a:effectLst/>
-        </p:spPr>
-        <p:style>
-          <a:lnRef idx="2">
-            <a:schemeClr val="accent1"/>
-          </a:lnRef>
-          <a:fillRef idx="0">
-            <a:schemeClr val="accent1"/>
-          </a:fillRef>
-          <a:effectRef idx="1">
-            <a:schemeClr val="accent1"/>
-          </a:effectRef>
-          <a:fontRef idx="minor">
-            <a:schemeClr val="tx1"/>
-          </a:fontRef>
-        </p:style>
-      </p:cxnSp>
-      <p:cxnSp>
-        <p:nvCxnSpPr>
-          <p:cNvPr id="91" name="Connector 90"/>
-          <p:cNvCxnSpPr/>
-          <p:nvPr/>
-        </p:nvCxnSpPr>
-        <p:spPr>
-          <a:xfrm flipV="1">
-            <a:off x="3483864" y="5497570"/>
-            <a:ext cx="198120" cy="10730"/>
-          </a:xfrm>
-          <a:prstGeom prst="line">
-            <a:avLst/>
-          </a:prstGeom>
-          <a:ln w="35560">
-            <a:solidFill>
-              <a:srgbClr val="3A6FD0"/>
-            </a:solidFill>
-          </a:ln>
-          <a:effectLst/>
-        </p:spPr>
-        <p:style>
-          <a:lnRef idx="2">
-            <a:schemeClr val="accent1"/>
-          </a:lnRef>
-          <a:fillRef idx="0">
-            <a:schemeClr val="accent1"/>
-          </a:fillRef>
-          <a:effectRef idx="1">
-            <a:schemeClr val="accent1"/>
-          </a:effectRef>
-          <a:fontRef idx="minor">
-            <a:schemeClr val="tx1"/>
-          </a:fontRef>
-        </p:style>
-      </p:cxnSp>
-      <p:cxnSp>
-        <p:nvCxnSpPr>
-          <p:cNvPr id="92" name="Connector 91"/>
-          <p:cNvCxnSpPr/>
-          <p:nvPr/>
-        </p:nvCxnSpPr>
-        <p:spPr>
-          <a:xfrm flipV="1">
-            <a:off x="3681984" y="5488267"/>
-            <a:ext cx="198120" cy="9303"/>
-          </a:xfrm>
-          <a:prstGeom prst="line">
-            <a:avLst/>
-          </a:prstGeom>
-          <a:ln w="35560">
-            <a:solidFill>
-              <a:srgbClr val="3A6FD0"/>
-            </a:solidFill>
-          </a:ln>
-          <a:effectLst/>
-        </p:spPr>
-        <p:style>
-          <a:lnRef idx="2">
-            <a:schemeClr val="accent1"/>
-          </a:lnRef>
-          <a:fillRef idx="0">
-            <a:schemeClr val="accent1"/>
-          </a:fillRef>
-          <a:effectRef idx="1">
-            <a:schemeClr val="accent1"/>
-          </a:effectRef>
-          <a:fontRef idx="minor">
-            <a:schemeClr val="tx1"/>
-          </a:fontRef>
-        </p:style>
-      </p:cxnSp>
-      <p:cxnSp>
-        <p:nvCxnSpPr>
-          <p:cNvPr id="93" name="Connector 92"/>
-          <p:cNvCxnSpPr/>
-          <p:nvPr/>
-        </p:nvCxnSpPr>
-        <p:spPr>
-          <a:xfrm flipV="1">
-            <a:off x="3880104" y="5369226"/>
-            <a:ext cx="198120" cy="119041"/>
-          </a:xfrm>
-          <a:prstGeom prst="line">
-            <a:avLst/>
-          </a:prstGeom>
-          <a:ln w="35560">
-            <a:solidFill>
-              <a:srgbClr val="3A6FD0"/>
-            </a:solidFill>
-          </a:ln>
-          <a:effectLst/>
-        </p:spPr>
-        <p:style>
-          <a:lnRef idx="2">
-            <a:schemeClr val="accent1"/>
-          </a:lnRef>
-          <a:fillRef idx="0">
-            <a:schemeClr val="accent1"/>
-          </a:fillRef>
-          <a:effectRef idx="1">
-            <a:schemeClr val="accent1"/>
-          </a:effectRef>
-          <a:fontRef idx="minor">
-            <a:schemeClr val="tx1"/>
-          </a:fontRef>
-        </p:style>
-      </p:cxnSp>
-      <p:cxnSp>
-        <p:nvCxnSpPr>
-          <p:cNvPr id="94" name="Connector 93"/>
-          <p:cNvCxnSpPr/>
-          <p:nvPr/>
-        </p:nvCxnSpPr>
-        <p:spPr>
-          <a:xfrm>
-            <a:off x="4078224" y="5369226"/>
-            <a:ext cx="198120" cy="0"/>
-          </a:xfrm>
-          <a:prstGeom prst="line">
-            <a:avLst/>
-          </a:prstGeom>
-          <a:ln w="35560">
-            <a:solidFill>
-              <a:srgbClr val="3A6FD0"/>
-            </a:solidFill>
-          </a:ln>
-          <a:effectLst/>
-        </p:spPr>
-        <p:style>
-          <a:lnRef idx="2">
-            <a:schemeClr val="accent1"/>
-          </a:lnRef>
-          <a:fillRef idx="0">
-            <a:schemeClr val="accent1"/>
-          </a:fillRef>
-          <a:effectRef idx="1">
-            <a:schemeClr val="accent1"/>
-          </a:effectRef>
-          <a:fontRef idx="minor">
-            <a:schemeClr val="tx1"/>
-          </a:fontRef>
-        </p:style>
-      </p:cxnSp>
-      <p:cxnSp>
-        <p:nvCxnSpPr>
-          <p:cNvPr id="95" name="Connector 94"/>
-          <p:cNvCxnSpPr/>
-          <p:nvPr/>
-        </p:nvCxnSpPr>
-        <p:spPr>
-          <a:xfrm>
-            <a:off x="4276344" y="5369226"/>
-            <a:ext cx="198120" cy="31156"/>
-          </a:xfrm>
-          <a:prstGeom prst="line">
-            <a:avLst/>
-          </a:prstGeom>
-          <a:ln w="35560">
-            <a:solidFill>
-              <a:srgbClr val="3A6FD0"/>
-            </a:solidFill>
-          </a:ln>
-          <a:effectLst/>
-        </p:spPr>
-        <p:style>
-          <a:lnRef idx="2">
-            <a:schemeClr val="accent1"/>
-          </a:lnRef>
-          <a:fillRef idx="0">
-            <a:schemeClr val="accent1"/>
-          </a:fillRef>
-          <a:effectRef idx="1">
-            <a:schemeClr val="accent1"/>
-          </a:effectRef>
-          <a:fontRef idx="minor">
-            <a:schemeClr val="tx1"/>
-          </a:fontRef>
-        </p:style>
-      </p:cxnSp>
-      <p:cxnSp>
-        <p:nvCxnSpPr>
-          <p:cNvPr id="96" name="Connector 95"/>
-          <p:cNvCxnSpPr/>
-          <p:nvPr/>
-        </p:nvCxnSpPr>
-        <p:spPr>
-          <a:xfrm>
-            <a:off x="4474464" y="5400382"/>
-            <a:ext cx="198120" cy="0"/>
-          </a:xfrm>
-          <a:prstGeom prst="line">
-            <a:avLst/>
-          </a:prstGeom>
-          <a:ln w="35560">
-            <a:solidFill>
-              <a:srgbClr val="3A6FD0"/>
-            </a:solidFill>
-          </a:ln>
-          <a:effectLst/>
-        </p:spPr>
-        <p:style>
-          <a:lnRef idx="2">
-            <a:schemeClr val="accent1"/>
-          </a:lnRef>
-          <a:fillRef idx="0">
-            <a:schemeClr val="accent1"/>
-          </a:fillRef>
-          <a:effectRef idx="1">
-            <a:schemeClr val="accent1"/>
-          </a:effectRef>
-          <a:fontRef idx="minor">
-            <a:schemeClr val="tx1"/>
-          </a:fontRef>
-        </p:style>
-      </p:cxnSp>
-      <p:cxnSp>
-        <p:nvCxnSpPr>
-          <p:cNvPr id="97" name="Connector 96"/>
-          <p:cNvCxnSpPr/>
-          <p:nvPr/>
-        </p:nvCxnSpPr>
-        <p:spPr>
-          <a:xfrm>
-            <a:off x="4672584" y="5400382"/>
-            <a:ext cx="198120" cy="0"/>
-          </a:xfrm>
-          <a:prstGeom prst="line">
-            <a:avLst/>
-          </a:prstGeom>
-          <a:ln w="35560">
-            <a:solidFill>
-              <a:srgbClr val="3A6FD0"/>
-            </a:solidFill>
-          </a:ln>
-          <a:effectLst/>
-        </p:spPr>
-        <p:style>
-          <a:lnRef idx="2">
-            <a:schemeClr val="accent1"/>
-          </a:lnRef>
-          <a:fillRef idx="0">
-            <a:schemeClr val="accent1"/>
-          </a:fillRef>
-          <a:effectRef idx="1">
-            <a:schemeClr val="accent1"/>
-          </a:effectRef>
-          <a:fontRef idx="minor">
-            <a:schemeClr val="tx1"/>
-          </a:fontRef>
-        </p:style>
-      </p:cxnSp>
-      <p:cxnSp>
-        <p:nvCxnSpPr>
-          <p:cNvPr id="98" name="Connector 97"/>
-          <p:cNvCxnSpPr/>
-          <p:nvPr/>
-        </p:nvCxnSpPr>
-        <p:spPr>
-          <a:xfrm flipV="1">
-            <a:off x="4870704" y="5395616"/>
-            <a:ext cx="198120" cy="4766"/>
-          </a:xfrm>
-          <a:prstGeom prst="line">
-            <a:avLst/>
-          </a:prstGeom>
-          <a:ln w="35560">
-            <a:solidFill>
-              <a:srgbClr val="3A6FD0"/>
-            </a:solidFill>
-          </a:ln>
-          <a:effectLst/>
-        </p:spPr>
-        <p:style>
-          <a:lnRef idx="2">
-            <a:schemeClr val="accent1"/>
-          </a:lnRef>
-          <a:fillRef idx="0">
-            <a:schemeClr val="accent1"/>
-          </a:fillRef>
-          <a:effectRef idx="1">
-            <a:schemeClr val="accent1"/>
-          </a:effectRef>
-          <a:fontRef idx="minor">
-            <a:schemeClr val="tx1"/>
-          </a:fontRef>
-        </p:style>
-      </p:cxnSp>
-      <p:cxnSp>
-        <p:nvCxnSpPr>
-          <p:cNvPr id="99" name="Connector 98"/>
-          <p:cNvCxnSpPr/>
-          <p:nvPr/>
-        </p:nvCxnSpPr>
-        <p:spPr>
-          <a:xfrm flipV="1">
-            <a:off x="5068824" y="5377320"/>
-            <a:ext cx="198120" cy="18296"/>
-          </a:xfrm>
-          <a:prstGeom prst="line">
-            <a:avLst/>
-          </a:prstGeom>
-          <a:ln w="35560">
-            <a:solidFill>
-              <a:srgbClr val="3A6FD0"/>
-            </a:solidFill>
-          </a:ln>
-          <a:effectLst/>
-        </p:spPr>
-        <p:style>
-          <a:lnRef idx="2">
-            <a:schemeClr val="accent1"/>
-          </a:lnRef>
-          <a:fillRef idx="0">
-            <a:schemeClr val="accent1"/>
-          </a:fillRef>
-          <a:effectRef idx="1">
-            <a:schemeClr val="accent1"/>
-          </a:effectRef>
-          <a:fontRef idx="minor">
-            <a:schemeClr val="tx1"/>
-          </a:fontRef>
-        </p:style>
-      </p:cxnSp>
-      <p:cxnSp>
-        <p:nvCxnSpPr>
-          <p:cNvPr id="100" name="Connector 99"/>
-          <p:cNvCxnSpPr/>
-          <p:nvPr/>
-        </p:nvCxnSpPr>
-        <p:spPr>
-          <a:xfrm flipV="1">
-            <a:off x="5266944" y="5375163"/>
-            <a:ext cx="198120" cy="2157"/>
-          </a:xfrm>
-          <a:prstGeom prst="line">
-            <a:avLst/>
-          </a:prstGeom>
-          <a:ln w="35560">
-            <a:solidFill>
-              <a:srgbClr val="3A6FD0"/>
-            </a:solidFill>
-          </a:ln>
-          <a:effectLst/>
-        </p:spPr>
-        <p:style>
-          <a:lnRef idx="2">
-            <a:schemeClr val="accent1"/>
-          </a:lnRef>
-          <a:fillRef idx="0">
-            <a:schemeClr val="accent1"/>
-          </a:fillRef>
-          <a:effectRef idx="1">
-            <a:schemeClr val="accent1"/>
-          </a:effectRef>
-          <a:fontRef idx="minor">
-            <a:schemeClr val="tx1"/>
-          </a:fontRef>
-        </p:style>
-      </p:cxnSp>
-      <p:sp>
-        <p:nvSpPr>
-          <p:cNvPr id="101" name="Oval 100"/>
-          <p:cNvSpPr/>
-          <p:nvPr/>
-        </p:nvSpPr>
-        <p:spPr>
-          <a:xfrm>
-            <a:off x="2839212" y="5206386"/>
-            <a:ext cx="100584" cy="100584"/>
-          </a:xfrm>
-          <a:prstGeom prst="ellipse">
-            <a:avLst/>
-          </a:prstGeom>
-          <a:solidFill>
-            <a:srgbClr val="CC3328"/>
-          </a:solidFill>
-          <a:ln>
-            <a:noFill/>
-          </a:ln>
-          <a:effectLst/>
-        </p:spPr>
-        <p:style>
-          <a:lnRef idx="1">
-            <a:schemeClr val="accent1"/>
-          </a:lnRef>
-          <a:fillRef idx="3">
-            <a:schemeClr val="accent1"/>
-          </a:fillRef>
-          <a:effectRef idx="2">
-            <a:schemeClr val="accent1"/>
-          </a:effectRef>
-          <a:fontRef idx="minor">
-            <a:schemeClr val="lt1"/>
-          </a:fontRef>
-        </p:style>
-        <p:txBody>
-          <a:bodyPr rtlCol="0" anchor="ctr"/>
-          <a:lstStyle/>
-          <a:p>
-            <a:pPr algn="ctr"/>
-          </a:p>
-        </p:txBody>
-      </p:sp>
-      <p:sp>
-        <p:nvSpPr>
-          <p:cNvPr id="102" name="Diamond 101"/>
-          <p:cNvSpPr/>
-          <p:nvPr/>
-        </p:nvSpPr>
-        <p:spPr>
-          <a:xfrm>
-            <a:off x="4009644" y="5300646"/>
-            <a:ext cx="137160" cy="137160"/>
-          </a:xfrm>
-          <a:prstGeom prst="diamond">
-            <a:avLst/>
-          </a:prstGeom>
-          <a:solidFill>
-            <a:srgbClr val="0F1E3D"/>
-          </a:solidFill>
-          <a:ln>
-            <a:noFill/>
-          </a:ln>
-          <a:effectLst/>
-        </p:spPr>
-        <p:style>
-          <a:lnRef idx="1">
-            <a:schemeClr val="accent1"/>
-          </a:lnRef>
-          <a:fillRef idx="3">
-            <a:schemeClr val="accent1"/>
-          </a:fillRef>
-          <a:effectRef idx="2">
-            <a:schemeClr val="accent1"/>
-          </a:effectRef>
-          <a:fontRef idx="minor">
-            <a:schemeClr val="lt1"/>
-          </a:fontRef>
-        </p:style>
-        <p:txBody>
-          <a:bodyPr rtlCol="0" anchor="ctr"/>
-          <a:lstStyle/>
-          <a:p>
-            <a:pPr algn="ctr"/>
-          </a:p>
-        </p:txBody>
-      </p:sp>
-      <p:cxnSp>
-        <p:nvCxnSpPr>
-          <p:cNvPr id="103" name="Connector 102"/>
-          <p:cNvCxnSpPr/>
-          <p:nvPr/>
-        </p:nvCxnSpPr>
-        <p:spPr>
           <a:xfrm>
             <a:off x="1700784" y="6016752"/>
             <a:ext cx="4160520" cy="0"/>
@@ -34250,7 +33762,7 @@
       </p:cxnSp>
       <p:sp>
         <p:nvSpPr>
-          <p:cNvPr id="104" name="TextBox 103"/>
+          <p:cNvPr id="88" name="TextBox 87"/>
           <p:cNvSpPr txBox="1"/>
           <p:nvPr/>
         </p:nvSpPr>
@@ -34296,14 +33808,14 @@
       </p:sp>
       <p:sp>
         <p:nvSpPr>
-          <p:cNvPr id="105" name="TextBox 104"/>
+          <p:cNvPr id="89" name="TextBox 88"/>
           <p:cNvSpPr txBox="1"/>
           <p:nvPr/>
         </p:nvSpPr>
         <p:spPr>
           <a:xfrm>
-            <a:off x="6355080" y="4489704"/>
-            <a:ext cx="4288536" cy="256032"/>
+            <a:off x="6355080" y="4480560"/>
+            <a:ext cx="4288536" cy="237744"/>
           </a:xfrm>
           <a:prstGeom prst="rect">
             <a:avLst/>
@@ -34325,14 +33837,70 @@
                 <a:latin typeface="맑은 고딕"/>
                 <a:ea typeface="맑은 고딕"/>
               </a:rPr>
-              <a:t>Color 변경 전후 — target 색 대비↑ 분리도 향상</a:t>
+              <a:t>Color 변경 전후 — 배경 대비 색차↑(빨강) → 분리도 향상</a:t>
+            </a:r>
+          </a:p>
+        </p:txBody>
+      </p:sp>
+      <p:sp>
+        <p:nvSpPr>
+          <p:cNvPr id="90" name="TextBox 89"/>
+          <p:cNvSpPr txBox="1"/>
+          <p:nvPr/>
+        </p:nvSpPr>
+        <p:spPr>
+          <a:xfrm>
+            <a:off x="6355080" y="4718304"/>
+            <a:ext cx="4288536" cy="219456"/>
+          </a:xfrm>
+          <a:prstGeom prst="rect">
+            <a:avLst/>
+          </a:prstGeom>
+          <a:noFill/>
+        </p:spPr>
+        <p:txBody>
+          <a:bodyPr wrap="none" anchor="ctr" lIns="0" rIns="0" tIns="0" bIns="0">
+            <a:spAutoFit/>
+          </a:bodyPr>
+          <a:lstStyle/>
+          <a:p>
+            <a:pPr algn="ctr"/>
+            <a:r>
+              <a:rPr sz="1200">
+                <a:solidFill>
+                  <a:srgbClr val="6B7280"/>
+                </a:solidFill>
+                <a:latin typeface="맑은 고딕"/>
+                <a:ea typeface="맑은 고딕"/>
+              </a:rPr>
+              <a:t>색 단변수 5-seed:  </a:t>
+            </a:r>
+            <a:r>
+              <a:rPr sz="1200" b="1">
+                <a:solidFill>
+                  <a:srgbClr val="0F1E3D"/>
+                </a:solidFill>
+                <a:latin typeface="맑은 고딕"/>
+                <a:ea typeface="맑은 고딕"/>
+              </a:rPr>
+              <a:t>F1 +0.0008</a:t>
+            </a:r>
+            <a:r>
+              <a:rPr sz="1200">
+                <a:solidFill>
+                  <a:srgbClr val="6B7280"/>
+                </a:solidFill>
+                <a:latin typeface="맑은 고딕"/>
+                <a:ea typeface="맑은 고딕"/>
+              </a:rPr>
+              <a:t>  ·  놓친 불량 −0.8  ·  오경보 −0.4</a:t>
             </a:r>
           </a:p>
         </p:txBody>
       </p:sp>
       <p:pic>
         <p:nvPicPr>
-          <p:cNvPr id="106" name="Picture 105" descr="p3r_color_baseline.png"/>
+          <p:cNvPr id="91" name="Picture 90" descr="p3r_color_baseline.png"/>
           <p:cNvPicPr>
             <a:picLocks noChangeAspect="1"/>
           </p:cNvPicPr>
@@ -34346,8 +33914,8 @@
         </p:blipFill>
         <p:spPr>
           <a:xfrm>
-            <a:off x="7356348" y="4818888"/>
-            <a:ext cx="914400" cy="914400"/>
+            <a:off x="7292340" y="4965192"/>
+            <a:ext cx="996696" cy="996696"/>
           </a:xfrm>
           <a:prstGeom prst="rect">
             <a:avLst/>
@@ -34356,14 +33924,14 @@
       </p:pic>
       <p:sp>
         <p:nvSpPr>
-          <p:cNvPr id="107" name="TextBox 106"/>
+          <p:cNvPr id="92" name="TextBox 91"/>
           <p:cNvSpPr txBox="1"/>
           <p:nvPr/>
         </p:nvSpPr>
         <p:spPr>
           <a:xfrm>
-            <a:off x="7219188" y="5769864"/>
-            <a:ext cx="1188720" cy="219456"/>
+            <a:off x="7155180" y="5989320"/>
+            <a:ext cx="1271016" cy="201168"/>
           </a:xfrm>
           <a:prstGeom prst="rect">
             <a:avLst/>
@@ -34392,7 +33960,7 @@
       </p:sp>
       <p:pic>
         <p:nvPicPr>
-          <p:cNvPr id="108" name="Picture 107" descr="p3r_color_c01.png"/>
+          <p:cNvPr id="93" name="Picture 92" descr="p3r_color_c01.png"/>
           <p:cNvPicPr>
             <a:picLocks noChangeAspect="1"/>
           </p:cNvPicPr>
@@ -34406,8 +33974,8 @@
         </p:blipFill>
         <p:spPr>
           <a:xfrm>
-            <a:off x="8727948" y="4818888"/>
-            <a:ext cx="914400" cy="914400"/>
+            <a:off x="8709660" y="4965192"/>
+            <a:ext cx="996696" cy="996696"/>
           </a:xfrm>
           <a:prstGeom prst="rect">
             <a:avLst/>
@@ -34416,14 +33984,14 @@
       </p:pic>
       <p:sp>
         <p:nvSpPr>
-          <p:cNvPr id="109" name="TextBox 108"/>
+          <p:cNvPr id="94" name="TextBox 93"/>
           <p:cNvSpPr txBox="1"/>
           <p:nvPr/>
         </p:nvSpPr>
         <p:spPr>
           <a:xfrm>
-            <a:off x="8590788" y="5769864"/>
-            <a:ext cx="1188720" cy="219456"/>
+            <a:off x="8572500" y="5989320"/>
+            <a:ext cx="1271016" cy="201168"/>
           </a:xfrm>
           <a:prstGeom prst="rect">
             <a:avLst/>
@@ -34452,7 +34020,7 @@
       </p:sp>
       <p:sp>
         <p:nvSpPr>
-          <p:cNvPr id="110" name="TextBox 109"/>
+          <p:cNvPr id="95" name="TextBox 94"/>
           <p:cNvSpPr txBox="1"/>
           <p:nvPr/>
         </p:nvSpPr>
@@ -34488,7 +34056,7 @@
       </p:sp>
       <p:sp>
         <p:nvSpPr>
-          <p:cNvPr id="111" name="TextBox 110"/>
+          <p:cNvPr id="96" name="TextBox 95"/>
           <p:cNvSpPr txBox="1"/>
           <p:nvPr/>
         </p:nvSpPr>

--- a/recommendation/presentation/발표_P3_데이터생성_최호길.pptx
+++ b/recommendation/presentation/발표_P3_데이터생성_최호길.pptx
@@ -25023,7 +25023,7 @@
                 <a:latin typeface="맑은 고딕"/>
                 <a:ea typeface="맑은 고딕"/>
               </a:rPr>
-              <a:t>Correlated / hunting</a:t>
+              <a:t>Equipment-correlated</a:t>
             </a:r>
           </a:p>
         </p:txBody>
@@ -27517,7 +27517,7 @@
                 <a:latin typeface="맑은 고딕"/>
                 <a:ea typeface="맑은 고딕"/>
               </a:rPr>
-              <a:t>Laplacian</a:t>
+              <a:t>Laplacian / hunting</a:t>
             </a:r>
           </a:p>
         </p:txBody>
@@ -29062,7 +29062,7 @@
         </p:nvSpPr>
         <p:spPr>
           <a:xfrm>
-            <a:off x="9267239" y="5563265"/>
+            <a:off x="9267239" y="5570627"/>
             <a:ext cx="53035" cy="53035"/>
           </a:xfrm>
           <a:prstGeom prst="ellipse">
@@ -29106,7 +29106,7 @@
         </p:nvSpPr>
         <p:spPr>
           <a:xfrm>
-            <a:off x="9388265" y="5539589"/>
+            <a:off x="9388265" y="5551390"/>
             <a:ext cx="53035" cy="53035"/>
           </a:xfrm>
           <a:prstGeom prst="ellipse">
@@ -29150,7 +29150,7 @@
         </p:nvSpPr>
         <p:spPr>
           <a:xfrm>
-            <a:off x="9509291" y="5631242"/>
+            <a:off x="9509291" y="5625858"/>
             <a:ext cx="53035" cy="53035"/>
           </a:xfrm>
           <a:prstGeom prst="ellipse">
@@ -29194,7 +29194,7 @@
         </p:nvSpPr>
         <p:spPr>
           <a:xfrm>
-            <a:off x="9630317" y="5663231"/>
+            <a:off x="9630317" y="5651849"/>
             <a:ext cx="53035" cy="53035"/>
           </a:xfrm>
           <a:prstGeom prst="ellipse">
@@ -29238,7 +29238,7 @@
         </p:nvSpPr>
         <p:spPr>
           <a:xfrm>
-            <a:off x="9751343" y="5575458"/>
+            <a:off x="9751343" y="5580533"/>
             <a:ext cx="53035" cy="53035"/>
           </a:xfrm>
           <a:prstGeom prst="ellipse">
@@ -29282,7 +29282,7 @@
         </p:nvSpPr>
         <p:spPr>
           <a:xfrm>
-            <a:off x="9872369" y="5554196"/>
+            <a:off x="9872369" y="5563258"/>
             <a:ext cx="53035" cy="53035"/>
           </a:xfrm>
           <a:prstGeom prst="ellipse">
@@ -29326,7 +29326,7 @@
         </p:nvSpPr>
         <p:spPr>
           <a:xfrm>
-            <a:off x="9993395" y="5573382"/>
+            <a:off x="9993395" y="5578847"/>
             <a:ext cx="53035" cy="53035"/>
           </a:xfrm>
           <a:prstGeom prst="ellipse">
@@ -29370,7 +29370,7 @@
         </p:nvSpPr>
         <p:spPr>
           <a:xfrm>
-            <a:off x="10114421" y="5576807"/>
+            <a:off x="10114421" y="5581630"/>
             <a:ext cx="53035" cy="53035"/>
           </a:xfrm>
           <a:prstGeom prst="ellipse">
@@ -29414,7 +29414,7 @@
         </p:nvSpPr>
         <p:spPr>
           <a:xfrm>
-            <a:off x="10235447" y="5622078"/>
+            <a:off x="10235447" y="5618412"/>
             <a:ext cx="53035" cy="53035"/>
           </a:xfrm>
           <a:prstGeom prst="ellipse">
@@ -29458,7 +29458,7 @@
         </p:nvSpPr>
         <p:spPr>
           <a:xfrm>
-            <a:off x="10356473" y="5625077"/>
+            <a:off x="10356473" y="5620849"/>
             <a:ext cx="53035" cy="53035"/>
           </a:xfrm>
           <a:prstGeom prst="ellipse">
@@ -29502,7 +29502,7 @@
         </p:nvSpPr>
         <p:spPr>
           <a:xfrm>
-            <a:off x="10477499" y="5574454"/>
+            <a:off x="10477499" y="5579718"/>
             <a:ext cx="53035" cy="53035"/>
           </a:xfrm>
           <a:prstGeom prst="ellipse">
@@ -29546,7 +29546,7 @@
         </p:nvSpPr>
         <p:spPr>
           <a:xfrm>
-            <a:off x="10598525" y="5631334"/>
+            <a:off x="10598525" y="5625933"/>
             <a:ext cx="53035" cy="53035"/>
           </a:xfrm>
           <a:prstGeom prst="ellipse">
@@ -29590,14 +29590,14 @@
         </p:nvSpPr>
         <p:spPr>
           <a:xfrm>
-            <a:off x="10719551" y="5659832"/>
+            <a:off x="10719551" y="5436620"/>
             <a:ext cx="53035" cy="53035"/>
           </a:xfrm>
           <a:prstGeom prst="ellipse">
             <a:avLst/>
           </a:prstGeom>
           <a:solidFill>
-            <a:srgbClr val="0F1E3D"/>
+            <a:srgbClr val="CC3328"/>
           </a:solidFill>
           <a:ln>
             <a:noFill/>
@@ -29634,14 +29634,14 @@
         </p:nvSpPr>
         <p:spPr>
           <a:xfrm>
-            <a:off x="10840577" y="5634051"/>
+            <a:off x="10840577" y="5760536"/>
             <a:ext cx="53035" cy="53035"/>
           </a:xfrm>
           <a:prstGeom prst="ellipse">
             <a:avLst/>
           </a:prstGeom>
           <a:solidFill>
-            <a:srgbClr val="0F1E3D"/>
+            <a:srgbClr val="CC3328"/>
           </a:solidFill>
           <a:ln>
             <a:noFill/>
@@ -29678,7 +29678,7 @@
         </p:nvSpPr>
         <p:spPr>
           <a:xfrm>
-            <a:off x="10961603" y="5420819"/>
+            <a:off x="10961603" y="5460321"/>
             <a:ext cx="53035" cy="53035"/>
           </a:xfrm>
           <a:prstGeom prst="ellipse">
@@ -29722,7 +29722,7 @@
         </p:nvSpPr>
         <p:spPr>
           <a:xfrm>
-            <a:off x="11082629" y="5776336"/>
+            <a:off x="11082629" y="5736834"/>
             <a:ext cx="53035" cy="53035"/>
           </a:xfrm>
           <a:prstGeom prst="ellipse">
@@ -29766,7 +29766,7 @@
         </p:nvSpPr>
         <p:spPr>
           <a:xfrm>
-            <a:off x="11203655" y="5456371"/>
+            <a:off x="11203655" y="5424769"/>
             <a:ext cx="53035" cy="53035"/>
           </a:xfrm>
           <a:prstGeom prst="ellipse">
@@ -29810,7 +29810,7 @@
         </p:nvSpPr>
         <p:spPr>
           <a:xfrm>
-            <a:off x="11324681" y="5736834"/>
+            <a:off x="11324681" y="5776336"/>
             <a:ext cx="53035" cy="53035"/>
           </a:xfrm>
           <a:prstGeom prst="ellipse">
@@ -32718,60 +32718,47 @@
                 <a:latin typeface="맑은 고딕"/>
                 <a:ea typeface="맑은 고딕"/>
               </a:rPr>
-              <a:t>Smoothing window — 후속 3-epoch median 으로 best 선택</a:t>
+              <a:t>Smoothing — 후속 3-epoch median best 선택</a:t>
             </a:r>
           </a:p>
         </p:txBody>
       </p:sp>
-      <p:sp>
-        <p:nvSpPr>
-          <p:cNvPr id="60" name="TextBox 59"/>
-          <p:cNvSpPr txBox="1"/>
-          <p:nvPr/>
-        </p:nvSpPr>
-        <p:spPr>
-          <a:xfrm>
-            <a:off x="1664208" y="4736592"/>
-            <a:ext cx="4197096" cy="420624"/>
-          </a:xfrm>
-          <a:prstGeom prst="rect">
-            <a:avLst/>
-          </a:prstGeom>
-          <a:noFill/>
-        </p:spPr>
-        <p:txBody>
-          <a:bodyPr wrap="square" anchor="t" lIns="0" rIns="0" tIns="0" bIns="0">
-            <a:spAutoFit/>
-          </a:bodyPr>
-          <a:lstStyle/>
-          <a:p>
-            <a:pPr algn="l"/>
-            <a:r>
-              <a:rPr sz="1200">
-                <a:solidFill>
-                  <a:srgbClr val="0F1E3D"/>
-                </a:solidFill>
-                <a:latin typeface="맑은 고딕"/>
-                <a:ea typeface="맑은 고딕"/>
-              </a:rPr>
-              <a:t>단일 epoch 최고 F1은 초기 hunting spike(학습 덜 됨),</a:t>
-            </a:r>
-          </a:p>
-          <a:p>
-            <a:pPr algn="l"/>
-            <a:r>
-              <a:rPr sz="1200" b="1">
-                <a:solidFill>
-                  <a:srgbClr val="0F1E3D"/>
-                </a:solidFill>
-                <a:latin typeface="맑은 고딕"/>
-                <a:ea typeface="맑은 고딕"/>
-              </a:rPr>
-              <a:t>후속 3-epoch median 이 더 높은 plateau 를 best 선택</a:t>
-            </a:r>
-          </a:p>
-        </p:txBody>
-      </p:sp>
+      <p:cxnSp>
+        <p:nvCxnSpPr>
+          <p:cNvPr id="60" name="Connector 59"/>
+          <p:cNvCxnSpPr/>
+          <p:nvPr/>
+        </p:nvCxnSpPr>
+        <p:spPr>
+          <a:xfrm flipV="1">
+            <a:off x="1700784" y="5574791"/>
+            <a:ext cx="320040" cy="158061"/>
+          </a:xfrm>
+          <a:prstGeom prst="line">
+            <a:avLst/>
+          </a:prstGeom>
+          <a:ln w="19050">
+            <a:solidFill>
+              <a:srgbClr val="AEB4BD"/>
+            </a:solidFill>
+          </a:ln>
+          <a:effectLst/>
+        </p:spPr>
+        <p:style>
+          <a:lnRef idx="2">
+            <a:schemeClr val="accent1"/>
+          </a:lnRef>
+          <a:fillRef idx="0">
+            <a:schemeClr val="accent1"/>
+          </a:fillRef>
+          <a:effectRef idx="1">
+            <a:schemeClr val="accent1"/>
+          </a:effectRef>
+          <a:fontRef idx="minor">
+            <a:schemeClr val="tx1"/>
+          </a:fontRef>
+        </p:style>
+      </p:cxnSp>
       <p:cxnSp>
         <p:nvCxnSpPr>
           <p:cNvPr id="61" name="Connector 60"/>
@@ -32780,8 +32767,8 @@
         </p:nvCxnSpPr>
         <p:spPr>
           <a:xfrm flipV="1">
-            <a:off x="1700784" y="5745479"/>
-            <a:ext cx="320040" cy="116260"/>
+            <a:off x="2020824" y="5469418"/>
+            <a:ext cx="320040" cy="105373"/>
           </a:xfrm>
           <a:prstGeom prst="line">
             <a:avLst/>
@@ -32816,8 +32803,8 @@
         </p:nvCxnSpPr>
         <p:spPr>
           <a:xfrm flipV="1">
-            <a:off x="2020824" y="5667973"/>
-            <a:ext cx="320040" cy="77506"/>
+            <a:off x="2340864" y="5390388"/>
+            <a:ext cx="320040" cy="79030"/>
           </a:xfrm>
           <a:prstGeom prst="line">
             <a:avLst/>
@@ -32852,8 +32839,8 @@
         </p:nvCxnSpPr>
         <p:spPr>
           <a:xfrm flipV="1">
-            <a:off x="2340864" y="5609844"/>
-            <a:ext cx="320040" cy="58129"/>
+            <a:off x="2660904" y="4916206"/>
+            <a:ext cx="320040" cy="474182"/>
           </a:xfrm>
           <a:prstGeom prst="line">
             <a:avLst/>
@@ -32887,9 +32874,9 @@
           <p:nvPr/>
         </p:nvCxnSpPr>
         <p:spPr>
-          <a:xfrm flipV="1">
-            <a:off x="2660904" y="5261065"/>
-            <a:ext cx="320040" cy="348779"/>
+          <a:xfrm>
+            <a:off x="2980944" y="4916206"/>
+            <a:ext cx="320040" cy="632242"/>
           </a:xfrm>
           <a:prstGeom prst="line">
             <a:avLst/>
@@ -32923,9 +32910,9 @@
           <p:nvPr/>
         </p:nvCxnSpPr>
         <p:spPr>
-          <a:xfrm>
-            <a:off x="2980944" y="5261065"/>
-            <a:ext cx="320040" cy="465038"/>
+          <a:xfrm flipV="1">
+            <a:off x="3300984" y="5364044"/>
+            <a:ext cx="320040" cy="184404"/>
           </a:xfrm>
           <a:prstGeom prst="line">
             <a:avLst/>
@@ -32960,8 +32947,8 @@
         </p:nvCxnSpPr>
         <p:spPr>
           <a:xfrm flipV="1">
-            <a:off x="3300984" y="5590467"/>
-            <a:ext cx="320040" cy="135636"/>
+            <a:off x="3621024" y="5285014"/>
+            <a:ext cx="320040" cy="79030"/>
           </a:xfrm>
           <a:prstGeom prst="line">
             <a:avLst/>
@@ -32996,8 +32983,8 @@
         </p:nvCxnSpPr>
         <p:spPr>
           <a:xfrm flipV="1">
-            <a:off x="3621024" y="5532337"/>
-            <a:ext cx="320040" cy="58130"/>
+            <a:off x="3941064" y="5232327"/>
+            <a:ext cx="320040" cy="52687"/>
           </a:xfrm>
           <a:prstGeom prst="line">
             <a:avLst/>
@@ -33032,8 +33019,8 @@
         </p:nvCxnSpPr>
         <p:spPr>
           <a:xfrm flipV="1">
-            <a:off x="3941064" y="5493584"/>
-            <a:ext cx="320040" cy="38753"/>
+            <a:off x="4261104" y="5179640"/>
+            <a:ext cx="320040" cy="52687"/>
           </a:xfrm>
           <a:prstGeom prst="line">
             <a:avLst/>
@@ -33068,8 +33055,8 @@
         </p:nvCxnSpPr>
         <p:spPr>
           <a:xfrm flipV="1">
-            <a:off x="4261104" y="5454831"/>
-            <a:ext cx="320040" cy="38753"/>
+            <a:off x="4581144" y="5166468"/>
+            <a:ext cx="320040" cy="13172"/>
           </a:xfrm>
           <a:prstGeom prst="line">
             <a:avLst/>
@@ -33104,8 +33091,8 @@
         </p:nvCxnSpPr>
         <p:spPr>
           <a:xfrm flipV="1">
-            <a:off x="4581144" y="5445143"/>
-            <a:ext cx="320040" cy="9688"/>
+            <a:off x="4901184" y="5153297"/>
+            <a:ext cx="320040" cy="13171"/>
           </a:xfrm>
           <a:prstGeom prst="line">
             <a:avLst/>
@@ -33140,8 +33127,8 @@
         </p:nvCxnSpPr>
         <p:spPr>
           <a:xfrm flipV="1">
-            <a:off x="4901184" y="5435454"/>
-            <a:ext cx="320040" cy="9689"/>
+            <a:off x="5221224" y="5140125"/>
+            <a:ext cx="320040" cy="13172"/>
           </a:xfrm>
           <a:prstGeom prst="line">
             <a:avLst/>
@@ -33175,9 +33162,9 @@
           <p:nvPr/>
         </p:nvCxnSpPr>
         <p:spPr>
-          <a:xfrm flipV="1">
-            <a:off x="5221224" y="5425766"/>
-            <a:ext cx="320040" cy="9688"/>
+          <a:xfrm>
+            <a:off x="5541264" y="5140125"/>
+            <a:ext cx="320040" cy="13172"/>
           </a:xfrm>
           <a:prstGeom prst="line">
             <a:avLst/>
@@ -33211,16 +33198,16 @@
           <p:nvPr/>
         </p:nvCxnSpPr>
         <p:spPr>
-          <a:xfrm>
-            <a:off x="5541264" y="5425766"/>
-            <a:ext cx="320040" cy="9688"/>
+          <a:xfrm flipV="1">
+            <a:off x="1700784" y="5469418"/>
+            <a:ext cx="320040" cy="105373"/>
           </a:xfrm>
           <a:prstGeom prst="line">
             <a:avLst/>
           </a:prstGeom>
-          <a:ln w="19050">
+          <a:ln w="35560">
             <a:solidFill>
-              <a:srgbClr val="AEB4BD"/>
+              <a:srgbClr val="3A6FD0"/>
             </a:solidFill>
           </a:ln>
           <a:effectLst/>
@@ -33248,8 +33235,8 @@
         </p:nvCxnSpPr>
         <p:spPr>
           <a:xfrm flipV="1">
-            <a:off x="1700784" y="5667973"/>
-            <a:ext cx="320040" cy="77506"/>
+            <a:off x="2020824" y="5390388"/>
+            <a:ext cx="320040" cy="79030"/>
           </a:xfrm>
           <a:prstGeom prst="line">
             <a:avLst/>
@@ -33283,9 +33270,9 @@
           <p:nvPr/>
         </p:nvCxnSpPr>
         <p:spPr>
-          <a:xfrm flipV="1">
-            <a:off x="2020824" y="5609844"/>
-            <a:ext cx="320040" cy="58129"/>
+          <a:xfrm>
+            <a:off x="2340864" y="5390388"/>
+            <a:ext cx="320040" cy="0"/>
           </a:xfrm>
           <a:prstGeom prst="line">
             <a:avLst/>
@@ -33319,9 +33306,9 @@
           <p:nvPr/>
         </p:nvCxnSpPr>
         <p:spPr>
-          <a:xfrm>
-            <a:off x="2340864" y="5609844"/>
-            <a:ext cx="320040" cy="0"/>
+          <a:xfrm flipV="1">
+            <a:off x="2660904" y="5364044"/>
+            <a:ext cx="320040" cy="26344"/>
           </a:xfrm>
           <a:prstGeom prst="line">
             <a:avLst/>
@@ -33355,9 +33342,9 @@
           <p:nvPr/>
         </p:nvCxnSpPr>
         <p:spPr>
-          <a:xfrm flipV="1">
-            <a:off x="2660904" y="5590467"/>
-            <a:ext cx="320040" cy="19377"/>
+          <a:xfrm>
+            <a:off x="2980944" y="5364044"/>
+            <a:ext cx="320040" cy="0"/>
           </a:xfrm>
           <a:prstGeom prst="line">
             <a:avLst/>
@@ -33391,9 +33378,9 @@
           <p:nvPr/>
         </p:nvCxnSpPr>
         <p:spPr>
-          <a:xfrm>
-            <a:off x="2980944" y="5590467"/>
-            <a:ext cx="320040" cy="0"/>
+          <a:xfrm flipV="1">
+            <a:off x="3300984" y="5285014"/>
+            <a:ext cx="320040" cy="79030"/>
           </a:xfrm>
           <a:prstGeom prst="line">
             <a:avLst/>
@@ -33428,8 +33415,8 @@
         </p:nvCxnSpPr>
         <p:spPr>
           <a:xfrm flipV="1">
-            <a:off x="3300984" y="5532337"/>
-            <a:ext cx="320040" cy="58130"/>
+            <a:off x="3621024" y="5232327"/>
+            <a:ext cx="320040" cy="52687"/>
           </a:xfrm>
           <a:prstGeom prst="line">
             <a:avLst/>
@@ -33464,8 +33451,8 @@
         </p:nvCxnSpPr>
         <p:spPr>
           <a:xfrm flipV="1">
-            <a:off x="3621024" y="5493584"/>
-            <a:ext cx="320040" cy="38753"/>
+            <a:off x="3941064" y="5179640"/>
+            <a:ext cx="320040" cy="52687"/>
           </a:xfrm>
           <a:prstGeom prst="line">
             <a:avLst/>
@@ -33500,8 +33487,8 @@
         </p:nvCxnSpPr>
         <p:spPr>
           <a:xfrm flipV="1">
-            <a:off x="3941064" y="5454831"/>
-            <a:ext cx="320040" cy="38753"/>
+            <a:off x="4261104" y="5166468"/>
+            <a:ext cx="320040" cy="13172"/>
           </a:xfrm>
           <a:prstGeom prst="line">
             <a:avLst/>
@@ -33536,8 +33523,8 @@
         </p:nvCxnSpPr>
         <p:spPr>
           <a:xfrm flipV="1">
-            <a:off x="4261104" y="5445143"/>
-            <a:ext cx="320040" cy="9688"/>
+            <a:off x="4581144" y="5153297"/>
+            <a:ext cx="320040" cy="13171"/>
           </a:xfrm>
           <a:prstGeom prst="line">
             <a:avLst/>
@@ -33571,9 +33558,9 @@
           <p:nvPr/>
         </p:nvCxnSpPr>
         <p:spPr>
-          <a:xfrm flipV="1">
-            <a:off x="4581144" y="5435454"/>
-            <a:ext cx="320040" cy="9689"/>
+          <a:xfrm>
+            <a:off x="4901184" y="5153297"/>
+            <a:ext cx="320040" cy="0"/>
           </a:xfrm>
           <a:prstGeom prst="line">
             <a:avLst/>
@@ -33600,139 +33587,103 @@
           </a:fontRef>
         </p:style>
       </p:cxnSp>
+      <p:sp>
+        <p:nvSpPr>
+          <p:cNvPr id="84" name="Oval 83"/>
+          <p:cNvSpPr/>
+          <p:nvPr/>
+        </p:nvSpPr>
+        <p:spPr>
+          <a:xfrm>
+            <a:off x="2930652" y="4865914"/>
+            <a:ext cx="100584" cy="100584"/>
+          </a:xfrm>
+          <a:prstGeom prst="ellipse">
+            <a:avLst/>
+          </a:prstGeom>
+          <a:solidFill>
+            <a:srgbClr val="CC3328"/>
+          </a:solidFill>
+          <a:ln>
+            <a:noFill/>
+          </a:ln>
+          <a:effectLst/>
+        </p:spPr>
+        <p:style>
+          <a:lnRef idx="1">
+            <a:schemeClr val="accent1"/>
+          </a:lnRef>
+          <a:fillRef idx="3">
+            <a:schemeClr val="accent1"/>
+          </a:fillRef>
+          <a:effectRef idx="2">
+            <a:schemeClr val="accent1"/>
+          </a:effectRef>
+          <a:fontRef idx="minor">
+            <a:schemeClr val="lt1"/>
+          </a:fontRef>
+        </p:style>
+        <p:txBody>
+          <a:bodyPr rtlCol="0" anchor="ctr"/>
+          <a:lstStyle/>
+          <a:p>
+            <a:pPr algn="ctr"/>
+          </a:p>
+        </p:txBody>
+      </p:sp>
+      <p:sp>
+        <p:nvSpPr>
+          <p:cNvPr id="85" name="Diamond 84"/>
+          <p:cNvSpPr/>
+          <p:nvPr/>
+        </p:nvSpPr>
+        <p:spPr>
+          <a:xfrm>
+            <a:off x="4832604" y="5084717"/>
+            <a:ext cx="137160" cy="137160"/>
+          </a:xfrm>
+          <a:prstGeom prst="diamond">
+            <a:avLst/>
+          </a:prstGeom>
+          <a:solidFill>
+            <a:srgbClr val="0F1E3D"/>
+          </a:solidFill>
+          <a:ln>
+            <a:noFill/>
+          </a:ln>
+          <a:effectLst/>
+        </p:spPr>
+        <p:style>
+          <a:lnRef idx="1">
+            <a:schemeClr val="accent1"/>
+          </a:lnRef>
+          <a:fillRef idx="3">
+            <a:schemeClr val="accent1"/>
+          </a:fillRef>
+          <a:effectRef idx="2">
+            <a:schemeClr val="accent1"/>
+          </a:effectRef>
+          <a:fontRef idx="minor">
+            <a:schemeClr val="lt1"/>
+          </a:fontRef>
+        </p:style>
+        <p:txBody>
+          <a:bodyPr rtlCol="0" anchor="ctr"/>
+          <a:lstStyle/>
+          <a:p>
+            <a:pPr algn="ctr"/>
+          </a:p>
+        </p:txBody>
+      </p:sp>
       <p:cxnSp>
         <p:nvCxnSpPr>
-          <p:cNvPr id="84" name="Connector 83"/>
+          <p:cNvPr id="86" name="Connector 85"/>
           <p:cNvCxnSpPr/>
           <p:nvPr/>
         </p:nvCxnSpPr>
         <p:spPr>
           <a:xfrm>
-            <a:off x="4901184" y="5435454"/>
-            <a:ext cx="320040" cy="0"/>
-          </a:xfrm>
-          <a:prstGeom prst="line">
-            <a:avLst/>
-          </a:prstGeom>
-          <a:ln w="35560">
-            <a:solidFill>
-              <a:srgbClr val="3A6FD0"/>
-            </a:solidFill>
-          </a:ln>
-          <a:effectLst/>
-        </p:spPr>
-        <p:style>
-          <a:lnRef idx="2">
-            <a:schemeClr val="accent1"/>
-          </a:lnRef>
-          <a:fillRef idx="0">
-            <a:schemeClr val="accent1"/>
-          </a:fillRef>
-          <a:effectRef idx="1">
-            <a:schemeClr val="accent1"/>
-          </a:effectRef>
-          <a:fontRef idx="minor">
-            <a:schemeClr val="tx1"/>
-          </a:fontRef>
-        </p:style>
-      </p:cxnSp>
-      <p:sp>
-        <p:nvSpPr>
-          <p:cNvPr id="85" name="Oval 84"/>
-          <p:cNvSpPr/>
-          <p:nvPr/>
-        </p:nvSpPr>
-        <p:spPr>
-          <a:xfrm>
-            <a:off x="2930652" y="5210773"/>
-            <a:ext cx="100584" cy="100584"/>
-          </a:xfrm>
-          <a:prstGeom prst="ellipse">
-            <a:avLst/>
-          </a:prstGeom>
-          <a:solidFill>
-            <a:srgbClr val="CC3328"/>
-          </a:solidFill>
-          <a:ln>
-            <a:noFill/>
-          </a:ln>
-          <a:effectLst/>
-        </p:spPr>
-        <p:style>
-          <a:lnRef idx="1">
-            <a:schemeClr val="accent1"/>
-          </a:lnRef>
-          <a:fillRef idx="3">
-            <a:schemeClr val="accent1"/>
-          </a:fillRef>
-          <a:effectRef idx="2">
-            <a:schemeClr val="accent1"/>
-          </a:effectRef>
-          <a:fontRef idx="minor">
-            <a:schemeClr val="lt1"/>
-          </a:fontRef>
-        </p:style>
-        <p:txBody>
-          <a:bodyPr rtlCol="0" anchor="ctr"/>
-          <a:lstStyle/>
-          <a:p>
-            <a:pPr algn="ctr"/>
-          </a:p>
-        </p:txBody>
-      </p:sp>
-      <p:sp>
-        <p:nvSpPr>
-          <p:cNvPr id="86" name="Diamond 85"/>
-          <p:cNvSpPr/>
-          <p:nvPr/>
-        </p:nvSpPr>
-        <p:spPr>
-          <a:xfrm>
-            <a:off x="4832604" y="5366874"/>
-            <a:ext cx="137160" cy="137160"/>
-          </a:xfrm>
-          <a:prstGeom prst="diamond">
-            <a:avLst/>
-          </a:prstGeom>
-          <a:solidFill>
-            <a:srgbClr val="0F1E3D"/>
-          </a:solidFill>
-          <a:ln>
-            <a:noFill/>
-          </a:ln>
-          <a:effectLst/>
-        </p:spPr>
-        <p:style>
-          <a:lnRef idx="1">
-            <a:schemeClr val="accent1"/>
-          </a:lnRef>
-          <a:fillRef idx="3">
-            <a:schemeClr val="accent1"/>
-          </a:fillRef>
-          <a:effectRef idx="2">
-            <a:schemeClr val="accent1"/>
-          </a:effectRef>
-          <a:fontRef idx="minor">
-            <a:schemeClr val="lt1"/>
-          </a:fontRef>
-        </p:style>
-        <p:txBody>
-          <a:bodyPr rtlCol="0" anchor="ctr"/>
-          <a:lstStyle/>
-          <a:p>
-            <a:pPr algn="ctr"/>
-          </a:p>
-        </p:txBody>
-      </p:sp>
-      <p:cxnSp>
-        <p:nvCxnSpPr>
-          <p:cNvPr id="87" name="Connector 86"/>
-          <p:cNvCxnSpPr/>
-          <p:nvPr/>
-        </p:nvCxnSpPr>
-        <p:spPr>
-          <a:xfrm>
-            <a:off x="1700784" y="6016752"/>
+            <a:off x="1700784" y="5943600"/>
             <a:ext cx="4160520" cy="0"/>
           </a:xfrm>
           <a:prstGeom prst="line">
@@ -33762,13 +33713,13 @@
       </p:cxnSp>
       <p:sp>
         <p:nvSpPr>
-          <p:cNvPr id="88" name="TextBox 87"/>
+          <p:cNvPr id="87" name="TextBox 86"/>
           <p:cNvSpPr txBox="1"/>
           <p:nvPr/>
         </p:nvSpPr>
         <p:spPr>
           <a:xfrm>
-            <a:off x="1609344" y="6030468"/>
+            <a:off x="1609344" y="6012180"/>
             <a:ext cx="4288536" cy="173736"/>
           </a:xfrm>
           <a:prstGeom prst="rect">
@@ -33808,7 +33759,7 @@
       </p:sp>
       <p:sp>
         <p:nvSpPr>
-          <p:cNvPr id="89" name="TextBox 88"/>
+          <p:cNvPr id="88" name="TextBox 87"/>
           <p:cNvSpPr txBox="1"/>
           <p:nvPr/>
         </p:nvSpPr>
@@ -33837,14 +33788,14 @@
                 <a:latin typeface="맑은 고딕"/>
                 <a:ea typeface="맑은 고딕"/>
               </a:rPr>
-              <a:t>Color 변경 전후 — 배경 대비 색차↑(빨강) → 분리도 향상</a:t>
+              <a:t>Color 변경 전후 — 빨강(c01)이 배경 대비 색차 큼</a:t>
             </a:r>
           </a:p>
         </p:txBody>
       </p:sp>
       <p:sp>
         <p:nvSpPr>
-          <p:cNvPr id="90" name="TextBox 89"/>
+          <p:cNvPr id="89" name="TextBox 88"/>
           <p:cNvSpPr txBox="1"/>
           <p:nvPr/>
         </p:nvSpPr>
@@ -33866,41 +33817,21 @@
           <a:p>
             <a:pPr algn="ctr"/>
             <a:r>
-              <a:rPr sz="1200">
-                <a:solidFill>
-                  <a:srgbClr val="6B7280"/>
-                </a:solidFill>
-                <a:latin typeface="맑은 고딕"/>
-                <a:ea typeface="맑은 고딕"/>
-              </a:rPr>
-              <a:t>색 단변수 5-seed:  </a:t>
-            </a:r>
-            <a:r>
-              <a:rPr sz="1200" b="1">
+              <a:rPr sz="1300" b="1">
                 <a:solidFill>
                   <a:srgbClr val="0F1E3D"/>
                 </a:solidFill>
                 <a:latin typeface="맑은 고딕"/>
                 <a:ea typeface="맑은 고딕"/>
               </a:rPr>
-              <a:t>F1 +0.0008</a:t>
-            </a:r>
-            <a:r>
-              <a:rPr sz="1200">
-                <a:solidFill>
-                  <a:srgbClr val="6B7280"/>
-                </a:solidFill>
-                <a:latin typeface="맑은 고딕"/>
-                <a:ea typeface="맑은 고딕"/>
-              </a:rPr>
-              <a:t>  ·  놓친 불량 −0.8  ·  오경보 −0.4</a:t>
+              <a:t>→ F1 +0.001,  FN/FP 약 1개씩 감소</a:t>
             </a:r>
           </a:p>
         </p:txBody>
       </p:sp>
       <p:pic>
         <p:nvPicPr>
-          <p:cNvPr id="91" name="Picture 90" descr="p3r_color_baseline.png"/>
+          <p:cNvPr id="90" name="Picture 89" descr="p3r_color_baseline.png"/>
           <p:cNvPicPr>
             <a:picLocks noChangeAspect="1"/>
           </p:cNvPicPr>
@@ -33924,7 +33855,7 @@
       </p:pic>
       <p:sp>
         <p:nvSpPr>
-          <p:cNvPr id="92" name="TextBox 91"/>
+          <p:cNvPr id="91" name="TextBox 90"/>
           <p:cNvSpPr txBox="1"/>
           <p:nvPr/>
         </p:nvSpPr>
@@ -33960,7 +33891,7 @@
       </p:sp>
       <p:pic>
         <p:nvPicPr>
-          <p:cNvPr id="93" name="Picture 92" descr="p3r_color_c01.png"/>
+          <p:cNvPr id="92" name="Picture 91" descr="p3r_color_c01.png"/>
           <p:cNvPicPr>
             <a:picLocks noChangeAspect="1"/>
           </p:cNvPicPr>
@@ -33984,7 +33915,7 @@
       </p:pic>
       <p:sp>
         <p:nvSpPr>
-          <p:cNvPr id="94" name="TextBox 93"/>
+          <p:cNvPr id="93" name="TextBox 92"/>
           <p:cNvSpPr txBox="1"/>
           <p:nvPr/>
         </p:nvSpPr>
@@ -34020,7 +33951,7 @@
       </p:sp>
       <p:sp>
         <p:nvSpPr>
-          <p:cNvPr id="95" name="TextBox 94"/>
+          <p:cNvPr id="94" name="TextBox 93"/>
           <p:cNvSpPr txBox="1"/>
           <p:nvPr/>
         </p:nvSpPr>
@@ -34056,7 +33987,7 @@
       </p:sp>
       <p:sp>
         <p:nvSpPr>
-          <p:cNvPr id="96" name="TextBox 95"/>
+          <p:cNvPr id="95" name="TextBox 94"/>
           <p:cNvSpPr txBox="1"/>
           <p:nvPr/>
         </p:nvSpPr>

--- a/recommendation/presentation/발표_P3_데이터생성_최호길.pptx
+++ b/recommendation/presentation/발표_P3_데이터생성_최호길.pptx
@@ -32723,42 +32723,42 @@
           </a:p>
         </p:txBody>
       </p:sp>
-      <p:cxnSp>
-        <p:nvCxnSpPr>
-          <p:cNvPr id="60" name="Connector 59"/>
-          <p:cNvCxnSpPr/>
-          <p:nvPr/>
-        </p:nvCxnSpPr>
-        <p:spPr>
-          <a:xfrm flipV="1">
-            <a:off x="1700784" y="5574791"/>
-            <a:ext cx="320040" cy="158061"/>
-          </a:xfrm>
-          <a:prstGeom prst="line">
-            <a:avLst/>
-          </a:prstGeom>
-          <a:ln w="19050">
-            <a:solidFill>
-              <a:srgbClr val="AEB4BD"/>
-            </a:solidFill>
-          </a:ln>
-          <a:effectLst/>
-        </p:spPr>
-        <p:style>
-          <a:lnRef idx="2">
-            <a:schemeClr val="accent1"/>
-          </a:lnRef>
-          <a:fillRef idx="0">
-            <a:schemeClr val="accent1"/>
-          </a:fillRef>
-          <a:effectRef idx="1">
-            <a:schemeClr val="accent1"/>
-          </a:effectRef>
-          <a:fontRef idx="minor">
-            <a:schemeClr val="tx1"/>
-          </a:fontRef>
-        </p:style>
-      </p:cxnSp>
+      <p:sp>
+        <p:nvSpPr>
+          <p:cNvPr id="60" name="TextBox 59"/>
+          <p:cNvSpPr txBox="1"/>
+          <p:nvPr/>
+        </p:nvSpPr>
+        <p:spPr>
+          <a:xfrm>
+            <a:off x="1609344" y="4727448"/>
+            <a:ext cx="1097280" cy="164592"/>
+          </a:xfrm>
+          <a:prstGeom prst="rect">
+            <a:avLst/>
+          </a:prstGeom>
+          <a:noFill/>
+        </p:spPr>
+        <p:txBody>
+          <a:bodyPr wrap="none" anchor="ctr" lIns="0" rIns="0" tIns="0" bIns="0">
+            <a:spAutoFit/>
+          </a:bodyPr>
+          <a:lstStyle/>
+          <a:p>
+            <a:pPr algn="l"/>
+            <a:r>
+              <a:rPr sz="1100">
+                <a:solidFill>
+                  <a:srgbClr val="6B7280"/>
+                </a:solidFill>
+                <a:latin typeface="맑은 고딕"/>
+                <a:ea typeface="맑은 고딕"/>
+              </a:rPr>
+              <a:t>val F1</a:t>
+            </a:r>
+          </a:p>
+        </p:txBody>
+      </p:sp>
       <p:cxnSp>
         <p:nvCxnSpPr>
           <p:cNvPr id="61" name="Connector 60"/>
@@ -32767,8 +32767,8 @@
         </p:nvCxnSpPr>
         <p:spPr>
           <a:xfrm flipV="1">
-            <a:off x="2020824" y="5469418"/>
-            <a:ext cx="320040" cy="105373"/>
+            <a:off x="1929384" y="5489447"/>
+            <a:ext cx="284167" cy="124098"/>
           </a:xfrm>
           <a:prstGeom prst="line">
             <a:avLst/>
@@ -32803,8 +32803,8 @@
         </p:nvCxnSpPr>
         <p:spPr>
           <a:xfrm flipV="1">
-            <a:off x="2340864" y="5390388"/>
-            <a:ext cx="320040" cy="79030"/>
+            <a:off x="2213551" y="5406716"/>
+            <a:ext cx="284167" cy="82731"/>
           </a:xfrm>
           <a:prstGeom prst="line">
             <a:avLst/>
@@ -32839,8 +32839,8 @@
         </p:nvCxnSpPr>
         <p:spPr>
           <a:xfrm flipV="1">
-            <a:off x="2660904" y="4916206"/>
-            <a:ext cx="320040" cy="474182"/>
+            <a:off x="2497718" y="5344668"/>
+            <a:ext cx="284168" cy="62048"/>
           </a:xfrm>
           <a:prstGeom prst="line">
             <a:avLst/>
@@ -32874,9 +32874,9 @@
           <p:nvPr/>
         </p:nvCxnSpPr>
         <p:spPr>
-          <a:xfrm>
-            <a:off x="2980944" y="4916206"/>
-            <a:ext cx="320040" cy="632242"/>
+          <a:xfrm flipV="1">
+            <a:off x="2781886" y="4972376"/>
+            <a:ext cx="284167" cy="372292"/>
           </a:xfrm>
           <a:prstGeom prst="line">
             <a:avLst/>
@@ -32910,9 +32910,9 @@
           <p:nvPr/>
         </p:nvCxnSpPr>
         <p:spPr>
-          <a:xfrm flipV="1">
-            <a:off x="3300984" y="5364044"/>
-            <a:ext cx="320040" cy="184404"/>
+          <a:xfrm>
+            <a:off x="3066053" y="4972376"/>
+            <a:ext cx="284167" cy="496389"/>
           </a:xfrm>
           <a:prstGeom prst="line">
             <a:avLst/>
@@ -32947,8 +32947,8 @@
         </p:nvCxnSpPr>
         <p:spPr>
           <a:xfrm flipV="1">
-            <a:off x="3621024" y="5285014"/>
-            <a:ext cx="320040" cy="79030"/>
+            <a:off x="3350220" y="5323985"/>
+            <a:ext cx="284168" cy="144780"/>
           </a:xfrm>
           <a:prstGeom prst="line">
             <a:avLst/>
@@ -32983,8 +32983,8 @@
         </p:nvCxnSpPr>
         <p:spPr>
           <a:xfrm flipV="1">
-            <a:off x="3941064" y="5232327"/>
-            <a:ext cx="320040" cy="52687"/>
+            <a:off x="3634388" y="5261936"/>
+            <a:ext cx="284167" cy="62049"/>
           </a:xfrm>
           <a:prstGeom prst="line">
             <a:avLst/>
@@ -33019,8 +33019,8 @@
         </p:nvCxnSpPr>
         <p:spPr>
           <a:xfrm flipV="1">
-            <a:off x="4261104" y="5179640"/>
-            <a:ext cx="320040" cy="52687"/>
+            <a:off x="3918555" y="5220570"/>
+            <a:ext cx="284168" cy="41366"/>
           </a:xfrm>
           <a:prstGeom prst="line">
             <a:avLst/>
@@ -33055,8 +33055,8 @@
         </p:nvCxnSpPr>
         <p:spPr>
           <a:xfrm flipV="1">
-            <a:off x="4581144" y="5166468"/>
-            <a:ext cx="320040" cy="13172"/>
+            <a:off x="4202723" y="5179205"/>
+            <a:ext cx="284167" cy="41365"/>
           </a:xfrm>
           <a:prstGeom prst="line">
             <a:avLst/>
@@ -33091,8 +33091,8 @@
         </p:nvCxnSpPr>
         <p:spPr>
           <a:xfrm flipV="1">
-            <a:off x="4901184" y="5153297"/>
-            <a:ext cx="320040" cy="13171"/>
+            <a:off x="4486890" y="5168863"/>
+            <a:ext cx="284167" cy="10342"/>
           </a:xfrm>
           <a:prstGeom prst="line">
             <a:avLst/>
@@ -33127,8 +33127,8 @@
         </p:nvCxnSpPr>
         <p:spPr>
           <a:xfrm flipV="1">
-            <a:off x="5221224" y="5140125"/>
-            <a:ext cx="320040" cy="13172"/>
+            <a:off x="4771057" y="5158522"/>
+            <a:ext cx="284168" cy="10341"/>
           </a:xfrm>
           <a:prstGeom prst="line">
             <a:avLst/>
@@ -33162,9 +33162,9 @@
           <p:nvPr/>
         </p:nvCxnSpPr>
         <p:spPr>
-          <a:xfrm>
-            <a:off x="5541264" y="5140125"/>
-            <a:ext cx="320040" cy="13172"/>
+          <a:xfrm flipV="1">
+            <a:off x="5055225" y="5148180"/>
+            <a:ext cx="284167" cy="10342"/>
           </a:xfrm>
           <a:prstGeom prst="line">
             <a:avLst/>
@@ -33198,16 +33198,16 @@
           <p:nvPr/>
         </p:nvCxnSpPr>
         <p:spPr>
-          <a:xfrm flipV="1">
-            <a:off x="1700784" y="5469418"/>
-            <a:ext cx="320040" cy="105373"/>
+          <a:xfrm>
+            <a:off x="5339392" y="5148180"/>
+            <a:ext cx="284168" cy="10342"/>
           </a:xfrm>
           <a:prstGeom prst="line">
             <a:avLst/>
           </a:prstGeom>
-          <a:ln w="35560">
+          <a:ln w="19050">
             <a:solidFill>
-              <a:srgbClr val="3A6FD0"/>
+              <a:srgbClr val="AEB4BD"/>
             </a:solidFill>
           </a:ln>
           <a:effectLst/>
@@ -33235,8 +33235,8 @@
         </p:nvCxnSpPr>
         <p:spPr>
           <a:xfrm flipV="1">
-            <a:off x="2020824" y="5390388"/>
-            <a:ext cx="320040" cy="79030"/>
+            <a:off x="1929384" y="5406716"/>
+            <a:ext cx="284167" cy="82731"/>
           </a:xfrm>
           <a:prstGeom prst="line">
             <a:avLst/>
@@ -33270,9 +33270,9 @@
           <p:nvPr/>
         </p:nvCxnSpPr>
         <p:spPr>
-          <a:xfrm>
-            <a:off x="2340864" y="5390388"/>
-            <a:ext cx="320040" cy="0"/>
+          <a:xfrm flipV="1">
+            <a:off x="2213551" y="5344668"/>
+            <a:ext cx="284167" cy="62048"/>
           </a:xfrm>
           <a:prstGeom prst="line">
             <a:avLst/>
@@ -33306,9 +33306,9 @@
           <p:nvPr/>
         </p:nvCxnSpPr>
         <p:spPr>
-          <a:xfrm flipV="1">
-            <a:off x="2660904" y="5364044"/>
-            <a:ext cx="320040" cy="26344"/>
+          <a:xfrm>
+            <a:off x="2497718" y="5344668"/>
+            <a:ext cx="284168" cy="0"/>
           </a:xfrm>
           <a:prstGeom prst="line">
             <a:avLst/>
@@ -33342,9 +33342,9 @@
           <p:nvPr/>
         </p:nvCxnSpPr>
         <p:spPr>
-          <a:xfrm>
-            <a:off x="2980944" y="5364044"/>
-            <a:ext cx="320040" cy="0"/>
+          <a:xfrm flipV="1">
+            <a:off x="2781886" y="5323985"/>
+            <a:ext cx="284167" cy="20683"/>
           </a:xfrm>
           <a:prstGeom prst="line">
             <a:avLst/>
@@ -33378,9 +33378,9 @@
           <p:nvPr/>
         </p:nvCxnSpPr>
         <p:spPr>
-          <a:xfrm flipV="1">
-            <a:off x="3300984" y="5285014"/>
-            <a:ext cx="320040" cy="79030"/>
+          <a:xfrm>
+            <a:off x="3066053" y="5323985"/>
+            <a:ext cx="284167" cy="0"/>
           </a:xfrm>
           <a:prstGeom prst="line">
             <a:avLst/>
@@ -33415,8 +33415,8 @@
         </p:nvCxnSpPr>
         <p:spPr>
           <a:xfrm flipV="1">
-            <a:off x="3621024" y="5232327"/>
-            <a:ext cx="320040" cy="52687"/>
+            <a:off x="3350220" y="5261936"/>
+            <a:ext cx="284168" cy="62049"/>
           </a:xfrm>
           <a:prstGeom prst="line">
             <a:avLst/>
@@ -33451,8 +33451,8 @@
         </p:nvCxnSpPr>
         <p:spPr>
           <a:xfrm flipV="1">
-            <a:off x="3941064" y="5179640"/>
-            <a:ext cx="320040" cy="52687"/>
+            <a:off x="3634388" y="5220570"/>
+            <a:ext cx="284167" cy="41366"/>
           </a:xfrm>
           <a:prstGeom prst="line">
             <a:avLst/>
@@ -33487,8 +33487,8 @@
         </p:nvCxnSpPr>
         <p:spPr>
           <a:xfrm flipV="1">
-            <a:off x="4261104" y="5166468"/>
-            <a:ext cx="320040" cy="13172"/>
+            <a:off x="3918555" y="5179205"/>
+            <a:ext cx="284168" cy="41365"/>
           </a:xfrm>
           <a:prstGeom prst="line">
             <a:avLst/>
@@ -33523,8 +33523,8 @@
         </p:nvCxnSpPr>
         <p:spPr>
           <a:xfrm flipV="1">
-            <a:off x="4581144" y="5153297"/>
-            <a:ext cx="320040" cy="13171"/>
+            <a:off x="4202723" y="5168863"/>
+            <a:ext cx="284167" cy="10342"/>
           </a:xfrm>
           <a:prstGeom prst="line">
             <a:avLst/>
@@ -33558,9 +33558,9 @@
           <p:nvPr/>
         </p:nvCxnSpPr>
         <p:spPr>
-          <a:xfrm>
-            <a:off x="4901184" y="5153297"/>
-            <a:ext cx="320040" cy="0"/>
+          <a:xfrm flipV="1">
+            <a:off x="4486890" y="5158522"/>
+            <a:ext cx="284167" cy="10341"/>
           </a:xfrm>
           <a:prstGeom prst="line">
             <a:avLst/>
@@ -33587,104 +33587,140 @@
           </a:fontRef>
         </p:style>
       </p:cxnSp>
-      <p:sp>
-        <p:nvSpPr>
-          <p:cNvPr id="84" name="Oval 83"/>
-          <p:cNvSpPr/>
-          <p:nvPr/>
-        </p:nvSpPr>
-        <p:spPr>
-          <a:xfrm>
-            <a:off x="2930652" y="4865914"/>
-            <a:ext cx="100584" cy="100584"/>
-          </a:xfrm>
-          <a:prstGeom prst="ellipse">
-            <a:avLst/>
-          </a:prstGeom>
-          <a:solidFill>
-            <a:srgbClr val="CC3328"/>
-          </a:solidFill>
-          <a:ln>
-            <a:noFill/>
-          </a:ln>
-          <a:effectLst/>
-        </p:spPr>
-        <p:style>
-          <a:lnRef idx="1">
-            <a:schemeClr val="accent1"/>
-          </a:lnRef>
-          <a:fillRef idx="3">
-            <a:schemeClr val="accent1"/>
-          </a:fillRef>
-          <a:effectRef idx="2">
-            <a:schemeClr val="accent1"/>
-          </a:effectRef>
-          <a:fontRef idx="minor">
-            <a:schemeClr val="lt1"/>
-          </a:fontRef>
-        </p:style>
-        <p:txBody>
-          <a:bodyPr rtlCol="0" anchor="ctr"/>
-          <a:lstStyle/>
-          <a:p>
-            <a:pPr algn="ctr"/>
-          </a:p>
-        </p:txBody>
-      </p:sp>
-      <p:sp>
-        <p:nvSpPr>
-          <p:cNvPr id="85" name="Diamond 84"/>
-          <p:cNvSpPr/>
-          <p:nvPr/>
-        </p:nvSpPr>
-        <p:spPr>
-          <a:xfrm>
-            <a:off x="4832604" y="5084717"/>
-            <a:ext cx="137160" cy="137160"/>
-          </a:xfrm>
-          <a:prstGeom prst="diamond">
-            <a:avLst/>
-          </a:prstGeom>
-          <a:solidFill>
-            <a:srgbClr val="0F1E3D"/>
-          </a:solidFill>
-          <a:ln>
-            <a:noFill/>
-          </a:ln>
-          <a:effectLst/>
-        </p:spPr>
-        <p:style>
-          <a:lnRef idx="1">
-            <a:schemeClr val="accent1"/>
-          </a:lnRef>
-          <a:fillRef idx="3">
-            <a:schemeClr val="accent1"/>
-          </a:fillRef>
-          <a:effectRef idx="2">
-            <a:schemeClr val="accent1"/>
-          </a:effectRef>
-          <a:fontRef idx="minor">
-            <a:schemeClr val="lt1"/>
-          </a:fontRef>
-        </p:style>
-        <p:txBody>
-          <a:bodyPr rtlCol="0" anchor="ctr"/>
-          <a:lstStyle/>
-          <a:p>
-            <a:pPr algn="ctr"/>
-          </a:p>
-        </p:txBody>
-      </p:sp>
       <p:cxnSp>
         <p:nvCxnSpPr>
-          <p:cNvPr id="86" name="Connector 85"/>
+          <p:cNvPr id="84" name="Connector 83"/>
           <p:cNvCxnSpPr/>
           <p:nvPr/>
         </p:nvCxnSpPr>
         <p:spPr>
           <a:xfrm>
-            <a:off x="1700784" y="5943600"/>
-            <a:ext cx="4160520" cy="0"/>
+            <a:off x="4771057" y="5158522"/>
+            <a:ext cx="284168" cy="0"/>
+          </a:xfrm>
+          <a:prstGeom prst="line">
+            <a:avLst/>
+          </a:prstGeom>
+          <a:ln w="35560">
+            <a:solidFill>
+              <a:srgbClr val="3A6FD0"/>
+            </a:solidFill>
+          </a:ln>
+          <a:effectLst/>
+        </p:spPr>
+        <p:style>
+          <a:lnRef idx="2">
+            <a:schemeClr val="accent1"/>
+          </a:lnRef>
+          <a:fillRef idx="0">
+            <a:schemeClr val="accent1"/>
+          </a:fillRef>
+          <a:effectRef idx="1">
+            <a:schemeClr val="accent1"/>
+          </a:effectRef>
+          <a:fontRef idx="minor">
+            <a:schemeClr val="tx1"/>
+          </a:fontRef>
+        </p:style>
+      </p:cxnSp>
+      <p:sp>
+        <p:nvSpPr>
+          <p:cNvPr id="85" name="Oval 84"/>
+          <p:cNvSpPr/>
+          <p:nvPr/>
+        </p:nvSpPr>
+        <p:spPr>
+          <a:xfrm>
+            <a:off x="3015761" y="4922084"/>
+            <a:ext cx="100584" cy="100584"/>
+          </a:xfrm>
+          <a:prstGeom prst="ellipse">
+            <a:avLst/>
+          </a:prstGeom>
+          <a:solidFill>
+            <a:srgbClr val="CC3328"/>
+          </a:solidFill>
+          <a:ln>
+            <a:noFill/>
+          </a:ln>
+          <a:effectLst/>
+        </p:spPr>
+        <p:style>
+          <a:lnRef idx="1">
+            <a:schemeClr val="accent1"/>
+          </a:lnRef>
+          <a:fillRef idx="3">
+            <a:schemeClr val="accent1"/>
+          </a:fillRef>
+          <a:effectRef idx="2">
+            <a:schemeClr val="accent1"/>
+          </a:effectRef>
+          <a:fontRef idx="minor">
+            <a:schemeClr val="lt1"/>
+          </a:fontRef>
+        </p:style>
+        <p:txBody>
+          <a:bodyPr rtlCol="0" anchor="ctr"/>
+          <a:lstStyle/>
+          <a:p>
+            <a:pPr algn="ctr"/>
+          </a:p>
+        </p:txBody>
+      </p:sp>
+      <p:sp>
+        <p:nvSpPr>
+          <p:cNvPr id="86" name="Diamond 85"/>
+          <p:cNvSpPr/>
+          <p:nvPr/>
+        </p:nvSpPr>
+        <p:spPr>
+          <a:xfrm>
+            <a:off x="4702477" y="5089942"/>
+            <a:ext cx="137160" cy="137160"/>
+          </a:xfrm>
+          <a:prstGeom prst="diamond">
+            <a:avLst/>
+          </a:prstGeom>
+          <a:solidFill>
+            <a:srgbClr val="0F1E3D"/>
+          </a:solidFill>
+          <a:ln>
+            <a:noFill/>
+          </a:ln>
+          <a:effectLst/>
+        </p:spPr>
+        <p:style>
+          <a:lnRef idx="1">
+            <a:schemeClr val="accent1"/>
+          </a:lnRef>
+          <a:fillRef idx="3">
+            <a:schemeClr val="accent1"/>
+          </a:fillRef>
+          <a:effectRef idx="2">
+            <a:schemeClr val="accent1"/>
+          </a:effectRef>
+          <a:fontRef idx="minor">
+            <a:schemeClr val="lt1"/>
+          </a:fontRef>
+        </p:style>
+        <p:txBody>
+          <a:bodyPr rtlCol="0" anchor="ctr"/>
+          <a:lstStyle/>
+          <a:p>
+            <a:pPr algn="ctr"/>
+          </a:p>
+        </p:txBody>
+      </p:sp>
+      <p:cxnSp>
+        <p:nvCxnSpPr>
+          <p:cNvPr id="87" name="Connector 86"/>
+          <p:cNvCxnSpPr/>
+          <p:nvPr/>
+        </p:nvCxnSpPr>
+        <p:spPr>
+          <a:xfrm>
+            <a:off x="1929384" y="5779008"/>
+            <a:ext cx="3694176" cy="0"/>
           </a:xfrm>
           <a:prstGeom prst="line">
             <a:avLst/>
@@ -33711,15 +33747,87 @@
           </a:fontRef>
         </p:style>
       </p:cxnSp>
-      <p:sp>
-        <p:nvSpPr>
-          <p:cNvPr id="87" name="TextBox 86"/>
+      <p:cxnSp>
+        <p:nvCxnSpPr>
+          <p:cNvPr id="88" name="Connector 87"/>
+          <p:cNvCxnSpPr/>
+          <p:nvPr/>
+        </p:nvCxnSpPr>
+        <p:spPr>
+          <a:xfrm>
+            <a:off x="1929384" y="4873752"/>
+            <a:ext cx="0" cy="905256"/>
+          </a:xfrm>
+          <a:prstGeom prst="line">
+            <a:avLst/>
+          </a:prstGeom>
+          <a:ln w="12700">
+            <a:solidFill>
+              <a:srgbClr val="C7CDD6"/>
+            </a:solidFill>
+          </a:ln>
+          <a:effectLst/>
+        </p:spPr>
+        <p:style>
+          <a:lnRef idx="2">
+            <a:schemeClr val="accent1"/>
+          </a:lnRef>
+          <a:fillRef idx="0">
+            <a:schemeClr val="accent1"/>
+          </a:fillRef>
+          <a:effectRef idx="1">
+            <a:schemeClr val="accent1"/>
+          </a:effectRef>
+          <a:fontRef idx="minor">
+            <a:schemeClr val="tx1"/>
+          </a:fontRef>
+        </p:style>
+      </p:cxnSp>
+      <p:sp>
+        <p:nvSpPr>
+          <p:cNvPr id="89" name="TextBox 88"/>
           <p:cNvSpPr txBox="1"/>
           <p:nvPr/>
         </p:nvSpPr>
         <p:spPr>
           <a:xfrm>
-            <a:off x="1609344" y="6012180"/>
+            <a:off x="1700784" y="5797296"/>
+            <a:ext cx="4151376" cy="155448"/>
+          </a:xfrm>
+          <a:prstGeom prst="rect">
+            <a:avLst/>
+          </a:prstGeom>
+          <a:noFill/>
+        </p:spPr>
+        <p:txBody>
+          <a:bodyPr wrap="none" anchor="ctr" lIns="0" rIns="0" tIns="0" bIns="0">
+            <a:spAutoFit/>
+          </a:bodyPr>
+          <a:lstStyle/>
+          <a:p>
+            <a:pPr algn="ctr"/>
+            <a:r>
+              <a:rPr sz="1100">
+                <a:solidFill>
+                  <a:srgbClr val="6B7280"/>
+                </a:solidFill>
+                <a:latin typeface="맑은 고딕"/>
+                <a:ea typeface="맑은 고딕"/>
+              </a:rPr>
+              <a:t>epoch</a:t>
+            </a:r>
+          </a:p>
+        </p:txBody>
+      </p:sp>
+      <p:sp>
+        <p:nvSpPr>
+          <p:cNvPr id="90" name="TextBox 89"/>
+          <p:cNvSpPr txBox="1"/>
+          <p:nvPr/>
+        </p:nvSpPr>
+        <p:spPr>
+          <a:xfrm>
+            <a:off x="1609344" y="6030468"/>
             <a:ext cx="4288536" cy="173736"/>
           </a:xfrm>
           <a:prstGeom prst="rect">
@@ -33759,7 +33867,7 @@
       </p:sp>
       <p:sp>
         <p:nvSpPr>
-          <p:cNvPr id="88" name="TextBox 87"/>
+          <p:cNvPr id="91" name="TextBox 90"/>
           <p:cNvSpPr txBox="1"/>
           <p:nvPr/>
         </p:nvSpPr>
@@ -33795,7 +33903,7 @@
       </p:sp>
       <p:sp>
         <p:nvSpPr>
-          <p:cNvPr id="89" name="TextBox 88"/>
+          <p:cNvPr id="92" name="TextBox 91"/>
           <p:cNvSpPr txBox="1"/>
           <p:nvPr/>
         </p:nvSpPr>
@@ -33831,7 +33939,7 @@
       </p:sp>
       <p:pic>
         <p:nvPicPr>
-          <p:cNvPr id="90" name="Picture 89" descr="p3r_color_baseline.png"/>
+          <p:cNvPr id="93" name="Picture 92" descr="p3r_color_baseline.png"/>
           <p:cNvPicPr>
             <a:picLocks noChangeAspect="1"/>
           </p:cNvPicPr>
@@ -33855,7 +33963,7 @@
       </p:pic>
       <p:sp>
         <p:nvSpPr>
-          <p:cNvPr id="91" name="TextBox 90"/>
+          <p:cNvPr id="94" name="TextBox 93"/>
           <p:cNvSpPr txBox="1"/>
           <p:nvPr/>
         </p:nvSpPr>
@@ -33891,7 +33999,7 @@
       </p:sp>
       <p:pic>
         <p:nvPicPr>
-          <p:cNvPr id="92" name="Picture 91" descr="p3r_color_c01.png"/>
+          <p:cNvPr id="95" name="Picture 94" descr="p3r_color_c01.png"/>
           <p:cNvPicPr>
             <a:picLocks noChangeAspect="1"/>
           </p:cNvPicPr>
@@ -33915,7 +34023,7 @@
       </p:pic>
       <p:sp>
         <p:nvSpPr>
-          <p:cNvPr id="93" name="TextBox 92"/>
+          <p:cNvPr id="96" name="TextBox 95"/>
           <p:cNvSpPr txBox="1"/>
           <p:nvPr/>
         </p:nvSpPr>
@@ -33951,7 +34059,7 @@
       </p:sp>
       <p:sp>
         <p:nvSpPr>
-          <p:cNvPr id="94" name="TextBox 93"/>
+          <p:cNvPr id="97" name="TextBox 96"/>
           <p:cNvSpPr txBox="1"/>
           <p:nvPr/>
         </p:nvSpPr>
@@ -33987,7 +34095,7 @@
       </p:sp>
       <p:sp>
         <p:nvSpPr>
-          <p:cNvPr id="95" name="TextBox 94"/>
+          <p:cNvPr id="98" name="TextBox 97"/>
           <p:cNvSpPr txBox="1"/>
           <p:nvPr/>
         </p:nvSpPr>

--- a/recommendation/presentation/발표_P3_데이터생성_최호길.pptx
+++ b/recommendation/presentation/발표_P3_데이터생성_최호길.pptx
@@ -32766,16 +32766,16 @@
           <p:nvPr/>
         </p:nvCxnSpPr>
         <p:spPr>
-          <a:xfrm flipV="1">
-            <a:off x="1929384" y="5489447"/>
-            <a:ext cx="284167" cy="124098"/>
+          <a:xfrm>
+            <a:off x="1929384" y="4892040"/>
+            <a:ext cx="0" cy="868680"/>
           </a:xfrm>
           <a:prstGeom prst="line">
             <a:avLst/>
           </a:prstGeom>
-          <a:ln w="19050">
+          <a:ln w="10160">
             <a:solidFill>
-              <a:srgbClr val="AEB4BD"/>
+              <a:srgbClr val="ECEFF4"/>
             </a:solidFill>
           </a:ln>
           <a:effectLst/>
@@ -32802,16 +32802,16 @@
           <p:nvPr/>
         </p:nvCxnSpPr>
         <p:spPr>
-          <a:xfrm flipV="1">
-            <a:off x="2213551" y="5406716"/>
-            <a:ext cx="284167" cy="82731"/>
+          <a:xfrm>
+            <a:off x="2497718" y="4892040"/>
+            <a:ext cx="0" cy="868680"/>
           </a:xfrm>
           <a:prstGeom prst="line">
             <a:avLst/>
           </a:prstGeom>
-          <a:ln w="19050">
+          <a:ln w="10160">
             <a:solidFill>
-              <a:srgbClr val="AEB4BD"/>
+              <a:srgbClr val="ECEFF4"/>
             </a:solidFill>
           </a:ln>
           <a:effectLst/>
@@ -32838,16 +32838,16 @@
           <p:nvPr/>
         </p:nvCxnSpPr>
         <p:spPr>
-          <a:xfrm flipV="1">
-            <a:off x="2497718" y="5344668"/>
-            <a:ext cx="284168" cy="62048"/>
+          <a:xfrm>
+            <a:off x="3066053" y="4892040"/>
+            <a:ext cx="0" cy="868680"/>
           </a:xfrm>
           <a:prstGeom prst="line">
             <a:avLst/>
           </a:prstGeom>
-          <a:ln w="19050">
+          <a:ln w="10160">
             <a:solidFill>
-              <a:srgbClr val="AEB4BD"/>
+              <a:srgbClr val="ECEFF4"/>
             </a:solidFill>
           </a:ln>
           <a:effectLst/>
@@ -32874,16 +32874,16 @@
           <p:nvPr/>
         </p:nvCxnSpPr>
         <p:spPr>
-          <a:xfrm flipV="1">
-            <a:off x="2781886" y="4972376"/>
-            <a:ext cx="284167" cy="372292"/>
+          <a:xfrm>
+            <a:off x="3634388" y="4892040"/>
+            <a:ext cx="0" cy="868680"/>
           </a:xfrm>
           <a:prstGeom prst="line">
             <a:avLst/>
           </a:prstGeom>
-          <a:ln w="19050">
+          <a:ln w="10160">
             <a:solidFill>
-              <a:srgbClr val="AEB4BD"/>
+              <a:srgbClr val="ECEFF4"/>
             </a:solidFill>
           </a:ln>
           <a:effectLst/>
@@ -32911,15 +32911,15 @@
         </p:nvCxnSpPr>
         <p:spPr>
           <a:xfrm>
-            <a:off x="3066053" y="4972376"/>
-            <a:ext cx="284167" cy="496389"/>
+            <a:off x="4202723" y="4892040"/>
+            <a:ext cx="0" cy="868680"/>
           </a:xfrm>
           <a:prstGeom prst="line">
             <a:avLst/>
           </a:prstGeom>
-          <a:ln w="19050">
+          <a:ln w="10160">
             <a:solidFill>
-              <a:srgbClr val="AEB4BD"/>
+              <a:srgbClr val="ECEFF4"/>
             </a:solidFill>
           </a:ln>
           <a:effectLst/>
@@ -32946,16 +32946,16 @@
           <p:nvPr/>
         </p:nvCxnSpPr>
         <p:spPr>
-          <a:xfrm flipV="1">
-            <a:off x="3350220" y="5323985"/>
-            <a:ext cx="284168" cy="144780"/>
+          <a:xfrm>
+            <a:off x="4771057" y="4892040"/>
+            <a:ext cx="0" cy="868680"/>
           </a:xfrm>
           <a:prstGeom prst="line">
             <a:avLst/>
           </a:prstGeom>
-          <a:ln w="19050">
+          <a:ln w="10160">
             <a:solidFill>
-              <a:srgbClr val="AEB4BD"/>
+              <a:srgbClr val="ECEFF4"/>
             </a:solidFill>
           </a:ln>
           <a:effectLst/>
@@ -32982,16 +32982,16 @@
           <p:nvPr/>
         </p:nvCxnSpPr>
         <p:spPr>
-          <a:xfrm flipV="1">
-            <a:off x="3634388" y="5261936"/>
-            <a:ext cx="284167" cy="62049"/>
+          <a:xfrm>
+            <a:off x="5339392" y="4892040"/>
+            <a:ext cx="0" cy="868680"/>
           </a:xfrm>
           <a:prstGeom prst="line">
             <a:avLst/>
           </a:prstGeom>
-          <a:ln w="19050">
+          <a:ln w="10160">
             <a:solidFill>
-              <a:srgbClr val="AEB4BD"/>
+              <a:srgbClr val="ECEFF4"/>
             </a:solidFill>
           </a:ln>
           <a:effectLst/>
@@ -33019,8 +33019,8 @@
         </p:nvCxnSpPr>
         <p:spPr>
           <a:xfrm flipV="1">
-            <a:off x="3918555" y="5220570"/>
-            <a:ext cx="284168" cy="41366"/>
+            <a:off x="1929384" y="5471159"/>
+            <a:ext cx="284167" cy="124098"/>
           </a:xfrm>
           <a:prstGeom prst="line">
             <a:avLst/>
@@ -33055,8 +33055,8 @@
         </p:nvCxnSpPr>
         <p:spPr>
           <a:xfrm flipV="1">
-            <a:off x="4202723" y="5179205"/>
-            <a:ext cx="284167" cy="41365"/>
+            <a:off x="2213551" y="5388428"/>
+            <a:ext cx="284167" cy="82731"/>
           </a:xfrm>
           <a:prstGeom prst="line">
             <a:avLst/>
@@ -33091,8 +33091,8 @@
         </p:nvCxnSpPr>
         <p:spPr>
           <a:xfrm flipV="1">
-            <a:off x="4486890" y="5168863"/>
-            <a:ext cx="284167" cy="10342"/>
+            <a:off x="2497718" y="5326380"/>
+            <a:ext cx="284168" cy="62048"/>
           </a:xfrm>
           <a:prstGeom prst="line">
             <a:avLst/>
@@ -33127,8 +33127,8 @@
         </p:nvCxnSpPr>
         <p:spPr>
           <a:xfrm flipV="1">
-            <a:off x="4771057" y="5158522"/>
-            <a:ext cx="284168" cy="10341"/>
+            <a:off x="2781886" y="4954088"/>
+            <a:ext cx="284167" cy="372292"/>
           </a:xfrm>
           <a:prstGeom prst="line">
             <a:avLst/>
@@ -33162,9 +33162,9 @@
           <p:nvPr/>
         </p:nvCxnSpPr>
         <p:spPr>
-          <a:xfrm flipV="1">
-            <a:off x="5055225" y="5148180"/>
-            <a:ext cx="284167" cy="10342"/>
+          <a:xfrm>
+            <a:off x="3066053" y="4954088"/>
+            <a:ext cx="284167" cy="496389"/>
           </a:xfrm>
           <a:prstGeom prst="line">
             <a:avLst/>
@@ -33198,9 +33198,9 @@
           <p:nvPr/>
         </p:nvCxnSpPr>
         <p:spPr>
-          <a:xfrm>
-            <a:off x="5339392" y="5148180"/>
-            <a:ext cx="284168" cy="10342"/>
+          <a:xfrm flipV="1">
+            <a:off x="3350220" y="5305697"/>
+            <a:ext cx="284168" cy="144780"/>
           </a:xfrm>
           <a:prstGeom prst="line">
             <a:avLst/>
@@ -33235,15 +33235,15 @@
         </p:nvCxnSpPr>
         <p:spPr>
           <a:xfrm flipV="1">
-            <a:off x="1929384" y="5406716"/>
-            <a:ext cx="284167" cy="82731"/>
+            <a:off x="3634388" y="5243648"/>
+            <a:ext cx="284167" cy="62049"/>
           </a:xfrm>
           <a:prstGeom prst="line">
             <a:avLst/>
           </a:prstGeom>
-          <a:ln w="35560">
+          <a:ln w="19050">
             <a:solidFill>
-              <a:srgbClr val="3A6FD0"/>
+              <a:srgbClr val="AEB4BD"/>
             </a:solidFill>
           </a:ln>
           <a:effectLst/>
@@ -33271,15 +33271,15 @@
         </p:nvCxnSpPr>
         <p:spPr>
           <a:xfrm flipV="1">
-            <a:off x="2213551" y="5344668"/>
-            <a:ext cx="284167" cy="62048"/>
+            <a:off x="3918555" y="5202282"/>
+            <a:ext cx="284168" cy="41366"/>
           </a:xfrm>
           <a:prstGeom prst="line">
             <a:avLst/>
           </a:prstGeom>
-          <a:ln w="35560">
+          <a:ln w="19050">
             <a:solidFill>
-              <a:srgbClr val="3A6FD0"/>
+              <a:srgbClr val="AEB4BD"/>
             </a:solidFill>
           </a:ln>
           <a:effectLst/>
@@ -33306,16 +33306,16 @@
           <p:nvPr/>
         </p:nvCxnSpPr>
         <p:spPr>
-          <a:xfrm>
-            <a:off x="2497718" y="5344668"/>
-            <a:ext cx="284168" cy="0"/>
+          <a:xfrm flipV="1">
+            <a:off x="4202723" y="5160917"/>
+            <a:ext cx="284167" cy="41365"/>
           </a:xfrm>
           <a:prstGeom prst="line">
             <a:avLst/>
           </a:prstGeom>
-          <a:ln w="35560">
+          <a:ln w="19050">
             <a:solidFill>
-              <a:srgbClr val="3A6FD0"/>
+              <a:srgbClr val="AEB4BD"/>
             </a:solidFill>
           </a:ln>
           <a:effectLst/>
@@ -33343,15 +33343,15 @@
         </p:nvCxnSpPr>
         <p:spPr>
           <a:xfrm flipV="1">
-            <a:off x="2781886" y="5323985"/>
-            <a:ext cx="284167" cy="20683"/>
+            <a:off x="4486890" y="5150575"/>
+            <a:ext cx="284167" cy="10342"/>
           </a:xfrm>
           <a:prstGeom prst="line">
             <a:avLst/>
           </a:prstGeom>
-          <a:ln w="35560">
+          <a:ln w="19050">
             <a:solidFill>
-              <a:srgbClr val="3A6FD0"/>
+              <a:srgbClr val="AEB4BD"/>
             </a:solidFill>
           </a:ln>
           <a:effectLst/>
@@ -33378,16 +33378,16 @@
           <p:nvPr/>
         </p:nvCxnSpPr>
         <p:spPr>
-          <a:xfrm>
-            <a:off x="3066053" y="5323985"/>
-            <a:ext cx="284167" cy="0"/>
+          <a:xfrm flipV="1">
+            <a:off x="4771057" y="5140234"/>
+            <a:ext cx="284168" cy="10341"/>
           </a:xfrm>
           <a:prstGeom prst="line">
             <a:avLst/>
           </a:prstGeom>
-          <a:ln w="35560">
+          <a:ln w="19050">
             <a:solidFill>
-              <a:srgbClr val="3A6FD0"/>
+              <a:srgbClr val="AEB4BD"/>
             </a:solidFill>
           </a:ln>
           <a:effectLst/>
@@ -33415,15 +33415,15 @@
         </p:nvCxnSpPr>
         <p:spPr>
           <a:xfrm flipV="1">
-            <a:off x="3350220" y="5261936"/>
-            <a:ext cx="284168" cy="62049"/>
+            <a:off x="5055225" y="5129892"/>
+            <a:ext cx="284167" cy="10342"/>
           </a:xfrm>
           <a:prstGeom prst="line">
             <a:avLst/>
           </a:prstGeom>
-          <a:ln w="35560">
+          <a:ln w="19050">
             <a:solidFill>
-              <a:srgbClr val="3A6FD0"/>
+              <a:srgbClr val="AEB4BD"/>
             </a:solidFill>
           </a:ln>
           <a:effectLst/>
@@ -33450,16 +33450,16 @@
           <p:nvPr/>
         </p:nvCxnSpPr>
         <p:spPr>
-          <a:xfrm flipV="1">
-            <a:off x="3634388" y="5220570"/>
-            <a:ext cx="284167" cy="41366"/>
+          <a:xfrm>
+            <a:off x="5339392" y="5129892"/>
+            <a:ext cx="284168" cy="10342"/>
           </a:xfrm>
           <a:prstGeom prst="line">
             <a:avLst/>
           </a:prstGeom>
-          <a:ln w="35560">
+          <a:ln w="19050">
             <a:solidFill>
-              <a:srgbClr val="3A6FD0"/>
+              <a:srgbClr val="AEB4BD"/>
             </a:solidFill>
           </a:ln>
           <a:effectLst/>
@@ -33487,8 +33487,8 @@
         </p:nvCxnSpPr>
         <p:spPr>
           <a:xfrm flipV="1">
-            <a:off x="3918555" y="5179205"/>
-            <a:ext cx="284168" cy="41365"/>
+            <a:off x="1929384" y="5388428"/>
+            <a:ext cx="284167" cy="82731"/>
           </a:xfrm>
           <a:prstGeom prst="line">
             <a:avLst/>
@@ -33523,8 +33523,8 @@
         </p:nvCxnSpPr>
         <p:spPr>
           <a:xfrm flipV="1">
-            <a:off x="4202723" y="5168863"/>
-            <a:ext cx="284167" cy="10342"/>
+            <a:off x="2213551" y="5326380"/>
+            <a:ext cx="284167" cy="62048"/>
           </a:xfrm>
           <a:prstGeom prst="line">
             <a:avLst/>
@@ -33558,9 +33558,9 @@
           <p:nvPr/>
         </p:nvCxnSpPr>
         <p:spPr>
-          <a:xfrm flipV="1">
-            <a:off x="4486890" y="5158522"/>
-            <a:ext cx="284167" cy="10341"/>
+          <a:xfrm>
+            <a:off x="2497718" y="5326380"/>
+            <a:ext cx="284168" cy="0"/>
           </a:xfrm>
           <a:prstGeom prst="line">
             <a:avLst/>
@@ -33594,9 +33594,9 @@
           <p:nvPr/>
         </p:nvCxnSpPr>
         <p:spPr>
-          <a:xfrm>
-            <a:off x="4771057" y="5158522"/>
-            <a:ext cx="284168" cy="0"/>
+          <a:xfrm flipV="1">
+            <a:off x="2781886" y="5305697"/>
+            <a:ext cx="284167" cy="20683"/>
           </a:xfrm>
           <a:prstGeom prst="line">
             <a:avLst/>
@@ -33623,94 +33623,78 @@
           </a:fontRef>
         </p:style>
       </p:cxnSp>
-      <p:sp>
-        <p:nvSpPr>
-          <p:cNvPr id="85" name="Oval 84"/>
-          <p:cNvSpPr/>
-          <p:nvPr/>
-        </p:nvSpPr>
-        <p:spPr>
-          <a:xfrm>
-            <a:off x="3015761" y="4922084"/>
-            <a:ext cx="100584" cy="100584"/>
-          </a:xfrm>
-          <a:prstGeom prst="ellipse">
-            <a:avLst/>
-          </a:prstGeom>
-          <a:solidFill>
-            <a:srgbClr val="CC3328"/>
-          </a:solidFill>
-          <a:ln>
-            <a:noFill/>
-          </a:ln>
-          <a:effectLst/>
-        </p:spPr>
-        <p:style>
-          <a:lnRef idx="1">
-            <a:schemeClr val="accent1"/>
-          </a:lnRef>
-          <a:fillRef idx="3">
-            <a:schemeClr val="accent1"/>
-          </a:fillRef>
-          <a:effectRef idx="2">
-            <a:schemeClr val="accent1"/>
-          </a:effectRef>
-          <a:fontRef idx="minor">
-            <a:schemeClr val="lt1"/>
-          </a:fontRef>
-        </p:style>
-        <p:txBody>
-          <a:bodyPr rtlCol="0" anchor="ctr"/>
-          <a:lstStyle/>
-          <a:p>
-            <a:pPr algn="ctr"/>
-          </a:p>
-        </p:txBody>
-      </p:sp>
-      <p:sp>
-        <p:nvSpPr>
-          <p:cNvPr id="86" name="Diamond 85"/>
-          <p:cNvSpPr/>
-          <p:nvPr/>
-        </p:nvSpPr>
-        <p:spPr>
-          <a:xfrm>
-            <a:off x="4702477" y="5089942"/>
-            <a:ext cx="137160" cy="137160"/>
-          </a:xfrm>
-          <a:prstGeom prst="diamond">
-            <a:avLst/>
-          </a:prstGeom>
-          <a:solidFill>
-            <a:srgbClr val="0F1E3D"/>
-          </a:solidFill>
-          <a:ln>
-            <a:noFill/>
-          </a:ln>
-          <a:effectLst/>
-        </p:spPr>
-        <p:style>
-          <a:lnRef idx="1">
-            <a:schemeClr val="accent1"/>
-          </a:lnRef>
-          <a:fillRef idx="3">
-            <a:schemeClr val="accent1"/>
-          </a:fillRef>
-          <a:effectRef idx="2">
-            <a:schemeClr val="accent1"/>
-          </a:effectRef>
-          <a:fontRef idx="minor">
-            <a:schemeClr val="lt1"/>
-          </a:fontRef>
-        </p:style>
-        <p:txBody>
-          <a:bodyPr rtlCol="0" anchor="ctr"/>
-          <a:lstStyle/>
-          <a:p>
-            <a:pPr algn="ctr"/>
-          </a:p>
-        </p:txBody>
-      </p:sp>
+      <p:cxnSp>
+        <p:nvCxnSpPr>
+          <p:cNvPr id="85" name="Connector 84"/>
+          <p:cNvCxnSpPr/>
+          <p:nvPr/>
+        </p:nvCxnSpPr>
+        <p:spPr>
+          <a:xfrm>
+            <a:off x="3066053" y="5305697"/>
+            <a:ext cx="284167" cy="0"/>
+          </a:xfrm>
+          <a:prstGeom prst="line">
+            <a:avLst/>
+          </a:prstGeom>
+          <a:ln w="35560">
+            <a:solidFill>
+              <a:srgbClr val="3A6FD0"/>
+            </a:solidFill>
+          </a:ln>
+          <a:effectLst/>
+        </p:spPr>
+        <p:style>
+          <a:lnRef idx="2">
+            <a:schemeClr val="accent1"/>
+          </a:lnRef>
+          <a:fillRef idx="0">
+            <a:schemeClr val="accent1"/>
+          </a:fillRef>
+          <a:effectRef idx="1">
+            <a:schemeClr val="accent1"/>
+          </a:effectRef>
+          <a:fontRef idx="minor">
+            <a:schemeClr val="tx1"/>
+          </a:fontRef>
+        </p:style>
+      </p:cxnSp>
+      <p:cxnSp>
+        <p:nvCxnSpPr>
+          <p:cNvPr id="86" name="Connector 85"/>
+          <p:cNvCxnSpPr/>
+          <p:nvPr/>
+        </p:nvCxnSpPr>
+        <p:spPr>
+          <a:xfrm flipV="1">
+            <a:off x="3350220" y="5243648"/>
+            <a:ext cx="284168" cy="62049"/>
+          </a:xfrm>
+          <a:prstGeom prst="line">
+            <a:avLst/>
+          </a:prstGeom>
+          <a:ln w="35560">
+            <a:solidFill>
+              <a:srgbClr val="3A6FD0"/>
+            </a:solidFill>
+          </a:ln>
+          <a:effectLst/>
+        </p:spPr>
+        <p:style>
+          <a:lnRef idx="2">
+            <a:schemeClr val="accent1"/>
+          </a:lnRef>
+          <a:fillRef idx="0">
+            <a:schemeClr val="accent1"/>
+          </a:fillRef>
+          <a:effectRef idx="1">
+            <a:schemeClr val="accent1"/>
+          </a:effectRef>
+          <a:fontRef idx="minor">
+            <a:schemeClr val="tx1"/>
+          </a:fontRef>
+        </p:style>
+      </p:cxnSp>
       <p:cxnSp>
         <p:nvCxnSpPr>
           <p:cNvPr id="87" name="Connector 86"/>
@@ -33718,16 +33702,16 @@
           <p:nvPr/>
         </p:nvCxnSpPr>
         <p:spPr>
-          <a:xfrm>
-            <a:off x="1929384" y="5779008"/>
-            <a:ext cx="3694176" cy="0"/>
+          <a:xfrm flipV="1">
+            <a:off x="3634388" y="5202282"/>
+            <a:ext cx="284167" cy="41366"/>
           </a:xfrm>
           <a:prstGeom prst="line">
             <a:avLst/>
           </a:prstGeom>
-          <a:ln w="12700">
+          <a:ln w="35560">
             <a:solidFill>
-              <a:srgbClr val="C7CDD6"/>
+              <a:srgbClr val="3A6FD0"/>
             </a:solidFill>
           </a:ln>
           <a:effectLst/>
@@ -33754,9 +33738,241 @@
           <p:nvPr/>
         </p:nvCxnSpPr>
         <p:spPr>
-          <a:xfrm>
-            <a:off x="1929384" y="4873752"/>
-            <a:ext cx="0" cy="905256"/>
+          <a:xfrm flipV="1">
+            <a:off x="3918555" y="5160917"/>
+            <a:ext cx="284168" cy="41365"/>
+          </a:xfrm>
+          <a:prstGeom prst="line">
+            <a:avLst/>
+          </a:prstGeom>
+          <a:ln w="35560">
+            <a:solidFill>
+              <a:srgbClr val="3A6FD0"/>
+            </a:solidFill>
+          </a:ln>
+          <a:effectLst/>
+        </p:spPr>
+        <p:style>
+          <a:lnRef idx="2">
+            <a:schemeClr val="accent1"/>
+          </a:lnRef>
+          <a:fillRef idx="0">
+            <a:schemeClr val="accent1"/>
+          </a:fillRef>
+          <a:effectRef idx="1">
+            <a:schemeClr val="accent1"/>
+          </a:effectRef>
+          <a:fontRef idx="minor">
+            <a:schemeClr val="tx1"/>
+          </a:fontRef>
+        </p:style>
+      </p:cxnSp>
+      <p:cxnSp>
+        <p:nvCxnSpPr>
+          <p:cNvPr id="89" name="Connector 88"/>
+          <p:cNvCxnSpPr/>
+          <p:nvPr/>
+        </p:nvCxnSpPr>
+        <p:spPr>
+          <a:xfrm flipV="1">
+            <a:off x="4202723" y="5150575"/>
+            <a:ext cx="284167" cy="10342"/>
+          </a:xfrm>
+          <a:prstGeom prst="line">
+            <a:avLst/>
+          </a:prstGeom>
+          <a:ln w="35560">
+            <a:solidFill>
+              <a:srgbClr val="3A6FD0"/>
+            </a:solidFill>
+          </a:ln>
+          <a:effectLst/>
+        </p:spPr>
+        <p:style>
+          <a:lnRef idx="2">
+            <a:schemeClr val="accent1"/>
+          </a:lnRef>
+          <a:fillRef idx="0">
+            <a:schemeClr val="accent1"/>
+          </a:fillRef>
+          <a:effectRef idx="1">
+            <a:schemeClr val="accent1"/>
+          </a:effectRef>
+          <a:fontRef idx="minor">
+            <a:schemeClr val="tx1"/>
+          </a:fontRef>
+        </p:style>
+      </p:cxnSp>
+      <p:cxnSp>
+        <p:nvCxnSpPr>
+          <p:cNvPr id="90" name="Connector 89"/>
+          <p:cNvCxnSpPr/>
+          <p:nvPr/>
+        </p:nvCxnSpPr>
+        <p:spPr>
+          <a:xfrm flipV="1">
+            <a:off x="4486890" y="5140234"/>
+            <a:ext cx="284167" cy="10341"/>
+          </a:xfrm>
+          <a:prstGeom prst="line">
+            <a:avLst/>
+          </a:prstGeom>
+          <a:ln w="35560">
+            <a:solidFill>
+              <a:srgbClr val="3A6FD0"/>
+            </a:solidFill>
+          </a:ln>
+          <a:effectLst/>
+        </p:spPr>
+        <p:style>
+          <a:lnRef idx="2">
+            <a:schemeClr val="accent1"/>
+          </a:lnRef>
+          <a:fillRef idx="0">
+            <a:schemeClr val="accent1"/>
+          </a:fillRef>
+          <a:effectRef idx="1">
+            <a:schemeClr val="accent1"/>
+          </a:effectRef>
+          <a:fontRef idx="minor">
+            <a:schemeClr val="tx1"/>
+          </a:fontRef>
+        </p:style>
+      </p:cxnSp>
+      <p:cxnSp>
+        <p:nvCxnSpPr>
+          <p:cNvPr id="91" name="Connector 90"/>
+          <p:cNvCxnSpPr/>
+          <p:nvPr/>
+        </p:nvCxnSpPr>
+        <p:spPr>
+          <a:xfrm>
+            <a:off x="4771057" y="5140234"/>
+            <a:ext cx="284168" cy="0"/>
+          </a:xfrm>
+          <a:prstGeom prst="line">
+            <a:avLst/>
+          </a:prstGeom>
+          <a:ln w="35560">
+            <a:solidFill>
+              <a:srgbClr val="3A6FD0"/>
+            </a:solidFill>
+          </a:ln>
+          <a:effectLst/>
+        </p:spPr>
+        <p:style>
+          <a:lnRef idx="2">
+            <a:schemeClr val="accent1"/>
+          </a:lnRef>
+          <a:fillRef idx="0">
+            <a:schemeClr val="accent1"/>
+          </a:fillRef>
+          <a:effectRef idx="1">
+            <a:schemeClr val="accent1"/>
+          </a:effectRef>
+          <a:fontRef idx="minor">
+            <a:schemeClr val="tx1"/>
+          </a:fontRef>
+        </p:style>
+      </p:cxnSp>
+      <p:sp>
+        <p:nvSpPr>
+          <p:cNvPr id="92" name="Oval 91"/>
+          <p:cNvSpPr/>
+          <p:nvPr/>
+        </p:nvSpPr>
+        <p:spPr>
+          <a:xfrm>
+            <a:off x="3015761" y="4903796"/>
+            <a:ext cx="100584" cy="100584"/>
+          </a:xfrm>
+          <a:prstGeom prst="ellipse">
+            <a:avLst/>
+          </a:prstGeom>
+          <a:solidFill>
+            <a:srgbClr val="CC3328"/>
+          </a:solidFill>
+          <a:ln>
+            <a:noFill/>
+          </a:ln>
+          <a:effectLst/>
+        </p:spPr>
+        <p:style>
+          <a:lnRef idx="1">
+            <a:schemeClr val="accent1"/>
+          </a:lnRef>
+          <a:fillRef idx="3">
+            <a:schemeClr val="accent1"/>
+          </a:fillRef>
+          <a:effectRef idx="2">
+            <a:schemeClr val="accent1"/>
+          </a:effectRef>
+          <a:fontRef idx="minor">
+            <a:schemeClr val="lt1"/>
+          </a:fontRef>
+        </p:style>
+        <p:txBody>
+          <a:bodyPr rtlCol="0" anchor="ctr"/>
+          <a:lstStyle/>
+          <a:p>
+            <a:pPr algn="ctr"/>
+          </a:p>
+        </p:txBody>
+      </p:sp>
+      <p:sp>
+        <p:nvSpPr>
+          <p:cNvPr id="93" name="Diamond 92"/>
+          <p:cNvSpPr/>
+          <p:nvPr/>
+        </p:nvSpPr>
+        <p:spPr>
+          <a:xfrm>
+            <a:off x="4702477" y="5071654"/>
+            <a:ext cx="137160" cy="137160"/>
+          </a:xfrm>
+          <a:prstGeom prst="diamond">
+            <a:avLst/>
+          </a:prstGeom>
+          <a:solidFill>
+            <a:srgbClr val="0F1E3D"/>
+          </a:solidFill>
+          <a:ln>
+            <a:noFill/>
+          </a:ln>
+          <a:effectLst/>
+        </p:spPr>
+        <p:style>
+          <a:lnRef idx="1">
+            <a:schemeClr val="accent1"/>
+          </a:lnRef>
+          <a:fillRef idx="3">
+            <a:schemeClr val="accent1"/>
+          </a:fillRef>
+          <a:effectRef idx="2">
+            <a:schemeClr val="accent1"/>
+          </a:effectRef>
+          <a:fontRef idx="minor">
+            <a:schemeClr val="lt1"/>
+          </a:fontRef>
+        </p:style>
+        <p:txBody>
+          <a:bodyPr rtlCol="0" anchor="ctr"/>
+          <a:lstStyle/>
+          <a:p>
+            <a:pPr algn="ctr"/>
+          </a:p>
+        </p:txBody>
+      </p:sp>
+      <p:cxnSp>
+        <p:nvCxnSpPr>
+          <p:cNvPr id="94" name="Connector 93"/>
+          <p:cNvCxnSpPr/>
+          <p:nvPr/>
+        </p:nvCxnSpPr>
+        <p:spPr>
+          <a:xfrm>
+            <a:off x="1929384" y="5760720"/>
+            <a:ext cx="3694176" cy="0"/>
           </a:xfrm>
           <a:prstGeom prst="line">
             <a:avLst/>
@@ -33783,16 +33999,88 @@
           </a:fontRef>
         </p:style>
       </p:cxnSp>
-      <p:sp>
-        <p:nvSpPr>
-          <p:cNvPr id="89" name="TextBox 88"/>
+      <p:cxnSp>
+        <p:nvCxnSpPr>
+          <p:cNvPr id="95" name="Connector 94"/>
+          <p:cNvCxnSpPr/>
+          <p:nvPr/>
+        </p:nvCxnSpPr>
+        <p:spPr>
+          <a:xfrm>
+            <a:off x="1929384" y="4855464"/>
+            <a:ext cx="0" cy="905256"/>
+          </a:xfrm>
+          <a:prstGeom prst="line">
+            <a:avLst/>
+          </a:prstGeom>
+          <a:ln w="12700">
+            <a:solidFill>
+              <a:srgbClr val="C7CDD6"/>
+            </a:solidFill>
+          </a:ln>
+          <a:effectLst/>
+        </p:spPr>
+        <p:style>
+          <a:lnRef idx="2">
+            <a:schemeClr val="accent1"/>
+          </a:lnRef>
+          <a:fillRef idx="0">
+            <a:schemeClr val="accent1"/>
+          </a:fillRef>
+          <a:effectRef idx="1">
+            <a:schemeClr val="accent1"/>
+          </a:effectRef>
+          <a:fontRef idx="minor">
+            <a:schemeClr val="tx1"/>
+          </a:fontRef>
+        </p:style>
+      </p:cxnSp>
+      <p:cxnSp>
+        <p:nvCxnSpPr>
+          <p:cNvPr id="96" name="Connector 95"/>
+          <p:cNvCxnSpPr/>
+          <p:nvPr/>
+        </p:nvCxnSpPr>
+        <p:spPr>
+          <a:xfrm>
+            <a:off x="1929384" y="5760720"/>
+            <a:ext cx="0" cy="36576"/>
+          </a:xfrm>
+          <a:prstGeom prst="line">
+            <a:avLst/>
+          </a:prstGeom>
+          <a:ln w="12700">
+            <a:solidFill>
+              <a:srgbClr val="C7CDD6"/>
+            </a:solidFill>
+          </a:ln>
+          <a:effectLst/>
+        </p:spPr>
+        <p:style>
+          <a:lnRef idx="2">
+            <a:schemeClr val="accent1"/>
+          </a:lnRef>
+          <a:fillRef idx="0">
+            <a:schemeClr val="accent1"/>
+          </a:fillRef>
+          <a:effectRef idx="1">
+            <a:schemeClr val="accent1"/>
+          </a:effectRef>
+          <a:fontRef idx="minor">
+            <a:schemeClr val="tx1"/>
+          </a:fontRef>
+        </p:style>
+      </p:cxnSp>
+      <p:sp>
+        <p:nvSpPr>
+          <p:cNvPr id="97" name="TextBox 96"/>
           <p:cNvSpPr txBox="1"/>
           <p:nvPr/>
         </p:nvSpPr>
         <p:spPr>
           <a:xfrm>
-            <a:off x="1700784" y="5797296"/>
-            <a:ext cx="4151376" cy="155448"/>
+            <a:off x="1728216" y="5797296"/>
+            <a:ext cx="402336" cy="137160"/>
           </a:xfrm>
           <a:prstGeom prst="rect">
             <a:avLst/>
@@ -33814,6 +34102,474 @@
                 <a:latin typeface="맑은 고딕"/>
                 <a:ea typeface="맑은 고딕"/>
               </a:rPr>
+              <a:t>1</a:t>
+            </a:r>
+          </a:p>
+        </p:txBody>
+      </p:sp>
+      <p:cxnSp>
+        <p:nvCxnSpPr>
+          <p:cNvPr id="98" name="Connector 97"/>
+          <p:cNvCxnSpPr/>
+          <p:nvPr/>
+        </p:nvCxnSpPr>
+        <p:spPr>
+          <a:xfrm>
+            <a:off x="2497718" y="5760720"/>
+            <a:ext cx="0" cy="36576"/>
+          </a:xfrm>
+          <a:prstGeom prst="line">
+            <a:avLst/>
+          </a:prstGeom>
+          <a:ln w="12700">
+            <a:solidFill>
+              <a:srgbClr val="C7CDD6"/>
+            </a:solidFill>
+          </a:ln>
+          <a:effectLst/>
+        </p:spPr>
+        <p:style>
+          <a:lnRef idx="2">
+            <a:schemeClr val="accent1"/>
+          </a:lnRef>
+          <a:fillRef idx="0">
+            <a:schemeClr val="accent1"/>
+          </a:fillRef>
+          <a:effectRef idx="1">
+            <a:schemeClr val="accent1"/>
+          </a:effectRef>
+          <a:fontRef idx="minor">
+            <a:schemeClr val="tx1"/>
+          </a:fontRef>
+        </p:style>
+      </p:cxnSp>
+      <p:sp>
+        <p:nvSpPr>
+          <p:cNvPr id="99" name="TextBox 98"/>
+          <p:cNvSpPr txBox="1"/>
+          <p:nvPr/>
+        </p:nvSpPr>
+        <p:spPr>
+          <a:xfrm>
+            <a:off x="2296550" y="5797296"/>
+            <a:ext cx="402336" cy="137160"/>
+          </a:xfrm>
+          <a:prstGeom prst="rect">
+            <a:avLst/>
+          </a:prstGeom>
+          <a:noFill/>
+        </p:spPr>
+        <p:txBody>
+          <a:bodyPr wrap="none" anchor="ctr" lIns="0" rIns="0" tIns="0" bIns="0">
+            <a:spAutoFit/>
+          </a:bodyPr>
+          <a:lstStyle/>
+          <a:p>
+            <a:pPr algn="ctr"/>
+            <a:r>
+              <a:rPr sz="1100">
+                <a:solidFill>
+                  <a:srgbClr val="6B7280"/>
+                </a:solidFill>
+                <a:latin typeface="맑은 고딕"/>
+                <a:ea typeface="맑은 고딕"/>
+              </a:rPr>
+              <a:t>3</a:t>
+            </a:r>
+          </a:p>
+        </p:txBody>
+      </p:sp>
+      <p:cxnSp>
+        <p:nvCxnSpPr>
+          <p:cNvPr id="100" name="Connector 99"/>
+          <p:cNvCxnSpPr/>
+          <p:nvPr/>
+        </p:nvCxnSpPr>
+        <p:spPr>
+          <a:xfrm>
+            <a:off x="3066053" y="5760720"/>
+            <a:ext cx="0" cy="36576"/>
+          </a:xfrm>
+          <a:prstGeom prst="line">
+            <a:avLst/>
+          </a:prstGeom>
+          <a:ln w="12700">
+            <a:solidFill>
+              <a:srgbClr val="C7CDD6"/>
+            </a:solidFill>
+          </a:ln>
+          <a:effectLst/>
+        </p:spPr>
+        <p:style>
+          <a:lnRef idx="2">
+            <a:schemeClr val="accent1"/>
+          </a:lnRef>
+          <a:fillRef idx="0">
+            <a:schemeClr val="accent1"/>
+          </a:fillRef>
+          <a:effectRef idx="1">
+            <a:schemeClr val="accent1"/>
+          </a:effectRef>
+          <a:fontRef idx="minor">
+            <a:schemeClr val="tx1"/>
+          </a:fontRef>
+        </p:style>
+      </p:cxnSp>
+      <p:sp>
+        <p:nvSpPr>
+          <p:cNvPr id="101" name="TextBox 100"/>
+          <p:cNvSpPr txBox="1"/>
+          <p:nvPr/>
+        </p:nvSpPr>
+        <p:spPr>
+          <a:xfrm>
+            <a:off x="2864885" y="5797296"/>
+            <a:ext cx="402336" cy="137160"/>
+          </a:xfrm>
+          <a:prstGeom prst="rect">
+            <a:avLst/>
+          </a:prstGeom>
+          <a:noFill/>
+        </p:spPr>
+        <p:txBody>
+          <a:bodyPr wrap="none" anchor="ctr" lIns="0" rIns="0" tIns="0" bIns="0">
+            <a:spAutoFit/>
+          </a:bodyPr>
+          <a:lstStyle/>
+          <a:p>
+            <a:pPr algn="ctr"/>
+            <a:r>
+              <a:rPr sz="1100">
+                <a:solidFill>
+                  <a:srgbClr val="6B7280"/>
+                </a:solidFill>
+                <a:latin typeface="맑은 고딕"/>
+                <a:ea typeface="맑은 고딕"/>
+              </a:rPr>
+              <a:t>5</a:t>
+            </a:r>
+          </a:p>
+        </p:txBody>
+      </p:sp>
+      <p:cxnSp>
+        <p:nvCxnSpPr>
+          <p:cNvPr id="102" name="Connector 101"/>
+          <p:cNvCxnSpPr/>
+          <p:nvPr/>
+        </p:nvCxnSpPr>
+        <p:spPr>
+          <a:xfrm>
+            <a:off x="3634388" y="5760720"/>
+            <a:ext cx="0" cy="36576"/>
+          </a:xfrm>
+          <a:prstGeom prst="line">
+            <a:avLst/>
+          </a:prstGeom>
+          <a:ln w="12700">
+            <a:solidFill>
+              <a:srgbClr val="C7CDD6"/>
+            </a:solidFill>
+          </a:ln>
+          <a:effectLst/>
+        </p:spPr>
+        <p:style>
+          <a:lnRef idx="2">
+            <a:schemeClr val="accent1"/>
+          </a:lnRef>
+          <a:fillRef idx="0">
+            <a:schemeClr val="accent1"/>
+          </a:fillRef>
+          <a:effectRef idx="1">
+            <a:schemeClr val="accent1"/>
+          </a:effectRef>
+          <a:fontRef idx="minor">
+            <a:schemeClr val="tx1"/>
+          </a:fontRef>
+        </p:style>
+      </p:cxnSp>
+      <p:sp>
+        <p:nvSpPr>
+          <p:cNvPr id="103" name="TextBox 102"/>
+          <p:cNvSpPr txBox="1"/>
+          <p:nvPr/>
+        </p:nvSpPr>
+        <p:spPr>
+          <a:xfrm>
+            <a:off x="3433220" y="5797296"/>
+            <a:ext cx="402336" cy="137160"/>
+          </a:xfrm>
+          <a:prstGeom prst="rect">
+            <a:avLst/>
+          </a:prstGeom>
+          <a:noFill/>
+        </p:spPr>
+        <p:txBody>
+          <a:bodyPr wrap="none" anchor="ctr" lIns="0" rIns="0" tIns="0" bIns="0">
+            <a:spAutoFit/>
+          </a:bodyPr>
+          <a:lstStyle/>
+          <a:p>
+            <a:pPr algn="ctr"/>
+            <a:r>
+              <a:rPr sz="1100">
+                <a:solidFill>
+                  <a:srgbClr val="6B7280"/>
+                </a:solidFill>
+                <a:latin typeface="맑은 고딕"/>
+                <a:ea typeface="맑은 고딕"/>
+              </a:rPr>
+              <a:t>7</a:t>
+            </a:r>
+          </a:p>
+        </p:txBody>
+      </p:sp>
+      <p:cxnSp>
+        <p:nvCxnSpPr>
+          <p:cNvPr id="104" name="Connector 103"/>
+          <p:cNvCxnSpPr/>
+          <p:nvPr/>
+        </p:nvCxnSpPr>
+        <p:spPr>
+          <a:xfrm>
+            <a:off x="4202723" y="5760720"/>
+            <a:ext cx="0" cy="36576"/>
+          </a:xfrm>
+          <a:prstGeom prst="line">
+            <a:avLst/>
+          </a:prstGeom>
+          <a:ln w="12700">
+            <a:solidFill>
+              <a:srgbClr val="C7CDD6"/>
+            </a:solidFill>
+          </a:ln>
+          <a:effectLst/>
+        </p:spPr>
+        <p:style>
+          <a:lnRef idx="2">
+            <a:schemeClr val="accent1"/>
+          </a:lnRef>
+          <a:fillRef idx="0">
+            <a:schemeClr val="accent1"/>
+          </a:fillRef>
+          <a:effectRef idx="1">
+            <a:schemeClr val="accent1"/>
+          </a:effectRef>
+          <a:fontRef idx="minor">
+            <a:schemeClr val="tx1"/>
+          </a:fontRef>
+        </p:style>
+      </p:cxnSp>
+      <p:sp>
+        <p:nvSpPr>
+          <p:cNvPr id="105" name="TextBox 104"/>
+          <p:cNvSpPr txBox="1"/>
+          <p:nvPr/>
+        </p:nvSpPr>
+        <p:spPr>
+          <a:xfrm>
+            <a:off x="4001555" y="5797296"/>
+            <a:ext cx="402336" cy="137160"/>
+          </a:xfrm>
+          <a:prstGeom prst="rect">
+            <a:avLst/>
+          </a:prstGeom>
+          <a:noFill/>
+        </p:spPr>
+        <p:txBody>
+          <a:bodyPr wrap="none" anchor="ctr" lIns="0" rIns="0" tIns="0" bIns="0">
+            <a:spAutoFit/>
+          </a:bodyPr>
+          <a:lstStyle/>
+          <a:p>
+            <a:pPr algn="ctr"/>
+            <a:r>
+              <a:rPr sz="1100">
+                <a:solidFill>
+                  <a:srgbClr val="6B7280"/>
+                </a:solidFill>
+                <a:latin typeface="맑은 고딕"/>
+                <a:ea typeface="맑은 고딕"/>
+              </a:rPr>
+              <a:t>9</a:t>
+            </a:r>
+          </a:p>
+        </p:txBody>
+      </p:sp>
+      <p:cxnSp>
+        <p:nvCxnSpPr>
+          <p:cNvPr id="106" name="Connector 105"/>
+          <p:cNvCxnSpPr/>
+          <p:nvPr/>
+        </p:nvCxnSpPr>
+        <p:spPr>
+          <a:xfrm>
+            <a:off x="4771057" y="5760720"/>
+            <a:ext cx="0" cy="36576"/>
+          </a:xfrm>
+          <a:prstGeom prst="line">
+            <a:avLst/>
+          </a:prstGeom>
+          <a:ln w="12700">
+            <a:solidFill>
+              <a:srgbClr val="C7CDD6"/>
+            </a:solidFill>
+          </a:ln>
+          <a:effectLst/>
+        </p:spPr>
+        <p:style>
+          <a:lnRef idx="2">
+            <a:schemeClr val="accent1"/>
+          </a:lnRef>
+          <a:fillRef idx="0">
+            <a:schemeClr val="accent1"/>
+          </a:fillRef>
+          <a:effectRef idx="1">
+            <a:schemeClr val="accent1"/>
+          </a:effectRef>
+          <a:fontRef idx="minor">
+            <a:schemeClr val="tx1"/>
+          </a:fontRef>
+        </p:style>
+      </p:cxnSp>
+      <p:sp>
+        <p:nvSpPr>
+          <p:cNvPr id="107" name="TextBox 106"/>
+          <p:cNvSpPr txBox="1"/>
+          <p:nvPr/>
+        </p:nvSpPr>
+        <p:spPr>
+          <a:xfrm>
+            <a:off x="4569889" y="5797296"/>
+            <a:ext cx="402336" cy="137160"/>
+          </a:xfrm>
+          <a:prstGeom prst="rect">
+            <a:avLst/>
+          </a:prstGeom>
+          <a:noFill/>
+        </p:spPr>
+        <p:txBody>
+          <a:bodyPr wrap="none" anchor="ctr" lIns="0" rIns="0" tIns="0" bIns="0">
+            <a:spAutoFit/>
+          </a:bodyPr>
+          <a:lstStyle/>
+          <a:p>
+            <a:pPr algn="ctr"/>
+            <a:r>
+              <a:rPr sz="1100">
+                <a:solidFill>
+                  <a:srgbClr val="6B7280"/>
+                </a:solidFill>
+                <a:latin typeface="맑은 고딕"/>
+                <a:ea typeface="맑은 고딕"/>
+              </a:rPr>
+              <a:t>11</a:t>
+            </a:r>
+          </a:p>
+        </p:txBody>
+      </p:sp>
+      <p:cxnSp>
+        <p:nvCxnSpPr>
+          <p:cNvPr id="108" name="Connector 107"/>
+          <p:cNvCxnSpPr/>
+          <p:nvPr/>
+        </p:nvCxnSpPr>
+        <p:spPr>
+          <a:xfrm>
+            <a:off x="5339392" y="5760720"/>
+            <a:ext cx="0" cy="36576"/>
+          </a:xfrm>
+          <a:prstGeom prst="line">
+            <a:avLst/>
+          </a:prstGeom>
+          <a:ln w="12700">
+            <a:solidFill>
+              <a:srgbClr val="C7CDD6"/>
+            </a:solidFill>
+          </a:ln>
+          <a:effectLst/>
+        </p:spPr>
+        <p:style>
+          <a:lnRef idx="2">
+            <a:schemeClr val="accent1"/>
+          </a:lnRef>
+          <a:fillRef idx="0">
+            <a:schemeClr val="accent1"/>
+          </a:fillRef>
+          <a:effectRef idx="1">
+            <a:schemeClr val="accent1"/>
+          </a:effectRef>
+          <a:fontRef idx="minor">
+            <a:schemeClr val="tx1"/>
+          </a:fontRef>
+        </p:style>
+      </p:cxnSp>
+      <p:sp>
+        <p:nvSpPr>
+          <p:cNvPr id="109" name="TextBox 108"/>
+          <p:cNvSpPr txBox="1"/>
+          <p:nvPr/>
+        </p:nvSpPr>
+        <p:spPr>
+          <a:xfrm>
+            <a:off x="5138224" y="5797296"/>
+            <a:ext cx="402336" cy="137160"/>
+          </a:xfrm>
+          <a:prstGeom prst="rect">
+            <a:avLst/>
+          </a:prstGeom>
+          <a:noFill/>
+        </p:spPr>
+        <p:txBody>
+          <a:bodyPr wrap="none" anchor="ctr" lIns="0" rIns="0" tIns="0" bIns="0">
+            <a:spAutoFit/>
+          </a:bodyPr>
+          <a:lstStyle/>
+          <a:p>
+            <a:pPr algn="ctr"/>
+            <a:r>
+              <a:rPr sz="1100">
+                <a:solidFill>
+                  <a:srgbClr val="6B7280"/>
+                </a:solidFill>
+                <a:latin typeface="맑은 고딕"/>
+                <a:ea typeface="맑은 고딕"/>
+              </a:rPr>
+              <a:t>13</a:t>
+            </a:r>
+          </a:p>
+        </p:txBody>
+      </p:sp>
+      <p:sp>
+        <p:nvSpPr>
+          <p:cNvPr id="110" name="TextBox 109"/>
+          <p:cNvSpPr txBox="1"/>
+          <p:nvPr/>
+        </p:nvSpPr>
+        <p:spPr>
+          <a:xfrm>
+            <a:off x="1700784" y="5934456"/>
+            <a:ext cx="4151376" cy="128016"/>
+          </a:xfrm>
+          <a:prstGeom prst="rect">
+            <a:avLst/>
+          </a:prstGeom>
+          <a:noFill/>
+        </p:spPr>
+        <p:txBody>
+          <a:bodyPr wrap="none" anchor="ctr" lIns="0" rIns="0" tIns="0" bIns="0">
+            <a:spAutoFit/>
+          </a:bodyPr>
+          <a:lstStyle/>
+          <a:p>
+            <a:pPr algn="ctr"/>
+            <a:r>
+              <a:rPr sz="1050">
+                <a:solidFill>
+                  <a:srgbClr val="6B7280"/>
+                </a:solidFill>
+                <a:latin typeface="맑은 고딕"/>
+                <a:ea typeface="맑은 고딕"/>
+              </a:rPr>
               <a:t>epoch</a:t>
             </a:r>
           </a:p>
@@ -33821,14 +34577,14 @@
       </p:sp>
       <p:sp>
         <p:nvSpPr>
-          <p:cNvPr id="90" name="TextBox 89"/>
+          <p:cNvPr id="111" name="TextBox 110"/>
           <p:cNvSpPr txBox="1"/>
           <p:nvPr/>
         </p:nvSpPr>
         <p:spPr>
           <a:xfrm>
-            <a:off x="1609344" y="6030468"/>
-            <a:ext cx="4288536" cy="173736"/>
+            <a:off x="1609344" y="6067044"/>
+            <a:ext cx="4288536" cy="155448"/>
           </a:xfrm>
           <a:prstGeom prst="rect">
             <a:avLst/>
@@ -33867,7 +34623,7 @@
       </p:sp>
       <p:sp>
         <p:nvSpPr>
-          <p:cNvPr id="91" name="TextBox 90"/>
+          <p:cNvPr id="112" name="TextBox 111"/>
           <p:cNvSpPr txBox="1"/>
           <p:nvPr/>
         </p:nvSpPr>
@@ -33903,7 +34659,7 @@
       </p:sp>
       <p:sp>
         <p:nvSpPr>
-          <p:cNvPr id="92" name="TextBox 91"/>
+          <p:cNvPr id="113" name="TextBox 112"/>
           <p:cNvSpPr txBox="1"/>
           <p:nvPr/>
         </p:nvSpPr>
@@ -33939,7 +34695,7 @@
       </p:sp>
       <p:pic>
         <p:nvPicPr>
-          <p:cNvPr id="93" name="Picture 92" descr="p3r_color_baseline.png"/>
+          <p:cNvPr id="114" name="Picture 113" descr="p3r_color_baseline.png"/>
           <p:cNvPicPr>
             <a:picLocks noChangeAspect="1"/>
           </p:cNvPicPr>
@@ -33963,7 +34719,7 @@
       </p:pic>
       <p:sp>
         <p:nvSpPr>
-          <p:cNvPr id="94" name="TextBox 93"/>
+          <p:cNvPr id="115" name="TextBox 114"/>
           <p:cNvSpPr txBox="1"/>
           <p:nvPr/>
         </p:nvSpPr>
@@ -33999,7 +34755,7 @@
       </p:sp>
       <p:pic>
         <p:nvPicPr>
-          <p:cNvPr id="95" name="Picture 94" descr="p3r_color_c01.png"/>
+          <p:cNvPr id="116" name="Picture 115" descr="p3r_color_c01.png"/>
           <p:cNvPicPr>
             <a:picLocks noChangeAspect="1"/>
           </p:cNvPicPr>
@@ -34023,7 +34779,7 @@
       </p:pic>
       <p:sp>
         <p:nvSpPr>
-          <p:cNvPr id="96" name="TextBox 95"/>
+          <p:cNvPr id="117" name="TextBox 116"/>
           <p:cNvSpPr txBox="1"/>
           <p:nvPr/>
         </p:nvSpPr>
@@ -34059,7 +34815,7 @@
       </p:sp>
       <p:sp>
         <p:nvSpPr>
-          <p:cNvPr id="97" name="TextBox 96"/>
+          <p:cNvPr id="118" name="TextBox 117"/>
           <p:cNvSpPr txBox="1"/>
           <p:nvPr/>
         </p:nvSpPr>
@@ -34095,7 +34851,7 @@
       </p:sp>
       <p:sp>
         <p:nvSpPr>
-          <p:cNvPr id="98" name="TextBox 97"/>
+          <p:cNvPr id="119" name="TextBox 118"/>
           <p:cNvSpPr txBox="1"/>
           <p:nvPr/>
         </p:nvSpPr>
